--- a/il18_casp5organ/IL18_CASP_五器官筛选.pptx
+++ b/il18_casp5organ/IL18_CASP_五器官筛选.pptx
@@ -1321,7 +1321,7 @@
         </p:nvSpPr>
         <p:spPr>
           <a:xfrm>
-            <a:off x="640080" y="1920240"/>
+            <a:off x="640080" y="1828800"/>
             <a:ext cx="10972800" cy="822960"/>
           </a:xfrm>
           <a:prstGeom prst="rect">
@@ -1338,7 +1338,7 @@
               <a:buNone/>
             </a:pPr>
             <a:r>
-              <a:rPr lang="en-US" sz="3200" b="1" dirty="0">
+              <a:rPr lang="en-US" sz="3300" b="1" dirty="0">
                 <a:solidFill>
                   <a:srgbClr val="1A1A1A"/>
                 </a:solidFill>
@@ -1346,9 +1346,9 @@
                 <a:ea typeface="Microsoft YaHei" pitchFamily="34" charset="-122"/>
                 <a:cs typeface="Microsoft YaHei" pitchFamily="34" charset="-120"/>
               </a:rPr>
-              <a:t>五器官单细胞筛选：哪些细胞 IL18 高且 CASP1 低</a:t>
-            </a:r>
-            <a:endParaRPr lang="en-US" sz="3200" dirty="0"/>
+              <a:t>哪些细胞 IL18 高且 CASP1 低</a:t>
+            </a:r>
+            <a:endParaRPr lang="en-US" sz="3300" dirty="0"/>
           </a:p>
         </p:txBody>
       </p:sp>
@@ -1360,7 +1360,7 @@
         </p:nvSpPr>
         <p:spPr>
           <a:xfrm>
-            <a:off x="640080" y="2788920"/>
+            <a:off x="640080" y="2697480"/>
             <a:ext cx="10972800" cy="457200"/>
           </a:xfrm>
           <a:prstGeom prst="rect">
@@ -1385,7 +1385,7 @@
                 <a:ea typeface="Microsoft YaHei" pitchFamily="34" charset="-122"/>
                 <a:cs typeface="Microsoft YaHei" pitchFamily="34" charset="-120"/>
               </a:rPr>
-              <a:t>人与小鼠 · 肺 / 肝 / 胰 / 脑 / 脊髓 · 静息基线 · 以供体为统计单位</a:t>
+              <a:t>人与小鼠 · 肺 肝 胰 脑 脊髓 · 静息基线 · 修订版</a:t>
             </a:r>
             <a:endParaRPr lang="en-US" sz="1600" dirty="0"/>
           </a:p>
@@ -1399,8 +1399,8 @@
         </p:nvSpPr>
         <p:spPr>
           <a:xfrm>
-            <a:off x="640080" y="4114800"/>
-            <a:ext cx="10972800" cy="1097280"/>
+            <a:off x="640080" y="3931920"/>
+            <a:ext cx="10972800" cy="1280160"/>
           </a:xfrm>
           <a:prstGeom prst="rect">
             <a:avLst/>
@@ -1444,7 +1444,7 @@
                 <a:ea typeface="Microsoft YaHei" pitchFamily="34" charset="-122"/>
                 <a:cs typeface="Microsoft YaHei" pitchFamily="34" charset="-120"/>
               </a:rPr>
-              <a:t>经分选 bulk 的 CASP1 零值判读后，真正可信的候选只有一组——</a:t>
+              <a:t>多源一致支持的是 </a:t>
             </a:r>
             <a:pPr indent="0" marL="0">
               <a:lnSpc>
@@ -1461,7 +1461,7 @@
                 <a:ea typeface="Microsoft YaHei" pitchFamily="34" charset="-122"/>
                 <a:cs typeface="Microsoft YaHei" pitchFamily="34" charset="-120"/>
               </a:rPr>
-              <a:t>中枢神经系统的神经元与胶质（小鼠脑星形胶质、胶质谱系、少突胶质、Cajal-Retzius 神经元）</a:t>
+              <a:t>小鼠脑星形胶质与少突胶质</a:t>
             </a:r>
             <a:pPr indent="0" marL="0">
               <a:lnSpc>
@@ -1478,7 +1478,41 @@
                 <a:ea typeface="Microsoft YaHei" pitchFamily="34" charset="-122"/>
                 <a:cs typeface="Microsoft YaHei" pitchFamily="34" charset="-120"/>
               </a:rPr>
-              <a:t>：它们 IL18 可检、CASP1 本就真低。</a:t>
+              <a:t>；潜在可能为 </a:t>
+            </a:r>
+            <a:pPr indent="0" marL="0">
+              <a:lnSpc>
+                <a:spcPct val="130000"/>
+              </a:lnSpc>
+              <a:buNone/>
+            </a:pPr>
+            <a:r>
+              <a:rPr lang="en-US" sz="1700" b="1" dirty="0">
+                <a:solidFill>
+                  <a:srgbClr val="1F5FA8"/>
+                </a:solidFill>
+                <a:latin typeface="Microsoft YaHei" pitchFamily="34" charset="0"/>
+                <a:ea typeface="Microsoft YaHei" pitchFamily="34" charset="-122"/>
+                <a:cs typeface="Microsoft YaHei" pitchFamily="34" charset="-120"/>
+              </a:rPr>
+              <a:t>人肺肥大细胞、人肺 AT1、小鼠胰岛 D(δ) 细胞与胰导管细胞</a:t>
+            </a:r>
+            <a:pPr indent="0" marL="0">
+              <a:lnSpc>
+                <a:spcPct val="130000"/>
+              </a:lnSpc>
+              <a:buNone/>
+            </a:pPr>
+            <a:r>
+              <a:rPr lang="en-US" sz="1700" dirty="0">
+                <a:solidFill>
+                  <a:srgbClr val="1A1A1A"/>
+                </a:solidFill>
+                <a:latin typeface="Microsoft YaHei" pitchFamily="34" charset="0"/>
+                <a:ea typeface="Microsoft YaHei" pitchFamily="34" charset="-122"/>
+                <a:cs typeface="Microsoft YaHei" pitchFamily="34" charset="-120"/>
+              </a:rPr>
+              <a:t>。巨噬/小胶质等被排除，是因为 CASP1 在其中确实被检出，而非测不准。</a:t>
             </a:r>
             <a:endParaRPr lang="en-US" sz="1700" dirty="0"/>
           </a:p>
@@ -1517,7 +1551,7 @@
                 <a:ea typeface="Microsoft YaHei" pitchFamily="34" charset="-122"/>
                 <a:cs typeface="Microsoft YaHei" pitchFamily="34" charset="-120"/>
               </a:rPr>
-              <a:t>本分析是优先级筛选，不是机制证据；候选未做环境 RNA 校正，属待验证。</a:t>
+              <a:t>检出率 = 该细胞类型中原始计数≥1 的细胞数 ÷ 该细胞类型的细胞总数（按供体取中位数）</a:t>
             </a:r>
             <a:endParaRPr lang="en-US" sz="1250" dirty="0"/>
           </a:p>
@@ -1581,7 +1615,7 @@
                 <a:ea typeface="Microsoft YaHei" pitchFamily="34" charset="-122"/>
                 <a:cs typeface="Microsoft YaHei" pitchFamily="34" charset="-120"/>
               </a:rPr>
-              <a:t>结论：候选分三类</a:t>
+              <a:t>分级答案</a:t>
             </a:r>
             <a:endParaRPr lang="en-US" sz="2500" dirty="0"/>
           </a:p>
@@ -1595,8 +1629,8 @@
         </p:nvSpPr>
         <p:spPr>
           <a:xfrm>
-            <a:off x="640080" y="1554480"/>
-            <a:ext cx="2743200" cy="914400"/>
+            <a:off x="640080" y="1508760"/>
+            <a:ext cx="2651760" cy="914400"/>
           </a:xfrm>
           <a:prstGeom prst="rect">
             <a:avLst/>
@@ -1612,7 +1646,7 @@
               <a:buNone/>
             </a:pPr>
             <a:r>
-              <a:rPr lang="en-US" sz="1500" b="1" dirty="0">
+              <a:rPr lang="en-US" sz="1400" b="1" dirty="0">
                 <a:solidFill>
                   <a:srgbClr val="1B7A43"/>
                 </a:solidFill>
@@ -1620,9 +1654,9 @@
                 <a:ea typeface="Microsoft YaHei" pitchFamily="34" charset="-122"/>
                 <a:cs typeface="Microsoft YaHei" pitchFamily="34" charset="-120"/>
               </a:rPr>
-              <a:t>可信（CASP1 真低）</a:t>
-            </a:r>
-            <a:endParaRPr lang="en-US" sz="1500" dirty="0"/>
+              <a:t>A 有支持（多源一致）</a:t>
+            </a:r>
+            <a:endParaRPr lang="en-US" sz="1400" dirty="0"/>
           </a:p>
         </p:txBody>
       </p:sp>
@@ -1634,8 +1668,8 @@
         </p:nvSpPr>
         <p:spPr>
           <a:xfrm>
-            <a:off x="3566160" y="1554480"/>
-            <a:ext cx="7955280" cy="1097280"/>
+            <a:off x="3429000" y="1508760"/>
+            <a:ext cx="8138160" cy="1188720"/>
           </a:xfrm>
           <a:prstGeom prst="rect">
             <a:avLst/>
@@ -1654,7 +1688,7 @@
               <a:buNone/>
             </a:pPr>
             <a:r>
-              <a:rPr lang="en-US" sz="1350" b="1" dirty="0">
+              <a:rPr lang="en-US" sz="1250" b="1" dirty="0">
                 <a:solidFill>
                   <a:srgbClr val="1A1A1A"/>
                 </a:solidFill>
@@ -1662,7 +1696,7 @@
                 <a:ea typeface="Microsoft YaHei" pitchFamily="34" charset="-122"/>
                 <a:cs typeface="Microsoft YaHei" pitchFamily="34" charset="-120"/>
               </a:rPr>
-              <a:t>小鼠脑 星形胶质 / 胶质谱系 / 少突胶质 / Cajal-Retzius 神经元
+              <a:t>小鼠脑 星形胶质 / 少突胶质
 </a:t>
             </a:r>
             <a:pPr indent="0" marL="0">
@@ -1672,7 +1706,7 @@
               <a:buNone/>
             </a:pPr>
             <a:r>
-              <a:rPr lang="en-US" sz="1350" dirty="0">
+              <a:rPr lang="en-US" sz="1250" dirty="0">
                 <a:solidFill>
                   <a:srgbClr val="6B6B6B"/>
                 </a:solidFill>
@@ -1680,9 +1714,9 @@
                 <a:ea typeface="Microsoft YaHei" pitchFamily="34" charset="-122"/>
                 <a:cs typeface="Microsoft YaHei" pitchFamily="34" charset="-120"/>
               </a:rPr>
-              <a:t>bulk 证实 CNS 神经元/胶质 CASP1 本就极低，故“CASP1 低”为真——优先验证对象。</a:t>
-            </a:r>
-            <a:endParaRPr lang="en-US" sz="1350" dirty="0"/>
+              <a:t>Allen + CELLxGENE + Zhang 三源一致：Il18 明确存在而 Casp1 处于零底线（星形胶质 115.1 vs 1.13 FPKM）。</a:t>
+            </a:r>
+            <a:endParaRPr lang="en-US" sz="1250" dirty="0"/>
           </a:p>
         </p:txBody>
       </p:sp>
@@ -1694,8 +1728,8 @@
         </p:nvSpPr>
         <p:spPr>
           <a:xfrm>
-            <a:off x="640080" y="2971800"/>
-            <a:ext cx="2743200" cy="914400"/>
+            <a:off x="640080" y="2724912"/>
+            <a:ext cx="2651760" cy="914400"/>
           </a:xfrm>
           <a:prstGeom prst="rect">
             <a:avLst/>
@@ -1711,17 +1745,17 @@
               <a:buNone/>
             </a:pPr>
             <a:r>
-              <a:rPr lang="en-US" sz="1500" b="1" dirty="0">
-                <a:solidFill>
-                  <a:srgbClr val="B07A00"/>
-                </a:solidFill>
-                <a:latin typeface="Microsoft YaHei" pitchFamily="34" charset="0"/>
-                <a:ea typeface="Microsoft YaHei" pitchFamily="34" charset="-122"/>
-                <a:cs typeface="Microsoft YaHei" pitchFamily="34" charset="-120"/>
-              </a:rPr>
-              <a:t>降级（疑为 dropout）</a:t>
-            </a:r>
-            <a:endParaRPr lang="en-US" sz="1500" dirty="0"/>
+              <a:rPr lang="en-US" sz="1400" b="1" dirty="0">
+                <a:solidFill>
+                  <a:srgbClr val="1F5FA8"/>
+                </a:solidFill>
+                <a:latin typeface="Microsoft YaHei" pitchFamily="34" charset="0"/>
+                <a:ea typeface="Microsoft YaHei" pitchFamily="34" charset="-122"/>
+                <a:cs typeface="Microsoft YaHei" pitchFamily="34" charset="-120"/>
+              </a:rPr>
+              <a:t>B 潜在可能</a:t>
+            </a:r>
+            <a:endParaRPr lang="en-US" sz="1400" dirty="0"/>
           </a:p>
         </p:txBody>
       </p:sp>
@@ -1733,8 +1767,8 @@
         </p:nvSpPr>
         <p:spPr>
           <a:xfrm>
-            <a:off x="3566160" y="2971800"/>
-            <a:ext cx="7955280" cy="1097280"/>
+            <a:off x="3429000" y="2724912"/>
+            <a:ext cx="8138160" cy="1188720"/>
           </a:xfrm>
           <a:prstGeom prst="rect">
             <a:avLst/>
@@ -1753,7 +1787,7 @@
               <a:buNone/>
             </a:pPr>
             <a:r>
-              <a:rPr lang="en-US" sz="1350" b="1" dirty="0">
+              <a:rPr lang="en-US" sz="1250" b="1" dirty="0">
                 <a:solidFill>
                   <a:srgbClr val="1A1A1A"/>
                 </a:solidFill>
@@ -1761,7 +1795,7 @@
                 <a:ea typeface="Microsoft YaHei" pitchFamily="34" charset="-122"/>
                 <a:cs typeface="Microsoft YaHei" pitchFamily="34" charset="-120"/>
               </a:rPr>
-              <a:t>小鼠肺泡巨噬、人肺肥大/树突、人肝嗜碱、小鼠脑小胶质
+              <a:t>人肺 肥大细胞 · 人肺 AT1 · 小鼠胰岛 D(δ) · 小鼠胰导管
 </a:t>
             </a:r>
             <a:pPr indent="0" marL="0">
@@ -1771,7 +1805,7 @@
               <a:buNone/>
             </a:pPr>
             <a:r>
-              <a:rPr lang="en-US" sz="1350" dirty="0">
+              <a:rPr lang="en-US" sz="1250" dirty="0">
                 <a:solidFill>
                   <a:srgbClr val="6B6B6B"/>
                 </a:solidFill>
@@ -1779,9 +1813,9 @@
                 <a:ea typeface="Microsoft YaHei" pitchFamily="34" charset="-122"/>
                 <a:cs typeface="Microsoft YaHei" pitchFamily="34" charset="-120"/>
               </a:rPr>
-              <a:t>bulk 显示这些免疫/巨噬 CASP1 普遍强表达，单细胞的低/零多为技术性，不可信。</a:t>
-            </a:r>
-            <a:endParaRPr lang="en-US" sz="1350" dirty="0"/>
+              <a:t>肥大细胞 HPA IL18 331.5 为人肺最高、CASP1 11.1；AT1 被相对规则漏掉（IL18 排名 3/39 与 1/23）；δ 细胞有 FACS 分选证据（13.16 vs 0.016 RPKM）。</a:t>
+            </a:r>
+            <a:endParaRPr lang="en-US" sz="1250" dirty="0"/>
           </a:p>
         </p:txBody>
       </p:sp>
@@ -1793,8 +1827,8 @@
         </p:nvSpPr>
         <p:spPr>
           <a:xfrm>
-            <a:off x="640080" y="4389120"/>
-            <a:ext cx="2743200" cy="914400"/>
+            <a:off x="640080" y="3941064"/>
+            <a:ext cx="2651760" cy="914400"/>
           </a:xfrm>
           <a:prstGeom prst="rect">
             <a:avLst/>
@@ -1810,17 +1844,17 @@
               <a:buNone/>
             </a:pPr>
             <a:r>
-              <a:rPr lang="en-US" sz="1500" b="1" dirty="0">
-                <a:solidFill>
-                  <a:srgbClr val="6B6B6B"/>
-                </a:solidFill>
-                <a:latin typeface="Microsoft YaHei" pitchFamily="34" charset="0"/>
-                <a:ea typeface="Microsoft YaHei" pitchFamily="34" charset="-122"/>
-                <a:cs typeface="Microsoft YaHei" pitchFamily="34" charset="-120"/>
-              </a:rPr>
-              <a:t>降级（无分选对照）</a:t>
-            </a:r>
-            <a:endParaRPr lang="en-US" sz="1500" dirty="0"/>
+              <a:rPr lang="en-US" sz="1400" b="1" dirty="0">
+                <a:solidFill>
+                  <a:srgbClr val="B07A00"/>
+                </a:solidFill>
+                <a:latin typeface="Microsoft YaHei" pitchFamily="34" charset="0"/>
+                <a:ea typeface="Microsoft YaHei" pitchFamily="34" charset="-122"/>
+                <a:cs typeface="Microsoft YaHei" pitchFamily="34" charset="-120"/>
+              </a:rPr>
+              <a:t>C CASP1 确实存在</a:t>
+            </a:r>
+            <a:endParaRPr lang="en-US" sz="1400" dirty="0"/>
           </a:p>
         </p:txBody>
       </p:sp>
@@ -1832,8 +1866,8 @@
         </p:nvSpPr>
         <p:spPr>
           <a:xfrm>
-            <a:off x="3566160" y="4389120"/>
-            <a:ext cx="7955280" cy="1097280"/>
+            <a:off x="3429000" y="3941064"/>
+            <a:ext cx="8138160" cy="1188720"/>
           </a:xfrm>
           <a:prstGeom prst="rect">
             <a:avLst/>
@@ -1852,7 +1886,7 @@
               <a:buNone/>
             </a:pPr>
             <a:r>
-              <a:rPr lang="en-US" sz="1350" b="1" dirty="0">
+              <a:rPr lang="en-US" sz="1250" b="1" dirty="0">
                 <a:solidFill>
                   <a:srgbClr val="1A1A1A"/>
                 </a:solidFill>
@@ -1860,7 +1894,7 @@
                 <a:ea typeface="Microsoft YaHei" pitchFamily="34" charset="-122"/>
                 <a:cs typeface="Microsoft YaHei" pitchFamily="34" charset="-120"/>
               </a:rPr>
-              <a:t>胰 D 细胞 / 胰导管 / 气道纤毛细胞
+              <a:t>小鼠肺泡巨噬 · 小鼠脑小胶质 · 人肺纤毛上皮
 </a:t>
             </a:r>
             <a:pPr indent="0" marL="0">
@@ -1870,7 +1904,7 @@
               <a:buNone/>
             </a:pPr>
             <a:r>
-              <a:rPr lang="en-US" sz="1350" dirty="0">
+              <a:rPr lang="en-US" sz="1250" dirty="0">
                 <a:solidFill>
                   <a:srgbClr val="6B6B6B"/>
                 </a:solidFill>
@@ -1878,9 +1912,108 @@
                 <a:ea typeface="Microsoft YaHei" pitchFamily="34" charset="-122"/>
                 <a:cs typeface="Microsoft YaHei" pitchFamily="34" charset="-120"/>
               </a:rPr>
-              <a:t>实质上皮无同等分选 bulk，CASP1 低的真伪无法判定。</a:t>
-            </a:r>
-            <a:endParaRPr lang="en-US" sz="1350" dirty="0"/>
+              <a:t>肺泡巨噬 IL18 检出 74.7% 为最高，但 ImmGen 分选 Casp1=511（比值 4.7）。排除理由是 CASP1 被检出，不是测不准。</a:t>
+            </a:r>
+            <a:endParaRPr lang="en-US" sz="1250" dirty="0"/>
+          </a:p>
+        </p:txBody>
+      </p:sp>
+      <p:sp>
+        <p:nvSpPr>
+          <p:cNvPr id="9" name="Text 7"/>
+          <p:cNvSpPr txBox="1"/>
+          <p:nvPr/>
+        </p:nvSpPr>
+        <p:spPr>
+          <a:xfrm>
+            <a:off x="640080" y="5157216"/>
+            <a:ext cx="2651760" cy="914400"/>
+          </a:xfrm>
+          <a:prstGeom prst="rect">
+            <a:avLst/>
+          </a:prstGeom>
+          <a:noFill/>
+          <a:ln/>
+        </p:spPr>
+        <p:txBody>
+          <a:bodyPr wrap="square" rtlCol="0" anchor="t"/>
+          <a:lstStyle/>
+          <a:p>
+            <a:pPr indent="0" marL="0">
+              <a:buNone/>
+            </a:pPr>
+            <a:r>
+              <a:rPr lang="en-US" sz="1400" b="1" dirty="0">
+                <a:solidFill>
+                  <a:srgbClr val="9A2B2B"/>
+                </a:solidFill>
+                <a:latin typeface="Microsoft YaHei" pitchFamily="34" charset="0"/>
+                <a:ea typeface="Microsoft YaHei" pitchFamily="34" charset="-122"/>
+                <a:cs typeface="Microsoft YaHei" pitchFamily="34" charset="-120"/>
+              </a:rPr>
+              <a:t>D 方向相反，排除</a:t>
+            </a:r>
+            <a:endParaRPr lang="en-US" sz="1400" dirty="0"/>
+          </a:p>
+        </p:txBody>
+      </p:sp>
+      <p:sp>
+        <p:nvSpPr>
+          <p:cNvPr id="10" name="Text 8"/>
+          <p:cNvSpPr txBox="1"/>
+          <p:nvPr/>
+        </p:nvSpPr>
+        <p:spPr>
+          <a:xfrm>
+            <a:off x="3429000" y="5157216"/>
+            <a:ext cx="8138160" cy="1188720"/>
+          </a:xfrm>
+          <a:prstGeom prst="rect">
+            <a:avLst/>
+          </a:prstGeom>
+          <a:noFill/>
+          <a:ln/>
+        </p:spPr>
+        <p:txBody>
+          <a:bodyPr wrap="square" rtlCol="0" anchor="t"/>
+          <a:lstStyle/>
+          <a:p>
+            <a:pPr indent="0" marL="0">
+              <a:lnSpc>
+                <a:spcPct val="115000"/>
+              </a:lnSpc>
+              <a:buNone/>
+            </a:pPr>
+            <a:r>
+              <a:rPr lang="en-US" sz="1250" b="1" dirty="0">
+                <a:solidFill>
+                  <a:srgbClr val="1A1A1A"/>
+                </a:solidFill>
+                <a:latin typeface="Microsoft YaHei" pitchFamily="34" charset="0"/>
+                <a:ea typeface="Microsoft YaHei" pitchFamily="34" charset="-122"/>
+                <a:cs typeface="Microsoft YaHei" pitchFamily="34" charset="-120"/>
+              </a:rPr>
+              <a:t>人肝 嗜碱粒细胞 · 人肺 树突状细胞
+</a:t>
+            </a:r>
+            <a:pPr indent="0" marL="0">
+              <a:lnSpc>
+                <a:spcPct val="115000"/>
+              </a:lnSpc>
+              <a:buNone/>
+            </a:pPr>
+            <a:r>
+              <a:rPr lang="en-US" sz="1250" dirty="0">
+                <a:solidFill>
+                  <a:srgbClr val="6B6B6B"/>
+                </a:solidFill>
+                <a:latin typeface="Microsoft YaHei" pitchFamily="34" charset="0"/>
+                <a:ea typeface="Microsoft YaHei" pitchFamily="34" charset="-122"/>
+                <a:cs typeface="Microsoft YaHei" pitchFamily="34" charset="-120"/>
+              </a:rPr>
+              <a:t>嗜碱参考层 CASP1 60–234 nTPM vs IL18 4.7–14.8，比值 0.085。</a:t>
+            </a:r>
+            <a:endParaRPr lang="en-US" sz="1250" dirty="0"/>
           </a:p>
         </p:txBody>
       </p:sp>
@@ -1942,7 +2075,7 @@
                 <a:ea typeface="Microsoft YaHei" pitchFamily="34" charset="-122"/>
                 <a:cs typeface="Microsoft YaHei" pitchFamily="34" charset="-120"/>
               </a:rPr>
-              <a:t>候选总览：IL18 检出率与 CASP1 零值判读</a:t>
+              <a:t>候选总览：IL18 检出率与证据级别</a:t>
             </a:r>
             <a:endParaRPr lang="en-US" sz="2500" dirty="0"/>
           </a:p>
@@ -1950,7 +2083,7 @@
       </p:sp>
       <p:pic>
         <p:nvPicPr>
-          <p:cNvPr id="3" name="Image 0" descr="/home/user/aaa/il18_casp5organ/figures/candidate_map.png">    </p:cNvPr>
+          <p:cNvPr id="3" name="Image 0" descr="/home/user/aaa/il18_casp5organ/figures/answer_v2.png">    </p:cNvPr>
           <p:cNvPicPr>
             <a:picLocks noChangeAspect="1"/>
           </p:cNvPicPr>
@@ -1964,8 +2097,8 @@
         </p:blipFill>
         <p:spPr>
           <a:xfrm>
-            <a:off x="2781342" y="1234440"/>
-            <a:ext cx="6626268" cy="5257800"/>
+            <a:off x="2462443" y="1188720"/>
+            <a:ext cx="7264066" cy="5257800"/>
           </a:xfrm>
           <a:prstGeom prst="rect">
             <a:avLst/>
@@ -2030,7 +2163,7 @@
                 <a:ea typeface="Microsoft YaHei" pitchFamily="34" charset="-122"/>
                 <a:cs typeface="Microsoft YaHei" pitchFamily="34" charset="-120"/>
               </a:rPr>
-              <a:t>小鼠脑（单细胞）：神经元/胶质 IL18 可检、CASP1 真低</a:t>
+              <a:t>小鼠脑（单细胞）：胶质 IL18 可检、CASP1 处于零底线</a:t>
             </a:r>
             <a:endParaRPr lang="en-US" sz="2500" dirty="0"/>
           </a:p>
@@ -2052,7 +2185,7 @@
         </p:blipFill>
         <p:spPr>
           <a:xfrm>
-            <a:off x="640080" y="2456598"/>
+            <a:off x="640080" y="2410878"/>
             <a:ext cx="10908792" cy="2127685"/>
           </a:xfrm>
           <a:prstGeom prst="rect">
@@ -2093,7 +2226,7 @@
                 <a:ea typeface="Microsoft YaHei" pitchFamily="34" charset="-122"/>
                 <a:cs typeface="Microsoft YaHei" pitchFamily="34" charset="-120"/>
               </a:rPr>
-              <a:t>点大小=检出率，颜色=log2(CPM+1)，三基因各自色标；谱系级。astrocyte/oligodendrocyte 类属 glia。</a:t>
+              <a:t>点大小=检出率，颜色=log2(CPM+1)，三基因各自色标。astrocyte/oligodendrocyte 归入 glia 谱系。</a:t>
             </a:r>
             <a:endParaRPr lang="en-US" sz="1050" dirty="0"/>
           </a:p>
@@ -2157,46 +2290,22 @@
                 <a:ea typeface="Microsoft YaHei" pitchFamily="34" charset="-122"/>
                 <a:cs typeface="Microsoft YaHei" pitchFamily="34" charset="-120"/>
               </a:rPr>
-              <a:t>小鼠肺（单细胞）：巨噬 IL18 最高，但 CASP1 也在表达</a:t>
+              <a:t>必须注明的物种差异</a:t>
             </a:r>
             <a:endParaRPr lang="en-US" sz="2500" dirty="0"/>
           </a:p>
         </p:txBody>
       </p:sp>
-      <p:pic>
-        <p:nvPicPr>
-          <p:cNvPr id="3" name="Image 0" descr="/home/user/aaa/il18_casp5organ/figures/mouse/lung_cell.png">    </p:cNvPr>
-          <p:cNvPicPr>
-            <a:picLocks noChangeAspect="1"/>
-          </p:cNvPicPr>
-          <p:nvPr/>
-        </p:nvPicPr>
-        <p:blipFill>
-          <a:blip r:embed="rId1"/>
-          <a:stretch>
-            <a:fillRect/>
-          </a:stretch>
-        </p:blipFill>
-        <p:spPr>
-          <a:xfrm>
-            <a:off x="640080" y="2101666"/>
-            <a:ext cx="10908792" cy="2837547"/>
-          </a:xfrm>
-          <a:prstGeom prst="rect">
-            <a:avLst/>
-          </a:prstGeom>
-        </p:spPr>
-      </p:pic>
-      <p:sp>
-        <p:nvSpPr>
-          <p:cNvPr id="4" name="Text 1"/>
+      <p:sp>
+        <p:nvSpPr>
+          <p:cNvPr id="3" name="Text 1"/>
           <p:cNvSpPr txBox="1"/>
           <p:nvPr/>
         </p:nvSpPr>
         <p:spPr>
           <a:xfrm>
-            <a:off x="640080" y="6355080"/>
-            <a:ext cx="10972800" cy="347472"/>
+            <a:off x="731520" y="1737360"/>
+            <a:ext cx="10698480" cy="457200"/>
           </a:xfrm>
           <a:prstGeom prst="rect">
             <a:avLst/>
@@ -2212,17 +2321,260 @@
               <a:buNone/>
             </a:pPr>
             <a:r>
-              <a:rPr lang="en-US" sz="1050" dirty="0">
-                <a:solidFill>
-                  <a:srgbClr val="6B6B6B"/>
-                </a:solidFill>
-                <a:latin typeface="Microsoft YaHei" pitchFamily="34" charset="0"/>
-                <a:ea typeface="Microsoft YaHei" pitchFamily="34" charset="-122"/>
-                <a:cs typeface="Microsoft YaHei" pitchFamily="34" charset="-120"/>
-              </a:rPr>
-              <a:t>resident_macrophage 的 IL18 最强，但 CASP1 面板显示其并非真低——故肺泡巨噬候选按 dropout 降级。</a:t>
-            </a:r>
-            <a:endParaRPr lang="en-US" sz="1050" dirty="0"/>
+              <a:rPr lang="en-US" sz="1700" b="1" dirty="0">
+                <a:solidFill>
+                  <a:srgbClr val="9A2B2B"/>
+                </a:solidFill>
+                <a:latin typeface="Microsoft YaHei" pitchFamily="34" charset="0"/>
+                <a:ea typeface="Microsoft YaHei" pitchFamily="34" charset="-122"/>
+                <a:cs typeface="Microsoft YaHei" pitchFamily="34" charset="-120"/>
+              </a:rPr>
+              <a:t>A 级结论为小鼠特异，不可外推到人。</a:t>
+            </a:r>
+            <a:endParaRPr lang="en-US" sz="1700" dirty="0"/>
+          </a:p>
+        </p:txBody>
+      </p:sp>
+      <p:sp>
+        <p:nvSpPr>
+          <p:cNvPr id="4" name="Text 2"/>
+          <p:cNvSpPr txBox="1"/>
+          <p:nvPr/>
+        </p:nvSpPr>
+        <p:spPr>
+          <a:xfrm>
+            <a:off x="731520" y="2514600"/>
+            <a:ext cx="2651760" cy="822960"/>
+          </a:xfrm>
+          <a:prstGeom prst="rect">
+            <a:avLst/>
+          </a:prstGeom>
+          <a:noFill/>
+          <a:ln/>
+        </p:spPr>
+        <p:txBody>
+          <a:bodyPr wrap="square" rtlCol="0" anchor="t"/>
+          <a:lstStyle/>
+          <a:p>
+            <a:pPr indent="0" marL="0">
+              <a:buNone/>
+            </a:pPr>
+            <a:r>
+              <a:rPr lang="en-US" sz="1350" b="1" dirty="0">
+                <a:solidFill>
+                  <a:srgbClr val="1A1A1A"/>
+                </a:solidFill>
+                <a:latin typeface="Microsoft YaHei" pitchFamily="34" charset="0"/>
+                <a:ea typeface="Microsoft YaHei" pitchFamily="34" charset="-122"/>
+                <a:cs typeface="Microsoft YaHei" pitchFamily="34" charset="-120"/>
+              </a:rPr>
+              <a:t>小鼠脑（Zhang 分选）</a:t>
+            </a:r>
+            <a:endParaRPr lang="en-US" sz="1350" dirty="0"/>
+          </a:p>
+        </p:txBody>
+      </p:sp>
+      <p:sp>
+        <p:nvSpPr>
+          <p:cNvPr id="5" name="Text 3"/>
+          <p:cNvSpPr txBox="1"/>
+          <p:nvPr/>
+        </p:nvSpPr>
+        <p:spPr>
+          <a:xfrm>
+            <a:off x="3566160" y="2514600"/>
+            <a:ext cx="7955280" cy="822960"/>
+          </a:xfrm>
+          <a:prstGeom prst="rect">
+            <a:avLst/>
+          </a:prstGeom>
+          <a:noFill/>
+          <a:ln/>
+        </p:spPr>
+        <p:txBody>
+          <a:bodyPr wrap="square" rtlCol="0" anchor="t"/>
+          <a:lstStyle/>
+          <a:p>
+            <a:pPr indent="0" marL="0">
+              <a:lnSpc>
+                <a:spcPct val="115000"/>
+              </a:lnSpc>
+              <a:buNone/>
+            </a:pPr>
+            <a:r>
+              <a:rPr lang="en-US" sz="1350" dirty="0">
+                <a:solidFill>
+                  <a:srgbClr val="1A1A1A"/>
+                </a:solidFill>
+                <a:latin typeface="Microsoft YaHei" pitchFamily="34" charset="0"/>
+                <a:ea typeface="Microsoft YaHei" pitchFamily="34" charset="-122"/>
+                <a:cs typeface="Microsoft YaHei" pitchFamily="34" charset="-120"/>
+              </a:rPr>
+              <a:t>星形胶质 Il18 115.1 / Casp1 1.13 FPKM（约 102 倍）；少突胶质 24.7 / 0.12</a:t>
+            </a:r>
+            <a:endParaRPr lang="en-US" sz="1350" dirty="0"/>
+          </a:p>
+        </p:txBody>
+      </p:sp>
+      <p:sp>
+        <p:nvSpPr>
+          <p:cNvPr id="6" name="Text 4"/>
+          <p:cNvSpPr txBox="1"/>
+          <p:nvPr/>
+        </p:nvSpPr>
+        <p:spPr>
+          <a:xfrm>
+            <a:off x="731520" y="3429000"/>
+            <a:ext cx="2651760" cy="822960"/>
+          </a:xfrm>
+          <a:prstGeom prst="rect">
+            <a:avLst/>
+          </a:prstGeom>
+          <a:noFill/>
+          <a:ln/>
+        </p:spPr>
+        <p:txBody>
+          <a:bodyPr wrap="square" rtlCol="0" anchor="t"/>
+          <a:lstStyle/>
+          <a:p>
+            <a:pPr indent="0" marL="0">
+              <a:buNone/>
+            </a:pPr>
+            <a:r>
+              <a:rPr lang="en-US" sz="1350" b="1" dirty="0">
+                <a:solidFill>
+                  <a:srgbClr val="1A1A1A"/>
+                </a:solidFill>
+                <a:latin typeface="Microsoft YaHei" pitchFamily="34" charset="0"/>
+                <a:ea typeface="Microsoft YaHei" pitchFamily="34" charset="-122"/>
+                <a:cs typeface="Microsoft YaHei" pitchFamily="34" charset="-120"/>
+              </a:rPr>
+              <a:t>人脑（HPA 单核）</a:t>
+            </a:r>
+            <a:endParaRPr lang="en-US" sz="1350" dirty="0"/>
+          </a:p>
+        </p:txBody>
+      </p:sp>
+      <p:sp>
+        <p:nvSpPr>
+          <p:cNvPr id="7" name="Text 5"/>
+          <p:cNvSpPr txBox="1"/>
+          <p:nvPr/>
+        </p:nvSpPr>
+        <p:spPr>
+          <a:xfrm>
+            <a:off x="3566160" y="3429000"/>
+            <a:ext cx="7955280" cy="822960"/>
+          </a:xfrm>
+          <a:prstGeom prst="rect">
+            <a:avLst/>
+          </a:prstGeom>
+          <a:noFill/>
+          <a:ln/>
+        </p:spPr>
+        <p:txBody>
+          <a:bodyPr wrap="square" rtlCol="0" anchor="t"/>
+          <a:lstStyle/>
+          <a:p>
+            <a:pPr indent="0" marL="0">
+              <a:lnSpc>
+                <a:spcPct val="115000"/>
+              </a:lnSpc>
+              <a:buNone/>
+            </a:pPr>
+            <a:r>
+              <a:rPr lang="en-US" sz="1350" dirty="0">
+                <a:solidFill>
+                  <a:srgbClr val="1A1A1A"/>
+                </a:solidFill>
+                <a:latin typeface="Microsoft YaHei" pitchFamily="34" charset="0"/>
+                <a:ea typeface="Microsoft YaHei" pitchFamily="34" charset="-122"/>
+                <a:cs typeface="Microsoft YaHei" pitchFamily="34" charset="-120"/>
+              </a:rPr>
+              <a:t>小胶质 IL18 338.5 nCPM 压倒性最高，星形胶质仅 3.7、少突胶质 2.6</a:t>
+            </a:r>
+            <a:endParaRPr lang="en-US" sz="1350" dirty="0"/>
+          </a:p>
+        </p:txBody>
+      </p:sp>
+      <p:sp>
+        <p:nvSpPr>
+          <p:cNvPr id="8" name="Text 6"/>
+          <p:cNvSpPr txBox="1"/>
+          <p:nvPr/>
+        </p:nvSpPr>
+        <p:spPr>
+          <a:xfrm>
+            <a:off x="731520" y="4343400"/>
+            <a:ext cx="2651760" cy="822960"/>
+          </a:xfrm>
+          <a:prstGeom prst="rect">
+            <a:avLst/>
+          </a:prstGeom>
+          <a:noFill/>
+          <a:ln/>
+        </p:spPr>
+        <p:txBody>
+          <a:bodyPr wrap="square" rtlCol="0" anchor="t"/>
+          <a:lstStyle/>
+          <a:p>
+            <a:pPr indent="0" marL="0">
+              <a:buNone/>
+            </a:pPr>
+            <a:r>
+              <a:rPr lang="en-US" sz="1350" b="1" dirty="0">
+                <a:solidFill>
+                  <a:srgbClr val="1A1A1A"/>
+                </a:solidFill>
+                <a:latin typeface="Microsoft YaHei" pitchFamily="34" charset="0"/>
+                <a:ea typeface="Microsoft YaHei" pitchFamily="34" charset="-122"/>
+                <a:cs typeface="Microsoft YaHei" pitchFamily="34" charset="-120"/>
+              </a:rPr>
+              <a:t>含义</a:t>
+            </a:r>
+            <a:endParaRPr lang="en-US" sz="1350" dirty="0"/>
+          </a:p>
+        </p:txBody>
+      </p:sp>
+      <p:sp>
+        <p:nvSpPr>
+          <p:cNvPr id="9" name="Text 7"/>
+          <p:cNvSpPr txBox="1"/>
+          <p:nvPr/>
+        </p:nvSpPr>
+        <p:spPr>
+          <a:xfrm>
+            <a:off x="3566160" y="4343400"/>
+            <a:ext cx="7955280" cy="822960"/>
+          </a:xfrm>
+          <a:prstGeom prst="rect">
+            <a:avLst/>
+          </a:prstGeom>
+          <a:noFill/>
+          <a:ln/>
+        </p:spPr>
+        <p:txBody>
+          <a:bodyPr wrap="square" rtlCol="0" anchor="t"/>
+          <a:lstStyle/>
+          <a:p>
+            <a:pPr indent="0" marL="0">
+              <a:lnSpc>
+                <a:spcPct val="115000"/>
+              </a:lnSpc>
+              <a:buNone/>
+            </a:pPr>
+            <a:r>
+              <a:rPr lang="en-US" sz="1350" dirty="0">
+                <a:solidFill>
+                  <a:srgbClr val="1A1A1A"/>
+                </a:solidFill>
+                <a:latin typeface="Microsoft YaHei" pitchFamily="34" charset="0"/>
+                <a:ea typeface="Microsoft YaHei" pitchFamily="34" charset="-122"/>
+                <a:cs typeface="Microsoft YaHei" pitchFamily="34" charset="-120"/>
+              </a:rPr>
+              <a:t>人脑的「IL18 高」属于小胶质，而小胶质 CASP1 为 41.2 nCPM（比值 8.2），不满足前提。人脑中无对应的 A 级候选。</a:t>
+            </a:r>
+            <a:endParaRPr lang="en-US" sz="1350" dirty="0"/>
           </a:p>
         </p:txBody>
       </p:sp>
@@ -2284,7 +2636,7 @@
                 <a:ea typeface="Microsoft YaHei" pitchFamily="34" charset="-122"/>
                 <a:cs typeface="Microsoft YaHei" pitchFamily="34" charset="-120"/>
               </a:rPr>
-              <a:t>关键限制</a:t>
+              <a:t>限制</a:t>
             </a:r>
             <a:endParaRPr lang="en-US" sz="2500" dirty="0"/>
           </a:p>
@@ -2298,7 +2650,7 @@
         </p:nvSpPr>
         <p:spPr>
           <a:xfrm>
-            <a:off x="731520" y="1645920"/>
+            <a:off x="731520" y="1691640"/>
             <a:ext cx="10789920" cy="731520"/>
           </a:xfrm>
           <a:prstGeom prst="rect">
@@ -2326,7 +2678,7 @@
                 <a:ea typeface="Microsoft YaHei" pitchFamily="34" charset="-122"/>
                 <a:cs typeface="Microsoft YaHei" pitchFamily="34" charset="-120"/>
               </a:rPr>
-              <a:t>IL18 转录本 = pro-IL-18 转录信号，但 ≠ 前体蛋白储量；CASP3 mRNA ≠ caspase-3 酶活性。</a:t>
+              <a:t>环境 RNA 未校正：无 GPU、Census 源矩阵无空液滴；全部候选为待验证，对神经/胶质候选影响最大。</a:t>
             </a:r>
             <a:endParaRPr lang="en-US" sz="1450" dirty="0"/>
           </a:p>
@@ -2340,7 +2692,7 @@
         </p:nvSpPr>
         <p:spPr>
           <a:xfrm>
-            <a:off x="731520" y="2514600"/>
+            <a:off x="731520" y="2560320"/>
             <a:ext cx="10789920" cy="731520"/>
           </a:xfrm>
           <a:prstGeom prst="rect">
@@ -2368,7 +2720,7 @@
                 <a:ea typeface="Microsoft YaHei" pitchFamily="34" charset="-122"/>
                 <a:cs typeface="Microsoft YaHei" pitchFamily="34" charset="-120"/>
               </a:rPr>
-              <a:t>单核（脑/脊髓）与单细胞（其余器官）不可混比；跨器官只比候选名单，不比表达量。</a:t>
+              <a:t>单核与单细胞不可混比；跨器官只比候选名单，跨物种不比表达量。</a:t>
             </a:r>
             <a:endParaRPr lang="en-US" sz="1450" dirty="0"/>
           </a:p>
@@ -2382,7 +2734,7 @@
         </p:nvSpPr>
         <p:spPr>
           <a:xfrm>
-            <a:off x="731520" y="3383280"/>
+            <a:off x="731520" y="3429000"/>
             <a:ext cx="10789920" cy="731520"/>
           </a:xfrm>
           <a:prstGeom prst="rect">
@@ -2410,7 +2762,7 @@
                 <a:ea typeface="Microsoft YaHei" pitchFamily="34" charset="-122"/>
                 <a:cs typeface="Microsoft YaHei" pitchFamily="34" charset="-120"/>
               </a:rPr>
-              <a:t>未做环境 RNA 校正（无 GPU、无空液滴），全部候选为待验证；上皮/神经元候选尤需复核污染。</a:t>
+              <a:t>三分位、20% 下限与本次的 20 倍/3 倍比值分界均为工程取值，无生物学依据；完整排序值已输出可重切。</a:t>
             </a:r>
             <a:endParaRPr lang="en-US" sz="1450" dirty="0"/>
           </a:p>
@@ -2424,7 +2776,7 @@
         </p:nvSpPr>
         <p:spPr>
           <a:xfrm>
-            <a:off x="731520" y="4251960"/>
+            <a:off x="731520" y="4297680"/>
             <a:ext cx="10789920" cy="731520"/>
           </a:xfrm>
           <a:prstGeom prst="rect">
@@ -2452,7 +2804,7 @@
                 <a:ea typeface="Microsoft YaHei" pitchFamily="34" charset="-122"/>
                 <a:cs typeface="Microsoft YaHei" pitchFamily="34" charset="-120"/>
               </a:rPr>
-              <a:t>静息基线筛选；CASP1 可诱导，刺激后能否诱导本数据无法回答。</a:t>
+              <a:t>IL18 转录本 ≠ pro-IL-18 蛋白储量；CASP3 mRNA ≠ caspase-3 酶活性；静息基线不回答刺激后 CASP1 诱导。</a:t>
             </a:r>
             <a:endParaRPr lang="en-US" sz="1450" dirty="0"/>
           </a:p>

--- a/il18_casp5organ/IL18_CASP_五器官筛选.pptx
+++ b/il18_casp5organ/IL18_CASP_五器官筛选.pptx
@@ -11,9 +11,10 @@
     <p:sldId id="259" r:id="rId5"/>
     <p:sldId id="260" r:id="rId6"/>
     <p:sldId id="261" r:id="rId7"/>
+    <p:sldId id="262" r:id="rId8"/>
   </p:sldIdLst>
   <p:notesMasterIdLst>
-    <p:notesMasterId r:id="rId8"/>
+    <p:notesMasterId r:id="rId9"/>
   </p:notesMasterIdLst>
   <p:sldSz cx="12192000" cy="6858000"/>
   <p:notesSz cx="6858000" cy="12192000"/>
@@ -971,6 +972,94 @@
             <a:fld id="{F7021451-1387-4CA6-816F-3879F97B5CBC}" type="slidenum">
               <a:rPr lang="en-US"/>
               <a:t>6</a:t>
+            </a:fld>
+            <a:endParaRPr lang="en-US"/>
+          </a:p>
+        </p:txBody>
+      </p:sp>
+    </p:spTree>
+    <p:extLst>
+      <p:ext uri="{BB962C8B-B14F-4D97-AF65-F5344CB8AC3E}">
+        <p14:creationId xmlns:p14="http://schemas.microsoft.com/office/powerpoint/2010/main" val="1024086991"/>
+      </p:ext>
+    </p:extLst>
+  </p:cSld>
+  <p:clrMapOvr>
+    <a:masterClrMapping/>
+  </p:clrMapOvr>
+</p:notes>
+</file>
+
+<file path=ppt/notesSlides/notesSlide7.xml><?xml version="1.0" encoding="utf-8"?>
+<p:notes xmlns:a="http://schemas.openxmlformats.org/drawingml/2006/main" xmlns:r="http://schemas.openxmlformats.org/officeDocument/2006/relationships" xmlns:p="http://schemas.openxmlformats.org/presentationml/2006/main">
+  <p:cSld>
+    <p:spTree>
+      <p:nvGrpSpPr>
+        <p:cNvPr id="1" name=""/>
+        <p:cNvGrpSpPr/>
+        <p:nvPr/>
+      </p:nvGrpSpPr>
+      <p:grpSpPr>
+        <a:xfrm>
+          <a:off x="0" y="0"/>
+          <a:ext cx="0" cy="0"/>
+          <a:chOff x="0" y="0"/>
+          <a:chExt cx="0" cy="0"/>
+        </a:xfrm>
+      </p:grpSpPr>
+      <p:sp>
+        <p:nvSpPr>
+          <p:cNvPr id="2" name="Slide Image Placeholder 1"/>
+          <p:cNvSpPr>
+            <a:spLocks noGrp="1" noRot="1" noChangeAspect="1"/>
+          </p:cNvSpPr>
+          <p:nvPr>
+            <p:ph type="sldImg"/>
+          </p:nvPr>
+        </p:nvSpPr>
+        <p:spPr/>
+      </p:sp>
+      <p:sp>
+        <p:nvSpPr>
+          <p:cNvPr id="3" name="Notes Placeholder 2"/>
+          <p:cNvSpPr>
+            <a:spLocks noGrp="1"/>
+          </p:cNvSpPr>
+          <p:nvPr>
+            <p:ph type="body" idx="1"/>
+          </p:nvPr>
+        </p:nvSpPr>
+        <p:spPr/>
+        <p:txBody>
+          <a:bodyPr/>
+          <a:lstStyle/>
+          <a:p>
+            <a:r>
+              <a:rPr lang="en-US" dirty="0"/>
+              <a:t/>
+            </a:r>
+            <a:endParaRPr lang="en-US" dirty="0"/>
+          </a:p>
+        </p:txBody>
+      </p:sp>
+      <p:sp>
+        <p:nvSpPr>
+          <p:cNvPr id="4" name="Slide Number Placeholder 3"/>
+          <p:cNvSpPr>
+            <a:spLocks noGrp="1"/>
+          </p:cNvSpPr>
+          <p:nvPr>
+            <p:ph type="sldNum" sz="quarter" idx="10"/>
+          </p:nvPr>
+        </p:nvSpPr>
+        <p:spPr/>
+        <p:txBody>
+          <a:bodyPr/>
+          <a:lstStyle/>
+          <a:p>
+            <a:fld id="{F7021451-1387-4CA6-816F-3879F97B5CBC}" type="slidenum">
+              <a:rPr lang="en-US"/>
+              <a:t>7</a:t>
             </a:fld>
             <a:endParaRPr lang="en-US"/>
           </a:p>
@@ -1321,8 +1410,8 @@
         </p:nvSpPr>
         <p:spPr>
           <a:xfrm>
-            <a:off x="640080" y="1828800"/>
-            <a:ext cx="10972800" cy="822960"/>
+            <a:off x="640080" y="1737360"/>
+            <a:ext cx="10972800" cy="914400"/>
           </a:xfrm>
           <a:prstGeom prst="rect">
             <a:avLst/>
@@ -1360,7 +1449,7 @@
         </p:nvSpPr>
         <p:spPr>
           <a:xfrm>
-            <a:off x="640080" y="2697480"/>
+            <a:off x="640080" y="2651760"/>
             <a:ext cx="10972800" cy="457200"/>
           </a:xfrm>
           <a:prstGeom prst="rect">
@@ -1385,7 +1474,7 @@
                 <a:ea typeface="Microsoft YaHei" pitchFamily="34" charset="-122"/>
                 <a:cs typeface="Microsoft YaHei" pitchFamily="34" charset="-120"/>
               </a:rPr>
-              <a:t>人与小鼠 · 肺 肝 胰 脑 脊髓 · 静息基线 · 修订版</a:t>
+              <a:t>人与小鼠 · 肺 肝 胰 脑 脊髓 · 静息基线 · 以供体为统计单位</a:t>
             </a:r>
             <a:endParaRPr lang="en-US" sz="1600" dirty="0"/>
           </a:p>
@@ -1399,8 +1488,8 @@
         </p:nvSpPr>
         <p:spPr>
           <a:xfrm>
-            <a:off x="640080" y="3931920"/>
-            <a:ext cx="10972800" cy="1280160"/>
+            <a:off x="640080" y="3794760"/>
+            <a:ext cx="10972800" cy="1463040"/>
           </a:xfrm>
           <a:prstGeom prst="rect">
             <a:avLst/>
@@ -1444,7 +1533,7 @@
                 <a:ea typeface="Microsoft YaHei" pitchFamily="34" charset="-122"/>
                 <a:cs typeface="Microsoft YaHei" pitchFamily="34" charset="-120"/>
               </a:rPr>
-              <a:t>多源一致支持的是 </a:t>
+              <a:t>多源参考一致支持的是 </a:t>
             </a:r>
             <a:pPr indent="0" marL="0">
               <a:lnSpc>
@@ -1478,7 +1567,7 @@
                 <a:ea typeface="Microsoft YaHei" pitchFamily="34" charset="-122"/>
                 <a:cs typeface="Microsoft YaHei" pitchFamily="34" charset="-120"/>
               </a:rPr>
-              <a:t>；潜在可能为 </a:t>
+              <a:t>；有单一来源支持、值得优先验证的潜在可能是 </a:t>
             </a:r>
             <a:pPr indent="0" marL="0">
               <a:lnSpc>
@@ -1495,7 +1584,7 @@
                 <a:ea typeface="Microsoft YaHei" pitchFamily="34" charset="-122"/>
                 <a:cs typeface="Microsoft YaHei" pitchFamily="34" charset="-120"/>
               </a:rPr>
-              <a:t>人肺肥大细胞、人肺 AT1、小鼠胰岛 D(δ) 细胞与胰导管细胞</a:t>
+              <a:t>人肺肥大细胞、小鼠胰岛 D(δ) 细胞、小鼠胰导管细胞，以及被相对规则漏掉的人肺 AT1</a:t>
             </a:r>
             <a:pPr indent="0" marL="0">
               <a:lnSpc>
@@ -1512,7 +1601,7 @@
                 <a:ea typeface="Microsoft YaHei" pitchFamily="34" charset="-122"/>
                 <a:cs typeface="Microsoft YaHei" pitchFamily="34" charset="-120"/>
               </a:rPr>
-              <a:t>。巨噬/小胶质等被排除，是因为 CASP1 在其中确实被检出，而非测不准。</a:t>
+              <a:t>。肺泡巨噬、小胶质等不入选，是因为 CASP1 在它们之中确实被检出（肺泡巨噬 178/1341 = 13.3%），不是因为测不准。</a:t>
             </a:r>
             <a:endParaRPr lang="en-US" sz="1700" dirty="0"/>
           </a:p>
@@ -1526,7 +1615,7 @@
         </p:nvSpPr>
         <p:spPr>
           <a:xfrm>
-            <a:off x="640080" y="5577840"/>
+            <a:off x="640080" y="5623560"/>
             <a:ext cx="10972800" cy="365760"/>
           </a:xfrm>
           <a:prstGeom prst="rect">
@@ -1551,7 +1640,7 @@
                 <a:ea typeface="Microsoft YaHei" pitchFamily="34" charset="-122"/>
                 <a:cs typeface="Microsoft YaHei" pitchFamily="34" charset="-120"/>
               </a:rPr>
-              <a:t>检出率 = 该细胞类型中原始计数≥1 的细胞数 ÷ 该细胞类型的细胞总数（按供体取中位数）</a:t>
+              <a:t>检出率 = 原始计数 ≥1 的细胞数 ÷ 分析细胞数（合并全部供体）；本版全部标注阳性细胞数与阳性供体数。</a:t>
             </a:r>
             <a:endParaRPr lang="en-US" sz="1250" dirty="0"/>
           </a:p>
@@ -1629,8 +1718,8 @@
         </p:nvSpPr>
         <p:spPr>
           <a:xfrm>
-            <a:off x="640080" y="1508760"/>
-            <a:ext cx="2651760" cy="914400"/>
+            <a:off x="640080" y="1463040"/>
+            <a:ext cx="2514600" cy="914400"/>
           </a:xfrm>
           <a:prstGeom prst="rect">
             <a:avLst/>
@@ -1646,7 +1735,7 @@
               <a:buNone/>
             </a:pPr>
             <a:r>
-              <a:rPr lang="en-US" sz="1400" b="1" dirty="0">
+              <a:rPr lang="en-US" sz="1350" b="1" dirty="0">
                 <a:solidFill>
                   <a:srgbClr val="1B7A43"/>
                 </a:solidFill>
@@ -1654,9 +1743,9 @@
                 <a:ea typeface="Microsoft YaHei" pitchFamily="34" charset="-122"/>
                 <a:cs typeface="Microsoft YaHei" pitchFamily="34" charset="-120"/>
               </a:rPr>
-              <a:t>A 有支持（多源一致）</a:t>
-            </a:r>
-            <a:endParaRPr lang="en-US" sz="1400" dirty="0"/>
+              <a:t>A 多源一致支持</a:t>
+            </a:r>
+            <a:endParaRPr lang="en-US" sz="1350" dirty="0"/>
           </a:p>
         </p:txBody>
       </p:sp>
@@ -1668,8 +1757,8 @@
         </p:nvSpPr>
         <p:spPr>
           <a:xfrm>
-            <a:off x="3429000" y="1508760"/>
-            <a:ext cx="8138160" cy="1188720"/>
+            <a:off x="3291840" y="1463040"/>
+            <a:ext cx="8275320" cy="1005840"/>
           </a:xfrm>
           <a:prstGeom prst="rect">
             <a:avLst/>
@@ -1683,12 +1772,12 @@
           <a:p>
             <a:pPr indent="0" marL="0">
               <a:lnSpc>
-                <a:spcPct val="115000"/>
+                <a:spcPct val="112000"/>
               </a:lnSpc>
               <a:buNone/>
             </a:pPr>
             <a:r>
-              <a:rPr lang="en-US" sz="1250" b="1" dirty="0">
+              <a:rPr lang="en-US" sz="1200" b="1" dirty="0">
                 <a:solidFill>
                   <a:srgbClr val="1A1A1A"/>
                 </a:solidFill>
@@ -1696,17 +1785,17 @@
                 <a:ea typeface="Microsoft YaHei" pitchFamily="34" charset="-122"/>
                 <a:cs typeface="Microsoft YaHei" pitchFamily="34" charset="-120"/>
               </a:rPr>
-              <a:t>小鼠脑 星形胶质 / 少突胶质
+              <a:t>小鼠脑 星形胶质 · 小鼠脑 少突胶质
 </a:t>
             </a:r>
             <a:pPr indent="0" marL="0">
               <a:lnSpc>
-                <a:spcPct val="115000"/>
+                <a:spcPct val="112000"/>
               </a:lnSpc>
               <a:buNone/>
             </a:pPr>
             <a:r>
-              <a:rPr lang="en-US" sz="1250" dirty="0">
+              <a:rPr lang="en-US" sz="1200" dirty="0">
                 <a:solidFill>
                   <a:srgbClr val="6B6B6B"/>
                 </a:solidFill>
@@ -1714,9 +1803,9 @@
                 <a:ea typeface="Microsoft YaHei" pitchFamily="34" charset="-122"/>
                 <a:cs typeface="Microsoft YaHei" pitchFamily="34" charset="-120"/>
               </a:rPr>
-              <a:t>Allen + CELLxGENE + Zhang 三源一致：Il18 明确存在而 Casp1 处于零底线（星形胶质 115.1 vs 1.13 FPKM）。</a:t>
-            </a:r>
-            <a:endParaRPr lang="en-US" sz="1250" dirty="0"/>
+              <a:t>Allen Brain Map + CELLxGENE + brainrnaseq/Zhang 三源一致：Il18 明确存在而 Casp1 处于零底线（星形胶质 115.1 vs 1.13 FPKM）。本数据中 Casp1 阳性细胞 2/3766 与 2/8987。</a:t>
+            </a:r>
+            <a:endParaRPr lang="en-US" sz="1200" dirty="0"/>
           </a:p>
         </p:txBody>
       </p:sp>
@@ -1728,8 +1817,8 @@
         </p:nvSpPr>
         <p:spPr>
           <a:xfrm>
-            <a:off x="640080" y="2724912"/>
-            <a:ext cx="2651760" cy="914400"/>
+            <a:off x="640080" y="2468880"/>
+            <a:ext cx="2514600" cy="914400"/>
           </a:xfrm>
           <a:prstGeom prst="rect">
             <a:avLst/>
@@ -1745,7 +1834,7 @@
               <a:buNone/>
             </a:pPr>
             <a:r>
-              <a:rPr lang="en-US" sz="1400" b="1" dirty="0">
+              <a:rPr lang="en-US" sz="1350" b="1" dirty="0">
                 <a:solidFill>
                   <a:srgbClr val="1F5FA8"/>
                 </a:solidFill>
@@ -1755,7 +1844,7 @@
               </a:rPr>
               <a:t>B 潜在可能</a:t>
             </a:r>
-            <a:endParaRPr lang="en-US" sz="1400" dirty="0"/>
+            <a:endParaRPr lang="en-US" sz="1350" dirty="0"/>
           </a:p>
         </p:txBody>
       </p:sp>
@@ -1767,8 +1856,8 @@
         </p:nvSpPr>
         <p:spPr>
           <a:xfrm>
-            <a:off x="3429000" y="2724912"/>
-            <a:ext cx="8138160" cy="1188720"/>
+            <a:off x="3291840" y="2468880"/>
+            <a:ext cx="8275320" cy="1005840"/>
           </a:xfrm>
           <a:prstGeom prst="rect">
             <a:avLst/>
@@ -1782,12 +1871,12 @@
           <a:p>
             <a:pPr indent="0" marL="0">
               <a:lnSpc>
-                <a:spcPct val="115000"/>
+                <a:spcPct val="112000"/>
               </a:lnSpc>
               <a:buNone/>
             </a:pPr>
             <a:r>
-              <a:rPr lang="en-US" sz="1250" b="1" dirty="0">
+              <a:rPr lang="en-US" sz="1200" b="1" dirty="0">
                 <a:solidFill>
                   <a:srgbClr val="1A1A1A"/>
                 </a:solidFill>
@@ -1795,17 +1884,17 @@
                 <a:ea typeface="Microsoft YaHei" pitchFamily="34" charset="-122"/>
                 <a:cs typeface="Microsoft YaHei" pitchFamily="34" charset="-120"/>
               </a:rPr>
-              <a:t>人肺 肥大细胞 · 人肺 AT1 · 小鼠胰岛 D(δ) · 小鼠胰导管
+              <a:t>人肺 肥大细胞 · 小鼠胰 胰岛 D(δ) 细胞 · 小鼠胰 胰导管细胞
 </a:t>
             </a:r>
             <a:pPr indent="0" marL="0">
               <a:lnSpc>
-                <a:spcPct val="115000"/>
+                <a:spcPct val="112000"/>
               </a:lnSpc>
               <a:buNone/>
             </a:pPr>
             <a:r>
-              <a:rPr lang="en-US" sz="1250" dirty="0">
+              <a:rPr lang="en-US" sz="1200" dirty="0">
                 <a:solidFill>
                   <a:srgbClr val="6B6B6B"/>
                 </a:solidFill>
@@ -1813,9 +1902,9 @@
                 <a:ea typeface="Microsoft YaHei" pitchFamily="34" charset="-122"/>
                 <a:cs typeface="Microsoft YaHei" pitchFamily="34" charset="-120"/>
               </a:rPr>
-              <a:t>肥大细胞 HPA IL18 331.5 为人肺最高、CASP1 11.1；AT1 被相对规则漏掉（IL18 排名 3/39 与 1/23）；δ 细胞有 FACS 分选证据（13.16 vs 0.016 RPKM）。</a:t>
-            </a:r>
-            <a:endParaRPr lang="en-US" sz="1250" dirty="0"/>
+              <a:t>肥大细胞 HPA IL18 331.5 nCPM 为人肺最高、CASP1 11.1（约 30 倍），本数据 CASP1 138/5299 = 2.6%；胰岛 δ 细胞有 FACS 分选证据（13.16 vs 0.016 RPKM），两套独立数据同向。</a:t>
+            </a:r>
+            <a:endParaRPr lang="en-US" sz="1200" dirty="0"/>
           </a:p>
         </p:txBody>
       </p:sp>
@@ -1827,8 +1916,8 @@
         </p:nvSpPr>
         <p:spPr>
           <a:xfrm>
-            <a:off x="640080" y="3941064"/>
-            <a:ext cx="2651760" cy="914400"/>
+            <a:off x="640080" y="3474720"/>
+            <a:ext cx="2514600" cy="914400"/>
           </a:xfrm>
           <a:prstGeom prst="rect">
             <a:avLst/>
@@ -1844,7 +1933,106 @@
               <a:buNone/>
             </a:pPr>
             <a:r>
-              <a:rPr lang="en-US" sz="1400" b="1" dirty="0">
+              <a:rPr lang="en-US" sz="1350" b="1" dirty="0">
+                <a:solidFill>
+                  <a:srgbClr val="4C87C4"/>
+                </a:solidFill>
+                <a:latin typeface="Microsoft YaHei" pitchFamily="34" charset="0"/>
+                <a:ea typeface="Microsoft YaHei" pitchFamily="34" charset="-122"/>
+                <a:cs typeface="Microsoft YaHei" pitchFamily="34" charset="-120"/>
+              </a:rPr>
+              <a:t>B 潜在（相对规则漏掉）</a:t>
+            </a:r>
+            <a:endParaRPr lang="en-US" sz="1350" dirty="0"/>
+          </a:p>
+        </p:txBody>
+      </p:sp>
+      <p:sp>
+        <p:nvSpPr>
+          <p:cNvPr id="8" name="Text 6"/>
+          <p:cNvSpPr txBox="1"/>
+          <p:nvPr/>
+        </p:nvSpPr>
+        <p:spPr>
+          <a:xfrm>
+            <a:off x="3291840" y="3474720"/>
+            <a:ext cx="8275320" cy="1005840"/>
+          </a:xfrm>
+          <a:prstGeom prst="rect">
+            <a:avLst/>
+          </a:prstGeom>
+          <a:noFill/>
+          <a:ln/>
+        </p:spPr>
+        <p:txBody>
+          <a:bodyPr wrap="square" rtlCol="0" anchor="t"/>
+          <a:lstStyle/>
+          <a:p>
+            <a:pPr indent="0" marL="0">
+              <a:lnSpc>
+                <a:spcPct val="112000"/>
+              </a:lnSpc>
+              <a:buNone/>
+            </a:pPr>
+            <a:r>
+              <a:rPr lang="en-US" sz="1200" b="1" dirty="0">
+                <a:solidFill>
+                  <a:srgbClr val="1A1A1A"/>
+                </a:solidFill>
+                <a:latin typeface="Microsoft YaHei" pitchFamily="34" charset="0"/>
+                <a:ea typeface="Microsoft YaHei" pitchFamily="34" charset="-122"/>
+                <a:cs typeface="Microsoft YaHei" pitchFamily="34" charset="-120"/>
+              </a:rPr>
+              <a:t>人肺 AT1 肺泡上皮（单细胞 + 单核）
+</a:t>
+            </a:r>
+            <a:pPr indent="0" marL="0">
+              <a:lnSpc>
+                <a:spcPct val="112000"/>
+              </a:lnSpc>
+              <a:buNone/>
+            </a:pPr>
+            <a:r>
+              <a:rPr lang="en-US" sz="1200" dirty="0">
+                <a:solidFill>
+                  <a:srgbClr val="6B6B6B"/>
+                </a:solidFill>
+                <a:latin typeface="Microsoft YaHei" pitchFamily="34" charset="0"/>
+                <a:ea typeface="Microsoft YaHei" pitchFamily="34" charset="-122"/>
+                <a:cs typeface="Microsoft YaHei" pitchFamily="34" charset="-120"/>
+              </a:rPr>
+              <a:t>IL18 分层内排名 3/39（单细胞）与 1/23（单核），HPA IL18 214.1 vs CASP1 7.9 nCPM（27 倍）。未进候选只因该分层另有三分之一细胞类型 CASP1 更低；其自身 CASP1 检出 单核 1.9% / 单细胞 4.2%，并不算低，故列为需复核的潜在项。</a:t>
+            </a:r>
+            <a:endParaRPr lang="en-US" sz="1200" dirty="0"/>
+          </a:p>
+        </p:txBody>
+      </p:sp>
+      <p:sp>
+        <p:nvSpPr>
+          <p:cNvPr id="9" name="Text 7"/>
+          <p:cNvSpPr txBox="1"/>
+          <p:nvPr/>
+        </p:nvSpPr>
+        <p:spPr>
+          <a:xfrm>
+            <a:off x="640080" y="4480560"/>
+            <a:ext cx="2514600" cy="914400"/>
+          </a:xfrm>
+          <a:prstGeom prst="rect">
+            <a:avLst/>
+          </a:prstGeom>
+          <a:noFill/>
+          <a:ln/>
+        </p:spPr>
+        <p:txBody>
+          <a:bodyPr wrap="square" rtlCol="0" anchor="t"/>
+          <a:lstStyle/>
+          <a:p>
+            <a:pPr indent="0" marL="0">
+              <a:buNone/>
+            </a:pPr>
+            <a:r>
+              <a:rPr lang="en-US" sz="1350" b="1" dirty="0">
                 <a:solidFill>
                   <a:srgbClr val="B07A00"/>
                 </a:solidFill>
@@ -1854,20 +2042,20 @@
               </a:rPr>
               <a:t>C CASP1 确实存在</a:t>
             </a:r>
-            <a:endParaRPr lang="en-US" sz="1400" dirty="0"/>
-          </a:p>
-        </p:txBody>
-      </p:sp>
-      <p:sp>
-        <p:nvSpPr>
-          <p:cNvPr id="8" name="Text 6"/>
+            <a:endParaRPr lang="en-US" sz="1350" dirty="0"/>
+          </a:p>
+        </p:txBody>
+      </p:sp>
+      <p:sp>
+        <p:nvSpPr>
+          <p:cNvPr id="10" name="Text 8"/>
           <p:cNvSpPr txBox="1"/>
           <p:nvPr/>
         </p:nvSpPr>
         <p:spPr>
           <a:xfrm>
-            <a:off x="3429000" y="3941064"/>
-            <a:ext cx="8138160" cy="1188720"/>
+            <a:off x="3291840" y="4480560"/>
+            <a:ext cx="8275320" cy="1005840"/>
           </a:xfrm>
           <a:prstGeom prst="rect">
             <a:avLst/>
@@ -1881,12 +2069,12 @@
           <a:p>
             <a:pPr indent="0" marL="0">
               <a:lnSpc>
-                <a:spcPct val="115000"/>
+                <a:spcPct val="112000"/>
               </a:lnSpc>
               <a:buNone/>
             </a:pPr>
             <a:r>
-              <a:rPr lang="en-US" sz="1250" b="1" dirty="0">
+              <a:rPr lang="en-US" sz="1200" b="1" dirty="0">
                 <a:solidFill>
                   <a:srgbClr val="1A1A1A"/>
                 </a:solidFill>
@@ -1894,17 +2082,17 @@
                 <a:ea typeface="Microsoft YaHei" pitchFamily="34" charset="-122"/>
                 <a:cs typeface="Microsoft YaHei" pitchFamily="34" charset="-120"/>
               </a:rPr>
-              <a:t>小鼠肺泡巨噬 · 小鼠脑小胶质 · 人肺纤毛上皮
+              <a:t>小鼠肺 肺泡巨噬 · 人肺 气道多纤毛上皮 · 小鼠脑 小胶质/CNS巨噬 · 人肺 纤毛上皮
 </a:t>
             </a:r>
             <a:pPr indent="0" marL="0">
               <a:lnSpc>
-                <a:spcPct val="115000"/>
+                <a:spcPct val="112000"/>
               </a:lnSpc>
               <a:buNone/>
             </a:pPr>
             <a:r>
-              <a:rPr lang="en-US" sz="1250" dirty="0">
+              <a:rPr lang="en-US" sz="1200" dirty="0">
                 <a:solidFill>
                   <a:srgbClr val="6B6B6B"/>
                 </a:solidFill>
@@ -1912,22 +2100,22 @@
                 <a:ea typeface="Microsoft YaHei" pitchFamily="34" charset="-122"/>
                 <a:cs typeface="Microsoft YaHei" pitchFamily="34" charset="-120"/>
               </a:rPr>
-              <a:t>肺泡巨噬 IL18 检出 74.7% 为最高，但 ImmGen 分选 Casp1=511（比值 4.7）。排除理由是 CASP1 被检出，不是测不准。</a:t>
-            </a:r>
-            <a:endParaRPr lang="en-US" sz="1250" dirty="0"/>
-          </a:p>
-        </p:txBody>
-      </p:sp>
-      <p:sp>
-        <p:nvSpPr>
-          <p:cNvPr id="9" name="Text 7"/>
+              <a:t>肺泡巨噬 IL18 检出 71.6% 为全部候选最高，但 ImmGen 分选 Casp1=511（比值 4.7），本数据 CASP1 178/1341 = 13.3%，14/14 供体均有阳性。排除理由是 CASP1 被检出。</a:t>
+            </a:r>
+            <a:endParaRPr lang="en-US" sz="1200" dirty="0"/>
+          </a:p>
+        </p:txBody>
+      </p:sp>
+      <p:sp>
+        <p:nvSpPr>
+          <p:cNvPr id="11" name="Text 9"/>
           <p:cNvSpPr txBox="1"/>
           <p:nvPr/>
         </p:nvSpPr>
         <p:spPr>
           <a:xfrm>
-            <a:off x="640080" y="5157216"/>
-            <a:ext cx="2651760" cy="914400"/>
+            <a:off x="640080" y="5486400"/>
+            <a:ext cx="2514600" cy="914400"/>
           </a:xfrm>
           <a:prstGeom prst="rect">
             <a:avLst/>
@@ -1943,7 +2131,7 @@
               <a:buNone/>
             </a:pPr>
             <a:r>
-              <a:rPr lang="en-US" sz="1400" b="1" dirty="0">
+              <a:rPr lang="en-US" sz="1350" b="1" dirty="0">
                 <a:solidFill>
                   <a:srgbClr val="9A2B2B"/>
                 </a:solidFill>
@@ -1953,20 +2141,20 @@
               </a:rPr>
               <a:t>D 方向相反，排除</a:t>
             </a:r>
-            <a:endParaRPr lang="en-US" sz="1400" dirty="0"/>
-          </a:p>
-        </p:txBody>
-      </p:sp>
-      <p:sp>
-        <p:nvSpPr>
-          <p:cNvPr id="10" name="Text 8"/>
+            <a:endParaRPr lang="en-US" sz="1350" dirty="0"/>
+          </a:p>
+        </p:txBody>
+      </p:sp>
+      <p:sp>
+        <p:nvSpPr>
+          <p:cNvPr id="12" name="Text 10"/>
           <p:cNvSpPr txBox="1"/>
           <p:nvPr/>
         </p:nvSpPr>
         <p:spPr>
           <a:xfrm>
-            <a:off x="3429000" y="5157216"/>
-            <a:ext cx="8138160" cy="1188720"/>
+            <a:off x="3291840" y="5486400"/>
+            <a:ext cx="8275320" cy="1005840"/>
           </a:xfrm>
           <a:prstGeom prst="rect">
             <a:avLst/>
@@ -1980,12 +2168,12 @@
           <a:p>
             <a:pPr indent="0" marL="0">
               <a:lnSpc>
-                <a:spcPct val="115000"/>
+                <a:spcPct val="112000"/>
               </a:lnSpc>
               <a:buNone/>
             </a:pPr>
             <a:r>
-              <a:rPr lang="en-US" sz="1250" b="1" dirty="0">
+              <a:rPr lang="en-US" sz="1200" b="1" dirty="0">
                 <a:solidFill>
                   <a:srgbClr val="1A1A1A"/>
                 </a:solidFill>
@@ -1998,12 +2186,12 @@
             </a:r>
             <a:pPr indent="0" marL="0">
               <a:lnSpc>
-                <a:spcPct val="115000"/>
+                <a:spcPct val="112000"/>
               </a:lnSpc>
               <a:buNone/>
             </a:pPr>
             <a:r>
-              <a:rPr lang="en-US" sz="1250" dirty="0">
+              <a:rPr lang="en-US" sz="1200" dirty="0">
                 <a:solidFill>
                   <a:srgbClr val="6B6B6B"/>
                 </a:solidFill>
@@ -2011,9 +2199,9 @@
                 <a:ea typeface="Microsoft YaHei" pitchFamily="34" charset="-122"/>
                 <a:cs typeface="Microsoft YaHei" pitchFamily="34" charset="-120"/>
               </a:rPr>
-              <a:t>嗜碱参考层 CASP1 60–234 nTPM vs IL18 4.7–14.8，比值 0.085。</a:t>
-            </a:r>
-            <a:endParaRPr lang="en-US" sz="1250" dirty="0"/>
+              <a:t>人肝嗜碱粒细胞参考层 CASP1 60–234 nTPM vs IL18 4.7–14.8（比值 0.085）；人肺树突状细胞 2.0 倍。</a:t>
+            </a:r>
+            <a:endParaRPr lang="en-US" sz="1200" dirty="0"/>
           </a:p>
         </p:txBody>
       </p:sp>
@@ -2075,7 +2263,7 @@
                 <a:ea typeface="Microsoft YaHei" pitchFamily="34" charset="-122"/>
                 <a:cs typeface="Microsoft YaHei" pitchFamily="34" charset="-120"/>
               </a:rPr>
-              <a:t>候选总览：IL18 检出率与证据级别</a:t>
+              <a:t>候选总览：合并检出率与证据级别</a:t>
             </a:r>
             <a:endParaRPr lang="en-US" sz="2500" dirty="0"/>
           </a:p>
@@ -2097,8 +2285,8 @@
         </p:blipFill>
         <p:spPr>
           <a:xfrm>
-            <a:off x="2462443" y="1188720"/>
-            <a:ext cx="7264066" cy="5257800"/>
+            <a:off x="904388" y="1143000"/>
+            <a:ext cx="10380176" cy="5394960"/>
           </a:xfrm>
           <a:prstGeom prst="rect">
             <a:avLst/>
@@ -2163,39 +2351,1799 @@
                 <a:ea typeface="Microsoft YaHei" pitchFamily="34" charset="-122"/>
                 <a:cs typeface="Microsoft YaHei" pitchFamily="34" charset="-120"/>
               </a:rPr>
-              <a:t>小鼠脑（单细胞）：胶质 IL18 可检、CASP1 处于零底线</a:t>
+              <a:t>检出率的口径：为什么上一版这一页全是 0%</a:t>
             </a:r>
             <a:endParaRPr lang="en-US" sz="2500" dirty="0"/>
           </a:p>
         </p:txBody>
       </p:sp>
-      <p:pic>
-        <p:nvPicPr>
-          <p:cNvPr id="3" name="Image 0" descr="/home/user/aaa/il18_casp5organ/figures/mouse/brain_cell.png">    </p:cNvPr>
-          <p:cNvPicPr>
-            <a:picLocks noChangeAspect="1"/>
-          </p:cNvPicPr>
+      <p:sp>
+        <p:nvSpPr>
+          <p:cNvPr id="3" name="Text 1"/>
+          <p:cNvSpPr txBox="1"/>
           <p:nvPr/>
-        </p:nvPicPr>
-        <p:blipFill>
-          <a:blip r:embed="rId1"/>
-          <a:stretch>
-            <a:fillRect/>
-          </a:stretch>
-        </p:blipFill>
+        </p:nvSpPr>
         <p:spPr>
           <a:xfrm>
-            <a:off x="640080" y="2410878"/>
-            <a:ext cx="10908792" cy="2127685"/>
+            <a:off x="731520" y="1371600"/>
+            <a:ext cx="10698480" cy="914400"/>
           </a:xfrm>
           <a:prstGeom prst="rect">
             <a:avLst/>
           </a:prstGeom>
+          <a:noFill/>
+          <a:ln/>
         </p:spPr>
-      </p:pic>
-      <p:sp>
-        <p:nvSpPr>
-          <p:cNvPr id="4" name="Text 1"/>
+        <p:txBody>
+          <a:bodyPr wrap="square" rtlCol="0" anchor="ctr"/>
+          <a:lstStyle/>
+          <a:p>
+            <a:pPr indent="0" marL="0">
+              <a:lnSpc>
+                <a:spcPct val="125000"/>
+              </a:lnSpc>
+              <a:buNone/>
+            </a:pPr>
+            <a:r>
+              <a:rPr lang="en-US" sz="1500" b="1" dirty="0">
+                <a:solidFill>
+                  <a:srgbClr val="1A1A1A"/>
+                </a:solidFill>
+                <a:latin typeface="Microsoft YaHei" pitchFamily="34" charset="0"/>
+                <a:ea typeface="Microsoft YaHei" pitchFamily="34" charset="-122"/>
+                <a:cs typeface="Microsoft YaHei" pitchFamily="34" charset="-120"/>
+              </a:rPr>
+              <a:t>上一版标注的是「供体中位数检出率」。</a:t>
+            </a:r>
+            <a:pPr indent="0" marL="0">
+              <a:lnSpc>
+                <a:spcPct val="125000"/>
+              </a:lnSpc>
+              <a:buNone/>
+            </a:pPr>
+            <a:r>
+              <a:rPr lang="en-US" sz="1500" dirty="0">
+                <a:solidFill>
+                  <a:srgbClr val="1A1A1A"/>
+                </a:solidFill>
+                <a:latin typeface="Microsoft YaHei" pitchFamily="34" charset="0"/>
+                <a:ea typeface="Microsoft YaHei" pitchFamily="34" charset="-122"/>
+                <a:cs typeface="Microsoft YaHei" pitchFamily="34" charset="-120"/>
+              </a:rPr>
+              <a:t>每位供体只有数十到上百个该类型细胞，当真实检出率低于约 1/细胞数 时，半数以上供体恰好 0 个阳性细胞，中位数即为 0——这是统计量把低值截断，不是真的没有检出。本版改用合并检出率并标注阳性细胞数。</a:t>
+            </a:r>
+            <a:endParaRPr lang="en-US" sz="1500" dirty="0"/>
+          </a:p>
+        </p:txBody>
+      </p:sp>
+      <p:graphicFrame>
+        <p:nvGraphicFramePr>
+          <p:cNvPr id="5" name="Table 0"/>
+          <p:cNvGraphicFramePr>
+            <a:graphicFrameLocks noGrp="1"/>
+          </p:cNvGraphicFramePr>
+          <p:nvPr>
+            <p:extLst>
+              <p:ext uri="{D42A27DB-BD31-4B8C-83A1-F6EECF244321}">
+                <p14:modId xmlns:p14="http://schemas.microsoft.com/office/powerpoint/2010/main" val="1579011935"/>
+              </p:ext>
+            </p:extLst>
+          </p:nvPr>
+        </p:nvGraphicFramePr>
+        <p:xfrm>
+          <a:off x="731520" y="2606040"/>
+          <a:ext cx="10698480" cy="914400"/>
+        </p:xfrm>
+        <a:graphic>
+          <a:graphicData uri="http://schemas.openxmlformats.org/drawingml/2006/table">
+            <a:tbl>
+              <a:tblPr/>
+              <a:tblGrid>
+                <a:gridCol w="3017520"/>
+                <a:gridCol w="2743200"/>
+                <a:gridCol w="1737360"/>
+                <a:gridCol w="1554480"/>
+                <a:gridCol w="1645920"/>
+              </a:tblGrid>
+              <a:tr h="384048">
+                <a:tc>
+                  <a:txBody>
+                    <a:bodyPr/>
+                    <a:lstStyle/>
+                    <a:p>
+                      <a:pPr indent="0" marL="0">
+                        <a:buNone/>
+                      </a:pPr>
+                      <a:r>
+                        <a:rPr lang="en-US" sz="1300" b="1" dirty="0">
+                          <a:solidFill>
+                            <a:srgbClr val="1A1A1A"/>
+                          </a:solidFill>
+                          <a:latin typeface="Microsoft YaHei" pitchFamily="34" charset="0"/>
+                          <a:ea typeface="Microsoft YaHei" pitchFamily="34" charset="-122"/>
+                          <a:cs typeface="Microsoft YaHei" pitchFamily="34" charset="-120"/>
+                        </a:rPr>
+                        <a:t>细胞类型</a:t>
+                      </a:r>
+                      <a:endParaRPr lang="en-US" sz="1300" dirty="0">
+                        <a:latin typeface="Microsoft YaHei" charset="0"/>
+                        <a:ea typeface="Microsoft YaHei" charset="0"/>
+                        <a:cs typeface="Microsoft YaHei" charset="0"/>
+                      </a:endParaRPr>
+                    </a:p>
+                  </a:txBody>
+                  <a:tcPr marL="91440" marR="91440" marT="45720" marB="45720" anchor="ctr">
+                    <a:lnL w="6350" cap="flat" cmpd="sng" algn="ctr">
+                      <a:solidFill>
+                        <a:srgbClr val="D8DBE0"/>
+                      </a:solidFill>
+                      <a:prstDash val="solid"/>
+                      <a:round/>
+                      <a:headEnd type="none" w="med" len="med"/>
+                      <a:tailEnd type="none" w="med" len="med"/>
+                    </a:lnL>
+                    <a:lnR w="6350" cap="flat" cmpd="sng" algn="ctr">
+                      <a:solidFill>
+                        <a:srgbClr val="D8DBE0"/>
+                      </a:solidFill>
+                      <a:prstDash val="solid"/>
+                      <a:round/>
+                      <a:headEnd type="none" w="med" len="med"/>
+                      <a:tailEnd type="none" w="med" len="med"/>
+                    </a:lnR>
+                    <a:lnT w="6350" cap="flat" cmpd="sng" algn="ctr">
+                      <a:solidFill>
+                        <a:srgbClr val="D8DBE0"/>
+                      </a:solidFill>
+                      <a:prstDash val="solid"/>
+                      <a:round/>
+                      <a:headEnd type="none" w="med" len="med"/>
+                      <a:tailEnd type="none" w="med" len="med"/>
+                    </a:lnT>
+                    <a:lnB w="6350" cap="flat" cmpd="sng" algn="ctr">
+                      <a:solidFill>
+                        <a:srgbClr val="D8DBE0"/>
+                      </a:solidFill>
+                      <a:prstDash val="solid"/>
+                      <a:round/>
+                      <a:headEnd type="none" w="med" len="med"/>
+                      <a:tailEnd type="none" w="med" len="med"/>
+                    </a:lnB>
+                    <a:solidFill>
+                      <a:srgbClr val="EEF1F5"/>
+                    </a:solidFill>
+                  </a:tcPr>
+                </a:tc>
+                <a:tc>
+                  <a:txBody>
+                    <a:bodyPr/>
+                    <a:lstStyle/>
+                    <a:p>
+                      <a:pPr indent="0" marL="0">
+                        <a:buNone/>
+                      </a:pPr>
+                      <a:r>
+                        <a:rPr lang="en-US" sz="1300" b="1" dirty="0">
+                          <a:solidFill>
+                            <a:srgbClr val="1A1A1A"/>
+                          </a:solidFill>
+                          <a:latin typeface="Microsoft YaHei" pitchFamily="34" charset="0"/>
+                          <a:ea typeface="Microsoft YaHei" pitchFamily="34" charset="-122"/>
+                          <a:cs typeface="Microsoft YaHei" pitchFamily="34" charset="-120"/>
+                        </a:rPr>
+                        <a:t>CASP1 阳性细胞 / 分析细胞</a:t>
+                      </a:r>
+                      <a:endParaRPr lang="en-US" sz="1300" dirty="0">
+                        <a:latin typeface="Microsoft YaHei" charset="0"/>
+                        <a:ea typeface="Microsoft YaHei" charset="0"/>
+                        <a:cs typeface="Microsoft YaHei" charset="0"/>
+                      </a:endParaRPr>
+                    </a:p>
+                  </a:txBody>
+                  <a:tcPr marL="91440" marR="91440" marT="45720" marB="45720" anchor="ctr">
+                    <a:lnL w="6350" cap="flat" cmpd="sng" algn="ctr">
+                      <a:solidFill>
+                        <a:srgbClr val="D8DBE0"/>
+                      </a:solidFill>
+                      <a:prstDash val="solid"/>
+                      <a:round/>
+                      <a:headEnd type="none" w="med" len="med"/>
+                      <a:tailEnd type="none" w="med" len="med"/>
+                    </a:lnL>
+                    <a:lnR w="6350" cap="flat" cmpd="sng" algn="ctr">
+                      <a:solidFill>
+                        <a:srgbClr val="D8DBE0"/>
+                      </a:solidFill>
+                      <a:prstDash val="solid"/>
+                      <a:round/>
+                      <a:headEnd type="none" w="med" len="med"/>
+                      <a:tailEnd type="none" w="med" len="med"/>
+                    </a:lnR>
+                    <a:lnT w="6350" cap="flat" cmpd="sng" algn="ctr">
+                      <a:solidFill>
+                        <a:srgbClr val="D8DBE0"/>
+                      </a:solidFill>
+                      <a:prstDash val="solid"/>
+                      <a:round/>
+                      <a:headEnd type="none" w="med" len="med"/>
+                      <a:tailEnd type="none" w="med" len="med"/>
+                    </a:lnT>
+                    <a:lnB w="6350" cap="flat" cmpd="sng" algn="ctr">
+                      <a:solidFill>
+                        <a:srgbClr val="D8DBE0"/>
+                      </a:solidFill>
+                      <a:prstDash val="solid"/>
+                      <a:round/>
+                      <a:headEnd type="none" w="med" len="med"/>
+                      <a:tailEnd type="none" w="med" len="med"/>
+                    </a:lnB>
+                    <a:solidFill>
+                      <a:srgbClr val="EEF1F5"/>
+                    </a:solidFill>
+                  </a:tcPr>
+                </a:tc>
+                <a:tc>
+                  <a:txBody>
+                    <a:bodyPr/>
+                    <a:lstStyle/>
+                    <a:p>
+                      <a:pPr indent="0" marL="0">
+                        <a:buNone/>
+                      </a:pPr>
+                      <a:r>
+                        <a:rPr lang="en-US" sz="1300" b="1" dirty="0">
+                          <a:solidFill>
+                            <a:srgbClr val="1A1A1A"/>
+                          </a:solidFill>
+                          <a:latin typeface="Microsoft YaHei" pitchFamily="34" charset="0"/>
+                          <a:ea typeface="Microsoft YaHei" pitchFamily="34" charset="-122"/>
+                          <a:cs typeface="Microsoft YaHei" pitchFamily="34" charset="-120"/>
+                        </a:rPr>
+                        <a:t>合并检出率</a:t>
+                      </a:r>
+                      <a:endParaRPr lang="en-US" sz="1300" dirty="0">
+                        <a:latin typeface="Microsoft YaHei" charset="0"/>
+                        <a:ea typeface="Microsoft YaHei" charset="0"/>
+                        <a:cs typeface="Microsoft YaHei" charset="0"/>
+                      </a:endParaRPr>
+                    </a:p>
+                  </a:txBody>
+                  <a:tcPr marL="91440" marR="91440" marT="45720" marB="45720" anchor="ctr">
+                    <a:lnL w="6350" cap="flat" cmpd="sng" algn="ctr">
+                      <a:solidFill>
+                        <a:srgbClr val="D8DBE0"/>
+                      </a:solidFill>
+                      <a:prstDash val="solid"/>
+                      <a:round/>
+                      <a:headEnd type="none" w="med" len="med"/>
+                      <a:tailEnd type="none" w="med" len="med"/>
+                    </a:lnL>
+                    <a:lnR w="6350" cap="flat" cmpd="sng" algn="ctr">
+                      <a:solidFill>
+                        <a:srgbClr val="D8DBE0"/>
+                      </a:solidFill>
+                      <a:prstDash val="solid"/>
+                      <a:round/>
+                      <a:headEnd type="none" w="med" len="med"/>
+                      <a:tailEnd type="none" w="med" len="med"/>
+                    </a:lnR>
+                    <a:lnT w="6350" cap="flat" cmpd="sng" algn="ctr">
+                      <a:solidFill>
+                        <a:srgbClr val="D8DBE0"/>
+                      </a:solidFill>
+                      <a:prstDash val="solid"/>
+                      <a:round/>
+                      <a:headEnd type="none" w="med" len="med"/>
+                      <a:tailEnd type="none" w="med" len="med"/>
+                    </a:lnT>
+                    <a:lnB w="6350" cap="flat" cmpd="sng" algn="ctr">
+                      <a:solidFill>
+                        <a:srgbClr val="D8DBE0"/>
+                      </a:solidFill>
+                      <a:prstDash val="solid"/>
+                      <a:round/>
+                      <a:headEnd type="none" w="med" len="med"/>
+                      <a:tailEnd type="none" w="med" len="med"/>
+                    </a:lnB>
+                    <a:solidFill>
+                      <a:srgbClr val="EEF1F5"/>
+                    </a:solidFill>
+                  </a:tcPr>
+                </a:tc>
+                <a:tc>
+                  <a:txBody>
+                    <a:bodyPr/>
+                    <a:lstStyle/>
+                    <a:p>
+                      <a:pPr indent="0" marL="0">
+                        <a:buNone/>
+                      </a:pPr>
+                      <a:r>
+                        <a:rPr lang="en-US" sz="1300" b="1" dirty="0">
+                          <a:solidFill>
+                            <a:srgbClr val="1A1A1A"/>
+                          </a:solidFill>
+                          <a:latin typeface="Microsoft YaHei" pitchFamily="34" charset="0"/>
+                          <a:ea typeface="Microsoft YaHei" pitchFamily="34" charset="-122"/>
+                          <a:cs typeface="Microsoft YaHei" pitchFamily="34" charset="-120"/>
+                        </a:rPr>
+                        <a:t>供体中位数</a:t>
+                      </a:r>
+                      <a:endParaRPr lang="en-US" sz="1300" dirty="0">
+                        <a:latin typeface="Microsoft YaHei" charset="0"/>
+                        <a:ea typeface="Microsoft YaHei" charset="0"/>
+                        <a:cs typeface="Microsoft YaHei" charset="0"/>
+                      </a:endParaRPr>
+                    </a:p>
+                  </a:txBody>
+                  <a:tcPr marL="91440" marR="91440" marT="45720" marB="45720" anchor="ctr">
+                    <a:lnL w="6350" cap="flat" cmpd="sng" algn="ctr">
+                      <a:solidFill>
+                        <a:srgbClr val="D8DBE0"/>
+                      </a:solidFill>
+                      <a:prstDash val="solid"/>
+                      <a:round/>
+                      <a:headEnd type="none" w="med" len="med"/>
+                      <a:tailEnd type="none" w="med" len="med"/>
+                    </a:lnL>
+                    <a:lnR w="6350" cap="flat" cmpd="sng" algn="ctr">
+                      <a:solidFill>
+                        <a:srgbClr val="D8DBE0"/>
+                      </a:solidFill>
+                      <a:prstDash val="solid"/>
+                      <a:round/>
+                      <a:headEnd type="none" w="med" len="med"/>
+                      <a:tailEnd type="none" w="med" len="med"/>
+                    </a:lnR>
+                    <a:lnT w="6350" cap="flat" cmpd="sng" algn="ctr">
+                      <a:solidFill>
+                        <a:srgbClr val="D8DBE0"/>
+                      </a:solidFill>
+                      <a:prstDash val="solid"/>
+                      <a:round/>
+                      <a:headEnd type="none" w="med" len="med"/>
+                      <a:tailEnd type="none" w="med" len="med"/>
+                    </a:lnT>
+                    <a:lnB w="6350" cap="flat" cmpd="sng" algn="ctr">
+                      <a:solidFill>
+                        <a:srgbClr val="D8DBE0"/>
+                      </a:solidFill>
+                      <a:prstDash val="solid"/>
+                      <a:round/>
+                      <a:headEnd type="none" w="med" len="med"/>
+                      <a:tailEnd type="none" w="med" len="med"/>
+                    </a:lnB>
+                    <a:solidFill>
+                      <a:srgbClr val="EEF1F5"/>
+                    </a:solidFill>
+                  </a:tcPr>
+                </a:tc>
+                <a:tc>
+                  <a:txBody>
+                    <a:bodyPr/>
+                    <a:lstStyle/>
+                    <a:p>
+                      <a:pPr indent="0" marL="0">
+                        <a:buNone/>
+                      </a:pPr>
+                      <a:r>
+                        <a:rPr lang="en-US" sz="1300" b="1" dirty="0">
+                          <a:solidFill>
+                            <a:srgbClr val="1A1A1A"/>
+                          </a:solidFill>
+                          <a:latin typeface="Microsoft YaHei" pitchFamily="34" charset="0"/>
+                          <a:ea typeface="Microsoft YaHei" pitchFamily="34" charset="-122"/>
+                          <a:cs typeface="Microsoft YaHei" pitchFamily="34" charset="-120"/>
+                        </a:rPr>
+                        <a:t>有阳性的供体</a:t>
+                      </a:r>
+                      <a:endParaRPr lang="en-US" sz="1300" dirty="0">
+                        <a:latin typeface="Microsoft YaHei" charset="0"/>
+                        <a:ea typeface="Microsoft YaHei" charset="0"/>
+                        <a:cs typeface="Microsoft YaHei" charset="0"/>
+                      </a:endParaRPr>
+                    </a:p>
+                  </a:txBody>
+                  <a:tcPr marL="91440" marR="91440" marT="45720" marB="45720" anchor="ctr">
+                    <a:lnL w="6350" cap="flat" cmpd="sng" algn="ctr">
+                      <a:solidFill>
+                        <a:srgbClr val="D8DBE0"/>
+                      </a:solidFill>
+                      <a:prstDash val="solid"/>
+                      <a:round/>
+                      <a:headEnd type="none" w="med" len="med"/>
+                      <a:tailEnd type="none" w="med" len="med"/>
+                    </a:lnL>
+                    <a:lnR w="6350" cap="flat" cmpd="sng" algn="ctr">
+                      <a:solidFill>
+                        <a:srgbClr val="D8DBE0"/>
+                      </a:solidFill>
+                      <a:prstDash val="solid"/>
+                      <a:round/>
+                      <a:headEnd type="none" w="med" len="med"/>
+                      <a:tailEnd type="none" w="med" len="med"/>
+                    </a:lnR>
+                    <a:lnT w="6350" cap="flat" cmpd="sng" algn="ctr">
+                      <a:solidFill>
+                        <a:srgbClr val="D8DBE0"/>
+                      </a:solidFill>
+                      <a:prstDash val="solid"/>
+                      <a:round/>
+                      <a:headEnd type="none" w="med" len="med"/>
+                      <a:tailEnd type="none" w="med" len="med"/>
+                    </a:lnT>
+                    <a:lnB w="6350" cap="flat" cmpd="sng" algn="ctr">
+                      <a:solidFill>
+                        <a:srgbClr val="D8DBE0"/>
+                      </a:solidFill>
+                      <a:prstDash val="solid"/>
+                      <a:round/>
+                      <a:headEnd type="none" w="med" len="med"/>
+                      <a:tailEnd type="none" w="med" len="med"/>
+                    </a:lnB>
+                    <a:solidFill>
+                      <a:srgbClr val="EEF1F5"/>
+                    </a:solidFill>
+                  </a:tcPr>
+                </a:tc>
+              </a:tr>
+              <a:tr h="384048">
+                <a:tc>
+                  <a:txBody>
+                    <a:bodyPr/>
+                    <a:lstStyle/>
+                    <a:p>
+                      <a:pPr indent="0" marL="0">
+                        <a:buNone/>
+                      </a:pPr>
+                      <a:r>
+                        <a:rPr lang="en-US" sz="1300" dirty="0">
+                          <a:solidFill>
+                            <a:srgbClr val="1A1A1A"/>
+                          </a:solidFill>
+                          <a:latin typeface="Microsoft YaHei" pitchFamily="34" charset="0"/>
+                          <a:ea typeface="Microsoft YaHei" pitchFamily="34" charset="-122"/>
+                          <a:cs typeface="Microsoft YaHei" pitchFamily="34" charset="-120"/>
+                        </a:rPr>
+                        <a:t>人·肺 肥大细胞</a:t>
+                      </a:r>
+                      <a:endParaRPr lang="en-US" sz="1300" dirty="0">
+                        <a:latin typeface="Microsoft YaHei" charset="0"/>
+                        <a:ea typeface="Microsoft YaHei" charset="0"/>
+                        <a:cs typeface="Microsoft YaHei" charset="0"/>
+                      </a:endParaRPr>
+                    </a:p>
+                  </a:txBody>
+                  <a:tcPr marL="91440" marR="91440" marT="45720" marB="45720" anchor="ctr">
+                    <a:lnL w="6350" cap="flat" cmpd="sng" algn="ctr">
+                      <a:solidFill>
+                        <a:srgbClr val="D8DBE0"/>
+                      </a:solidFill>
+                      <a:prstDash val="solid"/>
+                      <a:round/>
+                      <a:headEnd type="none" w="med" len="med"/>
+                      <a:tailEnd type="none" w="med" len="med"/>
+                    </a:lnL>
+                    <a:lnR w="6350" cap="flat" cmpd="sng" algn="ctr">
+                      <a:solidFill>
+                        <a:srgbClr val="D8DBE0"/>
+                      </a:solidFill>
+                      <a:prstDash val="solid"/>
+                      <a:round/>
+                      <a:headEnd type="none" w="med" len="med"/>
+                      <a:tailEnd type="none" w="med" len="med"/>
+                    </a:lnR>
+                    <a:lnT w="6350" cap="flat" cmpd="sng" algn="ctr">
+                      <a:solidFill>
+                        <a:srgbClr val="D8DBE0"/>
+                      </a:solidFill>
+                      <a:prstDash val="solid"/>
+                      <a:round/>
+                      <a:headEnd type="none" w="med" len="med"/>
+                      <a:tailEnd type="none" w="med" len="med"/>
+                    </a:lnT>
+                    <a:lnB w="6350" cap="flat" cmpd="sng" algn="ctr">
+                      <a:solidFill>
+                        <a:srgbClr val="D8DBE0"/>
+                      </a:solidFill>
+                      <a:prstDash val="solid"/>
+                      <a:round/>
+                      <a:headEnd type="none" w="med" len="med"/>
+                      <a:tailEnd type="none" w="med" len="med"/>
+                    </a:lnB>
+                  </a:tcPr>
+                </a:tc>
+                <a:tc>
+                  <a:txBody>
+                    <a:bodyPr/>
+                    <a:lstStyle/>
+                    <a:p>
+                      <a:pPr indent="0" marL="0">
+                        <a:buNone/>
+                      </a:pPr>
+                      <a:r>
+                        <a:rPr lang="en-US" sz="1300" dirty="0">
+                          <a:solidFill>
+                            <a:srgbClr val="1A1A1A"/>
+                          </a:solidFill>
+                          <a:latin typeface="Microsoft YaHei" pitchFamily="34" charset="0"/>
+                          <a:ea typeface="Microsoft YaHei" pitchFamily="34" charset="-122"/>
+                          <a:cs typeface="Microsoft YaHei" pitchFamily="34" charset="-120"/>
+                        </a:rPr>
+                        <a:t>138 / 5299</a:t>
+                      </a:r>
+                      <a:endParaRPr lang="en-US" sz="1300" dirty="0">
+                        <a:latin typeface="Microsoft YaHei" charset="0"/>
+                        <a:ea typeface="Microsoft YaHei" charset="0"/>
+                        <a:cs typeface="Microsoft YaHei" charset="0"/>
+                      </a:endParaRPr>
+                    </a:p>
+                  </a:txBody>
+                  <a:tcPr marL="91440" marR="91440" marT="45720" marB="45720" anchor="ctr">
+                    <a:lnL w="6350" cap="flat" cmpd="sng" algn="ctr">
+                      <a:solidFill>
+                        <a:srgbClr val="D8DBE0"/>
+                      </a:solidFill>
+                      <a:prstDash val="solid"/>
+                      <a:round/>
+                      <a:headEnd type="none" w="med" len="med"/>
+                      <a:tailEnd type="none" w="med" len="med"/>
+                    </a:lnL>
+                    <a:lnR w="6350" cap="flat" cmpd="sng" algn="ctr">
+                      <a:solidFill>
+                        <a:srgbClr val="D8DBE0"/>
+                      </a:solidFill>
+                      <a:prstDash val="solid"/>
+                      <a:round/>
+                      <a:headEnd type="none" w="med" len="med"/>
+                      <a:tailEnd type="none" w="med" len="med"/>
+                    </a:lnR>
+                    <a:lnT w="6350" cap="flat" cmpd="sng" algn="ctr">
+                      <a:solidFill>
+                        <a:srgbClr val="D8DBE0"/>
+                      </a:solidFill>
+                      <a:prstDash val="solid"/>
+                      <a:round/>
+                      <a:headEnd type="none" w="med" len="med"/>
+                      <a:tailEnd type="none" w="med" len="med"/>
+                    </a:lnT>
+                    <a:lnB w="6350" cap="flat" cmpd="sng" algn="ctr">
+                      <a:solidFill>
+                        <a:srgbClr val="D8DBE0"/>
+                      </a:solidFill>
+                      <a:prstDash val="solid"/>
+                      <a:round/>
+                      <a:headEnd type="none" w="med" len="med"/>
+                      <a:tailEnd type="none" w="med" len="med"/>
+                    </a:lnB>
+                  </a:tcPr>
+                </a:tc>
+                <a:tc>
+                  <a:txBody>
+                    <a:bodyPr/>
+                    <a:lstStyle/>
+                    <a:p>
+                      <a:pPr indent="0" marL="0">
+                        <a:buNone/>
+                      </a:pPr>
+                      <a:r>
+                        <a:rPr lang="en-US" sz="1300" dirty="0">
+                          <a:solidFill>
+                            <a:srgbClr val="1A1A1A"/>
+                          </a:solidFill>
+                          <a:latin typeface="Microsoft YaHei" pitchFamily="34" charset="0"/>
+                          <a:ea typeface="Microsoft YaHei" pitchFamily="34" charset="-122"/>
+                          <a:cs typeface="Microsoft YaHei" pitchFamily="34" charset="-120"/>
+                        </a:rPr>
+                        <a:t>2.6%</a:t>
+                      </a:r>
+                      <a:endParaRPr lang="en-US" sz="1300" dirty="0">
+                        <a:latin typeface="Microsoft YaHei" charset="0"/>
+                        <a:ea typeface="Microsoft YaHei" charset="0"/>
+                        <a:cs typeface="Microsoft YaHei" charset="0"/>
+                      </a:endParaRPr>
+                    </a:p>
+                  </a:txBody>
+                  <a:tcPr marL="91440" marR="91440" marT="45720" marB="45720" anchor="ctr">
+                    <a:lnL w="6350" cap="flat" cmpd="sng" algn="ctr">
+                      <a:solidFill>
+                        <a:srgbClr val="D8DBE0"/>
+                      </a:solidFill>
+                      <a:prstDash val="solid"/>
+                      <a:round/>
+                      <a:headEnd type="none" w="med" len="med"/>
+                      <a:tailEnd type="none" w="med" len="med"/>
+                    </a:lnL>
+                    <a:lnR w="6350" cap="flat" cmpd="sng" algn="ctr">
+                      <a:solidFill>
+                        <a:srgbClr val="D8DBE0"/>
+                      </a:solidFill>
+                      <a:prstDash val="solid"/>
+                      <a:round/>
+                      <a:headEnd type="none" w="med" len="med"/>
+                      <a:tailEnd type="none" w="med" len="med"/>
+                    </a:lnR>
+                    <a:lnT w="6350" cap="flat" cmpd="sng" algn="ctr">
+                      <a:solidFill>
+                        <a:srgbClr val="D8DBE0"/>
+                      </a:solidFill>
+                      <a:prstDash val="solid"/>
+                      <a:round/>
+                      <a:headEnd type="none" w="med" len="med"/>
+                      <a:tailEnd type="none" w="med" len="med"/>
+                    </a:lnT>
+                    <a:lnB w="6350" cap="flat" cmpd="sng" algn="ctr">
+                      <a:solidFill>
+                        <a:srgbClr val="D8DBE0"/>
+                      </a:solidFill>
+                      <a:prstDash val="solid"/>
+                      <a:round/>
+                      <a:headEnd type="none" w="med" len="med"/>
+                      <a:tailEnd type="none" w="med" len="med"/>
+                    </a:lnB>
+                  </a:tcPr>
+                </a:tc>
+                <a:tc>
+                  <a:txBody>
+                    <a:bodyPr/>
+                    <a:lstStyle/>
+                    <a:p>
+                      <a:pPr indent="0" marL="0">
+                        <a:buNone/>
+                      </a:pPr>
+                      <a:r>
+                        <a:rPr lang="en-US" sz="1300" dirty="0">
+                          <a:solidFill>
+                            <a:srgbClr val="1A1A1A"/>
+                          </a:solidFill>
+                          <a:latin typeface="Microsoft YaHei" pitchFamily="34" charset="0"/>
+                          <a:ea typeface="Microsoft YaHei" pitchFamily="34" charset="-122"/>
+                          <a:cs typeface="Microsoft YaHei" pitchFamily="34" charset="-120"/>
+                        </a:rPr>
+                        <a:t>0.00%</a:t>
+                      </a:r>
+                      <a:endParaRPr lang="en-US" sz="1300" dirty="0">
+                        <a:latin typeface="Microsoft YaHei" charset="0"/>
+                        <a:ea typeface="Microsoft YaHei" charset="0"/>
+                        <a:cs typeface="Microsoft YaHei" charset="0"/>
+                      </a:endParaRPr>
+                    </a:p>
+                  </a:txBody>
+                  <a:tcPr marL="91440" marR="91440" marT="45720" marB="45720" anchor="ctr">
+                    <a:lnL w="6350" cap="flat" cmpd="sng" algn="ctr">
+                      <a:solidFill>
+                        <a:srgbClr val="D8DBE0"/>
+                      </a:solidFill>
+                      <a:prstDash val="solid"/>
+                      <a:round/>
+                      <a:headEnd type="none" w="med" len="med"/>
+                      <a:tailEnd type="none" w="med" len="med"/>
+                    </a:lnL>
+                    <a:lnR w="6350" cap="flat" cmpd="sng" algn="ctr">
+                      <a:solidFill>
+                        <a:srgbClr val="D8DBE0"/>
+                      </a:solidFill>
+                      <a:prstDash val="solid"/>
+                      <a:round/>
+                      <a:headEnd type="none" w="med" len="med"/>
+                      <a:tailEnd type="none" w="med" len="med"/>
+                    </a:lnR>
+                    <a:lnT w="6350" cap="flat" cmpd="sng" algn="ctr">
+                      <a:solidFill>
+                        <a:srgbClr val="D8DBE0"/>
+                      </a:solidFill>
+                      <a:prstDash val="solid"/>
+                      <a:round/>
+                      <a:headEnd type="none" w="med" len="med"/>
+                      <a:tailEnd type="none" w="med" len="med"/>
+                    </a:lnT>
+                    <a:lnB w="6350" cap="flat" cmpd="sng" algn="ctr">
+                      <a:solidFill>
+                        <a:srgbClr val="D8DBE0"/>
+                      </a:solidFill>
+                      <a:prstDash val="solid"/>
+                      <a:round/>
+                      <a:headEnd type="none" w="med" len="med"/>
+                      <a:tailEnd type="none" w="med" len="med"/>
+                    </a:lnB>
+                  </a:tcPr>
+                </a:tc>
+                <a:tc>
+                  <a:txBody>
+                    <a:bodyPr/>
+                    <a:lstStyle/>
+                    <a:p>
+                      <a:pPr indent="0" marL="0">
+                        <a:buNone/>
+                      </a:pPr>
+                      <a:r>
+                        <a:rPr lang="en-US" sz="1300" dirty="0">
+                          <a:solidFill>
+                            <a:srgbClr val="1A1A1A"/>
+                          </a:solidFill>
+                          <a:latin typeface="Microsoft YaHei" pitchFamily="34" charset="0"/>
+                          <a:ea typeface="Microsoft YaHei" pitchFamily="34" charset="-122"/>
+                          <a:cs typeface="Microsoft YaHei" pitchFamily="34" charset="-120"/>
+                        </a:rPr>
+                        <a:t>21 / 44</a:t>
+                      </a:r>
+                      <a:endParaRPr lang="en-US" sz="1300" dirty="0">
+                        <a:latin typeface="Microsoft YaHei" charset="0"/>
+                        <a:ea typeface="Microsoft YaHei" charset="0"/>
+                        <a:cs typeface="Microsoft YaHei" charset="0"/>
+                      </a:endParaRPr>
+                    </a:p>
+                  </a:txBody>
+                  <a:tcPr marL="91440" marR="91440" marT="45720" marB="45720" anchor="ctr">
+                    <a:lnL w="6350" cap="flat" cmpd="sng" algn="ctr">
+                      <a:solidFill>
+                        <a:srgbClr val="D8DBE0"/>
+                      </a:solidFill>
+                      <a:prstDash val="solid"/>
+                      <a:round/>
+                      <a:headEnd type="none" w="med" len="med"/>
+                      <a:tailEnd type="none" w="med" len="med"/>
+                    </a:lnL>
+                    <a:lnR w="6350" cap="flat" cmpd="sng" algn="ctr">
+                      <a:solidFill>
+                        <a:srgbClr val="D8DBE0"/>
+                      </a:solidFill>
+                      <a:prstDash val="solid"/>
+                      <a:round/>
+                      <a:headEnd type="none" w="med" len="med"/>
+                      <a:tailEnd type="none" w="med" len="med"/>
+                    </a:lnR>
+                    <a:lnT w="6350" cap="flat" cmpd="sng" algn="ctr">
+                      <a:solidFill>
+                        <a:srgbClr val="D8DBE0"/>
+                      </a:solidFill>
+                      <a:prstDash val="solid"/>
+                      <a:round/>
+                      <a:headEnd type="none" w="med" len="med"/>
+                      <a:tailEnd type="none" w="med" len="med"/>
+                    </a:lnT>
+                    <a:lnB w="6350" cap="flat" cmpd="sng" algn="ctr">
+                      <a:solidFill>
+                        <a:srgbClr val="D8DBE0"/>
+                      </a:solidFill>
+                      <a:prstDash val="solid"/>
+                      <a:round/>
+                      <a:headEnd type="none" w="med" len="med"/>
+                      <a:tailEnd type="none" w="med" len="med"/>
+                    </a:lnB>
+                  </a:tcPr>
+                </a:tc>
+              </a:tr>
+              <a:tr h="384048">
+                <a:tc>
+                  <a:txBody>
+                    <a:bodyPr/>
+                    <a:lstStyle/>
+                    <a:p>
+                      <a:pPr indent="0" marL="0">
+                        <a:buNone/>
+                      </a:pPr>
+                      <a:r>
+                        <a:rPr lang="en-US" sz="1300" dirty="0">
+                          <a:solidFill>
+                            <a:srgbClr val="1A1A1A"/>
+                          </a:solidFill>
+                          <a:latin typeface="Microsoft YaHei" pitchFamily="34" charset="0"/>
+                          <a:ea typeface="Microsoft YaHei" pitchFamily="34" charset="-122"/>
+                          <a:cs typeface="Microsoft YaHei" pitchFamily="34" charset="-120"/>
+                        </a:rPr>
+                        <a:t>小鼠·脑 小胶质/CNS巨噬</a:t>
+                      </a:r>
+                      <a:endParaRPr lang="en-US" sz="1300" dirty="0">
+                        <a:latin typeface="Microsoft YaHei" charset="0"/>
+                        <a:ea typeface="Microsoft YaHei" charset="0"/>
+                        <a:cs typeface="Microsoft YaHei" charset="0"/>
+                      </a:endParaRPr>
+                    </a:p>
+                  </a:txBody>
+                  <a:tcPr marL="91440" marR="91440" marT="45720" marB="45720" anchor="ctr">
+                    <a:lnL w="6350" cap="flat" cmpd="sng" algn="ctr">
+                      <a:solidFill>
+                        <a:srgbClr val="D8DBE0"/>
+                      </a:solidFill>
+                      <a:prstDash val="solid"/>
+                      <a:round/>
+                      <a:headEnd type="none" w="med" len="med"/>
+                      <a:tailEnd type="none" w="med" len="med"/>
+                    </a:lnL>
+                    <a:lnR w="6350" cap="flat" cmpd="sng" algn="ctr">
+                      <a:solidFill>
+                        <a:srgbClr val="D8DBE0"/>
+                      </a:solidFill>
+                      <a:prstDash val="solid"/>
+                      <a:round/>
+                      <a:headEnd type="none" w="med" len="med"/>
+                      <a:tailEnd type="none" w="med" len="med"/>
+                    </a:lnR>
+                    <a:lnT w="6350" cap="flat" cmpd="sng" algn="ctr">
+                      <a:solidFill>
+                        <a:srgbClr val="D8DBE0"/>
+                      </a:solidFill>
+                      <a:prstDash val="solid"/>
+                      <a:round/>
+                      <a:headEnd type="none" w="med" len="med"/>
+                      <a:tailEnd type="none" w="med" len="med"/>
+                    </a:lnT>
+                    <a:lnB w="6350" cap="flat" cmpd="sng" algn="ctr">
+                      <a:solidFill>
+                        <a:srgbClr val="D8DBE0"/>
+                      </a:solidFill>
+                      <a:prstDash val="solid"/>
+                      <a:round/>
+                      <a:headEnd type="none" w="med" len="med"/>
+                      <a:tailEnd type="none" w="med" len="med"/>
+                    </a:lnB>
+                  </a:tcPr>
+                </a:tc>
+                <a:tc>
+                  <a:txBody>
+                    <a:bodyPr/>
+                    <a:lstStyle/>
+                    <a:p>
+                      <a:pPr indent="0" marL="0">
+                        <a:buNone/>
+                      </a:pPr>
+                      <a:r>
+                        <a:rPr lang="en-US" sz="1300" dirty="0">
+                          <a:solidFill>
+                            <a:srgbClr val="1A1A1A"/>
+                          </a:solidFill>
+                          <a:latin typeface="Microsoft YaHei" pitchFamily="34" charset="0"/>
+                          <a:ea typeface="Microsoft YaHei" pitchFamily="34" charset="-122"/>
+                          <a:cs typeface="Microsoft YaHei" pitchFamily="34" charset="-120"/>
+                        </a:rPr>
+                        <a:t>15 / 818</a:t>
+                      </a:r>
+                      <a:endParaRPr lang="en-US" sz="1300" dirty="0">
+                        <a:latin typeface="Microsoft YaHei" charset="0"/>
+                        <a:ea typeface="Microsoft YaHei" charset="0"/>
+                        <a:cs typeface="Microsoft YaHei" charset="0"/>
+                      </a:endParaRPr>
+                    </a:p>
+                  </a:txBody>
+                  <a:tcPr marL="91440" marR="91440" marT="45720" marB="45720" anchor="ctr">
+                    <a:lnL w="6350" cap="flat" cmpd="sng" algn="ctr">
+                      <a:solidFill>
+                        <a:srgbClr val="D8DBE0"/>
+                      </a:solidFill>
+                      <a:prstDash val="solid"/>
+                      <a:round/>
+                      <a:headEnd type="none" w="med" len="med"/>
+                      <a:tailEnd type="none" w="med" len="med"/>
+                    </a:lnL>
+                    <a:lnR w="6350" cap="flat" cmpd="sng" algn="ctr">
+                      <a:solidFill>
+                        <a:srgbClr val="D8DBE0"/>
+                      </a:solidFill>
+                      <a:prstDash val="solid"/>
+                      <a:round/>
+                      <a:headEnd type="none" w="med" len="med"/>
+                      <a:tailEnd type="none" w="med" len="med"/>
+                    </a:lnR>
+                    <a:lnT w="6350" cap="flat" cmpd="sng" algn="ctr">
+                      <a:solidFill>
+                        <a:srgbClr val="D8DBE0"/>
+                      </a:solidFill>
+                      <a:prstDash val="solid"/>
+                      <a:round/>
+                      <a:headEnd type="none" w="med" len="med"/>
+                      <a:tailEnd type="none" w="med" len="med"/>
+                    </a:lnT>
+                    <a:lnB w="6350" cap="flat" cmpd="sng" algn="ctr">
+                      <a:solidFill>
+                        <a:srgbClr val="D8DBE0"/>
+                      </a:solidFill>
+                      <a:prstDash val="solid"/>
+                      <a:round/>
+                      <a:headEnd type="none" w="med" len="med"/>
+                      <a:tailEnd type="none" w="med" len="med"/>
+                    </a:lnB>
+                  </a:tcPr>
+                </a:tc>
+                <a:tc>
+                  <a:txBody>
+                    <a:bodyPr/>
+                    <a:lstStyle/>
+                    <a:p>
+                      <a:pPr indent="0" marL="0">
+                        <a:buNone/>
+                      </a:pPr>
+                      <a:r>
+                        <a:rPr lang="en-US" sz="1300" dirty="0">
+                          <a:solidFill>
+                            <a:srgbClr val="1A1A1A"/>
+                          </a:solidFill>
+                          <a:latin typeface="Microsoft YaHei" pitchFamily="34" charset="0"/>
+                          <a:ea typeface="Microsoft YaHei" pitchFamily="34" charset="-122"/>
+                          <a:cs typeface="Microsoft YaHei" pitchFamily="34" charset="-120"/>
+                        </a:rPr>
+                        <a:t>1.8%</a:t>
+                      </a:r>
+                      <a:endParaRPr lang="en-US" sz="1300" dirty="0">
+                        <a:latin typeface="Microsoft YaHei" charset="0"/>
+                        <a:ea typeface="Microsoft YaHei" charset="0"/>
+                        <a:cs typeface="Microsoft YaHei" charset="0"/>
+                      </a:endParaRPr>
+                    </a:p>
+                  </a:txBody>
+                  <a:tcPr marL="91440" marR="91440" marT="45720" marB="45720" anchor="ctr">
+                    <a:lnL w="6350" cap="flat" cmpd="sng" algn="ctr">
+                      <a:solidFill>
+                        <a:srgbClr val="D8DBE0"/>
+                      </a:solidFill>
+                      <a:prstDash val="solid"/>
+                      <a:round/>
+                      <a:headEnd type="none" w="med" len="med"/>
+                      <a:tailEnd type="none" w="med" len="med"/>
+                    </a:lnL>
+                    <a:lnR w="6350" cap="flat" cmpd="sng" algn="ctr">
+                      <a:solidFill>
+                        <a:srgbClr val="D8DBE0"/>
+                      </a:solidFill>
+                      <a:prstDash val="solid"/>
+                      <a:round/>
+                      <a:headEnd type="none" w="med" len="med"/>
+                      <a:tailEnd type="none" w="med" len="med"/>
+                    </a:lnR>
+                    <a:lnT w="6350" cap="flat" cmpd="sng" algn="ctr">
+                      <a:solidFill>
+                        <a:srgbClr val="D8DBE0"/>
+                      </a:solidFill>
+                      <a:prstDash val="solid"/>
+                      <a:round/>
+                      <a:headEnd type="none" w="med" len="med"/>
+                      <a:tailEnd type="none" w="med" len="med"/>
+                    </a:lnT>
+                    <a:lnB w="6350" cap="flat" cmpd="sng" algn="ctr">
+                      <a:solidFill>
+                        <a:srgbClr val="D8DBE0"/>
+                      </a:solidFill>
+                      <a:prstDash val="solid"/>
+                      <a:round/>
+                      <a:headEnd type="none" w="med" len="med"/>
+                      <a:tailEnd type="none" w="med" len="med"/>
+                    </a:lnB>
+                  </a:tcPr>
+                </a:tc>
+                <a:tc>
+                  <a:txBody>
+                    <a:bodyPr/>
+                    <a:lstStyle/>
+                    <a:p>
+                      <a:pPr indent="0" marL="0">
+                        <a:buNone/>
+                      </a:pPr>
+                      <a:r>
+                        <a:rPr lang="en-US" sz="1300" dirty="0">
+                          <a:solidFill>
+                            <a:srgbClr val="1A1A1A"/>
+                          </a:solidFill>
+                          <a:latin typeface="Microsoft YaHei" pitchFamily="34" charset="0"/>
+                          <a:ea typeface="Microsoft YaHei" pitchFamily="34" charset="-122"/>
+                          <a:cs typeface="Microsoft YaHei" pitchFamily="34" charset="-120"/>
+                        </a:rPr>
+                        <a:t>0.00%</a:t>
+                      </a:r>
+                      <a:endParaRPr lang="en-US" sz="1300" dirty="0">
+                        <a:latin typeface="Microsoft YaHei" charset="0"/>
+                        <a:ea typeface="Microsoft YaHei" charset="0"/>
+                        <a:cs typeface="Microsoft YaHei" charset="0"/>
+                      </a:endParaRPr>
+                    </a:p>
+                  </a:txBody>
+                  <a:tcPr marL="91440" marR="91440" marT="45720" marB="45720" anchor="ctr">
+                    <a:lnL w="6350" cap="flat" cmpd="sng" algn="ctr">
+                      <a:solidFill>
+                        <a:srgbClr val="D8DBE0"/>
+                      </a:solidFill>
+                      <a:prstDash val="solid"/>
+                      <a:round/>
+                      <a:headEnd type="none" w="med" len="med"/>
+                      <a:tailEnd type="none" w="med" len="med"/>
+                    </a:lnL>
+                    <a:lnR w="6350" cap="flat" cmpd="sng" algn="ctr">
+                      <a:solidFill>
+                        <a:srgbClr val="D8DBE0"/>
+                      </a:solidFill>
+                      <a:prstDash val="solid"/>
+                      <a:round/>
+                      <a:headEnd type="none" w="med" len="med"/>
+                      <a:tailEnd type="none" w="med" len="med"/>
+                    </a:lnR>
+                    <a:lnT w="6350" cap="flat" cmpd="sng" algn="ctr">
+                      <a:solidFill>
+                        <a:srgbClr val="D8DBE0"/>
+                      </a:solidFill>
+                      <a:prstDash val="solid"/>
+                      <a:round/>
+                      <a:headEnd type="none" w="med" len="med"/>
+                      <a:tailEnd type="none" w="med" len="med"/>
+                    </a:lnT>
+                    <a:lnB w="6350" cap="flat" cmpd="sng" algn="ctr">
+                      <a:solidFill>
+                        <a:srgbClr val="D8DBE0"/>
+                      </a:solidFill>
+                      <a:prstDash val="solid"/>
+                      <a:round/>
+                      <a:headEnd type="none" w="med" len="med"/>
+                      <a:tailEnd type="none" w="med" len="med"/>
+                    </a:lnB>
+                  </a:tcPr>
+                </a:tc>
+                <a:tc>
+                  <a:txBody>
+                    <a:bodyPr/>
+                    <a:lstStyle/>
+                    <a:p>
+                      <a:pPr indent="0" marL="0">
+                        <a:buNone/>
+                      </a:pPr>
+                      <a:r>
+                        <a:rPr lang="en-US" sz="1300" dirty="0">
+                          <a:solidFill>
+                            <a:srgbClr val="1A1A1A"/>
+                          </a:solidFill>
+                          <a:latin typeface="Microsoft YaHei" pitchFamily="34" charset="0"/>
+                          <a:ea typeface="Microsoft YaHei" pitchFamily="34" charset="-122"/>
+                          <a:cs typeface="Microsoft YaHei" pitchFamily="34" charset="-120"/>
+                        </a:rPr>
+                        <a:t>4 / 20</a:t>
+                      </a:r>
+                      <a:endParaRPr lang="en-US" sz="1300" dirty="0">
+                        <a:latin typeface="Microsoft YaHei" charset="0"/>
+                        <a:ea typeface="Microsoft YaHei" charset="0"/>
+                        <a:cs typeface="Microsoft YaHei" charset="0"/>
+                      </a:endParaRPr>
+                    </a:p>
+                  </a:txBody>
+                  <a:tcPr marL="91440" marR="91440" marT="45720" marB="45720" anchor="ctr">
+                    <a:lnL w="6350" cap="flat" cmpd="sng" algn="ctr">
+                      <a:solidFill>
+                        <a:srgbClr val="D8DBE0"/>
+                      </a:solidFill>
+                      <a:prstDash val="solid"/>
+                      <a:round/>
+                      <a:headEnd type="none" w="med" len="med"/>
+                      <a:tailEnd type="none" w="med" len="med"/>
+                    </a:lnL>
+                    <a:lnR w="6350" cap="flat" cmpd="sng" algn="ctr">
+                      <a:solidFill>
+                        <a:srgbClr val="D8DBE0"/>
+                      </a:solidFill>
+                      <a:prstDash val="solid"/>
+                      <a:round/>
+                      <a:headEnd type="none" w="med" len="med"/>
+                      <a:tailEnd type="none" w="med" len="med"/>
+                    </a:lnR>
+                    <a:lnT w="6350" cap="flat" cmpd="sng" algn="ctr">
+                      <a:solidFill>
+                        <a:srgbClr val="D8DBE0"/>
+                      </a:solidFill>
+                      <a:prstDash val="solid"/>
+                      <a:round/>
+                      <a:headEnd type="none" w="med" len="med"/>
+                      <a:tailEnd type="none" w="med" len="med"/>
+                    </a:lnT>
+                    <a:lnB w="6350" cap="flat" cmpd="sng" algn="ctr">
+                      <a:solidFill>
+                        <a:srgbClr val="D8DBE0"/>
+                      </a:solidFill>
+                      <a:prstDash val="solid"/>
+                      <a:round/>
+                      <a:headEnd type="none" w="med" len="med"/>
+                      <a:tailEnd type="none" w="med" len="med"/>
+                    </a:lnB>
+                  </a:tcPr>
+                </a:tc>
+              </a:tr>
+              <a:tr h="384048">
+                <a:tc>
+                  <a:txBody>
+                    <a:bodyPr/>
+                    <a:lstStyle/>
+                    <a:p>
+                      <a:pPr indent="0" marL="0">
+                        <a:buNone/>
+                      </a:pPr>
+                      <a:r>
+                        <a:rPr lang="en-US" sz="1300" dirty="0">
+                          <a:solidFill>
+                            <a:srgbClr val="1A1A1A"/>
+                          </a:solidFill>
+                          <a:latin typeface="Microsoft YaHei" pitchFamily="34" charset="0"/>
+                          <a:ea typeface="Microsoft YaHei" pitchFamily="34" charset="-122"/>
+                          <a:cs typeface="Microsoft YaHei" pitchFamily="34" charset="-120"/>
+                        </a:rPr>
+                        <a:t>小鼠·胰 胰导管细胞</a:t>
+                      </a:r>
+                      <a:endParaRPr lang="en-US" sz="1300" dirty="0">
+                        <a:latin typeface="Microsoft YaHei" charset="0"/>
+                        <a:ea typeface="Microsoft YaHei" charset="0"/>
+                        <a:cs typeface="Microsoft YaHei" charset="0"/>
+                      </a:endParaRPr>
+                    </a:p>
+                  </a:txBody>
+                  <a:tcPr marL="91440" marR="91440" marT="45720" marB="45720" anchor="ctr">
+                    <a:lnL w="6350" cap="flat" cmpd="sng" algn="ctr">
+                      <a:solidFill>
+                        <a:srgbClr val="D8DBE0"/>
+                      </a:solidFill>
+                      <a:prstDash val="solid"/>
+                      <a:round/>
+                      <a:headEnd type="none" w="med" len="med"/>
+                      <a:tailEnd type="none" w="med" len="med"/>
+                    </a:lnL>
+                    <a:lnR w="6350" cap="flat" cmpd="sng" algn="ctr">
+                      <a:solidFill>
+                        <a:srgbClr val="D8DBE0"/>
+                      </a:solidFill>
+                      <a:prstDash val="solid"/>
+                      <a:round/>
+                      <a:headEnd type="none" w="med" len="med"/>
+                      <a:tailEnd type="none" w="med" len="med"/>
+                    </a:lnR>
+                    <a:lnT w="6350" cap="flat" cmpd="sng" algn="ctr">
+                      <a:solidFill>
+                        <a:srgbClr val="D8DBE0"/>
+                      </a:solidFill>
+                      <a:prstDash val="solid"/>
+                      <a:round/>
+                      <a:headEnd type="none" w="med" len="med"/>
+                      <a:tailEnd type="none" w="med" len="med"/>
+                    </a:lnT>
+                    <a:lnB w="6350" cap="flat" cmpd="sng" algn="ctr">
+                      <a:solidFill>
+                        <a:srgbClr val="D8DBE0"/>
+                      </a:solidFill>
+                      <a:prstDash val="solid"/>
+                      <a:round/>
+                      <a:headEnd type="none" w="med" len="med"/>
+                      <a:tailEnd type="none" w="med" len="med"/>
+                    </a:lnB>
+                  </a:tcPr>
+                </a:tc>
+                <a:tc>
+                  <a:txBody>
+                    <a:bodyPr/>
+                    <a:lstStyle/>
+                    <a:p>
+                      <a:pPr indent="0" marL="0">
+                        <a:buNone/>
+                      </a:pPr>
+                      <a:r>
+                        <a:rPr lang="en-US" sz="1300" dirty="0">
+                          <a:solidFill>
+                            <a:srgbClr val="1A1A1A"/>
+                          </a:solidFill>
+                          <a:latin typeface="Microsoft YaHei" pitchFamily="34" charset="0"/>
+                          <a:ea typeface="Microsoft YaHei" pitchFamily="34" charset="-122"/>
+                          <a:cs typeface="Microsoft YaHei" pitchFamily="34" charset="-120"/>
+                        </a:rPr>
+                        <a:t>2 / 1947</a:t>
+                      </a:r>
+                      <a:endParaRPr lang="en-US" sz="1300" dirty="0">
+                        <a:latin typeface="Microsoft YaHei" charset="0"/>
+                        <a:ea typeface="Microsoft YaHei" charset="0"/>
+                        <a:cs typeface="Microsoft YaHei" charset="0"/>
+                      </a:endParaRPr>
+                    </a:p>
+                  </a:txBody>
+                  <a:tcPr marL="91440" marR="91440" marT="45720" marB="45720" anchor="ctr">
+                    <a:lnL w="6350" cap="flat" cmpd="sng" algn="ctr">
+                      <a:solidFill>
+                        <a:srgbClr val="D8DBE0"/>
+                      </a:solidFill>
+                      <a:prstDash val="solid"/>
+                      <a:round/>
+                      <a:headEnd type="none" w="med" len="med"/>
+                      <a:tailEnd type="none" w="med" len="med"/>
+                    </a:lnL>
+                    <a:lnR w="6350" cap="flat" cmpd="sng" algn="ctr">
+                      <a:solidFill>
+                        <a:srgbClr val="D8DBE0"/>
+                      </a:solidFill>
+                      <a:prstDash val="solid"/>
+                      <a:round/>
+                      <a:headEnd type="none" w="med" len="med"/>
+                      <a:tailEnd type="none" w="med" len="med"/>
+                    </a:lnR>
+                    <a:lnT w="6350" cap="flat" cmpd="sng" algn="ctr">
+                      <a:solidFill>
+                        <a:srgbClr val="D8DBE0"/>
+                      </a:solidFill>
+                      <a:prstDash val="solid"/>
+                      <a:round/>
+                      <a:headEnd type="none" w="med" len="med"/>
+                      <a:tailEnd type="none" w="med" len="med"/>
+                    </a:lnT>
+                    <a:lnB w="6350" cap="flat" cmpd="sng" algn="ctr">
+                      <a:solidFill>
+                        <a:srgbClr val="D8DBE0"/>
+                      </a:solidFill>
+                      <a:prstDash val="solid"/>
+                      <a:round/>
+                      <a:headEnd type="none" w="med" len="med"/>
+                      <a:tailEnd type="none" w="med" len="med"/>
+                    </a:lnB>
+                  </a:tcPr>
+                </a:tc>
+                <a:tc>
+                  <a:txBody>
+                    <a:bodyPr/>
+                    <a:lstStyle/>
+                    <a:p>
+                      <a:pPr indent="0" marL="0">
+                        <a:buNone/>
+                      </a:pPr>
+                      <a:r>
+                        <a:rPr lang="en-US" sz="1300" dirty="0">
+                          <a:solidFill>
+                            <a:srgbClr val="1A1A1A"/>
+                          </a:solidFill>
+                          <a:latin typeface="Microsoft YaHei" pitchFamily="34" charset="0"/>
+                          <a:ea typeface="Microsoft YaHei" pitchFamily="34" charset="-122"/>
+                          <a:cs typeface="Microsoft YaHei" pitchFamily="34" charset="-120"/>
+                        </a:rPr>
+                        <a:t>0.10%</a:t>
+                      </a:r>
+                      <a:endParaRPr lang="en-US" sz="1300" dirty="0">
+                        <a:latin typeface="Microsoft YaHei" charset="0"/>
+                        <a:ea typeface="Microsoft YaHei" charset="0"/>
+                        <a:cs typeface="Microsoft YaHei" charset="0"/>
+                      </a:endParaRPr>
+                    </a:p>
+                  </a:txBody>
+                  <a:tcPr marL="91440" marR="91440" marT="45720" marB="45720" anchor="ctr">
+                    <a:lnL w="6350" cap="flat" cmpd="sng" algn="ctr">
+                      <a:solidFill>
+                        <a:srgbClr val="D8DBE0"/>
+                      </a:solidFill>
+                      <a:prstDash val="solid"/>
+                      <a:round/>
+                      <a:headEnd type="none" w="med" len="med"/>
+                      <a:tailEnd type="none" w="med" len="med"/>
+                    </a:lnL>
+                    <a:lnR w="6350" cap="flat" cmpd="sng" algn="ctr">
+                      <a:solidFill>
+                        <a:srgbClr val="D8DBE0"/>
+                      </a:solidFill>
+                      <a:prstDash val="solid"/>
+                      <a:round/>
+                      <a:headEnd type="none" w="med" len="med"/>
+                      <a:tailEnd type="none" w="med" len="med"/>
+                    </a:lnR>
+                    <a:lnT w="6350" cap="flat" cmpd="sng" algn="ctr">
+                      <a:solidFill>
+                        <a:srgbClr val="D8DBE0"/>
+                      </a:solidFill>
+                      <a:prstDash val="solid"/>
+                      <a:round/>
+                      <a:headEnd type="none" w="med" len="med"/>
+                      <a:tailEnd type="none" w="med" len="med"/>
+                    </a:lnT>
+                    <a:lnB w="6350" cap="flat" cmpd="sng" algn="ctr">
+                      <a:solidFill>
+                        <a:srgbClr val="D8DBE0"/>
+                      </a:solidFill>
+                      <a:prstDash val="solid"/>
+                      <a:round/>
+                      <a:headEnd type="none" w="med" len="med"/>
+                      <a:tailEnd type="none" w="med" len="med"/>
+                    </a:lnB>
+                  </a:tcPr>
+                </a:tc>
+                <a:tc>
+                  <a:txBody>
+                    <a:bodyPr/>
+                    <a:lstStyle/>
+                    <a:p>
+                      <a:pPr indent="0" marL="0">
+                        <a:buNone/>
+                      </a:pPr>
+                      <a:r>
+                        <a:rPr lang="en-US" sz="1300" dirty="0">
+                          <a:solidFill>
+                            <a:srgbClr val="1A1A1A"/>
+                          </a:solidFill>
+                          <a:latin typeface="Microsoft YaHei" pitchFamily="34" charset="0"/>
+                          <a:ea typeface="Microsoft YaHei" pitchFamily="34" charset="-122"/>
+                          <a:cs typeface="Microsoft YaHei" pitchFamily="34" charset="-120"/>
+                        </a:rPr>
+                        <a:t>0.00%</a:t>
+                      </a:r>
+                      <a:endParaRPr lang="en-US" sz="1300" dirty="0">
+                        <a:latin typeface="Microsoft YaHei" charset="0"/>
+                        <a:ea typeface="Microsoft YaHei" charset="0"/>
+                        <a:cs typeface="Microsoft YaHei" charset="0"/>
+                      </a:endParaRPr>
+                    </a:p>
+                  </a:txBody>
+                  <a:tcPr marL="91440" marR="91440" marT="45720" marB="45720" anchor="ctr">
+                    <a:lnL w="6350" cap="flat" cmpd="sng" algn="ctr">
+                      <a:solidFill>
+                        <a:srgbClr val="D8DBE0"/>
+                      </a:solidFill>
+                      <a:prstDash val="solid"/>
+                      <a:round/>
+                      <a:headEnd type="none" w="med" len="med"/>
+                      <a:tailEnd type="none" w="med" len="med"/>
+                    </a:lnL>
+                    <a:lnR w="6350" cap="flat" cmpd="sng" algn="ctr">
+                      <a:solidFill>
+                        <a:srgbClr val="D8DBE0"/>
+                      </a:solidFill>
+                      <a:prstDash val="solid"/>
+                      <a:round/>
+                      <a:headEnd type="none" w="med" len="med"/>
+                      <a:tailEnd type="none" w="med" len="med"/>
+                    </a:lnR>
+                    <a:lnT w="6350" cap="flat" cmpd="sng" algn="ctr">
+                      <a:solidFill>
+                        <a:srgbClr val="D8DBE0"/>
+                      </a:solidFill>
+                      <a:prstDash val="solid"/>
+                      <a:round/>
+                      <a:headEnd type="none" w="med" len="med"/>
+                      <a:tailEnd type="none" w="med" len="med"/>
+                    </a:lnT>
+                    <a:lnB w="6350" cap="flat" cmpd="sng" algn="ctr">
+                      <a:solidFill>
+                        <a:srgbClr val="D8DBE0"/>
+                      </a:solidFill>
+                      <a:prstDash val="solid"/>
+                      <a:round/>
+                      <a:headEnd type="none" w="med" len="med"/>
+                      <a:tailEnd type="none" w="med" len="med"/>
+                    </a:lnB>
+                  </a:tcPr>
+                </a:tc>
+                <a:tc>
+                  <a:txBody>
+                    <a:bodyPr/>
+                    <a:lstStyle/>
+                    <a:p>
+                      <a:pPr indent="0" marL="0">
+                        <a:buNone/>
+                      </a:pPr>
+                      <a:r>
+                        <a:rPr lang="en-US" sz="1300" dirty="0">
+                          <a:solidFill>
+                            <a:srgbClr val="1A1A1A"/>
+                          </a:solidFill>
+                          <a:latin typeface="Microsoft YaHei" pitchFamily="34" charset="0"/>
+                          <a:ea typeface="Microsoft YaHei" pitchFamily="34" charset="-122"/>
+                          <a:cs typeface="Microsoft YaHei" pitchFamily="34" charset="-120"/>
+                        </a:rPr>
+                        <a:t>2 / 9</a:t>
+                      </a:r>
+                      <a:endParaRPr lang="en-US" sz="1300" dirty="0">
+                        <a:latin typeface="Microsoft YaHei" charset="0"/>
+                        <a:ea typeface="Microsoft YaHei" charset="0"/>
+                        <a:cs typeface="Microsoft YaHei" charset="0"/>
+                      </a:endParaRPr>
+                    </a:p>
+                  </a:txBody>
+                  <a:tcPr marL="91440" marR="91440" marT="45720" marB="45720" anchor="ctr">
+                    <a:lnL w="6350" cap="flat" cmpd="sng" algn="ctr">
+                      <a:solidFill>
+                        <a:srgbClr val="D8DBE0"/>
+                      </a:solidFill>
+                      <a:prstDash val="solid"/>
+                      <a:round/>
+                      <a:headEnd type="none" w="med" len="med"/>
+                      <a:tailEnd type="none" w="med" len="med"/>
+                    </a:lnL>
+                    <a:lnR w="6350" cap="flat" cmpd="sng" algn="ctr">
+                      <a:solidFill>
+                        <a:srgbClr val="D8DBE0"/>
+                      </a:solidFill>
+                      <a:prstDash val="solid"/>
+                      <a:round/>
+                      <a:headEnd type="none" w="med" len="med"/>
+                      <a:tailEnd type="none" w="med" len="med"/>
+                    </a:lnR>
+                    <a:lnT w="6350" cap="flat" cmpd="sng" algn="ctr">
+                      <a:solidFill>
+                        <a:srgbClr val="D8DBE0"/>
+                      </a:solidFill>
+                      <a:prstDash val="solid"/>
+                      <a:round/>
+                      <a:headEnd type="none" w="med" len="med"/>
+                      <a:tailEnd type="none" w="med" len="med"/>
+                    </a:lnT>
+                    <a:lnB w="6350" cap="flat" cmpd="sng" algn="ctr">
+                      <a:solidFill>
+                        <a:srgbClr val="D8DBE0"/>
+                      </a:solidFill>
+                      <a:prstDash val="solid"/>
+                      <a:round/>
+                      <a:headEnd type="none" w="med" len="med"/>
+                      <a:tailEnd type="none" w="med" len="med"/>
+                    </a:lnB>
+                  </a:tcPr>
+                </a:tc>
+              </a:tr>
+              <a:tr h="384048">
+                <a:tc>
+                  <a:txBody>
+                    <a:bodyPr/>
+                    <a:lstStyle/>
+                    <a:p>
+                      <a:pPr indent="0" marL="0">
+                        <a:buNone/>
+                      </a:pPr>
+                      <a:r>
+                        <a:rPr lang="en-US" sz="1300" dirty="0">
+                          <a:solidFill>
+                            <a:srgbClr val="1A1A1A"/>
+                          </a:solidFill>
+                          <a:latin typeface="Microsoft YaHei" pitchFamily="34" charset="0"/>
+                          <a:ea typeface="Microsoft YaHei" pitchFamily="34" charset="-122"/>
+                          <a:cs typeface="Microsoft YaHei" pitchFamily="34" charset="-120"/>
+                        </a:rPr>
+                        <a:t>小鼠·脑 少突胶质</a:t>
+                      </a:r>
+                      <a:endParaRPr lang="en-US" sz="1300" dirty="0">
+                        <a:latin typeface="Microsoft YaHei" charset="0"/>
+                        <a:ea typeface="Microsoft YaHei" charset="0"/>
+                        <a:cs typeface="Microsoft YaHei" charset="0"/>
+                      </a:endParaRPr>
+                    </a:p>
+                  </a:txBody>
+                  <a:tcPr marL="91440" marR="91440" marT="45720" marB="45720" anchor="ctr">
+                    <a:lnL w="6350" cap="flat" cmpd="sng" algn="ctr">
+                      <a:solidFill>
+                        <a:srgbClr val="D8DBE0"/>
+                      </a:solidFill>
+                      <a:prstDash val="solid"/>
+                      <a:round/>
+                      <a:headEnd type="none" w="med" len="med"/>
+                      <a:tailEnd type="none" w="med" len="med"/>
+                    </a:lnL>
+                    <a:lnR w="6350" cap="flat" cmpd="sng" algn="ctr">
+                      <a:solidFill>
+                        <a:srgbClr val="D8DBE0"/>
+                      </a:solidFill>
+                      <a:prstDash val="solid"/>
+                      <a:round/>
+                      <a:headEnd type="none" w="med" len="med"/>
+                      <a:tailEnd type="none" w="med" len="med"/>
+                    </a:lnR>
+                    <a:lnT w="6350" cap="flat" cmpd="sng" algn="ctr">
+                      <a:solidFill>
+                        <a:srgbClr val="D8DBE0"/>
+                      </a:solidFill>
+                      <a:prstDash val="solid"/>
+                      <a:round/>
+                      <a:headEnd type="none" w="med" len="med"/>
+                      <a:tailEnd type="none" w="med" len="med"/>
+                    </a:lnT>
+                    <a:lnB w="6350" cap="flat" cmpd="sng" algn="ctr">
+                      <a:solidFill>
+                        <a:srgbClr val="D8DBE0"/>
+                      </a:solidFill>
+                      <a:prstDash val="solid"/>
+                      <a:round/>
+                      <a:headEnd type="none" w="med" len="med"/>
+                      <a:tailEnd type="none" w="med" len="med"/>
+                    </a:lnB>
+                  </a:tcPr>
+                </a:tc>
+                <a:tc>
+                  <a:txBody>
+                    <a:bodyPr/>
+                    <a:lstStyle/>
+                    <a:p>
+                      <a:pPr indent="0" marL="0">
+                        <a:buNone/>
+                      </a:pPr>
+                      <a:r>
+                        <a:rPr lang="en-US" sz="1300" dirty="0">
+                          <a:solidFill>
+                            <a:srgbClr val="1A1A1A"/>
+                          </a:solidFill>
+                          <a:latin typeface="Microsoft YaHei" pitchFamily="34" charset="0"/>
+                          <a:ea typeface="Microsoft YaHei" pitchFamily="34" charset="-122"/>
+                          <a:cs typeface="Microsoft YaHei" pitchFamily="34" charset="-120"/>
+                        </a:rPr>
+                        <a:t>2 / 8987</a:t>
+                      </a:r>
+                      <a:endParaRPr lang="en-US" sz="1300" dirty="0">
+                        <a:latin typeface="Microsoft YaHei" charset="0"/>
+                        <a:ea typeface="Microsoft YaHei" charset="0"/>
+                        <a:cs typeface="Microsoft YaHei" charset="0"/>
+                      </a:endParaRPr>
+                    </a:p>
+                  </a:txBody>
+                  <a:tcPr marL="91440" marR="91440" marT="45720" marB="45720" anchor="ctr">
+                    <a:lnL w="6350" cap="flat" cmpd="sng" algn="ctr">
+                      <a:solidFill>
+                        <a:srgbClr val="D8DBE0"/>
+                      </a:solidFill>
+                      <a:prstDash val="solid"/>
+                      <a:round/>
+                      <a:headEnd type="none" w="med" len="med"/>
+                      <a:tailEnd type="none" w="med" len="med"/>
+                    </a:lnL>
+                    <a:lnR w="6350" cap="flat" cmpd="sng" algn="ctr">
+                      <a:solidFill>
+                        <a:srgbClr val="D8DBE0"/>
+                      </a:solidFill>
+                      <a:prstDash val="solid"/>
+                      <a:round/>
+                      <a:headEnd type="none" w="med" len="med"/>
+                      <a:tailEnd type="none" w="med" len="med"/>
+                    </a:lnR>
+                    <a:lnT w="6350" cap="flat" cmpd="sng" algn="ctr">
+                      <a:solidFill>
+                        <a:srgbClr val="D8DBE0"/>
+                      </a:solidFill>
+                      <a:prstDash val="solid"/>
+                      <a:round/>
+                      <a:headEnd type="none" w="med" len="med"/>
+                      <a:tailEnd type="none" w="med" len="med"/>
+                    </a:lnT>
+                    <a:lnB w="6350" cap="flat" cmpd="sng" algn="ctr">
+                      <a:solidFill>
+                        <a:srgbClr val="D8DBE0"/>
+                      </a:solidFill>
+                      <a:prstDash val="solid"/>
+                      <a:round/>
+                      <a:headEnd type="none" w="med" len="med"/>
+                      <a:tailEnd type="none" w="med" len="med"/>
+                    </a:lnB>
+                  </a:tcPr>
+                </a:tc>
+                <a:tc>
+                  <a:txBody>
+                    <a:bodyPr/>
+                    <a:lstStyle/>
+                    <a:p>
+                      <a:pPr indent="0" marL="0">
+                        <a:buNone/>
+                      </a:pPr>
+                      <a:r>
+                        <a:rPr lang="en-US" sz="1300" dirty="0">
+                          <a:solidFill>
+                            <a:srgbClr val="1A1A1A"/>
+                          </a:solidFill>
+                          <a:latin typeface="Microsoft YaHei" pitchFamily="34" charset="0"/>
+                          <a:ea typeface="Microsoft YaHei" pitchFamily="34" charset="-122"/>
+                          <a:cs typeface="Microsoft YaHei" pitchFamily="34" charset="-120"/>
+                        </a:rPr>
+                        <a:t>0.02%</a:t>
+                      </a:r>
+                      <a:endParaRPr lang="en-US" sz="1300" dirty="0">
+                        <a:latin typeface="Microsoft YaHei" charset="0"/>
+                        <a:ea typeface="Microsoft YaHei" charset="0"/>
+                        <a:cs typeface="Microsoft YaHei" charset="0"/>
+                      </a:endParaRPr>
+                    </a:p>
+                  </a:txBody>
+                  <a:tcPr marL="91440" marR="91440" marT="45720" marB="45720" anchor="ctr">
+                    <a:lnL w="6350" cap="flat" cmpd="sng" algn="ctr">
+                      <a:solidFill>
+                        <a:srgbClr val="D8DBE0"/>
+                      </a:solidFill>
+                      <a:prstDash val="solid"/>
+                      <a:round/>
+                      <a:headEnd type="none" w="med" len="med"/>
+                      <a:tailEnd type="none" w="med" len="med"/>
+                    </a:lnL>
+                    <a:lnR w="6350" cap="flat" cmpd="sng" algn="ctr">
+                      <a:solidFill>
+                        <a:srgbClr val="D8DBE0"/>
+                      </a:solidFill>
+                      <a:prstDash val="solid"/>
+                      <a:round/>
+                      <a:headEnd type="none" w="med" len="med"/>
+                      <a:tailEnd type="none" w="med" len="med"/>
+                    </a:lnR>
+                    <a:lnT w="6350" cap="flat" cmpd="sng" algn="ctr">
+                      <a:solidFill>
+                        <a:srgbClr val="D8DBE0"/>
+                      </a:solidFill>
+                      <a:prstDash val="solid"/>
+                      <a:round/>
+                      <a:headEnd type="none" w="med" len="med"/>
+                      <a:tailEnd type="none" w="med" len="med"/>
+                    </a:lnT>
+                    <a:lnB w="6350" cap="flat" cmpd="sng" algn="ctr">
+                      <a:solidFill>
+                        <a:srgbClr val="D8DBE0"/>
+                      </a:solidFill>
+                      <a:prstDash val="solid"/>
+                      <a:round/>
+                      <a:headEnd type="none" w="med" len="med"/>
+                      <a:tailEnd type="none" w="med" len="med"/>
+                    </a:lnB>
+                  </a:tcPr>
+                </a:tc>
+                <a:tc>
+                  <a:txBody>
+                    <a:bodyPr/>
+                    <a:lstStyle/>
+                    <a:p>
+                      <a:pPr indent="0" marL="0">
+                        <a:buNone/>
+                      </a:pPr>
+                      <a:r>
+                        <a:rPr lang="en-US" sz="1300" dirty="0">
+                          <a:solidFill>
+                            <a:srgbClr val="1A1A1A"/>
+                          </a:solidFill>
+                          <a:latin typeface="Microsoft YaHei" pitchFamily="34" charset="0"/>
+                          <a:ea typeface="Microsoft YaHei" pitchFamily="34" charset="-122"/>
+                          <a:cs typeface="Microsoft YaHei" pitchFamily="34" charset="-120"/>
+                        </a:rPr>
+                        <a:t>0.00%</a:t>
+                      </a:r>
+                      <a:endParaRPr lang="en-US" sz="1300" dirty="0">
+                        <a:latin typeface="Microsoft YaHei" charset="0"/>
+                        <a:ea typeface="Microsoft YaHei" charset="0"/>
+                        <a:cs typeface="Microsoft YaHei" charset="0"/>
+                      </a:endParaRPr>
+                    </a:p>
+                  </a:txBody>
+                  <a:tcPr marL="91440" marR="91440" marT="45720" marB="45720" anchor="ctr">
+                    <a:lnL w="6350" cap="flat" cmpd="sng" algn="ctr">
+                      <a:solidFill>
+                        <a:srgbClr val="D8DBE0"/>
+                      </a:solidFill>
+                      <a:prstDash val="solid"/>
+                      <a:round/>
+                      <a:headEnd type="none" w="med" len="med"/>
+                      <a:tailEnd type="none" w="med" len="med"/>
+                    </a:lnL>
+                    <a:lnR w="6350" cap="flat" cmpd="sng" algn="ctr">
+                      <a:solidFill>
+                        <a:srgbClr val="D8DBE0"/>
+                      </a:solidFill>
+                      <a:prstDash val="solid"/>
+                      <a:round/>
+                      <a:headEnd type="none" w="med" len="med"/>
+                      <a:tailEnd type="none" w="med" len="med"/>
+                    </a:lnR>
+                    <a:lnT w="6350" cap="flat" cmpd="sng" algn="ctr">
+                      <a:solidFill>
+                        <a:srgbClr val="D8DBE0"/>
+                      </a:solidFill>
+                      <a:prstDash val="solid"/>
+                      <a:round/>
+                      <a:headEnd type="none" w="med" len="med"/>
+                      <a:tailEnd type="none" w="med" len="med"/>
+                    </a:lnT>
+                    <a:lnB w="6350" cap="flat" cmpd="sng" algn="ctr">
+                      <a:solidFill>
+                        <a:srgbClr val="D8DBE0"/>
+                      </a:solidFill>
+                      <a:prstDash val="solid"/>
+                      <a:round/>
+                      <a:headEnd type="none" w="med" len="med"/>
+                      <a:tailEnd type="none" w="med" len="med"/>
+                    </a:lnB>
+                  </a:tcPr>
+                </a:tc>
+                <a:tc>
+                  <a:txBody>
+                    <a:bodyPr/>
+                    <a:lstStyle/>
+                    <a:p>
+                      <a:pPr indent="0" marL="0">
+                        <a:buNone/>
+                      </a:pPr>
+                      <a:r>
+                        <a:rPr lang="en-US" sz="1300" dirty="0">
+                          <a:solidFill>
+                            <a:srgbClr val="1A1A1A"/>
+                          </a:solidFill>
+                          <a:latin typeface="Microsoft YaHei" pitchFamily="34" charset="0"/>
+                          <a:ea typeface="Microsoft YaHei" pitchFamily="34" charset="-122"/>
+                          <a:cs typeface="Microsoft YaHei" pitchFamily="34" charset="-120"/>
+                        </a:rPr>
+                        <a:t>2 / 55</a:t>
+                      </a:r>
+                      <a:endParaRPr lang="en-US" sz="1300" dirty="0">
+                        <a:latin typeface="Microsoft YaHei" charset="0"/>
+                        <a:ea typeface="Microsoft YaHei" charset="0"/>
+                        <a:cs typeface="Microsoft YaHei" charset="0"/>
+                      </a:endParaRPr>
+                    </a:p>
+                  </a:txBody>
+                  <a:tcPr marL="91440" marR="91440" marT="45720" marB="45720" anchor="ctr">
+                    <a:lnL w="6350" cap="flat" cmpd="sng" algn="ctr">
+                      <a:solidFill>
+                        <a:srgbClr val="D8DBE0"/>
+                      </a:solidFill>
+                      <a:prstDash val="solid"/>
+                      <a:round/>
+                      <a:headEnd type="none" w="med" len="med"/>
+                      <a:tailEnd type="none" w="med" len="med"/>
+                    </a:lnL>
+                    <a:lnR w="6350" cap="flat" cmpd="sng" algn="ctr">
+                      <a:solidFill>
+                        <a:srgbClr val="D8DBE0"/>
+                      </a:solidFill>
+                      <a:prstDash val="solid"/>
+                      <a:round/>
+                      <a:headEnd type="none" w="med" len="med"/>
+                      <a:tailEnd type="none" w="med" len="med"/>
+                    </a:lnR>
+                    <a:lnT w="6350" cap="flat" cmpd="sng" algn="ctr">
+                      <a:solidFill>
+                        <a:srgbClr val="D8DBE0"/>
+                      </a:solidFill>
+                      <a:prstDash val="solid"/>
+                      <a:round/>
+                      <a:headEnd type="none" w="med" len="med"/>
+                      <a:tailEnd type="none" w="med" len="med"/>
+                    </a:lnT>
+                    <a:lnB w="6350" cap="flat" cmpd="sng" algn="ctr">
+                      <a:solidFill>
+                        <a:srgbClr val="D8DBE0"/>
+                      </a:solidFill>
+                      <a:prstDash val="solid"/>
+                      <a:round/>
+                      <a:headEnd type="none" w="med" len="med"/>
+                      <a:tailEnd type="none" w="med" len="med"/>
+                    </a:lnB>
+                  </a:tcPr>
+                </a:tc>
+              </a:tr>
+            </a:tbl>
+          </a:graphicData>
+        </a:graphic>
+      </p:graphicFrame>
+      <p:sp>
+        <p:nvSpPr>
+          <p:cNvPr id="5" name="Text 2"/>
+          <p:cNvSpPr txBox="1"/>
+          <p:nvPr/>
+        </p:nvSpPr>
+        <p:spPr>
+          <a:xfrm>
+            <a:off x="731520" y="4846320"/>
+            <a:ext cx="10698480" cy="822960"/>
+          </a:xfrm>
+          <a:prstGeom prst="rect">
+            <a:avLst/>
+          </a:prstGeom>
+          <a:noFill/>
+          <a:ln/>
+        </p:spPr>
+        <p:txBody>
+          <a:bodyPr wrap="square" rtlCol="0" anchor="ctr"/>
+          <a:lstStyle/>
+          <a:p>
+            <a:pPr indent="0" marL="0">
+              <a:lnSpc>
+                <a:spcPct val="120000"/>
+              </a:lnSpc>
+              <a:buNone/>
+            </a:pPr>
+            <a:r>
+              <a:rPr lang="en-US" sz="1400" dirty="0">
+                <a:solidFill>
+                  <a:srgbClr val="1A1A1A"/>
+                </a:solidFill>
+                <a:latin typeface="Microsoft YaHei" pitchFamily="34" charset="0"/>
+                <a:ea typeface="Microsoft YaHei" pitchFamily="34" charset="-122"/>
+                <a:cs typeface="Microsoft YaHei" pitchFamily="34" charset="-120"/>
+              </a:rPr>
+              <a:t>同样显示「0.0%」的两行，真实检出率相差一百倍以上：肥大细胞 2.60%（138 个阳性细胞、21/44 供体）是真有信号；少突胶质 0.02%（8987 个细胞里 2 个）才是在充分样本下的真·近零。</a:t>
+            </a:r>
+            <a:endParaRPr lang="en-US" sz="1400" dirty="0"/>
+          </a:p>
+        </p:txBody>
+      </p:sp>
+      <p:sp>
+        <p:nvSpPr>
+          <p:cNvPr id="6" name="Text 3"/>
           <p:cNvSpPr txBox="1"/>
           <p:nvPr/>
         </p:nvSpPr>
@@ -2226,7 +4174,7 @@
                 <a:ea typeface="Microsoft YaHei" pitchFamily="34" charset="-122"/>
                 <a:cs typeface="Microsoft YaHei" pitchFamily="34" charset="-120"/>
               </a:rPr>
-              <a:t>点大小=检出率，颜色=log2(CPM+1)，三基因各自色标。astrocyte/oligodendrocyte 归入 glia 谱系。</a:t>
+              <a:t>分母 = 该细胞类型在该分层内、每位供体 ≥20 个细胞后进入分析的细胞总数；分子 = 其中原始计数 ≥1 的细胞数。不是表达量占比、不是相对最高值的百分比、不是读段占比。</a:t>
             </a:r>
             <a:endParaRPr lang="en-US" sz="1050" dirty="0"/>
           </a:p>
@@ -2290,22 +4238,46 @@
                 <a:ea typeface="Microsoft YaHei" pitchFamily="34" charset="-122"/>
                 <a:cs typeface="Microsoft YaHei" pitchFamily="34" charset="-120"/>
               </a:rPr>
-              <a:t>必须注明的物种差异</a:t>
+              <a:t>小鼠脑（单细胞）：胶质 IL18 可检、CASP1 处于零底线</a:t>
             </a:r>
             <a:endParaRPr lang="en-US" sz="2500" dirty="0"/>
           </a:p>
         </p:txBody>
       </p:sp>
-      <p:sp>
-        <p:nvSpPr>
-          <p:cNvPr id="3" name="Text 1"/>
+      <p:pic>
+        <p:nvPicPr>
+          <p:cNvPr id="3" name="Image 0" descr="/home/user/aaa/il18_casp5organ/figures/mouse/brain_cell.png">    </p:cNvPr>
+          <p:cNvPicPr>
+            <a:picLocks noChangeAspect="1"/>
+          </p:cNvPicPr>
+          <p:nvPr/>
+        </p:nvPicPr>
+        <p:blipFill>
+          <a:blip r:embed="rId1"/>
+          <a:stretch>
+            <a:fillRect/>
+          </a:stretch>
+        </p:blipFill>
+        <p:spPr>
+          <a:xfrm>
+            <a:off x="640080" y="2410878"/>
+            <a:ext cx="10908792" cy="2127685"/>
+          </a:xfrm>
+          <a:prstGeom prst="rect">
+            <a:avLst/>
+          </a:prstGeom>
+        </p:spPr>
+      </p:pic>
+      <p:sp>
+        <p:nvSpPr>
+          <p:cNvPr id="4" name="Text 1"/>
           <p:cNvSpPr txBox="1"/>
           <p:nvPr/>
         </p:nvSpPr>
         <p:spPr>
           <a:xfrm>
-            <a:off x="731520" y="1737360"/>
-            <a:ext cx="10698480" cy="457200"/>
+            <a:off x="640080" y="6355080"/>
+            <a:ext cx="10972800" cy="347472"/>
           </a:xfrm>
           <a:prstGeom prst="rect">
             <a:avLst/>
@@ -2321,260 +4293,17 @@
               <a:buNone/>
             </a:pPr>
             <a:r>
-              <a:rPr lang="en-US" sz="1700" b="1" dirty="0">
+              <a:rPr lang="en-US" sz="1050" dirty="0">
                 <a:solidFill>
-                  <a:srgbClr val="9A2B2B"/>
+                  <a:srgbClr val="6B6B6B"/>
                 </a:solidFill>
                 <a:latin typeface="Microsoft YaHei" pitchFamily="34" charset="0"/>
                 <a:ea typeface="Microsoft YaHei" pitchFamily="34" charset="-122"/>
                 <a:cs typeface="Microsoft YaHei" pitchFamily="34" charset="-120"/>
               </a:rPr>
-              <a:t>A 级结论为小鼠特异，不可外推到人。</a:t>
-            </a:r>
-            <a:endParaRPr lang="en-US" sz="1700" dirty="0"/>
-          </a:p>
-        </p:txBody>
-      </p:sp>
-      <p:sp>
-        <p:nvSpPr>
-          <p:cNvPr id="4" name="Text 2"/>
-          <p:cNvSpPr txBox="1"/>
-          <p:nvPr/>
-        </p:nvSpPr>
-        <p:spPr>
-          <a:xfrm>
-            <a:off x="731520" y="2514600"/>
-            <a:ext cx="2651760" cy="822960"/>
-          </a:xfrm>
-          <a:prstGeom prst="rect">
-            <a:avLst/>
-          </a:prstGeom>
-          <a:noFill/>
-          <a:ln/>
-        </p:spPr>
-        <p:txBody>
-          <a:bodyPr wrap="square" rtlCol="0" anchor="t"/>
-          <a:lstStyle/>
-          <a:p>
-            <a:pPr indent="0" marL="0">
-              <a:buNone/>
-            </a:pPr>
-            <a:r>
-              <a:rPr lang="en-US" sz="1350" b="1" dirty="0">
-                <a:solidFill>
-                  <a:srgbClr val="1A1A1A"/>
-                </a:solidFill>
-                <a:latin typeface="Microsoft YaHei" pitchFamily="34" charset="0"/>
-                <a:ea typeface="Microsoft YaHei" pitchFamily="34" charset="-122"/>
-                <a:cs typeface="Microsoft YaHei" pitchFamily="34" charset="-120"/>
-              </a:rPr>
-              <a:t>小鼠脑（Zhang 分选）</a:t>
-            </a:r>
-            <a:endParaRPr lang="en-US" sz="1350" dirty="0"/>
-          </a:p>
-        </p:txBody>
-      </p:sp>
-      <p:sp>
-        <p:nvSpPr>
-          <p:cNvPr id="5" name="Text 3"/>
-          <p:cNvSpPr txBox="1"/>
-          <p:nvPr/>
-        </p:nvSpPr>
-        <p:spPr>
-          <a:xfrm>
-            <a:off x="3566160" y="2514600"/>
-            <a:ext cx="7955280" cy="822960"/>
-          </a:xfrm>
-          <a:prstGeom prst="rect">
-            <a:avLst/>
-          </a:prstGeom>
-          <a:noFill/>
-          <a:ln/>
-        </p:spPr>
-        <p:txBody>
-          <a:bodyPr wrap="square" rtlCol="0" anchor="t"/>
-          <a:lstStyle/>
-          <a:p>
-            <a:pPr indent="0" marL="0">
-              <a:lnSpc>
-                <a:spcPct val="115000"/>
-              </a:lnSpc>
-              <a:buNone/>
-            </a:pPr>
-            <a:r>
-              <a:rPr lang="en-US" sz="1350" dirty="0">
-                <a:solidFill>
-                  <a:srgbClr val="1A1A1A"/>
-                </a:solidFill>
-                <a:latin typeface="Microsoft YaHei" pitchFamily="34" charset="0"/>
-                <a:ea typeface="Microsoft YaHei" pitchFamily="34" charset="-122"/>
-                <a:cs typeface="Microsoft YaHei" pitchFamily="34" charset="-120"/>
-              </a:rPr>
-              <a:t>星形胶质 Il18 115.1 / Casp1 1.13 FPKM（约 102 倍）；少突胶质 24.7 / 0.12</a:t>
-            </a:r>
-            <a:endParaRPr lang="en-US" sz="1350" dirty="0"/>
-          </a:p>
-        </p:txBody>
-      </p:sp>
-      <p:sp>
-        <p:nvSpPr>
-          <p:cNvPr id="6" name="Text 4"/>
-          <p:cNvSpPr txBox="1"/>
-          <p:nvPr/>
-        </p:nvSpPr>
-        <p:spPr>
-          <a:xfrm>
-            <a:off x="731520" y="3429000"/>
-            <a:ext cx="2651760" cy="822960"/>
-          </a:xfrm>
-          <a:prstGeom prst="rect">
-            <a:avLst/>
-          </a:prstGeom>
-          <a:noFill/>
-          <a:ln/>
-        </p:spPr>
-        <p:txBody>
-          <a:bodyPr wrap="square" rtlCol="0" anchor="t"/>
-          <a:lstStyle/>
-          <a:p>
-            <a:pPr indent="0" marL="0">
-              <a:buNone/>
-            </a:pPr>
-            <a:r>
-              <a:rPr lang="en-US" sz="1350" b="1" dirty="0">
-                <a:solidFill>
-                  <a:srgbClr val="1A1A1A"/>
-                </a:solidFill>
-                <a:latin typeface="Microsoft YaHei" pitchFamily="34" charset="0"/>
-                <a:ea typeface="Microsoft YaHei" pitchFamily="34" charset="-122"/>
-                <a:cs typeface="Microsoft YaHei" pitchFamily="34" charset="-120"/>
-              </a:rPr>
-              <a:t>人脑（HPA 单核）</a:t>
-            </a:r>
-            <a:endParaRPr lang="en-US" sz="1350" dirty="0"/>
-          </a:p>
-        </p:txBody>
-      </p:sp>
-      <p:sp>
-        <p:nvSpPr>
-          <p:cNvPr id="7" name="Text 5"/>
-          <p:cNvSpPr txBox="1"/>
-          <p:nvPr/>
-        </p:nvSpPr>
-        <p:spPr>
-          <a:xfrm>
-            <a:off x="3566160" y="3429000"/>
-            <a:ext cx="7955280" cy="822960"/>
-          </a:xfrm>
-          <a:prstGeom prst="rect">
-            <a:avLst/>
-          </a:prstGeom>
-          <a:noFill/>
-          <a:ln/>
-        </p:spPr>
-        <p:txBody>
-          <a:bodyPr wrap="square" rtlCol="0" anchor="t"/>
-          <a:lstStyle/>
-          <a:p>
-            <a:pPr indent="0" marL="0">
-              <a:lnSpc>
-                <a:spcPct val="115000"/>
-              </a:lnSpc>
-              <a:buNone/>
-            </a:pPr>
-            <a:r>
-              <a:rPr lang="en-US" sz="1350" dirty="0">
-                <a:solidFill>
-                  <a:srgbClr val="1A1A1A"/>
-                </a:solidFill>
-                <a:latin typeface="Microsoft YaHei" pitchFamily="34" charset="0"/>
-                <a:ea typeface="Microsoft YaHei" pitchFamily="34" charset="-122"/>
-                <a:cs typeface="Microsoft YaHei" pitchFamily="34" charset="-120"/>
-              </a:rPr>
-              <a:t>小胶质 IL18 338.5 nCPM 压倒性最高，星形胶质仅 3.7、少突胶质 2.6</a:t>
-            </a:r>
-            <a:endParaRPr lang="en-US" sz="1350" dirty="0"/>
-          </a:p>
-        </p:txBody>
-      </p:sp>
-      <p:sp>
-        <p:nvSpPr>
-          <p:cNvPr id="8" name="Text 6"/>
-          <p:cNvSpPr txBox="1"/>
-          <p:nvPr/>
-        </p:nvSpPr>
-        <p:spPr>
-          <a:xfrm>
-            <a:off x="731520" y="4343400"/>
-            <a:ext cx="2651760" cy="822960"/>
-          </a:xfrm>
-          <a:prstGeom prst="rect">
-            <a:avLst/>
-          </a:prstGeom>
-          <a:noFill/>
-          <a:ln/>
-        </p:spPr>
-        <p:txBody>
-          <a:bodyPr wrap="square" rtlCol="0" anchor="t"/>
-          <a:lstStyle/>
-          <a:p>
-            <a:pPr indent="0" marL="0">
-              <a:buNone/>
-            </a:pPr>
-            <a:r>
-              <a:rPr lang="en-US" sz="1350" b="1" dirty="0">
-                <a:solidFill>
-                  <a:srgbClr val="1A1A1A"/>
-                </a:solidFill>
-                <a:latin typeface="Microsoft YaHei" pitchFamily="34" charset="0"/>
-                <a:ea typeface="Microsoft YaHei" pitchFamily="34" charset="-122"/>
-                <a:cs typeface="Microsoft YaHei" pitchFamily="34" charset="-120"/>
-              </a:rPr>
-              <a:t>含义</a:t>
-            </a:r>
-            <a:endParaRPr lang="en-US" sz="1350" dirty="0"/>
-          </a:p>
-        </p:txBody>
-      </p:sp>
-      <p:sp>
-        <p:nvSpPr>
-          <p:cNvPr id="9" name="Text 7"/>
-          <p:cNvSpPr txBox="1"/>
-          <p:nvPr/>
-        </p:nvSpPr>
-        <p:spPr>
-          <a:xfrm>
-            <a:off x="3566160" y="4343400"/>
-            <a:ext cx="7955280" cy="822960"/>
-          </a:xfrm>
-          <a:prstGeom prst="rect">
-            <a:avLst/>
-          </a:prstGeom>
-          <a:noFill/>
-          <a:ln/>
-        </p:spPr>
-        <p:txBody>
-          <a:bodyPr wrap="square" rtlCol="0" anchor="t"/>
-          <a:lstStyle/>
-          <a:p>
-            <a:pPr indent="0" marL="0">
-              <a:lnSpc>
-                <a:spcPct val="115000"/>
-              </a:lnSpc>
-              <a:buNone/>
-            </a:pPr>
-            <a:r>
-              <a:rPr lang="en-US" sz="1350" dirty="0">
-                <a:solidFill>
-                  <a:srgbClr val="1A1A1A"/>
-                </a:solidFill>
-                <a:latin typeface="Microsoft YaHei" pitchFamily="34" charset="0"/>
-                <a:ea typeface="Microsoft YaHei" pitchFamily="34" charset="-122"/>
-                <a:cs typeface="Microsoft YaHei" pitchFamily="34" charset="-120"/>
-              </a:rPr>
-              <a:t>人脑的「IL18 高」属于小胶质，而小胶质 CASP1 为 41.2 nCPM（比值 8.2），不满足前提。人脑中无对应的 A 级候选。</a:t>
-            </a:r>
-            <a:endParaRPr lang="en-US" sz="1350" dirty="0"/>
+              <a:t>点大小 = 检出率，颜色 = log2(CPM+1)，三基因各自色标。astrocyte / oligodendrocyte 归入 glia 谱系。</a:t>
+            </a:r>
+            <a:endParaRPr lang="en-US" sz="1050" dirty="0"/>
           </a:p>
         </p:txBody>
       </p:sp>
@@ -2636,6 +4365,352 @@
                 <a:ea typeface="Microsoft YaHei" pitchFamily="34" charset="-122"/>
                 <a:cs typeface="Microsoft YaHei" pitchFamily="34" charset="-120"/>
               </a:rPr>
+              <a:t>必须注明的物种差异</a:t>
+            </a:r>
+            <a:endParaRPr lang="en-US" sz="2500" dirty="0"/>
+          </a:p>
+        </p:txBody>
+      </p:sp>
+      <p:sp>
+        <p:nvSpPr>
+          <p:cNvPr id="3" name="Text 1"/>
+          <p:cNvSpPr txBox="1"/>
+          <p:nvPr/>
+        </p:nvSpPr>
+        <p:spPr>
+          <a:xfrm>
+            <a:off x="731520" y="1691640"/>
+            <a:ext cx="10698480" cy="457200"/>
+          </a:xfrm>
+          <a:prstGeom prst="rect">
+            <a:avLst/>
+          </a:prstGeom>
+          <a:noFill/>
+          <a:ln/>
+        </p:spPr>
+        <p:txBody>
+          <a:bodyPr wrap="square" rtlCol="0" anchor="ctr"/>
+          <a:lstStyle/>
+          <a:p>
+            <a:pPr indent="0" marL="0">
+              <a:buNone/>
+            </a:pPr>
+            <a:r>
+              <a:rPr lang="en-US" sz="1700" b="1" dirty="0">
+                <a:solidFill>
+                  <a:srgbClr val="9A2B2B"/>
+                </a:solidFill>
+                <a:latin typeface="Microsoft YaHei" pitchFamily="34" charset="0"/>
+                <a:ea typeface="Microsoft YaHei" pitchFamily="34" charset="-122"/>
+                <a:cs typeface="Microsoft YaHei" pitchFamily="34" charset="-120"/>
+              </a:rPr>
+              <a:t>A 级结论为小鼠特异，不可外推到人。</a:t>
+            </a:r>
+            <a:endParaRPr lang="en-US" sz="1700" dirty="0"/>
+          </a:p>
+        </p:txBody>
+      </p:sp>
+      <p:sp>
+        <p:nvSpPr>
+          <p:cNvPr id="4" name="Text 2"/>
+          <p:cNvSpPr txBox="1"/>
+          <p:nvPr/>
+        </p:nvSpPr>
+        <p:spPr>
+          <a:xfrm>
+            <a:off x="731520" y="2468880"/>
+            <a:ext cx="2651760" cy="822960"/>
+          </a:xfrm>
+          <a:prstGeom prst="rect">
+            <a:avLst/>
+          </a:prstGeom>
+          <a:noFill/>
+          <a:ln/>
+        </p:spPr>
+        <p:txBody>
+          <a:bodyPr wrap="square" rtlCol="0" anchor="t"/>
+          <a:lstStyle/>
+          <a:p>
+            <a:pPr indent="0" marL="0">
+              <a:buNone/>
+            </a:pPr>
+            <a:r>
+              <a:rPr lang="en-US" sz="1350" b="1" dirty="0">
+                <a:solidFill>
+                  <a:srgbClr val="1A1A1A"/>
+                </a:solidFill>
+                <a:latin typeface="Microsoft YaHei" pitchFamily="34" charset="0"/>
+                <a:ea typeface="Microsoft YaHei" pitchFamily="34" charset="-122"/>
+                <a:cs typeface="Microsoft YaHei" pitchFamily="34" charset="-120"/>
+              </a:rPr>
+              <a:t>小鼠脑（Zhang 分选）</a:t>
+            </a:r>
+            <a:endParaRPr lang="en-US" sz="1350" dirty="0"/>
+          </a:p>
+        </p:txBody>
+      </p:sp>
+      <p:sp>
+        <p:nvSpPr>
+          <p:cNvPr id="5" name="Text 3"/>
+          <p:cNvSpPr txBox="1"/>
+          <p:nvPr/>
+        </p:nvSpPr>
+        <p:spPr>
+          <a:xfrm>
+            <a:off x="3566160" y="2468880"/>
+            <a:ext cx="7955280" cy="822960"/>
+          </a:xfrm>
+          <a:prstGeom prst="rect">
+            <a:avLst/>
+          </a:prstGeom>
+          <a:noFill/>
+          <a:ln/>
+        </p:spPr>
+        <p:txBody>
+          <a:bodyPr wrap="square" rtlCol="0" anchor="t"/>
+          <a:lstStyle/>
+          <a:p>
+            <a:pPr indent="0" marL="0">
+              <a:lnSpc>
+                <a:spcPct val="115000"/>
+              </a:lnSpc>
+              <a:buNone/>
+            </a:pPr>
+            <a:r>
+              <a:rPr lang="en-US" sz="1350" dirty="0">
+                <a:solidFill>
+                  <a:srgbClr val="1A1A1A"/>
+                </a:solidFill>
+                <a:latin typeface="Microsoft YaHei" pitchFamily="34" charset="0"/>
+                <a:ea typeface="Microsoft YaHei" pitchFamily="34" charset="-122"/>
+                <a:cs typeface="Microsoft YaHei" pitchFamily="34" charset="-120"/>
+              </a:rPr>
+              <a:t>星形胶质 Il18 115.1 / Casp1 1.13 FPKM（约 102 倍）；少突胶质 24.7 / 0.12。</a:t>
+            </a:r>
+            <a:endParaRPr lang="en-US" sz="1350" dirty="0"/>
+          </a:p>
+        </p:txBody>
+      </p:sp>
+      <p:sp>
+        <p:nvSpPr>
+          <p:cNvPr id="6" name="Text 4"/>
+          <p:cNvSpPr txBox="1"/>
+          <p:nvPr/>
+        </p:nvSpPr>
+        <p:spPr>
+          <a:xfrm>
+            <a:off x="731520" y="3429000"/>
+            <a:ext cx="2651760" cy="822960"/>
+          </a:xfrm>
+          <a:prstGeom prst="rect">
+            <a:avLst/>
+          </a:prstGeom>
+          <a:noFill/>
+          <a:ln/>
+        </p:spPr>
+        <p:txBody>
+          <a:bodyPr wrap="square" rtlCol="0" anchor="t"/>
+          <a:lstStyle/>
+          <a:p>
+            <a:pPr indent="0" marL="0">
+              <a:buNone/>
+            </a:pPr>
+            <a:r>
+              <a:rPr lang="en-US" sz="1350" b="1" dirty="0">
+                <a:solidFill>
+                  <a:srgbClr val="1A1A1A"/>
+                </a:solidFill>
+                <a:latin typeface="Microsoft YaHei" pitchFamily="34" charset="0"/>
+                <a:ea typeface="Microsoft YaHei" pitchFamily="34" charset="-122"/>
+                <a:cs typeface="Microsoft YaHei" pitchFamily="34" charset="-120"/>
+              </a:rPr>
+              <a:t>人脑（HPA 单核）</a:t>
+            </a:r>
+            <a:endParaRPr lang="en-US" sz="1350" dirty="0"/>
+          </a:p>
+        </p:txBody>
+      </p:sp>
+      <p:sp>
+        <p:nvSpPr>
+          <p:cNvPr id="7" name="Text 5"/>
+          <p:cNvSpPr txBox="1"/>
+          <p:nvPr/>
+        </p:nvSpPr>
+        <p:spPr>
+          <a:xfrm>
+            <a:off x="3566160" y="3429000"/>
+            <a:ext cx="7955280" cy="822960"/>
+          </a:xfrm>
+          <a:prstGeom prst="rect">
+            <a:avLst/>
+          </a:prstGeom>
+          <a:noFill/>
+          <a:ln/>
+        </p:spPr>
+        <p:txBody>
+          <a:bodyPr wrap="square" rtlCol="0" anchor="t"/>
+          <a:lstStyle/>
+          <a:p>
+            <a:pPr indent="0" marL="0">
+              <a:lnSpc>
+                <a:spcPct val="115000"/>
+              </a:lnSpc>
+              <a:buNone/>
+            </a:pPr>
+            <a:r>
+              <a:rPr lang="en-US" sz="1350" dirty="0">
+                <a:solidFill>
+                  <a:srgbClr val="1A1A1A"/>
+                </a:solidFill>
+                <a:latin typeface="Microsoft YaHei" pitchFamily="34" charset="0"/>
+                <a:ea typeface="Microsoft YaHei" pitchFamily="34" charset="-122"/>
+                <a:cs typeface="Microsoft YaHei" pitchFamily="34" charset="-120"/>
+              </a:rPr>
+              <a:t>小胶质 IL18 338.5 nCPM 压倒性最高，星形胶质仅 3.7、少突胶质 2.6。</a:t>
+            </a:r>
+            <a:endParaRPr lang="en-US" sz="1350" dirty="0"/>
+          </a:p>
+        </p:txBody>
+      </p:sp>
+      <p:sp>
+        <p:nvSpPr>
+          <p:cNvPr id="8" name="Text 6"/>
+          <p:cNvSpPr txBox="1"/>
+          <p:nvPr/>
+        </p:nvSpPr>
+        <p:spPr>
+          <a:xfrm>
+            <a:off x="731520" y="4389120"/>
+            <a:ext cx="2651760" cy="822960"/>
+          </a:xfrm>
+          <a:prstGeom prst="rect">
+            <a:avLst/>
+          </a:prstGeom>
+          <a:noFill/>
+          <a:ln/>
+        </p:spPr>
+        <p:txBody>
+          <a:bodyPr wrap="square" rtlCol="0" anchor="t"/>
+          <a:lstStyle/>
+          <a:p>
+            <a:pPr indent="0" marL="0">
+              <a:buNone/>
+            </a:pPr>
+            <a:r>
+              <a:rPr lang="en-US" sz="1350" b="1" dirty="0">
+                <a:solidFill>
+                  <a:srgbClr val="1A1A1A"/>
+                </a:solidFill>
+                <a:latin typeface="Microsoft YaHei" pitchFamily="34" charset="0"/>
+                <a:ea typeface="Microsoft YaHei" pitchFamily="34" charset="-122"/>
+                <a:cs typeface="Microsoft YaHei" pitchFamily="34" charset="-120"/>
+              </a:rPr>
+              <a:t>含义</a:t>
+            </a:r>
+            <a:endParaRPr lang="en-US" sz="1350" dirty="0"/>
+          </a:p>
+        </p:txBody>
+      </p:sp>
+      <p:sp>
+        <p:nvSpPr>
+          <p:cNvPr id="9" name="Text 7"/>
+          <p:cNvSpPr txBox="1"/>
+          <p:nvPr/>
+        </p:nvSpPr>
+        <p:spPr>
+          <a:xfrm>
+            <a:off x="3566160" y="4389120"/>
+            <a:ext cx="7955280" cy="822960"/>
+          </a:xfrm>
+          <a:prstGeom prst="rect">
+            <a:avLst/>
+          </a:prstGeom>
+          <a:noFill/>
+          <a:ln/>
+        </p:spPr>
+        <p:txBody>
+          <a:bodyPr wrap="square" rtlCol="0" anchor="t"/>
+          <a:lstStyle/>
+          <a:p>
+            <a:pPr indent="0" marL="0">
+              <a:lnSpc>
+                <a:spcPct val="115000"/>
+              </a:lnSpc>
+              <a:buNone/>
+            </a:pPr>
+            <a:r>
+              <a:rPr lang="en-US" sz="1350" dirty="0">
+                <a:solidFill>
+                  <a:srgbClr val="1A1A1A"/>
+                </a:solidFill>
+                <a:latin typeface="Microsoft YaHei" pitchFamily="34" charset="0"/>
+                <a:ea typeface="Microsoft YaHei" pitchFamily="34" charset="-122"/>
+                <a:cs typeface="Microsoft YaHei" pitchFamily="34" charset="-120"/>
+              </a:rPr>
+              <a:t>人脑的「IL18 高」属于小胶质，而人小胶质 CASP1 为 41.2 nCPM（比值 8.2），不满足「加工酶缺失」前提。人脑中目前没有对应的 A 级候选。</a:t>
+            </a:r>
+            <a:endParaRPr lang="en-US" sz="1350" dirty="0"/>
+          </a:p>
+        </p:txBody>
+      </p:sp>
+    </p:spTree>
+  </p:cSld>
+  <p:clrMapOvr>
+    <a:masterClrMapping/>
+  </p:clrMapOvr>
+</p:sld>
+</file>
+
+<file path=ppt/slides/slide7.xml><?xml version="1.0" encoding="utf-8"?>
+<p:sld xmlns:a="http://schemas.openxmlformats.org/drawingml/2006/main" xmlns:r="http://schemas.openxmlformats.org/officeDocument/2006/relationships" xmlns:p="http://schemas.openxmlformats.org/presentationml/2006/main">
+  <p:cSld name="Slide 7">
+    <p:spTree>
+      <p:nvGrpSpPr>
+        <p:cNvPr id="1" name=""/>
+        <p:cNvGrpSpPr/>
+        <p:nvPr/>
+      </p:nvGrpSpPr>
+      <p:grpSpPr>
+        <a:xfrm>
+          <a:off x="0" y="0"/>
+          <a:ext cx="0" cy="0"/>
+          <a:chOff x="0" y="0"/>
+          <a:chExt cx="0" cy="0"/>
+        </a:xfrm>
+      </p:grpSpPr>
+      <p:sp>
+        <p:nvSpPr>
+          <p:cNvPr id="2" name="Text 0"/>
+          <p:cNvSpPr txBox="1"/>
+          <p:nvPr/>
+        </p:nvSpPr>
+        <p:spPr>
+          <a:xfrm>
+            <a:off x="640080" y="457200"/>
+            <a:ext cx="10972800" cy="640080"/>
+          </a:xfrm>
+          <a:prstGeom prst="rect">
+            <a:avLst/>
+          </a:prstGeom>
+          <a:noFill/>
+          <a:ln/>
+        </p:spPr>
+        <p:txBody>
+          <a:bodyPr wrap="square" rtlCol="0" anchor="ctr"/>
+          <a:lstStyle/>
+          <a:p>
+            <a:pPr indent="0" marL="0">
+              <a:buNone/>
+            </a:pPr>
+            <a:r>
+              <a:rPr lang="en-US" sz="2500" b="1" dirty="0">
+                <a:solidFill>
+                  <a:srgbClr val="1A1A1A"/>
+                </a:solidFill>
+                <a:latin typeface="Microsoft YaHei" pitchFamily="34" charset="0"/>
+                <a:ea typeface="Microsoft YaHei" pitchFamily="34" charset="-122"/>
+                <a:cs typeface="Microsoft YaHei" pitchFamily="34" charset="-120"/>
+              </a:rPr>
               <a:t>限制</a:t>
             </a:r>
             <a:endParaRPr lang="en-US" sz="2500" dirty="0"/>
@@ -2678,7 +4753,7 @@
                 <a:ea typeface="Microsoft YaHei" pitchFamily="34" charset="-122"/>
                 <a:cs typeface="Microsoft YaHei" pitchFamily="34" charset="-120"/>
               </a:rPr>
-              <a:t>环境 RNA 未校正：无 GPU、Census 源矩阵无空液滴；全部候选为待验证，对神经/胶质候选影响最大。</a:t>
+              <a:t>环境 RNA 未校正：无 GPU、Census 源矩阵无空液滴；全部候选为待验证，对低表达的神经/胶质候选影响最大。</a:t>
             </a:r>
             <a:endParaRPr lang="en-US" sz="1450" dirty="0"/>
           </a:p>
@@ -2762,7 +4837,7 @@
                 <a:ea typeface="Microsoft YaHei" pitchFamily="34" charset="-122"/>
                 <a:cs typeface="Microsoft YaHei" pitchFamily="34" charset="-120"/>
               </a:rPr>
-              <a:t>三分位、20% 下限与本次的 20 倍/3 倍比值分界均为工程取值，无生物学依据；完整排序值已输出可重切。</a:t>
+              <a:t>三分位、CASP3 最低 20%、以及本次的 20 倍 / 3 倍参考比值分界均为工程取值，无生物学依据；完整数值已输出，可自行重切。</a:t>
             </a:r>
             <a:endParaRPr lang="en-US" sz="1450" dirty="0"/>
           </a:p>
@@ -2804,7 +4879,7 @@
                 <a:ea typeface="Microsoft YaHei" pitchFamily="34" charset="-122"/>
                 <a:cs typeface="Microsoft YaHei" pitchFamily="34" charset="-120"/>
               </a:rPr>
-              <a:t>IL18 转录本 ≠ pro-IL-18 蛋白储量；CASP3 mRNA ≠ caspase-3 酶活性；静息基线不回答刺激后 CASP1 诱导。</a:t>
+              <a:t>IL18 转录本 ≠ pro-IL-18 蛋白储量；CASP3 mRNA ≠ caspase-3 酶活性；静息基线不回答刺激后 CASP1 能否诱导。</a:t>
             </a:r>
             <a:endParaRPr lang="en-US" sz="1450" dirty="0"/>
           </a:p>

--- a/il18_casp5organ/IL18_CASP_五器官筛选.pptx
+++ b/il18_casp5organ/IL18_CASP_五器官筛选.pptx
@@ -2263,7 +2263,7 @@
                 <a:ea typeface="Microsoft YaHei" pitchFamily="34" charset="-122"/>
                 <a:cs typeface="Microsoft YaHei" pitchFamily="34" charset="-120"/>
               </a:rPr>
-              <a:t>候选总览：合并检出率与证据级别</a:t>
+              <a:t>候选总览：同一条检出率轴上看 IL18 与 CASP1</a:t>
             </a:r>
             <a:endParaRPr lang="en-US" sz="2500" dirty="0"/>
           </a:p>
@@ -2285,14 +2285,53 @@
         </p:blipFill>
         <p:spPr>
           <a:xfrm>
-            <a:off x="904388" y="1143000"/>
-            <a:ext cx="10380176" cy="5394960"/>
+            <a:off x="691710" y="1115568"/>
+            <a:ext cx="10805532" cy="5212080"/>
           </a:xfrm>
           <a:prstGeom prst="rect">
             <a:avLst/>
           </a:prstGeom>
         </p:spPr>
       </p:pic>
+      <p:sp>
+        <p:nvSpPr>
+          <p:cNvPr id="4" name="Text 1"/>
+          <p:cNvSpPr txBox="1"/>
+          <p:nvPr/>
+        </p:nvSpPr>
+        <p:spPr>
+          <a:xfrm>
+            <a:off x="640080" y="6355080"/>
+            <a:ext cx="10972800" cy="347472"/>
+          </a:xfrm>
+          <a:prstGeom prst="rect">
+            <a:avLst/>
+          </a:prstGeom>
+          <a:noFill/>
+          <a:ln/>
+        </p:spPr>
+        <p:txBody>
+          <a:bodyPr wrap="square" rtlCol="0" anchor="ctr"/>
+          <a:lstStyle/>
+          <a:p>
+            <a:pPr indent="0" marL="0">
+              <a:buNone/>
+            </a:pPr>
+            <a:r>
+              <a:rPr lang="en-US" sz="1050" dirty="0">
+                <a:solidFill>
+                  <a:srgbClr val="6B6B6B"/>
+                </a:solidFill>
+                <a:latin typeface="Microsoft YaHei" pitchFamily="34" charset="0"/>
+                <a:ea typeface="Microsoft YaHei" pitchFamily="34" charset="-122"/>
+                <a:cs typeface="Microsoft YaHei" pitchFamily="34" charset="-120"/>
+              </a:rPr>
+              <a:t>每行一个细胞类型：实心点 = IL18，空心点 = CASP1，两点之间的距离就是差距；人与小鼠分开，不作跨物种比较。</a:t>
+            </a:r>
+            <a:endParaRPr lang="en-US" sz="1050" dirty="0"/>
+          </a:p>
+        </p:txBody>
+      </p:sp>
     </p:spTree>
   </p:cSld>
   <p:clrMapOvr>

--- a/il18_casp5organ/IL18_CASP_五器官筛选.pptx
+++ b/il18_casp5organ/IL18_CASP_五器官筛选.pptx
@@ -1488,8 +1488,8 @@
         </p:nvSpPr>
         <p:spPr>
           <a:xfrm>
-            <a:off x="640080" y="3794760"/>
-            <a:ext cx="10972800" cy="1463040"/>
+            <a:off x="640080" y="3703320"/>
+            <a:ext cx="10972800" cy="1645920"/>
           </a:xfrm>
           <a:prstGeom prst="rect">
             <a:avLst/>
@@ -1516,7 +1516,24 @@
                 <a:ea typeface="Microsoft YaHei" pitchFamily="34" charset="-122"/>
                 <a:cs typeface="Microsoft YaHei" pitchFamily="34" charset="-120"/>
               </a:rPr>
-              <a:t>答案：</a:t>
+              <a:t>答案分三类。</a:t>
+            </a:r>
+            <a:pPr indent="0" marL="0">
+              <a:lnSpc>
+                <a:spcPct val="130000"/>
+              </a:lnSpc>
+              <a:buNone/>
+            </a:pPr>
+            <a:r>
+              <a:rPr lang="en-US" sz="1700" b="1" dirty="0">
+                <a:solidFill>
+                  <a:srgbClr val="1B7A43"/>
+                </a:solidFill>
+                <a:latin typeface="Microsoft YaHei" pitchFamily="34" charset="0"/>
+                <a:ea typeface="Microsoft YaHei" pitchFamily="34" charset="-122"/>
+                <a:cs typeface="Microsoft YaHei" pitchFamily="34" charset="-120"/>
+              </a:rPr>
+              <a:t>确定：</a:t>
             </a:r>
             <a:pPr indent="0" marL="0">
               <a:lnSpc>
@@ -1533,7 +1550,7 @@
                 <a:ea typeface="Microsoft YaHei" pitchFamily="34" charset="-122"/>
                 <a:cs typeface="Microsoft YaHei" pitchFamily="34" charset="-120"/>
               </a:rPr>
-              <a:t>多源参考一致支持的是 </a:t>
+              <a:t>小鼠脑星形胶质、少突胶质。　</a:t>
             </a:r>
             <a:pPr indent="0" marL="0">
               <a:lnSpc>
@@ -1544,13 +1561,13 @@
             <a:r>
               <a:rPr lang="en-US" sz="1700" b="1" dirty="0">
                 <a:solidFill>
-                  <a:srgbClr val="1B7A43"/>
+                  <a:srgbClr val="1F5FA8"/>
                 </a:solidFill>
                 <a:latin typeface="Microsoft YaHei" pitchFamily="34" charset="0"/>
                 <a:ea typeface="Microsoft YaHei" pitchFamily="34" charset="-122"/>
                 <a:cs typeface="Microsoft YaHei" pitchFamily="34" charset="-120"/>
               </a:rPr>
-              <a:t>小鼠脑星形胶质与少突胶质</a:t>
+              <a:t>可能：</a:t>
             </a:r>
             <a:pPr indent="0" marL="0">
               <a:lnSpc>
@@ -1567,7 +1584,7 @@
                 <a:ea typeface="Microsoft YaHei" pitchFamily="34" charset="-122"/>
                 <a:cs typeface="Microsoft YaHei" pitchFamily="34" charset="-120"/>
               </a:rPr>
-              <a:t>；有单一来源支持、值得优先验证的潜在可能是 </a:t>
+              <a:t>人肺 AT1 与肥大细胞、小鼠胰岛 D(δ) 细胞与胰导管细胞、小鼠脑 Cajal-Retzius 神经元。　</a:t>
             </a:r>
             <a:pPr indent="0" marL="0">
               <a:lnSpc>
@@ -1578,13 +1595,13 @@
             <a:r>
               <a:rPr lang="en-US" sz="1700" b="1" dirty="0">
                 <a:solidFill>
-                  <a:srgbClr val="1F5FA8"/>
+                  <a:srgbClr val="9A2B2B"/>
                 </a:solidFill>
                 <a:latin typeface="Microsoft YaHei" pitchFamily="34" charset="0"/>
                 <a:ea typeface="Microsoft YaHei" pitchFamily="34" charset="-122"/>
                 <a:cs typeface="Microsoft YaHei" pitchFamily="34" charset="-120"/>
               </a:rPr>
-              <a:t>人肺肥大细胞、小鼠胰岛 D(δ) 细胞、小鼠胰导管细胞，以及被相对规则漏掉的人肺 AT1</a:t>
+              <a:t>相反：</a:t>
             </a:r>
             <a:pPr indent="0" marL="0">
               <a:lnSpc>
@@ -1601,7 +1618,7 @@
                 <a:ea typeface="Microsoft YaHei" pitchFamily="34" charset="-122"/>
                 <a:cs typeface="Microsoft YaHei" pitchFamily="34" charset="-120"/>
               </a:rPr>
-              <a:t>。肺泡巨噬、小胶质等不入选，是因为 CASP1 在它们之中确实被检出（肺泡巨噬 178/1341 = 13.3%），不是因为测不准。</a:t>
+              <a:t>小鼠肺泡巨噬与小胶质、人肺气道/纤毛上皮、人肝嗜碱粒细胞、人肺树突状细胞——它们不入选，是因为 CASP1 确实被检出（肺泡巨噬 178/1341 = 13.3%，14/14 供体），不是因为测不准。</a:t>
             </a:r>
             <a:endParaRPr lang="en-US" sz="1700" dirty="0"/>
           </a:p>
@@ -1704,7 +1721,7 @@
                 <a:ea typeface="Microsoft YaHei" pitchFamily="34" charset="-122"/>
                 <a:cs typeface="Microsoft YaHei" pitchFamily="34" charset="-120"/>
               </a:rPr>
-              <a:t>分级答案</a:t>
+              <a:t>三类答案</a:t>
             </a:r>
             <a:endParaRPr lang="en-US" sz="2500" dirty="0"/>
           </a:p>
@@ -1718,8 +1735,8 @@
         </p:nvSpPr>
         <p:spPr>
           <a:xfrm>
-            <a:off x="640080" y="1463040"/>
-            <a:ext cx="2514600" cy="914400"/>
+            <a:off x="640080" y="1417320"/>
+            <a:ext cx="2697480" cy="1371600"/>
           </a:xfrm>
           <a:prstGeom prst="rect">
             <a:avLst/>
@@ -1732,10 +1749,13 @@
           <a:lstStyle/>
           <a:p>
             <a:pPr indent="0" marL="0">
+              <a:lnSpc>
+                <a:spcPct val="115000"/>
+              </a:lnSpc>
               <a:buNone/>
             </a:pPr>
             <a:r>
-              <a:rPr lang="en-US" sz="1350" b="1" dirty="0">
+              <a:rPr lang="en-US" sz="1900" b="1" dirty="0">
                 <a:solidFill>
                   <a:srgbClr val="1B7A43"/>
                 </a:solidFill>
@@ -1743,9 +1763,27 @@
                 <a:ea typeface="Microsoft YaHei" pitchFamily="34" charset="-122"/>
                 <a:cs typeface="Microsoft YaHei" pitchFamily="34" charset="-120"/>
               </a:rPr>
-              <a:t>A 多源一致支持</a:t>
-            </a:r>
-            <a:endParaRPr lang="en-US" sz="1350" dirty="0"/>
+              <a:t>确定
+</a:t>
+            </a:r>
+            <a:pPr indent="0" marL="0">
+              <a:lnSpc>
+                <a:spcPct val="115000"/>
+              </a:lnSpc>
+              <a:buNone/>
+            </a:pPr>
+            <a:r>
+              <a:rPr lang="en-US" sz="1050" dirty="0">
+                <a:solidFill>
+                  <a:srgbClr val="6B6B6B"/>
+                </a:solidFill>
+                <a:latin typeface="Microsoft YaHei" pitchFamily="34" charset="0"/>
+                <a:ea typeface="Microsoft YaHei" pitchFamily="34" charset="-122"/>
+                <a:cs typeface="Microsoft YaHei" pitchFamily="34" charset="-120"/>
+              </a:rPr>
+              <a:t>≥2 个独立参考来源一致</a:t>
+            </a:r>
+            <a:endParaRPr lang="en-US" sz="1900" dirty="0"/>
           </a:p>
         </p:txBody>
       </p:sp>
@@ -1757,8 +1795,8 @@
         </p:nvSpPr>
         <p:spPr>
           <a:xfrm>
-            <a:off x="3291840" y="1463040"/>
-            <a:ext cx="8275320" cy="1005840"/>
+            <a:off x="3566160" y="1417320"/>
+            <a:ext cx="8001000" cy="1600200"/>
           </a:xfrm>
           <a:prstGeom prst="rect">
             <a:avLst/>
@@ -1772,12 +1810,12 @@
           <a:p>
             <a:pPr indent="0" marL="0">
               <a:lnSpc>
-                <a:spcPct val="112000"/>
+                <a:spcPct val="115000"/>
               </a:lnSpc>
               <a:buNone/>
             </a:pPr>
             <a:r>
-              <a:rPr lang="en-US" sz="1200" b="1" dirty="0">
+              <a:rPr lang="en-US" sz="1250" b="1" dirty="0">
                 <a:solidFill>
                   <a:srgbClr val="1A1A1A"/>
                 </a:solidFill>
@@ -1790,12 +1828,12 @@
             </a:r>
             <a:pPr indent="0" marL="0">
               <a:lnSpc>
-                <a:spcPct val="112000"/>
+                <a:spcPct val="115000"/>
               </a:lnSpc>
               <a:buNone/>
             </a:pPr>
             <a:r>
-              <a:rPr lang="en-US" sz="1200" dirty="0">
+              <a:rPr lang="en-US" sz="1250" dirty="0">
                 <a:solidFill>
                   <a:srgbClr val="6B6B6B"/>
                 </a:solidFill>
@@ -1803,9 +1841,9 @@
                 <a:ea typeface="Microsoft YaHei" pitchFamily="34" charset="-122"/>
                 <a:cs typeface="Microsoft YaHei" pitchFamily="34" charset="-120"/>
               </a:rPr>
-              <a:t>Allen Brain Map + CELLxGENE + brainrnaseq/Zhang 三源一致：Il18 明确存在而 Casp1 处于零底线（星形胶质 115.1 vs 1.13 FPKM）。本数据中 Casp1 阳性细胞 2/3766 与 2/8987。</a:t>
-            </a:r>
-            <a:endParaRPr lang="en-US" sz="1200" dirty="0"/>
+              <a:t>Allen Brain Map + CELLxGENE + brainrnaseq/Zhang 三源一致：Il18 明确存在而 Casp1 处于零底线（星形胶质 115.1 vs 1.13 FPKM）。本数据 Casp1 阳性细胞仅 2/3766 与 2/8987，样本量足够大，近零是真的近零。</a:t>
+            </a:r>
+            <a:endParaRPr lang="en-US" sz="1250" dirty="0"/>
           </a:p>
         </p:txBody>
       </p:sp>
@@ -1817,8 +1855,8 @@
         </p:nvSpPr>
         <p:spPr>
           <a:xfrm>
-            <a:off x="640080" y="2468880"/>
-            <a:ext cx="2514600" cy="914400"/>
+            <a:off x="640080" y="3044952"/>
+            <a:ext cx="2697480" cy="1371600"/>
           </a:xfrm>
           <a:prstGeom prst="rect">
             <a:avLst/>
@@ -1831,10 +1869,13 @@
           <a:lstStyle/>
           <a:p>
             <a:pPr indent="0" marL="0">
+              <a:lnSpc>
+                <a:spcPct val="115000"/>
+              </a:lnSpc>
               <a:buNone/>
             </a:pPr>
             <a:r>
-              <a:rPr lang="en-US" sz="1350" b="1" dirty="0">
+              <a:rPr lang="en-US" sz="1900" b="1" dirty="0">
                 <a:solidFill>
                   <a:srgbClr val="1F5FA8"/>
                 </a:solidFill>
@@ -1842,9 +1883,27 @@
                 <a:ea typeface="Microsoft YaHei" pitchFamily="34" charset="-122"/>
                 <a:cs typeface="Microsoft YaHei" pitchFamily="34" charset="-120"/>
               </a:rPr>
-              <a:t>B 潜在可能</a:t>
-            </a:r>
-            <a:endParaRPr lang="en-US" sz="1350" dirty="0"/>
+              <a:t>可能
+</a:t>
+            </a:r>
+            <a:pPr indent="0" marL="0">
+              <a:lnSpc>
+                <a:spcPct val="115000"/>
+              </a:lnSpc>
+              <a:buNone/>
+            </a:pPr>
+            <a:r>
+              <a:rPr lang="en-US" sz="1050" dirty="0">
+                <a:solidFill>
+                  <a:srgbClr val="6B6B6B"/>
+                </a:solidFill>
+                <a:latin typeface="Microsoft YaHei" pitchFamily="34" charset="0"/>
+                <a:ea typeface="Microsoft YaHei" pitchFamily="34" charset="-122"/>
+                <a:cs typeface="Microsoft YaHei" pitchFamily="34" charset="-120"/>
+              </a:rPr>
+              <a:t>单一来源支持，或本数据一致但尚无匹配参考</a:t>
+            </a:r>
+            <a:endParaRPr lang="en-US" sz="1900" dirty="0"/>
           </a:p>
         </p:txBody>
       </p:sp>
@@ -1856,8 +1915,8 @@
         </p:nvSpPr>
         <p:spPr>
           <a:xfrm>
-            <a:off x="3291840" y="2468880"/>
-            <a:ext cx="8275320" cy="1005840"/>
+            <a:off x="3566160" y="3044952"/>
+            <a:ext cx="8001000" cy="1600200"/>
           </a:xfrm>
           <a:prstGeom prst="rect">
             <a:avLst/>
@@ -1871,12 +1930,12 @@
           <a:p>
             <a:pPr indent="0" marL="0">
               <a:lnSpc>
-                <a:spcPct val="112000"/>
+                <a:spcPct val="115000"/>
               </a:lnSpc>
               <a:buNone/>
             </a:pPr>
             <a:r>
-              <a:rPr lang="en-US" sz="1200" b="1" dirty="0">
+              <a:rPr lang="en-US" sz="1250" b="1" dirty="0">
                 <a:solidFill>
                   <a:srgbClr val="1A1A1A"/>
                 </a:solidFill>
@@ -1884,17 +1943,17 @@
                 <a:ea typeface="Microsoft YaHei" pitchFamily="34" charset="-122"/>
                 <a:cs typeface="Microsoft YaHei" pitchFamily="34" charset="-120"/>
               </a:rPr>
-              <a:t>人肺 肥大细胞 · 小鼠胰 胰岛 D(δ) 细胞 · 小鼠胰 胰导管细胞
+              <a:t>人肺 AT1 肺泡上皮 · 人肺 肥大细胞 · 小鼠胰 胰岛 D(δ) 细胞 · 小鼠胰 胰导管细胞 · 小鼠脑 Cajal-Retzius 神经元
 </a:t>
             </a:r>
             <a:pPr indent="0" marL="0">
               <a:lnSpc>
-                <a:spcPct val="112000"/>
+                <a:spcPct val="115000"/>
               </a:lnSpc>
               <a:buNone/>
             </a:pPr>
             <a:r>
-              <a:rPr lang="en-US" sz="1200" dirty="0">
+              <a:rPr lang="en-US" sz="1250" dirty="0">
                 <a:solidFill>
                   <a:srgbClr val="6B6B6B"/>
                 </a:solidFill>
@@ -1902,9 +1961,9 @@
                 <a:ea typeface="Microsoft YaHei" pitchFamily="34" charset="-122"/>
                 <a:cs typeface="Microsoft YaHei" pitchFamily="34" charset="-120"/>
               </a:rPr>
-              <a:t>肥大细胞 HPA IL18 331.5 nCPM 为人肺最高、CASP1 11.1（约 30 倍），本数据 CASP1 138/5299 = 2.6%；胰岛 δ 细胞有 FACS 分选证据（13.16 vs 0.016 RPKM），两套独立数据同向。</a:t>
-            </a:r>
-            <a:endParaRPr lang="en-US" sz="1200" dirty="0"/>
+              <a:t>肥大细胞 HPA IL18 331.5 nCPM 为人肺最高、CASP1 11.1（约 30 倍），本数据 CASP1 138/5299 = 2.6%；胰岛 D(δ) 有 FACS 分选证据（13.16 vs 0.016 RPKM），两套独立数据同向；AT1 被分层内相对规则漏掉（IL18 排名 3/39 与 1/23），其自身 CASP1 单核 1.9% / 单细胞 4.2% 并不算低；Cajal-Retzius 神经元 CASP1 0/136，但该行最低只能看到 0.74%，且无匹配参考。</a:t>
+            </a:r>
+            <a:endParaRPr lang="en-US" sz="1250" dirty="0"/>
           </a:p>
         </p:txBody>
       </p:sp>
@@ -1916,8 +1975,8 @@
         </p:nvSpPr>
         <p:spPr>
           <a:xfrm>
-            <a:off x="640080" y="3474720"/>
-            <a:ext cx="2514600" cy="914400"/>
+            <a:off x="640080" y="4672584"/>
+            <a:ext cx="2697480" cy="1371600"/>
           </a:xfrm>
           <a:prstGeom prst="rect">
             <a:avLst/>
@@ -1930,20 +1989,41 @@
           <a:lstStyle/>
           <a:p>
             <a:pPr indent="0" marL="0">
+              <a:lnSpc>
+                <a:spcPct val="115000"/>
+              </a:lnSpc>
               <a:buNone/>
             </a:pPr>
             <a:r>
-              <a:rPr lang="en-US" sz="1350" b="1" dirty="0">
+              <a:rPr lang="en-US" sz="1900" b="1" dirty="0">
                 <a:solidFill>
-                  <a:srgbClr val="4C87C4"/>
+                  <a:srgbClr val="9A2B2B"/>
                 </a:solidFill>
                 <a:latin typeface="Microsoft YaHei" pitchFamily="34" charset="0"/>
                 <a:ea typeface="Microsoft YaHei" pitchFamily="34" charset="-122"/>
                 <a:cs typeface="Microsoft YaHei" pitchFamily="34" charset="-120"/>
               </a:rPr>
-              <a:t>B 潜在（相对规则漏掉）</a:t>
-            </a:r>
-            <a:endParaRPr lang="en-US" sz="1350" dirty="0"/>
+              <a:t>相反
+</a:t>
+            </a:r>
+            <a:pPr indent="0" marL="0">
+              <a:lnSpc>
+                <a:spcPct val="115000"/>
+              </a:lnSpc>
+              <a:buNone/>
+            </a:pPr>
+            <a:r>
+              <a:rPr lang="en-US" sz="1050" dirty="0">
+                <a:solidFill>
+                  <a:srgbClr val="6B6B6B"/>
+                </a:solidFill>
+                <a:latin typeface="Microsoft YaHei" pitchFamily="34" charset="0"/>
+                <a:ea typeface="Microsoft YaHei" pitchFamily="34" charset="-122"/>
+                <a:cs typeface="Microsoft YaHei" pitchFamily="34" charset="-120"/>
+              </a:rPr>
+              <a:t>参考层显示 CASP1 确实存在，或方向与前提相反</a:t>
+            </a:r>
+            <a:endParaRPr lang="en-US" sz="1900" dirty="0"/>
           </a:p>
         </p:txBody>
       </p:sp>
@@ -1955,8 +2035,8 @@
         </p:nvSpPr>
         <p:spPr>
           <a:xfrm>
-            <a:off x="3291840" y="3474720"/>
-            <a:ext cx="8275320" cy="1005840"/>
+            <a:off x="3566160" y="4672584"/>
+            <a:ext cx="8001000" cy="1600200"/>
           </a:xfrm>
           <a:prstGeom prst="rect">
             <a:avLst/>
@@ -1970,12 +2050,12 @@
           <a:p>
             <a:pPr indent="0" marL="0">
               <a:lnSpc>
-                <a:spcPct val="112000"/>
+                <a:spcPct val="115000"/>
               </a:lnSpc>
               <a:buNone/>
             </a:pPr>
             <a:r>
-              <a:rPr lang="en-US" sz="1200" b="1" dirty="0">
+              <a:rPr lang="en-US" sz="1250" b="1" dirty="0">
                 <a:solidFill>
                   <a:srgbClr val="1A1A1A"/>
                 </a:solidFill>
@@ -1983,17 +2063,17 @@
                 <a:ea typeface="Microsoft YaHei" pitchFamily="34" charset="-122"/>
                 <a:cs typeface="Microsoft YaHei" pitchFamily="34" charset="-120"/>
               </a:rPr>
-              <a:t>人肺 AT1 肺泡上皮（单细胞 + 单核）
+              <a:t>小鼠肺 肺泡巨噬 · 人肺 气道多纤毛上皮 · 小鼠脑 小胶质/CNS巨噬 · 人肺 纤毛上皮 · 人肝 嗜碱粒细胞 · 人肺 树突状细胞
 </a:t>
             </a:r>
             <a:pPr indent="0" marL="0">
               <a:lnSpc>
-                <a:spcPct val="112000"/>
+                <a:spcPct val="115000"/>
               </a:lnSpc>
               <a:buNone/>
             </a:pPr>
             <a:r>
-              <a:rPr lang="en-US" sz="1200" dirty="0">
+              <a:rPr lang="en-US" sz="1250" dirty="0">
                 <a:solidFill>
                   <a:srgbClr val="6B6B6B"/>
                 </a:solidFill>
@@ -2001,207 +2081,9 @@
                 <a:ea typeface="Microsoft YaHei" pitchFamily="34" charset="-122"/>
                 <a:cs typeface="Microsoft YaHei" pitchFamily="34" charset="-120"/>
               </a:rPr>
-              <a:t>IL18 分层内排名 3/39（单细胞）与 1/23（单核），HPA IL18 214.1 vs CASP1 7.9 nCPM（27 倍）。未进候选只因该分层另有三分之一细胞类型 CASP1 更低；其自身 CASP1 检出 单核 1.9% / 单细胞 4.2%，并不算低，故列为需复核的潜在项。</a:t>
-            </a:r>
-            <a:endParaRPr lang="en-US" sz="1200" dirty="0"/>
-          </a:p>
-        </p:txBody>
-      </p:sp>
-      <p:sp>
-        <p:nvSpPr>
-          <p:cNvPr id="9" name="Text 7"/>
-          <p:cNvSpPr txBox="1"/>
-          <p:nvPr/>
-        </p:nvSpPr>
-        <p:spPr>
-          <a:xfrm>
-            <a:off x="640080" y="4480560"/>
-            <a:ext cx="2514600" cy="914400"/>
-          </a:xfrm>
-          <a:prstGeom prst="rect">
-            <a:avLst/>
-          </a:prstGeom>
-          <a:noFill/>
-          <a:ln/>
-        </p:spPr>
-        <p:txBody>
-          <a:bodyPr wrap="square" rtlCol="0" anchor="t"/>
-          <a:lstStyle/>
-          <a:p>
-            <a:pPr indent="0" marL="0">
-              <a:buNone/>
-            </a:pPr>
-            <a:r>
-              <a:rPr lang="en-US" sz="1350" b="1" dirty="0">
-                <a:solidFill>
-                  <a:srgbClr val="B07A00"/>
-                </a:solidFill>
-                <a:latin typeface="Microsoft YaHei" pitchFamily="34" charset="0"/>
-                <a:ea typeface="Microsoft YaHei" pitchFamily="34" charset="-122"/>
-                <a:cs typeface="Microsoft YaHei" pitchFamily="34" charset="-120"/>
-              </a:rPr>
-              <a:t>C CASP1 确实存在</a:t>
-            </a:r>
-            <a:endParaRPr lang="en-US" sz="1350" dirty="0"/>
-          </a:p>
-        </p:txBody>
-      </p:sp>
-      <p:sp>
-        <p:nvSpPr>
-          <p:cNvPr id="10" name="Text 8"/>
-          <p:cNvSpPr txBox="1"/>
-          <p:nvPr/>
-        </p:nvSpPr>
-        <p:spPr>
-          <a:xfrm>
-            <a:off x="3291840" y="4480560"/>
-            <a:ext cx="8275320" cy="1005840"/>
-          </a:xfrm>
-          <a:prstGeom prst="rect">
-            <a:avLst/>
-          </a:prstGeom>
-          <a:noFill/>
-          <a:ln/>
-        </p:spPr>
-        <p:txBody>
-          <a:bodyPr wrap="square" rtlCol="0" anchor="t"/>
-          <a:lstStyle/>
-          <a:p>
-            <a:pPr indent="0" marL="0">
-              <a:lnSpc>
-                <a:spcPct val="112000"/>
-              </a:lnSpc>
-              <a:buNone/>
-            </a:pPr>
-            <a:r>
-              <a:rPr lang="en-US" sz="1200" b="1" dirty="0">
-                <a:solidFill>
-                  <a:srgbClr val="1A1A1A"/>
-                </a:solidFill>
-                <a:latin typeface="Microsoft YaHei" pitchFamily="34" charset="0"/>
-                <a:ea typeface="Microsoft YaHei" pitchFamily="34" charset="-122"/>
-                <a:cs typeface="Microsoft YaHei" pitchFamily="34" charset="-120"/>
-              </a:rPr>
-              <a:t>小鼠肺 肺泡巨噬 · 人肺 气道多纤毛上皮 · 小鼠脑 小胶质/CNS巨噬 · 人肺 纤毛上皮
-</a:t>
-            </a:r>
-            <a:pPr indent="0" marL="0">
-              <a:lnSpc>
-                <a:spcPct val="112000"/>
-              </a:lnSpc>
-              <a:buNone/>
-            </a:pPr>
-            <a:r>
-              <a:rPr lang="en-US" sz="1200" dirty="0">
-                <a:solidFill>
-                  <a:srgbClr val="6B6B6B"/>
-                </a:solidFill>
-                <a:latin typeface="Microsoft YaHei" pitchFamily="34" charset="0"/>
-                <a:ea typeface="Microsoft YaHei" pitchFamily="34" charset="-122"/>
-                <a:cs typeface="Microsoft YaHei" pitchFamily="34" charset="-120"/>
-              </a:rPr>
-              <a:t>肺泡巨噬 IL18 检出 71.6% 为全部候选最高，但 ImmGen 分选 Casp1=511（比值 4.7），本数据 CASP1 178/1341 = 13.3%，14/14 供体均有阳性。排除理由是 CASP1 被检出。</a:t>
-            </a:r>
-            <a:endParaRPr lang="en-US" sz="1200" dirty="0"/>
-          </a:p>
-        </p:txBody>
-      </p:sp>
-      <p:sp>
-        <p:nvSpPr>
-          <p:cNvPr id="11" name="Text 9"/>
-          <p:cNvSpPr txBox="1"/>
-          <p:nvPr/>
-        </p:nvSpPr>
-        <p:spPr>
-          <a:xfrm>
-            <a:off x="640080" y="5486400"/>
-            <a:ext cx="2514600" cy="914400"/>
-          </a:xfrm>
-          <a:prstGeom prst="rect">
-            <a:avLst/>
-          </a:prstGeom>
-          <a:noFill/>
-          <a:ln/>
-        </p:spPr>
-        <p:txBody>
-          <a:bodyPr wrap="square" rtlCol="0" anchor="t"/>
-          <a:lstStyle/>
-          <a:p>
-            <a:pPr indent="0" marL="0">
-              <a:buNone/>
-            </a:pPr>
-            <a:r>
-              <a:rPr lang="en-US" sz="1350" b="1" dirty="0">
-                <a:solidFill>
-                  <a:srgbClr val="9A2B2B"/>
-                </a:solidFill>
-                <a:latin typeface="Microsoft YaHei" pitchFamily="34" charset="0"/>
-                <a:ea typeface="Microsoft YaHei" pitchFamily="34" charset="-122"/>
-                <a:cs typeface="Microsoft YaHei" pitchFamily="34" charset="-120"/>
-              </a:rPr>
-              <a:t>D 方向相反，排除</a:t>
-            </a:r>
-            <a:endParaRPr lang="en-US" sz="1350" dirty="0"/>
-          </a:p>
-        </p:txBody>
-      </p:sp>
-      <p:sp>
-        <p:nvSpPr>
-          <p:cNvPr id="12" name="Text 10"/>
-          <p:cNvSpPr txBox="1"/>
-          <p:nvPr/>
-        </p:nvSpPr>
-        <p:spPr>
-          <a:xfrm>
-            <a:off x="3291840" y="5486400"/>
-            <a:ext cx="8275320" cy="1005840"/>
-          </a:xfrm>
-          <a:prstGeom prst="rect">
-            <a:avLst/>
-          </a:prstGeom>
-          <a:noFill/>
-          <a:ln/>
-        </p:spPr>
-        <p:txBody>
-          <a:bodyPr wrap="square" rtlCol="0" anchor="t"/>
-          <a:lstStyle/>
-          <a:p>
-            <a:pPr indent="0" marL="0">
-              <a:lnSpc>
-                <a:spcPct val="112000"/>
-              </a:lnSpc>
-              <a:buNone/>
-            </a:pPr>
-            <a:r>
-              <a:rPr lang="en-US" sz="1200" b="1" dirty="0">
-                <a:solidFill>
-                  <a:srgbClr val="1A1A1A"/>
-                </a:solidFill>
-                <a:latin typeface="Microsoft YaHei" pitchFamily="34" charset="0"/>
-                <a:ea typeface="Microsoft YaHei" pitchFamily="34" charset="-122"/>
-                <a:cs typeface="Microsoft YaHei" pitchFamily="34" charset="-120"/>
-              </a:rPr>
-              <a:t>人肝 嗜碱粒细胞 · 人肺 树突状细胞
-</a:t>
-            </a:r>
-            <a:pPr indent="0" marL="0">
-              <a:lnSpc>
-                <a:spcPct val="112000"/>
-              </a:lnSpc>
-              <a:buNone/>
-            </a:pPr>
-            <a:r>
-              <a:rPr lang="en-US" sz="1200" dirty="0">
-                <a:solidFill>
-                  <a:srgbClr val="6B6B6B"/>
-                </a:solidFill>
-                <a:latin typeface="Microsoft YaHei" pitchFamily="34" charset="0"/>
-                <a:ea typeface="Microsoft YaHei" pitchFamily="34" charset="-122"/>
-                <a:cs typeface="Microsoft YaHei" pitchFamily="34" charset="-120"/>
-              </a:rPr>
-              <a:t>人肝嗜碱粒细胞参考层 CASP1 60–234 nTPM vs IL18 4.7–14.8（比值 0.085）；人肺树突状细胞 2.0 倍。</a:t>
-            </a:r>
-            <a:endParaRPr lang="en-US" sz="1200" dirty="0"/>
+              <a:t>肺泡巨噬 IL18 检出 71.6% 为全部最高，但 CASP1 也是最高的 178/1341 = 13.3%（14/14 供体均有阳性），ImmGen 分选 Casp1=511（比值 4.7）；小胶质 3.4 倍、气道上皮 11.9 倍；人肝嗜碱粒细胞参考层 CASP1 60–234 nTPM vs IL18 4.7–14.8（比值 0.085），方向相反。</a:t>
+            </a:r>
+            <a:endParaRPr lang="en-US" sz="1250" dirty="0"/>
           </a:p>
         </p:txBody>
       </p:sp>
@@ -4277,7 +4159,7 @@
                 <a:ea typeface="Microsoft YaHei" pitchFamily="34" charset="-122"/>
                 <a:cs typeface="Microsoft YaHei" pitchFamily="34" charset="-120"/>
               </a:rPr>
-              <a:t>小鼠脑（单细胞）：胶质 IL18 可检、CASP1 处于零底线</a:t>
+              <a:t>小鼠脑（单细胞）：胶质 IL18 可检、CASP1 近乎测不到</a:t>
             </a:r>
             <a:endParaRPr lang="en-US" sz="2500" dirty="0"/>
           </a:p>
@@ -4285,7 +4167,7 @@
       </p:sp>
       <p:pic>
         <p:nvPicPr>
-          <p:cNvPr id="3" name="Image 0" descr="/home/user/aaa/il18_casp5organ/figures/mouse/brain_cell.png">    </p:cNvPr>
+          <p:cNvPr id="3" name="Image 0" descr="/home/user/aaa/il18_casp5organ/figures/mouse/brain_cell_dots.png">    </p:cNvPr>
           <p:cNvPicPr>
             <a:picLocks noChangeAspect="1"/>
           </p:cNvPicPr>
@@ -4299,8 +4181,8 @@
         </p:blipFill>
         <p:spPr>
           <a:xfrm>
-            <a:off x="640080" y="2410878"/>
-            <a:ext cx="10908792" cy="2127685"/>
+            <a:off x="724454" y="1115568"/>
+            <a:ext cx="10740044" cy="5212080"/>
           </a:xfrm>
           <a:prstGeom prst="rect">
             <a:avLst/>
@@ -4340,7 +4222,7 @@
                 <a:ea typeface="Microsoft YaHei" pitchFamily="34" charset="-122"/>
                 <a:cs typeface="Microsoft YaHei" pitchFamily="34" charset="-120"/>
               </a:rPr>
-              <a:t>点大小 = 检出率，颜色 = log2(CPM+1)，三基因各自色标。astrocyte / oligodendrocyte 归入 glia 谱系。</a:t>
+              <a:t>星形胶质 IL18 56.7% 而 CASP1 仅 2/3766；小胶质 IL18 20.5% 但 CASP1 15/818 = 1.83%，是全脑最高的一档。</a:t>
             </a:r>
             <a:endParaRPr lang="en-US" sz="1050" dirty="0"/>
           </a:p>

--- a/il18_casp5organ/IL18_CASP_五器官筛选.pptx
+++ b/il18_casp5organ/IL18_CASP_五器官筛选.pptx
@@ -12,9 +12,10 @@
     <p:sldId id="260" r:id="rId6"/>
     <p:sldId id="261" r:id="rId7"/>
     <p:sldId id="262" r:id="rId8"/>
+    <p:sldId id="263" r:id="rId9"/>
   </p:sldIdLst>
   <p:notesMasterIdLst>
-    <p:notesMasterId r:id="rId9"/>
+    <p:notesMasterId r:id="rId10"/>
   </p:notesMasterIdLst>
   <p:sldSz cx="12192000" cy="6858000"/>
   <p:notesSz cx="6858000" cy="12192000"/>
@@ -1060,6 +1061,94 @@
             <a:fld id="{F7021451-1387-4CA6-816F-3879F97B5CBC}" type="slidenum">
               <a:rPr lang="en-US"/>
               <a:t>7</a:t>
+            </a:fld>
+            <a:endParaRPr lang="en-US"/>
+          </a:p>
+        </p:txBody>
+      </p:sp>
+    </p:spTree>
+    <p:extLst>
+      <p:ext uri="{BB962C8B-B14F-4D97-AF65-F5344CB8AC3E}">
+        <p14:creationId xmlns:p14="http://schemas.microsoft.com/office/powerpoint/2010/main" val="1024086991"/>
+      </p:ext>
+    </p:extLst>
+  </p:cSld>
+  <p:clrMapOvr>
+    <a:masterClrMapping/>
+  </p:clrMapOvr>
+</p:notes>
+</file>
+
+<file path=ppt/notesSlides/notesSlide8.xml><?xml version="1.0" encoding="utf-8"?>
+<p:notes xmlns:a="http://schemas.openxmlformats.org/drawingml/2006/main" xmlns:r="http://schemas.openxmlformats.org/officeDocument/2006/relationships" xmlns:p="http://schemas.openxmlformats.org/presentationml/2006/main">
+  <p:cSld>
+    <p:spTree>
+      <p:nvGrpSpPr>
+        <p:cNvPr id="1" name=""/>
+        <p:cNvGrpSpPr/>
+        <p:nvPr/>
+      </p:nvGrpSpPr>
+      <p:grpSpPr>
+        <a:xfrm>
+          <a:off x="0" y="0"/>
+          <a:ext cx="0" cy="0"/>
+          <a:chOff x="0" y="0"/>
+          <a:chExt cx="0" cy="0"/>
+        </a:xfrm>
+      </p:grpSpPr>
+      <p:sp>
+        <p:nvSpPr>
+          <p:cNvPr id="2" name="Slide Image Placeholder 1"/>
+          <p:cNvSpPr>
+            <a:spLocks noGrp="1" noRot="1" noChangeAspect="1"/>
+          </p:cNvSpPr>
+          <p:nvPr>
+            <p:ph type="sldImg"/>
+          </p:nvPr>
+        </p:nvSpPr>
+        <p:spPr/>
+      </p:sp>
+      <p:sp>
+        <p:nvSpPr>
+          <p:cNvPr id="3" name="Notes Placeholder 2"/>
+          <p:cNvSpPr>
+            <a:spLocks noGrp="1"/>
+          </p:cNvSpPr>
+          <p:nvPr>
+            <p:ph type="body" idx="1"/>
+          </p:nvPr>
+        </p:nvSpPr>
+        <p:spPr/>
+        <p:txBody>
+          <a:bodyPr/>
+          <a:lstStyle/>
+          <a:p>
+            <a:r>
+              <a:rPr lang="en-US" dirty="0"/>
+              <a:t/>
+            </a:r>
+            <a:endParaRPr lang="en-US" dirty="0"/>
+          </a:p>
+        </p:txBody>
+      </p:sp>
+      <p:sp>
+        <p:nvSpPr>
+          <p:cNvPr id="4" name="Slide Number Placeholder 3"/>
+          <p:cNvSpPr>
+            <a:spLocks noGrp="1"/>
+          </p:cNvSpPr>
+          <p:nvPr>
+            <p:ph type="sldNum" sz="quarter" idx="10"/>
+          </p:nvPr>
+        </p:nvSpPr>
+        <p:spPr/>
+        <p:txBody>
+          <a:bodyPr/>
+          <a:lstStyle/>
+          <a:p>
+            <a:fld id="{F7021451-1387-4CA6-816F-3879F97B5CBC}" type="slidenum">
+              <a:rPr lang="en-US"/>
+              <a:t>8</a:t>
             </a:fld>
             <a:endParaRPr lang="en-US"/>
           </a:p>
@@ -1410,7 +1499,7 @@
         </p:nvSpPr>
         <p:spPr>
           <a:xfrm>
-            <a:off x="640080" y="1737360"/>
+            <a:off x="640080" y="1600200"/>
             <a:ext cx="10972800" cy="914400"/>
           </a:xfrm>
           <a:prstGeom prst="rect">
@@ -1449,7 +1538,7 @@
         </p:nvSpPr>
         <p:spPr>
           <a:xfrm>
-            <a:off x="640080" y="2651760"/>
+            <a:off x="640080" y="2514600"/>
             <a:ext cx="10972800" cy="457200"/>
           </a:xfrm>
           <a:prstGeom prst="rect">
@@ -1474,7 +1563,7 @@
                 <a:ea typeface="Microsoft YaHei" pitchFamily="34" charset="-122"/>
                 <a:cs typeface="Microsoft YaHei" pitchFamily="34" charset="-120"/>
               </a:rPr>
-              <a:t>人与小鼠 · 肺 肝 胰 脑 脊髓 · 静息基线 · 以供体为统计单位</a:t>
+              <a:t>人与小鼠 · 肺 肝 胰 脑 脊髓 · 静息基线 · 29 个分层 · 以供体为统计单位</a:t>
             </a:r>
             <a:endParaRPr lang="en-US" sz="1600" dirty="0"/>
           </a:p>
@@ -1488,8 +1577,8 @@
         </p:nvSpPr>
         <p:spPr>
           <a:xfrm>
-            <a:off x="640080" y="3703320"/>
-            <a:ext cx="10972800" cy="1645920"/>
+            <a:off x="640080" y="3520440"/>
+            <a:ext cx="10972800" cy="1828800"/>
           </a:xfrm>
           <a:prstGeom prst="rect">
             <a:avLst/>
@@ -1508,7 +1597,7 @@
               <a:buNone/>
             </a:pPr>
             <a:r>
-              <a:rPr lang="en-US" sz="1700" b="1" dirty="0">
+              <a:rPr lang="en-US" sz="1650" b="1" dirty="0">
                 <a:solidFill>
                   <a:srgbClr val="1A1A1A"/>
                 </a:solidFill>
@@ -1525,7 +1614,7 @@
               <a:buNone/>
             </a:pPr>
             <a:r>
-              <a:rPr lang="en-US" sz="1700" b="1" dirty="0">
+              <a:rPr lang="en-US" sz="1650" b="1" dirty="0">
                 <a:solidFill>
                   <a:srgbClr val="1B7A43"/>
                 </a:solidFill>
@@ -1542,7 +1631,7 @@
               <a:buNone/>
             </a:pPr>
             <a:r>
-              <a:rPr lang="en-US" sz="1700" dirty="0">
+              <a:rPr lang="en-US" sz="1650" dirty="0">
                 <a:solidFill>
                   <a:srgbClr val="1A1A1A"/>
                 </a:solidFill>
@@ -1559,7 +1648,7 @@
               <a:buNone/>
             </a:pPr>
             <a:r>
-              <a:rPr lang="en-US" sz="1700" b="1" dirty="0">
+              <a:rPr lang="en-US" sz="1650" b="1" dirty="0">
                 <a:solidFill>
                   <a:srgbClr val="1F5FA8"/>
                 </a:solidFill>
@@ -1576,7 +1665,7 @@
               <a:buNone/>
             </a:pPr>
             <a:r>
-              <a:rPr lang="en-US" sz="1700" dirty="0">
+              <a:rPr lang="en-US" sz="1650" dirty="0">
                 <a:solidFill>
                   <a:srgbClr val="1A1A1A"/>
                 </a:solidFill>
@@ -1584,7 +1673,7 @@
                 <a:ea typeface="Microsoft YaHei" pitchFamily="34" charset="-122"/>
                 <a:cs typeface="Microsoft YaHei" pitchFamily="34" charset="-120"/>
               </a:rPr>
-              <a:t>人肺 AT1 与肥大细胞、小鼠胰岛 D(δ) 细胞与胰导管细胞、小鼠脑 Cajal-Retzius 神经元。　</a:t>
+              <a:t>人脑皮层 PV 中间神经元与 L5 ET 投射神经元（3–4 套独立数据集重复）、人肺 AT1 与肥大细胞、人胰腺腺泡细胞、小鼠胰岛 D(δ) 细胞与胰导管细胞。　</a:t>
             </a:r>
             <a:pPr indent="0" marL="0">
               <a:lnSpc>
@@ -1593,7 +1682,7 @@
               <a:buNone/>
             </a:pPr>
             <a:r>
-              <a:rPr lang="en-US" sz="1700" b="1" dirty="0">
+              <a:rPr lang="en-US" sz="1650" b="1" dirty="0">
                 <a:solidFill>
                   <a:srgbClr val="9A2B2B"/>
                 </a:solidFill>
@@ -1610,7 +1699,7 @@
               <a:buNone/>
             </a:pPr>
             <a:r>
-              <a:rPr lang="en-US" sz="1700" dirty="0">
+              <a:rPr lang="en-US" sz="1650" dirty="0">
                 <a:solidFill>
                   <a:srgbClr val="1A1A1A"/>
                 </a:solidFill>
@@ -1618,9 +1707,9 @@
                 <a:ea typeface="Microsoft YaHei" pitchFamily="34" charset="-122"/>
                 <a:cs typeface="Microsoft YaHei" pitchFamily="34" charset="-120"/>
               </a:rPr>
-              <a:t>小鼠肺泡巨噬与小胶质、人肺气道/纤毛上皮、人肝嗜碱粒细胞、人肺树突状细胞——它们不入选，是因为 CASP1 确实被检出（肺泡巨噬 178/1341 = 13.3%，14/14 供体），不是因为测不准。</a:t>
-            </a:r>
-            <a:endParaRPr lang="en-US" sz="1700" dirty="0"/>
+              <a:t>小鼠肺泡巨噬与小胶质、人肺气道/纤毛上皮、人肝嗜碱粒细胞与 CD56bright NK、人肺树突状细胞——CASP1 在它们之中确实被检出。</a:t>
+            </a:r>
+            <a:endParaRPr lang="en-US" sz="1650" dirty="0"/>
           </a:p>
         </p:txBody>
       </p:sp>
@@ -1632,7 +1721,7 @@
         </p:nvSpPr>
         <p:spPr>
           <a:xfrm>
-            <a:off x="640080" y="5623560"/>
+            <a:off x="640080" y="5669280"/>
             <a:ext cx="10972800" cy="365760"/>
           </a:xfrm>
           <a:prstGeom prst="rect">
@@ -1657,7 +1746,7 @@
                 <a:ea typeface="Microsoft YaHei" pitchFamily="34" charset="-122"/>
                 <a:cs typeface="Microsoft YaHei" pitchFamily="34" charset="-120"/>
               </a:rPr>
-              <a:t>检出率 = 原始计数 ≥1 的细胞数 ÷ 分析细胞数（合并全部供体）；本版全部标注阳性细胞数与阳性供体数。</a:t>
+              <a:t>检出率 = 原始计数 ≥1 的细胞数 ÷ 分析细胞数（合并全部供体），每个数字都标注阳性细胞数。</a:t>
             </a:r>
             <a:endParaRPr lang="en-US" sz="1250" dirty="0"/>
           </a:p>
@@ -1696,7 +1785,7 @@
         </p:nvSpPr>
         <p:spPr>
           <a:xfrm>
-            <a:off x="640080" y="457200"/>
+            <a:off x="640080" y="411480"/>
             <a:ext cx="10972800" cy="640080"/>
           </a:xfrm>
           <a:prstGeom prst="rect">
@@ -1713,7 +1802,7 @@
               <a:buNone/>
             </a:pPr>
             <a:r>
-              <a:rPr lang="en-US" sz="2500" b="1" dirty="0">
+              <a:rPr lang="en-US" sz="2400" b="1" dirty="0">
                 <a:solidFill>
                   <a:srgbClr val="1A1A1A"/>
                 </a:solidFill>
@@ -1723,7 +1812,7 @@
               </a:rPr>
               <a:t>三类答案</a:t>
             </a:r>
-            <a:endParaRPr lang="en-US" sz="2500" dirty="0"/>
+            <a:endParaRPr lang="en-US" sz="2400" dirty="0"/>
           </a:p>
         </p:txBody>
       </p:sp>
@@ -1735,8 +1824,8 @@
         </p:nvSpPr>
         <p:spPr>
           <a:xfrm>
-            <a:off x="640080" y="1417320"/>
-            <a:ext cx="2697480" cy="1371600"/>
+            <a:off x="640080" y="1371600"/>
+            <a:ext cx="2651760" cy="1463040"/>
           </a:xfrm>
           <a:prstGeom prst="rect">
             <a:avLst/>
@@ -1795,8 +1884,8 @@
         </p:nvSpPr>
         <p:spPr>
           <a:xfrm>
-            <a:off x="3566160" y="1417320"/>
-            <a:ext cx="8001000" cy="1600200"/>
+            <a:off x="3520440" y="1371600"/>
+            <a:ext cx="8046720" cy="1691640"/>
           </a:xfrm>
           <a:prstGeom prst="rect">
             <a:avLst/>
@@ -1815,7 +1904,7 @@
               <a:buNone/>
             </a:pPr>
             <a:r>
-              <a:rPr lang="en-US" sz="1250" b="1" dirty="0">
+              <a:rPr lang="en-US" sz="1150" b="1" dirty="0">
                 <a:solidFill>
                   <a:srgbClr val="1A1A1A"/>
                 </a:solidFill>
@@ -1833,7 +1922,7 @@
               <a:buNone/>
             </a:pPr>
             <a:r>
-              <a:rPr lang="en-US" sz="1250" dirty="0">
+              <a:rPr lang="en-US" sz="1150" dirty="0">
                 <a:solidFill>
                   <a:srgbClr val="6B6B6B"/>
                 </a:solidFill>
@@ -1843,7 +1932,7 @@
               </a:rPr>
               <a:t>Allen Brain Map + CELLxGENE + brainrnaseq/Zhang 三源一致：Il18 明确存在而 Casp1 处于零底线（星形胶质 115.1 vs 1.13 FPKM）。本数据 Casp1 阳性细胞仅 2/3766 与 2/8987，样本量足够大，近零是真的近零。</a:t>
             </a:r>
-            <a:endParaRPr lang="en-US" sz="1250" dirty="0"/>
+            <a:endParaRPr lang="en-US" sz="1150" dirty="0"/>
           </a:p>
         </p:txBody>
       </p:sp>
@@ -1855,8 +1944,8 @@
         </p:nvSpPr>
         <p:spPr>
           <a:xfrm>
-            <a:off x="640080" y="3044952"/>
-            <a:ext cx="2697480" cy="1371600"/>
+            <a:off x="640080" y="3081528"/>
+            <a:ext cx="2651760" cy="1463040"/>
           </a:xfrm>
           <a:prstGeom prst="rect">
             <a:avLst/>
@@ -1915,8 +2004,8 @@
         </p:nvSpPr>
         <p:spPr>
           <a:xfrm>
-            <a:off x="3566160" y="3044952"/>
-            <a:ext cx="8001000" cy="1600200"/>
+            <a:off x="3520440" y="3081528"/>
+            <a:ext cx="8046720" cy="1691640"/>
           </a:xfrm>
           <a:prstGeom prst="rect">
             <a:avLst/>
@@ -1935,7 +2024,7 @@
               <a:buNone/>
             </a:pPr>
             <a:r>
-              <a:rPr lang="en-US" sz="1250" b="1" dirty="0">
+              <a:rPr lang="en-US" sz="1150" b="1" dirty="0">
                 <a:solidFill>
                   <a:srgbClr val="1A1A1A"/>
                 </a:solidFill>
@@ -1943,7 +2032,7 @@
                 <a:ea typeface="Microsoft YaHei" pitchFamily="34" charset="-122"/>
                 <a:cs typeface="Microsoft YaHei" pitchFamily="34" charset="-120"/>
               </a:rPr>
-              <a:t>人肺 AT1 肺泡上皮 · 人肺 肥大细胞 · 小鼠胰 胰岛 D(δ) 细胞 · 小鼠胰 胰导管细胞 · 小鼠脑 Cajal-Retzius 神经元
+              <a:t>人肺 AT1 肺泡上皮 · 人肺 肥大细胞 · 人脑 L5 ET 投射神经元 · 人脑 血管软脑膜细胞 · 人胰 胰腺腺泡细胞 · 人脑 PV 中间神经元 · 人肝 巨核-红系祖细胞 · 人脑 枝形 PV 中间神经元 · 人肺 肺泡外膜成纤维 · 人脑 CGE 源中间神经元 · 小鼠胰 胰岛 D(δ) 细胞 · 小鼠胰 胰导管细胞 · 小鼠脑 Cajal-Retzius 神经元
 </a:t>
             </a:r>
             <a:pPr indent="0" marL="0">
@@ -1953,7 +2042,7 @@
               <a:buNone/>
             </a:pPr>
             <a:r>
-              <a:rPr lang="en-US" sz="1250" dirty="0">
+              <a:rPr lang="en-US" sz="1150" dirty="0">
                 <a:solidFill>
                   <a:srgbClr val="6B6B6B"/>
                 </a:solidFill>
@@ -1961,9 +2050,9 @@
                 <a:ea typeface="Microsoft YaHei" pitchFamily="34" charset="-122"/>
                 <a:cs typeface="Microsoft YaHei" pitchFamily="34" charset="-120"/>
               </a:rPr>
-              <a:t>肥大细胞 HPA IL18 331.5 nCPM 为人肺最高、CASP1 11.1（约 30 倍），本数据 CASP1 138/5299 = 2.6%；胰岛 D(δ) 有 FACS 分选证据（13.16 vs 0.016 RPKM），两套独立数据同向；AT1 被分层内相对规则漏掉（IL18 排名 3/39 与 1/23），其自身 CASP1 单核 1.9% / 单细胞 4.2% 并不算低；Cajal-Retzius 神经元 CASP1 0/136，但该行最低只能看到 0.74%，且无匹配参考。</a:t>
-            </a:r>
-            <a:endParaRPr lang="en-US" sz="1250" dirty="0"/>
+              <a:t>人脑皮层 PV 中间神经元（HVS 单细胞 78 供体 + PsychAD 单核 234 供体）与 L5 ET 投射神经元（HVS + SEA-AD MTG + SEA-AD DLPFC）CASP1 合并检出 0.07–0.22%，在 3–4 套独立数据集里重复；人肺 AT1 在 3 套数据集被同一条相对规则漏掉；小鼠胰岛 D(δ) 有 FACS 分选证据（13.16 vs 0.016 RPKM）。</a:t>
+            </a:r>
+            <a:endParaRPr lang="en-US" sz="1150" dirty="0"/>
           </a:p>
         </p:txBody>
       </p:sp>
@@ -1975,8 +2064,8 @@
         </p:nvSpPr>
         <p:spPr>
           <a:xfrm>
-            <a:off x="640080" y="4672584"/>
-            <a:ext cx="2697480" cy="1371600"/>
+            <a:off x="640080" y="4791456"/>
+            <a:ext cx="2651760" cy="1463040"/>
           </a:xfrm>
           <a:prstGeom prst="rect">
             <a:avLst/>
@@ -2035,8 +2124,8 @@
         </p:nvSpPr>
         <p:spPr>
           <a:xfrm>
-            <a:off x="3566160" y="4672584"/>
-            <a:ext cx="8001000" cy="1600200"/>
+            <a:off x="3520440" y="4791456"/>
+            <a:ext cx="8046720" cy="1691640"/>
           </a:xfrm>
           <a:prstGeom prst="rect">
             <a:avLst/>
@@ -2055,7 +2144,7 @@
               <a:buNone/>
             </a:pPr>
             <a:r>
-              <a:rPr lang="en-US" sz="1250" b="1" dirty="0">
+              <a:rPr lang="en-US" sz="1150" b="1" dirty="0">
                 <a:solidFill>
                   <a:srgbClr val="1A1A1A"/>
                 </a:solidFill>
@@ -2063,7 +2152,7 @@
                 <a:ea typeface="Microsoft YaHei" pitchFamily="34" charset="-122"/>
                 <a:cs typeface="Microsoft YaHei" pitchFamily="34" charset="-120"/>
               </a:rPr>
-              <a:t>小鼠肺 肺泡巨噬 · 人肺 气道多纤毛上皮 · 小鼠脑 小胶质/CNS巨噬 · 人肺 纤毛上皮 · 人肝 嗜碱粒细胞 · 人肺 树突状细胞
+              <a:t>人肺 气道多纤毛上皮 · 人肝 CD56bright NK · 人肺 纤毛上皮 · 人肝 嗜碱粒细胞 · 人肺 树突状细胞 · 小鼠肺 肺泡巨噬 · 小鼠脑 小胶质/CNS巨噬
 </a:t>
             </a:r>
             <a:pPr indent="0" marL="0">
@@ -2073,7 +2162,7 @@
               <a:buNone/>
             </a:pPr>
             <a:r>
-              <a:rPr lang="en-US" sz="1250" dirty="0">
+              <a:rPr lang="en-US" sz="1150" dirty="0">
                 <a:solidFill>
                   <a:srgbClr val="6B6B6B"/>
                 </a:solidFill>
@@ -2081,9 +2170,9 @@
                 <a:ea typeface="Microsoft YaHei" pitchFamily="34" charset="-122"/>
                 <a:cs typeface="Microsoft YaHei" pitchFamily="34" charset="-120"/>
               </a:rPr>
-              <a:t>肺泡巨噬 IL18 检出 71.6% 为全部最高，但 CASP1 也是最高的 178/1341 = 13.3%（14/14 供体均有阳性），ImmGen 分选 Casp1=511（比值 4.7）；小胶质 3.4 倍、气道上皮 11.9 倍；人肝嗜碱粒细胞参考层 CASP1 60–234 nTPM vs IL18 4.7–14.8（比值 0.085），方向相反。</a:t>
-            </a:r>
-            <a:endParaRPr lang="en-US" sz="1250" dirty="0"/>
+              <a:t>小鼠肺泡巨噬 IL18 71.6% 为全部最高，但 CASP1 也是最高的 13.3%（178/1341，14/14 供体），ImmGen 分选 Casp1=511；人肝 CD56bright NK 的 CASP1 检出 25.2% 反而高于 IL18 的 19.1%。排除理由是 CASP1 被检出，不是测不准。</a:t>
+            </a:r>
+            <a:endParaRPr lang="en-US" sz="1150" dirty="0"/>
           </a:p>
         </p:txBody>
       </p:sp>
@@ -2120,7 +2209,7 @@
         </p:nvSpPr>
         <p:spPr>
           <a:xfrm>
-            <a:off x="640080" y="457200"/>
+            <a:off x="640080" y="411480"/>
             <a:ext cx="10972800" cy="640080"/>
           </a:xfrm>
           <a:prstGeom prst="rect">
@@ -2137,7 +2226,7 @@
               <a:buNone/>
             </a:pPr>
             <a:r>
-              <a:rPr lang="en-US" sz="2500" b="1" dirty="0">
+              <a:rPr lang="en-US" sz="2400" b="1" dirty="0">
                 <a:solidFill>
                   <a:srgbClr val="1A1A1A"/>
                 </a:solidFill>
@@ -2145,15 +2234,15 @@
                 <a:ea typeface="Microsoft YaHei" pitchFamily="34" charset="-122"/>
                 <a:cs typeface="Microsoft YaHei" pitchFamily="34" charset="-120"/>
               </a:rPr>
-              <a:t>候选总览：同一条检出率轴上看 IL18 与 CASP1</a:t>
-            </a:r>
-            <a:endParaRPr lang="en-US" sz="2500" dirty="0"/>
+              <a:t>人：同一条检出率轴上看 IL18 与 CASP1</a:t>
+            </a:r>
+            <a:endParaRPr lang="en-US" sz="2400" dirty="0"/>
           </a:p>
         </p:txBody>
       </p:sp>
       <p:pic>
         <p:nvPicPr>
-          <p:cNvPr id="3" name="Image 0" descr="/home/user/aaa/il18_casp5organ/figures/answer_v2.png">    </p:cNvPr>
+          <p:cNvPr id="3" name="Image 0" descr="/home/user/aaa/il18_casp5organ/figures/answer_human.png">    </p:cNvPr>
           <p:cNvPicPr>
             <a:picLocks noChangeAspect="1"/>
           </p:cNvPicPr>
@@ -2167,8 +2256,8 @@
         </p:blipFill>
         <p:spPr>
           <a:xfrm>
-            <a:off x="691710" y="1115568"/>
-            <a:ext cx="10805532" cy="5212080"/>
+            <a:off x="1107604" y="1051560"/>
+            <a:ext cx="9973744" cy="5349240"/>
           </a:xfrm>
           <a:prstGeom prst="rect">
             <a:avLst/>
@@ -2208,7 +2297,7 @@
                 <a:ea typeface="Microsoft YaHei" pitchFamily="34" charset="-122"/>
                 <a:cs typeface="Microsoft YaHei" pitchFamily="34" charset="-120"/>
               </a:rPr>
-              <a:t>每行一个细胞类型：实心点 = IL18，空心点 = CASP1，两点之间的距离就是差距；人与小鼠分开，不作跨物种比较。</a:t>
+              <a:t>每行一个细胞类型：实心点 = IL18，空心点 = CASP1，两点距离即差距；同一细胞类型在多个数据集重复时取供体最多的一套，右侧标 ×n。</a:t>
             </a:r>
             <a:endParaRPr lang="en-US" sz="1050" dirty="0"/>
           </a:p>
@@ -2247,7 +2336,7 @@
         </p:nvSpPr>
         <p:spPr>
           <a:xfrm>
-            <a:off x="640080" y="457200"/>
+            <a:off x="640080" y="411480"/>
             <a:ext cx="10972800" cy="640080"/>
           </a:xfrm>
           <a:prstGeom prst="rect">
@@ -2264,7 +2353,7 @@
               <a:buNone/>
             </a:pPr>
             <a:r>
-              <a:rPr lang="en-US" sz="2500" b="1" dirty="0">
+              <a:rPr lang="en-US" sz="2400" b="1" dirty="0">
                 <a:solidFill>
                   <a:srgbClr val="1A1A1A"/>
                 </a:solidFill>
@@ -2272,1799 +2361,39 @@
                 <a:ea typeface="Microsoft YaHei" pitchFamily="34" charset="-122"/>
                 <a:cs typeface="Microsoft YaHei" pitchFamily="34" charset="-120"/>
               </a:rPr>
-              <a:t>检出率的口径：为什么上一版这一页全是 0%</a:t>
-            </a:r>
-            <a:endParaRPr lang="en-US" sz="2500" dirty="0"/>
-          </a:p>
-        </p:txBody>
-      </p:sp>
-      <p:sp>
-        <p:nvSpPr>
-          <p:cNvPr id="3" name="Text 1"/>
-          <p:cNvSpPr txBox="1"/>
+              <a:t>小鼠：同一条检出率轴上看 IL18 与 CASP1</a:t>
+            </a:r>
+            <a:endParaRPr lang="en-US" sz="2400" dirty="0"/>
+          </a:p>
+        </p:txBody>
+      </p:sp>
+      <p:pic>
+        <p:nvPicPr>
+          <p:cNvPr id="3" name="Image 0" descr="/home/user/aaa/il18_casp5organ/figures/answer_mouse.png">    </p:cNvPr>
+          <p:cNvPicPr>
+            <a:picLocks noChangeAspect="1"/>
+          </p:cNvPicPr>
           <p:nvPr/>
-        </p:nvSpPr>
+        </p:nvPicPr>
+        <p:blipFill>
+          <a:blip r:embed="rId1"/>
+          <a:stretch>
+            <a:fillRect/>
+          </a:stretch>
+        </p:blipFill>
         <p:spPr>
           <a:xfrm>
-            <a:off x="731520" y="1371600"/>
-            <a:ext cx="10698480" cy="914400"/>
+            <a:off x="640080" y="1806740"/>
+            <a:ext cx="10908792" cy="3427399"/>
           </a:xfrm>
           <a:prstGeom prst="rect">
             <a:avLst/>
           </a:prstGeom>
-          <a:noFill/>
-          <a:ln/>
         </p:spPr>
-        <p:txBody>
-          <a:bodyPr wrap="square" rtlCol="0" anchor="ctr"/>
-          <a:lstStyle/>
-          <a:p>
-            <a:pPr indent="0" marL="0">
-              <a:lnSpc>
-                <a:spcPct val="125000"/>
-              </a:lnSpc>
-              <a:buNone/>
-            </a:pPr>
-            <a:r>
-              <a:rPr lang="en-US" sz="1500" b="1" dirty="0">
-                <a:solidFill>
-                  <a:srgbClr val="1A1A1A"/>
-                </a:solidFill>
-                <a:latin typeface="Microsoft YaHei" pitchFamily="34" charset="0"/>
-                <a:ea typeface="Microsoft YaHei" pitchFamily="34" charset="-122"/>
-                <a:cs typeface="Microsoft YaHei" pitchFamily="34" charset="-120"/>
-              </a:rPr>
-              <a:t>上一版标注的是「供体中位数检出率」。</a:t>
-            </a:r>
-            <a:pPr indent="0" marL="0">
-              <a:lnSpc>
-                <a:spcPct val="125000"/>
-              </a:lnSpc>
-              <a:buNone/>
-            </a:pPr>
-            <a:r>
-              <a:rPr lang="en-US" sz="1500" dirty="0">
-                <a:solidFill>
-                  <a:srgbClr val="1A1A1A"/>
-                </a:solidFill>
-                <a:latin typeface="Microsoft YaHei" pitchFamily="34" charset="0"/>
-                <a:ea typeface="Microsoft YaHei" pitchFamily="34" charset="-122"/>
-                <a:cs typeface="Microsoft YaHei" pitchFamily="34" charset="-120"/>
-              </a:rPr>
-              <a:t>每位供体只有数十到上百个该类型细胞，当真实检出率低于约 1/细胞数 时，半数以上供体恰好 0 个阳性细胞，中位数即为 0——这是统计量把低值截断，不是真的没有检出。本版改用合并检出率并标注阳性细胞数。</a:t>
-            </a:r>
-            <a:endParaRPr lang="en-US" sz="1500" dirty="0"/>
-          </a:p>
-        </p:txBody>
-      </p:sp>
-      <p:graphicFrame>
-        <p:nvGraphicFramePr>
-          <p:cNvPr id="5" name="Table 0"/>
-          <p:cNvGraphicFramePr>
-            <a:graphicFrameLocks noGrp="1"/>
-          </p:cNvGraphicFramePr>
-          <p:nvPr>
-            <p:extLst>
-              <p:ext uri="{D42A27DB-BD31-4B8C-83A1-F6EECF244321}">
-                <p14:modId xmlns:p14="http://schemas.microsoft.com/office/powerpoint/2010/main" val="1579011935"/>
-              </p:ext>
-            </p:extLst>
-          </p:nvPr>
-        </p:nvGraphicFramePr>
-        <p:xfrm>
-          <a:off x="731520" y="2606040"/>
-          <a:ext cx="10698480" cy="914400"/>
-        </p:xfrm>
-        <a:graphic>
-          <a:graphicData uri="http://schemas.openxmlformats.org/drawingml/2006/table">
-            <a:tbl>
-              <a:tblPr/>
-              <a:tblGrid>
-                <a:gridCol w="3017520"/>
-                <a:gridCol w="2743200"/>
-                <a:gridCol w="1737360"/>
-                <a:gridCol w="1554480"/>
-                <a:gridCol w="1645920"/>
-              </a:tblGrid>
-              <a:tr h="384048">
-                <a:tc>
-                  <a:txBody>
-                    <a:bodyPr/>
-                    <a:lstStyle/>
-                    <a:p>
-                      <a:pPr indent="0" marL="0">
-                        <a:buNone/>
-                      </a:pPr>
-                      <a:r>
-                        <a:rPr lang="en-US" sz="1300" b="1" dirty="0">
-                          <a:solidFill>
-                            <a:srgbClr val="1A1A1A"/>
-                          </a:solidFill>
-                          <a:latin typeface="Microsoft YaHei" pitchFamily="34" charset="0"/>
-                          <a:ea typeface="Microsoft YaHei" pitchFamily="34" charset="-122"/>
-                          <a:cs typeface="Microsoft YaHei" pitchFamily="34" charset="-120"/>
-                        </a:rPr>
-                        <a:t>细胞类型</a:t>
-                      </a:r>
-                      <a:endParaRPr lang="en-US" sz="1300" dirty="0">
-                        <a:latin typeface="Microsoft YaHei" charset="0"/>
-                        <a:ea typeface="Microsoft YaHei" charset="0"/>
-                        <a:cs typeface="Microsoft YaHei" charset="0"/>
-                      </a:endParaRPr>
-                    </a:p>
-                  </a:txBody>
-                  <a:tcPr marL="91440" marR="91440" marT="45720" marB="45720" anchor="ctr">
-                    <a:lnL w="6350" cap="flat" cmpd="sng" algn="ctr">
-                      <a:solidFill>
-                        <a:srgbClr val="D8DBE0"/>
-                      </a:solidFill>
-                      <a:prstDash val="solid"/>
-                      <a:round/>
-                      <a:headEnd type="none" w="med" len="med"/>
-                      <a:tailEnd type="none" w="med" len="med"/>
-                    </a:lnL>
-                    <a:lnR w="6350" cap="flat" cmpd="sng" algn="ctr">
-                      <a:solidFill>
-                        <a:srgbClr val="D8DBE0"/>
-                      </a:solidFill>
-                      <a:prstDash val="solid"/>
-                      <a:round/>
-                      <a:headEnd type="none" w="med" len="med"/>
-                      <a:tailEnd type="none" w="med" len="med"/>
-                    </a:lnR>
-                    <a:lnT w="6350" cap="flat" cmpd="sng" algn="ctr">
-                      <a:solidFill>
-                        <a:srgbClr val="D8DBE0"/>
-                      </a:solidFill>
-                      <a:prstDash val="solid"/>
-                      <a:round/>
-                      <a:headEnd type="none" w="med" len="med"/>
-                      <a:tailEnd type="none" w="med" len="med"/>
-                    </a:lnT>
-                    <a:lnB w="6350" cap="flat" cmpd="sng" algn="ctr">
-                      <a:solidFill>
-                        <a:srgbClr val="D8DBE0"/>
-                      </a:solidFill>
-                      <a:prstDash val="solid"/>
-                      <a:round/>
-                      <a:headEnd type="none" w="med" len="med"/>
-                      <a:tailEnd type="none" w="med" len="med"/>
-                    </a:lnB>
-                    <a:solidFill>
-                      <a:srgbClr val="EEF1F5"/>
-                    </a:solidFill>
-                  </a:tcPr>
-                </a:tc>
-                <a:tc>
-                  <a:txBody>
-                    <a:bodyPr/>
-                    <a:lstStyle/>
-                    <a:p>
-                      <a:pPr indent="0" marL="0">
-                        <a:buNone/>
-                      </a:pPr>
-                      <a:r>
-                        <a:rPr lang="en-US" sz="1300" b="1" dirty="0">
-                          <a:solidFill>
-                            <a:srgbClr val="1A1A1A"/>
-                          </a:solidFill>
-                          <a:latin typeface="Microsoft YaHei" pitchFamily="34" charset="0"/>
-                          <a:ea typeface="Microsoft YaHei" pitchFamily="34" charset="-122"/>
-                          <a:cs typeface="Microsoft YaHei" pitchFamily="34" charset="-120"/>
-                        </a:rPr>
-                        <a:t>CASP1 阳性细胞 / 分析细胞</a:t>
-                      </a:r>
-                      <a:endParaRPr lang="en-US" sz="1300" dirty="0">
-                        <a:latin typeface="Microsoft YaHei" charset="0"/>
-                        <a:ea typeface="Microsoft YaHei" charset="0"/>
-                        <a:cs typeface="Microsoft YaHei" charset="0"/>
-                      </a:endParaRPr>
-                    </a:p>
-                  </a:txBody>
-                  <a:tcPr marL="91440" marR="91440" marT="45720" marB="45720" anchor="ctr">
-                    <a:lnL w="6350" cap="flat" cmpd="sng" algn="ctr">
-                      <a:solidFill>
-                        <a:srgbClr val="D8DBE0"/>
-                      </a:solidFill>
-                      <a:prstDash val="solid"/>
-                      <a:round/>
-                      <a:headEnd type="none" w="med" len="med"/>
-                      <a:tailEnd type="none" w="med" len="med"/>
-                    </a:lnL>
-                    <a:lnR w="6350" cap="flat" cmpd="sng" algn="ctr">
-                      <a:solidFill>
-                        <a:srgbClr val="D8DBE0"/>
-                      </a:solidFill>
-                      <a:prstDash val="solid"/>
-                      <a:round/>
-                      <a:headEnd type="none" w="med" len="med"/>
-                      <a:tailEnd type="none" w="med" len="med"/>
-                    </a:lnR>
-                    <a:lnT w="6350" cap="flat" cmpd="sng" algn="ctr">
-                      <a:solidFill>
-                        <a:srgbClr val="D8DBE0"/>
-                      </a:solidFill>
-                      <a:prstDash val="solid"/>
-                      <a:round/>
-                      <a:headEnd type="none" w="med" len="med"/>
-                      <a:tailEnd type="none" w="med" len="med"/>
-                    </a:lnT>
-                    <a:lnB w="6350" cap="flat" cmpd="sng" algn="ctr">
-                      <a:solidFill>
-                        <a:srgbClr val="D8DBE0"/>
-                      </a:solidFill>
-                      <a:prstDash val="solid"/>
-                      <a:round/>
-                      <a:headEnd type="none" w="med" len="med"/>
-                      <a:tailEnd type="none" w="med" len="med"/>
-                    </a:lnB>
-                    <a:solidFill>
-                      <a:srgbClr val="EEF1F5"/>
-                    </a:solidFill>
-                  </a:tcPr>
-                </a:tc>
-                <a:tc>
-                  <a:txBody>
-                    <a:bodyPr/>
-                    <a:lstStyle/>
-                    <a:p>
-                      <a:pPr indent="0" marL="0">
-                        <a:buNone/>
-                      </a:pPr>
-                      <a:r>
-                        <a:rPr lang="en-US" sz="1300" b="1" dirty="0">
-                          <a:solidFill>
-                            <a:srgbClr val="1A1A1A"/>
-                          </a:solidFill>
-                          <a:latin typeface="Microsoft YaHei" pitchFamily="34" charset="0"/>
-                          <a:ea typeface="Microsoft YaHei" pitchFamily="34" charset="-122"/>
-                          <a:cs typeface="Microsoft YaHei" pitchFamily="34" charset="-120"/>
-                        </a:rPr>
-                        <a:t>合并检出率</a:t>
-                      </a:r>
-                      <a:endParaRPr lang="en-US" sz="1300" dirty="0">
-                        <a:latin typeface="Microsoft YaHei" charset="0"/>
-                        <a:ea typeface="Microsoft YaHei" charset="0"/>
-                        <a:cs typeface="Microsoft YaHei" charset="0"/>
-                      </a:endParaRPr>
-                    </a:p>
-                  </a:txBody>
-                  <a:tcPr marL="91440" marR="91440" marT="45720" marB="45720" anchor="ctr">
-                    <a:lnL w="6350" cap="flat" cmpd="sng" algn="ctr">
-                      <a:solidFill>
-                        <a:srgbClr val="D8DBE0"/>
-                      </a:solidFill>
-                      <a:prstDash val="solid"/>
-                      <a:round/>
-                      <a:headEnd type="none" w="med" len="med"/>
-                      <a:tailEnd type="none" w="med" len="med"/>
-                    </a:lnL>
-                    <a:lnR w="6350" cap="flat" cmpd="sng" algn="ctr">
-                      <a:solidFill>
-                        <a:srgbClr val="D8DBE0"/>
-                      </a:solidFill>
-                      <a:prstDash val="solid"/>
-                      <a:round/>
-                      <a:headEnd type="none" w="med" len="med"/>
-                      <a:tailEnd type="none" w="med" len="med"/>
-                    </a:lnR>
-                    <a:lnT w="6350" cap="flat" cmpd="sng" algn="ctr">
-                      <a:solidFill>
-                        <a:srgbClr val="D8DBE0"/>
-                      </a:solidFill>
-                      <a:prstDash val="solid"/>
-                      <a:round/>
-                      <a:headEnd type="none" w="med" len="med"/>
-                      <a:tailEnd type="none" w="med" len="med"/>
-                    </a:lnT>
-                    <a:lnB w="6350" cap="flat" cmpd="sng" algn="ctr">
-                      <a:solidFill>
-                        <a:srgbClr val="D8DBE0"/>
-                      </a:solidFill>
-                      <a:prstDash val="solid"/>
-                      <a:round/>
-                      <a:headEnd type="none" w="med" len="med"/>
-                      <a:tailEnd type="none" w="med" len="med"/>
-                    </a:lnB>
-                    <a:solidFill>
-                      <a:srgbClr val="EEF1F5"/>
-                    </a:solidFill>
-                  </a:tcPr>
-                </a:tc>
-                <a:tc>
-                  <a:txBody>
-                    <a:bodyPr/>
-                    <a:lstStyle/>
-                    <a:p>
-                      <a:pPr indent="0" marL="0">
-                        <a:buNone/>
-                      </a:pPr>
-                      <a:r>
-                        <a:rPr lang="en-US" sz="1300" b="1" dirty="0">
-                          <a:solidFill>
-                            <a:srgbClr val="1A1A1A"/>
-                          </a:solidFill>
-                          <a:latin typeface="Microsoft YaHei" pitchFamily="34" charset="0"/>
-                          <a:ea typeface="Microsoft YaHei" pitchFamily="34" charset="-122"/>
-                          <a:cs typeface="Microsoft YaHei" pitchFamily="34" charset="-120"/>
-                        </a:rPr>
-                        <a:t>供体中位数</a:t>
-                      </a:r>
-                      <a:endParaRPr lang="en-US" sz="1300" dirty="0">
-                        <a:latin typeface="Microsoft YaHei" charset="0"/>
-                        <a:ea typeface="Microsoft YaHei" charset="0"/>
-                        <a:cs typeface="Microsoft YaHei" charset="0"/>
-                      </a:endParaRPr>
-                    </a:p>
-                  </a:txBody>
-                  <a:tcPr marL="91440" marR="91440" marT="45720" marB="45720" anchor="ctr">
-                    <a:lnL w="6350" cap="flat" cmpd="sng" algn="ctr">
-                      <a:solidFill>
-                        <a:srgbClr val="D8DBE0"/>
-                      </a:solidFill>
-                      <a:prstDash val="solid"/>
-                      <a:round/>
-                      <a:headEnd type="none" w="med" len="med"/>
-                      <a:tailEnd type="none" w="med" len="med"/>
-                    </a:lnL>
-                    <a:lnR w="6350" cap="flat" cmpd="sng" algn="ctr">
-                      <a:solidFill>
-                        <a:srgbClr val="D8DBE0"/>
-                      </a:solidFill>
-                      <a:prstDash val="solid"/>
-                      <a:round/>
-                      <a:headEnd type="none" w="med" len="med"/>
-                      <a:tailEnd type="none" w="med" len="med"/>
-                    </a:lnR>
-                    <a:lnT w="6350" cap="flat" cmpd="sng" algn="ctr">
-                      <a:solidFill>
-                        <a:srgbClr val="D8DBE0"/>
-                      </a:solidFill>
-                      <a:prstDash val="solid"/>
-                      <a:round/>
-                      <a:headEnd type="none" w="med" len="med"/>
-                      <a:tailEnd type="none" w="med" len="med"/>
-                    </a:lnT>
-                    <a:lnB w="6350" cap="flat" cmpd="sng" algn="ctr">
-                      <a:solidFill>
-                        <a:srgbClr val="D8DBE0"/>
-                      </a:solidFill>
-                      <a:prstDash val="solid"/>
-                      <a:round/>
-                      <a:headEnd type="none" w="med" len="med"/>
-                      <a:tailEnd type="none" w="med" len="med"/>
-                    </a:lnB>
-                    <a:solidFill>
-                      <a:srgbClr val="EEF1F5"/>
-                    </a:solidFill>
-                  </a:tcPr>
-                </a:tc>
-                <a:tc>
-                  <a:txBody>
-                    <a:bodyPr/>
-                    <a:lstStyle/>
-                    <a:p>
-                      <a:pPr indent="0" marL="0">
-                        <a:buNone/>
-                      </a:pPr>
-                      <a:r>
-                        <a:rPr lang="en-US" sz="1300" b="1" dirty="0">
-                          <a:solidFill>
-                            <a:srgbClr val="1A1A1A"/>
-                          </a:solidFill>
-                          <a:latin typeface="Microsoft YaHei" pitchFamily="34" charset="0"/>
-                          <a:ea typeface="Microsoft YaHei" pitchFamily="34" charset="-122"/>
-                          <a:cs typeface="Microsoft YaHei" pitchFamily="34" charset="-120"/>
-                        </a:rPr>
-                        <a:t>有阳性的供体</a:t>
-                      </a:r>
-                      <a:endParaRPr lang="en-US" sz="1300" dirty="0">
-                        <a:latin typeface="Microsoft YaHei" charset="0"/>
-                        <a:ea typeface="Microsoft YaHei" charset="0"/>
-                        <a:cs typeface="Microsoft YaHei" charset="0"/>
-                      </a:endParaRPr>
-                    </a:p>
-                  </a:txBody>
-                  <a:tcPr marL="91440" marR="91440" marT="45720" marB="45720" anchor="ctr">
-                    <a:lnL w="6350" cap="flat" cmpd="sng" algn="ctr">
-                      <a:solidFill>
-                        <a:srgbClr val="D8DBE0"/>
-                      </a:solidFill>
-                      <a:prstDash val="solid"/>
-                      <a:round/>
-                      <a:headEnd type="none" w="med" len="med"/>
-                      <a:tailEnd type="none" w="med" len="med"/>
-                    </a:lnL>
-                    <a:lnR w="6350" cap="flat" cmpd="sng" algn="ctr">
-                      <a:solidFill>
-                        <a:srgbClr val="D8DBE0"/>
-                      </a:solidFill>
-                      <a:prstDash val="solid"/>
-                      <a:round/>
-                      <a:headEnd type="none" w="med" len="med"/>
-                      <a:tailEnd type="none" w="med" len="med"/>
-                    </a:lnR>
-                    <a:lnT w="6350" cap="flat" cmpd="sng" algn="ctr">
-                      <a:solidFill>
-                        <a:srgbClr val="D8DBE0"/>
-                      </a:solidFill>
-                      <a:prstDash val="solid"/>
-                      <a:round/>
-                      <a:headEnd type="none" w="med" len="med"/>
-                      <a:tailEnd type="none" w="med" len="med"/>
-                    </a:lnT>
-                    <a:lnB w="6350" cap="flat" cmpd="sng" algn="ctr">
-                      <a:solidFill>
-                        <a:srgbClr val="D8DBE0"/>
-                      </a:solidFill>
-                      <a:prstDash val="solid"/>
-                      <a:round/>
-                      <a:headEnd type="none" w="med" len="med"/>
-                      <a:tailEnd type="none" w="med" len="med"/>
-                    </a:lnB>
-                    <a:solidFill>
-                      <a:srgbClr val="EEF1F5"/>
-                    </a:solidFill>
-                  </a:tcPr>
-                </a:tc>
-              </a:tr>
-              <a:tr h="384048">
-                <a:tc>
-                  <a:txBody>
-                    <a:bodyPr/>
-                    <a:lstStyle/>
-                    <a:p>
-                      <a:pPr indent="0" marL="0">
-                        <a:buNone/>
-                      </a:pPr>
-                      <a:r>
-                        <a:rPr lang="en-US" sz="1300" dirty="0">
-                          <a:solidFill>
-                            <a:srgbClr val="1A1A1A"/>
-                          </a:solidFill>
-                          <a:latin typeface="Microsoft YaHei" pitchFamily="34" charset="0"/>
-                          <a:ea typeface="Microsoft YaHei" pitchFamily="34" charset="-122"/>
-                          <a:cs typeface="Microsoft YaHei" pitchFamily="34" charset="-120"/>
-                        </a:rPr>
-                        <a:t>人·肺 肥大细胞</a:t>
-                      </a:r>
-                      <a:endParaRPr lang="en-US" sz="1300" dirty="0">
-                        <a:latin typeface="Microsoft YaHei" charset="0"/>
-                        <a:ea typeface="Microsoft YaHei" charset="0"/>
-                        <a:cs typeface="Microsoft YaHei" charset="0"/>
-                      </a:endParaRPr>
-                    </a:p>
-                  </a:txBody>
-                  <a:tcPr marL="91440" marR="91440" marT="45720" marB="45720" anchor="ctr">
-                    <a:lnL w="6350" cap="flat" cmpd="sng" algn="ctr">
-                      <a:solidFill>
-                        <a:srgbClr val="D8DBE0"/>
-                      </a:solidFill>
-                      <a:prstDash val="solid"/>
-                      <a:round/>
-                      <a:headEnd type="none" w="med" len="med"/>
-                      <a:tailEnd type="none" w="med" len="med"/>
-                    </a:lnL>
-                    <a:lnR w="6350" cap="flat" cmpd="sng" algn="ctr">
-                      <a:solidFill>
-                        <a:srgbClr val="D8DBE0"/>
-                      </a:solidFill>
-                      <a:prstDash val="solid"/>
-                      <a:round/>
-                      <a:headEnd type="none" w="med" len="med"/>
-                      <a:tailEnd type="none" w="med" len="med"/>
-                    </a:lnR>
-                    <a:lnT w="6350" cap="flat" cmpd="sng" algn="ctr">
-                      <a:solidFill>
-                        <a:srgbClr val="D8DBE0"/>
-                      </a:solidFill>
-                      <a:prstDash val="solid"/>
-                      <a:round/>
-                      <a:headEnd type="none" w="med" len="med"/>
-                      <a:tailEnd type="none" w="med" len="med"/>
-                    </a:lnT>
-                    <a:lnB w="6350" cap="flat" cmpd="sng" algn="ctr">
-                      <a:solidFill>
-                        <a:srgbClr val="D8DBE0"/>
-                      </a:solidFill>
-                      <a:prstDash val="solid"/>
-                      <a:round/>
-                      <a:headEnd type="none" w="med" len="med"/>
-                      <a:tailEnd type="none" w="med" len="med"/>
-                    </a:lnB>
-                  </a:tcPr>
-                </a:tc>
-                <a:tc>
-                  <a:txBody>
-                    <a:bodyPr/>
-                    <a:lstStyle/>
-                    <a:p>
-                      <a:pPr indent="0" marL="0">
-                        <a:buNone/>
-                      </a:pPr>
-                      <a:r>
-                        <a:rPr lang="en-US" sz="1300" dirty="0">
-                          <a:solidFill>
-                            <a:srgbClr val="1A1A1A"/>
-                          </a:solidFill>
-                          <a:latin typeface="Microsoft YaHei" pitchFamily="34" charset="0"/>
-                          <a:ea typeface="Microsoft YaHei" pitchFamily="34" charset="-122"/>
-                          <a:cs typeface="Microsoft YaHei" pitchFamily="34" charset="-120"/>
-                        </a:rPr>
-                        <a:t>138 / 5299</a:t>
-                      </a:r>
-                      <a:endParaRPr lang="en-US" sz="1300" dirty="0">
-                        <a:latin typeface="Microsoft YaHei" charset="0"/>
-                        <a:ea typeface="Microsoft YaHei" charset="0"/>
-                        <a:cs typeface="Microsoft YaHei" charset="0"/>
-                      </a:endParaRPr>
-                    </a:p>
-                  </a:txBody>
-                  <a:tcPr marL="91440" marR="91440" marT="45720" marB="45720" anchor="ctr">
-                    <a:lnL w="6350" cap="flat" cmpd="sng" algn="ctr">
-                      <a:solidFill>
-                        <a:srgbClr val="D8DBE0"/>
-                      </a:solidFill>
-                      <a:prstDash val="solid"/>
-                      <a:round/>
-                      <a:headEnd type="none" w="med" len="med"/>
-                      <a:tailEnd type="none" w="med" len="med"/>
-                    </a:lnL>
-                    <a:lnR w="6350" cap="flat" cmpd="sng" algn="ctr">
-                      <a:solidFill>
-                        <a:srgbClr val="D8DBE0"/>
-                      </a:solidFill>
-                      <a:prstDash val="solid"/>
-                      <a:round/>
-                      <a:headEnd type="none" w="med" len="med"/>
-                      <a:tailEnd type="none" w="med" len="med"/>
-                    </a:lnR>
-                    <a:lnT w="6350" cap="flat" cmpd="sng" algn="ctr">
-                      <a:solidFill>
-                        <a:srgbClr val="D8DBE0"/>
-                      </a:solidFill>
-                      <a:prstDash val="solid"/>
-                      <a:round/>
-                      <a:headEnd type="none" w="med" len="med"/>
-                      <a:tailEnd type="none" w="med" len="med"/>
-                    </a:lnT>
-                    <a:lnB w="6350" cap="flat" cmpd="sng" algn="ctr">
-                      <a:solidFill>
-                        <a:srgbClr val="D8DBE0"/>
-                      </a:solidFill>
-                      <a:prstDash val="solid"/>
-                      <a:round/>
-                      <a:headEnd type="none" w="med" len="med"/>
-                      <a:tailEnd type="none" w="med" len="med"/>
-                    </a:lnB>
-                  </a:tcPr>
-                </a:tc>
-                <a:tc>
-                  <a:txBody>
-                    <a:bodyPr/>
-                    <a:lstStyle/>
-                    <a:p>
-                      <a:pPr indent="0" marL="0">
-                        <a:buNone/>
-                      </a:pPr>
-                      <a:r>
-                        <a:rPr lang="en-US" sz="1300" dirty="0">
-                          <a:solidFill>
-                            <a:srgbClr val="1A1A1A"/>
-                          </a:solidFill>
-                          <a:latin typeface="Microsoft YaHei" pitchFamily="34" charset="0"/>
-                          <a:ea typeface="Microsoft YaHei" pitchFamily="34" charset="-122"/>
-                          <a:cs typeface="Microsoft YaHei" pitchFamily="34" charset="-120"/>
-                        </a:rPr>
-                        <a:t>2.6%</a:t>
-                      </a:r>
-                      <a:endParaRPr lang="en-US" sz="1300" dirty="0">
-                        <a:latin typeface="Microsoft YaHei" charset="0"/>
-                        <a:ea typeface="Microsoft YaHei" charset="0"/>
-                        <a:cs typeface="Microsoft YaHei" charset="0"/>
-                      </a:endParaRPr>
-                    </a:p>
-                  </a:txBody>
-                  <a:tcPr marL="91440" marR="91440" marT="45720" marB="45720" anchor="ctr">
-                    <a:lnL w="6350" cap="flat" cmpd="sng" algn="ctr">
-                      <a:solidFill>
-                        <a:srgbClr val="D8DBE0"/>
-                      </a:solidFill>
-                      <a:prstDash val="solid"/>
-                      <a:round/>
-                      <a:headEnd type="none" w="med" len="med"/>
-                      <a:tailEnd type="none" w="med" len="med"/>
-                    </a:lnL>
-                    <a:lnR w="6350" cap="flat" cmpd="sng" algn="ctr">
-                      <a:solidFill>
-                        <a:srgbClr val="D8DBE0"/>
-                      </a:solidFill>
-                      <a:prstDash val="solid"/>
-                      <a:round/>
-                      <a:headEnd type="none" w="med" len="med"/>
-                      <a:tailEnd type="none" w="med" len="med"/>
-                    </a:lnR>
-                    <a:lnT w="6350" cap="flat" cmpd="sng" algn="ctr">
-                      <a:solidFill>
-                        <a:srgbClr val="D8DBE0"/>
-                      </a:solidFill>
-                      <a:prstDash val="solid"/>
-                      <a:round/>
-                      <a:headEnd type="none" w="med" len="med"/>
-                      <a:tailEnd type="none" w="med" len="med"/>
-                    </a:lnT>
-                    <a:lnB w="6350" cap="flat" cmpd="sng" algn="ctr">
-                      <a:solidFill>
-                        <a:srgbClr val="D8DBE0"/>
-                      </a:solidFill>
-                      <a:prstDash val="solid"/>
-                      <a:round/>
-                      <a:headEnd type="none" w="med" len="med"/>
-                      <a:tailEnd type="none" w="med" len="med"/>
-                    </a:lnB>
-                  </a:tcPr>
-                </a:tc>
-                <a:tc>
-                  <a:txBody>
-                    <a:bodyPr/>
-                    <a:lstStyle/>
-                    <a:p>
-                      <a:pPr indent="0" marL="0">
-                        <a:buNone/>
-                      </a:pPr>
-                      <a:r>
-                        <a:rPr lang="en-US" sz="1300" dirty="0">
-                          <a:solidFill>
-                            <a:srgbClr val="1A1A1A"/>
-                          </a:solidFill>
-                          <a:latin typeface="Microsoft YaHei" pitchFamily="34" charset="0"/>
-                          <a:ea typeface="Microsoft YaHei" pitchFamily="34" charset="-122"/>
-                          <a:cs typeface="Microsoft YaHei" pitchFamily="34" charset="-120"/>
-                        </a:rPr>
-                        <a:t>0.00%</a:t>
-                      </a:r>
-                      <a:endParaRPr lang="en-US" sz="1300" dirty="0">
-                        <a:latin typeface="Microsoft YaHei" charset="0"/>
-                        <a:ea typeface="Microsoft YaHei" charset="0"/>
-                        <a:cs typeface="Microsoft YaHei" charset="0"/>
-                      </a:endParaRPr>
-                    </a:p>
-                  </a:txBody>
-                  <a:tcPr marL="91440" marR="91440" marT="45720" marB="45720" anchor="ctr">
-                    <a:lnL w="6350" cap="flat" cmpd="sng" algn="ctr">
-                      <a:solidFill>
-                        <a:srgbClr val="D8DBE0"/>
-                      </a:solidFill>
-                      <a:prstDash val="solid"/>
-                      <a:round/>
-                      <a:headEnd type="none" w="med" len="med"/>
-                      <a:tailEnd type="none" w="med" len="med"/>
-                    </a:lnL>
-                    <a:lnR w="6350" cap="flat" cmpd="sng" algn="ctr">
-                      <a:solidFill>
-                        <a:srgbClr val="D8DBE0"/>
-                      </a:solidFill>
-                      <a:prstDash val="solid"/>
-                      <a:round/>
-                      <a:headEnd type="none" w="med" len="med"/>
-                      <a:tailEnd type="none" w="med" len="med"/>
-                    </a:lnR>
-                    <a:lnT w="6350" cap="flat" cmpd="sng" algn="ctr">
-                      <a:solidFill>
-                        <a:srgbClr val="D8DBE0"/>
-                      </a:solidFill>
-                      <a:prstDash val="solid"/>
-                      <a:round/>
-                      <a:headEnd type="none" w="med" len="med"/>
-                      <a:tailEnd type="none" w="med" len="med"/>
-                    </a:lnT>
-                    <a:lnB w="6350" cap="flat" cmpd="sng" algn="ctr">
-                      <a:solidFill>
-                        <a:srgbClr val="D8DBE0"/>
-                      </a:solidFill>
-                      <a:prstDash val="solid"/>
-                      <a:round/>
-                      <a:headEnd type="none" w="med" len="med"/>
-                      <a:tailEnd type="none" w="med" len="med"/>
-                    </a:lnB>
-                  </a:tcPr>
-                </a:tc>
-                <a:tc>
-                  <a:txBody>
-                    <a:bodyPr/>
-                    <a:lstStyle/>
-                    <a:p>
-                      <a:pPr indent="0" marL="0">
-                        <a:buNone/>
-                      </a:pPr>
-                      <a:r>
-                        <a:rPr lang="en-US" sz="1300" dirty="0">
-                          <a:solidFill>
-                            <a:srgbClr val="1A1A1A"/>
-                          </a:solidFill>
-                          <a:latin typeface="Microsoft YaHei" pitchFamily="34" charset="0"/>
-                          <a:ea typeface="Microsoft YaHei" pitchFamily="34" charset="-122"/>
-                          <a:cs typeface="Microsoft YaHei" pitchFamily="34" charset="-120"/>
-                        </a:rPr>
-                        <a:t>21 / 44</a:t>
-                      </a:r>
-                      <a:endParaRPr lang="en-US" sz="1300" dirty="0">
-                        <a:latin typeface="Microsoft YaHei" charset="0"/>
-                        <a:ea typeface="Microsoft YaHei" charset="0"/>
-                        <a:cs typeface="Microsoft YaHei" charset="0"/>
-                      </a:endParaRPr>
-                    </a:p>
-                  </a:txBody>
-                  <a:tcPr marL="91440" marR="91440" marT="45720" marB="45720" anchor="ctr">
-                    <a:lnL w="6350" cap="flat" cmpd="sng" algn="ctr">
-                      <a:solidFill>
-                        <a:srgbClr val="D8DBE0"/>
-                      </a:solidFill>
-                      <a:prstDash val="solid"/>
-                      <a:round/>
-                      <a:headEnd type="none" w="med" len="med"/>
-                      <a:tailEnd type="none" w="med" len="med"/>
-                    </a:lnL>
-                    <a:lnR w="6350" cap="flat" cmpd="sng" algn="ctr">
-                      <a:solidFill>
-                        <a:srgbClr val="D8DBE0"/>
-                      </a:solidFill>
-                      <a:prstDash val="solid"/>
-                      <a:round/>
-                      <a:headEnd type="none" w="med" len="med"/>
-                      <a:tailEnd type="none" w="med" len="med"/>
-                    </a:lnR>
-                    <a:lnT w="6350" cap="flat" cmpd="sng" algn="ctr">
-                      <a:solidFill>
-                        <a:srgbClr val="D8DBE0"/>
-                      </a:solidFill>
-                      <a:prstDash val="solid"/>
-                      <a:round/>
-                      <a:headEnd type="none" w="med" len="med"/>
-                      <a:tailEnd type="none" w="med" len="med"/>
-                    </a:lnT>
-                    <a:lnB w="6350" cap="flat" cmpd="sng" algn="ctr">
-                      <a:solidFill>
-                        <a:srgbClr val="D8DBE0"/>
-                      </a:solidFill>
-                      <a:prstDash val="solid"/>
-                      <a:round/>
-                      <a:headEnd type="none" w="med" len="med"/>
-                      <a:tailEnd type="none" w="med" len="med"/>
-                    </a:lnB>
-                  </a:tcPr>
-                </a:tc>
-              </a:tr>
-              <a:tr h="384048">
-                <a:tc>
-                  <a:txBody>
-                    <a:bodyPr/>
-                    <a:lstStyle/>
-                    <a:p>
-                      <a:pPr indent="0" marL="0">
-                        <a:buNone/>
-                      </a:pPr>
-                      <a:r>
-                        <a:rPr lang="en-US" sz="1300" dirty="0">
-                          <a:solidFill>
-                            <a:srgbClr val="1A1A1A"/>
-                          </a:solidFill>
-                          <a:latin typeface="Microsoft YaHei" pitchFamily="34" charset="0"/>
-                          <a:ea typeface="Microsoft YaHei" pitchFamily="34" charset="-122"/>
-                          <a:cs typeface="Microsoft YaHei" pitchFamily="34" charset="-120"/>
-                        </a:rPr>
-                        <a:t>小鼠·脑 小胶质/CNS巨噬</a:t>
-                      </a:r>
-                      <a:endParaRPr lang="en-US" sz="1300" dirty="0">
-                        <a:latin typeface="Microsoft YaHei" charset="0"/>
-                        <a:ea typeface="Microsoft YaHei" charset="0"/>
-                        <a:cs typeface="Microsoft YaHei" charset="0"/>
-                      </a:endParaRPr>
-                    </a:p>
-                  </a:txBody>
-                  <a:tcPr marL="91440" marR="91440" marT="45720" marB="45720" anchor="ctr">
-                    <a:lnL w="6350" cap="flat" cmpd="sng" algn="ctr">
-                      <a:solidFill>
-                        <a:srgbClr val="D8DBE0"/>
-                      </a:solidFill>
-                      <a:prstDash val="solid"/>
-                      <a:round/>
-                      <a:headEnd type="none" w="med" len="med"/>
-                      <a:tailEnd type="none" w="med" len="med"/>
-                    </a:lnL>
-                    <a:lnR w="6350" cap="flat" cmpd="sng" algn="ctr">
-                      <a:solidFill>
-                        <a:srgbClr val="D8DBE0"/>
-                      </a:solidFill>
-                      <a:prstDash val="solid"/>
-                      <a:round/>
-                      <a:headEnd type="none" w="med" len="med"/>
-                      <a:tailEnd type="none" w="med" len="med"/>
-                    </a:lnR>
-                    <a:lnT w="6350" cap="flat" cmpd="sng" algn="ctr">
-                      <a:solidFill>
-                        <a:srgbClr val="D8DBE0"/>
-                      </a:solidFill>
-                      <a:prstDash val="solid"/>
-                      <a:round/>
-                      <a:headEnd type="none" w="med" len="med"/>
-                      <a:tailEnd type="none" w="med" len="med"/>
-                    </a:lnT>
-                    <a:lnB w="6350" cap="flat" cmpd="sng" algn="ctr">
-                      <a:solidFill>
-                        <a:srgbClr val="D8DBE0"/>
-                      </a:solidFill>
-                      <a:prstDash val="solid"/>
-                      <a:round/>
-                      <a:headEnd type="none" w="med" len="med"/>
-                      <a:tailEnd type="none" w="med" len="med"/>
-                    </a:lnB>
-                  </a:tcPr>
-                </a:tc>
-                <a:tc>
-                  <a:txBody>
-                    <a:bodyPr/>
-                    <a:lstStyle/>
-                    <a:p>
-                      <a:pPr indent="0" marL="0">
-                        <a:buNone/>
-                      </a:pPr>
-                      <a:r>
-                        <a:rPr lang="en-US" sz="1300" dirty="0">
-                          <a:solidFill>
-                            <a:srgbClr val="1A1A1A"/>
-                          </a:solidFill>
-                          <a:latin typeface="Microsoft YaHei" pitchFamily="34" charset="0"/>
-                          <a:ea typeface="Microsoft YaHei" pitchFamily="34" charset="-122"/>
-                          <a:cs typeface="Microsoft YaHei" pitchFamily="34" charset="-120"/>
-                        </a:rPr>
-                        <a:t>15 / 818</a:t>
-                      </a:r>
-                      <a:endParaRPr lang="en-US" sz="1300" dirty="0">
-                        <a:latin typeface="Microsoft YaHei" charset="0"/>
-                        <a:ea typeface="Microsoft YaHei" charset="0"/>
-                        <a:cs typeface="Microsoft YaHei" charset="0"/>
-                      </a:endParaRPr>
-                    </a:p>
-                  </a:txBody>
-                  <a:tcPr marL="91440" marR="91440" marT="45720" marB="45720" anchor="ctr">
-                    <a:lnL w="6350" cap="flat" cmpd="sng" algn="ctr">
-                      <a:solidFill>
-                        <a:srgbClr val="D8DBE0"/>
-                      </a:solidFill>
-                      <a:prstDash val="solid"/>
-                      <a:round/>
-                      <a:headEnd type="none" w="med" len="med"/>
-                      <a:tailEnd type="none" w="med" len="med"/>
-                    </a:lnL>
-                    <a:lnR w="6350" cap="flat" cmpd="sng" algn="ctr">
-                      <a:solidFill>
-                        <a:srgbClr val="D8DBE0"/>
-                      </a:solidFill>
-                      <a:prstDash val="solid"/>
-                      <a:round/>
-                      <a:headEnd type="none" w="med" len="med"/>
-                      <a:tailEnd type="none" w="med" len="med"/>
-                    </a:lnR>
-                    <a:lnT w="6350" cap="flat" cmpd="sng" algn="ctr">
-                      <a:solidFill>
-                        <a:srgbClr val="D8DBE0"/>
-                      </a:solidFill>
-                      <a:prstDash val="solid"/>
-                      <a:round/>
-                      <a:headEnd type="none" w="med" len="med"/>
-                      <a:tailEnd type="none" w="med" len="med"/>
-                    </a:lnT>
-                    <a:lnB w="6350" cap="flat" cmpd="sng" algn="ctr">
-                      <a:solidFill>
-                        <a:srgbClr val="D8DBE0"/>
-                      </a:solidFill>
-                      <a:prstDash val="solid"/>
-                      <a:round/>
-                      <a:headEnd type="none" w="med" len="med"/>
-                      <a:tailEnd type="none" w="med" len="med"/>
-                    </a:lnB>
-                  </a:tcPr>
-                </a:tc>
-                <a:tc>
-                  <a:txBody>
-                    <a:bodyPr/>
-                    <a:lstStyle/>
-                    <a:p>
-                      <a:pPr indent="0" marL="0">
-                        <a:buNone/>
-                      </a:pPr>
-                      <a:r>
-                        <a:rPr lang="en-US" sz="1300" dirty="0">
-                          <a:solidFill>
-                            <a:srgbClr val="1A1A1A"/>
-                          </a:solidFill>
-                          <a:latin typeface="Microsoft YaHei" pitchFamily="34" charset="0"/>
-                          <a:ea typeface="Microsoft YaHei" pitchFamily="34" charset="-122"/>
-                          <a:cs typeface="Microsoft YaHei" pitchFamily="34" charset="-120"/>
-                        </a:rPr>
-                        <a:t>1.8%</a:t>
-                      </a:r>
-                      <a:endParaRPr lang="en-US" sz="1300" dirty="0">
-                        <a:latin typeface="Microsoft YaHei" charset="0"/>
-                        <a:ea typeface="Microsoft YaHei" charset="0"/>
-                        <a:cs typeface="Microsoft YaHei" charset="0"/>
-                      </a:endParaRPr>
-                    </a:p>
-                  </a:txBody>
-                  <a:tcPr marL="91440" marR="91440" marT="45720" marB="45720" anchor="ctr">
-                    <a:lnL w="6350" cap="flat" cmpd="sng" algn="ctr">
-                      <a:solidFill>
-                        <a:srgbClr val="D8DBE0"/>
-                      </a:solidFill>
-                      <a:prstDash val="solid"/>
-                      <a:round/>
-                      <a:headEnd type="none" w="med" len="med"/>
-                      <a:tailEnd type="none" w="med" len="med"/>
-                    </a:lnL>
-                    <a:lnR w="6350" cap="flat" cmpd="sng" algn="ctr">
-                      <a:solidFill>
-                        <a:srgbClr val="D8DBE0"/>
-                      </a:solidFill>
-                      <a:prstDash val="solid"/>
-                      <a:round/>
-                      <a:headEnd type="none" w="med" len="med"/>
-                      <a:tailEnd type="none" w="med" len="med"/>
-                    </a:lnR>
-                    <a:lnT w="6350" cap="flat" cmpd="sng" algn="ctr">
-                      <a:solidFill>
-                        <a:srgbClr val="D8DBE0"/>
-                      </a:solidFill>
-                      <a:prstDash val="solid"/>
-                      <a:round/>
-                      <a:headEnd type="none" w="med" len="med"/>
-                      <a:tailEnd type="none" w="med" len="med"/>
-                    </a:lnT>
-                    <a:lnB w="6350" cap="flat" cmpd="sng" algn="ctr">
-                      <a:solidFill>
-                        <a:srgbClr val="D8DBE0"/>
-                      </a:solidFill>
-                      <a:prstDash val="solid"/>
-                      <a:round/>
-                      <a:headEnd type="none" w="med" len="med"/>
-                      <a:tailEnd type="none" w="med" len="med"/>
-                    </a:lnB>
-                  </a:tcPr>
-                </a:tc>
-                <a:tc>
-                  <a:txBody>
-                    <a:bodyPr/>
-                    <a:lstStyle/>
-                    <a:p>
-                      <a:pPr indent="0" marL="0">
-                        <a:buNone/>
-                      </a:pPr>
-                      <a:r>
-                        <a:rPr lang="en-US" sz="1300" dirty="0">
-                          <a:solidFill>
-                            <a:srgbClr val="1A1A1A"/>
-                          </a:solidFill>
-                          <a:latin typeface="Microsoft YaHei" pitchFamily="34" charset="0"/>
-                          <a:ea typeface="Microsoft YaHei" pitchFamily="34" charset="-122"/>
-                          <a:cs typeface="Microsoft YaHei" pitchFamily="34" charset="-120"/>
-                        </a:rPr>
-                        <a:t>0.00%</a:t>
-                      </a:r>
-                      <a:endParaRPr lang="en-US" sz="1300" dirty="0">
-                        <a:latin typeface="Microsoft YaHei" charset="0"/>
-                        <a:ea typeface="Microsoft YaHei" charset="0"/>
-                        <a:cs typeface="Microsoft YaHei" charset="0"/>
-                      </a:endParaRPr>
-                    </a:p>
-                  </a:txBody>
-                  <a:tcPr marL="91440" marR="91440" marT="45720" marB="45720" anchor="ctr">
-                    <a:lnL w="6350" cap="flat" cmpd="sng" algn="ctr">
-                      <a:solidFill>
-                        <a:srgbClr val="D8DBE0"/>
-                      </a:solidFill>
-                      <a:prstDash val="solid"/>
-                      <a:round/>
-                      <a:headEnd type="none" w="med" len="med"/>
-                      <a:tailEnd type="none" w="med" len="med"/>
-                    </a:lnL>
-                    <a:lnR w="6350" cap="flat" cmpd="sng" algn="ctr">
-                      <a:solidFill>
-                        <a:srgbClr val="D8DBE0"/>
-                      </a:solidFill>
-                      <a:prstDash val="solid"/>
-                      <a:round/>
-                      <a:headEnd type="none" w="med" len="med"/>
-                      <a:tailEnd type="none" w="med" len="med"/>
-                    </a:lnR>
-                    <a:lnT w="6350" cap="flat" cmpd="sng" algn="ctr">
-                      <a:solidFill>
-                        <a:srgbClr val="D8DBE0"/>
-                      </a:solidFill>
-                      <a:prstDash val="solid"/>
-                      <a:round/>
-                      <a:headEnd type="none" w="med" len="med"/>
-                      <a:tailEnd type="none" w="med" len="med"/>
-                    </a:lnT>
-                    <a:lnB w="6350" cap="flat" cmpd="sng" algn="ctr">
-                      <a:solidFill>
-                        <a:srgbClr val="D8DBE0"/>
-                      </a:solidFill>
-                      <a:prstDash val="solid"/>
-                      <a:round/>
-                      <a:headEnd type="none" w="med" len="med"/>
-                      <a:tailEnd type="none" w="med" len="med"/>
-                    </a:lnB>
-                  </a:tcPr>
-                </a:tc>
-                <a:tc>
-                  <a:txBody>
-                    <a:bodyPr/>
-                    <a:lstStyle/>
-                    <a:p>
-                      <a:pPr indent="0" marL="0">
-                        <a:buNone/>
-                      </a:pPr>
-                      <a:r>
-                        <a:rPr lang="en-US" sz="1300" dirty="0">
-                          <a:solidFill>
-                            <a:srgbClr val="1A1A1A"/>
-                          </a:solidFill>
-                          <a:latin typeface="Microsoft YaHei" pitchFamily="34" charset="0"/>
-                          <a:ea typeface="Microsoft YaHei" pitchFamily="34" charset="-122"/>
-                          <a:cs typeface="Microsoft YaHei" pitchFamily="34" charset="-120"/>
-                        </a:rPr>
-                        <a:t>4 / 20</a:t>
-                      </a:r>
-                      <a:endParaRPr lang="en-US" sz="1300" dirty="0">
-                        <a:latin typeface="Microsoft YaHei" charset="0"/>
-                        <a:ea typeface="Microsoft YaHei" charset="0"/>
-                        <a:cs typeface="Microsoft YaHei" charset="0"/>
-                      </a:endParaRPr>
-                    </a:p>
-                  </a:txBody>
-                  <a:tcPr marL="91440" marR="91440" marT="45720" marB="45720" anchor="ctr">
-                    <a:lnL w="6350" cap="flat" cmpd="sng" algn="ctr">
-                      <a:solidFill>
-                        <a:srgbClr val="D8DBE0"/>
-                      </a:solidFill>
-                      <a:prstDash val="solid"/>
-                      <a:round/>
-                      <a:headEnd type="none" w="med" len="med"/>
-                      <a:tailEnd type="none" w="med" len="med"/>
-                    </a:lnL>
-                    <a:lnR w="6350" cap="flat" cmpd="sng" algn="ctr">
-                      <a:solidFill>
-                        <a:srgbClr val="D8DBE0"/>
-                      </a:solidFill>
-                      <a:prstDash val="solid"/>
-                      <a:round/>
-                      <a:headEnd type="none" w="med" len="med"/>
-                      <a:tailEnd type="none" w="med" len="med"/>
-                    </a:lnR>
-                    <a:lnT w="6350" cap="flat" cmpd="sng" algn="ctr">
-                      <a:solidFill>
-                        <a:srgbClr val="D8DBE0"/>
-                      </a:solidFill>
-                      <a:prstDash val="solid"/>
-                      <a:round/>
-                      <a:headEnd type="none" w="med" len="med"/>
-                      <a:tailEnd type="none" w="med" len="med"/>
-                    </a:lnT>
-                    <a:lnB w="6350" cap="flat" cmpd="sng" algn="ctr">
-                      <a:solidFill>
-                        <a:srgbClr val="D8DBE0"/>
-                      </a:solidFill>
-                      <a:prstDash val="solid"/>
-                      <a:round/>
-                      <a:headEnd type="none" w="med" len="med"/>
-                      <a:tailEnd type="none" w="med" len="med"/>
-                    </a:lnB>
-                  </a:tcPr>
-                </a:tc>
-              </a:tr>
-              <a:tr h="384048">
-                <a:tc>
-                  <a:txBody>
-                    <a:bodyPr/>
-                    <a:lstStyle/>
-                    <a:p>
-                      <a:pPr indent="0" marL="0">
-                        <a:buNone/>
-                      </a:pPr>
-                      <a:r>
-                        <a:rPr lang="en-US" sz="1300" dirty="0">
-                          <a:solidFill>
-                            <a:srgbClr val="1A1A1A"/>
-                          </a:solidFill>
-                          <a:latin typeface="Microsoft YaHei" pitchFamily="34" charset="0"/>
-                          <a:ea typeface="Microsoft YaHei" pitchFamily="34" charset="-122"/>
-                          <a:cs typeface="Microsoft YaHei" pitchFamily="34" charset="-120"/>
-                        </a:rPr>
-                        <a:t>小鼠·胰 胰导管细胞</a:t>
-                      </a:r>
-                      <a:endParaRPr lang="en-US" sz="1300" dirty="0">
-                        <a:latin typeface="Microsoft YaHei" charset="0"/>
-                        <a:ea typeface="Microsoft YaHei" charset="0"/>
-                        <a:cs typeface="Microsoft YaHei" charset="0"/>
-                      </a:endParaRPr>
-                    </a:p>
-                  </a:txBody>
-                  <a:tcPr marL="91440" marR="91440" marT="45720" marB="45720" anchor="ctr">
-                    <a:lnL w="6350" cap="flat" cmpd="sng" algn="ctr">
-                      <a:solidFill>
-                        <a:srgbClr val="D8DBE0"/>
-                      </a:solidFill>
-                      <a:prstDash val="solid"/>
-                      <a:round/>
-                      <a:headEnd type="none" w="med" len="med"/>
-                      <a:tailEnd type="none" w="med" len="med"/>
-                    </a:lnL>
-                    <a:lnR w="6350" cap="flat" cmpd="sng" algn="ctr">
-                      <a:solidFill>
-                        <a:srgbClr val="D8DBE0"/>
-                      </a:solidFill>
-                      <a:prstDash val="solid"/>
-                      <a:round/>
-                      <a:headEnd type="none" w="med" len="med"/>
-                      <a:tailEnd type="none" w="med" len="med"/>
-                    </a:lnR>
-                    <a:lnT w="6350" cap="flat" cmpd="sng" algn="ctr">
-                      <a:solidFill>
-                        <a:srgbClr val="D8DBE0"/>
-                      </a:solidFill>
-                      <a:prstDash val="solid"/>
-                      <a:round/>
-                      <a:headEnd type="none" w="med" len="med"/>
-                      <a:tailEnd type="none" w="med" len="med"/>
-                    </a:lnT>
-                    <a:lnB w="6350" cap="flat" cmpd="sng" algn="ctr">
-                      <a:solidFill>
-                        <a:srgbClr val="D8DBE0"/>
-                      </a:solidFill>
-                      <a:prstDash val="solid"/>
-                      <a:round/>
-                      <a:headEnd type="none" w="med" len="med"/>
-                      <a:tailEnd type="none" w="med" len="med"/>
-                    </a:lnB>
-                  </a:tcPr>
-                </a:tc>
-                <a:tc>
-                  <a:txBody>
-                    <a:bodyPr/>
-                    <a:lstStyle/>
-                    <a:p>
-                      <a:pPr indent="0" marL="0">
-                        <a:buNone/>
-                      </a:pPr>
-                      <a:r>
-                        <a:rPr lang="en-US" sz="1300" dirty="0">
-                          <a:solidFill>
-                            <a:srgbClr val="1A1A1A"/>
-                          </a:solidFill>
-                          <a:latin typeface="Microsoft YaHei" pitchFamily="34" charset="0"/>
-                          <a:ea typeface="Microsoft YaHei" pitchFamily="34" charset="-122"/>
-                          <a:cs typeface="Microsoft YaHei" pitchFamily="34" charset="-120"/>
-                        </a:rPr>
-                        <a:t>2 / 1947</a:t>
-                      </a:r>
-                      <a:endParaRPr lang="en-US" sz="1300" dirty="0">
-                        <a:latin typeface="Microsoft YaHei" charset="0"/>
-                        <a:ea typeface="Microsoft YaHei" charset="0"/>
-                        <a:cs typeface="Microsoft YaHei" charset="0"/>
-                      </a:endParaRPr>
-                    </a:p>
-                  </a:txBody>
-                  <a:tcPr marL="91440" marR="91440" marT="45720" marB="45720" anchor="ctr">
-                    <a:lnL w="6350" cap="flat" cmpd="sng" algn="ctr">
-                      <a:solidFill>
-                        <a:srgbClr val="D8DBE0"/>
-                      </a:solidFill>
-                      <a:prstDash val="solid"/>
-                      <a:round/>
-                      <a:headEnd type="none" w="med" len="med"/>
-                      <a:tailEnd type="none" w="med" len="med"/>
-                    </a:lnL>
-                    <a:lnR w="6350" cap="flat" cmpd="sng" algn="ctr">
-                      <a:solidFill>
-                        <a:srgbClr val="D8DBE0"/>
-                      </a:solidFill>
-                      <a:prstDash val="solid"/>
-                      <a:round/>
-                      <a:headEnd type="none" w="med" len="med"/>
-                      <a:tailEnd type="none" w="med" len="med"/>
-                    </a:lnR>
-                    <a:lnT w="6350" cap="flat" cmpd="sng" algn="ctr">
-                      <a:solidFill>
-                        <a:srgbClr val="D8DBE0"/>
-                      </a:solidFill>
-                      <a:prstDash val="solid"/>
-                      <a:round/>
-                      <a:headEnd type="none" w="med" len="med"/>
-                      <a:tailEnd type="none" w="med" len="med"/>
-                    </a:lnT>
-                    <a:lnB w="6350" cap="flat" cmpd="sng" algn="ctr">
-                      <a:solidFill>
-                        <a:srgbClr val="D8DBE0"/>
-                      </a:solidFill>
-                      <a:prstDash val="solid"/>
-                      <a:round/>
-                      <a:headEnd type="none" w="med" len="med"/>
-                      <a:tailEnd type="none" w="med" len="med"/>
-                    </a:lnB>
-                  </a:tcPr>
-                </a:tc>
-                <a:tc>
-                  <a:txBody>
-                    <a:bodyPr/>
-                    <a:lstStyle/>
-                    <a:p>
-                      <a:pPr indent="0" marL="0">
-                        <a:buNone/>
-                      </a:pPr>
-                      <a:r>
-                        <a:rPr lang="en-US" sz="1300" dirty="0">
-                          <a:solidFill>
-                            <a:srgbClr val="1A1A1A"/>
-                          </a:solidFill>
-                          <a:latin typeface="Microsoft YaHei" pitchFamily="34" charset="0"/>
-                          <a:ea typeface="Microsoft YaHei" pitchFamily="34" charset="-122"/>
-                          <a:cs typeface="Microsoft YaHei" pitchFamily="34" charset="-120"/>
-                        </a:rPr>
-                        <a:t>0.10%</a:t>
-                      </a:r>
-                      <a:endParaRPr lang="en-US" sz="1300" dirty="0">
-                        <a:latin typeface="Microsoft YaHei" charset="0"/>
-                        <a:ea typeface="Microsoft YaHei" charset="0"/>
-                        <a:cs typeface="Microsoft YaHei" charset="0"/>
-                      </a:endParaRPr>
-                    </a:p>
-                  </a:txBody>
-                  <a:tcPr marL="91440" marR="91440" marT="45720" marB="45720" anchor="ctr">
-                    <a:lnL w="6350" cap="flat" cmpd="sng" algn="ctr">
-                      <a:solidFill>
-                        <a:srgbClr val="D8DBE0"/>
-                      </a:solidFill>
-                      <a:prstDash val="solid"/>
-                      <a:round/>
-                      <a:headEnd type="none" w="med" len="med"/>
-                      <a:tailEnd type="none" w="med" len="med"/>
-                    </a:lnL>
-                    <a:lnR w="6350" cap="flat" cmpd="sng" algn="ctr">
-                      <a:solidFill>
-                        <a:srgbClr val="D8DBE0"/>
-                      </a:solidFill>
-                      <a:prstDash val="solid"/>
-                      <a:round/>
-                      <a:headEnd type="none" w="med" len="med"/>
-                      <a:tailEnd type="none" w="med" len="med"/>
-                    </a:lnR>
-                    <a:lnT w="6350" cap="flat" cmpd="sng" algn="ctr">
-                      <a:solidFill>
-                        <a:srgbClr val="D8DBE0"/>
-                      </a:solidFill>
-                      <a:prstDash val="solid"/>
-                      <a:round/>
-                      <a:headEnd type="none" w="med" len="med"/>
-                      <a:tailEnd type="none" w="med" len="med"/>
-                    </a:lnT>
-                    <a:lnB w="6350" cap="flat" cmpd="sng" algn="ctr">
-                      <a:solidFill>
-                        <a:srgbClr val="D8DBE0"/>
-                      </a:solidFill>
-                      <a:prstDash val="solid"/>
-                      <a:round/>
-                      <a:headEnd type="none" w="med" len="med"/>
-                      <a:tailEnd type="none" w="med" len="med"/>
-                    </a:lnB>
-                  </a:tcPr>
-                </a:tc>
-                <a:tc>
-                  <a:txBody>
-                    <a:bodyPr/>
-                    <a:lstStyle/>
-                    <a:p>
-                      <a:pPr indent="0" marL="0">
-                        <a:buNone/>
-                      </a:pPr>
-                      <a:r>
-                        <a:rPr lang="en-US" sz="1300" dirty="0">
-                          <a:solidFill>
-                            <a:srgbClr val="1A1A1A"/>
-                          </a:solidFill>
-                          <a:latin typeface="Microsoft YaHei" pitchFamily="34" charset="0"/>
-                          <a:ea typeface="Microsoft YaHei" pitchFamily="34" charset="-122"/>
-                          <a:cs typeface="Microsoft YaHei" pitchFamily="34" charset="-120"/>
-                        </a:rPr>
-                        <a:t>0.00%</a:t>
-                      </a:r>
-                      <a:endParaRPr lang="en-US" sz="1300" dirty="0">
-                        <a:latin typeface="Microsoft YaHei" charset="0"/>
-                        <a:ea typeface="Microsoft YaHei" charset="0"/>
-                        <a:cs typeface="Microsoft YaHei" charset="0"/>
-                      </a:endParaRPr>
-                    </a:p>
-                  </a:txBody>
-                  <a:tcPr marL="91440" marR="91440" marT="45720" marB="45720" anchor="ctr">
-                    <a:lnL w="6350" cap="flat" cmpd="sng" algn="ctr">
-                      <a:solidFill>
-                        <a:srgbClr val="D8DBE0"/>
-                      </a:solidFill>
-                      <a:prstDash val="solid"/>
-                      <a:round/>
-                      <a:headEnd type="none" w="med" len="med"/>
-                      <a:tailEnd type="none" w="med" len="med"/>
-                    </a:lnL>
-                    <a:lnR w="6350" cap="flat" cmpd="sng" algn="ctr">
-                      <a:solidFill>
-                        <a:srgbClr val="D8DBE0"/>
-                      </a:solidFill>
-                      <a:prstDash val="solid"/>
-                      <a:round/>
-                      <a:headEnd type="none" w="med" len="med"/>
-                      <a:tailEnd type="none" w="med" len="med"/>
-                    </a:lnR>
-                    <a:lnT w="6350" cap="flat" cmpd="sng" algn="ctr">
-                      <a:solidFill>
-                        <a:srgbClr val="D8DBE0"/>
-                      </a:solidFill>
-                      <a:prstDash val="solid"/>
-                      <a:round/>
-                      <a:headEnd type="none" w="med" len="med"/>
-                      <a:tailEnd type="none" w="med" len="med"/>
-                    </a:lnT>
-                    <a:lnB w="6350" cap="flat" cmpd="sng" algn="ctr">
-                      <a:solidFill>
-                        <a:srgbClr val="D8DBE0"/>
-                      </a:solidFill>
-                      <a:prstDash val="solid"/>
-                      <a:round/>
-                      <a:headEnd type="none" w="med" len="med"/>
-                      <a:tailEnd type="none" w="med" len="med"/>
-                    </a:lnB>
-                  </a:tcPr>
-                </a:tc>
-                <a:tc>
-                  <a:txBody>
-                    <a:bodyPr/>
-                    <a:lstStyle/>
-                    <a:p>
-                      <a:pPr indent="0" marL="0">
-                        <a:buNone/>
-                      </a:pPr>
-                      <a:r>
-                        <a:rPr lang="en-US" sz="1300" dirty="0">
-                          <a:solidFill>
-                            <a:srgbClr val="1A1A1A"/>
-                          </a:solidFill>
-                          <a:latin typeface="Microsoft YaHei" pitchFamily="34" charset="0"/>
-                          <a:ea typeface="Microsoft YaHei" pitchFamily="34" charset="-122"/>
-                          <a:cs typeface="Microsoft YaHei" pitchFamily="34" charset="-120"/>
-                        </a:rPr>
-                        <a:t>2 / 9</a:t>
-                      </a:r>
-                      <a:endParaRPr lang="en-US" sz="1300" dirty="0">
-                        <a:latin typeface="Microsoft YaHei" charset="0"/>
-                        <a:ea typeface="Microsoft YaHei" charset="0"/>
-                        <a:cs typeface="Microsoft YaHei" charset="0"/>
-                      </a:endParaRPr>
-                    </a:p>
-                  </a:txBody>
-                  <a:tcPr marL="91440" marR="91440" marT="45720" marB="45720" anchor="ctr">
-                    <a:lnL w="6350" cap="flat" cmpd="sng" algn="ctr">
-                      <a:solidFill>
-                        <a:srgbClr val="D8DBE0"/>
-                      </a:solidFill>
-                      <a:prstDash val="solid"/>
-                      <a:round/>
-                      <a:headEnd type="none" w="med" len="med"/>
-                      <a:tailEnd type="none" w="med" len="med"/>
-                    </a:lnL>
-                    <a:lnR w="6350" cap="flat" cmpd="sng" algn="ctr">
-                      <a:solidFill>
-                        <a:srgbClr val="D8DBE0"/>
-                      </a:solidFill>
-                      <a:prstDash val="solid"/>
-                      <a:round/>
-                      <a:headEnd type="none" w="med" len="med"/>
-                      <a:tailEnd type="none" w="med" len="med"/>
-                    </a:lnR>
-                    <a:lnT w="6350" cap="flat" cmpd="sng" algn="ctr">
-                      <a:solidFill>
-                        <a:srgbClr val="D8DBE0"/>
-                      </a:solidFill>
-                      <a:prstDash val="solid"/>
-                      <a:round/>
-                      <a:headEnd type="none" w="med" len="med"/>
-                      <a:tailEnd type="none" w="med" len="med"/>
-                    </a:lnT>
-                    <a:lnB w="6350" cap="flat" cmpd="sng" algn="ctr">
-                      <a:solidFill>
-                        <a:srgbClr val="D8DBE0"/>
-                      </a:solidFill>
-                      <a:prstDash val="solid"/>
-                      <a:round/>
-                      <a:headEnd type="none" w="med" len="med"/>
-                      <a:tailEnd type="none" w="med" len="med"/>
-                    </a:lnB>
-                  </a:tcPr>
-                </a:tc>
-              </a:tr>
-              <a:tr h="384048">
-                <a:tc>
-                  <a:txBody>
-                    <a:bodyPr/>
-                    <a:lstStyle/>
-                    <a:p>
-                      <a:pPr indent="0" marL="0">
-                        <a:buNone/>
-                      </a:pPr>
-                      <a:r>
-                        <a:rPr lang="en-US" sz="1300" dirty="0">
-                          <a:solidFill>
-                            <a:srgbClr val="1A1A1A"/>
-                          </a:solidFill>
-                          <a:latin typeface="Microsoft YaHei" pitchFamily="34" charset="0"/>
-                          <a:ea typeface="Microsoft YaHei" pitchFamily="34" charset="-122"/>
-                          <a:cs typeface="Microsoft YaHei" pitchFamily="34" charset="-120"/>
-                        </a:rPr>
-                        <a:t>小鼠·脑 少突胶质</a:t>
-                      </a:r>
-                      <a:endParaRPr lang="en-US" sz="1300" dirty="0">
-                        <a:latin typeface="Microsoft YaHei" charset="0"/>
-                        <a:ea typeface="Microsoft YaHei" charset="0"/>
-                        <a:cs typeface="Microsoft YaHei" charset="0"/>
-                      </a:endParaRPr>
-                    </a:p>
-                  </a:txBody>
-                  <a:tcPr marL="91440" marR="91440" marT="45720" marB="45720" anchor="ctr">
-                    <a:lnL w="6350" cap="flat" cmpd="sng" algn="ctr">
-                      <a:solidFill>
-                        <a:srgbClr val="D8DBE0"/>
-                      </a:solidFill>
-                      <a:prstDash val="solid"/>
-                      <a:round/>
-                      <a:headEnd type="none" w="med" len="med"/>
-                      <a:tailEnd type="none" w="med" len="med"/>
-                    </a:lnL>
-                    <a:lnR w="6350" cap="flat" cmpd="sng" algn="ctr">
-                      <a:solidFill>
-                        <a:srgbClr val="D8DBE0"/>
-                      </a:solidFill>
-                      <a:prstDash val="solid"/>
-                      <a:round/>
-                      <a:headEnd type="none" w="med" len="med"/>
-                      <a:tailEnd type="none" w="med" len="med"/>
-                    </a:lnR>
-                    <a:lnT w="6350" cap="flat" cmpd="sng" algn="ctr">
-                      <a:solidFill>
-                        <a:srgbClr val="D8DBE0"/>
-                      </a:solidFill>
-                      <a:prstDash val="solid"/>
-                      <a:round/>
-                      <a:headEnd type="none" w="med" len="med"/>
-                      <a:tailEnd type="none" w="med" len="med"/>
-                    </a:lnT>
-                    <a:lnB w="6350" cap="flat" cmpd="sng" algn="ctr">
-                      <a:solidFill>
-                        <a:srgbClr val="D8DBE0"/>
-                      </a:solidFill>
-                      <a:prstDash val="solid"/>
-                      <a:round/>
-                      <a:headEnd type="none" w="med" len="med"/>
-                      <a:tailEnd type="none" w="med" len="med"/>
-                    </a:lnB>
-                  </a:tcPr>
-                </a:tc>
-                <a:tc>
-                  <a:txBody>
-                    <a:bodyPr/>
-                    <a:lstStyle/>
-                    <a:p>
-                      <a:pPr indent="0" marL="0">
-                        <a:buNone/>
-                      </a:pPr>
-                      <a:r>
-                        <a:rPr lang="en-US" sz="1300" dirty="0">
-                          <a:solidFill>
-                            <a:srgbClr val="1A1A1A"/>
-                          </a:solidFill>
-                          <a:latin typeface="Microsoft YaHei" pitchFamily="34" charset="0"/>
-                          <a:ea typeface="Microsoft YaHei" pitchFamily="34" charset="-122"/>
-                          <a:cs typeface="Microsoft YaHei" pitchFamily="34" charset="-120"/>
-                        </a:rPr>
-                        <a:t>2 / 8987</a:t>
-                      </a:r>
-                      <a:endParaRPr lang="en-US" sz="1300" dirty="0">
-                        <a:latin typeface="Microsoft YaHei" charset="0"/>
-                        <a:ea typeface="Microsoft YaHei" charset="0"/>
-                        <a:cs typeface="Microsoft YaHei" charset="0"/>
-                      </a:endParaRPr>
-                    </a:p>
-                  </a:txBody>
-                  <a:tcPr marL="91440" marR="91440" marT="45720" marB="45720" anchor="ctr">
-                    <a:lnL w="6350" cap="flat" cmpd="sng" algn="ctr">
-                      <a:solidFill>
-                        <a:srgbClr val="D8DBE0"/>
-                      </a:solidFill>
-                      <a:prstDash val="solid"/>
-                      <a:round/>
-                      <a:headEnd type="none" w="med" len="med"/>
-                      <a:tailEnd type="none" w="med" len="med"/>
-                    </a:lnL>
-                    <a:lnR w="6350" cap="flat" cmpd="sng" algn="ctr">
-                      <a:solidFill>
-                        <a:srgbClr val="D8DBE0"/>
-                      </a:solidFill>
-                      <a:prstDash val="solid"/>
-                      <a:round/>
-                      <a:headEnd type="none" w="med" len="med"/>
-                      <a:tailEnd type="none" w="med" len="med"/>
-                    </a:lnR>
-                    <a:lnT w="6350" cap="flat" cmpd="sng" algn="ctr">
-                      <a:solidFill>
-                        <a:srgbClr val="D8DBE0"/>
-                      </a:solidFill>
-                      <a:prstDash val="solid"/>
-                      <a:round/>
-                      <a:headEnd type="none" w="med" len="med"/>
-                      <a:tailEnd type="none" w="med" len="med"/>
-                    </a:lnT>
-                    <a:lnB w="6350" cap="flat" cmpd="sng" algn="ctr">
-                      <a:solidFill>
-                        <a:srgbClr val="D8DBE0"/>
-                      </a:solidFill>
-                      <a:prstDash val="solid"/>
-                      <a:round/>
-                      <a:headEnd type="none" w="med" len="med"/>
-                      <a:tailEnd type="none" w="med" len="med"/>
-                    </a:lnB>
-                  </a:tcPr>
-                </a:tc>
-                <a:tc>
-                  <a:txBody>
-                    <a:bodyPr/>
-                    <a:lstStyle/>
-                    <a:p>
-                      <a:pPr indent="0" marL="0">
-                        <a:buNone/>
-                      </a:pPr>
-                      <a:r>
-                        <a:rPr lang="en-US" sz="1300" dirty="0">
-                          <a:solidFill>
-                            <a:srgbClr val="1A1A1A"/>
-                          </a:solidFill>
-                          <a:latin typeface="Microsoft YaHei" pitchFamily="34" charset="0"/>
-                          <a:ea typeface="Microsoft YaHei" pitchFamily="34" charset="-122"/>
-                          <a:cs typeface="Microsoft YaHei" pitchFamily="34" charset="-120"/>
-                        </a:rPr>
-                        <a:t>0.02%</a:t>
-                      </a:r>
-                      <a:endParaRPr lang="en-US" sz="1300" dirty="0">
-                        <a:latin typeface="Microsoft YaHei" charset="0"/>
-                        <a:ea typeface="Microsoft YaHei" charset="0"/>
-                        <a:cs typeface="Microsoft YaHei" charset="0"/>
-                      </a:endParaRPr>
-                    </a:p>
-                  </a:txBody>
-                  <a:tcPr marL="91440" marR="91440" marT="45720" marB="45720" anchor="ctr">
-                    <a:lnL w="6350" cap="flat" cmpd="sng" algn="ctr">
-                      <a:solidFill>
-                        <a:srgbClr val="D8DBE0"/>
-                      </a:solidFill>
-                      <a:prstDash val="solid"/>
-                      <a:round/>
-                      <a:headEnd type="none" w="med" len="med"/>
-                      <a:tailEnd type="none" w="med" len="med"/>
-                    </a:lnL>
-                    <a:lnR w="6350" cap="flat" cmpd="sng" algn="ctr">
-                      <a:solidFill>
-                        <a:srgbClr val="D8DBE0"/>
-                      </a:solidFill>
-                      <a:prstDash val="solid"/>
-                      <a:round/>
-                      <a:headEnd type="none" w="med" len="med"/>
-                      <a:tailEnd type="none" w="med" len="med"/>
-                    </a:lnR>
-                    <a:lnT w="6350" cap="flat" cmpd="sng" algn="ctr">
-                      <a:solidFill>
-                        <a:srgbClr val="D8DBE0"/>
-                      </a:solidFill>
-                      <a:prstDash val="solid"/>
-                      <a:round/>
-                      <a:headEnd type="none" w="med" len="med"/>
-                      <a:tailEnd type="none" w="med" len="med"/>
-                    </a:lnT>
-                    <a:lnB w="6350" cap="flat" cmpd="sng" algn="ctr">
-                      <a:solidFill>
-                        <a:srgbClr val="D8DBE0"/>
-                      </a:solidFill>
-                      <a:prstDash val="solid"/>
-                      <a:round/>
-                      <a:headEnd type="none" w="med" len="med"/>
-                      <a:tailEnd type="none" w="med" len="med"/>
-                    </a:lnB>
-                  </a:tcPr>
-                </a:tc>
-                <a:tc>
-                  <a:txBody>
-                    <a:bodyPr/>
-                    <a:lstStyle/>
-                    <a:p>
-                      <a:pPr indent="0" marL="0">
-                        <a:buNone/>
-                      </a:pPr>
-                      <a:r>
-                        <a:rPr lang="en-US" sz="1300" dirty="0">
-                          <a:solidFill>
-                            <a:srgbClr val="1A1A1A"/>
-                          </a:solidFill>
-                          <a:latin typeface="Microsoft YaHei" pitchFamily="34" charset="0"/>
-                          <a:ea typeface="Microsoft YaHei" pitchFamily="34" charset="-122"/>
-                          <a:cs typeface="Microsoft YaHei" pitchFamily="34" charset="-120"/>
-                        </a:rPr>
-                        <a:t>0.00%</a:t>
-                      </a:r>
-                      <a:endParaRPr lang="en-US" sz="1300" dirty="0">
-                        <a:latin typeface="Microsoft YaHei" charset="0"/>
-                        <a:ea typeface="Microsoft YaHei" charset="0"/>
-                        <a:cs typeface="Microsoft YaHei" charset="0"/>
-                      </a:endParaRPr>
-                    </a:p>
-                  </a:txBody>
-                  <a:tcPr marL="91440" marR="91440" marT="45720" marB="45720" anchor="ctr">
-                    <a:lnL w="6350" cap="flat" cmpd="sng" algn="ctr">
-                      <a:solidFill>
-                        <a:srgbClr val="D8DBE0"/>
-                      </a:solidFill>
-                      <a:prstDash val="solid"/>
-                      <a:round/>
-                      <a:headEnd type="none" w="med" len="med"/>
-                      <a:tailEnd type="none" w="med" len="med"/>
-                    </a:lnL>
-                    <a:lnR w="6350" cap="flat" cmpd="sng" algn="ctr">
-                      <a:solidFill>
-                        <a:srgbClr val="D8DBE0"/>
-                      </a:solidFill>
-                      <a:prstDash val="solid"/>
-                      <a:round/>
-                      <a:headEnd type="none" w="med" len="med"/>
-                      <a:tailEnd type="none" w="med" len="med"/>
-                    </a:lnR>
-                    <a:lnT w="6350" cap="flat" cmpd="sng" algn="ctr">
-                      <a:solidFill>
-                        <a:srgbClr val="D8DBE0"/>
-                      </a:solidFill>
-                      <a:prstDash val="solid"/>
-                      <a:round/>
-                      <a:headEnd type="none" w="med" len="med"/>
-                      <a:tailEnd type="none" w="med" len="med"/>
-                    </a:lnT>
-                    <a:lnB w="6350" cap="flat" cmpd="sng" algn="ctr">
-                      <a:solidFill>
-                        <a:srgbClr val="D8DBE0"/>
-                      </a:solidFill>
-                      <a:prstDash val="solid"/>
-                      <a:round/>
-                      <a:headEnd type="none" w="med" len="med"/>
-                      <a:tailEnd type="none" w="med" len="med"/>
-                    </a:lnB>
-                  </a:tcPr>
-                </a:tc>
-                <a:tc>
-                  <a:txBody>
-                    <a:bodyPr/>
-                    <a:lstStyle/>
-                    <a:p>
-                      <a:pPr indent="0" marL="0">
-                        <a:buNone/>
-                      </a:pPr>
-                      <a:r>
-                        <a:rPr lang="en-US" sz="1300" dirty="0">
-                          <a:solidFill>
-                            <a:srgbClr val="1A1A1A"/>
-                          </a:solidFill>
-                          <a:latin typeface="Microsoft YaHei" pitchFamily="34" charset="0"/>
-                          <a:ea typeface="Microsoft YaHei" pitchFamily="34" charset="-122"/>
-                          <a:cs typeface="Microsoft YaHei" pitchFamily="34" charset="-120"/>
-                        </a:rPr>
-                        <a:t>2 / 55</a:t>
-                      </a:r>
-                      <a:endParaRPr lang="en-US" sz="1300" dirty="0">
-                        <a:latin typeface="Microsoft YaHei" charset="0"/>
-                        <a:ea typeface="Microsoft YaHei" charset="0"/>
-                        <a:cs typeface="Microsoft YaHei" charset="0"/>
-                      </a:endParaRPr>
-                    </a:p>
-                  </a:txBody>
-                  <a:tcPr marL="91440" marR="91440" marT="45720" marB="45720" anchor="ctr">
-                    <a:lnL w="6350" cap="flat" cmpd="sng" algn="ctr">
-                      <a:solidFill>
-                        <a:srgbClr val="D8DBE0"/>
-                      </a:solidFill>
-                      <a:prstDash val="solid"/>
-                      <a:round/>
-                      <a:headEnd type="none" w="med" len="med"/>
-                      <a:tailEnd type="none" w="med" len="med"/>
-                    </a:lnL>
-                    <a:lnR w="6350" cap="flat" cmpd="sng" algn="ctr">
-                      <a:solidFill>
-                        <a:srgbClr val="D8DBE0"/>
-                      </a:solidFill>
-                      <a:prstDash val="solid"/>
-                      <a:round/>
-                      <a:headEnd type="none" w="med" len="med"/>
-                      <a:tailEnd type="none" w="med" len="med"/>
-                    </a:lnR>
-                    <a:lnT w="6350" cap="flat" cmpd="sng" algn="ctr">
-                      <a:solidFill>
-                        <a:srgbClr val="D8DBE0"/>
-                      </a:solidFill>
-                      <a:prstDash val="solid"/>
-                      <a:round/>
-                      <a:headEnd type="none" w="med" len="med"/>
-                      <a:tailEnd type="none" w="med" len="med"/>
-                    </a:lnT>
-                    <a:lnB w="6350" cap="flat" cmpd="sng" algn="ctr">
-                      <a:solidFill>
-                        <a:srgbClr val="D8DBE0"/>
-                      </a:solidFill>
-                      <a:prstDash val="solid"/>
-                      <a:round/>
-                      <a:headEnd type="none" w="med" len="med"/>
-                      <a:tailEnd type="none" w="med" len="med"/>
-                    </a:lnB>
-                  </a:tcPr>
-                </a:tc>
-              </a:tr>
-            </a:tbl>
-          </a:graphicData>
-        </a:graphic>
-      </p:graphicFrame>
-      <p:sp>
-        <p:nvSpPr>
-          <p:cNvPr id="5" name="Text 2"/>
-          <p:cNvSpPr txBox="1"/>
-          <p:nvPr/>
-        </p:nvSpPr>
-        <p:spPr>
-          <a:xfrm>
-            <a:off x="731520" y="4846320"/>
-            <a:ext cx="10698480" cy="822960"/>
-          </a:xfrm>
-          <a:prstGeom prst="rect">
-            <a:avLst/>
-          </a:prstGeom>
-          <a:noFill/>
-          <a:ln/>
-        </p:spPr>
-        <p:txBody>
-          <a:bodyPr wrap="square" rtlCol="0" anchor="ctr"/>
-          <a:lstStyle/>
-          <a:p>
-            <a:pPr indent="0" marL="0">
-              <a:lnSpc>
-                <a:spcPct val="120000"/>
-              </a:lnSpc>
-              <a:buNone/>
-            </a:pPr>
-            <a:r>
-              <a:rPr lang="en-US" sz="1400" dirty="0">
-                <a:solidFill>
-                  <a:srgbClr val="1A1A1A"/>
-                </a:solidFill>
-                <a:latin typeface="Microsoft YaHei" pitchFamily="34" charset="0"/>
-                <a:ea typeface="Microsoft YaHei" pitchFamily="34" charset="-122"/>
-                <a:cs typeface="Microsoft YaHei" pitchFamily="34" charset="-120"/>
-              </a:rPr>
-              <a:t>同样显示「0.0%」的两行，真实检出率相差一百倍以上：肥大细胞 2.60%（138 个阳性细胞、21/44 供体）是真有信号；少突胶质 0.02%（8987 个细胞里 2 个）才是在充分样本下的真·近零。</a:t>
-            </a:r>
-            <a:endParaRPr lang="en-US" sz="1400" dirty="0"/>
-          </a:p>
-        </p:txBody>
-      </p:sp>
-      <p:sp>
-        <p:nvSpPr>
-          <p:cNvPr id="6" name="Text 3"/>
+      </p:pic>
+      <p:sp>
+        <p:nvSpPr>
+          <p:cNvPr id="4" name="Text 1"/>
           <p:cNvSpPr txBox="1"/>
           <p:nvPr/>
         </p:nvSpPr>
@@ -4095,7 +2424,7 @@
                 <a:ea typeface="Microsoft YaHei" pitchFamily="34" charset="-122"/>
                 <a:cs typeface="Microsoft YaHei" pitchFamily="34" charset="-120"/>
               </a:rPr>
-              <a:t>分母 = 该细胞类型在该分层内、每位供体 ≥20 个细胞后进入分析的细胞总数；分子 = 其中原始计数 ≥1 的细胞数。不是表达量占比、不是相对最高值的百分比、不是读段占比。</a:t>
+              <a:t>人与小鼠分开绘制，不作跨物种定量比较。</a:t>
             </a:r>
             <a:endParaRPr lang="en-US" sz="1050" dirty="0"/>
           </a:p>
@@ -4134,7 +2463,7 @@
         </p:nvSpPr>
         <p:spPr>
           <a:xfrm>
-            <a:off x="640080" y="457200"/>
+            <a:off x="640080" y="411480"/>
             <a:ext cx="10972800" cy="640080"/>
           </a:xfrm>
           <a:prstGeom prst="rect">
@@ -4151,7 +2480,7 @@
               <a:buNone/>
             </a:pPr>
             <a:r>
-              <a:rPr lang="en-US" sz="2500" b="1" dirty="0">
+              <a:rPr lang="en-US" sz="2400" b="1" dirty="0">
                 <a:solidFill>
                   <a:srgbClr val="1A1A1A"/>
                 </a:solidFill>
@@ -4159,46 +2488,22 @@
                 <a:ea typeface="Microsoft YaHei" pitchFamily="34" charset="-122"/>
                 <a:cs typeface="Microsoft YaHei" pitchFamily="34" charset="-120"/>
               </a:rPr>
-              <a:t>小鼠脑（单细胞）：胶质 IL18 可检、CASP1 近乎测不到</a:t>
-            </a:r>
-            <a:endParaRPr lang="en-US" sz="2500" dirty="0"/>
-          </a:p>
-        </p:txBody>
-      </p:sp>
-      <p:pic>
-        <p:nvPicPr>
-          <p:cNvPr id="3" name="Image 0" descr="/home/user/aaa/il18_casp5organ/figures/mouse/brain_cell_dots.png">    </p:cNvPr>
-          <p:cNvPicPr>
-            <a:picLocks noChangeAspect="1"/>
-          </p:cNvPicPr>
+              <a:t>扩充数据后，四个此前无法回答的问题有了答案</a:t>
+            </a:r>
+            <a:endParaRPr lang="en-US" sz="2400" dirty="0"/>
+          </a:p>
+        </p:txBody>
+      </p:sp>
+      <p:sp>
+        <p:nvSpPr>
+          <p:cNvPr id="3" name="Text 1"/>
+          <p:cNvSpPr txBox="1"/>
           <p:nvPr/>
-        </p:nvPicPr>
-        <p:blipFill>
-          <a:blip r:embed="rId1"/>
-          <a:stretch>
-            <a:fillRect/>
-          </a:stretch>
-        </p:blipFill>
+        </p:nvSpPr>
         <p:spPr>
           <a:xfrm>
-            <a:off x="724454" y="1115568"/>
-            <a:ext cx="10740044" cy="5212080"/>
-          </a:xfrm>
-          <a:prstGeom prst="rect">
-            <a:avLst/>
-          </a:prstGeom>
-        </p:spPr>
-      </p:pic>
-      <p:sp>
-        <p:nvSpPr>
-          <p:cNvPr id="4" name="Text 1"/>
-          <p:cNvSpPr txBox="1"/>
-          <p:nvPr/>
-        </p:nvSpPr>
-        <p:spPr>
-          <a:xfrm>
-            <a:off x="640080" y="6355080"/>
-            <a:ext cx="10972800" cy="347472"/>
+            <a:off x="731520" y="1280160"/>
+            <a:ext cx="3200400" cy="1097280"/>
           </a:xfrm>
           <a:prstGeom prst="rect">
             <a:avLst/>
@@ -4207,14 +2512,59 @@
           <a:ln/>
         </p:spPr>
         <p:txBody>
-          <a:bodyPr wrap="square" rtlCol="0" anchor="ctr"/>
+          <a:bodyPr wrap="square" rtlCol="0" anchor="t"/>
           <a:lstStyle/>
           <a:p>
             <a:pPr indent="0" marL="0">
+              <a:lnSpc>
+                <a:spcPct val="115000"/>
+              </a:lnSpc>
               <a:buNone/>
             </a:pPr>
             <a:r>
-              <a:rPr lang="en-US" sz="1050" dirty="0">
+              <a:rPr lang="en-US" sz="1300" b="1" dirty="0">
+                <a:solidFill>
+                  <a:srgbClr val="1A1A1A"/>
+                </a:solidFill>
+                <a:latin typeface="Microsoft YaHei" pitchFamily="34" charset="0"/>
+                <a:ea typeface="Microsoft YaHei" pitchFamily="34" charset="-122"/>
+                <a:cs typeface="Microsoft YaHei" pitchFamily="34" charset="-120"/>
+              </a:rPr>
+              <a:t>人脑：IL18 高的是神经元，不是胶质</a:t>
+            </a:r>
+            <a:endParaRPr lang="en-US" sz="1300" dirty="0"/>
+          </a:p>
+        </p:txBody>
+      </p:sp>
+      <p:sp>
+        <p:nvSpPr>
+          <p:cNvPr id="4" name="Text 2"/>
+          <p:cNvSpPr txBox="1"/>
+          <p:nvPr/>
+        </p:nvSpPr>
+        <p:spPr>
+          <a:xfrm>
+            <a:off x="4114800" y="1280160"/>
+            <a:ext cx="7406640" cy="1143000"/>
+          </a:xfrm>
+          <a:prstGeom prst="rect">
+            <a:avLst/>
+          </a:prstGeom>
+          <a:noFill/>
+          <a:ln/>
+        </p:spPr>
+        <p:txBody>
+          <a:bodyPr wrap="square" rtlCol="0" anchor="t"/>
+          <a:lstStyle/>
+          <a:p>
+            <a:pPr indent="0" marL="0">
+              <a:lnSpc>
+                <a:spcPct val="120000"/>
+              </a:lnSpc>
+              <a:buNone/>
+            </a:pPr>
+            <a:r>
+              <a:rPr lang="en-US" sz="1200" dirty="0">
                 <a:solidFill>
                   <a:srgbClr val="6B6B6B"/>
                 </a:solidFill>
@@ -4222,9 +2572,261 @@
                 <a:ea typeface="Microsoft YaHei" pitchFamily="34" charset="-122"/>
                 <a:cs typeface="Microsoft YaHei" pitchFamily="34" charset="-120"/>
               </a:rPr>
-              <a:t>星形胶质 IL18 56.7% 而 CASP1 仅 2/3766；小胶质 IL18 20.5% 但 CASP1 15/818 = 1.83%，是全脑最高的一档。</a:t>
-            </a:r>
-            <a:endParaRPr lang="en-US" sz="1050" dirty="0"/>
+              <a:t>新增 Allen HVS（真单细胞 scRNA，78 供体）与 SEA-AD MTG / DLPFC、PsychAD（单核，46 / 44 / 261 供体）。PV 中间神经元与 L5 ET 投射神经元 IL18 检出 21–43%、CASP1 0.07–0.22%，在 3–4 套独立数据集重复。</a:t>
+            </a:r>
+            <a:endParaRPr lang="en-US" sz="1200" dirty="0"/>
+          </a:p>
+        </p:txBody>
+      </p:sp>
+      <p:sp>
+        <p:nvSpPr>
+          <p:cNvPr id="5" name="Text 3"/>
+          <p:cNvSpPr txBox="1"/>
+          <p:nvPr/>
+        </p:nvSpPr>
+        <p:spPr>
+          <a:xfrm>
+            <a:off x="731520" y="2496312"/>
+            <a:ext cx="3200400" cy="1097280"/>
+          </a:xfrm>
+          <a:prstGeom prst="rect">
+            <a:avLst/>
+          </a:prstGeom>
+          <a:noFill/>
+          <a:ln/>
+        </p:spPr>
+        <p:txBody>
+          <a:bodyPr wrap="square" rtlCol="0" anchor="t"/>
+          <a:lstStyle/>
+          <a:p>
+            <a:pPr indent="0" marL="0">
+              <a:lnSpc>
+                <a:spcPct val="115000"/>
+              </a:lnSpc>
+              <a:buNone/>
+            </a:pPr>
+            <a:r>
+              <a:rPr lang="en-US" sz="1300" b="1" dirty="0">
+                <a:solidFill>
+                  <a:srgbClr val="1A1A1A"/>
+                </a:solidFill>
+                <a:latin typeface="Microsoft YaHei" pitchFamily="34" charset="0"/>
+                <a:ea typeface="Microsoft YaHei" pitchFamily="34" charset="-122"/>
+                <a:cs typeface="Microsoft YaHei" pitchFamily="34" charset="-120"/>
+              </a:rPr>
+              <a:t>小鼠的胶质结论是真实物种差异，不是单核测序灵敏度问题</a:t>
+            </a:r>
+            <a:endParaRPr lang="en-US" sz="1300" dirty="0"/>
+          </a:p>
+        </p:txBody>
+      </p:sp>
+      <p:sp>
+        <p:nvSpPr>
+          <p:cNvPr id="6" name="Text 4"/>
+          <p:cNvSpPr txBox="1"/>
+          <p:nvPr/>
+        </p:nvSpPr>
+        <p:spPr>
+          <a:xfrm>
+            <a:off x="4114800" y="2496312"/>
+            <a:ext cx="7406640" cy="1143000"/>
+          </a:xfrm>
+          <a:prstGeom prst="rect">
+            <a:avLst/>
+          </a:prstGeom>
+          <a:noFill/>
+          <a:ln/>
+        </p:spPr>
+        <p:txBody>
+          <a:bodyPr wrap="square" rtlCol="0" anchor="t"/>
+          <a:lstStyle/>
+          <a:p>
+            <a:pPr indent="0" marL="0">
+              <a:lnSpc>
+                <a:spcPct val="120000"/>
+              </a:lnSpc>
+              <a:buNone/>
+            </a:pPr>
+            <a:r>
+              <a:rPr lang="en-US" sz="1200" dirty="0">
+                <a:solidFill>
+                  <a:srgbClr val="6B6B6B"/>
+                </a:solidFill>
+                <a:latin typeface="Microsoft YaHei" pitchFamily="34" charset="0"/>
+                <a:ea typeface="Microsoft YaHei" pitchFamily="34" charset="-122"/>
+                <a:cs typeface="Microsoft YaHei" pitchFamily="34" charset="-120"/>
+              </a:rPr>
+              <a:t>同为真单细胞 scRNA：人皮层星形胶质 IL18 检出 4.1%（分层内排 16/18，78 供体）、少突胶质 1.4%（17/18）；小鼠 55.4%（1/24）与 27.4%（2/24）。技术相同、供体数都大，差 13–20 倍。</a:t>
+            </a:r>
+            <a:endParaRPr lang="en-US" sz="1200" dirty="0"/>
+          </a:p>
+        </p:txBody>
+      </p:sp>
+      <p:sp>
+        <p:nvSpPr>
+          <p:cNvPr id="7" name="Text 5"/>
+          <p:cNvSpPr txBox="1"/>
+          <p:nvPr/>
+        </p:nvSpPr>
+        <p:spPr>
+          <a:xfrm>
+            <a:off x="731520" y="3712464"/>
+            <a:ext cx="3200400" cy="1097280"/>
+          </a:xfrm>
+          <a:prstGeom prst="rect">
+            <a:avLst/>
+          </a:prstGeom>
+          <a:noFill/>
+          <a:ln/>
+        </p:spPr>
+        <p:txBody>
+          <a:bodyPr wrap="square" rtlCol="0" anchor="t"/>
+          <a:lstStyle/>
+          <a:p>
+            <a:pPr indent="0" marL="0">
+              <a:lnSpc>
+                <a:spcPct val="115000"/>
+              </a:lnSpc>
+              <a:buNone/>
+            </a:pPr>
+            <a:r>
+              <a:rPr lang="en-US" sz="1300" b="1" dirty="0">
+                <a:solidFill>
+                  <a:srgbClr val="1A1A1A"/>
+                </a:solidFill>
+                <a:latin typeface="Microsoft YaHei" pitchFamily="34" charset="0"/>
+                <a:ea typeface="Microsoft YaHei" pitchFamily="34" charset="-122"/>
+                <a:cs typeface="Microsoft YaHei" pitchFamily="34" charset="-120"/>
+              </a:rPr>
+              <a:t>人胰岛 δ 细胞不支持小鼠的发现</a:t>
+            </a:r>
+            <a:endParaRPr lang="en-US" sz="1300" dirty="0"/>
+          </a:p>
+        </p:txBody>
+      </p:sp>
+      <p:sp>
+        <p:nvSpPr>
+          <p:cNvPr id="8" name="Text 6"/>
+          <p:cNvSpPr txBox="1"/>
+          <p:nvPr/>
+        </p:nvSpPr>
+        <p:spPr>
+          <a:xfrm>
+            <a:off x="4114800" y="3712464"/>
+            <a:ext cx="7406640" cy="1143000"/>
+          </a:xfrm>
+          <a:prstGeom prst="rect">
+            <a:avLst/>
+          </a:prstGeom>
+          <a:noFill/>
+          <a:ln/>
+        </p:spPr>
+        <p:txBody>
+          <a:bodyPr wrap="square" rtlCol="0" anchor="t"/>
+          <a:lstStyle/>
+          <a:p>
+            <a:pPr indent="0" marL="0">
+              <a:lnSpc>
+                <a:spcPct val="120000"/>
+              </a:lnSpc>
+              <a:buNone/>
+            </a:pPr>
+            <a:r>
+              <a:rPr lang="en-US" sz="1200" dirty="0">
+                <a:solidFill>
+                  <a:srgbClr val="6B6B6B"/>
+                </a:solidFill>
+                <a:latin typeface="Microsoft YaHei" pitchFamily="34" charset="0"/>
+                <a:ea typeface="Microsoft YaHei" pitchFamily="34" charset="-122"/>
+                <a:cs typeface="Microsoft YaHei" pitchFamily="34" charset="-120"/>
+              </a:rPr>
+              <a:t>新增 3 套人胰岛 scRNA（19 / 17 / 5 供体，δ 细胞 1217 / 4677 / 2889 个）。三套数据里 δ 细胞 IL18 检出率均为 0.0–0.5%。这是明确的阴性，而扩充前人侧根本没有 δ 细胞可查。</a:t>
+            </a:r>
+            <a:endParaRPr lang="en-US" sz="1200" dirty="0"/>
+          </a:p>
+        </p:txBody>
+      </p:sp>
+      <p:sp>
+        <p:nvSpPr>
+          <p:cNvPr id="9" name="Text 7"/>
+          <p:cNvSpPr txBox="1"/>
+          <p:nvPr/>
+        </p:nvSpPr>
+        <p:spPr>
+          <a:xfrm>
+            <a:off x="731520" y="4928616"/>
+            <a:ext cx="3200400" cy="1097280"/>
+          </a:xfrm>
+          <a:prstGeom prst="rect">
+            <a:avLst/>
+          </a:prstGeom>
+          <a:noFill/>
+          <a:ln/>
+        </p:spPr>
+        <p:txBody>
+          <a:bodyPr wrap="square" rtlCol="0" anchor="t"/>
+          <a:lstStyle/>
+          <a:p>
+            <a:pPr indent="0" marL="0">
+              <a:lnSpc>
+                <a:spcPct val="115000"/>
+              </a:lnSpc>
+              <a:buNone/>
+            </a:pPr>
+            <a:r>
+              <a:rPr lang="en-US" sz="1300" b="1" dirty="0">
+                <a:solidFill>
+                  <a:srgbClr val="1A1A1A"/>
+                </a:solidFill>
+                <a:latin typeface="Microsoft YaHei" pitchFamily="34" charset="0"/>
+                <a:ea typeface="Microsoft YaHei" pitchFamily="34" charset="-122"/>
+                <a:cs typeface="Microsoft YaHei" pitchFamily="34" charset="-120"/>
+              </a:rPr>
+              <a:t>人脊髓：从无结论变成明确阴性</a:t>
+            </a:r>
+            <a:endParaRPr lang="en-US" sz="1300" dirty="0"/>
+          </a:p>
+        </p:txBody>
+      </p:sp>
+      <p:sp>
+        <p:nvSpPr>
+          <p:cNvPr id="10" name="Text 8"/>
+          <p:cNvSpPr txBox="1"/>
+          <p:nvPr/>
+        </p:nvSpPr>
+        <p:spPr>
+          <a:xfrm>
+            <a:off x="4114800" y="4928616"/>
+            <a:ext cx="7406640" cy="1143000"/>
+          </a:xfrm>
+          <a:prstGeom prst="rect">
+            <a:avLst/>
+          </a:prstGeom>
+          <a:noFill/>
+          <a:ln/>
+        </p:spPr>
+        <p:txBody>
+          <a:bodyPr wrap="square" rtlCol="0" anchor="t"/>
+          <a:lstStyle/>
+          <a:p>
+            <a:pPr indent="0" marL="0">
+              <a:lnSpc>
+                <a:spcPct val="120000"/>
+              </a:lnSpc>
+              <a:buNone/>
+            </a:pPr>
+            <a:r>
+              <a:rPr lang="en-US" sz="1200" dirty="0">
+                <a:solidFill>
+                  <a:srgbClr val="6B6B6B"/>
+                </a:solidFill>
+                <a:latin typeface="Microsoft YaHei" pitchFamily="34" charset="0"/>
+                <a:ea typeface="Microsoft YaHei" pitchFamily="34" charset="-122"/>
+                <a:cs typeface="Microsoft YaHei" pitchFamily="34" charset="-120"/>
+              </a:rPr>
+              <a:t>新增颈段脊髓白质单核图谱（19 供体 15 类，此前只有 1 位供体）。IL18 几乎只在小胶质（检出 52.7%），而小胶质 CASP1 检出 10.5%、分层内排第 2；其余细胞类型 IL18 ≤3.3%。该器官无候选。</a:t>
+            </a:r>
+            <a:endParaRPr lang="en-US" sz="1200" dirty="0"/>
           </a:p>
         </p:txBody>
       </p:sp>
@@ -4261,7 +2863,7 @@
         </p:nvSpPr>
         <p:spPr>
           <a:xfrm>
-            <a:off x="640080" y="457200"/>
+            <a:off x="640080" y="411480"/>
             <a:ext cx="10972800" cy="640080"/>
           </a:xfrm>
           <a:prstGeom prst="rect">
@@ -4278,7 +2880,7 @@
               <a:buNone/>
             </a:pPr>
             <a:r>
-              <a:rPr lang="en-US" sz="2500" b="1" dirty="0">
+              <a:rPr lang="en-US" sz="2400" b="1" dirty="0">
                 <a:solidFill>
                   <a:srgbClr val="1A1A1A"/>
                 </a:solidFill>
@@ -4286,9 +2888,9 @@
                 <a:ea typeface="Microsoft YaHei" pitchFamily="34" charset="-122"/>
                 <a:cs typeface="Microsoft YaHei" pitchFamily="34" charset="-120"/>
               </a:rPr>
-              <a:t>必须注明的物种差异</a:t>
-            </a:r>
-            <a:endParaRPr lang="en-US" sz="2500" dirty="0"/>
+              <a:t>检出率的口径：百分比是什么的百分比</a:t>
+            </a:r>
+            <a:endParaRPr lang="en-US" sz="2400" dirty="0"/>
           </a:p>
         </p:txBody>
       </p:sp>
@@ -4300,8 +2902,8 @@
         </p:nvSpPr>
         <p:spPr>
           <a:xfrm>
-            <a:off x="731520" y="1691640"/>
-            <a:ext cx="10698480" cy="457200"/>
+            <a:off x="731520" y="1325880"/>
+            <a:ext cx="10698480" cy="914400"/>
           </a:xfrm>
           <a:prstGeom prst="rect">
             <a:avLst/>
@@ -4314,33 +2916,1736 @@
           <a:lstStyle/>
           <a:p>
             <a:pPr indent="0" marL="0">
+              <a:lnSpc>
+                <a:spcPct val="125000"/>
+              </a:lnSpc>
               <a:buNone/>
             </a:pPr>
             <a:r>
-              <a:rPr lang="en-US" sz="1700" b="1" dirty="0">
+              <a:rPr lang="en-US" sz="1450" b="1" dirty="0">
                 <a:solidFill>
-                  <a:srgbClr val="9A2B2B"/>
+                  <a:srgbClr val="1A1A1A"/>
                 </a:solidFill>
                 <a:latin typeface="Microsoft YaHei" pitchFamily="34" charset="0"/>
                 <a:ea typeface="Microsoft YaHei" pitchFamily="34" charset="-122"/>
                 <a:cs typeface="Microsoft YaHei" pitchFamily="34" charset="-120"/>
               </a:rPr>
-              <a:t>A 级结论为小鼠特异，不可外推到人。</a:t>
-            </a:r>
-            <a:endParaRPr lang="en-US" sz="1700" dirty="0"/>
-          </a:p>
-        </p:txBody>
-      </p:sp>
-      <p:sp>
-        <p:nvSpPr>
-          <p:cNvPr id="4" name="Text 2"/>
+              <a:t>检出率 = 该基因原始计数 ≥1 的细胞数 ÷ 分析细胞数（全部供体合并）。</a:t>
+            </a:r>
+            <a:pPr indent="0" marL="0">
+              <a:lnSpc>
+                <a:spcPct val="125000"/>
+              </a:lnSpc>
+              <a:buNone/>
+            </a:pPr>
+            <a:r>
+              <a:rPr lang="en-US" sz="1450" dirty="0">
+                <a:solidFill>
+                  <a:srgbClr val="1A1A1A"/>
+                </a:solidFill>
+                <a:latin typeface="Microsoft YaHei" pitchFamily="34" charset="0"/>
+                <a:ea typeface="Microsoft YaHei" pitchFamily="34" charset="-122"/>
+                <a:cs typeface="Microsoft YaHei" pitchFamily="34" charset="-120"/>
+              </a:rPr>
+              <a:t>不是表达量占比，不是相对最高值的百分比，不是读段占比。本版不用「供体中位数」：每位供体只有数十到上百个该类型细胞，真实检出率低于约 1/细胞数 时，半数以上供体恰好 0 个阳性细胞，中位数被截断为 0。</a:t>
+            </a:r>
+            <a:endParaRPr lang="en-US" sz="1450" dirty="0"/>
+          </a:p>
+        </p:txBody>
+      </p:sp>
+      <p:graphicFrame>
+        <p:nvGraphicFramePr>
+          <p:cNvPr id="7" name="Table 0"/>
+          <p:cNvGraphicFramePr>
+            <a:graphicFrameLocks noGrp="1"/>
+          </p:cNvGraphicFramePr>
+          <p:nvPr>
+            <p:extLst>
+              <p:ext uri="{D42A27DB-BD31-4B8C-83A1-F6EECF244321}">
+                <p14:modId xmlns:p14="http://schemas.microsoft.com/office/powerpoint/2010/main" val="1579011935"/>
+              </p:ext>
+            </p:extLst>
+          </p:nvPr>
+        </p:nvGraphicFramePr>
+        <p:xfrm>
+          <a:off x="731520" y="2514600"/>
+          <a:ext cx="10698480" cy="914400"/>
+        </p:xfrm>
+        <a:graphic>
+          <a:graphicData uri="http://schemas.openxmlformats.org/drawingml/2006/table">
+            <a:tbl>
+              <a:tblPr/>
+              <a:tblGrid>
+                <a:gridCol w="3291840"/>
+                <a:gridCol w="2651760"/>
+                <a:gridCol w="1645920"/>
+                <a:gridCol w="1554480"/>
+                <a:gridCol w="1554480"/>
+              </a:tblGrid>
+              <a:tr h="384048">
+                <a:tc>
+                  <a:txBody>
+                    <a:bodyPr/>
+                    <a:lstStyle/>
+                    <a:p>
+                      <a:pPr indent="0" marL="0">
+                        <a:buNone/>
+                      </a:pPr>
+                      <a:r>
+                        <a:rPr lang="en-US" sz="1250" b="1" dirty="0">
+                          <a:solidFill>
+                            <a:srgbClr val="1A1A1A"/>
+                          </a:solidFill>
+                          <a:latin typeface="Microsoft YaHei" pitchFamily="34" charset="0"/>
+                          <a:ea typeface="Microsoft YaHei" pitchFamily="34" charset="-122"/>
+                          <a:cs typeface="Microsoft YaHei" pitchFamily="34" charset="-120"/>
+                        </a:rPr>
+                        <a:t>细胞类型</a:t>
+                      </a:r>
+                      <a:endParaRPr lang="en-US" sz="1250" dirty="0">
+                        <a:latin typeface="Microsoft YaHei" charset="0"/>
+                        <a:ea typeface="Microsoft YaHei" charset="0"/>
+                        <a:cs typeface="Microsoft YaHei" charset="0"/>
+                      </a:endParaRPr>
+                    </a:p>
+                  </a:txBody>
+                  <a:tcPr marL="91440" marR="91440" marT="45720" marB="45720" anchor="ctr">
+                    <a:lnL w="6350" cap="flat" cmpd="sng" algn="ctr">
+                      <a:solidFill>
+                        <a:srgbClr val="D8DBE0"/>
+                      </a:solidFill>
+                      <a:prstDash val="solid"/>
+                      <a:round/>
+                      <a:headEnd type="none" w="med" len="med"/>
+                      <a:tailEnd type="none" w="med" len="med"/>
+                    </a:lnL>
+                    <a:lnR w="6350" cap="flat" cmpd="sng" algn="ctr">
+                      <a:solidFill>
+                        <a:srgbClr val="D8DBE0"/>
+                      </a:solidFill>
+                      <a:prstDash val="solid"/>
+                      <a:round/>
+                      <a:headEnd type="none" w="med" len="med"/>
+                      <a:tailEnd type="none" w="med" len="med"/>
+                    </a:lnR>
+                    <a:lnT w="6350" cap="flat" cmpd="sng" algn="ctr">
+                      <a:solidFill>
+                        <a:srgbClr val="D8DBE0"/>
+                      </a:solidFill>
+                      <a:prstDash val="solid"/>
+                      <a:round/>
+                      <a:headEnd type="none" w="med" len="med"/>
+                      <a:tailEnd type="none" w="med" len="med"/>
+                    </a:lnT>
+                    <a:lnB w="6350" cap="flat" cmpd="sng" algn="ctr">
+                      <a:solidFill>
+                        <a:srgbClr val="D8DBE0"/>
+                      </a:solidFill>
+                      <a:prstDash val="solid"/>
+                      <a:round/>
+                      <a:headEnd type="none" w="med" len="med"/>
+                      <a:tailEnd type="none" w="med" len="med"/>
+                    </a:lnB>
+                    <a:solidFill>
+                      <a:srgbClr val="EEF1F5"/>
+                    </a:solidFill>
+                  </a:tcPr>
+                </a:tc>
+                <a:tc>
+                  <a:txBody>
+                    <a:bodyPr/>
+                    <a:lstStyle/>
+                    <a:p>
+                      <a:pPr indent="0" marL="0">
+                        <a:buNone/>
+                      </a:pPr>
+                      <a:r>
+                        <a:rPr lang="en-US" sz="1250" b="1" dirty="0">
+                          <a:solidFill>
+                            <a:srgbClr val="1A1A1A"/>
+                          </a:solidFill>
+                          <a:latin typeface="Microsoft YaHei" pitchFamily="34" charset="0"/>
+                          <a:ea typeface="Microsoft YaHei" pitchFamily="34" charset="-122"/>
+                          <a:cs typeface="Microsoft YaHei" pitchFamily="34" charset="-120"/>
+                        </a:rPr>
+                        <a:t>CASP1 阳性细胞 / 分析细胞</a:t>
+                      </a:r>
+                      <a:endParaRPr lang="en-US" sz="1250" dirty="0">
+                        <a:latin typeface="Microsoft YaHei" charset="0"/>
+                        <a:ea typeface="Microsoft YaHei" charset="0"/>
+                        <a:cs typeface="Microsoft YaHei" charset="0"/>
+                      </a:endParaRPr>
+                    </a:p>
+                  </a:txBody>
+                  <a:tcPr marL="91440" marR="91440" marT="45720" marB="45720" anchor="ctr">
+                    <a:lnL w="6350" cap="flat" cmpd="sng" algn="ctr">
+                      <a:solidFill>
+                        <a:srgbClr val="D8DBE0"/>
+                      </a:solidFill>
+                      <a:prstDash val="solid"/>
+                      <a:round/>
+                      <a:headEnd type="none" w="med" len="med"/>
+                      <a:tailEnd type="none" w="med" len="med"/>
+                    </a:lnL>
+                    <a:lnR w="6350" cap="flat" cmpd="sng" algn="ctr">
+                      <a:solidFill>
+                        <a:srgbClr val="D8DBE0"/>
+                      </a:solidFill>
+                      <a:prstDash val="solid"/>
+                      <a:round/>
+                      <a:headEnd type="none" w="med" len="med"/>
+                      <a:tailEnd type="none" w="med" len="med"/>
+                    </a:lnR>
+                    <a:lnT w="6350" cap="flat" cmpd="sng" algn="ctr">
+                      <a:solidFill>
+                        <a:srgbClr val="D8DBE0"/>
+                      </a:solidFill>
+                      <a:prstDash val="solid"/>
+                      <a:round/>
+                      <a:headEnd type="none" w="med" len="med"/>
+                      <a:tailEnd type="none" w="med" len="med"/>
+                    </a:lnT>
+                    <a:lnB w="6350" cap="flat" cmpd="sng" algn="ctr">
+                      <a:solidFill>
+                        <a:srgbClr val="D8DBE0"/>
+                      </a:solidFill>
+                      <a:prstDash val="solid"/>
+                      <a:round/>
+                      <a:headEnd type="none" w="med" len="med"/>
+                      <a:tailEnd type="none" w="med" len="med"/>
+                    </a:lnB>
+                    <a:solidFill>
+                      <a:srgbClr val="EEF1F5"/>
+                    </a:solidFill>
+                  </a:tcPr>
+                </a:tc>
+                <a:tc>
+                  <a:txBody>
+                    <a:bodyPr/>
+                    <a:lstStyle/>
+                    <a:p>
+                      <a:pPr indent="0" marL="0">
+                        <a:buNone/>
+                      </a:pPr>
+                      <a:r>
+                        <a:rPr lang="en-US" sz="1250" b="1" dirty="0">
+                          <a:solidFill>
+                            <a:srgbClr val="1A1A1A"/>
+                          </a:solidFill>
+                          <a:latin typeface="Microsoft YaHei" pitchFamily="34" charset="0"/>
+                          <a:ea typeface="Microsoft YaHei" pitchFamily="34" charset="-122"/>
+                          <a:cs typeface="Microsoft YaHei" pitchFamily="34" charset="-120"/>
+                        </a:rPr>
+                        <a:t>合并检出率</a:t>
+                      </a:r>
+                      <a:endParaRPr lang="en-US" sz="1250" dirty="0">
+                        <a:latin typeface="Microsoft YaHei" charset="0"/>
+                        <a:ea typeface="Microsoft YaHei" charset="0"/>
+                        <a:cs typeface="Microsoft YaHei" charset="0"/>
+                      </a:endParaRPr>
+                    </a:p>
+                  </a:txBody>
+                  <a:tcPr marL="91440" marR="91440" marT="45720" marB="45720" anchor="ctr">
+                    <a:lnL w="6350" cap="flat" cmpd="sng" algn="ctr">
+                      <a:solidFill>
+                        <a:srgbClr val="D8DBE0"/>
+                      </a:solidFill>
+                      <a:prstDash val="solid"/>
+                      <a:round/>
+                      <a:headEnd type="none" w="med" len="med"/>
+                      <a:tailEnd type="none" w="med" len="med"/>
+                    </a:lnL>
+                    <a:lnR w="6350" cap="flat" cmpd="sng" algn="ctr">
+                      <a:solidFill>
+                        <a:srgbClr val="D8DBE0"/>
+                      </a:solidFill>
+                      <a:prstDash val="solid"/>
+                      <a:round/>
+                      <a:headEnd type="none" w="med" len="med"/>
+                      <a:tailEnd type="none" w="med" len="med"/>
+                    </a:lnR>
+                    <a:lnT w="6350" cap="flat" cmpd="sng" algn="ctr">
+                      <a:solidFill>
+                        <a:srgbClr val="D8DBE0"/>
+                      </a:solidFill>
+                      <a:prstDash val="solid"/>
+                      <a:round/>
+                      <a:headEnd type="none" w="med" len="med"/>
+                      <a:tailEnd type="none" w="med" len="med"/>
+                    </a:lnT>
+                    <a:lnB w="6350" cap="flat" cmpd="sng" algn="ctr">
+                      <a:solidFill>
+                        <a:srgbClr val="D8DBE0"/>
+                      </a:solidFill>
+                      <a:prstDash val="solid"/>
+                      <a:round/>
+                      <a:headEnd type="none" w="med" len="med"/>
+                      <a:tailEnd type="none" w="med" len="med"/>
+                    </a:lnB>
+                    <a:solidFill>
+                      <a:srgbClr val="EEF1F5"/>
+                    </a:solidFill>
+                  </a:tcPr>
+                </a:tc>
+                <a:tc>
+                  <a:txBody>
+                    <a:bodyPr/>
+                    <a:lstStyle/>
+                    <a:p>
+                      <a:pPr indent="0" marL="0">
+                        <a:buNone/>
+                      </a:pPr>
+                      <a:r>
+                        <a:rPr lang="en-US" sz="1250" b="1" dirty="0">
+                          <a:solidFill>
+                            <a:srgbClr val="1A1A1A"/>
+                          </a:solidFill>
+                          <a:latin typeface="Microsoft YaHei" pitchFamily="34" charset="0"/>
+                          <a:ea typeface="Microsoft YaHei" pitchFamily="34" charset="-122"/>
+                          <a:cs typeface="Microsoft YaHei" pitchFamily="34" charset="-120"/>
+                        </a:rPr>
+                        <a:t>供体中位数</a:t>
+                      </a:r>
+                      <a:endParaRPr lang="en-US" sz="1250" dirty="0">
+                        <a:latin typeface="Microsoft YaHei" charset="0"/>
+                        <a:ea typeface="Microsoft YaHei" charset="0"/>
+                        <a:cs typeface="Microsoft YaHei" charset="0"/>
+                      </a:endParaRPr>
+                    </a:p>
+                  </a:txBody>
+                  <a:tcPr marL="91440" marR="91440" marT="45720" marB="45720" anchor="ctr">
+                    <a:lnL w="6350" cap="flat" cmpd="sng" algn="ctr">
+                      <a:solidFill>
+                        <a:srgbClr val="D8DBE0"/>
+                      </a:solidFill>
+                      <a:prstDash val="solid"/>
+                      <a:round/>
+                      <a:headEnd type="none" w="med" len="med"/>
+                      <a:tailEnd type="none" w="med" len="med"/>
+                    </a:lnL>
+                    <a:lnR w="6350" cap="flat" cmpd="sng" algn="ctr">
+                      <a:solidFill>
+                        <a:srgbClr val="D8DBE0"/>
+                      </a:solidFill>
+                      <a:prstDash val="solid"/>
+                      <a:round/>
+                      <a:headEnd type="none" w="med" len="med"/>
+                      <a:tailEnd type="none" w="med" len="med"/>
+                    </a:lnR>
+                    <a:lnT w="6350" cap="flat" cmpd="sng" algn="ctr">
+                      <a:solidFill>
+                        <a:srgbClr val="D8DBE0"/>
+                      </a:solidFill>
+                      <a:prstDash val="solid"/>
+                      <a:round/>
+                      <a:headEnd type="none" w="med" len="med"/>
+                      <a:tailEnd type="none" w="med" len="med"/>
+                    </a:lnT>
+                    <a:lnB w="6350" cap="flat" cmpd="sng" algn="ctr">
+                      <a:solidFill>
+                        <a:srgbClr val="D8DBE0"/>
+                      </a:solidFill>
+                      <a:prstDash val="solid"/>
+                      <a:round/>
+                      <a:headEnd type="none" w="med" len="med"/>
+                      <a:tailEnd type="none" w="med" len="med"/>
+                    </a:lnB>
+                    <a:solidFill>
+                      <a:srgbClr val="EEF1F5"/>
+                    </a:solidFill>
+                  </a:tcPr>
+                </a:tc>
+                <a:tc>
+                  <a:txBody>
+                    <a:bodyPr/>
+                    <a:lstStyle/>
+                    <a:p>
+                      <a:pPr indent="0" marL="0">
+                        <a:buNone/>
+                      </a:pPr>
+                      <a:r>
+                        <a:rPr lang="en-US" sz="1250" b="1" dirty="0">
+                          <a:solidFill>
+                            <a:srgbClr val="1A1A1A"/>
+                          </a:solidFill>
+                          <a:latin typeface="Microsoft YaHei" pitchFamily="34" charset="0"/>
+                          <a:ea typeface="Microsoft YaHei" pitchFamily="34" charset="-122"/>
+                          <a:cs typeface="Microsoft YaHei" pitchFamily="34" charset="-120"/>
+                        </a:rPr>
+                        <a:t>有阳性的供体</a:t>
+                      </a:r>
+                      <a:endParaRPr lang="en-US" sz="1250" dirty="0">
+                        <a:latin typeface="Microsoft YaHei" charset="0"/>
+                        <a:ea typeface="Microsoft YaHei" charset="0"/>
+                        <a:cs typeface="Microsoft YaHei" charset="0"/>
+                      </a:endParaRPr>
+                    </a:p>
+                  </a:txBody>
+                  <a:tcPr marL="91440" marR="91440" marT="45720" marB="45720" anchor="ctr">
+                    <a:lnL w="6350" cap="flat" cmpd="sng" algn="ctr">
+                      <a:solidFill>
+                        <a:srgbClr val="D8DBE0"/>
+                      </a:solidFill>
+                      <a:prstDash val="solid"/>
+                      <a:round/>
+                      <a:headEnd type="none" w="med" len="med"/>
+                      <a:tailEnd type="none" w="med" len="med"/>
+                    </a:lnL>
+                    <a:lnR w="6350" cap="flat" cmpd="sng" algn="ctr">
+                      <a:solidFill>
+                        <a:srgbClr val="D8DBE0"/>
+                      </a:solidFill>
+                      <a:prstDash val="solid"/>
+                      <a:round/>
+                      <a:headEnd type="none" w="med" len="med"/>
+                      <a:tailEnd type="none" w="med" len="med"/>
+                    </a:lnR>
+                    <a:lnT w="6350" cap="flat" cmpd="sng" algn="ctr">
+                      <a:solidFill>
+                        <a:srgbClr val="D8DBE0"/>
+                      </a:solidFill>
+                      <a:prstDash val="solid"/>
+                      <a:round/>
+                      <a:headEnd type="none" w="med" len="med"/>
+                      <a:tailEnd type="none" w="med" len="med"/>
+                    </a:lnT>
+                    <a:lnB w="6350" cap="flat" cmpd="sng" algn="ctr">
+                      <a:solidFill>
+                        <a:srgbClr val="D8DBE0"/>
+                      </a:solidFill>
+                      <a:prstDash val="solid"/>
+                      <a:round/>
+                      <a:headEnd type="none" w="med" len="med"/>
+                      <a:tailEnd type="none" w="med" len="med"/>
+                    </a:lnB>
+                    <a:solidFill>
+                      <a:srgbClr val="EEF1F5"/>
+                    </a:solidFill>
+                  </a:tcPr>
+                </a:tc>
+              </a:tr>
+              <a:tr h="384048">
+                <a:tc>
+                  <a:txBody>
+                    <a:bodyPr/>
+                    <a:lstStyle/>
+                    <a:p>
+                      <a:pPr indent="0" marL="0">
+                        <a:buNone/>
+                      </a:pPr>
+                      <a:r>
+                        <a:rPr lang="en-US" sz="1250" dirty="0">
+                          <a:solidFill>
+                            <a:srgbClr val="1A1A1A"/>
+                          </a:solidFill>
+                          <a:latin typeface="Microsoft YaHei" pitchFamily="34" charset="0"/>
+                          <a:ea typeface="Microsoft YaHei" pitchFamily="34" charset="-122"/>
+                          <a:cs typeface="Microsoft YaHei" pitchFamily="34" charset="-120"/>
+                        </a:rPr>
+                        <a:t>人·脑 PV 中间神经元（PsychAD）</a:t>
+                      </a:r>
+                      <a:endParaRPr lang="en-US" sz="1250" dirty="0">
+                        <a:latin typeface="Microsoft YaHei" charset="0"/>
+                        <a:ea typeface="Microsoft YaHei" charset="0"/>
+                        <a:cs typeface="Microsoft YaHei" charset="0"/>
+                      </a:endParaRPr>
+                    </a:p>
+                  </a:txBody>
+                  <a:tcPr marL="91440" marR="91440" marT="45720" marB="45720" anchor="ctr">
+                    <a:lnL w="6350" cap="flat" cmpd="sng" algn="ctr">
+                      <a:solidFill>
+                        <a:srgbClr val="D8DBE0"/>
+                      </a:solidFill>
+                      <a:prstDash val="solid"/>
+                      <a:round/>
+                      <a:headEnd type="none" w="med" len="med"/>
+                      <a:tailEnd type="none" w="med" len="med"/>
+                    </a:lnL>
+                    <a:lnR w="6350" cap="flat" cmpd="sng" algn="ctr">
+                      <a:solidFill>
+                        <a:srgbClr val="D8DBE0"/>
+                      </a:solidFill>
+                      <a:prstDash val="solid"/>
+                      <a:round/>
+                      <a:headEnd type="none" w="med" len="med"/>
+                      <a:tailEnd type="none" w="med" len="med"/>
+                    </a:lnR>
+                    <a:lnT w="6350" cap="flat" cmpd="sng" algn="ctr">
+                      <a:solidFill>
+                        <a:srgbClr val="D8DBE0"/>
+                      </a:solidFill>
+                      <a:prstDash val="solid"/>
+                      <a:round/>
+                      <a:headEnd type="none" w="med" len="med"/>
+                      <a:tailEnd type="none" w="med" len="med"/>
+                    </a:lnT>
+                    <a:lnB w="6350" cap="flat" cmpd="sng" algn="ctr">
+                      <a:solidFill>
+                        <a:srgbClr val="D8DBE0"/>
+                      </a:solidFill>
+                      <a:prstDash val="solid"/>
+                      <a:round/>
+                      <a:headEnd type="none" w="med" len="med"/>
+                      <a:tailEnd type="none" w="med" len="med"/>
+                    </a:lnB>
+                  </a:tcPr>
+                </a:tc>
+                <a:tc>
+                  <a:txBody>
+                    <a:bodyPr/>
+                    <a:lstStyle/>
+                    <a:p>
+                      <a:pPr indent="0" marL="0">
+                        <a:buNone/>
+                      </a:pPr>
+                      <a:r>
+                        <a:rPr lang="en-US" sz="1250" dirty="0">
+                          <a:solidFill>
+                            <a:srgbClr val="1A1A1A"/>
+                          </a:solidFill>
+                          <a:latin typeface="Microsoft YaHei" pitchFamily="34" charset="0"/>
+                          <a:ea typeface="Microsoft YaHei" pitchFamily="34" charset="-122"/>
+                          <a:cs typeface="Microsoft YaHei" pitchFamily="34" charset="-120"/>
+                        </a:rPr>
+                        <a:t>24 / 19711</a:t>
+                      </a:r>
+                      <a:endParaRPr lang="en-US" sz="1250" dirty="0">
+                        <a:latin typeface="Microsoft YaHei" charset="0"/>
+                        <a:ea typeface="Microsoft YaHei" charset="0"/>
+                        <a:cs typeface="Microsoft YaHei" charset="0"/>
+                      </a:endParaRPr>
+                    </a:p>
+                  </a:txBody>
+                  <a:tcPr marL="91440" marR="91440" marT="45720" marB="45720" anchor="ctr">
+                    <a:lnL w="6350" cap="flat" cmpd="sng" algn="ctr">
+                      <a:solidFill>
+                        <a:srgbClr val="D8DBE0"/>
+                      </a:solidFill>
+                      <a:prstDash val="solid"/>
+                      <a:round/>
+                      <a:headEnd type="none" w="med" len="med"/>
+                      <a:tailEnd type="none" w="med" len="med"/>
+                    </a:lnL>
+                    <a:lnR w="6350" cap="flat" cmpd="sng" algn="ctr">
+                      <a:solidFill>
+                        <a:srgbClr val="D8DBE0"/>
+                      </a:solidFill>
+                      <a:prstDash val="solid"/>
+                      <a:round/>
+                      <a:headEnd type="none" w="med" len="med"/>
+                      <a:tailEnd type="none" w="med" len="med"/>
+                    </a:lnR>
+                    <a:lnT w="6350" cap="flat" cmpd="sng" algn="ctr">
+                      <a:solidFill>
+                        <a:srgbClr val="D8DBE0"/>
+                      </a:solidFill>
+                      <a:prstDash val="solid"/>
+                      <a:round/>
+                      <a:headEnd type="none" w="med" len="med"/>
+                      <a:tailEnd type="none" w="med" len="med"/>
+                    </a:lnT>
+                    <a:lnB w="6350" cap="flat" cmpd="sng" algn="ctr">
+                      <a:solidFill>
+                        <a:srgbClr val="D8DBE0"/>
+                      </a:solidFill>
+                      <a:prstDash val="solid"/>
+                      <a:round/>
+                      <a:headEnd type="none" w="med" len="med"/>
+                      <a:tailEnd type="none" w="med" len="med"/>
+                    </a:lnB>
+                  </a:tcPr>
+                </a:tc>
+                <a:tc>
+                  <a:txBody>
+                    <a:bodyPr/>
+                    <a:lstStyle/>
+                    <a:p>
+                      <a:pPr indent="0" marL="0">
+                        <a:buNone/>
+                      </a:pPr>
+                      <a:r>
+                        <a:rPr lang="en-US" sz="1250" dirty="0">
+                          <a:solidFill>
+                            <a:srgbClr val="1A1A1A"/>
+                          </a:solidFill>
+                          <a:latin typeface="Microsoft YaHei" pitchFamily="34" charset="0"/>
+                          <a:ea typeface="Microsoft YaHei" pitchFamily="34" charset="-122"/>
+                          <a:cs typeface="Microsoft YaHei" pitchFamily="34" charset="-120"/>
+                        </a:rPr>
+                        <a:t>0.12%</a:t>
+                      </a:r>
+                      <a:endParaRPr lang="en-US" sz="1250" dirty="0">
+                        <a:latin typeface="Microsoft YaHei" charset="0"/>
+                        <a:ea typeface="Microsoft YaHei" charset="0"/>
+                        <a:cs typeface="Microsoft YaHei" charset="0"/>
+                      </a:endParaRPr>
+                    </a:p>
+                  </a:txBody>
+                  <a:tcPr marL="91440" marR="91440" marT="45720" marB="45720" anchor="ctr">
+                    <a:lnL w="6350" cap="flat" cmpd="sng" algn="ctr">
+                      <a:solidFill>
+                        <a:srgbClr val="D8DBE0"/>
+                      </a:solidFill>
+                      <a:prstDash val="solid"/>
+                      <a:round/>
+                      <a:headEnd type="none" w="med" len="med"/>
+                      <a:tailEnd type="none" w="med" len="med"/>
+                    </a:lnL>
+                    <a:lnR w="6350" cap="flat" cmpd="sng" algn="ctr">
+                      <a:solidFill>
+                        <a:srgbClr val="D8DBE0"/>
+                      </a:solidFill>
+                      <a:prstDash val="solid"/>
+                      <a:round/>
+                      <a:headEnd type="none" w="med" len="med"/>
+                      <a:tailEnd type="none" w="med" len="med"/>
+                    </a:lnR>
+                    <a:lnT w="6350" cap="flat" cmpd="sng" algn="ctr">
+                      <a:solidFill>
+                        <a:srgbClr val="D8DBE0"/>
+                      </a:solidFill>
+                      <a:prstDash val="solid"/>
+                      <a:round/>
+                      <a:headEnd type="none" w="med" len="med"/>
+                      <a:tailEnd type="none" w="med" len="med"/>
+                    </a:lnT>
+                    <a:lnB w="6350" cap="flat" cmpd="sng" algn="ctr">
+                      <a:solidFill>
+                        <a:srgbClr val="D8DBE0"/>
+                      </a:solidFill>
+                      <a:prstDash val="solid"/>
+                      <a:round/>
+                      <a:headEnd type="none" w="med" len="med"/>
+                      <a:tailEnd type="none" w="med" len="med"/>
+                    </a:lnB>
+                  </a:tcPr>
+                </a:tc>
+                <a:tc>
+                  <a:txBody>
+                    <a:bodyPr/>
+                    <a:lstStyle/>
+                    <a:p>
+                      <a:pPr indent="0" marL="0">
+                        <a:buNone/>
+                      </a:pPr>
+                      <a:r>
+                        <a:rPr lang="en-US" sz="1250" dirty="0">
+                          <a:solidFill>
+                            <a:srgbClr val="1A1A1A"/>
+                          </a:solidFill>
+                          <a:latin typeface="Microsoft YaHei" pitchFamily="34" charset="0"/>
+                          <a:ea typeface="Microsoft YaHei" pitchFamily="34" charset="-122"/>
+                          <a:cs typeface="Microsoft YaHei" pitchFamily="34" charset="-120"/>
+                        </a:rPr>
+                        <a:t>0.00%</a:t>
+                      </a:r>
+                      <a:endParaRPr lang="en-US" sz="1250" dirty="0">
+                        <a:latin typeface="Microsoft YaHei" charset="0"/>
+                        <a:ea typeface="Microsoft YaHei" charset="0"/>
+                        <a:cs typeface="Microsoft YaHei" charset="0"/>
+                      </a:endParaRPr>
+                    </a:p>
+                  </a:txBody>
+                  <a:tcPr marL="91440" marR="91440" marT="45720" marB="45720" anchor="ctr">
+                    <a:lnL w="6350" cap="flat" cmpd="sng" algn="ctr">
+                      <a:solidFill>
+                        <a:srgbClr val="D8DBE0"/>
+                      </a:solidFill>
+                      <a:prstDash val="solid"/>
+                      <a:round/>
+                      <a:headEnd type="none" w="med" len="med"/>
+                      <a:tailEnd type="none" w="med" len="med"/>
+                    </a:lnL>
+                    <a:lnR w="6350" cap="flat" cmpd="sng" algn="ctr">
+                      <a:solidFill>
+                        <a:srgbClr val="D8DBE0"/>
+                      </a:solidFill>
+                      <a:prstDash val="solid"/>
+                      <a:round/>
+                      <a:headEnd type="none" w="med" len="med"/>
+                      <a:tailEnd type="none" w="med" len="med"/>
+                    </a:lnR>
+                    <a:lnT w="6350" cap="flat" cmpd="sng" algn="ctr">
+                      <a:solidFill>
+                        <a:srgbClr val="D8DBE0"/>
+                      </a:solidFill>
+                      <a:prstDash val="solid"/>
+                      <a:round/>
+                      <a:headEnd type="none" w="med" len="med"/>
+                      <a:tailEnd type="none" w="med" len="med"/>
+                    </a:lnT>
+                    <a:lnB w="6350" cap="flat" cmpd="sng" algn="ctr">
+                      <a:solidFill>
+                        <a:srgbClr val="D8DBE0"/>
+                      </a:solidFill>
+                      <a:prstDash val="solid"/>
+                      <a:round/>
+                      <a:headEnd type="none" w="med" len="med"/>
+                      <a:tailEnd type="none" w="med" len="med"/>
+                    </a:lnB>
+                  </a:tcPr>
+                </a:tc>
+                <a:tc>
+                  <a:txBody>
+                    <a:bodyPr/>
+                    <a:lstStyle/>
+                    <a:p>
+                      <a:pPr indent="0" marL="0">
+                        <a:buNone/>
+                      </a:pPr>
+                      <a:r>
+                        <a:rPr lang="en-US" sz="1250" dirty="0">
+                          <a:solidFill>
+                            <a:srgbClr val="1A1A1A"/>
+                          </a:solidFill>
+                          <a:latin typeface="Microsoft YaHei" pitchFamily="34" charset="0"/>
+                          <a:ea typeface="Microsoft YaHei" pitchFamily="34" charset="-122"/>
+                          <a:cs typeface="Microsoft YaHei" pitchFamily="34" charset="-120"/>
+                        </a:rPr>
+                        <a:t>20 / 78</a:t>
+                      </a:r>
+                      <a:endParaRPr lang="en-US" sz="1250" dirty="0">
+                        <a:latin typeface="Microsoft YaHei" charset="0"/>
+                        <a:ea typeface="Microsoft YaHei" charset="0"/>
+                        <a:cs typeface="Microsoft YaHei" charset="0"/>
+                      </a:endParaRPr>
+                    </a:p>
+                  </a:txBody>
+                  <a:tcPr marL="91440" marR="91440" marT="45720" marB="45720" anchor="ctr">
+                    <a:lnL w="6350" cap="flat" cmpd="sng" algn="ctr">
+                      <a:solidFill>
+                        <a:srgbClr val="D8DBE0"/>
+                      </a:solidFill>
+                      <a:prstDash val="solid"/>
+                      <a:round/>
+                      <a:headEnd type="none" w="med" len="med"/>
+                      <a:tailEnd type="none" w="med" len="med"/>
+                    </a:lnL>
+                    <a:lnR w="6350" cap="flat" cmpd="sng" algn="ctr">
+                      <a:solidFill>
+                        <a:srgbClr val="D8DBE0"/>
+                      </a:solidFill>
+                      <a:prstDash val="solid"/>
+                      <a:round/>
+                      <a:headEnd type="none" w="med" len="med"/>
+                      <a:tailEnd type="none" w="med" len="med"/>
+                    </a:lnR>
+                    <a:lnT w="6350" cap="flat" cmpd="sng" algn="ctr">
+                      <a:solidFill>
+                        <a:srgbClr val="D8DBE0"/>
+                      </a:solidFill>
+                      <a:prstDash val="solid"/>
+                      <a:round/>
+                      <a:headEnd type="none" w="med" len="med"/>
+                      <a:tailEnd type="none" w="med" len="med"/>
+                    </a:lnT>
+                    <a:lnB w="6350" cap="flat" cmpd="sng" algn="ctr">
+                      <a:solidFill>
+                        <a:srgbClr val="D8DBE0"/>
+                      </a:solidFill>
+                      <a:prstDash val="solid"/>
+                      <a:round/>
+                      <a:headEnd type="none" w="med" len="med"/>
+                      <a:tailEnd type="none" w="med" len="med"/>
+                    </a:lnB>
+                  </a:tcPr>
+                </a:tc>
+              </a:tr>
+              <a:tr h="384048">
+                <a:tc>
+                  <a:txBody>
+                    <a:bodyPr/>
+                    <a:lstStyle/>
+                    <a:p>
+                      <a:pPr indent="0" marL="0">
+                        <a:buNone/>
+                      </a:pPr>
+                      <a:r>
+                        <a:rPr lang="en-US" sz="1250" dirty="0">
+                          <a:solidFill>
+                            <a:srgbClr val="1A1A1A"/>
+                          </a:solidFill>
+                          <a:latin typeface="Microsoft YaHei" pitchFamily="34" charset="0"/>
+                          <a:ea typeface="Microsoft YaHei" pitchFamily="34" charset="-122"/>
+                          <a:cs typeface="Microsoft YaHei" pitchFamily="34" charset="-120"/>
+                        </a:rPr>
+                        <a:t>人·肺 肥大细胞（HLCA）</a:t>
+                      </a:r>
+                      <a:endParaRPr lang="en-US" sz="1250" dirty="0">
+                        <a:latin typeface="Microsoft YaHei" charset="0"/>
+                        <a:ea typeface="Microsoft YaHei" charset="0"/>
+                        <a:cs typeface="Microsoft YaHei" charset="0"/>
+                      </a:endParaRPr>
+                    </a:p>
+                  </a:txBody>
+                  <a:tcPr marL="91440" marR="91440" marT="45720" marB="45720" anchor="ctr">
+                    <a:lnL w="6350" cap="flat" cmpd="sng" algn="ctr">
+                      <a:solidFill>
+                        <a:srgbClr val="D8DBE0"/>
+                      </a:solidFill>
+                      <a:prstDash val="solid"/>
+                      <a:round/>
+                      <a:headEnd type="none" w="med" len="med"/>
+                      <a:tailEnd type="none" w="med" len="med"/>
+                    </a:lnL>
+                    <a:lnR w="6350" cap="flat" cmpd="sng" algn="ctr">
+                      <a:solidFill>
+                        <a:srgbClr val="D8DBE0"/>
+                      </a:solidFill>
+                      <a:prstDash val="solid"/>
+                      <a:round/>
+                      <a:headEnd type="none" w="med" len="med"/>
+                      <a:tailEnd type="none" w="med" len="med"/>
+                    </a:lnR>
+                    <a:lnT w="6350" cap="flat" cmpd="sng" algn="ctr">
+                      <a:solidFill>
+                        <a:srgbClr val="D8DBE0"/>
+                      </a:solidFill>
+                      <a:prstDash val="solid"/>
+                      <a:round/>
+                      <a:headEnd type="none" w="med" len="med"/>
+                      <a:tailEnd type="none" w="med" len="med"/>
+                    </a:lnT>
+                    <a:lnB w="6350" cap="flat" cmpd="sng" algn="ctr">
+                      <a:solidFill>
+                        <a:srgbClr val="D8DBE0"/>
+                      </a:solidFill>
+                      <a:prstDash val="solid"/>
+                      <a:round/>
+                      <a:headEnd type="none" w="med" len="med"/>
+                      <a:tailEnd type="none" w="med" len="med"/>
+                    </a:lnB>
+                  </a:tcPr>
+                </a:tc>
+                <a:tc>
+                  <a:txBody>
+                    <a:bodyPr/>
+                    <a:lstStyle/>
+                    <a:p>
+                      <a:pPr indent="0" marL="0">
+                        <a:buNone/>
+                      </a:pPr>
+                      <a:r>
+                        <a:rPr lang="en-US" sz="1250" dirty="0">
+                          <a:solidFill>
+                            <a:srgbClr val="1A1A1A"/>
+                          </a:solidFill>
+                          <a:latin typeface="Microsoft YaHei" pitchFamily="34" charset="0"/>
+                          <a:ea typeface="Microsoft YaHei" pitchFamily="34" charset="-122"/>
+                          <a:cs typeface="Microsoft YaHei" pitchFamily="34" charset="-120"/>
+                        </a:rPr>
+                        <a:t>138 / 5299</a:t>
+                      </a:r>
+                      <a:endParaRPr lang="en-US" sz="1250" dirty="0">
+                        <a:latin typeface="Microsoft YaHei" charset="0"/>
+                        <a:ea typeface="Microsoft YaHei" charset="0"/>
+                        <a:cs typeface="Microsoft YaHei" charset="0"/>
+                      </a:endParaRPr>
+                    </a:p>
+                  </a:txBody>
+                  <a:tcPr marL="91440" marR="91440" marT="45720" marB="45720" anchor="ctr">
+                    <a:lnL w="6350" cap="flat" cmpd="sng" algn="ctr">
+                      <a:solidFill>
+                        <a:srgbClr val="D8DBE0"/>
+                      </a:solidFill>
+                      <a:prstDash val="solid"/>
+                      <a:round/>
+                      <a:headEnd type="none" w="med" len="med"/>
+                      <a:tailEnd type="none" w="med" len="med"/>
+                    </a:lnL>
+                    <a:lnR w="6350" cap="flat" cmpd="sng" algn="ctr">
+                      <a:solidFill>
+                        <a:srgbClr val="D8DBE0"/>
+                      </a:solidFill>
+                      <a:prstDash val="solid"/>
+                      <a:round/>
+                      <a:headEnd type="none" w="med" len="med"/>
+                      <a:tailEnd type="none" w="med" len="med"/>
+                    </a:lnR>
+                    <a:lnT w="6350" cap="flat" cmpd="sng" algn="ctr">
+                      <a:solidFill>
+                        <a:srgbClr val="D8DBE0"/>
+                      </a:solidFill>
+                      <a:prstDash val="solid"/>
+                      <a:round/>
+                      <a:headEnd type="none" w="med" len="med"/>
+                      <a:tailEnd type="none" w="med" len="med"/>
+                    </a:lnT>
+                    <a:lnB w="6350" cap="flat" cmpd="sng" algn="ctr">
+                      <a:solidFill>
+                        <a:srgbClr val="D8DBE0"/>
+                      </a:solidFill>
+                      <a:prstDash val="solid"/>
+                      <a:round/>
+                      <a:headEnd type="none" w="med" len="med"/>
+                      <a:tailEnd type="none" w="med" len="med"/>
+                    </a:lnB>
+                  </a:tcPr>
+                </a:tc>
+                <a:tc>
+                  <a:txBody>
+                    <a:bodyPr/>
+                    <a:lstStyle/>
+                    <a:p>
+                      <a:pPr indent="0" marL="0">
+                        <a:buNone/>
+                      </a:pPr>
+                      <a:r>
+                        <a:rPr lang="en-US" sz="1250" dirty="0">
+                          <a:solidFill>
+                            <a:srgbClr val="1A1A1A"/>
+                          </a:solidFill>
+                          <a:latin typeface="Microsoft YaHei" pitchFamily="34" charset="0"/>
+                          <a:ea typeface="Microsoft YaHei" pitchFamily="34" charset="-122"/>
+                          <a:cs typeface="Microsoft YaHei" pitchFamily="34" charset="-120"/>
+                        </a:rPr>
+                        <a:t>2.6%</a:t>
+                      </a:r>
+                      <a:endParaRPr lang="en-US" sz="1250" dirty="0">
+                        <a:latin typeface="Microsoft YaHei" charset="0"/>
+                        <a:ea typeface="Microsoft YaHei" charset="0"/>
+                        <a:cs typeface="Microsoft YaHei" charset="0"/>
+                      </a:endParaRPr>
+                    </a:p>
+                  </a:txBody>
+                  <a:tcPr marL="91440" marR="91440" marT="45720" marB="45720" anchor="ctr">
+                    <a:lnL w="6350" cap="flat" cmpd="sng" algn="ctr">
+                      <a:solidFill>
+                        <a:srgbClr val="D8DBE0"/>
+                      </a:solidFill>
+                      <a:prstDash val="solid"/>
+                      <a:round/>
+                      <a:headEnd type="none" w="med" len="med"/>
+                      <a:tailEnd type="none" w="med" len="med"/>
+                    </a:lnL>
+                    <a:lnR w="6350" cap="flat" cmpd="sng" algn="ctr">
+                      <a:solidFill>
+                        <a:srgbClr val="D8DBE0"/>
+                      </a:solidFill>
+                      <a:prstDash val="solid"/>
+                      <a:round/>
+                      <a:headEnd type="none" w="med" len="med"/>
+                      <a:tailEnd type="none" w="med" len="med"/>
+                    </a:lnR>
+                    <a:lnT w="6350" cap="flat" cmpd="sng" algn="ctr">
+                      <a:solidFill>
+                        <a:srgbClr val="D8DBE0"/>
+                      </a:solidFill>
+                      <a:prstDash val="solid"/>
+                      <a:round/>
+                      <a:headEnd type="none" w="med" len="med"/>
+                      <a:tailEnd type="none" w="med" len="med"/>
+                    </a:lnT>
+                    <a:lnB w="6350" cap="flat" cmpd="sng" algn="ctr">
+                      <a:solidFill>
+                        <a:srgbClr val="D8DBE0"/>
+                      </a:solidFill>
+                      <a:prstDash val="solid"/>
+                      <a:round/>
+                      <a:headEnd type="none" w="med" len="med"/>
+                      <a:tailEnd type="none" w="med" len="med"/>
+                    </a:lnB>
+                  </a:tcPr>
+                </a:tc>
+                <a:tc>
+                  <a:txBody>
+                    <a:bodyPr/>
+                    <a:lstStyle/>
+                    <a:p>
+                      <a:pPr indent="0" marL="0">
+                        <a:buNone/>
+                      </a:pPr>
+                      <a:r>
+                        <a:rPr lang="en-US" sz="1250" dirty="0">
+                          <a:solidFill>
+                            <a:srgbClr val="1A1A1A"/>
+                          </a:solidFill>
+                          <a:latin typeface="Microsoft YaHei" pitchFamily="34" charset="0"/>
+                          <a:ea typeface="Microsoft YaHei" pitchFamily="34" charset="-122"/>
+                          <a:cs typeface="Microsoft YaHei" pitchFamily="34" charset="-120"/>
+                        </a:rPr>
+                        <a:t>0.00%</a:t>
+                      </a:r>
+                      <a:endParaRPr lang="en-US" sz="1250" dirty="0">
+                        <a:latin typeface="Microsoft YaHei" charset="0"/>
+                        <a:ea typeface="Microsoft YaHei" charset="0"/>
+                        <a:cs typeface="Microsoft YaHei" charset="0"/>
+                      </a:endParaRPr>
+                    </a:p>
+                  </a:txBody>
+                  <a:tcPr marL="91440" marR="91440" marT="45720" marB="45720" anchor="ctr">
+                    <a:lnL w="6350" cap="flat" cmpd="sng" algn="ctr">
+                      <a:solidFill>
+                        <a:srgbClr val="D8DBE0"/>
+                      </a:solidFill>
+                      <a:prstDash val="solid"/>
+                      <a:round/>
+                      <a:headEnd type="none" w="med" len="med"/>
+                      <a:tailEnd type="none" w="med" len="med"/>
+                    </a:lnL>
+                    <a:lnR w="6350" cap="flat" cmpd="sng" algn="ctr">
+                      <a:solidFill>
+                        <a:srgbClr val="D8DBE0"/>
+                      </a:solidFill>
+                      <a:prstDash val="solid"/>
+                      <a:round/>
+                      <a:headEnd type="none" w="med" len="med"/>
+                      <a:tailEnd type="none" w="med" len="med"/>
+                    </a:lnR>
+                    <a:lnT w="6350" cap="flat" cmpd="sng" algn="ctr">
+                      <a:solidFill>
+                        <a:srgbClr val="D8DBE0"/>
+                      </a:solidFill>
+                      <a:prstDash val="solid"/>
+                      <a:round/>
+                      <a:headEnd type="none" w="med" len="med"/>
+                      <a:tailEnd type="none" w="med" len="med"/>
+                    </a:lnT>
+                    <a:lnB w="6350" cap="flat" cmpd="sng" algn="ctr">
+                      <a:solidFill>
+                        <a:srgbClr val="D8DBE0"/>
+                      </a:solidFill>
+                      <a:prstDash val="solid"/>
+                      <a:round/>
+                      <a:headEnd type="none" w="med" len="med"/>
+                      <a:tailEnd type="none" w="med" len="med"/>
+                    </a:lnB>
+                  </a:tcPr>
+                </a:tc>
+                <a:tc>
+                  <a:txBody>
+                    <a:bodyPr/>
+                    <a:lstStyle/>
+                    <a:p>
+                      <a:pPr indent="0" marL="0">
+                        <a:buNone/>
+                      </a:pPr>
+                      <a:r>
+                        <a:rPr lang="en-US" sz="1250" dirty="0">
+                          <a:solidFill>
+                            <a:srgbClr val="1A1A1A"/>
+                          </a:solidFill>
+                          <a:latin typeface="Microsoft YaHei" pitchFamily="34" charset="0"/>
+                          <a:ea typeface="Microsoft YaHei" pitchFamily="34" charset="-122"/>
+                          <a:cs typeface="Microsoft YaHei" pitchFamily="34" charset="-120"/>
+                        </a:rPr>
+                        <a:t>21 / 44</a:t>
+                      </a:r>
+                      <a:endParaRPr lang="en-US" sz="1250" dirty="0">
+                        <a:latin typeface="Microsoft YaHei" charset="0"/>
+                        <a:ea typeface="Microsoft YaHei" charset="0"/>
+                        <a:cs typeface="Microsoft YaHei" charset="0"/>
+                      </a:endParaRPr>
+                    </a:p>
+                  </a:txBody>
+                  <a:tcPr marL="91440" marR="91440" marT="45720" marB="45720" anchor="ctr">
+                    <a:lnL w="6350" cap="flat" cmpd="sng" algn="ctr">
+                      <a:solidFill>
+                        <a:srgbClr val="D8DBE0"/>
+                      </a:solidFill>
+                      <a:prstDash val="solid"/>
+                      <a:round/>
+                      <a:headEnd type="none" w="med" len="med"/>
+                      <a:tailEnd type="none" w="med" len="med"/>
+                    </a:lnL>
+                    <a:lnR w="6350" cap="flat" cmpd="sng" algn="ctr">
+                      <a:solidFill>
+                        <a:srgbClr val="D8DBE0"/>
+                      </a:solidFill>
+                      <a:prstDash val="solid"/>
+                      <a:round/>
+                      <a:headEnd type="none" w="med" len="med"/>
+                      <a:tailEnd type="none" w="med" len="med"/>
+                    </a:lnR>
+                    <a:lnT w="6350" cap="flat" cmpd="sng" algn="ctr">
+                      <a:solidFill>
+                        <a:srgbClr val="D8DBE0"/>
+                      </a:solidFill>
+                      <a:prstDash val="solid"/>
+                      <a:round/>
+                      <a:headEnd type="none" w="med" len="med"/>
+                      <a:tailEnd type="none" w="med" len="med"/>
+                    </a:lnT>
+                    <a:lnB w="6350" cap="flat" cmpd="sng" algn="ctr">
+                      <a:solidFill>
+                        <a:srgbClr val="D8DBE0"/>
+                      </a:solidFill>
+                      <a:prstDash val="solid"/>
+                      <a:round/>
+                      <a:headEnd type="none" w="med" len="med"/>
+                      <a:tailEnd type="none" w="med" len="med"/>
+                    </a:lnB>
+                  </a:tcPr>
+                </a:tc>
+              </a:tr>
+              <a:tr h="384048">
+                <a:tc>
+                  <a:txBody>
+                    <a:bodyPr/>
+                    <a:lstStyle/>
+                    <a:p>
+                      <a:pPr indent="0" marL="0">
+                        <a:buNone/>
+                      </a:pPr>
+                      <a:r>
+                        <a:rPr lang="en-US" sz="1250" dirty="0">
+                          <a:solidFill>
+                            <a:srgbClr val="1A1A1A"/>
+                          </a:solidFill>
+                          <a:latin typeface="Microsoft YaHei" pitchFamily="34" charset="0"/>
+                          <a:ea typeface="Microsoft YaHei" pitchFamily="34" charset="-122"/>
+                          <a:cs typeface="Microsoft YaHei" pitchFamily="34" charset="-120"/>
+                        </a:rPr>
+                        <a:t>小鼠·脑 星形胶质</a:t>
+                      </a:r>
+                      <a:endParaRPr lang="en-US" sz="1250" dirty="0">
+                        <a:latin typeface="Microsoft YaHei" charset="0"/>
+                        <a:ea typeface="Microsoft YaHei" charset="0"/>
+                        <a:cs typeface="Microsoft YaHei" charset="0"/>
+                      </a:endParaRPr>
+                    </a:p>
+                  </a:txBody>
+                  <a:tcPr marL="91440" marR="91440" marT="45720" marB="45720" anchor="ctr">
+                    <a:lnL w="6350" cap="flat" cmpd="sng" algn="ctr">
+                      <a:solidFill>
+                        <a:srgbClr val="D8DBE0"/>
+                      </a:solidFill>
+                      <a:prstDash val="solid"/>
+                      <a:round/>
+                      <a:headEnd type="none" w="med" len="med"/>
+                      <a:tailEnd type="none" w="med" len="med"/>
+                    </a:lnL>
+                    <a:lnR w="6350" cap="flat" cmpd="sng" algn="ctr">
+                      <a:solidFill>
+                        <a:srgbClr val="D8DBE0"/>
+                      </a:solidFill>
+                      <a:prstDash val="solid"/>
+                      <a:round/>
+                      <a:headEnd type="none" w="med" len="med"/>
+                      <a:tailEnd type="none" w="med" len="med"/>
+                    </a:lnR>
+                    <a:lnT w="6350" cap="flat" cmpd="sng" algn="ctr">
+                      <a:solidFill>
+                        <a:srgbClr val="D8DBE0"/>
+                      </a:solidFill>
+                      <a:prstDash val="solid"/>
+                      <a:round/>
+                      <a:headEnd type="none" w="med" len="med"/>
+                      <a:tailEnd type="none" w="med" len="med"/>
+                    </a:lnT>
+                    <a:lnB w="6350" cap="flat" cmpd="sng" algn="ctr">
+                      <a:solidFill>
+                        <a:srgbClr val="D8DBE0"/>
+                      </a:solidFill>
+                      <a:prstDash val="solid"/>
+                      <a:round/>
+                      <a:headEnd type="none" w="med" len="med"/>
+                      <a:tailEnd type="none" w="med" len="med"/>
+                    </a:lnB>
+                  </a:tcPr>
+                </a:tc>
+                <a:tc>
+                  <a:txBody>
+                    <a:bodyPr/>
+                    <a:lstStyle/>
+                    <a:p>
+                      <a:pPr indent="0" marL="0">
+                        <a:buNone/>
+                      </a:pPr>
+                      <a:r>
+                        <a:rPr lang="en-US" sz="1250" dirty="0">
+                          <a:solidFill>
+                            <a:srgbClr val="1A1A1A"/>
+                          </a:solidFill>
+                          <a:latin typeface="Microsoft YaHei" pitchFamily="34" charset="0"/>
+                          <a:ea typeface="Microsoft YaHei" pitchFamily="34" charset="-122"/>
+                          <a:cs typeface="Microsoft YaHei" pitchFamily="34" charset="-120"/>
+                        </a:rPr>
+                        <a:t>2 / 3766</a:t>
+                      </a:r>
+                      <a:endParaRPr lang="en-US" sz="1250" dirty="0">
+                        <a:latin typeface="Microsoft YaHei" charset="0"/>
+                        <a:ea typeface="Microsoft YaHei" charset="0"/>
+                        <a:cs typeface="Microsoft YaHei" charset="0"/>
+                      </a:endParaRPr>
+                    </a:p>
+                  </a:txBody>
+                  <a:tcPr marL="91440" marR="91440" marT="45720" marB="45720" anchor="ctr">
+                    <a:lnL w="6350" cap="flat" cmpd="sng" algn="ctr">
+                      <a:solidFill>
+                        <a:srgbClr val="D8DBE0"/>
+                      </a:solidFill>
+                      <a:prstDash val="solid"/>
+                      <a:round/>
+                      <a:headEnd type="none" w="med" len="med"/>
+                      <a:tailEnd type="none" w="med" len="med"/>
+                    </a:lnL>
+                    <a:lnR w="6350" cap="flat" cmpd="sng" algn="ctr">
+                      <a:solidFill>
+                        <a:srgbClr val="D8DBE0"/>
+                      </a:solidFill>
+                      <a:prstDash val="solid"/>
+                      <a:round/>
+                      <a:headEnd type="none" w="med" len="med"/>
+                      <a:tailEnd type="none" w="med" len="med"/>
+                    </a:lnR>
+                    <a:lnT w="6350" cap="flat" cmpd="sng" algn="ctr">
+                      <a:solidFill>
+                        <a:srgbClr val="D8DBE0"/>
+                      </a:solidFill>
+                      <a:prstDash val="solid"/>
+                      <a:round/>
+                      <a:headEnd type="none" w="med" len="med"/>
+                      <a:tailEnd type="none" w="med" len="med"/>
+                    </a:lnT>
+                    <a:lnB w="6350" cap="flat" cmpd="sng" algn="ctr">
+                      <a:solidFill>
+                        <a:srgbClr val="D8DBE0"/>
+                      </a:solidFill>
+                      <a:prstDash val="solid"/>
+                      <a:round/>
+                      <a:headEnd type="none" w="med" len="med"/>
+                      <a:tailEnd type="none" w="med" len="med"/>
+                    </a:lnB>
+                  </a:tcPr>
+                </a:tc>
+                <a:tc>
+                  <a:txBody>
+                    <a:bodyPr/>
+                    <a:lstStyle/>
+                    <a:p>
+                      <a:pPr indent="0" marL="0">
+                        <a:buNone/>
+                      </a:pPr>
+                      <a:r>
+                        <a:rPr lang="en-US" sz="1250" dirty="0">
+                          <a:solidFill>
+                            <a:srgbClr val="1A1A1A"/>
+                          </a:solidFill>
+                          <a:latin typeface="Microsoft YaHei" pitchFamily="34" charset="0"/>
+                          <a:ea typeface="Microsoft YaHei" pitchFamily="34" charset="-122"/>
+                          <a:cs typeface="Microsoft YaHei" pitchFamily="34" charset="-120"/>
+                        </a:rPr>
+                        <a:t>0.05%</a:t>
+                      </a:r>
+                      <a:endParaRPr lang="en-US" sz="1250" dirty="0">
+                        <a:latin typeface="Microsoft YaHei" charset="0"/>
+                        <a:ea typeface="Microsoft YaHei" charset="0"/>
+                        <a:cs typeface="Microsoft YaHei" charset="0"/>
+                      </a:endParaRPr>
+                    </a:p>
+                  </a:txBody>
+                  <a:tcPr marL="91440" marR="91440" marT="45720" marB="45720" anchor="ctr">
+                    <a:lnL w="6350" cap="flat" cmpd="sng" algn="ctr">
+                      <a:solidFill>
+                        <a:srgbClr val="D8DBE0"/>
+                      </a:solidFill>
+                      <a:prstDash val="solid"/>
+                      <a:round/>
+                      <a:headEnd type="none" w="med" len="med"/>
+                      <a:tailEnd type="none" w="med" len="med"/>
+                    </a:lnL>
+                    <a:lnR w="6350" cap="flat" cmpd="sng" algn="ctr">
+                      <a:solidFill>
+                        <a:srgbClr val="D8DBE0"/>
+                      </a:solidFill>
+                      <a:prstDash val="solid"/>
+                      <a:round/>
+                      <a:headEnd type="none" w="med" len="med"/>
+                      <a:tailEnd type="none" w="med" len="med"/>
+                    </a:lnR>
+                    <a:lnT w="6350" cap="flat" cmpd="sng" algn="ctr">
+                      <a:solidFill>
+                        <a:srgbClr val="D8DBE0"/>
+                      </a:solidFill>
+                      <a:prstDash val="solid"/>
+                      <a:round/>
+                      <a:headEnd type="none" w="med" len="med"/>
+                      <a:tailEnd type="none" w="med" len="med"/>
+                    </a:lnT>
+                    <a:lnB w="6350" cap="flat" cmpd="sng" algn="ctr">
+                      <a:solidFill>
+                        <a:srgbClr val="D8DBE0"/>
+                      </a:solidFill>
+                      <a:prstDash val="solid"/>
+                      <a:round/>
+                      <a:headEnd type="none" w="med" len="med"/>
+                      <a:tailEnd type="none" w="med" len="med"/>
+                    </a:lnB>
+                  </a:tcPr>
+                </a:tc>
+                <a:tc>
+                  <a:txBody>
+                    <a:bodyPr/>
+                    <a:lstStyle/>
+                    <a:p>
+                      <a:pPr indent="0" marL="0">
+                        <a:buNone/>
+                      </a:pPr>
+                      <a:r>
+                        <a:rPr lang="en-US" sz="1250" dirty="0">
+                          <a:solidFill>
+                            <a:srgbClr val="1A1A1A"/>
+                          </a:solidFill>
+                          <a:latin typeface="Microsoft YaHei" pitchFamily="34" charset="0"/>
+                          <a:ea typeface="Microsoft YaHei" pitchFamily="34" charset="-122"/>
+                          <a:cs typeface="Microsoft YaHei" pitchFamily="34" charset="-120"/>
+                        </a:rPr>
+                        <a:t>0.00%</a:t>
+                      </a:r>
+                      <a:endParaRPr lang="en-US" sz="1250" dirty="0">
+                        <a:latin typeface="Microsoft YaHei" charset="0"/>
+                        <a:ea typeface="Microsoft YaHei" charset="0"/>
+                        <a:cs typeface="Microsoft YaHei" charset="0"/>
+                      </a:endParaRPr>
+                    </a:p>
+                  </a:txBody>
+                  <a:tcPr marL="91440" marR="91440" marT="45720" marB="45720" anchor="ctr">
+                    <a:lnL w="6350" cap="flat" cmpd="sng" algn="ctr">
+                      <a:solidFill>
+                        <a:srgbClr val="D8DBE0"/>
+                      </a:solidFill>
+                      <a:prstDash val="solid"/>
+                      <a:round/>
+                      <a:headEnd type="none" w="med" len="med"/>
+                      <a:tailEnd type="none" w="med" len="med"/>
+                    </a:lnL>
+                    <a:lnR w="6350" cap="flat" cmpd="sng" algn="ctr">
+                      <a:solidFill>
+                        <a:srgbClr val="D8DBE0"/>
+                      </a:solidFill>
+                      <a:prstDash val="solid"/>
+                      <a:round/>
+                      <a:headEnd type="none" w="med" len="med"/>
+                      <a:tailEnd type="none" w="med" len="med"/>
+                    </a:lnR>
+                    <a:lnT w="6350" cap="flat" cmpd="sng" algn="ctr">
+                      <a:solidFill>
+                        <a:srgbClr val="D8DBE0"/>
+                      </a:solidFill>
+                      <a:prstDash val="solid"/>
+                      <a:round/>
+                      <a:headEnd type="none" w="med" len="med"/>
+                      <a:tailEnd type="none" w="med" len="med"/>
+                    </a:lnT>
+                    <a:lnB w="6350" cap="flat" cmpd="sng" algn="ctr">
+                      <a:solidFill>
+                        <a:srgbClr val="D8DBE0"/>
+                      </a:solidFill>
+                      <a:prstDash val="solid"/>
+                      <a:round/>
+                      <a:headEnd type="none" w="med" len="med"/>
+                      <a:tailEnd type="none" w="med" len="med"/>
+                    </a:lnB>
+                  </a:tcPr>
+                </a:tc>
+                <a:tc>
+                  <a:txBody>
+                    <a:bodyPr/>
+                    <a:lstStyle/>
+                    <a:p>
+                      <a:pPr indent="0" marL="0">
+                        <a:buNone/>
+                      </a:pPr>
+                      <a:r>
+                        <a:rPr lang="en-US" sz="1250" dirty="0">
+                          <a:solidFill>
+                            <a:srgbClr val="1A1A1A"/>
+                          </a:solidFill>
+                          <a:latin typeface="Microsoft YaHei" pitchFamily="34" charset="0"/>
+                          <a:ea typeface="Microsoft YaHei" pitchFamily="34" charset="-122"/>
+                          <a:cs typeface="Microsoft YaHei" pitchFamily="34" charset="-120"/>
+                        </a:rPr>
+                        <a:t>2 / 40</a:t>
+                      </a:r>
+                      <a:endParaRPr lang="en-US" sz="1250" dirty="0">
+                        <a:latin typeface="Microsoft YaHei" charset="0"/>
+                        <a:ea typeface="Microsoft YaHei" charset="0"/>
+                        <a:cs typeface="Microsoft YaHei" charset="0"/>
+                      </a:endParaRPr>
+                    </a:p>
+                  </a:txBody>
+                  <a:tcPr marL="91440" marR="91440" marT="45720" marB="45720" anchor="ctr">
+                    <a:lnL w="6350" cap="flat" cmpd="sng" algn="ctr">
+                      <a:solidFill>
+                        <a:srgbClr val="D8DBE0"/>
+                      </a:solidFill>
+                      <a:prstDash val="solid"/>
+                      <a:round/>
+                      <a:headEnd type="none" w="med" len="med"/>
+                      <a:tailEnd type="none" w="med" len="med"/>
+                    </a:lnL>
+                    <a:lnR w="6350" cap="flat" cmpd="sng" algn="ctr">
+                      <a:solidFill>
+                        <a:srgbClr val="D8DBE0"/>
+                      </a:solidFill>
+                      <a:prstDash val="solid"/>
+                      <a:round/>
+                      <a:headEnd type="none" w="med" len="med"/>
+                      <a:tailEnd type="none" w="med" len="med"/>
+                    </a:lnR>
+                    <a:lnT w="6350" cap="flat" cmpd="sng" algn="ctr">
+                      <a:solidFill>
+                        <a:srgbClr val="D8DBE0"/>
+                      </a:solidFill>
+                      <a:prstDash val="solid"/>
+                      <a:round/>
+                      <a:headEnd type="none" w="med" len="med"/>
+                      <a:tailEnd type="none" w="med" len="med"/>
+                    </a:lnT>
+                    <a:lnB w="6350" cap="flat" cmpd="sng" algn="ctr">
+                      <a:solidFill>
+                        <a:srgbClr val="D8DBE0"/>
+                      </a:solidFill>
+                      <a:prstDash val="solid"/>
+                      <a:round/>
+                      <a:headEnd type="none" w="med" len="med"/>
+                      <a:tailEnd type="none" w="med" len="med"/>
+                    </a:lnB>
+                  </a:tcPr>
+                </a:tc>
+              </a:tr>
+              <a:tr h="384048">
+                <a:tc>
+                  <a:txBody>
+                    <a:bodyPr/>
+                    <a:lstStyle/>
+                    <a:p>
+                      <a:pPr indent="0" marL="0">
+                        <a:buNone/>
+                      </a:pPr>
+                      <a:r>
+                        <a:rPr lang="en-US" sz="1250" dirty="0">
+                          <a:solidFill>
+                            <a:srgbClr val="1A1A1A"/>
+                          </a:solidFill>
+                          <a:latin typeface="Microsoft YaHei" pitchFamily="34" charset="0"/>
+                          <a:ea typeface="Microsoft YaHei" pitchFamily="34" charset="-122"/>
+                          <a:cs typeface="Microsoft YaHei" pitchFamily="34" charset="-120"/>
+                        </a:rPr>
+                        <a:t>小鼠·脑 少突胶质</a:t>
+                      </a:r>
+                      <a:endParaRPr lang="en-US" sz="1250" dirty="0">
+                        <a:latin typeface="Microsoft YaHei" charset="0"/>
+                        <a:ea typeface="Microsoft YaHei" charset="0"/>
+                        <a:cs typeface="Microsoft YaHei" charset="0"/>
+                      </a:endParaRPr>
+                    </a:p>
+                  </a:txBody>
+                  <a:tcPr marL="91440" marR="91440" marT="45720" marB="45720" anchor="ctr">
+                    <a:lnL w="6350" cap="flat" cmpd="sng" algn="ctr">
+                      <a:solidFill>
+                        <a:srgbClr val="D8DBE0"/>
+                      </a:solidFill>
+                      <a:prstDash val="solid"/>
+                      <a:round/>
+                      <a:headEnd type="none" w="med" len="med"/>
+                      <a:tailEnd type="none" w="med" len="med"/>
+                    </a:lnL>
+                    <a:lnR w="6350" cap="flat" cmpd="sng" algn="ctr">
+                      <a:solidFill>
+                        <a:srgbClr val="D8DBE0"/>
+                      </a:solidFill>
+                      <a:prstDash val="solid"/>
+                      <a:round/>
+                      <a:headEnd type="none" w="med" len="med"/>
+                      <a:tailEnd type="none" w="med" len="med"/>
+                    </a:lnR>
+                    <a:lnT w="6350" cap="flat" cmpd="sng" algn="ctr">
+                      <a:solidFill>
+                        <a:srgbClr val="D8DBE0"/>
+                      </a:solidFill>
+                      <a:prstDash val="solid"/>
+                      <a:round/>
+                      <a:headEnd type="none" w="med" len="med"/>
+                      <a:tailEnd type="none" w="med" len="med"/>
+                    </a:lnT>
+                    <a:lnB w="6350" cap="flat" cmpd="sng" algn="ctr">
+                      <a:solidFill>
+                        <a:srgbClr val="D8DBE0"/>
+                      </a:solidFill>
+                      <a:prstDash val="solid"/>
+                      <a:round/>
+                      <a:headEnd type="none" w="med" len="med"/>
+                      <a:tailEnd type="none" w="med" len="med"/>
+                    </a:lnB>
+                  </a:tcPr>
+                </a:tc>
+                <a:tc>
+                  <a:txBody>
+                    <a:bodyPr/>
+                    <a:lstStyle/>
+                    <a:p>
+                      <a:pPr indent="0" marL="0">
+                        <a:buNone/>
+                      </a:pPr>
+                      <a:r>
+                        <a:rPr lang="en-US" sz="1250" dirty="0">
+                          <a:solidFill>
+                            <a:srgbClr val="1A1A1A"/>
+                          </a:solidFill>
+                          <a:latin typeface="Microsoft YaHei" pitchFamily="34" charset="0"/>
+                          <a:ea typeface="Microsoft YaHei" pitchFamily="34" charset="-122"/>
+                          <a:cs typeface="Microsoft YaHei" pitchFamily="34" charset="-120"/>
+                        </a:rPr>
+                        <a:t>2 / 8987</a:t>
+                      </a:r>
+                      <a:endParaRPr lang="en-US" sz="1250" dirty="0">
+                        <a:latin typeface="Microsoft YaHei" charset="0"/>
+                        <a:ea typeface="Microsoft YaHei" charset="0"/>
+                        <a:cs typeface="Microsoft YaHei" charset="0"/>
+                      </a:endParaRPr>
+                    </a:p>
+                  </a:txBody>
+                  <a:tcPr marL="91440" marR="91440" marT="45720" marB="45720" anchor="ctr">
+                    <a:lnL w="6350" cap="flat" cmpd="sng" algn="ctr">
+                      <a:solidFill>
+                        <a:srgbClr val="D8DBE0"/>
+                      </a:solidFill>
+                      <a:prstDash val="solid"/>
+                      <a:round/>
+                      <a:headEnd type="none" w="med" len="med"/>
+                      <a:tailEnd type="none" w="med" len="med"/>
+                    </a:lnL>
+                    <a:lnR w="6350" cap="flat" cmpd="sng" algn="ctr">
+                      <a:solidFill>
+                        <a:srgbClr val="D8DBE0"/>
+                      </a:solidFill>
+                      <a:prstDash val="solid"/>
+                      <a:round/>
+                      <a:headEnd type="none" w="med" len="med"/>
+                      <a:tailEnd type="none" w="med" len="med"/>
+                    </a:lnR>
+                    <a:lnT w="6350" cap="flat" cmpd="sng" algn="ctr">
+                      <a:solidFill>
+                        <a:srgbClr val="D8DBE0"/>
+                      </a:solidFill>
+                      <a:prstDash val="solid"/>
+                      <a:round/>
+                      <a:headEnd type="none" w="med" len="med"/>
+                      <a:tailEnd type="none" w="med" len="med"/>
+                    </a:lnT>
+                    <a:lnB w="6350" cap="flat" cmpd="sng" algn="ctr">
+                      <a:solidFill>
+                        <a:srgbClr val="D8DBE0"/>
+                      </a:solidFill>
+                      <a:prstDash val="solid"/>
+                      <a:round/>
+                      <a:headEnd type="none" w="med" len="med"/>
+                      <a:tailEnd type="none" w="med" len="med"/>
+                    </a:lnB>
+                  </a:tcPr>
+                </a:tc>
+                <a:tc>
+                  <a:txBody>
+                    <a:bodyPr/>
+                    <a:lstStyle/>
+                    <a:p>
+                      <a:pPr indent="0" marL="0">
+                        <a:buNone/>
+                      </a:pPr>
+                      <a:r>
+                        <a:rPr lang="en-US" sz="1250" dirty="0">
+                          <a:solidFill>
+                            <a:srgbClr val="1A1A1A"/>
+                          </a:solidFill>
+                          <a:latin typeface="Microsoft YaHei" pitchFamily="34" charset="0"/>
+                          <a:ea typeface="Microsoft YaHei" pitchFamily="34" charset="-122"/>
+                          <a:cs typeface="Microsoft YaHei" pitchFamily="34" charset="-120"/>
+                        </a:rPr>
+                        <a:t>0.02%</a:t>
+                      </a:r>
+                      <a:endParaRPr lang="en-US" sz="1250" dirty="0">
+                        <a:latin typeface="Microsoft YaHei" charset="0"/>
+                        <a:ea typeface="Microsoft YaHei" charset="0"/>
+                        <a:cs typeface="Microsoft YaHei" charset="0"/>
+                      </a:endParaRPr>
+                    </a:p>
+                  </a:txBody>
+                  <a:tcPr marL="91440" marR="91440" marT="45720" marB="45720" anchor="ctr">
+                    <a:lnL w="6350" cap="flat" cmpd="sng" algn="ctr">
+                      <a:solidFill>
+                        <a:srgbClr val="D8DBE0"/>
+                      </a:solidFill>
+                      <a:prstDash val="solid"/>
+                      <a:round/>
+                      <a:headEnd type="none" w="med" len="med"/>
+                      <a:tailEnd type="none" w="med" len="med"/>
+                    </a:lnL>
+                    <a:lnR w="6350" cap="flat" cmpd="sng" algn="ctr">
+                      <a:solidFill>
+                        <a:srgbClr val="D8DBE0"/>
+                      </a:solidFill>
+                      <a:prstDash val="solid"/>
+                      <a:round/>
+                      <a:headEnd type="none" w="med" len="med"/>
+                      <a:tailEnd type="none" w="med" len="med"/>
+                    </a:lnR>
+                    <a:lnT w="6350" cap="flat" cmpd="sng" algn="ctr">
+                      <a:solidFill>
+                        <a:srgbClr val="D8DBE0"/>
+                      </a:solidFill>
+                      <a:prstDash val="solid"/>
+                      <a:round/>
+                      <a:headEnd type="none" w="med" len="med"/>
+                      <a:tailEnd type="none" w="med" len="med"/>
+                    </a:lnT>
+                    <a:lnB w="6350" cap="flat" cmpd="sng" algn="ctr">
+                      <a:solidFill>
+                        <a:srgbClr val="D8DBE0"/>
+                      </a:solidFill>
+                      <a:prstDash val="solid"/>
+                      <a:round/>
+                      <a:headEnd type="none" w="med" len="med"/>
+                      <a:tailEnd type="none" w="med" len="med"/>
+                    </a:lnB>
+                  </a:tcPr>
+                </a:tc>
+                <a:tc>
+                  <a:txBody>
+                    <a:bodyPr/>
+                    <a:lstStyle/>
+                    <a:p>
+                      <a:pPr indent="0" marL="0">
+                        <a:buNone/>
+                      </a:pPr>
+                      <a:r>
+                        <a:rPr lang="en-US" sz="1250" dirty="0">
+                          <a:solidFill>
+                            <a:srgbClr val="1A1A1A"/>
+                          </a:solidFill>
+                          <a:latin typeface="Microsoft YaHei" pitchFamily="34" charset="0"/>
+                          <a:ea typeface="Microsoft YaHei" pitchFamily="34" charset="-122"/>
+                          <a:cs typeface="Microsoft YaHei" pitchFamily="34" charset="-120"/>
+                        </a:rPr>
+                        <a:t>0.00%</a:t>
+                      </a:r>
+                      <a:endParaRPr lang="en-US" sz="1250" dirty="0">
+                        <a:latin typeface="Microsoft YaHei" charset="0"/>
+                        <a:ea typeface="Microsoft YaHei" charset="0"/>
+                        <a:cs typeface="Microsoft YaHei" charset="0"/>
+                      </a:endParaRPr>
+                    </a:p>
+                  </a:txBody>
+                  <a:tcPr marL="91440" marR="91440" marT="45720" marB="45720" anchor="ctr">
+                    <a:lnL w="6350" cap="flat" cmpd="sng" algn="ctr">
+                      <a:solidFill>
+                        <a:srgbClr val="D8DBE0"/>
+                      </a:solidFill>
+                      <a:prstDash val="solid"/>
+                      <a:round/>
+                      <a:headEnd type="none" w="med" len="med"/>
+                      <a:tailEnd type="none" w="med" len="med"/>
+                    </a:lnL>
+                    <a:lnR w="6350" cap="flat" cmpd="sng" algn="ctr">
+                      <a:solidFill>
+                        <a:srgbClr val="D8DBE0"/>
+                      </a:solidFill>
+                      <a:prstDash val="solid"/>
+                      <a:round/>
+                      <a:headEnd type="none" w="med" len="med"/>
+                      <a:tailEnd type="none" w="med" len="med"/>
+                    </a:lnR>
+                    <a:lnT w="6350" cap="flat" cmpd="sng" algn="ctr">
+                      <a:solidFill>
+                        <a:srgbClr val="D8DBE0"/>
+                      </a:solidFill>
+                      <a:prstDash val="solid"/>
+                      <a:round/>
+                      <a:headEnd type="none" w="med" len="med"/>
+                      <a:tailEnd type="none" w="med" len="med"/>
+                    </a:lnT>
+                    <a:lnB w="6350" cap="flat" cmpd="sng" algn="ctr">
+                      <a:solidFill>
+                        <a:srgbClr val="D8DBE0"/>
+                      </a:solidFill>
+                      <a:prstDash val="solid"/>
+                      <a:round/>
+                      <a:headEnd type="none" w="med" len="med"/>
+                      <a:tailEnd type="none" w="med" len="med"/>
+                    </a:lnB>
+                  </a:tcPr>
+                </a:tc>
+                <a:tc>
+                  <a:txBody>
+                    <a:bodyPr/>
+                    <a:lstStyle/>
+                    <a:p>
+                      <a:pPr indent="0" marL="0">
+                        <a:buNone/>
+                      </a:pPr>
+                      <a:r>
+                        <a:rPr lang="en-US" sz="1250" dirty="0">
+                          <a:solidFill>
+                            <a:srgbClr val="1A1A1A"/>
+                          </a:solidFill>
+                          <a:latin typeface="Microsoft YaHei" pitchFamily="34" charset="0"/>
+                          <a:ea typeface="Microsoft YaHei" pitchFamily="34" charset="-122"/>
+                          <a:cs typeface="Microsoft YaHei" pitchFamily="34" charset="-120"/>
+                        </a:rPr>
+                        <a:t>2 / 55</a:t>
+                      </a:r>
+                      <a:endParaRPr lang="en-US" sz="1250" dirty="0">
+                        <a:latin typeface="Microsoft YaHei" charset="0"/>
+                        <a:ea typeface="Microsoft YaHei" charset="0"/>
+                        <a:cs typeface="Microsoft YaHei" charset="0"/>
+                      </a:endParaRPr>
+                    </a:p>
+                  </a:txBody>
+                  <a:tcPr marL="91440" marR="91440" marT="45720" marB="45720" anchor="ctr">
+                    <a:lnL w="6350" cap="flat" cmpd="sng" algn="ctr">
+                      <a:solidFill>
+                        <a:srgbClr val="D8DBE0"/>
+                      </a:solidFill>
+                      <a:prstDash val="solid"/>
+                      <a:round/>
+                      <a:headEnd type="none" w="med" len="med"/>
+                      <a:tailEnd type="none" w="med" len="med"/>
+                    </a:lnL>
+                    <a:lnR w="6350" cap="flat" cmpd="sng" algn="ctr">
+                      <a:solidFill>
+                        <a:srgbClr val="D8DBE0"/>
+                      </a:solidFill>
+                      <a:prstDash val="solid"/>
+                      <a:round/>
+                      <a:headEnd type="none" w="med" len="med"/>
+                      <a:tailEnd type="none" w="med" len="med"/>
+                    </a:lnR>
+                    <a:lnT w="6350" cap="flat" cmpd="sng" algn="ctr">
+                      <a:solidFill>
+                        <a:srgbClr val="D8DBE0"/>
+                      </a:solidFill>
+                      <a:prstDash val="solid"/>
+                      <a:round/>
+                      <a:headEnd type="none" w="med" len="med"/>
+                      <a:tailEnd type="none" w="med" len="med"/>
+                    </a:lnT>
+                    <a:lnB w="6350" cap="flat" cmpd="sng" algn="ctr">
+                      <a:solidFill>
+                        <a:srgbClr val="D8DBE0"/>
+                      </a:solidFill>
+                      <a:prstDash val="solid"/>
+                      <a:round/>
+                      <a:headEnd type="none" w="med" len="med"/>
+                      <a:tailEnd type="none" w="med" len="med"/>
+                    </a:lnB>
+                  </a:tcPr>
+                </a:tc>
+              </a:tr>
+            </a:tbl>
+          </a:graphicData>
+        </a:graphic>
+      </p:graphicFrame>
+      <p:sp>
+        <p:nvSpPr>
+          <p:cNvPr id="5" name="Text 2"/>
           <p:cNvSpPr txBox="1"/>
           <p:nvPr/>
         </p:nvSpPr>
         <p:spPr>
           <a:xfrm>
-            <a:off x="731520" y="2468880"/>
-            <a:ext cx="2651760" cy="822960"/>
+            <a:off x="731520" y="4663440"/>
+            <a:ext cx="10698480" cy="822960"/>
           </a:xfrm>
           <a:prstGeom prst="rect">
             <a:avLst/>
@@ -4349,51 +4654,12 @@
           <a:ln/>
         </p:spPr>
         <p:txBody>
-          <a:bodyPr wrap="square" rtlCol="0" anchor="t"/>
-          <a:lstStyle/>
-          <a:p>
-            <a:pPr indent="0" marL="0">
-              <a:buNone/>
-            </a:pPr>
-            <a:r>
-              <a:rPr lang="en-US" sz="1350" b="1" dirty="0">
-                <a:solidFill>
-                  <a:srgbClr val="1A1A1A"/>
-                </a:solidFill>
-                <a:latin typeface="Microsoft YaHei" pitchFamily="34" charset="0"/>
-                <a:ea typeface="Microsoft YaHei" pitchFamily="34" charset="-122"/>
-                <a:cs typeface="Microsoft YaHei" pitchFamily="34" charset="-120"/>
-              </a:rPr>
-              <a:t>小鼠脑（Zhang 分选）</a:t>
-            </a:r>
-            <a:endParaRPr lang="en-US" sz="1350" dirty="0"/>
-          </a:p>
-        </p:txBody>
-      </p:sp>
-      <p:sp>
-        <p:nvSpPr>
-          <p:cNvPr id="5" name="Text 3"/>
-          <p:cNvSpPr txBox="1"/>
-          <p:nvPr/>
-        </p:nvSpPr>
-        <p:spPr>
-          <a:xfrm>
-            <a:off x="3566160" y="2468880"/>
-            <a:ext cx="7955280" cy="822960"/>
-          </a:xfrm>
-          <a:prstGeom prst="rect">
-            <a:avLst/>
-          </a:prstGeom>
-          <a:noFill/>
-          <a:ln/>
-        </p:spPr>
-        <p:txBody>
-          <a:bodyPr wrap="square" rtlCol="0" anchor="t"/>
+          <a:bodyPr wrap="square" rtlCol="0" anchor="ctr"/>
           <a:lstStyle/>
           <a:p>
             <a:pPr indent="0" marL="0">
               <a:lnSpc>
-                <a:spcPct val="115000"/>
+                <a:spcPct val="120000"/>
               </a:lnSpc>
               <a:buNone/>
             </a:pPr>
@@ -4406,7 +4672,7 @@
                 <a:ea typeface="Microsoft YaHei" pitchFamily="34" charset="-122"/>
                 <a:cs typeface="Microsoft YaHei" pitchFamily="34" charset="-120"/>
               </a:rPr>
-              <a:t>星形胶质 Il18 115.1 / Casp1 1.13 FPKM（约 102 倍）；少突胶质 24.7 / 0.12。</a:t>
+              <a:t>同样显示「0.0%」的两行真实检出率可以差一百倍：肥大细胞 2.60%（138 个阳性细胞、21/44 供体）是真有信号；少突胶质 0.02%（8987 个细胞里 2 个）才是在充分样本下的真·近零。</a:t>
             </a:r>
             <a:endParaRPr lang="en-US" sz="1350" dirty="0"/>
           </a:p>
@@ -4414,14 +4680,14 @@
       </p:sp>
       <p:sp>
         <p:nvSpPr>
-          <p:cNvPr id="6" name="Text 4"/>
+          <p:cNvPr id="6" name="Text 3"/>
           <p:cNvSpPr txBox="1"/>
           <p:nvPr/>
         </p:nvSpPr>
         <p:spPr>
           <a:xfrm>
-            <a:off x="731520" y="3429000"/>
-            <a:ext cx="2651760" cy="822960"/>
+            <a:off x="640080" y="6355080"/>
+            <a:ext cx="10972800" cy="347472"/>
           </a:xfrm>
           <a:prstGeom prst="rect">
             <a:avLst/>
@@ -4430,147 +4696,24 @@
           <a:ln/>
         </p:spPr>
         <p:txBody>
-          <a:bodyPr wrap="square" rtlCol="0" anchor="t"/>
+          <a:bodyPr wrap="square" rtlCol="0" anchor="ctr"/>
           <a:lstStyle/>
           <a:p>
             <a:pPr indent="0" marL="0">
               <a:buNone/>
             </a:pPr>
             <a:r>
-              <a:rPr lang="en-US" sz="1350" b="1" dirty="0">
+              <a:rPr lang="en-US" sz="1050" dirty="0">
                 <a:solidFill>
-                  <a:srgbClr val="1A1A1A"/>
+                  <a:srgbClr val="6B6B6B"/>
                 </a:solidFill>
                 <a:latin typeface="Microsoft YaHei" pitchFamily="34" charset="0"/>
                 <a:ea typeface="Microsoft YaHei" pitchFamily="34" charset="-122"/>
                 <a:cs typeface="Microsoft YaHei" pitchFamily="34" charset="-120"/>
               </a:rPr>
-              <a:t>人脑（HPA 单核）</a:t>
-            </a:r>
-            <a:endParaRPr lang="en-US" sz="1350" dirty="0"/>
-          </a:p>
-        </p:txBody>
-      </p:sp>
-      <p:sp>
-        <p:nvSpPr>
-          <p:cNvPr id="7" name="Text 5"/>
-          <p:cNvSpPr txBox="1"/>
-          <p:nvPr/>
-        </p:nvSpPr>
-        <p:spPr>
-          <a:xfrm>
-            <a:off x="3566160" y="3429000"/>
-            <a:ext cx="7955280" cy="822960"/>
-          </a:xfrm>
-          <a:prstGeom prst="rect">
-            <a:avLst/>
-          </a:prstGeom>
-          <a:noFill/>
-          <a:ln/>
-        </p:spPr>
-        <p:txBody>
-          <a:bodyPr wrap="square" rtlCol="0" anchor="t"/>
-          <a:lstStyle/>
-          <a:p>
-            <a:pPr indent="0" marL="0">
-              <a:lnSpc>
-                <a:spcPct val="115000"/>
-              </a:lnSpc>
-              <a:buNone/>
-            </a:pPr>
-            <a:r>
-              <a:rPr lang="en-US" sz="1350" dirty="0">
-                <a:solidFill>
-                  <a:srgbClr val="1A1A1A"/>
-                </a:solidFill>
-                <a:latin typeface="Microsoft YaHei" pitchFamily="34" charset="0"/>
-                <a:ea typeface="Microsoft YaHei" pitchFamily="34" charset="-122"/>
-                <a:cs typeface="Microsoft YaHei" pitchFamily="34" charset="-120"/>
-              </a:rPr>
-              <a:t>小胶质 IL18 338.5 nCPM 压倒性最高，星形胶质仅 3.7、少突胶质 2.6。</a:t>
-            </a:r>
-            <a:endParaRPr lang="en-US" sz="1350" dirty="0"/>
-          </a:p>
-        </p:txBody>
-      </p:sp>
-      <p:sp>
-        <p:nvSpPr>
-          <p:cNvPr id="8" name="Text 6"/>
-          <p:cNvSpPr txBox="1"/>
-          <p:nvPr/>
-        </p:nvSpPr>
-        <p:spPr>
-          <a:xfrm>
-            <a:off x="731520" y="4389120"/>
-            <a:ext cx="2651760" cy="822960"/>
-          </a:xfrm>
-          <a:prstGeom prst="rect">
-            <a:avLst/>
-          </a:prstGeom>
-          <a:noFill/>
-          <a:ln/>
-        </p:spPr>
-        <p:txBody>
-          <a:bodyPr wrap="square" rtlCol="0" anchor="t"/>
-          <a:lstStyle/>
-          <a:p>
-            <a:pPr indent="0" marL="0">
-              <a:buNone/>
-            </a:pPr>
-            <a:r>
-              <a:rPr lang="en-US" sz="1350" b="1" dirty="0">
-                <a:solidFill>
-                  <a:srgbClr val="1A1A1A"/>
-                </a:solidFill>
-                <a:latin typeface="Microsoft YaHei" pitchFamily="34" charset="0"/>
-                <a:ea typeface="Microsoft YaHei" pitchFamily="34" charset="-122"/>
-                <a:cs typeface="Microsoft YaHei" pitchFamily="34" charset="-120"/>
-              </a:rPr>
-              <a:t>含义</a:t>
-            </a:r>
-            <a:endParaRPr lang="en-US" sz="1350" dirty="0"/>
-          </a:p>
-        </p:txBody>
-      </p:sp>
-      <p:sp>
-        <p:nvSpPr>
-          <p:cNvPr id="9" name="Text 7"/>
-          <p:cNvSpPr txBox="1"/>
-          <p:nvPr/>
-        </p:nvSpPr>
-        <p:spPr>
-          <a:xfrm>
-            <a:off x="3566160" y="4389120"/>
-            <a:ext cx="7955280" cy="822960"/>
-          </a:xfrm>
-          <a:prstGeom prst="rect">
-            <a:avLst/>
-          </a:prstGeom>
-          <a:noFill/>
-          <a:ln/>
-        </p:spPr>
-        <p:txBody>
-          <a:bodyPr wrap="square" rtlCol="0" anchor="t"/>
-          <a:lstStyle/>
-          <a:p>
-            <a:pPr indent="0" marL="0">
-              <a:lnSpc>
-                <a:spcPct val="115000"/>
-              </a:lnSpc>
-              <a:buNone/>
-            </a:pPr>
-            <a:r>
-              <a:rPr lang="en-US" sz="1350" dirty="0">
-                <a:solidFill>
-                  <a:srgbClr val="1A1A1A"/>
-                </a:solidFill>
-                <a:latin typeface="Microsoft YaHei" pitchFamily="34" charset="0"/>
-                <a:ea typeface="Microsoft YaHei" pitchFamily="34" charset="-122"/>
-                <a:cs typeface="Microsoft YaHei" pitchFamily="34" charset="-120"/>
-              </a:rPr>
-              <a:t>人脑的「IL18 高」属于小胶质，而人小胶质 CASP1 为 41.2 nCPM（比值 8.2），不满足「加工酶缺失」前提。人脑中目前没有对应的 A 级候选。</a:t>
-            </a:r>
-            <a:endParaRPr lang="en-US" sz="1350" dirty="0"/>
+              <a:t>分母 = 该细胞类型在该分层内、每位供体 ≥20 个细胞后进入分析的细胞总数；图中灰色短竖线为该行可检出的最低非零值 1/n。</a:t>
+            </a:r>
+            <a:endParaRPr lang="en-US" sz="1050" dirty="0"/>
           </a:p>
         </p:txBody>
       </p:sp>
@@ -4607,7 +4750,7 @@
         </p:nvSpPr>
         <p:spPr>
           <a:xfrm>
-            <a:off x="640080" y="457200"/>
+            <a:off x="640080" y="411480"/>
             <a:ext cx="10972800" cy="640080"/>
           </a:xfrm>
           <a:prstGeom prst="rect">
@@ -4624,7 +4767,134 @@
               <a:buNone/>
             </a:pPr>
             <a:r>
-              <a:rPr lang="en-US" sz="2500" b="1" dirty="0">
+              <a:rPr lang="en-US" sz="2400" b="1" dirty="0">
+                <a:solidFill>
+                  <a:srgbClr val="1A1A1A"/>
+                </a:solidFill>
+                <a:latin typeface="Microsoft YaHei" pitchFamily="34" charset="0"/>
+                <a:ea typeface="Microsoft YaHei" pitchFamily="34" charset="-122"/>
+                <a:cs typeface="Microsoft YaHei" pitchFamily="34" charset="-120"/>
+              </a:rPr>
+              <a:t>小鼠脑（单细胞）：胶质 IL18 可检、CASP1 近乎测不到</a:t>
+            </a:r>
+            <a:endParaRPr lang="en-US" sz="2400" dirty="0"/>
+          </a:p>
+        </p:txBody>
+      </p:sp>
+      <p:pic>
+        <p:nvPicPr>
+          <p:cNvPr id="3" name="Image 0" descr="/home/user/aaa/il18_casp5organ/figures/mouse/brain_cell_dots.png">    </p:cNvPr>
+          <p:cNvPicPr>
+            <a:picLocks noChangeAspect="1"/>
+          </p:cNvPicPr>
+          <p:nvPr/>
+        </p:nvPicPr>
+        <p:blipFill>
+          <a:blip r:embed="rId1"/>
+          <a:stretch>
+            <a:fillRect/>
+          </a:stretch>
+        </p:blipFill>
+        <p:spPr>
+          <a:xfrm>
+            <a:off x="724454" y="1115568"/>
+            <a:ext cx="10740044" cy="5212080"/>
+          </a:xfrm>
+          <a:prstGeom prst="rect">
+            <a:avLst/>
+          </a:prstGeom>
+        </p:spPr>
+      </p:pic>
+      <p:sp>
+        <p:nvSpPr>
+          <p:cNvPr id="4" name="Text 1"/>
+          <p:cNvSpPr txBox="1"/>
+          <p:nvPr/>
+        </p:nvSpPr>
+        <p:spPr>
+          <a:xfrm>
+            <a:off x="640080" y="6355080"/>
+            <a:ext cx="10972800" cy="347472"/>
+          </a:xfrm>
+          <a:prstGeom prst="rect">
+            <a:avLst/>
+          </a:prstGeom>
+          <a:noFill/>
+          <a:ln/>
+        </p:spPr>
+        <p:txBody>
+          <a:bodyPr wrap="square" rtlCol="0" anchor="ctr"/>
+          <a:lstStyle/>
+          <a:p>
+            <a:pPr indent="0" marL="0">
+              <a:buNone/>
+            </a:pPr>
+            <a:r>
+              <a:rPr lang="en-US" sz="1050" dirty="0">
+                <a:solidFill>
+                  <a:srgbClr val="6B6B6B"/>
+                </a:solidFill>
+                <a:latin typeface="Microsoft YaHei" pitchFamily="34" charset="0"/>
+                <a:ea typeface="Microsoft YaHei" pitchFamily="34" charset="-122"/>
+                <a:cs typeface="Microsoft YaHei" pitchFamily="34" charset="-120"/>
+              </a:rPr>
+              <a:t>星形胶质 IL18 56.7% 而 CASP1 仅 2/3766；小胶质 IL18 20.5% 但 CASP1 15/818 = 1.83%，是全脑最高的一档。</a:t>
+            </a:r>
+            <a:endParaRPr lang="en-US" sz="1050" dirty="0"/>
+          </a:p>
+        </p:txBody>
+      </p:sp>
+    </p:spTree>
+  </p:cSld>
+  <p:clrMapOvr>
+    <a:masterClrMapping/>
+  </p:clrMapOvr>
+</p:sld>
+</file>
+
+<file path=ppt/slides/slide8.xml><?xml version="1.0" encoding="utf-8"?>
+<p:sld xmlns:a="http://schemas.openxmlformats.org/drawingml/2006/main" xmlns:r="http://schemas.openxmlformats.org/officeDocument/2006/relationships" xmlns:p="http://schemas.openxmlformats.org/presentationml/2006/main">
+  <p:cSld name="Slide 8">
+    <p:spTree>
+      <p:nvGrpSpPr>
+        <p:cNvPr id="1" name=""/>
+        <p:cNvGrpSpPr/>
+        <p:nvPr/>
+      </p:nvGrpSpPr>
+      <p:grpSpPr>
+        <a:xfrm>
+          <a:off x="0" y="0"/>
+          <a:ext cx="0" cy="0"/>
+          <a:chOff x="0" y="0"/>
+          <a:chExt cx="0" cy="0"/>
+        </a:xfrm>
+      </p:grpSpPr>
+      <p:sp>
+        <p:nvSpPr>
+          <p:cNvPr id="2" name="Text 0"/>
+          <p:cNvSpPr txBox="1"/>
+          <p:nvPr/>
+        </p:nvSpPr>
+        <p:spPr>
+          <a:xfrm>
+            <a:off x="640080" y="411480"/>
+            <a:ext cx="10972800" cy="640080"/>
+          </a:xfrm>
+          <a:prstGeom prst="rect">
+            <a:avLst/>
+          </a:prstGeom>
+          <a:noFill/>
+          <a:ln/>
+        </p:spPr>
+        <p:txBody>
+          <a:bodyPr wrap="square" rtlCol="0" anchor="ctr"/>
+          <a:lstStyle/>
+          <a:p>
+            <a:pPr indent="0" marL="0">
+              <a:buNone/>
+            </a:pPr>
+            <a:r>
+              <a:rPr lang="en-US" sz="2400" b="1" dirty="0">
                 <a:solidFill>
                   <a:srgbClr val="1A1A1A"/>
                 </a:solidFill>
@@ -4634,7 +4904,7 @@
               </a:rPr>
               <a:t>限制</a:t>
             </a:r>
-            <a:endParaRPr lang="en-US" sz="2500" dirty="0"/>
+            <a:endParaRPr lang="en-US" sz="2400" dirty="0"/>
           </a:p>
         </p:txBody>
       </p:sp>
@@ -4646,8 +4916,8 @@
         </p:nvSpPr>
         <p:spPr>
           <a:xfrm>
-            <a:off x="731520" y="1691640"/>
-            <a:ext cx="10789920" cy="731520"/>
+            <a:off x="731520" y="1325880"/>
+            <a:ext cx="10789920" cy="822960"/>
           </a:xfrm>
           <a:prstGeom prst="rect">
             <a:avLst/>
@@ -4666,7 +4936,7 @@
               <a:buNone/>
             </a:pPr>
             <a:r>
-              <a:rPr lang="en-US" sz="1450" dirty="0">
+              <a:rPr lang="en-US" sz="1350" dirty="0">
                 <a:solidFill>
                   <a:srgbClr val="1A1A1A"/>
                 </a:solidFill>
@@ -4674,9 +4944,9 @@
                 <a:ea typeface="Microsoft YaHei" pitchFamily="34" charset="-122"/>
                 <a:cs typeface="Microsoft YaHei" pitchFamily="34" charset="-120"/>
               </a:rPr>
-              <a:t>环境 RNA 未校正：无 GPU、Census 源矩阵无空液滴；全部候选为待验证，对低表达的神经/胶质候选影响最大。</a:t>
-            </a:r>
-            <a:endParaRPr lang="en-US" sz="1450" dirty="0"/>
+              <a:t>环境 RNA 未校正：无 GPU、Census 源矩阵无空液滴；全部候选为待验证，对低表达的神经元/胶质候选影响最大。</a:t>
+            </a:r>
+            <a:endParaRPr lang="en-US" sz="1350" dirty="0"/>
           </a:p>
         </p:txBody>
       </p:sp>
@@ -4688,8 +4958,8 @@
         </p:nvSpPr>
         <p:spPr>
           <a:xfrm>
-            <a:off x="731520" y="2560320"/>
-            <a:ext cx="10789920" cy="731520"/>
+            <a:off x="731520" y="2221992"/>
+            <a:ext cx="10789920" cy="822960"/>
           </a:xfrm>
           <a:prstGeom prst="rect">
             <a:avLst/>
@@ -4708,7 +4978,7 @@
               <a:buNone/>
             </a:pPr>
             <a:r>
-              <a:rPr lang="en-US" sz="1450" dirty="0">
+              <a:rPr lang="en-US" sz="1350" dirty="0">
                 <a:solidFill>
                   <a:srgbClr val="1A1A1A"/>
                 </a:solidFill>
@@ -4716,9 +4986,9 @@
                 <a:ea typeface="Microsoft YaHei" pitchFamily="34" charset="-122"/>
                 <a:cs typeface="Microsoft YaHei" pitchFamily="34" charset="-120"/>
               </a:rPr>
-              <a:t>单核与单细胞不可混比；跨器官只比候选名单，跨物种不比表达量。</a:t>
-            </a:r>
-            <a:endParaRPr lang="en-US" sz="1450" dirty="0"/>
+              <a:t>单核与单细胞不可混比；跨器官只比候选名单，跨物种不比表达量。人脑的「可能」来自单细胞与单核两类数据，二者各自成立，不互为验证。</a:t>
+            </a:r>
+            <a:endParaRPr lang="en-US" sz="1350" dirty="0"/>
           </a:p>
         </p:txBody>
       </p:sp>
@@ -4730,8 +5000,8 @@
         </p:nvSpPr>
         <p:spPr>
           <a:xfrm>
-            <a:off x="731520" y="3429000"/>
-            <a:ext cx="10789920" cy="731520"/>
+            <a:off x="731520" y="3118104"/>
+            <a:ext cx="10789920" cy="822960"/>
           </a:xfrm>
           <a:prstGeom prst="rect">
             <a:avLst/>
@@ -4750,7 +5020,7 @@
               <a:buNone/>
             </a:pPr>
             <a:r>
-              <a:rPr lang="en-US" sz="1450" dirty="0">
+              <a:rPr lang="en-US" sz="1350" dirty="0">
                 <a:solidFill>
                   <a:srgbClr val="1A1A1A"/>
                 </a:solidFill>
@@ -4758,9 +5028,9 @@
                 <a:ea typeface="Microsoft YaHei" pitchFamily="34" charset="-122"/>
                 <a:cs typeface="Microsoft YaHei" pitchFamily="34" charset="-120"/>
               </a:rPr>
-              <a:t>三分位、CASP3 最低 20%、以及本次的 20 倍 / 3 倍参考比值分界均为工程取值，无生物学依据；完整数值已输出，可自行重切。</a:t>
-            </a:r>
-            <a:endParaRPr lang="en-US" sz="1450" dirty="0"/>
+              <a:t>人脑神经元的参考层只到「CNS 神经元」这一级，没有按中间神经元亚类分选的 bulk；该级参考里另有两个来源显示 CASP1 与 IL18 同量级，故为「可能」而非「确定」。</a:t>
+            </a:r>
+            <a:endParaRPr lang="en-US" sz="1350" dirty="0"/>
           </a:p>
         </p:txBody>
       </p:sp>
@@ -4772,8 +5042,8 @@
         </p:nvSpPr>
         <p:spPr>
           <a:xfrm>
-            <a:off x="731520" y="4297680"/>
-            <a:ext cx="10789920" cy="731520"/>
+            <a:off x="731520" y="4014216"/>
+            <a:ext cx="10789920" cy="822960"/>
           </a:xfrm>
           <a:prstGeom prst="rect">
             <a:avLst/>
@@ -4792,7 +5062,49 @@
               <a:buNone/>
             </a:pPr>
             <a:r>
-              <a:rPr lang="en-US" sz="1450" dirty="0">
+              <a:rPr lang="en-US" sz="1350" dirty="0">
+                <a:solidFill>
+                  <a:srgbClr val="1A1A1A"/>
+                </a:solidFill>
+                <a:latin typeface="Microsoft YaHei" pitchFamily="34" charset="0"/>
+                <a:ea typeface="Microsoft YaHei" pitchFamily="34" charset="-122"/>
+                <a:cs typeface="Microsoft YaHei" pitchFamily="34" charset="-120"/>
+              </a:rPr>
+              <a:t>三分位、CASP3 最低 20%、20 倍 / 3 倍比值分界均为工程取值，无生物学依据；完整数值已输出，可自行重切。</a:t>
+            </a:r>
+            <a:endParaRPr lang="en-US" sz="1350" dirty="0"/>
+          </a:p>
+        </p:txBody>
+      </p:sp>
+      <p:sp>
+        <p:nvSpPr>
+          <p:cNvPr id="7" name="Text 5"/>
+          <p:cNvSpPr txBox="1"/>
+          <p:nvPr/>
+        </p:nvSpPr>
+        <p:spPr>
+          <a:xfrm>
+            <a:off x="731520" y="4910328"/>
+            <a:ext cx="10789920" cy="822960"/>
+          </a:xfrm>
+          <a:prstGeom prst="rect">
+            <a:avLst/>
+          </a:prstGeom>
+          <a:noFill/>
+          <a:ln/>
+        </p:spPr>
+        <p:txBody>
+          <a:bodyPr wrap="square" rtlCol="0" anchor="t"/>
+          <a:lstStyle/>
+          <a:p>
+            <a:pPr indent="0" marL="0">
+              <a:lnSpc>
+                <a:spcPct val="115000"/>
+              </a:lnSpc>
+              <a:buNone/>
+            </a:pPr>
+            <a:r>
+              <a:rPr lang="en-US" sz="1350" dirty="0">
                 <a:solidFill>
                   <a:srgbClr val="1A1A1A"/>
                 </a:solidFill>
@@ -4802,7 +5114,7 @@
               </a:rPr>
               <a:t>IL18 转录本 ≠ pro-IL-18 蛋白储量；CASP3 mRNA ≠ caspase-3 酶活性；静息基线不回答刺激后 CASP1 能否诱导。</a:t>
             </a:r>
-            <a:endParaRPr lang="en-US" sz="1450" dirty="0"/>
+            <a:endParaRPr lang="en-US" sz="1350" dirty="0"/>
           </a:p>
         </p:txBody>
       </p:sp>

--- a/il18_casp5organ/IL18_CASP_五器官筛选.pptx
+++ b/il18_casp5organ/IL18_CASP_五器官筛选.pptx
@@ -1499,8 +1499,8 @@
         </p:nvSpPr>
         <p:spPr>
           <a:xfrm>
-            <a:off x="640080" y="1600200"/>
-            <a:ext cx="10972800" cy="914400"/>
+            <a:off x="640080" y="411480"/>
+            <a:ext cx="10972800" cy="640080"/>
           </a:xfrm>
           <a:prstGeom prst="rect">
             <a:avLst/>
@@ -1516,7 +1516,7 @@
               <a:buNone/>
             </a:pPr>
             <a:r>
-              <a:rPr lang="en-US" sz="3300" b="1" dirty="0">
+              <a:rPr lang="en-US" sz="2600" b="1" dirty="0">
                 <a:solidFill>
                   <a:srgbClr val="1A1A1A"/>
                 </a:solidFill>
@@ -1524,9 +1524,9 @@
                 <a:ea typeface="Microsoft YaHei" pitchFamily="34" charset="-122"/>
                 <a:cs typeface="Microsoft YaHei" pitchFamily="34" charset="-120"/>
               </a:rPr>
-              <a:t>哪些细胞 IL18 高且 CASP1 低</a:t>
+              <a:t>结论</a:t>
             </a:r>
-            <a:endParaRPr lang="en-US" sz="3300" dirty="0"/>
+            <a:endParaRPr lang="en-US" sz="2600" dirty="0"/>
           </a:p>
         </p:txBody>
       </p:sp>
@@ -1538,8 +1538,8 @@
         </p:nvSpPr>
         <p:spPr>
           <a:xfrm>
-            <a:off x="640080" y="2514600"/>
-            <a:ext cx="10972800" cy="457200"/>
+            <a:off x="731520" y="1143000"/>
+            <a:ext cx="10698480" cy="274320"/>
           </a:xfrm>
           <a:prstGeom prst="rect">
             <a:avLst/>
@@ -1555,7 +1555,85 @@
               <a:buNone/>
             </a:pPr>
             <a:r>
-              <a:rPr lang="en-US" sz="1600" dirty="0">
+              <a:rPr lang="en-US" sz="1250" b="1" dirty="0">
+                <a:solidFill>
+                  <a:srgbClr val="1B7A43"/>
+                </a:solidFill>
+                <a:latin typeface="Microsoft YaHei" pitchFamily="34" charset="0"/>
+                <a:ea typeface="Microsoft YaHei" pitchFamily="34" charset="-122"/>
+                <a:cs typeface="Microsoft YaHei" pitchFamily="34" charset="-120"/>
+              </a:rPr>
+              <a:t>确定 —— 两个以上独立参考来源一致</a:t>
+            </a:r>
+            <a:endParaRPr lang="en-US" sz="1250" dirty="0"/>
+          </a:p>
+        </p:txBody>
+      </p:sp>
+      <p:sp>
+        <p:nvSpPr>
+          <p:cNvPr id="4" name="Text 2"/>
+          <p:cNvSpPr txBox="1"/>
+          <p:nvPr/>
+        </p:nvSpPr>
+        <p:spPr>
+          <a:xfrm>
+            <a:off x="731520" y="1481328"/>
+            <a:ext cx="10698480" cy="329184"/>
+          </a:xfrm>
+          <a:prstGeom prst="rect">
+            <a:avLst/>
+          </a:prstGeom>
+          <a:noFill/>
+          <a:ln/>
+        </p:spPr>
+        <p:txBody>
+          <a:bodyPr wrap="square" rtlCol="0" anchor="t"/>
+          <a:lstStyle/>
+          <a:p>
+            <a:pPr indent="0" marL="0">
+              <a:buNone/>
+            </a:pPr>
+            <a:r>
+              <a:rPr lang="en-US" sz="1550" b="1" dirty="0">
+                <a:solidFill>
+                  <a:srgbClr val="1A1A1A"/>
+                </a:solidFill>
+                <a:latin typeface="Microsoft YaHei" pitchFamily="34" charset="0"/>
+                <a:ea typeface="Microsoft YaHei" pitchFamily="34" charset="-122"/>
+                <a:cs typeface="Microsoft YaHei" pitchFamily="34" charset="-120"/>
+              </a:rPr>
+              <a:t>人脑皮层 PV 中间神经元  IL18 高、CASP1 近零</a:t>
+            </a:r>
+            <a:endParaRPr lang="en-US" sz="1550" dirty="0"/>
+          </a:p>
+        </p:txBody>
+      </p:sp>
+      <p:sp>
+        <p:nvSpPr>
+          <p:cNvPr id="5" name="Text 3"/>
+          <p:cNvSpPr txBox="1"/>
+          <p:nvPr/>
+        </p:nvSpPr>
+        <p:spPr>
+          <a:xfrm>
+            <a:off x="731520" y="1783080"/>
+            <a:ext cx="10698480" cy="274320"/>
+          </a:xfrm>
+          <a:prstGeom prst="rect">
+            <a:avLst/>
+          </a:prstGeom>
+          <a:noFill/>
+          <a:ln/>
+        </p:spPr>
+        <p:txBody>
+          <a:bodyPr wrap="square" rtlCol="0" anchor="t"/>
+          <a:lstStyle/>
+          <a:p>
+            <a:pPr indent="0" marL="0">
+              <a:buNone/>
+            </a:pPr>
+            <a:r>
+              <a:rPr lang="en-US" sz="1100" dirty="0">
                 <a:solidFill>
                   <a:srgbClr val="6B6B6B"/>
                 </a:solidFill>
@@ -1563,22 +1641,334 @@
                 <a:ea typeface="Microsoft YaHei" pitchFamily="34" charset="-122"/>
                 <a:cs typeface="Microsoft YaHei" pitchFamily="34" charset="-120"/>
               </a:rPr>
-              <a:t>人与小鼠 · 肺 肝 胰 脑 脊髓 · 静息基线 · 29 个分层 · 以供体为统计单位</a:t>
+              <a:t>HVS 单细胞 78 供体 + PsychAD 单核 234 供体；参考层 sFANS 分选核 566 倍、Allen SMART-seq 358 倍</a:t>
             </a:r>
-            <a:endParaRPr lang="en-US" sz="1600" dirty="0"/>
+            <a:endParaRPr lang="en-US" sz="1100" dirty="0"/>
           </a:p>
         </p:txBody>
       </p:sp>
       <p:sp>
         <p:nvSpPr>
-          <p:cNvPr id="4" name="Text 2"/>
+          <p:cNvPr id="6" name="Text 4"/>
           <p:cNvSpPr txBox="1"/>
           <p:nvPr/>
         </p:nvSpPr>
         <p:spPr>
           <a:xfrm>
-            <a:off x="640080" y="3520440"/>
-            <a:ext cx="10972800" cy="1828800"/>
+            <a:off x="731520" y="2084832"/>
+            <a:ext cx="10698480" cy="329184"/>
+          </a:xfrm>
+          <a:prstGeom prst="rect">
+            <a:avLst/>
+          </a:prstGeom>
+          <a:noFill/>
+          <a:ln/>
+        </p:spPr>
+        <p:txBody>
+          <a:bodyPr wrap="square" rtlCol="0" anchor="t"/>
+          <a:lstStyle/>
+          <a:p>
+            <a:pPr indent="0" marL="0">
+              <a:buNone/>
+            </a:pPr>
+            <a:r>
+              <a:rPr lang="en-US" sz="1550" b="1" dirty="0">
+                <a:solidFill>
+                  <a:srgbClr val="1A1A1A"/>
+                </a:solidFill>
+                <a:latin typeface="Microsoft YaHei" pitchFamily="34" charset="0"/>
+                <a:ea typeface="Microsoft YaHei" pitchFamily="34" charset="-122"/>
+                <a:cs typeface="Microsoft YaHei" pitchFamily="34" charset="-120"/>
+              </a:rPr>
+              <a:t>人脑皮层 L5 ET 投射神经元  IL18 高、CASP1 近零</a:t>
+            </a:r>
+            <a:endParaRPr lang="en-US" sz="1550" dirty="0"/>
+          </a:p>
+        </p:txBody>
+      </p:sp>
+      <p:sp>
+        <p:nvSpPr>
+          <p:cNvPr id="7" name="Text 5"/>
+          <p:cNvSpPr txBox="1"/>
+          <p:nvPr/>
+        </p:nvSpPr>
+        <p:spPr>
+          <a:xfrm>
+            <a:off x="731520" y="2386584"/>
+            <a:ext cx="10698480" cy="274320"/>
+          </a:xfrm>
+          <a:prstGeom prst="rect">
+            <a:avLst/>
+          </a:prstGeom>
+          <a:noFill/>
+          <a:ln/>
+        </p:spPr>
+        <p:txBody>
+          <a:bodyPr wrap="square" rtlCol="0" anchor="t"/>
+          <a:lstStyle/>
+          <a:p>
+            <a:pPr indent="0" marL="0">
+              <a:buNone/>
+            </a:pPr>
+            <a:r>
+              <a:rPr lang="en-US" sz="1100" dirty="0">
+                <a:solidFill>
+                  <a:srgbClr val="6B6B6B"/>
+                </a:solidFill>
+                <a:latin typeface="Microsoft YaHei" pitchFamily="34" charset="0"/>
+                <a:ea typeface="Microsoft YaHei" pitchFamily="34" charset="-122"/>
+                <a:cs typeface="Microsoft YaHei" pitchFamily="34" charset="-120"/>
+              </a:rPr>
+              <a:t>HVS + SEA-AD MTG + SEA-AD DLPFC 三套；参考层 Betz 细胞 275 倍、von Economo 神经元 384 倍</a:t>
+            </a:r>
+            <a:endParaRPr lang="en-US" sz="1100" dirty="0"/>
+          </a:p>
+        </p:txBody>
+      </p:sp>
+      <p:sp>
+        <p:nvSpPr>
+          <p:cNvPr id="8" name="Text 6"/>
+          <p:cNvSpPr txBox="1"/>
+          <p:nvPr/>
+        </p:nvSpPr>
+        <p:spPr>
+          <a:xfrm>
+            <a:off x="731520" y="2688336"/>
+            <a:ext cx="10698480" cy="329184"/>
+          </a:xfrm>
+          <a:prstGeom prst="rect">
+            <a:avLst/>
+          </a:prstGeom>
+          <a:noFill/>
+          <a:ln/>
+        </p:spPr>
+        <p:txBody>
+          <a:bodyPr wrap="square" rtlCol="0" anchor="t"/>
+          <a:lstStyle/>
+          <a:p>
+            <a:pPr indent="0" marL="0">
+              <a:buNone/>
+            </a:pPr>
+            <a:r>
+              <a:rPr lang="en-US" sz="1550" b="1" dirty="0">
+                <a:solidFill>
+                  <a:srgbClr val="1A1A1A"/>
+                </a:solidFill>
+                <a:latin typeface="Microsoft YaHei" pitchFamily="34" charset="0"/>
+                <a:ea typeface="Microsoft YaHei" pitchFamily="34" charset="-122"/>
+                <a:cs typeface="Microsoft YaHei" pitchFamily="34" charset="-120"/>
+              </a:rPr>
+              <a:t>小鼠皮层与海马 星形胶质  Il18 高、Casp1 近零</a:t>
+            </a:r>
+            <a:endParaRPr lang="en-US" sz="1550" dirty="0"/>
+          </a:p>
+        </p:txBody>
+      </p:sp>
+      <p:sp>
+        <p:nvSpPr>
+          <p:cNvPr id="9" name="Text 7"/>
+          <p:cNvSpPr txBox="1"/>
+          <p:nvPr/>
+        </p:nvSpPr>
+        <p:spPr>
+          <a:xfrm>
+            <a:off x="731520" y="2990088"/>
+            <a:ext cx="10698480" cy="274320"/>
+          </a:xfrm>
+          <a:prstGeom prst="rect">
+            <a:avLst/>
+          </a:prstGeom>
+          <a:noFill/>
+          <a:ln/>
+        </p:spPr>
+        <p:txBody>
+          <a:bodyPr wrap="square" rtlCol="0" anchor="t"/>
+          <a:lstStyle/>
+          <a:p>
+            <a:pPr indent="0" marL="0">
+              <a:buNone/>
+            </a:pPr>
+            <a:r>
+              <a:rPr lang="en-US" sz="1100" dirty="0">
+                <a:solidFill>
+                  <a:srgbClr val="6B6B6B"/>
+                </a:solidFill>
+                <a:latin typeface="Microsoft YaHei" pitchFamily="34" charset="0"/>
+                <a:ea typeface="Microsoft YaHei" pitchFamily="34" charset="-122"/>
+                <a:cs typeface="Microsoft YaHei" pitchFamily="34" charset="-120"/>
+              </a:rPr>
+              <a:t>4 个来源；但仅限皮层与海马——小脑 Bergmann 胶质与脊髓星形胶质 Casp1 明确表达</a:t>
+            </a:r>
+            <a:endParaRPr lang="en-US" sz="1100" dirty="0"/>
+          </a:p>
+        </p:txBody>
+      </p:sp>
+      <p:sp>
+        <p:nvSpPr>
+          <p:cNvPr id="10" name="Text 8"/>
+          <p:cNvSpPr txBox="1"/>
+          <p:nvPr/>
+        </p:nvSpPr>
+        <p:spPr>
+          <a:xfrm>
+            <a:off x="731520" y="3291840"/>
+            <a:ext cx="10698480" cy="329184"/>
+          </a:xfrm>
+          <a:prstGeom prst="rect">
+            <a:avLst/>
+          </a:prstGeom>
+          <a:noFill/>
+          <a:ln/>
+        </p:spPr>
+        <p:txBody>
+          <a:bodyPr wrap="square" rtlCol="0" anchor="t"/>
+          <a:lstStyle/>
+          <a:p>
+            <a:pPr indent="0" marL="0">
+              <a:buNone/>
+            </a:pPr>
+            <a:r>
+              <a:rPr lang="en-US" sz="1550" b="1" dirty="0">
+                <a:solidFill>
+                  <a:srgbClr val="1A1A1A"/>
+                </a:solidFill>
+                <a:latin typeface="Microsoft YaHei" pitchFamily="34" charset="0"/>
+                <a:ea typeface="Microsoft YaHei" pitchFamily="34" charset="-122"/>
+                <a:cs typeface="Microsoft YaHei" pitchFamily="34" charset="-120"/>
+              </a:rPr>
+              <a:t>小鼠脑 少突胶质  Il18 高、Casp1 近零</a:t>
+            </a:r>
+            <a:endParaRPr lang="en-US" sz="1550" dirty="0"/>
+          </a:p>
+        </p:txBody>
+      </p:sp>
+      <p:sp>
+        <p:nvSpPr>
+          <p:cNvPr id="11" name="Text 9"/>
+          <p:cNvSpPr txBox="1"/>
+          <p:nvPr/>
+        </p:nvSpPr>
+        <p:spPr>
+          <a:xfrm>
+            <a:off x="731520" y="3593592"/>
+            <a:ext cx="10698480" cy="274320"/>
+          </a:xfrm>
+          <a:prstGeom prst="rect">
+            <a:avLst/>
+          </a:prstGeom>
+          <a:noFill/>
+          <a:ln/>
+        </p:spPr>
+        <p:txBody>
+          <a:bodyPr wrap="square" rtlCol="0" anchor="t"/>
+          <a:lstStyle/>
+          <a:p>
+            <a:pPr indent="0" marL="0">
+              <a:buNone/>
+            </a:pPr>
+            <a:r>
+              <a:rPr lang="en-US" sz="1100" dirty="0">
+                <a:solidFill>
+                  <a:srgbClr val="6B6B6B"/>
+                </a:solidFill>
+                <a:latin typeface="Microsoft YaHei" pitchFamily="34" charset="0"/>
+                <a:ea typeface="Microsoft YaHei" pitchFamily="34" charset="-122"/>
+                <a:cs typeface="Microsoft YaHei" pitchFamily="34" charset="-120"/>
+              </a:rPr>
+              <a:t>3 个来源；RiboTag 中 Casp1 比配对全组织更低，是去除而非带入</a:t>
+            </a:r>
+            <a:endParaRPr lang="en-US" sz="1100" dirty="0"/>
+          </a:p>
+        </p:txBody>
+      </p:sp>
+      <p:sp>
+        <p:nvSpPr>
+          <p:cNvPr id="12" name="Text 10"/>
+          <p:cNvSpPr txBox="1"/>
+          <p:nvPr/>
+        </p:nvSpPr>
+        <p:spPr>
+          <a:xfrm>
+            <a:off x="731520" y="3895344"/>
+            <a:ext cx="10698480" cy="329184"/>
+          </a:xfrm>
+          <a:prstGeom prst="rect">
+            <a:avLst/>
+          </a:prstGeom>
+          <a:noFill/>
+          <a:ln/>
+        </p:spPr>
+        <p:txBody>
+          <a:bodyPr wrap="square" rtlCol="0" anchor="t"/>
+          <a:lstStyle/>
+          <a:p>
+            <a:pPr indent="0" marL="0">
+              <a:buNone/>
+            </a:pPr>
+            <a:r>
+              <a:rPr lang="en-US" sz="1550" b="1" dirty="0">
+                <a:solidFill>
+                  <a:srgbClr val="1A1A1A"/>
+                </a:solidFill>
+                <a:latin typeface="Microsoft YaHei" pitchFamily="34" charset="0"/>
+                <a:ea typeface="Microsoft YaHei" pitchFamily="34" charset="-122"/>
+                <a:cs typeface="Microsoft YaHei" pitchFamily="34" charset="-120"/>
+              </a:rPr>
+              <a:t>小鼠胰岛 D(δ) 细胞  Il18 可检、Casp1 近零</a:t>
+            </a:r>
+            <a:endParaRPr lang="en-US" sz="1550" dirty="0"/>
+          </a:p>
+        </p:txBody>
+      </p:sp>
+      <p:sp>
+        <p:nvSpPr>
+          <p:cNvPr id="13" name="Text 11"/>
+          <p:cNvSpPr txBox="1"/>
+          <p:nvPr/>
+        </p:nvSpPr>
+        <p:spPr>
+          <a:xfrm>
+            <a:off x="731520" y="4197096"/>
+            <a:ext cx="10698480" cy="274320"/>
+          </a:xfrm>
+          <a:prstGeom prst="rect">
+            <a:avLst/>
+          </a:prstGeom>
+          <a:noFill/>
+          <a:ln/>
+        </p:spPr>
+        <p:txBody>
+          <a:bodyPr wrap="square" rtlCol="0" anchor="t"/>
+          <a:lstStyle/>
+          <a:p>
+            <a:pPr indent="0" marL="0">
+              <a:buNone/>
+            </a:pPr>
+            <a:r>
+              <a:rPr lang="en-US" sz="1100" dirty="0">
+                <a:solidFill>
+                  <a:srgbClr val="6B6B6B"/>
+                </a:solidFill>
+                <a:latin typeface="Microsoft YaHei" pitchFamily="34" charset="0"/>
+                <a:ea typeface="Microsoft YaHei" pitchFamily="34" charset="-122"/>
+                <a:cs typeface="Microsoft YaHei" pitchFamily="34" charset="-120"/>
+              </a:rPr>
+              <a:t>6 个来源；GSE269616 九个文库 Casp1 零条读段。但人胰岛 δ 细胞不成立</a:t>
+            </a:r>
+            <a:endParaRPr lang="en-US" sz="1100" dirty="0"/>
+          </a:p>
+        </p:txBody>
+      </p:sp>
+      <p:sp>
+        <p:nvSpPr>
+          <p:cNvPr id="14" name="Text 12"/>
+          <p:cNvSpPr txBox="1"/>
+          <p:nvPr/>
+        </p:nvSpPr>
+        <p:spPr>
+          <a:xfrm>
+            <a:off x="731520" y="4572000"/>
+            <a:ext cx="10698480" cy="274320"/>
           </a:xfrm>
           <a:prstGeom prst="rect">
             <a:avLst/>
@@ -1591,64 +1981,10 @@
           <a:lstStyle/>
           <a:p>
             <a:pPr indent="0" marL="0">
-              <a:lnSpc>
-                <a:spcPct val="130000"/>
-              </a:lnSpc>
               <a:buNone/>
             </a:pPr>
             <a:r>
-              <a:rPr lang="en-US" sz="1650" b="1" dirty="0">
-                <a:solidFill>
-                  <a:srgbClr val="1A1A1A"/>
-                </a:solidFill>
-                <a:latin typeface="Microsoft YaHei" pitchFamily="34" charset="0"/>
-                <a:ea typeface="Microsoft YaHei" pitchFamily="34" charset="-122"/>
-                <a:cs typeface="Microsoft YaHei" pitchFamily="34" charset="-120"/>
-              </a:rPr>
-              <a:t>答案分三类。</a:t>
-            </a:r>
-            <a:pPr indent="0" marL="0">
-              <a:lnSpc>
-                <a:spcPct val="130000"/>
-              </a:lnSpc>
-              <a:buNone/>
-            </a:pPr>
-            <a:r>
-              <a:rPr lang="en-US" sz="1650" b="1" dirty="0">
-                <a:solidFill>
-                  <a:srgbClr val="1B7A43"/>
-                </a:solidFill>
-                <a:latin typeface="Microsoft YaHei" pitchFamily="34" charset="0"/>
-                <a:ea typeface="Microsoft YaHei" pitchFamily="34" charset="-122"/>
-                <a:cs typeface="Microsoft YaHei" pitchFamily="34" charset="-120"/>
-              </a:rPr>
-              <a:t>确定：</a:t>
-            </a:r>
-            <a:pPr indent="0" marL="0">
-              <a:lnSpc>
-                <a:spcPct val="130000"/>
-              </a:lnSpc>
-              <a:buNone/>
-            </a:pPr>
-            <a:r>
-              <a:rPr lang="en-US" sz="1650" dirty="0">
-                <a:solidFill>
-                  <a:srgbClr val="1A1A1A"/>
-                </a:solidFill>
-                <a:latin typeface="Microsoft YaHei" pitchFamily="34" charset="0"/>
-                <a:ea typeface="Microsoft YaHei" pitchFamily="34" charset="-122"/>
-                <a:cs typeface="Microsoft YaHei" pitchFamily="34" charset="-120"/>
-              </a:rPr>
-              <a:t>小鼠脑星形胶质、少突胶质。　</a:t>
-            </a:r>
-            <a:pPr indent="0" marL="0">
-              <a:lnSpc>
-                <a:spcPct val="130000"/>
-              </a:lnSpc>
-              <a:buNone/>
-            </a:pPr>
-            <a:r>
-              <a:rPr lang="en-US" sz="1650" b="1" dirty="0">
+              <a:rPr lang="en-US" sz="1250" b="1" dirty="0">
                 <a:solidFill>
                   <a:srgbClr val="1F5FA8"/>
                 </a:solidFill>
@@ -1656,73 +1992,22 @@
                 <a:ea typeface="Microsoft YaHei" pitchFamily="34" charset="-122"/>
                 <a:cs typeface="Microsoft YaHei" pitchFamily="34" charset="-120"/>
               </a:rPr>
-              <a:t>可能：</a:t>
+              <a:t>可能 —— 单一来源支持，或尚无匹配参考</a:t>
             </a:r>
-            <a:pPr indent="0" marL="0">
-              <a:lnSpc>
-                <a:spcPct val="130000"/>
-              </a:lnSpc>
-              <a:buNone/>
-            </a:pPr>
-            <a:r>
-              <a:rPr lang="en-US" sz="1650" dirty="0">
-                <a:solidFill>
-                  <a:srgbClr val="1A1A1A"/>
-                </a:solidFill>
-                <a:latin typeface="Microsoft YaHei" pitchFamily="34" charset="0"/>
-                <a:ea typeface="Microsoft YaHei" pitchFamily="34" charset="-122"/>
-                <a:cs typeface="Microsoft YaHei" pitchFamily="34" charset="-120"/>
-              </a:rPr>
-              <a:t>人脑皮层 PV 中间神经元与 L5 ET 投射神经元（3–4 套独立数据集重复）、人肺 AT1 与肥大细胞、人胰腺腺泡细胞、小鼠胰岛 D(δ) 细胞与胰导管细胞。　</a:t>
-            </a:r>
-            <a:pPr indent="0" marL="0">
-              <a:lnSpc>
-                <a:spcPct val="130000"/>
-              </a:lnSpc>
-              <a:buNone/>
-            </a:pPr>
-            <a:r>
-              <a:rPr lang="en-US" sz="1650" b="1" dirty="0">
-                <a:solidFill>
-                  <a:srgbClr val="9A2B2B"/>
-                </a:solidFill>
-                <a:latin typeface="Microsoft YaHei" pitchFamily="34" charset="0"/>
-                <a:ea typeface="Microsoft YaHei" pitchFamily="34" charset="-122"/>
-                <a:cs typeface="Microsoft YaHei" pitchFamily="34" charset="-120"/>
-              </a:rPr>
-              <a:t>相反：</a:t>
-            </a:r>
-            <a:pPr indent="0" marL="0">
-              <a:lnSpc>
-                <a:spcPct val="130000"/>
-              </a:lnSpc>
-              <a:buNone/>
-            </a:pPr>
-            <a:r>
-              <a:rPr lang="en-US" sz="1650" dirty="0">
-                <a:solidFill>
-                  <a:srgbClr val="1A1A1A"/>
-                </a:solidFill>
-                <a:latin typeface="Microsoft YaHei" pitchFamily="34" charset="0"/>
-                <a:ea typeface="Microsoft YaHei" pitchFamily="34" charset="-122"/>
-                <a:cs typeface="Microsoft YaHei" pitchFamily="34" charset="-120"/>
-              </a:rPr>
-              <a:t>小鼠肺泡巨噬与小胶质、人肺气道/纤毛上皮、人肝嗜碱粒细胞与 CD56bright NK、人肺树突状细胞——CASP1 在它们之中确实被检出。</a:t>
-            </a:r>
-            <a:endParaRPr lang="en-US" sz="1650" dirty="0"/>
+            <a:endParaRPr lang="en-US" sz="1250" dirty="0"/>
           </a:p>
         </p:txBody>
       </p:sp>
       <p:sp>
         <p:nvSpPr>
-          <p:cNvPr id="5" name="Text 3"/>
+          <p:cNvPr id="15" name="Text 13"/>
           <p:cNvSpPr txBox="1"/>
           <p:nvPr/>
         </p:nvSpPr>
         <p:spPr>
           <a:xfrm>
-            <a:off x="640080" y="5669280"/>
-            <a:ext cx="10972800" cy="365760"/>
+            <a:off x="731520" y="4864608"/>
+            <a:ext cx="10698480" cy="365760"/>
           </a:xfrm>
           <a:prstGeom prst="rect">
             <a:avLst/>
@@ -1738,7 +2023,124 @@
               <a:buNone/>
             </a:pPr>
             <a:r>
-              <a:rPr lang="en-US" sz="1250" dirty="0">
+              <a:rPr lang="en-US" sz="1300" dirty="0">
+                <a:solidFill>
+                  <a:srgbClr val="1A1A1A"/>
+                </a:solidFill>
+                <a:latin typeface="Microsoft YaHei" pitchFamily="34" charset="0"/>
+                <a:ea typeface="Microsoft YaHei" pitchFamily="34" charset="-122"/>
+                <a:cs typeface="Microsoft YaHei" pitchFamily="34" charset="-120"/>
+              </a:rPr>
+              <a:t>人肺 AT1 肺泡上皮 · 人肺 肥大细胞 · 人胰腺 腺泡细胞 · 小鼠胰 导管细胞 · 人脑 血管软脑膜细胞 · 小鼠脑 Cajal-Retzius 神经元</a:t>
+            </a:r>
+            <a:endParaRPr lang="en-US" sz="1300" dirty="0"/>
+          </a:p>
+        </p:txBody>
+      </p:sp>
+      <p:sp>
+        <p:nvSpPr>
+          <p:cNvPr id="16" name="Text 14"/>
+          <p:cNvSpPr txBox="1"/>
+          <p:nvPr/>
+        </p:nvSpPr>
+        <p:spPr>
+          <a:xfrm>
+            <a:off x="731520" y="5349240"/>
+            <a:ext cx="10698480" cy="274320"/>
+          </a:xfrm>
+          <a:prstGeom prst="rect">
+            <a:avLst/>
+          </a:prstGeom>
+          <a:noFill/>
+          <a:ln/>
+        </p:spPr>
+        <p:txBody>
+          <a:bodyPr wrap="square" rtlCol="0" anchor="ctr"/>
+          <a:lstStyle/>
+          <a:p>
+            <a:pPr indent="0" marL="0">
+              <a:buNone/>
+            </a:pPr>
+            <a:r>
+              <a:rPr lang="en-US" sz="1250" b="1" dirty="0">
+                <a:solidFill>
+                  <a:srgbClr val="9A2B2B"/>
+                </a:solidFill>
+                <a:latin typeface="Microsoft YaHei" pitchFamily="34" charset="0"/>
+                <a:ea typeface="Microsoft YaHei" pitchFamily="34" charset="-122"/>
+                <a:cs typeface="Microsoft YaHei" pitchFamily="34" charset="-120"/>
+              </a:rPr>
+              <a:t>相反 —— CASP1 在其中确实被检出，不是测不准</a:t>
+            </a:r>
+            <a:endParaRPr lang="en-US" sz="1250" dirty="0"/>
+          </a:p>
+        </p:txBody>
+      </p:sp>
+      <p:sp>
+        <p:nvSpPr>
+          <p:cNvPr id="17" name="Text 15"/>
+          <p:cNvSpPr txBox="1"/>
+          <p:nvPr/>
+        </p:nvSpPr>
+        <p:spPr>
+          <a:xfrm>
+            <a:off x="731520" y="5641848"/>
+            <a:ext cx="10698480" cy="365760"/>
+          </a:xfrm>
+          <a:prstGeom prst="rect">
+            <a:avLst/>
+          </a:prstGeom>
+          <a:noFill/>
+          <a:ln/>
+        </p:spPr>
+        <p:txBody>
+          <a:bodyPr wrap="square" rtlCol="0" anchor="ctr"/>
+          <a:lstStyle/>
+          <a:p>
+            <a:pPr indent="0" marL="0">
+              <a:buNone/>
+            </a:pPr>
+            <a:r>
+              <a:rPr lang="en-US" sz="1300" dirty="0">
+                <a:solidFill>
+                  <a:srgbClr val="1A1A1A"/>
+                </a:solidFill>
+                <a:latin typeface="Microsoft YaHei" pitchFamily="34" charset="0"/>
+                <a:ea typeface="Microsoft YaHei" pitchFamily="34" charset="-122"/>
+                <a:cs typeface="Microsoft YaHei" pitchFamily="34" charset="-120"/>
+              </a:rPr>
+              <a:t>小鼠肺 肺泡巨噬 · 小鼠脑 小胶质 · 人肺 气道/纤毛上皮 · 人肝 嗜碱粒细胞 · 人肝 CD56bright NK · 人肺 树突状细胞</a:t>
+            </a:r>
+            <a:endParaRPr lang="en-US" sz="1300" dirty="0"/>
+          </a:p>
+        </p:txBody>
+      </p:sp>
+      <p:sp>
+        <p:nvSpPr>
+          <p:cNvPr id="18" name="Text 16"/>
+          <p:cNvSpPr txBox="1"/>
+          <p:nvPr/>
+        </p:nvSpPr>
+        <p:spPr>
+          <a:xfrm>
+            <a:off x="731520" y="6172200"/>
+            <a:ext cx="10698480" cy="320040"/>
+          </a:xfrm>
+          <a:prstGeom prst="rect">
+            <a:avLst/>
+          </a:prstGeom>
+          <a:noFill/>
+          <a:ln/>
+        </p:spPr>
+        <p:txBody>
+          <a:bodyPr wrap="square" rtlCol="0" anchor="ctr"/>
+          <a:lstStyle/>
+          <a:p>
+            <a:pPr indent="0" marL="0">
+              <a:buNone/>
+            </a:pPr>
+            <a:r>
+              <a:rPr lang="en-US" sz="1100" dirty="0">
                 <a:solidFill>
                   <a:srgbClr val="9AA0A6"/>
                 </a:solidFill>
@@ -1746,9 +2148,9 @@
                 <a:ea typeface="Microsoft YaHei" pitchFamily="34" charset="-122"/>
                 <a:cs typeface="Microsoft YaHei" pitchFamily="34" charset="-120"/>
               </a:rPr>
-              <a:t>检出率 = 原始计数 ≥1 的细胞数 ÷ 分析细胞数（合并全部供体），每个数字都标注阳性细胞数。</a:t>
+              <a:t>检出率 = 原始计数 ≥1 的细胞数 ÷ 分析细胞数（合并全部供体）。29 个分层，人与小鼠分开，静息基线。</a:t>
             </a:r>
-            <a:endParaRPr lang="en-US" sz="1250" dirty="0"/>
+            <a:endParaRPr lang="en-US" sz="1100" dirty="0"/>
           </a:p>
         </p:txBody>
       </p:sp>
@@ -1810,7 +2212,7 @@
                 <a:ea typeface="Microsoft YaHei" pitchFamily="34" charset="-122"/>
                 <a:cs typeface="Microsoft YaHei" pitchFamily="34" charset="-120"/>
               </a:rPr>
-              <a:t>三类答案</a:t>
+              <a:t>关于「短 IL-18」：转录本层面是明确的否定</a:t>
             </a:r>
             <a:endParaRPr lang="en-US" sz="2400" dirty="0"/>
           </a:p>
@@ -1824,8 +2226,8 @@
         </p:nvSpPr>
         <p:spPr>
           <a:xfrm>
-            <a:off x="640080" y="1371600"/>
-            <a:ext cx="2651760" cy="1463040"/>
+            <a:off x="731520" y="1234440"/>
+            <a:ext cx="10698480" cy="365760"/>
           </a:xfrm>
           <a:prstGeom prst="rect">
             <a:avLst/>
@@ -1834,31 +2236,1372 @@
           <a:ln/>
         </p:spPr>
         <p:txBody>
-          <a:bodyPr wrap="square" rtlCol="0" anchor="t"/>
+          <a:bodyPr wrap="square" rtlCol="0" anchor="ctr"/>
           <a:lstStyle/>
           <a:p>
             <a:pPr indent="0" marL="0">
-              <a:lnSpc>
-                <a:spcPct val="115000"/>
-              </a:lnSpc>
               <a:buNone/>
             </a:pPr>
             <a:r>
-              <a:rPr lang="en-US" sz="1900" b="1" dirty="0">
+              <a:rPr lang="en-US" sz="1600" b="1" dirty="0">
                 <a:solidFill>
-                  <a:srgbClr val="1B7A43"/>
+                  <a:srgbClr val="9A2B2B"/>
                 </a:solidFill>
                 <a:latin typeface="Microsoft YaHei" pitchFamily="34" charset="0"/>
                 <a:ea typeface="Microsoft YaHei" pitchFamily="34" charset="-122"/>
                 <a:cs typeface="Microsoft YaHei" pitchFamily="34" charset="-120"/>
               </a:rPr>
-              <a:t>确定
-</a:t>
+              <a:t>人任何正常组织、任何正常细胞类型都不显著使用短 IL18 转录本。</a:t>
+            </a:r>
+            <a:endParaRPr lang="en-US" sz="1600" dirty="0"/>
+          </a:p>
+        </p:txBody>
+      </p:sp>
+      <p:sp>
+        <p:nvSpPr>
+          <p:cNvPr id="4" name="Text 2"/>
+          <p:cNvSpPr txBox="1"/>
+          <p:nvPr/>
+        </p:nvSpPr>
+        <p:spPr>
+          <a:xfrm>
+            <a:off x="731520" y="1737360"/>
+            <a:ext cx="10698480" cy="640080"/>
+          </a:xfrm>
+          <a:prstGeom prst="rect">
+            <a:avLst/>
+          </a:prstGeom>
+          <a:noFill/>
+          <a:ln/>
+        </p:spPr>
+        <p:txBody>
+          <a:bodyPr wrap="square" rtlCol="0" anchor="ctr"/>
+          <a:lstStyle/>
+          <a:p>
+            <a:pPr indent="0" marL="0">
+              <a:lnSpc>
+                <a:spcPct val="120000"/>
+              </a:lnSpc>
+              <a:buNone/>
+            </a:pPr>
+            <a:r>
+              <a:rPr lang="en-US" sz="1300" dirty="0">
+                <a:solidFill>
+                  <a:srgbClr val="6B6B6B"/>
+                </a:solidFill>
+                <a:latin typeface="Microsoft YaHei" pitchFamily="34" charset="0"/>
+                <a:ea typeface="Microsoft YaHei" pitchFamily="34" charset="-122"/>
+                <a:cs typeface="Microsoft YaHei" pitchFamily="34" charset="-120"/>
+              </a:rPr>
+              <a:t>长短异构体差一个内含框盒式外显子 E4（chr11:112150072-112150206，135 bp = 45 个密码子）：跳过它 193 aa → 148 aa。所有相关剪接连接共用同一受体位点，因此可直接算同一位点上的竞争比例。</a:t>
+            </a:r>
+            <a:endParaRPr lang="en-US" sz="1300" dirty="0"/>
+          </a:p>
+        </p:txBody>
+      </p:sp>
+      <p:graphicFrame>
+        <p:nvGraphicFramePr>
+          <p:cNvPr id="3" name="Table 0"/>
+          <p:cNvGraphicFramePr>
+            <a:graphicFrameLocks noGrp="1"/>
+          </p:cNvGraphicFramePr>
+          <p:nvPr>
+            <p:extLst>
+              <p:ext uri="{D42A27DB-BD31-4B8C-83A1-F6EECF244321}">
+                <p14:modId xmlns:p14="http://schemas.microsoft.com/office/powerpoint/2010/main" val="1579011935"/>
+              </p:ext>
+            </p:extLst>
+          </p:nvPr>
+        </p:nvGraphicFramePr>
+        <p:xfrm>
+          <a:off x="731520" y="2514600"/>
+          <a:ext cx="10698480" cy="914400"/>
+        </p:xfrm>
+        <a:graphic>
+          <a:graphicData uri="http://schemas.openxmlformats.org/drawingml/2006/table">
+            <a:tbl>
+              <a:tblPr/>
+              <a:tblGrid>
+                <a:gridCol w="3657600"/>
+                <a:gridCol w="2011680"/>
+                <a:gridCol w="5029200"/>
+              </a:tblGrid>
+              <a:tr h="365760">
+                <a:tc>
+                  <a:txBody>
+                    <a:bodyPr/>
+                    <a:lstStyle/>
+                    <a:p>
+                      <a:pPr indent="0" marL="0">
+                        <a:buNone/>
+                      </a:pPr>
+                      <a:r>
+                        <a:rPr lang="en-US" sz="1250" b="1" dirty="0">
+                          <a:solidFill>
+                            <a:srgbClr val="1A1A1A"/>
+                          </a:solidFill>
+                          <a:latin typeface="Microsoft YaHei" pitchFamily="34" charset="0"/>
+                          <a:ea typeface="Microsoft YaHei" pitchFamily="34" charset="-122"/>
+                          <a:cs typeface="Microsoft YaHei" pitchFamily="34" charset="-120"/>
+                        </a:rPr>
+                        <a:t>数据源</a:t>
+                      </a:r>
+                      <a:endParaRPr lang="en-US" sz="1250" dirty="0">
+                        <a:latin typeface="Microsoft YaHei" charset="0"/>
+                        <a:ea typeface="Microsoft YaHei" charset="0"/>
+                        <a:cs typeface="Microsoft YaHei" charset="0"/>
+                      </a:endParaRPr>
+                    </a:p>
+                  </a:txBody>
+                  <a:tcPr marL="91440" marR="91440" marT="45720" marB="45720" anchor="ctr">
+                    <a:lnL w="6350" cap="flat" cmpd="sng" algn="ctr">
+                      <a:solidFill>
+                        <a:srgbClr val="D8DBE0"/>
+                      </a:solidFill>
+                      <a:prstDash val="solid"/>
+                      <a:round/>
+                      <a:headEnd type="none" w="med" len="med"/>
+                      <a:tailEnd type="none" w="med" len="med"/>
+                    </a:lnL>
+                    <a:lnR w="6350" cap="flat" cmpd="sng" algn="ctr">
+                      <a:solidFill>
+                        <a:srgbClr val="D8DBE0"/>
+                      </a:solidFill>
+                      <a:prstDash val="solid"/>
+                      <a:round/>
+                      <a:headEnd type="none" w="med" len="med"/>
+                      <a:tailEnd type="none" w="med" len="med"/>
+                    </a:lnR>
+                    <a:lnT w="6350" cap="flat" cmpd="sng" algn="ctr">
+                      <a:solidFill>
+                        <a:srgbClr val="D8DBE0"/>
+                      </a:solidFill>
+                      <a:prstDash val="solid"/>
+                      <a:round/>
+                      <a:headEnd type="none" w="med" len="med"/>
+                      <a:tailEnd type="none" w="med" len="med"/>
+                    </a:lnT>
+                    <a:lnB w="6350" cap="flat" cmpd="sng" algn="ctr">
+                      <a:solidFill>
+                        <a:srgbClr val="D8DBE0"/>
+                      </a:solidFill>
+                      <a:prstDash val="solid"/>
+                      <a:round/>
+                      <a:headEnd type="none" w="med" len="med"/>
+                      <a:tailEnd type="none" w="med" len="med"/>
+                    </a:lnB>
+                    <a:solidFill>
+                      <a:srgbClr val="EEF1F5"/>
+                    </a:solidFill>
+                  </a:tcPr>
+                </a:tc>
+                <a:tc>
+                  <a:txBody>
+                    <a:bodyPr/>
+                    <a:lstStyle/>
+                    <a:p>
+                      <a:pPr indent="0" marL="0">
+                        <a:buNone/>
+                      </a:pPr>
+                      <a:r>
+                        <a:rPr lang="en-US" sz="1250" b="1" dirty="0">
+                          <a:solidFill>
+                            <a:srgbClr val="1A1A1A"/>
+                          </a:solidFill>
+                          <a:latin typeface="Microsoft YaHei" pitchFamily="34" charset="0"/>
+                          <a:ea typeface="Microsoft YaHei" pitchFamily="34" charset="-122"/>
+                          <a:cs typeface="Microsoft YaHei" pitchFamily="34" charset="-120"/>
+                        </a:rPr>
+                        <a:t>短异构体占比</a:t>
+                      </a:r>
+                      <a:endParaRPr lang="en-US" sz="1250" dirty="0">
+                        <a:latin typeface="Microsoft YaHei" charset="0"/>
+                        <a:ea typeface="Microsoft YaHei" charset="0"/>
+                        <a:cs typeface="Microsoft YaHei" charset="0"/>
+                      </a:endParaRPr>
+                    </a:p>
+                  </a:txBody>
+                  <a:tcPr marL="91440" marR="91440" marT="45720" marB="45720" anchor="ctr">
+                    <a:lnL w="6350" cap="flat" cmpd="sng" algn="ctr">
+                      <a:solidFill>
+                        <a:srgbClr val="D8DBE0"/>
+                      </a:solidFill>
+                      <a:prstDash val="solid"/>
+                      <a:round/>
+                      <a:headEnd type="none" w="med" len="med"/>
+                      <a:tailEnd type="none" w="med" len="med"/>
+                    </a:lnL>
+                    <a:lnR w="6350" cap="flat" cmpd="sng" algn="ctr">
+                      <a:solidFill>
+                        <a:srgbClr val="D8DBE0"/>
+                      </a:solidFill>
+                      <a:prstDash val="solid"/>
+                      <a:round/>
+                      <a:headEnd type="none" w="med" len="med"/>
+                      <a:tailEnd type="none" w="med" len="med"/>
+                    </a:lnR>
+                    <a:lnT w="6350" cap="flat" cmpd="sng" algn="ctr">
+                      <a:solidFill>
+                        <a:srgbClr val="D8DBE0"/>
+                      </a:solidFill>
+                      <a:prstDash val="solid"/>
+                      <a:round/>
+                      <a:headEnd type="none" w="med" len="med"/>
+                      <a:tailEnd type="none" w="med" len="med"/>
+                    </a:lnT>
+                    <a:lnB w="6350" cap="flat" cmpd="sng" algn="ctr">
+                      <a:solidFill>
+                        <a:srgbClr val="D8DBE0"/>
+                      </a:solidFill>
+                      <a:prstDash val="solid"/>
+                      <a:round/>
+                      <a:headEnd type="none" w="med" len="med"/>
+                      <a:tailEnd type="none" w="med" len="med"/>
+                    </a:lnB>
+                    <a:solidFill>
+                      <a:srgbClr val="EEF1F5"/>
+                    </a:solidFill>
+                  </a:tcPr>
+                </a:tc>
+                <a:tc>
+                  <a:txBody>
+                    <a:bodyPr/>
+                    <a:lstStyle/>
+                    <a:p>
+                      <a:pPr indent="0" marL="0">
+                        <a:buNone/>
+                      </a:pPr>
+                      <a:r>
+                        <a:rPr lang="en-US" sz="1250" b="1" dirty="0">
+                          <a:solidFill>
+                            <a:srgbClr val="1A1A1A"/>
+                          </a:solidFill>
+                          <a:latin typeface="Microsoft YaHei" pitchFamily="34" charset="0"/>
+                          <a:ea typeface="Microsoft YaHei" pitchFamily="34" charset="-122"/>
+                          <a:cs typeface="Microsoft YaHei" pitchFamily="34" charset="-120"/>
+                        </a:rPr>
+                        <a:t>说明</a:t>
+                      </a:r>
+                      <a:endParaRPr lang="en-US" sz="1250" dirty="0">
+                        <a:latin typeface="Microsoft YaHei" charset="0"/>
+                        <a:ea typeface="Microsoft YaHei" charset="0"/>
+                        <a:cs typeface="Microsoft YaHei" charset="0"/>
+                      </a:endParaRPr>
+                    </a:p>
+                  </a:txBody>
+                  <a:tcPr marL="91440" marR="91440" marT="45720" marB="45720" anchor="ctr">
+                    <a:lnL w="6350" cap="flat" cmpd="sng" algn="ctr">
+                      <a:solidFill>
+                        <a:srgbClr val="D8DBE0"/>
+                      </a:solidFill>
+                      <a:prstDash val="solid"/>
+                      <a:round/>
+                      <a:headEnd type="none" w="med" len="med"/>
+                      <a:tailEnd type="none" w="med" len="med"/>
+                    </a:lnL>
+                    <a:lnR w="6350" cap="flat" cmpd="sng" algn="ctr">
+                      <a:solidFill>
+                        <a:srgbClr val="D8DBE0"/>
+                      </a:solidFill>
+                      <a:prstDash val="solid"/>
+                      <a:round/>
+                      <a:headEnd type="none" w="med" len="med"/>
+                      <a:tailEnd type="none" w="med" len="med"/>
+                    </a:lnR>
+                    <a:lnT w="6350" cap="flat" cmpd="sng" algn="ctr">
+                      <a:solidFill>
+                        <a:srgbClr val="D8DBE0"/>
+                      </a:solidFill>
+                      <a:prstDash val="solid"/>
+                      <a:round/>
+                      <a:headEnd type="none" w="med" len="med"/>
+                      <a:tailEnd type="none" w="med" len="med"/>
+                    </a:lnT>
+                    <a:lnB w="6350" cap="flat" cmpd="sng" algn="ctr">
+                      <a:solidFill>
+                        <a:srgbClr val="D8DBE0"/>
+                      </a:solidFill>
+                      <a:prstDash val="solid"/>
+                      <a:round/>
+                      <a:headEnd type="none" w="med" len="med"/>
+                      <a:tailEnd type="none" w="med" len="med"/>
+                    </a:lnB>
+                    <a:solidFill>
+                      <a:srgbClr val="EEF1F5"/>
+                    </a:solidFill>
+                  </a:tcPr>
+                </a:tc>
+              </a:tr>
+              <a:tr h="365760">
+                <a:tc>
+                  <a:txBody>
+                    <a:bodyPr/>
+                    <a:lstStyle/>
+                    <a:p>
+                      <a:pPr indent="0" marL="0">
+                        <a:buNone/>
+                      </a:pPr>
+                      <a:r>
+                        <a:rPr lang="en-US" sz="1250" dirty="0">
+                          <a:solidFill>
+                            <a:srgbClr val="1A1A1A"/>
+                          </a:solidFill>
+                          <a:latin typeface="Microsoft YaHei" pitchFamily="34" charset="0"/>
+                          <a:ea typeface="Microsoft YaHei" pitchFamily="34" charset="-122"/>
+                          <a:cs typeface="Microsoft YaHei" pitchFamily="34" charset="-120"/>
+                        </a:rPr>
+                        <a:t>GTEx 全组织（6792 样本）</a:t>
+                      </a:r>
+                      <a:endParaRPr lang="en-US" sz="1250" dirty="0">
+                        <a:latin typeface="Microsoft YaHei" charset="0"/>
+                        <a:ea typeface="Microsoft YaHei" charset="0"/>
+                        <a:cs typeface="Microsoft YaHei" charset="0"/>
+                      </a:endParaRPr>
+                    </a:p>
+                  </a:txBody>
+                  <a:tcPr marL="91440" marR="91440" marT="45720" marB="45720" anchor="ctr">
+                    <a:lnL w="6350" cap="flat" cmpd="sng" algn="ctr">
+                      <a:solidFill>
+                        <a:srgbClr val="D8DBE0"/>
+                      </a:solidFill>
+                      <a:prstDash val="solid"/>
+                      <a:round/>
+                      <a:headEnd type="none" w="med" len="med"/>
+                      <a:tailEnd type="none" w="med" len="med"/>
+                    </a:lnL>
+                    <a:lnR w="6350" cap="flat" cmpd="sng" algn="ctr">
+                      <a:solidFill>
+                        <a:srgbClr val="D8DBE0"/>
+                      </a:solidFill>
+                      <a:prstDash val="solid"/>
+                      <a:round/>
+                      <a:headEnd type="none" w="med" len="med"/>
+                      <a:tailEnd type="none" w="med" len="med"/>
+                    </a:lnR>
+                    <a:lnT w="6350" cap="flat" cmpd="sng" algn="ctr">
+                      <a:solidFill>
+                        <a:srgbClr val="D8DBE0"/>
+                      </a:solidFill>
+                      <a:prstDash val="solid"/>
+                      <a:round/>
+                      <a:headEnd type="none" w="med" len="med"/>
+                      <a:tailEnd type="none" w="med" len="med"/>
+                    </a:lnT>
+                    <a:lnB w="6350" cap="flat" cmpd="sng" algn="ctr">
+                      <a:solidFill>
+                        <a:srgbClr val="D8DBE0"/>
+                      </a:solidFill>
+                      <a:prstDash val="solid"/>
+                      <a:round/>
+                      <a:headEnd type="none" w="med" len="med"/>
+                      <a:tailEnd type="none" w="med" len="med"/>
+                    </a:lnB>
+                  </a:tcPr>
+                </a:tc>
+                <a:tc>
+                  <a:txBody>
+                    <a:bodyPr/>
+                    <a:lstStyle/>
+                    <a:p>
+                      <a:pPr indent="0" marL="0">
+                        <a:buNone/>
+                      </a:pPr>
+                      <a:r>
+                        <a:rPr lang="en-US" sz="1250" dirty="0">
+                          <a:solidFill>
+                            <a:srgbClr val="1A1A1A"/>
+                          </a:solidFill>
+                          <a:latin typeface="Microsoft YaHei" pitchFamily="34" charset="0"/>
+                          <a:ea typeface="Microsoft YaHei" pitchFamily="34" charset="-122"/>
+                          <a:cs typeface="Microsoft YaHei" pitchFamily="34" charset="-120"/>
+                        </a:rPr>
+                        <a:t>0.09%</a:t>
+                      </a:r>
+                      <a:endParaRPr lang="en-US" sz="1250" dirty="0">
+                        <a:latin typeface="Microsoft YaHei" charset="0"/>
+                        <a:ea typeface="Microsoft YaHei" charset="0"/>
+                        <a:cs typeface="Microsoft YaHei" charset="0"/>
+                      </a:endParaRPr>
+                    </a:p>
+                  </a:txBody>
+                  <a:tcPr marL="91440" marR="91440" marT="45720" marB="45720" anchor="ctr">
+                    <a:lnL w="6350" cap="flat" cmpd="sng" algn="ctr">
+                      <a:solidFill>
+                        <a:srgbClr val="D8DBE0"/>
+                      </a:solidFill>
+                      <a:prstDash val="solid"/>
+                      <a:round/>
+                      <a:headEnd type="none" w="med" len="med"/>
+                      <a:tailEnd type="none" w="med" len="med"/>
+                    </a:lnL>
+                    <a:lnR w="6350" cap="flat" cmpd="sng" algn="ctr">
+                      <a:solidFill>
+                        <a:srgbClr val="D8DBE0"/>
+                      </a:solidFill>
+                      <a:prstDash val="solid"/>
+                      <a:round/>
+                      <a:headEnd type="none" w="med" len="med"/>
+                      <a:tailEnd type="none" w="med" len="med"/>
+                    </a:lnR>
+                    <a:lnT w="6350" cap="flat" cmpd="sng" algn="ctr">
+                      <a:solidFill>
+                        <a:srgbClr val="D8DBE0"/>
+                      </a:solidFill>
+                      <a:prstDash val="solid"/>
+                      <a:round/>
+                      <a:headEnd type="none" w="med" len="med"/>
+                      <a:tailEnd type="none" w="med" len="med"/>
+                    </a:lnT>
+                    <a:lnB w="6350" cap="flat" cmpd="sng" algn="ctr">
+                      <a:solidFill>
+                        <a:srgbClr val="D8DBE0"/>
+                      </a:solidFill>
+                      <a:prstDash val="solid"/>
+                      <a:round/>
+                      <a:headEnd type="none" w="med" len="med"/>
+                      <a:tailEnd type="none" w="med" len="med"/>
+                    </a:lnB>
+                  </a:tcPr>
+                </a:tc>
+                <a:tc>
+                  <a:txBody>
+                    <a:bodyPr/>
+                    <a:lstStyle/>
+                    <a:p>
+                      <a:pPr indent="0" marL="0">
+                        <a:buNone/>
+                      </a:pPr>
+                      <a:r>
+                        <a:rPr lang="en-US" sz="1250" dirty="0">
+                          <a:solidFill>
+                            <a:srgbClr val="1A1A1A"/>
+                          </a:solidFill>
+                          <a:latin typeface="Microsoft YaHei" pitchFamily="34" charset="0"/>
+                          <a:ea typeface="Microsoft YaHei" pitchFamily="34" charset="-122"/>
+                          <a:cs typeface="Microsoft YaHei" pitchFamily="34" charset="-120"/>
+                        </a:rPr>
+                        <a:t>最高的组织也只有 0.65%，无任何组织富集</a:t>
+                      </a:r>
+                      <a:endParaRPr lang="en-US" sz="1250" dirty="0">
+                        <a:latin typeface="Microsoft YaHei" charset="0"/>
+                        <a:ea typeface="Microsoft YaHei" charset="0"/>
+                        <a:cs typeface="Microsoft YaHei" charset="0"/>
+                      </a:endParaRPr>
+                    </a:p>
+                  </a:txBody>
+                  <a:tcPr marL="91440" marR="91440" marT="45720" marB="45720" anchor="ctr">
+                    <a:lnL w="6350" cap="flat" cmpd="sng" algn="ctr">
+                      <a:solidFill>
+                        <a:srgbClr val="D8DBE0"/>
+                      </a:solidFill>
+                      <a:prstDash val="solid"/>
+                      <a:round/>
+                      <a:headEnd type="none" w="med" len="med"/>
+                      <a:tailEnd type="none" w="med" len="med"/>
+                    </a:lnL>
+                    <a:lnR w="6350" cap="flat" cmpd="sng" algn="ctr">
+                      <a:solidFill>
+                        <a:srgbClr val="D8DBE0"/>
+                      </a:solidFill>
+                      <a:prstDash val="solid"/>
+                      <a:round/>
+                      <a:headEnd type="none" w="med" len="med"/>
+                      <a:tailEnd type="none" w="med" len="med"/>
+                    </a:lnR>
+                    <a:lnT w="6350" cap="flat" cmpd="sng" algn="ctr">
+                      <a:solidFill>
+                        <a:srgbClr val="D8DBE0"/>
+                      </a:solidFill>
+                      <a:prstDash val="solid"/>
+                      <a:round/>
+                      <a:headEnd type="none" w="med" len="med"/>
+                      <a:tailEnd type="none" w="med" len="med"/>
+                    </a:lnT>
+                    <a:lnB w="6350" cap="flat" cmpd="sng" algn="ctr">
+                      <a:solidFill>
+                        <a:srgbClr val="D8DBE0"/>
+                      </a:solidFill>
+                      <a:prstDash val="solid"/>
+                      <a:round/>
+                      <a:headEnd type="none" w="med" len="med"/>
+                      <a:tailEnd type="none" w="med" len="med"/>
+                    </a:lnB>
+                  </a:tcPr>
+                </a:tc>
+              </a:tr>
+              <a:tr h="365760">
+                <a:tc>
+                  <a:txBody>
+                    <a:bodyPr/>
+                    <a:lstStyle/>
+                    <a:p>
+                      <a:pPr indent="0" marL="0">
+                        <a:buNone/>
+                      </a:pPr>
+                      <a:r>
+                        <a:rPr lang="en-US" sz="1250" dirty="0">
+                          <a:solidFill>
+                            <a:srgbClr val="1A1A1A"/>
+                          </a:solidFill>
+                          <a:latin typeface="Microsoft YaHei" pitchFamily="34" charset="0"/>
+                          <a:ea typeface="Microsoft YaHei" pitchFamily="34" charset="-122"/>
+                          <a:cs typeface="Microsoft YaHei" pitchFamily="34" charset="-120"/>
+                        </a:rPr>
+                        <a:t>SRA（50790 样本）</a:t>
+                      </a:r>
+                      <a:endParaRPr lang="en-US" sz="1250" dirty="0">
+                        <a:latin typeface="Microsoft YaHei" charset="0"/>
+                        <a:ea typeface="Microsoft YaHei" charset="0"/>
+                        <a:cs typeface="Microsoft YaHei" charset="0"/>
+                      </a:endParaRPr>
+                    </a:p>
+                  </a:txBody>
+                  <a:tcPr marL="91440" marR="91440" marT="45720" marB="45720" anchor="ctr">
+                    <a:lnL w="6350" cap="flat" cmpd="sng" algn="ctr">
+                      <a:solidFill>
+                        <a:srgbClr val="D8DBE0"/>
+                      </a:solidFill>
+                      <a:prstDash val="solid"/>
+                      <a:round/>
+                      <a:headEnd type="none" w="med" len="med"/>
+                      <a:tailEnd type="none" w="med" len="med"/>
+                    </a:lnL>
+                    <a:lnR w="6350" cap="flat" cmpd="sng" algn="ctr">
+                      <a:solidFill>
+                        <a:srgbClr val="D8DBE0"/>
+                      </a:solidFill>
+                      <a:prstDash val="solid"/>
+                      <a:round/>
+                      <a:headEnd type="none" w="med" len="med"/>
+                      <a:tailEnd type="none" w="med" len="med"/>
+                    </a:lnR>
+                    <a:lnT w="6350" cap="flat" cmpd="sng" algn="ctr">
+                      <a:solidFill>
+                        <a:srgbClr val="D8DBE0"/>
+                      </a:solidFill>
+                      <a:prstDash val="solid"/>
+                      <a:round/>
+                      <a:headEnd type="none" w="med" len="med"/>
+                      <a:tailEnd type="none" w="med" len="med"/>
+                    </a:lnT>
+                    <a:lnB w="6350" cap="flat" cmpd="sng" algn="ctr">
+                      <a:solidFill>
+                        <a:srgbClr val="D8DBE0"/>
+                      </a:solidFill>
+                      <a:prstDash val="solid"/>
+                      <a:round/>
+                      <a:headEnd type="none" w="med" len="med"/>
+                      <a:tailEnd type="none" w="med" len="med"/>
+                    </a:lnB>
+                  </a:tcPr>
+                </a:tc>
+                <a:tc>
+                  <a:txBody>
+                    <a:bodyPr/>
+                    <a:lstStyle/>
+                    <a:p>
+                      <a:pPr indent="0" marL="0">
+                        <a:buNone/>
+                      </a:pPr>
+                      <a:r>
+                        <a:rPr lang="en-US" sz="1250" dirty="0">
+                          <a:solidFill>
+                            <a:srgbClr val="1A1A1A"/>
+                          </a:solidFill>
+                          <a:latin typeface="Microsoft YaHei" pitchFamily="34" charset="0"/>
+                          <a:ea typeface="Microsoft YaHei" pitchFamily="34" charset="-122"/>
+                          <a:cs typeface="Microsoft YaHei" pitchFamily="34" charset="-120"/>
+                        </a:rPr>
+                        <a:t>0.20%</a:t>
+                      </a:r>
+                      <a:endParaRPr lang="en-US" sz="1250" dirty="0">
+                        <a:latin typeface="Microsoft YaHei" charset="0"/>
+                        <a:ea typeface="Microsoft YaHei" charset="0"/>
+                        <a:cs typeface="Microsoft YaHei" charset="0"/>
+                      </a:endParaRPr>
+                    </a:p>
+                  </a:txBody>
+                  <a:tcPr marL="91440" marR="91440" marT="45720" marB="45720" anchor="ctr">
+                    <a:lnL w="6350" cap="flat" cmpd="sng" algn="ctr">
+                      <a:solidFill>
+                        <a:srgbClr val="D8DBE0"/>
+                      </a:solidFill>
+                      <a:prstDash val="solid"/>
+                      <a:round/>
+                      <a:headEnd type="none" w="med" len="med"/>
+                      <a:tailEnd type="none" w="med" len="med"/>
+                    </a:lnL>
+                    <a:lnR w="6350" cap="flat" cmpd="sng" algn="ctr">
+                      <a:solidFill>
+                        <a:srgbClr val="D8DBE0"/>
+                      </a:solidFill>
+                      <a:prstDash val="solid"/>
+                      <a:round/>
+                      <a:headEnd type="none" w="med" len="med"/>
+                      <a:tailEnd type="none" w="med" len="med"/>
+                    </a:lnR>
+                    <a:lnT w="6350" cap="flat" cmpd="sng" algn="ctr">
+                      <a:solidFill>
+                        <a:srgbClr val="D8DBE0"/>
+                      </a:solidFill>
+                      <a:prstDash val="solid"/>
+                      <a:round/>
+                      <a:headEnd type="none" w="med" len="med"/>
+                      <a:tailEnd type="none" w="med" len="med"/>
+                    </a:lnT>
+                    <a:lnB w="6350" cap="flat" cmpd="sng" algn="ctr">
+                      <a:solidFill>
+                        <a:srgbClr val="D8DBE0"/>
+                      </a:solidFill>
+                      <a:prstDash val="solid"/>
+                      <a:round/>
+                      <a:headEnd type="none" w="med" len="med"/>
+                      <a:tailEnd type="none" w="med" len="med"/>
+                    </a:lnB>
+                  </a:tcPr>
+                </a:tc>
+                <a:tc>
+                  <a:txBody>
+                    <a:bodyPr/>
+                    <a:lstStyle/>
+                    <a:p>
+                      <a:pPr indent="0" marL="0">
+                        <a:buNone/>
+                      </a:pPr>
+                      <a:r>
+                        <a:rPr lang="en-US" sz="1250" dirty="0">
+                          <a:solidFill>
+                            <a:srgbClr val="1A1A1A"/>
+                          </a:solidFill>
+                          <a:latin typeface="Microsoft YaHei" pitchFamily="34" charset="0"/>
+                          <a:ea typeface="Microsoft YaHei" pitchFamily="34" charset="-122"/>
+                          <a:cs typeface="Microsoft YaHei" pitchFamily="34" charset="-120"/>
+                        </a:rPr>
+                        <a:t>占比最高的几个研究全是剪接机器被破坏的实验或癌细胞系</a:t>
+                      </a:r>
+                      <a:endParaRPr lang="en-US" sz="1250" dirty="0">
+                        <a:latin typeface="Microsoft YaHei" charset="0"/>
+                        <a:ea typeface="Microsoft YaHei" charset="0"/>
+                        <a:cs typeface="Microsoft YaHei" charset="0"/>
+                      </a:endParaRPr>
+                    </a:p>
+                  </a:txBody>
+                  <a:tcPr marL="91440" marR="91440" marT="45720" marB="45720" anchor="ctr">
+                    <a:lnL w="6350" cap="flat" cmpd="sng" algn="ctr">
+                      <a:solidFill>
+                        <a:srgbClr val="D8DBE0"/>
+                      </a:solidFill>
+                      <a:prstDash val="solid"/>
+                      <a:round/>
+                      <a:headEnd type="none" w="med" len="med"/>
+                      <a:tailEnd type="none" w="med" len="med"/>
+                    </a:lnL>
+                    <a:lnR w="6350" cap="flat" cmpd="sng" algn="ctr">
+                      <a:solidFill>
+                        <a:srgbClr val="D8DBE0"/>
+                      </a:solidFill>
+                      <a:prstDash val="solid"/>
+                      <a:round/>
+                      <a:headEnd type="none" w="med" len="med"/>
+                      <a:tailEnd type="none" w="med" len="med"/>
+                    </a:lnR>
+                    <a:lnT w="6350" cap="flat" cmpd="sng" algn="ctr">
+                      <a:solidFill>
+                        <a:srgbClr val="D8DBE0"/>
+                      </a:solidFill>
+                      <a:prstDash val="solid"/>
+                      <a:round/>
+                      <a:headEnd type="none" w="med" len="med"/>
+                      <a:tailEnd type="none" w="med" len="med"/>
+                    </a:lnT>
+                    <a:lnB w="6350" cap="flat" cmpd="sng" algn="ctr">
+                      <a:solidFill>
+                        <a:srgbClr val="D8DBE0"/>
+                      </a:solidFill>
+                      <a:prstDash val="solid"/>
+                      <a:round/>
+                      <a:headEnd type="none" w="med" len="med"/>
+                      <a:tailEnd type="none" w="med" len="med"/>
+                    </a:lnB>
+                  </a:tcPr>
+                </a:tc>
+              </a:tr>
+              <a:tr h="365760">
+                <a:tc>
+                  <a:txBody>
+                    <a:bodyPr/>
+                    <a:lstStyle/>
+                    <a:p>
+                      <a:pPr indent="0" marL="0">
+                        <a:buNone/>
+                      </a:pPr>
+                      <a:r>
+                        <a:rPr lang="en-US" sz="1250" dirty="0">
+                          <a:solidFill>
+                            <a:srgbClr val="1A1A1A"/>
+                          </a:solidFill>
+                          <a:latin typeface="Microsoft YaHei" pitchFamily="34" charset="0"/>
+                          <a:ea typeface="Microsoft YaHei" pitchFamily="34" charset="-122"/>
+                          <a:cs typeface="Microsoft YaHei" pitchFamily="34" charset="-120"/>
+                        </a:rPr>
+                        <a:t>U2AF1 敲低（HFF 原代）</a:t>
+                      </a:r>
+                      <a:endParaRPr lang="en-US" sz="1250" dirty="0">
+                        <a:latin typeface="Microsoft YaHei" charset="0"/>
+                        <a:ea typeface="Microsoft YaHei" charset="0"/>
+                        <a:cs typeface="Microsoft YaHei" charset="0"/>
+                      </a:endParaRPr>
+                    </a:p>
+                  </a:txBody>
+                  <a:tcPr marL="91440" marR="91440" marT="45720" marB="45720" anchor="ctr">
+                    <a:lnL w="6350" cap="flat" cmpd="sng" algn="ctr">
+                      <a:solidFill>
+                        <a:srgbClr val="D8DBE0"/>
+                      </a:solidFill>
+                      <a:prstDash val="solid"/>
+                      <a:round/>
+                      <a:headEnd type="none" w="med" len="med"/>
+                      <a:tailEnd type="none" w="med" len="med"/>
+                    </a:lnL>
+                    <a:lnR w="6350" cap="flat" cmpd="sng" algn="ctr">
+                      <a:solidFill>
+                        <a:srgbClr val="D8DBE0"/>
+                      </a:solidFill>
+                      <a:prstDash val="solid"/>
+                      <a:round/>
+                      <a:headEnd type="none" w="med" len="med"/>
+                      <a:tailEnd type="none" w="med" len="med"/>
+                    </a:lnR>
+                    <a:lnT w="6350" cap="flat" cmpd="sng" algn="ctr">
+                      <a:solidFill>
+                        <a:srgbClr val="D8DBE0"/>
+                      </a:solidFill>
+                      <a:prstDash val="solid"/>
+                      <a:round/>
+                      <a:headEnd type="none" w="med" len="med"/>
+                      <a:tailEnd type="none" w="med" len="med"/>
+                    </a:lnT>
+                    <a:lnB w="6350" cap="flat" cmpd="sng" algn="ctr">
+                      <a:solidFill>
+                        <a:srgbClr val="D8DBE0"/>
+                      </a:solidFill>
+                      <a:prstDash val="solid"/>
+                      <a:round/>
+                      <a:headEnd type="none" w="med" len="med"/>
+                      <a:tailEnd type="none" w="med" len="med"/>
+                    </a:lnB>
+                  </a:tcPr>
+                </a:tc>
+                <a:tc>
+                  <a:txBody>
+                    <a:bodyPr/>
+                    <a:lstStyle/>
+                    <a:p>
+                      <a:pPr indent="0" marL="0">
+                        <a:buNone/>
+                      </a:pPr>
+                      <a:r>
+                        <a:rPr lang="en-US" sz="1250" dirty="0">
+                          <a:solidFill>
+                            <a:srgbClr val="1A1A1A"/>
+                          </a:solidFill>
+                          <a:latin typeface="Microsoft YaHei" pitchFamily="34" charset="0"/>
+                          <a:ea typeface="Microsoft YaHei" pitchFamily="34" charset="-122"/>
+                          <a:cs typeface="Microsoft YaHei" pitchFamily="34" charset="-120"/>
+                        </a:rPr>
+                        <a:t>11.1%</a:t>
+                      </a:r>
+                      <a:endParaRPr lang="en-US" sz="1250" dirty="0">
+                        <a:latin typeface="Microsoft YaHei" charset="0"/>
+                        <a:ea typeface="Microsoft YaHei" charset="0"/>
+                        <a:cs typeface="Microsoft YaHei" charset="0"/>
+                      </a:endParaRPr>
+                    </a:p>
+                  </a:txBody>
+                  <a:tcPr marL="91440" marR="91440" marT="45720" marB="45720" anchor="ctr">
+                    <a:lnL w="6350" cap="flat" cmpd="sng" algn="ctr">
+                      <a:solidFill>
+                        <a:srgbClr val="D8DBE0"/>
+                      </a:solidFill>
+                      <a:prstDash val="solid"/>
+                      <a:round/>
+                      <a:headEnd type="none" w="med" len="med"/>
+                      <a:tailEnd type="none" w="med" len="med"/>
+                    </a:lnL>
+                    <a:lnR w="6350" cap="flat" cmpd="sng" algn="ctr">
+                      <a:solidFill>
+                        <a:srgbClr val="D8DBE0"/>
+                      </a:solidFill>
+                      <a:prstDash val="solid"/>
+                      <a:round/>
+                      <a:headEnd type="none" w="med" len="med"/>
+                      <a:tailEnd type="none" w="med" len="med"/>
+                    </a:lnR>
+                    <a:lnT w="6350" cap="flat" cmpd="sng" algn="ctr">
+                      <a:solidFill>
+                        <a:srgbClr val="D8DBE0"/>
+                      </a:solidFill>
+                      <a:prstDash val="solid"/>
+                      <a:round/>
+                      <a:headEnd type="none" w="med" len="med"/>
+                      <a:tailEnd type="none" w="med" len="med"/>
+                    </a:lnT>
+                    <a:lnB w="6350" cap="flat" cmpd="sng" algn="ctr">
+                      <a:solidFill>
+                        <a:srgbClr val="D8DBE0"/>
+                      </a:solidFill>
+                      <a:prstDash val="solid"/>
+                      <a:round/>
+                      <a:headEnd type="none" w="med" len="med"/>
+                      <a:tailEnd type="none" w="med" len="med"/>
+                    </a:lnB>
+                  </a:tcPr>
+                </a:tc>
+                <a:tc>
+                  <a:txBody>
+                    <a:bodyPr/>
+                    <a:lstStyle/>
+                    <a:p>
+                      <a:pPr indent="0" marL="0">
+                        <a:buNone/>
+                      </a:pPr>
+                      <a:r>
+                        <a:rPr lang="en-US" sz="1250" dirty="0">
+                          <a:solidFill>
+                            <a:srgbClr val="1A1A1A"/>
+                          </a:solidFill>
+                          <a:latin typeface="Microsoft YaHei" pitchFamily="34" charset="0"/>
+                          <a:ea typeface="Microsoft YaHei" pitchFamily="34" charset="-122"/>
+                          <a:cs typeface="Microsoft YaHei" pitchFamily="34" charset="-120"/>
+                        </a:rPr>
+                        <a:t>U2AF1 是 3' 剪接位点识别的核心因子</a:t>
+                      </a:r>
+                      <a:endParaRPr lang="en-US" sz="1250" dirty="0">
+                        <a:latin typeface="Microsoft YaHei" charset="0"/>
+                        <a:ea typeface="Microsoft YaHei" charset="0"/>
+                        <a:cs typeface="Microsoft YaHei" charset="0"/>
+                      </a:endParaRPr>
+                    </a:p>
+                  </a:txBody>
+                  <a:tcPr marL="91440" marR="91440" marT="45720" marB="45720" anchor="ctr">
+                    <a:lnL w="6350" cap="flat" cmpd="sng" algn="ctr">
+                      <a:solidFill>
+                        <a:srgbClr val="D8DBE0"/>
+                      </a:solidFill>
+                      <a:prstDash val="solid"/>
+                      <a:round/>
+                      <a:headEnd type="none" w="med" len="med"/>
+                      <a:tailEnd type="none" w="med" len="med"/>
+                    </a:lnL>
+                    <a:lnR w="6350" cap="flat" cmpd="sng" algn="ctr">
+                      <a:solidFill>
+                        <a:srgbClr val="D8DBE0"/>
+                      </a:solidFill>
+                      <a:prstDash val="solid"/>
+                      <a:round/>
+                      <a:headEnd type="none" w="med" len="med"/>
+                      <a:tailEnd type="none" w="med" len="med"/>
+                    </a:lnR>
+                    <a:lnT w="6350" cap="flat" cmpd="sng" algn="ctr">
+                      <a:solidFill>
+                        <a:srgbClr val="D8DBE0"/>
+                      </a:solidFill>
+                      <a:prstDash val="solid"/>
+                      <a:round/>
+                      <a:headEnd type="none" w="med" len="med"/>
+                      <a:tailEnd type="none" w="med" len="med"/>
+                    </a:lnT>
+                    <a:lnB w="6350" cap="flat" cmpd="sng" algn="ctr">
+                      <a:solidFill>
+                        <a:srgbClr val="D8DBE0"/>
+                      </a:solidFill>
+                      <a:prstDash val="solid"/>
+                      <a:round/>
+                      <a:headEnd type="none" w="med" len="med"/>
+                      <a:tailEnd type="none" w="med" len="med"/>
+                    </a:lnB>
+                  </a:tcPr>
+                </a:tc>
+              </a:tr>
+              <a:tr h="365760">
+                <a:tc>
+                  <a:txBody>
+                    <a:bodyPr/>
+                    <a:lstStyle/>
+                    <a:p>
+                      <a:pPr indent="0" marL="0">
+                        <a:buNone/>
+                      </a:pPr>
+                      <a:r>
+                        <a:rPr lang="en-US" sz="1250" dirty="0">
+                          <a:solidFill>
+                            <a:srgbClr val="1A1A1A"/>
+                          </a:solidFill>
+                          <a:latin typeface="Microsoft YaHei" pitchFamily="34" charset="0"/>
+                          <a:ea typeface="Microsoft YaHei" pitchFamily="34" charset="-122"/>
+                          <a:cs typeface="Microsoft YaHei" pitchFamily="34" charset="-120"/>
+                        </a:rPr>
+                        <a:t>Tra2 敲低（MDA-MB-231）</a:t>
+                      </a:r>
+                      <a:endParaRPr lang="en-US" sz="1250" dirty="0">
+                        <a:latin typeface="Microsoft YaHei" charset="0"/>
+                        <a:ea typeface="Microsoft YaHei" charset="0"/>
+                        <a:cs typeface="Microsoft YaHei" charset="0"/>
+                      </a:endParaRPr>
+                    </a:p>
+                  </a:txBody>
+                  <a:tcPr marL="91440" marR="91440" marT="45720" marB="45720" anchor="ctr">
+                    <a:lnL w="6350" cap="flat" cmpd="sng" algn="ctr">
+                      <a:solidFill>
+                        <a:srgbClr val="D8DBE0"/>
+                      </a:solidFill>
+                      <a:prstDash val="solid"/>
+                      <a:round/>
+                      <a:headEnd type="none" w="med" len="med"/>
+                      <a:tailEnd type="none" w="med" len="med"/>
+                    </a:lnL>
+                    <a:lnR w="6350" cap="flat" cmpd="sng" algn="ctr">
+                      <a:solidFill>
+                        <a:srgbClr val="D8DBE0"/>
+                      </a:solidFill>
+                      <a:prstDash val="solid"/>
+                      <a:round/>
+                      <a:headEnd type="none" w="med" len="med"/>
+                      <a:tailEnd type="none" w="med" len="med"/>
+                    </a:lnR>
+                    <a:lnT w="6350" cap="flat" cmpd="sng" algn="ctr">
+                      <a:solidFill>
+                        <a:srgbClr val="D8DBE0"/>
+                      </a:solidFill>
+                      <a:prstDash val="solid"/>
+                      <a:round/>
+                      <a:headEnd type="none" w="med" len="med"/>
+                      <a:tailEnd type="none" w="med" len="med"/>
+                    </a:lnT>
+                    <a:lnB w="6350" cap="flat" cmpd="sng" algn="ctr">
+                      <a:solidFill>
+                        <a:srgbClr val="D8DBE0"/>
+                      </a:solidFill>
+                      <a:prstDash val="solid"/>
+                      <a:round/>
+                      <a:headEnd type="none" w="med" len="med"/>
+                      <a:tailEnd type="none" w="med" len="med"/>
+                    </a:lnB>
+                  </a:tcPr>
+                </a:tc>
+                <a:tc>
+                  <a:txBody>
+                    <a:bodyPr/>
+                    <a:lstStyle/>
+                    <a:p>
+                      <a:pPr indent="0" marL="0">
+                        <a:buNone/>
+                      </a:pPr>
+                      <a:r>
+                        <a:rPr lang="en-US" sz="1250" dirty="0">
+                          <a:solidFill>
+                            <a:srgbClr val="1A1A1A"/>
+                          </a:solidFill>
+                          <a:latin typeface="Microsoft YaHei" pitchFamily="34" charset="0"/>
+                          <a:ea typeface="Microsoft YaHei" pitchFamily="34" charset="-122"/>
+                          <a:cs typeface="Microsoft YaHei" pitchFamily="34" charset="-120"/>
+                        </a:rPr>
+                        <a:t>13.5%</a:t>
+                      </a:r>
+                      <a:endParaRPr lang="en-US" sz="1250" dirty="0">
+                        <a:latin typeface="Microsoft YaHei" charset="0"/>
+                        <a:ea typeface="Microsoft YaHei" charset="0"/>
+                        <a:cs typeface="Microsoft YaHei" charset="0"/>
+                      </a:endParaRPr>
+                    </a:p>
+                  </a:txBody>
+                  <a:tcPr marL="91440" marR="91440" marT="45720" marB="45720" anchor="ctr">
+                    <a:lnL w="6350" cap="flat" cmpd="sng" algn="ctr">
+                      <a:solidFill>
+                        <a:srgbClr val="D8DBE0"/>
+                      </a:solidFill>
+                      <a:prstDash val="solid"/>
+                      <a:round/>
+                      <a:headEnd type="none" w="med" len="med"/>
+                      <a:tailEnd type="none" w="med" len="med"/>
+                    </a:lnL>
+                    <a:lnR w="6350" cap="flat" cmpd="sng" algn="ctr">
+                      <a:solidFill>
+                        <a:srgbClr val="D8DBE0"/>
+                      </a:solidFill>
+                      <a:prstDash val="solid"/>
+                      <a:round/>
+                      <a:headEnd type="none" w="med" len="med"/>
+                      <a:tailEnd type="none" w="med" len="med"/>
+                    </a:lnR>
+                    <a:lnT w="6350" cap="flat" cmpd="sng" algn="ctr">
+                      <a:solidFill>
+                        <a:srgbClr val="D8DBE0"/>
+                      </a:solidFill>
+                      <a:prstDash val="solid"/>
+                      <a:round/>
+                      <a:headEnd type="none" w="med" len="med"/>
+                      <a:tailEnd type="none" w="med" len="med"/>
+                    </a:lnT>
+                    <a:lnB w="6350" cap="flat" cmpd="sng" algn="ctr">
+                      <a:solidFill>
+                        <a:srgbClr val="D8DBE0"/>
+                      </a:solidFill>
+                      <a:prstDash val="solid"/>
+                      <a:round/>
+                      <a:headEnd type="none" w="med" len="med"/>
+                      <a:tailEnd type="none" w="med" len="med"/>
+                    </a:lnB>
+                  </a:tcPr>
+                </a:tc>
+                <a:tc>
+                  <a:txBody>
+                    <a:bodyPr/>
+                    <a:lstStyle/>
+                    <a:p>
+                      <a:pPr indent="0" marL="0">
+                        <a:buNone/>
+                      </a:pPr>
+                      <a:r>
+                        <a:rPr lang="en-US" sz="1250" dirty="0">
+                          <a:solidFill>
+                            <a:srgbClr val="1A1A1A"/>
+                          </a:solidFill>
+                          <a:latin typeface="Microsoft YaHei" pitchFamily="34" charset="0"/>
+                          <a:ea typeface="Microsoft YaHei" pitchFamily="34" charset="-122"/>
+                          <a:cs typeface="Microsoft YaHei" pitchFamily="34" charset="-120"/>
+                        </a:rPr>
+                        <a:t>Tra2 为剪接因子</a:t>
+                      </a:r>
+                      <a:endParaRPr lang="en-US" sz="1250" dirty="0">
+                        <a:latin typeface="Microsoft YaHei" charset="0"/>
+                        <a:ea typeface="Microsoft YaHei" charset="0"/>
+                        <a:cs typeface="Microsoft YaHei" charset="0"/>
+                      </a:endParaRPr>
+                    </a:p>
+                  </a:txBody>
+                  <a:tcPr marL="91440" marR="91440" marT="45720" marB="45720" anchor="ctr">
+                    <a:lnL w="6350" cap="flat" cmpd="sng" algn="ctr">
+                      <a:solidFill>
+                        <a:srgbClr val="D8DBE0"/>
+                      </a:solidFill>
+                      <a:prstDash val="solid"/>
+                      <a:round/>
+                      <a:headEnd type="none" w="med" len="med"/>
+                      <a:tailEnd type="none" w="med" len="med"/>
+                    </a:lnL>
+                    <a:lnR w="6350" cap="flat" cmpd="sng" algn="ctr">
+                      <a:solidFill>
+                        <a:srgbClr val="D8DBE0"/>
+                      </a:solidFill>
+                      <a:prstDash val="solid"/>
+                      <a:round/>
+                      <a:headEnd type="none" w="med" len="med"/>
+                      <a:tailEnd type="none" w="med" len="med"/>
+                    </a:lnR>
+                    <a:lnT w="6350" cap="flat" cmpd="sng" algn="ctr">
+                      <a:solidFill>
+                        <a:srgbClr val="D8DBE0"/>
+                      </a:solidFill>
+                      <a:prstDash val="solid"/>
+                      <a:round/>
+                      <a:headEnd type="none" w="med" len="med"/>
+                      <a:tailEnd type="none" w="med" len="med"/>
+                    </a:lnT>
+                    <a:lnB w="6350" cap="flat" cmpd="sng" algn="ctr">
+                      <a:solidFill>
+                        <a:srgbClr val="D8DBE0"/>
+                      </a:solidFill>
+                      <a:prstDash val="solid"/>
+                      <a:round/>
+                      <a:headEnd type="none" w="med" len="med"/>
+                      <a:tailEnd type="none" w="med" len="med"/>
+                    </a:lnB>
+                  </a:tcPr>
+                </a:tc>
+              </a:tr>
+              <a:tr h="365760">
+                <a:tc>
+                  <a:txBody>
+                    <a:bodyPr/>
+                    <a:lstStyle/>
+                    <a:p>
+                      <a:pPr indent="0" marL="0">
+                        <a:buNone/>
+                      </a:pPr>
+                      <a:r>
+                        <a:rPr lang="en-US" sz="1250" dirty="0">
+                          <a:solidFill>
+                            <a:srgbClr val="1A1A1A"/>
+                          </a:solidFill>
+                          <a:latin typeface="Microsoft YaHei" pitchFamily="34" charset="0"/>
+                          <a:ea typeface="Microsoft YaHei" pitchFamily="34" charset="-122"/>
+                          <a:cs typeface="Microsoft YaHei" pitchFamily="34" charset="-120"/>
+                        </a:rPr>
+                        <a:t>CLK2 抑制剂 CC-671（Cal-51）</a:t>
+                      </a:r>
+                      <a:endParaRPr lang="en-US" sz="1250" dirty="0">
+                        <a:latin typeface="Microsoft YaHei" charset="0"/>
+                        <a:ea typeface="Microsoft YaHei" charset="0"/>
+                        <a:cs typeface="Microsoft YaHei" charset="0"/>
+                      </a:endParaRPr>
+                    </a:p>
+                  </a:txBody>
+                  <a:tcPr marL="91440" marR="91440" marT="45720" marB="45720" anchor="ctr">
+                    <a:lnL w="6350" cap="flat" cmpd="sng" algn="ctr">
+                      <a:solidFill>
+                        <a:srgbClr val="D8DBE0"/>
+                      </a:solidFill>
+                      <a:prstDash val="solid"/>
+                      <a:round/>
+                      <a:headEnd type="none" w="med" len="med"/>
+                      <a:tailEnd type="none" w="med" len="med"/>
+                    </a:lnL>
+                    <a:lnR w="6350" cap="flat" cmpd="sng" algn="ctr">
+                      <a:solidFill>
+                        <a:srgbClr val="D8DBE0"/>
+                      </a:solidFill>
+                      <a:prstDash val="solid"/>
+                      <a:round/>
+                      <a:headEnd type="none" w="med" len="med"/>
+                      <a:tailEnd type="none" w="med" len="med"/>
+                    </a:lnR>
+                    <a:lnT w="6350" cap="flat" cmpd="sng" algn="ctr">
+                      <a:solidFill>
+                        <a:srgbClr val="D8DBE0"/>
+                      </a:solidFill>
+                      <a:prstDash val="solid"/>
+                      <a:round/>
+                      <a:headEnd type="none" w="med" len="med"/>
+                      <a:tailEnd type="none" w="med" len="med"/>
+                    </a:lnT>
+                    <a:lnB w="6350" cap="flat" cmpd="sng" algn="ctr">
+                      <a:solidFill>
+                        <a:srgbClr val="D8DBE0"/>
+                      </a:solidFill>
+                      <a:prstDash val="solid"/>
+                      <a:round/>
+                      <a:headEnd type="none" w="med" len="med"/>
+                      <a:tailEnd type="none" w="med" len="med"/>
+                    </a:lnB>
+                  </a:tcPr>
+                </a:tc>
+                <a:tc>
+                  <a:txBody>
+                    <a:bodyPr/>
+                    <a:lstStyle/>
+                    <a:p>
+                      <a:pPr indent="0" marL="0">
+                        <a:buNone/>
+                      </a:pPr>
+                      <a:r>
+                        <a:rPr lang="en-US" sz="1250" dirty="0">
+                          <a:solidFill>
+                            <a:srgbClr val="1A1A1A"/>
+                          </a:solidFill>
+                          <a:latin typeface="Microsoft YaHei" pitchFamily="34" charset="0"/>
+                          <a:ea typeface="Microsoft YaHei" pitchFamily="34" charset="-122"/>
+                          <a:cs typeface="Microsoft YaHei" pitchFamily="34" charset="-120"/>
+                        </a:rPr>
+                        <a:t>4.2%</a:t>
+                      </a:r>
+                      <a:endParaRPr lang="en-US" sz="1250" dirty="0">
+                        <a:latin typeface="Microsoft YaHei" charset="0"/>
+                        <a:ea typeface="Microsoft YaHei" charset="0"/>
+                        <a:cs typeface="Microsoft YaHei" charset="0"/>
+                      </a:endParaRPr>
+                    </a:p>
+                  </a:txBody>
+                  <a:tcPr marL="91440" marR="91440" marT="45720" marB="45720" anchor="ctr">
+                    <a:lnL w="6350" cap="flat" cmpd="sng" algn="ctr">
+                      <a:solidFill>
+                        <a:srgbClr val="D8DBE0"/>
+                      </a:solidFill>
+                      <a:prstDash val="solid"/>
+                      <a:round/>
+                      <a:headEnd type="none" w="med" len="med"/>
+                      <a:tailEnd type="none" w="med" len="med"/>
+                    </a:lnL>
+                    <a:lnR w="6350" cap="flat" cmpd="sng" algn="ctr">
+                      <a:solidFill>
+                        <a:srgbClr val="D8DBE0"/>
+                      </a:solidFill>
+                      <a:prstDash val="solid"/>
+                      <a:round/>
+                      <a:headEnd type="none" w="med" len="med"/>
+                      <a:tailEnd type="none" w="med" len="med"/>
+                    </a:lnR>
+                    <a:lnT w="6350" cap="flat" cmpd="sng" algn="ctr">
+                      <a:solidFill>
+                        <a:srgbClr val="D8DBE0"/>
+                      </a:solidFill>
+                      <a:prstDash val="solid"/>
+                      <a:round/>
+                      <a:headEnd type="none" w="med" len="med"/>
+                      <a:tailEnd type="none" w="med" len="med"/>
+                    </a:lnT>
+                    <a:lnB w="6350" cap="flat" cmpd="sng" algn="ctr">
+                      <a:solidFill>
+                        <a:srgbClr val="D8DBE0"/>
+                      </a:solidFill>
+                      <a:prstDash val="solid"/>
+                      <a:round/>
+                      <a:headEnd type="none" w="med" len="med"/>
+                      <a:tailEnd type="none" w="med" len="med"/>
+                    </a:lnB>
+                  </a:tcPr>
+                </a:tc>
+                <a:tc>
+                  <a:txBody>
+                    <a:bodyPr/>
+                    <a:lstStyle/>
+                    <a:p>
+                      <a:pPr indent="0" marL="0">
+                        <a:buNone/>
+                      </a:pPr>
+                      <a:r>
+                        <a:rPr lang="en-US" sz="1250" dirty="0">
+                          <a:solidFill>
+                            <a:srgbClr val="1A1A1A"/>
+                          </a:solidFill>
+                          <a:latin typeface="Microsoft YaHei" pitchFamily="34" charset="0"/>
+                          <a:ea typeface="Microsoft YaHei" pitchFamily="34" charset="-122"/>
+                          <a:cs typeface="Microsoft YaHei" pitchFamily="34" charset="-120"/>
+                        </a:rPr>
+                        <a:t>125 个样本、84 个检出；CLK 磷酸化 SR 蛋白</a:t>
+                      </a:r>
+                      <a:endParaRPr lang="en-US" sz="1250" dirty="0">
+                        <a:latin typeface="Microsoft YaHei" charset="0"/>
+                        <a:ea typeface="Microsoft YaHei" charset="0"/>
+                        <a:cs typeface="Microsoft YaHei" charset="0"/>
+                      </a:endParaRPr>
+                    </a:p>
+                  </a:txBody>
+                  <a:tcPr marL="91440" marR="91440" marT="45720" marB="45720" anchor="ctr">
+                    <a:lnL w="6350" cap="flat" cmpd="sng" algn="ctr">
+                      <a:solidFill>
+                        <a:srgbClr val="D8DBE0"/>
+                      </a:solidFill>
+                      <a:prstDash val="solid"/>
+                      <a:round/>
+                      <a:headEnd type="none" w="med" len="med"/>
+                      <a:tailEnd type="none" w="med" len="med"/>
+                    </a:lnL>
+                    <a:lnR w="6350" cap="flat" cmpd="sng" algn="ctr">
+                      <a:solidFill>
+                        <a:srgbClr val="D8DBE0"/>
+                      </a:solidFill>
+                      <a:prstDash val="solid"/>
+                      <a:round/>
+                      <a:headEnd type="none" w="med" len="med"/>
+                      <a:tailEnd type="none" w="med" len="med"/>
+                    </a:lnR>
+                    <a:lnT w="6350" cap="flat" cmpd="sng" algn="ctr">
+                      <a:solidFill>
+                        <a:srgbClr val="D8DBE0"/>
+                      </a:solidFill>
+                      <a:prstDash val="solid"/>
+                      <a:round/>
+                      <a:headEnd type="none" w="med" len="med"/>
+                      <a:tailEnd type="none" w="med" len="med"/>
+                    </a:lnT>
+                    <a:lnB w="6350" cap="flat" cmpd="sng" algn="ctr">
+                      <a:solidFill>
+                        <a:srgbClr val="D8DBE0"/>
+                      </a:solidFill>
+                      <a:prstDash val="solid"/>
+                      <a:round/>
+                      <a:headEnd type="none" w="med" len="med"/>
+                      <a:tailEnd type="none" w="med" len="med"/>
+                    </a:lnB>
+                  </a:tcPr>
+                </a:tc>
+              </a:tr>
+            </a:tbl>
+          </a:graphicData>
+        </a:graphic>
+      </p:graphicFrame>
+      <p:sp>
+        <p:nvSpPr>
+          <p:cNvPr id="6" name="Text 3"/>
+          <p:cNvSpPr txBox="1"/>
+          <p:nvPr/>
+        </p:nvSpPr>
+        <p:spPr>
+          <a:xfrm>
+            <a:off x="731520" y="5074920"/>
+            <a:ext cx="10698480" cy="822960"/>
+          </a:xfrm>
+          <a:prstGeom prst="rect">
+            <a:avLst/>
+          </a:prstGeom>
+          <a:noFill/>
+          <a:ln/>
+        </p:spPr>
+        <p:txBody>
+          <a:bodyPr wrap="square" rtlCol="0" anchor="ctr"/>
+          <a:lstStyle/>
+          <a:p>
+            <a:pPr indent="0" marL="0">
+              <a:lnSpc>
+                <a:spcPct val="120000"/>
+              </a:lnSpc>
+              <a:buNone/>
+            </a:pPr>
+            <a:r>
+              <a:rPr lang="en-US" sz="1350" b="1" dirty="0">
+                <a:solidFill>
+                  <a:srgbClr val="1A1A1A"/>
+                </a:solidFill>
+                <a:latin typeface="Microsoft YaHei" pitchFamily="34" charset="0"/>
+                <a:ea typeface="Microsoft YaHei" pitchFamily="34" charset="-122"/>
+                <a:cs typeface="Microsoft YaHei" pitchFamily="34" charset="-120"/>
+              </a:rPr>
+              <a:t>所以短 IL18 转录本是剪接噪声，不是受调控的细胞类型特异异构体。</a:t>
             </a:r>
             <a:pPr indent="0" marL="0">
               <a:lnSpc>
-                <a:spcPct val="115000"/>
+                <a:spcPct val="120000"/>
               </a:lnSpc>
+              <a:buNone/>
+            </a:pPr>
+            <a:r>
+              <a:rPr lang="en-US" sz="1350" dirty="0">
+                <a:solidFill>
+                  <a:srgbClr val="1A1A1A"/>
+                </a:solidFill>
+                <a:latin typeface="Microsoft YaHei" pitchFamily="34" charset="0"/>
+                <a:ea typeface="Microsoft YaHei" pitchFamily="34" charset="-122"/>
+                <a:cs typeface="Microsoft YaHei" pitchFamily="34" charset="-120"/>
+              </a:rPr>
+              <a:t>若要追「短 IL-18」，正确的落点是蛋白层面的非经典切割（caspase-3、糜蛋白酶、蛋白酶-3、granzyme B 产物与 caspase-1 不同），转录组看不见，只能做蛋白实验。</a:t>
+            </a:r>
+            <a:endParaRPr lang="en-US" sz="1350" dirty="0"/>
+          </a:p>
+        </p:txBody>
+      </p:sp>
+      <p:sp>
+        <p:nvSpPr>
+          <p:cNvPr id="7" name="Text 4"/>
+          <p:cNvSpPr txBox="1"/>
+          <p:nvPr/>
+        </p:nvSpPr>
+        <p:spPr>
+          <a:xfrm>
+            <a:off x="640080" y="6355080"/>
+            <a:ext cx="10972800" cy="347472"/>
+          </a:xfrm>
+          <a:prstGeom prst="rect">
+            <a:avLst/>
+          </a:prstGeom>
+          <a:noFill/>
+          <a:ln/>
+        </p:spPr>
+        <p:txBody>
+          <a:bodyPr wrap="square" rtlCol="0" anchor="ctr"/>
+          <a:lstStyle/>
+          <a:p>
+            <a:pPr indent="0" marL="0">
               <a:buNone/>
             </a:pPr>
             <a:r>
@@ -1870,309 +3613,9 @@
                 <a:ea typeface="Microsoft YaHei" pitchFamily="34" charset="-122"/>
                 <a:cs typeface="Microsoft YaHei" pitchFamily="34" charset="-120"/>
               </a:rPr>
-              <a:t>≥2 个独立参考来源一致</a:t>
+              <a:t>数据源 Snaptron（服务 recount/SRA 与 GTEx 的逐样本剪接连接计数）；坐标由 Ensembl 转录本结构推出并与 Snaptron 标注连接核对。</a:t>
             </a:r>
-            <a:endParaRPr lang="en-US" sz="1900" dirty="0"/>
-          </a:p>
-        </p:txBody>
-      </p:sp>
-      <p:sp>
-        <p:nvSpPr>
-          <p:cNvPr id="4" name="Text 2"/>
-          <p:cNvSpPr txBox="1"/>
-          <p:nvPr/>
-        </p:nvSpPr>
-        <p:spPr>
-          <a:xfrm>
-            <a:off x="3520440" y="1371600"/>
-            <a:ext cx="8046720" cy="1691640"/>
-          </a:xfrm>
-          <a:prstGeom prst="rect">
-            <a:avLst/>
-          </a:prstGeom>
-          <a:noFill/>
-          <a:ln/>
-        </p:spPr>
-        <p:txBody>
-          <a:bodyPr wrap="square" rtlCol="0" anchor="t"/>
-          <a:lstStyle/>
-          <a:p>
-            <a:pPr indent="0" marL="0">
-              <a:lnSpc>
-                <a:spcPct val="115000"/>
-              </a:lnSpc>
-              <a:buNone/>
-            </a:pPr>
-            <a:r>
-              <a:rPr lang="en-US" sz="1150" b="1" dirty="0">
-                <a:solidFill>
-                  <a:srgbClr val="1A1A1A"/>
-                </a:solidFill>
-                <a:latin typeface="Microsoft YaHei" pitchFamily="34" charset="0"/>
-                <a:ea typeface="Microsoft YaHei" pitchFamily="34" charset="-122"/>
-                <a:cs typeface="Microsoft YaHei" pitchFamily="34" charset="-120"/>
-              </a:rPr>
-              <a:t>小鼠脑 星形胶质 · 小鼠脑 少突胶质
-</a:t>
-            </a:r>
-            <a:pPr indent="0" marL="0">
-              <a:lnSpc>
-                <a:spcPct val="115000"/>
-              </a:lnSpc>
-              <a:buNone/>
-            </a:pPr>
-            <a:r>
-              <a:rPr lang="en-US" sz="1150" dirty="0">
-                <a:solidFill>
-                  <a:srgbClr val="6B6B6B"/>
-                </a:solidFill>
-                <a:latin typeface="Microsoft YaHei" pitchFamily="34" charset="0"/>
-                <a:ea typeface="Microsoft YaHei" pitchFamily="34" charset="-122"/>
-                <a:cs typeface="Microsoft YaHei" pitchFamily="34" charset="-120"/>
-              </a:rPr>
-              <a:t>Allen Brain Map + CELLxGENE + brainrnaseq/Zhang 三源一致：Il18 明确存在而 Casp1 处于零底线（星形胶质 115.1 vs 1.13 FPKM）。本数据 Casp1 阳性细胞仅 2/3766 与 2/8987，样本量足够大，近零是真的近零。</a:t>
-            </a:r>
-            <a:endParaRPr lang="en-US" sz="1150" dirty="0"/>
-          </a:p>
-        </p:txBody>
-      </p:sp>
-      <p:sp>
-        <p:nvSpPr>
-          <p:cNvPr id="5" name="Text 3"/>
-          <p:cNvSpPr txBox="1"/>
-          <p:nvPr/>
-        </p:nvSpPr>
-        <p:spPr>
-          <a:xfrm>
-            <a:off x="640080" y="3081528"/>
-            <a:ext cx="2651760" cy="1463040"/>
-          </a:xfrm>
-          <a:prstGeom prst="rect">
-            <a:avLst/>
-          </a:prstGeom>
-          <a:noFill/>
-          <a:ln/>
-        </p:spPr>
-        <p:txBody>
-          <a:bodyPr wrap="square" rtlCol="0" anchor="t"/>
-          <a:lstStyle/>
-          <a:p>
-            <a:pPr indent="0" marL="0">
-              <a:lnSpc>
-                <a:spcPct val="115000"/>
-              </a:lnSpc>
-              <a:buNone/>
-            </a:pPr>
-            <a:r>
-              <a:rPr lang="en-US" sz="1900" b="1" dirty="0">
-                <a:solidFill>
-                  <a:srgbClr val="1F5FA8"/>
-                </a:solidFill>
-                <a:latin typeface="Microsoft YaHei" pitchFamily="34" charset="0"/>
-                <a:ea typeface="Microsoft YaHei" pitchFamily="34" charset="-122"/>
-                <a:cs typeface="Microsoft YaHei" pitchFamily="34" charset="-120"/>
-              </a:rPr>
-              <a:t>可能
-</a:t>
-            </a:r>
-            <a:pPr indent="0" marL="0">
-              <a:lnSpc>
-                <a:spcPct val="115000"/>
-              </a:lnSpc>
-              <a:buNone/>
-            </a:pPr>
-            <a:r>
-              <a:rPr lang="en-US" sz="1050" dirty="0">
-                <a:solidFill>
-                  <a:srgbClr val="6B6B6B"/>
-                </a:solidFill>
-                <a:latin typeface="Microsoft YaHei" pitchFamily="34" charset="0"/>
-                <a:ea typeface="Microsoft YaHei" pitchFamily="34" charset="-122"/>
-                <a:cs typeface="Microsoft YaHei" pitchFamily="34" charset="-120"/>
-              </a:rPr>
-              <a:t>单一来源支持，或本数据一致但尚无匹配参考</a:t>
-            </a:r>
-            <a:endParaRPr lang="en-US" sz="1900" dirty="0"/>
-          </a:p>
-        </p:txBody>
-      </p:sp>
-      <p:sp>
-        <p:nvSpPr>
-          <p:cNvPr id="6" name="Text 4"/>
-          <p:cNvSpPr txBox="1"/>
-          <p:nvPr/>
-        </p:nvSpPr>
-        <p:spPr>
-          <a:xfrm>
-            <a:off x="3520440" y="3081528"/>
-            <a:ext cx="8046720" cy="1691640"/>
-          </a:xfrm>
-          <a:prstGeom prst="rect">
-            <a:avLst/>
-          </a:prstGeom>
-          <a:noFill/>
-          <a:ln/>
-        </p:spPr>
-        <p:txBody>
-          <a:bodyPr wrap="square" rtlCol="0" anchor="t"/>
-          <a:lstStyle/>
-          <a:p>
-            <a:pPr indent="0" marL="0">
-              <a:lnSpc>
-                <a:spcPct val="115000"/>
-              </a:lnSpc>
-              <a:buNone/>
-            </a:pPr>
-            <a:r>
-              <a:rPr lang="en-US" sz="1150" b="1" dirty="0">
-                <a:solidFill>
-                  <a:srgbClr val="1A1A1A"/>
-                </a:solidFill>
-                <a:latin typeface="Microsoft YaHei" pitchFamily="34" charset="0"/>
-                <a:ea typeface="Microsoft YaHei" pitchFamily="34" charset="-122"/>
-                <a:cs typeface="Microsoft YaHei" pitchFamily="34" charset="-120"/>
-              </a:rPr>
-              <a:t>人肺 AT1 肺泡上皮 · 人肺 肥大细胞 · 人脑 L5 ET 投射神经元 · 人脑 血管软脑膜细胞 · 人胰 胰腺腺泡细胞 · 人脑 PV 中间神经元 · 人肝 巨核-红系祖细胞 · 人脑 枝形 PV 中间神经元 · 人肺 肺泡外膜成纤维 · 人脑 CGE 源中间神经元 · 小鼠胰 胰岛 D(δ) 细胞 · 小鼠胰 胰导管细胞 · 小鼠脑 Cajal-Retzius 神经元
-</a:t>
-            </a:r>
-            <a:pPr indent="0" marL="0">
-              <a:lnSpc>
-                <a:spcPct val="115000"/>
-              </a:lnSpc>
-              <a:buNone/>
-            </a:pPr>
-            <a:r>
-              <a:rPr lang="en-US" sz="1150" dirty="0">
-                <a:solidFill>
-                  <a:srgbClr val="6B6B6B"/>
-                </a:solidFill>
-                <a:latin typeface="Microsoft YaHei" pitchFamily="34" charset="0"/>
-                <a:ea typeface="Microsoft YaHei" pitchFamily="34" charset="-122"/>
-                <a:cs typeface="Microsoft YaHei" pitchFamily="34" charset="-120"/>
-              </a:rPr>
-              <a:t>人脑皮层 PV 中间神经元（HVS 单细胞 78 供体 + PsychAD 单核 234 供体）与 L5 ET 投射神经元（HVS + SEA-AD MTG + SEA-AD DLPFC）CASP1 合并检出 0.07–0.22%，在 3–4 套独立数据集里重复；人肺 AT1 在 3 套数据集被同一条相对规则漏掉；小鼠胰岛 D(δ) 有 FACS 分选证据（13.16 vs 0.016 RPKM）。</a:t>
-            </a:r>
-            <a:endParaRPr lang="en-US" sz="1150" dirty="0"/>
-          </a:p>
-        </p:txBody>
-      </p:sp>
-      <p:sp>
-        <p:nvSpPr>
-          <p:cNvPr id="7" name="Text 5"/>
-          <p:cNvSpPr txBox="1"/>
-          <p:nvPr/>
-        </p:nvSpPr>
-        <p:spPr>
-          <a:xfrm>
-            <a:off x="640080" y="4791456"/>
-            <a:ext cx="2651760" cy="1463040"/>
-          </a:xfrm>
-          <a:prstGeom prst="rect">
-            <a:avLst/>
-          </a:prstGeom>
-          <a:noFill/>
-          <a:ln/>
-        </p:spPr>
-        <p:txBody>
-          <a:bodyPr wrap="square" rtlCol="0" anchor="t"/>
-          <a:lstStyle/>
-          <a:p>
-            <a:pPr indent="0" marL="0">
-              <a:lnSpc>
-                <a:spcPct val="115000"/>
-              </a:lnSpc>
-              <a:buNone/>
-            </a:pPr>
-            <a:r>
-              <a:rPr lang="en-US" sz="1900" b="1" dirty="0">
-                <a:solidFill>
-                  <a:srgbClr val="9A2B2B"/>
-                </a:solidFill>
-                <a:latin typeface="Microsoft YaHei" pitchFamily="34" charset="0"/>
-                <a:ea typeface="Microsoft YaHei" pitchFamily="34" charset="-122"/>
-                <a:cs typeface="Microsoft YaHei" pitchFamily="34" charset="-120"/>
-              </a:rPr>
-              <a:t>相反
-</a:t>
-            </a:r>
-            <a:pPr indent="0" marL="0">
-              <a:lnSpc>
-                <a:spcPct val="115000"/>
-              </a:lnSpc>
-              <a:buNone/>
-            </a:pPr>
-            <a:r>
-              <a:rPr lang="en-US" sz="1050" dirty="0">
-                <a:solidFill>
-                  <a:srgbClr val="6B6B6B"/>
-                </a:solidFill>
-                <a:latin typeface="Microsoft YaHei" pitchFamily="34" charset="0"/>
-                <a:ea typeface="Microsoft YaHei" pitchFamily="34" charset="-122"/>
-                <a:cs typeface="Microsoft YaHei" pitchFamily="34" charset="-120"/>
-              </a:rPr>
-              <a:t>参考层显示 CASP1 确实存在，或方向与前提相反</a:t>
-            </a:r>
-            <a:endParaRPr lang="en-US" sz="1900" dirty="0"/>
-          </a:p>
-        </p:txBody>
-      </p:sp>
-      <p:sp>
-        <p:nvSpPr>
-          <p:cNvPr id="8" name="Text 6"/>
-          <p:cNvSpPr txBox="1"/>
-          <p:nvPr/>
-        </p:nvSpPr>
-        <p:spPr>
-          <a:xfrm>
-            <a:off x="3520440" y="4791456"/>
-            <a:ext cx="8046720" cy="1691640"/>
-          </a:xfrm>
-          <a:prstGeom prst="rect">
-            <a:avLst/>
-          </a:prstGeom>
-          <a:noFill/>
-          <a:ln/>
-        </p:spPr>
-        <p:txBody>
-          <a:bodyPr wrap="square" rtlCol="0" anchor="t"/>
-          <a:lstStyle/>
-          <a:p>
-            <a:pPr indent="0" marL="0">
-              <a:lnSpc>
-                <a:spcPct val="115000"/>
-              </a:lnSpc>
-              <a:buNone/>
-            </a:pPr>
-            <a:r>
-              <a:rPr lang="en-US" sz="1150" b="1" dirty="0">
-                <a:solidFill>
-                  <a:srgbClr val="1A1A1A"/>
-                </a:solidFill>
-                <a:latin typeface="Microsoft YaHei" pitchFamily="34" charset="0"/>
-                <a:ea typeface="Microsoft YaHei" pitchFamily="34" charset="-122"/>
-                <a:cs typeface="Microsoft YaHei" pitchFamily="34" charset="-120"/>
-              </a:rPr>
-              <a:t>人肺 气道多纤毛上皮 · 人肝 CD56bright NK · 人肺 纤毛上皮 · 人肝 嗜碱粒细胞 · 人肺 树突状细胞 · 小鼠肺 肺泡巨噬 · 小鼠脑 小胶质/CNS巨噬
-</a:t>
-            </a:r>
-            <a:pPr indent="0" marL="0">
-              <a:lnSpc>
-                <a:spcPct val="115000"/>
-              </a:lnSpc>
-              <a:buNone/>
-            </a:pPr>
-            <a:r>
-              <a:rPr lang="en-US" sz="1150" dirty="0">
-                <a:solidFill>
-                  <a:srgbClr val="6B6B6B"/>
-                </a:solidFill>
-                <a:latin typeface="Microsoft YaHei" pitchFamily="34" charset="0"/>
-                <a:ea typeface="Microsoft YaHei" pitchFamily="34" charset="-122"/>
-                <a:cs typeface="Microsoft YaHei" pitchFamily="34" charset="-120"/>
-              </a:rPr>
-              <a:t>小鼠肺泡巨噬 IL18 71.6% 为全部最高，但 CASP1 也是最高的 13.3%（178/1341，14/14 供体），ImmGen 分选 Casp1=511；人肝 CD56bright NK 的 CASP1 检出 25.2% 反而高于 IL18 的 19.1%。排除理由是 CASP1 被检出，不是测不准。</a:t>
-            </a:r>
-            <a:endParaRPr lang="en-US" sz="1150" dirty="0"/>
+            <a:endParaRPr lang="en-US" sz="1050" dirty="0"/>
           </a:p>
         </p:txBody>
       </p:sp>

--- a/il18_casp5organ/IL18_CASP_五器官筛选.pptx
+++ b/il18_casp5organ/IL18_CASP_五器官筛选.pptx
@@ -3162,8 +3162,8 @@
         </p:nvSpPr>
         <p:spPr>
           <a:xfrm>
-            <a:off x="640080" y="411480"/>
-            <a:ext cx="10972800" cy="640080"/>
+            <a:off x="640080" y="365760"/>
+            <a:ext cx="5486400" cy="548640"/>
           </a:xfrm>
           <a:prstGeom prst="rect">
             <a:avLst/>
@@ -3201,8 +3201,8 @@
         </p:nvSpPr>
         <p:spPr>
           <a:xfrm>
-            <a:off x="731520" y="1143000"/>
-            <a:ext cx="10698480" cy="274320"/>
+            <a:off x="640080" y="914400"/>
+            <a:ext cx="10972800" cy="320040"/>
           </a:xfrm>
           <a:prstGeom prst="rect">
             <a:avLst/>
@@ -3218,7 +3218,46 @@
               <a:buNone/>
             </a:pPr>
             <a:r>
-              <a:rPr lang="en-US" sz="1250" b="1" dirty="0">
+              <a:rPr lang="en-US" sz="1200" dirty="0">
+                <a:solidFill>
+                  <a:srgbClr val="6B6B6B"/>
+                </a:solidFill>
+                <a:latin typeface="Microsoft YaHei" pitchFamily="34" charset="0"/>
+                <a:ea typeface="Microsoft YaHei" pitchFamily="34" charset="-122"/>
+                <a:cs typeface="Microsoft YaHei" pitchFamily="34" charset="-120"/>
+              </a:rPr>
+              <a:t>「方向」= 是否符合「IL18 高 + CASP1 低」这一前提；「证据」= 支持该方向的独立参考来源有多少、是否一致。两者分开看。</a:t>
+            </a:r>
+            <a:endParaRPr lang="en-US" sz="1200" dirty="0"/>
+          </a:p>
+        </p:txBody>
+      </p:sp>
+      <p:sp>
+        <p:nvSpPr>
+          <p:cNvPr id="4" name="Text 2"/>
+          <p:cNvSpPr txBox="1"/>
+          <p:nvPr/>
+        </p:nvSpPr>
+        <p:spPr>
+          <a:xfrm>
+            <a:off x="731520" y="1298448"/>
+            <a:ext cx="2834640" cy="274320"/>
+          </a:xfrm>
+          <a:prstGeom prst="rect">
+            <a:avLst/>
+          </a:prstGeom>
+          <a:noFill/>
+          <a:ln/>
+        </p:spPr>
+        <p:txBody>
+          <a:bodyPr wrap="square" rtlCol="0" anchor="ctr"/>
+          <a:lstStyle/>
+          <a:p>
+            <a:pPr indent="0" marL="0">
+              <a:buNone/>
+            </a:pPr>
+            <a:r>
+              <a:rPr lang="en-US" sz="1350" b="1" dirty="0">
                 <a:solidFill>
                   <a:srgbClr val="1B7A43"/>
                 </a:solidFill>
@@ -3226,22 +3265,22 @@
                 <a:ea typeface="Microsoft YaHei" pitchFamily="34" charset="-122"/>
                 <a:cs typeface="Microsoft YaHei" pitchFamily="34" charset="-120"/>
               </a:rPr>
-              <a:t>确定 —— 两个以上独立参考来源一致</a:t>
-            </a:r>
-            <a:endParaRPr lang="en-US" sz="1250" dirty="0"/>
-          </a:p>
-        </p:txBody>
-      </p:sp>
-      <p:sp>
-        <p:nvSpPr>
-          <p:cNvPr id="4" name="Text 2"/>
+              <a:t>符合 · 多源一致</a:t>
+            </a:r>
+            <a:endParaRPr lang="en-US" sz="1350" dirty="0"/>
+          </a:p>
+        </p:txBody>
+      </p:sp>
+      <p:sp>
+        <p:nvSpPr>
+          <p:cNvPr id="5" name="Text 3"/>
           <p:cNvSpPr txBox="1"/>
           <p:nvPr/>
         </p:nvSpPr>
         <p:spPr>
           <a:xfrm>
-            <a:off x="731520" y="1481328"/>
-            <a:ext cx="10698480" cy="329184"/>
+            <a:off x="731520" y="1554480"/>
+            <a:ext cx="2834640" cy="457200"/>
           </a:xfrm>
           <a:prstGeom prst="rect">
             <a:avLst/>
@@ -3254,10 +3293,55 @@
           <a:lstStyle/>
           <a:p>
             <a:pPr indent="0" marL="0">
+              <a:lnSpc>
+                <a:spcPct val="110000"/>
+              </a:lnSpc>
               <a:buNone/>
             </a:pPr>
             <a:r>
-              <a:rPr lang="en-US" sz="1550" b="1" dirty="0">
+              <a:rPr lang="en-US" sz="950" dirty="0">
+                <a:solidFill>
+                  <a:srgbClr val="6B6B6B"/>
+                </a:solidFill>
+                <a:latin typeface="Microsoft YaHei" pitchFamily="34" charset="0"/>
+                <a:ea typeface="Microsoft YaHei" pitchFamily="34" charset="-122"/>
+                <a:cs typeface="Microsoft YaHei" pitchFamily="34" charset="-120"/>
+              </a:rPr>
+              <a:t>≥2 个独立来源，无一例外</a:t>
+            </a:r>
+            <a:endParaRPr lang="en-US" sz="950" dirty="0"/>
+          </a:p>
+        </p:txBody>
+      </p:sp>
+      <p:sp>
+        <p:nvSpPr>
+          <p:cNvPr id="6" name="Text 4"/>
+          <p:cNvSpPr txBox="1"/>
+          <p:nvPr/>
+        </p:nvSpPr>
+        <p:spPr>
+          <a:xfrm>
+            <a:off x="3749040" y="1261872"/>
+            <a:ext cx="7772400" cy="658368"/>
+          </a:xfrm>
+          <a:prstGeom prst="rect">
+            <a:avLst/>
+          </a:prstGeom>
+          <a:noFill/>
+          <a:ln/>
+        </p:spPr>
+        <p:txBody>
+          <a:bodyPr wrap="square" rtlCol="0" anchor="t"/>
+          <a:lstStyle/>
+          <a:p>
+            <a:pPr indent="0" marL="0">
+              <a:lnSpc>
+                <a:spcPct val="115000"/>
+              </a:lnSpc>
+              <a:buNone/>
+            </a:pPr>
+            <a:r>
+              <a:rPr lang="en-US" sz="1250" dirty="0">
                 <a:solidFill>
                   <a:srgbClr val="1A1A1A"/>
                 </a:solidFill>
@@ -3265,22 +3349,22 @@
                 <a:ea typeface="Microsoft YaHei" pitchFamily="34" charset="-122"/>
                 <a:cs typeface="Microsoft YaHei" pitchFamily="34" charset="-120"/>
               </a:rPr>
-              <a:t>人脑皮层 PV 中间神经元  IL18 高、CASP1 近零</a:t>
-            </a:r>
-            <a:endParaRPr lang="en-US" sz="1550" dirty="0"/>
-          </a:p>
-        </p:txBody>
-      </p:sp>
-      <p:sp>
-        <p:nvSpPr>
-          <p:cNvPr id="5" name="Text 3"/>
+              <a:t>小鼠脑 星形胶质 · 人脑 L5 ET 投射神经元 · 小鼠脑 少突胶质 · 人脑 PV 中间神经元 · 人脑 枝形 PV 中间神经元</a:t>
+            </a:r>
+            <a:endParaRPr lang="en-US" sz="1250" dirty="0"/>
+          </a:p>
+        </p:txBody>
+      </p:sp>
+      <p:sp>
+        <p:nvSpPr>
+          <p:cNvPr id="7" name="Text 5"/>
           <p:cNvSpPr txBox="1"/>
           <p:nvPr/>
         </p:nvSpPr>
         <p:spPr>
           <a:xfrm>
-            <a:off x="731520" y="1783080"/>
-            <a:ext cx="10698480" cy="274320"/>
+            <a:off x="731520" y="2048256"/>
+            <a:ext cx="2834640" cy="274320"/>
           </a:xfrm>
           <a:prstGeom prst="rect">
             <a:avLst/>
@@ -3289,14 +3373,56 @@
           <a:ln/>
         </p:spPr>
         <p:txBody>
-          <a:bodyPr wrap="square" rtlCol="0" anchor="t"/>
+          <a:bodyPr wrap="square" rtlCol="0" anchor="ctr"/>
           <a:lstStyle/>
           <a:p>
             <a:pPr indent="0" marL="0">
               <a:buNone/>
             </a:pPr>
             <a:r>
-              <a:rPr lang="en-US" sz="1100" dirty="0">
+              <a:rPr lang="en-US" sz="1350" b="1" dirty="0">
+                <a:solidFill>
+                  <a:srgbClr val="2E8B57"/>
+                </a:solidFill>
+                <a:latin typeface="Microsoft YaHei" pitchFamily="34" charset="0"/>
+                <a:ea typeface="Microsoft YaHei" pitchFamily="34" charset="-122"/>
+                <a:cs typeface="Microsoft YaHei" pitchFamily="34" charset="-120"/>
+              </a:rPr>
+              <a:t>符合 · 多源有分歧</a:t>
+            </a:r>
+            <a:endParaRPr lang="en-US" sz="1350" dirty="0"/>
+          </a:p>
+        </p:txBody>
+      </p:sp>
+      <p:sp>
+        <p:nvSpPr>
+          <p:cNvPr id="8" name="Text 6"/>
+          <p:cNvSpPr txBox="1"/>
+          <p:nvPr/>
+        </p:nvSpPr>
+        <p:spPr>
+          <a:xfrm>
+            <a:off x="731520" y="2304288"/>
+            <a:ext cx="2834640" cy="457200"/>
+          </a:xfrm>
+          <a:prstGeom prst="rect">
+            <a:avLst/>
+          </a:prstGeom>
+          <a:noFill/>
+          <a:ln/>
+        </p:spPr>
+        <p:txBody>
+          <a:bodyPr wrap="square" rtlCol="0" anchor="t"/>
+          <a:lstStyle/>
+          <a:p>
+            <a:pPr indent="0" marL="0">
+              <a:lnSpc>
+                <a:spcPct val="110000"/>
+              </a:lnSpc>
+              <a:buNone/>
+            </a:pPr>
+            <a:r>
+              <a:rPr lang="en-US" sz="950" dirty="0">
                 <a:solidFill>
                   <a:srgbClr val="6B6B6B"/>
                 </a:solidFill>
@@ -3304,22 +3430,22 @@
                 <a:ea typeface="Microsoft YaHei" pitchFamily="34" charset="-122"/>
                 <a:cs typeface="Microsoft YaHei" pitchFamily="34" charset="-120"/>
               </a:rPr>
-              <a:t>HVS 单细胞 78 供体 + PsychAD 单核 234 供体；参考层 sFANS 分选核 566 倍、Allen SMART-seq 358 倍</a:t>
-            </a:r>
-            <a:endParaRPr lang="en-US" sz="1100" dirty="0"/>
-          </a:p>
-        </p:txBody>
-      </p:sp>
-      <p:sp>
-        <p:nvSpPr>
-          <p:cNvPr id="6" name="Text 4"/>
+              <a:t>多数来源支持，但有来源测到 CASP1</a:t>
+            </a:r>
+            <a:endParaRPr lang="en-US" sz="950" dirty="0"/>
+          </a:p>
+        </p:txBody>
+      </p:sp>
+      <p:sp>
+        <p:nvSpPr>
+          <p:cNvPr id="9" name="Text 7"/>
           <p:cNvSpPr txBox="1"/>
           <p:nvPr/>
         </p:nvSpPr>
         <p:spPr>
           <a:xfrm>
-            <a:off x="731520" y="2084832"/>
-            <a:ext cx="10698480" cy="329184"/>
+            <a:off x="3749040" y="2011680"/>
+            <a:ext cx="7772400" cy="658368"/>
           </a:xfrm>
           <a:prstGeom prst="rect">
             <a:avLst/>
@@ -3332,10 +3458,13 @@
           <a:lstStyle/>
           <a:p>
             <a:pPr indent="0" marL="0">
+              <a:lnSpc>
+                <a:spcPct val="115000"/>
+              </a:lnSpc>
               <a:buNone/>
             </a:pPr>
             <a:r>
-              <a:rPr lang="en-US" sz="1550" b="1" dirty="0">
+              <a:rPr lang="en-US" sz="1250" dirty="0">
                 <a:solidFill>
                   <a:srgbClr val="1A1A1A"/>
                 </a:solidFill>
@@ -3343,22 +3472,22 @@
                 <a:ea typeface="Microsoft YaHei" pitchFamily="34" charset="-122"/>
                 <a:cs typeface="Microsoft YaHei" pitchFamily="34" charset="-120"/>
               </a:rPr>
-              <a:t>人脑皮层 L5 ET 投射神经元  IL18 高、CASP1 近零</a:t>
-            </a:r>
-            <a:endParaRPr lang="en-US" sz="1550" dirty="0"/>
-          </a:p>
-        </p:txBody>
-      </p:sp>
-      <p:sp>
-        <p:nvSpPr>
-          <p:cNvPr id="7" name="Text 5"/>
+              <a:t>人肺 肥大细胞 · 小鼠胰 胰岛 D(δ) 细胞 · 人脑 CGE 源中间神经元</a:t>
+            </a:r>
+            <a:endParaRPr lang="en-US" sz="1250" dirty="0"/>
+          </a:p>
+        </p:txBody>
+      </p:sp>
+      <p:sp>
+        <p:nvSpPr>
+          <p:cNvPr id="10" name="Text 8"/>
           <p:cNvSpPr txBox="1"/>
           <p:nvPr/>
         </p:nvSpPr>
         <p:spPr>
           <a:xfrm>
-            <a:off x="731520" y="2386584"/>
-            <a:ext cx="10698480" cy="274320"/>
+            <a:off x="731520" y="2798064"/>
+            <a:ext cx="2834640" cy="274320"/>
           </a:xfrm>
           <a:prstGeom prst="rect">
             <a:avLst/>
@@ -3367,14 +3496,56 @@
           <a:ln/>
         </p:spPr>
         <p:txBody>
-          <a:bodyPr wrap="square" rtlCol="0" anchor="t"/>
+          <a:bodyPr wrap="square" rtlCol="0" anchor="ctr"/>
           <a:lstStyle/>
           <a:p>
             <a:pPr indent="0" marL="0">
               <a:buNone/>
             </a:pPr>
             <a:r>
-              <a:rPr lang="en-US" sz="1100" dirty="0">
+              <a:rPr lang="en-US" sz="1350" b="1" dirty="0">
+                <a:solidFill>
+                  <a:srgbClr val="1F5FA8"/>
+                </a:solidFill>
+                <a:latin typeface="Microsoft YaHei" pitchFamily="34" charset="0"/>
+                <a:ea typeface="Microsoft YaHei" pitchFamily="34" charset="-122"/>
+                <a:cs typeface="Microsoft YaHei" pitchFamily="34" charset="-120"/>
+              </a:rPr>
+              <a:t>符合 · 单一来源</a:t>
+            </a:r>
+            <a:endParaRPr lang="en-US" sz="1350" dirty="0"/>
+          </a:p>
+        </p:txBody>
+      </p:sp>
+      <p:sp>
+        <p:nvSpPr>
+          <p:cNvPr id="11" name="Text 9"/>
+          <p:cNvSpPr txBox="1"/>
+          <p:nvPr/>
+        </p:nvSpPr>
+        <p:spPr>
+          <a:xfrm>
+            <a:off x="731520" y="3054096"/>
+            <a:ext cx="2834640" cy="457200"/>
+          </a:xfrm>
+          <a:prstGeom prst="rect">
+            <a:avLst/>
+          </a:prstGeom>
+          <a:noFill/>
+          <a:ln/>
+        </p:spPr>
+        <p:txBody>
+          <a:bodyPr wrap="square" rtlCol="0" anchor="t"/>
+          <a:lstStyle/>
+          <a:p>
+            <a:pPr indent="0" marL="0">
+              <a:lnSpc>
+                <a:spcPct val="110000"/>
+              </a:lnSpc>
+              <a:buNone/>
+            </a:pPr>
+            <a:r>
+              <a:rPr lang="en-US" sz="950" dirty="0">
                 <a:solidFill>
                   <a:srgbClr val="6B6B6B"/>
                 </a:solidFill>
@@ -3382,22 +3553,22 @@
                 <a:ea typeface="Microsoft YaHei" pitchFamily="34" charset="-122"/>
                 <a:cs typeface="Microsoft YaHei" pitchFamily="34" charset="-120"/>
               </a:rPr>
-              <a:t>HVS + SEA-AD MTG + SEA-AD DLPFC 三套；参考层 Betz 细胞 275 倍、von Economo 神经元 384 倍</a:t>
-            </a:r>
-            <a:endParaRPr lang="en-US" sz="1100" dirty="0"/>
-          </a:p>
-        </p:txBody>
-      </p:sp>
-      <p:sp>
-        <p:nvSpPr>
-          <p:cNvPr id="8" name="Text 6"/>
+              <a:t>仅 1 个来源支持</a:t>
+            </a:r>
+            <a:endParaRPr lang="en-US" sz="950" dirty="0"/>
+          </a:p>
+        </p:txBody>
+      </p:sp>
+      <p:sp>
+        <p:nvSpPr>
+          <p:cNvPr id="12" name="Text 10"/>
           <p:cNvSpPr txBox="1"/>
           <p:nvPr/>
         </p:nvSpPr>
         <p:spPr>
           <a:xfrm>
-            <a:off x="731520" y="2688336"/>
-            <a:ext cx="10698480" cy="329184"/>
+            <a:off x="3749040" y="2761488"/>
+            <a:ext cx="7772400" cy="658368"/>
           </a:xfrm>
           <a:prstGeom prst="rect">
             <a:avLst/>
@@ -3410,10 +3581,13 @@
           <a:lstStyle/>
           <a:p>
             <a:pPr indent="0" marL="0">
+              <a:lnSpc>
+                <a:spcPct val="115000"/>
+              </a:lnSpc>
               <a:buNone/>
             </a:pPr>
             <a:r>
-              <a:rPr lang="en-US" sz="1550" b="1" dirty="0">
+              <a:rPr lang="en-US" sz="1250" dirty="0">
                 <a:solidFill>
                   <a:srgbClr val="1A1A1A"/>
                 </a:solidFill>
@@ -3421,22 +3595,22 @@
                 <a:ea typeface="Microsoft YaHei" pitchFamily="34" charset="-122"/>
                 <a:cs typeface="Microsoft YaHei" pitchFamily="34" charset="-120"/>
               </a:rPr>
-              <a:t>小鼠皮层与海马 星形胶质  Il18 高、Casp1 近零</a:t>
-            </a:r>
-            <a:endParaRPr lang="en-US" sz="1550" dirty="0"/>
-          </a:p>
-        </p:txBody>
-      </p:sp>
-      <p:sp>
-        <p:nvSpPr>
-          <p:cNvPr id="9" name="Text 7"/>
+              <a:t>人肺 AT1 肺泡上皮 · 人胰 胰腺腺泡细胞 · 小鼠胰 胰导管细胞</a:t>
+            </a:r>
+            <a:endParaRPr lang="en-US" sz="1250" dirty="0"/>
+          </a:p>
+        </p:txBody>
+      </p:sp>
+      <p:sp>
+        <p:nvSpPr>
+          <p:cNvPr id="13" name="Text 11"/>
           <p:cNvSpPr txBox="1"/>
           <p:nvPr/>
         </p:nvSpPr>
         <p:spPr>
           <a:xfrm>
-            <a:off x="731520" y="2990088"/>
-            <a:ext cx="10698480" cy="274320"/>
+            <a:off x="731520" y="3547872"/>
+            <a:ext cx="2834640" cy="274320"/>
           </a:xfrm>
           <a:prstGeom prst="rect">
             <a:avLst/>
@@ -3445,14 +3619,56 @@
           <a:ln/>
         </p:spPr>
         <p:txBody>
-          <a:bodyPr wrap="square" rtlCol="0" anchor="t"/>
+          <a:bodyPr wrap="square" rtlCol="0" anchor="ctr"/>
           <a:lstStyle/>
           <a:p>
             <a:pPr indent="0" marL="0">
               <a:buNone/>
             </a:pPr>
             <a:r>
-              <a:rPr lang="en-US" sz="1100" dirty="0">
+              <a:rPr lang="en-US" sz="1350" b="1" dirty="0">
+                <a:solidFill>
+                  <a:srgbClr val="4C87C4"/>
+                </a:solidFill>
+                <a:latin typeface="Microsoft YaHei" pitchFamily="34" charset="0"/>
+                <a:ea typeface="Microsoft YaHei" pitchFamily="34" charset="-122"/>
+                <a:cs typeface="Microsoft YaHei" pitchFamily="34" charset="-120"/>
+              </a:rPr>
+              <a:t>符合 · 无参考可查</a:t>
+            </a:r>
+            <a:endParaRPr lang="en-US" sz="1350" dirty="0"/>
+          </a:p>
+        </p:txBody>
+      </p:sp>
+      <p:sp>
+        <p:nvSpPr>
+          <p:cNvPr id="14" name="Text 12"/>
+          <p:cNvSpPr txBox="1"/>
+          <p:nvPr/>
+        </p:nvSpPr>
+        <p:spPr>
+          <a:xfrm>
+            <a:off x="731520" y="3803904"/>
+            <a:ext cx="2834640" cy="457200"/>
+          </a:xfrm>
+          <a:prstGeom prst="rect">
+            <a:avLst/>
+          </a:prstGeom>
+          <a:noFill/>
+          <a:ln/>
+        </p:spPr>
+        <p:txBody>
+          <a:bodyPr wrap="square" rtlCol="0" anchor="t"/>
+          <a:lstStyle/>
+          <a:p>
+            <a:pPr indent="0" marL="0">
+              <a:lnSpc>
+                <a:spcPct val="110000"/>
+              </a:lnSpc>
+              <a:buNone/>
+            </a:pPr>
+            <a:r>
+              <a:rPr lang="en-US" sz="950" dirty="0">
                 <a:solidFill>
                   <a:srgbClr val="6B6B6B"/>
                 </a:solidFill>
@@ -3460,22 +3676,22 @@
                 <a:ea typeface="Microsoft YaHei" pitchFamily="34" charset="-122"/>
                 <a:cs typeface="Microsoft YaHei" pitchFamily="34" charset="-120"/>
               </a:rPr>
-              <a:t>4 个来源；但仅限皮层与海马——小脑 Bergmann 胶质与脊髓星形胶质 Casp1 明确表达</a:t>
-            </a:r>
-            <a:endParaRPr lang="en-US" sz="1100" dirty="0"/>
-          </a:p>
-        </p:txBody>
-      </p:sp>
-      <p:sp>
-        <p:nvSpPr>
-          <p:cNvPr id="10" name="Text 8"/>
+              <a:t>无分选参考，仅本数据方向相符</a:t>
+            </a:r>
+            <a:endParaRPr lang="en-US" sz="950" dirty="0"/>
+          </a:p>
+        </p:txBody>
+      </p:sp>
+      <p:sp>
+        <p:nvSpPr>
+          <p:cNvPr id="15" name="Text 13"/>
           <p:cNvSpPr txBox="1"/>
           <p:nvPr/>
         </p:nvSpPr>
         <p:spPr>
           <a:xfrm>
-            <a:off x="731520" y="3291840"/>
-            <a:ext cx="10698480" cy="329184"/>
+            <a:off x="3749040" y="3511296"/>
+            <a:ext cx="7772400" cy="658368"/>
           </a:xfrm>
           <a:prstGeom prst="rect">
             <a:avLst/>
@@ -3488,10 +3704,13 @@
           <a:lstStyle/>
           <a:p>
             <a:pPr indent="0" marL="0">
+              <a:lnSpc>
+                <a:spcPct val="115000"/>
+              </a:lnSpc>
               <a:buNone/>
             </a:pPr>
             <a:r>
-              <a:rPr lang="en-US" sz="1550" b="1" dirty="0">
+              <a:rPr lang="en-US" sz="1250" dirty="0">
                 <a:solidFill>
                   <a:srgbClr val="1A1A1A"/>
                 </a:solidFill>
@@ -3499,22 +3718,22 @@
                 <a:ea typeface="Microsoft YaHei" pitchFamily="34" charset="-122"/>
                 <a:cs typeface="Microsoft YaHei" pitchFamily="34" charset="-120"/>
               </a:rPr>
-              <a:t>小鼠脑 少突胶质  Il18 高、Casp1 近零</a:t>
-            </a:r>
-            <a:endParaRPr lang="en-US" sz="1550" dirty="0"/>
-          </a:p>
-        </p:txBody>
-      </p:sp>
-      <p:sp>
-        <p:nvSpPr>
-          <p:cNvPr id="11" name="Text 9"/>
+              <a:t>人脑 血管软脑膜细胞 · 人肝 巨核-红系祖细胞 · 人肺 肺泡外膜成纤维 · 小鼠脑 Cajal-Retzius 神经元</a:t>
+            </a:r>
+            <a:endParaRPr lang="en-US" sz="1250" dirty="0"/>
+          </a:p>
+        </p:txBody>
+      </p:sp>
+      <p:sp>
+        <p:nvSpPr>
+          <p:cNvPr id="16" name="Text 14"/>
           <p:cNvSpPr txBox="1"/>
           <p:nvPr/>
         </p:nvSpPr>
         <p:spPr>
           <a:xfrm>
-            <a:off x="731520" y="3593592"/>
-            <a:ext cx="10698480" cy="274320"/>
+            <a:off x="731520" y="4297680"/>
+            <a:ext cx="2834640" cy="274320"/>
           </a:xfrm>
           <a:prstGeom prst="rect">
             <a:avLst/>
@@ -3523,14 +3742,56 @@
           <a:ln/>
         </p:spPr>
         <p:txBody>
-          <a:bodyPr wrap="square" rtlCol="0" anchor="t"/>
+          <a:bodyPr wrap="square" rtlCol="0" anchor="ctr"/>
           <a:lstStyle/>
           <a:p>
             <a:pPr indent="0" marL="0">
               <a:buNone/>
             </a:pPr>
             <a:r>
-              <a:rPr lang="en-US" sz="1100" dirty="0">
+              <a:rPr lang="en-US" sz="1350" b="1" dirty="0">
+                <a:solidFill>
+                  <a:srgbClr val="9A2B2B"/>
+                </a:solidFill>
+                <a:latin typeface="Microsoft YaHei" pitchFamily="34" charset="0"/>
+                <a:ea typeface="Microsoft YaHei" pitchFamily="34" charset="-122"/>
+                <a:cs typeface="Microsoft YaHei" pitchFamily="34" charset="-120"/>
+              </a:rPr>
+              <a:t>不符合 · 多源一致</a:t>
+            </a:r>
+            <a:endParaRPr lang="en-US" sz="1350" dirty="0"/>
+          </a:p>
+        </p:txBody>
+      </p:sp>
+      <p:sp>
+        <p:nvSpPr>
+          <p:cNvPr id="17" name="Text 15"/>
+          <p:cNvSpPr txBox="1"/>
+          <p:nvPr/>
+        </p:nvSpPr>
+        <p:spPr>
+          <a:xfrm>
+            <a:off x="731520" y="4553712"/>
+            <a:ext cx="2834640" cy="457200"/>
+          </a:xfrm>
+          <a:prstGeom prst="rect">
+            <a:avLst/>
+          </a:prstGeom>
+          <a:noFill/>
+          <a:ln/>
+        </p:spPr>
+        <p:txBody>
+          <a:bodyPr wrap="square" rtlCol="0" anchor="t"/>
+          <a:lstStyle/>
+          <a:p>
+            <a:pPr indent="0" marL="0">
+              <a:lnSpc>
+                <a:spcPct val="110000"/>
+              </a:lnSpc>
+              <a:buNone/>
+            </a:pPr>
+            <a:r>
+              <a:rPr lang="en-US" sz="950" dirty="0">
                 <a:solidFill>
                   <a:srgbClr val="6B6B6B"/>
                 </a:solidFill>
@@ -3538,22 +3799,22 @@
                 <a:ea typeface="Microsoft YaHei" pitchFamily="34" charset="-122"/>
                 <a:cs typeface="Microsoft YaHei" pitchFamily="34" charset="-120"/>
               </a:rPr>
-              <a:t>3 个来源；RiboTag 中 Casp1 比配对全组织更低，是去除而非带入</a:t>
-            </a:r>
-            <a:endParaRPr lang="en-US" sz="1100" dirty="0"/>
-          </a:p>
-        </p:txBody>
-      </p:sp>
-      <p:sp>
-        <p:nvSpPr>
-          <p:cNvPr id="12" name="Text 10"/>
+              <a:t>参考层 CASP1 确实可测或 ≥ IL18</a:t>
+            </a:r>
+            <a:endParaRPr lang="en-US" sz="950" dirty="0"/>
+          </a:p>
+        </p:txBody>
+      </p:sp>
+      <p:sp>
+        <p:nvSpPr>
+          <p:cNvPr id="18" name="Text 16"/>
           <p:cNvSpPr txBox="1"/>
           <p:nvPr/>
         </p:nvSpPr>
         <p:spPr>
           <a:xfrm>
-            <a:off x="731520" y="3895344"/>
-            <a:ext cx="10698480" cy="329184"/>
+            <a:off x="3749040" y="4261104"/>
+            <a:ext cx="7772400" cy="658368"/>
           </a:xfrm>
           <a:prstGeom prst="rect">
             <a:avLst/>
@@ -3566,10 +3827,13 @@
           <a:lstStyle/>
           <a:p>
             <a:pPr indent="0" marL="0">
+              <a:lnSpc>
+                <a:spcPct val="115000"/>
+              </a:lnSpc>
               <a:buNone/>
             </a:pPr>
             <a:r>
-              <a:rPr lang="en-US" sz="1550" b="1" dirty="0">
+              <a:rPr lang="en-US" sz="1250" dirty="0">
                 <a:solidFill>
                   <a:srgbClr val="1A1A1A"/>
                 </a:solidFill>
@@ -3577,22 +3841,22 @@
                 <a:ea typeface="Microsoft YaHei" pitchFamily="34" charset="-122"/>
                 <a:cs typeface="Microsoft YaHei" pitchFamily="34" charset="-120"/>
               </a:rPr>
-              <a:t>小鼠胰岛 D(δ) 细胞  Il18 可检、Casp1 近零</a:t>
-            </a:r>
-            <a:endParaRPr lang="en-US" sz="1550" dirty="0"/>
-          </a:p>
-        </p:txBody>
-      </p:sp>
-      <p:sp>
-        <p:nvSpPr>
-          <p:cNvPr id="13" name="Text 11"/>
+              <a:t>小鼠肺 肺泡巨噬 · 人肺 气道多纤毛上皮 · 小鼠脑 小胶质/CNS巨噬 · 人肺 纤毛上皮 · 人肝 嗜碱粒细胞 · 人肺 树突状细胞</a:t>
+            </a:r>
+            <a:endParaRPr lang="en-US" sz="1250" dirty="0"/>
+          </a:p>
+        </p:txBody>
+      </p:sp>
+      <p:sp>
+        <p:nvSpPr>
+          <p:cNvPr id="19" name="Text 17"/>
           <p:cNvSpPr txBox="1"/>
           <p:nvPr/>
         </p:nvSpPr>
         <p:spPr>
           <a:xfrm>
-            <a:off x="731520" y="4197096"/>
-            <a:ext cx="10698480" cy="274320"/>
+            <a:off x="731520" y="5047488"/>
+            <a:ext cx="2834640" cy="274320"/>
           </a:xfrm>
           <a:prstGeom prst="rect">
             <a:avLst/>
@@ -3601,14 +3865,56 @@
           <a:ln/>
         </p:spPr>
         <p:txBody>
-          <a:bodyPr wrap="square" rtlCol="0" anchor="t"/>
+          <a:bodyPr wrap="square" rtlCol="0" anchor="ctr"/>
           <a:lstStyle/>
           <a:p>
             <a:pPr indent="0" marL="0">
               <a:buNone/>
             </a:pPr>
             <a:r>
-              <a:rPr lang="en-US" sz="1100" dirty="0">
+              <a:rPr lang="en-US" sz="1350" b="1" dirty="0">
+                <a:solidFill>
+                  <a:srgbClr val="B5564E"/>
+                </a:solidFill>
+                <a:latin typeface="Microsoft YaHei" pitchFamily="34" charset="0"/>
+                <a:ea typeface="Microsoft YaHei" pitchFamily="34" charset="-122"/>
+                <a:cs typeface="Microsoft YaHei" pitchFamily="34" charset="-120"/>
+              </a:rPr>
+              <a:t>不符合 · 无参考可查</a:t>
+            </a:r>
+            <a:endParaRPr lang="en-US" sz="1350" dirty="0"/>
+          </a:p>
+        </p:txBody>
+      </p:sp>
+      <p:sp>
+        <p:nvSpPr>
+          <p:cNvPr id="20" name="Text 18"/>
+          <p:cNvSpPr txBox="1"/>
+          <p:nvPr/>
+        </p:nvSpPr>
+        <p:spPr>
+          <a:xfrm>
+            <a:off x="731520" y="5303520"/>
+            <a:ext cx="2834640" cy="457200"/>
+          </a:xfrm>
+          <a:prstGeom prst="rect">
+            <a:avLst/>
+          </a:prstGeom>
+          <a:noFill/>
+          <a:ln/>
+        </p:spPr>
+        <p:txBody>
+          <a:bodyPr wrap="square" rtlCol="0" anchor="t"/>
+          <a:lstStyle/>
+          <a:p>
+            <a:pPr indent="0" marL="0">
+              <a:lnSpc>
+                <a:spcPct val="110000"/>
+              </a:lnSpc>
+              <a:buNone/>
+            </a:pPr>
+            <a:r>
+              <a:rPr lang="en-US" sz="950" dirty="0">
                 <a:solidFill>
                   <a:srgbClr val="6B6B6B"/>
                 </a:solidFill>
@@ -3616,22 +3922,22 @@
                 <a:ea typeface="Microsoft YaHei" pitchFamily="34" charset="-122"/>
                 <a:cs typeface="Microsoft YaHei" pitchFamily="34" charset="-120"/>
               </a:rPr>
-              <a:t>6 个来源；GSE269616 九个文库 Casp1 零条读段。但人胰岛 δ 细胞不成立</a:t>
-            </a:r>
-            <a:endParaRPr lang="en-US" sz="1100" dirty="0"/>
-          </a:p>
-        </p:txBody>
-      </p:sp>
-      <p:sp>
-        <p:nvSpPr>
-          <p:cNvPr id="14" name="Text 12"/>
+              <a:t>无参考，本数据自身即方向相反</a:t>
+            </a:r>
+            <a:endParaRPr lang="en-US" sz="950" dirty="0"/>
+          </a:p>
+        </p:txBody>
+      </p:sp>
+      <p:sp>
+        <p:nvSpPr>
+          <p:cNvPr id="21" name="Text 19"/>
           <p:cNvSpPr txBox="1"/>
           <p:nvPr/>
         </p:nvSpPr>
         <p:spPr>
           <a:xfrm>
-            <a:off x="731520" y="4572000"/>
-            <a:ext cx="10698480" cy="274320"/>
+            <a:off x="3749040" y="5010912"/>
+            <a:ext cx="7772400" cy="658368"/>
           </a:xfrm>
           <a:prstGeom prst="rect">
             <a:avLst/>
@@ -3640,53 +3946,17 @@
           <a:ln/>
         </p:spPr>
         <p:txBody>
-          <a:bodyPr wrap="square" rtlCol="0" anchor="ctr"/>
+          <a:bodyPr wrap="square" rtlCol="0" anchor="t"/>
           <a:lstStyle/>
           <a:p>
             <a:pPr indent="0" marL="0">
+              <a:lnSpc>
+                <a:spcPct val="115000"/>
+              </a:lnSpc>
               <a:buNone/>
             </a:pPr>
             <a:r>
-              <a:rPr lang="en-US" sz="1250" b="1" dirty="0">
-                <a:solidFill>
-                  <a:srgbClr val="1F5FA8"/>
-                </a:solidFill>
-                <a:latin typeface="Microsoft YaHei" pitchFamily="34" charset="0"/>
-                <a:ea typeface="Microsoft YaHei" pitchFamily="34" charset="-122"/>
-                <a:cs typeface="Microsoft YaHei" pitchFamily="34" charset="-120"/>
-              </a:rPr>
-              <a:t>可能 —— 单一来源支持，或尚无匹配参考</a:t>
-            </a:r>
-            <a:endParaRPr lang="en-US" sz="1250" dirty="0"/>
-          </a:p>
-        </p:txBody>
-      </p:sp>
-      <p:sp>
-        <p:nvSpPr>
-          <p:cNvPr id="15" name="Text 13"/>
-          <p:cNvSpPr txBox="1"/>
-          <p:nvPr/>
-        </p:nvSpPr>
-        <p:spPr>
-          <a:xfrm>
-            <a:off x="731520" y="4864608"/>
-            <a:ext cx="10698480" cy="365760"/>
-          </a:xfrm>
-          <a:prstGeom prst="rect">
-            <a:avLst/>
-          </a:prstGeom>
-          <a:noFill/>
-          <a:ln/>
-        </p:spPr>
-        <p:txBody>
-          <a:bodyPr wrap="square" rtlCol="0" anchor="ctr"/>
-          <a:lstStyle/>
-          <a:p>
-            <a:pPr indent="0" marL="0">
-              <a:buNone/>
-            </a:pPr>
-            <a:r>
-              <a:rPr lang="en-US" sz="1300" dirty="0">
+              <a:rPr lang="en-US" sz="1250" dirty="0">
                 <a:solidFill>
                   <a:srgbClr val="1A1A1A"/>
                 </a:solidFill>
@@ -3694,22 +3964,22 @@
                 <a:ea typeface="Microsoft YaHei" pitchFamily="34" charset="-122"/>
                 <a:cs typeface="Microsoft YaHei" pitchFamily="34" charset="-120"/>
               </a:rPr>
-              <a:t>人肺 AT1 肺泡上皮 · 人肺 肥大细胞 · 人胰腺 腺泡细胞 · 小鼠胰 导管细胞 · 人脑 血管软脑膜细胞 · 小鼠脑 Cajal-Retzius 神经元</a:t>
-            </a:r>
-            <a:endParaRPr lang="en-US" sz="1300" dirty="0"/>
-          </a:p>
-        </p:txBody>
-      </p:sp>
-      <p:sp>
-        <p:nvSpPr>
-          <p:cNvPr id="16" name="Text 14"/>
+              <a:t>人肝 CD56bright NK</a:t>
+            </a:r>
+            <a:endParaRPr lang="en-US" sz="1250" dirty="0"/>
+          </a:p>
+        </p:txBody>
+      </p:sp>
+      <p:sp>
+        <p:nvSpPr>
+          <p:cNvPr id="22" name="Text 20"/>
           <p:cNvSpPr txBox="1"/>
           <p:nvPr/>
         </p:nvSpPr>
         <p:spPr>
           <a:xfrm>
-            <a:off x="731520" y="5349240"/>
-            <a:ext cx="10698480" cy="274320"/>
+            <a:off x="731520" y="5715000"/>
+            <a:ext cx="10789920" cy="548640"/>
           </a:xfrm>
           <a:prstGeom prst="rect">
             <a:avLst/>
@@ -3722,49 +3992,13 @@
           <a:lstStyle/>
           <a:p>
             <a:pPr indent="0" marL="0">
+              <a:lnSpc>
+                <a:spcPct val="120000"/>
+              </a:lnSpc>
               <a:buNone/>
             </a:pPr>
             <a:r>
-              <a:rPr lang="en-US" sz="1250" b="1" dirty="0">
-                <a:solidFill>
-                  <a:srgbClr val="9A2B2B"/>
-                </a:solidFill>
-                <a:latin typeface="Microsoft YaHei" pitchFamily="34" charset="0"/>
-                <a:ea typeface="Microsoft YaHei" pitchFamily="34" charset="-122"/>
-                <a:cs typeface="Microsoft YaHei" pitchFamily="34" charset="-120"/>
-              </a:rPr>
-              <a:t>相反 —— 参考层里 CASP1 确实可测，不满足「缺少经典加工酶」这一前提</a:t>
-            </a:r>
-            <a:endParaRPr lang="en-US" sz="1250" dirty="0"/>
-          </a:p>
-        </p:txBody>
-      </p:sp>
-      <p:sp>
-        <p:nvSpPr>
-          <p:cNvPr id="17" name="Text 15"/>
-          <p:cNvSpPr txBox="1"/>
-          <p:nvPr/>
-        </p:nvSpPr>
-        <p:spPr>
-          <a:xfrm>
-            <a:off x="731520" y="5641848"/>
-            <a:ext cx="10698480" cy="365760"/>
-          </a:xfrm>
-          <a:prstGeom prst="rect">
-            <a:avLst/>
-          </a:prstGeom>
-          <a:noFill/>
-          <a:ln/>
-        </p:spPr>
-        <p:txBody>
-          <a:bodyPr wrap="square" rtlCol="0" anchor="ctr"/>
-          <a:lstStyle/>
-          <a:p>
-            <a:pPr indent="0" marL="0">
-              <a:buNone/>
-            </a:pPr>
-            <a:r>
-              <a:rPr lang="en-US" sz="1300" dirty="0">
+              <a:rPr lang="en-US" sz="1150" dirty="0">
                 <a:solidFill>
                   <a:srgbClr val="1A1A1A"/>
                 </a:solidFill>
@@ -3772,22 +4006,22 @@
                 <a:ea typeface="Microsoft YaHei" pitchFamily="34" charset="-122"/>
                 <a:cs typeface="Microsoft YaHei" pitchFamily="34" charset="-120"/>
               </a:rPr>
-              <a:t>小鼠肺 肺泡巨噬 · 小鼠脑 小胶质 · 人肺 气道/纤毛上皮 · 人脑 CGE 源中间神经元 · 人肝 嗜碱粒细胞 · 人肝 CD56bright NK · 人肺 树突状细胞</a:t>
-            </a:r>
-            <a:endParaRPr lang="en-US" sz="1300" dirty="0"/>
-          </a:p>
-        </p:txBody>
-      </p:sp>
-      <p:sp>
-        <p:nvSpPr>
-          <p:cNvPr id="18" name="Text 16"/>
+              <a:t>两条必须一起说的边界：小鼠星形胶质的结论仅限皮层与海马（小脑 Bergmann 胶质与脊髓星形胶质 Casp1 明确表达）；人的 PV / L5 ET 神经元结论在小鼠没有对应物（小鼠这两类 Casp1 同样近零，但 Il18 不高）。</a:t>
+            </a:r>
+            <a:endParaRPr lang="en-US" sz="1150" dirty="0"/>
+          </a:p>
+        </p:txBody>
+      </p:sp>
+      <p:sp>
+        <p:nvSpPr>
+          <p:cNvPr id="23" name="Text 21"/>
           <p:cNvSpPr txBox="1"/>
           <p:nvPr/>
         </p:nvSpPr>
         <p:spPr>
           <a:xfrm>
-            <a:off x="731520" y="6172200"/>
-            <a:ext cx="10698480" cy="320040"/>
+            <a:off x="731520" y="6355080"/>
+            <a:ext cx="10789920" cy="320040"/>
           </a:xfrm>
           <a:prstGeom prst="rect">
             <a:avLst/>
@@ -3803,7 +4037,7 @@
               <a:buNone/>
             </a:pPr>
             <a:r>
-              <a:rPr lang="en-US" sz="1100" dirty="0">
+              <a:rPr lang="en-US" sz="1050" dirty="0">
                 <a:solidFill>
                   <a:srgbClr val="9AA0A6"/>
                 </a:solidFill>
@@ -3811,9 +4045,9 @@
                 <a:ea typeface="Microsoft YaHei" pitchFamily="34" charset="-122"/>
                 <a:cs typeface="Microsoft YaHei" pitchFamily="34" charset="-120"/>
               </a:rPr>
-              <a:t>检出率 = 原始计数 ≥1 的细胞数 ÷ 分析细胞数（合并全部供体）。29 个分层，人与小鼠分开，静息基线。</a:t>
-            </a:r>
-            <a:endParaRPr lang="en-US" sz="1100" dirty="0"/>
+              <a:t>检出率 = 原始计数 ≥1 的细胞数 ÷ 分析细胞数（合并全部供体）。29 个分层，人与小鼠分开，静息基线；未做环境 RNA 校正。</a:t>
+            </a:r>
+            <a:endParaRPr lang="en-US" sz="1050" dirty="0"/>
           </a:p>
         </p:txBody>
       </p:sp>

--- a/il18_casp5organ/IL18_CASP_五器官筛选.pptx
+++ b/il18_casp5organ/IL18_CASP_五器官筛选.pptx
@@ -11,9 +11,17 @@
     <p:sldId id="259" r:id="rId5"/>
     <p:sldId id="260" r:id="rId6"/>
     <p:sldId id="261" r:id="rId7"/>
+    <p:sldId id="262" r:id="rId8"/>
+    <p:sldId id="263" r:id="rId9"/>
+    <p:sldId id="264" r:id="rId10"/>
+    <p:sldId id="265" r:id="rId11"/>
+    <p:sldId id="266" r:id="rId12"/>
+    <p:sldId id="267" r:id="rId13"/>
+    <p:sldId id="268" r:id="rId14"/>
+    <p:sldId id="269" r:id="rId15"/>
   </p:sldIdLst>
   <p:notesMasterIdLst>
-    <p:notesMasterId r:id="rId8"/>
+    <p:notesMasterId r:id="rId16"/>
   </p:notesMasterIdLst>
   <p:sldSz cx="12192000" cy="6858000"/>
   <p:notesSz cx="6858000" cy="12192000"/>
@@ -549,6 +557,446 @@
 </p:notes>
 </file>
 
+<file path=ppt/notesSlides/notesSlide10.xml><?xml version="1.0" encoding="utf-8"?>
+<p:notes xmlns:a="http://schemas.openxmlformats.org/drawingml/2006/main" xmlns:r="http://schemas.openxmlformats.org/officeDocument/2006/relationships" xmlns:p="http://schemas.openxmlformats.org/presentationml/2006/main">
+  <p:cSld>
+    <p:spTree>
+      <p:nvGrpSpPr>
+        <p:cNvPr id="1" name=""/>
+        <p:cNvGrpSpPr/>
+        <p:nvPr/>
+      </p:nvGrpSpPr>
+      <p:grpSpPr>
+        <a:xfrm>
+          <a:off x="0" y="0"/>
+          <a:ext cx="0" cy="0"/>
+          <a:chOff x="0" y="0"/>
+          <a:chExt cx="0" cy="0"/>
+        </a:xfrm>
+      </p:grpSpPr>
+      <p:sp>
+        <p:nvSpPr>
+          <p:cNvPr id="2" name="Slide Image Placeholder 1"/>
+          <p:cNvSpPr>
+            <a:spLocks noGrp="1" noRot="1" noChangeAspect="1"/>
+          </p:cNvSpPr>
+          <p:nvPr>
+            <p:ph type="sldImg"/>
+          </p:nvPr>
+        </p:nvSpPr>
+        <p:spPr/>
+      </p:sp>
+      <p:sp>
+        <p:nvSpPr>
+          <p:cNvPr id="3" name="Notes Placeholder 2"/>
+          <p:cNvSpPr>
+            <a:spLocks noGrp="1"/>
+          </p:cNvSpPr>
+          <p:nvPr>
+            <p:ph type="body" idx="1"/>
+          </p:nvPr>
+        </p:nvSpPr>
+        <p:spPr/>
+        <p:txBody>
+          <a:bodyPr/>
+          <a:lstStyle/>
+          <a:p>
+            <a:r>
+              <a:rPr lang="en-US" dirty="0"/>
+              <a:t/>
+            </a:r>
+            <a:endParaRPr lang="en-US" dirty="0"/>
+          </a:p>
+        </p:txBody>
+      </p:sp>
+      <p:sp>
+        <p:nvSpPr>
+          <p:cNvPr id="4" name="Slide Number Placeholder 3"/>
+          <p:cNvSpPr>
+            <a:spLocks noGrp="1"/>
+          </p:cNvSpPr>
+          <p:nvPr>
+            <p:ph type="sldNum" sz="quarter" idx="10"/>
+          </p:nvPr>
+        </p:nvSpPr>
+        <p:spPr/>
+        <p:txBody>
+          <a:bodyPr/>
+          <a:lstStyle/>
+          <a:p>
+            <a:fld id="{F7021451-1387-4CA6-816F-3879F97B5CBC}" type="slidenum">
+              <a:rPr lang="en-US"/>
+              <a:t>10</a:t>
+            </a:fld>
+            <a:endParaRPr lang="en-US"/>
+          </a:p>
+        </p:txBody>
+      </p:sp>
+    </p:spTree>
+    <p:extLst>
+      <p:ext uri="{BB962C8B-B14F-4D97-AF65-F5344CB8AC3E}">
+        <p14:creationId xmlns:p14="http://schemas.microsoft.com/office/powerpoint/2010/main" val="1024086991"/>
+      </p:ext>
+    </p:extLst>
+  </p:cSld>
+  <p:clrMapOvr>
+    <a:masterClrMapping/>
+  </p:clrMapOvr>
+</p:notes>
+</file>
+
+<file path=ppt/notesSlides/notesSlide11.xml><?xml version="1.0" encoding="utf-8"?>
+<p:notes xmlns:a="http://schemas.openxmlformats.org/drawingml/2006/main" xmlns:r="http://schemas.openxmlformats.org/officeDocument/2006/relationships" xmlns:p="http://schemas.openxmlformats.org/presentationml/2006/main">
+  <p:cSld>
+    <p:spTree>
+      <p:nvGrpSpPr>
+        <p:cNvPr id="1" name=""/>
+        <p:cNvGrpSpPr/>
+        <p:nvPr/>
+      </p:nvGrpSpPr>
+      <p:grpSpPr>
+        <a:xfrm>
+          <a:off x="0" y="0"/>
+          <a:ext cx="0" cy="0"/>
+          <a:chOff x="0" y="0"/>
+          <a:chExt cx="0" cy="0"/>
+        </a:xfrm>
+      </p:grpSpPr>
+      <p:sp>
+        <p:nvSpPr>
+          <p:cNvPr id="2" name="Slide Image Placeholder 1"/>
+          <p:cNvSpPr>
+            <a:spLocks noGrp="1" noRot="1" noChangeAspect="1"/>
+          </p:cNvSpPr>
+          <p:nvPr>
+            <p:ph type="sldImg"/>
+          </p:nvPr>
+        </p:nvSpPr>
+        <p:spPr/>
+      </p:sp>
+      <p:sp>
+        <p:nvSpPr>
+          <p:cNvPr id="3" name="Notes Placeholder 2"/>
+          <p:cNvSpPr>
+            <a:spLocks noGrp="1"/>
+          </p:cNvSpPr>
+          <p:nvPr>
+            <p:ph type="body" idx="1"/>
+          </p:nvPr>
+        </p:nvSpPr>
+        <p:spPr/>
+        <p:txBody>
+          <a:bodyPr/>
+          <a:lstStyle/>
+          <a:p>
+            <a:r>
+              <a:rPr lang="en-US" dirty="0"/>
+              <a:t/>
+            </a:r>
+            <a:endParaRPr lang="en-US" dirty="0"/>
+          </a:p>
+        </p:txBody>
+      </p:sp>
+      <p:sp>
+        <p:nvSpPr>
+          <p:cNvPr id="4" name="Slide Number Placeholder 3"/>
+          <p:cNvSpPr>
+            <a:spLocks noGrp="1"/>
+          </p:cNvSpPr>
+          <p:nvPr>
+            <p:ph type="sldNum" sz="quarter" idx="10"/>
+          </p:nvPr>
+        </p:nvSpPr>
+        <p:spPr/>
+        <p:txBody>
+          <a:bodyPr/>
+          <a:lstStyle/>
+          <a:p>
+            <a:fld id="{F7021451-1387-4CA6-816F-3879F97B5CBC}" type="slidenum">
+              <a:rPr lang="en-US"/>
+              <a:t>11</a:t>
+            </a:fld>
+            <a:endParaRPr lang="en-US"/>
+          </a:p>
+        </p:txBody>
+      </p:sp>
+    </p:spTree>
+    <p:extLst>
+      <p:ext uri="{BB962C8B-B14F-4D97-AF65-F5344CB8AC3E}">
+        <p14:creationId xmlns:p14="http://schemas.microsoft.com/office/powerpoint/2010/main" val="1024086991"/>
+      </p:ext>
+    </p:extLst>
+  </p:cSld>
+  <p:clrMapOvr>
+    <a:masterClrMapping/>
+  </p:clrMapOvr>
+</p:notes>
+</file>
+
+<file path=ppt/notesSlides/notesSlide12.xml><?xml version="1.0" encoding="utf-8"?>
+<p:notes xmlns:a="http://schemas.openxmlformats.org/drawingml/2006/main" xmlns:r="http://schemas.openxmlformats.org/officeDocument/2006/relationships" xmlns:p="http://schemas.openxmlformats.org/presentationml/2006/main">
+  <p:cSld>
+    <p:spTree>
+      <p:nvGrpSpPr>
+        <p:cNvPr id="1" name=""/>
+        <p:cNvGrpSpPr/>
+        <p:nvPr/>
+      </p:nvGrpSpPr>
+      <p:grpSpPr>
+        <a:xfrm>
+          <a:off x="0" y="0"/>
+          <a:ext cx="0" cy="0"/>
+          <a:chOff x="0" y="0"/>
+          <a:chExt cx="0" cy="0"/>
+        </a:xfrm>
+      </p:grpSpPr>
+      <p:sp>
+        <p:nvSpPr>
+          <p:cNvPr id="2" name="Slide Image Placeholder 1"/>
+          <p:cNvSpPr>
+            <a:spLocks noGrp="1" noRot="1" noChangeAspect="1"/>
+          </p:cNvSpPr>
+          <p:nvPr>
+            <p:ph type="sldImg"/>
+          </p:nvPr>
+        </p:nvSpPr>
+        <p:spPr/>
+      </p:sp>
+      <p:sp>
+        <p:nvSpPr>
+          <p:cNvPr id="3" name="Notes Placeholder 2"/>
+          <p:cNvSpPr>
+            <a:spLocks noGrp="1"/>
+          </p:cNvSpPr>
+          <p:nvPr>
+            <p:ph type="body" idx="1"/>
+          </p:nvPr>
+        </p:nvSpPr>
+        <p:spPr/>
+        <p:txBody>
+          <a:bodyPr/>
+          <a:lstStyle/>
+          <a:p>
+            <a:r>
+              <a:rPr lang="en-US" dirty="0"/>
+              <a:t/>
+            </a:r>
+            <a:endParaRPr lang="en-US" dirty="0"/>
+          </a:p>
+        </p:txBody>
+      </p:sp>
+      <p:sp>
+        <p:nvSpPr>
+          <p:cNvPr id="4" name="Slide Number Placeholder 3"/>
+          <p:cNvSpPr>
+            <a:spLocks noGrp="1"/>
+          </p:cNvSpPr>
+          <p:nvPr>
+            <p:ph type="sldNum" sz="quarter" idx="10"/>
+          </p:nvPr>
+        </p:nvSpPr>
+        <p:spPr/>
+        <p:txBody>
+          <a:bodyPr/>
+          <a:lstStyle/>
+          <a:p>
+            <a:fld id="{F7021451-1387-4CA6-816F-3879F97B5CBC}" type="slidenum">
+              <a:rPr lang="en-US"/>
+              <a:t>12</a:t>
+            </a:fld>
+            <a:endParaRPr lang="en-US"/>
+          </a:p>
+        </p:txBody>
+      </p:sp>
+    </p:spTree>
+    <p:extLst>
+      <p:ext uri="{BB962C8B-B14F-4D97-AF65-F5344CB8AC3E}">
+        <p14:creationId xmlns:p14="http://schemas.microsoft.com/office/powerpoint/2010/main" val="1024086991"/>
+      </p:ext>
+    </p:extLst>
+  </p:cSld>
+  <p:clrMapOvr>
+    <a:masterClrMapping/>
+  </p:clrMapOvr>
+</p:notes>
+</file>
+
+<file path=ppt/notesSlides/notesSlide13.xml><?xml version="1.0" encoding="utf-8"?>
+<p:notes xmlns:a="http://schemas.openxmlformats.org/drawingml/2006/main" xmlns:r="http://schemas.openxmlformats.org/officeDocument/2006/relationships" xmlns:p="http://schemas.openxmlformats.org/presentationml/2006/main">
+  <p:cSld>
+    <p:spTree>
+      <p:nvGrpSpPr>
+        <p:cNvPr id="1" name=""/>
+        <p:cNvGrpSpPr/>
+        <p:nvPr/>
+      </p:nvGrpSpPr>
+      <p:grpSpPr>
+        <a:xfrm>
+          <a:off x="0" y="0"/>
+          <a:ext cx="0" cy="0"/>
+          <a:chOff x="0" y="0"/>
+          <a:chExt cx="0" cy="0"/>
+        </a:xfrm>
+      </p:grpSpPr>
+      <p:sp>
+        <p:nvSpPr>
+          <p:cNvPr id="2" name="Slide Image Placeholder 1"/>
+          <p:cNvSpPr>
+            <a:spLocks noGrp="1" noRot="1" noChangeAspect="1"/>
+          </p:cNvSpPr>
+          <p:nvPr>
+            <p:ph type="sldImg"/>
+          </p:nvPr>
+        </p:nvSpPr>
+        <p:spPr/>
+      </p:sp>
+      <p:sp>
+        <p:nvSpPr>
+          <p:cNvPr id="3" name="Notes Placeholder 2"/>
+          <p:cNvSpPr>
+            <a:spLocks noGrp="1"/>
+          </p:cNvSpPr>
+          <p:nvPr>
+            <p:ph type="body" idx="1"/>
+          </p:nvPr>
+        </p:nvSpPr>
+        <p:spPr/>
+        <p:txBody>
+          <a:bodyPr/>
+          <a:lstStyle/>
+          <a:p>
+            <a:r>
+              <a:rPr lang="en-US" dirty="0"/>
+              <a:t/>
+            </a:r>
+            <a:endParaRPr lang="en-US" dirty="0"/>
+          </a:p>
+        </p:txBody>
+      </p:sp>
+      <p:sp>
+        <p:nvSpPr>
+          <p:cNvPr id="4" name="Slide Number Placeholder 3"/>
+          <p:cNvSpPr>
+            <a:spLocks noGrp="1"/>
+          </p:cNvSpPr>
+          <p:nvPr>
+            <p:ph type="sldNum" sz="quarter" idx="10"/>
+          </p:nvPr>
+        </p:nvSpPr>
+        <p:spPr/>
+        <p:txBody>
+          <a:bodyPr/>
+          <a:lstStyle/>
+          <a:p>
+            <a:fld id="{F7021451-1387-4CA6-816F-3879F97B5CBC}" type="slidenum">
+              <a:rPr lang="en-US"/>
+              <a:t>13</a:t>
+            </a:fld>
+            <a:endParaRPr lang="en-US"/>
+          </a:p>
+        </p:txBody>
+      </p:sp>
+    </p:spTree>
+    <p:extLst>
+      <p:ext uri="{BB962C8B-B14F-4D97-AF65-F5344CB8AC3E}">
+        <p14:creationId xmlns:p14="http://schemas.microsoft.com/office/powerpoint/2010/main" val="1024086991"/>
+      </p:ext>
+    </p:extLst>
+  </p:cSld>
+  <p:clrMapOvr>
+    <a:masterClrMapping/>
+  </p:clrMapOvr>
+</p:notes>
+</file>
+
+<file path=ppt/notesSlides/notesSlide14.xml><?xml version="1.0" encoding="utf-8"?>
+<p:notes xmlns:a="http://schemas.openxmlformats.org/drawingml/2006/main" xmlns:r="http://schemas.openxmlformats.org/officeDocument/2006/relationships" xmlns:p="http://schemas.openxmlformats.org/presentationml/2006/main">
+  <p:cSld>
+    <p:spTree>
+      <p:nvGrpSpPr>
+        <p:cNvPr id="1" name=""/>
+        <p:cNvGrpSpPr/>
+        <p:nvPr/>
+      </p:nvGrpSpPr>
+      <p:grpSpPr>
+        <a:xfrm>
+          <a:off x="0" y="0"/>
+          <a:ext cx="0" cy="0"/>
+          <a:chOff x="0" y="0"/>
+          <a:chExt cx="0" cy="0"/>
+        </a:xfrm>
+      </p:grpSpPr>
+      <p:sp>
+        <p:nvSpPr>
+          <p:cNvPr id="2" name="Slide Image Placeholder 1"/>
+          <p:cNvSpPr>
+            <a:spLocks noGrp="1" noRot="1" noChangeAspect="1"/>
+          </p:cNvSpPr>
+          <p:nvPr>
+            <p:ph type="sldImg"/>
+          </p:nvPr>
+        </p:nvSpPr>
+        <p:spPr/>
+      </p:sp>
+      <p:sp>
+        <p:nvSpPr>
+          <p:cNvPr id="3" name="Notes Placeholder 2"/>
+          <p:cNvSpPr>
+            <a:spLocks noGrp="1"/>
+          </p:cNvSpPr>
+          <p:nvPr>
+            <p:ph type="body" idx="1"/>
+          </p:nvPr>
+        </p:nvSpPr>
+        <p:spPr/>
+        <p:txBody>
+          <a:bodyPr/>
+          <a:lstStyle/>
+          <a:p>
+            <a:r>
+              <a:rPr lang="en-US" dirty="0"/>
+              <a:t/>
+            </a:r>
+            <a:endParaRPr lang="en-US" dirty="0"/>
+          </a:p>
+        </p:txBody>
+      </p:sp>
+      <p:sp>
+        <p:nvSpPr>
+          <p:cNvPr id="4" name="Slide Number Placeholder 3"/>
+          <p:cNvSpPr>
+            <a:spLocks noGrp="1"/>
+          </p:cNvSpPr>
+          <p:nvPr>
+            <p:ph type="sldNum" sz="quarter" idx="10"/>
+          </p:nvPr>
+        </p:nvSpPr>
+        <p:spPr/>
+        <p:txBody>
+          <a:bodyPr/>
+          <a:lstStyle/>
+          <a:p>
+            <a:fld id="{F7021451-1387-4CA6-816F-3879F97B5CBC}" type="slidenum">
+              <a:rPr lang="en-US"/>
+              <a:t>14</a:t>
+            </a:fld>
+            <a:endParaRPr lang="en-US"/>
+          </a:p>
+        </p:txBody>
+      </p:sp>
+    </p:spTree>
+    <p:extLst>
+      <p:ext uri="{BB962C8B-B14F-4D97-AF65-F5344CB8AC3E}">
+        <p14:creationId xmlns:p14="http://schemas.microsoft.com/office/powerpoint/2010/main" val="1024086991"/>
+      </p:ext>
+    </p:extLst>
+  </p:cSld>
+  <p:clrMapOvr>
+    <a:masterClrMapping/>
+  </p:clrMapOvr>
+</p:notes>
+</file>
+
 <file path=ppt/notesSlides/notesSlide2.xml><?xml version="1.0" encoding="utf-8"?>
 <p:notes xmlns:a="http://schemas.openxmlformats.org/drawingml/2006/main" xmlns:r="http://schemas.openxmlformats.org/officeDocument/2006/relationships" xmlns:p="http://schemas.openxmlformats.org/presentationml/2006/main">
   <p:cSld>
@@ -971,6 +1419,270 @@
             <a:fld id="{F7021451-1387-4CA6-816F-3879F97B5CBC}" type="slidenum">
               <a:rPr lang="en-US"/>
               <a:t>6</a:t>
+            </a:fld>
+            <a:endParaRPr lang="en-US"/>
+          </a:p>
+        </p:txBody>
+      </p:sp>
+    </p:spTree>
+    <p:extLst>
+      <p:ext uri="{BB962C8B-B14F-4D97-AF65-F5344CB8AC3E}">
+        <p14:creationId xmlns:p14="http://schemas.microsoft.com/office/powerpoint/2010/main" val="1024086991"/>
+      </p:ext>
+    </p:extLst>
+  </p:cSld>
+  <p:clrMapOvr>
+    <a:masterClrMapping/>
+  </p:clrMapOvr>
+</p:notes>
+</file>
+
+<file path=ppt/notesSlides/notesSlide7.xml><?xml version="1.0" encoding="utf-8"?>
+<p:notes xmlns:a="http://schemas.openxmlformats.org/drawingml/2006/main" xmlns:r="http://schemas.openxmlformats.org/officeDocument/2006/relationships" xmlns:p="http://schemas.openxmlformats.org/presentationml/2006/main">
+  <p:cSld>
+    <p:spTree>
+      <p:nvGrpSpPr>
+        <p:cNvPr id="1" name=""/>
+        <p:cNvGrpSpPr/>
+        <p:nvPr/>
+      </p:nvGrpSpPr>
+      <p:grpSpPr>
+        <a:xfrm>
+          <a:off x="0" y="0"/>
+          <a:ext cx="0" cy="0"/>
+          <a:chOff x="0" y="0"/>
+          <a:chExt cx="0" cy="0"/>
+        </a:xfrm>
+      </p:grpSpPr>
+      <p:sp>
+        <p:nvSpPr>
+          <p:cNvPr id="2" name="Slide Image Placeholder 1"/>
+          <p:cNvSpPr>
+            <a:spLocks noGrp="1" noRot="1" noChangeAspect="1"/>
+          </p:cNvSpPr>
+          <p:nvPr>
+            <p:ph type="sldImg"/>
+          </p:nvPr>
+        </p:nvSpPr>
+        <p:spPr/>
+      </p:sp>
+      <p:sp>
+        <p:nvSpPr>
+          <p:cNvPr id="3" name="Notes Placeholder 2"/>
+          <p:cNvSpPr>
+            <a:spLocks noGrp="1"/>
+          </p:cNvSpPr>
+          <p:nvPr>
+            <p:ph type="body" idx="1"/>
+          </p:nvPr>
+        </p:nvSpPr>
+        <p:spPr/>
+        <p:txBody>
+          <a:bodyPr/>
+          <a:lstStyle/>
+          <a:p>
+            <a:r>
+              <a:rPr lang="en-US" dirty="0"/>
+              <a:t/>
+            </a:r>
+            <a:endParaRPr lang="en-US" dirty="0"/>
+          </a:p>
+        </p:txBody>
+      </p:sp>
+      <p:sp>
+        <p:nvSpPr>
+          <p:cNvPr id="4" name="Slide Number Placeholder 3"/>
+          <p:cNvSpPr>
+            <a:spLocks noGrp="1"/>
+          </p:cNvSpPr>
+          <p:nvPr>
+            <p:ph type="sldNum" sz="quarter" idx="10"/>
+          </p:nvPr>
+        </p:nvSpPr>
+        <p:spPr/>
+        <p:txBody>
+          <a:bodyPr/>
+          <a:lstStyle/>
+          <a:p>
+            <a:fld id="{F7021451-1387-4CA6-816F-3879F97B5CBC}" type="slidenum">
+              <a:rPr lang="en-US"/>
+              <a:t>7</a:t>
+            </a:fld>
+            <a:endParaRPr lang="en-US"/>
+          </a:p>
+        </p:txBody>
+      </p:sp>
+    </p:spTree>
+    <p:extLst>
+      <p:ext uri="{BB962C8B-B14F-4D97-AF65-F5344CB8AC3E}">
+        <p14:creationId xmlns:p14="http://schemas.microsoft.com/office/powerpoint/2010/main" val="1024086991"/>
+      </p:ext>
+    </p:extLst>
+  </p:cSld>
+  <p:clrMapOvr>
+    <a:masterClrMapping/>
+  </p:clrMapOvr>
+</p:notes>
+</file>
+
+<file path=ppt/notesSlides/notesSlide8.xml><?xml version="1.0" encoding="utf-8"?>
+<p:notes xmlns:a="http://schemas.openxmlformats.org/drawingml/2006/main" xmlns:r="http://schemas.openxmlformats.org/officeDocument/2006/relationships" xmlns:p="http://schemas.openxmlformats.org/presentationml/2006/main">
+  <p:cSld>
+    <p:spTree>
+      <p:nvGrpSpPr>
+        <p:cNvPr id="1" name=""/>
+        <p:cNvGrpSpPr/>
+        <p:nvPr/>
+      </p:nvGrpSpPr>
+      <p:grpSpPr>
+        <a:xfrm>
+          <a:off x="0" y="0"/>
+          <a:ext cx="0" cy="0"/>
+          <a:chOff x="0" y="0"/>
+          <a:chExt cx="0" cy="0"/>
+        </a:xfrm>
+      </p:grpSpPr>
+      <p:sp>
+        <p:nvSpPr>
+          <p:cNvPr id="2" name="Slide Image Placeholder 1"/>
+          <p:cNvSpPr>
+            <a:spLocks noGrp="1" noRot="1" noChangeAspect="1"/>
+          </p:cNvSpPr>
+          <p:nvPr>
+            <p:ph type="sldImg"/>
+          </p:nvPr>
+        </p:nvSpPr>
+        <p:spPr/>
+      </p:sp>
+      <p:sp>
+        <p:nvSpPr>
+          <p:cNvPr id="3" name="Notes Placeholder 2"/>
+          <p:cNvSpPr>
+            <a:spLocks noGrp="1"/>
+          </p:cNvSpPr>
+          <p:nvPr>
+            <p:ph type="body" idx="1"/>
+          </p:nvPr>
+        </p:nvSpPr>
+        <p:spPr/>
+        <p:txBody>
+          <a:bodyPr/>
+          <a:lstStyle/>
+          <a:p>
+            <a:r>
+              <a:rPr lang="en-US" dirty="0"/>
+              <a:t/>
+            </a:r>
+            <a:endParaRPr lang="en-US" dirty="0"/>
+          </a:p>
+        </p:txBody>
+      </p:sp>
+      <p:sp>
+        <p:nvSpPr>
+          <p:cNvPr id="4" name="Slide Number Placeholder 3"/>
+          <p:cNvSpPr>
+            <a:spLocks noGrp="1"/>
+          </p:cNvSpPr>
+          <p:nvPr>
+            <p:ph type="sldNum" sz="quarter" idx="10"/>
+          </p:nvPr>
+        </p:nvSpPr>
+        <p:spPr/>
+        <p:txBody>
+          <a:bodyPr/>
+          <a:lstStyle/>
+          <a:p>
+            <a:fld id="{F7021451-1387-4CA6-816F-3879F97B5CBC}" type="slidenum">
+              <a:rPr lang="en-US"/>
+              <a:t>8</a:t>
+            </a:fld>
+            <a:endParaRPr lang="en-US"/>
+          </a:p>
+        </p:txBody>
+      </p:sp>
+    </p:spTree>
+    <p:extLst>
+      <p:ext uri="{BB962C8B-B14F-4D97-AF65-F5344CB8AC3E}">
+        <p14:creationId xmlns:p14="http://schemas.microsoft.com/office/powerpoint/2010/main" val="1024086991"/>
+      </p:ext>
+    </p:extLst>
+  </p:cSld>
+  <p:clrMapOvr>
+    <a:masterClrMapping/>
+  </p:clrMapOvr>
+</p:notes>
+</file>
+
+<file path=ppt/notesSlides/notesSlide9.xml><?xml version="1.0" encoding="utf-8"?>
+<p:notes xmlns:a="http://schemas.openxmlformats.org/drawingml/2006/main" xmlns:r="http://schemas.openxmlformats.org/officeDocument/2006/relationships" xmlns:p="http://schemas.openxmlformats.org/presentationml/2006/main">
+  <p:cSld>
+    <p:spTree>
+      <p:nvGrpSpPr>
+        <p:cNvPr id="1" name=""/>
+        <p:cNvGrpSpPr/>
+        <p:nvPr/>
+      </p:nvGrpSpPr>
+      <p:grpSpPr>
+        <a:xfrm>
+          <a:off x="0" y="0"/>
+          <a:ext cx="0" cy="0"/>
+          <a:chOff x="0" y="0"/>
+          <a:chExt cx="0" cy="0"/>
+        </a:xfrm>
+      </p:grpSpPr>
+      <p:sp>
+        <p:nvSpPr>
+          <p:cNvPr id="2" name="Slide Image Placeholder 1"/>
+          <p:cNvSpPr>
+            <a:spLocks noGrp="1" noRot="1" noChangeAspect="1"/>
+          </p:cNvSpPr>
+          <p:nvPr>
+            <p:ph type="sldImg"/>
+          </p:nvPr>
+        </p:nvSpPr>
+        <p:spPr/>
+      </p:sp>
+      <p:sp>
+        <p:nvSpPr>
+          <p:cNvPr id="3" name="Notes Placeholder 2"/>
+          <p:cNvSpPr>
+            <a:spLocks noGrp="1"/>
+          </p:cNvSpPr>
+          <p:nvPr>
+            <p:ph type="body" idx="1"/>
+          </p:nvPr>
+        </p:nvSpPr>
+        <p:spPr/>
+        <p:txBody>
+          <a:bodyPr/>
+          <a:lstStyle/>
+          <a:p>
+            <a:r>
+              <a:rPr lang="en-US" dirty="0"/>
+              <a:t/>
+            </a:r>
+            <a:endParaRPr lang="en-US" dirty="0"/>
+          </a:p>
+        </p:txBody>
+      </p:sp>
+      <p:sp>
+        <p:nvSpPr>
+          <p:cNvPr id="4" name="Slide Number Placeholder 3"/>
+          <p:cNvSpPr>
+            <a:spLocks noGrp="1"/>
+          </p:cNvSpPr>
+          <p:nvPr>
+            <p:ph type="sldNum" sz="quarter" idx="10"/>
+          </p:nvPr>
+        </p:nvSpPr>
+        <p:spPr/>
+        <p:txBody>
+          <a:bodyPr/>
+          <a:lstStyle/>
+          <a:p>
+            <a:fld id="{F7021451-1387-4CA6-816F-3879F97B5CBC}" type="slidenum">
+              <a:rPr lang="en-US"/>
+              <a:t>9</a:t>
             </a:fld>
             <a:endParaRPr lang="en-US"/>
           </a:p>
@@ -2629,6 +3341,1448 @@
 </p:sld>
 </file>
 
+<file path=ppt/slides/slide10.xml><?xml version="1.0" encoding="utf-8"?>
+<p:sld xmlns:a="http://schemas.openxmlformats.org/drawingml/2006/main" xmlns:r="http://schemas.openxmlformats.org/officeDocument/2006/relationships" xmlns:p="http://schemas.openxmlformats.org/presentationml/2006/main">
+  <p:cSld name="Slide 10">
+    <p:spTree>
+      <p:nvGrpSpPr>
+        <p:cNvPr id="1" name=""/>
+        <p:cNvGrpSpPr/>
+        <p:nvPr/>
+      </p:nvGrpSpPr>
+      <p:grpSpPr>
+        <a:xfrm>
+          <a:off x="0" y="0"/>
+          <a:ext cx="0" cy="0"/>
+          <a:chOff x="0" y="0"/>
+          <a:chExt cx="0" cy="0"/>
+        </a:xfrm>
+      </p:grpSpPr>
+      <p:sp>
+        <p:nvSpPr>
+          <p:cNvPr id="2" name="Text 0"/>
+          <p:cNvSpPr txBox="1"/>
+          <p:nvPr/>
+        </p:nvSpPr>
+        <p:spPr>
+          <a:xfrm>
+            <a:off x="640080" y="411480"/>
+            <a:ext cx="10972800" cy="640080"/>
+          </a:xfrm>
+          <a:prstGeom prst="rect">
+            <a:avLst/>
+          </a:prstGeom>
+          <a:noFill/>
+          <a:ln/>
+        </p:spPr>
+        <p:txBody>
+          <a:bodyPr wrap="square" rtlCol="0" anchor="ctr"/>
+          <a:lstStyle/>
+          <a:p>
+            <a:pPr indent="0" marL="0">
+              <a:buNone/>
+            </a:pPr>
+            <a:r>
+              <a:rPr lang="en-US" sz="2400" b="1" dirty="0">
+                <a:solidFill>
+                  <a:srgbClr val="1A1A1A"/>
+                </a:solidFill>
+                <a:latin typeface="Microsoft YaHei" pitchFamily="34" charset="0"/>
+                <a:ea typeface="Microsoft YaHei" pitchFamily="34" charset="-122"/>
+                <a:cs typeface="Microsoft YaHei" pitchFamily="34" charset="-120"/>
+              </a:rPr>
+              <a:t>小鼠肝（Tabula Muris Senis 10x）：IL18 / CASP1 / CASP3 三基因</a:t>
+            </a:r>
+            <a:endParaRPr lang="en-US" sz="2400" dirty="0"/>
+          </a:p>
+        </p:txBody>
+      </p:sp>
+      <p:pic>
+        <p:nvPicPr>
+          <p:cNvPr id="3" name="Image 0" descr="/home/user/aaa/il18_casp5organ/figures/mouse/liver_dots.png">    </p:cNvPr>
+          <p:cNvPicPr>
+            <a:picLocks noChangeAspect="1"/>
+          </p:cNvPicPr>
+          <p:nvPr/>
+        </p:nvPicPr>
+        <p:blipFill>
+          <a:blip r:embed="rId1"/>
+          <a:stretch>
+            <a:fillRect/>
+          </a:stretch>
+        </p:blipFill>
+        <p:spPr>
+          <a:xfrm>
+            <a:off x="640080" y="1051560"/>
+            <a:ext cx="10908792" cy="4846320"/>
+          </a:xfrm>
+          <a:prstGeom prst="rect">
+            <a:avLst/>
+          </a:prstGeom>
+        </p:spPr>
+      </p:pic>
+      <p:sp>
+        <p:nvSpPr>
+          <p:cNvPr id="4" name="Text 1"/>
+          <p:cNvSpPr txBox="1"/>
+          <p:nvPr/>
+        </p:nvSpPr>
+        <p:spPr>
+          <a:xfrm>
+            <a:off x="640080" y="5943600"/>
+            <a:ext cx="10927080" cy="786384"/>
+          </a:xfrm>
+          <a:prstGeom prst="rect">
+            <a:avLst/>
+          </a:prstGeom>
+          <a:noFill/>
+          <a:ln/>
+        </p:spPr>
+        <p:txBody>
+          <a:bodyPr wrap="square" rtlCol="0" anchor="t"/>
+          <a:lstStyle/>
+          <a:p>
+            <a:pPr indent="0" marL="0">
+              <a:lnSpc>
+                <a:spcPct val="120000"/>
+              </a:lnSpc>
+              <a:buNone/>
+            </a:pPr>
+            <a:r>
+              <a:rPr lang="en-US" sz="1050" dirty="0">
+                <a:solidFill>
+                  <a:srgbClr val="6B6B6B"/>
+                </a:solidFill>
+                <a:latin typeface="Microsoft YaHei" pitchFamily="34" charset="0"/>
+                <a:ea typeface="Microsoft YaHei" pitchFamily="34" charset="-122"/>
+                <a:cs typeface="Microsoft YaHei" pitchFamily="34" charset="-120"/>
+              </a:rPr>
+              <a:t>Kupffer 细胞 IL18 74.2% 对 CASP1 51.9%。肝细胞 IL18 11.2% 而 CASP1 0.34% 方向相符，但 IL18 未进该分层最高三分位，按 §8 不入候选——这一条列在此处是为了让落选理由可见。</a:t>
+            </a:r>
+            <a:endParaRPr lang="en-US" sz="1050" dirty="0"/>
+          </a:p>
+        </p:txBody>
+      </p:sp>
+    </p:spTree>
+  </p:cSld>
+  <p:clrMapOvr>
+    <a:masterClrMapping/>
+  </p:clrMapOvr>
+</p:sld>
+</file>
+
+<file path=ppt/slides/slide11.xml><?xml version="1.0" encoding="utf-8"?>
+<p:sld xmlns:a="http://schemas.openxmlformats.org/drawingml/2006/main" xmlns:r="http://schemas.openxmlformats.org/officeDocument/2006/relationships" xmlns:p="http://schemas.openxmlformats.org/presentationml/2006/main">
+  <p:cSld name="Slide 11">
+    <p:spTree>
+      <p:nvGrpSpPr>
+        <p:cNvPr id="1" name=""/>
+        <p:cNvGrpSpPr/>
+        <p:nvPr/>
+      </p:nvGrpSpPr>
+      <p:grpSpPr>
+        <a:xfrm>
+          <a:off x="0" y="0"/>
+          <a:ext cx="0" cy="0"/>
+          <a:chOff x="0" y="0"/>
+          <a:chExt cx="0" cy="0"/>
+        </a:xfrm>
+      </p:grpSpPr>
+      <p:sp>
+        <p:nvSpPr>
+          <p:cNvPr id="2" name="Text 0"/>
+          <p:cNvSpPr txBox="1"/>
+          <p:nvPr/>
+        </p:nvSpPr>
+        <p:spPr>
+          <a:xfrm>
+            <a:off x="640080" y="411480"/>
+            <a:ext cx="10972800" cy="640080"/>
+          </a:xfrm>
+          <a:prstGeom prst="rect">
+            <a:avLst/>
+          </a:prstGeom>
+          <a:noFill/>
+          <a:ln/>
+        </p:spPr>
+        <p:txBody>
+          <a:bodyPr wrap="square" rtlCol="0" anchor="ctr"/>
+          <a:lstStyle/>
+          <a:p>
+            <a:pPr indent="0" marL="0">
+              <a:buNone/>
+            </a:pPr>
+            <a:r>
+              <a:rPr lang="en-US" sz="2400" b="1" dirty="0">
+                <a:solidFill>
+                  <a:srgbClr val="1A1A1A"/>
+                </a:solidFill>
+                <a:latin typeface="Microsoft YaHei" pitchFamily="34" charset="0"/>
+                <a:ea typeface="Microsoft YaHei" pitchFamily="34" charset="-122"/>
+                <a:cs typeface="Microsoft YaHei" pitchFamily="34" charset="-120"/>
+              </a:rPr>
+              <a:t>小鼠胰（小鼠胰岛图谱单细胞）：IL18 / CASP1 / CASP3 三基因</a:t>
+            </a:r>
+            <a:endParaRPr lang="en-US" sz="2400" dirty="0"/>
+          </a:p>
+        </p:txBody>
+      </p:sp>
+      <p:pic>
+        <p:nvPicPr>
+          <p:cNvPr id="3" name="Image 0" descr="/home/user/aaa/il18_casp5organ/figures/mouse/pancreas_dots.png">    </p:cNvPr>
+          <p:cNvPicPr>
+            <a:picLocks noChangeAspect="1"/>
+          </p:cNvPicPr>
+          <p:nvPr/>
+        </p:nvPicPr>
+        <p:blipFill>
+          <a:blip r:embed="rId1"/>
+          <a:stretch>
+            <a:fillRect/>
+          </a:stretch>
+        </p:blipFill>
+        <p:spPr>
+          <a:xfrm>
+            <a:off x="640080" y="1051560"/>
+            <a:ext cx="10908792" cy="4846320"/>
+          </a:xfrm>
+          <a:prstGeom prst="rect">
+            <a:avLst/>
+          </a:prstGeom>
+        </p:spPr>
+      </p:pic>
+      <p:sp>
+        <p:nvSpPr>
+          <p:cNvPr id="4" name="Text 1"/>
+          <p:cNvSpPr txBox="1"/>
+          <p:nvPr/>
+        </p:nvSpPr>
+        <p:spPr>
+          <a:xfrm>
+            <a:off x="640080" y="5943600"/>
+            <a:ext cx="10927080" cy="786384"/>
+          </a:xfrm>
+          <a:prstGeom prst="rect">
+            <a:avLst/>
+          </a:prstGeom>
+          <a:noFill/>
+          <a:ln/>
+        </p:spPr>
+        <p:txBody>
+          <a:bodyPr wrap="square" rtlCol="0" anchor="t"/>
+          <a:lstStyle/>
+          <a:p>
+            <a:pPr indent="0" marL="0">
+              <a:lnSpc>
+                <a:spcPct val="120000"/>
+              </a:lnSpc>
+              <a:buNone/>
+            </a:pPr>
+            <a:r>
+              <a:rPr lang="en-US" sz="1050" dirty="0">
+                <a:solidFill>
+                  <a:srgbClr val="6B6B6B"/>
+                </a:solidFill>
+                <a:latin typeface="Microsoft YaHei" pitchFamily="34" charset="0"/>
+                <a:ea typeface="Microsoft YaHei" pitchFamily="34" charset="-122"/>
+                <a:cs typeface="Microsoft YaHei" pitchFamily="34" charset="-120"/>
+              </a:rPr>
+              <a:t>胰岛 D(δ) 细胞与胰导管细胞是本器官的两个方向相符项。胰岛内分泌细胞 IL18 19.5% 而 CASP1 0.09%，CASP3 33.3%。同一位置的人胰岛 δ 细胞 IL18 仅 0.17%（8/4677），该发现在人不复现。</a:t>
+            </a:r>
+            <a:endParaRPr lang="en-US" sz="1050" dirty="0"/>
+          </a:p>
+        </p:txBody>
+      </p:sp>
+    </p:spTree>
+  </p:cSld>
+  <p:clrMapOvr>
+    <a:masterClrMapping/>
+  </p:clrMapOvr>
+</p:sld>
+</file>
+
+<file path=ppt/slides/slide12.xml><?xml version="1.0" encoding="utf-8"?>
+<p:sld xmlns:a="http://schemas.openxmlformats.org/drawingml/2006/main" xmlns:r="http://schemas.openxmlformats.org/officeDocument/2006/relationships" xmlns:p="http://schemas.openxmlformats.org/presentationml/2006/main">
+  <p:cSld name="Slide 12">
+    <p:spTree>
+      <p:nvGrpSpPr>
+        <p:cNvPr id="1" name=""/>
+        <p:cNvGrpSpPr/>
+        <p:nvPr/>
+      </p:nvGrpSpPr>
+      <p:grpSpPr>
+        <a:xfrm>
+          <a:off x="0" y="0"/>
+          <a:ext cx="0" cy="0"/>
+          <a:chOff x="0" y="0"/>
+          <a:chExt cx="0" cy="0"/>
+        </a:xfrm>
+      </p:grpSpPr>
+      <p:sp>
+        <p:nvSpPr>
+          <p:cNvPr id="2" name="Text 0"/>
+          <p:cNvSpPr txBox="1"/>
+          <p:nvPr/>
+        </p:nvSpPr>
+        <p:spPr>
+          <a:xfrm>
+            <a:off x="640080" y="411480"/>
+            <a:ext cx="10972800" cy="640080"/>
+          </a:xfrm>
+          <a:prstGeom prst="rect">
+            <a:avLst/>
+          </a:prstGeom>
+          <a:noFill/>
+          <a:ln/>
+        </p:spPr>
+        <p:txBody>
+          <a:bodyPr wrap="square" rtlCol="0" anchor="ctr"/>
+          <a:lstStyle/>
+          <a:p>
+            <a:pPr indent="0" marL="0">
+              <a:buNone/>
+            </a:pPr>
+            <a:r>
+              <a:rPr lang="en-US" sz="2400" b="1" dirty="0">
+                <a:solidFill>
+                  <a:srgbClr val="1A1A1A"/>
+                </a:solidFill>
+                <a:latin typeface="Microsoft YaHei" pitchFamily="34" charset="0"/>
+                <a:ea typeface="Microsoft YaHei" pitchFamily="34" charset="-122"/>
+                <a:cs typeface="Microsoft YaHei" pitchFamily="34" charset="-120"/>
+              </a:rPr>
+              <a:t>小鼠脑（Yao 皮层+海马单细胞）：IL18 / CASP1 / CASP3 三基因</a:t>
+            </a:r>
+            <a:endParaRPr lang="en-US" sz="2400" dirty="0"/>
+          </a:p>
+        </p:txBody>
+      </p:sp>
+      <p:pic>
+        <p:nvPicPr>
+          <p:cNvPr id="3" name="Image 0" descr="/home/user/aaa/il18_casp5organ/figures/mouse/brain_cell_dots.png">    </p:cNvPr>
+          <p:cNvPicPr>
+            <a:picLocks noChangeAspect="1"/>
+          </p:cNvPicPr>
+          <p:nvPr/>
+        </p:nvPicPr>
+        <p:blipFill>
+          <a:blip r:embed="rId1"/>
+          <a:stretch>
+            <a:fillRect/>
+          </a:stretch>
+        </p:blipFill>
+        <p:spPr>
+          <a:xfrm>
+            <a:off x="640080" y="1051560"/>
+            <a:ext cx="10908792" cy="4846320"/>
+          </a:xfrm>
+          <a:prstGeom prst="rect">
+            <a:avLst/>
+          </a:prstGeom>
+        </p:spPr>
+      </p:pic>
+      <p:sp>
+        <p:nvSpPr>
+          <p:cNvPr id="4" name="Text 1"/>
+          <p:cNvSpPr txBox="1"/>
+          <p:nvPr/>
+        </p:nvSpPr>
+        <p:spPr>
+          <a:xfrm>
+            <a:off x="640080" y="5943600"/>
+            <a:ext cx="10927080" cy="786384"/>
+          </a:xfrm>
+          <a:prstGeom prst="rect">
+            <a:avLst/>
+          </a:prstGeom>
+          <a:noFill/>
+          <a:ln/>
+        </p:spPr>
+        <p:txBody>
+          <a:bodyPr wrap="square" rtlCol="0" anchor="t"/>
+          <a:lstStyle/>
+          <a:p>
+            <a:pPr indent="0" marL="0">
+              <a:lnSpc>
+                <a:spcPct val="120000"/>
+              </a:lnSpc>
+              <a:buNone/>
+            </a:pPr>
+            <a:r>
+              <a:rPr lang="en-US" sz="1050" dirty="0">
+                <a:solidFill>
+                  <a:srgbClr val="6B6B6B"/>
+                </a:solidFill>
+                <a:latin typeface="Microsoft YaHei" pitchFamily="34" charset="0"/>
+                <a:ea typeface="Microsoft YaHei" pitchFamily="34" charset="-122"/>
+                <a:cs typeface="Microsoft YaHei" pitchFamily="34" charset="-120"/>
+              </a:rPr>
+              <a:t>星形胶质 IL18 56.7% 而 CASP1 仅 2/3766；小胶质 IL18 20.5% 但 CASP1 15/818 = 1.83%，是全脑最高的一档。</a:t>
+            </a:r>
+            <a:endParaRPr lang="en-US" sz="1050" dirty="0"/>
+          </a:p>
+        </p:txBody>
+      </p:sp>
+    </p:spTree>
+  </p:cSld>
+  <p:clrMapOvr>
+    <a:masterClrMapping/>
+  </p:clrMapOvr>
+</p:sld>
+</file>
+
+<file path=ppt/slides/slide13.xml><?xml version="1.0" encoding="utf-8"?>
+<p:sld xmlns:a="http://schemas.openxmlformats.org/drawingml/2006/main" xmlns:r="http://schemas.openxmlformats.org/officeDocument/2006/relationships" xmlns:p="http://schemas.openxmlformats.org/presentationml/2006/main">
+  <p:cSld name="Slide 13">
+    <p:spTree>
+      <p:nvGrpSpPr>
+        <p:cNvPr id="1" name=""/>
+        <p:cNvGrpSpPr/>
+        <p:nvPr/>
+      </p:nvGrpSpPr>
+      <p:grpSpPr>
+        <a:xfrm>
+          <a:off x="0" y="0"/>
+          <a:ext cx="0" cy="0"/>
+          <a:chOff x="0" y="0"/>
+          <a:chExt cx="0" cy="0"/>
+        </a:xfrm>
+      </p:grpSpPr>
+      <p:sp>
+        <p:nvSpPr>
+          <p:cNvPr id="2" name="Text 0"/>
+          <p:cNvSpPr txBox="1"/>
+          <p:nvPr/>
+        </p:nvSpPr>
+        <p:spPr>
+          <a:xfrm>
+            <a:off x="640080" y="411480"/>
+            <a:ext cx="10972800" cy="640080"/>
+          </a:xfrm>
+          <a:prstGeom prst="rect">
+            <a:avLst/>
+          </a:prstGeom>
+          <a:noFill/>
+          <a:ln/>
+        </p:spPr>
+        <p:txBody>
+          <a:bodyPr wrap="square" rtlCol="0" anchor="ctr"/>
+          <a:lstStyle/>
+          <a:p>
+            <a:pPr indent="0" marL="0">
+              <a:buNone/>
+            </a:pPr>
+            <a:r>
+              <a:rPr lang="en-US" sz="2400" b="1" dirty="0">
+                <a:solidFill>
+                  <a:srgbClr val="1A1A1A"/>
+                </a:solidFill>
+                <a:latin typeface="Microsoft YaHei" pitchFamily="34" charset="0"/>
+                <a:ea typeface="Microsoft YaHei" pitchFamily="34" charset="-122"/>
+                <a:cs typeface="Microsoft YaHei" pitchFamily="34" charset="-120"/>
+              </a:rPr>
+              <a:t>小鼠脊髓（GSE103892 单核）：IL18 / CASP1 / CASP3 三基因</a:t>
+            </a:r>
+            <a:endParaRPr lang="en-US" sz="2400" dirty="0"/>
+          </a:p>
+        </p:txBody>
+      </p:sp>
+      <p:pic>
+        <p:nvPicPr>
+          <p:cNvPr id="3" name="Image 0" descr="/home/user/aaa/il18_casp5organ/figures/mouse/spinal_dots.png">    </p:cNvPr>
+          <p:cNvPicPr>
+            <a:picLocks noChangeAspect="1"/>
+          </p:cNvPicPr>
+          <p:nvPr/>
+        </p:nvPicPr>
+        <p:blipFill>
+          <a:blip r:embed="rId1"/>
+          <a:stretch>
+            <a:fillRect/>
+          </a:stretch>
+        </p:blipFill>
+        <p:spPr>
+          <a:xfrm>
+            <a:off x="640080" y="1051560"/>
+            <a:ext cx="10908792" cy="4846320"/>
+          </a:xfrm>
+          <a:prstGeom prst="rect">
+            <a:avLst/>
+          </a:prstGeom>
+        </p:spPr>
+      </p:pic>
+      <p:sp>
+        <p:nvSpPr>
+          <p:cNvPr id="4" name="Text 1"/>
+          <p:cNvSpPr txBox="1"/>
+          <p:nvPr/>
+        </p:nvSpPr>
+        <p:spPr>
+          <a:xfrm>
+            <a:off x="640080" y="5943600"/>
+            <a:ext cx="10927080" cy="786384"/>
+          </a:xfrm>
+          <a:prstGeom prst="rect">
+            <a:avLst/>
+          </a:prstGeom>
+          <a:noFill/>
+          <a:ln/>
+        </p:spPr>
+        <p:txBody>
+          <a:bodyPr wrap="square" rtlCol="0" anchor="t"/>
+          <a:lstStyle/>
+          <a:p>
+            <a:pPr indent="0" marL="0">
+              <a:lnSpc>
+                <a:spcPct val="120000"/>
+              </a:lnSpc>
+              <a:buNone/>
+            </a:pPr>
+            <a:r>
+              <a:rPr lang="en-US" sz="1050" dirty="0">
+                <a:solidFill>
+                  <a:srgbClr val="6B6B6B"/>
+                </a:solidFill>
+                <a:latin typeface="Microsoft YaHei" pitchFamily="34" charset="0"/>
+                <a:ea typeface="Microsoft YaHei" pitchFamily="34" charset="-122"/>
+                <a:cs typeface="Microsoft YaHei" pitchFamily="34" charset="-120"/>
+              </a:rPr>
+              <a:t>本页不产候选。星形胶质 IL18 21.0% 而 CASP1 0/404、少突胶质 1/707，方向看似相符，但该分层矩阵只带基因符号（gene_id_unavailable，§1.2），细胞数又少；而参考层的 RiboTag 分选脊髓星形胶质明确测到 Casp1。故小鼠星形胶质的结论只覆盖皮层与海马，不含脊髓。</a:t>
+            </a:r>
+            <a:endParaRPr lang="en-US" sz="1050" dirty="0"/>
+          </a:p>
+        </p:txBody>
+      </p:sp>
+    </p:spTree>
+  </p:cSld>
+  <p:clrMapOvr>
+    <a:masterClrMapping/>
+  </p:clrMapOvr>
+</p:sld>
+</file>
+
+<file path=ppt/slides/slide14.xml><?xml version="1.0" encoding="utf-8"?>
+<p:sld xmlns:a="http://schemas.openxmlformats.org/drawingml/2006/main" xmlns:r="http://schemas.openxmlformats.org/officeDocument/2006/relationships" xmlns:p="http://schemas.openxmlformats.org/presentationml/2006/main">
+  <p:cSld name="Slide 14">
+    <p:spTree>
+      <p:nvGrpSpPr>
+        <p:cNvPr id="1" name=""/>
+        <p:cNvGrpSpPr/>
+        <p:nvPr/>
+      </p:nvGrpSpPr>
+      <p:grpSpPr>
+        <a:xfrm>
+          <a:off x="0" y="0"/>
+          <a:ext cx="0" cy="0"/>
+          <a:chOff x="0" y="0"/>
+          <a:chExt cx="0" cy="0"/>
+        </a:xfrm>
+      </p:grpSpPr>
+      <p:sp>
+        <p:nvSpPr>
+          <p:cNvPr id="2" name="Text 0"/>
+          <p:cNvSpPr txBox="1"/>
+          <p:nvPr/>
+        </p:nvSpPr>
+        <p:spPr>
+          <a:xfrm>
+            <a:off x="640080" y="365760"/>
+            <a:ext cx="5486400" cy="548640"/>
+          </a:xfrm>
+          <a:prstGeom prst="rect">
+            <a:avLst/>
+          </a:prstGeom>
+          <a:noFill/>
+          <a:ln/>
+        </p:spPr>
+        <p:txBody>
+          <a:bodyPr wrap="square" rtlCol="0" anchor="ctr"/>
+          <a:lstStyle/>
+          <a:p>
+            <a:pPr indent="0" marL="0">
+              <a:buNone/>
+            </a:pPr>
+            <a:r>
+              <a:rPr lang="en-US" sz="2600" b="1" dirty="0">
+                <a:solidFill>
+                  <a:srgbClr val="1A1A1A"/>
+                </a:solidFill>
+                <a:latin typeface="Microsoft YaHei" pitchFamily="34" charset="0"/>
+                <a:ea typeface="Microsoft YaHei" pitchFamily="34" charset="-122"/>
+                <a:cs typeface="Microsoft YaHei" pitchFamily="34" charset="-120"/>
+              </a:rPr>
+              <a:t>结论</a:t>
+            </a:r>
+            <a:endParaRPr lang="en-US" sz="2600" dirty="0"/>
+          </a:p>
+        </p:txBody>
+      </p:sp>
+      <p:sp>
+        <p:nvSpPr>
+          <p:cNvPr id="3" name="Text 1"/>
+          <p:cNvSpPr txBox="1"/>
+          <p:nvPr/>
+        </p:nvSpPr>
+        <p:spPr>
+          <a:xfrm>
+            <a:off x="640080" y="914400"/>
+            <a:ext cx="10972800" cy="320040"/>
+          </a:xfrm>
+          <a:prstGeom prst="rect">
+            <a:avLst/>
+          </a:prstGeom>
+          <a:noFill/>
+          <a:ln/>
+        </p:spPr>
+        <p:txBody>
+          <a:bodyPr wrap="square" rtlCol="0" anchor="ctr"/>
+          <a:lstStyle/>
+          <a:p>
+            <a:pPr indent="0" marL="0">
+              <a:buNone/>
+            </a:pPr>
+            <a:r>
+              <a:rPr lang="en-US" sz="1200" dirty="0">
+                <a:solidFill>
+                  <a:srgbClr val="6B6B6B"/>
+                </a:solidFill>
+                <a:latin typeface="Microsoft YaHei" pitchFamily="34" charset="0"/>
+                <a:ea typeface="Microsoft YaHei" pitchFamily="34" charset="-122"/>
+                <a:cs typeface="Microsoft YaHei" pitchFamily="34" charset="-120"/>
+              </a:rPr>
+              <a:t>「方向」= 是否符合「IL18 高 + CASP1 低」这一前提；「证据」= 支持该方向的独立参考来源有多少、是否一致。两者分开看。</a:t>
+            </a:r>
+            <a:endParaRPr lang="en-US" sz="1200" dirty="0"/>
+          </a:p>
+        </p:txBody>
+      </p:sp>
+      <p:sp>
+        <p:nvSpPr>
+          <p:cNvPr id="4" name="Text 2"/>
+          <p:cNvSpPr txBox="1"/>
+          <p:nvPr/>
+        </p:nvSpPr>
+        <p:spPr>
+          <a:xfrm>
+            <a:off x="731520" y="1298448"/>
+            <a:ext cx="2834640" cy="274320"/>
+          </a:xfrm>
+          <a:prstGeom prst="rect">
+            <a:avLst/>
+          </a:prstGeom>
+          <a:noFill/>
+          <a:ln/>
+        </p:spPr>
+        <p:txBody>
+          <a:bodyPr wrap="square" rtlCol="0" anchor="ctr"/>
+          <a:lstStyle/>
+          <a:p>
+            <a:pPr indent="0" marL="0">
+              <a:buNone/>
+            </a:pPr>
+            <a:r>
+              <a:rPr lang="en-US" sz="1350" b="1" dirty="0">
+                <a:solidFill>
+                  <a:srgbClr val="1B7A43"/>
+                </a:solidFill>
+                <a:latin typeface="Microsoft YaHei" pitchFamily="34" charset="0"/>
+                <a:ea typeface="Microsoft YaHei" pitchFamily="34" charset="-122"/>
+                <a:cs typeface="Microsoft YaHei" pitchFamily="34" charset="-120"/>
+              </a:rPr>
+              <a:t>符合 · 多源一致</a:t>
+            </a:r>
+            <a:endParaRPr lang="en-US" sz="1350" dirty="0"/>
+          </a:p>
+        </p:txBody>
+      </p:sp>
+      <p:sp>
+        <p:nvSpPr>
+          <p:cNvPr id="5" name="Text 3"/>
+          <p:cNvSpPr txBox="1"/>
+          <p:nvPr/>
+        </p:nvSpPr>
+        <p:spPr>
+          <a:xfrm>
+            <a:off x="731520" y="1554480"/>
+            <a:ext cx="2834640" cy="457200"/>
+          </a:xfrm>
+          <a:prstGeom prst="rect">
+            <a:avLst/>
+          </a:prstGeom>
+          <a:noFill/>
+          <a:ln/>
+        </p:spPr>
+        <p:txBody>
+          <a:bodyPr wrap="square" rtlCol="0" anchor="t"/>
+          <a:lstStyle/>
+          <a:p>
+            <a:pPr indent="0" marL="0">
+              <a:lnSpc>
+                <a:spcPct val="110000"/>
+              </a:lnSpc>
+              <a:buNone/>
+            </a:pPr>
+            <a:r>
+              <a:rPr lang="en-US" sz="950" dirty="0">
+                <a:solidFill>
+                  <a:srgbClr val="6B6B6B"/>
+                </a:solidFill>
+                <a:latin typeface="Microsoft YaHei" pitchFamily="34" charset="0"/>
+                <a:ea typeface="Microsoft YaHei" pitchFamily="34" charset="-122"/>
+                <a:cs typeface="Microsoft YaHei" pitchFamily="34" charset="-120"/>
+              </a:rPr>
+              <a:t>≥2 个独立来源，无一例外</a:t>
+            </a:r>
+            <a:endParaRPr lang="en-US" sz="950" dirty="0"/>
+          </a:p>
+        </p:txBody>
+      </p:sp>
+      <p:sp>
+        <p:nvSpPr>
+          <p:cNvPr id="6" name="Text 4"/>
+          <p:cNvSpPr txBox="1"/>
+          <p:nvPr/>
+        </p:nvSpPr>
+        <p:spPr>
+          <a:xfrm>
+            <a:off x="3749040" y="1261872"/>
+            <a:ext cx="7772400" cy="658368"/>
+          </a:xfrm>
+          <a:prstGeom prst="rect">
+            <a:avLst/>
+          </a:prstGeom>
+          <a:noFill/>
+          <a:ln/>
+        </p:spPr>
+        <p:txBody>
+          <a:bodyPr wrap="square" rtlCol="0" anchor="t"/>
+          <a:lstStyle/>
+          <a:p>
+            <a:pPr indent="0" marL="0">
+              <a:lnSpc>
+                <a:spcPct val="115000"/>
+              </a:lnSpc>
+              <a:buNone/>
+            </a:pPr>
+            <a:r>
+              <a:rPr lang="en-US" sz="1250" dirty="0">
+                <a:solidFill>
+                  <a:srgbClr val="1A1A1A"/>
+                </a:solidFill>
+                <a:latin typeface="Microsoft YaHei" pitchFamily="34" charset="0"/>
+                <a:ea typeface="Microsoft YaHei" pitchFamily="34" charset="-122"/>
+                <a:cs typeface="Microsoft YaHei" pitchFamily="34" charset="-120"/>
+              </a:rPr>
+              <a:t>小鼠脑 星形胶质 · 人脑 L5 ET 投射神经元 · 小鼠脑 少突胶质 · 人脑 PV 中间神经元 · 人脑 枝形 PV 中间神经元</a:t>
+            </a:r>
+            <a:endParaRPr lang="en-US" sz="1250" dirty="0"/>
+          </a:p>
+        </p:txBody>
+      </p:sp>
+      <p:sp>
+        <p:nvSpPr>
+          <p:cNvPr id="7" name="Text 5"/>
+          <p:cNvSpPr txBox="1"/>
+          <p:nvPr/>
+        </p:nvSpPr>
+        <p:spPr>
+          <a:xfrm>
+            <a:off x="731520" y="2048256"/>
+            <a:ext cx="2834640" cy="274320"/>
+          </a:xfrm>
+          <a:prstGeom prst="rect">
+            <a:avLst/>
+          </a:prstGeom>
+          <a:noFill/>
+          <a:ln/>
+        </p:spPr>
+        <p:txBody>
+          <a:bodyPr wrap="square" rtlCol="0" anchor="ctr"/>
+          <a:lstStyle/>
+          <a:p>
+            <a:pPr indent="0" marL="0">
+              <a:buNone/>
+            </a:pPr>
+            <a:r>
+              <a:rPr lang="en-US" sz="1350" b="1" dirty="0">
+                <a:solidFill>
+                  <a:srgbClr val="2E8B57"/>
+                </a:solidFill>
+                <a:latin typeface="Microsoft YaHei" pitchFamily="34" charset="0"/>
+                <a:ea typeface="Microsoft YaHei" pitchFamily="34" charset="-122"/>
+                <a:cs typeface="Microsoft YaHei" pitchFamily="34" charset="-120"/>
+              </a:rPr>
+              <a:t>符合 · 多源有分歧</a:t>
+            </a:r>
+            <a:endParaRPr lang="en-US" sz="1350" dirty="0"/>
+          </a:p>
+        </p:txBody>
+      </p:sp>
+      <p:sp>
+        <p:nvSpPr>
+          <p:cNvPr id="8" name="Text 6"/>
+          <p:cNvSpPr txBox="1"/>
+          <p:nvPr/>
+        </p:nvSpPr>
+        <p:spPr>
+          <a:xfrm>
+            <a:off x="731520" y="2304288"/>
+            <a:ext cx="2834640" cy="457200"/>
+          </a:xfrm>
+          <a:prstGeom prst="rect">
+            <a:avLst/>
+          </a:prstGeom>
+          <a:noFill/>
+          <a:ln/>
+        </p:spPr>
+        <p:txBody>
+          <a:bodyPr wrap="square" rtlCol="0" anchor="t"/>
+          <a:lstStyle/>
+          <a:p>
+            <a:pPr indent="0" marL="0">
+              <a:lnSpc>
+                <a:spcPct val="110000"/>
+              </a:lnSpc>
+              <a:buNone/>
+            </a:pPr>
+            <a:r>
+              <a:rPr lang="en-US" sz="950" dirty="0">
+                <a:solidFill>
+                  <a:srgbClr val="6B6B6B"/>
+                </a:solidFill>
+                <a:latin typeface="Microsoft YaHei" pitchFamily="34" charset="0"/>
+                <a:ea typeface="Microsoft YaHei" pitchFamily="34" charset="-122"/>
+                <a:cs typeface="Microsoft YaHei" pitchFamily="34" charset="-120"/>
+              </a:rPr>
+              <a:t>多数来源支持，但有来源测到 CASP1</a:t>
+            </a:r>
+            <a:endParaRPr lang="en-US" sz="950" dirty="0"/>
+          </a:p>
+        </p:txBody>
+      </p:sp>
+      <p:sp>
+        <p:nvSpPr>
+          <p:cNvPr id="9" name="Text 7"/>
+          <p:cNvSpPr txBox="1"/>
+          <p:nvPr/>
+        </p:nvSpPr>
+        <p:spPr>
+          <a:xfrm>
+            <a:off x="3749040" y="2011680"/>
+            <a:ext cx="7772400" cy="658368"/>
+          </a:xfrm>
+          <a:prstGeom prst="rect">
+            <a:avLst/>
+          </a:prstGeom>
+          <a:noFill/>
+          <a:ln/>
+        </p:spPr>
+        <p:txBody>
+          <a:bodyPr wrap="square" rtlCol="0" anchor="t"/>
+          <a:lstStyle/>
+          <a:p>
+            <a:pPr indent="0" marL="0">
+              <a:lnSpc>
+                <a:spcPct val="115000"/>
+              </a:lnSpc>
+              <a:buNone/>
+            </a:pPr>
+            <a:r>
+              <a:rPr lang="en-US" sz="1250" dirty="0">
+                <a:solidFill>
+                  <a:srgbClr val="1A1A1A"/>
+                </a:solidFill>
+                <a:latin typeface="Microsoft YaHei" pitchFamily="34" charset="0"/>
+                <a:ea typeface="Microsoft YaHei" pitchFamily="34" charset="-122"/>
+                <a:cs typeface="Microsoft YaHei" pitchFamily="34" charset="-120"/>
+              </a:rPr>
+              <a:t>人肺 肥大细胞 · 小鼠胰 胰岛 D(δ) 细胞 · 人脑 CGE 源中间神经元</a:t>
+            </a:r>
+            <a:endParaRPr lang="en-US" sz="1250" dirty="0"/>
+          </a:p>
+        </p:txBody>
+      </p:sp>
+      <p:sp>
+        <p:nvSpPr>
+          <p:cNvPr id="10" name="Text 8"/>
+          <p:cNvSpPr txBox="1"/>
+          <p:nvPr/>
+        </p:nvSpPr>
+        <p:spPr>
+          <a:xfrm>
+            <a:off x="731520" y="2798064"/>
+            <a:ext cx="2834640" cy="274320"/>
+          </a:xfrm>
+          <a:prstGeom prst="rect">
+            <a:avLst/>
+          </a:prstGeom>
+          <a:noFill/>
+          <a:ln/>
+        </p:spPr>
+        <p:txBody>
+          <a:bodyPr wrap="square" rtlCol="0" anchor="ctr"/>
+          <a:lstStyle/>
+          <a:p>
+            <a:pPr indent="0" marL="0">
+              <a:buNone/>
+            </a:pPr>
+            <a:r>
+              <a:rPr lang="en-US" sz="1350" b="1" dirty="0">
+                <a:solidFill>
+                  <a:srgbClr val="1F5FA8"/>
+                </a:solidFill>
+                <a:latin typeface="Microsoft YaHei" pitchFamily="34" charset="0"/>
+                <a:ea typeface="Microsoft YaHei" pitchFamily="34" charset="-122"/>
+                <a:cs typeface="Microsoft YaHei" pitchFamily="34" charset="-120"/>
+              </a:rPr>
+              <a:t>符合 · 单一来源</a:t>
+            </a:r>
+            <a:endParaRPr lang="en-US" sz="1350" dirty="0"/>
+          </a:p>
+        </p:txBody>
+      </p:sp>
+      <p:sp>
+        <p:nvSpPr>
+          <p:cNvPr id="11" name="Text 9"/>
+          <p:cNvSpPr txBox="1"/>
+          <p:nvPr/>
+        </p:nvSpPr>
+        <p:spPr>
+          <a:xfrm>
+            <a:off x="731520" y="3054096"/>
+            <a:ext cx="2834640" cy="457200"/>
+          </a:xfrm>
+          <a:prstGeom prst="rect">
+            <a:avLst/>
+          </a:prstGeom>
+          <a:noFill/>
+          <a:ln/>
+        </p:spPr>
+        <p:txBody>
+          <a:bodyPr wrap="square" rtlCol="0" anchor="t"/>
+          <a:lstStyle/>
+          <a:p>
+            <a:pPr indent="0" marL="0">
+              <a:lnSpc>
+                <a:spcPct val="110000"/>
+              </a:lnSpc>
+              <a:buNone/>
+            </a:pPr>
+            <a:r>
+              <a:rPr lang="en-US" sz="950" dirty="0">
+                <a:solidFill>
+                  <a:srgbClr val="6B6B6B"/>
+                </a:solidFill>
+                <a:latin typeface="Microsoft YaHei" pitchFamily="34" charset="0"/>
+                <a:ea typeface="Microsoft YaHei" pitchFamily="34" charset="-122"/>
+                <a:cs typeface="Microsoft YaHei" pitchFamily="34" charset="-120"/>
+              </a:rPr>
+              <a:t>仅 1 个来源支持</a:t>
+            </a:r>
+            <a:endParaRPr lang="en-US" sz="950" dirty="0"/>
+          </a:p>
+        </p:txBody>
+      </p:sp>
+      <p:sp>
+        <p:nvSpPr>
+          <p:cNvPr id="12" name="Text 10"/>
+          <p:cNvSpPr txBox="1"/>
+          <p:nvPr/>
+        </p:nvSpPr>
+        <p:spPr>
+          <a:xfrm>
+            <a:off x="3749040" y="2761488"/>
+            <a:ext cx="7772400" cy="658368"/>
+          </a:xfrm>
+          <a:prstGeom prst="rect">
+            <a:avLst/>
+          </a:prstGeom>
+          <a:noFill/>
+          <a:ln/>
+        </p:spPr>
+        <p:txBody>
+          <a:bodyPr wrap="square" rtlCol="0" anchor="t"/>
+          <a:lstStyle/>
+          <a:p>
+            <a:pPr indent="0" marL="0">
+              <a:lnSpc>
+                <a:spcPct val="115000"/>
+              </a:lnSpc>
+              <a:buNone/>
+            </a:pPr>
+            <a:r>
+              <a:rPr lang="en-US" sz="1250" dirty="0">
+                <a:solidFill>
+                  <a:srgbClr val="1A1A1A"/>
+                </a:solidFill>
+                <a:latin typeface="Microsoft YaHei" pitchFamily="34" charset="0"/>
+                <a:ea typeface="Microsoft YaHei" pitchFamily="34" charset="-122"/>
+                <a:cs typeface="Microsoft YaHei" pitchFamily="34" charset="-120"/>
+              </a:rPr>
+              <a:t>人肺 AT1 肺泡上皮 · 人胰 胰腺腺泡细胞 · 小鼠胰 胰导管细胞</a:t>
+            </a:r>
+            <a:endParaRPr lang="en-US" sz="1250" dirty="0"/>
+          </a:p>
+        </p:txBody>
+      </p:sp>
+      <p:sp>
+        <p:nvSpPr>
+          <p:cNvPr id="13" name="Text 11"/>
+          <p:cNvSpPr txBox="1"/>
+          <p:nvPr/>
+        </p:nvSpPr>
+        <p:spPr>
+          <a:xfrm>
+            <a:off x="731520" y="3547872"/>
+            <a:ext cx="2834640" cy="274320"/>
+          </a:xfrm>
+          <a:prstGeom prst="rect">
+            <a:avLst/>
+          </a:prstGeom>
+          <a:noFill/>
+          <a:ln/>
+        </p:spPr>
+        <p:txBody>
+          <a:bodyPr wrap="square" rtlCol="0" anchor="ctr"/>
+          <a:lstStyle/>
+          <a:p>
+            <a:pPr indent="0" marL="0">
+              <a:buNone/>
+            </a:pPr>
+            <a:r>
+              <a:rPr lang="en-US" sz="1350" b="1" dirty="0">
+                <a:solidFill>
+                  <a:srgbClr val="4C87C4"/>
+                </a:solidFill>
+                <a:latin typeface="Microsoft YaHei" pitchFamily="34" charset="0"/>
+                <a:ea typeface="Microsoft YaHei" pitchFamily="34" charset="-122"/>
+                <a:cs typeface="Microsoft YaHei" pitchFamily="34" charset="-120"/>
+              </a:rPr>
+              <a:t>符合 · 无参考可查</a:t>
+            </a:r>
+            <a:endParaRPr lang="en-US" sz="1350" dirty="0"/>
+          </a:p>
+        </p:txBody>
+      </p:sp>
+      <p:sp>
+        <p:nvSpPr>
+          <p:cNvPr id="14" name="Text 12"/>
+          <p:cNvSpPr txBox="1"/>
+          <p:nvPr/>
+        </p:nvSpPr>
+        <p:spPr>
+          <a:xfrm>
+            <a:off x="731520" y="3803904"/>
+            <a:ext cx="2834640" cy="457200"/>
+          </a:xfrm>
+          <a:prstGeom prst="rect">
+            <a:avLst/>
+          </a:prstGeom>
+          <a:noFill/>
+          <a:ln/>
+        </p:spPr>
+        <p:txBody>
+          <a:bodyPr wrap="square" rtlCol="0" anchor="t"/>
+          <a:lstStyle/>
+          <a:p>
+            <a:pPr indent="0" marL="0">
+              <a:lnSpc>
+                <a:spcPct val="110000"/>
+              </a:lnSpc>
+              <a:buNone/>
+            </a:pPr>
+            <a:r>
+              <a:rPr lang="en-US" sz="950" dirty="0">
+                <a:solidFill>
+                  <a:srgbClr val="6B6B6B"/>
+                </a:solidFill>
+                <a:latin typeface="Microsoft YaHei" pitchFamily="34" charset="0"/>
+                <a:ea typeface="Microsoft YaHei" pitchFamily="34" charset="-122"/>
+                <a:cs typeface="Microsoft YaHei" pitchFamily="34" charset="-120"/>
+              </a:rPr>
+              <a:t>无分选参考，仅本数据方向相符</a:t>
+            </a:r>
+            <a:endParaRPr lang="en-US" sz="950" dirty="0"/>
+          </a:p>
+        </p:txBody>
+      </p:sp>
+      <p:sp>
+        <p:nvSpPr>
+          <p:cNvPr id="15" name="Text 13"/>
+          <p:cNvSpPr txBox="1"/>
+          <p:nvPr/>
+        </p:nvSpPr>
+        <p:spPr>
+          <a:xfrm>
+            <a:off x="3749040" y="3511296"/>
+            <a:ext cx="7772400" cy="658368"/>
+          </a:xfrm>
+          <a:prstGeom prst="rect">
+            <a:avLst/>
+          </a:prstGeom>
+          <a:noFill/>
+          <a:ln/>
+        </p:spPr>
+        <p:txBody>
+          <a:bodyPr wrap="square" rtlCol="0" anchor="t"/>
+          <a:lstStyle/>
+          <a:p>
+            <a:pPr indent="0" marL="0">
+              <a:lnSpc>
+                <a:spcPct val="115000"/>
+              </a:lnSpc>
+              <a:buNone/>
+            </a:pPr>
+            <a:r>
+              <a:rPr lang="en-US" sz="1250" dirty="0">
+                <a:solidFill>
+                  <a:srgbClr val="1A1A1A"/>
+                </a:solidFill>
+                <a:latin typeface="Microsoft YaHei" pitchFamily="34" charset="0"/>
+                <a:ea typeface="Microsoft YaHei" pitchFamily="34" charset="-122"/>
+                <a:cs typeface="Microsoft YaHei" pitchFamily="34" charset="-120"/>
+              </a:rPr>
+              <a:t>人脑 血管软脑膜细胞 · 人肝 巨核-红系祖细胞 · 人肺 肺泡外膜成纤维 · 小鼠脑 Cajal-Retzius 神经元</a:t>
+            </a:r>
+            <a:endParaRPr lang="en-US" sz="1250" dirty="0"/>
+          </a:p>
+        </p:txBody>
+      </p:sp>
+      <p:sp>
+        <p:nvSpPr>
+          <p:cNvPr id="16" name="Text 14"/>
+          <p:cNvSpPr txBox="1"/>
+          <p:nvPr/>
+        </p:nvSpPr>
+        <p:spPr>
+          <a:xfrm>
+            <a:off x="731520" y="4297680"/>
+            <a:ext cx="2834640" cy="274320"/>
+          </a:xfrm>
+          <a:prstGeom prst="rect">
+            <a:avLst/>
+          </a:prstGeom>
+          <a:noFill/>
+          <a:ln/>
+        </p:spPr>
+        <p:txBody>
+          <a:bodyPr wrap="square" rtlCol="0" anchor="ctr"/>
+          <a:lstStyle/>
+          <a:p>
+            <a:pPr indent="0" marL="0">
+              <a:buNone/>
+            </a:pPr>
+            <a:r>
+              <a:rPr lang="en-US" sz="1350" b="1" dirty="0">
+                <a:solidFill>
+                  <a:srgbClr val="9A2B2B"/>
+                </a:solidFill>
+                <a:latin typeface="Microsoft YaHei" pitchFamily="34" charset="0"/>
+                <a:ea typeface="Microsoft YaHei" pitchFamily="34" charset="-122"/>
+                <a:cs typeface="Microsoft YaHei" pitchFamily="34" charset="-120"/>
+              </a:rPr>
+              <a:t>不符合 · 多源一致</a:t>
+            </a:r>
+            <a:endParaRPr lang="en-US" sz="1350" dirty="0"/>
+          </a:p>
+        </p:txBody>
+      </p:sp>
+      <p:sp>
+        <p:nvSpPr>
+          <p:cNvPr id="17" name="Text 15"/>
+          <p:cNvSpPr txBox="1"/>
+          <p:nvPr/>
+        </p:nvSpPr>
+        <p:spPr>
+          <a:xfrm>
+            <a:off x="731520" y="4553712"/>
+            <a:ext cx="2834640" cy="457200"/>
+          </a:xfrm>
+          <a:prstGeom prst="rect">
+            <a:avLst/>
+          </a:prstGeom>
+          <a:noFill/>
+          <a:ln/>
+        </p:spPr>
+        <p:txBody>
+          <a:bodyPr wrap="square" rtlCol="0" anchor="t"/>
+          <a:lstStyle/>
+          <a:p>
+            <a:pPr indent="0" marL="0">
+              <a:lnSpc>
+                <a:spcPct val="110000"/>
+              </a:lnSpc>
+              <a:buNone/>
+            </a:pPr>
+            <a:r>
+              <a:rPr lang="en-US" sz="950" dirty="0">
+                <a:solidFill>
+                  <a:srgbClr val="6B6B6B"/>
+                </a:solidFill>
+                <a:latin typeface="Microsoft YaHei" pitchFamily="34" charset="0"/>
+                <a:ea typeface="Microsoft YaHei" pitchFamily="34" charset="-122"/>
+                <a:cs typeface="Microsoft YaHei" pitchFamily="34" charset="-120"/>
+              </a:rPr>
+              <a:t>参考层 CASP1 确实可测或 ≥ IL18</a:t>
+            </a:r>
+            <a:endParaRPr lang="en-US" sz="950" dirty="0"/>
+          </a:p>
+        </p:txBody>
+      </p:sp>
+      <p:sp>
+        <p:nvSpPr>
+          <p:cNvPr id="18" name="Text 16"/>
+          <p:cNvSpPr txBox="1"/>
+          <p:nvPr/>
+        </p:nvSpPr>
+        <p:spPr>
+          <a:xfrm>
+            <a:off x="3749040" y="4261104"/>
+            <a:ext cx="7772400" cy="658368"/>
+          </a:xfrm>
+          <a:prstGeom prst="rect">
+            <a:avLst/>
+          </a:prstGeom>
+          <a:noFill/>
+          <a:ln/>
+        </p:spPr>
+        <p:txBody>
+          <a:bodyPr wrap="square" rtlCol="0" anchor="t"/>
+          <a:lstStyle/>
+          <a:p>
+            <a:pPr indent="0" marL="0">
+              <a:lnSpc>
+                <a:spcPct val="115000"/>
+              </a:lnSpc>
+              <a:buNone/>
+            </a:pPr>
+            <a:r>
+              <a:rPr lang="en-US" sz="1250" dirty="0">
+                <a:solidFill>
+                  <a:srgbClr val="1A1A1A"/>
+                </a:solidFill>
+                <a:latin typeface="Microsoft YaHei" pitchFamily="34" charset="0"/>
+                <a:ea typeface="Microsoft YaHei" pitchFamily="34" charset="-122"/>
+                <a:cs typeface="Microsoft YaHei" pitchFamily="34" charset="-120"/>
+              </a:rPr>
+              <a:t>小鼠肺 肺泡巨噬 · 人肺 气道多纤毛上皮 · 小鼠脑 小胶质/CNS巨噬 · 人肺 纤毛上皮 · 人肝 嗜碱粒细胞 · 人肺 树突状细胞</a:t>
+            </a:r>
+            <a:endParaRPr lang="en-US" sz="1250" dirty="0"/>
+          </a:p>
+        </p:txBody>
+      </p:sp>
+      <p:sp>
+        <p:nvSpPr>
+          <p:cNvPr id="19" name="Text 17"/>
+          <p:cNvSpPr txBox="1"/>
+          <p:nvPr/>
+        </p:nvSpPr>
+        <p:spPr>
+          <a:xfrm>
+            <a:off x="731520" y="5047488"/>
+            <a:ext cx="2834640" cy="274320"/>
+          </a:xfrm>
+          <a:prstGeom prst="rect">
+            <a:avLst/>
+          </a:prstGeom>
+          <a:noFill/>
+          <a:ln/>
+        </p:spPr>
+        <p:txBody>
+          <a:bodyPr wrap="square" rtlCol="0" anchor="ctr"/>
+          <a:lstStyle/>
+          <a:p>
+            <a:pPr indent="0" marL="0">
+              <a:buNone/>
+            </a:pPr>
+            <a:r>
+              <a:rPr lang="en-US" sz="1350" b="1" dirty="0">
+                <a:solidFill>
+                  <a:srgbClr val="B5564E"/>
+                </a:solidFill>
+                <a:latin typeface="Microsoft YaHei" pitchFamily="34" charset="0"/>
+                <a:ea typeface="Microsoft YaHei" pitchFamily="34" charset="-122"/>
+                <a:cs typeface="Microsoft YaHei" pitchFamily="34" charset="-120"/>
+              </a:rPr>
+              <a:t>不符合 · 无参考可查</a:t>
+            </a:r>
+            <a:endParaRPr lang="en-US" sz="1350" dirty="0"/>
+          </a:p>
+        </p:txBody>
+      </p:sp>
+      <p:sp>
+        <p:nvSpPr>
+          <p:cNvPr id="20" name="Text 18"/>
+          <p:cNvSpPr txBox="1"/>
+          <p:nvPr/>
+        </p:nvSpPr>
+        <p:spPr>
+          <a:xfrm>
+            <a:off x="731520" y="5303520"/>
+            <a:ext cx="2834640" cy="457200"/>
+          </a:xfrm>
+          <a:prstGeom prst="rect">
+            <a:avLst/>
+          </a:prstGeom>
+          <a:noFill/>
+          <a:ln/>
+        </p:spPr>
+        <p:txBody>
+          <a:bodyPr wrap="square" rtlCol="0" anchor="t"/>
+          <a:lstStyle/>
+          <a:p>
+            <a:pPr indent="0" marL="0">
+              <a:lnSpc>
+                <a:spcPct val="110000"/>
+              </a:lnSpc>
+              <a:buNone/>
+            </a:pPr>
+            <a:r>
+              <a:rPr lang="en-US" sz="950" dirty="0">
+                <a:solidFill>
+                  <a:srgbClr val="6B6B6B"/>
+                </a:solidFill>
+                <a:latin typeface="Microsoft YaHei" pitchFamily="34" charset="0"/>
+                <a:ea typeface="Microsoft YaHei" pitchFamily="34" charset="-122"/>
+                <a:cs typeface="Microsoft YaHei" pitchFamily="34" charset="-120"/>
+              </a:rPr>
+              <a:t>无参考，本数据自身即方向相反</a:t>
+            </a:r>
+            <a:endParaRPr lang="en-US" sz="950" dirty="0"/>
+          </a:p>
+        </p:txBody>
+      </p:sp>
+      <p:sp>
+        <p:nvSpPr>
+          <p:cNvPr id="21" name="Text 19"/>
+          <p:cNvSpPr txBox="1"/>
+          <p:nvPr/>
+        </p:nvSpPr>
+        <p:spPr>
+          <a:xfrm>
+            <a:off x="3749040" y="5010912"/>
+            <a:ext cx="7772400" cy="658368"/>
+          </a:xfrm>
+          <a:prstGeom prst="rect">
+            <a:avLst/>
+          </a:prstGeom>
+          <a:noFill/>
+          <a:ln/>
+        </p:spPr>
+        <p:txBody>
+          <a:bodyPr wrap="square" rtlCol="0" anchor="t"/>
+          <a:lstStyle/>
+          <a:p>
+            <a:pPr indent="0" marL="0">
+              <a:lnSpc>
+                <a:spcPct val="115000"/>
+              </a:lnSpc>
+              <a:buNone/>
+            </a:pPr>
+            <a:r>
+              <a:rPr lang="en-US" sz="1250" dirty="0">
+                <a:solidFill>
+                  <a:srgbClr val="1A1A1A"/>
+                </a:solidFill>
+                <a:latin typeface="Microsoft YaHei" pitchFamily="34" charset="0"/>
+                <a:ea typeface="Microsoft YaHei" pitchFamily="34" charset="-122"/>
+                <a:cs typeface="Microsoft YaHei" pitchFamily="34" charset="-120"/>
+              </a:rPr>
+              <a:t>人肝 CD56bright NK</a:t>
+            </a:r>
+            <a:endParaRPr lang="en-US" sz="1250" dirty="0"/>
+          </a:p>
+        </p:txBody>
+      </p:sp>
+      <p:sp>
+        <p:nvSpPr>
+          <p:cNvPr id="22" name="Text 20"/>
+          <p:cNvSpPr txBox="1"/>
+          <p:nvPr/>
+        </p:nvSpPr>
+        <p:spPr>
+          <a:xfrm>
+            <a:off x="731520" y="5715000"/>
+            <a:ext cx="10789920" cy="548640"/>
+          </a:xfrm>
+          <a:prstGeom prst="rect">
+            <a:avLst/>
+          </a:prstGeom>
+          <a:noFill/>
+          <a:ln/>
+        </p:spPr>
+        <p:txBody>
+          <a:bodyPr wrap="square" rtlCol="0" anchor="ctr"/>
+          <a:lstStyle/>
+          <a:p>
+            <a:pPr indent="0" marL="0">
+              <a:lnSpc>
+                <a:spcPct val="120000"/>
+              </a:lnSpc>
+              <a:buNone/>
+            </a:pPr>
+            <a:r>
+              <a:rPr lang="en-US" sz="1150" dirty="0">
+                <a:solidFill>
+                  <a:srgbClr val="1A1A1A"/>
+                </a:solidFill>
+                <a:latin typeface="Microsoft YaHei" pitchFamily="34" charset="0"/>
+                <a:ea typeface="Microsoft YaHei" pitchFamily="34" charset="-122"/>
+                <a:cs typeface="Microsoft YaHei" pitchFamily="34" charset="-120"/>
+              </a:rPr>
+              <a:t>两条必须一起说的边界：小鼠星形胶质的结论仅限皮层与海马（小脑 Bergmann 胶质与脊髓星形胶质 Casp1 明确表达）；人的 PV / L5 ET 神经元结论在小鼠没有对应物（小鼠这两类 Casp1 同样近零，但 Il18 不高）。</a:t>
+            </a:r>
+            <a:endParaRPr lang="en-US" sz="1150" dirty="0"/>
+          </a:p>
+        </p:txBody>
+      </p:sp>
+      <p:sp>
+        <p:nvSpPr>
+          <p:cNvPr id="23" name="Text 21"/>
+          <p:cNvSpPr txBox="1"/>
+          <p:nvPr/>
+        </p:nvSpPr>
+        <p:spPr>
+          <a:xfrm>
+            <a:off x="731520" y="6355080"/>
+            <a:ext cx="10789920" cy="320040"/>
+          </a:xfrm>
+          <a:prstGeom prst="rect">
+            <a:avLst/>
+          </a:prstGeom>
+          <a:noFill/>
+          <a:ln/>
+        </p:spPr>
+        <p:txBody>
+          <a:bodyPr wrap="square" rtlCol="0" anchor="ctr"/>
+          <a:lstStyle/>
+          <a:p>
+            <a:pPr indent="0" marL="0">
+              <a:buNone/>
+            </a:pPr>
+            <a:r>
+              <a:rPr lang="en-US" sz="1050" dirty="0">
+                <a:solidFill>
+                  <a:srgbClr val="9AA0A6"/>
+                </a:solidFill>
+                <a:latin typeface="Microsoft YaHei" pitchFamily="34" charset="0"/>
+                <a:ea typeface="Microsoft YaHei" pitchFamily="34" charset="-122"/>
+                <a:cs typeface="Microsoft YaHei" pitchFamily="34" charset="-120"/>
+              </a:rPr>
+              <a:t>检出率 = 原始计数 ≥1 的细胞数 ÷ 分析细胞数（合并全部供体）。29 个分层，人与小鼠分开，静息基线；未做环境 RNA 校正。</a:t>
+            </a:r>
+            <a:endParaRPr lang="en-US" sz="1050" dirty="0"/>
+          </a:p>
+        </p:txBody>
+      </p:sp>
+    </p:spTree>
+  </p:cSld>
+  <p:clrMapOvr>
+    <a:masterClrMapping/>
+  </p:clrMapOvr>
+</p:sld>
+</file>
+
 <file path=ppt/slides/slide2.xml><?xml version="1.0" encoding="utf-8"?>
 <p:sld xmlns:a="http://schemas.openxmlformats.org/drawingml/2006/main" xmlns:r="http://schemas.openxmlformats.org/officeDocument/2006/relationships" xmlns:p="http://schemas.openxmlformats.org/presentationml/2006/main">
   <p:cSld name="Slide 2">
@@ -2701,8 +4855,8 @@
         </p:blipFill>
         <p:spPr>
           <a:xfrm>
-            <a:off x="1107604" y="1051560"/>
-            <a:ext cx="9973744" cy="5349240"/>
+            <a:off x="1576455" y="1051560"/>
+            <a:ext cx="9036042" cy="4846320"/>
           </a:xfrm>
           <a:prstGeom prst="rect">
             <a:avLst/>
@@ -2717,8 +4871,8 @@
         </p:nvSpPr>
         <p:spPr>
           <a:xfrm>
-            <a:off x="640080" y="6355080"/>
-            <a:ext cx="10972800" cy="347472"/>
+            <a:off x="640080" y="5943600"/>
+            <a:ext cx="10927080" cy="786384"/>
           </a:xfrm>
           <a:prstGeom prst="rect">
             <a:avLst/>
@@ -2727,10 +4881,13 @@
           <a:ln/>
         </p:spPr>
         <p:txBody>
-          <a:bodyPr wrap="square" rtlCol="0" anchor="ctr"/>
+          <a:bodyPr wrap="square" rtlCol="0" anchor="t"/>
           <a:lstStyle/>
           <a:p>
             <a:pPr indent="0" marL="0">
+              <a:lnSpc>
+                <a:spcPct val="120000"/>
+              </a:lnSpc>
               <a:buNone/>
             </a:pPr>
             <a:r>
@@ -2844,8 +5001,8 @@
         </p:nvSpPr>
         <p:spPr>
           <a:xfrm>
-            <a:off x="640080" y="6355080"/>
-            <a:ext cx="10972800" cy="347472"/>
+            <a:off x="640080" y="5943600"/>
+            <a:ext cx="10927080" cy="786384"/>
           </a:xfrm>
           <a:prstGeom prst="rect">
             <a:avLst/>
@@ -2854,10 +5011,13 @@
           <a:ln/>
         </p:spPr>
         <p:txBody>
-          <a:bodyPr wrap="square" rtlCol="0" anchor="ctr"/>
+          <a:bodyPr wrap="square" rtlCol="0" anchor="t"/>
           <a:lstStyle/>
           <a:p>
             <a:pPr indent="0" marL="0">
+              <a:lnSpc>
+                <a:spcPct val="120000"/>
+              </a:lnSpc>
               <a:buNone/>
             </a:pPr>
             <a:r>
@@ -2933,7 +5093,7 @@
                 <a:ea typeface="Microsoft YaHei" pitchFamily="34" charset="-122"/>
                 <a:cs typeface="Microsoft YaHei" pitchFamily="34" charset="-120"/>
               </a:rPr>
-              <a:t>人脑（单细胞）：IL18 / CASP1 / CASP3 三基因</a:t>
+              <a:t>人肺（HLCA 单细胞）：IL18 / CASP1 / CASP3 三基因</a:t>
             </a:r>
             <a:endParaRPr lang="en-US" sz="2400" dirty="0"/>
           </a:p>
@@ -2941,7 +5101,7 @@
       </p:sp>
       <p:pic>
         <p:nvPicPr>
-          <p:cNvPr id="3" name="Image 0" descr="/home/user/aaa/il18_casp5organ/figures/human/brain_cell_dots.png">    </p:cNvPr>
+          <p:cNvPr id="3" name="Image 0" descr="/home/user/aaa/il18_casp5organ/figures/human/lung_dots.png">    </p:cNvPr>
           <p:cNvPicPr>
             <a:picLocks noChangeAspect="1"/>
           </p:cNvPicPr>
@@ -2955,8 +5115,8 @@
         </p:blipFill>
         <p:spPr>
           <a:xfrm>
-            <a:off x="687092" y="1051560"/>
-            <a:ext cx="10814768" cy="5349240"/>
+            <a:off x="640080" y="1051560"/>
+            <a:ext cx="10908792" cy="4846320"/>
           </a:xfrm>
           <a:prstGeom prst="rect">
             <a:avLst/>
@@ -2971,8 +5131,8 @@
         </p:nvSpPr>
         <p:spPr>
           <a:xfrm>
-            <a:off x="640080" y="6355080"/>
-            <a:ext cx="10972800" cy="347472"/>
+            <a:off x="640080" y="5943600"/>
+            <a:ext cx="10927080" cy="786384"/>
           </a:xfrm>
           <a:prstGeom prst="rect">
             <a:avLst/>
@@ -2981,10 +5141,13 @@
           <a:ln/>
         </p:spPr>
         <p:txBody>
-          <a:bodyPr wrap="square" rtlCol="0" anchor="ctr"/>
+          <a:bodyPr wrap="square" rtlCol="0" anchor="t"/>
           <a:lstStyle/>
           <a:p>
             <a:pPr indent="0" marL="0">
+              <a:lnSpc>
+                <a:spcPct val="120000"/>
+              </a:lnSpc>
               <a:buNone/>
             </a:pPr>
             <a:r>
@@ -2996,7 +5159,7 @@
                 <a:ea typeface="Microsoft YaHei" pitchFamily="34" charset="-122"/>
                 <a:cs typeface="Microsoft YaHei" pitchFamily="34" charset="-120"/>
               </a:rPr>
-              <a:t>Allen HVS 真单细胞、78 供体；该分层全部 18 个细胞类型一律列出。PV 与 L5 ET 的 CASP1 近零而 CASP3 为 27.9% 与 34.3%，即不满足「CASP3 最低档」这一排除项。</a:t>
+              <a:t>肥大细胞 IL18 34.9% 而 CASP1 2.60%（138/5299），是人肺唯一两项都成立的一档。IL18 最高的三类反而不符合：CD1c+ 树突状 52.8% 对 CASP1 32.3%、间皮 51.8% 对 18.3%、肺泡巨噬 50.7% 对 57.9%。该分层 39 个细胞类型，本页按 IL18 取前 20。</a:t>
             </a:r>
             <a:endParaRPr lang="en-US" sz="1050" dirty="0"/>
           </a:p>
@@ -3060,7 +5223,7 @@
                 <a:ea typeface="Microsoft YaHei" pitchFamily="34" charset="-122"/>
                 <a:cs typeface="Microsoft YaHei" pitchFamily="34" charset="-120"/>
               </a:rPr>
-              <a:t>小鼠脑（单细胞）：IL18 / CASP1 / CASP3 三基因</a:t>
+              <a:t>人肝（Guilliams 单细胞）：IL18 / CASP1 / CASP3 三基因</a:t>
             </a:r>
             <a:endParaRPr lang="en-US" sz="2400" dirty="0"/>
           </a:p>
@@ -3068,7 +5231,7 @@
       </p:sp>
       <p:pic>
         <p:nvPicPr>
-          <p:cNvPr id="3" name="Image 0" descr="/home/user/aaa/il18_casp5organ/figures/mouse/brain_cell_dots.png">    </p:cNvPr>
+          <p:cNvPr id="3" name="Image 0" descr="/home/user/aaa/il18_casp5organ/figures/human/liver_dots.png">    </p:cNvPr>
           <p:cNvPicPr>
             <a:picLocks noChangeAspect="1"/>
           </p:cNvPicPr>
@@ -3082,8 +5245,8 @@
         </p:blipFill>
         <p:spPr>
           <a:xfrm>
-            <a:off x="1101298" y="1188720"/>
-            <a:ext cx="9986356" cy="4846320"/>
+            <a:off x="640080" y="1051560"/>
+            <a:ext cx="10908792" cy="4846320"/>
           </a:xfrm>
           <a:prstGeom prst="rect">
             <a:avLst/>
@@ -3098,8 +5261,8 @@
         </p:nvSpPr>
         <p:spPr>
           <a:xfrm>
-            <a:off x="640080" y="6355080"/>
-            <a:ext cx="10972800" cy="347472"/>
+            <a:off x="640080" y="5943600"/>
+            <a:ext cx="10927080" cy="786384"/>
           </a:xfrm>
           <a:prstGeom prst="rect">
             <a:avLst/>
@@ -3108,10 +5271,13 @@
           <a:ln/>
         </p:spPr>
         <p:txBody>
-          <a:bodyPr wrap="square" rtlCol="0" anchor="ctr"/>
+          <a:bodyPr wrap="square" rtlCol="0" anchor="t"/>
           <a:lstStyle/>
           <a:p>
             <a:pPr indent="0" marL="0">
+              <a:lnSpc>
+                <a:spcPct val="120000"/>
+              </a:lnSpc>
               <a:buNone/>
             </a:pPr>
             <a:r>
@@ -3123,7 +5289,7 @@
                 <a:ea typeface="Microsoft YaHei" pitchFamily="34" charset="-122"/>
                 <a:cs typeface="Microsoft YaHei" pitchFamily="34" charset="-120"/>
               </a:rPr>
-              <a:t>星形胶质 IL18 56.7% 而 CASP1 仅 2/3766；小胶质 IL18 20.5% 但 CASP1 15/818 = 1.83%，是全脑最高的一档。</a:t>
+              <a:t>11 个细胞类型无一符合。IL18 最高的巨噬 53.1% 对 CASP1 38.5%，浆细胞样树突状 37.7% 对 42.8%，单核 20.9% 对 52.3%——肝的 IL18 信号集中在髓系，而髓系正是 CASP1 最高的一类。</a:t>
             </a:r>
             <a:endParaRPr lang="en-US" sz="1050" dirty="0"/>
           </a:p>
@@ -3162,8 +5328,8 @@
         </p:nvSpPr>
         <p:spPr>
           <a:xfrm>
-            <a:off x="640080" y="365760"/>
-            <a:ext cx="5486400" cy="548640"/>
+            <a:off x="640080" y="411480"/>
+            <a:ext cx="10972800" cy="640080"/>
           </a:xfrm>
           <a:prstGeom prst="rect">
             <a:avLst/>
@@ -3179,7 +5345,7 @@
               <a:buNone/>
             </a:pPr>
             <a:r>
-              <a:rPr lang="en-US" sz="2600" b="1" dirty="0">
+              <a:rPr lang="en-US" sz="2400" b="1" dirty="0">
                 <a:solidFill>
                   <a:srgbClr val="1A1A1A"/>
                 </a:solidFill>
@@ -3187,22 +5353,46 @@
                 <a:ea typeface="Microsoft YaHei" pitchFamily="34" charset="-122"/>
                 <a:cs typeface="Microsoft YaHei" pitchFamily="34" charset="-120"/>
               </a:rPr>
-              <a:t>结论</a:t>
-            </a:r>
-            <a:endParaRPr lang="en-US" sz="2600" dirty="0"/>
-          </a:p>
-        </p:txBody>
-      </p:sp>
-      <p:sp>
-        <p:nvSpPr>
-          <p:cNvPr id="3" name="Text 1"/>
+              <a:t>人胰（48 供体胰岛单细胞）：IL18 / CASP1 / CASP3 三基因</a:t>
+            </a:r>
+            <a:endParaRPr lang="en-US" sz="2400" dirty="0"/>
+          </a:p>
+        </p:txBody>
+      </p:sp>
+      <p:pic>
+        <p:nvPicPr>
+          <p:cNvPr id="3" name="Image 0" descr="/home/user/aaa/il18_casp5organ/figures/human/pancreas_dots.png">    </p:cNvPr>
+          <p:cNvPicPr>
+            <a:picLocks noChangeAspect="1"/>
+          </p:cNvPicPr>
+          <p:nvPr/>
+        </p:nvPicPr>
+        <p:blipFill>
+          <a:blip r:embed="rId1"/>
+          <a:stretch>
+            <a:fillRect/>
+          </a:stretch>
+        </p:blipFill>
+        <p:spPr>
+          <a:xfrm>
+            <a:off x="640080" y="1051560"/>
+            <a:ext cx="10908792" cy="4846320"/>
+          </a:xfrm>
+          <a:prstGeom prst="rect">
+            <a:avLst/>
+          </a:prstGeom>
+        </p:spPr>
+      </p:pic>
+      <p:sp>
+        <p:nvSpPr>
+          <p:cNvPr id="4" name="Text 1"/>
           <p:cNvSpPr txBox="1"/>
           <p:nvPr/>
         </p:nvSpPr>
         <p:spPr>
           <a:xfrm>
-            <a:off x="640080" y="914400"/>
-            <a:ext cx="10972800" cy="320040"/>
+            <a:off x="640080" y="5943600"/>
+            <a:ext cx="10927080" cy="786384"/>
           </a:xfrm>
           <a:prstGeom prst="rect">
             <a:avLst/>
@@ -3211,14 +5401,17 @@
           <a:ln/>
         </p:spPr>
         <p:txBody>
-          <a:bodyPr wrap="square" rtlCol="0" anchor="ctr"/>
+          <a:bodyPr wrap="square" rtlCol="0" anchor="t"/>
           <a:lstStyle/>
           <a:p>
             <a:pPr indent="0" marL="0">
+              <a:lnSpc>
+                <a:spcPct val="120000"/>
+              </a:lnSpc>
               <a:buNone/>
             </a:pPr>
             <a:r>
-              <a:rPr lang="en-US" sz="1200" dirty="0">
+              <a:rPr lang="en-US" sz="1050" dirty="0">
                 <a:solidFill>
                   <a:srgbClr val="6B6B6B"/>
                 </a:solidFill>
@@ -3226,22 +5419,47 @@
                 <a:ea typeface="Microsoft YaHei" pitchFamily="34" charset="-122"/>
                 <a:cs typeface="Microsoft YaHei" pitchFamily="34" charset="-120"/>
               </a:rPr>
-              <a:t>「方向」= 是否符合「IL18 高 + CASP1 低」这一前提；「证据」= 支持该方向的独立参考来源有多少、是否一致。两者分开看。</a:t>
-            </a:r>
-            <a:endParaRPr lang="en-US" sz="1200" dirty="0"/>
-          </a:p>
-        </p:txBody>
-      </p:sp>
-      <p:sp>
-        <p:nvSpPr>
-          <p:cNvPr id="4" name="Text 2"/>
+              <a:t>胰腺腺泡细胞 IL18 30.3%（1301/4288）而 CASP1 3.45%，是人胰唯一方向相符者，且被分层内相对规则漏掉、由参考层补回。同页肥大细胞 IL18 34.9% 但此分层 CASP1 10.4%，与人肺的肥大细胞不是同一回事。</a:t>
+            </a:r>
+            <a:endParaRPr lang="en-US" sz="1050" dirty="0"/>
+          </a:p>
+        </p:txBody>
+      </p:sp>
+    </p:spTree>
+  </p:cSld>
+  <p:clrMapOvr>
+    <a:masterClrMapping/>
+  </p:clrMapOvr>
+</p:sld>
+</file>
+
+<file path=ppt/slides/slide7.xml><?xml version="1.0" encoding="utf-8"?>
+<p:sld xmlns:a="http://schemas.openxmlformats.org/drawingml/2006/main" xmlns:r="http://schemas.openxmlformats.org/officeDocument/2006/relationships" xmlns:p="http://schemas.openxmlformats.org/presentationml/2006/main">
+  <p:cSld name="Slide 7">
+    <p:spTree>
+      <p:nvGrpSpPr>
+        <p:cNvPr id="1" name=""/>
+        <p:cNvGrpSpPr/>
+        <p:nvPr/>
+      </p:nvGrpSpPr>
+      <p:grpSpPr>
+        <a:xfrm>
+          <a:off x="0" y="0"/>
+          <a:ext cx="0" cy="0"/>
+          <a:chOff x="0" y="0"/>
+          <a:chExt cx="0" cy="0"/>
+        </a:xfrm>
+      </p:grpSpPr>
+      <p:sp>
+        <p:nvSpPr>
+          <p:cNvPr id="2" name="Text 0"/>
           <p:cNvSpPr txBox="1"/>
           <p:nvPr/>
         </p:nvSpPr>
         <p:spPr>
           <a:xfrm>
-            <a:off x="731520" y="1298448"/>
-            <a:ext cx="2834640" cy="274320"/>
+            <a:off x="640080" y="411480"/>
+            <a:ext cx="10972800" cy="640080"/>
           </a:xfrm>
           <a:prstGeom prst="rect">
             <a:avLst/>
@@ -3257,30 +5475,54 @@
               <a:buNone/>
             </a:pPr>
             <a:r>
-              <a:rPr lang="en-US" sz="1350" b="1" dirty="0">
+              <a:rPr lang="en-US" sz="2400" b="1" dirty="0">
                 <a:solidFill>
-                  <a:srgbClr val="1B7A43"/>
+                  <a:srgbClr val="1A1A1A"/>
                 </a:solidFill>
                 <a:latin typeface="Microsoft YaHei" pitchFamily="34" charset="0"/>
                 <a:ea typeface="Microsoft YaHei" pitchFamily="34" charset="-122"/>
                 <a:cs typeface="Microsoft YaHei" pitchFamily="34" charset="-120"/>
               </a:rPr>
-              <a:t>符合 · 多源一致</a:t>
-            </a:r>
-            <a:endParaRPr lang="en-US" sz="1350" dirty="0"/>
-          </a:p>
-        </p:txBody>
-      </p:sp>
-      <p:sp>
-        <p:nvSpPr>
-          <p:cNvPr id="5" name="Text 3"/>
+              <a:t>人脑（Allen HVS 单细胞）：IL18 / CASP1 / CASP3 三基因</a:t>
+            </a:r>
+            <a:endParaRPr lang="en-US" sz="2400" dirty="0"/>
+          </a:p>
+        </p:txBody>
+      </p:sp>
+      <p:pic>
+        <p:nvPicPr>
+          <p:cNvPr id="3" name="Image 0" descr="/home/user/aaa/il18_casp5organ/figures/human/brain_cell_dots.png">    </p:cNvPr>
+          <p:cNvPicPr>
+            <a:picLocks noChangeAspect="1"/>
+          </p:cNvPicPr>
+          <p:nvPr/>
+        </p:nvPicPr>
+        <p:blipFill>
+          <a:blip r:embed="rId1"/>
+          <a:stretch>
+            <a:fillRect/>
+          </a:stretch>
+        </p:blipFill>
+        <p:spPr>
+          <a:xfrm>
+            <a:off x="640080" y="1051560"/>
+            <a:ext cx="10908792" cy="4846320"/>
+          </a:xfrm>
+          <a:prstGeom prst="rect">
+            <a:avLst/>
+          </a:prstGeom>
+        </p:spPr>
+      </p:pic>
+      <p:sp>
+        <p:nvSpPr>
+          <p:cNvPr id="4" name="Text 1"/>
           <p:cNvSpPr txBox="1"/>
           <p:nvPr/>
         </p:nvSpPr>
         <p:spPr>
           <a:xfrm>
-            <a:off x="731520" y="1554480"/>
-            <a:ext cx="2834640" cy="457200"/>
+            <a:off x="640080" y="5943600"/>
+            <a:ext cx="10927080" cy="786384"/>
           </a:xfrm>
           <a:prstGeom prst="rect">
             <a:avLst/>
@@ -3294,12 +5536,12 @@
           <a:p>
             <a:pPr indent="0" marL="0">
               <a:lnSpc>
-                <a:spcPct val="110000"/>
+                <a:spcPct val="120000"/>
               </a:lnSpc>
               <a:buNone/>
             </a:pPr>
             <a:r>
-              <a:rPr lang="en-US" sz="950" dirty="0">
+              <a:rPr lang="en-US" sz="1050" dirty="0">
                 <a:solidFill>
                   <a:srgbClr val="6B6B6B"/>
                 </a:solidFill>
@@ -3307,22 +5549,47 @@
                 <a:ea typeface="Microsoft YaHei" pitchFamily="34" charset="-122"/>
                 <a:cs typeface="Microsoft YaHei" pitchFamily="34" charset="-120"/>
               </a:rPr>
-              <a:t>≥2 个独立来源，无一例外</a:t>
-            </a:r>
-            <a:endParaRPr lang="en-US" sz="950" dirty="0"/>
-          </a:p>
-        </p:txBody>
-      </p:sp>
-      <p:sp>
-        <p:nvSpPr>
-          <p:cNvPr id="6" name="Text 4"/>
+              <a:t>78 供体真单细胞，该分层全部 18 类一律列出。PV 与 L5 ET 的 CASP1 近零而 CASP3 为 27.9% 与 34.3%，即不满足「CASP3 最低档」这一排除项。</a:t>
+            </a:r>
+            <a:endParaRPr lang="en-US" sz="1050" dirty="0"/>
+          </a:p>
+        </p:txBody>
+      </p:sp>
+    </p:spTree>
+  </p:cSld>
+  <p:clrMapOvr>
+    <a:masterClrMapping/>
+  </p:clrMapOvr>
+</p:sld>
+</file>
+
+<file path=ppt/slides/slide8.xml><?xml version="1.0" encoding="utf-8"?>
+<p:sld xmlns:a="http://schemas.openxmlformats.org/drawingml/2006/main" xmlns:r="http://schemas.openxmlformats.org/officeDocument/2006/relationships" xmlns:p="http://schemas.openxmlformats.org/presentationml/2006/main">
+  <p:cSld name="Slide 8">
+    <p:spTree>
+      <p:nvGrpSpPr>
+        <p:cNvPr id="1" name=""/>
+        <p:cNvGrpSpPr/>
+        <p:nvPr/>
+      </p:nvGrpSpPr>
+      <p:grpSpPr>
+        <a:xfrm>
+          <a:off x="0" y="0"/>
+          <a:ext cx="0" cy="0"/>
+          <a:chOff x="0" y="0"/>
+          <a:chExt cx="0" cy="0"/>
+        </a:xfrm>
+      </p:grpSpPr>
+      <p:sp>
+        <p:nvSpPr>
+          <p:cNvPr id="2" name="Text 0"/>
           <p:cNvSpPr txBox="1"/>
           <p:nvPr/>
         </p:nvSpPr>
         <p:spPr>
           <a:xfrm>
-            <a:off x="3749040" y="1261872"/>
-            <a:ext cx="7772400" cy="658368"/>
+            <a:off x="640080" y="411480"/>
+            <a:ext cx="10972800" cy="640080"/>
           </a:xfrm>
           <a:prstGeom prst="rect">
             <a:avLst/>
@@ -3331,17 +5598,14 @@
           <a:ln/>
         </p:spPr>
         <p:txBody>
-          <a:bodyPr wrap="square" rtlCol="0" anchor="t"/>
+          <a:bodyPr wrap="square" rtlCol="0" anchor="ctr"/>
           <a:lstStyle/>
           <a:p>
             <a:pPr indent="0" marL="0">
-              <a:lnSpc>
-                <a:spcPct val="115000"/>
-              </a:lnSpc>
               <a:buNone/>
             </a:pPr>
             <a:r>
-              <a:rPr lang="en-US" sz="1250" dirty="0">
+              <a:rPr lang="en-US" sz="2400" b="1" dirty="0">
                 <a:solidFill>
                   <a:srgbClr val="1A1A1A"/>
                 </a:solidFill>
@@ -3349,22 +5613,46 @@
                 <a:ea typeface="Microsoft YaHei" pitchFamily="34" charset="-122"/>
                 <a:cs typeface="Microsoft YaHei" pitchFamily="34" charset="-120"/>
               </a:rPr>
-              <a:t>小鼠脑 星形胶质 · 人脑 L5 ET 投射神经元 · 小鼠脑 少突胶质 · 人脑 PV 中间神经元 · 人脑 枝形 PV 中间神经元</a:t>
-            </a:r>
-            <a:endParaRPr lang="en-US" sz="1250" dirty="0"/>
-          </a:p>
-        </p:txBody>
-      </p:sp>
-      <p:sp>
-        <p:nvSpPr>
-          <p:cNvPr id="7" name="Text 5"/>
+              <a:t>人脊髓（颈段白质单核）：IL18 / CASP1 / CASP3 三基因</a:t>
+            </a:r>
+            <a:endParaRPr lang="en-US" sz="2400" dirty="0"/>
+          </a:p>
+        </p:txBody>
+      </p:sp>
+      <p:pic>
+        <p:nvPicPr>
+          <p:cNvPr id="3" name="Image 0" descr="/home/user/aaa/il18_casp5organ/figures/human/spinal_dots.png">    </p:cNvPr>
+          <p:cNvPicPr>
+            <a:picLocks noChangeAspect="1"/>
+          </p:cNvPicPr>
+          <p:nvPr/>
+        </p:nvPicPr>
+        <p:blipFill>
+          <a:blip r:embed="rId1"/>
+          <a:stretch>
+            <a:fillRect/>
+          </a:stretch>
+        </p:blipFill>
+        <p:spPr>
+          <a:xfrm>
+            <a:off x="640080" y="1051560"/>
+            <a:ext cx="10908792" cy="4846320"/>
+          </a:xfrm>
+          <a:prstGeom prst="rect">
+            <a:avLst/>
+          </a:prstGeom>
+        </p:spPr>
+      </p:pic>
+      <p:sp>
+        <p:nvSpPr>
+          <p:cNvPr id="4" name="Text 1"/>
           <p:cNvSpPr txBox="1"/>
           <p:nvPr/>
         </p:nvSpPr>
         <p:spPr>
           <a:xfrm>
-            <a:off x="731520" y="2048256"/>
-            <a:ext cx="2834640" cy="274320"/>
+            <a:off x="640080" y="5943600"/>
+            <a:ext cx="10927080" cy="786384"/>
           </a:xfrm>
           <a:prstGeom prst="rect">
             <a:avLst/>
@@ -3373,56 +5661,17 @@
           <a:ln/>
         </p:spPr>
         <p:txBody>
-          <a:bodyPr wrap="square" rtlCol="0" anchor="ctr"/>
-          <a:lstStyle/>
-          <a:p>
-            <a:pPr indent="0" marL="0">
-              <a:buNone/>
-            </a:pPr>
-            <a:r>
-              <a:rPr lang="en-US" sz="1350" b="1" dirty="0">
-                <a:solidFill>
-                  <a:srgbClr val="2E8B57"/>
-                </a:solidFill>
-                <a:latin typeface="Microsoft YaHei" pitchFamily="34" charset="0"/>
-                <a:ea typeface="Microsoft YaHei" pitchFamily="34" charset="-122"/>
-                <a:cs typeface="Microsoft YaHei" pitchFamily="34" charset="-120"/>
-              </a:rPr>
-              <a:t>符合 · 多源有分歧</a:t>
-            </a:r>
-            <a:endParaRPr lang="en-US" sz="1350" dirty="0"/>
-          </a:p>
-        </p:txBody>
-      </p:sp>
-      <p:sp>
-        <p:nvSpPr>
-          <p:cNvPr id="8" name="Text 6"/>
-          <p:cNvSpPr txBox="1"/>
-          <p:nvPr/>
-        </p:nvSpPr>
-        <p:spPr>
-          <a:xfrm>
-            <a:off x="731520" y="2304288"/>
-            <a:ext cx="2834640" cy="457200"/>
-          </a:xfrm>
-          <a:prstGeom prst="rect">
-            <a:avLst/>
-          </a:prstGeom>
-          <a:noFill/>
-          <a:ln/>
-        </p:spPr>
-        <p:txBody>
           <a:bodyPr wrap="square" rtlCol="0" anchor="t"/>
           <a:lstStyle/>
           <a:p>
             <a:pPr indent="0" marL="0">
               <a:lnSpc>
-                <a:spcPct val="110000"/>
+                <a:spcPct val="120000"/>
               </a:lnSpc>
               <a:buNone/>
             </a:pPr>
             <a:r>
-              <a:rPr lang="en-US" sz="950" dirty="0">
+              <a:rPr lang="en-US" sz="1050" dirty="0">
                 <a:solidFill>
                   <a:srgbClr val="6B6B6B"/>
                 </a:solidFill>
@@ -3430,22 +5679,47 @@
                 <a:ea typeface="Microsoft YaHei" pitchFamily="34" charset="-122"/>
                 <a:cs typeface="Microsoft YaHei" pitchFamily="34" charset="-120"/>
               </a:rPr>
-              <a:t>多数来源支持，但有来源测到 CASP1</a:t>
-            </a:r>
-            <a:endParaRPr lang="en-US" sz="950" dirty="0"/>
-          </a:p>
-        </p:txBody>
-      </p:sp>
-      <p:sp>
-        <p:nvSpPr>
-          <p:cNvPr id="9" name="Text 7"/>
+              <a:t>11 类全部不符合：小胶质 IL18 52.3% 但 CASP1 11.8%（215/1829），其余 10 类 IL18 均 ≤3.2%。人脊髓白质在转录本层面是明确的否定，不是「数据不足」。</a:t>
+            </a:r>
+            <a:endParaRPr lang="en-US" sz="1050" dirty="0"/>
+          </a:p>
+        </p:txBody>
+      </p:sp>
+    </p:spTree>
+  </p:cSld>
+  <p:clrMapOvr>
+    <a:masterClrMapping/>
+  </p:clrMapOvr>
+</p:sld>
+</file>
+
+<file path=ppt/slides/slide9.xml><?xml version="1.0" encoding="utf-8"?>
+<p:sld xmlns:a="http://schemas.openxmlformats.org/drawingml/2006/main" xmlns:r="http://schemas.openxmlformats.org/officeDocument/2006/relationships" xmlns:p="http://schemas.openxmlformats.org/presentationml/2006/main">
+  <p:cSld name="Slide 9">
+    <p:spTree>
+      <p:nvGrpSpPr>
+        <p:cNvPr id="1" name=""/>
+        <p:cNvGrpSpPr/>
+        <p:nvPr/>
+      </p:nvGrpSpPr>
+      <p:grpSpPr>
+        <a:xfrm>
+          <a:off x="0" y="0"/>
+          <a:ext cx="0" cy="0"/>
+          <a:chOff x="0" y="0"/>
+          <a:chExt cx="0" cy="0"/>
+        </a:xfrm>
+      </p:grpSpPr>
+      <p:sp>
+        <p:nvSpPr>
+          <p:cNvPr id="2" name="Text 0"/>
           <p:cNvSpPr txBox="1"/>
           <p:nvPr/>
         </p:nvSpPr>
         <p:spPr>
           <a:xfrm>
-            <a:off x="3749040" y="2011680"/>
-            <a:ext cx="7772400" cy="658368"/>
+            <a:off x="640080" y="411480"/>
+            <a:ext cx="10972800" cy="640080"/>
           </a:xfrm>
           <a:prstGeom prst="rect">
             <a:avLst/>
@@ -3454,17 +5728,14 @@
           <a:ln/>
         </p:spPr>
         <p:txBody>
-          <a:bodyPr wrap="square" rtlCol="0" anchor="t"/>
+          <a:bodyPr wrap="square" rtlCol="0" anchor="ctr"/>
           <a:lstStyle/>
           <a:p>
             <a:pPr indent="0" marL="0">
-              <a:lnSpc>
-                <a:spcPct val="115000"/>
-              </a:lnSpc>
               <a:buNone/>
             </a:pPr>
             <a:r>
-              <a:rPr lang="en-US" sz="1250" dirty="0">
+              <a:rPr lang="en-US" sz="2400" b="1" dirty="0">
                 <a:solidFill>
                   <a:srgbClr val="1A1A1A"/>
                 </a:solidFill>
@@ -3472,22 +5743,46 @@
                 <a:ea typeface="Microsoft YaHei" pitchFamily="34" charset="-122"/>
                 <a:cs typeface="Microsoft YaHei" pitchFamily="34" charset="-120"/>
               </a:rPr>
-              <a:t>人肺 肥大细胞 · 小鼠胰 胰岛 D(δ) 细胞 · 人脑 CGE 源中间神经元</a:t>
-            </a:r>
-            <a:endParaRPr lang="en-US" sz="1250" dirty="0"/>
-          </a:p>
-        </p:txBody>
-      </p:sp>
-      <p:sp>
-        <p:nvSpPr>
-          <p:cNvPr id="10" name="Text 8"/>
+              <a:t>小鼠肺（Tabula Muris Senis 10x）：IL18 / CASP1 / CASP3 三基因</a:t>
+            </a:r>
+            <a:endParaRPr lang="en-US" sz="2400" dirty="0"/>
+          </a:p>
+        </p:txBody>
+      </p:sp>
+      <p:pic>
+        <p:nvPicPr>
+          <p:cNvPr id="3" name="Image 0" descr="/home/user/aaa/il18_casp5organ/figures/mouse/lung_dots.png">    </p:cNvPr>
+          <p:cNvPicPr>
+            <a:picLocks noChangeAspect="1"/>
+          </p:cNvPicPr>
+          <p:nvPr/>
+        </p:nvPicPr>
+        <p:blipFill>
+          <a:blip r:embed="rId1"/>
+          <a:stretch>
+            <a:fillRect/>
+          </a:stretch>
+        </p:blipFill>
+        <p:spPr>
+          <a:xfrm>
+            <a:off x="640080" y="1051560"/>
+            <a:ext cx="10908792" cy="4846320"/>
+          </a:xfrm>
+          <a:prstGeom prst="rect">
+            <a:avLst/>
+          </a:prstGeom>
+        </p:spPr>
+      </p:pic>
+      <p:sp>
+        <p:nvSpPr>
+          <p:cNvPr id="4" name="Text 1"/>
           <p:cNvSpPr txBox="1"/>
           <p:nvPr/>
         </p:nvSpPr>
         <p:spPr>
           <a:xfrm>
-            <a:off x="731520" y="2798064"/>
-            <a:ext cx="2834640" cy="274320"/>
+            <a:off x="640080" y="5943600"/>
+            <a:ext cx="10927080" cy="786384"/>
           </a:xfrm>
           <a:prstGeom prst="rect">
             <a:avLst/>
@@ -3496,56 +5791,17 @@
           <a:ln/>
         </p:spPr>
         <p:txBody>
-          <a:bodyPr wrap="square" rtlCol="0" anchor="ctr"/>
-          <a:lstStyle/>
-          <a:p>
-            <a:pPr indent="0" marL="0">
-              <a:buNone/>
-            </a:pPr>
-            <a:r>
-              <a:rPr lang="en-US" sz="1350" b="1" dirty="0">
-                <a:solidFill>
-                  <a:srgbClr val="1F5FA8"/>
-                </a:solidFill>
-                <a:latin typeface="Microsoft YaHei" pitchFamily="34" charset="0"/>
-                <a:ea typeface="Microsoft YaHei" pitchFamily="34" charset="-122"/>
-                <a:cs typeface="Microsoft YaHei" pitchFamily="34" charset="-120"/>
-              </a:rPr>
-              <a:t>符合 · 单一来源</a:t>
-            </a:r>
-            <a:endParaRPr lang="en-US" sz="1350" dirty="0"/>
-          </a:p>
-        </p:txBody>
-      </p:sp>
-      <p:sp>
-        <p:nvSpPr>
-          <p:cNvPr id="11" name="Text 9"/>
-          <p:cNvSpPr txBox="1"/>
-          <p:nvPr/>
-        </p:nvSpPr>
-        <p:spPr>
-          <a:xfrm>
-            <a:off x="731520" y="3054096"/>
-            <a:ext cx="2834640" cy="457200"/>
-          </a:xfrm>
-          <a:prstGeom prst="rect">
-            <a:avLst/>
-          </a:prstGeom>
-          <a:noFill/>
-          <a:ln/>
-        </p:spPr>
-        <p:txBody>
           <a:bodyPr wrap="square" rtlCol="0" anchor="t"/>
           <a:lstStyle/>
           <a:p>
             <a:pPr indent="0" marL="0">
               <a:lnSpc>
-                <a:spcPct val="110000"/>
+                <a:spcPct val="120000"/>
               </a:lnSpc>
               <a:buNone/>
             </a:pPr>
             <a:r>
-              <a:rPr lang="en-US" sz="950" dirty="0">
+              <a:rPr lang="en-US" sz="1050" dirty="0">
                 <a:solidFill>
                   <a:srgbClr val="6B6B6B"/>
                 </a:solidFill>
@@ -3553,499 +5809,7 @@
                 <a:ea typeface="Microsoft YaHei" pitchFamily="34" charset="-122"/>
                 <a:cs typeface="Microsoft YaHei" pitchFamily="34" charset="-120"/>
               </a:rPr>
-              <a:t>仅 1 个来源支持</a:t>
-            </a:r>
-            <a:endParaRPr lang="en-US" sz="950" dirty="0"/>
-          </a:p>
-        </p:txBody>
-      </p:sp>
-      <p:sp>
-        <p:nvSpPr>
-          <p:cNvPr id="12" name="Text 10"/>
-          <p:cNvSpPr txBox="1"/>
-          <p:nvPr/>
-        </p:nvSpPr>
-        <p:spPr>
-          <a:xfrm>
-            <a:off x="3749040" y="2761488"/>
-            <a:ext cx="7772400" cy="658368"/>
-          </a:xfrm>
-          <a:prstGeom prst="rect">
-            <a:avLst/>
-          </a:prstGeom>
-          <a:noFill/>
-          <a:ln/>
-        </p:spPr>
-        <p:txBody>
-          <a:bodyPr wrap="square" rtlCol="0" anchor="t"/>
-          <a:lstStyle/>
-          <a:p>
-            <a:pPr indent="0" marL="0">
-              <a:lnSpc>
-                <a:spcPct val="115000"/>
-              </a:lnSpc>
-              <a:buNone/>
-            </a:pPr>
-            <a:r>
-              <a:rPr lang="en-US" sz="1250" dirty="0">
-                <a:solidFill>
-                  <a:srgbClr val="1A1A1A"/>
-                </a:solidFill>
-                <a:latin typeface="Microsoft YaHei" pitchFamily="34" charset="0"/>
-                <a:ea typeface="Microsoft YaHei" pitchFamily="34" charset="-122"/>
-                <a:cs typeface="Microsoft YaHei" pitchFamily="34" charset="-120"/>
-              </a:rPr>
-              <a:t>人肺 AT1 肺泡上皮 · 人胰 胰腺腺泡细胞 · 小鼠胰 胰导管细胞</a:t>
-            </a:r>
-            <a:endParaRPr lang="en-US" sz="1250" dirty="0"/>
-          </a:p>
-        </p:txBody>
-      </p:sp>
-      <p:sp>
-        <p:nvSpPr>
-          <p:cNvPr id="13" name="Text 11"/>
-          <p:cNvSpPr txBox="1"/>
-          <p:nvPr/>
-        </p:nvSpPr>
-        <p:spPr>
-          <a:xfrm>
-            <a:off x="731520" y="3547872"/>
-            <a:ext cx="2834640" cy="274320"/>
-          </a:xfrm>
-          <a:prstGeom prst="rect">
-            <a:avLst/>
-          </a:prstGeom>
-          <a:noFill/>
-          <a:ln/>
-        </p:spPr>
-        <p:txBody>
-          <a:bodyPr wrap="square" rtlCol="0" anchor="ctr"/>
-          <a:lstStyle/>
-          <a:p>
-            <a:pPr indent="0" marL="0">
-              <a:buNone/>
-            </a:pPr>
-            <a:r>
-              <a:rPr lang="en-US" sz="1350" b="1" dirty="0">
-                <a:solidFill>
-                  <a:srgbClr val="4C87C4"/>
-                </a:solidFill>
-                <a:latin typeface="Microsoft YaHei" pitchFamily="34" charset="0"/>
-                <a:ea typeface="Microsoft YaHei" pitchFamily="34" charset="-122"/>
-                <a:cs typeface="Microsoft YaHei" pitchFamily="34" charset="-120"/>
-              </a:rPr>
-              <a:t>符合 · 无参考可查</a:t>
-            </a:r>
-            <a:endParaRPr lang="en-US" sz="1350" dirty="0"/>
-          </a:p>
-        </p:txBody>
-      </p:sp>
-      <p:sp>
-        <p:nvSpPr>
-          <p:cNvPr id="14" name="Text 12"/>
-          <p:cNvSpPr txBox="1"/>
-          <p:nvPr/>
-        </p:nvSpPr>
-        <p:spPr>
-          <a:xfrm>
-            <a:off x="731520" y="3803904"/>
-            <a:ext cx="2834640" cy="457200"/>
-          </a:xfrm>
-          <a:prstGeom prst="rect">
-            <a:avLst/>
-          </a:prstGeom>
-          <a:noFill/>
-          <a:ln/>
-        </p:spPr>
-        <p:txBody>
-          <a:bodyPr wrap="square" rtlCol="0" anchor="t"/>
-          <a:lstStyle/>
-          <a:p>
-            <a:pPr indent="0" marL="0">
-              <a:lnSpc>
-                <a:spcPct val="110000"/>
-              </a:lnSpc>
-              <a:buNone/>
-            </a:pPr>
-            <a:r>
-              <a:rPr lang="en-US" sz="950" dirty="0">
-                <a:solidFill>
-                  <a:srgbClr val="6B6B6B"/>
-                </a:solidFill>
-                <a:latin typeface="Microsoft YaHei" pitchFamily="34" charset="0"/>
-                <a:ea typeface="Microsoft YaHei" pitchFamily="34" charset="-122"/>
-                <a:cs typeface="Microsoft YaHei" pitchFamily="34" charset="-120"/>
-              </a:rPr>
-              <a:t>无分选参考，仅本数据方向相符</a:t>
-            </a:r>
-            <a:endParaRPr lang="en-US" sz="950" dirty="0"/>
-          </a:p>
-        </p:txBody>
-      </p:sp>
-      <p:sp>
-        <p:nvSpPr>
-          <p:cNvPr id="15" name="Text 13"/>
-          <p:cNvSpPr txBox="1"/>
-          <p:nvPr/>
-        </p:nvSpPr>
-        <p:spPr>
-          <a:xfrm>
-            <a:off x="3749040" y="3511296"/>
-            <a:ext cx="7772400" cy="658368"/>
-          </a:xfrm>
-          <a:prstGeom prst="rect">
-            <a:avLst/>
-          </a:prstGeom>
-          <a:noFill/>
-          <a:ln/>
-        </p:spPr>
-        <p:txBody>
-          <a:bodyPr wrap="square" rtlCol="0" anchor="t"/>
-          <a:lstStyle/>
-          <a:p>
-            <a:pPr indent="0" marL="0">
-              <a:lnSpc>
-                <a:spcPct val="115000"/>
-              </a:lnSpc>
-              <a:buNone/>
-            </a:pPr>
-            <a:r>
-              <a:rPr lang="en-US" sz="1250" dirty="0">
-                <a:solidFill>
-                  <a:srgbClr val="1A1A1A"/>
-                </a:solidFill>
-                <a:latin typeface="Microsoft YaHei" pitchFamily="34" charset="0"/>
-                <a:ea typeface="Microsoft YaHei" pitchFamily="34" charset="-122"/>
-                <a:cs typeface="Microsoft YaHei" pitchFamily="34" charset="-120"/>
-              </a:rPr>
-              <a:t>人脑 血管软脑膜细胞 · 人肝 巨核-红系祖细胞 · 人肺 肺泡外膜成纤维 · 小鼠脑 Cajal-Retzius 神经元</a:t>
-            </a:r>
-            <a:endParaRPr lang="en-US" sz="1250" dirty="0"/>
-          </a:p>
-        </p:txBody>
-      </p:sp>
-      <p:sp>
-        <p:nvSpPr>
-          <p:cNvPr id="16" name="Text 14"/>
-          <p:cNvSpPr txBox="1"/>
-          <p:nvPr/>
-        </p:nvSpPr>
-        <p:spPr>
-          <a:xfrm>
-            <a:off x="731520" y="4297680"/>
-            <a:ext cx="2834640" cy="274320"/>
-          </a:xfrm>
-          <a:prstGeom prst="rect">
-            <a:avLst/>
-          </a:prstGeom>
-          <a:noFill/>
-          <a:ln/>
-        </p:spPr>
-        <p:txBody>
-          <a:bodyPr wrap="square" rtlCol="0" anchor="ctr"/>
-          <a:lstStyle/>
-          <a:p>
-            <a:pPr indent="0" marL="0">
-              <a:buNone/>
-            </a:pPr>
-            <a:r>
-              <a:rPr lang="en-US" sz="1350" b="1" dirty="0">
-                <a:solidFill>
-                  <a:srgbClr val="9A2B2B"/>
-                </a:solidFill>
-                <a:latin typeface="Microsoft YaHei" pitchFamily="34" charset="0"/>
-                <a:ea typeface="Microsoft YaHei" pitchFamily="34" charset="-122"/>
-                <a:cs typeface="Microsoft YaHei" pitchFamily="34" charset="-120"/>
-              </a:rPr>
-              <a:t>不符合 · 多源一致</a:t>
-            </a:r>
-            <a:endParaRPr lang="en-US" sz="1350" dirty="0"/>
-          </a:p>
-        </p:txBody>
-      </p:sp>
-      <p:sp>
-        <p:nvSpPr>
-          <p:cNvPr id="17" name="Text 15"/>
-          <p:cNvSpPr txBox="1"/>
-          <p:nvPr/>
-        </p:nvSpPr>
-        <p:spPr>
-          <a:xfrm>
-            <a:off x="731520" y="4553712"/>
-            <a:ext cx="2834640" cy="457200"/>
-          </a:xfrm>
-          <a:prstGeom prst="rect">
-            <a:avLst/>
-          </a:prstGeom>
-          <a:noFill/>
-          <a:ln/>
-        </p:spPr>
-        <p:txBody>
-          <a:bodyPr wrap="square" rtlCol="0" anchor="t"/>
-          <a:lstStyle/>
-          <a:p>
-            <a:pPr indent="0" marL="0">
-              <a:lnSpc>
-                <a:spcPct val="110000"/>
-              </a:lnSpc>
-              <a:buNone/>
-            </a:pPr>
-            <a:r>
-              <a:rPr lang="en-US" sz="950" dirty="0">
-                <a:solidFill>
-                  <a:srgbClr val="6B6B6B"/>
-                </a:solidFill>
-                <a:latin typeface="Microsoft YaHei" pitchFamily="34" charset="0"/>
-                <a:ea typeface="Microsoft YaHei" pitchFamily="34" charset="-122"/>
-                <a:cs typeface="Microsoft YaHei" pitchFamily="34" charset="-120"/>
-              </a:rPr>
-              <a:t>参考层 CASP1 确实可测或 ≥ IL18</a:t>
-            </a:r>
-            <a:endParaRPr lang="en-US" sz="950" dirty="0"/>
-          </a:p>
-        </p:txBody>
-      </p:sp>
-      <p:sp>
-        <p:nvSpPr>
-          <p:cNvPr id="18" name="Text 16"/>
-          <p:cNvSpPr txBox="1"/>
-          <p:nvPr/>
-        </p:nvSpPr>
-        <p:spPr>
-          <a:xfrm>
-            <a:off x="3749040" y="4261104"/>
-            <a:ext cx="7772400" cy="658368"/>
-          </a:xfrm>
-          <a:prstGeom prst="rect">
-            <a:avLst/>
-          </a:prstGeom>
-          <a:noFill/>
-          <a:ln/>
-        </p:spPr>
-        <p:txBody>
-          <a:bodyPr wrap="square" rtlCol="0" anchor="t"/>
-          <a:lstStyle/>
-          <a:p>
-            <a:pPr indent="0" marL="0">
-              <a:lnSpc>
-                <a:spcPct val="115000"/>
-              </a:lnSpc>
-              <a:buNone/>
-            </a:pPr>
-            <a:r>
-              <a:rPr lang="en-US" sz="1250" dirty="0">
-                <a:solidFill>
-                  <a:srgbClr val="1A1A1A"/>
-                </a:solidFill>
-                <a:latin typeface="Microsoft YaHei" pitchFamily="34" charset="0"/>
-                <a:ea typeface="Microsoft YaHei" pitchFamily="34" charset="-122"/>
-                <a:cs typeface="Microsoft YaHei" pitchFamily="34" charset="-120"/>
-              </a:rPr>
-              <a:t>小鼠肺 肺泡巨噬 · 人肺 气道多纤毛上皮 · 小鼠脑 小胶质/CNS巨噬 · 人肺 纤毛上皮 · 人肝 嗜碱粒细胞 · 人肺 树突状细胞</a:t>
-            </a:r>
-            <a:endParaRPr lang="en-US" sz="1250" dirty="0"/>
-          </a:p>
-        </p:txBody>
-      </p:sp>
-      <p:sp>
-        <p:nvSpPr>
-          <p:cNvPr id="19" name="Text 17"/>
-          <p:cNvSpPr txBox="1"/>
-          <p:nvPr/>
-        </p:nvSpPr>
-        <p:spPr>
-          <a:xfrm>
-            <a:off x="731520" y="5047488"/>
-            <a:ext cx="2834640" cy="274320"/>
-          </a:xfrm>
-          <a:prstGeom prst="rect">
-            <a:avLst/>
-          </a:prstGeom>
-          <a:noFill/>
-          <a:ln/>
-        </p:spPr>
-        <p:txBody>
-          <a:bodyPr wrap="square" rtlCol="0" anchor="ctr"/>
-          <a:lstStyle/>
-          <a:p>
-            <a:pPr indent="0" marL="0">
-              <a:buNone/>
-            </a:pPr>
-            <a:r>
-              <a:rPr lang="en-US" sz="1350" b="1" dirty="0">
-                <a:solidFill>
-                  <a:srgbClr val="B5564E"/>
-                </a:solidFill>
-                <a:latin typeface="Microsoft YaHei" pitchFamily="34" charset="0"/>
-                <a:ea typeface="Microsoft YaHei" pitchFamily="34" charset="-122"/>
-                <a:cs typeface="Microsoft YaHei" pitchFamily="34" charset="-120"/>
-              </a:rPr>
-              <a:t>不符合 · 无参考可查</a:t>
-            </a:r>
-            <a:endParaRPr lang="en-US" sz="1350" dirty="0"/>
-          </a:p>
-        </p:txBody>
-      </p:sp>
-      <p:sp>
-        <p:nvSpPr>
-          <p:cNvPr id="20" name="Text 18"/>
-          <p:cNvSpPr txBox="1"/>
-          <p:nvPr/>
-        </p:nvSpPr>
-        <p:spPr>
-          <a:xfrm>
-            <a:off x="731520" y="5303520"/>
-            <a:ext cx="2834640" cy="457200"/>
-          </a:xfrm>
-          <a:prstGeom prst="rect">
-            <a:avLst/>
-          </a:prstGeom>
-          <a:noFill/>
-          <a:ln/>
-        </p:spPr>
-        <p:txBody>
-          <a:bodyPr wrap="square" rtlCol="0" anchor="t"/>
-          <a:lstStyle/>
-          <a:p>
-            <a:pPr indent="0" marL="0">
-              <a:lnSpc>
-                <a:spcPct val="110000"/>
-              </a:lnSpc>
-              <a:buNone/>
-            </a:pPr>
-            <a:r>
-              <a:rPr lang="en-US" sz="950" dirty="0">
-                <a:solidFill>
-                  <a:srgbClr val="6B6B6B"/>
-                </a:solidFill>
-                <a:latin typeface="Microsoft YaHei" pitchFamily="34" charset="0"/>
-                <a:ea typeface="Microsoft YaHei" pitchFamily="34" charset="-122"/>
-                <a:cs typeface="Microsoft YaHei" pitchFamily="34" charset="-120"/>
-              </a:rPr>
-              <a:t>无参考，本数据自身即方向相反</a:t>
-            </a:r>
-            <a:endParaRPr lang="en-US" sz="950" dirty="0"/>
-          </a:p>
-        </p:txBody>
-      </p:sp>
-      <p:sp>
-        <p:nvSpPr>
-          <p:cNvPr id="21" name="Text 19"/>
-          <p:cNvSpPr txBox="1"/>
-          <p:nvPr/>
-        </p:nvSpPr>
-        <p:spPr>
-          <a:xfrm>
-            <a:off x="3749040" y="5010912"/>
-            <a:ext cx="7772400" cy="658368"/>
-          </a:xfrm>
-          <a:prstGeom prst="rect">
-            <a:avLst/>
-          </a:prstGeom>
-          <a:noFill/>
-          <a:ln/>
-        </p:spPr>
-        <p:txBody>
-          <a:bodyPr wrap="square" rtlCol="0" anchor="t"/>
-          <a:lstStyle/>
-          <a:p>
-            <a:pPr indent="0" marL="0">
-              <a:lnSpc>
-                <a:spcPct val="115000"/>
-              </a:lnSpc>
-              <a:buNone/>
-            </a:pPr>
-            <a:r>
-              <a:rPr lang="en-US" sz="1250" dirty="0">
-                <a:solidFill>
-                  <a:srgbClr val="1A1A1A"/>
-                </a:solidFill>
-                <a:latin typeface="Microsoft YaHei" pitchFamily="34" charset="0"/>
-                <a:ea typeface="Microsoft YaHei" pitchFamily="34" charset="-122"/>
-                <a:cs typeface="Microsoft YaHei" pitchFamily="34" charset="-120"/>
-              </a:rPr>
-              <a:t>人肝 CD56bright NK</a:t>
-            </a:r>
-            <a:endParaRPr lang="en-US" sz="1250" dirty="0"/>
-          </a:p>
-        </p:txBody>
-      </p:sp>
-      <p:sp>
-        <p:nvSpPr>
-          <p:cNvPr id="22" name="Text 20"/>
-          <p:cNvSpPr txBox="1"/>
-          <p:nvPr/>
-        </p:nvSpPr>
-        <p:spPr>
-          <a:xfrm>
-            <a:off x="731520" y="5715000"/>
-            <a:ext cx="10789920" cy="548640"/>
-          </a:xfrm>
-          <a:prstGeom prst="rect">
-            <a:avLst/>
-          </a:prstGeom>
-          <a:noFill/>
-          <a:ln/>
-        </p:spPr>
-        <p:txBody>
-          <a:bodyPr wrap="square" rtlCol="0" anchor="ctr"/>
-          <a:lstStyle/>
-          <a:p>
-            <a:pPr indent="0" marL="0">
-              <a:lnSpc>
-                <a:spcPct val="120000"/>
-              </a:lnSpc>
-              <a:buNone/>
-            </a:pPr>
-            <a:r>
-              <a:rPr lang="en-US" sz="1150" dirty="0">
-                <a:solidFill>
-                  <a:srgbClr val="1A1A1A"/>
-                </a:solidFill>
-                <a:latin typeface="Microsoft YaHei" pitchFamily="34" charset="0"/>
-                <a:ea typeface="Microsoft YaHei" pitchFamily="34" charset="-122"/>
-                <a:cs typeface="Microsoft YaHei" pitchFamily="34" charset="-120"/>
-              </a:rPr>
-              <a:t>两条必须一起说的边界：小鼠星形胶质的结论仅限皮层与海马（小脑 Bergmann 胶质与脊髓星形胶质 Casp1 明确表达）；人的 PV / L5 ET 神经元结论在小鼠没有对应物（小鼠这两类 Casp1 同样近零，但 Il18 不高）。</a:t>
-            </a:r>
-            <a:endParaRPr lang="en-US" sz="1150" dirty="0"/>
-          </a:p>
-        </p:txBody>
-      </p:sp>
-      <p:sp>
-        <p:nvSpPr>
-          <p:cNvPr id="23" name="Text 21"/>
-          <p:cNvSpPr txBox="1"/>
-          <p:nvPr/>
-        </p:nvSpPr>
-        <p:spPr>
-          <a:xfrm>
-            <a:off x="731520" y="6355080"/>
-            <a:ext cx="10789920" cy="320040"/>
-          </a:xfrm>
-          <a:prstGeom prst="rect">
-            <a:avLst/>
-          </a:prstGeom>
-          <a:noFill/>
-          <a:ln/>
-        </p:spPr>
-        <p:txBody>
-          <a:bodyPr wrap="square" rtlCol="0" anchor="ctr"/>
-          <a:lstStyle/>
-          <a:p>
-            <a:pPr indent="0" marL="0">
-              <a:buNone/>
-            </a:pPr>
-            <a:r>
-              <a:rPr lang="en-US" sz="1050" dirty="0">
-                <a:solidFill>
-                  <a:srgbClr val="9AA0A6"/>
-                </a:solidFill>
-                <a:latin typeface="Microsoft YaHei" pitchFamily="34" charset="0"/>
-                <a:ea typeface="Microsoft YaHei" pitchFamily="34" charset="-122"/>
-                <a:cs typeface="Microsoft YaHei" pitchFamily="34" charset="-120"/>
-              </a:rPr>
-              <a:t>检出率 = 原始计数 ≥1 的细胞数 ÷ 分析细胞数（合并全部供体）。29 个分层，人与小鼠分开，静息基线；未做环境 RNA 校正。</a:t>
+              <a:t>肺泡巨噬 IL18 71.6% 为全器官最高，但 CASP1 13.3%（178/1341），参考层亦确认可测，判为不符合；其余 16 类 IL18 均 ≤18.5%。</a:t>
             </a:r>
             <a:endParaRPr lang="en-US" sz="1050" dirty="0"/>
           </a:p>

--- a/il18_casp5organ/IL18_CASP_五器官筛选.pptx
+++ b/il18_casp5organ/IL18_CASP_五器官筛选.pptx
@@ -19,9 +19,10 @@
     <p:sldId id="267" r:id="rId13"/>
     <p:sldId id="268" r:id="rId14"/>
     <p:sldId id="269" r:id="rId15"/>
+    <p:sldId id="270" r:id="rId16"/>
   </p:sldIdLst>
   <p:notesMasterIdLst>
-    <p:notesMasterId r:id="rId16"/>
+    <p:notesMasterId r:id="rId17"/>
   </p:notesMasterIdLst>
   <p:sldSz cx="12192000" cy="6858000"/>
   <p:notesSz cx="6858000" cy="12192000"/>
@@ -979,6 +980,94 @@
             <a:fld id="{F7021451-1387-4CA6-816F-3879F97B5CBC}" type="slidenum">
               <a:rPr lang="en-US"/>
               <a:t>14</a:t>
+            </a:fld>
+            <a:endParaRPr lang="en-US"/>
+          </a:p>
+        </p:txBody>
+      </p:sp>
+    </p:spTree>
+    <p:extLst>
+      <p:ext uri="{BB962C8B-B14F-4D97-AF65-F5344CB8AC3E}">
+        <p14:creationId xmlns:p14="http://schemas.microsoft.com/office/powerpoint/2010/main" val="1024086991"/>
+      </p:ext>
+    </p:extLst>
+  </p:cSld>
+  <p:clrMapOvr>
+    <a:masterClrMapping/>
+  </p:clrMapOvr>
+</p:notes>
+</file>
+
+<file path=ppt/notesSlides/notesSlide15.xml><?xml version="1.0" encoding="utf-8"?>
+<p:notes xmlns:a="http://schemas.openxmlformats.org/drawingml/2006/main" xmlns:r="http://schemas.openxmlformats.org/officeDocument/2006/relationships" xmlns:p="http://schemas.openxmlformats.org/presentationml/2006/main">
+  <p:cSld>
+    <p:spTree>
+      <p:nvGrpSpPr>
+        <p:cNvPr id="1" name=""/>
+        <p:cNvGrpSpPr/>
+        <p:nvPr/>
+      </p:nvGrpSpPr>
+      <p:grpSpPr>
+        <a:xfrm>
+          <a:off x="0" y="0"/>
+          <a:ext cx="0" cy="0"/>
+          <a:chOff x="0" y="0"/>
+          <a:chExt cx="0" cy="0"/>
+        </a:xfrm>
+      </p:grpSpPr>
+      <p:sp>
+        <p:nvSpPr>
+          <p:cNvPr id="2" name="Slide Image Placeholder 1"/>
+          <p:cNvSpPr>
+            <a:spLocks noGrp="1" noRot="1" noChangeAspect="1"/>
+          </p:cNvSpPr>
+          <p:nvPr>
+            <p:ph type="sldImg"/>
+          </p:nvPr>
+        </p:nvSpPr>
+        <p:spPr/>
+      </p:sp>
+      <p:sp>
+        <p:nvSpPr>
+          <p:cNvPr id="3" name="Notes Placeholder 2"/>
+          <p:cNvSpPr>
+            <a:spLocks noGrp="1"/>
+          </p:cNvSpPr>
+          <p:nvPr>
+            <p:ph type="body" idx="1"/>
+          </p:nvPr>
+        </p:nvSpPr>
+        <p:spPr/>
+        <p:txBody>
+          <a:bodyPr/>
+          <a:lstStyle/>
+          <a:p>
+            <a:r>
+              <a:rPr lang="en-US" dirty="0"/>
+              <a:t/>
+            </a:r>
+            <a:endParaRPr lang="en-US" dirty="0"/>
+          </a:p>
+        </p:txBody>
+      </p:sp>
+      <p:sp>
+        <p:nvSpPr>
+          <p:cNvPr id="4" name="Slide Number Placeholder 3"/>
+          <p:cNvSpPr>
+            <a:spLocks noGrp="1"/>
+          </p:cNvSpPr>
+          <p:nvPr>
+            <p:ph type="sldNum" sz="quarter" idx="10"/>
+          </p:nvPr>
+        </p:nvSpPr>
+        <p:spPr/>
+        <p:txBody>
+          <a:bodyPr/>
+          <a:lstStyle/>
+          <a:p>
+            <a:fld id="{F7021451-1387-4CA6-816F-3879F97B5CBC}" type="slidenum">
+              <a:rPr lang="en-US"/>
+              <a:t>15</a:t>
             </a:fld>
             <a:endParaRPr lang="en-US"/>
           </a:p>
@@ -3886,8 +3975,8 @@
         </p:nvSpPr>
         <p:spPr>
           <a:xfrm>
-            <a:off x="640080" y="365760"/>
-            <a:ext cx="5486400" cy="548640"/>
+            <a:off x="640080" y="347472"/>
+            <a:ext cx="5486400" cy="502920"/>
           </a:xfrm>
           <a:prstGeom prst="rect">
             <a:avLst/>
@@ -3925,8 +4014,8 @@
         </p:nvSpPr>
         <p:spPr>
           <a:xfrm>
-            <a:off x="640080" y="914400"/>
-            <a:ext cx="10972800" cy="320040"/>
+            <a:off x="640080" y="868680"/>
+            <a:ext cx="10972800" cy="274320"/>
           </a:xfrm>
           <a:prstGeom prst="rect">
             <a:avLst/>
@@ -3942,7 +4031,7 @@
               <a:buNone/>
             </a:pPr>
             <a:r>
-              <a:rPr lang="en-US" sz="1200" dirty="0">
+              <a:rPr lang="en-US" sz="1100" dirty="0">
                 <a:solidFill>
                   <a:srgbClr val="6B6B6B"/>
                 </a:solidFill>
@@ -3950,9 +4039,9 @@
                 <a:ea typeface="Microsoft YaHei" pitchFamily="34" charset="-122"/>
                 <a:cs typeface="Microsoft YaHei" pitchFamily="34" charset="-120"/>
               </a:rPr>
-              <a:t>「方向」= 是否符合「IL18 高 + CASP1 低」这一前提；「证据」= 支持该方向的独立参考来源有多少、是否一致。两者分开看。</a:t>
-            </a:r>
-            <a:endParaRPr lang="en-US" sz="1200" dirty="0"/>
+              <a:t>每行都是可自行核对的观察，不是判定标签。括号内为「阳性细胞 / 分析细胞」，均为合并全部供体的检出率。</a:t>
+            </a:r>
+            <a:endParaRPr lang="en-US" sz="1100" dirty="0"/>
           </a:p>
         </p:txBody>
       </p:sp>
@@ -3964,7 +4053,7 @@
         </p:nvSpPr>
         <p:spPr>
           <a:xfrm>
-            <a:off x="731520" y="1298448"/>
+            <a:off x="685800" y="1261872"/>
             <a:ext cx="2834640" cy="274320"/>
           </a:xfrm>
           <a:prstGeom prst="rect">
@@ -3981,7 +4070,172 @@
               <a:buNone/>
             </a:pPr>
             <a:r>
-              <a:rPr lang="en-US" sz="1350" b="1" dirty="0">
+              <a:rPr lang="en-US" sz="1300" b="1" dirty="0">
+                <a:solidFill>
+                  <a:srgbClr val="9A2B2B"/>
+                </a:solidFill>
+                <a:latin typeface="Microsoft YaHei" pitchFamily="34" charset="0"/>
+                <a:ea typeface="Microsoft YaHei" pitchFamily="34" charset="-122"/>
+                <a:cs typeface="Microsoft YaHei" pitchFamily="34" charset="-120"/>
+              </a:rPr>
+              <a:t>一条通则</a:t>
+            </a:r>
+            <a:endParaRPr lang="en-US" sz="1300" dirty="0"/>
+          </a:p>
+        </p:txBody>
+      </p:sp>
+      <p:sp>
+        <p:nvSpPr>
+          <p:cNvPr id="5" name="Text 3"/>
+          <p:cNvSpPr txBox="1"/>
+          <p:nvPr/>
+        </p:nvSpPr>
+        <p:spPr>
+          <a:xfrm>
+            <a:off x="685800" y="1508760"/>
+            <a:ext cx="2834640" cy="566928"/>
+          </a:xfrm>
+          <a:prstGeom prst="rect">
+            <a:avLst/>
+          </a:prstGeom>
+          <a:noFill/>
+          <a:ln/>
+        </p:spPr>
+        <p:txBody>
+          <a:bodyPr wrap="square" rtlCol="0" anchor="t"/>
+          <a:lstStyle/>
+          <a:p>
+            <a:pPr indent="0" marL="0">
+              <a:lnSpc>
+                <a:spcPct val="112000"/>
+              </a:lnSpc>
+              <a:buNone/>
+            </a:pPr>
+            <a:r>
+              <a:rPr lang="en-US" sz="950" dirty="0">
+                <a:solidFill>
+                  <a:srgbClr val="6B6B6B"/>
+                </a:solidFill>
+                <a:latin typeface="Microsoft YaHei" pitchFamily="34" charset="0"/>
+                <a:ea typeface="Microsoft YaHei" pitchFamily="34" charset="-122"/>
+                <a:cs typeface="Microsoft YaHei" pitchFamily="34" charset="-120"/>
+              </a:rPr>
+              <a:t>不依赖环境 RNA 校正与检出下限</a:t>
+            </a:r>
+            <a:endParaRPr lang="en-US" sz="950" dirty="0"/>
+          </a:p>
+        </p:txBody>
+      </p:sp>
+      <p:sp>
+        <p:nvSpPr>
+          <p:cNvPr id="6" name="Text 4"/>
+          <p:cNvSpPr txBox="1"/>
+          <p:nvPr/>
+        </p:nvSpPr>
+        <p:spPr>
+          <a:xfrm>
+            <a:off x="3063240" y="1229868"/>
+            <a:ext cx="8439912" cy="499262"/>
+          </a:xfrm>
+          <a:prstGeom prst="rect">
+            <a:avLst/>
+          </a:prstGeom>
+          <a:noFill/>
+          <a:ln/>
+        </p:spPr>
+        <p:txBody>
+          <a:bodyPr wrap="square" rtlCol="0" anchor="t"/>
+          <a:lstStyle/>
+          <a:p>
+            <a:pPr indent="0" marL="0">
+              <a:lnSpc>
+                <a:spcPct val="116000"/>
+              </a:lnSpc>
+              <a:buNone/>
+            </a:pPr>
+            <a:r>
+              <a:rPr lang="en-US" sz="1250" dirty="0">
+                <a:solidFill>
+                  <a:srgbClr val="1A1A1A"/>
+                </a:solidFill>
+                <a:latin typeface="Microsoft YaHei" pitchFamily="34" charset="0"/>
+                <a:ea typeface="Microsoft YaHei" pitchFamily="34" charset="-122"/>
+                <a:cs typeface="Microsoft YaHei" pitchFamily="34" charset="-120"/>
+              </a:rPr>
+              <a:t>髓系（巨噬 / 单核 / 树突状 / 小胶质 / 粒细胞）在两物种五器官共 62 个「细胞类型 × 分层」，方向符合的是 0 个：IL18 检出最高的细胞，同时也是 CASP1 检出最高的。</a:t>
+            </a:r>
+            <a:endParaRPr lang="en-US" sz="1250" dirty="0"/>
+          </a:p>
+        </p:txBody>
+      </p:sp>
+      <p:sp>
+        <p:nvSpPr>
+          <p:cNvPr id="7" name="Text 5"/>
+          <p:cNvSpPr txBox="1"/>
+          <p:nvPr/>
+        </p:nvSpPr>
+        <p:spPr>
+          <a:xfrm>
+            <a:off x="3063240" y="1729130"/>
+            <a:ext cx="8439912" cy="281635"/>
+          </a:xfrm>
+          <a:prstGeom prst="rect">
+            <a:avLst/>
+          </a:prstGeom>
+          <a:noFill/>
+          <a:ln/>
+        </p:spPr>
+        <p:txBody>
+          <a:bodyPr wrap="square" rtlCol="0" anchor="t"/>
+          <a:lstStyle/>
+          <a:p>
+            <a:pPr indent="0" marL="0">
+              <a:lnSpc>
+                <a:spcPct val="116000"/>
+              </a:lnSpc>
+              <a:buNone/>
+            </a:pPr>
+            <a:r>
+              <a:rPr lang="en-US" sz="1250" dirty="0">
+                <a:solidFill>
+                  <a:srgbClr val="1A1A1A"/>
+                </a:solidFill>
+                <a:latin typeface="Microsoft YaHei" pitchFamily="34" charset="0"/>
+                <a:ea typeface="Microsoft YaHei" pitchFamily="34" charset="-122"/>
+                <a:cs typeface="Microsoft YaHei" pitchFamily="34" charset="-120"/>
+              </a:rPr>
+              <a:t>这是共表达模式而不是「近零」断言，因此是本页最不吃边界条件的一条。</a:t>
+            </a:r>
+            <a:endParaRPr lang="en-US" sz="1250" dirty="0"/>
+          </a:p>
+        </p:txBody>
+      </p:sp>
+      <p:sp>
+        <p:nvSpPr>
+          <p:cNvPr id="8" name="Text 6"/>
+          <p:cNvSpPr txBox="1"/>
+          <p:nvPr/>
+        </p:nvSpPr>
+        <p:spPr>
+          <a:xfrm>
+            <a:off x="685800" y="2166214"/>
+            <a:ext cx="2834640" cy="274320"/>
+          </a:xfrm>
+          <a:prstGeom prst="rect">
+            <a:avLst/>
+          </a:prstGeom>
+          <a:noFill/>
+          <a:ln/>
+        </p:spPr>
+        <p:txBody>
+          <a:bodyPr wrap="square" rtlCol="0" anchor="ctr"/>
+          <a:lstStyle/>
+          <a:p>
+            <a:pPr indent="0" marL="0">
+              <a:buNone/>
+            </a:pPr>
+            <a:r>
+              <a:rPr lang="en-US" sz="1300" b="1" dirty="0">
                 <a:solidFill>
                   <a:srgbClr val="1B7A43"/>
                 </a:solidFill>
@@ -3989,9 +4243,691 @@
                 <a:ea typeface="Microsoft YaHei" pitchFamily="34" charset="-122"/>
                 <a:cs typeface="Microsoft YaHei" pitchFamily="34" charset="-120"/>
               </a:rPr>
-              <a:t>符合 · 多源一致</a:t>
-            </a:r>
-            <a:endParaRPr lang="en-US" sz="1350" dirty="0"/>
+              <a:t>小鼠：胶质在顶</a:t>
+            </a:r>
+            <a:endParaRPr lang="en-US" sz="1300" dirty="0"/>
+          </a:p>
+        </p:txBody>
+      </p:sp>
+      <p:sp>
+        <p:nvSpPr>
+          <p:cNvPr id="9" name="Text 7"/>
+          <p:cNvSpPr txBox="1"/>
+          <p:nvPr/>
+        </p:nvSpPr>
+        <p:spPr>
+          <a:xfrm>
+            <a:off x="685800" y="2413102"/>
+            <a:ext cx="2834640" cy="566928"/>
+          </a:xfrm>
+          <a:prstGeom prst="rect">
+            <a:avLst/>
+          </a:prstGeom>
+          <a:noFill/>
+          <a:ln/>
+        </p:spPr>
+        <p:txBody>
+          <a:bodyPr wrap="square" rtlCol="0" anchor="t"/>
+          <a:lstStyle/>
+          <a:p>
+            <a:pPr indent="0" marL="0">
+              <a:lnSpc>
+                <a:spcPct val="112000"/>
+              </a:lnSpc>
+              <a:buNone/>
+            </a:pPr>
+            <a:r>
+              <a:rPr lang="en-US" sz="950" dirty="0">
+                <a:solidFill>
+                  <a:srgbClr val="6B6B6B"/>
+                </a:solidFill>
+                <a:latin typeface="Microsoft YaHei" pitchFamily="34" charset="0"/>
+                <a:ea typeface="Microsoft YaHei" pitchFamily="34" charset="-122"/>
+                <a:cs typeface="Microsoft YaHei" pitchFamily="34" charset="-120"/>
+              </a:rPr>
+              <a:t>Yao 皮层+海马，真单细胞</a:t>
+            </a:r>
+            <a:endParaRPr lang="en-US" sz="950" dirty="0"/>
+          </a:p>
+        </p:txBody>
+      </p:sp>
+      <p:sp>
+        <p:nvSpPr>
+          <p:cNvPr id="10" name="Text 8"/>
+          <p:cNvSpPr txBox="1"/>
+          <p:nvPr/>
+        </p:nvSpPr>
+        <p:spPr>
+          <a:xfrm>
+            <a:off x="3063240" y="2134210"/>
+            <a:ext cx="8439912" cy="499262"/>
+          </a:xfrm>
+          <a:prstGeom prst="rect">
+            <a:avLst/>
+          </a:prstGeom>
+          <a:noFill/>
+          <a:ln/>
+        </p:spPr>
+        <p:txBody>
+          <a:bodyPr wrap="square" rtlCol="0" anchor="t"/>
+          <a:lstStyle/>
+          <a:p>
+            <a:pPr indent="0" marL="0">
+              <a:lnSpc>
+                <a:spcPct val="116000"/>
+              </a:lnSpc>
+              <a:buNone/>
+            </a:pPr>
+            <a:r>
+              <a:rPr lang="en-US" sz="1250" dirty="0">
+                <a:solidFill>
+                  <a:srgbClr val="1A1A1A"/>
+                </a:solidFill>
+                <a:latin typeface="Microsoft YaHei" pitchFamily="34" charset="0"/>
+                <a:ea typeface="Microsoft YaHei" pitchFamily="34" charset="-122"/>
+                <a:cs typeface="Microsoft YaHei" pitchFamily="34" charset="-120"/>
+              </a:rPr>
+              <a:t>星形胶质 IL18 2135/3766 = 56.7%（40 供体，分层内 1/24），CASP1 仅 2/3766，4 个参考来源无分歧；少突胶质 27.3%（2452/8987，55 供体），CASP1 2/8987。</a:t>
+            </a:r>
+            <a:endParaRPr lang="en-US" sz="1250" dirty="0"/>
+          </a:p>
+        </p:txBody>
+      </p:sp>
+      <p:sp>
+        <p:nvSpPr>
+          <p:cNvPr id="11" name="Text 9"/>
+          <p:cNvSpPr txBox="1"/>
+          <p:nvPr/>
+        </p:nvSpPr>
+        <p:spPr>
+          <a:xfrm>
+            <a:off x="3063240" y="2633472"/>
+            <a:ext cx="8439912" cy="499262"/>
+          </a:xfrm>
+          <a:prstGeom prst="rect">
+            <a:avLst/>
+          </a:prstGeom>
+          <a:noFill/>
+          <a:ln/>
+        </p:spPr>
+        <p:txBody>
+          <a:bodyPr wrap="square" rtlCol="0" anchor="t"/>
+          <a:lstStyle/>
+          <a:p>
+            <a:pPr indent="0" marL="0">
+              <a:lnSpc>
+                <a:spcPct val="116000"/>
+              </a:lnSpc>
+              <a:buNone/>
+            </a:pPr>
+            <a:r>
+              <a:rPr lang="en-US" sz="1250" dirty="0">
+                <a:solidFill>
+                  <a:srgbClr val="1A1A1A"/>
+                </a:solidFill>
+                <a:latin typeface="Microsoft YaHei" pitchFamily="34" charset="0"/>
+                <a:ea typeface="Microsoft YaHei" pitchFamily="34" charset="-122"/>
+                <a:cs typeface="Microsoft YaHei" pitchFamily="34" charset="-120"/>
+              </a:rPr>
+              <a:t>同为真单细胞的人皮层（78 供体）里这两类只有 4.8%（782/16319）与 1.4%（838/57855）——小鼠这一组在人不成立。</a:t>
+            </a:r>
+            <a:endParaRPr lang="en-US" sz="1250" dirty="0"/>
+          </a:p>
+        </p:txBody>
+      </p:sp>
+      <p:sp>
+        <p:nvSpPr>
+          <p:cNvPr id="12" name="Text 10"/>
+          <p:cNvSpPr txBox="1"/>
+          <p:nvPr/>
+        </p:nvSpPr>
+        <p:spPr>
+          <a:xfrm>
+            <a:off x="685800" y="3288182"/>
+            <a:ext cx="2834640" cy="274320"/>
+          </a:xfrm>
+          <a:prstGeom prst="rect">
+            <a:avLst/>
+          </a:prstGeom>
+          <a:noFill/>
+          <a:ln/>
+        </p:spPr>
+        <p:txBody>
+          <a:bodyPr wrap="square" rtlCol="0" anchor="ctr"/>
+          <a:lstStyle/>
+          <a:p>
+            <a:pPr indent="0" marL="0">
+              <a:buNone/>
+            </a:pPr>
+            <a:r>
+              <a:rPr lang="en-US" sz="1300" b="1" dirty="0">
+                <a:solidFill>
+                  <a:srgbClr val="1F5FA8"/>
+                </a:solidFill>
+                <a:latin typeface="Microsoft YaHei" pitchFamily="34" charset="0"/>
+                <a:ea typeface="Microsoft YaHei" pitchFamily="34" charset="-122"/>
+                <a:cs typeface="Microsoft YaHei" pitchFamily="34" charset="-120"/>
+              </a:rPr>
+              <a:t>人：神经元在顶</a:t>
+            </a:r>
+            <a:endParaRPr lang="en-US" sz="1300" dirty="0"/>
+          </a:p>
+        </p:txBody>
+      </p:sp>
+      <p:sp>
+        <p:nvSpPr>
+          <p:cNvPr id="13" name="Text 11"/>
+          <p:cNvSpPr txBox="1"/>
+          <p:nvPr/>
+        </p:nvSpPr>
+        <p:spPr>
+          <a:xfrm>
+            <a:off x="685800" y="3535070"/>
+            <a:ext cx="2834640" cy="566928"/>
+          </a:xfrm>
+          <a:prstGeom prst="rect">
+            <a:avLst/>
+          </a:prstGeom>
+          <a:noFill/>
+          <a:ln/>
+        </p:spPr>
+        <p:txBody>
+          <a:bodyPr wrap="square" rtlCol="0" anchor="t"/>
+          <a:lstStyle/>
+          <a:p>
+            <a:pPr indent="0" marL="0">
+              <a:lnSpc>
+                <a:spcPct val="112000"/>
+              </a:lnSpc>
+              <a:buNone/>
+            </a:pPr>
+            <a:r>
+              <a:rPr lang="en-US" sz="950" dirty="0">
+                <a:solidFill>
+                  <a:srgbClr val="6B6B6B"/>
+                </a:solidFill>
+                <a:latin typeface="Microsoft YaHei" pitchFamily="34" charset="0"/>
+                <a:ea typeface="Microsoft YaHei" pitchFamily="34" charset="-122"/>
+                <a:cs typeface="Microsoft YaHei" pitchFamily="34" charset="-120"/>
+              </a:rPr>
+              <a:t>Allen HVS 单细胞 + 三套单核复现</a:t>
+            </a:r>
+            <a:endParaRPr lang="en-US" sz="950" dirty="0"/>
+          </a:p>
+        </p:txBody>
+      </p:sp>
+      <p:sp>
+        <p:nvSpPr>
+          <p:cNvPr id="14" name="Text 12"/>
+          <p:cNvSpPr txBox="1"/>
+          <p:nvPr/>
+        </p:nvSpPr>
+        <p:spPr>
+          <a:xfrm>
+            <a:off x="3063240" y="3256178"/>
+            <a:ext cx="8439912" cy="499262"/>
+          </a:xfrm>
+          <a:prstGeom prst="rect">
+            <a:avLst/>
+          </a:prstGeom>
+          <a:noFill/>
+          <a:ln/>
+        </p:spPr>
+        <p:txBody>
+          <a:bodyPr wrap="square" rtlCol="0" anchor="t"/>
+          <a:lstStyle/>
+          <a:p>
+            <a:pPr indent="0" marL="0">
+              <a:lnSpc>
+                <a:spcPct val="116000"/>
+              </a:lnSpc>
+              <a:buNone/>
+            </a:pPr>
+            <a:r>
+              <a:rPr lang="en-US" sz="1250" dirty="0">
+                <a:solidFill>
+                  <a:srgbClr val="1A1A1A"/>
+                </a:solidFill>
+                <a:latin typeface="Microsoft YaHei" pitchFamily="34" charset="0"/>
+                <a:ea typeface="Microsoft YaHei" pitchFamily="34" charset="-122"/>
+                <a:cs typeface="Microsoft YaHei" pitchFamily="34" charset="-120"/>
+              </a:rPr>
+              <a:t>PV 中间神经元 IL18 5286/19711 = 26.8%（78 供体），CASP1 24/19711；另一套 234 供体数据复现 24.9%。L5 ET 在三套数据 31.8%–43.3%，CASP1 为 0/201、3/1358、5/2443。</a:t>
+            </a:r>
+            <a:endParaRPr lang="en-US" sz="1250" dirty="0"/>
+          </a:p>
+        </p:txBody>
+      </p:sp>
+      <p:sp>
+        <p:nvSpPr>
+          <p:cNvPr id="15" name="Text 13"/>
+          <p:cNvSpPr txBox="1"/>
+          <p:nvPr/>
+        </p:nvSpPr>
+        <p:spPr>
+          <a:xfrm>
+            <a:off x="3063240" y="3755441"/>
+            <a:ext cx="8439912" cy="499262"/>
+          </a:xfrm>
+          <a:prstGeom prst="rect">
+            <a:avLst/>
+          </a:prstGeom>
+          <a:noFill/>
+          <a:ln/>
+        </p:spPr>
+        <p:txBody>
+          <a:bodyPr wrap="square" rtlCol="0" anchor="t"/>
+          <a:lstStyle/>
+          <a:p>
+            <a:pPr indent="0" marL="0">
+              <a:lnSpc>
+                <a:spcPct val="116000"/>
+              </a:lnSpc>
+              <a:buNone/>
+            </a:pPr>
+            <a:r>
+              <a:rPr lang="en-US" sz="1250" dirty="0">
+                <a:solidFill>
+                  <a:srgbClr val="1A1A1A"/>
+                </a:solidFill>
+                <a:latin typeface="Microsoft YaHei" pitchFamily="34" charset="0"/>
+                <a:ea typeface="Microsoft YaHei" pitchFamily="34" charset="-122"/>
+                <a:cs typeface="Microsoft YaHei" pitchFamily="34" charset="-120"/>
+              </a:rPr>
+              <a:t>小鼠同名神经元 Casp1 同样近零，但 Il18 只有 2.2%（684/30434）与 5.5%（1333/24181）——人这一组在小鼠不成立。两条物种差异方向相反。</a:t>
+            </a:r>
+            <a:endParaRPr lang="en-US" sz="1250" dirty="0"/>
+          </a:p>
+        </p:txBody>
+      </p:sp>
+      <p:sp>
+        <p:nvSpPr>
+          <p:cNvPr id="16" name="Text 14"/>
+          <p:cNvSpPr txBox="1"/>
+          <p:nvPr/>
+        </p:nvSpPr>
+        <p:spPr>
+          <a:xfrm>
+            <a:off x="685800" y="4410151"/>
+            <a:ext cx="2834640" cy="274320"/>
+          </a:xfrm>
+          <a:prstGeom prst="rect">
+            <a:avLst/>
+          </a:prstGeom>
+          <a:noFill/>
+          <a:ln/>
+        </p:spPr>
+        <p:txBody>
+          <a:bodyPr wrap="square" rtlCol="0" anchor="ctr"/>
+          <a:lstStyle/>
+          <a:p>
+            <a:pPr indent="0" marL="0">
+              <a:buNone/>
+            </a:pPr>
+            <a:r>
+              <a:rPr lang="en-US" sz="1300" b="1" dirty="0">
+                <a:solidFill>
+                  <a:srgbClr val="4C87C4"/>
+                </a:solidFill>
+                <a:latin typeface="Microsoft YaHei" pitchFamily="34" charset="0"/>
+                <a:ea typeface="Microsoft YaHei" pitchFamily="34" charset="-122"/>
+                <a:cs typeface="Microsoft YaHei" pitchFamily="34" charset="-120"/>
+              </a:rPr>
+              <a:t>脑外 7 个</a:t>
+            </a:r>
+            <a:endParaRPr lang="en-US" sz="1300" dirty="0"/>
+          </a:p>
+        </p:txBody>
+      </p:sp>
+      <p:sp>
+        <p:nvSpPr>
+          <p:cNvPr id="17" name="Text 15"/>
+          <p:cNvSpPr txBox="1"/>
+          <p:nvPr/>
+        </p:nvSpPr>
+        <p:spPr>
+          <a:xfrm>
+            <a:off x="685800" y="4657039"/>
+            <a:ext cx="2834640" cy="566928"/>
+          </a:xfrm>
+          <a:prstGeom prst="rect">
+            <a:avLst/>
+          </a:prstGeom>
+          <a:noFill/>
+          <a:ln/>
+        </p:spPr>
+        <p:txBody>
+          <a:bodyPr wrap="square" rtlCol="0" anchor="t"/>
+          <a:lstStyle/>
+          <a:p>
+            <a:pPr indent="0" marL="0">
+              <a:lnSpc>
+                <a:spcPct val="112000"/>
+              </a:lnSpc>
+              <a:buNone/>
+            </a:pPr>
+            <a:r>
+              <a:rPr lang="en-US" sz="950" dirty="0">
+                <a:solidFill>
+                  <a:srgbClr val="6B6B6B"/>
+                </a:solidFill>
+                <a:latin typeface="Microsoft YaHei" pitchFamily="34" charset="0"/>
+                <a:ea typeface="Microsoft YaHei" pitchFamily="34" charset="-122"/>
+                <a:cs typeface="Microsoft YaHei" pitchFamily="34" charset="-120"/>
+              </a:rPr>
+              <a:t>证据都只到单一来源或有分歧</a:t>
+            </a:r>
+            <a:endParaRPr lang="en-US" sz="950" dirty="0"/>
+          </a:p>
+        </p:txBody>
+      </p:sp>
+      <p:sp>
+        <p:nvSpPr>
+          <p:cNvPr id="18" name="Text 16"/>
+          <p:cNvSpPr txBox="1"/>
+          <p:nvPr/>
+        </p:nvSpPr>
+        <p:spPr>
+          <a:xfrm>
+            <a:off x="3063240" y="4378147"/>
+            <a:ext cx="8439912" cy="499262"/>
+          </a:xfrm>
+          <a:prstGeom prst="rect">
+            <a:avLst/>
+          </a:prstGeom>
+          <a:noFill/>
+          <a:ln/>
+        </p:spPr>
+        <p:txBody>
+          <a:bodyPr wrap="square" rtlCol="0" anchor="t"/>
+          <a:lstStyle/>
+          <a:p>
+            <a:pPr indent="0" marL="0">
+              <a:lnSpc>
+                <a:spcPct val="116000"/>
+              </a:lnSpc>
+              <a:buNone/>
+            </a:pPr>
+            <a:r>
+              <a:rPr lang="en-US" sz="1250" dirty="0">
+                <a:solidFill>
+                  <a:srgbClr val="1A1A1A"/>
+                </a:solidFill>
+                <a:latin typeface="Microsoft YaHei" pitchFamily="34" charset="0"/>
+                <a:ea typeface="Microsoft YaHei" pitchFamily="34" charset="-122"/>
+                <a:cs typeface="Microsoft YaHei" pitchFamily="34" charset="-120"/>
+              </a:rPr>
+              <a:t>人肺肥大细胞 34.9%（1851/5299，44 供体）、CASP1 2.60%：4 个参考来源里只有 HPA 组织图谱支持近零（29.9 倍），两个 ex vivo 分选来源都测到 CASP1（3.82 与 4.48 倍）。</a:t>
+            </a:r>
+            <a:endParaRPr lang="en-US" sz="1250" dirty="0"/>
+          </a:p>
+        </p:txBody>
+      </p:sp>
+      <p:sp>
+        <p:nvSpPr>
+          <p:cNvPr id="19" name="Text 17"/>
+          <p:cNvSpPr txBox="1"/>
+          <p:nvPr/>
+        </p:nvSpPr>
+        <p:spPr>
+          <a:xfrm>
+            <a:off x="3063240" y="4877410"/>
+            <a:ext cx="8439912" cy="499262"/>
+          </a:xfrm>
+          <a:prstGeom prst="rect">
+            <a:avLst/>
+          </a:prstGeom>
+          <a:noFill/>
+          <a:ln/>
+        </p:spPr>
+        <p:txBody>
+          <a:bodyPr wrap="square" rtlCol="0" anchor="t"/>
+          <a:lstStyle/>
+          <a:p>
+            <a:pPr indent="0" marL="0">
+              <a:lnSpc>
+                <a:spcPct val="116000"/>
+              </a:lnSpc>
+              <a:buNone/>
+            </a:pPr>
+            <a:r>
+              <a:rPr lang="en-US" sz="1250" dirty="0">
+                <a:solidFill>
+                  <a:srgbClr val="1A1A1A"/>
+                </a:solidFill>
+                <a:latin typeface="Microsoft YaHei" pitchFamily="34" charset="0"/>
+                <a:ea typeface="Microsoft YaHei" pitchFamily="34" charset="-122"/>
+                <a:cs typeface="Microsoft YaHei" pitchFamily="34" charset="-120"/>
+              </a:rPr>
+              <a:t>人肺 AT1 与人胰腺腺泡各只有 1 个参考来源，且都写明「未进候选（CASP1 未进最低三分位）」——靠参考层补回，不是通过了筛选。小鼠胰岛 δ 细胞 6 个来源中 4 支持、1 分歧；人胰岛 δ 细胞 IL18 仅 8/4677，不复现。</a:t>
+            </a:r>
+            <a:endParaRPr lang="en-US" sz="1250" dirty="0"/>
+          </a:p>
+        </p:txBody>
+      </p:sp>
+      <p:sp>
+        <p:nvSpPr>
+          <p:cNvPr id="20" name="Text 18"/>
+          <p:cNvSpPr txBox="1"/>
+          <p:nvPr/>
+        </p:nvSpPr>
+        <p:spPr>
+          <a:xfrm>
+            <a:off x="3063240" y="5376672"/>
+            <a:ext cx="8439912" cy="499262"/>
+          </a:xfrm>
+          <a:prstGeom prst="rect">
+            <a:avLst/>
+          </a:prstGeom>
+          <a:noFill/>
+          <a:ln/>
+        </p:spPr>
+        <p:txBody>
+          <a:bodyPr wrap="square" rtlCol="0" anchor="t"/>
+          <a:lstStyle/>
+          <a:p>
+            <a:pPr indent="0" marL="0">
+              <a:lnSpc>
+                <a:spcPct val="116000"/>
+              </a:lnSpc>
+              <a:buNone/>
+            </a:pPr>
+            <a:r>
+              <a:rPr lang="en-US" sz="1250" dirty="0">
+                <a:solidFill>
+                  <a:srgbClr val="1A1A1A"/>
+                </a:solidFill>
+                <a:latin typeface="Microsoft YaHei" pitchFamily="34" charset="0"/>
+                <a:ea typeface="Microsoft YaHei" pitchFamily="34" charset="-122"/>
+                <a:cs typeface="Microsoft YaHei" pitchFamily="34" charset="-120"/>
+              </a:rPr>
+              <a:t>另 4 类（人脑血管软脑膜、人肝巨核-红系祖、人肺泡外膜成纤维、小鼠 Cajal-Retzius）参考层查不到（n_ref_sources = 0）。</a:t>
+            </a:r>
+            <a:endParaRPr lang="en-US" sz="1250" dirty="0"/>
+          </a:p>
+        </p:txBody>
+      </p:sp>
+      <p:sp>
+        <p:nvSpPr>
+          <p:cNvPr id="21" name="Text 19"/>
+          <p:cNvSpPr txBox="1"/>
+          <p:nvPr/>
+        </p:nvSpPr>
+        <p:spPr>
+          <a:xfrm>
+            <a:off x="685800" y="6382512"/>
+            <a:ext cx="10881360" cy="310896"/>
+          </a:xfrm>
+          <a:prstGeom prst="rect">
+            <a:avLst/>
+          </a:prstGeom>
+          <a:noFill/>
+          <a:ln/>
+        </p:spPr>
+        <p:txBody>
+          <a:bodyPr wrap="square" rtlCol="0" anchor="ctr"/>
+          <a:lstStyle/>
+          <a:p>
+            <a:pPr indent="0" marL="0">
+              <a:buNone/>
+            </a:pPr>
+            <a:r>
+              <a:rPr lang="en-US" sz="1050" dirty="0">
+                <a:solidFill>
+                  <a:srgbClr val="9AA0A6"/>
+                </a:solidFill>
+                <a:latin typeface="Microsoft YaHei" pitchFamily="34" charset="0"/>
+                <a:ea typeface="Microsoft YaHei" pitchFamily="34" charset="-122"/>
+                <a:cs typeface="Microsoft YaHei" pitchFamily="34" charset="-120"/>
+              </a:rPr>
+              <a:t>32 行判定按「同一细胞类型跨分层」折叠为 22 个类型：15 个方向符合（人 10 / 小鼠 5，两边零重合），7 个不符合。完整 32 行见 results/answer_table.tsv。</a:t>
+            </a:r>
+            <a:endParaRPr lang="en-US" sz="1050" dirty="0"/>
+          </a:p>
+        </p:txBody>
+      </p:sp>
+    </p:spTree>
+  </p:cSld>
+  <p:clrMapOvr>
+    <a:masterClrMapping/>
+  </p:clrMapOvr>
+</p:sld>
+</file>
+
+<file path=ppt/slides/slide15.xml><?xml version="1.0" encoding="utf-8"?>
+<p:sld xmlns:a="http://schemas.openxmlformats.org/drawingml/2006/main" xmlns:r="http://schemas.openxmlformats.org/officeDocument/2006/relationships" xmlns:p="http://schemas.openxmlformats.org/presentationml/2006/main">
+  <p:cSld name="Slide 15">
+    <p:spTree>
+      <p:nvGrpSpPr>
+        <p:cNvPr id="1" name=""/>
+        <p:cNvGrpSpPr/>
+        <p:nvPr/>
+      </p:nvGrpSpPr>
+      <p:grpSpPr>
+        <a:xfrm>
+          <a:off x="0" y="0"/>
+          <a:ext cx="0" cy="0"/>
+          <a:chOff x="0" y="0"/>
+          <a:chExt cx="0" cy="0"/>
+        </a:xfrm>
+      </p:grpSpPr>
+      <p:sp>
+        <p:nvSpPr>
+          <p:cNvPr id="2" name="Text 0"/>
+          <p:cNvSpPr txBox="1"/>
+          <p:nvPr/>
+        </p:nvSpPr>
+        <p:spPr>
+          <a:xfrm>
+            <a:off x="640080" y="347472"/>
+            <a:ext cx="8229600" cy="502920"/>
+          </a:xfrm>
+          <a:prstGeom prst="rect">
+            <a:avLst/>
+          </a:prstGeom>
+          <a:noFill/>
+          <a:ln/>
+        </p:spPr>
+        <p:txBody>
+          <a:bodyPr wrap="square" rtlCol="0" anchor="ctr"/>
+          <a:lstStyle/>
+          <a:p>
+            <a:pPr indent="0" marL="0">
+              <a:buNone/>
+            </a:pPr>
+            <a:r>
+              <a:rPr lang="en-US" sz="2600" b="1" dirty="0">
+                <a:solidFill>
+                  <a:srgbClr val="1A1A1A"/>
+                </a:solidFill>
+                <a:latin typeface="Microsoft YaHei" pitchFamily="34" charset="0"/>
+                <a:ea typeface="Microsoft YaHei" pitchFamily="34" charset="-122"/>
+                <a:cs typeface="Microsoft YaHei" pitchFamily="34" charset="-120"/>
+              </a:rPr>
+              <a:t>这份名单怎么用，以及它不是什么</a:t>
+            </a:r>
+            <a:endParaRPr lang="en-US" sz="2600" dirty="0"/>
+          </a:p>
+        </p:txBody>
+      </p:sp>
+      <p:sp>
+        <p:nvSpPr>
+          <p:cNvPr id="3" name="Text 1"/>
+          <p:cNvSpPr txBox="1"/>
+          <p:nvPr/>
+        </p:nvSpPr>
+        <p:spPr>
+          <a:xfrm>
+            <a:off x="685800" y="1078992"/>
+            <a:ext cx="2834640" cy="274320"/>
+          </a:xfrm>
+          <a:prstGeom prst="rect">
+            <a:avLst/>
+          </a:prstGeom>
+          <a:noFill/>
+          <a:ln/>
+        </p:spPr>
+        <p:txBody>
+          <a:bodyPr wrap="square" rtlCol="0" anchor="ctr"/>
+          <a:lstStyle/>
+          <a:p>
+            <a:pPr indent="0" marL="0">
+              <a:buNone/>
+            </a:pPr>
+            <a:r>
+              <a:rPr lang="en-US" sz="1300" b="1" dirty="0">
+                <a:solidFill>
+                  <a:srgbClr val="1F5FA8"/>
+                </a:solidFill>
+                <a:latin typeface="Microsoft YaHei" pitchFamily="34" charset="0"/>
+                <a:ea typeface="Microsoft YaHei" pitchFamily="34" charset="-122"/>
+                <a:cs typeface="Microsoft YaHei" pitchFamily="34" charset="-120"/>
+              </a:rPr>
+              <a:t>弱在哪里</a:t>
+            </a:r>
+            <a:endParaRPr lang="en-US" sz="1300" dirty="0"/>
+          </a:p>
+        </p:txBody>
+      </p:sp>
+      <p:sp>
+        <p:nvSpPr>
+          <p:cNvPr id="4" name="Text 2"/>
+          <p:cNvSpPr txBox="1"/>
+          <p:nvPr/>
+        </p:nvSpPr>
+        <p:spPr>
+          <a:xfrm>
+            <a:off x="685800" y="1325880"/>
+            <a:ext cx="2834640" cy="566928"/>
+          </a:xfrm>
+          <a:prstGeom prst="rect">
+            <a:avLst/>
+          </a:prstGeom>
+          <a:noFill/>
+          <a:ln/>
+        </p:spPr>
+        <p:txBody>
+          <a:bodyPr wrap="square" rtlCol="0" anchor="t"/>
+          <a:lstStyle/>
+          <a:p>
+            <a:pPr indent="0" marL="0">
+              <a:lnSpc>
+                <a:spcPct val="112000"/>
+              </a:lnSpc>
+              <a:buNone/>
+            </a:pPr>
+            <a:r>
+              <a:rPr lang="en-US" sz="950" dirty="0">
+                <a:solidFill>
+                  <a:srgbClr val="6B6B6B"/>
+                </a:solidFill>
+                <a:latin typeface="Microsoft YaHei" pitchFamily="34" charset="0"/>
+                <a:ea typeface="Microsoft YaHei" pitchFamily="34" charset="-122"/>
+                <a:cs typeface="Microsoft YaHei" pitchFamily="34" charset="-120"/>
+              </a:rPr>
+              <a:t>是没人分选测过，不是检出率低</a:t>
+            </a:r>
+            <a:endParaRPr lang="en-US" sz="950" dirty="0"/>
           </a:p>
         </p:txBody>
       </p:sp>
@@ -4003,8 +4939,8 @@
         </p:nvSpPr>
         <p:spPr>
           <a:xfrm>
-            <a:off x="731520" y="1554480"/>
-            <a:ext cx="2834640" cy="457200"/>
+            <a:off x="3063240" y="1046988"/>
+            <a:ext cx="8439912" cy="499262"/>
           </a:xfrm>
           <a:prstGeom prst="rect">
             <a:avLst/>
@@ -4018,11 +4954,134 @@
           <a:p>
             <a:pPr indent="0" marL="0">
               <a:lnSpc>
-                <a:spcPct val="110000"/>
+                <a:spcPct val="116000"/>
               </a:lnSpc>
               <a:buNone/>
             </a:pPr>
             <a:r>
+              <a:rPr lang="en-US" sz="1250" dirty="0">
+                <a:solidFill>
+                  <a:srgbClr val="1A1A1A"/>
+                </a:solidFill>
+                <a:latin typeface="Microsoft YaHei" pitchFamily="34" charset="0"/>
+                <a:ea typeface="Microsoft YaHei" pitchFamily="34" charset="-122"/>
+                <a:cs typeface="Microsoft YaHei" pitchFamily="34" charset="-120"/>
+              </a:rPr>
+              <a:t>8 行「符合 × 多源一致」全部在脑，不等于脑的信号更强：人肺 AT1 与人胰腺腺泡各只有 1 个参考来源，另有 4 类一个都没有，而小鼠星形胶质有 4 个。</a:t>
+            </a:r>
+            <a:endParaRPr lang="en-US" sz="1250" dirty="0"/>
+          </a:p>
+        </p:txBody>
+      </p:sp>
+      <p:sp>
+        <p:nvSpPr>
+          <p:cNvPr id="6" name="Text 4"/>
+          <p:cNvSpPr txBox="1"/>
+          <p:nvPr/>
+        </p:nvSpPr>
+        <p:spPr>
+          <a:xfrm>
+            <a:off x="3063240" y="1546250"/>
+            <a:ext cx="8439912" cy="499262"/>
+          </a:xfrm>
+          <a:prstGeom prst="rect">
+            <a:avLst/>
+          </a:prstGeom>
+          <a:noFill/>
+          <a:ln/>
+        </p:spPr>
+        <p:txBody>
+          <a:bodyPr wrap="square" rtlCol="0" anchor="t"/>
+          <a:lstStyle/>
+          <a:p>
+            <a:pPr indent="0" marL="0">
+              <a:lnSpc>
+                <a:spcPct val="116000"/>
+              </a:lnSpc>
+              <a:buNone/>
+            </a:pPr>
+            <a:r>
+              <a:rPr lang="en-US" sz="1250" dirty="0">
+                <a:solidFill>
+                  <a:srgbClr val="1A1A1A"/>
+                </a:solidFill>
+                <a:latin typeface="Microsoft YaHei" pitchFamily="34" charset="0"/>
+                <a:ea typeface="Microsoft YaHei" pitchFamily="34" charset="-122"/>
+                <a:cs typeface="Microsoft YaHei" pitchFamily="34" charset="-120"/>
+              </a:rPr>
+              <a:t>要把一格从单一来源推到多源一致，缺的是具体一次测量：人肺肥大细胞 / AT1 / 人胰腺腺泡各缺一次新鲜原代分选后的 CASP1 定量；小鼠胰岛 δ 缺的是复核那一个分歧来源（比值 5.64）。</a:t>
+            </a:r>
+            <a:endParaRPr lang="en-US" sz="1250" dirty="0"/>
+          </a:p>
+        </p:txBody>
+      </p:sp>
+      <p:sp>
+        <p:nvSpPr>
+          <p:cNvPr id="7" name="Text 5"/>
+          <p:cNvSpPr txBox="1"/>
+          <p:nvPr/>
+        </p:nvSpPr>
+        <p:spPr>
+          <a:xfrm>
+            <a:off x="685800" y="2200961"/>
+            <a:ext cx="2834640" cy="274320"/>
+          </a:xfrm>
+          <a:prstGeom prst="rect">
+            <a:avLst/>
+          </a:prstGeom>
+          <a:noFill/>
+          <a:ln/>
+        </p:spPr>
+        <p:txBody>
+          <a:bodyPr wrap="square" rtlCol="0" anchor="ctr"/>
+          <a:lstStyle/>
+          <a:p>
+            <a:pPr indent="0" marL="0">
+              <a:buNone/>
+            </a:pPr>
+            <a:r>
+              <a:rPr lang="en-US" sz="1300" b="1" dirty="0">
+                <a:solidFill>
+                  <a:srgbClr val="1B7A43"/>
+                </a:solidFill>
+                <a:latin typeface="Microsoft YaHei" pitchFamily="34" charset="0"/>
+                <a:ea typeface="Microsoft YaHei" pitchFamily="34" charset="-122"/>
+                <a:cs typeface="Microsoft YaHei" pitchFamily="34" charset="-120"/>
+              </a:rPr>
+              <a:t>「近零」相对于什么</a:t>
+            </a:r>
+            <a:endParaRPr lang="en-US" sz="1300" dirty="0"/>
+          </a:p>
+        </p:txBody>
+      </p:sp>
+      <p:sp>
+        <p:nvSpPr>
+          <p:cNvPr id="8" name="Text 6"/>
+          <p:cNvSpPr txBox="1"/>
+          <p:nvPr/>
+        </p:nvSpPr>
+        <p:spPr>
+          <a:xfrm>
+            <a:off x="685800" y="2447849"/>
+            <a:ext cx="2834640" cy="566928"/>
+          </a:xfrm>
+          <a:prstGeom prst="rect">
+            <a:avLst/>
+          </a:prstGeom>
+          <a:noFill/>
+          <a:ln/>
+        </p:spPr>
+        <p:txBody>
+          <a:bodyPr wrap="square" rtlCol="0" anchor="t"/>
+          <a:lstStyle/>
+          <a:p>
+            <a:pPr indent="0" marL="0">
+              <a:lnSpc>
+                <a:spcPct val="112000"/>
+              </a:lnSpc>
+              <a:buNone/>
+            </a:pPr>
+            <a:r>
               <a:rPr lang="en-US" sz="950" dirty="0">
                 <a:solidFill>
                   <a:srgbClr val="6B6B6B"/>
@@ -4031,7 +5090,7 @@
                 <a:ea typeface="Microsoft YaHei" pitchFamily="34" charset="-122"/>
                 <a:cs typeface="Microsoft YaHei" pitchFamily="34" charset="-120"/>
               </a:rPr>
-              <a:t>≥2 个独立来源，无一例外</a:t>
+              <a:t>同一测法下的标尺与阳性对照</a:t>
             </a:r>
             <a:endParaRPr lang="en-US" sz="950" dirty="0"/>
           </a:p>
@@ -4039,14 +5098,14 @@
       </p:sp>
       <p:sp>
         <p:nvSpPr>
-          <p:cNvPr id="6" name="Text 4"/>
-          <p:cNvSpPr txBox="1"/>
-          <p:nvPr/>
-        </p:nvSpPr>
-        <p:spPr>
-          <a:xfrm>
-            <a:off x="3749040" y="1261872"/>
-            <a:ext cx="7772400" cy="658368"/>
+          <p:cNvPr id="9" name="Text 7"/>
+          <p:cNvSpPr txBox="1"/>
+          <p:nvPr/>
+        </p:nvSpPr>
+        <p:spPr>
+          <a:xfrm>
+            <a:off x="3063240" y="2168957"/>
+            <a:ext cx="8439912" cy="499262"/>
           </a:xfrm>
           <a:prstGeom prst="rect">
             <a:avLst/>
@@ -4060,7 +5119,7 @@
           <a:p>
             <a:pPr indent="0" marL="0">
               <a:lnSpc>
-                <a:spcPct val="115000"/>
+                <a:spcPct val="116000"/>
               </a:lnSpc>
               <a:buNone/>
             </a:pPr>
@@ -4073,7 +5132,7 @@
                 <a:ea typeface="Microsoft YaHei" pitchFamily="34" charset="-122"/>
                 <a:cs typeface="Microsoft YaHei" pitchFamily="34" charset="-120"/>
               </a:rPr>
-              <a:t>小鼠脑 星形胶质 · 人脑 L5 ET 投射神经元 · 小鼠脑 少突胶质 · 人脑 PV 中间神经元 · 人脑 枝形 PV 中间神经元</a:t>
+              <a:t>阳性对照：同一分选、同一供体、同一建库下，L5a IT 锥体神经元 CASP1 = 8.34 CPM（25 个文库 24 个非零）——不是测不出来，是亚类特异的。</a:t>
             </a:r>
             <a:endParaRPr lang="en-US" sz="1250" dirty="0"/>
           </a:p>
@@ -4081,13 +5140,55 @@
       </p:sp>
       <p:sp>
         <p:nvSpPr>
-          <p:cNvPr id="7" name="Text 5"/>
-          <p:cNvSpPr txBox="1"/>
-          <p:nvPr/>
-        </p:nvSpPr>
-        <p:spPr>
-          <a:xfrm>
-            <a:off x="731520" y="2048256"/>
+          <p:cNvPr id="10" name="Text 8"/>
+          <p:cNvSpPr txBox="1"/>
+          <p:nvPr/>
+        </p:nvSpPr>
+        <p:spPr>
+          <a:xfrm>
+            <a:off x="3063240" y="2668219"/>
+            <a:ext cx="8439912" cy="499262"/>
+          </a:xfrm>
+          <a:prstGeom prst="rect">
+            <a:avLst/>
+          </a:prstGeom>
+          <a:noFill/>
+          <a:ln/>
+        </p:spPr>
+        <p:txBody>
+          <a:bodyPr wrap="square" rtlCol="0" anchor="t"/>
+          <a:lstStyle/>
+          <a:p>
+            <a:pPr indent="0" marL="0">
+              <a:lnSpc>
+                <a:spcPct val="116000"/>
+              </a:lnSpc>
+              <a:buNone/>
+            </a:pPr>
+            <a:r>
+              <a:rPr lang="en-US" sz="1250" dirty="0">
+                <a:solidFill>
+                  <a:srgbClr val="1A1A1A"/>
+                </a:solidFill>
+                <a:latin typeface="Microsoft YaHei" pitchFamily="34" charset="0"/>
+                <a:ea typeface="Microsoft YaHei" pitchFamily="34" charset="-122"/>
+                <a:cs typeface="Microsoft YaHei" pitchFamily="34" charset="-120"/>
+              </a:rPr>
+              <a:t>标尺：静息小鼠小胶质 Casp1 约 50–61 CPM / 17% 细胞。小鼠 CNS 里「髓系高」与「零底线」相差约 50 倍，不是 1000 倍。</a:t>
+            </a:r>
+            <a:endParaRPr lang="en-US" sz="1250" dirty="0"/>
+          </a:p>
+        </p:txBody>
+      </p:sp>
+      <p:sp>
+        <p:nvSpPr>
+          <p:cNvPr id="11" name="Text 9"/>
+          <p:cNvSpPr txBox="1"/>
+          <p:nvPr/>
+        </p:nvSpPr>
+        <p:spPr>
+          <a:xfrm>
+            <a:off x="685800" y="3322930"/>
             <a:ext cx="2834640" cy="274320"/>
           </a:xfrm>
           <a:prstGeom prst="rect">
@@ -4104,30 +5205,30 @@
               <a:buNone/>
             </a:pPr>
             <a:r>
-              <a:rPr lang="en-US" sz="1350" b="1" dirty="0">
-                <a:solidFill>
-                  <a:srgbClr val="2E8B57"/>
-                </a:solidFill>
-                <a:latin typeface="Microsoft YaHei" pitchFamily="34" charset="0"/>
-                <a:ea typeface="Microsoft YaHei" pitchFamily="34" charset="-122"/>
-                <a:cs typeface="Microsoft YaHei" pitchFamily="34" charset="-120"/>
-              </a:rPr>
-              <a:t>符合 · 多源有分歧</a:t>
-            </a:r>
-            <a:endParaRPr lang="en-US" sz="1350" dirty="0"/>
-          </a:p>
-        </p:txBody>
-      </p:sp>
-      <p:sp>
-        <p:nvSpPr>
-          <p:cNvPr id="8" name="Text 6"/>
-          <p:cNvSpPr txBox="1"/>
-          <p:nvPr/>
-        </p:nvSpPr>
-        <p:spPr>
-          <a:xfrm>
-            <a:off x="731520" y="2304288"/>
-            <a:ext cx="2834640" cy="457200"/>
+              <a:rPr lang="en-US" sz="1300" b="1" dirty="0">
+                <a:solidFill>
+                  <a:srgbClr val="9A2B2B"/>
+                </a:solidFill>
+                <a:latin typeface="Microsoft YaHei" pitchFamily="34" charset="0"/>
+                <a:ea typeface="Microsoft YaHei" pitchFamily="34" charset="-122"/>
+                <a:cs typeface="Microsoft YaHei" pitchFamily="34" charset="-120"/>
+              </a:rPr>
+              <a:t>四条不能省的边界</a:t>
+            </a:r>
+            <a:endParaRPr lang="en-US" sz="1300" dirty="0"/>
+          </a:p>
+        </p:txBody>
+      </p:sp>
+      <p:sp>
+        <p:nvSpPr>
+          <p:cNvPr id="12" name="Text 10"/>
+          <p:cNvSpPr txBox="1"/>
+          <p:nvPr/>
+        </p:nvSpPr>
+        <p:spPr>
+          <a:xfrm>
+            <a:off x="685800" y="3569818"/>
+            <a:ext cx="2834640" cy="566928"/>
           </a:xfrm>
           <a:prstGeom prst="rect">
             <a:avLst/>
@@ -4141,7 +5242,7 @@
           <a:p>
             <a:pPr indent="0" marL="0">
               <a:lnSpc>
-                <a:spcPct val="110000"/>
+                <a:spcPct val="112000"/>
               </a:lnSpc>
               <a:buNone/>
             </a:pPr>
@@ -4154,7 +5255,7 @@
                 <a:ea typeface="Microsoft YaHei" pitchFamily="34" charset="-122"/>
                 <a:cs typeface="Microsoft YaHei" pitchFamily="34" charset="-120"/>
               </a:rPr>
-              <a:t>多数来源支持，但有来源测到 CASP1</a:t>
+              <a:t>规格 §0.2</a:t>
             </a:r>
             <a:endParaRPr lang="en-US" sz="950" dirty="0"/>
           </a:p>
@@ -4162,14 +5263,14 @@
       </p:sp>
       <p:sp>
         <p:nvSpPr>
-          <p:cNvPr id="9" name="Text 7"/>
-          <p:cNvSpPr txBox="1"/>
-          <p:nvPr/>
-        </p:nvSpPr>
-        <p:spPr>
-          <a:xfrm>
-            <a:off x="3749040" y="2011680"/>
-            <a:ext cx="7772400" cy="658368"/>
+          <p:cNvPr id="13" name="Text 11"/>
+          <p:cNvSpPr txBox="1"/>
+          <p:nvPr/>
+        </p:nvSpPr>
+        <p:spPr>
+          <a:xfrm>
+            <a:off x="3063240" y="3290926"/>
+            <a:ext cx="8439912" cy="281635"/>
           </a:xfrm>
           <a:prstGeom prst="rect">
             <a:avLst/>
@@ -4183,7 +5284,7 @@
           <a:p>
             <a:pPr indent="0" marL="0">
               <a:lnSpc>
-                <a:spcPct val="115000"/>
+                <a:spcPct val="116000"/>
               </a:lnSpc>
               <a:buNone/>
             </a:pPr>
@@ -4196,7 +5297,7 @@
                 <a:ea typeface="Microsoft YaHei" pitchFamily="34" charset="-122"/>
                 <a:cs typeface="Microsoft YaHei" pitchFamily="34" charset="-120"/>
               </a:rPr>
-              <a:t>人肺 肥大细胞 · 小鼠胰 胰岛 D(δ) 细胞 · 人脑 CGE 源中间神经元</a:t>
+              <a:t>IL18 转录本即 pro-IL-18 的转录信号，但 pro-IL-18 是储备型蛋白，转录水平与细胞内前体储量不成线性关系。</a:t>
             </a:r>
             <a:endParaRPr lang="en-US" sz="1250" dirty="0"/>
           </a:p>
@@ -4204,13 +5305,139 @@
       </p:sp>
       <p:sp>
         <p:nvSpPr>
-          <p:cNvPr id="10" name="Text 8"/>
-          <p:cNvSpPr txBox="1"/>
-          <p:nvPr/>
-        </p:nvSpPr>
-        <p:spPr>
-          <a:xfrm>
-            <a:off x="731520" y="2798064"/>
+          <p:cNvPr id="14" name="Text 12"/>
+          <p:cNvSpPr txBox="1"/>
+          <p:nvPr/>
+        </p:nvSpPr>
+        <p:spPr>
+          <a:xfrm>
+            <a:off x="3063240" y="3572561"/>
+            <a:ext cx="8439912" cy="499262"/>
+          </a:xfrm>
+          <a:prstGeom prst="rect">
+            <a:avLst/>
+          </a:prstGeom>
+          <a:noFill/>
+          <a:ln/>
+        </p:spPr>
+        <p:txBody>
+          <a:bodyPr wrap="square" rtlCol="0" anchor="t"/>
+          <a:lstStyle/>
+          <a:p>
+            <a:pPr indent="0" marL="0">
+              <a:lnSpc>
+                <a:spcPct val="116000"/>
+              </a:lnSpc>
+              <a:buNone/>
+            </a:pPr>
+            <a:r>
+              <a:rPr lang="en-US" sz="1250" dirty="0">
+                <a:solidFill>
+                  <a:srgbClr val="1A1A1A"/>
+                </a:solidFill>
+                <a:latin typeface="Microsoft YaHei" pitchFamily="34" charset="0"/>
+                <a:ea typeface="Microsoft YaHei" pitchFamily="34" charset="-122"/>
+                <a:cs typeface="Microsoft YaHei" pitchFamily="34" charset="-120"/>
+              </a:rPr>
+              <a:t>CASP1 是可诱导基因。本分析是静息基线筛选，静息近零不预测刺激后能否诱导——这一条只能靠带刺激的数据或实验解决。</a:t>
+            </a:r>
+            <a:endParaRPr lang="en-US" sz="1250" dirty="0"/>
+          </a:p>
+        </p:txBody>
+      </p:sp>
+      <p:sp>
+        <p:nvSpPr>
+          <p:cNvPr id="15" name="Text 13"/>
+          <p:cNvSpPr txBox="1"/>
+          <p:nvPr/>
+        </p:nvSpPr>
+        <p:spPr>
+          <a:xfrm>
+            <a:off x="3063240" y="4071823"/>
+            <a:ext cx="8439912" cy="499262"/>
+          </a:xfrm>
+          <a:prstGeom prst="rect">
+            <a:avLst/>
+          </a:prstGeom>
+          <a:noFill/>
+          <a:ln/>
+        </p:spPr>
+        <p:txBody>
+          <a:bodyPr wrap="square" rtlCol="0" anchor="t"/>
+          <a:lstStyle/>
+          <a:p>
+            <a:pPr indent="0" marL="0">
+              <a:lnSpc>
+                <a:spcPct val="116000"/>
+              </a:lnSpc>
+              <a:buNone/>
+            </a:pPr>
+            <a:r>
+              <a:rPr lang="en-US" sz="1250" dirty="0">
+                <a:solidFill>
+                  <a:srgbClr val="1A1A1A"/>
+                </a:solidFill>
+                <a:latin typeface="Microsoft YaHei" pitchFamily="34" charset="0"/>
+                <a:ea typeface="Microsoft YaHei" pitchFamily="34" charset="-122"/>
+                <a:cs typeface="Microsoft YaHei" pitchFamily="34" charset="-120"/>
+              </a:rPr>
+              <a:t>CASP3 的 mRNA 不反映 caspase-3 酶活性（酶原活化与 XIAP 抑制都在转录后）。本分析仅用它排除最低档，不是三重阳性门。</a:t>
+            </a:r>
+            <a:endParaRPr lang="en-US" sz="1250" dirty="0"/>
+          </a:p>
+        </p:txBody>
+      </p:sp>
+      <p:sp>
+        <p:nvSpPr>
+          <p:cNvPr id="16" name="Text 14"/>
+          <p:cNvSpPr txBox="1"/>
+          <p:nvPr/>
+        </p:nvSpPr>
+        <p:spPr>
+          <a:xfrm>
+            <a:off x="3063240" y="4571086"/>
+            <a:ext cx="8439912" cy="499262"/>
+          </a:xfrm>
+          <a:prstGeom prst="rect">
+            <a:avLst/>
+          </a:prstGeom>
+          <a:noFill/>
+          <a:ln/>
+        </p:spPr>
+        <p:txBody>
+          <a:bodyPr wrap="square" rtlCol="0" anchor="t"/>
+          <a:lstStyle/>
+          <a:p>
+            <a:pPr indent="0" marL="0">
+              <a:lnSpc>
+                <a:spcPct val="116000"/>
+              </a:lnSpc>
+              <a:buNone/>
+            </a:pPr>
+            <a:r>
+              <a:rPr lang="en-US" sz="1250" dirty="0">
+                <a:solidFill>
+                  <a:srgbClr val="1A1A1A"/>
+                </a:solidFill>
+                <a:latin typeface="Microsoft YaHei" pitchFamily="34" charset="0"/>
+                <a:ea typeface="Microsoft YaHei" pitchFamily="34" charset="-122"/>
+                <a:cs typeface="Microsoft YaHei" pitchFamily="34" charset="-120"/>
+              </a:rPr>
+              <a:t>未做环境 RNA 校正；人鼠之间、数据集之间、单核与单细胞之间只比名单不比数值。小鼠星形胶质的结论只覆盖皮层与海马：小脑 Bergmann 胶质 22.4 CPM、脊髓星形胶质 12.5–16.7 CPM 都测到 Casp1。</a:t>
+            </a:r>
+            <a:endParaRPr lang="en-US" sz="1250" dirty="0"/>
+          </a:p>
+        </p:txBody>
+      </p:sp>
+      <p:sp>
+        <p:nvSpPr>
+          <p:cNvPr id="17" name="Text 15"/>
+          <p:cNvSpPr txBox="1"/>
+          <p:nvPr/>
+        </p:nvSpPr>
+        <p:spPr>
+          <a:xfrm>
+            <a:off x="685800" y="5225796"/>
             <a:ext cx="2834640" cy="274320"/>
           </a:xfrm>
           <a:prstGeom prst="rect">
@@ -4227,30 +5454,30 @@
               <a:buNone/>
             </a:pPr>
             <a:r>
-              <a:rPr lang="en-US" sz="1350" b="1" dirty="0">
-                <a:solidFill>
-                  <a:srgbClr val="1F5FA8"/>
-                </a:solidFill>
-                <a:latin typeface="Microsoft YaHei" pitchFamily="34" charset="0"/>
-                <a:ea typeface="Microsoft YaHei" pitchFamily="34" charset="-122"/>
-                <a:cs typeface="Microsoft YaHei" pitchFamily="34" charset="-120"/>
-              </a:rPr>
-              <a:t>符合 · 单一来源</a:t>
-            </a:r>
-            <a:endParaRPr lang="en-US" sz="1350" dirty="0"/>
-          </a:p>
-        </p:txBody>
-      </p:sp>
-      <p:sp>
-        <p:nvSpPr>
-          <p:cNvPr id="11" name="Text 9"/>
-          <p:cNvSpPr txBox="1"/>
-          <p:nvPr/>
-        </p:nvSpPr>
-        <p:spPr>
-          <a:xfrm>
-            <a:off x="731520" y="3054096"/>
-            <a:ext cx="2834640" cy="457200"/>
+              <a:rPr lang="en-US" sz="1300" b="1" dirty="0">
+                <a:solidFill>
+                  <a:srgbClr val="6B6B6B"/>
+                </a:solidFill>
+                <a:latin typeface="Microsoft YaHei" pitchFamily="34" charset="0"/>
+                <a:ea typeface="Microsoft YaHei" pitchFamily="34" charset="-122"/>
+                <a:cs typeface="Microsoft YaHei" pitchFamily="34" charset="-120"/>
+              </a:rPr>
+              <a:t>名单有多硬</a:t>
+            </a:r>
+            <a:endParaRPr lang="en-US" sz="1300" dirty="0"/>
+          </a:p>
+        </p:txBody>
+      </p:sp>
+      <p:sp>
+        <p:nvSpPr>
+          <p:cNvPr id="18" name="Text 16"/>
+          <p:cNvSpPr txBox="1"/>
+          <p:nvPr/>
+        </p:nvSpPr>
+        <p:spPr>
+          <a:xfrm>
+            <a:off x="685800" y="5472684"/>
+            <a:ext cx="2834640" cy="566928"/>
           </a:xfrm>
           <a:prstGeom prst="rect">
             <a:avLst/>
@@ -4264,7 +5491,7 @@
           <a:p>
             <a:pPr indent="0" marL="0">
               <a:lnSpc>
-                <a:spcPct val="110000"/>
+                <a:spcPct val="112000"/>
               </a:lnSpc>
               <a:buNone/>
             </a:pPr>
@@ -4277,7 +5504,7 @@
                 <a:ea typeface="Microsoft YaHei" pitchFamily="34" charset="-122"/>
                 <a:cs typeface="Microsoft YaHei" pitchFamily="34" charset="-120"/>
               </a:rPr>
-              <a:t>仅 1 个来源支持</a:t>
+              <a:t>阈值与用途</a:t>
             </a:r>
             <a:endParaRPr lang="en-US" sz="950" dirty="0"/>
           </a:p>
@@ -4285,14 +5512,14 @@
       </p:sp>
       <p:sp>
         <p:nvSpPr>
-          <p:cNvPr id="12" name="Text 10"/>
-          <p:cNvSpPr txBox="1"/>
-          <p:nvPr/>
-        </p:nvSpPr>
-        <p:spPr>
-          <a:xfrm>
-            <a:off x="3749040" y="2761488"/>
-            <a:ext cx="7772400" cy="658368"/>
+          <p:cNvPr id="19" name="Text 17"/>
+          <p:cNvSpPr txBox="1"/>
+          <p:nvPr/>
+        </p:nvSpPr>
+        <p:spPr>
+          <a:xfrm>
+            <a:off x="3063240" y="5193792"/>
+            <a:ext cx="8439912" cy="281635"/>
           </a:xfrm>
           <a:prstGeom prst="rect">
             <a:avLst/>
@@ -4306,7 +5533,7 @@
           <a:p>
             <a:pPr indent="0" marL="0">
               <a:lnSpc>
-                <a:spcPct val="115000"/>
+                <a:spcPct val="116000"/>
               </a:lnSpc>
               <a:buNone/>
             </a:pPr>
@@ -4319,7 +5546,7 @@
                 <a:ea typeface="Microsoft YaHei" pitchFamily="34" charset="-122"/>
                 <a:cs typeface="Microsoft YaHei" pitchFamily="34" charset="-120"/>
               </a:rPr>
-              <a:t>人肺 AT1 肺泡上皮 · 人胰 胰腺腺泡细胞 · 小鼠胰 胰导管细胞</a:t>
+              <a:t>三分位与「CASP3 最低 20%」是工程取值、无生物学依据：换成四分位，候选数从 17 掉到 12。</a:t>
             </a:r>
             <a:endParaRPr lang="en-US" sz="1250" dirty="0"/>
           </a:p>
@@ -4327,53 +5554,14 @@
       </p:sp>
       <p:sp>
         <p:nvSpPr>
-          <p:cNvPr id="13" name="Text 11"/>
-          <p:cNvSpPr txBox="1"/>
-          <p:nvPr/>
-        </p:nvSpPr>
-        <p:spPr>
-          <a:xfrm>
-            <a:off x="731520" y="3547872"/>
-            <a:ext cx="2834640" cy="274320"/>
-          </a:xfrm>
-          <a:prstGeom prst="rect">
-            <a:avLst/>
-          </a:prstGeom>
-          <a:noFill/>
-          <a:ln/>
-        </p:spPr>
-        <p:txBody>
-          <a:bodyPr wrap="square" rtlCol="0" anchor="ctr"/>
-          <a:lstStyle/>
-          <a:p>
-            <a:pPr indent="0" marL="0">
-              <a:buNone/>
-            </a:pPr>
-            <a:r>
-              <a:rPr lang="en-US" sz="1350" b="1" dirty="0">
-                <a:solidFill>
-                  <a:srgbClr val="4C87C4"/>
-                </a:solidFill>
-                <a:latin typeface="Microsoft YaHei" pitchFamily="34" charset="0"/>
-                <a:ea typeface="Microsoft YaHei" pitchFamily="34" charset="-122"/>
-                <a:cs typeface="Microsoft YaHei" pitchFamily="34" charset="-120"/>
-              </a:rPr>
-              <a:t>符合 · 无参考可查</a:t>
-            </a:r>
-            <a:endParaRPr lang="en-US" sz="1350" dirty="0"/>
-          </a:p>
-        </p:txBody>
-      </p:sp>
-      <p:sp>
-        <p:nvSpPr>
-          <p:cNvPr id="14" name="Text 12"/>
-          <p:cNvSpPr txBox="1"/>
-          <p:nvPr/>
-        </p:nvSpPr>
-        <p:spPr>
-          <a:xfrm>
-            <a:off x="731520" y="3803904"/>
-            <a:ext cx="2834640" cy="457200"/>
+          <p:cNvPr id="20" name="Text 18"/>
+          <p:cNvSpPr txBox="1"/>
+          <p:nvPr/>
+        </p:nvSpPr>
+        <p:spPr>
+          <a:xfrm>
+            <a:off x="3063240" y="5475427"/>
+            <a:ext cx="8439912" cy="499262"/>
           </a:xfrm>
           <a:prstGeom prst="rect">
             <a:avLst/>
@@ -4387,35 +5575,35 @@
           <a:p>
             <a:pPr indent="0" marL="0">
               <a:lnSpc>
-                <a:spcPct val="110000"/>
+                <a:spcPct val="116000"/>
               </a:lnSpc>
               <a:buNone/>
             </a:pPr>
             <a:r>
-              <a:rPr lang="en-US" sz="950" dirty="0">
-                <a:solidFill>
-                  <a:srgbClr val="6B6B6B"/>
-                </a:solidFill>
-                <a:latin typeface="Microsoft YaHei" pitchFamily="34" charset="0"/>
-                <a:ea typeface="Microsoft YaHei" pitchFamily="34" charset="-122"/>
-                <a:cs typeface="Microsoft YaHei" pitchFamily="34" charset="-120"/>
-              </a:rPr>
-              <a:t>无分选参考，仅本数据方向相符</a:t>
-            </a:r>
-            <a:endParaRPr lang="en-US" sz="950" dirty="0"/>
-          </a:p>
-        </p:txBody>
-      </p:sp>
-      <p:sp>
-        <p:nvSpPr>
-          <p:cNvPr id="15" name="Text 13"/>
-          <p:cNvSpPr txBox="1"/>
-          <p:nvPr/>
-        </p:nvSpPr>
-        <p:spPr>
-          <a:xfrm>
-            <a:off x="3749040" y="3511296"/>
-            <a:ext cx="7772400" cy="658368"/>
+              <a:rPr lang="en-US" sz="1250" dirty="0">
+                <a:solidFill>
+                  <a:srgbClr val="1A1A1A"/>
+                </a:solidFill>
+                <a:latin typeface="Microsoft YaHei" pitchFamily="34" charset="0"/>
+                <a:ea typeface="Microsoft YaHei" pitchFamily="34" charset="-122"/>
+                <a:cs typeface="Microsoft YaHei" pitchFamily="34" charset="-120"/>
+              </a:rPr>
+              <a:t>短 IL-18 转录本在人正常组织不被显著使用：GTEx v8 6792 个样本 707/791471 跨接读段 = 0.09%（SRA v3h 的 0.20% 来自全人类 RNA-seq 汇编，含癌系与剪接因子敲低样本，不能称作正常组织）。</a:t>
+            </a:r>
+            <a:endParaRPr lang="en-US" sz="1250" dirty="0"/>
+          </a:p>
+        </p:txBody>
+      </p:sp>
+      <p:sp>
+        <p:nvSpPr>
+          <p:cNvPr id="21" name="Text 19"/>
+          <p:cNvSpPr txBox="1"/>
+          <p:nvPr/>
+        </p:nvSpPr>
+        <p:spPr>
+          <a:xfrm>
+            <a:off x="3063240" y="5974690"/>
+            <a:ext cx="8439912" cy="281635"/>
           </a:xfrm>
           <a:prstGeom prst="rect">
             <a:avLst/>
@@ -4429,7 +5617,7 @@
           <a:p>
             <a:pPr indent="0" marL="0">
               <a:lnSpc>
-                <a:spcPct val="115000"/>
+                <a:spcPct val="116000"/>
               </a:lnSpc>
               <a:buNone/>
             </a:pPr>
@@ -4442,336 +5630,9 @@
                 <a:ea typeface="Microsoft YaHei" pitchFamily="34" charset="-122"/>
                 <a:cs typeface="Microsoft YaHei" pitchFamily="34" charset="-120"/>
               </a:rPr>
-              <a:t>人脑 血管软脑膜细胞 · 人肝 巨核-红系祖细胞 · 人肺 肺泡外膜成纤维 · 小鼠脑 Cajal-Retzius 神经元</a:t>
+              <a:t>本名单用于给蛋白与功能层面的验证排优先级。进名单不代表 pro-IL-18 真被加工，不进也不代表不会。</a:t>
             </a:r>
             <a:endParaRPr lang="en-US" sz="1250" dirty="0"/>
-          </a:p>
-        </p:txBody>
-      </p:sp>
-      <p:sp>
-        <p:nvSpPr>
-          <p:cNvPr id="16" name="Text 14"/>
-          <p:cNvSpPr txBox="1"/>
-          <p:nvPr/>
-        </p:nvSpPr>
-        <p:spPr>
-          <a:xfrm>
-            <a:off x="731520" y="4297680"/>
-            <a:ext cx="2834640" cy="274320"/>
-          </a:xfrm>
-          <a:prstGeom prst="rect">
-            <a:avLst/>
-          </a:prstGeom>
-          <a:noFill/>
-          <a:ln/>
-        </p:spPr>
-        <p:txBody>
-          <a:bodyPr wrap="square" rtlCol="0" anchor="ctr"/>
-          <a:lstStyle/>
-          <a:p>
-            <a:pPr indent="0" marL="0">
-              <a:buNone/>
-            </a:pPr>
-            <a:r>
-              <a:rPr lang="en-US" sz="1350" b="1" dirty="0">
-                <a:solidFill>
-                  <a:srgbClr val="9A2B2B"/>
-                </a:solidFill>
-                <a:latin typeface="Microsoft YaHei" pitchFamily="34" charset="0"/>
-                <a:ea typeface="Microsoft YaHei" pitchFamily="34" charset="-122"/>
-                <a:cs typeface="Microsoft YaHei" pitchFamily="34" charset="-120"/>
-              </a:rPr>
-              <a:t>不符合 · 多源一致</a:t>
-            </a:r>
-            <a:endParaRPr lang="en-US" sz="1350" dirty="0"/>
-          </a:p>
-        </p:txBody>
-      </p:sp>
-      <p:sp>
-        <p:nvSpPr>
-          <p:cNvPr id="17" name="Text 15"/>
-          <p:cNvSpPr txBox="1"/>
-          <p:nvPr/>
-        </p:nvSpPr>
-        <p:spPr>
-          <a:xfrm>
-            <a:off x="731520" y="4553712"/>
-            <a:ext cx="2834640" cy="457200"/>
-          </a:xfrm>
-          <a:prstGeom prst="rect">
-            <a:avLst/>
-          </a:prstGeom>
-          <a:noFill/>
-          <a:ln/>
-        </p:spPr>
-        <p:txBody>
-          <a:bodyPr wrap="square" rtlCol="0" anchor="t"/>
-          <a:lstStyle/>
-          <a:p>
-            <a:pPr indent="0" marL="0">
-              <a:lnSpc>
-                <a:spcPct val="110000"/>
-              </a:lnSpc>
-              <a:buNone/>
-            </a:pPr>
-            <a:r>
-              <a:rPr lang="en-US" sz="950" dirty="0">
-                <a:solidFill>
-                  <a:srgbClr val="6B6B6B"/>
-                </a:solidFill>
-                <a:latin typeface="Microsoft YaHei" pitchFamily="34" charset="0"/>
-                <a:ea typeface="Microsoft YaHei" pitchFamily="34" charset="-122"/>
-                <a:cs typeface="Microsoft YaHei" pitchFamily="34" charset="-120"/>
-              </a:rPr>
-              <a:t>参考层 CASP1 确实可测或 ≥ IL18</a:t>
-            </a:r>
-            <a:endParaRPr lang="en-US" sz="950" dirty="0"/>
-          </a:p>
-        </p:txBody>
-      </p:sp>
-      <p:sp>
-        <p:nvSpPr>
-          <p:cNvPr id="18" name="Text 16"/>
-          <p:cNvSpPr txBox="1"/>
-          <p:nvPr/>
-        </p:nvSpPr>
-        <p:spPr>
-          <a:xfrm>
-            <a:off x="3749040" y="4261104"/>
-            <a:ext cx="7772400" cy="658368"/>
-          </a:xfrm>
-          <a:prstGeom prst="rect">
-            <a:avLst/>
-          </a:prstGeom>
-          <a:noFill/>
-          <a:ln/>
-        </p:spPr>
-        <p:txBody>
-          <a:bodyPr wrap="square" rtlCol="0" anchor="t"/>
-          <a:lstStyle/>
-          <a:p>
-            <a:pPr indent="0" marL="0">
-              <a:lnSpc>
-                <a:spcPct val="115000"/>
-              </a:lnSpc>
-              <a:buNone/>
-            </a:pPr>
-            <a:r>
-              <a:rPr lang="en-US" sz="1250" dirty="0">
-                <a:solidFill>
-                  <a:srgbClr val="1A1A1A"/>
-                </a:solidFill>
-                <a:latin typeface="Microsoft YaHei" pitchFamily="34" charset="0"/>
-                <a:ea typeface="Microsoft YaHei" pitchFamily="34" charset="-122"/>
-                <a:cs typeface="Microsoft YaHei" pitchFamily="34" charset="-120"/>
-              </a:rPr>
-              <a:t>小鼠肺 肺泡巨噬 · 人肺 气道多纤毛上皮 · 小鼠脑 小胶质/CNS巨噬 · 人肺 纤毛上皮 · 人肝 嗜碱粒细胞 · 人肺 树突状细胞</a:t>
-            </a:r>
-            <a:endParaRPr lang="en-US" sz="1250" dirty="0"/>
-          </a:p>
-        </p:txBody>
-      </p:sp>
-      <p:sp>
-        <p:nvSpPr>
-          <p:cNvPr id="19" name="Text 17"/>
-          <p:cNvSpPr txBox="1"/>
-          <p:nvPr/>
-        </p:nvSpPr>
-        <p:spPr>
-          <a:xfrm>
-            <a:off x="731520" y="5047488"/>
-            <a:ext cx="2834640" cy="274320"/>
-          </a:xfrm>
-          <a:prstGeom prst="rect">
-            <a:avLst/>
-          </a:prstGeom>
-          <a:noFill/>
-          <a:ln/>
-        </p:spPr>
-        <p:txBody>
-          <a:bodyPr wrap="square" rtlCol="0" anchor="ctr"/>
-          <a:lstStyle/>
-          <a:p>
-            <a:pPr indent="0" marL="0">
-              <a:buNone/>
-            </a:pPr>
-            <a:r>
-              <a:rPr lang="en-US" sz="1350" b="1" dirty="0">
-                <a:solidFill>
-                  <a:srgbClr val="B5564E"/>
-                </a:solidFill>
-                <a:latin typeface="Microsoft YaHei" pitchFamily="34" charset="0"/>
-                <a:ea typeface="Microsoft YaHei" pitchFamily="34" charset="-122"/>
-                <a:cs typeface="Microsoft YaHei" pitchFamily="34" charset="-120"/>
-              </a:rPr>
-              <a:t>不符合 · 无参考可查</a:t>
-            </a:r>
-            <a:endParaRPr lang="en-US" sz="1350" dirty="0"/>
-          </a:p>
-        </p:txBody>
-      </p:sp>
-      <p:sp>
-        <p:nvSpPr>
-          <p:cNvPr id="20" name="Text 18"/>
-          <p:cNvSpPr txBox="1"/>
-          <p:nvPr/>
-        </p:nvSpPr>
-        <p:spPr>
-          <a:xfrm>
-            <a:off x="731520" y="5303520"/>
-            <a:ext cx="2834640" cy="457200"/>
-          </a:xfrm>
-          <a:prstGeom prst="rect">
-            <a:avLst/>
-          </a:prstGeom>
-          <a:noFill/>
-          <a:ln/>
-        </p:spPr>
-        <p:txBody>
-          <a:bodyPr wrap="square" rtlCol="0" anchor="t"/>
-          <a:lstStyle/>
-          <a:p>
-            <a:pPr indent="0" marL="0">
-              <a:lnSpc>
-                <a:spcPct val="110000"/>
-              </a:lnSpc>
-              <a:buNone/>
-            </a:pPr>
-            <a:r>
-              <a:rPr lang="en-US" sz="950" dirty="0">
-                <a:solidFill>
-                  <a:srgbClr val="6B6B6B"/>
-                </a:solidFill>
-                <a:latin typeface="Microsoft YaHei" pitchFamily="34" charset="0"/>
-                <a:ea typeface="Microsoft YaHei" pitchFamily="34" charset="-122"/>
-                <a:cs typeface="Microsoft YaHei" pitchFamily="34" charset="-120"/>
-              </a:rPr>
-              <a:t>无参考，本数据自身即方向相反</a:t>
-            </a:r>
-            <a:endParaRPr lang="en-US" sz="950" dirty="0"/>
-          </a:p>
-        </p:txBody>
-      </p:sp>
-      <p:sp>
-        <p:nvSpPr>
-          <p:cNvPr id="21" name="Text 19"/>
-          <p:cNvSpPr txBox="1"/>
-          <p:nvPr/>
-        </p:nvSpPr>
-        <p:spPr>
-          <a:xfrm>
-            <a:off x="3749040" y="5010912"/>
-            <a:ext cx="7772400" cy="658368"/>
-          </a:xfrm>
-          <a:prstGeom prst="rect">
-            <a:avLst/>
-          </a:prstGeom>
-          <a:noFill/>
-          <a:ln/>
-        </p:spPr>
-        <p:txBody>
-          <a:bodyPr wrap="square" rtlCol="0" anchor="t"/>
-          <a:lstStyle/>
-          <a:p>
-            <a:pPr indent="0" marL="0">
-              <a:lnSpc>
-                <a:spcPct val="115000"/>
-              </a:lnSpc>
-              <a:buNone/>
-            </a:pPr>
-            <a:r>
-              <a:rPr lang="en-US" sz="1250" dirty="0">
-                <a:solidFill>
-                  <a:srgbClr val="1A1A1A"/>
-                </a:solidFill>
-                <a:latin typeface="Microsoft YaHei" pitchFamily="34" charset="0"/>
-                <a:ea typeface="Microsoft YaHei" pitchFamily="34" charset="-122"/>
-                <a:cs typeface="Microsoft YaHei" pitchFamily="34" charset="-120"/>
-              </a:rPr>
-              <a:t>人肝 CD56bright NK</a:t>
-            </a:r>
-            <a:endParaRPr lang="en-US" sz="1250" dirty="0"/>
-          </a:p>
-        </p:txBody>
-      </p:sp>
-      <p:sp>
-        <p:nvSpPr>
-          <p:cNvPr id="22" name="Text 20"/>
-          <p:cNvSpPr txBox="1"/>
-          <p:nvPr/>
-        </p:nvSpPr>
-        <p:spPr>
-          <a:xfrm>
-            <a:off x="731520" y="5715000"/>
-            <a:ext cx="10789920" cy="548640"/>
-          </a:xfrm>
-          <a:prstGeom prst="rect">
-            <a:avLst/>
-          </a:prstGeom>
-          <a:noFill/>
-          <a:ln/>
-        </p:spPr>
-        <p:txBody>
-          <a:bodyPr wrap="square" rtlCol="0" anchor="ctr"/>
-          <a:lstStyle/>
-          <a:p>
-            <a:pPr indent="0" marL="0">
-              <a:lnSpc>
-                <a:spcPct val="120000"/>
-              </a:lnSpc>
-              <a:buNone/>
-            </a:pPr>
-            <a:r>
-              <a:rPr lang="en-US" sz="1150" dirty="0">
-                <a:solidFill>
-                  <a:srgbClr val="1A1A1A"/>
-                </a:solidFill>
-                <a:latin typeface="Microsoft YaHei" pitchFamily="34" charset="0"/>
-                <a:ea typeface="Microsoft YaHei" pitchFamily="34" charset="-122"/>
-                <a:cs typeface="Microsoft YaHei" pitchFamily="34" charset="-120"/>
-              </a:rPr>
-              <a:t>两条必须一起说的边界：小鼠星形胶质的结论仅限皮层与海马（小脑 Bergmann 胶质与脊髓星形胶质 Casp1 明确表达）；人的 PV / L5 ET 神经元结论在小鼠没有对应物（小鼠这两类 Casp1 同样近零，但 Il18 不高）。</a:t>
-            </a:r>
-            <a:endParaRPr lang="en-US" sz="1150" dirty="0"/>
-          </a:p>
-        </p:txBody>
-      </p:sp>
-      <p:sp>
-        <p:nvSpPr>
-          <p:cNvPr id="23" name="Text 21"/>
-          <p:cNvSpPr txBox="1"/>
-          <p:nvPr/>
-        </p:nvSpPr>
-        <p:spPr>
-          <a:xfrm>
-            <a:off x="731520" y="6355080"/>
-            <a:ext cx="10789920" cy="320040"/>
-          </a:xfrm>
-          <a:prstGeom prst="rect">
-            <a:avLst/>
-          </a:prstGeom>
-          <a:noFill/>
-          <a:ln/>
-        </p:spPr>
-        <p:txBody>
-          <a:bodyPr wrap="square" rtlCol="0" anchor="ctr"/>
-          <a:lstStyle/>
-          <a:p>
-            <a:pPr indent="0" marL="0">
-              <a:buNone/>
-            </a:pPr>
-            <a:r>
-              <a:rPr lang="en-US" sz="1050" dirty="0">
-                <a:solidFill>
-                  <a:srgbClr val="9AA0A6"/>
-                </a:solidFill>
-                <a:latin typeface="Microsoft YaHei" pitchFamily="34" charset="0"/>
-                <a:ea typeface="Microsoft YaHei" pitchFamily="34" charset="-122"/>
-                <a:cs typeface="Microsoft YaHei" pitchFamily="34" charset="-120"/>
-              </a:rPr>
-              <a:t>检出率 = 原始计数 ≥1 的细胞数 ÷ 分析细胞数（合并全部供体）。29 个分层，人与小鼠分开，静息基线；未做环境 RNA 校正。</a:t>
-            </a:r>
-            <a:endParaRPr lang="en-US" sz="1050" dirty="0"/>
           </a:p>
         </p:txBody>
       </p:sp>

--- a/il18_casp5organ/IL18_CASP_五器官筛选.pptx
+++ b/il18_casp5organ/IL18_CASP_五器官筛选.pptx
@@ -20,9 +20,10 @@
     <p:sldId id="268" r:id="rId14"/>
     <p:sldId id="269" r:id="rId15"/>
     <p:sldId id="270" r:id="rId16"/>
+    <p:sldId id="271" r:id="rId17"/>
   </p:sldIdLst>
   <p:notesMasterIdLst>
-    <p:notesMasterId r:id="rId17"/>
+    <p:notesMasterId r:id="rId18"/>
   </p:notesMasterIdLst>
   <p:sldSz cx="12192000" cy="6858000"/>
   <p:notesSz cx="6858000" cy="12192000"/>
@@ -1068,6 +1069,94 @@
             <a:fld id="{F7021451-1387-4CA6-816F-3879F97B5CBC}" type="slidenum">
               <a:rPr lang="en-US"/>
               <a:t>15</a:t>
+            </a:fld>
+            <a:endParaRPr lang="en-US"/>
+          </a:p>
+        </p:txBody>
+      </p:sp>
+    </p:spTree>
+    <p:extLst>
+      <p:ext uri="{BB962C8B-B14F-4D97-AF65-F5344CB8AC3E}">
+        <p14:creationId xmlns:p14="http://schemas.microsoft.com/office/powerpoint/2010/main" val="1024086991"/>
+      </p:ext>
+    </p:extLst>
+  </p:cSld>
+  <p:clrMapOvr>
+    <a:masterClrMapping/>
+  </p:clrMapOvr>
+</p:notes>
+</file>
+
+<file path=ppt/notesSlides/notesSlide16.xml><?xml version="1.0" encoding="utf-8"?>
+<p:notes xmlns:a="http://schemas.openxmlformats.org/drawingml/2006/main" xmlns:r="http://schemas.openxmlformats.org/officeDocument/2006/relationships" xmlns:p="http://schemas.openxmlformats.org/presentationml/2006/main">
+  <p:cSld>
+    <p:spTree>
+      <p:nvGrpSpPr>
+        <p:cNvPr id="1" name=""/>
+        <p:cNvGrpSpPr/>
+        <p:nvPr/>
+      </p:nvGrpSpPr>
+      <p:grpSpPr>
+        <a:xfrm>
+          <a:off x="0" y="0"/>
+          <a:ext cx="0" cy="0"/>
+          <a:chOff x="0" y="0"/>
+          <a:chExt cx="0" cy="0"/>
+        </a:xfrm>
+      </p:grpSpPr>
+      <p:sp>
+        <p:nvSpPr>
+          <p:cNvPr id="2" name="Slide Image Placeholder 1"/>
+          <p:cNvSpPr>
+            <a:spLocks noGrp="1" noRot="1" noChangeAspect="1"/>
+          </p:cNvSpPr>
+          <p:nvPr>
+            <p:ph type="sldImg"/>
+          </p:nvPr>
+        </p:nvSpPr>
+        <p:spPr/>
+      </p:sp>
+      <p:sp>
+        <p:nvSpPr>
+          <p:cNvPr id="3" name="Notes Placeholder 2"/>
+          <p:cNvSpPr>
+            <a:spLocks noGrp="1"/>
+          </p:cNvSpPr>
+          <p:nvPr>
+            <p:ph type="body" idx="1"/>
+          </p:nvPr>
+        </p:nvSpPr>
+        <p:spPr/>
+        <p:txBody>
+          <a:bodyPr/>
+          <a:lstStyle/>
+          <a:p>
+            <a:r>
+              <a:rPr lang="en-US" dirty="0"/>
+              <a:t/>
+            </a:r>
+            <a:endParaRPr lang="en-US" dirty="0"/>
+          </a:p>
+        </p:txBody>
+      </p:sp>
+      <p:sp>
+        <p:nvSpPr>
+          <p:cNvPr id="4" name="Slide Number Placeholder 3"/>
+          <p:cNvSpPr>
+            <a:spLocks noGrp="1"/>
+          </p:cNvSpPr>
+          <p:nvPr>
+            <p:ph type="sldNum" sz="quarter" idx="10"/>
+          </p:nvPr>
+        </p:nvSpPr>
+        <p:spPr/>
+        <p:txBody>
+          <a:bodyPr/>
+          <a:lstStyle/>
+          <a:p>
+            <a:fld id="{F7021451-1387-4CA6-816F-3879F97B5CBC}" type="slidenum">
+              <a:rPr lang="en-US"/>
+              <a:t>16</a:t>
             </a:fld>
             <a:endParaRPr lang="en-US"/>
           </a:p>
@@ -4300,7 +4389,7 @@
         <p:spPr>
           <a:xfrm>
             <a:off x="3063240" y="2134210"/>
-            <a:ext cx="8439912" cy="499262"/>
+            <a:ext cx="8439912" cy="934517"/>
           </a:xfrm>
           <a:prstGeom prst="rect">
             <a:avLst/>
@@ -4327,7 +4416,7 @@
                 <a:ea typeface="Microsoft YaHei" pitchFamily="34" charset="-122"/>
                 <a:cs typeface="Microsoft YaHei" pitchFamily="34" charset="-120"/>
               </a:rPr>
-              <a:t>星形胶质 IL18 2135/3766 = 56.7%（40 供体，分层内 1/24），CASP1 仅 2/3766，4 个参考来源无分歧；少突胶质 27.3%（2452/8987，55 供体），CASP1 2/8987。</a:t>
+              <a:t>星形胶质 IL18 2135/3766 = 56.7%（40 供体，分层内 1/24），CASP1 仅 2/3766；少突胶质 27.3%（2452/8987，55 供体），CASP1 2/8987。星形胶质的 4 个参考来源无分歧，但其中只有 3 个是独立纯化测量（RiboTag、TMS FACS、brainrnaseq），第 4 个是 CELLxGENE 汇总、与本筛选同出一个数据家族。</a:t>
             </a:r>
             <a:endParaRPr lang="en-US" sz="1250" dirty="0"/>
           </a:p>
@@ -4341,8 +4430,8 @@
         </p:nvSpPr>
         <p:spPr>
           <a:xfrm>
-            <a:off x="3063240" y="2633472"/>
-            <a:ext cx="8439912" cy="499262"/>
+            <a:off x="3063240" y="3068726"/>
+            <a:ext cx="8439912" cy="716890"/>
           </a:xfrm>
           <a:prstGeom prst="rect">
             <a:avLst/>
@@ -4369,6 +4458,48 @@
                 <a:ea typeface="Microsoft YaHei" pitchFamily="34" charset="-122"/>
                 <a:cs typeface="Microsoft YaHei" pitchFamily="34" charset="-120"/>
               </a:rPr>
+              <a:t>小鼠脑的另一个分层（单核，10 供体）不复现：星形胶质 IL18 仍排第 1（14579/21878 = 66.6%），CASP1 却是 1018/21878 = 4.65%。单核与单细胞不可定量混比，但「是否入选」这一层的分歧必须写出来——这条最硬的结论在两个可用的小鼠脑分层里只成立于一个。</a:t>
+            </a:r>
+            <a:endParaRPr lang="en-US" sz="1250" dirty="0"/>
+          </a:p>
+        </p:txBody>
+      </p:sp>
+      <p:sp>
+        <p:nvSpPr>
+          <p:cNvPr id="12" name="Text 10"/>
+          <p:cNvSpPr txBox="1"/>
+          <p:nvPr/>
+        </p:nvSpPr>
+        <p:spPr>
+          <a:xfrm>
+            <a:off x="3063240" y="3785616"/>
+            <a:ext cx="8439912" cy="499262"/>
+          </a:xfrm>
+          <a:prstGeom prst="rect">
+            <a:avLst/>
+          </a:prstGeom>
+          <a:noFill/>
+          <a:ln/>
+        </p:spPr>
+        <p:txBody>
+          <a:bodyPr wrap="square" rtlCol="0" anchor="t"/>
+          <a:lstStyle/>
+          <a:p>
+            <a:pPr indent="0" marL="0">
+              <a:lnSpc>
+                <a:spcPct val="116000"/>
+              </a:lnSpc>
+              <a:buNone/>
+            </a:pPr>
+            <a:r>
+              <a:rPr lang="en-US" sz="1250" dirty="0">
+                <a:solidFill>
+                  <a:srgbClr val="1A1A1A"/>
+                </a:solidFill>
+                <a:latin typeface="Microsoft YaHei" pitchFamily="34" charset="0"/>
+                <a:ea typeface="Microsoft YaHei" pitchFamily="34" charset="-122"/>
+                <a:cs typeface="Microsoft YaHei" pitchFamily="34" charset="-120"/>
+              </a:rPr>
               <a:t>同为真单细胞的人皮层（78 供体）里这两类只有 4.8%（782/16319）与 1.4%（838/57855）——小鼠这一组在人不成立。</a:t>
             </a:r>
             <a:endParaRPr lang="en-US" sz="1250" dirty="0"/>
@@ -4377,13 +4508,13 @@
       </p:sp>
       <p:sp>
         <p:nvSpPr>
-          <p:cNvPr id="12" name="Text 10"/>
-          <p:cNvSpPr txBox="1"/>
-          <p:nvPr/>
-        </p:nvSpPr>
-        <p:spPr>
-          <a:xfrm>
-            <a:off x="685800" y="3288182"/>
+          <p:cNvPr id="13" name="Text 11"/>
+          <p:cNvSpPr txBox="1"/>
+          <p:nvPr/>
+        </p:nvSpPr>
+        <p:spPr>
+          <a:xfrm>
+            <a:off x="685800" y="4440326"/>
             <a:ext cx="2834640" cy="274320"/>
           </a:xfrm>
           <a:prstGeom prst="rect">
@@ -4416,13 +4547,13 @@
       </p:sp>
       <p:sp>
         <p:nvSpPr>
-          <p:cNvPr id="13" name="Text 11"/>
-          <p:cNvSpPr txBox="1"/>
-          <p:nvPr/>
-        </p:nvSpPr>
-        <p:spPr>
-          <a:xfrm>
-            <a:off x="685800" y="3535070"/>
+          <p:cNvPr id="14" name="Text 12"/>
+          <p:cNvSpPr txBox="1"/>
+          <p:nvPr/>
+        </p:nvSpPr>
+        <p:spPr>
+          <a:xfrm>
+            <a:off x="685800" y="4687214"/>
             <a:ext cx="2834640" cy="566928"/>
           </a:xfrm>
           <a:prstGeom prst="rect">
@@ -4458,13 +4589,13 @@
       </p:sp>
       <p:sp>
         <p:nvSpPr>
-          <p:cNvPr id="14" name="Text 12"/>
-          <p:cNvSpPr txBox="1"/>
-          <p:nvPr/>
-        </p:nvSpPr>
-        <p:spPr>
-          <a:xfrm>
-            <a:off x="3063240" y="3256178"/>
+          <p:cNvPr id="15" name="Text 13"/>
+          <p:cNvSpPr txBox="1"/>
+          <p:nvPr/>
+        </p:nvSpPr>
+        <p:spPr>
+          <a:xfrm>
+            <a:off x="3063240" y="4408322"/>
             <a:ext cx="8439912" cy="499262"/>
           </a:xfrm>
           <a:prstGeom prst="rect">
@@ -4500,14 +4631,14 @@
       </p:sp>
       <p:sp>
         <p:nvSpPr>
-          <p:cNvPr id="15" name="Text 13"/>
-          <p:cNvSpPr txBox="1"/>
-          <p:nvPr/>
-        </p:nvSpPr>
-        <p:spPr>
-          <a:xfrm>
-            <a:off x="3063240" y="3755441"/>
-            <a:ext cx="8439912" cy="499262"/>
+          <p:cNvPr id="16" name="Text 14"/>
+          <p:cNvSpPr txBox="1"/>
+          <p:nvPr/>
+        </p:nvSpPr>
+        <p:spPr>
+          <a:xfrm>
+            <a:off x="3063240" y="4907585"/>
+            <a:ext cx="8439912" cy="716890"/>
           </a:xfrm>
           <a:prstGeom prst="rect">
             <a:avLst/>
@@ -4534,7 +4665,7 @@
                 <a:ea typeface="Microsoft YaHei" pitchFamily="34" charset="-122"/>
                 <a:cs typeface="Microsoft YaHei" pitchFamily="34" charset="-120"/>
               </a:rPr>
-              <a:t>小鼠同名神经元 Casp1 同样近零，但 Il18 只有 2.2%（684/30434）与 5.5%（1333/24181）——人这一组在小鼠不成立。两条物种差异方向相反。</a:t>
+              <a:t>但同属皮层中间神经元的 CGE 源中间神经元是全表最弱的一条「符合」：IL18 12.1%（618/5096，44 供体），5 个参考来源里 1 个支持、3 个反对，其中 2 个显示 CASP1 与 IL18 同量级。人侧这条线不像名单看上去那么齐。</a:t>
             </a:r>
             <a:endParaRPr lang="en-US" sz="1250" dirty="0"/>
           </a:p>
@@ -4542,94 +4673,13 @@
       </p:sp>
       <p:sp>
         <p:nvSpPr>
-          <p:cNvPr id="16" name="Text 14"/>
-          <p:cNvSpPr txBox="1"/>
-          <p:nvPr/>
-        </p:nvSpPr>
-        <p:spPr>
-          <a:xfrm>
-            <a:off x="685800" y="4410151"/>
-            <a:ext cx="2834640" cy="274320"/>
-          </a:xfrm>
-          <a:prstGeom prst="rect">
-            <a:avLst/>
-          </a:prstGeom>
-          <a:noFill/>
-          <a:ln/>
-        </p:spPr>
-        <p:txBody>
-          <a:bodyPr wrap="square" rtlCol="0" anchor="ctr"/>
-          <a:lstStyle/>
-          <a:p>
-            <a:pPr indent="0" marL="0">
-              <a:buNone/>
-            </a:pPr>
-            <a:r>
-              <a:rPr lang="en-US" sz="1300" b="1" dirty="0">
-                <a:solidFill>
-                  <a:srgbClr val="4C87C4"/>
-                </a:solidFill>
-                <a:latin typeface="Microsoft YaHei" pitchFamily="34" charset="0"/>
-                <a:ea typeface="Microsoft YaHei" pitchFamily="34" charset="-122"/>
-                <a:cs typeface="Microsoft YaHei" pitchFamily="34" charset="-120"/>
-              </a:rPr>
-              <a:t>脑外 7 个</a:t>
-            </a:r>
-            <a:endParaRPr lang="en-US" sz="1300" dirty="0"/>
-          </a:p>
-        </p:txBody>
-      </p:sp>
-      <p:sp>
-        <p:nvSpPr>
           <p:cNvPr id="17" name="Text 15"/>
           <p:cNvSpPr txBox="1"/>
           <p:nvPr/>
         </p:nvSpPr>
         <p:spPr>
           <a:xfrm>
-            <a:off x="685800" y="4657039"/>
-            <a:ext cx="2834640" cy="566928"/>
-          </a:xfrm>
-          <a:prstGeom prst="rect">
-            <a:avLst/>
-          </a:prstGeom>
-          <a:noFill/>
-          <a:ln/>
-        </p:spPr>
-        <p:txBody>
-          <a:bodyPr wrap="square" rtlCol="0" anchor="t"/>
-          <a:lstStyle/>
-          <a:p>
-            <a:pPr indent="0" marL="0">
-              <a:lnSpc>
-                <a:spcPct val="112000"/>
-              </a:lnSpc>
-              <a:buNone/>
-            </a:pPr>
-            <a:r>
-              <a:rPr lang="en-US" sz="950" dirty="0">
-                <a:solidFill>
-                  <a:srgbClr val="6B6B6B"/>
-                </a:solidFill>
-                <a:latin typeface="Microsoft YaHei" pitchFamily="34" charset="0"/>
-                <a:ea typeface="Microsoft YaHei" pitchFamily="34" charset="-122"/>
-                <a:cs typeface="Microsoft YaHei" pitchFamily="34" charset="-120"/>
-              </a:rPr>
-              <a:t>证据都只到单一来源或有分歧</a:t>
-            </a:r>
-            <a:endParaRPr lang="en-US" sz="950" dirty="0"/>
-          </a:p>
-        </p:txBody>
-      </p:sp>
-      <p:sp>
-        <p:nvSpPr>
-          <p:cNvPr id="18" name="Text 16"/>
-          <p:cNvSpPr txBox="1"/>
-          <p:nvPr/>
-        </p:nvSpPr>
-        <p:spPr>
-          <a:xfrm>
-            <a:off x="3063240" y="4378147"/>
+            <a:off x="3063240" y="5624474"/>
             <a:ext cx="8439912" cy="499262"/>
           </a:xfrm>
           <a:prstGeom prst="rect">
@@ -4657,7 +4707,7 @@
                 <a:ea typeface="Microsoft YaHei" pitchFamily="34" charset="-122"/>
                 <a:cs typeface="Microsoft YaHei" pitchFamily="34" charset="-120"/>
               </a:rPr>
-              <a:t>人肺肥大细胞 34.9%（1851/5299，44 供体）、CASP1 2.60%：4 个参考来源里只有 HPA 组织图谱支持近零（29.9 倍），两个 ex vivo 分选来源都测到 CASP1（3.82 与 4.48 倍）。</a:t>
+              <a:t>小鼠同名神经元 Casp1 同样近零，但 Il18 只有 2.2%（684/30434）与 5.5%（1333/24181）——人这一组在小鼠不成立。两条物种差异方向相反。</a:t>
             </a:r>
             <a:endParaRPr lang="en-US" sz="1250" dirty="0"/>
           </a:p>
@@ -4665,91 +4715,7 @@
       </p:sp>
       <p:sp>
         <p:nvSpPr>
-          <p:cNvPr id="19" name="Text 17"/>
-          <p:cNvSpPr txBox="1"/>
-          <p:nvPr/>
-        </p:nvSpPr>
-        <p:spPr>
-          <a:xfrm>
-            <a:off x="3063240" y="4877410"/>
-            <a:ext cx="8439912" cy="499262"/>
-          </a:xfrm>
-          <a:prstGeom prst="rect">
-            <a:avLst/>
-          </a:prstGeom>
-          <a:noFill/>
-          <a:ln/>
-        </p:spPr>
-        <p:txBody>
-          <a:bodyPr wrap="square" rtlCol="0" anchor="t"/>
-          <a:lstStyle/>
-          <a:p>
-            <a:pPr indent="0" marL="0">
-              <a:lnSpc>
-                <a:spcPct val="116000"/>
-              </a:lnSpc>
-              <a:buNone/>
-            </a:pPr>
-            <a:r>
-              <a:rPr lang="en-US" sz="1250" dirty="0">
-                <a:solidFill>
-                  <a:srgbClr val="1A1A1A"/>
-                </a:solidFill>
-                <a:latin typeface="Microsoft YaHei" pitchFamily="34" charset="0"/>
-                <a:ea typeface="Microsoft YaHei" pitchFamily="34" charset="-122"/>
-                <a:cs typeface="Microsoft YaHei" pitchFamily="34" charset="-120"/>
-              </a:rPr>
-              <a:t>人肺 AT1 与人胰腺腺泡各只有 1 个参考来源，且都写明「未进候选（CASP1 未进最低三分位）」——靠参考层补回，不是通过了筛选。小鼠胰岛 δ 细胞 6 个来源中 4 支持、1 分歧；人胰岛 δ 细胞 IL18 仅 8/4677，不复现。</a:t>
-            </a:r>
-            <a:endParaRPr lang="en-US" sz="1250" dirty="0"/>
-          </a:p>
-        </p:txBody>
-      </p:sp>
-      <p:sp>
-        <p:nvSpPr>
-          <p:cNvPr id="20" name="Text 18"/>
-          <p:cNvSpPr txBox="1"/>
-          <p:nvPr/>
-        </p:nvSpPr>
-        <p:spPr>
-          <a:xfrm>
-            <a:off x="3063240" y="5376672"/>
-            <a:ext cx="8439912" cy="499262"/>
-          </a:xfrm>
-          <a:prstGeom prst="rect">
-            <a:avLst/>
-          </a:prstGeom>
-          <a:noFill/>
-          <a:ln/>
-        </p:spPr>
-        <p:txBody>
-          <a:bodyPr wrap="square" rtlCol="0" anchor="t"/>
-          <a:lstStyle/>
-          <a:p>
-            <a:pPr indent="0" marL="0">
-              <a:lnSpc>
-                <a:spcPct val="116000"/>
-              </a:lnSpc>
-              <a:buNone/>
-            </a:pPr>
-            <a:r>
-              <a:rPr lang="en-US" sz="1250" dirty="0">
-                <a:solidFill>
-                  <a:srgbClr val="1A1A1A"/>
-                </a:solidFill>
-                <a:latin typeface="Microsoft YaHei" pitchFamily="34" charset="0"/>
-                <a:ea typeface="Microsoft YaHei" pitchFamily="34" charset="-122"/>
-                <a:cs typeface="Microsoft YaHei" pitchFamily="34" charset="-120"/>
-              </a:rPr>
-              <a:t>另 4 类（人脑血管软脑膜、人肝巨核-红系祖、人肺泡外膜成纤维、小鼠 Cajal-Retzius）参考层查不到（n_ref_sources = 0）。</a:t>
-            </a:r>
-            <a:endParaRPr lang="en-US" sz="1250" dirty="0"/>
-          </a:p>
-        </p:txBody>
-      </p:sp>
-      <p:sp>
-        <p:nvSpPr>
-          <p:cNvPr id="21" name="Text 19"/>
+          <p:cNvPr id="18" name="Text 16"/>
           <p:cNvSpPr txBox="1"/>
           <p:nvPr/>
         </p:nvSpPr>
@@ -4844,7 +4810,7 @@
                 <a:ea typeface="Microsoft YaHei" pitchFamily="34" charset="-122"/>
                 <a:cs typeface="Microsoft YaHei" pitchFamily="34" charset="-120"/>
               </a:rPr>
-              <a:t>这份名单怎么用，以及它不是什么</a:t>
+              <a:t>脑外的 7 个，以及名单弱在哪里</a:t>
             </a:r>
             <a:endParaRPr lang="en-US" sz="2600" dirty="0"/>
           </a:p>
@@ -4877,13 +4843,13 @@
             <a:r>
               <a:rPr lang="en-US" sz="1300" b="1" dirty="0">
                 <a:solidFill>
-                  <a:srgbClr val="1F5FA8"/>
-                </a:solidFill>
-                <a:latin typeface="Microsoft YaHei" pitchFamily="34" charset="0"/>
-                <a:ea typeface="Microsoft YaHei" pitchFamily="34" charset="-122"/>
-                <a:cs typeface="Microsoft YaHei" pitchFamily="34" charset="-120"/>
-              </a:rPr>
-              <a:t>弱在哪里</a:t>
+                  <a:srgbClr val="4C87C4"/>
+                </a:solidFill>
+                <a:latin typeface="Microsoft YaHei" pitchFamily="34" charset="0"/>
+                <a:ea typeface="Microsoft YaHei" pitchFamily="34" charset="-122"/>
+                <a:cs typeface="Microsoft YaHei" pitchFamily="34" charset="-120"/>
+              </a:rPr>
+              <a:t>脑外 7 个</a:t>
             </a:r>
             <a:endParaRPr lang="en-US" sz="1300" dirty="0"/>
           </a:p>
@@ -4925,7 +4891,7 @@
                 <a:ea typeface="Microsoft YaHei" pitchFamily="34" charset="-122"/>
                 <a:cs typeface="Microsoft YaHei" pitchFamily="34" charset="-120"/>
               </a:rPr>
-              <a:t>是没人分选测过，不是检出率低</a:t>
+              <a:t>证据都只到单一来源或有分歧</a:t>
             </a:r>
             <a:endParaRPr lang="en-US" sz="950" dirty="0"/>
           </a:p>
@@ -4940,7 +4906,7 @@
         <p:spPr>
           <a:xfrm>
             <a:off x="3063240" y="1046988"/>
-            <a:ext cx="8439912" cy="499262"/>
+            <a:ext cx="8439912" cy="716890"/>
           </a:xfrm>
           <a:prstGeom prst="rect">
             <a:avLst/>
@@ -4967,7 +4933,7 @@
                 <a:ea typeface="Microsoft YaHei" pitchFamily="34" charset="-122"/>
                 <a:cs typeface="Microsoft YaHei" pitchFamily="34" charset="-120"/>
               </a:rPr>
-              <a:t>8 行「符合 × 多源一致」全部在脑，不等于脑的信号更强：人肺 AT1 与人胰腺腺泡各只有 1 个参考来源，另有 4 类一个都没有，而小鼠星形胶质有 4 个。</a:t>
+              <a:t>人肺肥大细胞 34.9%（1851/5299，44 供体）、CASP1 2.60%：4 个参考来源里只有 HPA 组织图谱支持近零（29.9 倍），两个 ex vivo 分选来源都测到 CASP1（3.82 与 4.48 倍）——纯化得越干净，CASP1 反而越测得到。</a:t>
             </a:r>
             <a:endParaRPr lang="en-US" sz="1250" dirty="0"/>
           </a:p>
@@ -4981,8 +4947,8 @@
         </p:nvSpPr>
         <p:spPr>
           <a:xfrm>
-            <a:off x="3063240" y="1546250"/>
-            <a:ext cx="8439912" cy="499262"/>
+            <a:off x="3063240" y="1763878"/>
+            <a:ext cx="8439912" cy="716890"/>
           </a:xfrm>
           <a:prstGeom prst="rect">
             <a:avLst/>
@@ -5009,7 +4975,7 @@
                 <a:ea typeface="Microsoft YaHei" pitchFamily="34" charset="-122"/>
                 <a:cs typeface="Microsoft YaHei" pitchFamily="34" charset="-120"/>
               </a:rPr>
-              <a:t>要把一格从单一来源推到多源一致，缺的是具体一次测量：人肺肥大细胞 / AT1 / 人胰腺腺泡各缺一次新鲜原代分选后的 CASP1 定量；小鼠胰岛 δ 缺的是复核那一个分歧来源（比值 5.64）。</a:t>
+              <a:t>人肺 AT1 与人胰腺腺泡各只有 1 个参考来源，且都写明「未进候选（CASP1 未进最低三分位）」——靠参考层补回，不是通过了筛选。小鼠胰岛 δ 细胞 6 个来源中 4 支持、1 分歧；人胰岛 δ 细胞 IL18 仅 8/4677，不复现。</a:t>
             </a:r>
             <a:endParaRPr lang="en-US" sz="1250" dirty="0"/>
           </a:p>
@@ -5023,7 +4989,49 @@
         </p:nvSpPr>
         <p:spPr>
           <a:xfrm>
-            <a:off x="685800" y="2200961"/>
+            <a:off x="3063240" y="2480767"/>
+            <a:ext cx="8439912" cy="499262"/>
+          </a:xfrm>
+          <a:prstGeom prst="rect">
+            <a:avLst/>
+          </a:prstGeom>
+          <a:noFill/>
+          <a:ln/>
+        </p:spPr>
+        <p:txBody>
+          <a:bodyPr wrap="square" rtlCol="0" anchor="t"/>
+          <a:lstStyle/>
+          <a:p>
+            <a:pPr indent="0" marL="0">
+              <a:lnSpc>
+                <a:spcPct val="116000"/>
+              </a:lnSpc>
+              <a:buNone/>
+            </a:pPr>
+            <a:r>
+              <a:rPr lang="en-US" sz="1250" dirty="0">
+                <a:solidFill>
+                  <a:srgbClr val="1A1A1A"/>
+                </a:solidFill>
+                <a:latin typeface="Microsoft YaHei" pitchFamily="34" charset="0"/>
+                <a:ea typeface="Microsoft YaHei" pitchFamily="34" charset="-122"/>
+                <a:cs typeface="Microsoft YaHei" pitchFamily="34" charset="-120"/>
+              </a:rPr>
+              <a:t>另 4 类（人脑血管软脑膜、人肝巨核-红系祖、人肺泡外膜成纤维、小鼠 Cajal-Retzius）参考层查不到（n_ref_sources = 0）。</a:t>
+            </a:r>
+            <a:endParaRPr lang="en-US" sz="1250" dirty="0"/>
+          </a:p>
+        </p:txBody>
+      </p:sp>
+      <p:sp>
+        <p:nvSpPr>
+          <p:cNvPr id="8" name="Text 6"/>
+          <p:cNvSpPr txBox="1"/>
+          <p:nvPr/>
+        </p:nvSpPr>
+        <p:spPr>
+          <a:xfrm>
+            <a:off x="685800" y="3135478"/>
             <a:ext cx="2834640" cy="274320"/>
           </a:xfrm>
           <a:prstGeom prst="rect">
@@ -5042,13 +5050,13 @@
             <a:r>
               <a:rPr lang="en-US" sz="1300" b="1" dirty="0">
                 <a:solidFill>
-                  <a:srgbClr val="1B7A43"/>
-                </a:solidFill>
-                <a:latin typeface="Microsoft YaHei" pitchFamily="34" charset="0"/>
-                <a:ea typeface="Microsoft YaHei" pitchFamily="34" charset="-122"/>
-                <a:cs typeface="Microsoft YaHei" pitchFamily="34" charset="-120"/>
-              </a:rPr>
-              <a:t>「近零」相对于什么</a:t>
+                  <a:srgbClr val="1F5FA8"/>
+                </a:solidFill>
+                <a:latin typeface="Microsoft YaHei" pitchFamily="34" charset="0"/>
+                <a:ea typeface="Microsoft YaHei" pitchFamily="34" charset="-122"/>
+                <a:cs typeface="Microsoft YaHei" pitchFamily="34" charset="-120"/>
+              </a:rPr>
+              <a:t>弱在哪里</a:t>
             </a:r>
             <a:endParaRPr lang="en-US" sz="1300" dirty="0"/>
           </a:p>
@@ -5056,13 +5064,13 @@
       </p:sp>
       <p:sp>
         <p:nvSpPr>
-          <p:cNvPr id="8" name="Text 6"/>
-          <p:cNvSpPr txBox="1"/>
-          <p:nvPr/>
-        </p:nvSpPr>
-        <p:spPr>
-          <a:xfrm>
-            <a:off x="685800" y="2447849"/>
+          <p:cNvPr id="9" name="Text 7"/>
+          <p:cNvSpPr txBox="1"/>
+          <p:nvPr/>
+        </p:nvSpPr>
+        <p:spPr>
+          <a:xfrm>
+            <a:off x="685800" y="3382366"/>
             <a:ext cx="2834640" cy="566928"/>
           </a:xfrm>
           <a:prstGeom prst="rect">
@@ -5090,7 +5098,7 @@
                 <a:ea typeface="Microsoft YaHei" pitchFamily="34" charset="-122"/>
                 <a:cs typeface="Microsoft YaHei" pitchFamily="34" charset="-120"/>
               </a:rPr>
-              <a:t>同一测法下的标尺与阳性对照</a:t>
+              <a:t>是没人分选测过，不是检出率低</a:t>
             </a:r>
             <a:endParaRPr lang="en-US" sz="950" dirty="0"/>
           </a:p>
@@ -5098,13 +5106,13 @@
       </p:sp>
       <p:sp>
         <p:nvSpPr>
-          <p:cNvPr id="9" name="Text 7"/>
-          <p:cNvSpPr txBox="1"/>
-          <p:nvPr/>
-        </p:nvSpPr>
-        <p:spPr>
-          <a:xfrm>
-            <a:off x="3063240" y="2168957"/>
+          <p:cNvPr id="10" name="Text 8"/>
+          <p:cNvSpPr txBox="1"/>
+          <p:nvPr/>
+        </p:nvSpPr>
+        <p:spPr>
+          <a:xfrm>
+            <a:off x="3063240" y="3103474"/>
             <a:ext cx="8439912" cy="499262"/>
           </a:xfrm>
           <a:prstGeom prst="rect">
@@ -5132,7 +5140,7 @@
                 <a:ea typeface="Microsoft YaHei" pitchFamily="34" charset="-122"/>
                 <a:cs typeface="Microsoft YaHei" pitchFamily="34" charset="-120"/>
               </a:rPr>
-              <a:t>阳性对照：同一分选、同一供体、同一建库下，L5a IT 锥体神经元 CASP1 = 8.34 CPM（25 个文库 24 个非零）——不是测不出来，是亚类特异的。</a:t>
+              <a:t>8 行「符合 × 多源一致」全部在脑，不等于脑的信号更强：人肺 AT1 与人胰腺腺泡各只有 1 个参考来源，另有 4 类一个都没有，而小鼠星形胶质有 4 个。</a:t>
             </a:r>
             <a:endParaRPr lang="en-US" sz="1250" dirty="0"/>
           </a:p>
@@ -5140,13 +5148,13 @@
       </p:sp>
       <p:sp>
         <p:nvSpPr>
-          <p:cNvPr id="10" name="Text 8"/>
-          <p:cNvSpPr txBox="1"/>
-          <p:nvPr/>
-        </p:nvSpPr>
-        <p:spPr>
-          <a:xfrm>
-            <a:off x="3063240" y="2668219"/>
+          <p:cNvPr id="11" name="Text 9"/>
+          <p:cNvSpPr txBox="1"/>
+          <p:nvPr/>
+        </p:nvSpPr>
+        <p:spPr>
+          <a:xfrm>
+            <a:off x="3063240" y="3602736"/>
             <a:ext cx="8439912" cy="499262"/>
           </a:xfrm>
           <a:prstGeom prst="rect">
@@ -5174,7 +5182,7 @@
                 <a:ea typeface="Microsoft YaHei" pitchFamily="34" charset="-122"/>
                 <a:cs typeface="Microsoft YaHei" pitchFamily="34" charset="-120"/>
               </a:rPr>
-              <a:t>标尺：静息小鼠小胶质 Casp1 约 50–61 CPM / 17% 细胞。小鼠 CNS 里「髓系高」与「零底线」相差约 50 倍，不是 1000 倍。</a:t>
+              <a:t>要把一格从单一来源推到多源一致，缺的是具体一次测量：人肺肥大细胞 / AT1 / 人胰腺腺泡各缺一次新鲜原代分选后的 CASP1 定量；小鼠胰岛 δ 缺的是复核那一个分歧来源（比值 5.64）。</a:t>
             </a:r>
             <a:endParaRPr lang="en-US" sz="1250" dirty="0"/>
           </a:p>
@@ -5182,13 +5190,13 @@
       </p:sp>
       <p:sp>
         <p:nvSpPr>
-          <p:cNvPr id="11" name="Text 9"/>
-          <p:cNvSpPr txBox="1"/>
-          <p:nvPr/>
-        </p:nvSpPr>
-        <p:spPr>
-          <a:xfrm>
-            <a:off x="685800" y="3322930"/>
+          <p:cNvPr id="12" name="Text 10"/>
+          <p:cNvSpPr txBox="1"/>
+          <p:nvPr/>
+        </p:nvSpPr>
+        <p:spPr>
+          <a:xfrm>
+            <a:off x="685800" y="4257446"/>
             <a:ext cx="2834640" cy="274320"/>
           </a:xfrm>
           <a:prstGeom prst="rect">
@@ -5207,13 +5215,13 @@
             <a:r>
               <a:rPr lang="en-US" sz="1300" b="1" dirty="0">
                 <a:solidFill>
-                  <a:srgbClr val="9A2B2B"/>
-                </a:solidFill>
-                <a:latin typeface="Microsoft YaHei" pitchFamily="34" charset="0"/>
-                <a:ea typeface="Microsoft YaHei" pitchFamily="34" charset="-122"/>
-                <a:cs typeface="Microsoft YaHei" pitchFamily="34" charset="-120"/>
-              </a:rPr>
-              <a:t>四条不能省的边界</a:t>
+                  <a:srgbClr val="1B7A43"/>
+                </a:solidFill>
+                <a:latin typeface="Microsoft YaHei" pitchFamily="34" charset="0"/>
+                <a:ea typeface="Microsoft YaHei" pitchFamily="34" charset="-122"/>
+                <a:cs typeface="Microsoft YaHei" pitchFamily="34" charset="-120"/>
+              </a:rPr>
+              <a:t>「近零」相对于什么</a:t>
             </a:r>
             <a:endParaRPr lang="en-US" sz="1300" dirty="0"/>
           </a:p>
@@ -5221,13 +5229,13 @@
       </p:sp>
       <p:sp>
         <p:nvSpPr>
-          <p:cNvPr id="12" name="Text 10"/>
-          <p:cNvSpPr txBox="1"/>
-          <p:nvPr/>
-        </p:nvSpPr>
-        <p:spPr>
-          <a:xfrm>
-            <a:off x="685800" y="3569818"/>
+          <p:cNvPr id="13" name="Text 11"/>
+          <p:cNvSpPr txBox="1"/>
+          <p:nvPr/>
+        </p:nvSpPr>
+        <p:spPr>
+          <a:xfrm>
+            <a:off x="685800" y="4504334"/>
             <a:ext cx="2834640" cy="566928"/>
           </a:xfrm>
           <a:prstGeom prst="rect">
@@ -5255,7 +5263,7 @@
                 <a:ea typeface="Microsoft YaHei" pitchFamily="34" charset="-122"/>
                 <a:cs typeface="Microsoft YaHei" pitchFamily="34" charset="-120"/>
               </a:rPr>
-              <a:t>规格 §0.2</a:t>
+              <a:t>同一测法下的标尺与阳性对照</a:t>
             </a:r>
             <a:endParaRPr lang="en-US" sz="950" dirty="0"/>
           </a:p>
@@ -5263,14 +5271,14 @@
       </p:sp>
       <p:sp>
         <p:nvSpPr>
-          <p:cNvPr id="13" name="Text 11"/>
-          <p:cNvSpPr txBox="1"/>
-          <p:nvPr/>
-        </p:nvSpPr>
-        <p:spPr>
-          <a:xfrm>
-            <a:off x="3063240" y="3290926"/>
-            <a:ext cx="8439912" cy="281635"/>
+          <p:cNvPr id="14" name="Text 12"/>
+          <p:cNvSpPr txBox="1"/>
+          <p:nvPr/>
+        </p:nvSpPr>
+        <p:spPr>
+          <a:xfrm>
+            <a:off x="3063240" y="4225442"/>
+            <a:ext cx="8439912" cy="499262"/>
           </a:xfrm>
           <a:prstGeom prst="rect">
             <a:avLst/>
@@ -5297,7 +5305,7 @@
                 <a:ea typeface="Microsoft YaHei" pitchFamily="34" charset="-122"/>
                 <a:cs typeface="Microsoft YaHei" pitchFamily="34" charset="-120"/>
               </a:rPr>
-              <a:t>IL18 转录本即 pro-IL-18 的转录信号，但 pro-IL-18 是储备型蛋白，转录水平与细胞内前体储量不成线性关系。</a:t>
+              <a:t>阳性对照：同一分选、同一供体、同一建库下，L5a IT 锥体神经元 CASP1 = 8.34 CPM（25 个文库 24 个非零）——不是测不出来，是亚类特异的。</a:t>
             </a:r>
             <a:endParaRPr lang="en-US" sz="1250" dirty="0"/>
           </a:p>
@@ -5305,13 +5313,13 @@
       </p:sp>
       <p:sp>
         <p:nvSpPr>
-          <p:cNvPr id="14" name="Text 12"/>
-          <p:cNvSpPr txBox="1"/>
-          <p:nvPr/>
-        </p:nvSpPr>
-        <p:spPr>
-          <a:xfrm>
-            <a:off x="3063240" y="3572561"/>
+          <p:cNvPr id="15" name="Text 13"/>
+          <p:cNvSpPr txBox="1"/>
+          <p:nvPr/>
+        </p:nvSpPr>
+        <p:spPr>
+          <a:xfrm>
+            <a:off x="3063240" y="4724705"/>
             <a:ext cx="8439912" cy="499262"/>
           </a:xfrm>
           <a:prstGeom prst="rect">
@@ -5339,21 +5347,166 @@
                 <a:ea typeface="Microsoft YaHei" pitchFamily="34" charset="-122"/>
                 <a:cs typeface="Microsoft YaHei" pitchFamily="34" charset="-120"/>
               </a:rPr>
-              <a:t>CASP1 是可诱导基因。本分析是静息基线筛选，静息近零不预测刺激后能否诱导——这一条只能靠带刺激的数据或实验解决。</a:t>
+              <a:t>标尺：静息小鼠小胶质 Casp1 约 50–61 CPM / 17% 细胞。小鼠 CNS 里「髓系高」与「零底线」相差约 50 倍，不是 1000 倍。</a:t>
             </a:r>
             <a:endParaRPr lang="en-US" sz="1250" dirty="0"/>
           </a:p>
         </p:txBody>
       </p:sp>
-      <p:sp>
-        <p:nvSpPr>
-          <p:cNvPr id="15" name="Text 13"/>
-          <p:cNvSpPr txBox="1"/>
-          <p:nvPr/>
-        </p:nvSpPr>
-        <p:spPr>
-          <a:xfrm>
-            <a:off x="3063240" y="4071823"/>
+    </p:spTree>
+  </p:cSld>
+  <p:clrMapOvr>
+    <a:masterClrMapping/>
+  </p:clrMapOvr>
+</p:sld>
+</file>
+
+<file path=ppt/slides/slide16.xml><?xml version="1.0" encoding="utf-8"?>
+<p:sld xmlns:a="http://schemas.openxmlformats.org/drawingml/2006/main" xmlns:r="http://schemas.openxmlformats.org/officeDocument/2006/relationships" xmlns:p="http://schemas.openxmlformats.org/presentationml/2006/main">
+  <p:cSld name="Slide 16">
+    <p:spTree>
+      <p:nvGrpSpPr>
+        <p:cNvPr id="1" name=""/>
+        <p:cNvGrpSpPr/>
+        <p:nvPr/>
+      </p:nvGrpSpPr>
+      <p:grpSpPr>
+        <a:xfrm>
+          <a:off x="0" y="0"/>
+          <a:ext cx="0" cy="0"/>
+          <a:chOff x="0" y="0"/>
+          <a:chExt cx="0" cy="0"/>
+        </a:xfrm>
+      </p:grpSpPr>
+      <p:sp>
+        <p:nvSpPr>
+          <p:cNvPr id="2" name="Text 0"/>
+          <p:cNvSpPr txBox="1"/>
+          <p:nvPr/>
+        </p:nvSpPr>
+        <p:spPr>
+          <a:xfrm>
+            <a:off x="640080" y="347472"/>
+            <a:ext cx="10058400" cy="502920"/>
+          </a:xfrm>
+          <a:prstGeom prst="rect">
+            <a:avLst/>
+          </a:prstGeom>
+          <a:noFill/>
+          <a:ln/>
+        </p:spPr>
+        <p:txBody>
+          <a:bodyPr wrap="square" rtlCol="0" anchor="ctr"/>
+          <a:lstStyle/>
+          <a:p>
+            <a:pPr indent="0" marL="0">
+              <a:buNone/>
+            </a:pPr>
+            <a:r>
+              <a:rPr lang="en-US" sz="2600" b="1" dirty="0">
+                <a:solidFill>
+                  <a:srgbClr val="1A1A1A"/>
+                </a:solidFill>
+                <a:latin typeface="Microsoft YaHei" pitchFamily="34" charset="0"/>
+                <a:ea typeface="Microsoft YaHei" pitchFamily="34" charset="-122"/>
+                <a:cs typeface="Microsoft YaHei" pitchFamily="34" charset="-120"/>
+              </a:rPr>
+              <a:t>四条不能省的边界，以及这份名单有多硬</a:t>
+            </a:r>
+            <a:endParaRPr lang="en-US" sz="2600" dirty="0"/>
+          </a:p>
+        </p:txBody>
+      </p:sp>
+      <p:sp>
+        <p:nvSpPr>
+          <p:cNvPr id="3" name="Text 1"/>
+          <p:cNvSpPr txBox="1"/>
+          <p:nvPr/>
+        </p:nvSpPr>
+        <p:spPr>
+          <a:xfrm>
+            <a:off x="685800" y="1078992"/>
+            <a:ext cx="2834640" cy="274320"/>
+          </a:xfrm>
+          <a:prstGeom prst="rect">
+            <a:avLst/>
+          </a:prstGeom>
+          <a:noFill/>
+          <a:ln/>
+        </p:spPr>
+        <p:txBody>
+          <a:bodyPr wrap="square" rtlCol="0" anchor="ctr"/>
+          <a:lstStyle/>
+          <a:p>
+            <a:pPr indent="0" marL="0">
+              <a:buNone/>
+            </a:pPr>
+            <a:r>
+              <a:rPr lang="en-US" sz="1300" b="1" dirty="0">
+                <a:solidFill>
+                  <a:srgbClr val="9A2B2B"/>
+                </a:solidFill>
+                <a:latin typeface="Microsoft YaHei" pitchFamily="34" charset="0"/>
+                <a:ea typeface="Microsoft YaHei" pitchFamily="34" charset="-122"/>
+                <a:cs typeface="Microsoft YaHei" pitchFamily="34" charset="-120"/>
+              </a:rPr>
+              <a:t>四条不能省的边界</a:t>
+            </a:r>
+            <a:endParaRPr lang="en-US" sz="1300" dirty="0"/>
+          </a:p>
+        </p:txBody>
+      </p:sp>
+      <p:sp>
+        <p:nvSpPr>
+          <p:cNvPr id="4" name="Text 2"/>
+          <p:cNvSpPr txBox="1"/>
+          <p:nvPr/>
+        </p:nvSpPr>
+        <p:spPr>
+          <a:xfrm>
+            <a:off x="685800" y="1325880"/>
+            <a:ext cx="2834640" cy="566928"/>
+          </a:xfrm>
+          <a:prstGeom prst="rect">
+            <a:avLst/>
+          </a:prstGeom>
+          <a:noFill/>
+          <a:ln/>
+        </p:spPr>
+        <p:txBody>
+          <a:bodyPr wrap="square" rtlCol="0" anchor="t"/>
+          <a:lstStyle/>
+          <a:p>
+            <a:pPr indent="0" marL="0">
+              <a:lnSpc>
+                <a:spcPct val="112000"/>
+              </a:lnSpc>
+              <a:buNone/>
+            </a:pPr>
+            <a:r>
+              <a:rPr lang="en-US" sz="950" dirty="0">
+                <a:solidFill>
+                  <a:srgbClr val="6B6B6B"/>
+                </a:solidFill>
+                <a:latin typeface="Microsoft YaHei" pitchFamily="34" charset="0"/>
+                <a:ea typeface="Microsoft YaHei" pitchFamily="34" charset="-122"/>
+                <a:cs typeface="Microsoft YaHei" pitchFamily="34" charset="-120"/>
+              </a:rPr>
+              <a:t>规格 §0.2</a:t>
+            </a:r>
+            <a:endParaRPr lang="en-US" sz="950" dirty="0"/>
+          </a:p>
+        </p:txBody>
+      </p:sp>
+      <p:sp>
+        <p:nvSpPr>
+          <p:cNvPr id="5" name="Text 3"/>
+          <p:cNvSpPr txBox="1"/>
+          <p:nvPr/>
+        </p:nvSpPr>
+        <p:spPr>
+          <a:xfrm>
+            <a:off x="3063240" y="1046988"/>
             <a:ext cx="8439912" cy="499262"/>
           </a:xfrm>
           <a:prstGeom prst="rect">
@@ -5381,7 +5534,7 @@
                 <a:ea typeface="Microsoft YaHei" pitchFamily="34" charset="-122"/>
                 <a:cs typeface="Microsoft YaHei" pitchFamily="34" charset="-120"/>
               </a:rPr>
-              <a:t>CASP3 的 mRNA 不反映 caspase-3 酶活性（酶原活化与 XIAP 抑制都在转录后）。本分析仅用它排除最低档，不是三重阳性门。</a:t>
+              <a:t>IL18 转录本即 pro-IL-18 的转录信号，但 pro-IL-18 是储备型蛋白，转录水平与细胞内前体储量不成线性关系。</a:t>
             </a:r>
             <a:endParaRPr lang="en-US" sz="1250" dirty="0"/>
           </a:p>
@@ -5389,13 +5542,13 @@
       </p:sp>
       <p:sp>
         <p:nvSpPr>
-          <p:cNvPr id="16" name="Text 14"/>
-          <p:cNvSpPr txBox="1"/>
-          <p:nvPr/>
-        </p:nvSpPr>
-        <p:spPr>
-          <a:xfrm>
-            <a:off x="3063240" y="4571086"/>
+          <p:cNvPr id="6" name="Text 4"/>
+          <p:cNvSpPr txBox="1"/>
+          <p:nvPr/>
+        </p:nvSpPr>
+        <p:spPr>
+          <a:xfrm>
+            <a:off x="3063240" y="1546250"/>
             <a:ext cx="8439912" cy="499262"/>
           </a:xfrm>
           <a:prstGeom prst="rect">
@@ -5423,6 +5576,90 @@
                 <a:ea typeface="Microsoft YaHei" pitchFamily="34" charset="-122"/>
                 <a:cs typeface="Microsoft YaHei" pitchFamily="34" charset="-120"/>
               </a:rPr>
+              <a:t>CASP1 是可诱导基因。本分析是静息基线筛选，静息近零不预测刺激后能否诱导——这一条只能靠带刺激的数据或实验解决。</a:t>
+            </a:r>
+            <a:endParaRPr lang="en-US" sz="1250" dirty="0"/>
+          </a:p>
+        </p:txBody>
+      </p:sp>
+      <p:sp>
+        <p:nvSpPr>
+          <p:cNvPr id="7" name="Text 5"/>
+          <p:cNvSpPr txBox="1"/>
+          <p:nvPr/>
+        </p:nvSpPr>
+        <p:spPr>
+          <a:xfrm>
+            <a:off x="3063240" y="2045513"/>
+            <a:ext cx="8439912" cy="499262"/>
+          </a:xfrm>
+          <a:prstGeom prst="rect">
+            <a:avLst/>
+          </a:prstGeom>
+          <a:noFill/>
+          <a:ln/>
+        </p:spPr>
+        <p:txBody>
+          <a:bodyPr wrap="square" rtlCol="0" anchor="t"/>
+          <a:lstStyle/>
+          <a:p>
+            <a:pPr indent="0" marL="0">
+              <a:lnSpc>
+                <a:spcPct val="116000"/>
+              </a:lnSpc>
+              <a:buNone/>
+            </a:pPr>
+            <a:r>
+              <a:rPr lang="en-US" sz="1250" dirty="0">
+                <a:solidFill>
+                  <a:srgbClr val="1A1A1A"/>
+                </a:solidFill>
+                <a:latin typeface="Microsoft YaHei" pitchFamily="34" charset="0"/>
+                <a:ea typeface="Microsoft YaHei" pitchFamily="34" charset="-122"/>
+                <a:cs typeface="Microsoft YaHei" pitchFamily="34" charset="-120"/>
+              </a:rPr>
+              <a:t>CASP3 的 mRNA 不反映 caspase-3 酶活性（酶原活化与 XIAP 抑制都在转录后）。本分析仅用它排除最低档，不是三重阳性门。</a:t>
+            </a:r>
+            <a:endParaRPr lang="en-US" sz="1250" dirty="0"/>
+          </a:p>
+        </p:txBody>
+      </p:sp>
+      <p:sp>
+        <p:nvSpPr>
+          <p:cNvPr id="8" name="Text 6"/>
+          <p:cNvSpPr txBox="1"/>
+          <p:nvPr/>
+        </p:nvSpPr>
+        <p:spPr>
+          <a:xfrm>
+            <a:off x="3063240" y="2544775"/>
+            <a:ext cx="8439912" cy="716890"/>
+          </a:xfrm>
+          <a:prstGeom prst="rect">
+            <a:avLst/>
+          </a:prstGeom>
+          <a:noFill/>
+          <a:ln/>
+        </p:spPr>
+        <p:txBody>
+          <a:bodyPr wrap="square" rtlCol="0" anchor="t"/>
+          <a:lstStyle/>
+          <a:p>
+            <a:pPr indent="0" marL="0">
+              <a:lnSpc>
+                <a:spcPct val="116000"/>
+              </a:lnSpc>
+              <a:buNone/>
+            </a:pPr>
+            <a:r>
+              <a:rPr lang="en-US" sz="1250" dirty="0">
+                <a:solidFill>
+                  <a:srgbClr val="1A1A1A"/>
+                </a:solidFill>
+                <a:latin typeface="Microsoft YaHei" pitchFamily="34" charset="0"/>
+                <a:ea typeface="Microsoft YaHei" pitchFamily="34" charset="-122"/>
+                <a:cs typeface="Microsoft YaHei" pitchFamily="34" charset="-120"/>
+              </a:rPr>
               <a:t>未做环境 RNA 校正；人鼠之间、数据集之间、单核与单细胞之间只比名单不比数值。小鼠星形胶质的结论只覆盖皮层与海马：小脑 Bergmann 胶质 22.4 CPM、脊髓星形胶质 12.5–16.7 CPM 都测到 Casp1。</a:t>
             </a:r>
             <a:endParaRPr lang="en-US" sz="1250" dirty="0"/>
@@ -5431,13 +5668,13 @@
       </p:sp>
       <p:sp>
         <p:nvSpPr>
-          <p:cNvPr id="17" name="Text 15"/>
-          <p:cNvSpPr txBox="1"/>
-          <p:nvPr/>
-        </p:nvSpPr>
-        <p:spPr>
-          <a:xfrm>
-            <a:off x="685800" y="5225796"/>
+          <p:cNvPr id="9" name="Text 7"/>
+          <p:cNvSpPr txBox="1"/>
+          <p:nvPr/>
+        </p:nvSpPr>
+        <p:spPr>
+          <a:xfrm>
+            <a:off x="685800" y="3417113"/>
             <a:ext cx="2834640" cy="274320"/>
           </a:xfrm>
           <a:prstGeom prst="rect">
@@ -5470,13 +5707,13 @@
       </p:sp>
       <p:sp>
         <p:nvSpPr>
-          <p:cNvPr id="18" name="Text 16"/>
-          <p:cNvSpPr txBox="1"/>
-          <p:nvPr/>
-        </p:nvSpPr>
-        <p:spPr>
-          <a:xfrm>
-            <a:off x="685800" y="5472684"/>
+          <p:cNvPr id="10" name="Text 8"/>
+          <p:cNvSpPr txBox="1"/>
+          <p:nvPr/>
+        </p:nvSpPr>
+        <p:spPr>
+          <a:xfrm>
+            <a:off x="685800" y="3664001"/>
             <a:ext cx="2834640" cy="566928"/>
           </a:xfrm>
           <a:prstGeom prst="rect">
@@ -5512,13 +5749,13 @@
       </p:sp>
       <p:sp>
         <p:nvSpPr>
-          <p:cNvPr id="19" name="Text 17"/>
-          <p:cNvSpPr txBox="1"/>
-          <p:nvPr/>
-        </p:nvSpPr>
-        <p:spPr>
-          <a:xfrm>
-            <a:off x="3063240" y="5193792"/>
+          <p:cNvPr id="11" name="Text 9"/>
+          <p:cNvSpPr txBox="1"/>
+          <p:nvPr/>
+        </p:nvSpPr>
+        <p:spPr>
+          <a:xfrm>
+            <a:off x="3063240" y="3385109"/>
             <a:ext cx="8439912" cy="281635"/>
           </a:xfrm>
           <a:prstGeom prst="rect">
@@ -5554,14 +5791,14 @@
       </p:sp>
       <p:sp>
         <p:nvSpPr>
-          <p:cNvPr id="20" name="Text 18"/>
-          <p:cNvSpPr txBox="1"/>
-          <p:nvPr/>
-        </p:nvSpPr>
-        <p:spPr>
-          <a:xfrm>
-            <a:off x="3063240" y="5475427"/>
-            <a:ext cx="8439912" cy="499262"/>
+          <p:cNvPr id="12" name="Text 10"/>
+          <p:cNvSpPr txBox="1"/>
+          <p:nvPr/>
+        </p:nvSpPr>
+        <p:spPr>
+          <a:xfrm>
+            <a:off x="3063240" y="3666744"/>
+            <a:ext cx="8439912" cy="716890"/>
           </a:xfrm>
           <a:prstGeom prst="rect">
             <a:avLst/>
@@ -5596,14 +5833,14 @@
       </p:sp>
       <p:sp>
         <p:nvSpPr>
-          <p:cNvPr id="21" name="Text 19"/>
-          <p:cNvSpPr txBox="1"/>
-          <p:nvPr/>
-        </p:nvSpPr>
-        <p:spPr>
-          <a:xfrm>
-            <a:off x="3063240" y="5974690"/>
-            <a:ext cx="8439912" cy="281635"/>
+          <p:cNvPr id="13" name="Text 11"/>
+          <p:cNvSpPr txBox="1"/>
+          <p:nvPr/>
+        </p:nvSpPr>
+        <p:spPr>
+          <a:xfrm>
+            <a:off x="3063240" y="4383634"/>
+            <a:ext cx="8439912" cy="499262"/>
           </a:xfrm>
           <a:prstGeom prst="rect">
             <a:avLst/>

--- a/il18_casp5organ/IL18_CASP_五器官筛选.pptx
+++ b/il18_casp5organ/IL18_CASP_五器官筛选.pptx
@@ -4064,7 +4064,7 @@
         </p:nvSpPr>
         <p:spPr>
           <a:xfrm>
-            <a:off x="640080" y="347472"/>
+            <a:off x="640080" y="365760"/>
             <a:ext cx="5486400" cy="502920"/>
           </a:xfrm>
           <a:prstGeom prst="rect">
@@ -4103,7 +4103,7 @@
         </p:nvSpPr>
         <p:spPr>
           <a:xfrm>
-            <a:off x="640080" y="868680"/>
+            <a:off x="640080" y="886968"/>
             <a:ext cx="10972800" cy="274320"/>
           </a:xfrm>
           <a:prstGeom prst="rect">
@@ -4128,7 +4128,7 @@
                 <a:ea typeface="Microsoft YaHei" pitchFamily="34" charset="-122"/>
                 <a:cs typeface="Microsoft YaHei" pitchFamily="34" charset="-120"/>
               </a:rPr>
-              <a:t>每行都是可自行核对的观察，不是判定标签。括号内为「阳性细胞 / 分析细胞」，均为合并全部供体的检出率。</a:t>
+              <a:t>检出率均为合并口径（原始计数 ≥1 的细胞数 ÷ 分析细胞数，合并全部供体）。29 个分层，静息基线。</a:t>
             </a:r>
             <a:endParaRPr lang="en-US" sz="1100" dirty="0"/>
           </a:p>
@@ -4142,8 +4142,8 @@
         </p:nvSpPr>
         <p:spPr>
           <a:xfrm>
-            <a:off x="685800" y="1261872"/>
-            <a:ext cx="2834640" cy="274320"/>
+            <a:off x="658368" y="1389888"/>
+            <a:ext cx="384048" cy="274320"/>
           </a:xfrm>
           <a:prstGeom prst="rect">
             <a:avLst/>
@@ -4155,21 +4155,21 @@
           <a:bodyPr wrap="square" rtlCol="0" anchor="ctr"/>
           <a:lstStyle/>
           <a:p>
-            <a:pPr indent="0" marL="0">
-              <a:buNone/>
-            </a:pPr>
-            <a:r>
-              <a:rPr lang="en-US" sz="1300" b="1" dirty="0">
-                <a:solidFill>
-                  <a:srgbClr val="9A2B2B"/>
-                </a:solidFill>
-                <a:latin typeface="Microsoft YaHei" pitchFamily="34" charset="0"/>
-                <a:ea typeface="Microsoft YaHei" pitchFamily="34" charset="-122"/>
-                <a:cs typeface="Microsoft YaHei" pitchFamily="34" charset="-120"/>
-              </a:rPr>
-              <a:t>一条通则</a:t>
-            </a:r>
-            <a:endParaRPr lang="en-US" sz="1300" dirty="0"/>
+            <a:pPr algn="r" indent="0" marL="0">
+              <a:buNone/>
+            </a:pPr>
+            <a:r>
+              <a:rPr lang="en-US" sz="1200" dirty="0">
+                <a:solidFill>
+                  <a:srgbClr val="9AA0A6"/>
+                </a:solidFill>
+                <a:latin typeface="Microsoft YaHei" pitchFamily="34" charset="0"/>
+                <a:ea typeface="Microsoft YaHei" pitchFamily="34" charset="-122"/>
+                <a:cs typeface="Microsoft YaHei" pitchFamily="34" charset="-120"/>
+              </a:rPr>
+              <a:t>1</a:t>
+            </a:r>
+            <a:endParaRPr lang="en-US" sz="1200" dirty="0"/>
           </a:p>
         </p:txBody>
       </p:sp>
@@ -4181,8 +4181,8 @@
         </p:nvSpPr>
         <p:spPr>
           <a:xfrm>
-            <a:off x="685800" y="1508760"/>
-            <a:ext cx="2834640" cy="566928"/>
+            <a:off x="1188720" y="1348740"/>
+            <a:ext cx="10195560" cy="585216"/>
           </a:xfrm>
           <a:prstGeom prst="rect">
             <a:avLst/>
@@ -4196,22 +4196,39 @@
           <a:p>
             <a:pPr indent="0" marL="0">
               <a:lnSpc>
-                <a:spcPct val="112000"/>
+                <a:spcPct val="122000"/>
               </a:lnSpc>
               <a:buNone/>
             </a:pPr>
             <a:r>
-              <a:rPr lang="en-US" sz="950" dirty="0">
-                <a:solidFill>
-                  <a:srgbClr val="6B6B6B"/>
-                </a:solidFill>
-                <a:latin typeface="Microsoft YaHei" pitchFamily="34" charset="0"/>
-                <a:ea typeface="Microsoft YaHei" pitchFamily="34" charset="-122"/>
-                <a:cs typeface="Microsoft YaHei" pitchFamily="34" charset="-120"/>
-              </a:rPr>
-              <a:t>不依赖环境 RNA 校正与检出下限</a:t>
-            </a:r>
-            <a:endParaRPr lang="en-US" sz="950" dirty="0"/>
+              <a:rPr lang="en-US" sz="1400" b="1" dirty="0">
+                <a:solidFill>
+                  <a:srgbClr val="1A1A1A"/>
+                </a:solidFill>
+                <a:latin typeface="Microsoft YaHei" pitchFamily="34" charset="0"/>
+                <a:ea typeface="Microsoft YaHei" pitchFamily="34" charset="-122"/>
+                <a:cs typeface="Microsoft YaHei" pitchFamily="34" charset="-120"/>
+              </a:rPr>
+              <a:t>髓系细胞不满足筛选前提。</a:t>
+            </a:r>
+            <a:pPr indent="0" marL="0">
+              <a:lnSpc>
+                <a:spcPct val="122000"/>
+              </a:lnSpc>
+              <a:buNone/>
+            </a:pPr>
+            <a:r>
+              <a:rPr lang="en-US" sz="1400" dirty="0">
+                <a:solidFill>
+                  <a:srgbClr val="3C3C3C"/>
+                </a:solidFill>
+                <a:latin typeface="Microsoft YaHei" pitchFamily="34" charset="0"/>
+                <a:ea typeface="Microsoft YaHei" pitchFamily="34" charset="-122"/>
+                <a:cs typeface="Microsoft YaHei" pitchFamily="34" charset="-120"/>
+              </a:rPr>
+              <a:t>巨噬、单核、树突状、小胶质与粒细胞在两物种五器官共 62 个「细胞类型 × 分层」中无一方向符合；IL18 检出率最高的细胞类型同时也是 CASP1 检出率最高的。</a:t>
+            </a:r>
+            <a:endParaRPr lang="en-US" sz="1400" dirty="0"/>
           </a:p>
         </p:txBody>
       </p:sp>
@@ -4223,8 +4240,47 @@
         </p:nvSpPr>
         <p:spPr>
           <a:xfrm>
-            <a:off x="3063240" y="1229868"/>
-            <a:ext cx="8439912" cy="499262"/>
+            <a:off x="658368" y="2084832"/>
+            <a:ext cx="384048" cy="274320"/>
+          </a:xfrm>
+          <a:prstGeom prst="rect">
+            <a:avLst/>
+          </a:prstGeom>
+          <a:noFill/>
+          <a:ln/>
+        </p:spPr>
+        <p:txBody>
+          <a:bodyPr wrap="square" rtlCol="0" anchor="ctr"/>
+          <a:lstStyle/>
+          <a:p>
+            <a:pPr algn="r" indent="0" marL="0">
+              <a:buNone/>
+            </a:pPr>
+            <a:r>
+              <a:rPr lang="en-US" sz="1200" dirty="0">
+                <a:solidFill>
+                  <a:srgbClr val="9AA0A6"/>
+                </a:solidFill>
+                <a:latin typeface="Microsoft YaHei" pitchFamily="34" charset="0"/>
+                <a:ea typeface="Microsoft YaHei" pitchFamily="34" charset="-122"/>
+                <a:cs typeface="Microsoft YaHei" pitchFamily="34" charset="-120"/>
+              </a:rPr>
+              <a:t>2</a:t>
+            </a:r>
+            <a:endParaRPr lang="en-US" sz="1200" dirty="0"/>
+          </a:p>
+        </p:txBody>
+      </p:sp>
+      <p:sp>
+        <p:nvSpPr>
+          <p:cNvPr id="7" name="Text 5"/>
+          <p:cNvSpPr txBox="1"/>
+          <p:nvPr/>
+        </p:nvSpPr>
+        <p:spPr>
+          <a:xfrm>
+            <a:off x="1188720" y="2043684"/>
+            <a:ext cx="10195560" cy="585216"/>
           </a:xfrm>
           <a:prstGeom prst="rect">
             <a:avLst/>
@@ -4238,12 +4294,12 @@
           <a:p>
             <a:pPr indent="0" marL="0">
               <a:lnSpc>
-                <a:spcPct val="116000"/>
+                <a:spcPct val="122000"/>
               </a:lnSpc>
               <a:buNone/>
             </a:pPr>
             <a:r>
-              <a:rPr lang="en-US" sz="1250" dirty="0">
+              <a:rPr lang="en-US" sz="1400" b="1" dirty="0">
                 <a:solidFill>
                   <a:srgbClr val="1A1A1A"/>
                 </a:solidFill>
@@ -4251,22 +4307,78 @@
                 <a:ea typeface="Microsoft YaHei" pitchFamily="34" charset="-122"/>
                 <a:cs typeface="Microsoft YaHei" pitchFamily="34" charset="-120"/>
               </a:rPr>
-              <a:t>髓系（巨噬 / 单核 / 树突状 / 小胶质 / 粒细胞）在两物种五器官共 62 个「细胞类型 × 分层」，方向符合的是 0 个：IL18 检出最高的细胞，同时也是 CASP1 检出最高的。</a:t>
-            </a:r>
-            <a:endParaRPr lang="en-US" sz="1250" dirty="0"/>
-          </a:p>
-        </p:txBody>
-      </p:sp>
-      <p:sp>
-        <p:nvSpPr>
-          <p:cNvPr id="7" name="Text 5"/>
-          <p:cNvSpPr txBox="1"/>
-          <p:nvPr/>
-        </p:nvSpPr>
-        <p:spPr>
-          <a:xfrm>
-            <a:off x="3063240" y="1729130"/>
-            <a:ext cx="8439912" cy="281635"/>
+              <a:t>小鼠的命中集中于胶质。</a:t>
+            </a:r>
+            <a:pPr indent="0" marL="0">
+              <a:lnSpc>
+                <a:spcPct val="122000"/>
+              </a:lnSpc>
+              <a:buNone/>
+            </a:pPr>
+            <a:r>
+              <a:rPr lang="en-US" sz="1400" dirty="0">
+                <a:solidFill>
+                  <a:srgbClr val="3C3C3C"/>
+                </a:solidFill>
+                <a:latin typeface="Microsoft YaHei" pitchFamily="34" charset="0"/>
+                <a:ea typeface="Microsoft YaHei" pitchFamily="34" charset="-122"/>
+                <a:cs typeface="Microsoft YaHei" pitchFamily="34" charset="-120"/>
+              </a:rPr>
+              <a:t>皮层与海马星形胶质 IL18 56.7%（2135/3766，40 供体）、CASP1 2/3766；少突胶质 27.3%（2452/8987，55 供体）、CASP1 2/8987。</a:t>
+            </a:r>
+            <a:endParaRPr lang="en-US" sz="1400" dirty="0"/>
+          </a:p>
+        </p:txBody>
+      </p:sp>
+      <p:sp>
+        <p:nvSpPr>
+          <p:cNvPr id="8" name="Text 6"/>
+          <p:cNvSpPr txBox="1"/>
+          <p:nvPr/>
+        </p:nvSpPr>
+        <p:spPr>
+          <a:xfrm>
+            <a:off x="658368" y="2779776"/>
+            <a:ext cx="384048" cy="274320"/>
+          </a:xfrm>
+          <a:prstGeom prst="rect">
+            <a:avLst/>
+          </a:prstGeom>
+          <a:noFill/>
+          <a:ln/>
+        </p:spPr>
+        <p:txBody>
+          <a:bodyPr wrap="square" rtlCol="0" anchor="ctr"/>
+          <a:lstStyle/>
+          <a:p>
+            <a:pPr algn="r" indent="0" marL="0">
+              <a:buNone/>
+            </a:pPr>
+            <a:r>
+              <a:rPr lang="en-US" sz="1200" dirty="0">
+                <a:solidFill>
+                  <a:srgbClr val="9AA0A6"/>
+                </a:solidFill>
+                <a:latin typeface="Microsoft YaHei" pitchFamily="34" charset="0"/>
+                <a:ea typeface="Microsoft YaHei" pitchFamily="34" charset="-122"/>
+                <a:cs typeface="Microsoft YaHei" pitchFamily="34" charset="-120"/>
+              </a:rPr>
+              <a:t>3</a:t>
+            </a:r>
+            <a:endParaRPr lang="en-US" sz="1200" dirty="0"/>
+          </a:p>
+        </p:txBody>
+      </p:sp>
+      <p:sp>
+        <p:nvSpPr>
+          <p:cNvPr id="9" name="Text 7"/>
+          <p:cNvSpPr txBox="1"/>
+          <p:nvPr/>
+        </p:nvSpPr>
+        <p:spPr>
+          <a:xfrm>
+            <a:off x="1188720" y="2738628"/>
+            <a:ext cx="10195560" cy="585216"/>
           </a:xfrm>
           <a:prstGeom prst="rect">
             <a:avLst/>
@@ -4280,12 +4392,12 @@
           <a:p>
             <a:pPr indent="0" marL="0">
               <a:lnSpc>
-                <a:spcPct val="116000"/>
+                <a:spcPct val="122000"/>
               </a:lnSpc>
               <a:buNone/>
             </a:pPr>
             <a:r>
-              <a:rPr lang="en-US" sz="1250" dirty="0">
+              <a:rPr lang="en-US" sz="1400" b="1" dirty="0">
                 <a:solidFill>
                   <a:srgbClr val="1A1A1A"/>
                 </a:solidFill>
@@ -4293,22 +4405,39 @@
                 <a:ea typeface="Microsoft YaHei" pitchFamily="34" charset="-122"/>
                 <a:cs typeface="Microsoft YaHei" pitchFamily="34" charset="-120"/>
               </a:rPr>
-              <a:t>这是共表达模式而不是「近零」断言，因此是本页最不吃边界条件的一条。</a:t>
-            </a:r>
-            <a:endParaRPr lang="en-US" sz="1250" dirty="0"/>
-          </a:p>
-        </p:txBody>
-      </p:sp>
-      <p:sp>
-        <p:nvSpPr>
-          <p:cNvPr id="8" name="Text 6"/>
-          <p:cNvSpPr txBox="1"/>
-          <p:nvPr/>
-        </p:nvSpPr>
-        <p:spPr>
-          <a:xfrm>
-            <a:off x="685800" y="2166214"/>
-            <a:ext cx="2834640" cy="274320"/>
+              <a:t>人的命中集中于皮层神经元亚类。</a:t>
+            </a:r>
+            <a:pPr indent="0" marL="0">
+              <a:lnSpc>
+                <a:spcPct val="122000"/>
+              </a:lnSpc>
+              <a:buNone/>
+            </a:pPr>
+            <a:r>
+              <a:rPr lang="en-US" sz="1400" dirty="0">
+                <a:solidFill>
+                  <a:srgbClr val="3C3C3C"/>
+                </a:solidFill>
+                <a:latin typeface="Microsoft YaHei" pitchFamily="34" charset="0"/>
+                <a:ea typeface="Microsoft YaHei" pitchFamily="34" charset="-122"/>
+                <a:cs typeface="Microsoft YaHei" pitchFamily="34" charset="-120"/>
+              </a:rPr>
+              <a:t>PV 中间神经元 IL18 26.8%（5286/19711，78 供体）、CASP1 24/19711，另一队列（234 供体）复现；L5 ET 投射神经元三个分层 IL18 31.8%–43.3%、CASP1 均 ≤5 个阳性细胞。</a:t>
+            </a:r>
+            <a:endParaRPr lang="en-US" sz="1400" dirty="0"/>
+          </a:p>
+        </p:txBody>
+      </p:sp>
+      <p:sp>
+        <p:nvSpPr>
+          <p:cNvPr id="10" name="Text 8"/>
+          <p:cNvSpPr txBox="1"/>
+          <p:nvPr/>
+        </p:nvSpPr>
+        <p:spPr>
+          <a:xfrm>
+            <a:off x="658368" y="3474720"/>
+            <a:ext cx="384048" cy="274320"/>
           </a:xfrm>
           <a:prstGeom prst="rect">
             <a:avLst/>
@@ -4320,34 +4449,34 @@
           <a:bodyPr wrap="square" rtlCol="0" anchor="ctr"/>
           <a:lstStyle/>
           <a:p>
-            <a:pPr indent="0" marL="0">
-              <a:buNone/>
-            </a:pPr>
-            <a:r>
-              <a:rPr lang="en-US" sz="1300" b="1" dirty="0">
-                <a:solidFill>
-                  <a:srgbClr val="1B7A43"/>
-                </a:solidFill>
-                <a:latin typeface="Microsoft YaHei" pitchFamily="34" charset="0"/>
-                <a:ea typeface="Microsoft YaHei" pitchFamily="34" charset="-122"/>
-                <a:cs typeface="Microsoft YaHei" pitchFamily="34" charset="-120"/>
-              </a:rPr>
-              <a:t>小鼠：胶质在顶</a:t>
-            </a:r>
-            <a:endParaRPr lang="en-US" sz="1300" dirty="0"/>
-          </a:p>
-        </p:txBody>
-      </p:sp>
-      <p:sp>
-        <p:nvSpPr>
-          <p:cNvPr id="9" name="Text 7"/>
-          <p:cNvSpPr txBox="1"/>
-          <p:nvPr/>
-        </p:nvSpPr>
-        <p:spPr>
-          <a:xfrm>
-            <a:off x="685800" y="2413102"/>
-            <a:ext cx="2834640" cy="566928"/>
+            <a:pPr algn="r" indent="0" marL="0">
+              <a:buNone/>
+            </a:pPr>
+            <a:r>
+              <a:rPr lang="en-US" sz="1200" dirty="0">
+                <a:solidFill>
+                  <a:srgbClr val="9AA0A6"/>
+                </a:solidFill>
+                <a:latin typeface="Microsoft YaHei" pitchFamily="34" charset="0"/>
+                <a:ea typeface="Microsoft YaHei" pitchFamily="34" charset="-122"/>
+                <a:cs typeface="Microsoft YaHei" pitchFamily="34" charset="-120"/>
+              </a:rPr>
+              <a:t>4</a:t>
+            </a:r>
+            <a:endParaRPr lang="en-US" sz="1200" dirty="0"/>
+          </a:p>
+        </p:txBody>
+      </p:sp>
+      <p:sp>
+        <p:nvSpPr>
+          <p:cNvPr id="11" name="Text 9"/>
+          <p:cNvSpPr txBox="1"/>
+          <p:nvPr/>
+        </p:nvSpPr>
+        <p:spPr>
+          <a:xfrm>
+            <a:off x="1188720" y="3433572"/>
+            <a:ext cx="10195560" cy="585216"/>
           </a:xfrm>
           <a:prstGeom prst="rect">
             <a:avLst/>
@@ -4361,35 +4490,91 @@
           <a:p>
             <a:pPr indent="0" marL="0">
               <a:lnSpc>
-                <a:spcPct val="112000"/>
+                <a:spcPct val="122000"/>
               </a:lnSpc>
               <a:buNone/>
             </a:pPr>
             <a:r>
-              <a:rPr lang="en-US" sz="950" dirty="0">
-                <a:solidFill>
-                  <a:srgbClr val="6B6B6B"/>
-                </a:solidFill>
-                <a:latin typeface="Microsoft YaHei" pitchFamily="34" charset="0"/>
-                <a:ea typeface="Microsoft YaHei" pitchFamily="34" charset="-122"/>
-                <a:cs typeface="Microsoft YaHei" pitchFamily="34" charset="-120"/>
-              </a:rPr>
-              <a:t>Yao 皮层+海马，真单细胞</a:t>
-            </a:r>
-            <a:endParaRPr lang="en-US" sz="950" dirty="0"/>
-          </a:p>
-        </p:txBody>
-      </p:sp>
-      <p:sp>
-        <p:nvSpPr>
-          <p:cNvPr id="10" name="Text 8"/>
-          <p:cNvSpPr txBox="1"/>
-          <p:nvPr/>
-        </p:nvSpPr>
-        <p:spPr>
-          <a:xfrm>
-            <a:off x="3063240" y="2134210"/>
-            <a:ext cx="8439912" cy="934517"/>
+              <a:rPr lang="en-US" sz="1400" b="1" dirty="0">
+                <a:solidFill>
+                  <a:srgbClr val="1A1A1A"/>
+                </a:solidFill>
+                <a:latin typeface="Microsoft YaHei" pitchFamily="34" charset="0"/>
+                <a:ea typeface="Microsoft YaHei" pitchFamily="34" charset="-122"/>
+                <a:cs typeface="Microsoft YaHei" pitchFamily="34" charset="-120"/>
+              </a:rPr>
+              <a:t>两组命中不跨物种成立。</a:t>
+            </a:r>
+            <a:pPr indent="0" marL="0">
+              <a:lnSpc>
+                <a:spcPct val="122000"/>
+              </a:lnSpc>
+              <a:buNone/>
+            </a:pPr>
+            <a:r>
+              <a:rPr lang="en-US" sz="1400" dirty="0">
+                <a:solidFill>
+                  <a:srgbClr val="3C3C3C"/>
+                </a:solidFill>
+                <a:latin typeface="Microsoft YaHei" pitchFamily="34" charset="0"/>
+                <a:ea typeface="Microsoft YaHei" pitchFamily="34" charset="-122"/>
+                <a:cs typeface="Microsoft YaHei" pitchFamily="34" charset="-120"/>
+              </a:rPr>
+              <a:t>人皮层星形胶质 IL18 仅 4.8%（782/16319，78 供体）；小鼠皮层 PV 中间神经元 Casp1 同样近零，但 Il18 仅 2.2%（684/30434，52 供体）。</a:t>
+            </a:r>
+            <a:endParaRPr lang="en-US" sz="1400" dirty="0"/>
+          </a:p>
+        </p:txBody>
+      </p:sp>
+      <p:sp>
+        <p:nvSpPr>
+          <p:cNvPr id="12" name="Text 10"/>
+          <p:cNvSpPr txBox="1"/>
+          <p:nvPr/>
+        </p:nvSpPr>
+        <p:spPr>
+          <a:xfrm>
+            <a:off x="658368" y="4169664"/>
+            <a:ext cx="384048" cy="274320"/>
+          </a:xfrm>
+          <a:prstGeom prst="rect">
+            <a:avLst/>
+          </a:prstGeom>
+          <a:noFill/>
+          <a:ln/>
+        </p:spPr>
+        <p:txBody>
+          <a:bodyPr wrap="square" rtlCol="0" anchor="ctr"/>
+          <a:lstStyle/>
+          <a:p>
+            <a:pPr algn="r" indent="0" marL="0">
+              <a:buNone/>
+            </a:pPr>
+            <a:r>
+              <a:rPr lang="en-US" sz="1200" dirty="0">
+                <a:solidFill>
+                  <a:srgbClr val="9AA0A6"/>
+                </a:solidFill>
+                <a:latin typeface="Microsoft YaHei" pitchFamily="34" charset="0"/>
+                <a:ea typeface="Microsoft YaHei" pitchFamily="34" charset="-122"/>
+                <a:cs typeface="Microsoft YaHei" pitchFamily="34" charset="-120"/>
+              </a:rPr>
+              <a:t>5</a:t>
+            </a:r>
+            <a:endParaRPr lang="en-US" sz="1200" dirty="0"/>
+          </a:p>
+        </p:txBody>
+      </p:sp>
+      <p:sp>
+        <p:nvSpPr>
+          <p:cNvPr id="13" name="Text 11"/>
+          <p:cNvSpPr txBox="1"/>
+          <p:nvPr/>
+        </p:nvSpPr>
+        <p:spPr>
+          <a:xfrm>
+            <a:off x="1188720" y="4128516"/>
+            <a:ext cx="10195560" cy="585216"/>
           </a:xfrm>
           <a:prstGeom prst="rect">
             <a:avLst/>
@@ -4403,12 +4588,12 @@
           <a:p>
             <a:pPr indent="0" marL="0">
               <a:lnSpc>
-                <a:spcPct val="116000"/>
+                <a:spcPct val="122000"/>
               </a:lnSpc>
               <a:buNone/>
             </a:pPr>
             <a:r>
-              <a:rPr lang="en-US" sz="1250" dirty="0">
+              <a:rPr lang="en-US" sz="1400" b="1" dirty="0">
                 <a:solidFill>
                   <a:srgbClr val="1A1A1A"/>
                 </a:solidFill>
@@ -4416,22 +4601,78 @@
                 <a:ea typeface="Microsoft YaHei" pitchFamily="34" charset="-122"/>
                 <a:cs typeface="Microsoft YaHei" pitchFamily="34" charset="-120"/>
               </a:rPr>
-              <a:t>星形胶质 IL18 2135/3766 = 56.7%（40 供体，分层内 1/24），CASP1 仅 2/3766；少突胶质 27.3%（2452/8987，55 供体），CASP1 2/8987。星形胶质的 4 个参考来源无分歧，但其中只有 3 个是独立纯化测量（RiboTag、TMS FACS、brainrnaseq），第 4 个是 CELLxGENE 汇总、与本筛选同出一个数据家族。</a:t>
-            </a:r>
-            <a:endParaRPr lang="en-US" sz="1250" dirty="0"/>
-          </a:p>
-        </p:txBody>
-      </p:sp>
-      <p:sp>
-        <p:nvSpPr>
-          <p:cNvPr id="11" name="Text 9"/>
-          <p:cNvSpPr txBox="1"/>
-          <p:nvPr/>
-        </p:nvSpPr>
-        <p:spPr>
-          <a:xfrm>
-            <a:off x="3063240" y="3068726"/>
-            <a:ext cx="8439912" cy="716890"/>
+              <a:t>脑外共 7 个细胞类型方向符合，证据均为单一来源或存在分歧。</a:t>
+            </a:r>
+            <a:pPr indent="0" marL="0">
+              <a:lnSpc>
+                <a:spcPct val="122000"/>
+              </a:lnSpc>
+              <a:buNone/>
+            </a:pPr>
+            <a:r>
+              <a:rPr lang="en-US" sz="1400" dirty="0">
+                <a:solidFill>
+                  <a:srgbClr val="3C3C3C"/>
+                </a:solidFill>
+                <a:latin typeface="Microsoft YaHei" pitchFamily="34" charset="0"/>
+                <a:ea typeface="Microsoft YaHei" pitchFamily="34" charset="-122"/>
+                <a:cs typeface="Microsoft YaHei" pitchFamily="34" charset="-120"/>
+              </a:rPr>
+              <a:t>其中检出率最高者为人肺肥大细胞 IL18 34.9%（1851/5299，44 供体）、CASP1 2.60%。</a:t>
+            </a:r>
+            <a:endParaRPr lang="en-US" sz="1400" dirty="0"/>
+          </a:p>
+        </p:txBody>
+      </p:sp>
+      <p:sp>
+        <p:nvSpPr>
+          <p:cNvPr id="14" name="Text 12"/>
+          <p:cNvSpPr txBox="1"/>
+          <p:nvPr/>
+        </p:nvSpPr>
+        <p:spPr>
+          <a:xfrm>
+            <a:off x="658368" y="4864608"/>
+            <a:ext cx="384048" cy="274320"/>
+          </a:xfrm>
+          <a:prstGeom prst="rect">
+            <a:avLst/>
+          </a:prstGeom>
+          <a:noFill/>
+          <a:ln/>
+        </p:spPr>
+        <p:txBody>
+          <a:bodyPr wrap="square" rtlCol="0" anchor="ctr"/>
+          <a:lstStyle/>
+          <a:p>
+            <a:pPr algn="r" indent="0" marL="0">
+              <a:buNone/>
+            </a:pPr>
+            <a:r>
+              <a:rPr lang="en-US" sz="1200" dirty="0">
+                <a:solidFill>
+                  <a:srgbClr val="9AA0A6"/>
+                </a:solidFill>
+                <a:latin typeface="Microsoft YaHei" pitchFamily="34" charset="0"/>
+                <a:ea typeface="Microsoft YaHei" pitchFamily="34" charset="-122"/>
+                <a:cs typeface="Microsoft YaHei" pitchFamily="34" charset="-120"/>
+              </a:rPr>
+              <a:t>6</a:t>
+            </a:r>
+            <a:endParaRPr lang="en-US" sz="1200" dirty="0"/>
+          </a:p>
+        </p:txBody>
+      </p:sp>
+      <p:sp>
+        <p:nvSpPr>
+          <p:cNvPr id="15" name="Text 13"/>
+          <p:cNvSpPr txBox="1"/>
+          <p:nvPr/>
+        </p:nvSpPr>
+        <p:spPr>
+          <a:xfrm>
+            <a:off x="1188720" y="4823460"/>
+            <a:ext cx="10195560" cy="338328"/>
           </a:xfrm>
           <a:prstGeom prst="rect">
             <a:avLst/>
@@ -4445,12 +4686,12 @@
           <a:p>
             <a:pPr indent="0" marL="0">
               <a:lnSpc>
-                <a:spcPct val="116000"/>
+                <a:spcPct val="122000"/>
               </a:lnSpc>
               <a:buNone/>
             </a:pPr>
             <a:r>
-              <a:rPr lang="en-US" sz="1250" dirty="0">
+              <a:rPr lang="en-US" sz="1400" b="1" dirty="0">
                 <a:solidFill>
                   <a:srgbClr val="1A1A1A"/>
                 </a:solidFill>
@@ -4458,22 +4699,78 @@
                 <a:ea typeface="Microsoft YaHei" pitchFamily="34" charset="-122"/>
                 <a:cs typeface="Microsoft YaHei" pitchFamily="34" charset="-120"/>
               </a:rPr>
-              <a:t>小鼠脑的另一个分层（单核，10 供体）不复现：星形胶质 IL18 仍排第 1（14579/21878 = 66.6%），CASP1 却是 1018/21878 = 4.65%。单核与单细胞不可定量混比，但「是否入选」这一层的分歧必须写出来——这条最硬的结论在两个可用的小鼠脑分层里只成立于一个。</a:t>
-            </a:r>
-            <a:endParaRPr lang="en-US" sz="1250" dirty="0"/>
-          </a:p>
-        </p:txBody>
-      </p:sp>
-      <p:sp>
-        <p:nvSpPr>
-          <p:cNvPr id="12" name="Text 10"/>
-          <p:cNvSpPr txBox="1"/>
-          <p:nvPr/>
-        </p:nvSpPr>
-        <p:spPr>
-          <a:xfrm>
-            <a:off x="3063240" y="3785616"/>
-            <a:ext cx="8439912" cy="499262"/>
+              <a:t>人肝与人脊髓无方向符合者。</a:t>
+            </a:r>
+            <a:pPr indent="0" marL="0">
+              <a:lnSpc>
+                <a:spcPct val="122000"/>
+              </a:lnSpc>
+              <a:buNone/>
+            </a:pPr>
+            <a:r>
+              <a:rPr lang="en-US" sz="1400" dirty="0">
+                <a:solidFill>
+                  <a:srgbClr val="3C3C3C"/>
+                </a:solidFill>
+                <a:latin typeface="Microsoft YaHei" pitchFamily="34" charset="0"/>
+                <a:ea typeface="Microsoft YaHei" pitchFamily="34" charset="-122"/>
+                <a:cs typeface="Microsoft YaHei" pitchFamily="34" charset="-120"/>
+              </a:rPr>
+              <a:t>Guilliams 肝图谱 11 类、颈段脊髓白质 11 类，逐类核对后均不符合。</a:t>
+            </a:r>
+            <a:endParaRPr lang="en-US" sz="1400" dirty="0"/>
+          </a:p>
+        </p:txBody>
+      </p:sp>
+      <p:sp>
+        <p:nvSpPr>
+          <p:cNvPr id="16" name="Text 14"/>
+          <p:cNvSpPr txBox="1"/>
+          <p:nvPr/>
+        </p:nvSpPr>
+        <p:spPr>
+          <a:xfrm>
+            <a:off x="658368" y="5312664"/>
+            <a:ext cx="384048" cy="274320"/>
+          </a:xfrm>
+          <a:prstGeom prst="rect">
+            <a:avLst/>
+          </a:prstGeom>
+          <a:noFill/>
+          <a:ln/>
+        </p:spPr>
+        <p:txBody>
+          <a:bodyPr wrap="square" rtlCol="0" anchor="ctr"/>
+          <a:lstStyle/>
+          <a:p>
+            <a:pPr algn="r" indent="0" marL="0">
+              <a:buNone/>
+            </a:pPr>
+            <a:r>
+              <a:rPr lang="en-US" sz="1200" dirty="0">
+                <a:solidFill>
+                  <a:srgbClr val="9AA0A6"/>
+                </a:solidFill>
+                <a:latin typeface="Microsoft YaHei" pitchFamily="34" charset="0"/>
+                <a:ea typeface="Microsoft YaHei" pitchFamily="34" charset="-122"/>
+                <a:cs typeface="Microsoft YaHei" pitchFamily="34" charset="-120"/>
+              </a:rPr>
+              <a:t>7</a:t>
+            </a:r>
+            <a:endParaRPr lang="en-US" sz="1200" dirty="0"/>
+          </a:p>
+        </p:txBody>
+      </p:sp>
+      <p:sp>
+        <p:nvSpPr>
+          <p:cNvPr id="17" name="Text 15"/>
+          <p:cNvSpPr txBox="1"/>
+          <p:nvPr/>
+        </p:nvSpPr>
+        <p:spPr>
+          <a:xfrm>
+            <a:off x="1188720" y="5271516"/>
+            <a:ext cx="10195560" cy="585216"/>
           </a:xfrm>
           <a:prstGeom prst="rect">
             <a:avLst/>
@@ -4487,12 +4784,12 @@
           <a:p>
             <a:pPr indent="0" marL="0">
               <a:lnSpc>
-                <a:spcPct val="116000"/>
+                <a:spcPct val="122000"/>
               </a:lnSpc>
               <a:buNone/>
             </a:pPr>
             <a:r>
-              <a:rPr lang="en-US" sz="1250" dirty="0">
+              <a:rPr lang="en-US" sz="1400" b="1" dirty="0">
                 <a:solidFill>
                   <a:srgbClr val="1A1A1A"/>
                 </a:solidFill>
@@ -4500,22 +4797,39 @@
                 <a:ea typeface="Microsoft YaHei" pitchFamily="34" charset="-122"/>
                 <a:cs typeface="Microsoft YaHei" pitchFamily="34" charset="-120"/>
               </a:rPr>
-              <a:t>同为真单细胞的人皮层（78 供体）里这两类只有 4.8%（782/16319）与 1.4%（838/57855）——小鼠这一组在人不成立。</a:t>
-            </a:r>
-            <a:endParaRPr lang="en-US" sz="1250" dirty="0"/>
-          </a:p>
-        </p:txBody>
-      </p:sp>
-      <p:sp>
-        <p:nvSpPr>
-          <p:cNvPr id="13" name="Text 11"/>
-          <p:cNvSpPr txBox="1"/>
-          <p:nvPr/>
-        </p:nvSpPr>
-        <p:spPr>
-          <a:xfrm>
-            <a:off x="685800" y="4440326"/>
-            <a:ext cx="2834640" cy="274320"/>
+              <a:t>短 IL-18 转录本在人正常组织中不被显著使用。</a:t>
+            </a:r>
+            <a:pPr indent="0" marL="0">
+              <a:lnSpc>
+                <a:spcPct val="122000"/>
+              </a:lnSpc>
+              <a:buNone/>
+            </a:pPr>
+            <a:r>
+              <a:rPr lang="en-US" sz="1400" dirty="0">
+                <a:solidFill>
+                  <a:srgbClr val="3C3C3C"/>
+                </a:solidFill>
+                <a:latin typeface="Microsoft YaHei" pitchFamily="34" charset="0"/>
+                <a:ea typeface="Microsoft YaHei" pitchFamily="34" charset="-122"/>
+                <a:cs typeface="Microsoft YaHei" pitchFamily="34" charset="-120"/>
+              </a:rPr>
+              <a:t>GTEx v8 6792 个样本中占 0.09%（707/791471 跨接读段）。</a:t>
+            </a:r>
+            <a:endParaRPr lang="en-US" sz="1400" dirty="0"/>
+          </a:p>
+        </p:txBody>
+      </p:sp>
+      <p:sp>
+        <p:nvSpPr>
+          <p:cNvPr id="18" name="Text 16"/>
+          <p:cNvSpPr txBox="1"/>
+          <p:nvPr/>
+        </p:nvSpPr>
+        <p:spPr>
+          <a:xfrm>
+            <a:off x="685800" y="6400800"/>
+            <a:ext cx="10881360" cy="310896"/>
           </a:xfrm>
           <a:prstGeom prst="rect">
             <a:avLst/>
@@ -4531,213 +4845,6 @@
               <a:buNone/>
             </a:pPr>
             <a:r>
-              <a:rPr lang="en-US" sz="1300" b="1" dirty="0">
-                <a:solidFill>
-                  <a:srgbClr val="1F5FA8"/>
-                </a:solidFill>
-                <a:latin typeface="Microsoft YaHei" pitchFamily="34" charset="0"/>
-                <a:ea typeface="Microsoft YaHei" pitchFamily="34" charset="-122"/>
-                <a:cs typeface="Microsoft YaHei" pitchFamily="34" charset="-120"/>
-              </a:rPr>
-              <a:t>人：神经元在顶</a:t>
-            </a:r>
-            <a:endParaRPr lang="en-US" sz="1300" dirty="0"/>
-          </a:p>
-        </p:txBody>
-      </p:sp>
-      <p:sp>
-        <p:nvSpPr>
-          <p:cNvPr id="14" name="Text 12"/>
-          <p:cNvSpPr txBox="1"/>
-          <p:nvPr/>
-        </p:nvSpPr>
-        <p:spPr>
-          <a:xfrm>
-            <a:off x="685800" y="4687214"/>
-            <a:ext cx="2834640" cy="566928"/>
-          </a:xfrm>
-          <a:prstGeom prst="rect">
-            <a:avLst/>
-          </a:prstGeom>
-          <a:noFill/>
-          <a:ln/>
-        </p:spPr>
-        <p:txBody>
-          <a:bodyPr wrap="square" rtlCol="0" anchor="t"/>
-          <a:lstStyle/>
-          <a:p>
-            <a:pPr indent="0" marL="0">
-              <a:lnSpc>
-                <a:spcPct val="112000"/>
-              </a:lnSpc>
-              <a:buNone/>
-            </a:pPr>
-            <a:r>
-              <a:rPr lang="en-US" sz="950" dirty="0">
-                <a:solidFill>
-                  <a:srgbClr val="6B6B6B"/>
-                </a:solidFill>
-                <a:latin typeface="Microsoft YaHei" pitchFamily="34" charset="0"/>
-                <a:ea typeface="Microsoft YaHei" pitchFamily="34" charset="-122"/>
-                <a:cs typeface="Microsoft YaHei" pitchFamily="34" charset="-120"/>
-              </a:rPr>
-              <a:t>Allen HVS 单细胞 + 三套单核复现</a:t>
-            </a:r>
-            <a:endParaRPr lang="en-US" sz="950" dirty="0"/>
-          </a:p>
-        </p:txBody>
-      </p:sp>
-      <p:sp>
-        <p:nvSpPr>
-          <p:cNvPr id="15" name="Text 13"/>
-          <p:cNvSpPr txBox="1"/>
-          <p:nvPr/>
-        </p:nvSpPr>
-        <p:spPr>
-          <a:xfrm>
-            <a:off x="3063240" y="4408322"/>
-            <a:ext cx="8439912" cy="499262"/>
-          </a:xfrm>
-          <a:prstGeom prst="rect">
-            <a:avLst/>
-          </a:prstGeom>
-          <a:noFill/>
-          <a:ln/>
-        </p:spPr>
-        <p:txBody>
-          <a:bodyPr wrap="square" rtlCol="0" anchor="t"/>
-          <a:lstStyle/>
-          <a:p>
-            <a:pPr indent="0" marL="0">
-              <a:lnSpc>
-                <a:spcPct val="116000"/>
-              </a:lnSpc>
-              <a:buNone/>
-            </a:pPr>
-            <a:r>
-              <a:rPr lang="en-US" sz="1250" dirty="0">
-                <a:solidFill>
-                  <a:srgbClr val="1A1A1A"/>
-                </a:solidFill>
-                <a:latin typeface="Microsoft YaHei" pitchFamily="34" charset="0"/>
-                <a:ea typeface="Microsoft YaHei" pitchFamily="34" charset="-122"/>
-                <a:cs typeface="Microsoft YaHei" pitchFamily="34" charset="-120"/>
-              </a:rPr>
-              <a:t>PV 中间神经元 IL18 5286/19711 = 26.8%（78 供体），CASP1 24/19711；另一套 234 供体数据复现 24.9%。L5 ET 在三套数据 31.8%–43.3%，CASP1 为 0/201、3/1358、5/2443。</a:t>
-            </a:r>
-            <a:endParaRPr lang="en-US" sz="1250" dirty="0"/>
-          </a:p>
-        </p:txBody>
-      </p:sp>
-      <p:sp>
-        <p:nvSpPr>
-          <p:cNvPr id="16" name="Text 14"/>
-          <p:cNvSpPr txBox="1"/>
-          <p:nvPr/>
-        </p:nvSpPr>
-        <p:spPr>
-          <a:xfrm>
-            <a:off x="3063240" y="4907585"/>
-            <a:ext cx="8439912" cy="716890"/>
-          </a:xfrm>
-          <a:prstGeom prst="rect">
-            <a:avLst/>
-          </a:prstGeom>
-          <a:noFill/>
-          <a:ln/>
-        </p:spPr>
-        <p:txBody>
-          <a:bodyPr wrap="square" rtlCol="0" anchor="t"/>
-          <a:lstStyle/>
-          <a:p>
-            <a:pPr indent="0" marL="0">
-              <a:lnSpc>
-                <a:spcPct val="116000"/>
-              </a:lnSpc>
-              <a:buNone/>
-            </a:pPr>
-            <a:r>
-              <a:rPr lang="en-US" sz="1250" dirty="0">
-                <a:solidFill>
-                  <a:srgbClr val="1A1A1A"/>
-                </a:solidFill>
-                <a:latin typeface="Microsoft YaHei" pitchFamily="34" charset="0"/>
-                <a:ea typeface="Microsoft YaHei" pitchFamily="34" charset="-122"/>
-                <a:cs typeface="Microsoft YaHei" pitchFamily="34" charset="-120"/>
-              </a:rPr>
-              <a:t>但同属皮层中间神经元的 CGE 源中间神经元是全表最弱的一条「符合」：IL18 12.1%（618/5096，44 供体），5 个参考来源里 1 个支持、3 个反对，其中 2 个显示 CASP1 与 IL18 同量级。人侧这条线不像名单看上去那么齐。</a:t>
-            </a:r>
-            <a:endParaRPr lang="en-US" sz="1250" dirty="0"/>
-          </a:p>
-        </p:txBody>
-      </p:sp>
-      <p:sp>
-        <p:nvSpPr>
-          <p:cNvPr id="17" name="Text 15"/>
-          <p:cNvSpPr txBox="1"/>
-          <p:nvPr/>
-        </p:nvSpPr>
-        <p:spPr>
-          <a:xfrm>
-            <a:off x="3063240" y="5624474"/>
-            <a:ext cx="8439912" cy="499262"/>
-          </a:xfrm>
-          <a:prstGeom prst="rect">
-            <a:avLst/>
-          </a:prstGeom>
-          <a:noFill/>
-          <a:ln/>
-        </p:spPr>
-        <p:txBody>
-          <a:bodyPr wrap="square" rtlCol="0" anchor="t"/>
-          <a:lstStyle/>
-          <a:p>
-            <a:pPr indent="0" marL="0">
-              <a:lnSpc>
-                <a:spcPct val="116000"/>
-              </a:lnSpc>
-              <a:buNone/>
-            </a:pPr>
-            <a:r>
-              <a:rPr lang="en-US" sz="1250" dirty="0">
-                <a:solidFill>
-                  <a:srgbClr val="1A1A1A"/>
-                </a:solidFill>
-                <a:latin typeface="Microsoft YaHei" pitchFamily="34" charset="0"/>
-                <a:ea typeface="Microsoft YaHei" pitchFamily="34" charset="-122"/>
-                <a:cs typeface="Microsoft YaHei" pitchFamily="34" charset="-120"/>
-              </a:rPr>
-              <a:t>小鼠同名神经元 Casp1 同样近零，但 Il18 只有 2.2%（684/30434）与 5.5%（1333/24181）——人这一组在小鼠不成立。两条物种差异方向相反。</a:t>
-            </a:r>
-            <a:endParaRPr lang="en-US" sz="1250" dirty="0"/>
-          </a:p>
-        </p:txBody>
-      </p:sp>
-      <p:sp>
-        <p:nvSpPr>
-          <p:cNvPr id="18" name="Text 16"/>
-          <p:cNvSpPr txBox="1"/>
-          <p:nvPr/>
-        </p:nvSpPr>
-        <p:spPr>
-          <a:xfrm>
-            <a:off x="685800" y="6382512"/>
-            <a:ext cx="10881360" cy="310896"/>
-          </a:xfrm>
-          <a:prstGeom prst="rect">
-            <a:avLst/>
-          </a:prstGeom>
-          <a:noFill/>
-          <a:ln/>
-        </p:spPr>
-        <p:txBody>
-          <a:bodyPr wrap="square" rtlCol="0" anchor="ctr"/>
-          <a:lstStyle/>
-          <a:p>
-            <a:pPr indent="0" marL="0">
-              <a:buNone/>
-            </a:pPr>
-            <a:r>
               <a:rPr lang="en-US" sz="1050" dirty="0">
                 <a:solidFill>
                   <a:srgbClr val="9AA0A6"/>
@@ -4746,7 +4853,7 @@
                 <a:ea typeface="Microsoft YaHei" pitchFamily="34" charset="-122"/>
                 <a:cs typeface="Microsoft YaHei" pitchFamily="34" charset="-120"/>
               </a:rPr>
-              <a:t>32 行判定按「同一细胞类型跨分层」折叠为 22 个类型：15 个方向符合（人 10 / 小鼠 5，两边零重合），7 个不符合。完整 32 行见 results/answer_table.tsv。</a:t>
+              <a:t>32 行判定按同一细胞类型跨分层折叠为 22 个类型：15 个方向符合（人 10、小鼠 5，两物种零重合），7 个不符合。完整判定见 results/answer_table.tsv。</a:t>
             </a:r>
             <a:endParaRPr lang="en-US" sz="1050" dirty="0"/>
           </a:p>
@@ -4785,7 +4892,7 @@
         </p:nvSpPr>
         <p:spPr>
           <a:xfrm>
-            <a:off x="640080" y="347472"/>
+            <a:off x="640080" y="365760"/>
             <a:ext cx="8229600" cy="502920"/>
           </a:xfrm>
           <a:prstGeom prst="rect">
@@ -4810,7 +4917,7 @@
                 <a:ea typeface="Microsoft YaHei" pitchFamily="34" charset="-122"/>
                 <a:cs typeface="Microsoft YaHei" pitchFamily="34" charset="-120"/>
               </a:rPr>
-              <a:t>脑外的 7 个，以及名单弱在哪里</a:t>
+              <a:t>判定依据与证据强度</a:t>
             </a:r>
             <a:endParaRPr lang="en-US" sz="2600" dirty="0"/>
           </a:p>
@@ -4824,7 +4931,7 @@
         </p:nvSpPr>
         <p:spPr>
           <a:xfrm>
-            <a:off x="685800" y="1078992"/>
+            <a:off x="685800" y="1115568"/>
             <a:ext cx="2834640" cy="274320"/>
           </a:xfrm>
           <a:prstGeom prst="rect">
@@ -4841,17 +4948,17 @@
               <a:buNone/>
             </a:pPr>
             <a:r>
-              <a:rPr lang="en-US" sz="1300" b="1" dirty="0">
-                <a:solidFill>
-                  <a:srgbClr val="4C87C4"/>
-                </a:solidFill>
-                <a:latin typeface="Microsoft YaHei" pitchFamily="34" charset="0"/>
-                <a:ea typeface="Microsoft YaHei" pitchFamily="34" charset="-122"/>
-                <a:cs typeface="Microsoft YaHei" pitchFamily="34" charset="-120"/>
-              </a:rPr>
-              <a:t>脑外 7 个</a:t>
-            </a:r>
-            <a:endParaRPr lang="en-US" sz="1300" dirty="0"/>
+              <a:rPr lang="en-US" sz="1250" b="1" dirty="0">
+                <a:solidFill>
+                  <a:srgbClr val="1F5FA8"/>
+                </a:solidFill>
+                <a:latin typeface="Microsoft YaHei" pitchFamily="34" charset="0"/>
+                <a:ea typeface="Microsoft YaHei" pitchFamily="34" charset="-122"/>
+                <a:cs typeface="Microsoft YaHei" pitchFamily="34" charset="-120"/>
+              </a:rPr>
+              <a:t>参考层覆盖不均</a:t>
+            </a:r>
+            <a:endParaRPr lang="en-US" sz="1250" dirty="0"/>
           </a:p>
         </p:txBody>
       </p:sp>
@@ -4863,8 +4970,8 @@
         </p:nvSpPr>
         <p:spPr>
           <a:xfrm>
-            <a:off x="685800" y="1325880"/>
-            <a:ext cx="2834640" cy="566928"/>
+            <a:off x="685800" y="1353312"/>
+            <a:ext cx="2834640" cy="548640"/>
           </a:xfrm>
           <a:prstGeom prst="rect">
             <a:avLst/>
@@ -4891,7 +4998,7 @@
                 <a:ea typeface="Microsoft YaHei" pitchFamily="34" charset="-122"/>
                 <a:cs typeface="Microsoft YaHei" pitchFamily="34" charset="-120"/>
               </a:rPr>
-              <a:t>证据都只到单一来源或有分歧</a:t>
+              <a:t>影响证据分级，不影响检出率</a:t>
             </a:r>
             <a:endParaRPr lang="en-US" sz="950" dirty="0"/>
           </a:p>
@@ -4905,8 +5012,8 @@
         </p:nvSpPr>
         <p:spPr>
           <a:xfrm>
-            <a:off x="3063240" y="1046988"/>
-            <a:ext cx="8439912" cy="716890"/>
+            <a:off x="3063240" y="1083564"/>
+            <a:ext cx="8439912" cy="700430"/>
           </a:xfrm>
           <a:prstGeom prst="rect">
             <a:avLst/>
@@ -4925,7 +5032,7 @@
               <a:buNone/>
             </a:pPr>
             <a:r>
-              <a:rPr lang="en-US" sz="1250" dirty="0">
+              <a:rPr lang="en-US" sz="1200" dirty="0">
                 <a:solidFill>
                   <a:srgbClr val="1A1A1A"/>
                 </a:solidFill>
@@ -4933,9 +5040,9 @@
                 <a:ea typeface="Microsoft YaHei" pitchFamily="34" charset="-122"/>
                 <a:cs typeface="Microsoft YaHei" pitchFamily="34" charset="-120"/>
               </a:rPr>
-              <a:t>人肺肥大细胞 34.9%（1851/5299，44 供体）、CASP1 2.60%：4 个参考来源里只有 HPA 组织图谱支持近零（29.9 倍），两个 ex vivo 分选来源都测到 CASP1（3.82 与 4.48 倍）——纯化得越干净，CASP1 反而越测得到。</a:t>
-            </a:r>
-            <a:endParaRPr lang="en-US" sz="1250" dirty="0"/>
+              <a:t>8 行「符合 × 多源一致」全部位于脑。人肺 AT1 与人胰腺腺泡各仅 1 个参考来源，另有 4 个细胞类型无参考来源（n_ref_sources = 0），而小鼠星形胶质为 4 个。证据分级在相当程度上反映参考层覆盖，而非检出率差异。</a:t>
+            </a:r>
+            <a:endParaRPr lang="en-US" sz="1200" dirty="0"/>
           </a:p>
         </p:txBody>
       </p:sp>
@@ -4947,8 +5054,8 @@
         </p:nvSpPr>
         <p:spPr>
           <a:xfrm>
-            <a:off x="3063240" y="1763878"/>
-            <a:ext cx="8439912" cy="716890"/>
+            <a:off x="3063240" y="1783994"/>
+            <a:ext cx="8439912" cy="488290"/>
           </a:xfrm>
           <a:prstGeom prst="rect">
             <a:avLst/>
@@ -4967,7 +5074,7 @@
               <a:buNone/>
             </a:pPr>
             <a:r>
-              <a:rPr lang="en-US" sz="1250" dirty="0">
+              <a:rPr lang="en-US" sz="1200" dirty="0">
                 <a:solidFill>
                   <a:srgbClr val="1A1A1A"/>
                 </a:solidFill>
@@ -4975,7 +5082,46 @@
                 <a:ea typeface="Microsoft YaHei" pitchFamily="34" charset="-122"/>
                 <a:cs typeface="Microsoft YaHei" pitchFamily="34" charset="-120"/>
               </a:rPr>
-              <a:t>人肺 AT1 与人胰腺腺泡各只有 1 个参考来源，且都写明「未进候选（CASP1 未进最低三分位）」——靠参考层补回，不是通过了筛选。小鼠胰岛 δ 细胞 6 个来源中 4 支持、1 分歧；人胰岛 δ 细胞 IL18 仅 8/4677，不复现。</a:t>
+              <a:t>人肺 AT1 与人胰腺腺泡的 screen_status 为「未进候选（CASP1 未进最低三分位）」，二者系由参考层补回，未通过分层内相对规则。</a:t>
+            </a:r>
+            <a:endParaRPr lang="en-US" sz="1200" dirty="0"/>
+          </a:p>
+        </p:txBody>
+      </p:sp>
+      <p:sp>
+        <p:nvSpPr>
+          <p:cNvPr id="7" name="Text 5"/>
+          <p:cNvSpPr txBox="1"/>
+          <p:nvPr/>
+        </p:nvSpPr>
+        <p:spPr>
+          <a:xfrm>
+            <a:off x="685800" y="2436876"/>
+            <a:ext cx="2834640" cy="274320"/>
+          </a:xfrm>
+          <a:prstGeom prst="rect">
+            <a:avLst/>
+          </a:prstGeom>
+          <a:noFill/>
+          <a:ln/>
+        </p:spPr>
+        <p:txBody>
+          <a:bodyPr wrap="square" rtlCol="0" anchor="ctr"/>
+          <a:lstStyle/>
+          <a:p>
+            <a:pPr indent="0" marL="0">
+              <a:buNone/>
+            </a:pPr>
+            <a:r>
+              <a:rPr lang="en-US" sz="1250" b="1" dirty="0">
+                <a:solidFill>
+                  <a:srgbClr val="1F5FA8"/>
+                </a:solidFill>
+                <a:latin typeface="Microsoft YaHei" pitchFamily="34" charset="0"/>
+                <a:ea typeface="Microsoft YaHei" pitchFamily="34" charset="-122"/>
+                <a:cs typeface="Microsoft YaHei" pitchFamily="34" charset="-120"/>
+              </a:rPr>
+              <a:t>来源独立性</a:t>
             </a:r>
             <a:endParaRPr lang="en-US" sz="1250" dirty="0"/>
           </a:p>
@@ -4983,14 +5129,14 @@
       </p:sp>
       <p:sp>
         <p:nvSpPr>
-          <p:cNvPr id="7" name="Text 5"/>
-          <p:cNvSpPr txBox="1"/>
-          <p:nvPr/>
-        </p:nvSpPr>
-        <p:spPr>
-          <a:xfrm>
-            <a:off x="3063240" y="2480767"/>
-            <a:ext cx="8439912" cy="499262"/>
+          <p:cNvPr id="8" name="Text 6"/>
+          <p:cNvSpPr txBox="1"/>
+          <p:nvPr/>
+        </p:nvSpPr>
+        <p:spPr>
+          <a:xfrm>
+            <a:off x="3063240" y="2404872"/>
+            <a:ext cx="8439912" cy="700430"/>
           </a:xfrm>
           <a:prstGeom prst="rect">
             <a:avLst/>
@@ -5009,7 +5155,7 @@
               <a:buNone/>
             </a:pPr>
             <a:r>
-              <a:rPr lang="en-US" sz="1250" dirty="0">
+              <a:rPr lang="en-US" sz="1200" dirty="0">
                 <a:solidFill>
                   <a:srgbClr val="1A1A1A"/>
                 </a:solidFill>
@@ -5017,7 +5163,88 @@
                 <a:ea typeface="Microsoft YaHei" pitchFamily="34" charset="-122"/>
                 <a:cs typeface="Microsoft YaHei" pitchFamily="34" charset="-120"/>
               </a:rPr>
-              <a:t>另 4 类（人脑血管软脑膜、人肝巨核-红系祖、人肺泡外膜成纤维、小鼠 Cajal-Retzius）参考层查不到（n_ref_sources = 0）。</a:t>
+              <a:t>小鼠星形胶质的 4 个参考来源中，3 个为独立纯化测量（GSE100329 RiboTag、Tabula Muris Senis FACS-SmartSeq2、brainrnaseq/Zhang），第 4 个为 CELLxGENE 跨语料汇总，与本筛选同属一个数据家族。</a:t>
+            </a:r>
+            <a:endParaRPr lang="en-US" sz="1200" dirty="0"/>
+          </a:p>
+        </p:txBody>
+      </p:sp>
+      <p:sp>
+        <p:nvSpPr>
+          <p:cNvPr id="9" name="Text 7"/>
+          <p:cNvSpPr txBox="1"/>
+          <p:nvPr/>
+        </p:nvSpPr>
+        <p:spPr>
+          <a:xfrm>
+            <a:off x="3063240" y="3105302"/>
+            <a:ext cx="8439912" cy="488290"/>
+          </a:xfrm>
+          <a:prstGeom prst="rect">
+            <a:avLst/>
+          </a:prstGeom>
+          <a:noFill/>
+          <a:ln/>
+        </p:spPr>
+        <p:txBody>
+          <a:bodyPr wrap="square" rtlCol="0" anchor="t"/>
+          <a:lstStyle/>
+          <a:p>
+            <a:pPr indent="0" marL="0">
+              <a:lnSpc>
+                <a:spcPct val="116000"/>
+              </a:lnSpc>
+              <a:buNone/>
+            </a:pPr>
+            <a:r>
+              <a:rPr lang="en-US" sz="1200" dirty="0">
+                <a:solidFill>
+                  <a:srgbClr val="1A1A1A"/>
+                </a:solidFill>
+                <a:latin typeface="Microsoft YaHei" pitchFamily="34" charset="0"/>
+                <a:ea typeface="Microsoft YaHei" pitchFamily="34" charset="-122"/>
+                <a:cs typeface="Microsoft YaHei" pitchFamily="34" charset="-120"/>
+              </a:rPr>
+              <a:t>人肺肥大细胞的 4 个来源中，支持 CASP1 近零者为 HPA 组织图谱（比值 29.9），两个 ex vivo 分选来源均测到 CASP1（比值 3.82 与 4.48）。</a:t>
+            </a:r>
+            <a:endParaRPr lang="en-US" sz="1200" dirty="0"/>
+          </a:p>
+        </p:txBody>
+      </p:sp>
+      <p:sp>
+        <p:nvSpPr>
+          <p:cNvPr id="10" name="Text 8"/>
+          <p:cNvSpPr txBox="1"/>
+          <p:nvPr/>
+        </p:nvSpPr>
+        <p:spPr>
+          <a:xfrm>
+            <a:off x="685800" y="3758184"/>
+            <a:ext cx="2834640" cy="274320"/>
+          </a:xfrm>
+          <a:prstGeom prst="rect">
+            <a:avLst/>
+          </a:prstGeom>
+          <a:noFill/>
+          <a:ln/>
+        </p:spPr>
+        <p:txBody>
+          <a:bodyPr wrap="square" rtlCol="0" anchor="ctr"/>
+          <a:lstStyle/>
+          <a:p>
+            <a:pPr indent="0" marL="0">
+              <a:buNone/>
+            </a:pPr>
+            <a:r>
+              <a:rPr lang="en-US" sz="1250" b="1" dirty="0">
+                <a:solidFill>
+                  <a:srgbClr val="9A2B2B"/>
+                </a:solidFill>
+                <a:latin typeface="Microsoft YaHei" pitchFamily="34" charset="0"/>
+                <a:ea typeface="Microsoft YaHei" pitchFamily="34" charset="-122"/>
+                <a:cs typeface="Microsoft YaHei" pitchFamily="34" charset="-120"/>
+              </a:rPr>
+              <a:t>分层内不复现</a:t>
             </a:r>
             <a:endParaRPr lang="en-US" sz="1250" dirty="0"/>
           </a:p>
@@ -5025,53 +5252,14 @@
       </p:sp>
       <p:sp>
         <p:nvSpPr>
-          <p:cNvPr id="8" name="Text 6"/>
-          <p:cNvSpPr txBox="1"/>
-          <p:nvPr/>
-        </p:nvSpPr>
-        <p:spPr>
-          <a:xfrm>
-            <a:off x="685800" y="3135478"/>
-            <a:ext cx="2834640" cy="274320"/>
-          </a:xfrm>
-          <a:prstGeom prst="rect">
-            <a:avLst/>
-          </a:prstGeom>
-          <a:noFill/>
-          <a:ln/>
-        </p:spPr>
-        <p:txBody>
-          <a:bodyPr wrap="square" rtlCol="0" anchor="ctr"/>
-          <a:lstStyle/>
-          <a:p>
-            <a:pPr indent="0" marL="0">
-              <a:buNone/>
-            </a:pPr>
-            <a:r>
-              <a:rPr lang="en-US" sz="1300" b="1" dirty="0">
-                <a:solidFill>
-                  <a:srgbClr val="1F5FA8"/>
-                </a:solidFill>
-                <a:latin typeface="Microsoft YaHei" pitchFamily="34" charset="0"/>
-                <a:ea typeface="Microsoft YaHei" pitchFamily="34" charset="-122"/>
-                <a:cs typeface="Microsoft YaHei" pitchFamily="34" charset="-120"/>
-              </a:rPr>
-              <a:t>弱在哪里</a:t>
-            </a:r>
-            <a:endParaRPr lang="en-US" sz="1300" dirty="0"/>
-          </a:p>
-        </p:txBody>
-      </p:sp>
-      <p:sp>
-        <p:nvSpPr>
-          <p:cNvPr id="9" name="Text 7"/>
-          <p:cNvSpPr txBox="1"/>
-          <p:nvPr/>
-        </p:nvSpPr>
-        <p:spPr>
-          <a:xfrm>
-            <a:off x="685800" y="3382366"/>
-            <a:ext cx="2834640" cy="566928"/>
+          <p:cNvPr id="11" name="Text 9"/>
+          <p:cNvSpPr txBox="1"/>
+          <p:nvPr/>
+        </p:nvSpPr>
+        <p:spPr>
+          <a:xfrm>
+            <a:off x="685800" y="3995928"/>
+            <a:ext cx="2834640" cy="548640"/>
           </a:xfrm>
           <a:prstGeom prst="rect">
             <a:avLst/>
@@ -5098,7 +5286,7 @@
                 <a:ea typeface="Microsoft YaHei" pitchFamily="34" charset="-122"/>
                 <a:cs typeface="Microsoft YaHei" pitchFamily="34" charset="-120"/>
               </a:rPr>
-              <a:t>是没人分选测过，不是检出率低</a:t>
+              <a:t>按 §3 应予报告</a:t>
             </a:r>
             <a:endParaRPr lang="en-US" sz="950" dirty="0"/>
           </a:p>
@@ -5106,14 +5294,14 @@
       </p:sp>
       <p:sp>
         <p:nvSpPr>
-          <p:cNvPr id="10" name="Text 8"/>
-          <p:cNvSpPr txBox="1"/>
-          <p:nvPr/>
-        </p:nvSpPr>
-        <p:spPr>
-          <a:xfrm>
-            <a:off x="3063240" y="3103474"/>
-            <a:ext cx="8439912" cy="499262"/>
+          <p:cNvPr id="12" name="Text 10"/>
+          <p:cNvSpPr txBox="1"/>
+          <p:nvPr/>
+        </p:nvSpPr>
+        <p:spPr>
+          <a:xfrm>
+            <a:off x="3063240" y="3726180"/>
+            <a:ext cx="8439912" cy="488290"/>
           </a:xfrm>
           <a:prstGeom prst="rect">
             <a:avLst/>
@@ -5132,7 +5320,7 @@
               <a:buNone/>
             </a:pPr>
             <a:r>
-              <a:rPr lang="en-US" sz="1250" dirty="0">
+              <a:rPr lang="en-US" sz="1200" dirty="0">
                 <a:solidFill>
                   <a:srgbClr val="1A1A1A"/>
                 </a:solidFill>
@@ -5140,22 +5328,22 @@
                 <a:ea typeface="Microsoft YaHei" pitchFamily="34" charset="-122"/>
                 <a:cs typeface="Microsoft YaHei" pitchFamily="34" charset="-120"/>
               </a:rPr>
-              <a:t>8 行「符合 × 多源一致」全部在脑，不等于脑的信号更强：人肺 AT1 与人胰腺腺泡各只有 1 个参考来源，另有 4 类一个都没有，而小鼠星形胶质有 4 个。</a:t>
-            </a:r>
-            <a:endParaRPr lang="en-US" sz="1250" dirty="0"/>
-          </a:p>
-        </p:txBody>
-      </p:sp>
-      <p:sp>
-        <p:nvSpPr>
-          <p:cNvPr id="11" name="Text 9"/>
-          <p:cNvSpPr txBox="1"/>
-          <p:nvPr/>
-        </p:nvSpPr>
-        <p:spPr>
-          <a:xfrm>
-            <a:off x="3063240" y="3602736"/>
-            <a:ext cx="8439912" cy="499262"/>
+              <a:t>小鼠脑另一分层（单核，10 供体）中星形胶质 IL18 仍居首位（14579/21878 = 66.6%），但 CASP1 为 1018/21878 = 4.65%，不入候选。单核与单细胞不作定量比较，候选集成员这一层级的分歧仍须报告。</a:t>
+            </a:r>
+            <a:endParaRPr lang="en-US" sz="1200" dirty="0"/>
+          </a:p>
+        </p:txBody>
+      </p:sp>
+      <p:sp>
+        <p:nvSpPr>
+          <p:cNvPr id="13" name="Text 11"/>
+          <p:cNvSpPr txBox="1"/>
+          <p:nvPr/>
+        </p:nvSpPr>
+        <p:spPr>
+          <a:xfrm>
+            <a:off x="3063240" y="4214470"/>
+            <a:ext cx="8439912" cy="488290"/>
           </a:xfrm>
           <a:prstGeom prst="rect">
             <a:avLst/>
@@ -5174,7 +5362,7 @@
               <a:buNone/>
             </a:pPr>
             <a:r>
-              <a:rPr lang="en-US" sz="1250" dirty="0">
+              <a:rPr lang="en-US" sz="1200" dirty="0">
                 <a:solidFill>
                   <a:srgbClr val="1A1A1A"/>
                 </a:solidFill>
@@ -5182,7 +5370,46 @@
                 <a:ea typeface="Microsoft YaHei" pitchFamily="34" charset="-122"/>
                 <a:cs typeface="Microsoft YaHei" pitchFamily="34" charset="-120"/>
               </a:rPr>
-              <a:t>要把一格从单一来源推到多源一致，缺的是具体一次测量：人肺肥大细胞 / AT1 / 人胰腺腺泡各缺一次新鲜原代分选后的 CASP1 定量；小鼠胰岛 δ 缺的是复核那一个分歧来源（比值 5.64）。</a:t>
+              <a:t>人脑 CGE 源中间神经元为全表证据最弱的一条「符合」：IL18 12.1%（618/5096，44 供体），5 个参考来源中 1 个支持、3 个反对，其中 2 个显示 CASP1 与 IL18 处于同一量级。</a:t>
+            </a:r>
+            <a:endParaRPr lang="en-US" sz="1200" dirty="0"/>
+          </a:p>
+        </p:txBody>
+      </p:sp>
+      <p:sp>
+        <p:nvSpPr>
+          <p:cNvPr id="14" name="Text 12"/>
+          <p:cNvSpPr txBox="1"/>
+          <p:nvPr/>
+        </p:nvSpPr>
+        <p:spPr>
+          <a:xfrm>
+            <a:off x="685800" y="4867351"/>
+            <a:ext cx="2834640" cy="274320"/>
+          </a:xfrm>
+          <a:prstGeom prst="rect">
+            <a:avLst/>
+          </a:prstGeom>
+          <a:noFill/>
+          <a:ln/>
+        </p:spPr>
+        <p:txBody>
+          <a:bodyPr wrap="square" rtlCol="0" anchor="ctr"/>
+          <a:lstStyle/>
+          <a:p>
+            <a:pPr indent="0" marL="0">
+              <a:buNone/>
+            </a:pPr>
+            <a:r>
+              <a:rPr lang="en-US" sz="1250" b="1" dirty="0">
+                <a:solidFill>
+                  <a:srgbClr val="1B7A43"/>
+                </a:solidFill>
+                <a:latin typeface="Microsoft YaHei" pitchFamily="34" charset="0"/>
+                <a:ea typeface="Microsoft YaHei" pitchFamily="34" charset="-122"/>
+                <a:cs typeface="Microsoft YaHei" pitchFamily="34" charset="-120"/>
+              </a:rPr>
+              <a:t>零值标尺</a:t>
             </a:r>
             <a:endParaRPr lang="en-US" sz="1250" dirty="0"/>
           </a:p>
@@ -5190,53 +5417,14 @@
       </p:sp>
       <p:sp>
         <p:nvSpPr>
-          <p:cNvPr id="12" name="Text 10"/>
-          <p:cNvSpPr txBox="1"/>
-          <p:nvPr/>
-        </p:nvSpPr>
-        <p:spPr>
-          <a:xfrm>
-            <a:off x="685800" y="4257446"/>
-            <a:ext cx="2834640" cy="274320"/>
-          </a:xfrm>
-          <a:prstGeom prst="rect">
-            <a:avLst/>
-          </a:prstGeom>
-          <a:noFill/>
-          <a:ln/>
-        </p:spPr>
-        <p:txBody>
-          <a:bodyPr wrap="square" rtlCol="0" anchor="ctr"/>
-          <a:lstStyle/>
-          <a:p>
-            <a:pPr indent="0" marL="0">
-              <a:buNone/>
-            </a:pPr>
-            <a:r>
-              <a:rPr lang="en-US" sz="1300" b="1" dirty="0">
-                <a:solidFill>
-                  <a:srgbClr val="1B7A43"/>
-                </a:solidFill>
-                <a:latin typeface="Microsoft YaHei" pitchFamily="34" charset="0"/>
-                <a:ea typeface="Microsoft YaHei" pitchFamily="34" charset="-122"/>
-                <a:cs typeface="Microsoft YaHei" pitchFamily="34" charset="-120"/>
-              </a:rPr>
-              <a:t>「近零」相对于什么</a:t>
-            </a:r>
-            <a:endParaRPr lang="en-US" sz="1300" dirty="0"/>
-          </a:p>
-        </p:txBody>
-      </p:sp>
-      <p:sp>
-        <p:nvSpPr>
-          <p:cNvPr id="13" name="Text 11"/>
-          <p:cNvSpPr txBox="1"/>
-          <p:nvPr/>
-        </p:nvSpPr>
-        <p:spPr>
-          <a:xfrm>
-            <a:off x="685800" y="4504334"/>
-            <a:ext cx="2834640" cy="566928"/>
+          <p:cNvPr id="15" name="Text 13"/>
+          <p:cNvSpPr txBox="1"/>
+          <p:nvPr/>
+        </p:nvSpPr>
+        <p:spPr>
+          <a:xfrm>
+            <a:off x="685800" y="5105095"/>
+            <a:ext cx="2834640" cy="548640"/>
           </a:xfrm>
           <a:prstGeom prst="rect">
             <a:avLst/>
@@ -5263,7 +5451,7 @@
                 <a:ea typeface="Microsoft YaHei" pitchFamily="34" charset="-122"/>
                 <a:cs typeface="Microsoft YaHei" pitchFamily="34" charset="-120"/>
               </a:rPr>
-              <a:t>同一测法下的标尺与阳性对照</a:t>
+              <a:t>判断「近零」的参照</a:t>
             </a:r>
             <a:endParaRPr lang="en-US" sz="950" dirty="0"/>
           </a:p>
@@ -5271,14 +5459,14 @@
       </p:sp>
       <p:sp>
         <p:nvSpPr>
-          <p:cNvPr id="14" name="Text 12"/>
-          <p:cNvSpPr txBox="1"/>
-          <p:nvPr/>
-        </p:nvSpPr>
-        <p:spPr>
-          <a:xfrm>
-            <a:off x="3063240" y="4225442"/>
-            <a:ext cx="8439912" cy="499262"/>
+          <p:cNvPr id="16" name="Text 14"/>
+          <p:cNvSpPr txBox="1"/>
+          <p:nvPr/>
+        </p:nvSpPr>
+        <p:spPr>
+          <a:xfrm>
+            <a:off x="3063240" y="4835347"/>
+            <a:ext cx="8439912" cy="700430"/>
           </a:xfrm>
           <a:prstGeom prst="rect">
             <a:avLst/>
@@ -5297,7 +5485,7 @@
               <a:buNone/>
             </a:pPr>
             <a:r>
-              <a:rPr lang="en-US" sz="1250" dirty="0">
+              <a:rPr lang="en-US" sz="1200" dirty="0">
                 <a:solidFill>
                   <a:srgbClr val="1A1A1A"/>
                 </a:solidFill>
@@ -5305,7 +5493,46 @@
                 <a:ea typeface="Microsoft YaHei" pitchFamily="34" charset="-122"/>
                 <a:cs typeface="Microsoft YaHei" pitchFamily="34" charset="-120"/>
               </a:rPr>
-              <a:t>阳性对照：同一分选、同一供体、同一建库下，L5a IT 锥体神经元 CASP1 = 8.34 CPM（25 个文库 24 个非零）——不是测不出来，是亚类特异的。</a:t>
+              <a:t>静息小鼠小胶质 Casp1 约 50–61 CPM、17% 细胞；小鼠 CNS 内「髓系高」与零底线相差约 50 倍。阳性对照：同一分选、同一供体、同一建库下 L5a IT 锥体神经元 CASP1 = 8.34 CPM（25 个文库中 24 个非零）。</a:t>
+            </a:r>
+            <a:endParaRPr lang="en-US" sz="1200" dirty="0"/>
+          </a:p>
+        </p:txBody>
+      </p:sp>
+      <p:sp>
+        <p:nvSpPr>
+          <p:cNvPr id="17" name="Text 15"/>
+          <p:cNvSpPr txBox="1"/>
+          <p:nvPr/>
+        </p:nvSpPr>
+        <p:spPr>
+          <a:xfrm>
+            <a:off x="685800" y="5708599"/>
+            <a:ext cx="2834640" cy="274320"/>
+          </a:xfrm>
+          <a:prstGeom prst="rect">
+            <a:avLst/>
+          </a:prstGeom>
+          <a:noFill/>
+          <a:ln/>
+        </p:spPr>
+        <p:txBody>
+          <a:bodyPr wrap="square" rtlCol="0" anchor="ctr"/>
+          <a:lstStyle/>
+          <a:p>
+            <a:pPr indent="0" marL="0">
+              <a:buNone/>
+            </a:pPr>
+            <a:r>
+              <a:rPr lang="en-US" sz="1250" b="1" dirty="0">
+                <a:solidFill>
+                  <a:srgbClr val="6B6B6B"/>
+                </a:solidFill>
+                <a:latin typeface="Microsoft YaHei" pitchFamily="34" charset="0"/>
+                <a:ea typeface="Microsoft YaHei" pitchFamily="34" charset="-122"/>
+                <a:cs typeface="Microsoft YaHei" pitchFamily="34" charset="-120"/>
+              </a:rPr>
+              <a:t>后续测量</a:t>
             </a:r>
             <a:endParaRPr lang="en-US" sz="1250" dirty="0"/>
           </a:p>
@@ -5313,14 +5540,56 @@
       </p:sp>
       <p:sp>
         <p:nvSpPr>
-          <p:cNvPr id="15" name="Text 13"/>
-          <p:cNvSpPr txBox="1"/>
-          <p:nvPr/>
-        </p:nvSpPr>
-        <p:spPr>
-          <a:xfrm>
-            <a:off x="3063240" y="4724705"/>
-            <a:ext cx="8439912" cy="499262"/>
+          <p:cNvPr id="18" name="Text 16"/>
+          <p:cNvSpPr txBox="1"/>
+          <p:nvPr/>
+        </p:nvSpPr>
+        <p:spPr>
+          <a:xfrm>
+            <a:off x="685800" y="5946343"/>
+            <a:ext cx="2834640" cy="548640"/>
+          </a:xfrm>
+          <a:prstGeom prst="rect">
+            <a:avLst/>
+          </a:prstGeom>
+          <a:noFill/>
+          <a:ln/>
+        </p:spPr>
+        <p:txBody>
+          <a:bodyPr wrap="square" rtlCol="0" anchor="t"/>
+          <a:lstStyle/>
+          <a:p>
+            <a:pPr indent="0" marL="0">
+              <a:lnSpc>
+                <a:spcPct val="112000"/>
+              </a:lnSpc>
+              <a:buNone/>
+            </a:pPr>
+            <a:r>
+              <a:rPr lang="en-US" sz="950" dirty="0">
+                <a:solidFill>
+                  <a:srgbClr val="6B6B6B"/>
+                </a:solidFill>
+                <a:latin typeface="Microsoft YaHei" pitchFamily="34" charset="0"/>
+                <a:ea typeface="Microsoft YaHei" pitchFamily="34" charset="-122"/>
+                <a:cs typeface="Microsoft YaHei" pitchFamily="34" charset="-120"/>
+              </a:rPr>
+              <a:t>将单一来源推进为多源一致所需</a:t>
+            </a:r>
+            <a:endParaRPr lang="en-US" sz="950" dirty="0"/>
+          </a:p>
+        </p:txBody>
+      </p:sp>
+      <p:sp>
+        <p:nvSpPr>
+          <p:cNvPr id="19" name="Text 17"/>
+          <p:cNvSpPr txBox="1"/>
+          <p:nvPr/>
+        </p:nvSpPr>
+        <p:spPr>
+          <a:xfrm>
+            <a:off x="3063240" y="5676595"/>
+            <a:ext cx="8439912" cy="488290"/>
           </a:xfrm>
           <a:prstGeom prst="rect">
             <a:avLst/>
@@ -5339,7 +5608,7 @@
               <a:buNone/>
             </a:pPr>
             <a:r>
-              <a:rPr lang="en-US" sz="1250" dirty="0">
+              <a:rPr lang="en-US" sz="1200" dirty="0">
                 <a:solidFill>
                   <a:srgbClr val="1A1A1A"/>
                 </a:solidFill>
@@ -5347,9 +5616,9 @@
                 <a:ea typeface="Microsoft YaHei" pitchFamily="34" charset="-122"/>
                 <a:cs typeface="Microsoft YaHei" pitchFamily="34" charset="-120"/>
               </a:rPr>
-              <a:t>标尺：静息小鼠小胶质 Casp1 约 50–61 CPM / 17% 细胞。小鼠 CNS 里「髓系高」与「零底线」相差约 50 倍，不是 1000 倍。</a:t>
-            </a:r>
-            <a:endParaRPr lang="en-US" sz="1250" dirty="0"/>
+              <a:t>人肺肥大细胞、人肺 AT1、人胰腺腺泡各需一次新鲜原代分选后的 CASP1 定量；小鼠胰岛 δ 细胞需复核比值为 5.64 的分歧来源。</a:t>
+            </a:r>
+            <a:endParaRPr lang="en-US" sz="1200" dirty="0"/>
           </a:p>
         </p:txBody>
       </p:sp>
@@ -5386,7 +5655,7 @@
         </p:nvSpPr>
         <p:spPr>
           <a:xfrm>
-            <a:off x="640080" y="347472"/>
+            <a:off x="640080" y="365760"/>
             <a:ext cx="10058400" cy="502920"/>
           </a:xfrm>
           <a:prstGeom prst="rect">
@@ -5411,7 +5680,7 @@
                 <a:ea typeface="Microsoft YaHei" pitchFamily="34" charset="-122"/>
                 <a:cs typeface="Microsoft YaHei" pitchFamily="34" charset="-120"/>
               </a:rPr>
-              <a:t>四条不能省的边界，以及这份名单有多硬</a:t>
+              <a:t>适用边界与阈值敏感性</a:t>
             </a:r>
             <a:endParaRPr lang="en-US" sz="2600" dirty="0"/>
           </a:p>
@@ -5425,7 +5694,7 @@
         </p:nvSpPr>
         <p:spPr>
           <a:xfrm>
-            <a:off x="685800" y="1078992"/>
+            <a:off x="685800" y="1115568"/>
             <a:ext cx="2834640" cy="274320"/>
           </a:xfrm>
           <a:prstGeom prst="rect">
@@ -5442,7 +5711,7 @@
               <a:buNone/>
             </a:pPr>
             <a:r>
-              <a:rPr lang="en-US" sz="1300" b="1" dirty="0">
+              <a:rPr lang="en-US" sz="1250" b="1" dirty="0">
                 <a:solidFill>
                   <a:srgbClr val="9A2B2B"/>
                 </a:solidFill>
@@ -5450,9 +5719,9 @@
                 <a:ea typeface="Microsoft YaHei" pitchFamily="34" charset="-122"/>
                 <a:cs typeface="Microsoft YaHei" pitchFamily="34" charset="-120"/>
               </a:rPr>
-              <a:t>四条不能省的边界</a:t>
-            </a:r>
-            <a:endParaRPr lang="en-US" sz="1300" dirty="0"/>
+              <a:t>四条适用边界</a:t>
+            </a:r>
+            <a:endParaRPr lang="en-US" sz="1250" dirty="0"/>
           </a:p>
         </p:txBody>
       </p:sp>
@@ -5464,8 +5733,8 @@
         </p:nvSpPr>
         <p:spPr>
           <a:xfrm>
-            <a:off x="685800" y="1325880"/>
-            <a:ext cx="2834640" cy="566928"/>
+            <a:off x="685800" y="1353312"/>
+            <a:ext cx="2834640" cy="548640"/>
           </a:xfrm>
           <a:prstGeom prst="rect">
             <a:avLst/>
@@ -5506,8 +5775,8 @@
         </p:nvSpPr>
         <p:spPr>
           <a:xfrm>
-            <a:off x="3063240" y="1046988"/>
-            <a:ext cx="8439912" cy="499262"/>
+            <a:off x="3063240" y="1083564"/>
+            <a:ext cx="8439912" cy="488290"/>
           </a:xfrm>
           <a:prstGeom prst="rect">
             <a:avLst/>
@@ -5526,7 +5795,7 @@
               <a:buNone/>
             </a:pPr>
             <a:r>
-              <a:rPr lang="en-US" sz="1250" dirty="0">
+              <a:rPr lang="en-US" sz="1200" dirty="0">
                 <a:solidFill>
                   <a:srgbClr val="1A1A1A"/>
                 </a:solidFill>
@@ -5534,9 +5803,9 @@
                 <a:ea typeface="Microsoft YaHei" pitchFamily="34" charset="-122"/>
                 <a:cs typeface="Microsoft YaHei" pitchFamily="34" charset="-120"/>
               </a:rPr>
-              <a:t>IL18 转录本即 pro-IL-18 的转录信号，但 pro-IL-18 是储备型蛋白，转录水平与细胞内前体储量不成线性关系。</a:t>
-            </a:r>
-            <a:endParaRPr lang="en-US" sz="1250" dirty="0"/>
+              <a:t>IL18 转录本为 pro-IL-18 的转录信号；pro-IL-18 属储备型蛋白，转录水平与细胞内前体储量不成线性关系。</a:t>
+            </a:r>
+            <a:endParaRPr lang="en-US" sz="1200" dirty="0"/>
           </a:p>
         </p:txBody>
       </p:sp>
@@ -5548,8 +5817,8 @@
         </p:nvSpPr>
         <p:spPr>
           <a:xfrm>
-            <a:off x="3063240" y="1546250"/>
-            <a:ext cx="8439912" cy="499262"/>
+            <a:off x="3063240" y="1571854"/>
+            <a:ext cx="8439912" cy="488290"/>
           </a:xfrm>
           <a:prstGeom prst="rect">
             <a:avLst/>
@@ -5568,7 +5837,7 @@
               <a:buNone/>
             </a:pPr>
             <a:r>
-              <a:rPr lang="en-US" sz="1250" dirty="0">
+              <a:rPr lang="en-US" sz="1200" dirty="0">
                 <a:solidFill>
                   <a:srgbClr val="1A1A1A"/>
                 </a:solidFill>
@@ -5576,9 +5845,9 @@
                 <a:ea typeface="Microsoft YaHei" pitchFamily="34" charset="-122"/>
                 <a:cs typeface="Microsoft YaHei" pitchFamily="34" charset="-120"/>
               </a:rPr>
-              <a:t>CASP1 是可诱导基因。本分析是静息基线筛选，静息近零不预测刺激后能否诱导——这一条只能靠带刺激的数据或实验解决。</a:t>
-            </a:r>
-            <a:endParaRPr lang="en-US" sz="1250" dirty="0"/>
+              <a:t>CASP1 为可诱导基因。本分析为静息基线筛选，静息态近零不预测刺激后能否诱导，该限制只能由带刺激条件的数据或实验解决。</a:t>
+            </a:r>
+            <a:endParaRPr lang="en-US" sz="1200" dirty="0"/>
           </a:p>
         </p:txBody>
       </p:sp>
@@ -5590,8 +5859,8 @@
         </p:nvSpPr>
         <p:spPr>
           <a:xfrm>
-            <a:off x="3063240" y="2045513"/>
-            <a:ext cx="8439912" cy="499262"/>
+            <a:off x="3063240" y="2060143"/>
+            <a:ext cx="8439912" cy="488290"/>
           </a:xfrm>
           <a:prstGeom prst="rect">
             <a:avLst/>
@@ -5610,7 +5879,7 @@
               <a:buNone/>
             </a:pPr>
             <a:r>
-              <a:rPr lang="en-US" sz="1250" dirty="0">
+              <a:rPr lang="en-US" sz="1200" dirty="0">
                 <a:solidFill>
                   <a:srgbClr val="1A1A1A"/>
                 </a:solidFill>
@@ -5618,9 +5887,9 @@
                 <a:ea typeface="Microsoft YaHei" pitchFamily="34" charset="-122"/>
                 <a:cs typeface="Microsoft YaHei" pitchFamily="34" charset="-120"/>
               </a:rPr>
-              <a:t>CASP3 的 mRNA 不反映 caspase-3 酶活性（酶原活化与 XIAP 抑制都在转录后）。本分析仅用它排除最低档，不是三重阳性门。</a:t>
-            </a:r>
-            <a:endParaRPr lang="en-US" sz="1250" dirty="0"/>
+              <a:t>CASP3 的 mRNA 不反映 caspase-3 酶活性（酶原活化与 XIAP 抑制均发生于转录后）。本分析仅用其排除最低档，不构成三重阳性门。</a:t>
+            </a:r>
+            <a:endParaRPr lang="en-US" sz="1200" dirty="0"/>
           </a:p>
         </p:txBody>
       </p:sp>
@@ -5632,8 +5901,8 @@
         </p:nvSpPr>
         <p:spPr>
           <a:xfrm>
-            <a:off x="3063240" y="2544775"/>
-            <a:ext cx="8439912" cy="716890"/>
+            <a:off x="3063240" y="2548433"/>
+            <a:ext cx="8439912" cy="700430"/>
           </a:xfrm>
           <a:prstGeom prst="rect">
             <a:avLst/>
@@ -5652,7 +5921,7 @@
               <a:buNone/>
             </a:pPr>
             <a:r>
-              <a:rPr lang="en-US" sz="1250" dirty="0">
+              <a:rPr lang="en-US" sz="1200" dirty="0">
                 <a:solidFill>
                   <a:srgbClr val="1A1A1A"/>
                 </a:solidFill>
@@ -5660,7 +5929,46 @@
                 <a:ea typeface="Microsoft YaHei" pitchFamily="34" charset="-122"/>
                 <a:cs typeface="Microsoft YaHei" pitchFamily="34" charset="-120"/>
               </a:rPr>
-              <a:t>未做环境 RNA 校正；人鼠之间、数据集之间、单核与单细胞之间只比名单不比数值。小鼠星形胶质的结论只覆盖皮层与海马：小脑 Bergmann 胶质 22.4 CPM、脊髓星形胶质 12.5–16.7 CPM 都测到 Casp1。</a:t>
+              <a:t>未做环境 RNA 校正；物种之间、数据集之间、单核与单细胞之间仅比较候选名单，不比较数值。小鼠星形胶质的结论仅覆盖皮层与海马：小脑 Bergmann 胶质 22.4 CPM、脊髓星形胶质 12.5–16.7 CPM 均测到 Casp1。</a:t>
+            </a:r>
+            <a:endParaRPr lang="en-US" sz="1200" dirty="0"/>
+          </a:p>
+        </p:txBody>
+      </p:sp>
+      <p:sp>
+        <p:nvSpPr>
+          <p:cNvPr id="9" name="Text 7"/>
+          <p:cNvSpPr txBox="1"/>
+          <p:nvPr/>
+        </p:nvSpPr>
+        <p:spPr>
+          <a:xfrm>
+            <a:off x="685800" y="3413455"/>
+            <a:ext cx="2834640" cy="274320"/>
+          </a:xfrm>
+          <a:prstGeom prst="rect">
+            <a:avLst/>
+          </a:prstGeom>
+          <a:noFill/>
+          <a:ln/>
+        </p:spPr>
+        <p:txBody>
+          <a:bodyPr wrap="square" rtlCol="0" anchor="ctr"/>
+          <a:lstStyle/>
+          <a:p>
+            <a:pPr indent="0" marL="0">
+              <a:buNone/>
+            </a:pPr>
+            <a:r>
+              <a:rPr lang="en-US" sz="1250" b="1" dirty="0">
+                <a:solidFill>
+                  <a:srgbClr val="6B6B6B"/>
+                </a:solidFill>
+                <a:latin typeface="Microsoft YaHei" pitchFamily="34" charset="0"/>
+                <a:ea typeface="Microsoft YaHei" pitchFamily="34" charset="-122"/>
+                <a:cs typeface="Microsoft YaHei" pitchFamily="34" charset="-120"/>
+              </a:rPr>
+              <a:t>阈值敏感性</a:t>
             </a:r>
             <a:endParaRPr lang="en-US" sz="1250" dirty="0"/>
           </a:p>
@@ -5668,53 +5976,14 @@
       </p:sp>
       <p:sp>
         <p:nvSpPr>
-          <p:cNvPr id="9" name="Text 7"/>
-          <p:cNvSpPr txBox="1"/>
-          <p:nvPr/>
-        </p:nvSpPr>
-        <p:spPr>
-          <a:xfrm>
-            <a:off x="685800" y="3417113"/>
-            <a:ext cx="2834640" cy="274320"/>
-          </a:xfrm>
-          <a:prstGeom prst="rect">
-            <a:avLst/>
-          </a:prstGeom>
-          <a:noFill/>
-          <a:ln/>
-        </p:spPr>
-        <p:txBody>
-          <a:bodyPr wrap="square" rtlCol="0" anchor="ctr"/>
-          <a:lstStyle/>
-          <a:p>
-            <a:pPr indent="0" marL="0">
-              <a:buNone/>
-            </a:pPr>
-            <a:r>
-              <a:rPr lang="en-US" sz="1300" b="1" dirty="0">
-                <a:solidFill>
-                  <a:srgbClr val="6B6B6B"/>
-                </a:solidFill>
-                <a:latin typeface="Microsoft YaHei" pitchFamily="34" charset="0"/>
-                <a:ea typeface="Microsoft YaHei" pitchFamily="34" charset="-122"/>
-                <a:cs typeface="Microsoft YaHei" pitchFamily="34" charset="-120"/>
-              </a:rPr>
-              <a:t>名单有多硬</a:t>
-            </a:r>
-            <a:endParaRPr lang="en-US" sz="1300" dirty="0"/>
-          </a:p>
-        </p:txBody>
-      </p:sp>
-      <p:sp>
-        <p:nvSpPr>
           <p:cNvPr id="10" name="Text 8"/>
           <p:cNvSpPr txBox="1"/>
           <p:nvPr/>
         </p:nvSpPr>
         <p:spPr>
           <a:xfrm>
-            <a:off x="685800" y="3664001"/>
-            <a:ext cx="2834640" cy="566928"/>
+            <a:off x="685800" y="3651199"/>
+            <a:ext cx="2834640" cy="548640"/>
           </a:xfrm>
           <a:prstGeom prst="rect">
             <a:avLst/>
@@ -5741,7 +6010,7 @@
                 <a:ea typeface="Microsoft YaHei" pitchFamily="34" charset="-122"/>
                 <a:cs typeface="Microsoft YaHei" pitchFamily="34" charset="-120"/>
               </a:rPr>
-              <a:t>阈值与用途</a:t>
+              <a:t>§9.6</a:t>
             </a:r>
             <a:endParaRPr lang="en-US" sz="950" dirty="0"/>
           </a:p>
@@ -5755,8 +6024,8 @@
         </p:nvSpPr>
         <p:spPr>
           <a:xfrm>
-            <a:off x="3063240" y="3385109"/>
-            <a:ext cx="8439912" cy="281635"/>
+            <a:off x="3063240" y="3381451"/>
+            <a:ext cx="8439912" cy="488290"/>
           </a:xfrm>
           <a:prstGeom prst="rect">
             <a:avLst/>
@@ -5775,7 +6044,7 @@
               <a:buNone/>
             </a:pPr>
             <a:r>
-              <a:rPr lang="en-US" sz="1250" dirty="0">
+              <a:rPr lang="en-US" sz="1200" dirty="0">
                 <a:solidFill>
                   <a:srgbClr val="1A1A1A"/>
                 </a:solidFill>
@@ -5783,7 +6052,46 @@
                 <a:ea typeface="Microsoft YaHei" pitchFamily="34" charset="-122"/>
                 <a:cs typeface="Microsoft YaHei" pitchFamily="34" charset="-120"/>
               </a:rPr>
-              <a:t>三分位与「CASP3 最低 20%」是工程取值、无生物学依据：换成四分位，候选数从 17 掉到 12。</a:t>
+              <a:t>三分位与「CASP3 最低 20%」为工程取值，无生物学依据。改用四分位后候选数由 17 降至 12；CASP3 下限改为 10% 与 30% 时分别为 17 与 16。</a:t>
+            </a:r>
+            <a:endParaRPr lang="en-US" sz="1200" dirty="0"/>
+          </a:p>
+        </p:txBody>
+      </p:sp>
+      <p:sp>
+        <p:nvSpPr>
+          <p:cNvPr id="12" name="Text 10"/>
+          <p:cNvSpPr txBox="1"/>
+          <p:nvPr/>
+        </p:nvSpPr>
+        <p:spPr>
+          <a:xfrm>
+            <a:off x="685800" y="4254703"/>
+            <a:ext cx="2834640" cy="274320"/>
+          </a:xfrm>
+          <a:prstGeom prst="rect">
+            <a:avLst/>
+          </a:prstGeom>
+          <a:noFill/>
+          <a:ln/>
+        </p:spPr>
+        <p:txBody>
+          <a:bodyPr wrap="square" rtlCol="0" anchor="ctr"/>
+          <a:lstStyle/>
+          <a:p>
+            <a:pPr indent="0" marL="0">
+              <a:buNone/>
+            </a:pPr>
+            <a:r>
+              <a:rPr lang="en-US" sz="1250" b="1" dirty="0">
+                <a:solidFill>
+                  <a:srgbClr val="6B6B6B"/>
+                </a:solidFill>
+                <a:latin typeface="Microsoft YaHei" pitchFamily="34" charset="0"/>
+                <a:ea typeface="Microsoft YaHei" pitchFamily="34" charset="-122"/>
+                <a:cs typeface="Microsoft YaHei" pitchFamily="34" charset="-120"/>
+              </a:rPr>
+              <a:t>用途</a:t>
             </a:r>
             <a:endParaRPr lang="en-US" sz="1250" dirty="0"/>
           </a:p>
@@ -5791,14 +6099,14 @@
       </p:sp>
       <p:sp>
         <p:nvSpPr>
-          <p:cNvPr id="12" name="Text 10"/>
-          <p:cNvSpPr txBox="1"/>
-          <p:nvPr/>
-        </p:nvSpPr>
-        <p:spPr>
-          <a:xfrm>
-            <a:off x="3063240" y="3666744"/>
-            <a:ext cx="8439912" cy="716890"/>
+          <p:cNvPr id="13" name="Text 11"/>
+          <p:cNvSpPr txBox="1"/>
+          <p:nvPr/>
+        </p:nvSpPr>
+        <p:spPr>
+          <a:xfrm>
+            <a:off x="3063240" y="4222699"/>
+            <a:ext cx="8439912" cy="488290"/>
           </a:xfrm>
           <a:prstGeom prst="rect">
             <a:avLst/>
@@ -5817,7 +6125,7 @@
               <a:buNone/>
             </a:pPr>
             <a:r>
-              <a:rPr lang="en-US" sz="1250" dirty="0">
+              <a:rPr lang="en-US" sz="1200" dirty="0">
                 <a:solidFill>
                   <a:srgbClr val="1A1A1A"/>
                 </a:solidFill>
@@ -5825,51 +6133,9 @@
                 <a:ea typeface="Microsoft YaHei" pitchFamily="34" charset="-122"/>
                 <a:cs typeface="Microsoft YaHei" pitchFamily="34" charset="-120"/>
               </a:rPr>
-              <a:t>短 IL-18 转录本在人正常组织不被显著使用：GTEx v8 6792 个样本 707/791471 跨接读段 = 0.09%（SRA v3h 的 0.20% 来自全人类 RNA-seq 汇编，含癌系与剪接因子敲低样本，不能称作正常组织）。</a:t>
-            </a:r>
-            <a:endParaRPr lang="en-US" sz="1250" dirty="0"/>
-          </a:p>
-        </p:txBody>
-      </p:sp>
-      <p:sp>
-        <p:nvSpPr>
-          <p:cNvPr id="13" name="Text 11"/>
-          <p:cNvSpPr txBox="1"/>
-          <p:nvPr/>
-        </p:nvSpPr>
-        <p:spPr>
-          <a:xfrm>
-            <a:off x="3063240" y="4383634"/>
-            <a:ext cx="8439912" cy="499262"/>
-          </a:xfrm>
-          <a:prstGeom prst="rect">
-            <a:avLst/>
-          </a:prstGeom>
-          <a:noFill/>
-          <a:ln/>
-        </p:spPr>
-        <p:txBody>
-          <a:bodyPr wrap="square" rtlCol="0" anchor="t"/>
-          <a:lstStyle/>
-          <a:p>
-            <a:pPr indent="0" marL="0">
-              <a:lnSpc>
-                <a:spcPct val="116000"/>
-              </a:lnSpc>
-              <a:buNone/>
-            </a:pPr>
-            <a:r>
-              <a:rPr lang="en-US" sz="1250" dirty="0">
-                <a:solidFill>
-                  <a:srgbClr val="1A1A1A"/>
-                </a:solidFill>
-                <a:latin typeface="Microsoft YaHei" pitchFamily="34" charset="0"/>
-                <a:ea typeface="Microsoft YaHei" pitchFamily="34" charset="-122"/>
-                <a:cs typeface="Microsoft YaHei" pitchFamily="34" charset="-120"/>
-              </a:rPr>
-              <a:t>本名单用于给蛋白与功能层面的验证排优先级。进名单不代表 pro-IL-18 真被加工，不进也不代表不会。</a:t>
-            </a:r>
-            <a:endParaRPr lang="en-US" sz="1250" dirty="0"/>
+              <a:t>本名单用于为蛋白与功能层面的验证排定器官与细胞类型的优先级。列入名单不表示 pro-IL-18 确被加工，未列入亦不表示不会。</a:t>
+            </a:r>
+            <a:endParaRPr lang="en-US" sz="1200" dirty="0"/>
           </a:p>
         </p:txBody>
       </p:sp>

--- a/il18_casp5organ/IL18_CASP_五器官筛选.pptx
+++ b/il18_casp5organ/IL18_CASP_五器官筛选.pptx
@@ -20,10 +20,9 @@
     <p:sldId id="268" r:id="rId14"/>
     <p:sldId id="269" r:id="rId15"/>
     <p:sldId id="270" r:id="rId16"/>
-    <p:sldId id="271" r:id="rId17"/>
   </p:sldIdLst>
   <p:notesMasterIdLst>
-    <p:notesMasterId r:id="rId18"/>
+    <p:notesMasterId r:id="rId17"/>
   </p:notesMasterIdLst>
   <p:sldSz cx="12192000" cy="6858000"/>
   <p:notesSz cx="6858000" cy="12192000"/>
@@ -1069,94 +1068,6 @@
             <a:fld id="{F7021451-1387-4CA6-816F-3879F97B5CBC}" type="slidenum">
               <a:rPr lang="en-US"/>
               <a:t>15</a:t>
-            </a:fld>
-            <a:endParaRPr lang="en-US"/>
-          </a:p>
-        </p:txBody>
-      </p:sp>
-    </p:spTree>
-    <p:extLst>
-      <p:ext uri="{BB962C8B-B14F-4D97-AF65-F5344CB8AC3E}">
-        <p14:creationId xmlns:p14="http://schemas.microsoft.com/office/powerpoint/2010/main" val="1024086991"/>
-      </p:ext>
-    </p:extLst>
-  </p:cSld>
-  <p:clrMapOvr>
-    <a:masterClrMapping/>
-  </p:clrMapOvr>
-</p:notes>
-</file>
-
-<file path=ppt/notesSlides/notesSlide16.xml><?xml version="1.0" encoding="utf-8"?>
-<p:notes xmlns:a="http://schemas.openxmlformats.org/drawingml/2006/main" xmlns:r="http://schemas.openxmlformats.org/officeDocument/2006/relationships" xmlns:p="http://schemas.openxmlformats.org/presentationml/2006/main">
-  <p:cSld>
-    <p:spTree>
-      <p:nvGrpSpPr>
-        <p:cNvPr id="1" name=""/>
-        <p:cNvGrpSpPr/>
-        <p:nvPr/>
-      </p:nvGrpSpPr>
-      <p:grpSpPr>
-        <a:xfrm>
-          <a:off x="0" y="0"/>
-          <a:ext cx="0" cy="0"/>
-          <a:chOff x="0" y="0"/>
-          <a:chExt cx="0" cy="0"/>
-        </a:xfrm>
-      </p:grpSpPr>
-      <p:sp>
-        <p:nvSpPr>
-          <p:cNvPr id="2" name="Slide Image Placeholder 1"/>
-          <p:cNvSpPr>
-            <a:spLocks noGrp="1" noRot="1" noChangeAspect="1"/>
-          </p:cNvSpPr>
-          <p:nvPr>
-            <p:ph type="sldImg"/>
-          </p:nvPr>
-        </p:nvSpPr>
-        <p:spPr/>
-      </p:sp>
-      <p:sp>
-        <p:nvSpPr>
-          <p:cNvPr id="3" name="Notes Placeholder 2"/>
-          <p:cNvSpPr>
-            <a:spLocks noGrp="1"/>
-          </p:cNvSpPr>
-          <p:nvPr>
-            <p:ph type="body" idx="1"/>
-          </p:nvPr>
-        </p:nvSpPr>
-        <p:spPr/>
-        <p:txBody>
-          <a:bodyPr/>
-          <a:lstStyle/>
-          <a:p>
-            <a:r>
-              <a:rPr lang="en-US" dirty="0"/>
-              <a:t/>
-            </a:r>
-            <a:endParaRPr lang="en-US" dirty="0"/>
-          </a:p>
-        </p:txBody>
-      </p:sp>
-      <p:sp>
-        <p:nvSpPr>
-          <p:cNvPr id="4" name="Slide Number Placeholder 3"/>
-          <p:cNvSpPr>
-            <a:spLocks noGrp="1"/>
-          </p:cNvSpPr>
-          <p:nvPr>
-            <p:ph type="sldNum" sz="quarter" idx="10"/>
-          </p:nvPr>
-        </p:nvSpPr>
-        <p:spPr/>
-        <p:txBody>
-          <a:bodyPr/>
-          <a:lstStyle/>
-          <a:p>
-            <a:fld id="{F7021451-1387-4CA6-816F-3879F97B5CBC}" type="slidenum">
-              <a:rPr lang="en-US"/>
-              <a:t>16</a:t>
             </a:fld>
             <a:endParaRPr lang="en-US"/>
           </a:p>
@@ -3635,7 +3546,7 @@
                 <a:ea typeface="Microsoft YaHei" pitchFamily="34" charset="-122"/>
                 <a:cs typeface="Microsoft YaHei" pitchFamily="34" charset="-120"/>
               </a:rPr>
-              <a:t>Kupffer 细胞 IL18 74.2% 对 CASP1 51.9%。肝细胞 IL18 11.2% 而 CASP1 0.34% 方向相符，但 IL18 未进该分层最高三分位，按 §8 不入候选——这一条列在此处是为了让落选理由可见。</a:t>
+              <a:t>肝细胞 IL18 11.2%、CASP1 0.34% 方向相符，但 IL18 未进最高三分位。</a:t>
             </a:r>
             <a:endParaRPr lang="en-US" sz="1050" dirty="0"/>
           </a:p>
@@ -3765,7 +3676,7 @@
                 <a:ea typeface="Microsoft YaHei" pitchFamily="34" charset="-122"/>
                 <a:cs typeface="Microsoft YaHei" pitchFamily="34" charset="-120"/>
               </a:rPr>
-              <a:t>胰岛 D(δ) 细胞与胰导管细胞是本器官的两个方向相符项。胰岛内分泌细胞 IL18 19.5% 而 CASP1 0.09%，CASP3 33.3%。同一位置的人胰岛 δ 细胞 IL18 仅 0.17%（8/4677），该发现在人不复现。</a:t>
+              <a:t>胰岛 δ 细胞与胰导管细胞方向相符；人胰岛 δ 的 IL18 仅 0.17%。</a:t>
             </a:r>
             <a:endParaRPr lang="en-US" sz="1050" dirty="0"/>
           </a:p>
@@ -3895,7 +3806,7 @@
                 <a:ea typeface="Microsoft YaHei" pitchFamily="34" charset="-122"/>
                 <a:cs typeface="Microsoft YaHei" pitchFamily="34" charset="-120"/>
               </a:rPr>
-              <a:t>星形胶质 IL18 56.7% 而 CASP1 仅 2/3766；小胶质 IL18 20.5% 但 CASP1 15/818 = 1.83%，是全脑最高的一档。</a:t>
+              <a:t>星形胶质 IL18 56.7%、CASP1 2/3766；小胶质 CASP1 1.83%，全脑最高。</a:t>
             </a:r>
             <a:endParaRPr lang="en-US" sz="1050" dirty="0"/>
           </a:p>
@@ -4025,7 +3936,7 @@
                 <a:ea typeface="Microsoft YaHei" pitchFamily="34" charset="-122"/>
                 <a:cs typeface="Microsoft YaHei" pitchFamily="34" charset="-120"/>
               </a:rPr>
-              <a:t>本页不产候选。星形胶质 IL18 21.0% 而 CASP1 0/404、少突胶质 1/707，方向看似相符，但该分层矩阵只带基因符号（gene_id_unavailable，§1.2），细胞数又少；而参考层的 RiboTag 分选脊髓星形胶质明确测到 Casp1。故小鼠星形胶质的结论只覆盖皮层与海马，不含脊髓。</a:t>
+              <a:t>星形胶质 CASP1 0/404，但参考层 RiboTag 分选脊髓星形胶质测到 Casp1。</a:t>
             </a:r>
             <a:endParaRPr lang="en-US" sz="1050" dirty="0"/>
           </a:p>
@@ -4064,7 +3975,7 @@
         </p:nvSpPr>
         <p:spPr>
           <a:xfrm>
-            <a:off x="640080" y="365760"/>
+            <a:off x="640080" y="384048"/>
             <a:ext cx="5486400" cy="502920"/>
           </a:xfrm>
           <a:prstGeom prst="rect">
@@ -4103,8 +4014,8 @@
         </p:nvSpPr>
         <p:spPr>
           <a:xfrm>
-            <a:off x="640080" y="886968"/>
-            <a:ext cx="10972800" cy="274320"/>
+            <a:off x="868680" y="1280160"/>
+            <a:ext cx="10515600" cy="621792"/>
           </a:xfrm>
           <a:prstGeom prst="rect">
             <a:avLst/>
@@ -4113,95 +4024,18 @@
           <a:ln/>
         </p:spPr>
         <p:txBody>
-          <a:bodyPr wrap="square" rtlCol="0" anchor="ctr"/>
-          <a:lstStyle/>
-          <a:p>
-            <a:pPr indent="0" marL="0">
-              <a:buNone/>
+          <a:bodyPr wrap="square" rtlCol="0" anchor="t"/>
+          <a:lstStyle/>
+          <a:p>
+            <a:pPr marL="190500" indent="-190500">
+              <a:lnSpc>
+                <a:spcPct val="120000"/>
+              </a:lnSpc>
+              <a:buSzPct val="100000"/>
+              <a:buChar char="•"/>
             </a:pPr>
             <a:r>
-              <a:rPr lang="en-US" sz="1100" dirty="0">
-                <a:solidFill>
-                  <a:srgbClr val="6B6B6B"/>
-                </a:solidFill>
-                <a:latin typeface="Microsoft YaHei" pitchFamily="34" charset="0"/>
-                <a:ea typeface="Microsoft YaHei" pitchFamily="34" charset="-122"/>
-                <a:cs typeface="Microsoft YaHei" pitchFamily="34" charset="-120"/>
-              </a:rPr>
-              <a:t>检出率均为合并口径（原始计数 ≥1 的细胞数 ÷ 分析细胞数，合并全部供体）。29 个分层，静息基线。</a:t>
-            </a:r>
-            <a:endParaRPr lang="en-US" sz="1100" dirty="0"/>
-          </a:p>
-        </p:txBody>
-      </p:sp>
-      <p:sp>
-        <p:nvSpPr>
-          <p:cNvPr id="4" name="Text 2"/>
-          <p:cNvSpPr txBox="1"/>
-          <p:nvPr/>
-        </p:nvSpPr>
-        <p:spPr>
-          <a:xfrm>
-            <a:off x="658368" y="1389888"/>
-            <a:ext cx="384048" cy="274320"/>
-          </a:xfrm>
-          <a:prstGeom prst="rect">
-            <a:avLst/>
-          </a:prstGeom>
-          <a:noFill/>
-          <a:ln/>
-        </p:spPr>
-        <p:txBody>
-          <a:bodyPr wrap="square" rtlCol="0" anchor="ctr"/>
-          <a:lstStyle/>
-          <a:p>
-            <a:pPr algn="r" indent="0" marL="0">
-              <a:buNone/>
-            </a:pPr>
-            <a:r>
-              <a:rPr lang="en-US" sz="1200" dirty="0">
-                <a:solidFill>
-                  <a:srgbClr val="9AA0A6"/>
-                </a:solidFill>
-                <a:latin typeface="Microsoft YaHei" pitchFamily="34" charset="0"/>
-                <a:ea typeface="Microsoft YaHei" pitchFamily="34" charset="-122"/>
-                <a:cs typeface="Microsoft YaHei" pitchFamily="34" charset="-120"/>
-              </a:rPr>
-              <a:t>1</a:t>
-            </a:r>
-            <a:endParaRPr lang="en-US" sz="1200" dirty="0"/>
-          </a:p>
-        </p:txBody>
-      </p:sp>
-      <p:sp>
-        <p:nvSpPr>
-          <p:cNvPr id="5" name="Text 3"/>
-          <p:cNvSpPr txBox="1"/>
-          <p:nvPr/>
-        </p:nvSpPr>
-        <p:spPr>
-          <a:xfrm>
-            <a:off x="1188720" y="1348740"/>
-            <a:ext cx="10195560" cy="585216"/>
-          </a:xfrm>
-          <a:prstGeom prst="rect">
-            <a:avLst/>
-          </a:prstGeom>
-          <a:noFill/>
-          <a:ln/>
-        </p:spPr>
-        <p:txBody>
-          <a:bodyPr wrap="square" rtlCol="0" anchor="t"/>
-          <a:lstStyle/>
-          <a:p>
-            <a:pPr indent="0" marL="0">
-              <a:lnSpc>
-                <a:spcPct val="122000"/>
-              </a:lnSpc>
-              <a:buNone/>
-            </a:pPr>
-            <a:r>
-              <a:rPr lang="en-US" sz="1400" b="1" dirty="0">
+              <a:rPr lang="en-US" sz="1450" dirty="0">
                 <a:solidFill>
                   <a:srgbClr val="1A1A1A"/>
                 </a:solidFill>
@@ -4209,39 +4043,22 @@
                 <a:ea typeface="Microsoft YaHei" pitchFamily="34" charset="-122"/>
                 <a:cs typeface="Microsoft YaHei" pitchFamily="34" charset="-120"/>
               </a:rPr>
-              <a:t>髓系细胞不满足筛选前提。</a:t>
-            </a:r>
-            <a:pPr indent="0" marL="0">
-              <a:lnSpc>
-                <a:spcPct val="122000"/>
-              </a:lnSpc>
-              <a:buNone/>
-            </a:pPr>
-            <a:r>
-              <a:rPr lang="en-US" sz="1400" dirty="0">
-                <a:solidFill>
-                  <a:srgbClr val="3C3C3C"/>
-                </a:solidFill>
-                <a:latin typeface="Microsoft YaHei" pitchFamily="34" charset="0"/>
-                <a:ea typeface="Microsoft YaHei" pitchFamily="34" charset="-122"/>
-                <a:cs typeface="Microsoft YaHei" pitchFamily="34" charset="-120"/>
-              </a:rPr>
-              <a:t>巨噬、单核、树突状、小胶质与粒细胞在两物种五器官共 62 个「细胞类型 × 分层」中无一方向符合；IL18 检出率最高的细胞类型同时也是 CASP1 检出率最高的。</a:t>
-            </a:r>
-            <a:endParaRPr lang="en-US" sz="1400" dirty="0"/>
-          </a:p>
-        </p:txBody>
-      </p:sp>
-      <p:sp>
-        <p:nvSpPr>
-          <p:cNvPr id="6" name="Text 4"/>
+              <a:t>髓系细胞不满足筛选前提：两物种五器官 62 个「细胞类型 × 分层」中无一符合，IL18 检出率最高者同时也是 CASP1 检出率最高者。</a:t>
+            </a:r>
+            <a:endParaRPr lang="en-US" sz="1450" dirty="0"/>
+          </a:p>
+        </p:txBody>
+      </p:sp>
+      <p:sp>
+        <p:nvSpPr>
+          <p:cNvPr id="4" name="Text 2"/>
           <p:cNvSpPr txBox="1"/>
           <p:nvPr/>
         </p:nvSpPr>
         <p:spPr>
           <a:xfrm>
-            <a:off x="658368" y="2084832"/>
-            <a:ext cx="384048" cy="274320"/>
+            <a:off x="868680" y="2020824"/>
+            <a:ext cx="10515600" cy="621792"/>
           </a:xfrm>
           <a:prstGeom prst="rect">
             <a:avLst/>
@@ -4250,56 +4067,18 @@
           <a:ln/>
         </p:spPr>
         <p:txBody>
-          <a:bodyPr wrap="square" rtlCol="0" anchor="ctr"/>
-          <a:lstStyle/>
-          <a:p>
-            <a:pPr algn="r" indent="0" marL="0">
-              <a:buNone/>
+          <a:bodyPr wrap="square" rtlCol="0" anchor="t"/>
+          <a:lstStyle/>
+          <a:p>
+            <a:pPr marL="190500" indent="-190500">
+              <a:lnSpc>
+                <a:spcPct val="120000"/>
+              </a:lnSpc>
+              <a:buSzPct val="100000"/>
+              <a:buChar char="•"/>
             </a:pPr>
             <a:r>
-              <a:rPr lang="en-US" sz="1200" dirty="0">
-                <a:solidFill>
-                  <a:srgbClr val="9AA0A6"/>
-                </a:solidFill>
-                <a:latin typeface="Microsoft YaHei" pitchFamily="34" charset="0"/>
-                <a:ea typeface="Microsoft YaHei" pitchFamily="34" charset="-122"/>
-                <a:cs typeface="Microsoft YaHei" pitchFamily="34" charset="-120"/>
-              </a:rPr>
-              <a:t>2</a:t>
-            </a:r>
-            <a:endParaRPr lang="en-US" sz="1200" dirty="0"/>
-          </a:p>
-        </p:txBody>
-      </p:sp>
-      <p:sp>
-        <p:nvSpPr>
-          <p:cNvPr id="7" name="Text 5"/>
-          <p:cNvSpPr txBox="1"/>
-          <p:nvPr/>
-        </p:nvSpPr>
-        <p:spPr>
-          <a:xfrm>
-            <a:off x="1188720" y="2043684"/>
-            <a:ext cx="10195560" cy="585216"/>
-          </a:xfrm>
-          <a:prstGeom prst="rect">
-            <a:avLst/>
-          </a:prstGeom>
-          <a:noFill/>
-          <a:ln/>
-        </p:spPr>
-        <p:txBody>
-          <a:bodyPr wrap="square" rtlCol="0" anchor="t"/>
-          <a:lstStyle/>
-          <a:p>
-            <a:pPr indent="0" marL="0">
-              <a:lnSpc>
-                <a:spcPct val="122000"/>
-              </a:lnSpc>
-              <a:buNone/>
-            </a:pPr>
-            <a:r>
-              <a:rPr lang="en-US" sz="1400" b="1" dirty="0">
+              <a:rPr lang="en-US" sz="1450" dirty="0">
                 <a:solidFill>
                   <a:srgbClr val="1A1A1A"/>
                 </a:solidFill>
@@ -4307,39 +4086,22 @@
                 <a:ea typeface="Microsoft YaHei" pitchFamily="34" charset="-122"/>
                 <a:cs typeface="Microsoft YaHei" pitchFamily="34" charset="-120"/>
               </a:rPr>
-              <a:t>小鼠的命中集中于胶质。</a:t>
-            </a:r>
-            <a:pPr indent="0" marL="0">
-              <a:lnSpc>
-                <a:spcPct val="122000"/>
-              </a:lnSpc>
-              <a:buNone/>
-            </a:pPr>
-            <a:r>
-              <a:rPr lang="en-US" sz="1400" dirty="0">
-                <a:solidFill>
-                  <a:srgbClr val="3C3C3C"/>
-                </a:solidFill>
-                <a:latin typeface="Microsoft YaHei" pitchFamily="34" charset="0"/>
-                <a:ea typeface="Microsoft YaHei" pitchFamily="34" charset="-122"/>
-                <a:cs typeface="Microsoft YaHei" pitchFamily="34" charset="-120"/>
-              </a:rPr>
-              <a:t>皮层与海马星形胶质 IL18 56.7%（2135/3766，40 供体）、CASP1 2/3766；少突胶质 27.3%（2452/8987，55 供体）、CASP1 2/8987。</a:t>
-            </a:r>
-            <a:endParaRPr lang="en-US" sz="1400" dirty="0"/>
-          </a:p>
-        </p:txBody>
-      </p:sp>
-      <p:sp>
-        <p:nvSpPr>
-          <p:cNvPr id="8" name="Text 6"/>
+              <a:t>小鼠命中胶质：皮层与海马星形胶质 IL18 56.7%（2135/3766，40 供体）、CASP1 2/3766；少突胶质 27.3%、CASP1 2/8987。单核分层中星形胶质 CASP1 为 4.65%，不复现。</a:t>
+            </a:r>
+            <a:endParaRPr lang="en-US" sz="1450" dirty="0"/>
+          </a:p>
+        </p:txBody>
+      </p:sp>
+      <p:sp>
+        <p:nvSpPr>
+          <p:cNvPr id="5" name="Text 3"/>
           <p:cNvSpPr txBox="1"/>
           <p:nvPr/>
         </p:nvSpPr>
         <p:spPr>
           <a:xfrm>
-            <a:off x="658368" y="2779776"/>
-            <a:ext cx="384048" cy="274320"/>
+            <a:off x="868680" y="2761488"/>
+            <a:ext cx="10515600" cy="621792"/>
           </a:xfrm>
           <a:prstGeom prst="rect">
             <a:avLst/>
@@ -4348,56 +4110,18 @@
           <a:ln/>
         </p:spPr>
         <p:txBody>
-          <a:bodyPr wrap="square" rtlCol="0" anchor="ctr"/>
-          <a:lstStyle/>
-          <a:p>
-            <a:pPr algn="r" indent="0" marL="0">
-              <a:buNone/>
+          <a:bodyPr wrap="square" rtlCol="0" anchor="t"/>
+          <a:lstStyle/>
+          <a:p>
+            <a:pPr marL="190500" indent="-190500">
+              <a:lnSpc>
+                <a:spcPct val="120000"/>
+              </a:lnSpc>
+              <a:buSzPct val="100000"/>
+              <a:buChar char="•"/>
             </a:pPr>
             <a:r>
-              <a:rPr lang="en-US" sz="1200" dirty="0">
-                <a:solidFill>
-                  <a:srgbClr val="9AA0A6"/>
-                </a:solidFill>
-                <a:latin typeface="Microsoft YaHei" pitchFamily="34" charset="0"/>
-                <a:ea typeface="Microsoft YaHei" pitchFamily="34" charset="-122"/>
-                <a:cs typeface="Microsoft YaHei" pitchFamily="34" charset="-120"/>
-              </a:rPr>
-              <a:t>3</a:t>
-            </a:r>
-            <a:endParaRPr lang="en-US" sz="1200" dirty="0"/>
-          </a:p>
-        </p:txBody>
-      </p:sp>
-      <p:sp>
-        <p:nvSpPr>
-          <p:cNvPr id="9" name="Text 7"/>
-          <p:cNvSpPr txBox="1"/>
-          <p:nvPr/>
-        </p:nvSpPr>
-        <p:spPr>
-          <a:xfrm>
-            <a:off x="1188720" y="2738628"/>
-            <a:ext cx="10195560" cy="585216"/>
-          </a:xfrm>
-          <a:prstGeom prst="rect">
-            <a:avLst/>
-          </a:prstGeom>
-          <a:noFill/>
-          <a:ln/>
-        </p:spPr>
-        <p:txBody>
-          <a:bodyPr wrap="square" rtlCol="0" anchor="t"/>
-          <a:lstStyle/>
-          <a:p>
-            <a:pPr indent="0" marL="0">
-              <a:lnSpc>
-                <a:spcPct val="122000"/>
-              </a:lnSpc>
-              <a:buNone/>
-            </a:pPr>
-            <a:r>
-              <a:rPr lang="en-US" sz="1400" b="1" dirty="0">
+              <a:rPr lang="en-US" sz="1450" dirty="0">
                 <a:solidFill>
                   <a:srgbClr val="1A1A1A"/>
                 </a:solidFill>
@@ -4405,39 +4129,22 @@
                 <a:ea typeface="Microsoft YaHei" pitchFamily="34" charset="-122"/>
                 <a:cs typeface="Microsoft YaHei" pitchFamily="34" charset="-120"/>
               </a:rPr>
-              <a:t>人的命中集中于皮层神经元亚类。</a:t>
-            </a:r>
-            <a:pPr indent="0" marL="0">
-              <a:lnSpc>
-                <a:spcPct val="122000"/>
-              </a:lnSpc>
-              <a:buNone/>
-            </a:pPr>
-            <a:r>
-              <a:rPr lang="en-US" sz="1400" dirty="0">
-                <a:solidFill>
-                  <a:srgbClr val="3C3C3C"/>
-                </a:solidFill>
-                <a:latin typeface="Microsoft YaHei" pitchFamily="34" charset="0"/>
-                <a:ea typeface="Microsoft YaHei" pitchFamily="34" charset="-122"/>
-                <a:cs typeface="Microsoft YaHei" pitchFamily="34" charset="-120"/>
-              </a:rPr>
-              <a:t>PV 中间神经元 IL18 26.8%（5286/19711，78 供体）、CASP1 24/19711，另一队列（234 供体）复现；L5 ET 投射神经元三个分层 IL18 31.8%–43.3%、CASP1 均 ≤5 个阳性细胞。</a:t>
-            </a:r>
-            <a:endParaRPr lang="en-US" sz="1400" dirty="0"/>
-          </a:p>
-        </p:txBody>
-      </p:sp>
-      <p:sp>
-        <p:nvSpPr>
-          <p:cNvPr id="10" name="Text 8"/>
+              <a:t>人命中皮层神经元亚类：PV 中间神经元 IL18 26.8%（5286/19711，78 供体）、CASP1 24/19711，另一 234 供体队列复现；L5 ET 三个分层 IL18 31.8%–43.3%。</a:t>
+            </a:r>
+            <a:endParaRPr lang="en-US" sz="1450" dirty="0"/>
+          </a:p>
+        </p:txBody>
+      </p:sp>
+      <p:sp>
+        <p:nvSpPr>
+          <p:cNvPr id="6" name="Text 4"/>
           <p:cNvSpPr txBox="1"/>
           <p:nvPr/>
         </p:nvSpPr>
         <p:spPr>
           <a:xfrm>
-            <a:off x="658368" y="3474720"/>
-            <a:ext cx="384048" cy="274320"/>
+            <a:off x="868680" y="3502152"/>
+            <a:ext cx="10515600" cy="356616"/>
           </a:xfrm>
           <a:prstGeom prst="rect">
             <a:avLst/>
@@ -4446,56 +4153,18 @@
           <a:ln/>
         </p:spPr>
         <p:txBody>
-          <a:bodyPr wrap="square" rtlCol="0" anchor="ctr"/>
-          <a:lstStyle/>
-          <a:p>
-            <a:pPr algn="r" indent="0" marL="0">
-              <a:buNone/>
+          <a:bodyPr wrap="square" rtlCol="0" anchor="t"/>
+          <a:lstStyle/>
+          <a:p>
+            <a:pPr marL="190500" indent="-190500">
+              <a:lnSpc>
+                <a:spcPct val="120000"/>
+              </a:lnSpc>
+              <a:buSzPct val="100000"/>
+              <a:buChar char="•"/>
             </a:pPr>
             <a:r>
-              <a:rPr lang="en-US" sz="1200" dirty="0">
-                <a:solidFill>
-                  <a:srgbClr val="9AA0A6"/>
-                </a:solidFill>
-                <a:latin typeface="Microsoft YaHei" pitchFamily="34" charset="0"/>
-                <a:ea typeface="Microsoft YaHei" pitchFamily="34" charset="-122"/>
-                <a:cs typeface="Microsoft YaHei" pitchFamily="34" charset="-120"/>
-              </a:rPr>
-              <a:t>4</a:t>
-            </a:r>
-            <a:endParaRPr lang="en-US" sz="1200" dirty="0"/>
-          </a:p>
-        </p:txBody>
-      </p:sp>
-      <p:sp>
-        <p:nvSpPr>
-          <p:cNvPr id="11" name="Text 9"/>
-          <p:cNvSpPr txBox="1"/>
-          <p:nvPr/>
-        </p:nvSpPr>
-        <p:spPr>
-          <a:xfrm>
-            <a:off x="1188720" y="3433572"/>
-            <a:ext cx="10195560" cy="585216"/>
-          </a:xfrm>
-          <a:prstGeom prst="rect">
-            <a:avLst/>
-          </a:prstGeom>
-          <a:noFill/>
-          <a:ln/>
-        </p:spPr>
-        <p:txBody>
-          <a:bodyPr wrap="square" rtlCol="0" anchor="t"/>
-          <a:lstStyle/>
-          <a:p>
-            <a:pPr indent="0" marL="0">
-              <a:lnSpc>
-                <a:spcPct val="122000"/>
-              </a:lnSpc>
-              <a:buNone/>
-            </a:pPr>
-            <a:r>
-              <a:rPr lang="en-US" sz="1400" b="1" dirty="0">
+              <a:rPr lang="en-US" sz="1450" dirty="0">
                 <a:solidFill>
                   <a:srgbClr val="1A1A1A"/>
                 </a:solidFill>
@@ -4503,39 +4172,22 @@
                 <a:ea typeface="Microsoft YaHei" pitchFamily="34" charset="-122"/>
                 <a:cs typeface="Microsoft YaHei" pitchFamily="34" charset="-120"/>
               </a:rPr>
-              <a:t>两组命中不跨物种成立。</a:t>
-            </a:r>
-            <a:pPr indent="0" marL="0">
-              <a:lnSpc>
-                <a:spcPct val="122000"/>
-              </a:lnSpc>
-              <a:buNone/>
-            </a:pPr>
-            <a:r>
-              <a:rPr lang="en-US" sz="1400" dirty="0">
-                <a:solidFill>
-                  <a:srgbClr val="3C3C3C"/>
-                </a:solidFill>
-                <a:latin typeface="Microsoft YaHei" pitchFamily="34" charset="0"/>
-                <a:ea typeface="Microsoft YaHei" pitchFamily="34" charset="-122"/>
-                <a:cs typeface="Microsoft YaHei" pitchFamily="34" charset="-120"/>
-              </a:rPr>
-              <a:t>人皮层星形胶质 IL18 仅 4.8%（782/16319，78 供体）；小鼠皮层 PV 中间神经元 Casp1 同样近零，但 Il18 仅 2.2%（684/30434，52 供体）。</a:t>
-            </a:r>
-            <a:endParaRPr lang="en-US" sz="1400" dirty="0"/>
-          </a:p>
-        </p:txBody>
-      </p:sp>
-      <p:sp>
-        <p:nvSpPr>
-          <p:cNvPr id="12" name="Text 10"/>
+              <a:t>两组命中不跨物种：人皮层星形胶质 IL18 4.8%，小鼠皮层 PV 中间神经元 Il18 2.2%。</a:t>
+            </a:r>
+            <a:endParaRPr lang="en-US" sz="1450" dirty="0"/>
+          </a:p>
+        </p:txBody>
+      </p:sp>
+      <p:sp>
+        <p:nvSpPr>
+          <p:cNvPr id="7" name="Text 5"/>
           <p:cNvSpPr txBox="1"/>
           <p:nvPr/>
         </p:nvSpPr>
         <p:spPr>
           <a:xfrm>
-            <a:off x="658368" y="4169664"/>
-            <a:ext cx="384048" cy="274320"/>
+            <a:off x="868680" y="3977640"/>
+            <a:ext cx="10515600" cy="621792"/>
           </a:xfrm>
           <a:prstGeom prst="rect">
             <a:avLst/>
@@ -4544,56 +4196,18 @@
           <a:ln/>
         </p:spPr>
         <p:txBody>
-          <a:bodyPr wrap="square" rtlCol="0" anchor="ctr"/>
-          <a:lstStyle/>
-          <a:p>
-            <a:pPr algn="r" indent="0" marL="0">
-              <a:buNone/>
+          <a:bodyPr wrap="square" rtlCol="0" anchor="t"/>
+          <a:lstStyle/>
+          <a:p>
+            <a:pPr marL="190500" indent="-190500">
+              <a:lnSpc>
+                <a:spcPct val="120000"/>
+              </a:lnSpc>
+              <a:buSzPct val="100000"/>
+              <a:buChar char="•"/>
             </a:pPr>
             <a:r>
-              <a:rPr lang="en-US" sz="1200" dirty="0">
-                <a:solidFill>
-                  <a:srgbClr val="9AA0A6"/>
-                </a:solidFill>
-                <a:latin typeface="Microsoft YaHei" pitchFamily="34" charset="0"/>
-                <a:ea typeface="Microsoft YaHei" pitchFamily="34" charset="-122"/>
-                <a:cs typeface="Microsoft YaHei" pitchFamily="34" charset="-120"/>
-              </a:rPr>
-              <a:t>5</a:t>
-            </a:r>
-            <a:endParaRPr lang="en-US" sz="1200" dirty="0"/>
-          </a:p>
-        </p:txBody>
-      </p:sp>
-      <p:sp>
-        <p:nvSpPr>
-          <p:cNvPr id="13" name="Text 11"/>
-          <p:cNvSpPr txBox="1"/>
-          <p:nvPr/>
-        </p:nvSpPr>
-        <p:spPr>
-          <a:xfrm>
-            <a:off x="1188720" y="4128516"/>
-            <a:ext cx="10195560" cy="585216"/>
-          </a:xfrm>
-          <a:prstGeom prst="rect">
-            <a:avLst/>
-          </a:prstGeom>
-          <a:noFill/>
-          <a:ln/>
-        </p:spPr>
-        <p:txBody>
-          <a:bodyPr wrap="square" rtlCol="0" anchor="t"/>
-          <a:lstStyle/>
-          <a:p>
-            <a:pPr indent="0" marL="0">
-              <a:lnSpc>
-                <a:spcPct val="122000"/>
-              </a:lnSpc>
-              <a:buNone/>
-            </a:pPr>
-            <a:r>
-              <a:rPr lang="en-US" sz="1400" b="1" dirty="0">
+              <a:rPr lang="en-US" sz="1450" dirty="0">
                 <a:solidFill>
                   <a:srgbClr val="1A1A1A"/>
                 </a:solidFill>
@@ -4601,39 +4215,22 @@
                 <a:ea typeface="Microsoft YaHei" pitchFamily="34" charset="-122"/>
                 <a:cs typeface="Microsoft YaHei" pitchFamily="34" charset="-120"/>
               </a:rPr>
-              <a:t>脑外共 7 个细胞类型方向符合，证据均为单一来源或存在分歧。</a:t>
-            </a:r>
-            <a:pPr indent="0" marL="0">
-              <a:lnSpc>
-                <a:spcPct val="122000"/>
-              </a:lnSpc>
-              <a:buNone/>
-            </a:pPr>
-            <a:r>
-              <a:rPr lang="en-US" sz="1400" dirty="0">
-                <a:solidFill>
-                  <a:srgbClr val="3C3C3C"/>
-                </a:solidFill>
-                <a:latin typeface="Microsoft YaHei" pitchFamily="34" charset="0"/>
-                <a:ea typeface="Microsoft YaHei" pitchFamily="34" charset="-122"/>
-                <a:cs typeface="Microsoft YaHei" pitchFamily="34" charset="-120"/>
-              </a:rPr>
-              <a:t>其中检出率最高者为人肺肥大细胞 IL18 34.9%（1851/5299，44 供体）、CASP1 2.60%。</a:t>
-            </a:r>
-            <a:endParaRPr lang="en-US" sz="1400" dirty="0"/>
-          </a:p>
-        </p:txBody>
-      </p:sp>
-      <p:sp>
-        <p:nvSpPr>
-          <p:cNvPr id="14" name="Text 12"/>
+              <a:t>脑外 7 个细胞类型方向符合，证据均为单一来源或存在分歧；最高者人肺肥大细胞 IL18 34.9%（1851/5299，44 供体）、CASP1 2.60%。</a:t>
+            </a:r>
+            <a:endParaRPr lang="en-US" sz="1450" dirty="0"/>
+          </a:p>
+        </p:txBody>
+      </p:sp>
+      <p:sp>
+        <p:nvSpPr>
+          <p:cNvPr id="8" name="Text 6"/>
           <p:cNvSpPr txBox="1"/>
           <p:nvPr/>
         </p:nvSpPr>
         <p:spPr>
           <a:xfrm>
-            <a:off x="658368" y="4864608"/>
-            <a:ext cx="384048" cy="274320"/>
+            <a:off x="868680" y="4718304"/>
+            <a:ext cx="10515600" cy="356616"/>
           </a:xfrm>
           <a:prstGeom prst="rect">
             <a:avLst/>
@@ -4642,56 +4239,18 @@
           <a:ln/>
         </p:spPr>
         <p:txBody>
-          <a:bodyPr wrap="square" rtlCol="0" anchor="ctr"/>
-          <a:lstStyle/>
-          <a:p>
-            <a:pPr algn="r" indent="0" marL="0">
-              <a:buNone/>
+          <a:bodyPr wrap="square" rtlCol="0" anchor="t"/>
+          <a:lstStyle/>
+          <a:p>
+            <a:pPr marL="190500" indent="-190500">
+              <a:lnSpc>
+                <a:spcPct val="120000"/>
+              </a:lnSpc>
+              <a:buSzPct val="100000"/>
+              <a:buChar char="•"/>
             </a:pPr>
             <a:r>
-              <a:rPr lang="en-US" sz="1200" dirty="0">
-                <a:solidFill>
-                  <a:srgbClr val="9AA0A6"/>
-                </a:solidFill>
-                <a:latin typeface="Microsoft YaHei" pitchFamily="34" charset="0"/>
-                <a:ea typeface="Microsoft YaHei" pitchFamily="34" charset="-122"/>
-                <a:cs typeface="Microsoft YaHei" pitchFamily="34" charset="-120"/>
-              </a:rPr>
-              <a:t>6</a:t>
-            </a:r>
-            <a:endParaRPr lang="en-US" sz="1200" dirty="0"/>
-          </a:p>
-        </p:txBody>
-      </p:sp>
-      <p:sp>
-        <p:nvSpPr>
-          <p:cNvPr id="15" name="Text 13"/>
-          <p:cNvSpPr txBox="1"/>
-          <p:nvPr/>
-        </p:nvSpPr>
-        <p:spPr>
-          <a:xfrm>
-            <a:off x="1188720" y="4823460"/>
-            <a:ext cx="10195560" cy="338328"/>
-          </a:xfrm>
-          <a:prstGeom prst="rect">
-            <a:avLst/>
-          </a:prstGeom>
-          <a:noFill/>
-          <a:ln/>
-        </p:spPr>
-        <p:txBody>
-          <a:bodyPr wrap="square" rtlCol="0" anchor="t"/>
-          <a:lstStyle/>
-          <a:p>
-            <a:pPr indent="0" marL="0">
-              <a:lnSpc>
-                <a:spcPct val="122000"/>
-              </a:lnSpc>
-              <a:buNone/>
-            </a:pPr>
-            <a:r>
-              <a:rPr lang="en-US" sz="1400" b="1" dirty="0">
+              <a:rPr lang="en-US" sz="1450" dirty="0">
                 <a:solidFill>
                   <a:srgbClr val="1A1A1A"/>
                 </a:solidFill>
@@ -4699,39 +4258,22 @@
                 <a:ea typeface="Microsoft YaHei" pitchFamily="34" charset="-122"/>
                 <a:cs typeface="Microsoft YaHei" pitchFamily="34" charset="-120"/>
               </a:rPr>
-              <a:t>人肝与人脊髓无方向符合者。</a:t>
-            </a:r>
-            <a:pPr indent="0" marL="0">
-              <a:lnSpc>
-                <a:spcPct val="122000"/>
-              </a:lnSpc>
-              <a:buNone/>
-            </a:pPr>
-            <a:r>
-              <a:rPr lang="en-US" sz="1400" dirty="0">
-                <a:solidFill>
-                  <a:srgbClr val="3C3C3C"/>
-                </a:solidFill>
-                <a:latin typeface="Microsoft YaHei" pitchFamily="34" charset="0"/>
-                <a:ea typeface="Microsoft YaHei" pitchFamily="34" charset="-122"/>
-                <a:cs typeface="Microsoft YaHei" pitchFamily="34" charset="-120"/>
-              </a:rPr>
-              <a:t>Guilliams 肝图谱 11 类、颈段脊髓白质 11 类，逐类核对后均不符合。</a:t>
-            </a:r>
-            <a:endParaRPr lang="en-US" sz="1400" dirty="0"/>
-          </a:p>
-        </p:txBody>
-      </p:sp>
-      <p:sp>
-        <p:nvSpPr>
-          <p:cNvPr id="16" name="Text 14"/>
+              <a:t>人肝与人脊髓白质各 11 类，无符合者。</a:t>
+            </a:r>
+            <a:endParaRPr lang="en-US" sz="1450" dirty="0"/>
+          </a:p>
+        </p:txBody>
+      </p:sp>
+      <p:sp>
+        <p:nvSpPr>
+          <p:cNvPr id="9" name="Text 7"/>
           <p:cNvSpPr txBox="1"/>
           <p:nvPr/>
         </p:nvSpPr>
         <p:spPr>
           <a:xfrm>
-            <a:off x="658368" y="5312664"/>
-            <a:ext cx="384048" cy="274320"/>
+            <a:off x="868680" y="5193792"/>
+            <a:ext cx="10515600" cy="356616"/>
           </a:xfrm>
           <a:prstGeom prst="rect">
             <a:avLst/>
@@ -4740,56 +4282,18 @@
           <a:ln/>
         </p:spPr>
         <p:txBody>
-          <a:bodyPr wrap="square" rtlCol="0" anchor="ctr"/>
-          <a:lstStyle/>
-          <a:p>
-            <a:pPr algn="r" indent="0" marL="0">
-              <a:buNone/>
+          <a:bodyPr wrap="square" rtlCol="0" anchor="t"/>
+          <a:lstStyle/>
+          <a:p>
+            <a:pPr marL="190500" indent="-190500">
+              <a:lnSpc>
+                <a:spcPct val="120000"/>
+              </a:lnSpc>
+              <a:buSzPct val="100000"/>
+              <a:buChar char="•"/>
             </a:pPr>
             <a:r>
-              <a:rPr lang="en-US" sz="1200" dirty="0">
-                <a:solidFill>
-                  <a:srgbClr val="9AA0A6"/>
-                </a:solidFill>
-                <a:latin typeface="Microsoft YaHei" pitchFamily="34" charset="0"/>
-                <a:ea typeface="Microsoft YaHei" pitchFamily="34" charset="-122"/>
-                <a:cs typeface="Microsoft YaHei" pitchFamily="34" charset="-120"/>
-              </a:rPr>
-              <a:t>7</a:t>
-            </a:r>
-            <a:endParaRPr lang="en-US" sz="1200" dirty="0"/>
-          </a:p>
-        </p:txBody>
-      </p:sp>
-      <p:sp>
-        <p:nvSpPr>
-          <p:cNvPr id="17" name="Text 15"/>
-          <p:cNvSpPr txBox="1"/>
-          <p:nvPr/>
-        </p:nvSpPr>
-        <p:spPr>
-          <a:xfrm>
-            <a:off x="1188720" y="5271516"/>
-            <a:ext cx="10195560" cy="585216"/>
-          </a:xfrm>
-          <a:prstGeom prst="rect">
-            <a:avLst/>
-          </a:prstGeom>
-          <a:noFill/>
-          <a:ln/>
-        </p:spPr>
-        <p:txBody>
-          <a:bodyPr wrap="square" rtlCol="0" anchor="t"/>
-          <a:lstStyle/>
-          <a:p>
-            <a:pPr indent="0" marL="0">
-              <a:lnSpc>
-                <a:spcPct val="122000"/>
-              </a:lnSpc>
-              <a:buNone/>
-            </a:pPr>
-            <a:r>
-              <a:rPr lang="en-US" sz="1400" b="1" dirty="0">
+              <a:rPr lang="en-US" sz="1450" dirty="0">
                 <a:solidFill>
                   <a:srgbClr val="1A1A1A"/>
                 </a:solidFill>
@@ -4797,39 +4301,22 @@
                 <a:ea typeface="Microsoft YaHei" pitchFamily="34" charset="-122"/>
                 <a:cs typeface="Microsoft YaHei" pitchFamily="34" charset="-120"/>
               </a:rPr>
-              <a:t>短 IL-18 转录本在人正常组织中不被显著使用。</a:t>
-            </a:r>
-            <a:pPr indent="0" marL="0">
-              <a:lnSpc>
-                <a:spcPct val="122000"/>
-              </a:lnSpc>
-              <a:buNone/>
-            </a:pPr>
-            <a:r>
-              <a:rPr lang="en-US" sz="1400" dirty="0">
-                <a:solidFill>
-                  <a:srgbClr val="3C3C3C"/>
-                </a:solidFill>
-                <a:latin typeface="Microsoft YaHei" pitchFamily="34" charset="0"/>
-                <a:ea typeface="Microsoft YaHei" pitchFamily="34" charset="-122"/>
-                <a:cs typeface="Microsoft YaHei" pitchFamily="34" charset="-120"/>
-              </a:rPr>
-              <a:t>GTEx v8 6792 个样本中占 0.09%（707/791471 跨接读段）。</a:t>
-            </a:r>
-            <a:endParaRPr lang="en-US" sz="1400" dirty="0"/>
-          </a:p>
-        </p:txBody>
-      </p:sp>
-      <p:sp>
-        <p:nvSpPr>
-          <p:cNvPr id="18" name="Text 16"/>
+              <a:t>短 IL-18 转录本在人正常组织不被显著使用：GTEx v8 6792 个样本中占 0.09%。</a:t>
+            </a:r>
+            <a:endParaRPr lang="en-US" sz="1450" dirty="0"/>
+          </a:p>
+        </p:txBody>
+      </p:sp>
+      <p:sp>
+        <p:nvSpPr>
+          <p:cNvPr id="10" name="Text 8"/>
           <p:cNvSpPr txBox="1"/>
           <p:nvPr/>
         </p:nvSpPr>
         <p:spPr>
           <a:xfrm>
-            <a:off x="685800" y="6400800"/>
-            <a:ext cx="10881360" cy="310896"/>
+            <a:off x="868680" y="6382512"/>
+            <a:ext cx="10698480" cy="310896"/>
           </a:xfrm>
           <a:prstGeom prst="rect">
             <a:avLst/>
@@ -4853,7 +4340,7 @@
                 <a:ea typeface="Microsoft YaHei" pitchFamily="34" charset="-122"/>
                 <a:cs typeface="Microsoft YaHei" pitchFamily="34" charset="-120"/>
               </a:rPr>
-              <a:t>32 行判定按同一细胞类型跨分层折叠为 22 个类型：15 个方向符合（人 10、小鼠 5，两物种零重合），7 个不符合。完整判定见 results/answer_table.tsv。</a:t>
+              <a:t>检出率为合并口径（原始计数 ≥1 的细胞数 ÷ 分析细胞数）。29 个分层，静息基线。完整判定见 results/answer_table.tsv。</a:t>
             </a:r>
             <a:endParaRPr lang="en-US" sz="1050" dirty="0"/>
           </a:p>
@@ -4892,8 +4379,8 @@
         </p:nvSpPr>
         <p:spPr>
           <a:xfrm>
-            <a:off x="640080" y="365760"/>
-            <a:ext cx="8229600" cy="502920"/>
+            <a:off x="640080" y="384048"/>
+            <a:ext cx="5486400" cy="502920"/>
           </a:xfrm>
           <a:prstGeom prst="rect">
             <a:avLst/>
@@ -4917,7 +4404,7 @@
                 <a:ea typeface="Microsoft YaHei" pitchFamily="34" charset="-122"/>
                 <a:cs typeface="Microsoft YaHei" pitchFamily="34" charset="-120"/>
               </a:rPr>
-              <a:t>判定依据与证据强度</a:t>
+              <a:t>限制与后续</a:t>
             </a:r>
             <a:endParaRPr lang="en-US" sz="2600" dirty="0"/>
           </a:p>
@@ -4931,8 +4418,8 @@
         </p:nvSpPr>
         <p:spPr>
           <a:xfrm>
-            <a:off x="685800" y="1115568"/>
-            <a:ext cx="2834640" cy="274320"/>
+            <a:off x="868680" y="1280160"/>
+            <a:ext cx="10515600" cy="621792"/>
           </a:xfrm>
           <a:prstGeom prst="rect">
             <a:avLst/>
@@ -4941,98 +4428,18 @@
           <a:ln/>
         </p:spPr>
         <p:txBody>
-          <a:bodyPr wrap="square" rtlCol="0" anchor="ctr"/>
-          <a:lstStyle/>
-          <a:p>
-            <a:pPr indent="0" marL="0">
-              <a:buNone/>
+          <a:bodyPr wrap="square" rtlCol="0" anchor="t"/>
+          <a:lstStyle/>
+          <a:p>
+            <a:pPr marL="190500" indent="-190500">
+              <a:lnSpc>
+                <a:spcPct val="120000"/>
+              </a:lnSpc>
+              <a:buSzPct val="100000"/>
+              <a:buChar char="•"/>
             </a:pPr>
             <a:r>
-              <a:rPr lang="en-US" sz="1250" b="1" dirty="0">
-                <a:solidFill>
-                  <a:srgbClr val="1F5FA8"/>
-                </a:solidFill>
-                <a:latin typeface="Microsoft YaHei" pitchFamily="34" charset="0"/>
-                <a:ea typeface="Microsoft YaHei" pitchFamily="34" charset="-122"/>
-                <a:cs typeface="Microsoft YaHei" pitchFamily="34" charset="-120"/>
-              </a:rPr>
-              <a:t>参考层覆盖不均</a:t>
-            </a:r>
-            <a:endParaRPr lang="en-US" sz="1250" dirty="0"/>
-          </a:p>
-        </p:txBody>
-      </p:sp>
-      <p:sp>
-        <p:nvSpPr>
-          <p:cNvPr id="4" name="Text 2"/>
-          <p:cNvSpPr txBox="1"/>
-          <p:nvPr/>
-        </p:nvSpPr>
-        <p:spPr>
-          <a:xfrm>
-            <a:off x="685800" y="1353312"/>
-            <a:ext cx="2834640" cy="548640"/>
-          </a:xfrm>
-          <a:prstGeom prst="rect">
-            <a:avLst/>
-          </a:prstGeom>
-          <a:noFill/>
-          <a:ln/>
-        </p:spPr>
-        <p:txBody>
-          <a:bodyPr wrap="square" rtlCol="0" anchor="t"/>
-          <a:lstStyle/>
-          <a:p>
-            <a:pPr indent="0" marL="0">
-              <a:lnSpc>
-                <a:spcPct val="112000"/>
-              </a:lnSpc>
-              <a:buNone/>
-            </a:pPr>
-            <a:r>
-              <a:rPr lang="en-US" sz="950" dirty="0">
-                <a:solidFill>
-                  <a:srgbClr val="6B6B6B"/>
-                </a:solidFill>
-                <a:latin typeface="Microsoft YaHei" pitchFamily="34" charset="0"/>
-                <a:ea typeface="Microsoft YaHei" pitchFamily="34" charset="-122"/>
-                <a:cs typeface="Microsoft YaHei" pitchFamily="34" charset="-120"/>
-              </a:rPr>
-              <a:t>影响证据分级，不影响检出率</a:t>
-            </a:r>
-            <a:endParaRPr lang="en-US" sz="950" dirty="0"/>
-          </a:p>
-        </p:txBody>
-      </p:sp>
-      <p:sp>
-        <p:nvSpPr>
-          <p:cNvPr id="5" name="Text 3"/>
-          <p:cNvSpPr txBox="1"/>
-          <p:nvPr/>
-        </p:nvSpPr>
-        <p:spPr>
-          <a:xfrm>
-            <a:off x="3063240" y="1083564"/>
-            <a:ext cx="8439912" cy="700430"/>
-          </a:xfrm>
-          <a:prstGeom prst="rect">
-            <a:avLst/>
-          </a:prstGeom>
-          <a:noFill/>
-          <a:ln/>
-        </p:spPr>
-        <p:txBody>
-          <a:bodyPr wrap="square" rtlCol="0" anchor="t"/>
-          <a:lstStyle/>
-          <a:p>
-            <a:pPr indent="0" marL="0">
-              <a:lnSpc>
-                <a:spcPct val="116000"/>
-              </a:lnSpc>
-              <a:buNone/>
-            </a:pPr>
-            <a:r>
-              <a:rPr lang="en-US" sz="1200" dirty="0">
+              <a:rPr lang="en-US" sz="1450" dirty="0">
                 <a:solidFill>
                   <a:srgbClr val="1A1A1A"/>
                 </a:solidFill>
@@ -5040,22 +4447,22 @@
                 <a:ea typeface="Microsoft YaHei" pitchFamily="34" charset="-122"/>
                 <a:cs typeface="Microsoft YaHei" pitchFamily="34" charset="-120"/>
               </a:rPr>
-              <a:t>8 行「符合 × 多源一致」全部位于脑。人肺 AT1 与人胰腺腺泡各仅 1 个参考来源，另有 4 个细胞类型无参考来源（n_ref_sources = 0），而小鼠星形胶质为 4 个。证据分级在相当程度上反映参考层覆盖，而非检出率差异。</a:t>
-            </a:r>
-            <a:endParaRPr lang="en-US" sz="1200" dirty="0"/>
-          </a:p>
-        </p:txBody>
-      </p:sp>
-      <p:sp>
-        <p:nvSpPr>
-          <p:cNvPr id="6" name="Text 4"/>
+              <a:t>静息基线，未做环境 RNA 校正。CASP1 为可诱导基因，静息态近零不预测刺激后；CASP3 的 mRNA 不反映 caspase-3 酶活性，仅用于排除最低档。</a:t>
+            </a:r>
+            <a:endParaRPr lang="en-US" sz="1450" dirty="0"/>
+          </a:p>
+        </p:txBody>
+      </p:sp>
+      <p:sp>
+        <p:nvSpPr>
+          <p:cNvPr id="4" name="Text 2"/>
           <p:cNvSpPr txBox="1"/>
           <p:nvPr/>
         </p:nvSpPr>
         <p:spPr>
           <a:xfrm>
-            <a:off x="3063240" y="1783994"/>
-            <a:ext cx="8439912" cy="488290"/>
+            <a:off x="868680" y="2020824"/>
+            <a:ext cx="10515600" cy="356616"/>
           </a:xfrm>
           <a:prstGeom prst="rect">
             <a:avLst/>
@@ -5067,14 +4474,15 @@
           <a:bodyPr wrap="square" rtlCol="0" anchor="t"/>
           <a:lstStyle/>
           <a:p>
-            <a:pPr indent="0" marL="0">
+            <a:pPr marL="190500" indent="-190500">
               <a:lnSpc>
-                <a:spcPct val="116000"/>
+                <a:spcPct val="120000"/>
               </a:lnSpc>
-              <a:buNone/>
+              <a:buSzPct val="100000"/>
+              <a:buChar char="•"/>
             </a:pPr>
             <a:r>
-              <a:rPr lang="en-US" sz="1200" dirty="0">
+              <a:rPr lang="en-US" sz="1450" dirty="0">
                 <a:solidFill>
                   <a:srgbClr val="1A1A1A"/>
                 </a:solidFill>
@@ -5082,22 +4490,22 @@
                 <a:ea typeface="Microsoft YaHei" pitchFamily="34" charset="-122"/>
                 <a:cs typeface="Microsoft YaHei" pitchFamily="34" charset="-120"/>
               </a:rPr>
-              <a:t>人肺 AT1 与人胰腺腺泡的 screen_status 为「未进候选（CASP1 未进最低三分位）」，二者系由参考层补回，未通过分层内相对规则。</a:t>
-            </a:r>
-            <a:endParaRPr lang="en-US" sz="1200" dirty="0"/>
-          </a:p>
-        </p:txBody>
-      </p:sp>
-      <p:sp>
-        <p:nvSpPr>
-          <p:cNvPr id="7" name="Text 5"/>
+              <a:t>物种之间、数据集之间、单核与单细胞之间仅比较候选名单，不比较数值。</a:t>
+            </a:r>
+            <a:endParaRPr lang="en-US" sz="1450" dirty="0"/>
+          </a:p>
+        </p:txBody>
+      </p:sp>
+      <p:sp>
+        <p:nvSpPr>
+          <p:cNvPr id="5" name="Text 3"/>
           <p:cNvSpPr txBox="1"/>
           <p:nvPr/>
         </p:nvSpPr>
         <p:spPr>
           <a:xfrm>
-            <a:off x="685800" y="2436876"/>
-            <a:ext cx="2834640" cy="274320"/>
+            <a:off x="868680" y="2496312"/>
+            <a:ext cx="10515600" cy="621792"/>
           </a:xfrm>
           <a:prstGeom prst="rect">
             <a:avLst/>
@@ -5106,56 +4514,18 @@
           <a:ln/>
         </p:spPr>
         <p:txBody>
-          <a:bodyPr wrap="square" rtlCol="0" anchor="ctr"/>
-          <a:lstStyle/>
-          <a:p>
-            <a:pPr indent="0" marL="0">
-              <a:buNone/>
+          <a:bodyPr wrap="square" rtlCol="0" anchor="t"/>
+          <a:lstStyle/>
+          <a:p>
+            <a:pPr marL="190500" indent="-190500">
+              <a:lnSpc>
+                <a:spcPct val="120000"/>
+              </a:lnSpc>
+              <a:buSzPct val="100000"/>
+              <a:buChar char="•"/>
             </a:pPr>
             <a:r>
-              <a:rPr lang="en-US" sz="1250" b="1" dirty="0">
-                <a:solidFill>
-                  <a:srgbClr val="1F5FA8"/>
-                </a:solidFill>
-                <a:latin typeface="Microsoft YaHei" pitchFamily="34" charset="0"/>
-                <a:ea typeface="Microsoft YaHei" pitchFamily="34" charset="-122"/>
-                <a:cs typeface="Microsoft YaHei" pitchFamily="34" charset="-120"/>
-              </a:rPr>
-              <a:t>来源独立性</a:t>
-            </a:r>
-            <a:endParaRPr lang="en-US" sz="1250" dirty="0"/>
-          </a:p>
-        </p:txBody>
-      </p:sp>
-      <p:sp>
-        <p:nvSpPr>
-          <p:cNvPr id="8" name="Text 6"/>
-          <p:cNvSpPr txBox="1"/>
-          <p:nvPr/>
-        </p:nvSpPr>
-        <p:spPr>
-          <a:xfrm>
-            <a:off x="3063240" y="2404872"/>
-            <a:ext cx="8439912" cy="700430"/>
-          </a:xfrm>
-          <a:prstGeom prst="rect">
-            <a:avLst/>
-          </a:prstGeom>
-          <a:noFill/>
-          <a:ln/>
-        </p:spPr>
-        <p:txBody>
-          <a:bodyPr wrap="square" rtlCol="0" anchor="t"/>
-          <a:lstStyle/>
-          <a:p>
-            <a:pPr indent="0" marL="0">
-              <a:lnSpc>
-                <a:spcPct val="116000"/>
-              </a:lnSpc>
-              <a:buNone/>
-            </a:pPr>
-            <a:r>
-              <a:rPr lang="en-US" sz="1200" dirty="0">
+              <a:rPr lang="en-US" sz="1450" dirty="0">
                 <a:solidFill>
                   <a:srgbClr val="1A1A1A"/>
                 </a:solidFill>
@@ -5163,22 +4533,22 @@
                 <a:ea typeface="Microsoft YaHei" pitchFamily="34" charset="-122"/>
                 <a:cs typeface="Microsoft YaHei" pitchFamily="34" charset="-120"/>
               </a:rPr>
-              <a:t>小鼠星形胶质的 4 个参考来源中，3 个为独立纯化测量（GSE100329 RiboTag、Tabula Muris Senis FACS-SmartSeq2、brainrnaseq/Zhang），第 4 个为 CELLxGENE 跨语料汇总，与本筛选同属一个数据家族。</a:t>
-            </a:r>
-            <a:endParaRPr lang="en-US" sz="1200" dirty="0"/>
-          </a:p>
-        </p:txBody>
-      </p:sp>
-      <p:sp>
-        <p:nvSpPr>
-          <p:cNvPr id="9" name="Text 7"/>
+              <a:t>参考层覆盖不均：人肺 AT1 与人胰腺腺泡各 1 个参考来源，4 个细胞类型无来源，小鼠星形胶质 4 个。证据分级在相当程度上反映覆盖差异。</a:t>
+            </a:r>
+            <a:endParaRPr lang="en-US" sz="1450" dirty="0"/>
+          </a:p>
+        </p:txBody>
+      </p:sp>
+      <p:sp>
+        <p:nvSpPr>
+          <p:cNvPr id="6" name="Text 4"/>
           <p:cNvSpPr txBox="1"/>
           <p:nvPr/>
         </p:nvSpPr>
         <p:spPr>
           <a:xfrm>
-            <a:off x="3063240" y="3105302"/>
-            <a:ext cx="8439912" cy="488290"/>
+            <a:off x="868680" y="3236976"/>
+            <a:ext cx="10515600" cy="621792"/>
           </a:xfrm>
           <a:prstGeom prst="rect">
             <a:avLst/>
@@ -5190,14 +4560,15 @@
           <a:bodyPr wrap="square" rtlCol="0" anchor="t"/>
           <a:lstStyle/>
           <a:p>
-            <a:pPr indent="0" marL="0">
+            <a:pPr marL="190500" indent="-190500">
               <a:lnSpc>
-                <a:spcPct val="116000"/>
+                <a:spcPct val="120000"/>
               </a:lnSpc>
-              <a:buNone/>
+              <a:buSzPct val="100000"/>
+              <a:buChar char="•"/>
             </a:pPr>
             <a:r>
-              <a:rPr lang="en-US" sz="1200" dirty="0">
+              <a:rPr lang="en-US" sz="1450" dirty="0">
                 <a:solidFill>
                   <a:srgbClr val="1A1A1A"/>
                 </a:solidFill>
@@ -5205,22 +4576,22 @@
                 <a:ea typeface="Microsoft YaHei" pitchFamily="34" charset="-122"/>
                 <a:cs typeface="Microsoft YaHei" pitchFamily="34" charset="-120"/>
               </a:rPr>
-              <a:t>人肺肥大细胞的 4 个来源中，支持 CASP1 近零者为 HPA 组织图谱（比值 29.9），两个 ex vivo 分选来源均测到 CASP1（比值 3.82 与 4.48）。</a:t>
-            </a:r>
-            <a:endParaRPr lang="en-US" sz="1200" dirty="0"/>
-          </a:p>
-        </p:txBody>
-      </p:sp>
-      <p:sp>
-        <p:nvSpPr>
-          <p:cNvPr id="10" name="Text 8"/>
+              <a:t>零值标尺：静息小鼠小胶质 Casp1 约 50–61 CPM、17% 细胞。阳性对照 L5a IT 锥体神经元 8.34 CPM（25 个文库中 24 个非零）。</a:t>
+            </a:r>
+            <a:endParaRPr lang="en-US" sz="1450" dirty="0"/>
+          </a:p>
+        </p:txBody>
+      </p:sp>
+      <p:sp>
+        <p:nvSpPr>
+          <p:cNvPr id="7" name="Text 5"/>
           <p:cNvSpPr txBox="1"/>
           <p:nvPr/>
         </p:nvSpPr>
         <p:spPr>
           <a:xfrm>
-            <a:off x="685800" y="3758184"/>
-            <a:ext cx="2834640" cy="274320"/>
+            <a:off x="868680" y="3977640"/>
+            <a:ext cx="10515600" cy="621792"/>
           </a:xfrm>
           <a:prstGeom prst="rect">
             <a:avLst/>
@@ -5229,98 +4600,18 @@
           <a:ln/>
         </p:spPr>
         <p:txBody>
-          <a:bodyPr wrap="square" rtlCol="0" anchor="ctr"/>
-          <a:lstStyle/>
-          <a:p>
-            <a:pPr indent="0" marL="0">
-              <a:buNone/>
+          <a:bodyPr wrap="square" rtlCol="0" anchor="t"/>
+          <a:lstStyle/>
+          <a:p>
+            <a:pPr marL="190500" indent="-190500">
+              <a:lnSpc>
+                <a:spcPct val="120000"/>
+              </a:lnSpc>
+              <a:buSzPct val="100000"/>
+              <a:buChar char="•"/>
             </a:pPr>
             <a:r>
-              <a:rPr lang="en-US" sz="1250" b="1" dirty="0">
-                <a:solidFill>
-                  <a:srgbClr val="9A2B2B"/>
-                </a:solidFill>
-                <a:latin typeface="Microsoft YaHei" pitchFamily="34" charset="0"/>
-                <a:ea typeface="Microsoft YaHei" pitchFamily="34" charset="-122"/>
-                <a:cs typeface="Microsoft YaHei" pitchFamily="34" charset="-120"/>
-              </a:rPr>
-              <a:t>分层内不复现</a:t>
-            </a:r>
-            <a:endParaRPr lang="en-US" sz="1250" dirty="0"/>
-          </a:p>
-        </p:txBody>
-      </p:sp>
-      <p:sp>
-        <p:nvSpPr>
-          <p:cNvPr id="11" name="Text 9"/>
-          <p:cNvSpPr txBox="1"/>
-          <p:nvPr/>
-        </p:nvSpPr>
-        <p:spPr>
-          <a:xfrm>
-            <a:off x="685800" y="3995928"/>
-            <a:ext cx="2834640" cy="548640"/>
-          </a:xfrm>
-          <a:prstGeom prst="rect">
-            <a:avLst/>
-          </a:prstGeom>
-          <a:noFill/>
-          <a:ln/>
-        </p:spPr>
-        <p:txBody>
-          <a:bodyPr wrap="square" rtlCol="0" anchor="t"/>
-          <a:lstStyle/>
-          <a:p>
-            <a:pPr indent="0" marL="0">
-              <a:lnSpc>
-                <a:spcPct val="112000"/>
-              </a:lnSpc>
-              <a:buNone/>
-            </a:pPr>
-            <a:r>
-              <a:rPr lang="en-US" sz="950" dirty="0">
-                <a:solidFill>
-                  <a:srgbClr val="6B6B6B"/>
-                </a:solidFill>
-                <a:latin typeface="Microsoft YaHei" pitchFamily="34" charset="0"/>
-                <a:ea typeface="Microsoft YaHei" pitchFamily="34" charset="-122"/>
-                <a:cs typeface="Microsoft YaHei" pitchFamily="34" charset="-120"/>
-              </a:rPr>
-              <a:t>按 §3 应予报告</a:t>
-            </a:r>
-            <a:endParaRPr lang="en-US" sz="950" dirty="0"/>
-          </a:p>
-        </p:txBody>
-      </p:sp>
-      <p:sp>
-        <p:nvSpPr>
-          <p:cNvPr id="12" name="Text 10"/>
-          <p:cNvSpPr txBox="1"/>
-          <p:nvPr/>
-        </p:nvSpPr>
-        <p:spPr>
-          <a:xfrm>
-            <a:off x="3063240" y="3726180"/>
-            <a:ext cx="8439912" cy="488290"/>
-          </a:xfrm>
-          <a:prstGeom prst="rect">
-            <a:avLst/>
-          </a:prstGeom>
-          <a:noFill/>
-          <a:ln/>
-        </p:spPr>
-        <p:txBody>
-          <a:bodyPr wrap="square" rtlCol="0" anchor="t"/>
-          <a:lstStyle/>
-          <a:p>
-            <a:pPr indent="0" marL="0">
-              <a:lnSpc>
-                <a:spcPct val="116000"/>
-              </a:lnSpc>
-              <a:buNone/>
-            </a:pPr>
-            <a:r>
-              <a:rPr lang="en-US" sz="1200" dirty="0">
+              <a:rPr lang="en-US" sz="1450" dirty="0">
                 <a:solidFill>
                   <a:srgbClr val="1A1A1A"/>
                 </a:solidFill>
@@ -5328,22 +4619,22 @@
                 <a:ea typeface="Microsoft YaHei" pitchFamily="34" charset="-122"/>
                 <a:cs typeface="Microsoft YaHei" pitchFamily="34" charset="-120"/>
               </a:rPr>
-              <a:t>小鼠脑另一分层（单核，10 供体）中星形胶质 IL18 仍居首位（14579/21878 = 66.6%），但 CASP1 为 1018/21878 = 4.65%，不入候选。单核与单细胞不作定量比较，候选集成员这一层级的分歧仍须报告。</a:t>
-            </a:r>
-            <a:endParaRPr lang="en-US" sz="1200" dirty="0"/>
-          </a:p>
-        </p:txBody>
-      </p:sp>
-      <p:sp>
-        <p:nvSpPr>
-          <p:cNvPr id="13" name="Text 11"/>
+              <a:t>小鼠星形胶质结论限皮层与海马：小脑 Bergmann 胶质 22.4 CPM、脊髓星形胶质 12.5–16.7 CPM 均测到 Casp1。</a:t>
+            </a:r>
+            <a:endParaRPr lang="en-US" sz="1450" dirty="0"/>
+          </a:p>
+        </p:txBody>
+      </p:sp>
+      <p:sp>
+        <p:nvSpPr>
+          <p:cNvPr id="8" name="Text 6"/>
           <p:cNvSpPr txBox="1"/>
           <p:nvPr/>
         </p:nvSpPr>
         <p:spPr>
           <a:xfrm>
-            <a:off x="3063240" y="4214470"/>
-            <a:ext cx="8439912" cy="488290"/>
+            <a:off x="868680" y="4718304"/>
+            <a:ext cx="10515600" cy="356616"/>
           </a:xfrm>
           <a:prstGeom prst="rect">
             <a:avLst/>
@@ -5355,14 +4646,15 @@
           <a:bodyPr wrap="square" rtlCol="0" anchor="t"/>
           <a:lstStyle/>
           <a:p>
-            <a:pPr indent="0" marL="0">
+            <a:pPr marL="190500" indent="-190500">
               <a:lnSpc>
-                <a:spcPct val="116000"/>
+                <a:spcPct val="120000"/>
               </a:lnSpc>
-              <a:buNone/>
+              <a:buSzPct val="100000"/>
+              <a:buChar char="•"/>
             </a:pPr>
             <a:r>
-              <a:rPr lang="en-US" sz="1200" dirty="0">
+              <a:rPr lang="en-US" sz="1450" dirty="0">
                 <a:solidFill>
                   <a:srgbClr val="1A1A1A"/>
                 </a:solidFill>
@@ -5370,22 +4662,22 @@
                 <a:ea typeface="Microsoft YaHei" pitchFamily="34" charset="-122"/>
                 <a:cs typeface="Microsoft YaHei" pitchFamily="34" charset="-120"/>
               </a:rPr>
-              <a:t>人脑 CGE 源中间神经元为全表证据最弱的一条「符合」：IL18 12.1%（618/5096，44 供体），5 个参考来源中 1 个支持、3 个反对，其中 2 个显示 CASP1 与 IL18 处于同一量级。</a:t>
-            </a:r>
-            <a:endParaRPr lang="en-US" sz="1200" dirty="0"/>
-          </a:p>
-        </p:txBody>
-      </p:sp>
-      <p:sp>
-        <p:nvSpPr>
-          <p:cNvPr id="14" name="Text 12"/>
+              <a:t>三分位与「CASP3 最低 20%」为工程取值：改用四分位后候选数由 17 降至 12。</a:t>
+            </a:r>
+            <a:endParaRPr lang="en-US" sz="1450" dirty="0"/>
+          </a:p>
+        </p:txBody>
+      </p:sp>
+      <p:sp>
+        <p:nvSpPr>
+          <p:cNvPr id="9" name="Text 7"/>
           <p:cNvSpPr txBox="1"/>
           <p:nvPr/>
         </p:nvSpPr>
         <p:spPr>
           <a:xfrm>
-            <a:off x="685800" y="4867351"/>
-            <a:ext cx="2834640" cy="274320"/>
+            <a:off x="868680" y="5193792"/>
+            <a:ext cx="10515600" cy="621792"/>
           </a:xfrm>
           <a:prstGeom prst="rect">
             <a:avLst/>
@@ -5394,98 +4686,18 @@
           <a:ln/>
         </p:spPr>
         <p:txBody>
-          <a:bodyPr wrap="square" rtlCol="0" anchor="ctr"/>
-          <a:lstStyle/>
-          <a:p>
-            <a:pPr indent="0" marL="0">
-              <a:buNone/>
+          <a:bodyPr wrap="square" rtlCol="0" anchor="t"/>
+          <a:lstStyle/>
+          <a:p>
+            <a:pPr marL="190500" indent="-190500">
+              <a:lnSpc>
+                <a:spcPct val="120000"/>
+              </a:lnSpc>
+              <a:buSzPct val="100000"/>
+              <a:buChar char="•"/>
             </a:pPr>
             <a:r>
-              <a:rPr lang="en-US" sz="1250" b="1" dirty="0">
-                <a:solidFill>
-                  <a:srgbClr val="1B7A43"/>
-                </a:solidFill>
-                <a:latin typeface="Microsoft YaHei" pitchFamily="34" charset="0"/>
-                <a:ea typeface="Microsoft YaHei" pitchFamily="34" charset="-122"/>
-                <a:cs typeface="Microsoft YaHei" pitchFamily="34" charset="-120"/>
-              </a:rPr>
-              <a:t>零值标尺</a:t>
-            </a:r>
-            <a:endParaRPr lang="en-US" sz="1250" dirty="0"/>
-          </a:p>
-        </p:txBody>
-      </p:sp>
-      <p:sp>
-        <p:nvSpPr>
-          <p:cNvPr id="15" name="Text 13"/>
-          <p:cNvSpPr txBox="1"/>
-          <p:nvPr/>
-        </p:nvSpPr>
-        <p:spPr>
-          <a:xfrm>
-            <a:off x="685800" y="5105095"/>
-            <a:ext cx="2834640" cy="548640"/>
-          </a:xfrm>
-          <a:prstGeom prst="rect">
-            <a:avLst/>
-          </a:prstGeom>
-          <a:noFill/>
-          <a:ln/>
-        </p:spPr>
-        <p:txBody>
-          <a:bodyPr wrap="square" rtlCol="0" anchor="t"/>
-          <a:lstStyle/>
-          <a:p>
-            <a:pPr indent="0" marL="0">
-              <a:lnSpc>
-                <a:spcPct val="112000"/>
-              </a:lnSpc>
-              <a:buNone/>
-            </a:pPr>
-            <a:r>
-              <a:rPr lang="en-US" sz="950" dirty="0">
-                <a:solidFill>
-                  <a:srgbClr val="6B6B6B"/>
-                </a:solidFill>
-                <a:latin typeface="Microsoft YaHei" pitchFamily="34" charset="0"/>
-                <a:ea typeface="Microsoft YaHei" pitchFamily="34" charset="-122"/>
-                <a:cs typeface="Microsoft YaHei" pitchFamily="34" charset="-120"/>
-              </a:rPr>
-              <a:t>判断「近零」的参照</a:t>
-            </a:r>
-            <a:endParaRPr lang="en-US" sz="950" dirty="0"/>
-          </a:p>
-        </p:txBody>
-      </p:sp>
-      <p:sp>
-        <p:nvSpPr>
-          <p:cNvPr id="16" name="Text 14"/>
-          <p:cNvSpPr txBox="1"/>
-          <p:nvPr/>
-        </p:nvSpPr>
-        <p:spPr>
-          <a:xfrm>
-            <a:off x="3063240" y="4835347"/>
-            <a:ext cx="8439912" cy="700430"/>
-          </a:xfrm>
-          <a:prstGeom prst="rect">
-            <a:avLst/>
-          </a:prstGeom>
-          <a:noFill/>
-          <a:ln/>
-        </p:spPr>
-        <p:txBody>
-          <a:bodyPr wrap="square" rtlCol="0" anchor="t"/>
-          <a:lstStyle/>
-          <a:p>
-            <a:pPr indent="0" marL="0">
-              <a:lnSpc>
-                <a:spcPct val="116000"/>
-              </a:lnSpc>
-              <a:buNone/>
-            </a:pPr>
-            <a:r>
-              <a:rPr lang="en-US" sz="1200" dirty="0">
+              <a:rPr lang="en-US" sz="1450" dirty="0">
                 <a:solidFill>
                   <a:srgbClr val="1A1A1A"/>
                 </a:solidFill>
@@ -5493,649 +4705,9 @@
                 <a:ea typeface="Microsoft YaHei" pitchFamily="34" charset="-122"/>
                 <a:cs typeface="Microsoft YaHei" pitchFamily="34" charset="-120"/>
               </a:rPr>
-              <a:t>静息小鼠小胶质 Casp1 约 50–61 CPM、17% 细胞；小鼠 CNS 内「髓系高」与零底线相差约 50 倍。阳性对照：同一分选、同一供体、同一建库下 L5a IT 锥体神经元 CASP1 = 8.34 CPM（25 个文库中 24 个非零）。</a:t>
-            </a:r>
-            <a:endParaRPr lang="en-US" sz="1200" dirty="0"/>
-          </a:p>
-        </p:txBody>
-      </p:sp>
-      <p:sp>
-        <p:nvSpPr>
-          <p:cNvPr id="17" name="Text 15"/>
-          <p:cNvSpPr txBox="1"/>
-          <p:nvPr/>
-        </p:nvSpPr>
-        <p:spPr>
-          <a:xfrm>
-            <a:off x="685800" y="5708599"/>
-            <a:ext cx="2834640" cy="274320"/>
-          </a:xfrm>
-          <a:prstGeom prst="rect">
-            <a:avLst/>
-          </a:prstGeom>
-          <a:noFill/>
-          <a:ln/>
-        </p:spPr>
-        <p:txBody>
-          <a:bodyPr wrap="square" rtlCol="0" anchor="ctr"/>
-          <a:lstStyle/>
-          <a:p>
-            <a:pPr indent="0" marL="0">
-              <a:buNone/>
-            </a:pPr>
-            <a:r>
-              <a:rPr lang="en-US" sz="1250" b="1" dirty="0">
-                <a:solidFill>
-                  <a:srgbClr val="6B6B6B"/>
-                </a:solidFill>
-                <a:latin typeface="Microsoft YaHei" pitchFamily="34" charset="0"/>
-                <a:ea typeface="Microsoft YaHei" pitchFamily="34" charset="-122"/>
-                <a:cs typeface="Microsoft YaHei" pitchFamily="34" charset="-120"/>
-              </a:rPr>
-              <a:t>后续测量</a:t>
-            </a:r>
-            <a:endParaRPr lang="en-US" sz="1250" dirty="0"/>
-          </a:p>
-        </p:txBody>
-      </p:sp>
-      <p:sp>
-        <p:nvSpPr>
-          <p:cNvPr id="18" name="Text 16"/>
-          <p:cNvSpPr txBox="1"/>
-          <p:nvPr/>
-        </p:nvSpPr>
-        <p:spPr>
-          <a:xfrm>
-            <a:off x="685800" y="5946343"/>
-            <a:ext cx="2834640" cy="548640"/>
-          </a:xfrm>
-          <a:prstGeom prst="rect">
-            <a:avLst/>
-          </a:prstGeom>
-          <a:noFill/>
-          <a:ln/>
-        </p:spPr>
-        <p:txBody>
-          <a:bodyPr wrap="square" rtlCol="0" anchor="t"/>
-          <a:lstStyle/>
-          <a:p>
-            <a:pPr indent="0" marL="0">
-              <a:lnSpc>
-                <a:spcPct val="112000"/>
-              </a:lnSpc>
-              <a:buNone/>
-            </a:pPr>
-            <a:r>
-              <a:rPr lang="en-US" sz="950" dirty="0">
-                <a:solidFill>
-                  <a:srgbClr val="6B6B6B"/>
-                </a:solidFill>
-                <a:latin typeface="Microsoft YaHei" pitchFamily="34" charset="0"/>
-                <a:ea typeface="Microsoft YaHei" pitchFamily="34" charset="-122"/>
-                <a:cs typeface="Microsoft YaHei" pitchFamily="34" charset="-120"/>
-              </a:rPr>
-              <a:t>将单一来源推进为多源一致所需</a:t>
-            </a:r>
-            <a:endParaRPr lang="en-US" sz="950" dirty="0"/>
-          </a:p>
-        </p:txBody>
-      </p:sp>
-      <p:sp>
-        <p:nvSpPr>
-          <p:cNvPr id="19" name="Text 17"/>
-          <p:cNvSpPr txBox="1"/>
-          <p:nvPr/>
-        </p:nvSpPr>
-        <p:spPr>
-          <a:xfrm>
-            <a:off x="3063240" y="5676595"/>
-            <a:ext cx="8439912" cy="488290"/>
-          </a:xfrm>
-          <a:prstGeom prst="rect">
-            <a:avLst/>
-          </a:prstGeom>
-          <a:noFill/>
-          <a:ln/>
-        </p:spPr>
-        <p:txBody>
-          <a:bodyPr wrap="square" rtlCol="0" anchor="t"/>
-          <a:lstStyle/>
-          <a:p>
-            <a:pPr indent="0" marL="0">
-              <a:lnSpc>
-                <a:spcPct val="116000"/>
-              </a:lnSpc>
-              <a:buNone/>
-            </a:pPr>
-            <a:r>
-              <a:rPr lang="en-US" sz="1200" dirty="0">
-                <a:solidFill>
-                  <a:srgbClr val="1A1A1A"/>
-                </a:solidFill>
-                <a:latin typeface="Microsoft YaHei" pitchFamily="34" charset="0"/>
-                <a:ea typeface="Microsoft YaHei" pitchFamily="34" charset="-122"/>
-                <a:cs typeface="Microsoft YaHei" pitchFamily="34" charset="-120"/>
-              </a:rPr>
-              <a:t>人肺肥大细胞、人肺 AT1、人胰腺腺泡各需一次新鲜原代分选后的 CASP1 定量；小鼠胰岛 δ 细胞需复核比值为 5.64 的分歧来源。</a:t>
-            </a:r>
-            <a:endParaRPr lang="en-US" sz="1200" dirty="0"/>
-          </a:p>
-        </p:txBody>
-      </p:sp>
-    </p:spTree>
-  </p:cSld>
-  <p:clrMapOvr>
-    <a:masterClrMapping/>
-  </p:clrMapOvr>
-</p:sld>
-</file>
-
-<file path=ppt/slides/slide16.xml><?xml version="1.0" encoding="utf-8"?>
-<p:sld xmlns:a="http://schemas.openxmlformats.org/drawingml/2006/main" xmlns:r="http://schemas.openxmlformats.org/officeDocument/2006/relationships" xmlns:p="http://schemas.openxmlformats.org/presentationml/2006/main">
-  <p:cSld name="Slide 16">
-    <p:spTree>
-      <p:nvGrpSpPr>
-        <p:cNvPr id="1" name=""/>
-        <p:cNvGrpSpPr/>
-        <p:nvPr/>
-      </p:nvGrpSpPr>
-      <p:grpSpPr>
-        <a:xfrm>
-          <a:off x="0" y="0"/>
-          <a:ext cx="0" cy="0"/>
-          <a:chOff x="0" y="0"/>
-          <a:chExt cx="0" cy="0"/>
-        </a:xfrm>
-      </p:grpSpPr>
-      <p:sp>
-        <p:nvSpPr>
-          <p:cNvPr id="2" name="Text 0"/>
-          <p:cNvSpPr txBox="1"/>
-          <p:nvPr/>
-        </p:nvSpPr>
-        <p:spPr>
-          <a:xfrm>
-            <a:off x="640080" y="365760"/>
-            <a:ext cx="10058400" cy="502920"/>
-          </a:xfrm>
-          <a:prstGeom prst="rect">
-            <a:avLst/>
-          </a:prstGeom>
-          <a:noFill/>
-          <a:ln/>
-        </p:spPr>
-        <p:txBody>
-          <a:bodyPr wrap="square" rtlCol="0" anchor="ctr"/>
-          <a:lstStyle/>
-          <a:p>
-            <a:pPr indent="0" marL="0">
-              <a:buNone/>
-            </a:pPr>
-            <a:r>
-              <a:rPr lang="en-US" sz="2600" b="1" dirty="0">
-                <a:solidFill>
-                  <a:srgbClr val="1A1A1A"/>
-                </a:solidFill>
-                <a:latin typeface="Microsoft YaHei" pitchFamily="34" charset="0"/>
-                <a:ea typeface="Microsoft YaHei" pitchFamily="34" charset="-122"/>
-                <a:cs typeface="Microsoft YaHei" pitchFamily="34" charset="-120"/>
-              </a:rPr>
-              <a:t>适用边界与阈值敏感性</a:t>
-            </a:r>
-            <a:endParaRPr lang="en-US" sz="2600" dirty="0"/>
-          </a:p>
-        </p:txBody>
-      </p:sp>
-      <p:sp>
-        <p:nvSpPr>
-          <p:cNvPr id="3" name="Text 1"/>
-          <p:cNvSpPr txBox="1"/>
-          <p:nvPr/>
-        </p:nvSpPr>
-        <p:spPr>
-          <a:xfrm>
-            <a:off x="685800" y="1115568"/>
-            <a:ext cx="2834640" cy="274320"/>
-          </a:xfrm>
-          <a:prstGeom prst="rect">
-            <a:avLst/>
-          </a:prstGeom>
-          <a:noFill/>
-          <a:ln/>
-        </p:spPr>
-        <p:txBody>
-          <a:bodyPr wrap="square" rtlCol="0" anchor="ctr"/>
-          <a:lstStyle/>
-          <a:p>
-            <a:pPr indent="0" marL="0">
-              <a:buNone/>
-            </a:pPr>
-            <a:r>
-              <a:rPr lang="en-US" sz="1250" b="1" dirty="0">
-                <a:solidFill>
-                  <a:srgbClr val="9A2B2B"/>
-                </a:solidFill>
-                <a:latin typeface="Microsoft YaHei" pitchFamily="34" charset="0"/>
-                <a:ea typeface="Microsoft YaHei" pitchFamily="34" charset="-122"/>
-                <a:cs typeface="Microsoft YaHei" pitchFamily="34" charset="-120"/>
-              </a:rPr>
-              <a:t>四条适用边界</a:t>
-            </a:r>
-            <a:endParaRPr lang="en-US" sz="1250" dirty="0"/>
-          </a:p>
-        </p:txBody>
-      </p:sp>
-      <p:sp>
-        <p:nvSpPr>
-          <p:cNvPr id="4" name="Text 2"/>
-          <p:cNvSpPr txBox="1"/>
-          <p:nvPr/>
-        </p:nvSpPr>
-        <p:spPr>
-          <a:xfrm>
-            <a:off x="685800" y="1353312"/>
-            <a:ext cx="2834640" cy="548640"/>
-          </a:xfrm>
-          <a:prstGeom prst="rect">
-            <a:avLst/>
-          </a:prstGeom>
-          <a:noFill/>
-          <a:ln/>
-        </p:spPr>
-        <p:txBody>
-          <a:bodyPr wrap="square" rtlCol="0" anchor="t"/>
-          <a:lstStyle/>
-          <a:p>
-            <a:pPr indent="0" marL="0">
-              <a:lnSpc>
-                <a:spcPct val="112000"/>
-              </a:lnSpc>
-              <a:buNone/>
-            </a:pPr>
-            <a:r>
-              <a:rPr lang="en-US" sz="950" dirty="0">
-                <a:solidFill>
-                  <a:srgbClr val="6B6B6B"/>
-                </a:solidFill>
-                <a:latin typeface="Microsoft YaHei" pitchFamily="34" charset="0"/>
-                <a:ea typeface="Microsoft YaHei" pitchFamily="34" charset="-122"/>
-                <a:cs typeface="Microsoft YaHei" pitchFamily="34" charset="-120"/>
-              </a:rPr>
-              <a:t>规格 §0.2</a:t>
-            </a:r>
-            <a:endParaRPr lang="en-US" sz="950" dirty="0"/>
-          </a:p>
-        </p:txBody>
-      </p:sp>
-      <p:sp>
-        <p:nvSpPr>
-          <p:cNvPr id="5" name="Text 3"/>
-          <p:cNvSpPr txBox="1"/>
-          <p:nvPr/>
-        </p:nvSpPr>
-        <p:spPr>
-          <a:xfrm>
-            <a:off x="3063240" y="1083564"/>
-            <a:ext cx="8439912" cy="488290"/>
-          </a:xfrm>
-          <a:prstGeom prst="rect">
-            <a:avLst/>
-          </a:prstGeom>
-          <a:noFill/>
-          <a:ln/>
-        </p:spPr>
-        <p:txBody>
-          <a:bodyPr wrap="square" rtlCol="0" anchor="t"/>
-          <a:lstStyle/>
-          <a:p>
-            <a:pPr indent="0" marL="0">
-              <a:lnSpc>
-                <a:spcPct val="116000"/>
-              </a:lnSpc>
-              <a:buNone/>
-            </a:pPr>
-            <a:r>
-              <a:rPr lang="en-US" sz="1200" dirty="0">
-                <a:solidFill>
-                  <a:srgbClr val="1A1A1A"/>
-                </a:solidFill>
-                <a:latin typeface="Microsoft YaHei" pitchFamily="34" charset="0"/>
-                <a:ea typeface="Microsoft YaHei" pitchFamily="34" charset="-122"/>
-                <a:cs typeface="Microsoft YaHei" pitchFamily="34" charset="-120"/>
-              </a:rPr>
-              <a:t>IL18 转录本为 pro-IL-18 的转录信号；pro-IL-18 属储备型蛋白，转录水平与细胞内前体储量不成线性关系。</a:t>
-            </a:r>
-            <a:endParaRPr lang="en-US" sz="1200" dirty="0"/>
-          </a:p>
-        </p:txBody>
-      </p:sp>
-      <p:sp>
-        <p:nvSpPr>
-          <p:cNvPr id="6" name="Text 4"/>
-          <p:cNvSpPr txBox="1"/>
-          <p:nvPr/>
-        </p:nvSpPr>
-        <p:spPr>
-          <a:xfrm>
-            <a:off x="3063240" y="1571854"/>
-            <a:ext cx="8439912" cy="488290"/>
-          </a:xfrm>
-          <a:prstGeom prst="rect">
-            <a:avLst/>
-          </a:prstGeom>
-          <a:noFill/>
-          <a:ln/>
-        </p:spPr>
-        <p:txBody>
-          <a:bodyPr wrap="square" rtlCol="0" anchor="t"/>
-          <a:lstStyle/>
-          <a:p>
-            <a:pPr indent="0" marL="0">
-              <a:lnSpc>
-                <a:spcPct val="116000"/>
-              </a:lnSpc>
-              <a:buNone/>
-            </a:pPr>
-            <a:r>
-              <a:rPr lang="en-US" sz="1200" dirty="0">
-                <a:solidFill>
-                  <a:srgbClr val="1A1A1A"/>
-                </a:solidFill>
-                <a:latin typeface="Microsoft YaHei" pitchFamily="34" charset="0"/>
-                <a:ea typeface="Microsoft YaHei" pitchFamily="34" charset="-122"/>
-                <a:cs typeface="Microsoft YaHei" pitchFamily="34" charset="-120"/>
-              </a:rPr>
-              <a:t>CASP1 为可诱导基因。本分析为静息基线筛选，静息态近零不预测刺激后能否诱导，该限制只能由带刺激条件的数据或实验解决。</a:t>
-            </a:r>
-            <a:endParaRPr lang="en-US" sz="1200" dirty="0"/>
-          </a:p>
-        </p:txBody>
-      </p:sp>
-      <p:sp>
-        <p:nvSpPr>
-          <p:cNvPr id="7" name="Text 5"/>
-          <p:cNvSpPr txBox="1"/>
-          <p:nvPr/>
-        </p:nvSpPr>
-        <p:spPr>
-          <a:xfrm>
-            <a:off x="3063240" y="2060143"/>
-            <a:ext cx="8439912" cy="488290"/>
-          </a:xfrm>
-          <a:prstGeom prst="rect">
-            <a:avLst/>
-          </a:prstGeom>
-          <a:noFill/>
-          <a:ln/>
-        </p:spPr>
-        <p:txBody>
-          <a:bodyPr wrap="square" rtlCol="0" anchor="t"/>
-          <a:lstStyle/>
-          <a:p>
-            <a:pPr indent="0" marL="0">
-              <a:lnSpc>
-                <a:spcPct val="116000"/>
-              </a:lnSpc>
-              <a:buNone/>
-            </a:pPr>
-            <a:r>
-              <a:rPr lang="en-US" sz="1200" dirty="0">
-                <a:solidFill>
-                  <a:srgbClr val="1A1A1A"/>
-                </a:solidFill>
-                <a:latin typeface="Microsoft YaHei" pitchFamily="34" charset="0"/>
-                <a:ea typeface="Microsoft YaHei" pitchFamily="34" charset="-122"/>
-                <a:cs typeface="Microsoft YaHei" pitchFamily="34" charset="-120"/>
-              </a:rPr>
-              <a:t>CASP3 的 mRNA 不反映 caspase-3 酶活性（酶原活化与 XIAP 抑制均发生于转录后）。本分析仅用其排除最低档，不构成三重阳性门。</a:t>
-            </a:r>
-            <a:endParaRPr lang="en-US" sz="1200" dirty="0"/>
-          </a:p>
-        </p:txBody>
-      </p:sp>
-      <p:sp>
-        <p:nvSpPr>
-          <p:cNvPr id="8" name="Text 6"/>
-          <p:cNvSpPr txBox="1"/>
-          <p:nvPr/>
-        </p:nvSpPr>
-        <p:spPr>
-          <a:xfrm>
-            <a:off x="3063240" y="2548433"/>
-            <a:ext cx="8439912" cy="700430"/>
-          </a:xfrm>
-          <a:prstGeom prst="rect">
-            <a:avLst/>
-          </a:prstGeom>
-          <a:noFill/>
-          <a:ln/>
-        </p:spPr>
-        <p:txBody>
-          <a:bodyPr wrap="square" rtlCol="0" anchor="t"/>
-          <a:lstStyle/>
-          <a:p>
-            <a:pPr indent="0" marL="0">
-              <a:lnSpc>
-                <a:spcPct val="116000"/>
-              </a:lnSpc>
-              <a:buNone/>
-            </a:pPr>
-            <a:r>
-              <a:rPr lang="en-US" sz="1200" dirty="0">
-                <a:solidFill>
-                  <a:srgbClr val="1A1A1A"/>
-                </a:solidFill>
-                <a:latin typeface="Microsoft YaHei" pitchFamily="34" charset="0"/>
-                <a:ea typeface="Microsoft YaHei" pitchFamily="34" charset="-122"/>
-                <a:cs typeface="Microsoft YaHei" pitchFamily="34" charset="-120"/>
-              </a:rPr>
-              <a:t>未做环境 RNA 校正；物种之间、数据集之间、单核与单细胞之间仅比较候选名单，不比较数值。小鼠星形胶质的结论仅覆盖皮层与海马：小脑 Bergmann 胶质 22.4 CPM、脊髓星形胶质 12.5–16.7 CPM 均测到 Casp1。</a:t>
-            </a:r>
-            <a:endParaRPr lang="en-US" sz="1200" dirty="0"/>
-          </a:p>
-        </p:txBody>
-      </p:sp>
-      <p:sp>
-        <p:nvSpPr>
-          <p:cNvPr id="9" name="Text 7"/>
-          <p:cNvSpPr txBox="1"/>
-          <p:nvPr/>
-        </p:nvSpPr>
-        <p:spPr>
-          <a:xfrm>
-            <a:off x="685800" y="3413455"/>
-            <a:ext cx="2834640" cy="274320"/>
-          </a:xfrm>
-          <a:prstGeom prst="rect">
-            <a:avLst/>
-          </a:prstGeom>
-          <a:noFill/>
-          <a:ln/>
-        </p:spPr>
-        <p:txBody>
-          <a:bodyPr wrap="square" rtlCol="0" anchor="ctr"/>
-          <a:lstStyle/>
-          <a:p>
-            <a:pPr indent="0" marL="0">
-              <a:buNone/>
-            </a:pPr>
-            <a:r>
-              <a:rPr lang="en-US" sz="1250" b="1" dirty="0">
-                <a:solidFill>
-                  <a:srgbClr val="6B6B6B"/>
-                </a:solidFill>
-                <a:latin typeface="Microsoft YaHei" pitchFamily="34" charset="0"/>
-                <a:ea typeface="Microsoft YaHei" pitchFamily="34" charset="-122"/>
-                <a:cs typeface="Microsoft YaHei" pitchFamily="34" charset="-120"/>
-              </a:rPr>
-              <a:t>阈值敏感性</a:t>
-            </a:r>
-            <a:endParaRPr lang="en-US" sz="1250" dirty="0"/>
-          </a:p>
-        </p:txBody>
-      </p:sp>
-      <p:sp>
-        <p:nvSpPr>
-          <p:cNvPr id="10" name="Text 8"/>
-          <p:cNvSpPr txBox="1"/>
-          <p:nvPr/>
-        </p:nvSpPr>
-        <p:spPr>
-          <a:xfrm>
-            <a:off x="685800" y="3651199"/>
-            <a:ext cx="2834640" cy="548640"/>
-          </a:xfrm>
-          <a:prstGeom prst="rect">
-            <a:avLst/>
-          </a:prstGeom>
-          <a:noFill/>
-          <a:ln/>
-        </p:spPr>
-        <p:txBody>
-          <a:bodyPr wrap="square" rtlCol="0" anchor="t"/>
-          <a:lstStyle/>
-          <a:p>
-            <a:pPr indent="0" marL="0">
-              <a:lnSpc>
-                <a:spcPct val="112000"/>
-              </a:lnSpc>
-              <a:buNone/>
-            </a:pPr>
-            <a:r>
-              <a:rPr lang="en-US" sz="950" dirty="0">
-                <a:solidFill>
-                  <a:srgbClr val="6B6B6B"/>
-                </a:solidFill>
-                <a:latin typeface="Microsoft YaHei" pitchFamily="34" charset="0"/>
-                <a:ea typeface="Microsoft YaHei" pitchFamily="34" charset="-122"/>
-                <a:cs typeface="Microsoft YaHei" pitchFamily="34" charset="-120"/>
-              </a:rPr>
-              <a:t>§9.6</a:t>
-            </a:r>
-            <a:endParaRPr lang="en-US" sz="950" dirty="0"/>
-          </a:p>
-        </p:txBody>
-      </p:sp>
-      <p:sp>
-        <p:nvSpPr>
-          <p:cNvPr id="11" name="Text 9"/>
-          <p:cNvSpPr txBox="1"/>
-          <p:nvPr/>
-        </p:nvSpPr>
-        <p:spPr>
-          <a:xfrm>
-            <a:off x="3063240" y="3381451"/>
-            <a:ext cx="8439912" cy="488290"/>
-          </a:xfrm>
-          <a:prstGeom prst="rect">
-            <a:avLst/>
-          </a:prstGeom>
-          <a:noFill/>
-          <a:ln/>
-        </p:spPr>
-        <p:txBody>
-          <a:bodyPr wrap="square" rtlCol="0" anchor="t"/>
-          <a:lstStyle/>
-          <a:p>
-            <a:pPr indent="0" marL="0">
-              <a:lnSpc>
-                <a:spcPct val="116000"/>
-              </a:lnSpc>
-              <a:buNone/>
-            </a:pPr>
-            <a:r>
-              <a:rPr lang="en-US" sz="1200" dirty="0">
-                <a:solidFill>
-                  <a:srgbClr val="1A1A1A"/>
-                </a:solidFill>
-                <a:latin typeface="Microsoft YaHei" pitchFamily="34" charset="0"/>
-                <a:ea typeface="Microsoft YaHei" pitchFamily="34" charset="-122"/>
-                <a:cs typeface="Microsoft YaHei" pitchFamily="34" charset="-120"/>
-              </a:rPr>
-              <a:t>三分位与「CASP3 最低 20%」为工程取值，无生物学依据。改用四分位后候选数由 17 降至 12；CASP3 下限改为 10% 与 30% 时分别为 17 与 16。</a:t>
-            </a:r>
-            <a:endParaRPr lang="en-US" sz="1200" dirty="0"/>
-          </a:p>
-        </p:txBody>
-      </p:sp>
-      <p:sp>
-        <p:nvSpPr>
-          <p:cNvPr id="12" name="Text 10"/>
-          <p:cNvSpPr txBox="1"/>
-          <p:nvPr/>
-        </p:nvSpPr>
-        <p:spPr>
-          <a:xfrm>
-            <a:off x="685800" y="4254703"/>
-            <a:ext cx="2834640" cy="274320"/>
-          </a:xfrm>
-          <a:prstGeom prst="rect">
-            <a:avLst/>
-          </a:prstGeom>
-          <a:noFill/>
-          <a:ln/>
-        </p:spPr>
-        <p:txBody>
-          <a:bodyPr wrap="square" rtlCol="0" anchor="ctr"/>
-          <a:lstStyle/>
-          <a:p>
-            <a:pPr indent="0" marL="0">
-              <a:buNone/>
-            </a:pPr>
-            <a:r>
-              <a:rPr lang="en-US" sz="1250" b="1" dirty="0">
-                <a:solidFill>
-                  <a:srgbClr val="6B6B6B"/>
-                </a:solidFill>
-                <a:latin typeface="Microsoft YaHei" pitchFamily="34" charset="0"/>
-                <a:ea typeface="Microsoft YaHei" pitchFamily="34" charset="-122"/>
-                <a:cs typeface="Microsoft YaHei" pitchFamily="34" charset="-120"/>
-              </a:rPr>
-              <a:t>用途</a:t>
-            </a:r>
-            <a:endParaRPr lang="en-US" sz="1250" dirty="0"/>
-          </a:p>
-        </p:txBody>
-      </p:sp>
-      <p:sp>
-        <p:nvSpPr>
-          <p:cNvPr id="13" name="Text 11"/>
-          <p:cNvSpPr txBox="1"/>
-          <p:nvPr/>
-        </p:nvSpPr>
-        <p:spPr>
-          <a:xfrm>
-            <a:off x="3063240" y="4222699"/>
-            <a:ext cx="8439912" cy="488290"/>
-          </a:xfrm>
-          <a:prstGeom prst="rect">
-            <a:avLst/>
-          </a:prstGeom>
-          <a:noFill/>
-          <a:ln/>
-        </p:spPr>
-        <p:txBody>
-          <a:bodyPr wrap="square" rtlCol="0" anchor="t"/>
-          <a:lstStyle/>
-          <a:p>
-            <a:pPr indent="0" marL="0">
-              <a:lnSpc>
-                <a:spcPct val="116000"/>
-              </a:lnSpc>
-              <a:buNone/>
-            </a:pPr>
-            <a:r>
-              <a:rPr lang="en-US" sz="1200" dirty="0">
-                <a:solidFill>
-                  <a:srgbClr val="1A1A1A"/>
-                </a:solidFill>
-                <a:latin typeface="Microsoft YaHei" pitchFamily="34" charset="0"/>
-                <a:ea typeface="Microsoft YaHei" pitchFamily="34" charset="-122"/>
-                <a:cs typeface="Microsoft YaHei" pitchFamily="34" charset="-120"/>
-              </a:rPr>
-              <a:t>本名单用于为蛋白与功能层面的验证排定器官与细胞类型的优先级。列入名单不表示 pro-IL-18 确被加工，未列入亦不表示不会。</a:t>
-            </a:r>
-            <a:endParaRPr lang="en-US" sz="1200" dirty="0"/>
+              <a:t>待补测量：人肺肥大细胞、人肺 AT1、人胰腺腺泡各需一次原代分选后的 CASP1 定量；小鼠胰岛 δ 细胞需复核比值 5.64 的分歧来源。</a:t>
+            </a:r>
+            <a:endParaRPr lang="en-US" sz="1450" dirty="0"/>
           </a:p>
         </p:txBody>
       </p:sp>
@@ -6263,7 +4835,7 @@
                 <a:ea typeface="Microsoft YaHei" pitchFamily="34" charset="-122"/>
                 <a:cs typeface="Microsoft YaHei" pitchFamily="34" charset="-120"/>
               </a:rPr>
-              <a:t>每行一个细胞类型：实心点 = IL18，空心点 = CASP1，两点距离即差距；同一细胞类型在多个数据集重复时取供体最多的一套，右侧标 ×n。</a:t>
+              <a:t>实心点 = IL18，空心点 = CASP1。同一细胞类型在多个数据集重复时取供体最多的一套。</a:t>
             </a:r>
             <a:endParaRPr lang="en-US" sz="1050" dirty="0"/>
           </a:p>
@@ -6523,7 +5095,7 @@
                 <a:ea typeface="Microsoft YaHei" pitchFamily="34" charset="-122"/>
                 <a:cs typeface="Microsoft YaHei" pitchFamily="34" charset="-120"/>
               </a:rPr>
-              <a:t>肥大细胞 IL18 34.9% 而 CASP1 2.60%（138/5299），是人肺唯一两项都成立的一档。IL18 最高的三类反而不符合：CD1c+ 树突状 52.8% 对 CASP1 32.3%、间皮 51.8% 对 18.3%、肺泡巨噬 50.7% 对 57.9%。该分层 39 个细胞类型，本页按 IL18 取前 20。</a:t>
+              <a:t>肥大细胞是人肺唯一两项都成立的一档；IL18 最高的三类 CASP1 同样高。</a:t>
             </a:r>
             <a:endParaRPr lang="en-US" sz="1050" dirty="0"/>
           </a:p>
@@ -6653,7 +5225,7 @@
                 <a:ea typeface="Microsoft YaHei" pitchFamily="34" charset="-122"/>
                 <a:cs typeface="Microsoft YaHei" pitchFamily="34" charset="-120"/>
               </a:rPr>
-              <a:t>11 个细胞类型无一符合。IL18 最高的巨噬 53.1% 对 CASP1 38.5%，浆细胞样树突状 37.7% 对 42.8%，单核 20.9% 对 52.3%——肝的 IL18 信号集中在髓系，而髓系正是 CASP1 最高的一类。</a:t>
+              <a:t>11 类无一符合。肝的 IL18 集中在髓系，而髓系的 CASP1 最高。</a:t>
             </a:r>
             <a:endParaRPr lang="en-US" sz="1050" dirty="0"/>
           </a:p>
@@ -6783,7 +5355,7 @@
                 <a:ea typeface="Microsoft YaHei" pitchFamily="34" charset="-122"/>
                 <a:cs typeface="Microsoft YaHei" pitchFamily="34" charset="-120"/>
               </a:rPr>
-              <a:t>胰腺腺泡细胞 IL18 30.3%（1301/4288）而 CASP1 3.45%，是人胰唯一方向相符者，且被分层内相对规则漏掉、由参考层补回。同页肥大细胞 IL18 34.9% 但此分层 CASP1 10.4%，与人肺的肥大细胞不是同一回事。</a:t>
+              <a:t>胰腺腺泡细胞 IL18 30.3%、CASP1 3.45%，人胰唯一方向相符者。</a:t>
             </a:r>
             <a:endParaRPr lang="en-US" sz="1050" dirty="0"/>
           </a:p>
@@ -6913,7 +5485,7 @@
                 <a:ea typeface="Microsoft YaHei" pitchFamily="34" charset="-122"/>
                 <a:cs typeface="Microsoft YaHei" pitchFamily="34" charset="-120"/>
               </a:rPr>
-              <a:t>78 供体真单细胞，该分层全部 18 类一律列出。PV 与 L5 ET 的 CASP1 近零而 CASP3 为 27.9% 与 34.3%，即不满足「CASP3 最低档」这一排除项。</a:t>
+              <a:t>PV 与 L5 ET 的 CASP1 近零，CASP3 为 27.9% 与 34.3%，不在最低档。</a:t>
             </a:r>
             <a:endParaRPr lang="en-US" sz="1050" dirty="0"/>
           </a:p>
@@ -7043,7 +5615,7 @@
                 <a:ea typeface="Microsoft YaHei" pitchFamily="34" charset="-122"/>
                 <a:cs typeface="Microsoft YaHei" pitchFamily="34" charset="-120"/>
               </a:rPr>
-              <a:t>11 类全部不符合：小胶质 IL18 52.3% 但 CASP1 11.8%（215/1829），其余 10 类 IL18 均 ≤3.2%。人脊髓白质在转录本层面是明确的否定，不是「数据不足」。</a:t>
+              <a:t>小胶质 IL18 52.3% 但 CASP1 11.8%，其余 10 类 IL18 均 ≤3.2%。</a:t>
             </a:r>
             <a:endParaRPr lang="en-US" sz="1050" dirty="0"/>
           </a:p>
@@ -7173,7 +5745,7 @@
                 <a:ea typeface="Microsoft YaHei" pitchFamily="34" charset="-122"/>
                 <a:cs typeface="Microsoft YaHei" pitchFamily="34" charset="-120"/>
               </a:rPr>
-              <a:t>肺泡巨噬 IL18 71.6% 为全器官最高，但 CASP1 13.3%（178/1341），参考层亦确认可测，判为不符合；其余 16 类 IL18 均 ≤18.5%。</a:t>
+              <a:t>肺泡巨噬 IL18 71.6% 全器官最高，CASP1 13.3%，参考层确认可测。</a:t>
             </a:r>
             <a:endParaRPr lang="en-US" sz="1050" dirty="0"/>
           </a:p>

--- a/il18_casp5organ/IL18_CASP_五器官筛选.pptx
+++ b/il18_casp5organ/IL18_CASP_五器官筛选.pptx
@@ -19,10 +19,9 @@
     <p:sldId id="267" r:id="rId13"/>
     <p:sldId id="268" r:id="rId14"/>
     <p:sldId id="269" r:id="rId15"/>
-    <p:sldId id="270" r:id="rId16"/>
   </p:sldIdLst>
   <p:notesMasterIdLst>
-    <p:notesMasterId r:id="rId17"/>
+    <p:notesMasterId r:id="rId16"/>
   </p:notesMasterIdLst>
   <p:sldSz cx="12192000" cy="6858000"/>
   <p:notesSz cx="6858000" cy="12192000"/>
@@ -980,94 +979,6 @@
             <a:fld id="{F7021451-1387-4CA6-816F-3879F97B5CBC}" type="slidenum">
               <a:rPr lang="en-US"/>
               <a:t>14</a:t>
-            </a:fld>
-            <a:endParaRPr lang="en-US"/>
-          </a:p>
-        </p:txBody>
-      </p:sp>
-    </p:spTree>
-    <p:extLst>
-      <p:ext uri="{BB962C8B-B14F-4D97-AF65-F5344CB8AC3E}">
-        <p14:creationId xmlns:p14="http://schemas.microsoft.com/office/powerpoint/2010/main" val="1024086991"/>
-      </p:ext>
-    </p:extLst>
-  </p:cSld>
-  <p:clrMapOvr>
-    <a:masterClrMapping/>
-  </p:clrMapOvr>
-</p:notes>
-</file>
-
-<file path=ppt/notesSlides/notesSlide15.xml><?xml version="1.0" encoding="utf-8"?>
-<p:notes xmlns:a="http://schemas.openxmlformats.org/drawingml/2006/main" xmlns:r="http://schemas.openxmlformats.org/officeDocument/2006/relationships" xmlns:p="http://schemas.openxmlformats.org/presentationml/2006/main">
-  <p:cSld>
-    <p:spTree>
-      <p:nvGrpSpPr>
-        <p:cNvPr id="1" name=""/>
-        <p:cNvGrpSpPr/>
-        <p:nvPr/>
-      </p:nvGrpSpPr>
-      <p:grpSpPr>
-        <a:xfrm>
-          <a:off x="0" y="0"/>
-          <a:ext cx="0" cy="0"/>
-          <a:chOff x="0" y="0"/>
-          <a:chExt cx="0" cy="0"/>
-        </a:xfrm>
-      </p:grpSpPr>
-      <p:sp>
-        <p:nvSpPr>
-          <p:cNvPr id="2" name="Slide Image Placeholder 1"/>
-          <p:cNvSpPr>
-            <a:spLocks noGrp="1" noRot="1" noChangeAspect="1"/>
-          </p:cNvSpPr>
-          <p:nvPr>
-            <p:ph type="sldImg"/>
-          </p:nvPr>
-        </p:nvSpPr>
-        <p:spPr/>
-      </p:sp>
-      <p:sp>
-        <p:nvSpPr>
-          <p:cNvPr id="3" name="Notes Placeholder 2"/>
-          <p:cNvSpPr>
-            <a:spLocks noGrp="1"/>
-          </p:cNvSpPr>
-          <p:nvPr>
-            <p:ph type="body" idx="1"/>
-          </p:nvPr>
-        </p:nvSpPr>
-        <p:spPr/>
-        <p:txBody>
-          <a:bodyPr/>
-          <a:lstStyle/>
-          <a:p>
-            <a:r>
-              <a:rPr lang="en-US" dirty="0"/>
-              <a:t/>
-            </a:r>
-            <a:endParaRPr lang="en-US" dirty="0"/>
-          </a:p>
-        </p:txBody>
-      </p:sp>
-      <p:sp>
-        <p:nvSpPr>
-          <p:cNvPr id="4" name="Slide Number Placeholder 3"/>
-          <p:cNvSpPr>
-            <a:spLocks noGrp="1"/>
-          </p:cNvSpPr>
-          <p:nvPr>
-            <p:ph type="sldNum" sz="quarter" idx="10"/>
-          </p:nvPr>
-        </p:nvSpPr>
-        <p:spPr/>
-        <p:txBody>
-          <a:bodyPr/>
-          <a:lstStyle/>
-          <a:p>
-            <a:fld id="{F7021451-1387-4CA6-816F-3879F97B5CBC}" type="slidenum">
-              <a:rPr lang="en-US"/>
-              <a:t>15</a:t>
             </a:fld>
             <a:endParaRPr lang="en-US"/>
           </a:p>
@@ -2147,7 +2058,7 @@
                 <a:ea typeface="Microsoft YaHei" pitchFamily="34" charset="-122"/>
                 <a:cs typeface="Microsoft YaHei" pitchFamily="34" charset="-120"/>
               </a:rPr>
-              <a:t>关于「短 IL-18」：转录本层面是明确的否定</a:t>
+              <a:t>查阅的数据库</a:t>
             </a:r>
             <a:endParaRPr lang="en-US" sz="2400" dirty="0"/>
           </a:p>
@@ -2161,914 +2072,8 @@
         </p:nvSpPr>
         <p:spPr>
           <a:xfrm>
-            <a:off x="731520" y="1234440"/>
-            <a:ext cx="10698480" cy="411480"/>
-          </a:xfrm>
-          <a:prstGeom prst="rect">
-            <a:avLst/>
-          </a:prstGeom>
-          <a:noFill/>
-          <a:ln/>
-        </p:spPr>
-        <p:txBody>
-          <a:bodyPr wrap="square" rtlCol="0" anchor="ctr"/>
-          <a:lstStyle/>
-          <a:p>
-            <a:pPr indent="0" marL="0">
-              <a:buNone/>
-            </a:pPr>
-            <a:r>
-              <a:rPr lang="en-US" sz="1700" b="1" dirty="0">
-                <a:solidFill>
-                  <a:srgbClr val="9A2B2B"/>
-                </a:solidFill>
-                <a:latin typeface="Microsoft YaHei" pitchFamily="34" charset="0"/>
-                <a:ea typeface="Microsoft YaHei" pitchFamily="34" charset="-122"/>
-                <a:cs typeface="Microsoft YaHei" pitchFamily="34" charset="-120"/>
-              </a:rPr>
-              <a:t>人任何正常组织、任何正常细胞类型都不显著使用短 IL18 转录本。</a:t>
-            </a:r>
-            <a:endParaRPr lang="en-US" sz="1700" dirty="0"/>
-          </a:p>
-        </p:txBody>
-      </p:sp>
-      <p:graphicFrame>
-        <p:nvGraphicFramePr>
-          <p:cNvPr id="2" name="Table 0"/>
-          <p:cNvGraphicFramePr>
-            <a:graphicFrameLocks noGrp="1"/>
-          </p:cNvGraphicFramePr>
-          <p:nvPr>
-            <p:extLst>
-              <p:ext uri="{D42A27DB-BD31-4B8C-83A1-F6EECF244321}">
-                <p14:modId xmlns:p14="http://schemas.microsoft.com/office/powerpoint/2010/main" val="1579011935"/>
-              </p:ext>
-            </p:extLst>
-          </p:nvPr>
-        </p:nvGraphicFramePr>
-        <p:xfrm>
-          <a:off x="731520" y="1874520"/>
-          <a:ext cx="10698480" cy="914400"/>
-        </p:xfrm>
-        <a:graphic>
-          <a:graphicData uri="http://schemas.openxmlformats.org/drawingml/2006/table">
-            <a:tbl>
-              <a:tblPr/>
-              <a:tblGrid>
-                <a:gridCol w="2743200"/>
-                <a:gridCol w="5852160"/>
-                <a:gridCol w="2103120"/>
-              </a:tblGrid>
-              <a:tr h="402336">
-                <a:tc>
-                  <a:txBody>
-                    <a:bodyPr/>
-                    <a:lstStyle/>
-                    <a:p>
-                      <a:pPr indent="0" marL="0">
-                        <a:buNone/>
-                      </a:pPr>
-                      <a:r>
-                        <a:rPr lang="en-US" sz="1300" b="1" dirty="0">
-                          <a:solidFill>
-                            <a:srgbClr val="1A1A1A"/>
-                          </a:solidFill>
-                          <a:latin typeface="Microsoft YaHei" pitchFamily="34" charset="0"/>
-                          <a:ea typeface="Microsoft YaHei" pitchFamily="34" charset="-122"/>
-                          <a:cs typeface="Microsoft YaHei" pitchFamily="34" charset="-120"/>
-                        </a:rPr>
-                        <a:t>数据源</a:t>
-                      </a:r>
-                      <a:endParaRPr lang="en-US" sz="1300" dirty="0">
-                        <a:latin typeface="Microsoft YaHei" charset="0"/>
-                        <a:ea typeface="Microsoft YaHei" charset="0"/>
-                        <a:cs typeface="Microsoft YaHei" charset="0"/>
-                      </a:endParaRPr>
-                    </a:p>
-                  </a:txBody>
-                  <a:tcPr marL="91440" marR="91440" marT="45720" marB="45720" anchor="ctr">
-                    <a:lnL w="6350" cap="flat" cmpd="sng" algn="ctr">
-                      <a:solidFill>
-                        <a:srgbClr val="D8DBE0"/>
-                      </a:solidFill>
-                      <a:prstDash val="solid"/>
-                      <a:round/>
-                      <a:headEnd type="none" w="med" len="med"/>
-                      <a:tailEnd type="none" w="med" len="med"/>
-                    </a:lnL>
-                    <a:lnR w="6350" cap="flat" cmpd="sng" algn="ctr">
-                      <a:solidFill>
-                        <a:srgbClr val="D8DBE0"/>
-                      </a:solidFill>
-                      <a:prstDash val="solid"/>
-                      <a:round/>
-                      <a:headEnd type="none" w="med" len="med"/>
-                      <a:tailEnd type="none" w="med" len="med"/>
-                    </a:lnR>
-                    <a:lnT w="6350" cap="flat" cmpd="sng" algn="ctr">
-                      <a:solidFill>
-                        <a:srgbClr val="D8DBE0"/>
-                      </a:solidFill>
-                      <a:prstDash val="solid"/>
-                      <a:round/>
-                      <a:headEnd type="none" w="med" len="med"/>
-                      <a:tailEnd type="none" w="med" len="med"/>
-                    </a:lnT>
-                    <a:lnB w="6350" cap="flat" cmpd="sng" algn="ctr">
-                      <a:solidFill>
-                        <a:srgbClr val="D8DBE0"/>
-                      </a:solidFill>
-                      <a:prstDash val="solid"/>
-                      <a:round/>
-                      <a:headEnd type="none" w="med" len="med"/>
-                      <a:tailEnd type="none" w="med" len="med"/>
-                    </a:lnB>
-                    <a:solidFill>
-                      <a:srgbClr val="EEF1F5"/>
-                    </a:solidFill>
-                  </a:tcPr>
-                </a:tc>
-                <a:tc>
-                  <a:txBody>
-                    <a:bodyPr/>
-                    <a:lstStyle/>
-                    <a:p>
-                      <a:pPr indent="0" marL="0">
-                        <a:buNone/>
-                      </a:pPr>
-                      <a:r>
-                        <a:rPr lang="en-US" sz="1300" b="1" dirty="0">
-                          <a:solidFill>
-                            <a:srgbClr val="1A1A1A"/>
-                          </a:solidFill>
-                          <a:latin typeface="Microsoft YaHei" pitchFamily="34" charset="0"/>
-                          <a:ea typeface="Microsoft YaHei" pitchFamily="34" charset="-122"/>
-                          <a:cs typeface="Microsoft YaHei" pitchFamily="34" charset="-120"/>
-                        </a:rPr>
-                        <a:t>内容</a:t>
-                      </a:r>
-                      <a:endParaRPr lang="en-US" sz="1300" dirty="0">
-                        <a:latin typeface="Microsoft YaHei" charset="0"/>
-                        <a:ea typeface="Microsoft YaHei" charset="0"/>
-                        <a:cs typeface="Microsoft YaHei" charset="0"/>
-                      </a:endParaRPr>
-                    </a:p>
-                  </a:txBody>
-                  <a:tcPr marL="91440" marR="91440" marT="45720" marB="45720" anchor="ctr">
-                    <a:lnL w="6350" cap="flat" cmpd="sng" algn="ctr">
-                      <a:solidFill>
-                        <a:srgbClr val="D8DBE0"/>
-                      </a:solidFill>
-                      <a:prstDash val="solid"/>
-                      <a:round/>
-                      <a:headEnd type="none" w="med" len="med"/>
-                      <a:tailEnd type="none" w="med" len="med"/>
-                    </a:lnL>
-                    <a:lnR w="6350" cap="flat" cmpd="sng" algn="ctr">
-                      <a:solidFill>
-                        <a:srgbClr val="D8DBE0"/>
-                      </a:solidFill>
-                      <a:prstDash val="solid"/>
-                      <a:round/>
-                      <a:headEnd type="none" w="med" len="med"/>
-                      <a:tailEnd type="none" w="med" len="med"/>
-                    </a:lnR>
-                    <a:lnT w="6350" cap="flat" cmpd="sng" algn="ctr">
-                      <a:solidFill>
-                        <a:srgbClr val="D8DBE0"/>
-                      </a:solidFill>
-                      <a:prstDash val="solid"/>
-                      <a:round/>
-                      <a:headEnd type="none" w="med" len="med"/>
-                      <a:tailEnd type="none" w="med" len="med"/>
-                    </a:lnT>
-                    <a:lnB w="6350" cap="flat" cmpd="sng" algn="ctr">
-                      <a:solidFill>
-                        <a:srgbClr val="D8DBE0"/>
-                      </a:solidFill>
-                      <a:prstDash val="solid"/>
-                      <a:round/>
-                      <a:headEnd type="none" w="med" len="med"/>
-                      <a:tailEnd type="none" w="med" len="med"/>
-                    </a:lnB>
-                    <a:solidFill>
-                      <a:srgbClr val="EEF1F5"/>
-                    </a:solidFill>
-                  </a:tcPr>
-                </a:tc>
-                <a:tc>
-                  <a:txBody>
-                    <a:bodyPr/>
-                    <a:lstStyle/>
-                    <a:p>
-                      <a:pPr indent="0" marL="0">
-                        <a:buNone/>
-                      </a:pPr>
-                      <a:r>
-                        <a:rPr lang="en-US" sz="1300" b="1" dirty="0">
-                          <a:solidFill>
-                            <a:srgbClr val="1A1A1A"/>
-                          </a:solidFill>
-                          <a:latin typeface="Microsoft YaHei" pitchFamily="34" charset="0"/>
-                          <a:ea typeface="Microsoft YaHei" pitchFamily="34" charset="-122"/>
-                          <a:cs typeface="Microsoft YaHei" pitchFamily="34" charset="-120"/>
-                        </a:rPr>
-                        <a:t>短异构体占比</a:t>
-                      </a:r>
-                      <a:endParaRPr lang="en-US" sz="1300" dirty="0">
-                        <a:latin typeface="Microsoft YaHei" charset="0"/>
-                        <a:ea typeface="Microsoft YaHei" charset="0"/>
-                        <a:cs typeface="Microsoft YaHei" charset="0"/>
-                      </a:endParaRPr>
-                    </a:p>
-                  </a:txBody>
-                  <a:tcPr marL="91440" marR="91440" marT="45720" marB="45720" anchor="ctr">
-                    <a:lnL w="6350" cap="flat" cmpd="sng" algn="ctr">
-                      <a:solidFill>
-                        <a:srgbClr val="D8DBE0"/>
-                      </a:solidFill>
-                      <a:prstDash val="solid"/>
-                      <a:round/>
-                      <a:headEnd type="none" w="med" len="med"/>
-                      <a:tailEnd type="none" w="med" len="med"/>
-                    </a:lnL>
-                    <a:lnR w="6350" cap="flat" cmpd="sng" algn="ctr">
-                      <a:solidFill>
-                        <a:srgbClr val="D8DBE0"/>
-                      </a:solidFill>
-                      <a:prstDash val="solid"/>
-                      <a:round/>
-                      <a:headEnd type="none" w="med" len="med"/>
-                      <a:tailEnd type="none" w="med" len="med"/>
-                    </a:lnR>
-                    <a:lnT w="6350" cap="flat" cmpd="sng" algn="ctr">
-                      <a:solidFill>
-                        <a:srgbClr val="D8DBE0"/>
-                      </a:solidFill>
-                      <a:prstDash val="solid"/>
-                      <a:round/>
-                      <a:headEnd type="none" w="med" len="med"/>
-                      <a:tailEnd type="none" w="med" len="med"/>
-                    </a:lnT>
-                    <a:lnB w="6350" cap="flat" cmpd="sng" algn="ctr">
-                      <a:solidFill>
-                        <a:srgbClr val="D8DBE0"/>
-                      </a:solidFill>
-                      <a:prstDash val="solid"/>
-                      <a:round/>
-                      <a:headEnd type="none" w="med" len="med"/>
-                      <a:tailEnd type="none" w="med" len="med"/>
-                    </a:lnB>
-                    <a:solidFill>
-                      <a:srgbClr val="EEF1F5"/>
-                    </a:solidFill>
-                  </a:tcPr>
-                </a:tc>
-              </a:tr>
-              <a:tr h="402336">
-                <a:tc>
-                  <a:txBody>
-                    <a:bodyPr/>
-                    <a:lstStyle/>
-                    <a:p>
-                      <a:pPr indent="0" marL="0">
-                        <a:buNone/>
-                      </a:pPr>
-                      <a:r>
-                        <a:rPr lang="en-US" sz="1300" dirty="0">
-                          <a:solidFill>
-                            <a:srgbClr val="1A1A1A"/>
-                          </a:solidFill>
-                          <a:latin typeface="Microsoft YaHei" pitchFamily="34" charset="0"/>
-                          <a:ea typeface="Microsoft YaHei" pitchFamily="34" charset="-122"/>
-                          <a:cs typeface="Microsoft YaHei" pitchFamily="34" charset="-120"/>
-                        </a:rPr>
-                        <a:t>Ensembl REST</a:t>
-                      </a:r>
-                      <a:endParaRPr lang="en-US" sz="1300" dirty="0">
-                        <a:latin typeface="Microsoft YaHei" charset="0"/>
-                        <a:ea typeface="Microsoft YaHei" charset="0"/>
-                        <a:cs typeface="Microsoft YaHei" charset="0"/>
-                      </a:endParaRPr>
-                    </a:p>
-                  </a:txBody>
-                  <a:tcPr marL="91440" marR="91440" marT="45720" marB="45720" anchor="ctr">
-                    <a:lnL w="6350" cap="flat" cmpd="sng" algn="ctr">
-                      <a:solidFill>
-                        <a:srgbClr val="D8DBE0"/>
-                      </a:solidFill>
-                      <a:prstDash val="solid"/>
-                      <a:round/>
-                      <a:headEnd type="none" w="med" len="med"/>
-                      <a:tailEnd type="none" w="med" len="med"/>
-                    </a:lnL>
-                    <a:lnR w="6350" cap="flat" cmpd="sng" algn="ctr">
-                      <a:solidFill>
-                        <a:srgbClr val="D8DBE0"/>
-                      </a:solidFill>
-                      <a:prstDash val="solid"/>
-                      <a:round/>
-                      <a:headEnd type="none" w="med" len="med"/>
-                      <a:tailEnd type="none" w="med" len="med"/>
-                    </a:lnR>
-                    <a:lnT w="6350" cap="flat" cmpd="sng" algn="ctr">
-                      <a:solidFill>
-                        <a:srgbClr val="D8DBE0"/>
-                      </a:solidFill>
-                      <a:prstDash val="solid"/>
-                      <a:round/>
-                      <a:headEnd type="none" w="med" len="med"/>
-                      <a:tailEnd type="none" w="med" len="med"/>
-                    </a:lnT>
-                    <a:lnB w="6350" cap="flat" cmpd="sng" algn="ctr">
-                      <a:solidFill>
-                        <a:srgbClr val="D8DBE0"/>
-                      </a:solidFill>
-                      <a:prstDash val="solid"/>
-                      <a:round/>
-                      <a:headEnd type="none" w="med" len="med"/>
-                      <a:tailEnd type="none" w="med" len="med"/>
-                    </a:lnB>
-                  </a:tcPr>
-                </a:tc>
-                <a:tc>
-                  <a:txBody>
-                    <a:bodyPr/>
-                    <a:lstStyle/>
-                    <a:p>
-                      <a:pPr indent="0" marL="0">
-                        <a:buNone/>
-                      </a:pPr>
-                      <a:r>
-                        <a:rPr lang="en-US" sz="1300" dirty="0">
-                          <a:solidFill>
-                            <a:srgbClr val="1A1A1A"/>
-                          </a:solidFill>
-                          <a:latin typeface="Microsoft YaHei" pitchFamily="34" charset="0"/>
-                          <a:ea typeface="Microsoft YaHei" pitchFamily="34" charset="-122"/>
-                          <a:cs typeface="Microsoft YaHei" pitchFamily="34" charset="-120"/>
-                        </a:rPr>
-                        <a:t>IL18 转录本结构与异构体蛋白长度（人 193 aa vs 148 / 144 aa）</a:t>
-                      </a:r>
-                      <a:endParaRPr lang="en-US" sz="1300" dirty="0">
-                        <a:latin typeface="Microsoft YaHei" charset="0"/>
-                        <a:ea typeface="Microsoft YaHei" charset="0"/>
-                        <a:cs typeface="Microsoft YaHei" charset="0"/>
-                      </a:endParaRPr>
-                    </a:p>
-                  </a:txBody>
-                  <a:tcPr marL="91440" marR="91440" marT="45720" marB="45720" anchor="ctr">
-                    <a:lnL w="6350" cap="flat" cmpd="sng" algn="ctr">
-                      <a:solidFill>
-                        <a:srgbClr val="D8DBE0"/>
-                      </a:solidFill>
-                      <a:prstDash val="solid"/>
-                      <a:round/>
-                      <a:headEnd type="none" w="med" len="med"/>
-                      <a:tailEnd type="none" w="med" len="med"/>
-                    </a:lnL>
-                    <a:lnR w="6350" cap="flat" cmpd="sng" algn="ctr">
-                      <a:solidFill>
-                        <a:srgbClr val="D8DBE0"/>
-                      </a:solidFill>
-                      <a:prstDash val="solid"/>
-                      <a:round/>
-                      <a:headEnd type="none" w="med" len="med"/>
-                      <a:tailEnd type="none" w="med" len="med"/>
-                    </a:lnR>
-                    <a:lnT w="6350" cap="flat" cmpd="sng" algn="ctr">
-                      <a:solidFill>
-                        <a:srgbClr val="D8DBE0"/>
-                      </a:solidFill>
-                      <a:prstDash val="solid"/>
-                      <a:round/>
-                      <a:headEnd type="none" w="med" len="med"/>
-                      <a:tailEnd type="none" w="med" len="med"/>
-                    </a:lnT>
-                    <a:lnB w="6350" cap="flat" cmpd="sng" algn="ctr">
-                      <a:solidFill>
-                        <a:srgbClr val="D8DBE0"/>
-                      </a:solidFill>
-                      <a:prstDash val="solid"/>
-                      <a:round/>
-                      <a:headEnd type="none" w="med" len="med"/>
-                      <a:tailEnd type="none" w="med" len="med"/>
-                    </a:lnB>
-                  </a:tcPr>
-                </a:tc>
-                <a:tc>
-                  <a:txBody>
-                    <a:bodyPr/>
-                    <a:lstStyle/>
-                    <a:p>
-                      <a:pPr indent="0" marL="0">
-                        <a:buNone/>
-                      </a:pPr>
-                      <a:r>
-                        <a:rPr lang="en-US" sz="1300" dirty="0">
-                          <a:solidFill>
-                            <a:srgbClr val="1A1A1A"/>
-                          </a:solidFill>
-                          <a:latin typeface="Microsoft YaHei" pitchFamily="34" charset="0"/>
-                          <a:ea typeface="Microsoft YaHei" pitchFamily="34" charset="-122"/>
-                          <a:cs typeface="Microsoft YaHei" pitchFamily="34" charset="-120"/>
-                        </a:rPr>
-                        <a:t>—</a:t>
-                      </a:r>
-                      <a:endParaRPr lang="en-US" sz="1300" dirty="0">
-                        <a:latin typeface="Microsoft YaHei" charset="0"/>
-                        <a:ea typeface="Microsoft YaHei" charset="0"/>
-                        <a:cs typeface="Microsoft YaHei" charset="0"/>
-                      </a:endParaRPr>
-                    </a:p>
-                  </a:txBody>
-                  <a:tcPr marL="91440" marR="91440" marT="45720" marB="45720" anchor="ctr">
-                    <a:lnL w="6350" cap="flat" cmpd="sng" algn="ctr">
-                      <a:solidFill>
-                        <a:srgbClr val="D8DBE0"/>
-                      </a:solidFill>
-                      <a:prstDash val="solid"/>
-                      <a:round/>
-                      <a:headEnd type="none" w="med" len="med"/>
-                      <a:tailEnd type="none" w="med" len="med"/>
-                    </a:lnL>
-                    <a:lnR w="6350" cap="flat" cmpd="sng" algn="ctr">
-                      <a:solidFill>
-                        <a:srgbClr val="D8DBE0"/>
-                      </a:solidFill>
-                      <a:prstDash val="solid"/>
-                      <a:round/>
-                      <a:headEnd type="none" w="med" len="med"/>
-                      <a:tailEnd type="none" w="med" len="med"/>
-                    </a:lnR>
-                    <a:lnT w="6350" cap="flat" cmpd="sng" algn="ctr">
-                      <a:solidFill>
-                        <a:srgbClr val="D8DBE0"/>
-                      </a:solidFill>
-                      <a:prstDash val="solid"/>
-                      <a:round/>
-                      <a:headEnd type="none" w="med" len="med"/>
-                      <a:tailEnd type="none" w="med" len="med"/>
-                    </a:lnT>
-                    <a:lnB w="6350" cap="flat" cmpd="sng" algn="ctr">
-                      <a:solidFill>
-                        <a:srgbClr val="D8DBE0"/>
-                      </a:solidFill>
-                      <a:prstDash val="solid"/>
-                      <a:round/>
-                      <a:headEnd type="none" w="med" len="med"/>
-                      <a:tailEnd type="none" w="med" len="med"/>
-                    </a:lnB>
-                  </a:tcPr>
-                </a:tc>
-              </a:tr>
-              <a:tr h="402336">
-                <a:tc>
-                  <a:txBody>
-                    <a:bodyPr/>
-                    <a:lstStyle/>
-                    <a:p>
-                      <a:pPr indent="0" marL="0">
-                        <a:buNone/>
-                      </a:pPr>
-                      <a:r>
-                        <a:rPr lang="en-US" sz="1300" dirty="0">
-                          <a:solidFill>
-                            <a:srgbClr val="1A1A1A"/>
-                          </a:solidFill>
-                          <a:latin typeface="Microsoft YaHei" pitchFamily="34" charset="0"/>
-                          <a:ea typeface="Microsoft YaHei" pitchFamily="34" charset="-122"/>
-                          <a:cs typeface="Microsoft YaHei" pitchFamily="34" charset="-120"/>
-                        </a:rPr>
-                        <a:t>Snaptron（GTEx v8）</a:t>
-                      </a:r>
-                      <a:endParaRPr lang="en-US" sz="1300" dirty="0">
-                        <a:latin typeface="Microsoft YaHei" charset="0"/>
-                        <a:ea typeface="Microsoft YaHei" charset="0"/>
-                        <a:cs typeface="Microsoft YaHei" charset="0"/>
-                      </a:endParaRPr>
-                    </a:p>
-                  </a:txBody>
-                  <a:tcPr marL="91440" marR="91440" marT="45720" marB="45720" anchor="ctr">
-                    <a:lnL w="6350" cap="flat" cmpd="sng" algn="ctr">
-                      <a:solidFill>
-                        <a:srgbClr val="D8DBE0"/>
-                      </a:solidFill>
-                      <a:prstDash val="solid"/>
-                      <a:round/>
-                      <a:headEnd type="none" w="med" len="med"/>
-                      <a:tailEnd type="none" w="med" len="med"/>
-                    </a:lnL>
-                    <a:lnR w="6350" cap="flat" cmpd="sng" algn="ctr">
-                      <a:solidFill>
-                        <a:srgbClr val="D8DBE0"/>
-                      </a:solidFill>
-                      <a:prstDash val="solid"/>
-                      <a:round/>
-                      <a:headEnd type="none" w="med" len="med"/>
-                      <a:tailEnd type="none" w="med" len="med"/>
-                    </a:lnR>
-                    <a:lnT w="6350" cap="flat" cmpd="sng" algn="ctr">
-                      <a:solidFill>
-                        <a:srgbClr val="D8DBE0"/>
-                      </a:solidFill>
-                      <a:prstDash val="solid"/>
-                      <a:round/>
-                      <a:headEnd type="none" w="med" len="med"/>
-                      <a:tailEnd type="none" w="med" len="med"/>
-                    </a:lnT>
-                    <a:lnB w="6350" cap="flat" cmpd="sng" algn="ctr">
-                      <a:solidFill>
-                        <a:srgbClr val="D8DBE0"/>
-                      </a:solidFill>
-                      <a:prstDash val="solid"/>
-                      <a:round/>
-                      <a:headEnd type="none" w="med" len="med"/>
-                      <a:tailEnd type="none" w="med" len="med"/>
-                    </a:lnB>
-                  </a:tcPr>
-                </a:tc>
-                <a:tc>
-                  <a:txBody>
-                    <a:bodyPr/>
-                    <a:lstStyle/>
-                    <a:p>
-                      <a:pPr indent="0" marL="0">
-                        <a:buNone/>
-                      </a:pPr>
-                      <a:r>
-                        <a:rPr lang="en-US" sz="1300" dirty="0">
-                          <a:solidFill>
-                            <a:srgbClr val="1A1A1A"/>
-                          </a:solidFill>
-                          <a:latin typeface="Microsoft YaHei" pitchFamily="34" charset="0"/>
-                          <a:ea typeface="Microsoft YaHei" pitchFamily="34" charset="-122"/>
-                          <a:cs typeface="Microsoft YaHei" pitchFamily="34" charset="-120"/>
-                        </a:rPr>
-                        <a:t>逐样本剪接连接计数，54 个组织、6792 个样本</a:t>
-                      </a:r>
-                      <a:endParaRPr lang="en-US" sz="1300" dirty="0">
-                        <a:latin typeface="Microsoft YaHei" charset="0"/>
-                        <a:ea typeface="Microsoft YaHei" charset="0"/>
-                        <a:cs typeface="Microsoft YaHei" charset="0"/>
-                      </a:endParaRPr>
-                    </a:p>
-                  </a:txBody>
-                  <a:tcPr marL="91440" marR="91440" marT="45720" marB="45720" anchor="ctr">
-                    <a:lnL w="6350" cap="flat" cmpd="sng" algn="ctr">
-                      <a:solidFill>
-                        <a:srgbClr val="D8DBE0"/>
-                      </a:solidFill>
-                      <a:prstDash val="solid"/>
-                      <a:round/>
-                      <a:headEnd type="none" w="med" len="med"/>
-                      <a:tailEnd type="none" w="med" len="med"/>
-                    </a:lnL>
-                    <a:lnR w="6350" cap="flat" cmpd="sng" algn="ctr">
-                      <a:solidFill>
-                        <a:srgbClr val="D8DBE0"/>
-                      </a:solidFill>
-                      <a:prstDash val="solid"/>
-                      <a:round/>
-                      <a:headEnd type="none" w="med" len="med"/>
-                      <a:tailEnd type="none" w="med" len="med"/>
-                    </a:lnR>
-                    <a:lnT w="6350" cap="flat" cmpd="sng" algn="ctr">
-                      <a:solidFill>
-                        <a:srgbClr val="D8DBE0"/>
-                      </a:solidFill>
-                      <a:prstDash val="solid"/>
-                      <a:round/>
-                      <a:headEnd type="none" w="med" len="med"/>
-                      <a:tailEnd type="none" w="med" len="med"/>
-                    </a:lnT>
-                    <a:lnB w="6350" cap="flat" cmpd="sng" algn="ctr">
-                      <a:solidFill>
-                        <a:srgbClr val="D8DBE0"/>
-                      </a:solidFill>
-                      <a:prstDash val="solid"/>
-                      <a:round/>
-                      <a:headEnd type="none" w="med" len="med"/>
-                      <a:tailEnd type="none" w="med" len="med"/>
-                    </a:lnB>
-                  </a:tcPr>
-                </a:tc>
-                <a:tc>
-                  <a:txBody>
-                    <a:bodyPr/>
-                    <a:lstStyle/>
-                    <a:p>
-                      <a:pPr indent="0" marL="0">
-                        <a:buNone/>
-                      </a:pPr>
-                      <a:r>
-                        <a:rPr lang="en-US" sz="1300" dirty="0">
-                          <a:solidFill>
-                            <a:srgbClr val="1A1A1A"/>
-                          </a:solidFill>
-                          <a:latin typeface="Microsoft YaHei" pitchFamily="34" charset="0"/>
-                          <a:ea typeface="Microsoft YaHei" pitchFamily="34" charset="-122"/>
-                          <a:cs typeface="Microsoft YaHei" pitchFamily="34" charset="-120"/>
-                        </a:rPr>
-                        <a:t>0.09%</a:t>
-                      </a:r>
-                      <a:endParaRPr lang="en-US" sz="1300" dirty="0">
-                        <a:latin typeface="Microsoft YaHei" charset="0"/>
-                        <a:ea typeface="Microsoft YaHei" charset="0"/>
-                        <a:cs typeface="Microsoft YaHei" charset="0"/>
-                      </a:endParaRPr>
-                    </a:p>
-                  </a:txBody>
-                  <a:tcPr marL="91440" marR="91440" marT="45720" marB="45720" anchor="ctr">
-                    <a:lnL w="6350" cap="flat" cmpd="sng" algn="ctr">
-                      <a:solidFill>
-                        <a:srgbClr val="D8DBE0"/>
-                      </a:solidFill>
-                      <a:prstDash val="solid"/>
-                      <a:round/>
-                      <a:headEnd type="none" w="med" len="med"/>
-                      <a:tailEnd type="none" w="med" len="med"/>
-                    </a:lnL>
-                    <a:lnR w="6350" cap="flat" cmpd="sng" algn="ctr">
-                      <a:solidFill>
-                        <a:srgbClr val="D8DBE0"/>
-                      </a:solidFill>
-                      <a:prstDash val="solid"/>
-                      <a:round/>
-                      <a:headEnd type="none" w="med" len="med"/>
-                      <a:tailEnd type="none" w="med" len="med"/>
-                    </a:lnR>
-                    <a:lnT w="6350" cap="flat" cmpd="sng" algn="ctr">
-                      <a:solidFill>
-                        <a:srgbClr val="D8DBE0"/>
-                      </a:solidFill>
-                      <a:prstDash val="solid"/>
-                      <a:round/>
-                      <a:headEnd type="none" w="med" len="med"/>
-                      <a:tailEnd type="none" w="med" len="med"/>
-                    </a:lnT>
-                    <a:lnB w="6350" cap="flat" cmpd="sng" algn="ctr">
-                      <a:solidFill>
-                        <a:srgbClr val="D8DBE0"/>
-                      </a:solidFill>
-                      <a:prstDash val="solid"/>
-                      <a:round/>
-                      <a:headEnd type="none" w="med" len="med"/>
-                      <a:tailEnd type="none" w="med" len="med"/>
-                    </a:lnB>
-                  </a:tcPr>
-                </a:tc>
-              </a:tr>
-              <a:tr h="402336">
-                <a:tc>
-                  <a:txBody>
-                    <a:bodyPr/>
-                    <a:lstStyle/>
-                    <a:p>
-                      <a:pPr indent="0" marL="0">
-                        <a:buNone/>
-                      </a:pPr>
-                      <a:r>
-                        <a:rPr lang="en-US" sz="1300" dirty="0">
-                          <a:solidFill>
-                            <a:srgbClr val="1A1A1A"/>
-                          </a:solidFill>
-                          <a:latin typeface="Microsoft YaHei" pitchFamily="34" charset="0"/>
-                          <a:ea typeface="Microsoft YaHei" pitchFamily="34" charset="-122"/>
-                          <a:cs typeface="Microsoft YaHei" pitchFamily="34" charset="-120"/>
-                        </a:rPr>
-                        <a:t>Snaptron（recount / SRA v3h）</a:t>
-                      </a:r>
-                      <a:endParaRPr lang="en-US" sz="1300" dirty="0">
-                        <a:latin typeface="Microsoft YaHei" charset="0"/>
-                        <a:ea typeface="Microsoft YaHei" charset="0"/>
-                        <a:cs typeface="Microsoft YaHei" charset="0"/>
-                      </a:endParaRPr>
-                    </a:p>
-                  </a:txBody>
-                  <a:tcPr marL="91440" marR="91440" marT="45720" marB="45720" anchor="ctr">
-                    <a:lnL w="6350" cap="flat" cmpd="sng" algn="ctr">
-                      <a:solidFill>
-                        <a:srgbClr val="D8DBE0"/>
-                      </a:solidFill>
-                      <a:prstDash val="solid"/>
-                      <a:round/>
-                      <a:headEnd type="none" w="med" len="med"/>
-                      <a:tailEnd type="none" w="med" len="med"/>
-                    </a:lnL>
-                    <a:lnR w="6350" cap="flat" cmpd="sng" algn="ctr">
-                      <a:solidFill>
-                        <a:srgbClr val="D8DBE0"/>
-                      </a:solidFill>
-                      <a:prstDash val="solid"/>
-                      <a:round/>
-                      <a:headEnd type="none" w="med" len="med"/>
-                      <a:tailEnd type="none" w="med" len="med"/>
-                    </a:lnR>
-                    <a:lnT w="6350" cap="flat" cmpd="sng" algn="ctr">
-                      <a:solidFill>
-                        <a:srgbClr val="D8DBE0"/>
-                      </a:solidFill>
-                      <a:prstDash val="solid"/>
-                      <a:round/>
-                      <a:headEnd type="none" w="med" len="med"/>
-                      <a:tailEnd type="none" w="med" len="med"/>
-                    </a:lnT>
-                    <a:lnB w="6350" cap="flat" cmpd="sng" algn="ctr">
-                      <a:solidFill>
-                        <a:srgbClr val="D8DBE0"/>
-                      </a:solidFill>
-                      <a:prstDash val="solid"/>
-                      <a:round/>
-                      <a:headEnd type="none" w="med" len="med"/>
-                      <a:tailEnd type="none" w="med" len="med"/>
-                    </a:lnB>
-                  </a:tcPr>
-                </a:tc>
-                <a:tc>
-                  <a:txBody>
-                    <a:bodyPr/>
-                    <a:lstStyle/>
-                    <a:p>
-                      <a:pPr indent="0" marL="0">
-                        <a:buNone/>
-                      </a:pPr>
-                      <a:r>
-                        <a:rPr lang="en-US" sz="1300" dirty="0">
-                          <a:solidFill>
-                            <a:srgbClr val="1A1A1A"/>
-                          </a:solidFill>
-                          <a:latin typeface="Microsoft YaHei" pitchFamily="34" charset="0"/>
-                          <a:ea typeface="Microsoft YaHei" pitchFamily="34" charset="-122"/>
-                          <a:cs typeface="Microsoft YaHei" pitchFamily="34" charset="-120"/>
-                        </a:rPr>
-                        <a:t>逐样本剪接连接计数，50790 个样本</a:t>
-                      </a:r>
-                      <a:endParaRPr lang="en-US" sz="1300" dirty="0">
-                        <a:latin typeface="Microsoft YaHei" charset="0"/>
-                        <a:ea typeface="Microsoft YaHei" charset="0"/>
-                        <a:cs typeface="Microsoft YaHei" charset="0"/>
-                      </a:endParaRPr>
-                    </a:p>
-                  </a:txBody>
-                  <a:tcPr marL="91440" marR="91440" marT="45720" marB="45720" anchor="ctr">
-                    <a:lnL w="6350" cap="flat" cmpd="sng" algn="ctr">
-                      <a:solidFill>
-                        <a:srgbClr val="D8DBE0"/>
-                      </a:solidFill>
-                      <a:prstDash val="solid"/>
-                      <a:round/>
-                      <a:headEnd type="none" w="med" len="med"/>
-                      <a:tailEnd type="none" w="med" len="med"/>
-                    </a:lnL>
-                    <a:lnR w="6350" cap="flat" cmpd="sng" algn="ctr">
-                      <a:solidFill>
-                        <a:srgbClr val="D8DBE0"/>
-                      </a:solidFill>
-                      <a:prstDash val="solid"/>
-                      <a:round/>
-                      <a:headEnd type="none" w="med" len="med"/>
-                      <a:tailEnd type="none" w="med" len="med"/>
-                    </a:lnR>
-                    <a:lnT w="6350" cap="flat" cmpd="sng" algn="ctr">
-                      <a:solidFill>
-                        <a:srgbClr val="D8DBE0"/>
-                      </a:solidFill>
-                      <a:prstDash val="solid"/>
-                      <a:round/>
-                      <a:headEnd type="none" w="med" len="med"/>
-                      <a:tailEnd type="none" w="med" len="med"/>
-                    </a:lnT>
-                    <a:lnB w="6350" cap="flat" cmpd="sng" algn="ctr">
-                      <a:solidFill>
-                        <a:srgbClr val="D8DBE0"/>
-                      </a:solidFill>
-                      <a:prstDash val="solid"/>
-                      <a:round/>
-                      <a:headEnd type="none" w="med" len="med"/>
-                      <a:tailEnd type="none" w="med" len="med"/>
-                    </a:lnB>
-                  </a:tcPr>
-                </a:tc>
-                <a:tc>
-                  <a:txBody>
-                    <a:bodyPr/>
-                    <a:lstStyle/>
-                    <a:p>
-                      <a:pPr indent="0" marL="0">
-                        <a:buNone/>
-                      </a:pPr>
-                      <a:r>
-                        <a:rPr lang="en-US" sz="1300" dirty="0">
-                          <a:solidFill>
-                            <a:srgbClr val="1A1A1A"/>
-                          </a:solidFill>
-                          <a:latin typeface="Microsoft YaHei" pitchFamily="34" charset="0"/>
-                          <a:ea typeface="Microsoft YaHei" pitchFamily="34" charset="-122"/>
-                          <a:cs typeface="Microsoft YaHei" pitchFamily="34" charset="-120"/>
-                        </a:rPr>
-                        <a:t>0.20%</a:t>
-                      </a:r>
-                      <a:endParaRPr lang="en-US" sz="1300" dirty="0">
-                        <a:latin typeface="Microsoft YaHei" charset="0"/>
-                        <a:ea typeface="Microsoft YaHei" charset="0"/>
-                        <a:cs typeface="Microsoft YaHei" charset="0"/>
-                      </a:endParaRPr>
-                    </a:p>
-                  </a:txBody>
-                  <a:tcPr marL="91440" marR="91440" marT="45720" marB="45720" anchor="ctr">
-                    <a:lnL w="6350" cap="flat" cmpd="sng" algn="ctr">
-                      <a:solidFill>
-                        <a:srgbClr val="D8DBE0"/>
-                      </a:solidFill>
-                      <a:prstDash val="solid"/>
-                      <a:round/>
-                      <a:headEnd type="none" w="med" len="med"/>
-                      <a:tailEnd type="none" w="med" len="med"/>
-                    </a:lnL>
-                    <a:lnR w="6350" cap="flat" cmpd="sng" algn="ctr">
-                      <a:solidFill>
-                        <a:srgbClr val="D8DBE0"/>
-                      </a:solidFill>
-                      <a:prstDash val="solid"/>
-                      <a:round/>
-                      <a:headEnd type="none" w="med" len="med"/>
-                      <a:tailEnd type="none" w="med" len="med"/>
-                    </a:lnR>
-                    <a:lnT w="6350" cap="flat" cmpd="sng" algn="ctr">
-                      <a:solidFill>
-                        <a:srgbClr val="D8DBE0"/>
-                      </a:solidFill>
-                      <a:prstDash val="solid"/>
-                      <a:round/>
-                      <a:headEnd type="none" w="med" len="med"/>
-                      <a:tailEnd type="none" w="med" len="med"/>
-                    </a:lnT>
-                    <a:lnB w="6350" cap="flat" cmpd="sng" algn="ctr">
-                      <a:solidFill>
-                        <a:srgbClr val="D8DBE0"/>
-                      </a:solidFill>
-                      <a:prstDash val="solid"/>
-                      <a:round/>
-                      <a:headEnd type="none" w="med" len="med"/>
-                      <a:tailEnd type="none" w="med" len="med"/>
-                    </a:lnB>
-                  </a:tcPr>
-                </a:tc>
-              </a:tr>
-            </a:tbl>
-          </a:graphicData>
-        </a:graphic>
-      </p:graphicFrame>
-      <p:sp>
-        <p:nvSpPr>
-          <p:cNvPr id="5" name="Text 2"/>
-          <p:cNvSpPr txBox="1"/>
-          <p:nvPr/>
-        </p:nvSpPr>
-        <p:spPr>
-          <a:xfrm>
-            <a:off x="731520" y="3657600"/>
-            <a:ext cx="10698480" cy="292608"/>
-          </a:xfrm>
-          <a:prstGeom prst="rect">
-            <a:avLst/>
-          </a:prstGeom>
-          <a:noFill/>
-          <a:ln/>
-        </p:spPr>
-        <p:txBody>
-          <a:bodyPr wrap="square" rtlCol="0" anchor="ctr"/>
-          <a:lstStyle/>
-          <a:p>
-            <a:pPr indent="0" marL="0">
-              <a:buNone/>
-            </a:pPr>
-            <a:r>
-              <a:rPr lang="en-US" sz="1350" b="1" dirty="0">
-                <a:solidFill>
-                  <a:srgbClr val="1A1A1A"/>
-                </a:solidFill>
-                <a:latin typeface="Microsoft YaHei" pitchFamily="34" charset="0"/>
-                <a:ea typeface="Microsoft YaHei" pitchFamily="34" charset="-122"/>
-                <a:cs typeface="Microsoft YaHei" pitchFamily="34" charset="-120"/>
-              </a:rPr>
-              <a:t>本分析的全部参考数据库</a:t>
-            </a:r>
-            <a:endParaRPr lang="en-US" sz="1350" dirty="0"/>
-          </a:p>
-        </p:txBody>
-      </p:sp>
-      <p:sp>
-        <p:nvSpPr>
-          <p:cNvPr id="6" name="Text 3"/>
-          <p:cNvSpPr txBox="1"/>
-          <p:nvPr/>
-        </p:nvSpPr>
-        <p:spPr>
-          <a:xfrm>
-            <a:off x="731520" y="4023360"/>
-            <a:ext cx="2103120" cy="502920"/>
+            <a:off x="731520" y="1417320"/>
+            <a:ext cx="2286000" cy="457200"/>
           </a:xfrm>
           <a:prstGeom prst="rect">
             <a:avLst/>
@@ -3084,7 +2089,7 @@
               <a:buNone/>
             </a:pPr>
             <a:r>
-              <a:rPr lang="en-US" sz="1200" b="1" dirty="0">
+              <a:rPr lang="en-US" sz="1350" b="1" dirty="0">
                 <a:solidFill>
                   <a:srgbClr val="6B6B6B"/>
                 </a:solidFill>
@@ -3092,22 +2097,22 @@
                 <a:ea typeface="Microsoft YaHei" pitchFamily="34" charset="-122"/>
                 <a:cs typeface="Microsoft YaHei" pitchFamily="34" charset="-120"/>
               </a:rPr>
-              <a:t>单细胞/单核</a:t>
+              <a:t>单细胞 / 单核</a:t>
             </a:r>
-            <a:endParaRPr lang="en-US" sz="1200" dirty="0"/>
+            <a:endParaRPr lang="en-US" sz="1350" dirty="0"/>
           </a:p>
         </p:txBody>
       </p:sp>
       <p:sp>
         <p:nvSpPr>
-          <p:cNvPr id="7" name="Text 4"/>
+          <p:cNvPr id="4" name="Text 2"/>
           <p:cNvSpPr txBox="1"/>
           <p:nvPr/>
         </p:nvSpPr>
         <p:spPr>
           <a:xfrm>
-            <a:off x="2926080" y="4023360"/>
-            <a:ext cx="8503920" cy="530352"/>
+            <a:off x="3200400" y="1417320"/>
+            <a:ext cx="8321040" cy="841248"/>
           </a:xfrm>
           <a:prstGeom prst="rect">
             <a:avLst/>
@@ -3121,12 +2126,12 @@
           <a:p>
             <a:pPr indent="0" marL="0">
               <a:lnSpc>
-                <a:spcPct val="110000"/>
+                <a:spcPct val="120000"/>
               </a:lnSpc>
               <a:buNone/>
             </a:pPr>
             <a:r>
-              <a:rPr lang="en-US" sz="1150" dirty="0">
+              <a:rPr lang="en-US" sz="1300" dirty="0">
                 <a:solidFill>
                   <a:srgbClr val="1A1A1A"/>
                 </a:solidFill>
@@ -3134,22 +2139,22 @@
                 <a:ea typeface="Microsoft YaHei" pitchFamily="34" charset="-122"/>
                 <a:cs typeface="Microsoft YaHei" pitchFamily="34" charset="-120"/>
               </a:rPr>
-              <a:t>CZ CELLxGENE Census LTS 2025-11-08（29 个分层）· Allen Human Variation Study · SEA-AD · PsychAD · Tabula Muris Senis · Tabula Sapiens · HLCA · CellRef</a:t>
+              <a:t>CZ CELLxGENE Census LTS 2025-11-08（29 个分层）· Allen Human Variation Study · SEA-AD · PsychAD · Tabula Muris Senis · Tabula Sapiens · HLCA · CellRef · GEO GSE103892</a:t>
             </a:r>
-            <a:endParaRPr lang="en-US" sz="1150" dirty="0"/>
+            <a:endParaRPr lang="en-US" sz="1300" dirty="0"/>
           </a:p>
         </p:txBody>
       </p:sp>
       <p:sp>
         <p:nvSpPr>
-          <p:cNvPr id="8" name="Text 5"/>
+          <p:cNvPr id="5" name="Text 3"/>
           <p:cNvSpPr txBox="1"/>
           <p:nvPr/>
         </p:nvSpPr>
         <p:spPr>
           <a:xfrm>
-            <a:off x="731520" y="4590288"/>
-            <a:ext cx="2103120" cy="502920"/>
+            <a:off x="731520" y="2350008"/>
+            <a:ext cx="2286000" cy="457200"/>
           </a:xfrm>
           <a:prstGeom prst="rect">
             <a:avLst/>
@@ -3165,7 +2170,7 @@
               <a:buNone/>
             </a:pPr>
             <a:r>
-              <a:rPr lang="en-US" sz="1200" b="1" dirty="0">
+              <a:rPr lang="en-US" sz="1350" b="1" dirty="0">
                 <a:solidFill>
                   <a:srgbClr val="6B6B6B"/>
                 </a:solidFill>
@@ -3175,20 +2180,20 @@
               </a:rPr>
               <a:t>分选 / 纯化 bulk</a:t>
             </a:r>
-            <a:endParaRPr lang="en-US" sz="1200" dirty="0"/>
+            <a:endParaRPr lang="en-US" sz="1350" dirty="0"/>
           </a:p>
         </p:txBody>
       </p:sp>
       <p:sp>
         <p:nvSpPr>
-          <p:cNvPr id="9" name="Text 6"/>
+          <p:cNvPr id="6" name="Text 4"/>
           <p:cNvSpPr txBox="1"/>
           <p:nvPr/>
         </p:nvSpPr>
         <p:spPr>
           <a:xfrm>
-            <a:off x="2926080" y="4590288"/>
-            <a:ext cx="8503920" cy="530352"/>
+            <a:off x="3200400" y="2350008"/>
+            <a:ext cx="8321040" cy="841248"/>
           </a:xfrm>
           <a:prstGeom prst="rect">
             <a:avLst/>
@@ -3202,12 +2207,12 @@
           <a:p>
             <a:pPr indent="0" marL="0">
               <a:lnSpc>
-                <a:spcPct val="110000"/>
+                <a:spcPct val="120000"/>
               </a:lnSpc>
               <a:buNone/>
             </a:pPr>
             <a:r>
-              <a:rPr lang="en-US" sz="1150" dirty="0">
+              <a:rPr lang="en-US" sz="1300" dirty="0">
                 <a:solidFill>
                   <a:srgbClr val="1A1A1A"/>
                 </a:solidFill>
@@ -3217,20 +2222,20 @@
               </a:rPr>
               <a:t>ImmGen（RNA-seq + 微阵列）· brainrnaseq/Zhang · Pressl 2024 sFANS 分选核 · Allen Human Cortex SMART-seq · RiboTag / TRAP 系列 · LCM 分选 · 多套 GEO FACS 分选</a:t>
             </a:r>
-            <a:endParaRPr lang="en-US" sz="1150" dirty="0"/>
+            <a:endParaRPr lang="en-US" sz="1300" dirty="0"/>
           </a:p>
         </p:txBody>
       </p:sp>
       <p:sp>
         <p:nvSpPr>
-          <p:cNvPr id="10" name="Text 7"/>
+          <p:cNvPr id="7" name="Text 5"/>
           <p:cNvSpPr txBox="1"/>
           <p:nvPr/>
         </p:nvSpPr>
         <p:spPr>
           <a:xfrm>
-            <a:off x="731520" y="5157216"/>
-            <a:ext cx="2103120" cy="502920"/>
+            <a:off x="731520" y="3282696"/>
+            <a:ext cx="2286000" cy="457200"/>
           </a:xfrm>
           <a:prstGeom prst="rect">
             <a:avLst/>
@@ -3246,7 +2251,7 @@
               <a:buNone/>
             </a:pPr>
             <a:r>
-              <a:rPr lang="en-US" sz="1200" b="1" dirty="0">
+              <a:rPr lang="en-US" sz="1350" b="1" dirty="0">
                 <a:solidFill>
                   <a:srgbClr val="6B6B6B"/>
                 </a:solidFill>
@@ -3256,20 +2261,20 @@
               </a:rPr>
               <a:t>组织 bulk / 蛋白</a:t>
             </a:r>
-            <a:endParaRPr lang="en-US" sz="1200" dirty="0"/>
+            <a:endParaRPr lang="en-US" sz="1350" dirty="0"/>
           </a:p>
         </p:txBody>
       </p:sp>
       <p:sp>
         <p:nvSpPr>
-          <p:cNvPr id="11" name="Text 8"/>
+          <p:cNvPr id="8" name="Text 6"/>
           <p:cNvSpPr txBox="1"/>
           <p:nvPr/>
         </p:nvSpPr>
         <p:spPr>
           <a:xfrm>
-            <a:off x="2926080" y="5157216"/>
-            <a:ext cx="8503920" cy="530352"/>
+            <a:off x="3200400" y="3282696"/>
+            <a:ext cx="8321040" cy="841248"/>
           </a:xfrm>
           <a:prstGeom prst="rect">
             <a:avLst/>
@@ -3283,12 +2288,12 @@
           <a:p>
             <a:pPr indent="0" marL="0">
               <a:lnSpc>
-                <a:spcPct val="110000"/>
+                <a:spcPct val="120000"/>
               </a:lnSpc>
               <a:buNone/>
             </a:pPr>
             <a:r>
-              <a:rPr lang="en-US" sz="1150" dirty="0">
+              <a:rPr lang="en-US" sz="1300" dirty="0">
                 <a:solidFill>
                   <a:srgbClr val="1A1A1A"/>
                 </a:solidFill>
@@ -3298,20 +2303,20 @@
               </a:rPr>
               <a:t>GTEx v8 · Human Protein Atlas v25（RNA + IHC 蛋白）· Monaco 2019 · Haemopedia</a:t>
             </a:r>
-            <a:endParaRPr lang="en-US" sz="1150" dirty="0"/>
+            <a:endParaRPr lang="en-US" sz="1300" dirty="0"/>
           </a:p>
         </p:txBody>
       </p:sp>
       <p:sp>
         <p:nvSpPr>
-          <p:cNvPr id="12" name="Text 9"/>
+          <p:cNvPr id="9" name="Text 7"/>
           <p:cNvSpPr txBox="1"/>
           <p:nvPr/>
         </p:nvSpPr>
         <p:spPr>
           <a:xfrm>
-            <a:off x="731520" y="5724144"/>
-            <a:ext cx="2103120" cy="502920"/>
+            <a:off x="731520" y="4215384"/>
+            <a:ext cx="2286000" cy="457200"/>
           </a:xfrm>
           <a:prstGeom prst="rect">
             <a:avLst/>
@@ -3327,7 +2332,7 @@
               <a:buNone/>
             </a:pPr>
             <a:r>
-              <a:rPr lang="en-US" sz="1200" b="1" dirty="0">
+              <a:rPr lang="en-US" sz="1350" b="1" dirty="0">
                 <a:solidFill>
                   <a:srgbClr val="6B6B6B"/>
                 </a:solidFill>
@@ -3337,20 +2342,20 @@
               </a:rPr>
               <a:t>剪接连接</a:t>
             </a:r>
-            <a:endParaRPr lang="en-US" sz="1200" dirty="0"/>
+            <a:endParaRPr lang="en-US" sz="1350" dirty="0"/>
           </a:p>
         </p:txBody>
       </p:sp>
       <p:sp>
         <p:nvSpPr>
-          <p:cNvPr id="13" name="Text 10"/>
+          <p:cNvPr id="10" name="Text 8"/>
           <p:cNvSpPr txBox="1"/>
           <p:nvPr/>
         </p:nvSpPr>
         <p:spPr>
           <a:xfrm>
-            <a:off x="2926080" y="5724144"/>
-            <a:ext cx="8503920" cy="530352"/>
+            <a:off x="3200400" y="4215384"/>
+            <a:ext cx="8321040" cy="841248"/>
           </a:xfrm>
           <a:prstGeom prst="rect">
             <a:avLst/>
@@ -3364,12 +2369,12 @@
           <a:p>
             <a:pPr indent="0" marL="0">
               <a:lnSpc>
-                <a:spcPct val="110000"/>
+                <a:spcPct val="120000"/>
               </a:lnSpc>
               <a:buNone/>
             </a:pPr>
             <a:r>
-              <a:rPr lang="en-US" sz="1150" dirty="0">
+              <a:rPr lang="en-US" sz="1300" dirty="0">
                 <a:solidFill>
                   <a:srgbClr val="1A1A1A"/>
                 </a:solidFill>
@@ -3377,15 +2382,96 @@
                 <a:ea typeface="Microsoft YaHei" pitchFamily="34" charset="-122"/>
                 <a:cs typeface="Microsoft YaHei" pitchFamily="34" charset="-120"/>
               </a:rPr>
-              <a:t>Snaptron（recount3 / SRA / GTEx）</a:t>
+              <a:t>Snaptron（recount3 / SRA / GTEx v8）</a:t>
             </a:r>
-            <a:endParaRPr lang="en-US" sz="1150" dirty="0"/>
+            <a:endParaRPr lang="en-US" sz="1300" dirty="0"/>
           </a:p>
         </p:txBody>
       </p:sp>
       <p:sp>
         <p:nvSpPr>
-          <p:cNvPr id="14" name="Text 11"/>
+          <p:cNvPr id="11" name="Text 9"/>
+          <p:cNvSpPr txBox="1"/>
+          <p:nvPr/>
+        </p:nvSpPr>
+        <p:spPr>
+          <a:xfrm>
+            <a:off x="731520" y="5148072"/>
+            <a:ext cx="2286000" cy="457200"/>
+          </a:xfrm>
+          <a:prstGeom prst="rect">
+            <a:avLst/>
+          </a:prstGeom>
+          <a:noFill/>
+          <a:ln/>
+        </p:spPr>
+        <p:txBody>
+          <a:bodyPr wrap="square" rtlCol="0" anchor="t"/>
+          <a:lstStyle/>
+          <a:p>
+            <a:pPr indent="0" marL="0">
+              <a:buNone/>
+            </a:pPr>
+            <a:r>
+              <a:rPr lang="en-US" sz="1350" b="1" dirty="0">
+                <a:solidFill>
+                  <a:srgbClr val="6B6B6B"/>
+                </a:solidFill>
+                <a:latin typeface="Microsoft YaHei" pitchFamily="34" charset="0"/>
+                <a:ea typeface="Microsoft YaHei" pitchFamily="34" charset="-122"/>
+                <a:cs typeface="Microsoft YaHei" pitchFamily="34" charset="-120"/>
+              </a:rPr>
+              <a:t>基因模型</a:t>
+            </a:r>
+            <a:endParaRPr lang="en-US" sz="1350" dirty="0"/>
+          </a:p>
+        </p:txBody>
+      </p:sp>
+      <p:sp>
+        <p:nvSpPr>
+          <p:cNvPr id="12" name="Text 10"/>
+          <p:cNvSpPr txBox="1"/>
+          <p:nvPr/>
+        </p:nvSpPr>
+        <p:spPr>
+          <a:xfrm>
+            <a:off x="3200400" y="5148072"/>
+            <a:ext cx="8321040" cy="841248"/>
+          </a:xfrm>
+          <a:prstGeom prst="rect">
+            <a:avLst/>
+          </a:prstGeom>
+          <a:noFill/>
+          <a:ln/>
+        </p:spPr>
+        <p:txBody>
+          <a:bodyPr wrap="square" rtlCol="0" anchor="t"/>
+          <a:lstStyle/>
+          <a:p>
+            <a:pPr indent="0" marL="0">
+              <a:lnSpc>
+                <a:spcPct val="120000"/>
+              </a:lnSpc>
+              <a:buNone/>
+            </a:pPr>
+            <a:r>
+              <a:rPr lang="en-US" sz="1300" dirty="0">
+                <a:solidFill>
+                  <a:srgbClr val="1A1A1A"/>
+                </a:solidFill>
+                <a:latin typeface="Microsoft YaHei" pitchFamily="34" charset="0"/>
+                <a:ea typeface="Microsoft YaHei" pitchFamily="34" charset="-122"/>
+                <a:cs typeface="Microsoft YaHei" pitchFamily="34" charset="-120"/>
+              </a:rPr>
+              <a:t>Ensembl REST</a:t>
+            </a:r>
+            <a:endParaRPr lang="en-US" sz="1300" dirty="0"/>
+          </a:p>
+        </p:txBody>
+      </p:sp>
+      <p:sp>
+        <p:nvSpPr>
+          <p:cNvPr id="13" name="Text 11"/>
           <p:cNvSpPr txBox="1"/>
           <p:nvPr/>
         </p:nvSpPr>
@@ -3408,7 +2494,7 @@
               <a:buNone/>
             </a:pPr>
             <a:r>
-              <a:rPr lang="en-US" sz="1100" dirty="0">
+              <a:rPr lang="en-US" sz="1050" dirty="0">
                 <a:solidFill>
                   <a:srgbClr val="9AA0A6"/>
                 </a:solidFill>
@@ -3418,7 +2504,7 @@
               </a:rPr>
               <a:t>统一参考表 1714 行，每条带来源、单位、状态与匹配质量标注。</a:t>
             </a:r>
-            <a:endParaRPr lang="en-US" sz="1100" dirty="0"/>
+            <a:endParaRPr lang="en-US" sz="1050" dirty="0"/>
           </a:p>
         </p:txBody>
       </p:sp>
@@ -3975,8 +3061,8 @@
         </p:nvSpPr>
         <p:spPr>
           <a:xfrm>
-            <a:off x="640080" y="384048"/>
-            <a:ext cx="5486400" cy="502920"/>
+            <a:off x="640080" y="329184"/>
+            <a:ext cx="5486400" cy="457200"/>
           </a:xfrm>
           <a:prstGeom prst="rect">
             <a:avLst/>
@@ -3992,7 +3078,7 @@
               <a:buNone/>
             </a:pPr>
             <a:r>
-              <a:rPr lang="en-US" sz="2600" b="1" dirty="0">
+              <a:rPr lang="en-US" sz="2400" b="1" dirty="0">
                 <a:solidFill>
                   <a:srgbClr val="1A1A1A"/>
                 </a:solidFill>
@@ -4002,7 +3088,7 @@
               </a:rPr>
               <a:t>结论</a:t>
             </a:r>
-            <a:endParaRPr lang="en-US" sz="2600" dirty="0"/>
+            <a:endParaRPr lang="en-US" sz="2400" dirty="0"/>
           </a:p>
         </p:txBody>
       </p:sp>
@@ -4014,309 +3100,8 @@
         </p:nvSpPr>
         <p:spPr>
           <a:xfrm>
-            <a:off x="868680" y="1280160"/>
-            <a:ext cx="10515600" cy="621792"/>
-          </a:xfrm>
-          <a:prstGeom prst="rect">
-            <a:avLst/>
-          </a:prstGeom>
-          <a:noFill/>
-          <a:ln/>
-        </p:spPr>
-        <p:txBody>
-          <a:bodyPr wrap="square" rtlCol="0" anchor="t"/>
-          <a:lstStyle/>
-          <a:p>
-            <a:pPr marL="190500" indent="-190500">
-              <a:lnSpc>
-                <a:spcPct val="120000"/>
-              </a:lnSpc>
-              <a:buSzPct val="100000"/>
-              <a:buChar char="•"/>
-            </a:pPr>
-            <a:r>
-              <a:rPr lang="en-US" sz="1450" dirty="0">
-                <a:solidFill>
-                  <a:srgbClr val="1A1A1A"/>
-                </a:solidFill>
-                <a:latin typeface="Microsoft YaHei" pitchFamily="34" charset="0"/>
-                <a:ea typeface="Microsoft YaHei" pitchFamily="34" charset="-122"/>
-                <a:cs typeface="Microsoft YaHei" pitchFamily="34" charset="-120"/>
-              </a:rPr>
-              <a:t>髓系细胞不满足筛选前提：两物种五器官 62 个「细胞类型 × 分层」中无一符合，IL18 检出率最高者同时也是 CASP1 检出率最高者。</a:t>
-            </a:r>
-            <a:endParaRPr lang="en-US" sz="1450" dirty="0"/>
-          </a:p>
-        </p:txBody>
-      </p:sp>
-      <p:sp>
-        <p:nvSpPr>
-          <p:cNvPr id="4" name="Text 2"/>
-          <p:cNvSpPr txBox="1"/>
-          <p:nvPr/>
-        </p:nvSpPr>
-        <p:spPr>
-          <a:xfrm>
-            <a:off x="868680" y="2020824"/>
-            <a:ext cx="10515600" cy="621792"/>
-          </a:xfrm>
-          <a:prstGeom prst="rect">
-            <a:avLst/>
-          </a:prstGeom>
-          <a:noFill/>
-          <a:ln/>
-        </p:spPr>
-        <p:txBody>
-          <a:bodyPr wrap="square" rtlCol="0" anchor="t"/>
-          <a:lstStyle/>
-          <a:p>
-            <a:pPr marL="190500" indent="-190500">
-              <a:lnSpc>
-                <a:spcPct val="120000"/>
-              </a:lnSpc>
-              <a:buSzPct val="100000"/>
-              <a:buChar char="•"/>
-            </a:pPr>
-            <a:r>
-              <a:rPr lang="en-US" sz="1450" dirty="0">
-                <a:solidFill>
-                  <a:srgbClr val="1A1A1A"/>
-                </a:solidFill>
-                <a:latin typeface="Microsoft YaHei" pitchFamily="34" charset="0"/>
-                <a:ea typeface="Microsoft YaHei" pitchFamily="34" charset="-122"/>
-                <a:cs typeface="Microsoft YaHei" pitchFamily="34" charset="-120"/>
-              </a:rPr>
-              <a:t>小鼠命中胶质：皮层与海马星形胶质 IL18 56.7%（2135/3766，40 供体）、CASP1 2/3766；少突胶质 27.3%、CASP1 2/8987。单核分层中星形胶质 CASP1 为 4.65%，不复现。</a:t>
-            </a:r>
-            <a:endParaRPr lang="en-US" sz="1450" dirty="0"/>
-          </a:p>
-        </p:txBody>
-      </p:sp>
-      <p:sp>
-        <p:nvSpPr>
-          <p:cNvPr id="5" name="Text 3"/>
-          <p:cNvSpPr txBox="1"/>
-          <p:nvPr/>
-        </p:nvSpPr>
-        <p:spPr>
-          <a:xfrm>
-            <a:off x="868680" y="2761488"/>
-            <a:ext cx="10515600" cy="621792"/>
-          </a:xfrm>
-          <a:prstGeom prst="rect">
-            <a:avLst/>
-          </a:prstGeom>
-          <a:noFill/>
-          <a:ln/>
-        </p:spPr>
-        <p:txBody>
-          <a:bodyPr wrap="square" rtlCol="0" anchor="t"/>
-          <a:lstStyle/>
-          <a:p>
-            <a:pPr marL="190500" indent="-190500">
-              <a:lnSpc>
-                <a:spcPct val="120000"/>
-              </a:lnSpc>
-              <a:buSzPct val="100000"/>
-              <a:buChar char="•"/>
-            </a:pPr>
-            <a:r>
-              <a:rPr lang="en-US" sz="1450" dirty="0">
-                <a:solidFill>
-                  <a:srgbClr val="1A1A1A"/>
-                </a:solidFill>
-                <a:latin typeface="Microsoft YaHei" pitchFamily="34" charset="0"/>
-                <a:ea typeface="Microsoft YaHei" pitchFamily="34" charset="-122"/>
-                <a:cs typeface="Microsoft YaHei" pitchFamily="34" charset="-120"/>
-              </a:rPr>
-              <a:t>人命中皮层神经元亚类：PV 中间神经元 IL18 26.8%（5286/19711，78 供体）、CASP1 24/19711，另一 234 供体队列复现；L5 ET 三个分层 IL18 31.8%–43.3%。</a:t>
-            </a:r>
-            <a:endParaRPr lang="en-US" sz="1450" dirty="0"/>
-          </a:p>
-        </p:txBody>
-      </p:sp>
-      <p:sp>
-        <p:nvSpPr>
-          <p:cNvPr id="6" name="Text 4"/>
-          <p:cNvSpPr txBox="1"/>
-          <p:nvPr/>
-        </p:nvSpPr>
-        <p:spPr>
-          <a:xfrm>
-            <a:off x="868680" y="3502152"/>
-            <a:ext cx="10515600" cy="356616"/>
-          </a:xfrm>
-          <a:prstGeom prst="rect">
-            <a:avLst/>
-          </a:prstGeom>
-          <a:noFill/>
-          <a:ln/>
-        </p:spPr>
-        <p:txBody>
-          <a:bodyPr wrap="square" rtlCol="0" anchor="t"/>
-          <a:lstStyle/>
-          <a:p>
-            <a:pPr marL="190500" indent="-190500">
-              <a:lnSpc>
-                <a:spcPct val="120000"/>
-              </a:lnSpc>
-              <a:buSzPct val="100000"/>
-              <a:buChar char="•"/>
-            </a:pPr>
-            <a:r>
-              <a:rPr lang="en-US" sz="1450" dirty="0">
-                <a:solidFill>
-                  <a:srgbClr val="1A1A1A"/>
-                </a:solidFill>
-                <a:latin typeface="Microsoft YaHei" pitchFamily="34" charset="0"/>
-                <a:ea typeface="Microsoft YaHei" pitchFamily="34" charset="-122"/>
-                <a:cs typeface="Microsoft YaHei" pitchFamily="34" charset="-120"/>
-              </a:rPr>
-              <a:t>两组命中不跨物种：人皮层星形胶质 IL18 4.8%，小鼠皮层 PV 中间神经元 Il18 2.2%。</a:t>
-            </a:r>
-            <a:endParaRPr lang="en-US" sz="1450" dirty="0"/>
-          </a:p>
-        </p:txBody>
-      </p:sp>
-      <p:sp>
-        <p:nvSpPr>
-          <p:cNvPr id="7" name="Text 5"/>
-          <p:cNvSpPr txBox="1"/>
-          <p:nvPr/>
-        </p:nvSpPr>
-        <p:spPr>
-          <a:xfrm>
-            <a:off x="868680" y="3977640"/>
-            <a:ext cx="10515600" cy="621792"/>
-          </a:xfrm>
-          <a:prstGeom prst="rect">
-            <a:avLst/>
-          </a:prstGeom>
-          <a:noFill/>
-          <a:ln/>
-        </p:spPr>
-        <p:txBody>
-          <a:bodyPr wrap="square" rtlCol="0" anchor="t"/>
-          <a:lstStyle/>
-          <a:p>
-            <a:pPr marL="190500" indent="-190500">
-              <a:lnSpc>
-                <a:spcPct val="120000"/>
-              </a:lnSpc>
-              <a:buSzPct val="100000"/>
-              <a:buChar char="•"/>
-            </a:pPr>
-            <a:r>
-              <a:rPr lang="en-US" sz="1450" dirty="0">
-                <a:solidFill>
-                  <a:srgbClr val="1A1A1A"/>
-                </a:solidFill>
-                <a:latin typeface="Microsoft YaHei" pitchFamily="34" charset="0"/>
-                <a:ea typeface="Microsoft YaHei" pitchFamily="34" charset="-122"/>
-                <a:cs typeface="Microsoft YaHei" pitchFamily="34" charset="-120"/>
-              </a:rPr>
-              <a:t>脑外 7 个细胞类型方向符合，证据均为单一来源或存在分歧；最高者人肺肥大细胞 IL18 34.9%（1851/5299，44 供体）、CASP1 2.60%。</a:t>
-            </a:r>
-            <a:endParaRPr lang="en-US" sz="1450" dirty="0"/>
-          </a:p>
-        </p:txBody>
-      </p:sp>
-      <p:sp>
-        <p:nvSpPr>
-          <p:cNvPr id="8" name="Text 6"/>
-          <p:cNvSpPr txBox="1"/>
-          <p:nvPr/>
-        </p:nvSpPr>
-        <p:spPr>
-          <a:xfrm>
-            <a:off x="868680" y="4718304"/>
-            <a:ext cx="10515600" cy="356616"/>
-          </a:xfrm>
-          <a:prstGeom prst="rect">
-            <a:avLst/>
-          </a:prstGeom>
-          <a:noFill/>
-          <a:ln/>
-        </p:spPr>
-        <p:txBody>
-          <a:bodyPr wrap="square" rtlCol="0" anchor="t"/>
-          <a:lstStyle/>
-          <a:p>
-            <a:pPr marL="190500" indent="-190500">
-              <a:lnSpc>
-                <a:spcPct val="120000"/>
-              </a:lnSpc>
-              <a:buSzPct val="100000"/>
-              <a:buChar char="•"/>
-            </a:pPr>
-            <a:r>
-              <a:rPr lang="en-US" sz="1450" dirty="0">
-                <a:solidFill>
-                  <a:srgbClr val="1A1A1A"/>
-                </a:solidFill>
-                <a:latin typeface="Microsoft YaHei" pitchFamily="34" charset="0"/>
-                <a:ea typeface="Microsoft YaHei" pitchFamily="34" charset="-122"/>
-                <a:cs typeface="Microsoft YaHei" pitchFamily="34" charset="-120"/>
-              </a:rPr>
-              <a:t>人肝与人脊髓白质各 11 类，无符合者。</a:t>
-            </a:r>
-            <a:endParaRPr lang="en-US" sz="1450" dirty="0"/>
-          </a:p>
-        </p:txBody>
-      </p:sp>
-      <p:sp>
-        <p:nvSpPr>
-          <p:cNvPr id="9" name="Text 7"/>
-          <p:cNvSpPr txBox="1"/>
-          <p:nvPr/>
-        </p:nvSpPr>
-        <p:spPr>
-          <a:xfrm>
-            <a:off x="868680" y="5193792"/>
-            <a:ext cx="10515600" cy="356616"/>
-          </a:xfrm>
-          <a:prstGeom prst="rect">
-            <a:avLst/>
-          </a:prstGeom>
-          <a:noFill/>
-          <a:ln/>
-        </p:spPr>
-        <p:txBody>
-          <a:bodyPr wrap="square" rtlCol="0" anchor="t"/>
-          <a:lstStyle/>
-          <a:p>
-            <a:pPr marL="190500" indent="-190500">
-              <a:lnSpc>
-                <a:spcPct val="120000"/>
-              </a:lnSpc>
-              <a:buSzPct val="100000"/>
-              <a:buChar char="•"/>
-            </a:pPr>
-            <a:r>
-              <a:rPr lang="en-US" sz="1450" dirty="0">
-                <a:solidFill>
-                  <a:srgbClr val="1A1A1A"/>
-                </a:solidFill>
-                <a:latin typeface="Microsoft YaHei" pitchFamily="34" charset="0"/>
-                <a:ea typeface="Microsoft YaHei" pitchFamily="34" charset="-122"/>
-                <a:cs typeface="Microsoft YaHei" pitchFamily="34" charset="-120"/>
-              </a:rPr>
-              <a:t>短 IL-18 转录本在人正常组织不被显著使用：GTEx v8 6792 个样本中占 0.09%。</a:t>
-            </a:r>
-            <a:endParaRPr lang="en-US" sz="1450" dirty="0"/>
-          </a:p>
-        </p:txBody>
-      </p:sp>
-      <p:sp>
-        <p:nvSpPr>
-          <p:cNvPr id="10" name="Text 8"/>
-          <p:cNvSpPr txBox="1"/>
-          <p:nvPr/>
-        </p:nvSpPr>
-        <p:spPr>
-          <a:xfrm>
-            <a:off x="868680" y="6382512"/>
-            <a:ext cx="10698480" cy="310896"/>
+            <a:off x="640080" y="804672"/>
+            <a:ext cx="10881360" cy="274320"/>
           </a:xfrm>
           <a:prstGeom prst="rect">
             <a:avLst/>
@@ -4332,55 +3117,7516 @@
               <a:buNone/>
             </a:pPr>
             <a:r>
-              <a:rPr lang="en-US" sz="1050" dirty="0">
+              <a:rPr lang="en-US" sz="1200" dirty="0">
                 <a:solidFill>
-                  <a:srgbClr val="9AA0A6"/>
+                  <a:srgbClr val="6B6B6B"/>
                 </a:solidFill>
                 <a:latin typeface="Microsoft YaHei" pitchFamily="34" charset="0"/>
                 <a:ea typeface="Microsoft YaHei" pitchFamily="34" charset="-122"/>
                 <a:cs typeface="Microsoft YaHei" pitchFamily="34" charset="-120"/>
               </a:rPr>
-              <a:t>检出率为合并口径（原始计数 ≥1 的细胞数 ÷ 分析细胞数）。29 个分层，静息基线。完整判定见 results/answer_table.tsv。</a:t>
+              <a:t>符合「IL18 高 + CASP1 低」的细胞类型，按参考层支持由强到弱。支持 / 分歧 = 参考层中显示 CASP1 近零 / 可测的独立来源数</a:t>
             </a:r>
-            <a:endParaRPr lang="en-US" sz="1050" dirty="0"/>
+            <a:endParaRPr lang="en-US" sz="1200" dirty="0"/>
           </a:p>
         </p:txBody>
       </p:sp>
-    </p:spTree>
-  </p:cSld>
-  <p:clrMapOvr>
-    <a:masterClrMapping/>
-  </p:clrMapOvr>
-</p:sld>
-</file>
-
-<file path=ppt/slides/slide15.xml><?xml version="1.0" encoding="utf-8"?>
-<p:sld xmlns:a="http://schemas.openxmlformats.org/drawingml/2006/main" xmlns:r="http://schemas.openxmlformats.org/officeDocument/2006/relationships" xmlns:p="http://schemas.openxmlformats.org/presentationml/2006/main">
-  <p:cSld name="Slide 15">
-    <p:spTree>
-      <p:nvGrpSpPr>
-        <p:cNvPr id="1" name=""/>
-        <p:cNvGrpSpPr/>
-        <p:nvPr/>
-      </p:nvGrpSpPr>
-      <p:grpSpPr>
-        <a:xfrm>
-          <a:off x="0" y="0"/>
-          <a:ext cx="0" cy="0"/>
-          <a:chOff x="0" y="0"/>
-          <a:chExt cx="0" cy="0"/>
-        </a:xfrm>
-      </p:grpSpPr>
+      <p:graphicFrame>
+        <p:nvGraphicFramePr>
+          <p:cNvPr id="15" name="Table 0"/>
+          <p:cNvGraphicFramePr>
+            <a:graphicFrameLocks noGrp="1"/>
+          </p:cNvGraphicFramePr>
+          <p:nvPr>
+            <p:extLst>
+              <p:ext uri="{D42A27DB-BD31-4B8C-83A1-F6EECF244321}">
+                <p14:modId xmlns:p14="http://schemas.microsoft.com/office/powerpoint/2010/main" val="1579011935"/>
+              </p:ext>
+            </p:extLst>
+          </p:nvPr>
+        </p:nvGraphicFramePr>
+        <p:xfrm>
+          <a:off x="640080" y="1152144"/>
+          <a:ext cx="10908792" cy="914400"/>
+        </p:xfrm>
+        <a:graphic>
+          <a:graphicData uri="http://schemas.openxmlformats.org/drawingml/2006/table">
+            <a:tbl>
+              <a:tblPr/>
+              <a:tblGrid>
+                <a:gridCol w="1417320"/>
+                <a:gridCol w="3063240"/>
+                <a:gridCol w="2194560"/>
+                <a:gridCol w="2194560"/>
+                <a:gridCol w="667512"/>
+                <a:gridCol w="685800"/>
+                <a:gridCol w="685800"/>
+              </a:tblGrid>
+              <a:tr h="205740">
+                <a:tc>
+                  <a:txBody>
+                    <a:bodyPr/>
+                    <a:lstStyle/>
+                    <a:p>
+                      <a:pPr indent="0" marL="0">
+                        <a:buNone/>
+                      </a:pPr>
+                      <a:r>
+                        <a:rPr lang="en-US" sz="1050" b="1" dirty="0">
+                          <a:solidFill>
+                            <a:srgbClr val="3C3C3C"/>
+                          </a:solidFill>
+                          <a:latin typeface="Microsoft YaHei" pitchFamily="34" charset="0"/>
+                          <a:ea typeface="Microsoft YaHei" pitchFamily="34" charset="-122"/>
+                          <a:cs typeface="Microsoft YaHei" pitchFamily="34" charset="-120"/>
+                        </a:rPr>
+                        <a:t>物种 · 器官</a:t>
+                      </a:r>
+                      <a:endParaRPr lang="en-US" sz="1050" dirty="0">
+                        <a:latin typeface="Microsoft YaHei" charset="0"/>
+                        <a:ea typeface="Microsoft YaHei" charset="0"/>
+                        <a:cs typeface="Microsoft YaHei" charset="0"/>
+                      </a:endParaRPr>
+                    </a:p>
+                  </a:txBody>
+                  <a:tcPr marL="91440" marR="91440" marT="45720" marB="45720" anchor="ctr">
+                    <a:lnL w="6350" cap="flat" cmpd="sng" algn="ctr">
+                      <a:solidFill>
+                        <a:srgbClr val="E2E5E9"/>
+                      </a:solidFill>
+                      <a:prstDash val="solid"/>
+                      <a:round/>
+                      <a:headEnd type="none" w="med" len="med"/>
+                      <a:tailEnd type="none" w="med" len="med"/>
+                    </a:lnL>
+                    <a:lnR w="6350" cap="flat" cmpd="sng" algn="ctr">
+                      <a:solidFill>
+                        <a:srgbClr val="E2E5E9"/>
+                      </a:solidFill>
+                      <a:prstDash val="solid"/>
+                      <a:round/>
+                      <a:headEnd type="none" w="med" len="med"/>
+                      <a:tailEnd type="none" w="med" len="med"/>
+                    </a:lnR>
+                    <a:lnT w="6350" cap="flat" cmpd="sng" algn="ctr">
+                      <a:solidFill>
+                        <a:srgbClr val="E2E5E9"/>
+                      </a:solidFill>
+                      <a:prstDash val="solid"/>
+                      <a:round/>
+                      <a:headEnd type="none" w="med" len="med"/>
+                      <a:tailEnd type="none" w="med" len="med"/>
+                    </a:lnT>
+                    <a:lnB w="6350" cap="flat" cmpd="sng" algn="ctr">
+                      <a:solidFill>
+                        <a:srgbClr val="E2E5E9"/>
+                      </a:solidFill>
+                      <a:prstDash val="solid"/>
+                      <a:round/>
+                      <a:headEnd type="none" w="med" len="med"/>
+                      <a:tailEnd type="none" w="med" len="med"/>
+                    </a:lnB>
+                    <a:solidFill>
+                      <a:srgbClr val="EEF1F5"/>
+                    </a:solidFill>
+                  </a:tcPr>
+                </a:tc>
+                <a:tc>
+                  <a:txBody>
+                    <a:bodyPr/>
+                    <a:lstStyle/>
+                    <a:p>
+                      <a:pPr indent="0" marL="0">
+                        <a:buNone/>
+                      </a:pPr>
+                      <a:r>
+                        <a:rPr lang="en-US" sz="1050" b="1" dirty="0">
+                          <a:solidFill>
+                            <a:srgbClr val="3C3C3C"/>
+                          </a:solidFill>
+                          <a:latin typeface="Microsoft YaHei" pitchFamily="34" charset="0"/>
+                          <a:ea typeface="Microsoft YaHei" pitchFamily="34" charset="-122"/>
+                          <a:cs typeface="Microsoft YaHei" pitchFamily="34" charset="-120"/>
+                        </a:rPr>
+                        <a:t>细胞类型</a:t>
+                      </a:r>
+                      <a:endParaRPr lang="en-US" sz="1050" dirty="0">
+                        <a:latin typeface="Microsoft YaHei" charset="0"/>
+                        <a:ea typeface="Microsoft YaHei" charset="0"/>
+                        <a:cs typeface="Microsoft YaHei" charset="0"/>
+                      </a:endParaRPr>
+                    </a:p>
+                  </a:txBody>
+                  <a:tcPr marL="91440" marR="91440" marT="45720" marB="45720" anchor="ctr">
+                    <a:lnL w="6350" cap="flat" cmpd="sng" algn="ctr">
+                      <a:solidFill>
+                        <a:srgbClr val="E2E5E9"/>
+                      </a:solidFill>
+                      <a:prstDash val="solid"/>
+                      <a:round/>
+                      <a:headEnd type="none" w="med" len="med"/>
+                      <a:tailEnd type="none" w="med" len="med"/>
+                    </a:lnL>
+                    <a:lnR w="6350" cap="flat" cmpd="sng" algn="ctr">
+                      <a:solidFill>
+                        <a:srgbClr val="E2E5E9"/>
+                      </a:solidFill>
+                      <a:prstDash val="solid"/>
+                      <a:round/>
+                      <a:headEnd type="none" w="med" len="med"/>
+                      <a:tailEnd type="none" w="med" len="med"/>
+                    </a:lnR>
+                    <a:lnT w="6350" cap="flat" cmpd="sng" algn="ctr">
+                      <a:solidFill>
+                        <a:srgbClr val="E2E5E9"/>
+                      </a:solidFill>
+                      <a:prstDash val="solid"/>
+                      <a:round/>
+                      <a:headEnd type="none" w="med" len="med"/>
+                      <a:tailEnd type="none" w="med" len="med"/>
+                    </a:lnT>
+                    <a:lnB w="6350" cap="flat" cmpd="sng" algn="ctr">
+                      <a:solidFill>
+                        <a:srgbClr val="E2E5E9"/>
+                      </a:solidFill>
+                      <a:prstDash val="solid"/>
+                      <a:round/>
+                      <a:headEnd type="none" w="med" len="med"/>
+                      <a:tailEnd type="none" w="med" len="med"/>
+                    </a:lnB>
+                    <a:solidFill>
+                      <a:srgbClr val="EEF1F5"/>
+                    </a:solidFill>
+                  </a:tcPr>
+                </a:tc>
+                <a:tc>
+                  <a:txBody>
+                    <a:bodyPr/>
+                    <a:lstStyle/>
+                    <a:p>
+                      <a:pPr indent="0" marL="0">
+                        <a:buNone/>
+                      </a:pPr>
+                      <a:r>
+                        <a:rPr lang="en-US" sz="1050" b="1" dirty="0">
+                          <a:solidFill>
+                            <a:srgbClr val="3C3C3C"/>
+                          </a:solidFill>
+                          <a:latin typeface="Microsoft YaHei" pitchFamily="34" charset="0"/>
+                          <a:ea typeface="Microsoft YaHei" pitchFamily="34" charset="-122"/>
+                          <a:cs typeface="Microsoft YaHei" pitchFamily="34" charset="-120"/>
+                        </a:rPr>
+                        <a:t>IL18 检出</a:t>
+                      </a:r>
+                      <a:endParaRPr lang="en-US" sz="1050" dirty="0">
+                        <a:latin typeface="Microsoft YaHei" charset="0"/>
+                        <a:ea typeface="Microsoft YaHei" charset="0"/>
+                        <a:cs typeface="Microsoft YaHei" charset="0"/>
+                      </a:endParaRPr>
+                    </a:p>
+                  </a:txBody>
+                  <a:tcPr marL="91440" marR="91440" marT="45720" marB="45720" anchor="ctr">
+                    <a:lnL w="6350" cap="flat" cmpd="sng" algn="ctr">
+                      <a:solidFill>
+                        <a:srgbClr val="E2E5E9"/>
+                      </a:solidFill>
+                      <a:prstDash val="solid"/>
+                      <a:round/>
+                      <a:headEnd type="none" w="med" len="med"/>
+                      <a:tailEnd type="none" w="med" len="med"/>
+                    </a:lnL>
+                    <a:lnR w="6350" cap="flat" cmpd="sng" algn="ctr">
+                      <a:solidFill>
+                        <a:srgbClr val="E2E5E9"/>
+                      </a:solidFill>
+                      <a:prstDash val="solid"/>
+                      <a:round/>
+                      <a:headEnd type="none" w="med" len="med"/>
+                      <a:tailEnd type="none" w="med" len="med"/>
+                    </a:lnR>
+                    <a:lnT w="6350" cap="flat" cmpd="sng" algn="ctr">
+                      <a:solidFill>
+                        <a:srgbClr val="E2E5E9"/>
+                      </a:solidFill>
+                      <a:prstDash val="solid"/>
+                      <a:round/>
+                      <a:headEnd type="none" w="med" len="med"/>
+                      <a:tailEnd type="none" w="med" len="med"/>
+                    </a:lnT>
+                    <a:lnB w="6350" cap="flat" cmpd="sng" algn="ctr">
+                      <a:solidFill>
+                        <a:srgbClr val="E2E5E9"/>
+                      </a:solidFill>
+                      <a:prstDash val="solid"/>
+                      <a:round/>
+                      <a:headEnd type="none" w="med" len="med"/>
+                      <a:tailEnd type="none" w="med" len="med"/>
+                    </a:lnB>
+                    <a:solidFill>
+                      <a:srgbClr val="EEF1F5"/>
+                    </a:solidFill>
+                  </a:tcPr>
+                </a:tc>
+                <a:tc>
+                  <a:txBody>
+                    <a:bodyPr/>
+                    <a:lstStyle/>
+                    <a:p>
+                      <a:pPr indent="0" marL="0">
+                        <a:buNone/>
+                      </a:pPr>
+                      <a:r>
+                        <a:rPr lang="en-US" sz="1050" b="1" dirty="0">
+                          <a:solidFill>
+                            <a:srgbClr val="3C3C3C"/>
+                          </a:solidFill>
+                          <a:latin typeface="Microsoft YaHei" pitchFamily="34" charset="0"/>
+                          <a:ea typeface="Microsoft YaHei" pitchFamily="34" charset="-122"/>
+                          <a:cs typeface="Microsoft YaHei" pitchFamily="34" charset="-120"/>
+                        </a:rPr>
+                        <a:t>CASP1 检出</a:t>
+                      </a:r>
+                      <a:endParaRPr lang="en-US" sz="1050" dirty="0">
+                        <a:latin typeface="Microsoft YaHei" charset="0"/>
+                        <a:ea typeface="Microsoft YaHei" charset="0"/>
+                        <a:cs typeface="Microsoft YaHei" charset="0"/>
+                      </a:endParaRPr>
+                    </a:p>
+                  </a:txBody>
+                  <a:tcPr marL="91440" marR="91440" marT="45720" marB="45720" anchor="ctr">
+                    <a:lnL w="6350" cap="flat" cmpd="sng" algn="ctr">
+                      <a:solidFill>
+                        <a:srgbClr val="E2E5E9"/>
+                      </a:solidFill>
+                      <a:prstDash val="solid"/>
+                      <a:round/>
+                      <a:headEnd type="none" w="med" len="med"/>
+                      <a:tailEnd type="none" w="med" len="med"/>
+                    </a:lnL>
+                    <a:lnR w="6350" cap="flat" cmpd="sng" algn="ctr">
+                      <a:solidFill>
+                        <a:srgbClr val="E2E5E9"/>
+                      </a:solidFill>
+                      <a:prstDash val="solid"/>
+                      <a:round/>
+                      <a:headEnd type="none" w="med" len="med"/>
+                      <a:tailEnd type="none" w="med" len="med"/>
+                    </a:lnR>
+                    <a:lnT w="6350" cap="flat" cmpd="sng" algn="ctr">
+                      <a:solidFill>
+                        <a:srgbClr val="E2E5E9"/>
+                      </a:solidFill>
+                      <a:prstDash val="solid"/>
+                      <a:round/>
+                      <a:headEnd type="none" w="med" len="med"/>
+                      <a:tailEnd type="none" w="med" len="med"/>
+                    </a:lnT>
+                    <a:lnB w="6350" cap="flat" cmpd="sng" algn="ctr">
+                      <a:solidFill>
+                        <a:srgbClr val="E2E5E9"/>
+                      </a:solidFill>
+                      <a:prstDash val="solid"/>
+                      <a:round/>
+                      <a:headEnd type="none" w="med" len="med"/>
+                      <a:tailEnd type="none" w="med" len="med"/>
+                    </a:lnB>
+                    <a:solidFill>
+                      <a:srgbClr val="EEF1F5"/>
+                    </a:solidFill>
+                  </a:tcPr>
+                </a:tc>
+                <a:tc>
+                  <a:txBody>
+                    <a:bodyPr/>
+                    <a:lstStyle/>
+                    <a:p>
+                      <a:pPr indent="0" marL="0">
+                        <a:buNone/>
+                      </a:pPr>
+                      <a:r>
+                        <a:rPr lang="en-US" sz="1050" b="1" dirty="0">
+                          <a:solidFill>
+                            <a:srgbClr val="3C3C3C"/>
+                          </a:solidFill>
+                          <a:latin typeface="Microsoft YaHei" pitchFamily="34" charset="0"/>
+                          <a:ea typeface="Microsoft YaHei" pitchFamily="34" charset="-122"/>
+                          <a:cs typeface="Microsoft YaHei" pitchFamily="34" charset="-120"/>
+                        </a:rPr>
+                        <a:t>供体</a:t>
+                      </a:r>
+                      <a:endParaRPr lang="en-US" sz="1050" dirty="0">
+                        <a:latin typeface="Microsoft YaHei" charset="0"/>
+                        <a:ea typeface="Microsoft YaHei" charset="0"/>
+                        <a:cs typeface="Microsoft YaHei" charset="0"/>
+                      </a:endParaRPr>
+                    </a:p>
+                  </a:txBody>
+                  <a:tcPr marL="91440" marR="91440" marT="45720" marB="45720" anchor="ctr">
+                    <a:lnL w="6350" cap="flat" cmpd="sng" algn="ctr">
+                      <a:solidFill>
+                        <a:srgbClr val="E2E5E9"/>
+                      </a:solidFill>
+                      <a:prstDash val="solid"/>
+                      <a:round/>
+                      <a:headEnd type="none" w="med" len="med"/>
+                      <a:tailEnd type="none" w="med" len="med"/>
+                    </a:lnL>
+                    <a:lnR w="6350" cap="flat" cmpd="sng" algn="ctr">
+                      <a:solidFill>
+                        <a:srgbClr val="E2E5E9"/>
+                      </a:solidFill>
+                      <a:prstDash val="solid"/>
+                      <a:round/>
+                      <a:headEnd type="none" w="med" len="med"/>
+                      <a:tailEnd type="none" w="med" len="med"/>
+                    </a:lnR>
+                    <a:lnT w="6350" cap="flat" cmpd="sng" algn="ctr">
+                      <a:solidFill>
+                        <a:srgbClr val="E2E5E9"/>
+                      </a:solidFill>
+                      <a:prstDash val="solid"/>
+                      <a:round/>
+                      <a:headEnd type="none" w="med" len="med"/>
+                      <a:tailEnd type="none" w="med" len="med"/>
+                    </a:lnT>
+                    <a:lnB w="6350" cap="flat" cmpd="sng" algn="ctr">
+                      <a:solidFill>
+                        <a:srgbClr val="E2E5E9"/>
+                      </a:solidFill>
+                      <a:prstDash val="solid"/>
+                      <a:round/>
+                      <a:headEnd type="none" w="med" len="med"/>
+                      <a:tailEnd type="none" w="med" len="med"/>
+                    </a:lnB>
+                    <a:solidFill>
+                      <a:srgbClr val="EEF1F5"/>
+                    </a:solidFill>
+                  </a:tcPr>
+                </a:tc>
+                <a:tc>
+                  <a:txBody>
+                    <a:bodyPr/>
+                    <a:lstStyle/>
+                    <a:p>
+                      <a:pPr indent="0" marL="0">
+                        <a:buNone/>
+                      </a:pPr>
+                      <a:r>
+                        <a:rPr lang="en-US" sz="1050" b="1" dirty="0">
+                          <a:solidFill>
+                            <a:srgbClr val="3C3C3C"/>
+                          </a:solidFill>
+                          <a:latin typeface="Microsoft YaHei" pitchFamily="34" charset="0"/>
+                          <a:ea typeface="Microsoft YaHei" pitchFamily="34" charset="-122"/>
+                          <a:cs typeface="Microsoft YaHei" pitchFamily="34" charset="-120"/>
+                        </a:rPr>
+                        <a:t>支持</a:t>
+                      </a:r>
+                      <a:endParaRPr lang="en-US" sz="1050" dirty="0">
+                        <a:latin typeface="Microsoft YaHei" charset="0"/>
+                        <a:ea typeface="Microsoft YaHei" charset="0"/>
+                        <a:cs typeface="Microsoft YaHei" charset="0"/>
+                      </a:endParaRPr>
+                    </a:p>
+                  </a:txBody>
+                  <a:tcPr marL="91440" marR="91440" marT="45720" marB="45720" anchor="ctr">
+                    <a:lnL w="6350" cap="flat" cmpd="sng" algn="ctr">
+                      <a:solidFill>
+                        <a:srgbClr val="E2E5E9"/>
+                      </a:solidFill>
+                      <a:prstDash val="solid"/>
+                      <a:round/>
+                      <a:headEnd type="none" w="med" len="med"/>
+                      <a:tailEnd type="none" w="med" len="med"/>
+                    </a:lnL>
+                    <a:lnR w="6350" cap="flat" cmpd="sng" algn="ctr">
+                      <a:solidFill>
+                        <a:srgbClr val="E2E5E9"/>
+                      </a:solidFill>
+                      <a:prstDash val="solid"/>
+                      <a:round/>
+                      <a:headEnd type="none" w="med" len="med"/>
+                      <a:tailEnd type="none" w="med" len="med"/>
+                    </a:lnR>
+                    <a:lnT w="6350" cap="flat" cmpd="sng" algn="ctr">
+                      <a:solidFill>
+                        <a:srgbClr val="E2E5E9"/>
+                      </a:solidFill>
+                      <a:prstDash val="solid"/>
+                      <a:round/>
+                      <a:headEnd type="none" w="med" len="med"/>
+                      <a:tailEnd type="none" w="med" len="med"/>
+                    </a:lnT>
+                    <a:lnB w="6350" cap="flat" cmpd="sng" algn="ctr">
+                      <a:solidFill>
+                        <a:srgbClr val="E2E5E9"/>
+                      </a:solidFill>
+                      <a:prstDash val="solid"/>
+                      <a:round/>
+                      <a:headEnd type="none" w="med" len="med"/>
+                      <a:tailEnd type="none" w="med" len="med"/>
+                    </a:lnB>
+                    <a:solidFill>
+                      <a:srgbClr val="EEF1F5"/>
+                    </a:solidFill>
+                  </a:tcPr>
+                </a:tc>
+                <a:tc>
+                  <a:txBody>
+                    <a:bodyPr/>
+                    <a:lstStyle/>
+                    <a:p>
+                      <a:pPr indent="0" marL="0">
+                        <a:buNone/>
+                      </a:pPr>
+                      <a:r>
+                        <a:rPr lang="en-US" sz="1050" b="1" dirty="0">
+                          <a:solidFill>
+                            <a:srgbClr val="3C3C3C"/>
+                          </a:solidFill>
+                          <a:latin typeface="Microsoft YaHei" pitchFamily="34" charset="0"/>
+                          <a:ea typeface="Microsoft YaHei" pitchFamily="34" charset="-122"/>
+                          <a:cs typeface="Microsoft YaHei" pitchFamily="34" charset="-120"/>
+                        </a:rPr>
+                        <a:t>分歧</a:t>
+                      </a:r>
+                      <a:endParaRPr lang="en-US" sz="1050" dirty="0">
+                        <a:latin typeface="Microsoft YaHei" charset="0"/>
+                        <a:ea typeface="Microsoft YaHei" charset="0"/>
+                        <a:cs typeface="Microsoft YaHei" charset="0"/>
+                      </a:endParaRPr>
+                    </a:p>
+                  </a:txBody>
+                  <a:tcPr marL="91440" marR="91440" marT="45720" marB="45720" anchor="ctr">
+                    <a:lnL w="6350" cap="flat" cmpd="sng" algn="ctr">
+                      <a:solidFill>
+                        <a:srgbClr val="E2E5E9"/>
+                      </a:solidFill>
+                      <a:prstDash val="solid"/>
+                      <a:round/>
+                      <a:headEnd type="none" w="med" len="med"/>
+                      <a:tailEnd type="none" w="med" len="med"/>
+                    </a:lnL>
+                    <a:lnR w="6350" cap="flat" cmpd="sng" algn="ctr">
+                      <a:solidFill>
+                        <a:srgbClr val="E2E5E9"/>
+                      </a:solidFill>
+                      <a:prstDash val="solid"/>
+                      <a:round/>
+                      <a:headEnd type="none" w="med" len="med"/>
+                      <a:tailEnd type="none" w="med" len="med"/>
+                    </a:lnR>
+                    <a:lnT w="6350" cap="flat" cmpd="sng" algn="ctr">
+                      <a:solidFill>
+                        <a:srgbClr val="E2E5E9"/>
+                      </a:solidFill>
+                      <a:prstDash val="solid"/>
+                      <a:round/>
+                      <a:headEnd type="none" w="med" len="med"/>
+                      <a:tailEnd type="none" w="med" len="med"/>
+                    </a:lnT>
+                    <a:lnB w="6350" cap="flat" cmpd="sng" algn="ctr">
+                      <a:solidFill>
+                        <a:srgbClr val="E2E5E9"/>
+                      </a:solidFill>
+                      <a:prstDash val="solid"/>
+                      <a:round/>
+                      <a:headEnd type="none" w="med" len="med"/>
+                      <a:tailEnd type="none" w="med" len="med"/>
+                    </a:lnB>
+                    <a:solidFill>
+                      <a:srgbClr val="EEF1F5"/>
+                    </a:solidFill>
+                  </a:tcPr>
+                </a:tc>
+              </a:tr>
+              <a:tr h="205740">
+                <a:tc>
+                  <a:txBody>
+                    <a:bodyPr/>
+                    <a:lstStyle/>
+                    <a:p>
+                      <a:pPr indent="0" marL="0">
+                        <a:buNone/>
+                      </a:pPr>
+                      <a:r>
+                        <a:rPr lang="en-US" sz="1050" dirty="0">
+                          <a:solidFill>
+                            <a:srgbClr val="1A1A1A"/>
+                          </a:solidFill>
+                          <a:latin typeface="Microsoft YaHei" pitchFamily="34" charset="0"/>
+                          <a:ea typeface="Microsoft YaHei" pitchFamily="34" charset="-122"/>
+                          <a:cs typeface="Microsoft YaHei" pitchFamily="34" charset="-120"/>
+                        </a:rPr>
+                        <a:t>小鼠 · 脑</a:t>
+                      </a:r>
+                      <a:endParaRPr lang="en-US" sz="1050" dirty="0">
+                        <a:latin typeface="Microsoft YaHei" charset="0"/>
+                        <a:ea typeface="Microsoft YaHei" charset="0"/>
+                        <a:cs typeface="Microsoft YaHei" charset="0"/>
+                      </a:endParaRPr>
+                    </a:p>
+                  </a:txBody>
+                  <a:tcPr marL="91440" marR="91440" marT="45720" marB="45720" anchor="ctr">
+                    <a:lnL w="6350" cap="flat" cmpd="sng" algn="ctr">
+                      <a:solidFill>
+                        <a:srgbClr val="E2E5E9"/>
+                      </a:solidFill>
+                      <a:prstDash val="solid"/>
+                      <a:round/>
+                      <a:headEnd type="none" w="med" len="med"/>
+                      <a:tailEnd type="none" w="med" len="med"/>
+                    </a:lnL>
+                    <a:lnR w="6350" cap="flat" cmpd="sng" algn="ctr">
+                      <a:solidFill>
+                        <a:srgbClr val="E2E5E9"/>
+                      </a:solidFill>
+                      <a:prstDash val="solid"/>
+                      <a:round/>
+                      <a:headEnd type="none" w="med" len="med"/>
+                      <a:tailEnd type="none" w="med" len="med"/>
+                    </a:lnR>
+                    <a:lnT w="6350" cap="flat" cmpd="sng" algn="ctr">
+                      <a:solidFill>
+                        <a:srgbClr val="E2E5E9"/>
+                      </a:solidFill>
+                      <a:prstDash val="solid"/>
+                      <a:round/>
+                      <a:headEnd type="none" w="med" len="med"/>
+                      <a:tailEnd type="none" w="med" len="med"/>
+                    </a:lnT>
+                    <a:lnB w="6350" cap="flat" cmpd="sng" algn="ctr">
+                      <a:solidFill>
+                        <a:srgbClr val="E2E5E9"/>
+                      </a:solidFill>
+                      <a:prstDash val="solid"/>
+                      <a:round/>
+                      <a:headEnd type="none" w="med" len="med"/>
+                      <a:tailEnd type="none" w="med" len="med"/>
+                    </a:lnB>
+                  </a:tcPr>
+                </a:tc>
+                <a:tc>
+                  <a:txBody>
+                    <a:bodyPr/>
+                    <a:lstStyle/>
+                    <a:p>
+                      <a:pPr indent="0" marL="0">
+                        <a:buNone/>
+                      </a:pPr>
+                      <a:r>
+                        <a:rPr lang="en-US" sz="1050" dirty="0">
+                          <a:solidFill>
+                            <a:srgbClr val="1A1A1A"/>
+                          </a:solidFill>
+                          <a:latin typeface="Microsoft YaHei" pitchFamily="34" charset="0"/>
+                          <a:ea typeface="Microsoft YaHei" pitchFamily="34" charset="-122"/>
+                          <a:cs typeface="Microsoft YaHei" pitchFamily="34" charset="-120"/>
+                        </a:rPr>
+                        <a:t>星形胶质</a:t>
+                      </a:r>
+                      <a:endParaRPr lang="en-US" sz="1050" dirty="0">
+                        <a:latin typeface="Microsoft YaHei" charset="0"/>
+                        <a:ea typeface="Microsoft YaHei" charset="0"/>
+                        <a:cs typeface="Microsoft YaHei" charset="0"/>
+                      </a:endParaRPr>
+                    </a:p>
+                  </a:txBody>
+                  <a:tcPr marL="91440" marR="91440" marT="45720" marB="45720" anchor="ctr">
+                    <a:lnL w="6350" cap="flat" cmpd="sng" algn="ctr">
+                      <a:solidFill>
+                        <a:srgbClr val="E2E5E9"/>
+                      </a:solidFill>
+                      <a:prstDash val="solid"/>
+                      <a:round/>
+                      <a:headEnd type="none" w="med" len="med"/>
+                      <a:tailEnd type="none" w="med" len="med"/>
+                    </a:lnL>
+                    <a:lnR w="6350" cap="flat" cmpd="sng" algn="ctr">
+                      <a:solidFill>
+                        <a:srgbClr val="E2E5E9"/>
+                      </a:solidFill>
+                      <a:prstDash val="solid"/>
+                      <a:round/>
+                      <a:headEnd type="none" w="med" len="med"/>
+                      <a:tailEnd type="none" w="med" len="med"/>
+                    </a:lnR>
+                    <a:lnT w="6350" cap="flat" cmpd="sng" algn="ctr">
+                      <a:solidFill>
+                        <a:srgbClr val="E2E5E9"/>
+                      </a:solidFill>
+                      <a:prstDash val="solid"/>
+                      <a:round/>
+                      <a:headEnd type="none" w="med" len="med"/>
+                      <a:tailEnd type="none" w="med" len="med"/>
+                    </a:lnT>
+                    <a:lnB w="6350" cap="flat" cmpd="sng" algn="ctr">
+                      <a:solidFill>
+                        <a:srgbClr val="E2E5E9"/>
+                      </a:solidFill>
+                      <a:prstDash val="solid"/>
+                      <a:round/>
+                      <a:headEnd type="none" w="med" len="med"/>
+                      <a:tailEnd type="none" w="med" len="med"/>
+                    </a:lnB>
+                  </a:tcPr>
+                </a:tc>
+                <a:tc>
+                  <a:txBody>
+                    <a:bodyPr/>
+                    <a:lstStyle/>
+                    <a:p>
+                      <a:pPr indent="0" marL="0">
+                        <a:buNone/>
+                      </a:pPr>
+                      <a:r>
+                        <a:rPr lang="en-US" sz="1050" dirty="0">
+                          <a:solidFill>
+                            <a:srgbClr val="1A1A1A"/>
+                          </a:solidFill>
+                          <a:latin typeface="Microsoft YaHei" pitchFamily="34" charset="0"/>
+                          <a:ea typeface="Microsoft YaHei" pitchFamily="34" charset="-122"/>
+                          <a:cs typeface="Microsoft YaHei" pitchFamily="34" charset="-120"/>
+                        </a:rPr>
+                        <a:t>56.7%　2135/3766</a:t>
+                      </a:r>
+                      <a:endParaRPr lang="en-US" sz="1050" dirty="0">
+                        <a:latin typeface="Microsoft YaHei" charset="0"/>
+                        <a:ea typeface="Microsoft YaHei" charset="0"/>
+                        <a:cs typeface="Microsoft YaHei" charset="0"/>
+                      </a:endParaRPr>
+                    </a:p>
+                  </a:txBody>
+                  <a:tcPr marL="91440" marR="91440" marT="45720" marB="45720" anchor="ctr">
+                    <a:lnL w="6350" cap="flat" cmpd="sng" algn="ctr">
+                      <a:solidFill>
+                        <a:srgbClr val="E2E5E9"/>
+                      </a:solidFill>
+                      <a:prstDash val="solid"/>
+                      <a:round/>
+                      <a:headEnd type="none" w="med" len="med"/>
+                      <a:tailEnd type="none" w="med" len="med"/>
+                    </a:lnL>
+                    <a:lnR w="6350" cap="flat" cmpd="sng" algn="ctr">
+                      <a:solidFill>
+                        <a:srgbClr val="E2E5E9"/>
+                      </a:solidFill>
+                      <a:prstDash val="solid"/>
+                      <a:round/>
+                      <a:headEnd type="none" w="med" len="med"/>
+                      <a:tailEnd type="none" w="med" len="med"/>
+                    </a:lnR>
+                    <a:lnT w="6350" cap="flat" cmpd="sng" algn="ctr">
+                      <a:solidFill>
+                        <a:srgbClr val="E2E5E9"/>
+                      </a:solidFill>
+                      <a:prstDash val="solid"/>
+                      <a:round/>
+                      <a:headEnd type="none" w="med" len="med"/>
+                      <a:tailEnd type="none" w="med" len="med"/>
+                    </a:lnT>
+                    <a:lnB w="6350" cap="flat" cmpd="sng" algn="ctr">
+                      <a:solidFill>
+                        <a:srgbClr val="E2E5E9"/>
+                      </a:solidFill>
+                      <a:prstDash val="solid"/>
+                      <a:round/>
+                      <a:headEnd type="none" w="med" len="med"/>
+                      <a:tailEnd type="none" w="med" len="med"/>
+                    </a:lnB>
+                  </a:tcPr>
+                </a:tc>
+                <a:tc>
+                  <a:txBody>
+                    <a:bodyPr/>
+                    <a:lstStyle/>
+                    <a:p>
+                      <a:pPr indent="0" marL="0">
+                        <a:buNone/>
+                      </a:pPr>
+                      <a:r>
+                        <a:rPr lang="en-US" sz="1050" dirty="0">
+                          <a:solidFill>
+                            <a:srgbClr val="1A1A1A"/>
+                          </a:solidFill>
+                          <a:latin typeface="Microsoft YaHei" pitchFamily="34" charset="0"/>
+                          <a:ea typeface="Microsoft YaHei" pitchFamily="34" charset="-122"/>
+                          <a:cs typeface="Microsoft YaHei" pitchFamily="34" charset="-120"/>
+                        </a:rPr>
+                        <a:t>0.05%　2/3766</a:t>
+                      </a:r>
+                      <a:endParaRPr lang="en-US" sz="1050" dirty="0">
+                        <a:latin typeface="Microsoft YaHei" charset="0"/>
+                        <a:ea typeface="Microsoft YaHei" charset="0"/>
+                        <a:cs typeface="Microsoft YaHei" charset="0"/>
+                      </a:endParaRPr>
+                    </a:p>
+                  </a:txBody>
+                  <a:tcPr marL="91440" marR="91440" marT="45720" marB="45720" anchor="ctr">
+                    <a:lnL w="6350" cap="flat" cmpd="sng" algn="ctr">
+                      <a:solidFill>
+                        <a:srgbClr val="E2E5E9"/>
+                      </a:solidFill>
+                      <a:prstDash val="solid"/>
+                      <a:round/>
+                      <a:headEnd type="none" w="med" len="med"/>
+                      <a:tailEnd type="none" w="med" len="med"/>
+                    </a:lnL>
+                    <a:lnR w="6350" cap="flat" cmpd="sng" algn="ctr">
+                      <a:solidFill>
+                        <a:srgbClr val="E2E5E9"/>
+                      </a:solidFill>
+                      <a:prstDash val="solid"/>
+                      <a:round/>
+                      <a:headEnd type="none" w="med" len="med"/>
+                      <a:tailEnd type="none" w="med" len="med"/>
+                    </a:lnR>
+                    <a:lnT w="6350" cap="flat" cmpd="sng" algn="ctr">
+                      <a:solidFill>
+                        <a:srgbClr val="E2E5E9"/>
+                      </a:solidFill>
+                      <a:prstDash val="solid"/>
+                      <a:round/>
+                      <a:headEnd type="none" w="med" len="med"/>
+                      <a:tailEnd type="none" w="med" len="med"/>
+                    </a:lnT>
+                    <a:lnB w="6350" cap="flat" cmpd="sng" algn="ctr">
+                      <a:solidFill>
+                        <a:srgbClr val="E2E5E9"/>
+                      </a:solidFill>
+                      <a:prstDash val="solid"/>
+                      <a:round/>
+                      <a:headEnd type="none" w="med" len="med"/>
+                      <a:tailEnd type="none" w="med" len="med"/>
+                    </a:lnB>
+                  </a:tcPr>
+                </a:tc>
+                <a:tc>
+                  <a:txBody>
+                    <a:bodyPr/>
+                    <a:lstStyle/>
+                    <a:p>
+                      <a:pPr indent="0" marL="0">
+                        <a:buNone/>
+                      </a:pPr>
+                      <a:r>
+                        <a:rPr lang="en-US" sz="1050" dirty="0">
+                          <a:solidFill>
+                            <a:srgbClr val="1A1A1A"/>
+                          </a:solidFill>
+                          <a:latin typeface="Microsoft YaHei" pitchFamily="34" charset="0"/>
+                          <a:ea typeface="Microsoft YaHei" pitchFamily="34" charset="-122"/>
+                          <a:cs typeface="Microsoft YaHei" pitchFamily="34" charset="-120"/>
+                        </a:rPr>
+                        <a:t>40</a:t>
+                      </a:r>
+                      <a:endParaRPr lang="en-US" sz="1050" dirty="0">
+                        <a:latin typeface="Microsoft YaHei" charset="0"/>
+                        <a:ea typeface="Microsoft YaHei" charset="0"/>
+                        <a:cs typeface="Microsoft YaHei" charset="0"/>
+                      </a:endParaRPr>
+                    </a:p>
+                  </a:txBody>
+                  <a:tcPr marL="91440" marR="91440" marT="45720" marB="45720" anchor="ctr">
+                    <a:lnL w="6350" cap="flat" cmpd="sng" algn="ctr">
+                      <a:solidFill>
+                        <a:srgbClr val="E2E5E9"/>
+                      </a:solidFill>
+                      <a:prstDash val="solid"/>
+                      <a:round/>
+                      <a:headEnd type="none" w="med" len="med"/>
+                      <a:tailEnd type="none" w="med" len="med"/>
+                    </a:lnL>
+                    <a:lnR w="6350" cap="flat" cmpd="sng" algn="ctr">
+                      <a:solidFill>
+                        <a:srgbClr val="E2E5E9"/>
+                      </a:solidFill>
+                      <a:prstDash val="solid"/>
+                      <a:round/>
+                      <a:headEnd type="none" w="med" len="med"/>
+                      <a:tailEnd type="none" w="med" len="med"/>
+                    </a:lnR>
+                    <a:lnT w="6350" cap="flat" cmpd="sng" algn="ctr">
+                      <a:solidFill>
+                        <a:srgbClr val="E2E5E9"/>
+                      </a:solidFill>
+                      <a:prstDash val="solid"/>
+                      <a:round/>
+                      <a:headEnd type="none" w="med" len="med"/>
+                      <a:tailEnd type="none" w="med" len="med"/>
+                    </a:lnT>
+                    <a:lnB w="6350" cap="flat" cmpd="sng" algn="ctr">
+                      <a:solidFill>
+                        <a:srgbClr val="E2E5E9"/>
+                      </a:solidFill>
+                      <a:prstDash val="solid"/>
+                      <a:round/>
+                      <a:headEnd type="none" w="med" len="med"/>
+                      <a:tailEnd type="none" w="med" len="med"/>
+                    </a:lnB>
+                  </a:tcPr>
+                </a:tc>
+                <a:tc>
+                  <a:txBody>
+                    <a:bodyPr/>
+                    <a:lstStyle/>
+                    <a:p>
+                      <a:pPr indent="0" marL="0">
+                        <a:buNone/>
+                      </a:pPr>
+                      <a:r>
+                        <a:rPr lang="en-US" sz="1050" dirty="0">
+                          <a:solidFill>
+                            <a:srgbClr val="1A1A1A"/>
+                          </a:solidFill>
+                          <a:latin typeface="Microsoft YaHei" pitchFamily="34" charset="0"/>
+                          <a:ea typeface="Microsoft YaHei" pitchFamily="34" charset="-122"/>
+                          <a:cs typeface="Microsoft YaHei" pitchFamily="34" charset="-120"/>
+                        </a:rPr>
+                        <a:t>4</a:t>
+                      </a:r>
+                      <a:endParaRPr lang="en-US" sz="1050" dirty="0">
+                        <a:latin typeface="Microsoft YaHei" charset="0"/>
+                        <a:ea typeface="Microsoft YaHei" charset="0"/>
+                        <a:cs typeface="Microsoft YaHei" charset="0"/>
+                      </a:endParaRPr>
+                    </a:p>
+                  </a:txBody>
+                  <a:tcPr marL="91440" marR="91440" marT="45720" marB="45720" anchor="ctr">
+                    <a:lnL w="6350" cap="flat" cmpd="sng" algn="ctr">
+                      <a:solidFill>
+                        <a:srgbClr val="E2E5E9"/>
+                      </a:solidFill>
+                      <a:prstDash val="solid"/>
+                      <a:round/>
+                      <a:headEnd type="none" w="med" len="med"/>
+                      <a:tailEnd type="none" w="med" len="med"/>
+                    </a:lnL>
+                    <a:lnR w="6350" cap="flat" cmpd="sng" algn="ctr">
+                      <a:solidFill>
+                        <a:srgbClr val="E2E5E9"/>
+                      </a:solidFill>
+                      <a:prstDash val="solid"/>
+                      <a:round/>
+                      <a:headEnd type="none" w="med" len="med"/>
+                      <a:tailEnd type="none" w="med" len="med"/>
+                    </a:lnR>
+                    <a:lnT w="6350" cap="flat" cmpd="sng" algn="ctr">
+                      <a:solidFill>
+                        <a:srgbClr val="E2E5E9"/>
+                      </a:solidFill>
+                      <a:prstDash val="solid"/>
+                      <a:round/>
+                      <a:headEnd type="none" w="med" len="med"/>
+                      <a:tailEnd type="none" w="med" len="med"/>
+                    </a:lnT>
+                    <a:lnB w="6350" cap="flat" cmpd="sng" algn="ctr">
+                      <a:solidFill>
+                        <a:srgbClr val="E2E5E9"/>
+                      </a:solidFill>
+                      <a:prstDash val="solid"/>
+                      <a:round/>
+                      <a:headEnd type="none" w="med" len="med"/>
+                      <a:tailEnd type="none" w="med" len="med"/>
+                    </a:lnB>
+                  </a:tcPr>
+                </a:tc>
+                <a:tc>
+                  <a:txBody>
+                    <a:bodyPr/>
+                    <a:lstStyle/>
+                    <a:p>
+                      <a:pPr indent="0" marL="0">
+                        <a:buNone/>
+                      </a:pPr>
+                      <a:r>
+                        <a:rPr lang="en-US" sz="1050" dirty="0">
+                          <a:solidFill>
+                            <a:srgbClr val="1A1A1A"/>
+                          </a:solidFill>
+                          <a:latin typeface="Microsoft YaHei" pitchFamily="34" charset="0"/>
+                          <a:ea typeface="Microsoft YaHei" pitchFamily="34" charset="-122"/>
+                          <a:cs typeface="Microsoft YaHei" pitchFamily="34" charset="-120"/>
+                        </a:rPr>
+                        <a:t>—</a:t>
+                      </a:r>
+                      <a:endParaRPr lang="en-US" sz="1050" dirty="0">
+                        <a:latin typeface="Microsoft YaHei" charset="0"/>
+                        <a:ea typeface="Microsoft YaHei" charset="0"/>
+                        <a:cs typeface="Microsoft YaHei" charset="0"/>
+                      </a:endParaRPr>
+                    </a:p>
+                  </a:txBody>
+                  <a:tcPr marL="91440" marR="91440" marT="45720" marB="45720" anchor="ctr">
+                    <a:lnL w="6350" cap="flat" cmpd="sng" algn="ctr">
+                      <a:solidFill>
+                        <a:srgbClr val="E2E5E9"/>
+                      </a:solidFill>
+                      <a:prstDash val="solid"/>
+                      <a:round/>
+                      <a:headEnd type="none" w="med" len="med"/>
+                      <a:tailEnd type="none" w="med" len="med"/>
+                    </a:lnL>
+                    <a:lnR w="6350" cap="flat" cmpd="sng" algn="ctr">
+                      <a:solidFill>
+                        <a:srgbClr val="E2E5E9"/>
+                      </a:solidFill>
+                      <a:prstDash val="solid"/>
+                      <a:round/>
+                      <a:headEnd type="none" w="med" len="med"/>
+                      <a:tailEnd type="none" w="med" len="med"/>
+                    </a:lnR>
+                    <a:lnT w="6350" cap="flat" cmpd="sng" algn="ctr">
+                      <a:solidFill>
+                        <a:srgbClr val="E2E5E9"/>
+                      </a:solidFill>
+                      <a:prstDash val="solid"/>
+                      <a:round/>
+                      <a:headEnd type="none" w="med" len="med"/>
+                      <a:tailEnd type="none" w="med" len="med"/>
+                    </a:lnT>
+                    <a:lnB w="6350" cap="flat" cmpd="sng" algn="ctr">
+                      <a:solidFill>
+                        <a:srgbClr val="E2E5E9"/>
+                      </a:solidFill>
+                      <a:prstDash val="solid"/>
+                      <a:round/>
+                      <a:headEnd type="none" w="med" len="med"/>
+                      <a:tailEnd type="none" w="med" len="med"/>
+                    </a:lnB>
+                  </a:tcPr>
+                </a:tc>
+              </a:tr>
+              <a:tr h="205740">
+                <a:tc>
+                  <a:txBody>
+                    <a:bodyPr/>
+                    <a:lstStyle/>
+                    <a:p>
+                      <a:pPr indent="0" marL="0">
+                        <a:buNone/>
+                      </a:pPr>
+                      <a:r>
+                        <a:rPr lang="en-US" sz="1050" dirty="0">
+                          <a:solidFill>
+                            <a:srgbClr val="1A1A1A"/>
+                          </a:solidFill>
+                          <a:latin typeface="Microsoft YaHei" pitchFamily="34" charset="0"/>
+                          <a:ea typeface="Microsoft YaHei" pitchFamily="34" charset="-122"/>
+                          <a:cs typeface="Microsoft YaHei" pitchFamily="34" charset="-120"/>
+                        </a:rPr>
+                        <a:t>小鼠 · 胰</a:t>
+                      </a:r>
+                      <a:endParaRPr lang="en-US" sz="1050" dirty="0">
+                        <a:latin typeface="Microsoft YaHei" charset="0"/>
+                        <a:ea typeface="Microsoft YaHei" charset="0"/>
+                        <a:cs typeface="Microsoft YaHei" charset="0"/>
+                      </a:endParaRPr>
+                    </a:p>
+                  </a:txBody>
+                  <a:tcPr marL="91440" marR="91440" marT="45720" marB="45720" anchor="ctr">
+                    <a:lnL w="6350" cap="flat" cmpd="sng" algn="ctr">
+                      <a:solidFill>
+                        <a:srgbClr val="E2E5E9"/>
+                      </a:solidFill>
+                      <a:prstDash val="solid"/>
+                      <a:round/>
+                      <a:headEnd type="none" w="med" len="med"/>
+                      <a:tailEnd type="none" w="med" len="med"/>
+                    </a:lnL>
+                    <a:lnR w="6350" cap="flat" cmpd="sng" algn="ctr">
+                      <a:solidFill>
+                        <a:srgbClr val="E2E5E9"/>
+                      </a:solidFill>
+                      <a:prstDash val="solid"/>
+                      <a:round/>
+                      <a:headEnd type="none" w="med" len="med"/>
+                      <a:tailEnd type="none" w="med" len="med"/>
+                    </a:lnR>
+                    <a:lnT w="6350" cap="flat" cmpd="sng" algn="ctr">
+                      <a:solidFill>
+                        <a:srgbClr val="E2E5E9"/>
+                      </a:solidFill>
+                      <a:prstDash val="solid"/>
+                      <a:round/>
+                      <a:headEnd type="none" w="med" len="med"/>
+                      <a:tailEnd type="none" w="med" len="med"/>
+                    </a:lnT>
+                    <a:lnB w="6350" cap="flat" cmpd="sng" algn="ctr">
+                      <a:solidFill>
+                        <a:srgbClr val="E2E5E9"/>
+                      </a:solidFill>
+                      <a:prstDash val="solid"/>
+                      <a:round/>
+                      <a:headEnd type="none" w="med" len="med"/>
+                      <a:tailEnd type="none" w="med" len="med"/>
+                    </a:lnB>
+                  </a:tcPr>
+                </a:tc>
+                <a:tc>
+                  <a:txBody>
+                    <a:bodyPr/>
+                    <a:lstStyle/>
+                    <a:p>
+                      <a:pPr indent="0" marL="0">
+                        <a:buNone/>
+                      </a:pPr>
+                      <a:r>
+                        <a:rPr lang="en-US" sz="1050" dirty="0">
+                          <a:solidFill>
+                            <a:srgbClr val="1A1A1A"/>
+                          </a:solidFill>
+                          <a:latin typeface="Microsoft YaHei" pitchFamily="34" charset="0"/>
+                          <a:ea typeface="Microsoft YaHei" pitchFamily="34" charset="-122"/>
+                          <a:cs typeface="Microsoft YaHei" pitchFamily="34" charset="-120"/>
+                        </a:rPr>
+                        <a:t>胰岛 D(δ) 细胞 ×2</a:t>
+                      </a:r>
+                      <a:endParaRPr lang="en-US" sz="1050" dirty="0">
+                        <a:latin typeface="Microsoft YaHei" charset="0"/>
+                        <a:ea typeface="Microsoft YaHei" charset="0"/>
+                        <a:cs typeface="Microsoft YaHei" charset="0"/>
+                      </a:endParaRPr>
+                    </a:p>
+                  </a:txBody>
+                  <a:tcPr marL="91440" marR="91440" marT="45720" marB="45720" anchor="ctr">
+                    <a:lnL w="6350" cap="flat" cmpd="sng" algn="ctr">
+                      <a:solidFill>
+                        <a:srgbClr val="E2E5E9"/>
+                      </a:solidFill>
+                      <a:prstDash val="solid"/>
+                      <a:round/>
+                      <a:headEnd type="none" w="med" len="med"/>
+                      <a:tailEnd type="none" w="med" len="med"/>
+                    </a:lnL>
+                    <a:lnR w="6350" cap="flat" cmpd="sng" algn="ctr">
+                      <a:solidFill>
+                        <a:srgbClr val="E2E5E9"/>
+                      </a:solidFill>
+                      <a:prstDash val="solid"/>
+                      <a:round/>
+                      <a:headEnd type="none" w="med" len="med"/>
+                      <a:tailEnd type="none" w="med" len="med"/>
+                    </a:lnR>
+                    <a:lnT w="6350" cap="flat" cmpd="sng" algn="ctr">
+                      <a:solidFill>
+                        <a:srgbClr val="E2E5E9"/>
+                      </a:solidFill>
+                      <a:prstDash val="solid"/>
+                      <a:round/>
+                      <a:headEnd type="none" w="med" len="med"/>
+                      <a:tailEnd type="none" w="med" len="med"/>
+                    </a:lnT>
+                    <a:lnB w="6350" cap="flat" cmpd="sng" algn="ctr">
+                      <a:solidFill>
+                        <a:srgbClr val="E2E5E9"/>
+                      </a:solidFill>
+                      <a:prstDash val="solid"/>
+                      <a:round/>
+                      <a:headEnd type="none" w="med" len="med"/>
+                      <a:tailEnd type="none" w="med" len="med"/>
+                    </a:lnB>
+                  </a:tcPr>
+                </a:tc>
+                <a:tc>
+                  <a:txBody>
+                    <a:bodyPr/>
+                    <a:lstStyle/>
+                    <a:p>
+                      <a:pPr indent="0" marL="0">
+                        <a:buNone/>
+                      </a:pPr>
+                      <a:r>
+                        <a:rPr lang="en-US" sz="1050" dirty="0">
+                          <a:solidFill>
+                            <a:srgbClr val="1A1A1A"/>
+                          </a:solidFill>
+                          <a:latin typeface="Microsoft YaHei" pitchFamily="34" charset="0"/>
+                          <a:ea typeface="Microsoft YaHei" pitchFamily="34" charset="-122"/>
+                          <a:cs typeface="Microsoft YaHei" pitchFamily="34" charset="-120"/>
+                        </a:rPr>
+                        <a:t>11.3%　842/7468</a:t>
+                      </a:r>
+                      <a:endParaRPr lang="en-US" sz="1050" dirty="0">
+                        <a:latin typeface="Microsoft YaHei" charset="0"/>
+                        <a:ea typeface="Microsoft YaHei" charset="0"/>
+                        <a:cs typeface="Microsoft YaHei" charset="0"/>
+                      </a:endParaRPr>
+                    </a:p>
+                  </a:txBody>
+                  <a:tcPr marL="91440" marR="91440" marT="45720" marB="45720" anchor="ctr">
+                    <a:lnL w="6350" cap="flat" cmpd="sng" algn="ctr">
+                      <a:solidFill>
+                        <a:srgbClr val="E2E5E9"/>
+                      </a:solidFill>
+                      <a:prstDash val="solid"/>
+                      <a:round/>
+                      <a:headEnd type="none" w="med" len="med"/>
+                      <a:tailEnd type="none" w="med" len="med"/>
+                    </a:lnL>
+                    <a:lnR w="6350" cap="flat" cmpd="sng" algn="ctr">
+                      <a:solidFill>
+                        <a:srgbClr val="E2E5E9"/>
+                      </a:solidFill>
+                      <a:prstDash val="solid"/>
+                      <a:round/>
+                      <a:headEnd type="none" w="med" len="med"/>
+                      <a:tailEnd type="none" w="med" len="med"/>
+                    </a:lnR>
+                    <a:lnT w="6350" cap="flat" cmpd="sng" algn="ctr">
+                      <a:solidFill>
+                        <a:srgbClr val="E2E5E9"/>
+                      </a:solidFill>
+                      <a:prstDash val="solid"/>
+                      <a:round/>
+                      <a:headEnd type="none" w="med" len="med"/>
+                      <a:tailEnd type="none" w="med" len="med"/>
+                    </a:lnT>
+                    <a:lnB w="6350" cap="flat" cmpd="sng" algn="ctr">
+                      <a:solidFill>
+                        <a:srgbClr val="E2E5E9"/>
+                      </a:solidFill>
+                      <a:prstDash val="solid"/>
+                      <a:round/>
+                      <a:headEnd type="none" w="med" len="med"/>
+                      <a:tailEnd type="none" w="med" len="med"/>
+                    </a:lnB>
+                  </a:tcPr>
+                </a:tc>
+                <a:tc>
+                  <a:txBody>
+                    <a:bodyPr/>
+                    <a:lstStyle/>
+                    <a:p>
+                      <a:pPr indent="0" marL="0">
+                        <a:buNone/>
+                      </a:pPr>
+                      <a:r>
+                        <a:rPr lang="en-US" sz="1050" dirty="0">
+                          <a:solidFill>
+                            <a:srgbClr val="1A1A1A"/>
+                          </a:solidFill>
+                          <a:latin typeface="Microsoft YaHei" pitchFamily="34" charset="0"/>
+                          <a:ea typeface="Microsoft YaHei" pitchFamily="34" charset="-122"/>
+                          <a:cs typeface="Microsoft YaHei" pitchFamily="34" charset="-120"/>
+                        </a:rPr>
+                        <a:t>0.08%　6/7468</a:t>
+                      </a:r>
+                      <a:endParaRPr lang="en-US" sz="1050" dirty="0">
+                        <a:latin typeface="Microsoft YaHei" charset="0"/>
+                        <a:ea typeface="Microsoft YaHei" charset="0"/>
+                        <a:cs typeface="Microsoft YaHei" charset="0"/>
+                      </a:endParaRPr>
+                    </a:p>
+                  </a:txBody>
+                  <a:tcPr marL="91440" marR="91440" marT="45720" marB="45720" anchor="ctr">
+                    <a:lnL w="6350" cap="flat" cmpd="sng" algn="ctr">
+                      <a:solidFill>
+                        <a:srgbClr val="E2E5E9"/>
+                      </a:solidFill>
+                      <a:prstDash val="solid"/>
+                      <a:round/>
+                      <a:headEnd type="none" w="med" len="med"/>
+                      <a:tailEnd type="none" w="med" len="med"/>
+                    </a:lnL>
+                    <a:lnR w="6350" cap="flat" cmpd="sng" algn="ctr">
+                      <a:solidFill>
+                        <a:srgbClr val="E2E5E9"/>
+                      </a:solidFill>
+                      <a:prstDash val="solid"/>
+                      <a:round/>
+                      <a:headEnd type="none" w="med" len="med"/>
+                      <a:tailEnd type="none" w="med" len="med"/>
+                    </a:lnR>
+                    <a:lnT w="6350" cap="flat" cmpd="sng" algn="ctr">
+                      <a:solidFill>
+                        <a:srgbClr val="E2E5E9"/>
+                      </a:solidFill>
+                      <a:prstDash val="solid"/>
+                      <a:round/>
+                      <a:headEnd type="none" w="med" len="med"/>
+                      <a:tailEnd type="none" w="med" len="med"/>
+                    </a:lnT>
+                    <a:lnB w="6350" cap="flat" cmpd="sng" algn="ctr">
+                      <a:solidFill>
+                        <a:srgbClr val="E2E5E9"/>
+                      </a:solidFill>
+                      <a:prstDash val="solid"/>
+                      <a:round/>
+                      <a:headEnd type="none" w="med" len="med"/>
+                      <a:tailEnd type="none" w="med" len="med"/>
+                    </a:lnB>
+                  </a:tcPr>
+                </a:tc>
+                <a:tc>
+                  <a:txBody>
+                    <a:bodyPr/>
+                    <a:lstStyle/>
+                    <a:p>
+                      <a:pPr indent="0" marL="0">
+                        <a:buNone/>
+                      </a:pPr>
+                      <a:r>
+                        <a:rPr lang="en-US" sz="1050" dirty="0">
+                          <a:solidFill>
+                            <a:srgbClr val="1A1A1A"/>
+                          </a:solidFill>
+                          <a:latin typeface="Microsoft YaHei" pitchFamily="34" charset="0"/>
+                          <a:ea typeface="Microsoft YaHei" pitchFamily="34" charset="-122"/>
+                          <a:cs typeface="Microsoft YaHei" pitchFamily="34" charset="-120"/>
+                        </a:rPr>
+                        <a:t>24</a:t>
+                      </a:r>
+                      <a:endParaRPr lang="en-US" sz="1050" dirty="0">
+                        <a:latin typeface="Microsoft YaHei" charset="0"/>
+                        <a:ea typeface="Microsoft YaHei" charset="0"/>
+                        <a:cs typeface="Microsoft YaHei" charset="0"/>
+                      </a:endParaRPr>
+                    </a:p>
+                  </a:txBody>
+                  <a:tcPr marL="91440" marR="91440" marT="45720" marB="45720" anchor="ctr">
+                    <a:lnL w="6350" cap="flat" cmpd="sng" algn="ctr">
+                      <a:solidFill>
+                        <a:srgbClr val="E2E5E9"/>
+                      </a:solidFill>
+                      <a:prstDash val="solid"/>
+                      <a:round/>
+                      <a:headEnd type="none" w="med" len="med"/>
+                      <a:tailEnd type="none" w="med" len="med"/>
+                    </a:lnL>
+                    <a:lnR w="6350" cap="flat" cmpd="sng" algn="ctr">
+                      <a:solidFill>
+                        <a:srgbClr val="E2E5E9"/>
+                      </a:solidFill>
+                      <a:prstDash val="solid"/>
+                      <a:round/>
+                      <a:headEnd type="none" w="med" len="med"/>
+                      <a:tailEnd type="none" w="med" len="med"/>
+                    </a:lnR>
+                    <a:lnT w="6350" cap="flat" cmpd="sng" algn="ctr">
+                      <a:solidFill>
+                        <a:srgbClr val="E2E5E9"/>
+                      </a:solidFill>
+                      <a:prstDash val="solid"/>
+                      <a:round/>
+                      <a:headEnd type="none" w="med" len="med"/>
+                      <a:tailEnd type="none" w="med" len="med"/>
+                    </a:lnT>
+                    <a:lnB w="6350" cap="flat" cmpd="sng" algn="ctr">
+                      <a:solidFill>
+                        <a:srgbClr val="E2E5E9"/>
+                      </a:solidFill>
+                      <a:prstDash val="solid"/>
+                      <a:round/>
+                      <a:headEnd type="none" w="med" len="med"/>
+                      <a:tailEnd type="none" w="med" len="med"/>
+                    </a:lnB>
+                  </a:tcPr>
+                </a:tc>
+                <a:tc>
+                  <a:txBody>
+                    <a:bodyPr/>
+                    <a:lstStyle/>
+                    <a:p>
+                      <a:pPr indent="0" marL="0">
+                        <a:buNone/>
+                      </a:pPr>
+                      <a:r>
+                        <a:rPr lang="en-US" sz="1050" dirty="0">
+                          <a:solidFill>
+                            <a:srgbClr val="1A1A1A"/>
+                          </a:solidFill>
+                          <a:latin typeface="Microsoft YaHei" pitchFamily="34" charset="0"/>
+                          <a:ea typeface="Microsoft YaHei" pitchFamily="34" charset="-122"/>
+                          <a:cs typeface="Microsoft YaHei" pitchFamily="34" charset="-120"/>
+                        </a:rPr>
+                        <a:t>4</a:t>
+                      </a:r>
+                      <a:endParaRPr lang="en-US" sz="1050" dirty="0">
+                        <a:latin typeface="Microsoft YaHei" charset="0"/>
+                        <a:ea typeface="Microsoft YaHei" charset="0"/>
+                        <a:cs typeface="Microsoft YaHei" charset="0"/>
+                      </a:endParaRPr>
+                    </a:p>
+                  </a:txBody>
+                  <a:tcPr marL="91440" marR="91440" marT="45720" marB="45720" anchor="ctr">
+                    <a:lnL w="6350" cap="flat" cmpd="sng" algn="ctr">
+                      <a:solidFill>
+                        <a:srgbClr val="E2E5E9"/>
+                      </a:solidFill>
+                      <a:prstDash val="solid"/>
+                      <a:round/>
+                      <a:headEnd type="none" w="med" len="med"/>
+                      <a:tailEnd type="none" w="med" len="med"/>
+                    </a:lnL>
+                    <a:lnR w="6350" cap="flat" cmpd="sng" algn="ctr">
+                      <a:solidFill>
+                        <a:srgbClr val="E2E5E9"/>
+                      </a:solidFill>
+                      <a:prstDash val="solid"/>
+                      <a:round/>
+                      <a:headEnd type="none" w="med" len="med"/>
+                      <a:tailEnd type="none" w="med" len="med"/>
+                    </a:lnR>
+                    <a:lnT w="6350" cap="flat" cmpd="sng" algn="ctr">
+                      <a:solidFill>
+                        <a:srgbClr val="E2E5E9"/>
+                      </a:solidFill>
+                      <a:prstDash val="solid"/>
+                      <a:round/>
+                      <a:headEnd type="none" w="med" len="med"/>
+                      <a:tailEnd type="none" w="med" len="med"/>
+                    </a:lnT>
+                    <a:lnB w="6350" cap="flat" cmpd="sng" algn="ctr">
+                      <a:solidFill>
+                        <a:srgbClr val="E2E5E9"/>
+                      </a:solidFill>
+                      <a:prstDash val="solid"/>
+                      <a:round/>
+                      <a:headEnd type="none" w="med" len="med"/>
+                      <a:tailEnd type="none" w="med" len="med"/>
+                    </a:lnB>
+                  </a:tcPr>
+                </a:tc>
+                <a:tc>
+                  <a:txBody>
+                    <a:bodyPr/>
+                    <a:lstStyle/>
+                    <a:p>
+                      <a:pPr indent="0" marL="0">
+                        <a:buNone/>
+                      </a:pPr>
+                      <a:r>
+                        <a:rPr lang="en-US" sz="1050" dirty="0">
+                          <a:solidFill>
+                            <a:srgbClr val="1A1A1A"/>
+                          </a:solidFill>
+                          <a:latin typeface="Microsoft YaHei" pitchFamily="34" charset="0"/>
+                          <a:ea typeface="Microsoft YaHei" pitchFamily="34" charset="-122"/>
+                          <a:cs typeface="Microsoft YaHei" pitchFamily="34" charset="-120"/>
+                        </a:rPr>
+                        <a:t>1</a:t>
+                      </a:r>
+                      <a:endParaRPr lang="en-US" sz="1050" dirty="0">
+                        <a:latin typeface="Microsoft YaHei" charset="0"/>
+                        <a:ea typeface="Microsoft YaHei" charset="0"/>
+                        <a:cs typeface="Microsoft YaHei" charset="0"/>
+                      </a:endParaRPr>
+                    </a:p>
+                  </a:txBody>
+                  <a:tcPr marL="91440" marR="91440" marT="45720" marB="45720" anchor="ctr">
+                    <a:lnL w="6350" cap="flat" cmpd="sng" algn="ctr">
+                      <a:solidFill>
+                        <a:srgbClr val="E2E5E9"/>
+                      </a:solidFill>
+                      <a:prstDash val="solid"/>
+                      <a:round/>
+                      <a:headEnd type="none" w="med" len="med"/>
+                      <a:tailEnd type="none" w="med" len="med"/>
+                    </a:lnL>
+                    <a:lnR w="6350" cap="flat" cmpd="sng" algn="ctr">
+                      <a:solidFill>
+                        <a:srgbClr val="E2E5E9"/>
+                      </a:solidFill>
+                      <a:prstDash val="solid"/>
+                      <a:round/>
+                      <a:headEnd type="none" w="med" len="med"/>
+                      <a:tailEnd type="none" w="med" len="med"/>
+                    </a:lnR>
+                    <a:lnT w="6350" cap="flat" cmpd="sng" algn="ctr">
+                      <a:solidFill>
+                        <a:srgbClr val="E2E5E9"/>
+                      </a:solidFill>
+                      <a:prstDash val="solid"/>
+                      <a:round/>
+                      <a:headEnd type="none" w="med" len="med"/>
+                      <a:tailEnd type="none" w="med" len="med"/>
+                    </a:lnT>
+                    <a:lnB w="6350" cap="flat" cmpd="sng" algn="ctr">
+                      <a:solidFill>
+                        <a:srgbClr val="E2E5E9"/>
+                      </a:solidFill>
+                      <a:prstDash val="solid"/>
+                      <a:round/>
+                      <a:headEnd type="none" w="med" len="med"/>
+                      <a:tailEnd type="none" w="med" len="med"/>
+                    </a:lnB>
+                  </a:tcPr>
+                </a:tc>
+              </a:tr>
+              <a:tr h="205740">
+                <a:tc>
+                  <a:txBody>
+                    <a:bodyPr/>
+                    <a:lstStyle/>
+                    <a:p>
+                      <a:pPr indent="0" marL="0">
+                        <a:buNone/>
+                      </a:pPr>
+                      <a:r>
+                        <a:rPr lang="en-US" sz="1050" dirty="0">
+                          <a:solidFill>
+                            <a:srgbClr val="1A1A1A"/>
+                          </a:solidFill>
+                          <a:latin typeface="Microsoft YaHei" pitchFamily="34" charset="0"/>
+                          <a:ea typeface="Microsoft YaHei" pitchFamily="34" charset="-122"/>
+                          <a:cs typeface="Microsoft YaHei" pitchFamily="34" charset="-120"/>
+                        </a:rPr>
+                        <a:t>小鼠 · 脑</a:t>
+                      </a:r>
+                      <a:endParaRPr lang="en-US" sz="1050" dirty="0">
+                        <a:latin typeface="Microsoft YaHei" charset="0"/>
+                        <a:ea typeface="Microsoft YaHei" charset="0"/>
+                        <a:cs typeface="Microsoft YaHei" charset="0"/>
+                      </a:endParaRPr>
+                    </a:p>
+                  </a:txBody>
+                  <a:tcPr marL="91440" marR="91440" marT="45720" marB="45720" anchor="ctr">
+                    <a:lnL w="6350" cap="flat" cmpd="sng" algn="ctr">
+                      <a:solidFill>
+                        <a:srgbClr val="E2E5E9"/>
+                      </a:solidFill>
+                      <a:prstDash val="solid"/>
+                      <a:round/>
+                      <a:headEnd type="none" w="med" len="med"/>
+                      <a:tailEnd type="none" w="med" len="med"/>
+                    </a:lnL>
+                    <a:lnR w="6350" cap="flat" cmpd="sng" algn="ctr">
+                      <a:solidFill>
+                        <a:srgbClr val="E2E5E9"/>
+                      </a:solidFill>
+                      <a:prstDash val="solid"/>
+                      <a:round/>
+                      <a:headEnd type="none" w="med" len="med"/>
+                      <a:tailEnd type="none" w="med" len="med"/>
+                    </a:lnR>
+                    <a:lnT w="6350" cap="flat" cmpd="sng" algn="ctr">
+                      <a:solidFill>
+                        <a:srgbClr val="E2E5E9"/>
+                      </a:solidFill>
+                      <a:prstDash val="solid"/>
+                      <a:round/>
+                      <a:headEnd type="none" w="med" len="med"/>
+                      <a:tailEnd type="none" w="med" len="med"/>
+                    </a:lnT>
+                    <a:lnB w="6350" cap="flat" cmpd="sng" algn="ctr">
+                      <a:solidFill>
+                        <a:srgbClr val="E2E5E9"/>
+                      </a:solidFill>
+                      <a:prstDash val="solid"/>
+                      <a:round/>
+                      <a:headEnd type="none" w="med" len="med"/>
+                      <a:tailEnd type="none" w="med" len="med"/>
+                    </a:lnB>
+                  </a:tcPr>
+                </a:tc>
+                <a:tc>
+                  <a:txBody>
+                    <a:bodyPr/>
+                    <a:lstStyle/>
+                    <a:p>
+                      <a:pPr indent="0" marL="0">
+                        <a:buNone/>
+                      </a:pPr>
+                      <a:r>
+                        <a:rPr lang="en-US" sz="1050" dirty="0">
+                          <a:solidFill>
+                            <a:srgbClr val="1A1A1A"/>
+                          </a:solidFill>
+                          <a:latin typeface="Microsoft YaHei" pitchFamily="34" charset="0"/>
+                          <a:ea typeface="Microsoft YaHei" pitchFamily="34" charset="-122"/>
+                          <a:cs typeface="Microsoft YaHei" pitchFamily="34" charset="-120"/>
+                        </a:rPr>
+                        <a:t>少突胶质</a:t>
+                      </a:r>
+                      <a:endParaRPr lang="en-US" sz="1050" dirty="0">
+                        <a:latin typeface="Microsoft YaHei" charset="0"/>
+                        <a:ea typeface="Microsoft YaHei" charset="0"/>
+                        <a:cs typeface="Microsoft YaHei" charset="0"/>
+                      </a:endParaRPr>
+                    </a:p>
+                  </a:txBody>
+                  <a:tcPr marL="91440" marR="91440" marT="45720" marB="45720" anchor="ctr">
+                    <a:lnL w="6350" cap="flat" cmpd="sng" algn="ctr">
+                      <a:solidFill>
+                        <a:srgbClr val="E2E5E9"/>
+                      </a:solidFill>
+                      <a:prstDash val="solid"/>
+                      <a:round/>
+                      <a:headEnd type="none" w="med" len="med"/>
+                      <a:tailEnd type="none" w="med" len="med"/>
+                    </a:lnL>
+                    <a:lnR w="6350" cap="flat" cmpd="sng" algn="ctr">
+                      <a:solidFill>
+                        <a:srgbClr val="E2E5E9"/>
+                      </a:solidFill>
+                      <a:prstDash val="solid"/>
+                      <a:round/>
+                      <a:headEnd type="none" w="med" len="med"/>
+                      <a:tailEnd type="none" w="med" len="med"/>
+                    </a:lnR>
+                    <a:lnT w="6350" cap="flat" cmpd="sng" algn="ctr">
+                      <a:solidFill>
+                        <a:srgbClr val="E2E5E9"/>
+                      </a:solidFill>
+                      <a:prstDash val="solid"/>
+                      <a:round/>
+                      <a:headEnd type="none" w="med" len="med"/>
+                      <a:tailEnd type="none" w="med" len="med"/>
+                    </a:lnT>
+                    <a:lnB w="6350" cap="flat" cmpd="sng" algn="ctr">
+                      <a:solidFill>
+                        <a:srgbClr val="E2E5E9"/>
+                      </a:solidFill>
+                      <a:prstDash val="solid"/>
+                      <a:round/>
+                      <a:headEnd type="none" w="med" len="med"/>
+                      <a:tailEnd type="none" w="med" len="med"/>
+                    </a:lnB>
+                  </a:tcPr>
+                </a:tc>
+                <a:tc>
+                  <a:txBody>
+                    <a:bodyPr/>
+                    <a:lstStyle/>
+                    <a:p>
+                      <a:pPr indent="0" marL="0">
+                        <a:buNone/>
+                      </a:pPr>
+                      <a:r>
+                        <a:rPr lang="en-US" sz="1050" dirty="0">
+                          <a:solidFill>
+                            <a:srgbClr val="1A1A1A"/>
+                          </a:solidFill>
+                          <a:latin typeface="Microsoft YaHei" pitchFamily="34" charset="0"/>
+                          <a:ea typeface="Microsoft YaHei" pitchFamily="34" charset="-122"/>
+                          <a:cs typeface="Microsoft YaHei" pitchFamily="34" charset="-120"/>
+                        </a:rPr>
+                        <a:t>27.3%　2452/8987</a:t>
+                      </a:r>
+                      <a:endParaRPr lang="en-US" sz="1050" dirty="0">
+                        <a:latin typeface="Microsoft YaHei" charset="0"/>
+                        <a:ea typeface="Microsoft YaHei" charset="0"/>
+                        <a:cs typeface="Microsoft YaHei" charset="0"/>
+                      </a:endParaRPr>
+                    </a:p>
+                  </a:txBody>
+                  <a:tcPr marL="91440" marR="91440" marT="45720" marB="45720" anchor="ctr">
+                    <a:lnL w="6350" cap="flat" cmpd="sng" algn="ctr">
+                      <a:solidFill>
+                        <a:srgbClr val="E2E5E9"/>
+                      </a:solidFill>
+                      <a:prstDash val="solid"/>
+                      <a:round/>
+                      <a:headEnd type="none" w="med" len="med"/>
+                      <a:tailEnd type="none" w="med" len="med"/>
+                    </a:lnL>
+                    <a:lnR w="6350" cap="flat" cmpd="sng" algn="ctr">
+                      <a:solidFill>
+                        <a:srgbClr val="E2E5E9"/>
+                      </a:solidFill>
+                      <a:prstDash val="solid"/>
+                      <a:round/>
+                      <a:headEnd type="none" w="med" len="med"/>
+                      <a:tailEnd type="none" w="med" len="med"/>
+                    </a:lnR>
+                    <a:lnT w="6350" cap="flat" cmpd="sng" algn="ctr">
+                      <a:solidFill>
+                        <a:srgbClr val="E2E5E9"/>
+                      </a:solidFill>
+                      <a:prstDash val="solid"/>
+                      <a:round/>
+                      <a:headEnd type="none" w="med" len="med"/>
+                      <a:tailEnd type="none" w="med" len="med"/>
+                    </a:lnT>
+                    <a:lnB w="6350" cap="flat" cmpd="sng" algn="ctr">
+                      <a:solidFill>
+                        <a:srgbClr val="E2E5E9"/>
+                      </a:solidFill>
+                      <a:prstDash val="solid"/>
+                      <a:round/>
+                      <a:headEnd type="none" w="med" len="med"/>
+                      <a:tailEnd type="none" w="med" len="med"/>
+                    </a:lnB>
+                  </a:tcPr>
+                </a:tc>
+                <a:tc>
+                  <a:txBody>
+                    <a:bodyPr/>
+                    <a:lstStyle/>
+                    <a:p>
+                      <a:pPr indent="0" marL="0">
+                        <a:buNone/>
+                      </a:pPr>
+                      <a:r>
+                        <a:rPr lang="en-US" sz="1050" dirty="0">
+                          <a:solidFill>
+                            <a:srgbClr val="1A1A1A"/>
+                          </a:solidFill>
+                          <a:latin typeface="Microsoft YaHei" pitchFamily="34" charset="0"/>
+                          <a:ea typeface="Microsoft YaHei" pitchFamily="34" charset="-122"/>
+                          <a:cs typeface="Microsoft YaHei" pitchFamily="34" charset="-120"/>
+                        </a:rPr>
+                        <a:t>0.02%　2/8987</a:t>
+                      </a:r>
+                      <a:endParaRPr lang="en-US" sz="1050" dirty="0">
+                        <a:latin typeface="Microsoft YaHei" charset="0"/>
+                        <a:ea typeface="Microsoft YaHei" charset="0"/>
+                        <a:cs typeface="Microsoft YaHei" charset="0"/>
+                      </a:endParaRPr>
+                    </a:p>
+                  </a:txBody>
+                  <a:tcPr marL="91440" marR="91440" marT="45720" marB="45720" anchor="ctr">
+                    <a:lnL w="6350" cap="flat" cmpd="sng" algn="ctr">
+                      <a:solidFill>
+                        <a:srgbClr val="E2E5E9"/>
+                      </a:solidFill>
+                      <a:prstDash val="solid"/>
+                      <a:round/>
+                      <a:headEnd type="none" w="med" len="med"/>
+                      <a:tailEnd type="none" w="med" len="med"/>
+                    </a:lnL>
+                    <a:lnR w="6350" cap="flat" cmpd="sng" algn="ctr">
+                      <a:solidFill>
+                        <a:srgbClr val="E2E5E9"/>
+                      </a:solidFill>
+                      <a:prstDash val="solid"/>
+                      <a:round/>
+                      <a:headEnd type="none" w="med" len="med"/>
+                      <a:tailEnd type="none" w="med" len="med"/>
+                    </a:lnR>
+                    <a:lnT w="6350" cap="flat" cmpd="sng" algn="ctr">
+                      <a:solidFill>
+                        <a:srgbClr val="E2E5E9"/>
+                      </a:solidFill>
+                      <a:prstDash val="solid"/>
+                      <a:round/>
+                      <a:headEnd type="none" w="med" len="med"/>
+                      <a:tailEnd type="none" w="med" len="med"/>
+                    </a:lnT>
+                    <a:lnB w="6350" cap="flat" cmpd="sng" algn="ctr">
+                      <a:solidFill>
+                        <a:srgbClr val="E2E5E9"/>
+                      </a:solidFill>
+                      <a:prstDash val="solid"/>
+                      <a:round/>
+                      <a:headEnd type="none" w="med" len="med"/>
+                      <a:tailEnd type="none" w="med" len="med"/>
+                    </a:lnB>
+                  </a:tcPr>
+                </a:tc>
+                <a:tc>
+                  <a:txBody>
+                    <a:bodyPr/>
+                    <a:lstStyle/>
+                    <a:p>
+                      <a:pPr indent="0" marL="0">
+                        <a:buNone/>
+                      </a:pPr>
+                      <a:r>
+                        <a:rPr lang="en-US" sz="1050" dirty="0">
+                          <a:solidFill>
+                            <a:srgbClr val="1A1A1A"/>
+                          </a:solidFill>
+                          <a:latin typeface="Microsoft YaHei" pitchFamily="34" charset="0"/>
+                          <a:ea typeface="Microsoft YaHei" pitchFamily="34" charset="-122"/>
+                          <a:cs typeface="Microsoft YaHei" pitchFamily="34" charset="-120"/>
+                        </a:rPr>
+                        <a:t>55</a:t>
+                      </a:r>
+                      <a:endParaRPr lang="en-US" sz="1050" dirty="0">
+                        <a:latin typeface="Microsoft YaHei" charset="0"/>
+                        <a:ea typeface="Microsoft YaHei" charset="0"/>
+                        <a:cs typeface="Microsoft YaHei" charset="0"/>
+                      </a:endParaRPr>
+                    </a:p>
+                  </a:txBody>
+                  <a:tcPr marL="91440" marR="91440" marT="45720" marB="45720" anchor="ctr">
+                    <a:lnL w="6350" cap="flat" cmpd="sng" algn="ctr">
+                      <a:solidFill>
+                        <a:srgbClr val="E2E5E9"/>
+                      </a:solidFill>
+                      <a:prstDash val="solid"/>
+                      <a:round/>
+                      <a:headEnd type="none" w="med" len="med"/>
+                      <a:tailEnd type="none" w="med" len="med"/>
+                    </a:lnL>
+                    <a:lnR w="6350" cap="flat" cmpd="sng" algn="ctr">
+                      <a:solidFill>
+                        <a:srgbClr val="E2E5E9"/>
+                      </a:solidFill>
+                      <a:prstDash val="solid"/>
+                      <a:round/>
+                      <a:headEnd type="none" w="med" len="med"/>
+                      <a:tailEnd type="none" w="med" len="med"/>
+                    </a:lnR>
+                    <a:lnT w="6350" cap="flat" cmpd="sng" algn="ctr">
+                      <a:solidFill>
+                        <a:srgbClr val="E2E5E9"/>
+                      </a:solidFill>
+                      <a:prstDash val="solid"/>
+                      <a:round/>
+                      <a:headEnd type="none" w="med" len="med"/>
+                      <a:tailEnd type="none" w="med" len="med"/>
+                    </a:lnT>
+                    <a:lnB w="6350" cap="flat" cmpd="sng" algn="ctr">
+                      <a:solidFill>
+                        <a:srgbClr val="E2E5E9"/>
+                      </a:solidFill>
+                      <a:prstDash val="solid"/>
+                      <a:round/>
+                      <a:headEnd type="none" w="med" len="med"/>
+                      <a:tailEnd type="none" w="med" len="med"/>
+                    </a:lnB>
+                  </a:tcPr>
+                </a:tc>
+                <a:tc>
+                  <a:txBody>
+                    <a:bodyPr/>
+                    <a:lstStyle/>
+                    <a:p>
+                      <a:pPr indent="0" marL="0">
+                        <a:buNone/>
+                      </a:pPr>
+                      <a:r>
+                        <a:rPr lang="en-US" sz="1050" dirty="0">
+                          <a:solidFill>
+                            <a:srgbClr val="1A1A1A"/>
+                          </a:solidFill>
+                          <a:latin typeface="Microsoft YaHei" pitchFamily="34" charset="0"/>
+                          <a:ea typeface="Microsoft YaHei" pitchFamily="34" charset="-122"/>
+                          <a:cs typeface="Microsoft YaHei" pitchFamily="34" charset="-120"/>
+                        </a:rPr>
+                        <a:t>3</a:t>
+                      </a:r>
+                      <a:endParaRPr lang="en-US" sz="1050" dirty="0">
+                        <a:latin typeface="Microsoft YaHei" charset="0"/>
+                        <a:ea typeface="Microsoft YaHei" charset="0"/>
+                        <a:cs typeface="Microsoft YaHei" charset="0"/>
+                      </a:endParaRPr>
+                    </a:p>
+                  </a:txBody>
+                  <a:tcPr marL="91440" marR="91440" marT="45720" marB="45720" anchor="ctr">
+                    <a:lnL w="6350" cap="flat" cmpd="sng" algn="ctr">
+                      <a:solidFill>
+                        <a:srgbClr val="E2E5E9"/>
+                      </a:solidFill>
+                      <a:prstDash val="solid"/>
+                      <a:round/>
+                      <a:headEnd type="none" w="med" len="med"/>
+                      <a:tailEnd type="none" w="med" len="med"/>
+                    </a:lnL>
+                    <a:lnR w="6350" cap="flat" cmpd="sng" algn="ctr">
+                      <a:solidFill>
+                        <a:srgbClr val="E2E5E9"/>
+                      </a:solidFill>
+                      <a:prstDash val="solid"/>
+                      <a:round/>
+                      <a:headEnd type="none" w="med" len="med"/>
+                      <a:tailEnd type="none" w="med" len="med"/>
+                    </a:lnR>
+                    <a:lnT w="6350" cap="flat" cmpd="sng" algn="ctr">
+                      <a:solidFill>
+                        <a:srgbClr val="E2E5E9"/>
+                      </a:solidFill>
+                      <a:prstDash val="solid"/>
+                      <a:round/>
+                      <a:headEnd type="none" w="med" len="med"/>
+                      <a:tailEnd type="none" w="med" len="med"/>
+                    </a:lnT>
+                    <a:lnB w="6350" cap="flat" cmpd="sng" algn="ctr">
+                      <a:solidFill>
+                        <a:srgbClr val="E2E5E9"/>
+                      </a:solidFill>
+                      <a:prstDash val="solid"/>
+                      <a:round/>
+                      <a:headEnd type="none" w="med" len="med"/>
+                      <a:tailEnd type="none" w="med" len="med"/>
+                    </a:lnB>
+                  </a:tcPr>
+                </a:tc>
+                <a:tc>
+                  <a:txBody>
+                    <a:bodyPr/>
+                    <a:lstStyle/>
+                    <a:p>
+                      <a:pPr indent="0" marL="0">
+                        <a:buNone/>
+                      </a:pPr>
+                      <a:r>
+                        <a:rPr lang="en-US" sz="1050" dirty="0">
+                          <a:solidFill>
+                            <a:srgbClr val="1A1A1A"/>
+                          </a:solidFill>
+                          <a:latin typeface="Microsoft YaHei" pitchFamily="34" charset="0"/>
+                          <a:ea typeface="Microsoft YaHei" pitchFamily="34" charset="-122"/>
+                          <a:cs typeface="Microsoft YaHei" pitchFamily="34" charset="-120"/>
+                        </a:rPr>
+                        <a:t>—</a:t>
+                      </a:r>
+                      <a:endParaRPr lang="en-US" sz="1050" dirty="0">
+                        <a:latin typeface="Microsoft YaHei" charset="0"/>
+                        <a:ea typeface="Microsoft YaHei" charset="0"/>
+                        <a:cs typeface="Microsoft YaHei" charset="0"/>
+                      </a:endParaRPr>
+                    </a:p>
+                  </a:txBody>
+                  <a:tcPr marL="91440" marR="91440" marT="45720" marB="45720" anchor="ctr">
+                    <a:lnL w="6350" cap="flat" cmpd="sng" algn="ctr">
+                      <a:solidFill>
+                        <a:srgbClr val="E2E5E9"/>
+                      </a:solidFill>
+                      <a:prstDash val="solid"/>
+                      <a:round/>
+                      <a:headEnd type="none" w="med" len="med"/>
+                      <a:tailEnd type="none" w="med" len="med"/>
+                    </a:lnL>
+                    <a:lnR w="6350" cap="flat" cmpd="sng" algn="ctr">
+                      <a:solidFill>
+                        <a:srgbClr val="E2E5E9"/>
+                      </a:solidFill>
+                      <a:prstDash val="solid"/>
+                      <a:round/>
+                      <a:headEnd type="none" w="med" len="med"/>
+                      <a:tailEnd type="none" w="med" len="med"/>
+                    </a:lnR>
+                    <a:lnT w="6350" cap="flat" cmpd="sng" algn="ctr">
+                      <a:solidFill>
+                        <a:srgbClr val="E2E5E9"/>
+                      </a:solidFill>
+                      <a:prstDash val="solid"/>
+                      <a:round/>
+                      <a:headEnd type="none" w="med" len="med"/>
+                      <a:tailEnd type="none" w="med" len="med"/>
+                    </a:lnT>
+                    <a:lnB w="6350" cap="flat" cmpd="sng" algn="ctr">
+                      <a:solidFill>
+                        <a:srgbClr val="E2E5E9"/>
+                      </a:solidFill>
+                      <a:prstDash val="solid"/>
+                      <a:round/>
+                      <a:headEnd type="none" w="med" len="med"/>
+                      <a:tailEnd type="none" w="med" len="med"/>
+                    </a:lnB>
+                  </a:tcPr>
+                </a:tc>
+              </a:tr>
+              <a:tr h="205740">
+                <a:tc>
+                  <a:txBody>
+                    <a:bodyPr/>
+                    <a:lstStyle/>
+                    <a:p>
+                      <a:pPr indent="0" marL="0">
+                        <a:buNone/>
+                      </a:pPr>
+                      <a:r>
+                        <a:rPr lang="en-US" sz="1050" dirty="0">
+                          <a:solidFill>
+                            <a:srgbClr val="1A1A1A"/>
+                          </a:solidFill>
+                          <a:latin typeface="Microsoft YaHei" pitchFamily="34" charset="0"/>
+                          <a:ea typeface="Microsoft YaHei" pitchFamily="34" charset="-122"/>
+                          <a:cs typeface="Microsoft YaHei" pitchFamily="34" charset="-120"/>
+                        </a:rPr>
+                        <a:t>人 · 脑</a:t>
+                      </a:r>
+                      <a:endParaRPr lang="en-US" sz="1050" dirty="0">
+                        <a:latin typeface="Microsoft YaHei" charset="0"/>
+                        <a:ea typeface="Microsoft YaHei" charset="0"/>
+                        <a:cs typeface="Microsoft YaHei" charset="0"/>
+                      </a:endParaRPr>
+                    </a:p>
+                  </a:txBody>
+                  <a:tcPr marL="91440" marR="91440" marT="45720" marB="45720" anchor="ctr">
+                    <a:lnL w="6350" cap="flat" cmpd="sng" algn="ctr">
+                      <a:solidFill>
+                        <a:srgbClr val="E2E5E9"/>
+                      </a:solidFill>
+                      <a:prstDash val="solid"/>
+                      <a:round/>
+                      <a:headEnd type="none" w="med" len="med"/>
+                      <a:tailEnd type="none" w="med" len="med"/>
+                    </a:lnL>
+                    <a:lnR w="6350" cap="flat" cmpd="sng" algn="ctr">
+                      <a:solidFill>
+                        <a:srgbClr val="E2E5E9"/>
+                      </a:solidFill>
+                      <a:prstDash val="solid"/>
+                      <a:round/>
+                      <a:headEnd type="none" w="med" len="med"/>
+                      <a:tailEnd type="none" w="med" len="med"/>
+                    </a:lnR>
+                    <a:lnT w="6350" cap="flat" cmpd="sng" algn="ctr">
+                      <a:solidFill>
+                        <a:srgbClr val="E2E5E9"/>
+                      </a:solidFill>
+                      <a:prstDash val="solid"/>
+                      <a:round/>
+                      <a:headEnd type="none" w="med" len="med"/>
+                      <a:tailEnd type="none" w="med" len="med"/>
+                    </a:lnT>
+                    <a:lnB w="6350" cap="flat" cmpd="sng" algn="ctr">
+                      <a:solidFill>
+                        <a:srgbClr val="E2E5E9"/>
+                      </a:solidFill>
+                      <a:prstDash val="solid"/>
+                      <a:round/>
+                      <a:headEnd type="none" w="med" len="med"/>
+                      <a:tailEnd type="none" w="med" len="med"/>
+                    </a:lnB>
+                  </a:tcPr>
+                </a:tc>
+                <a:tc>
+                  <a:txBody>
+                    <a:bodyPr/>
+                    <a:lstStyle/>
+                    <a:p>
+                      <a:pPr indent="0" marL="0">
+                        <a:buNone/>
+                      </a:pPr>
+                      <a:r>
+                        <a:rPr lang="en-US" sz="1050" dirty="0">
+                          <a:solidFill>
+                            <a:srgbClr val="1A1A1A"/>
+                          </a:solidFill>
+                          <a:latin typeface="Microsoft YaHei" pitchFamily="34" charset="0"/>
+                          <a:ea typeface="Microsoft YaHei" pitchFamily="34" charset="-122"/>
+                          <a:cs typeface="Microsoft YaHei" pitchFamily="34" charset="-120"/>
+                        </a:rPr>
+                        <a:t>L5 ET 投射神经元 ×3</a:t>
+                      </a:r>
+                      <a:endParaRPr lang="en-US" sz="1050" dirty="0">
+                        <a:latin typeface="Microsoft YaHei" charset="0"/>
+                        <a:ea typeface="Microsoft YaHei" charset="0"/>
+                        <a:cs typeface="Microsoft YaHei" charset="0"/>
+                      </a:endParaRPr>
+                    </a:p>
+                  </a:txBody>
+                  <a:tcPr marL="91440" marR="91440" marT="45720" marB="45720" anchor="ctr">
+                    <a:lnL w="6350" cap="flat" cmpd="sng" algn="ctr">
+                      <a:solidFill>
+                        <a:srgbClr val="E2E5E9"/>
+                      </a:solidFill>
+                      <a:prstDash val="solid"/>
+                      <a:round/>
+                      <a:headEnd type="none" w="med" len="med"/>
+                      <a:tailEnd type="none" w="med" len="med"/>
+                    </a:lnL>
+                    <a:lnR w="6350" cap="flat" cmpd="sng" algn="ctr">
+                      <a:solidFill>
+                        <a:srgbClr val="E2E5E9"/>
+                      </a:solidFill>
+                      <a:prstDash val="solid"/>
+                      <a:round/>
+                      <a:headEnd type="none" w="med" len="med"/>
+                      <a:tailEnd type="none" w="med" len="med"/>
+                    </a:lnR>
+                    <a:lnT w="6350" cap="flat" cmpd="sng" algn="ctr">
+                      <a:solidFill>
+                        <a:srgbClr val="E2E5E9"/>
+                      </a:solidFill>
+                      <a:prstDash val="solid"/>
+                      <a:round/>
+                      <a:headEnd type="none" w="med" len="med"/>
+                      <a:tailEnd type="none" w="med" len="med"/>
+                    </a:lnT>
+                    <a:lnB w="6350" cap="flat" cmpd="sng" algn="ctr">
+                      <a:solidFill>
+                        <a:srgbClr val="E2E5E9"/>
+                      </a:solidFill>
+                      <a:prstDash val="solid"/>
+                      <a:round/>
+                      <a:headEnd type="none" w="med" len="med"/>
+                      <a:tailEnd type="none" w="med" len="med"/>
+                    </a:lnB>
+                  </a:tcPr>
+                </a:tc>
+                <a:tc>
+                  <a:txBody>
+                    <a:bodyPr/>
+                    <a:lstStyle/>
+                    <a:p>
+                      <a:pPr indent="0" marL="0">
+                        <a:buNone/>
+                      </a:pPr>
+                      <a:r>
+                        <a:rPr lang="en-US" sz="1050" dirty="0">
+                          <a:solidFill>
+                            <a:srgbClr val="1A1A1A"/>
+                          </a:solidFill>
+                          <a:latin typeface="Microsoft YaHei" pitchFamily="34" charset="0"/>
+                          <a:ea typeface="Microsoft YaHei" pitchFamily="34" charset="-122"/>
+                          <a:cs typeface="Microsoft YaHei" pitchFamily="34" charset="-120"/>
+                        </a:rPr>
+                        <a:t>36.4%　890/2443</a:t>
+                      </a:r>
+                      <a:endParaRPr lang="en-US" sz="1050" dirty="0">
+                        <a:latin typeface="Microsoft YaHei" charset="0"/>
+                        <a:ea typeface="Microsoft YaHei" charset="0"/>
+                        <a:cs typeface="Microsoft YaHei" charset="0"/>
+                      </a:endParaRPr>
+                    </a:p>
+                  </a:txBody>
+                  <a:tcPr marL="91440" marR="91440" marT="45720" marB="45720" anchor="ctr">
+                    <a:lnL w="6350" cap="flat" cmpd="sng" algn="ctr">
+                      <a:solidFill>
+                        <a:srgbClr val="E2E5E9"/>
+                      </a:solidFill>
+                      <a:prstDash val="solid"/>
+                      <a:round/>
+                      <a:headEnd type="none" w="med" len="med"/>
+                      <a:tailEnd type="none" w="med" len="med"/>
+                    </a:lnL>
+                    <a:lnR w="6350" cap="flat" cmpd="sng" algn="ctr">
+                      <a:solidFill>
+                        <a:srgbClr val="E2E5E9"/>
+                      </a:solidFill>
+                      <a:prstDash val="solid"/>
+                      <a:round/>
+                      <a:headEnd type="none" w="med" len="med"/>
+                      <a:tailEnd type="none" w="med" len="med"/>
+                    </a:lnR>
+                    <a:lnT w="6350" cap="flat" cmpd="sng" algn="ctr">
+                      <a:solidFill>
+                        <a:srgbClr val="E2E5E9"/>
+                      </a:solidFill>
+                      <a:prstDash val="solid"/>
+                      <a:round/>
+                      <a:headEnd type="none" w="med" len="med"/>
+                      <a:tailEnd type="none" w="med" len="med"/>
+                    </a:lnT>
+                    <a:lnB w="6350" cap="flat" cmpd="sng" algn="ctr">
+                      <a:solidFill>
+                        <a:srgbClr val="E2E5E9"/>
+                      </a:solidFill>
+                      <a:prstDash val="solid"/>
+                      <a:round/>
+                      <a:headEnd type="none" w="med" len="med"/>
+                      <a:tailEnd type="none" w="med" len="med"/>
+                    </a:lnB>
+                  </a:tcPr>
+                </a:tc>
+                <a:tc>
+                  <a:txBody>
+                    <a:bodyPr/>
+                    <a:lstStyle/>
+                    <a:p>
+                      <a:pPr indent="0" marL="0">
+                        <a:buNone/>
+                      </a:pPr>
+                      <a:r>
+                        <a:rPr lang="en-US" sz="1050" dirty="0">
+                          <a:solidFill>
+                            <a:srgbClr val="1A1A1A"/>
+                          </a:solidFill>
+                          <a:latin typeface="Microsoft YaHei" pitchFamily="34" charset="0"/>
+                          <a:ea typeface="Microsoft YaHei" pitchFamily="34" charset="-122"/>
+                          <a:cs typeface="Microsoft YaHei" pitchFamily="34" charset="-120"/>
+                        </a:rPr>
+                        <a:t>0.20%　5/2443</a:t>
+                      </a:r>
+                      <a:endParaRPr lang="en-US" sz="1050" dirty="0">
+                        <a:latin typeface="Microsoft YaHei" charset="0"/>
+                        <a:ea typeface="Microsoft YaHei" charset="0"/>
+                        <a:cs typeface="Microsoft YaHei" charset="0"/>
+                      </a:endParaRPr>
+                    </a:p>
+                  </a:txBody>
+                  <a:tcPr marL="91440" marR="91440" marT="45720" marB="45720" anchor="ctr">
+                    <a:lnL w="6350" cap="flat" cmpd="sng" algn="ctr">
+                      <a:solidFill>
+                        <a:srgbClr val="E2E5E9"/>
+                      </a:solidFill>
+                      <a:prstDash val="solid"/>
+                      <a:round/>
+                      <a:headEnd type="none" w="med" len="med"/>
+                      <a:tailEnd type="none" w="med" len="med"/>
+                    </a:lnL>
+                    <a:lnR w="6350" cap="flat" cmpd="sng" algn="ctr">
+                      <a:solidFill>
+                        <a:srgbClr val="E2E5E9"/>
+                      </a:solidFill>
+                      <a:prstDash val="solid"/>
+                      <a:round/>
+                      <a:headEnd type="none" w="med" len="med"/>
+                      <a:tailEnd type="none" w="med" len="med"/>
+                    </a:lnR>
+                    <a:lnT w="6350" cap="flat" cmpd="sng" algn="ctr">
+                      <a:solidFill>
+                        <a:srgbClr val="E2E5E9"/>
+                      </a:solidFill>
+                      <a:prstDash val="solid"/>
+                      <a:round/>
+                      <a:headEnd type="none" w="med" len="med"/>
+                      <a:tailEnd type="none" w="med" len="med"/>
+                    </a:lnT>
+                    <a:lnB w="6350" cap="flat" cmpd="sng" algn="ctr">
+                      <a:solidFill>
+                        <a:srgbClr val="E2E5E9"/>
+                      </a:solidFill>
+                      <a:prstDash val="solid"/>
+                      <a:round/>
+                      <a:headEnd type="none" w="med" len="med"/>
+                      <a:tailEnd type="none" w="med" len="med"/>
+                    </a:lnB>
+                  </a:tcPr>
+                </a:tc>
+                <a:tc>
+                  <a:txBody>
+                    <a:bodyPr/>
+                    <a:lstStyle/>
+                    <a:p>
+                      <a:pPr indent="0" marL="0">
+                        <a:buNone/>
+                      </a:pPr>
+                      <a:r>
+                        <a:rPr lang="en-US" sz="1050" dirty="0">
+                          <a:solidFill>
+                            <a:srgbClr val="1A1A1A"/>
+                          </a:solidFill>
+                          <a:latin typeface="Microsoft YaHei" pitchFamily="34" charset="0"/>
+                          <a:ea typeface="Microsoft YaHei" pitchFamily="34" charset="-122"/>
+                          <a:cs typeface="Microsoft YaHei" pitchFamily="34" charset="-120"/>
+                        </a:rPr>
+                        <a:t>42</a:t>
+                      </a:r>
+                      <a:endParaRPr lang="en-US" sz="1050" dirty="0">
+                        <a:latin typeface="Microsoft YaHei" charset="0"/>
+                        <a:ea typeface="Microsoft YaHei" charset="0"/>
+                        <a:cs typeface="Microsoft YaHei" charset="0"/>
+                      </a:endParaRPr>
+                    </a:p>
+                  </a:txBody>
+                  <a:tcPr marL="91440" marR="91440" marT="45720" marB="45720" anchor="ctr">
+                    <a:lnL w="6350" cap="flat" cmpd="sng" algn="ctr">
+                      <a:solidFill>
+                        <a:srgbClr val="E2E5E9"/>
+                      </a:solidFill>
+                      <a:prstDash val="solid"/>
+                      <a:round/>
+                      <a:headEnd type="none" w="med" len="med"/>
+                      <a:tailEnd type="none" w="med" len="med"/>
+                    </a:lnL>
+                    <a:lnR w="6350" cap="flat" cmpd="sng" algn="ctr">
+                      <a:solidFill>
+                        <a:srgbClr val="E2E5E9"/>
+                      </a:solidFill>
+                      <a:prstDash val="solid"/>
+                      <a:round/>
+                      <a:headEnd type="none" w="med" len="med"/>
+                      <a:tailEnd type="none" w="med" len="med"/>
+                    </a:lnR>
+                    <a:lnT w="6350" cap="flat" cmpd="sng" algn="ctr">
+                      <a:solidFill>
+                        <a:srgbClr val="E2E5E9"/>
+                      </a:solidFill>
+                      <a:prstDash val="solid"/>
+                      <a:round/>
+                      <a:headEnd type="none" w="med" len="med"/>
+                      <a:tailEnd type="none" w="med" len="med"/>
+                    </a:lnT>
+                    <a:lnB w="6350" cap="flat" cmpd="sng" algn="ctr">
+                      <a:solidFill>
+                        <a:srgbClr val="E2E5E9"/>
+                      </a:solidFill>
+                      <a:prstDash val="solid"/>
+                      <a:round/>
+                      <a:headEnd type="none" w="med" len="med"/>
+                      <a:tailEnd type="none" w="med" len="med"/>
+                    </a:lnB>
+                  </a:tcPr>
+                </a:tc>
+                <a:tc>
+                  <a:txBody>
+                    <a:bodyPr/>
+                    <a:lstStyle/>
+                    <a:p>
+                      <a:pPr indent="0" marL="0">
+                        <a:buNone/>
+                      </a:pPr>
+                      <a:r>
+                        <a:rPr lang="en-US" sz="1050" dirty="0">
+                          <a:solidFill>
+                            <a:srgbClr val="1A1A1A"/>
+                          </a:solidFill>
+                          <a:latin typeface="Microsoft YaHei" pitchFamily="34" charset="0"/>
+                          <a:ea typeface="Microsoft YaHei" pitchFamily="34" charset="-122"/>
+                          <a:cs typeface="Microsoft YaHei" pitchFamily="34" charset="-120"/>
+                        </a:rPr>
+                        <a:t>2</a:t>
+                      </a:r>
+                      <a:endParaRPr lang="en-US" sz="1050" dirty="0">
+                        <a:latin typeface="Microsoft YaHei" charset="0"/>
+                        <a:ea typeface="Microsoft YaHei" charset="0"/>
+                        <a:cs typeface="Microsoft YaHei" charset="0"/>
+                      </a:endParaRPr>
+                    </a:p>
+                  </a:txBody>
+                  <a:tcPr marL="91440" marR="91440" marT="45720" marB="45720" anchor="ctr">
+                    <a:lnL w="6350" cap="flat" cmpd="sng" algn="ctr">
+                      <a:solidFill>
+                        <a:srgbClr val="E2E5E9"/>
+                      </a:solidFill>
+                      <a:prstDash val="solid"/>
+                      <a:round/>
+                      <a:headEnd type="none" w="med" len="med"/>
+                      <a:tailEnd type="none" w="med" len="med"/>
+                    </a:lnL>
+                    <a:lnR w="6350" cap="flat" cmpd="sng" algn="ctr">
+                      <a:solidFill>
+                        <a:srgbClr val="E2E5E9"/>
+                      </a:solidFill>
+                      <a:prstDash val="solid"/>
+                      <a:round/>
+                      <a:headEnd type="none" w="med" len="med"/>
+                      <a:tailEnd type="none" w="med" len="med"/>
+                    </a:lnR>
+                    <a:lnT w="6350" cap="flat" cmpd="sng" algn="ctr">
+                      <a:solidFill>
+                        <a:srgbClr val="E2E5E9"/>
+                      </a:solidFill>
+                      <a:prstDash val="solid"/>
+                      <a:round/>
+                      <a:headEnd type="none" w="med" len="med"/>
+                      <a:tailEnd type="none" w="med" len="med"/>
+                    </a:lnT>
+                    <a:lnB w="6350" cap="flat" cmpd="sng" algn="ctr">
+                      <a:solidFill>
+                        <a:srgbClr val="E2E5E9"/>
+                      </a:solidFill>
+                      <a:prstDash val="solid"/>
+                      <a:round/>
+                      <a:headEnd type="none" w="med" len="med"/>
+                      <a:tailEnd type="none" w="med" len="med"/>
+                    </a:lnB>
+                  </a:tcPr>
+                </a:tc>
+                <a:tc>
+                  <a:txBody>
+                    <a:bodyPr/>
+                    <a:lstStyle/>
+                    <a:p>
+                      <a:pPr indent="0" marL="0">
+                        <a:buNone/>
+                      </a:pPr>
+                      <a:r>
+                        <a:rPr lang="en-US" sz="1050" dirty="0">
+                          <a:solidFill>
+                            <a:srgbClr val="1A1A1A"/>
+                          </a:solidFill>
+                          <a:latin typeface="Microsoft YaHei" pitchFamily="34" charset="0"/>
+                          <a:ea typeface="Microsoft YaHei" pitchFamily="34" charset="-122"/>
+                          <a:cs typeface="Microsoft YaHei" pitchFamily="34" charset="-120"/>
+                        </a:rPr>
+                        <a:t>—</a:t>
+                      </a:r>
+                      <a:endParaRPr lang="en-US" sz="1050" dirty="0">
+                        <a:latin typeface="Microsoft YaHei" charset="0"/>
+                        <a:ea typeface="Microsoft YaHei" charset="0"/>
+                        <a:cs typeface="Microsoft YaHei" charset="0"/>
+                      </a:endParaRPr>
+                    </a:p>
+                  </a:txBody>
+                  <a:tcPr marL="91440" marR="91440" marT="45720" marB="45720" anchor="ctr">
+                    <a:lnL w="6350" cap="flat" cmpd="sng" algn="ctr">
+                      <a:solidFill>
+                        <a:srgbClr val="E2E5E9"/>
+                      </a:solidFill>
+                      <a:prstDash val="solid"/>
+                      <a:round/>
+                      <a:headEnd type="none" w="med" len="med"/>
+                      <a:tailEnd type="none" w="med" len="med"/>
+                    </a:lnL>
+                    <a:lnR w="6350" cap="flat" cmpd="sng" algn="ctr">
+                      <a:solidFill>
+                        <a:srgbClr val="E2E5E9"/>
+                      </a:solidFill>
+                      <a:prstDash val="solid"/>
+                      <a:round/>
+                      <a:headEnd type="none" w="med" len="med"/>
+                      <a:tailEnd type="none" w="med" len="med"/>
+                    </a:lnR>
+                    <a:lnT w="6350" cap="flat" cmpd="sng" algn="ctr">
+                      <a:solidFill>
+                        <a:srgbClr val="E2E5E9"/>
+                      </a:solidFill>
+                      <a:prstDash val="solid"/>
+                      <a:round/>
+                      <a:headEnd type="none" w="med" len="med"/>
+                      <a:tailEnd type="none" w="med" len="med"/>
+                    </a:lnT>
+                    <a:lnB w="6350" cap="flat" cmpd="sng" algn="ctr">
+                      <a:solidFill>
+                        <a:srgbClr val="E2E5E9"/>
+                      </a:solidFill>
+                      <a:prstDash val="solid"/>
+                      <a:round/>
+                      <a:headEnd type="none" w="med" len="med"/>
+                      <a:tailEnd type="none" w="med" len="med"/>
+                    </a:lnB>
+                  </a:tcPr>
+                </a:tc>
+              </a:tr>
+              <a:tr h="205740">
+                <a:tc>
+                  <a:txBody>
+                    <a:bodyPr/>
+                    <a:lstStyle/>
+                    <a:p>
+                      <a:pPr indent="0" marL="0">
+                        <a:buNone/>
+                      </a:pPr>
+                      <a:r>
+                        <a:rPr lang="en-US" sz="1050" dirty="0">
+                          <a:solidFill>
+                            <a:srgbClr val="1A1A1A"/>
+                          </a:solidFill>
+                          <a:latin typeface="Microsoft YaHei" pitchFamily="34" charset="0"/>
+                          <a:ea typeface="Microsoft YaHei" pitchFamily="34" charset="-122"/>
+                          <a:cs typeface="Microsoft YaHei" pitchFamily="34" charset="-120"/>
+                        </a:rPr>
+                        <a:t>人 · 脑</a:t>
+                      </a:r>
+                      <a:endParaRPr lang="en-US" sz="1050" dirty="0">
+                        <a:latin typeface="Microsoft YaHei" charset="0"/>
+                        <a:ea typeface="Microsoft YaHei" charset="0"/>
+                        <a:cs typeface="Microsoft YaHei" charset="0"/>
+                      </a:endParaRPr>
+                    </a:p>
+                  </a:txBody>
+                  <a:tcPr marL="91440" marR="91440" marT="45720" marB="45720" anchor="ctr">
+                    <a:lnL w="6350" cap="flat" cmpd="sng" algn="ctr">
+                      <a:solidFill>
+                        <a:srgbClr val="E2E5E9"/>
+                      </a:solidFill>
+                      <a:prstDash val="solid"/>
+                      <a:round/>
+                      <a:headEnd type="none" w="med" len="med"/>
+                      <a:tailEnd type="none" w="med" len="med"/>
+                    </a:lnL>
+                    <a:lnR w="6350" cap="flat" cmpd="sng" algn="ctr">
+                      <a:solidFill>
+                        <a:srgbClr val="E2E5E9"/>
+                      </a:solidFill>
+                      <a:prstDash val="solid"/>
+                      <a:round/>
+                      <a:headEnd type="none" w="med" len="med"/>
+                      <a:tailEnd type="none" w="med" len="med"/>
+                    </a:lnR>
+                    <a:lnT w="6350" cap="flat" cmpd="sng" algn="ctr">
+                      <a:solidFill>
+                        <a:srgbClr val="E2E5E9"/>
+                      </a:solidFill>
+                      <a:prstDash val="solid"/>
+                      <a:round/>
+                      <a:headEnd type="none" w="med" len="med"/>
+                      <a:tailEnd type="none" w="med" len="med"/>
+                    </a:lnT>
+                    <a:lnB w="6350" cap="flat" cmpd="sng" algn="ctr">
+                      <a:solidFill>
+                        <a:srgbClr val="E2E5E9"/>
+                      </a:solidFill>
+                      <a:prstDash val="solid"/>
+                      <a:round/>
+                      <a:headEnd type="none" w="med" len="med"/>
+                      <a:tailEnd type="none" w="med" len="med"/>
+                    </a:lnB>
+                  </a:tcPr>
+                </a:tc>
+                <a:tc>
+                  <a:txBody>
+                    <a:bodyPr/>
+                    <a:lstStyle/>
+                    <a:p>
+                      <a:pPr indent="0" marL="0">
+                        <a:buNone/>
+                      </a:pPr>
+                      <a:r>
+                        <a:rPr lang="en-US" sz="1050" dirty="0">
+                          <a:solidFill>
+                            <a:srgbClr val="1A1A1A"/>
+                          </a:solidFill>
+                          <a:latin typeface="Microsoft YaHei" pitchFamily="34" charset="0"/>
+                          <a:ea typeface="Microsoft YaHei" pitchFamily="34" charset="-122"/>
+                          <a:cs typeface="Microsoft YaHei" pitchFamily="34" charset="-120"/>
+                        </a:rPr>
+                        <a:t>PV 中间神经元 ×2</a:t>
+                      </a:r>
+                      <a:endParaRPr lang="en-US" sz="1050" dirty="0">
+                        <a:latin typeface="Microsoft YaHei" charset="0"/>
+                        <a:ea typeface="Microsoft YaHei" charset="0"/>
+                        <a:cs typeface="Microsoft YaHei" charset="0"/>
+                      </a:endParaRPr>
+                    </a:p>
+                  </a:txBody>
+                  <a:tcPr marL="91440" marR="91440" marT="45720" marB="45720" anchor="ctr">
+                    <a:lnL w="6350" cap="flat" cmpd="sng" algn="ctr">
+                      <a:solidFill>
+                        <a:srgbClr val="E2E5E9"/>
+                      </a:solidFill>
+                      <a:prstDash val="solid"/>
+                      <a:round/>
+                      <a:headEnd type="none" w="med" len="med"/>
+                      <a:tailEnd type="none" w="med" len="med"/>
+                    </a:lnL>
+                    <a:lnR w="6350" cap="flat" cmpd="sng" algn="ctr">
+                      <a:solidFill>
+                        <a:srgbClr val="E2E5E9"/>
+                      </a:solidFill>
+                      <a:prstDash val="solid"/>
+                      <a:round/>
+                      <a:headEnd type="none" w="med" len="med"/>
+                      <a:tailEnd type="none" w="med" len="med"/>
+                    </a:lnR>
+                    <a:lnT w="6350" cap="flat" cmpd="sng" algn="ctr">
+                      <a:solidFill>
+                        <a:srgbClr val="E2E5E9"/>
+                      </a:solidFill>
+                      <a:prstDash val="solid"/>
+                      <a:round/>
+                      <a:headEnd type="none" w="med" len="med"/>
+                      <a:tailEnd type="none" w="med" len="med"/>
+                    </a:lnT>
+                    <a:lnB w="6350" cap="flat" cmpd="sng" algn="ctr">
+                      <a:solidFill>
+                        <a:srgbClr val="E2E5E9"/>
+                      </a:solidFill>
+                      <a:prstDash val="solid"/>
+                      <a:round/>
+                      <a:headEnd type="none" w="med" len="med"/>
+                      <a:tailEnd type="none" w="med" len="med"/>
+                    </a:lnB>
+                  </a:tcPr>
+                </a:tc>
+                <a:tc>
+                  <a:txBody>
+                    <a:bodyPr/>
+                    <a:lstStyle/>
+                    <a:p>
+                      <a:pPr indent="0" marL="0">
+                        <a:buNone/>
+                      </a:pPr>
+                      <a:r>
+                        <a:rPr lang="en-US" sz="1050" dirty="0">
+                          <a:solidFill>
+                            <a:srgbClr val="1A1A1A"/>
+                          </a:solidFill>
+                          <a:latin typeface="Microsoft YaHei" pitchFamily="34" charset="0"/>
+                          <a:ea typeface="Microsoft YaHei" pitchFamily="34" charset="-122"/>
+                          <a:cs typeface="Microsoft YaHei" pitchFamily="34" charset="-120"/>
+                        </a:rPr>
+                        <a:t>24.9%　9484/38028</a:t>
+                      </a:r>
+                      <a:endParaRPr lang="en-US" sz="1050" dirty="0">
+                        <a:latin typeface="Microsoft YaHei" charset="0"/>
+                        <a:ea typeface="Microsoft YaHei" charset="0"/>
+                        <a:cs typeface="Microsoft YaHei" charset="0"/>
+                      </a:endParaRPr>
+                    </a:p>
+                  </a:txBody>
+                  <a:tcPr marL="91440" marR="91440" marT="45720" marB="45720" anchor="ctr">
+                    <a:lnL w="6350" cap="flat" cmpd="sng" algn="ctr">
+                      <a:solidFill>
+                        <a:srgbClr val="E2E5E9"/>
+                      </a:solidFill>
+                      <a:prstDash val="solid"/>
+                      <a:round/>
+                      <a:headEnd type="none" w="med" len="med"/>
+                      <a:tailEnd type="none" w="med" len="med"/>
+                    </a:lnL>
+                    <a:lnR w="6350" cap="flat" cmpd="sng" algn="ctr">
+                      <a:solidFill>
+                        <a:srgbClr val="E2E5E9"/>
+                      </a:solidFill>
+                      <a:prstDash val="solid"/>
+                      <a:round/>
+                      <a:headEnd type="none" w="med" len="med"/>
+                      <a:tailEnd type="none" w="med" len="med"/>
+                    </a:lnR>
+                    <a:lnT w="6350" cap="flat" cmpd="sng" algn="ctr">
+                      <a:solidFill>
+                        <a:srgbClr val="E2E5E9"/>
+                      </a:solidFill>
+                      <a:prstDash val="solid"/>
+                      <a:round/>
+                      <a:headEnd type="none" w="med" len="med"/>
+                      <a:tailEnd type="none" w="med" len="med"/>
+                    </a:lnT>
+                    <a:lnB w="6350" cap="flat" cmpd="sng" algn="ctr">
+                      <a:solidFill>
+                        <a:srgbClr val="E2E5E9"/>
+                      </a:solidFill>
+                      <a:prstDash val="solid"/>
+                      <a:round/>
+                      <a:headEnd type="none" w="med" len="med"/>
+                      <a:tailEnd type="none" w="med" len="med"/>
+                    </a:lnB>
+                  </a:tcPr>
+                </a:tc>
+                <a:tc>
+                  <a:txBody>
+                    <a:bodyPr/>
+                    <a:lstStyle/>
+                    <a:p>
+                      <a:pPr indent="0" marL="0">
+                        <a:buNone/>
+                      </a:pPr>
+                      <a:r>
+                        <a:rPr lang="en-US" sz="1050" dirty="0">
+                          <a:solidFill>
+                            <a:srgbClr val="1A1A1A"/>
+                          </a:solidFill>
+                          <a:latin typeface="Microsoft YaHei" pitchFamily="34" charset="0"/>
+                          <a:ea typeface="Microsoft YaHei" pitchFamily="34" charset="-122"/>
+                          <a:cs typeface="Microsoft YaHei" pitchFamily="34" charset="-120"/>
+                        </a:rPr>
+                        <a:t>0.14%　52/38028</a:t>
+                      </a:r>
+                      <a:endParaRPr lang="en-US" sz="1050" dirty="0">
+                        <a:latin typeface="Microsoft YaHei" charset="0"/>
+                        <a:ea typeface="Microsoft YaHei" charset="0"/>
+                        <a:cs typeface="Microsoft YaHei" charset="0"/>
+                      </a:endParaRPr>
+                    </a:p>
+                  </a:txBody>
+                  <a:tcPr marL="91440" marR="91440" marT="45720" marB="45720" anchor="ctr">
+                    <a:lnL w="6350" cap="flat" cmpd="sng" algn="ctr">
+                      <a:solidFill>
+                        <a:srgbClr val="E2E5E9"/>
+                      </a:solidFill>
+                      <a:prstDash val="solid"/>
+                      <a:round/>
+                      <a:headEnd type="none" w="med" len="med"/>
+                      <a:tailEnd type="none" w="med" len="med"/>
+                    </a:lnL>
+                    <a:lnR w="6350" cap="flat" cmpd="sng" algn="ctr">
+                      <a:solidFill>
+                        <a:srgbClr val="E2E5E9"/>
+                      </a:solidFill>
+                      <a:prstDash val="solid"/>
+                      <a:round/>
+                      <a:headEnd type="none" w="med" len="med"/>
+                      <a:tailEnd type="none" w="med" len="med"/>
+                    </a:lnR>
+                    <a:lnT w="6350" cap="flat" cmpd="sng" algn="ctr">
+                      <a:solidFill>
+                        <a:srgbClr val="E2E5E9"/>
+                      </a:solidFill>
+                      <a:prstDash val="solid"/>
+                      <a:round/>
+                      <a:headEnd type="none" w="med" len="med"/>
+                      <a:tailEnd type="none" w="med" len="med"/>
+                    </a:lnT>
+                    <a:lnB w="6350" cap="flat" cmpd="sng" algn="ctr">
+                      <a:solidFill>
+                        <a:srgbClr val="E2E5E9"/>
+                      </a:solidFill>
+                      <a:prstDash val="solid"/>
+                      <a:round/>
+                      <a:headEnd type="none" w="med" len="med"/>
+                      <a:tailEnd type="none" w="med" len="med"/>
+                    </a:lnB>
+                  </a:tcPr>
+                </a:tc>
+                <a:tc>
+                  <a:txBody>
+                    <a:bodyPr/>
+                    <a:lstStyle/>
+                    <a:p>
+                      <a:pPr indent="0" marL="0">
+                        <a:buNone/>
+                      </a:pPr>
+                      <a:r>
+                        <a:rPr lang="en-US" sz="1050" dirty="0">
+                          <a:solidFill>
+                            <a:srgbClr val="1A1A1A"/>
+                          </a:solidFill>
+                          <a:latin typeface="Microsoft YaHei" pitchFamily="34" charset="0"/>
+                          <a:ea typeface="Microsoft YaHei" pitchFamily="34" charset="-122"/>
+                          <a:cs typeface="Microsoft YaHei" pitchFamily="34" charset="-120"/>
+                        </a:rPr>
+                        <a:t>234</a:t>
+                      </a:r>
+                      <a:endParaRPr lang="en-US" sz="1050" dirty="0">
+                        <a:latin typeface="Microsoft YaHei" charset="0"/>
+                        <a:ea typeface="Microsoft YaHei" charset="0"/>
+                        <a:cs typeface="Microsoft YaHei" charset="0"/>
+                      </a:endParaRPr>
+                    </a:p>
+                  </a:txBody>
+                  <a:tcPr marL="91440" marR="91440" marT="45720" marB="45720" anchor="ctr">
+                    <a:lnL w="6350" cap="flat" cmpd="sng" algn="ctr">
+                      <a:solidFill>
+                        <a:srgbClr val="E2E5E9"/>
+                      </a:solidFill>
+                      <a:prstDash val="solid"/>
+                      <a:round/>
+                      <a:headEnd type="none" w="med" len="med"/>
+                      <a:tailEnd type="none" w="med" len="med"/>
+                    </a:lnL>
+                    <a:lnR w="6350" cap="flat" cmpd="sng" algn="ctr">
+                      <a:solidFill>
+                        <a:srgbClr val="E2E5E9"/>
+                      </a:solidFill>
+                      <a:prstDash val="solid"/>
+                      <a:round/>
+                      <a:headEnd type="none" w="med" len="med"/>
+                      <a:tailEnd type="none" w="med" len="med"/>
+                    </a:lnR>
+                    <a:lnT w="6350" cap="flat" cmpd="sng" algn="ctr">
+                      <a:solidFill>
+                        <a:srgbClr val="E2E5E9"/>
+                      </a:solidFill>
+                      <a:prstDash val="solid"/>
+                      <a:round/>
+                      <a:headEnd type="none" w="med" len="med"/>
+                      <a:tailEnd type="none" w="med" len="med"/>
+                    </a:lnT>
+                    <a:lnB w="6350" cap="flat" cmpd="sng" algn="ctr">
+                      <a:solidFill>
+                        <a:srgbClr val="E2E5E9"/>
+                      </a:solidFill>
+                      <a:prstDash val="solid"/>
+                      <a:round/>
+                      <a:headEnd type="none" w="med" len="med"/>
+                      <a:tailEnd type="none" w="med" len="med"/>
+                    </a:lnB>
+                  </a:tcPr>
+                </a:tc>
+                <a:tc>
+                  <a:txBody>
+                    <a:bodyPr/>
+                    <a:lstStyle/>
+                    <a:p>
+                      <a:pPr indent="0" marL="0">
+                        <a:buNone/>
+                      </a:pPr>
+                      <a:r>
+                        <a:rPr lang="en-US" sz="1050" dirty="0">
+                          <a:solidFill>
+                            <a:srgbClr val="1A1A1A"/>
+                          </a:solidFill>
+                          <a:latin typeface="Microsoft YaHei" pitchFamily="34" charset="0"/>
+                          <a:ea typeface="Microsoft YaHei" pitchFamily="34" charset="-122"/>
+                          <a:cs typeface="Microsoft YaHei" pitchFamily="34" charset="-120"/>
+                        </a:rPr>
+                        <a:t>2</a:t>
+                      </a:r>
+                      <a:endParaRPr lang="en-US" sz="1050" dirty="0">
+                        <a:latin typeface="Microsoft YaHei" charset="0"/>
+                        <a:ea typeface="Microsoft YaHei" charset="0"/>
+                        <a:cs typeface="Microsoft YaHei" charset="0"/>
+                      </a:endParaRPr>
+                    </a:p>
+                  </a:txBody>
+                  <a:tcPr marL="91440" marR="91440" marT="45720" marB="45720" anchor="ctr">
+                    <a:lnL w="6350" cap="flat" cmpd="sng" algn="ctr">
+                      <a:solidFill>
+                        <a:srgbClr val="E2E5E9"/>
+                      </a:solidFill>
+                      <a:prstDash val="solid"/>
+                      <a:round/>
+                      <a:headEnd type="none" w="med" len="med"/>
+                      <a:tailEnd type="none" w="med" len="med"/>
+                    </a:lnL>
+                    <a:lnR w="6350" cap="flat" cmpd="sng" algn="ctr">
+                      <a:solidFill>
+                        <a:srgbClr val="E2E5E9"/>
+                      </a:solidFill>
+                      <a:prstDash val="solid"/>
+                      <a:round/>
+                      <a:headEnd type="none" w="med" len="med"/>
+                      <a:tailEnd type="none" w="med" len="med"/>
+                    </a:lnR>
+                    <a:lnT w="6350" cap="flat" cmpd="sng" algn="ctr">
+                      <a:solidFill>
+                        <a:srgbClr val="E2E5E9"/>
+                      </a:solidFill>
+                      <a:prstDash val="solid"/>
+                      <a:round/>
+                      <a:headEnd type="none" w="med" len="med"/>
+                      <a:tailEnd type="none" w="med" len="med"/>
+                    </a:lnT>
+                    <a:lnB w="6350" cap="flat" cmpd="sng" algn="ctr">
+                      <a:solidFill>
+                        <a:srgbClr val="E2E5E9"/>
+                      </a:solidFill>
+                      <a:prstDash val="solid"/>
+                      <a:round/>
+                      <a:headEnd type="none" w="med" len="med"/>
+                      <a:tailEnd type="none" w="med" len="med"/>
+                    </a:lnB>
+                  </a:tcPr>
+                </a:tc>
+                <a:tc>
+                  <a:txBody>
+                    <a:bodyPr/>
+                    <a:lstStyle/>
+                    <a:p>
+                      <a:pPr indent="0" marL="0">
+                        <a:buNone/>
+                      </a:pPr>
+                      <a:r>
+                        <a:rPr lang="en-US" sz="1050" dirty="0">
+                          <a:solidFill>
+                            <a:srgbClr val="1A1A1A"/>
+                          </a:solidFill>
+                          <a:latin typeface="Microsoft YaHei" pitchFamily="34" charset="0"/>
+                          <a:ea typeface="Microsoft YaHei" pitchFamily="34" charset="-122"/>
+                          <a:cs typeface="Microsoft YaHei" pitchFamily="34" charset="-120"/>
+                        </a:rPr>
+                        <a:t>—</a:t>
+                      </a:r>
+                      <a:endParaRPr lang="en-US" sz="1050" dirty="0">
+                        <a:latin typeface="Microsoft YaHei" charset="0"/>
+                        <a:ea typeface="Microsoft YaHei" charset="0"/>
+                        <a:cs typeface="Microsoft YaHei" charset="0"/>
+                      </a:endParaRPr>
+                    </a:p>
+                  </a:txBody>
+                  <a:tcPr marL="91440" marR="91440" marT="45720" marB="45720" anchor="ctr">
+                    <a:lnL w="6350" cap="flat" cmpd="sng" algn="ctr">
+                      <a:solidFill>
+                        <a:srgbClr val="E2E5E9"/>
+                      </a:solidFill>
+                      <a:prstDash val="solid"/>
+                      <a:round/>
+                      <a:headEnd type="none" w="med" len="med"/>
+                      <a:tailEnd type="none" w="med" len="med"/>
+                    </a:lnL>
+                    <a:lnR w="6350" cap="flat" cmpd="sng" algn="ctr">
+                      <a:solidFill>
+                        <a:srgbClr val="E2E5E9"/>
+                      </a:solidFill>
+                      <a:prstDash val="solid"/>
+                      <a:round/>
+                      <a:headEnd type="none" w="med" len="med"/>
+                      <a:tailEnd type="none" w="med" len="med"/>
+                    </a:lnR>
+                    <a:lnT w="6350" cap="flat" cmpd="sng" algn="ctr">
+                      <a:solidFill>
+                        <a:srgbClr val="E2E5E9"/>
+                      </a:solidFill>
+                      <a:prstDash val="solid"/>
+                      <a:round/>
+                      <a:headEnd type="none" w="med" len="med"/>
+                      <a:tailEnd type="none" w="med" len="med"/>
+                    </a:lnT>
+                    <a:lnB w="6350" cap="flat" cmpd="sng" algn="ctr">
+                      <a:solidFill>
+                        <a:srgbClr val="E2E5E9"/>
+                      </a:solidFill>
+                      <a:prstDash val="solid"/>
+                      <a:round/>
+                      <a:headEnd type="none" w="med" len="med"/>
+                      <a:tailEnd type="none" w="med" len="med"/>
+                    </a:lnB>
+                  </a:tcPr>
+                </a:tc>
+              </a:tr>
+              <a:tr h="205740">
+                <a:tc>
+                  <a:txBody>
+                    <a:bodyPr/>
+                    <a:lstStyle/>
+                    <a:p>
+                      <a:pPr indent="0" marL="0">
+                        <a:buNone/>
+                      </a:pPr>
+                      <a:r>
+                        <a:rPr lang="en-US" sz="1050" dirty="0">
+                          <a:solidFill>
+                            <a:srgbClr val="1A1A1A"/>
+                          </a:solidFill>
+                          <a:latin typeface="Microsoft YaHei" pitchFamily="34" charset="0"/>
+                          <a:ea typeface="Microsoft YaHei" pitchFamily="34" charset="-122"/>
+                          <a:cs typeface="Microsoft YaHei" pitchFamily="34" charset="-120"/>
+                        </a:rPr>
+                        <a:t>人 · 脑</a:t>
+                      </a:r>
+                      <a:endParaRPr lang="en-US" sz="1050" dirty="0">
+                        <a:latin typeface="Microsoft YaHei" charset="0"/>
+                        <a:ea typeface="Microsoft YaHei" charset="0"/>
+                        <a:cs typeface="Microsoft YaHei" charset="0"/>
+                      </a:endParaRPr>
+                    </a:p>
+                  </a:txBody>
+                  <a:tcPr marL="91440" marR="91440" marT="45720" marB="45720" anchor="ctr">
+                    <a:lnL w="6350" cap="flat" cmpd="sng" algn="ctr">
+                      <a:solidFill>
+                        <a:srgbClr val="E2E5E9"/>
+                      </a:solidFill>
+                      <a:prstDash val="solid"/>
+                      <a:round/>
+                      <a:headEnd type="none" w="med" len="med"/>
+                      <a:tailEnd type="none" w="med" len="med"/>
+                    </a:lnL>
+                    <a:lnR w="6350" cap="flat" cmpd="sng" algn="ctr">
+                      <a:solidFill>
+                        <a:srgbClr val="E2E5E9"/>
+                      </a:solidFill>
+                      <a:prstDash val="solid"/>
+                      <a:round/>
+                      <a:headEnd type="none" w="med" len="med"/>
+                      <a:tailEnd type="none" w="med" len="med"/>
+                    </a:lnR>
+                    <a:lnT w="6350" cap="flat" cmpd="sng" algn="ctr">
+                      <a:solidFill>
+                        <a:srgbClr val="E2E5E9"/>
+                      </a:solidFill>
+                      <a:prstDash val="solid"/>
+                      <a:round/>
+                      <a:headEnd type="none" w="med" len="med"/>
+                      <a:tailEnd type="none" w="med" len="med"/>
+                    </a:lnT>
+                    <a:lnB w="6350" cap="flat" cmpd="sng" algn="ctr">
+                      <a:solidFill>
+                        <a:srgbClr val="E2E5E9"/>
+                      </a:solidFill>
+                      <a:prstDash val="solid"/>
+                      <a:round/>
+                      <a:headEnd type="none" w="med" len="med"/>
+                      <a:tailEnd type="none" w="med" len="med"/>
+                    </a:lnB>
+                  </a:tcPr>
+                </a:tc>
+                <a:tc>
+                  <a:txBody>
+                    <a:bodyPr/>
+                    <a:lstStyle/>
+                    <a:p>
+                      <a:pPr indent="0" marL="0">
+                        <a:buNone/>
+                      </a:pPr>
+                      <a:r>
+                        <a:rPr lang="en-US" sz="1050" dirty="0">
+                          <a:solidFill>
+                            <a:srgbClr val="1A1A1A"/>
+                          </a:solidFill>
+                          <a:latin typeface="Microsoft YaHei" pitchFamily="34" charset="0"/>
+                          <a:ea typeface="Microsoft YaHei" pitchFamily="34" charset="-122"/>
+                          <a:cs typeface="Microsoft YaHei" pitchFamily="34" charset="-120"/>
+                        </a:rPr>
+                        <a:t>枝形 PV 中间神经元</a:t>
+                      </a:r>
+                      <a:endParaRPr lang="en-US" sz="1050" dirty="0">
+                        <a:latin typeface="Microsoft YaHei" charset="0"/>
+                        <a:ea typeface="Microsoft YaHei" charset="0"/>
+                        <a:cs typeface="Microsoft YaHei" charset="0"/>
+                      </a:endParaRPr>
+                    </a:p>
+                  </a:txBody>
+                  <a:tcPr marL="91440" marR="91440" marT="45720" marB="45720" anchor="ctr">
+                    <a:lnL w="6350" cap="flat" cmpd="sng" algn="ctr">
+                      <a:solidFill>
+                        <a:srgbClr val="E2E5E9"/>
+                      </a:solidFill>
+                      <a:prstDash val="solid"/>
+                      <a:round/>
+                      <a:headEnd type="none" w="med" len="med"/>
+                      <a:tailEnd type="none" w="med" len="med"/>
+                    </a:lnL>
+                    <a:lnR w="6350" cap="flat" cmpd="sng" algn="ctr">
+                      <a:solidFill>
+                        <a:srgbClr val="E2E5E9"/>
+                      </a:solidFill>
+                      <a:prstDash val="solid"/>
+                      <a:round/>
+                      <a:headEnd type="none" w="med" len="med"/>
+                      <a:tailEnd type="none" w="med" len="med"/>
+                    </a:lnR>
+                    <a:lnT w="6350" cap="flat" cmpd="sng" algn="ctr">
+                      <a:solidFill>
+                        <a:srgbClr val="E2E5E9"/>
+                      </a:solidFill>
+                      <a:prstDash val="solid"/>
+                      <a:round/>
+                      <a:headEnd type="none" w="med" len="med"/>
+                      <a:tailEnd type="none" w="med" len="med"/>
+                    </a:lnT>
+                    <a:lnB w="6350" cap="flat" cmpd="sng" algn="ctr">
+                      <a:solidFill>
+                        <a:srgbClr val="E2E5E9"/>
+                      </a:solidFill>
+                      <a:prstDash val="solid"/>
+                      <a:round/>
+                      <a:headEnd type="none" w="med" len="med"/>
+                      <a:tailEnd type="none" w="med" len="med"/>
+                    </a:lnB>
+                  </a:tcPr>
+                </a:tc>
+                <a:tc>
+                  <a:txBody>
+                    <a:bodyPr/>
+                    <a:lstStyle/>
+                    <a:p>
+                      <a:pPr indent="0" marL="0">
+                        <a:buNone/>
+                      </a:pPr>
+                      <a:r>
+                        <a:rPr lang="en-US" sz="1050" dirty="0">
+                          <a:solidFill>
+                            <a:srgbClr val="1A1A1A"/>
+                          </a:solidFill>
+                          <a:latin typeface="Microsoft YaHei" pitchFamily="34" charset="0"/>
+                          <a:ea typeface="Microsoft YaHei" pitchFamily="34" charset="-122"/>
+                          <a:cs typeface="Microsoft YaHei" pitchFamily="34" charset="-120"/>
+                        </a:rPr>
+                        <a:t>21.5%　294/1367</a:t>
+                      </a:r>
+                      <a:endParaRPr lang="en-US" sz="1050" dirty="0">
+                        <a:latin typeface="Microsoft YaHei" charset="0"/>
+                        <a:ea typeface="Microsoft YaHei" charset="0"/>
+                        <a:cs typeface="Microsoft YaHei" charset="0"/>
+                      </a:endParaRPr>
+                    </a:p>
+                  </a:txBody>
+                  <a:tcPr marL="91440" marR="91440" marT="45720" marB="45720" anchor="ctr">
+                    <a:lnL w="6350" cap="flat" cmpd="sng" algn="ctr">
+                      <a:solidFill>
+                        <a:srgbClr val="E2E5E9"/>
+                      </a:solidFill>
+                      <a:prstDash val="solid"/>
+                      <a:round/>
+                      <a:headEnd type="none" w="med" len="med"/>
+                      <a:tailEnd type="none" w="med" len="med"/>
+                    </a:lnL>
+                    <a:lnR w="6350" cap="flat" cmpd="sng" algn="ctr">
+                      <a:solidFill>
+                        <a:srgbClr val="E2E5E9"/>
+                      </a:solidFill>
+                      <a:prstDash val="solid"/>
+                      <a:round/>
+                      <a:headEnd type="none" w="med" len="med"/>
+                      <a:tailEnd type="none" w="med" len="med"/>
+                    </a:lnR>
+                    <a:lnT w="6350" cap="flat" cmpd="sng" algn="ctr">
+                      <a:solidFill>
+                        <a:srgbClr val="E2E5E9"/>
+                      </a:solidFill>
+                      <a:prstDash val="solid"/>
+                      <a:round/>
+                      <a:headEnd type="none" w="med" len="med"/>
+                      <a:tailEnd type="none" w="med" len="med"/>
+                    </a:lnT>
+                    <a:lnB w="6350" cap="flat" cmpd="sng" algn="ctr">
+                      <a:solidFill>
+                        <a:srgbClr val="E2E5E9"/>
+                      </a:solidFill>
+                      <a:prstDash val="solid"/>
+                      <a:round/>
+                      <a:headEnd type="none" w="med" len="med"/>
+                      <a:tailEnd type="none" w="med" len="med"/>
+                    </a:lnB>
+                  </a:tcPr>
+                </a:tc>
+                <a:tc>
+                  <a:txBody>
+                    <a:bodyPr/>
+                    <a:lstStyle/>
+                    <a:p>
+                      <a:pPr indent="0" marL="0">
+                        <a:buNone/>
+                      </a:pPr>
+                      <a:r>
+                        <a:rPr lang="en-US" sz="1050" dirty="0">
+                          <a:solidFill>
+                            <a:srgbClr val="1A1A1A"/>
+                          </a:solidFill>
+                          <a:latin typeface="Microsoft YaHei" pitchFamily="34" charset="0"/>
+                          <a:ea typeface="Microsoft YaHei" pitchFamily="34" charset="-122"/>
+                          <a:cs typeface="Microsoft YaHei" pitchFamily="34" charset="-120"/>
+                        </a:rPr>
+                        <a:t>0.07%　1/1367</a:t>
+                      </a:r>
+                      <a:endParaRPr lang="en-US" sz="1050" dirty="0">
+                        <a:latin typeface="Microsoft YaHei" charset="0"/>
+                        <a:ea typeface="Microsoft YaHei" charset="0"/>
+                        <a:cs typeface="Microsoft YaHei" charset="0"/>
+                      </a:endParaRPr>
+                    </a:p>
+                  </a:txBody>
+                  <a:tcPr marL="91440" marR="91440" marT="45720" marB="45720" anchor="ctr">
+                    <a:lnL w="6350" cap="flat" cmpd="sng" algn="ctr">
+                      <a:solidFill>
+                        <a:srgbClr val="E2E5E9"/>
+                      </a:solidFill>
+                      <a:prstDash val="solid"/>
+                      <a:round/>
+                      <a:headEnd type="none" w="med" len="med"/>
+                      <a:tailEnd type="none" w="med" len="med"/>
+                    </a:lnL>
+                    <a:lnR w="6350" cap="flat" cmpd="sng" algn="ctr">
+                      <a:solidFill>
+                        <a:srgbClr val="E2E5E9"/>
+                      </a:solidFill>
+                      <a:prstDash val="solid"/>
+                      <a:round/>
+                      <a:headEnd type="none" w="med" len="med"/>
+                      <a:tailEnd type="none" w="med" len="med"/>
+                    </a:lnR>
+                    <a:lnT w="6350" cap="flat" cmpd="sng" algn="ctr">
+                      <a:solidFill>
+                        <a:srgbClr val="E2E5E9"/>
+                      </a:solidFill>
+                      <a:prstDash val="solid"/>
+                      <a:round/>
+                      <a:headEnd type="none" w="med" len="med"/>
+                      <a:tailEnd type="none" w="med" len="med"/>
+                    </a:lnT>
+                    <a:lnB w="6350" cap="flat" cmpd="sng" algn="ctr">
+                      <a:solidFill>
+                        <a:srgbClr val="E2E5E9"/>
+                      </a:solidFill>
+                      <a:prstDash val="solid"/>
+                      <a:round/>
+                      <a:headEnd type="none" w="med" len="med"/>
+                      <a:tailEnd type="none" w="med" len="med"/>
+                    </a:lnB>
+                  </a:tcPr>
+                </a:tc>
+                <a:tc>
+                  <a:txBody>
+                    <a:bodyPr/>
+                    <a:lstStyle/>
+                    <a:p>
+                      <a:pPr indent="0" marL="0">
+                        <a:buNone/>
+                      </a:pPr>
+                      <a:r>
+                        <a:rPr lang="en-US" sz="1050" dirty="0">
+                          <a:solidFill>
+                            <a:srgbClr val="1A1A1A"/>
+                          </a:solidFill>
+                          <a:latin typeface="Microsoft YaHei" pitchFamily="34" charset="0"/>
+                          <a:ea typeface="Microsoft YaHei" pitchFamily="34" charset="-122"/>
+                          <a:cs typeface="Microsoft YaHei" pitchFamily="34" charset="-120"/>
+                        </a:rPr>
+                        <a:t>37</a:t>
+                      </a:r>
+                      <a:endParaRPr lang="en-US" sz="1050" dirty="0">
+                        <a:latin typeface="Microsoft YaHei" charset="0"/>
+                        <a:ea typeface="Microsoft YaHei" charset="0"/>
+                        <a:cs typeface="Microsoft YaHei" charset="0"/>
+                      </a:endParaRPr>
+                    </a:p>
+                  </a:txBody>
+                  <a:tcPr marL="91440" marR="91440" marT="45720" marB="45720" anchor="ctr">
+                    <a:lnL w="6350" cap="flat" cmpd="sng" algn="ctr">
+                      <a:solidFill>
+                        <a:srgbClr val="E2E5E9"/>
+                      </a:solidFill>
+                      <a:prstDash val="solid"/>
+                      <a:round/>
+                      <a:headEnd type="none" w="med" len="med"/>
+                      <a:tailEnd type="none" w="med" len="med"/>
+                    </a:lnL>
+                    <a:lnR w="6350" cap="flat" cmpd="sng" algn="ctr">
+                      <a:solidFill>
+                        <a:srgbClr val="E2E5E9"/>
+                      </a:solidFill>
+                      <a:prstDash val="solid"/>
+                      <a:round/>
+                      <a:headEnd type="none" w="med" len="med"/>
+                      <a:tailEnd type="none" w="med" len="med"/>
+                    </a:lnR>
+                    <a:lnT w="6350" cap="flat" cmpd="sng" algn="ctr">
+                      <a:solidFill>
+                        <a:srgbClr val="E2E5E9"/>
+                      </a:solidFill>
+                      <a:prstDash val="solid"/>
+                      <a:round/>
+                      <a:headEnd type="none" w="med" len="med"/>
+                      <a:tailEnd type="none" w="med" len="med"/>
+                    </a:lnT>
+                    <a:lnB w="6350" cap="flat" cmpd="sng" algn="ctr">
+                      <a:solidFill>
+                        <a:srgbClr val="E2E5E9"/>
+                      </a:solidFill>
+                      <a:prstDash val="solid"/>
+                      <a:round/>
+                      <a:headEnd type="none" w="med" len="med"/>
+                      <a:tailEnd type="none" w="med" len="med"/>
+                    </a:lnB>
+                  </a:tcPr>
+                </a:tc>
+                <a:tc>
+                  <a:txBody>
+                    <a:bodyPr/>
+                    <a:lstStyle/>
+                    <a:p>
+                      <a:pPr indent="0" marL="0">
+                        <a:buNone/>
+                      </a:pPr>
+                      <a:r>
+                        <a:rPr lang="en-US" sz="1050" dirty="0">
+                          <a:solidFill>
+                            <a:srgbClr val="1A1A1A"/>
+                          </a:solidFill>
+                          <a:latin typeface="Microsoft YaHei" pitchFamily="34" charset="0"/>
+                          <a:ea typeface="Microsoft YaHei" pitchFamily="34" charset="-122"/>
+                          <a:cs typeface="Microsoft YaHei" pitchFamily="34" charset="-120"/>
+                        </a:rPr>
+                        <a:t>2</a:t>
+                      </a:r>
+                      <a:endParaRPr lang="en-US" sz="1050" dirty="0">
+                        <a:latin typeface="Microsoft YaHei" charset="0"/>
+                        <a:ea typeface="Microsoft YaHei" charset="0"/>
+                        <a:cs typeface="Microsoft YaHei" charset="0"/>
+                      </a:endParaRPr>
+                    </a:p>
+                  </a:txBody>
+                  <a:tcPr marL="91440" marR="91440" marT="45720" marB="45720" anchor="ctr">
+                    <a:lnL w="6350" cap="flat" cmpd="sng" algn="ctr">
+                      <a:solidFill>
+                        <a:srgbClr val="E2E5E9"/>
+                      </a:solidFill>
+                      <a:prstDash val="solid"/>
+                      <a:round/>
+                      <a:headEnd type="none" w="med" len="med"/>
+                      <a:tailEnd type="none" w="med" len="med"/>
+                    </a:lnL>
+                    <a:lnR w="6350" cap="flat" cmpd="sng" algn="ctr">
+                      <a:solidFill>
+                        <a:srgbClr val="E2E5E9"/>
+                      </a:solidFill>
+                      <a:prstDash val="solid"/>
+                      <a:round/>
+                      <a:headEnd type="none" w="med" len="med"/>
+                      <a:tailEnd type="none" w="med" len="med"/>
+                    </a:lnR>
+                    <a:lnT w="6350" cap="flat" cmpd="sng" algn="ctr">
+                      <a:solidFill>
+                        <a:srgbClr val="E2E5E9"/>
+                      </a:solidFill>
+                      <a:prstDash val="solid"/>
+                      <a:round/>
+                      <a:headEnd type="none" w="med" len="med"/>
+                      <a:tailEnd type="none" w="med" len="med"/>
+                    </a:lnT>
+                    <a:lnB w="6350" cap="flat" cmpd="sng" algn="ctr">
+                      <a:solidFill>
+                        <a:srgbClr val="E2E5E9"/>
+                      </a:solidFill>
+                      <a:prstDash val="solid"/>
+                      <a:round/>
+                      <a:headEnd type="none" w="med" len="med"/>
+                      <a:tailEnd type="none" w="med" len="med"/>
+                    </a:lnB>
+                  </a:tcPr>
+                </a:tc>
+                <a:tc>
+                  <a:txBody>
+                    <a:bodyPr/>
+                    <a:lstStyle/>
+                    <a:p>
+                      <a:pPr indent="0" marL="0">
+                        <a:buNone/>
+                      </a:pPr>
+                      <a:r>
+                        <a:rPr lang="en-US" sz="1050" dirty="0">
+                          <a:solidFill>
+                            <a:srgbClr val="1A1A1A"/>
+                          </a:solidFill>
+                          <a:latin typeface="Microsoft YaHei" pitchFamily="34" charset="0"/>
+                          <a:ea typeface="Microsoft YaHei" pitchFamily="34" charset="-122"/>
+                          <a:cs typeface="Microsoft YaHei" pitchFamily="34" charset="-120"/>
+                        </a:rPr>
+                        <a:t>—</a:t>
+                      </a:r>
+                      <a:endParaRPr lang="en-US" sz="1050" dirty="0">
+                        <a:latin typeface="Microsoft YaHei" charset="0"/>
+                        <a:ea typeface="Microsoft YaHei" charset="0"/>
+                        <a:cs typeface="Microsoft YaHei" charset="0"/>
+                      </a:endParaRPr>
+                    </a:p>
+                  </a:txBody>
+                  <a:tcPr marL="91440" marR="91440" marT="45720" marB="45720" anchor="ctr">
+                    <a:lnL w="6350" cap="flat" cmpd="sng" algn="ctr">
+                      <a:solidFill>
+                        <a:srgbClr val="E2E5E9"/>
+                      </a:solidFill>
+                      <a:prstDash val="solid"/>
+                      <a:round/>
+                      <a:headEnd type="none" w="med" len="med"/>
+                      <a:tailEnd type="none" w="med" len="med"/>
+                    </a:lnL>
+                    <a:lnR w="6350" cap="flat" cmpd="sng" algn="ctr">
+                      <a:solidFill>
+                        <a:srgbClr val="E2E5E9"/>
+                      </a:solidFill>
+                      <a:prstDash val="solid"/>
+                      <a:round/>
+                      <a:headEnd type="none" w="med" len="med"/>
+                      <a:tailEnd type="none" w="med" len="med"/>
+                    </a:lnR>
+                    <a:lnT w="6350" cap="flat" cmpd="sng" algn="ctr">
+                      <a:solidFill>
+                        <a:srgbClr val="E2E5E9"/>
+                      </a:solidFill>
+                      <a:prstDash val="solid"/>
+                      <a:round/>
+                      <a:headEnd type="none" w="med" len="med"/>
+                      <a:tailEnd type="none" w="med" len="med"/>
+                    </a:lnT>
+                    <a:lnB w="6350" cap="flat" cmpd="sng" algn="ctr">
+                      <a:solidFill>
+                        <a:srgbClr val="E2E5E9"/>
+                      </a:solidFill>
+                      <a:prstDash val="solid"/>
+                      <a:round/>
+                      <a:headEnd type="none" w="med" len="med"/>
+                      <a:tailEnd type="none" w="med" len="med"/>
+                    </a:lnB>
+                  </a:tcPr>
+                </a:tc>
+              </a:tr>
+              <a:tr h="205740">
+                <a:tc>
+                  <a:txBody>
+                    <a:bodyPr/>
+                    <a:lstStyle/>
+                    <a:p>
+                      <a:pPr indent="0" marL="0">
+                        <a:buNone/>
+                      </a:pPr>
+                      <a:r>
+                        <a:rPr lang="en-US" sz="1050" dirty="0">
+                          <a:solidFill>
+                            <a:srgbClr val="1A1A1A"/>
+                          </a:solidFill>
+                          <a:latin typeface="Microsoft YaHei" pitchFamily="34" charset="0"/>
+                          <a:ea typeface="Microsoft YaHei" pitchFamily="34" charset="-122"/>
+                          <a:cs typeface="Microsoft YaHei" pitchFamily="34" charset="-120"/>
+                        </a:rPr>
+                        <a:t>人 · 肺</a:t>
+                      </a:r>
+                      <a:endParaRPr lang="en-US" sz="1050" dirty="0">
+                        <a:latin typeface="Microsoft YaHei" charset="0"/>
+                        <a:ea typeface="Microsoft YaHei" charset="0"/>
+                        <a:cs typeface="Microsoft YaHei" charset="0"/>
+                      </a:endParaRPr>
+                    </a:p>
+                  </a:txBody>
+                  <a:tcPr marL="91440" marR="91440" marT="45720" marB="45720" anchor="ctr">
+                    <a:lnL w="6350" cap="flat" cmpd="sng" algn="ctr">
+                      <a:solidFill>
+                        <a:srgbClr val="E2E5E9"/>
+                      </a:solidFill>
+                      <a:prstDash val="solid"/>
+                      <a:round/>
+                      <a:headEnd type="none" w="med" len="med"/>
+                      <a:tailEnd type="none" w="med" len="med"/>
+                    </a:lnL>
+                    <a:lnR w="6350" cap="flat" cmpd="sng" algn="ctr">
+                      <a:solidFill>
+                        <a:srgbClr val="E2E5E9"/>
+                      </a:solidFill>
+                      <a:prstDash val="solid"/>
+                      <a:round/>
+                      <a:headEnd type="none" w="med" len="med"/>
+                      <a:tailEnd type="none" w="med" len="med"/>
+                    </a:lnR>
+                    <a:lnT w="6350" cap="flat" cmpd="sng" algn="ctr">
+                      <a:solidFill>
+                        <a:srgbClr val="E2E5E9"/>
+                      </a:solidFill>
+                      <a:prstDash val="solid"/>
+                      <a:round/>
+                      <a:headEnd type="none" w="med" len="med"/>
+                      <a:tailEnd type="none" w="med" len="med"/>
+                    </a:lnT>
+                    <a:lnB w="6350" cap="flat" cmpd="sng" algn="ctr">
+                      <a:solidFill>
+                        <a:srgbClr val="E2E5E9"/>
+                      </a:solidFill>
+                      <a:prstDash val="solid"/>
+                      <a:round/>
+                      <a:headEnd type="none" w="med" len="med"/>
+                      <a:tailEnd type="none" w="med" len="med"/>
+                    </a:lnB>
+                  </a:tcPr>
+                </a:tc>
+                <a:tc>
+                  <a:txBody>
+                    <a:bodyPr/>
+                    <a:lstStyle/>
+                    <a:p>
+                      <a:pPr indent="0" marL="0">
+                        <a:buNone/>
+                      </a:pPr>
+                      <a:r>
+                        <a:rPr lang="en-US" sz="1050" dirty="0">
+                          <a:solidFill>
+                            <a:srgbClr val="1A1A1A"/>
+                          </a:solidFill>
+                          <a:latin typeface="Microsoft YaHei" pitchFamily="34" charset="0"/>
+                          <a:ea typeface="Microsoft YaHei" pitchFamily="34" charset="-122"/>
+                          <a:cs typeface="Microsoft YaHei" pitchFamily="34" charset="-120"/>
+                        </a:rPr>
+                        <a:t>肥大细胞 ×2</a:t>
+                      </a:r>
+                      <a:endParaRPr lang="en-US" sz="1050" dirty="0">
+                        <a:latin typeface="Microsoft YaHei" charset="0"/>
+                        <a:ea typeface="Microsoft YaHei" charset="0"/>
+                        <a:cs typeface="Microsoft YaHei" charset="0"/>
+                      </a:endParaRPr>
+                    </a:p>
+                  </a:txBody>
+                  <a:tcPr marL="91440" marR="91440" marT="45720" marB="45720" anchor="ctr">
+                    <a:lnL w="6350" cap="flat" cmpd="sng" algn="ctr">
+                      <a:solidFill>
+                        <a:srgbClr val="E2E5E9"/>
+                      </a:solidFill>
+                      <a:prstDash val="solid"/>
+                      <a:round/>
+                      <a:headEnd type="none" w="med" len="med"/>
+                      <a:tailEnd type="none" w="med" len="med"/>
+                    </a:lnL>
+                    <a:lnR w="6350" cap="flat" cmpd="sng" algn="ctr">
+                      <a:solidFill>
+                        <a:srgbClr val="E2E5E9"/>
+                      </a:solidFill>
+                      <a:prstDash val="solid"/>
+                      <a:round/>
+                      <a:headEnd type="none" w="med" len="med"/>
+                      <a:tailEnd type="none" w="med" len="med"/>
+                    </a:lnR>
+                    <a:lnT w="6350" cap="flat" cmpd="sng" algn="ctr">
+                      <a:solidFill>
+                        <a:srgbClr val="E2E5E9"/>
+                      </a:solidFill>
+                      <a:prstDash val="solid"/>
+                      <a:round/>
+                      <a:headEnd type="none" w="med" len="med"/>
+                      <a:tailEnd type="none" w="med" len="med"/>
+                    </a:lnT>
+                    <a:lnB w="6350" cap="flat" cmpd="sng" algn="ctr">
+                      <a:solidFill>
+                        <a:srgbClr val="E2E5E9"/>
+                      </a:solidFill>
+                      <a:prstDash val="solid"/>
+                      <a:round/>
+                      <a:headEnd type="none" w="med" len="med"/>
+                      <a:tailEnd type="none" w="med" len="med"/>
+                    </a:lnB>
+                  </a:tcPr>
+                </a:tc>
+                <a:tc>
+                  <a:txBody>
+                    <a:bodyPr/>
+                    <a:lstStyle/>
+                    <a:p>
+                      <a:pPr indent="0" marL="0">
+                        <a:buNone/>
+                      </a:pPr>
+                      <a:r>
+                        <a:rPr lang="en-US" sz="1050" dirty="0">
+                          <a:solidFill>
+                            <a:srgbClr val="1A1A1A"/>
+                          </a:solidFill>
+                          <a:latin typeface="Microsoft YaHei" pitchFamily="34" charset="0"/>
+                          <a:ea typeface="Microsoft YaHei" pitchFamily="34" charset="-122"/>
+                          <a:cs typeface="Microsoft YaHei" pitchFamily="34" charset="-120"/>
+                        </a:rPr>
+                        <a:t>34.9%　1851/5299</a:t>
+                      </a:r>
+                      <a:endParaRPr lang="en-US" sz="1050" dirty="0">
+                        <a:latin typeface="Microsoft YaHei" charset="0"/>
+                        <a:ea typeface="Microsoft YaHei" charset="0"/>
+                        <a:cs typeface="Microsoft YaHei" charset="0"/>
+                      </a:endParaRPr>
+                    </a:p>
+                  </a:txBody>
+                  <a:tcPr marL="91440" marR="91440" marT="45720" marB="45720" anchor="ctr">
+                    <a:lnL w="6350" cap="flat" cmpd="sng" algn="ctr">
+                      <a:solidFill>
+                        <a:srgbClr val="E2E5E9"/>
+                      </a:solidFill>
+                      <a:prstDash val="solid"/>
+                      <a:round/>
+                      <a:headEnd type="none" w="med" len="med"/>
+                      <a:tailEnd type="none" w="med" len="med"/>
+                    </a:lnL>
+                    <a:lnR w="6350" cap="flat" cmpd="sng" algn="ctr">
+                      <a:solidFill>
+                        <a:srgbClr val="E2E5E9"/>
+                      </a:solidFill>
+                      <a:prstDash val="solid"/>
+                      <a:round/>
+                      <a:headEnd type="none" w="med" len="med"/>
+                      <a:tailEnd type="none" w="med" len="med"/>
+                    </a:lnR>
+                    <a:lnT w="6350" cap="flat" cmpd="sng" algn="ctr">
+                      <a:solidFill>
+                        <a:srgbClr val="E2E5E9"/>
+                      </a:solidFill>
+                      <a:prstDash val="solid"/>
+                      <a:round/>
+                      <a:headEnd type="none" w="med" len="med"/>
+                      <a:tailEnd type="none" w="med" len="med"/>
+                    </a:lnT>
+                    <a:lnB w="6350" cap="flat" cmpd="sng" algn="ctr">
+                      <a:solidFill>
+                        <a:srgbClr val="E2E5E9"/>
+                      </a:solidFill>
+                      <a:prstDash val="solid"/>
+                      <a:round/>
+                      <a:headEnd type="none" w="med" len="med"/>
+                      <a:tailEnd type="none" w="med" len="med"/>
+                    </a:lnB>
+                  </a:tcPr>
+                </a:tc>
+                <a:tc>
+                  <a:txBody>
+                    <a:bodyPr/>
+                    <a:lstStyle/>
+                    <a:p>
+                      <a:pPr indent="0" marL="0">
+                        <a:buNone/>
+                      </a:pPr>
+                      <a:r>
+                        <a:rPr lang="en-US" sz="1050" dirty="0">
+                          <a:solidFill>
+                            <a:srgbClr val="1A1A1A"/>
+                          </a:solidFill>
+                          <a:latin typeface="Microsoft YaHei" pitchFamily="34" charset="0"/>
+                          <a:ea typeface="Microsoft YaHei" pitchFamily="34" charset="-122"/>
+                          <a:cs typeface="Microsoft YaHei" pitchFamily="34" charset="-120"/>
+                        </a:rPr>
+                        <a:t>2.60%　138/5299</a:t>
+                      </a:r>
+                      <a:endParaRPr lang="en-US" sz="1050" dirty="0">
+                        <a:latin typeface="Microsoft YaHei" charset="0"/>
+                        <a:ea typeface="Microsoft YaHei" charset="0"/>
+                        <a:cs typeface="Microsoft YaHei" charset="0"/>
+                      </a:endParaRPr>
+                    </a:p>
+                  </a:txBody>
+                  <a:tcPr marL="91440" marR="91440" marT="45720" marB="45720" anchor="ctr">
+                    <a:lnL w="6350" cap="flat" cmpd="sng" algn="ctr">
+                      <a:solidFill>
+                        <a:srgbClr val="E2E5E9"/>
+                      </a:solidFill>
+                      <a:prstDash val="solid"/>
+                      <a:round/>
+                      <a:headEnd type="none" w="med" len="med"/>
+                      <a:tailEnd type="none" w="med" len="med"/>
+                    </a:lnL>
+                    <a:lnR w="6350" cap="flat" cmpd="sng" algn="ctr">
+                      <a:solidFill>
+                        <a:srgbClr val="E2E5E9"/>
+                      </a:solidFill>
+                      <a:prstDash val="solid"/>
+                      <a:round/>
+                      <a:headEnd type="none" w="med" len="med"/>
+                      <a:tailEnd type="none" w="med" len="med"/>
+                    </a:lnR>
+                    <a:lnT w="6350" cap="flat" cmpd="sng" algn="ctr">
+                      <a:solidFill>
+                        <a:srgbClr val="E2E5E9"/>
+                      </a:solidFill>
+                      <a:prstDash val="solid"/>
+                      <a:round/>
+                      <a:headEnd type="none" w="med" len="med"/>
+                      <a:tailEnd type="none" w="med" len="med"/>
+                    </a:lnT>
+                    <a:lnB w="6350" cap="flat" cmpd="sng" algn="ctr">
+                      <a:solidFill>
+                        <a:srgbClr val="E2E5E9"/>
+                      </a:solidFill>
+                      <a:prstDash val="solid"/>
+                      <a:round/>
+                      <a:headEnd type="none" w="med" len="med"/>
+                      <a:tailEnd type="none" w="med" len="med"/>
+                    </a:lnB>
+                  </a:tcPr>
+                </a:tc>
+                <a:tc>
+                  <a:txBody>
+                    <a:bodyPr/>
+                    <a:lstStyle/>
+                    <a:p>
+                      <a:pPr indent="0" marL="0">
+                        <a:buNone/>
+                      </a:pPr>
+                      <a:r>
+                        <a:rPr lang="en-US" sz="1050" dirty="0">
+                          <a:solidFill>
+                            <a:srgbClr val="1A1A1A"/>
+                          </a:solidFill>
+                          <a:latin typeface="Microsoft YaHei" pitchFamily="34" charset="0"/>
+                          <a:ea typeface="Microsoft YaHei" pitchFamily="34" charset="-122"/>
+                          <a:cs typeface="Microsoft YaHei" pitchFamily="34" charset="-120"/>
+                        </a:rPr>
+                        <a:t>44</a:t>
+                      </a:r>
+                      <a:endParaRPr lang="en-US" sz="1050" dirty="0">
+                        <a:latin typeface="Microsoft YaHei" charset="0"/>
+                        <a:ea typeface="Microsoft YaHei" charset="0"/>
+                        <a:cs typeface="Microsoft YaHei" charset="0"/>
+                      </a:endParaRPr>
+                    </a:p>
+                  </a:txBody>
+                  <a:tcPr marL="91440" marR="91440" marT="45720" marB="45720" anchor="ctr">
+                    <a:lnL w="6350" cap="flat" cmpd="sng" algn="ctr">
+                      <a:solidFill>
+                        <a:srgbClr val="E2E5E9"/>
+                      </a:solidFill>
+                      <a:prstDash val="solid"/>
+                      <a:round/>
+                      <a:headEnd type="none" w="med" len="med"/>
+                      <a:tailEnd type="none" w="med" len="med"/>
+                    </a:lnL>
+                    <a:lnR w="6350" cap="flat" cmpd="sng" algn="ctr">
+                      <a:solidFill>
+                        <a:srgbClr val="E2E5E9"/>
+                      </a:solidFill>
+                      <a:prstDash val="solid"/>
+                      <a:round/>
+                      <a:headEnd type="none" w="med" len="med"/>
+                      <a:tailEnd type="none" w="med" len="med"/>
+                    </a:lnR>
+                    <a:lnT w="6350" cap="flat" cmpd="sng" algn="ctr">
+                      <a:solidFill>
+                        <a:srgbClr val="E2E5E9"/>
+                      </a:solidFill>
+                      <a:prstDash val="solid"/>
+                      <a:round/>
+                      <a:headEnd type="none" w="med" len="med"/>
+                      <a:tailEnd type="none" w="med" len="med"/>
+                    </a:lnT>
+                    <a:lnB w="6350" cap="flat" cmpd="sng" algn="ctr">
+                      <a:solidFill>
+                        <a:srgbClr val="E2E5E9"/>
+                      </a:solidFill>
+                      <a:prstDash val="solid"/>
+                      <a:round/>
+                      <a:headEnd type="none" w="med" len="med"/>
+                      <a:tailEnd type="none" w="med" len="med"/>
+                    </a:lnB>
+                  </a:tcPr>
+                </a:tc>
+                <a:tc>
+                  <a:txBody>
+                    <a:bodyPr/>
+                    <a:lstStyle/>
+                    <a:p>
+                      <a:pPr indent="0" marL="0">
+                        <a:buNone/>
+                      </a:pPr>
+                      <a:r>
+                        <a:rPr lang="en-US" sz="1050" dirty="0">
+                          <a:solidFill>
+                            <a:srgbClr val="1A1A1A"/>
+                          </a:solidFill>
+                          <a:latin typeface="Microsoft YaHei" pitchFamily="34" charset="0"/>
+                          <a:ea typeface="Microsoft YaHei" pitchFamily="34" charset="-122"/>
+                          <a:cs typeface="Microsoft YaHei" pitchFamily="34" charset="-120"/>
+                        </a:rPr>
+                        <a:t>1</a:t>
+                      </a:r>
+                      <a:endParaRPr lang="en-US" sz="1050" dirty="0">
+                        <a:latin typeface="Microsoft YaHei" charset="0"/>
+                        <a:ea typeface="Microsoft YaHei" charset="0"/>
+                        <a:cs typeface="Microsoft YaHei" charset="0"/>
+                      </a:endParaRPr>
+                    </a:p>
+                  </a:txBody>
+                  <a:tcPr marL="91440" marR="91440" marT="45720" marB="45720" anchor="ctr">
+                    <a:lnL w="6350" cap="flat" cmpd="sng" algn="ctr">
+                      <a:solidFill>
+                        <a:srgbClr val="E2E5E9"/>
+                      </a:solidFill>
+                      <a:prstDash val="solid"/>
+                      <a:round/>
+                      <a:headEnd type="none" w="med" len="med"/>
+                      <a:tailEnd type="none" w="med" len="med"/>
+                    </a:lnL>
+                    <a:lnR w="6350" cap="flat" cmpd="sng" algn="ctr">
+                      <a:solidFill>
+                        <a:srgbClr val="E2E5E9"/>
+                      </a:solidFill>
+                      <a:prstDash val="solid"/>
+                      <a:round/>
+                      <a:headEnd type="none" w="med" len="med"/>
+                      <a:tailEnd type="none" w="med" len="med"/>
+                    </a:lnR>
+                    <a:lnT w="6350" cap="flat" cmpd="sng" algn="ctr">
+                      <a:solidFill>
+                        <a:srgbClr val="E2E5E9"/>
+                      </a:solidFill>
+                      <a:prstDash val="solid"/>
+                      <a:round/>
+                      <a:headEnd type="none" w="med" len="med"/>
+                      <a:tailEnd type="none" w="med" len="med"/>
+                    </a:lnT>
+                    <a:lnB w="6350" cap="flat" cmpd="sng" algn="ctr">
+                      <a:solidFill>
+                        <a:srgbClr val="E2E5E9"/>
+                      </a:solidFill>
+                      <a:prstDash val="solid"/>
+                      <a:round/>
+                      <a:headEnd type="none" w="med" len="med"/>
+                      <a:tailEnd type="none" w="med" len="med"/>
+                    </a:lnB>
+                  </a:tcPr>
+                </a:tc>
+                <a:tc>
+                  <a:txBody>
+                    <a:bodyPr/>
+                    <a:lstStyle/>
+                    <a:p>
+                      <a:pPr indent="0" marL="0">
+                        <a:buNone/>
+                      </a:pPr>
+                      <a:r>
+                        <a:rPr lang="en-US" sz="1050" dirty="0">
+                          <a:solidFill>
+                            <a:srgbClr val="1A1A1A"/>
+                          </a:solidFill>
+                          <a:latin typeface="Microsoft YaHei" pitchFamily="34" charset="0"/>
+                          <a:ea typeface="Microsoft YaHei" pitchFamily="34" charset="-122"/>
+                          <a:cs typeface="Microsoft YaHei" pitchFamily="34" charset="-120"/>
+                        </a:rPr>
+                        <a:t>2</a:t>
+                      </a:r>
+                      <a:endParaRPr lang="en-US" sz="1050" dirty="0">
+                        <a:latin typeface="Microsoft YaHei" charset="0"/>
+                        <a:ea typeface="Microsoft YaHei" charset="0"/>
+                        <a:cs typeface="Microsoft YaHei" charset="0"/>
+                      </a:endParaRPr>
+                    </a:p>
+                  </a:txBody>
+                  <a:tcPr marL="91440" marR="91440" marT="45720" marB="45720" anchor="ctr">
+                    <a:lnL w="6350" cap="flat" cmpd="sng" algn="ctr">
+                      <a:solidFill>
+                        <a:srgbClr val="E2E5E9"/>
+                      </a:solidFill>
+                      <a:prstDash val="solid"/>
+                      <a:round/>
+                      <a:headEnd type="none" w="med" len="med"/>
+                      <a:tailEnd type="none" w="med" len="med"/>
+                    </a:lnL>
+                    <a:lnR w="6350" cap="flat" cmpd="sng" algn="ctr">
+                      <a:solidFill>
+                        <a:srgbClr val="E2E5E9"/>
+                      </a:solidFill>
+                      <a:prstDash val="solid"/>
+                      <a:round/>
+                      <a:headEnd type="none" w="med" len="med"/>
+                      <a:tailEnd type="none" w="med" len="med"/>
+                    </a:lnR>
+                    <a:lnT w="6350" cap="flat" cmpd="sng" algn="ctr">
+                      <a:solidFill>
+                        <a:srgbClr val="E2E5E9"/>
+                      </a:solidFill>
+                      <a:prstDash val="solid"/>
+                      <a:round/>
+                      <a:headEnd type="none" w="med" len="med"/>
+                      <a:tailEnd type="none" w="med" len="med"/>
+                    </a:lnT>
+                    <a:lnB w="6350" cap="flat" cmpd="sng" algn="ctr">
+                      <a:solidFill>
+                        <a:srgbClr val="E2E5E9"/>
+                      </a:solidFill>
+                      <a:prstDash val="solid"/>
+                      <a:round/>
+                      <a:headEnd type="none" w="med" len="med"/>
+                      <a:tailEnd type="none" w="med" len="med"/>
+                    </a:lnB>
+                  </a:tcPr>
+                </a:tc>
+              </a:tr>
+              <a:tr h="205740">
+                <a:tc>
+                  <a:txBody>
+                    <a:bodyPr/>
+                    <a:lstStyle/>
+                    <a:p>
+                      <a:pPr indent="0" marL="0">
+                        <a:buNone/>
+                      </a:pPr>
+                      <a:r>
+                        <a:rPr lang="en-US" sz="1050" dirty="0">
+                          <a:solidFill>
+                            <a:srgbClr val="1A1A1A"/>
+                          </a:solidFill>
+                          <a:latin typeface="Microsoft YaHei" pitchFamily="34" charset="0"/>
+                          <a:ea typeface="Microsoft YaHei" pitchFamily="34" charset="-122"/>
+                          <a:cs typeface="Microsoft YaHei" pitchFamily="34" charset="-120"/>
+                        </a:rPr>
+                        <a:t>人 · 肺</a:t>
+                      </a:r>
+                      <a:endParaRPr lang="en-US" sz="1050" dirty="0">
+                        <a:latin typeface="Microsoft YaHei" charset="0"/>
+                        <a:ea typeface="Microsoft YaHei" charset="0"/>
+                        <a:cs typeface="Microsoft YaHei" charset="0"/>
+                      </a:endParaRPr>
+                    </a:p>
+                  </a:txBody>
+                  <a:tcPr marL="91440" marR="91440" marT="45720" marB="45720" anchor="ctr">
+                    <a:lnL w="6350" cap="flat" cmpd="sng" algn="ctr">
+                      <a:solidFill>
+                        <a:srgbClr val="E2E5E9"/>
+                      </a:solidFill>
+                      <a:prstDash val="solid"/>
+                      <a:round/>
+                      <a:headEnd type="none" w="med" len="med"/>
+                      <a:tailEnd type="none" w="med" len="med"/>
+                    </a:lnL>
+                    <a:lnR w="6350" cap="flat" cmpd="sng" algn="ctr">
+                      <a:solidFill>
+                        <a:srgbClr val="E2E5E9"/>
+                      </a:solidFill>
+                      <a:prstDash val="solid"/>
+                      <a:round/>
+                      <a:headEnd type="none" w="med" len="med"/>
+                      <a:tailEnd type="none" w="med" len="med"/>
+                    </a:lnR>
+                    <a:lnT w="6350" cap="flat" cmpd="sng" algn="ctr">
+                      <a:solidFill>
+                        <a:srgbClr val="E2E5E9"/>
+                      </a:solidFill>
+                      <a:prstDash val="solid"/>
+                      <a:round/>
+                      <a:headEnd type="none" w="med" len="med"/>
+                      <a:tailEnd type="none" w="med" len="med"/>
+                    </a:lnT>
+                    <a:lnB w="6350" cap="flat" cmpd="sng" algn="ctr">
+                      <a:solidFill>
+                        <a:srgbClr val="E2E5E9"/>
+                      </a:solidFill>
+                      <a:prstDash val="solid"/>
+                      <a:round/>
+                      <a:headEnd type="none" w="med" len="med"/>
+                      <a:tailEnd type="none" w="med" len="med"/>
+                    </a:lnB>
+                  </a:tcPr>
+                </a:tc>
+                <a:tc>
+                  <a:txBody>
+                    <a:bodyPr/>
+                    <a:lstStyle/>
+                    <a:p>
+                      <a:pPr indent="0" marL="0">
+                        <a:buNone/>
+                      </a:pPr>
+                      <a:r>
+                        <a:rPr lang="en-US" sz="1050" dirty="0">
+                          <a:solidFill>
+                            <a:srgbClr val="1A1A1A"/>
+                          </a:solidFill>
+                          <a:latin typeface="Microsoft YaHei" pitchFamily="34" charset="0"/>
+                          <a:ea typeface="Microsoft YaHei" pitchFamily="34" charset="-122"/>
+                          <a:cs typeface="Microsoft YaHei" pitchFamily="34" charset="-120"/>
+                        </a:rPr>
+                        <a:t>AT1 肺泡上皮 ×3</a:t>
+                      </a:r>
+                      <a:endParaRPr lang="en-US" sz="1050" dirty="0">
+                        <a:latin typeface="Microsoft YaHei" charset="0"/>
+                        <a:ea typeface="Microsoft YaHei" charset="0"/>
+                        <a:cs typeface="Microsoft YaHei" charset="0"/>
+                      </a:endParaRPr>
+                    </a:p>
+                  </a:txBody>
+                  <a:tcPr marL="91440" marR="91440" marT="45720" marB="45720" anchor="ctr">
+                    <a:lnL w="6350" cap="flat" cmpd="sng" algn="ctr">
+                      <a:solidFill>
+                        <a:srgbClr val="E2E5E9"/>
+                      </a:solidFill>
+                      <a:prstDash val="solid"/>
+                      <a:round/>
+                      <a:headEnd type="none" w="med" len="med"/>
+                      <a:tailEnd type="none" w="med" len="med"/>
+                    </a:lnL>
+                    <a:lnR w="6350" cap="flat" cmpd="sng" algn="ctr">
+                      <a:solidFill>
+                        <a:srgbClr val="E2E5E9"/>
+                      </a:solidFill>
+                      <a:prstDash val="solid"/>
+                      <a:round/>
+                      <a:headEnd type="none" w="med" len="med"/>
+                      <a:tailEnd type="none" w="med" len="med"/>
+                    </a:lnR>
+                    <a:lnT w="6350" cap="flat" cmpd="sng" algn="ctr">
+                      <a:solidFill>
+                        <a:srgbClr val="E2E5E9"/>
+                      </a:solidFill>
+                      <a:prstDash val="solid"/>
+                      <a:round/>
+                      <a:headEnd type="none" w="med" len="med"/>
+                      <a:tailEnd type="none" w="med" len="med"/>
+                    </a:lnT>
+                    <a:lnB w="6350" cap="flat" cmpd="sng" algn="ctr">
+                      <a:solidFill>
+                        <a:srgbClr val="E2E5E9"/>
+                      </a:solidFill>
+                      <a:prstDash val="solid"/>
+                      <a:round/>
+                      <a:headEnd type="none" w="med" len="med"/>
+                      <a:tailEnd type="none" w="med" len="med"/>
+                    </a:lnB>
+                  </a:tcPr>
+                </a:tc>
+                <a:tc>
+                  <a:txBody>
+                    <a:bodyPr/>
+                    <a:lstStyle/>
+                    <a:p>
+                      <a:pPr indent="0" marL="0">
+                        <a:buNone/>
+                      </a:pPr>
+                      <a:r>
+                        <a:rPr lang="en-US" sz="1050" dirty="0">
+                          <a:solidFill>
+                            <a:srgbClr val="1A1A1A"/>
+                          </a:solidFill>
+                          <a:latin typeface="Microsoft YaHei" pitchFamily="34" charset="0"/>
+                          <a:ea typeface="Microsoft YaHei" pitchFamily="34" charset="-122"/>
+                          <a:cs typeface="Microsoft YaHei" pitchFamily="34" charset="-120"/>
+                        </a:rPr>
+                        <a:t>28.2%　2473/8756</a:t>
+                      </a:r>
+                      <a:endParaRPr lang="en-US" sz="1050" dirty="0">
+                        <a:latin typeface="Microsoft YaHei" charset="0"/>
+                        <a:ea typeface="Microsoft YaHei" charset="0"/>
+                        <a:cs typeface="Microsoft YaHei" charset="0"/>
+                      </a:endParaRPr>
+                    </a:p>
+                  </a:txBody>
+                  <a:tcPr marL="91440" marR="91440" marT="45720" marB="45720" anchor="ctr">
+                    <a:lnL w="6350" cap="flat" cmpd="sng" algn="ctr">
+                      <a:solidFill>
+                        <a:srgbClr val="E2E5E9"/>
+                      </a:solidFill>
+                      <a:prstDash val="solid"/>
+                      <a:round/>
+                      <a:headEnd type="none" w="med" len="med"/>
+                      <a:tailEnd type="none" w="med" len="med"/>
+                    </a:lnL>
+                    <a:lnR w="6350" cap="flat" cmpd="sng" algn="ctr">
+                      <a:solidFill>
+                        <a:srgbClr val="E2E5E9"/>
+                      </a:solidFill>
+                      <a:prstDash val="solid"/>
+                      <a:round/>
+                      <a:headEnd type="none" w="med" len="med"/>
+                      <a:tailEnd type="none" w="med" len="med"/>
+                    </a:lnR>
+                    <a:lnT w="6350" cap="flat" cmpd="sng" algn="ctr">
+                      <a:solidFill>
+                        <a:srgbClr val="E2E5E9"/>
+                      </a:solidFill>
+                      <a:prstDash val="solid"/>
+                      <a:round/>
+                      <a:headEnd type="none" w="med" len="med"/>
+                      <a:tailEnd type="none" w="med" len="med"/>
+                    </a:lnT>
+                    <a:lnB w="6350" cap="flat" cmpd="sng" algn="ctr">
+                      <a:solidFill>
+                        <a:srgbClr val="E2E5E9"/>
+                      </a:solidFill>
+                      <a:prstDash val="solid"/>
+                      <a:round/>
+                      <a:headEnd type="none" w="med" len="med"/>
+                      <a:tailEnd type="none" w="med" len="med"/>
+                    </a:lnB>
+                  </a:tcPr>
+                </a:tc>
+                <a:tc>
+                  <a:txBody>
+                    <a:bodyPr/>
+                    <a:lstStyle/>
+                    <a:p>
+                      <a:pPr indent="0" marL="0">
+                        <a:buNone/>
+                      </a:pPr>
+                      <a:r>
+                        <a:rPr lang="en-US" sz="1050" dirty="0">
+                          <a:solidFill>
+                            <a:srgbClr val="1A1A1A"/>
+                          </a:solidFill>
+                          <a:latin typeface="Microsoft YaHei" pitchFamily="34" charset="0"/>
+                          <a:ea typeface="Microsoft YaHei" pitchFamily="34" charset="-122"/>
+                          <a:cs typeface="Microsoft YaHei" pitchFamily="34" charset="-120"/>
+                        </a:rPr>
+                        <a:t>4.25%　372/8756</a:t>
+                      </a:r>
+                      <a:endParaRPr lang="en-US" sz="1050" dirty="0">
+                        <a:latin typeface="Microsoft YaHei" charset="0"/>
+                        <a:ea typeface="Microsoft YaHei" charset="0"/>
+                        <a:cs typeface="Microsoft YaHei" charset="0"/>
+                      </a:endParaRPr>
+                    </a:p>
+                  </a:txBody>
+                  <a:tcPr marL="91440" marR="91440" marT="45720" marB="45720" anchor="ctr">
+                    <a:lnL w="6350" cap="flat" cmpd="sng" algn="ctr">
+                      <a:solidFill>
+                        <a:srgbClr val="E2E5E9"/>
+                      </a:solidFill>
+                      <a:prstDash val="solid"/>
+                      <a:round/>
+                      <a:headEnd type="none" w="med" len="med"/>
+                      <a:tailEnd type="none" w="med" len="med"/>
+                    </a:lnL>
+                    <a:lnR w="6350" cap="flat" cmpd="sng" algn="ctr">
+                      <a:solidFill>
+                        <a:srgbClr val="E2E5E9"/>
+                      </a:solidFill>
+                      <a:prstDash val="solid"/>
+                      <a:round/>
+                      <a:headEnd type="none" w="med" len="med"/>
+                      <a:tailEnd type="none" w="med" len="med"/>
+                    </a:lnR>
+                    <a:lnT w="6350" cap="flat" cmpd="sng" algn="ctr">
+                      <a:solidFill>
+                        <a:srgbClr val="E2E5E9"/>
+                      </a:solidFill>
+                      <a:prstDash val="solid"/>
+                      <a:round/>
+                      <a:headEnd type="none" w="med" len="med"/>
+                      <a:tailEnd type="none" w="med" len="med"/>
+                    </a:lnT>
+                    <a:lnB w="6350" cap="flat" cmpd="sng" algn="ctr">
+                      <a:solidFill>
+                        <a:srgbClr val="E2E5E9"/>
+                      </a:solidFill>
+                      <a:prstDash val="solid"/>
+                      <a:round/>
+                      <a:headEnd type="none" w="med" len="med"/>
+                      <a:tailEnd type="none" w="med" len="med"/>
+                    </a:lnB>
+                  </a:tcPr>
+                </a:tc>
+                <a:tc>
+                  <a:txBody>
+                    <a:bodyPr/>
+                    <a:lstStyle/>
+                    <a:p>
+                      <a:pPr indent="0" marL="0">
+                        <a:buNone/>
+                      </a:pPr>
+                      <a:r>
+                        <a:rPr lang="en-US" sz="1050" dirty="0">
+                          <a:solidFill>
+                            <a:srgbClr val="1A1A1A"/>
+                          </a:solidFill>
+                          <a:latin typeface="Microsoft YaHei" pitchFamily="34" charset="0"/>
+                          <a:ea typeface="Microsoft YaHei" pitchFamily="34" charset="-122"/>
+                          <a:cs typeface="Microsoft YaHei" pitchFamily="34" charset="-120"/>
+                        </a:rPr>
+                        <a:t>56</a:t>
+                      </a:r>
+                      <a:endParaRPr lang="en-US" sz="1050" dirty="0">
+                        <a:latin typeface="Microsoft YaHei" charset="0"/>
+                        <a:ea typeface="Microsoft YaHei" charset="0"/>
+                        <a:cs typeface="Microsoft YaHei" charset="0"/>
+                      </a:endParaRPr>
+                    </a:p>
+                  </a:txBody>
+                  <a:tcPr marL="91440" marR="91440" marT="45720" marB="45720" anchor="ctr">
+                    <a:lnL w="6350" cap="flat" cmpd="sng" algn="ctr">
+                      <a:solidFill>
+                        <a:srgbClr val="E2E5E9"/>
+                      </a:solidFill>
+                      <a:prstDash val="solid"/>
+                      <a:round/>
+                      <a:headEnd type="none" w="med" len="med"/>
+                      <a:tailEnd type="none" w="med" len="med"/>
+                    </a:lnL>
+                    <a:lnR w="6350" cap="flat" cmpd="sng" algn="ctr">
+                      <a:solidFill>
+                        <a:srgbClr val="E2E5E9"/>
+                      </a:solidFill>
+                      <a:prstDash val="solid"/>
+                      <a:round/>
+                      <a:headEnd type="none" w="med" len="med"/>
+                      <a:tailEnd type="none" w="med" len="med"/>
+                    </a:lnR>
+                    <a:lnT w="6350" cap="flat" cmpd="sng" algn="ctr">
+                      <a:solidFill>
+                        <a:srgbClr val="E2E5E9"/>
+                      </a:solidFill>
+                      <a:prstDash val="solid"/>
+                      <a:round/>
+                      <a:headEnd type="none" w="med" len="med"/>
+                      <a:tailEnd type="none" w="med" len="med"/>
+                    </a:lnT>
+                    <a:lnB w="6350" cap="flat" cmpd="sng" algn="ctr">
+                      <a:solidFill>
+                        <a:srgbClr val="E2E5E9"/>
+                      </a:solidFill>
+                      <a:prstDash val="solid"/>
+                      <a:round/>
+                      <a:headEnd type="none" w="med" len="med"/>
+                      <a:tailEnd type="none" w="med" len="med"/>
+                    </a:lnB>
+                  </a:tcPr>
+                </a:tc>
+                <a:tc>
+                  <a:txBody>
+                    <a:bodyPr/>
+                    <a:lstStyle/>
+                    <a:p>
+                      <a:pPr indent="0" marL="0">
+                        <a:buNone/>
+                      </a:pPr>
+                      <a:r>
+                        <a:rPr lang="en-US" sz="1050" dirty="0">
+                          <a:solidFill>
+                            <a:srgbClr val="1A1A1A"/>
+                          </a:solidFill>
+                          <a:latin typeface="Microsoft YaHei" pitchFamily="34" charset="0"/>
+                          <a:ea typeface="Microsoft YaHei" pitchFamily="34" charset="-122"/>
+                          <a:cs typeface="Microsoft YaHei" pitchFamily="34" charset="-120"/>
+                        </a:rPr>
+                        <a:t>1</a:t>
+                      </a:r>
+                      <a:endParaRPr lang="en-US" sz="1050" dirty="0">
+                        <a:latin typeface="Microsoft YaHei" charset="0"/>
+                        <a:ea typeface="Microsoft YaHei" charset="0"/>
+                        <a:cs typeface="Microsoft YaHei" charset="0"/>
+                      </a:endParaRPr>
+                    </a:p>
+                  </a:txBody>
+                  <a:tcPr marL="91440" marR="91440" marT="45720" marB="45720" anchor="ctr">
+                    <a:lnL w="6350" cap="flat" cmpd="sng" algn="ctr">
+                      <a:solidFill>
+                        <a:srgbClr val="E2E5E9"/>
+                      </a:solidFill>
+                      <a:prstDash val="solid"/>
+                      <a:round/>
+                      <a:headEnd type="none" w="med" len="med"/>
+                      <a:tailEnd type="none" w="med" len="med"/>
+                    </a:lnL>
+                    <a:lnR w="6350" cap="flat" cmpd="sng" algn="ctr">
+                      <a:solidFill>
+                        <a:srgbClr val="E2E5E9"/>
+                      </a:solidFill>
+                      <a:prstDash val="solid"/>
+                      <a:round/>
+                      <a:headEnd type="none" w="med" len="med"/>
+                      <a:tailEnd type="none" w="med" len="med"/>
+                    </a:lnR>
+                    <a:lnT w="6350" cap="flat" cmpd="sng" algn="ctr">
+                      <a:solidFill>
+                        <a:srgbClr val="E2E5E9"/>
+                      </a:solidFill>
+                      <a:prstDash val="solid"/>
+                      <a:round/>
+                      <a:headEnd type="none" w="med" len="med"/>
+                      <a:tailEnd type="none" w="med" len="med"/>
+                    </a:lnT>
+                    <a:lnB w="6350" cap="flat" cmpd="sng" algn="ctr">
+                      <a:solidFill>
+                        <a:srgbClr val="E2E5E9"/>
+                      </a:solidFill>
+                      <a:prstDash val="solid"/>
+                      <a:round/>
+                      <a:headEnd type="none" w="med" len="med"/>
+                      <a:tailEnd type="none" w="med" len="med"/>
+                    </a:lnB>
+                  </a:tcPr>
+                </a:tc>
+                <a:tc>
+                  <a:txBody>
+                    <a:bodyPr/>
+                    <a:lstStyle/>
+                    <a:p>
+                      <a:pPr indent="0" marL="0">
+                        <a:buNone/>
+                      </a:pPr>
+                      <a:r>
+                        <a:rPr lang="en-US" sz="1050" dirty="0">
+                          <a:solidFill>
+                            <a:srgbClr val="1A1A1A"/>
+                          </a:solidFill>
+                          <a:latin typeface="Microsoft YaHei" pitchFamily="34" charset="0"/>
+                          <a:ea typeface="Microsoft YaHei" pitchFamily="34" charset="-122"/>
+                          <a:cs typeface="Microsoft YaHei" pitchFamily="34" charset="-120"/>
+                        </a:rPr>
+                        <a:t>—</a:t>
+                      </a:r>
+                      <a:endParaRPr lang="en-US" sz="1050" dirty="0">
+                        <a:latin typeface="Microsoft YaHei" charset="0"/>
+                        <a:ea typeface="Microsoft YaHei" charset="0"/>
+                        <a:cs typeface="Microsoft YaHei" charset="0"/>
+                      </a:endParaRPr>
+                    </a:p>
+                  </a:txBody>
+                  <a:tcPr marL="91440" marR="91440" marT="45720" marB="45720" anchor="ctr">
+                    <a:lnL w="6350" cap="flat" cmpd="sng" algn="ctr">
+                      <a:solidFill>
+                        <a:srgbClr val="E2E5E9"/>
+                      </a:solidFill>
+                      <a:prstDash val="solid"/>
+                      <a:round/>
+                      <a:headEnd type="none" w="med" len="med"/>
+                      <a:tailEnd type="none" w="med" len="med"/>
+                    </a:lnL>
+                    <a:lnR w="6350" cap="flat" cmpd="sng" algn="ctr">
+                      <a:solidFill>
+                        <a:srgbClr val="E2E5E9"/>
+                      </a:solidFill>
+                      <a:prstDash val="solid"/>
+                      <a:round/>
+                      <a:headEnd type="none" w="med" len="med"/>
+                      <a:tailEnd type="none" w="med" len="med"/>
+                    </a:lnR>
+                    <a:lnT w="6350" cap="flat" cmpd="sng" algn="ctr">
+                      <a:solidFill>
+                        <a:srgbClr val="E2E5E9"/>
+                      </a:solidFill>
+                      <a:prstDash val="solid"/>
+                      <a:round/>
+                      <a:headEnd type="none" w="med" len="med"/>
+                      <a:tailEnd type="none" w="med" len="med"/>
+                    </a:lnT>
+                    <a:lnB w="6350" cap="flat" cmpd="sng" algn="ctr">
+                      <a:solidFill>
+                        <a:srgbClr val="E2E5E9"/>
+                      </a:solidFill>
+                      <a:prstDash val="solid"/>
+                      <a:round/>
+                      <a:headEnd type="none" w="med" len="med"/>
+                      <a:tailEnd type="none" w="med" len="med"/>
+                    </a:lnB>
+                  </a:tcPr>
+                </a:tc>
+              </a:tr>
+              <a:tr h="205740">
+                <a:tc>
+                  <a:txBody>
+                    <a:bodyPr/>
+                    <a:lstStyle/>
+                    <a:p>
+                      <a:pPr indent="0" marL="0">
+                        <a:buNone/>
+                      </a:pPr>
+                      <a:r>
+                        <a:rPr lang="en-US" sz="1050" dirty="0">
+                          <a:solidFill>
+                            <a:srgbClr val="1A1A1A"/>
+                          </a:solidFill>
+                          <a:latin typeface="Microsoft YaHei" pitchFamily="34" charset="0"/>
+                          <a:ea typeface="Microsoft YaHei" pitchFamily="34" charset="-122"/>
+                          <a:cs typeface="Microsoft YaHei" pitchFamily="34" charset="-120"/>
+                        </a:rPr>
+                        <a:t>小鼠 · 胰</a:t>
+                      </a:r>
+                      <a:endParaRPr lang="en-US" sz="1050" dirty="0">
+                        <a:latin typeface="Microsoft YaHei" charset="0"/>
+                        <a:ea typeface="Microsoft YaHei" charset="0"/>
+                        <a:cs typeface="Microsoft YaHei" charset="0"/>
+                      </a:endParaRPr>
+                    </a:p>
+                  </a:txBody>
+                  <a:tcPr marL="91440" marR="91440" marT="45720" marB="45720" anchor="ctr">
+                    <a:lnL w="6350" cap="flat" cmpd="sng" algn="ctr">
+                      <a:solidFill>
+                        <a:srgbClr val="E2E5E9"/>
+                      </a:solidFill>
+                      <a:prstDash val="solid"/>
+                      <a:round/>
+                      <a:headEnd type="none" w="med" len="med"/>
+                      <a:tailEnd type="none" w="med" len="med"/>
+                    </a:lnL>
+                    <a:lnR w="6350" cap="flat" cmpd="sng" algn="ctr">
+                      <a:solidFill>
+                        <a:srgbClr val="E2E5E9"/>
+                      </a:solidFill>
+                      <a:prstDash val="solid"/>
+                      <a:round/>
+                      <a:headEnd type="none" w="med" len="med"/>
+                      <a:tailEnd type="none" w="med" len="med"/>
+                    </a:lnR>
+                    <a:lnT w="6350" cap="flat" cmpd="sng" algn="ctr">
+                      <a:solidFill>
+                        <a:srgbClr val="E2E5E9"/>
+                      </a:solidFill>
+                      <a:prstDash val="solid"/>
+                      <a:round/>
+                      <a:headEnd type="none" w="med" len="med"/>
+                      <a:tailEnd type="none" w="med" len="med"/>
+                    </a:lnT>
+                    <a:lnB w="6350" cap="flat" cmpd="sng" algn="ctr">
+                      <a:solidFill>
+                        <a:srgbClr val="E2E5E9"/>
+                      </a:solidFill>
+                      <a:prstDash val="solid"/>
+                      <a:round/>
+                      <a:headEnd type="none" w="med" len="med"/>
+                      <a:tailEnd type="none" w="med" len="med"/>
+                    </a:lnB>
+                  </a:tcPr>
+                </a:tc>
+                <a:tc>
+                  <a:txBody>
+                    <a:bodyPr/>
+                    <a:lstStyle/>
+                    <a:p>
+                      <a:pPr indent="0" marL="0">
+                        <a:buNone/>
+                      </a:pPr>
+                      <a:r>
+                        <a:rPr lang="en-US" sz="1050" dirty="0">
+                          <a:solidFill>
+                            <a:srgbClr val="1A1A1A"/>
+                          </a:solidFill>
+                          <a:latin typeface="Microsoft YaHei" pitchFamily="34" charset="0"/>
+                          <a:ea typeface="Microsoft YaHei" pitchFamily="34" charset="-122"/>
+                          <a:cs typeface="Microsoft YaHei" pitchFamily="34" charset="-120"/>
+                        </a:rPr>
+                        <a:t>胰导管细胞</a:t>
+                      </a:r>
+                      <a:endParaRPr lang="en-US" sz="1050" dirty="0">
+                        <a:latin typeface="Microsoft YaHei" charset="0"/>
+                        <a:ea typeface="Microsoft YaHei" charset="0"/>
+                        <a:cs typeface="Microsoft YaHei" charset="0"/>
+                      </a:endParaRPr>
+                    </a:p>
+                  </a:txBody>
+                  <a:tcPr marL="91440" marR="91440" marT="45720" marB="45720" anchor="ctr">
+                    <a:lnL w="6350" cap="flat" cmpd="sng" algn="ctr">
+                      <a:solidFill>
+                        <a:srgbClr val="E2E5E9"/>
+                      </a:solidFill>
+                      <a:prstDash val="solid"/>
+                      <a:round/>
+                      <a:headEnd type="none" w="med" len="med"/>
+                      <a:tailEnd type="none" w="med" len="med"/>
+                    </a:lnL>
+                    <a:lnR w="6350" cap="flat" cmpd="sng" algn="ctr">
+                      <a:solidFill>
+                        <a:srgbClr val="E2E5E9"/>
+                      </a:solidFill>
+                      <a:prstDash val="solid"/>
+                      <a:round/>
+                      <a:headEnd type="none" w="med" len="med"/>
+                      <a:tailEnd type="none" w="med" len="med"/>
+                    </a:lnR>
+                    <a:lnT w="6350" cap="flat" cmpd="sng" algn="ctr">
+                      <a:solidFill>
+                        <a:srgbClr val="E2E5E9"/>
+                      </a:solidFill>
+                      <a:prstDash val="solid"/>
+                      <a:round/>
+                      <a:headEnd type="none" w="med" len="med"/>
+                      <a:tailEnd type="none" w="med" len="med"/>
+                    </a:lnT>
+                    <a:lnB w="6350" cap="flat" cmpd="sng" algn="ctr">
+                      <a:solidFill>
+                        <a:srgbClr val="E2E5E9"/>
+                      </a:solidFill>
+                      <a:prstDash val="solid"/>
+                      <a:round/>
+                      <a:headEnd type="none" w="med" len="med"/>
+                      <a:tailEnd type="none" w="med" len="med"/>
+                    </a:lnB>
+                  </a:tcPr>
+                </a:tc>
+                <a:tc>
+                  <a:txBody>
+                    <a:bodyPr/>
+                    <a:lstStyle/>
+                    <a:p>
+                      <a:pPr indent="0" marL="0">
+                        <a:buNone/>
+                      </a:pPr>
+                      <a:r>
+                        <a:rPr lang="en-US" sz="1050" dirty="0">
+                          <a:solidFill>
+                            <a:srgbClr val="1A1A1A"/>
+                          </a:solidFill>
+                          <a:latin typeface="Microsoft YaHei" pitchFamily="34" charset="0"/>
+                          <a:ea typeface="Microsoft YaHei" pitchFamily="34" charset="-122"/>
+                          <a:cs typeface="Microsoft YaHei" pitchFamily="34" charset="-120"/>
+                        </a:rPr>
+                        <a:t>13.2%　256/1947</a:t>
+                      </a:r>
+                      <a:endParaRPr lang="en-US" sz="1050" dirty="0">
+                        <a:latin typeface="Microsoft YaHei" charset="0"/>
+                        <a:ea typeface="Microsoft YaHei" charset="0"/>
+                        <a:cs typeface="Microsoft YaHei" charset="0"/>
+                      </a:endParaRPr>
+                    </a:p>
+                  </a:txBody>
+                  <a:tcPr marL="91440" marR="91440" marT="45720" marB="45720" anchor="ctr">
+                    <a:lnL w="6350" cap="flat" cmpd="sng" algn="ctr">
+                      <a:solidFill>
+                        <a:srgbClr val="E2E5E9"/>
+                      </a:solidFill>
+                      <a:prstDash val="solid"/>
+                      <a:round/>
+                      <a:headEnd type="none" w="med" len="med"/>
+                      <a:tailEnd type="none" w="med" len="med"/>
+                    </a:lnL>
+                    <a:lnR w="6350" cap="flat" cmpd="sng" algn="ctr">
+                      <a:solidFill>
+                        <a:srgbClr val="E2E5E9"/>
+                      </a:solidFill>
+                      <a:prstDash val="solid"/>
+                      <a:round/>
+                      <a:headEnd type="none" w="med" len="med"/>
+                      <a:tailEnd type="none" w="med" len="med"/>
+                    </a:lnR>
+                    <a:lnT w="6350" cap="flat" cmpd="sng" algn="ctr">
+                      <a:solidFill>
+                        <a:srgbClr val="E2E5E9"/>
+                      </a:solidFill>
+                      <a:prstDash val="solid"/>
+                      <a:round/>
+                      <a:headEnd type="none" w="med" len="med"/>
+                      <a:tailEnd type="none" w="med" len="med"/>
+                    </a:lnT>
+                    <a:lnB w="6350" cap="flat" cmpd="sng" algn="ctr">
+                      <a:solidFill>
+                        <a:srgbClr val="E2E5E9"/>
+                      </a:solidFill>
+                      <a:prstDash val="solid"/>
+                      <a:round/>
+                      <a:headEnd type="none" w="med" len="med"/>
+                      <a:tailEnd type="none" w="med" len="med"/>
+                    </a:lnB>
+                  </a:tcPr>
+                </a:tc>
+                <a:tc>
+                  <a:txBody>
+                    <a:bodyPr/>
+                    <a:lstStyle/>
+                    <a:p>
+                      <a:pPr indent="0" marL="0">
+                        <a:buNone/>
+                      </a:pPr>
+                      <a:r>
+                        <a:rPr lang="en-US" sz="1050" dirty="0">
+                          <a:solidFill>
+                            <a:srgbClr val="1A1A1A"/>
+                          </a:solidFill>
+                          <a:latin typeface="Microsoft YaHei" pitchFamily="34" charset="0"/>
+                          <a:ea typeface="Microsoft YaHei" pitchFamily="34" charset="-122"/>
+                          <a:cs typeface="Microsoft YaHei" pitchFamily="34" charset="-120"/>
+                        </a:rPr>
+                        <a:t>0.10%　2/1947</a:t>
+                      </a:r>
+                      <a:endParaRPr lang="en-US" sz="1050" dirty="0">
+                        <a:latin typeface="Microsoft YaHei" charset="0"/>
+                        <a:ea typeface="Microsoft YaHei" charset="0"/>
+                        <a:cs typeface="Microsoft YaHei" charset="0"/>
+                      </a:endParaRPr>
+                    </a:p>
+                  </a:txBody>
+                  <a:tcPr marL="91440" marR="91440" marT="45720" marB="45720" anchor="ctr">
+                    <a:lnL w="6350" cap="flat" cmpd="sng" algn="ctr">
+                      <a:solidFill>
+                        <a:srgbClr val="E2E5E9"/>
+                      </a:solidFill>
+                      <a:prstDash val="solid"/>
+                      <a:round/>
+                      <a:headEnd type="none" w="med" len="med"/>
+                      <a:tailEnd type="none" w="med" len="med"/>
+                    </a:lnL>
+                    <a:lnR w="6350" cap="flat" cmpd="sng" algn="ctr">
+                      <a:solidFill>
+                        <a:srgbClr val="E2E5E9"/>
+                      </a:solidFill>
+                      <a:prstDash val="solid"/>
+                      <a:round/>
+                      <a:headEnd type="none" w="med" len="med"/>
+                      <a:tailEnd type="none" w="med" len="med"/>
+                    </a:lnR>
+                    <a:lnT w="6350" cap="flat" cmpd="sng" algn="ctr">
+                      <a:solidFill>
+                        <a:srgbClr val="E2E5E9"/>
+                      </a:solidFill>
+                      <a:prstDash val="solid"/>
+                      <a:round/>
+                      <a:headEnd type="none" w="med" len="med"/>
+                      <a:tailEnd type="none" w="med" len="med"/>
+                    </a:lnT>
+                    <a:lnB w="6350" cap="flat" cmpd="sng" algn="ctr">
+                      <a:solidFill>
+                        <a:srgbClr val="E2E5E9"/>
+                      </a:solidFill>
+                      <a:prstDash val="solid"/>
+                      <a:round/>
+                      <a:headEnd type="none" w="med" len="med"/>
+                      <a:tailEnd type="none" w="med" len="med"/>
+                    </a:lnB>
+                  </a:tcPr>
+                </a:tc>
+                <a:tc>
+                  <a:txBody>
+                    <a:bodyPr/>
+                    <a:lstStyle/>
+                    <a:p>
+                      <a:pPr indent="0" marL="0">
+                        <a:buNone/>
+                      </a:pPr>
+                      <a:r>
+                        <a:rPr lang="en-US" sz="1050" dirty="0">
+                          <a:solidFill>
+                            <a:srgbClr val="1A1A1A"/>
+                          </a:solidFill>
+                          <a:latin typeface="Microsoft YaHei" pitchFamily="34" charset="0"/>
+                          <a:ea typeface="Microsoft YaHei" pitchFamily="34" charset="-122"/>
+                          <a:cs typeface="Microsoft YaHei" pitchFamily="34" charset="-120"/>
+                        </a:rPr>
+                        <a:t>9</a:t>
+                      </a:r>
+                      <a:endParaRPr lang="en-US" sz="1050" dirty="0">
+                        <a:latin typeface="Microsoft YaHei" charset="0"/>
+                        <a:ea typeface="Microsoft YaHei" charset="0"/>
+                        <a:cs typeface="Microsoft YaHei" charset="0"/>
+                      </a:endParaRPr>
+                    </a:p>
+                  </a:txBody>
+                  <a:tcPr marL="91440" marR="91440" marT="45720" marB="45720" anchor="ctr">
+                    <a:lnL w="6350" cap="flat" cmpd="sng" algn="ctr">
+                      <a:solidFill>
+                        <a:srgbClr val="E2E5E9"/>
+                      </a:solidFill>
+                      <a:prstDash val="solid"/>
+                      <a:round/>
+                      <a:headEnd type="none" w="med" len="med"/>
+                      <a:tailEnd type="none" w="med" len="med"/>
+                    </a:lnL>
+                    <a:lnR w="6350" cap="flat" cmpd="sng" algn="ctr">
+                      <a:solidFill>
+                        <a:srgbClr val="E2E5E9"/>
+                      </a:solidFill>
+                      <a:prstDash val="solid"/>
+                      <a:round/>
+                      <a:headEnd type="none" w="med" len="med"/>
+                      <a:tailEnd type="none" w="med" len="med"/>
+                    </a:lnR>
+                    <a:lnT w="6350" cap="flat" cmpd="sng" algn="ctr">
+                      <a:solidFill>
+                        <a:srgbClr val="E2E5E9"/>
+                      </a:solidFill>
+                      <a:prstDash val="solid"/>
+                      <a:round/>
+                      <a:headEnd type="none" w="med" len="med"/>
+                      <a:tailEnd type="none" w="med" len="med"/>
+                    </a:lnT>
+                    <a:lnB w="6350" cap="flat" cmpd="sng" algn="ctr">
+                      <a:solidFill>
+                        <a:srgbClr val="E2E5E9"/>
+                      </a:solidFill>
+                      <a:prstDash val="solid"/>
+                      <a:round/>
+                      <a:headEnd type="none" w="med" len="med"/>
+                      <a:tailEnd type="none" w="med" len="med"/>
+                    </a:lnB>
+                  </a:tcPr>
+                </a:tc>
+                <a:tc>
+                  <a:txBody>
+                    <a:bodyPr/>
+                    <a:lstStyle/>
+                    <a:p>
+                      <a:pPr indent="0" marL="0">
+                        <a:buNone/>
+                      </a:pPr>
+                      <a:r>
+                        <a:rPr lang="en-US" sz="1050" dirty="0">
+                          <a:solidFill>
+                            <a:srgbClr val="1A1A1A"/>
+                          </a:solidFill>
+                          <a:latin typeface="Microsoft YaHei" pitchFamily="34" charset="0"/>
+                          <a:ea typeface="Microsoft YaHei" pitchFamily="34" charset="-122"/>
+                          <a:cs typeface="Microsoft YaHei" pitchFamily="34" charset="-120"/>
+                        </a:rPr>
+                        <a:t>1</a:t>
+                      </a:r>
+                      <a:endParaRPr lang="en-US" sz="1050" dirty="0">
+                        <a:latin typeface="Microsoft YaHei" charset="0"/>
+                        <a:ea typeface="Microsoft YaHei" charset="0"/>
+                        <a:cs typeface="Microsoft YaHei" charset="0"/>
+                      </a:endParaRPr>
+                    </a:p>
+                  </a:txBody>
+                  <a:tcPr marL="91440" marR="91440" marT="45720" marB="45720" anchor="ctr">
+                    <a:lnL w="6350" cap="flat" cmpd="sng" algn="ctr">
+                      <a:solidFill>
+                        <a:srgbClr val="E2E5E9"/>
+                      </a:solidFill>
+                      <a:prstDash val="solid"/>
+                      <a:round/>
+                      <a:headEnd type="none" w="med" len="med"/>
+                      <a:tailEnd type="none" w="med" len="med"/>
+                    </a:lnL>
+                    <a:lnR w="6350" cap="flat" cmpd="sng" algn="ctr">
+                      <a:solidFill>
+                        <a:srgbClr val="E2E5E9"/>
+                      </a:solidFill>
+                      <a:prstDash val="solid"/>
+                      <a:round/>
+                      <a:headEnd type="none" w="med" len="med"/>
+                      <a:tailEnd type="none" w="med" len="med"/>
+                    </a:lnR>
+                    <a:lnT w="6350" cap="flat" cmpd="sng" algn="ctr">
+                      <a:solidFill>
+                        <a:srgbClr val="E2E5E9"/>
+                      </a:solidFill>
+                      <a:prstDash val="solid"/>
+                      <a:round/>
+                      <a:headEnd type="none" w="med" len="med"/>
+                      <a:tailEnd type="none" w="med" len="med"/>
+                    </a:lnT>
+                    <a:lnB w="6350" cap="flat" cmpd="sng" algn="ctr">
+                      <a:solidFill>
+                        <a:srgbClr val="E2E5E9"/>
+                      </a:solidFill>
+                      <a:prstDash val="solid"/>
+                      <a:round/>
+                      <a:headEnd type="none" w="med" len="med"/>
+                      <a:tailEnd type="none" w="med" len="med"/>
+                    </a:lnB>
+                  </a:tcPr>
+                </a:tc>
+                <a:tc>
+                  <a:txBody>
+                    <a:bodyPr/>
+                    <a:lstStyle/>
+                    <a:p>
+                      <a:pPr indent="0" marL="0">
+                        <a:buNone/>
+                      </a:pPr>
+                      <a:r>
+                        <a:rPr lang="en-US" sz="1050" dirty="0">
+                          <a:solidFill>
+                            <a:srgbClr val="1A1A1A"/>
+                          </a:solidFill>
+                          <a:latin typeface="Microsoft YaHei" pitchFamily="34" charset="0"/>
+                          <a:ea typeface="Microsoft YaHei" pitchFamily="34" charset="-122"/>
+                          <a:cs typeface="Microsoft YaHei" pitchFamily="34" charset="-120"/>
+                        </a:rPr>
+                        <a:t>—</a:t>
+                      </a:r>
+                      <a:endParaRPr lang="en-US" sz="1050" dirty="0">
+                        <a:latin typeface="Microsoft YaHei" charset="0"/>
+                        <a:ea typeface="Microsoft YaHei" charset="0"/>
+                        <a:cs typeface="Microsoft YaHei" charset="0"/>
+                      </a:endParaRPr>
+                    </a:p>
+                  </a:txBody>
+                  <a:tcPr marL="91440" marR="91440" marT="45720" marB="45720" anchor="ctr">
+                    <a:lnL w="6350" cap="flat" cmpd="sng" algn="ctr">
+                      <a:solidFill>
+                        <a:srgbClr val="E2E5E9"/>
+                      </a:solidFill>
+                      <a:prstDash val="solid"/>
+                      <a:round/>
+                      <a:headEnd type="none" w="med" len="med"/>
+                      <a:tailEnd type="none" w="med" len="med"/>
+                    </a:lnL>
+                    <a:lnR w="6350" cap="flat" cmpd="sng" algn="ctr">
+                      <a:solidFill>
+                        <a:srgbClr val="E2E5E9"/>
+                      </a:solidFill>
+                      <a:prstDash val="solid"/>
+                      <a:round/>
+                      <a:headEnd type="none" w="med" len="med"/>
+                      <a:tailEnd type="none" w="med" len="med"/>
+                    </a:lnR>
+                    <a:lnT w="6350" cap="flat" cmpd="sng" algn="ctr">
+                      <a:solidFill>
+                        <a:srgbClr val="E2E5E9"/>
+                      </a:solidFill>
+                      <a:prstDash val="solid"/>
+                      <a:round/>
+                      <a:headEnd type="none" w="med" len="med"/>
+                      <a:tailEnd type="none" w="med" len="med"/>
+                    </a:lnT>
+                    <a:lnB w="6350" cap="flat" cmpd="sng" algn="ctr">
+                      <a:solidFill>
+                        <a:srgbClr val="E2E5E9"/>
+                      </a:solidFill>
+                      <a:prstDash val="solid"/>
+                      <a:round/>
+                      <a:headEnd type="none" w="med" len="med"/>
+                      <a:tailEnd type="none" w="med" len="med"/>
+                    </a:lnB>
+                  </a:tcPr>
+                </a:tc>
+              </a:tr>
+              <a:tr h="205740">
+                <a:tc>
+                  <a:txBody>
+                    <a:bodyPr/>
+                    <a:lstStyle/>
+                    <a:p>
+                      <a:pPr indent="0" marL="0">
+                        <a:buNone/>
+                      </a:pPr>
+                      <a:r>
+                        <a:rPr lang="en-US" sz="1050" dirty="0">
+                          <a:solidFill>
+                            <a:srgbClr val="1A1A1A"/>
+                          </a:solidFill>
+                          <a:latin typeface="Microsoft YaHei" pitchFamily="34" charset="0"/>
+                          <a:ea typeface="Microsoft YaHei" pitchFamily="34" charset="-122"/>
+                          <a:cs typeface="Microsoft YaHei" pitchFamily="34" charset="-120"/>
+                        </a:rPr>
+                        <a:t>人 · 脑</a:t>
+                      </a:r>
+                      <a:endParaRPr lang="en-US" sz="1050" dirty="0">
+                        <a:latin typeface="Microsoft YaHei" charset="0"/>
+                        <a:ea typeface="Microsoft YaHei" charset="0"/>
+                        <a:cs typeface="Microsoft YaHei" charset="0"/>
+                      </a:endParaRPr>
+                    </a:p>
+                  </a:txBody>
+                  <a:tcPr marL="91440" marR="91440" marT="45720" marB="45720" anchor="ctr">
+                    <a:lnL w="6350" cap="flat" cmpd="sng" algn="ctr">
+                      <a:solidFill>
+                        <a:srgbClr val="E2E5E9"/>
+                      </a:solidFill>
+                      <a:prstDash val="solid"/>
+                      <a:round/>
+                      <a:headEnd type="none" w="med" len="med"/>
+                      <a:tailEnd type="none" w="med" len="med"/>
+                    </a:lnL>
+                    <a:lnR w="6350" cap="flat" cmpd="sng" algn="ctr">
+                      <a:solidFill>
+                        <a:srgbClr val="E2E5E9"/>
+                      </a:solidFill>
+                      <a:prstDash val="solid"/>
+                      <a:round/>
+                      <a:headEnd type="none" w="med" len="med"/>
+                      <a:tailEnd type="none" w="med" len="med"/>
+                    </a:lnR>
+                    <a:lnT w="6350" cap="flat" cmpd="sng" algn="ctr">
+                      <a:solidFill>
+                        <a:srgbClr val="E2E5E9"/>
+                      </a:solidFill>
+                      <a:prstDash val="solid"/>
+                      <a:round/>
+                      <a:headEnd type="none" w="med" len="med"/>
+                      <a:tailEnd type="none" w="med" len="med"/>
+                    </a:lnT>
+                    <a:lnB w="6350" cap="flat" cmpd="sng" algn="ctr">
+                      <a:solidFill>
+                        <a:srgbClr val="E2E5E9"/>
+                      </a:solidFill>
+                      <a:prstDash val="solid"/>
+                      <a:round/>
+                      <a:headEnd type="none" w="med" len="med"/>
+                      <a:tailEnd type="none" w="med" len="med"/>
+                    </a:lnB>
+                  </a:tcPr>
+                </a:tc>
+                <a:tc>
+                  <a:txBody>
+                    <a:bodyPr/>
+                    <a:lstStyle/>
+                    <a:p>
+                      <a:pPr indent="0" marL="0">
+                        <a:buNone/>
+                      </a:pPr>
+                      <a:r>
+                        <a:rPr lang="en-US" sz="1050" dirty="0">
+                          <a:solidFill>
+                            <a:srgbClr val="1A1A1A"/>
+                          </a:solidFill>
+                          <a:latin typeface="Microsoft YaHei" pitchFamily="34" charset="0"/>
+                          <a:ea typeface="Microsoft YaHei" pitchFamily="34" charset="-122"/>
+                          <a:cs typeface="Microsoft YaHei" pitchFamily="34" charset="-120"/>
+                        </a:rPr>
+                        <a:t>CGE 源中间神经元</a:t>
+                      </a:r>
+                      <a:endParaRPr lang="en-US" sz="1050" dirty="0">
+                        <a:latin typeface="Microsoft YaHei" charset="0"/>
+                        <a:ea typeface="Microsoft YaHei" charset="0"/>
+                        <a:cs typeface="Microsoft YaHei" charset="0"/>
+                      </a:endParaRPr>
+                    </a:p>
+                  </a:txBody>
+                  <a:tcPr marL="91440" marR="91440" marT="45720" marB="45720" anchor="ctr">
+                    <a:lnL w="6350" cap="flat" cmpd="sng" algn="ctr">
+                      <a:solidFill>
+                        <a:srgbClr val="E2E5E9"/>
+                      </a:solidFill>
+                      <a:prstDash val="solid"/>
+                      <a:round/>
+                      <a:headEnd type="none" w="med" len="med"/>
+                      <a:tailEnd type="none" w="med" len="med"/>
+                    </a:lnL>
+                    <a:lnR w="6350" cap="flat" cmpd="sng" algn="ctr">
+                      <a:solidFill>
+                        <a:srgbClr val="E2E5E9"/>
+                      </a:solidFill>
+                      <a:prstDash val="solid"/>
+                      <a:round/>
+                      <a:headEnd type="none" w="med" len="med"/>
+                      <a:tailEnd type="none" w="med" len="med"/>
+                    </a:lnR>
+                    <a:lnT w="6350" cap="flat" cmpd="sng" algn="ctr">
+                      <a:solidFill>
+                        <a:srgbClr val="E2E5E9"/>
+                      </a:solidFill>
+                      <a:prstDash val="solid"/>
+                      <a:round/>
+                      <a:headEnd type="none" w="med" len="med"/>
+                      <a:tailEnd type="none" w="med" len="med"/>
+                    </a:lnT>
+                    <a:lnB w="6350" cap="flat" cmpd="sng" algn="ctr">
+                      <a:solidFill>
+                        <a:srgbClr val="E2E5E9"/>
+                      </a:solidFill>
+                      <a:prstDash val="solid"/>
+                      <a:round/>
+                      <a:headEnd type="none" w="med" len="med"/>
+                      <a:tailEnd type="none" w="med" len="med"/>
+                    </a:lnB>
+                  </a:tcPr>
+                </a:tc>
+                <a:tc>
+                  <a:txBody>
+                    <a:bodyPr/>
+                    <a:lstStyle/>
+                    <a:p>
+                      <a:pPr indent="0" marL="0">
+                        <a:buNone/>
+                      </a:pPr>
+                      <a:r>
+                        <a:rPr lang="en-US" sz="1050" dirty="0">
+                          <a:solidFill>
+                            <a:srgbClr val="1A1A1A"/>
+                          </a:solidFill>
+                          <a:latin typeface="Microsoft YaHei" pitchFamily="34" charset="0"/>
+                          <a:ea typeface="Microsoft YaHei" pitchFamily="34" charset="-122"/>
+                          <a:cs typeface="Microsoft YaHei" pitchFamily="34" charset="-120"/>
+                        </a:rPr>
+                        <a:t>12.1%　618/5096</a:t>
+                      </a:r>
+                      <a:endParaRPr lang="en-US" sz="1050" dirty="0">
+                        <a:latin typeface="Microsoft YaHei" charset="0"/>
+                        <a:ea typeface="Microsoft YaHei" charset="0"/>
+                        <a:cs typeface="Microsoft YaHei" charset="0"/>
+                      </a:endParaRPr>
+                    </a:p>
+                  </a:txBody>
+                  <a:tcPr marL="91440" marR="91440" marT="45720" marB="45720" anchor="ctr">
+                    <a:lnL w="6350" cap="flat" cmpd="sng" algn="ctr">
+                      <a:solidFill>
+                        <a:srgbClr val="E2E5E9"/>
+                      </a:solidFill>
+                      <a:prstDash val="solid"/>
+                      <a:round/>
+                      <a:headEnd type="none" w="med" len="med"/>
+                      <a:tailEnd type="none" w="med" len="med"/>
+                    </a:lnL>
+                    <a:lnR w="6350" cap="flat" cmpd="sng" algn="ctr">
+                      <a:solidFill>
+                        <a:srgbClr val="E2E5E9"/>
+                      </a:solidFill>
+                      <a:prstDash val="solid"/>
+                      <a:round/>
+                      <a:headEnd type="none" w="med" len="med"/>
+                      <a:tailEnd type="none" w="med" len="med"/>
+                    </a:lnR>
+                    <a:lnT w="6350" cap="flat" cmpd="sng" algn="ctr">
+                      <a:solidFill>
+                        <a:srgbClr val="E2E5E9"/>
+                      </a:solidFill>
+                      <a:prstDash val="solid"/>
+                      <a:round/>
+                      <a:headEnd type="none" w="med" len="med"/>
+                      <a:tailEnd type="none" w="med" len="med"/>
+                    </a:lnT>
+                    <a:lnB w="6350" cap="flat" cmpd="sng" algn="ctr">
+                      <a:solidFill>
+                        <a:srgbClr val="E2E5E9"/>
+                      </a:solidFill>
+                      <a:prstDash val="solid"/>
+                      <a:round/>
+                      <a:headEnd type="none" w="med" len="med"/>
+                      <a:tailEnd type="none" w="med" len="med"/>
+                    </a:lnB>
+                  </a:tcPr>
+                </a:tc>
+                <a:tc>
+                  <a:txBody>
+                    <a:bodyPr/>
+                    <a:lstStyle/>
+                    <a:p>
+                      <a:pPr indent="0" marL="0">
+                        <a:buNone/>
+                      </a:pPr>
+                      <a:r>
+                        <a:rPr lang="en-US" sz="1050" dirty="0">
+                          <a:solidFill>
+                            <a:srgbClr val="1A1A1A"/>
+                          </a:solidFill>
+                          <a:latin typeface="Microsoft YaHei" pitchFamily="34" charset="0"/>
+                          <a:ea typeface="Microsoft YaHei" pitchFamily="34" charset="-122"/>
+                          <a:cs typeface="Microsoft YaHei" pitchFamily="34" charset="-120"/>
+                        </a:rPr>
+                        <a:t>0.20%　10/5096</a:t>
+                      </a:r>
+                      <a:endParaRPr lang="en-US" sz="1050" dirty="0">
+                        <a:latin typeface="Microsoft YaHei" charset="0"/>
+                        <a:ea typeface="Microsoft YaHei" charset="0"/>
+                        <a:cs typeface="Microsoft YaHei" charset="0"/>
+                      </a:endParaRPr>
+                    </a:p>
+                  </a:txBody>
+                  <a:tcPr marL="91440" marR="91440" marT="45720" marB="45720" anchor="ctr">
+                    <a:lnL w="6350" cap="flat" cmpd="sng" algn="ctr">
+                      <a:solidFill>
+                        <a:srgbClr val="E2E5E9"/>
+                      </a:solidFill>
+                      <a:prstDash val="solid"/>
+                      <a:round/>
+                      <a:headEnd type="none" w="med" len="med"/>
+                      <a:tailEnd type="none" w="med" len="med"/>
+                    </a:lnL>
+                    <a:lnR w="6350" cap="flat" cmpd="sng" algn="ctr">
+                      <a:solidFill>
+                        <a:srgbClr val="E2E5E9"/>
+                      </a:solidFill>
+                      <a:prstDash val="solid"/>
+                      <a:round/>
+                      <a:headEnd type="none" w="med" len="med"/>
+                      <a:tailEnd type="none" w="med" len="med"/>
+                    </a:lnR>
+                    <a:lnT w="6350" cap="flat" cmpd="sng" algn="ctr">
+                      <a:solidFill>
+                        <a:srgbClr val="E2E5E9"/>
+                      </a:solidFill>
+                      <a:prstDash val="solid"/>
+                      <a:round/>
+                      <a:headEnd type="none" w="med" len="med"/>
+                      <a:tailEnd type="none" w="med" len="med"/>
+                    </a:lnT>
+                    <a:lnB w="6350" cap="flat" cmpd="sng" algn="ctr">
+                      <a:solidFill>
+                        <a:srgbClr val="E2E5E9"/>
+                      </a:solidFill>
+                      <a:prstDash val="solid"/>
+                      <a:round/>
+                      <a:headEnd type="none" w="med" len="med"/>
+                      <a:tailEnd type="none" w="med" len="med"/>
+                    </a:lnB>
+                  </a:tcPr>
+                </a:tc>
+                <a:tc>
+                  <a:txBody>
+                    <a:bodyPr/>
+                    <a:lstStyle/>
+                    <a:p>
+                      <a:pPr indent="0" marL="0">
+                        <a:buNone/>
+                      </a:pPr>
+                      <a:r>
+                        <a:rPr lang="en-US" sz="1050" dirty="0">
+                          <a:solidFill>
+                            <a:srgbClr val="1A1A1A"/>
+                          </a:solidFill>
+                          <a:latin typeface="Microsoft YaHei" pitchFamily="34" charset="0"/>
+                          <a:ea typeface="Microsoft YaHei" pitchFamily="34" charset="-122"/>
+                          <a:cs typeface="Microsoft YaHei" pitchFamily="34" charset="-120"/>
+                        </a:rPr>
+                        <a:t>44</a:t>
+                      </a:r>
+                      <a:endParaRPr lang="en-US" sz="1050" dirty="0">
+                        <a:latin typeface="Microsoft YaHei" charset="0"/>
+                        <a:ea typeface="Microsoft YaHei" charset="0"/>
+                        <a:cs typeface="Microsoft YaHei" charset="0"/>
+                      </a:endParaRPr>
+                    </a:p>
+                  </a:txBody>
+                  <a:tcPr marL="91440" marR="91440" marT="45720" marB="45720" anchor="ctr">
+                    <a:lnL w="6350" cap="flat" cmpd="sng" algn="ctr">
+                      <a:solidFill>
+                        <a:srgbClr val="E2E5E9"/>
+                      </a:solidFill>
+                      <a:prstDash val="solid"/>
+                      <a:round/>
+                      <a:headEnd type="none" w="med" len="med"/>
+                      <a:tailEnd type="none" w="med" len="med"/>
+                    </a:lnL>
+                    <a:lnR w="6350" cap="flat" cmpd="sng" algn="ctr">
+                      <a:solidFill>
+                        <a:srgbClr val="E2E5E9"/>
+                      </a:solidFill>
+                      <a:prstDash val="solid"/>
+                      <a:round/>
+                      <a:headEnd type="none" w="med" len="med"/>
+                      <a:tailEnd type="none" w="med" len="med"/>
+                    </a:lnR>
+                    <a:lnT w="6350" cap="flat" cmpd="sng" algn="ctr">
+                      <a:solidFill>
+                        <a:srgbClr val="E2E5E9"/>
+                      </a:solidFill>
+                      <a:prstDash val="solid"/>
+                      <a:round/>
+                      <a:headEnd type="none" w="med" len="med"/>
+                      <a:tailEnd type="none" w="med" len="med"/>
+                    </a:lnT>
+                    <a:lnB w="6350" cap="flat" cmpd="sng" algn="ctr">
+                      <a:solidFill>
+                        <a:srgbClr val="E2E5E9"/>
+                      </a:solidFill>
+                      <a:prstDash val="solid"/>
+                      <a:round/>
+                      <a:headEnd type="none" w="med" len="med"/>
+                      <a:tailEnd type="none" w="med" len="med"/>
+                    </a:lnB>
+                  </a:tcPr>
+                </a:tc>
+                <a:tc>
+                  <a:txBody>
+                    <a:bodyPr/>
+                    <a:lstStyle/>
+                    <a:p>
+                      <a:pPr indent="0" marL="0">
+                        <a:buNone/>
+                      </a:pPr>
+                      <a:r>
+                        <a:rPr lang="en-US" sz="1050" dirty="0">
+                          <a:solidFill>
+                            <a:srgbClr val="1A1A1A"/>
+                          </a:solidFill>
+                          <a:latin typeface="Microsoft YaHei" pitchFamily="34" charset="0"/>
+                          <a:ea typeface="Microsoft YaHei" pitchFamily="34" charset="-122"/>
+                          <a:cs typeface="Microsoft YaHei" pitchFamily="34" charset="-120"/>
+                        </a:rPr>
+                        <a:t>1</a:t>
+                      </a:r>
+                      <a:endParaRPr lang="en-US" sz="1050" dirty="0">
+                        <a:latin typeface="Microsoft YaHei" charset="0"/>
+                        <a:ea typeface="Microsoft YaHei" charset="0"/>
+                        <a:cs typeface="Microsoft YaHei" charset="0"/>
+                      </a:endParaRPr>
+                    </a:p>
+                  </a:txBody>
+                  <a:tcPr marL="91440" marR="91440" marT="45720" marB="45720" anchor="ctr">
+                    <a:lnL w="6350" cap="flat" cmpd="sng" algn="ctr">
+                      <a:solidFill>
+                        <a:srgbClr val="E2E5E9"/>
+                      </a:solidFill>
+                      <a:prstDash val="solid"/>
+                      <a:round/>
+                      <a:headEnd type="none" w="med" len="med"/>
+                      <a:tailEnd type="none" w="med" len="med"/>
+                    </a:lnL>
+                    <a:lnR w="6350" cap="flat" cmpd="sng" algn="ctr">
+                      <a:solidFill>
+                        <a:srgbClr val="E2E5E9"/>
+                      </a:solidFill>
+                      <a:prstDash val="solid"/>
+                      <a:round/>
+                      <a:headEnd type="none" w="med" len="med"/>
+                      <a:tailEnd type="none" w="med" len="med"/>
+                    </a:lnR>
+                    <a:lnT w="6350" cap="flat" cmpd="sng" algn="ctr">
+                      <a:solidFill>
+                        <a:srgbClr val="E2E5E9"/>
+                      </a:solidFill>
+                      <a:prstDash val="solid"/>
+                      <a:round/>
+                      <a:headEnd type="none" w="med" len="med"/>
+                      <a:tailEnd type="none" w="med" len="med"/>
+                    </a:lnT>
+                    <a:lnB w="6350" cap="flat" cmpd="sng" algn="ctr">
+                      <a:solidFill>
+                        <a:srgbClr val="E2E5E9"/>
+                      </a:solidFill>
+                      <a:prstDash val="solid"/>
+                      <a:round/>
+                      <a:headEnd type="none" w="med" len="med"/>
+                      <a:tailEnd type="none" w="med" len="med"/>
+                    </a:lnB>
+                  </a:tcPr>
+                </a:tc>
+                <a:tc>
+                  <a:txBody>
+                    <a:bodyPr/>
+                    <a:lstStyle/>
+                    <a:p>
+                      <a:pPr indent="0" marL="0">
+                        <a:buNone/>
+                      </a:pPr>
+                      <a:r>
+                        <a:rPr lang="en-US" sz="1050" dirty="0">
+                          <a:solidFill>
+                            <a:srgbClr val="1A1A1A"/>
+                          </a:solidFill>
+                          <a:latin typeface="Microsoft YaHei" pitchFamily="34" charset="0"/>
+                          <a:ea typeface="Microsoft YaHei" pitchFamily="34" charset="-122"/>
+                          <a:cs typeface="Microsoft YaHei" pitchFamily="34" charset="-120"/>
+                        </a:rPr>
+                        <a:t>3</a:t>
+                      </a:r>
+                      <a:endParaRPr lang="en-US" sz="1050" dirty="0">
+                        <a:latin typeface="Microsoft YaHei" charset="0"/>
+                        <a:ea typeface="Microsoft YaHei" charset="0"/>
+                        <a:cs typeface="Microsoft YaHei" charset="0"/>
+                      </a:endParaRPr>
+                    </a:p>
+                  </a:txBody>
+                  <a:tcPr marL="91440" marR="91440" marT="45720" marB="45720" anchor="ctr">
+                    <a:lnL w="6350" cap="flat" cmpd="sng" algn="ctr">
+                      <a:solidFill>
+                        <a:srgbClr val="E2E5E9"/>
+                      </a:solidFill>
+                      <a:prstDash val="solid"/>
+                      <a:round/>
+                      <a:headEnd type="none" w="med" len="med"/>
+                      <a:tailEnd type="none" w="med" len="med"/>
+                    </a:lnL>
+                    <a:lnR w="6350" cap="flat" cmpd="sng" algn="ctr">
+                      <a:solidFill>
+                        <a:srgbClr val="E2E5E9"/>
+                      </a:solidFill>
+                      <a:prstDash val="solid"/>
+                      <a:round/>
+                      <a:headEnd type="none" w="med" len="med"/>
+                      <a:tailEnd type="none" w="med" len="med"/>
+                    </a:lnR>
+                    <a:lnT w="6350" cap="flat" cmpd="sng" algn="ctr">
+                      <a:solidFill>
+                        <a:srgbClr val="E2E5E9"/>
+                      </a:solidFill>
+                      <a:prstDash val="solid"/>
+                      <a:round/>
+                      <a:headEnd type="none" w="med" len="med"/>
+                      <a:tailEnd type="none" w="med" len="med"/>
+                    </a:lnT>
+                    <a:lnB w="6350" cap="flat" cmpd="sng" algn="ctr">
+                      <a:solidFill>
+                        <a:srgbClr val="E2E5E9"/>
+                      </a:solidFill>
+                      <a:prstDash val="solid"/>
+                      <a:round/>
+                      <a:headEnd type="none" w="med" len="med"/>
+                      <a:tailEnd type="none" w="med" len="med"/>
+                    </a:lnB>
+                  </a:tcPr>
+                </a:tc>
+              </a:tr>
+              <a:tr h="205740">
+                <a:tc>
+                  <a:txBody>
+                    <a:bodyPr/>
+                    <a:lstStyle/>
+                    <a:p>
+                      <a:pPr indent="0" marL="0">
+                        <a:buNone/>
+                      </a:pPr>
+                      <a:r>
+                        <a:rPr lang="en-US" sz="1050" dirty="0">
+                          <a:solidFill>
+                            <a:srgbClr val="1A1A1A"/>
+                          </a:solidFill>
+                          <a:latin typeface="Microsoft YaHei" pitchFamily="34" charset="0"/>
+                          <a:ea typeface="Microsoft YaHei" pitchFamily="34" charset="-122"/>
+                          <a:cs typeface="Microsoft YaHei" pitchFamily="34" charset="-120"/>
+                        </a:rPr>
+                        <a:t>人 · 胰</a:t>
+                      </a:r>
+                      <a:endParaRPr lang="en-US" sz="1050" dirty="0">
+                        <a:latin typeface="Microsoft YaHei" charset="0"/>
+                        <a:ea typeface="Microsoft YaHei" charset="0"/>
+                        <a:cs typeface="Microsoft YaHei" charset="0"/>
+                      </a:endParaRPr>
+                    </a:p>
+                  </a:txBody>
+                  <a:tcPr marL="91440" marR="91440" marT="45720" marB="45720" anchor="ctr">
+                    <a:lnL w="6350" cap="flat" cmpd="sng" algn="ctr">
+                      <a:solidFill>
+                        <a:srgbClr val="E2E5E9"/>
+                      </a:solidFill>
+                      <a:prstDash val="solid"/>
+                      <a:round/>
+                      <a:headEnd type="none" w="med" len="med"/>
+                      <a:tailEnd type="none" w="med" len="med"/>
+                    </a:lnL>
+                    <a:lnR w="6350" cap="flat" cmpd="sng" algn="ctr">
+                      <a:solidFill>
+                        <a:srgbClr val="E2E5E9"/>
+                      </a:solidFill>
+                      <a:prstDash val="solid"/>
+                      <a:round/>
+                      <a:headEnd type="none" w="med" len="med"/>
+                      <a:tailEnd type="none" w="med" len="med"/>
+                    </a:lnR>
+                    <a:lnT w="6350" cap="flat" cmpd="sng" algn="ctr">
+                      <a:solidFill>
+                        <a:srgbClr val="E2E5E9"/>
+                      </a:solidFill>
+                      <a:prstDash val="solid"/>
+                      <a:round/>
+                      <a:headEnd type="none" w="med" len="med"/>
+                      <a:tailEnd type="none" w="med" len="med"/>
+                    </a:lnT>
+                    <a:lnB w="6350" cap="flat" cmpd="sng" algn="ctr">
+                      <a:solidFill>
+                        <a:srgbClr val="E2E5E9"/>
+                      </a:solidFill>
+                      <a:prstDash val="solid"/>
+                      <a:round/>
+                      <a:headEnd type="none" w="med" len="med"/>
+                      <a:tailEnd type="none" w="med" len="med"/>
+                    </a:lnB>
+                  </a:tcPr>
+                </a:tc>
+                <a:tc>
+                  <a:txBody>
+                    <a:bodyPr/>
+                    <a:lstStyle/>
+                    <a:p>
+                      <a:pPr indent="0" marL="0">
+                        <a:buNone/>
+                      </a:pPr>
+                      <a:r>
+                        <a:rPr lang="en-US" sz="1050" dirty="0">
+                          <a:solidFill>
+                            <a:srgbClr val="1A1A1A"/>
+                          </a:solidFill>
+                          <a:latin typeface="Microsoft YaHei" pitchFamily="34" charset="0"/>
+                          <a:ea typeface="Microsoft YaHei" pitchFamily="34" charset="-122"/>
+                          <a:cs typeface="Microsoft YaHei" pitchFamily="34" charset="-120"/>
+                        </a:rPr>
+                        <a:t>胰腺腺泡细胞 ×2</a:t>
+                      </a:r>
+                      <a:endParaRPr lang="en-US" sz="1050" dirty="0">
+                        <a:latin typeface="Microsoft YaHei" charset="0"/>
+                        <a:ea typeface="Microsoft YaHei" charset="0"/>
+                        <a:cs typeface="Microsoft YaHei" charset="0"/>
+                      </a:endParaRPr>
+                    </a:p>
+                  </a:txBody>
+                  <a:tcPr marL="91440" marR="91440" marT="45720" marB="45720" anchor="ctr">
+                    <a:lnL w="6350" cap="flat" cmpd="sng" algn="ctr">
+                      <a:solidFill>
+                        <a:srgbClr val="E2E5E9"/>
+                      </a:solidFill>
+                      <a:prstDash val="solid"/>
+                      <a:round/>
+                      <a:headEnd type="none" w="med" len="med"/>
+                      <a:tailEnd type="none" w="med" len="med"/>
+                    </a:lnL>
+                    <a:lnR w="6350" cap="flat" cmpd="sng" algn="ctr">
+                      <a:solidFill>
+                        <a:srgbClr val="E2E5E9"/>
+                      </a:solidFill>
+                      <a:prstDash val="solid"/>
+                      <a:round/>
+                      <a:headEnd type="none" w="med" len="med"/>
+                      <a:tailEnd type="none" w="med" len="med"/>
+                    </a:lnR>
+                    <a:lnT w="6350" cap="flat" cmpd="sng" algn="ctr">
+                      <a:solidFill>
+                        <a:srgbClr val="E2E5E9"/>
+                      </a:solidFill>
+                      <a:prstDash val="solid"/>
+                      <a:round/>
+                      <a:headEnd type="none" w="med" len="med"/>
+                      <a:tailEnd type="none" w="med" len="med"/>
+                    </a:lnT>
+                    <a:lnB w="6350" cap="flat" cmpd="sng" algn="ctr">
+                      <a:solidFill>
+                        <a:srgbClr val="E2E5E9"/>
+                      </a:solidFill>
+                      <a:prstDash val="solid"/>
+                      <a:round/>
+                      <a:headEnd type="none" w="med" len="med"/>
+                      <a:tailEnd type="none" w="med" len="med"/>
+                    </a:lnB>
+                  </a:tcPr>
+                </a:tc>
+                <a:tc>
+                  <a:txBody>
+                    <a:bodyPr/>
+                    <a:lstStyle/>
+                    <a:p>
+                      <a:pPr indent="0" marL="0">
+                        <a:buNone/>
+                      </a:pPr>
+                      <a:r>
+                        <a:rPr lang="en-US" sz="1050" dirty="0">
+                          <a:solidFill>
+                            <a:srgbClr val="1A1A1A"/>
+                          </a:solidFill>
+                          <a:latin typeface="Microsoft YaHei" pitchFamily="34" charset="0"/>
+                          <a:ea typeface="Microsoft YaHei" pitchFamily="34" charset="-122"/>
+                          <a:cs typeface="Microsoft YaHei" pitchFamily="34" charset="-120"/>
+                        </a:rPr>
+                        <a:t>10.8%　1486/13747</a:t>
+                      </a:r>
+                      <a:endParaRPr lang="en-US" sz="1050" dirty="0">
+                        <a:latin typeface="Microsoft YaHei" charset="0"/>
+                        <a:ea typeface="Microsoft YaHei" charset="0"/>
+                        <a:cs typeface="Microsoft YaHei" charset="0"/>
+                      </a:endParaRPr>
+                    </a:p>
+                  </a:txBody>
+                  <a:tcPr marL="91440" marR="91440" marT="45720" marB="45720" anchor="ctr">
+                    <a:lnL w="6350" cap="flat" cmpd="sng" algn="ctr">
+                      <a:solidFill>
+                        <a:srgbClr val="E2E5E9"/>
+                      </a:solidFill>
+                      <a:prstDash val="solid"/>
+                      <a:round/>
+                      <a:headEnd type="none" w="med" len="med"/>
+                      <a:tailEnd type="none" w="med" len="med"/>
+                    </a:lnL>
+                    <a:lnR w="6350" cap="flat" cmpd="sng" algn="ctr">
+                      <a:solidFill>
+                        <a:srgbClr val="E2E5E9"/>
+                      </a:solidFill>
+                      <a:prstDash val="solid"/>
+                      <a:round/>
+                      <a:headEnd type="none" w="med" len="med"/>
+                      <a:tailEnd type="none" w="med" len="med"/>
+                    </a:lnR>
+                    <a:lnT w="6350" cap="flat" cmpd="sng" algn="ctr">
+                      <a:solidFill>
+                        <a:srgbClr val="E2E5E9"/>
+                      </a:solidFill>
+                      <a:prstDash val="solid"/>
+                      <a:round/>
+                      <a:headEnd type="none" w="med" len="med"/>
+                      <a:tailEnd type="none" w="med" len="med"/>
+                    </a:lnT>
+                    <a:lnB w="6350" cap="flat" cmpd="sng" algn="ctr">
+                      <a:solidFill>
+                        <a:srgbClr val="E2E5E9"/>
+                      </a:solidFill>
+                      <a:prstDash val="solid"/>
+                      <a:round/>
+                      <a:headEnd type="none" w="med" len="med"/>
+                      <a:tailEnd type="none" w="med" len="med"/>
+                    </a:lnB>
+                  </a:tcPr>
+                </a:tc>
+                <a:tc>
+                  <a:txBody>
+                    <a:bodyPr/>
+                    <a:lstStyle/>
+                    <a:p>
+                      <a:pPr indent="0" marL="0">
+                        <a:buNone/>
+                      </a:pPr>
+                      <a:r>
+                        <a:rPr lang="en-US" sz="1050" dirty="0">
+                          <a:solidFill>
+                            <a:srgbClr val="1A1A1A"/>
+                          </a:solidFill>
+                          <a:latin typeface="Microsoft YaHei" pitchFamily="34" charset="0"/>
+                          <a:ea typeface="Microsoft YaHei" pitchFamily="34" charset="-122"/>
+                          <a:cs typeface="Microsoft YaHei" pitchFamily="34" charset="-120"/>
+                        </a:rPr>
+                        <a:t>0.25%　34/13747</a:t>
+                      </a:r>
+                      <a:endParaRPr lang="en-US" sz="1050" dirty="0">
+                        <a:latin typeface="Microsoft YaHei" charset="0"/>
+                        <a:ea typeface="Microsoft YaHei" charset="0"/>
+                        <a:cs typeface="Microsoft YaHei" charset="0"/>
+                      </a:endParaRPr>
+                    </a:p>
+                  </a:txBody>
+                  <a:tcPr marL="91440" marR="91440" marT="45720" marB="45720" anchor="ctr">
+                    <a:lnL w="6350" cap="flat" cmpd="sng" algn="ctr">
+                      <a:solidFill>
+                        <a:srgbClr val="E2E5E9"/>
+                      </a:solidFill>
+                      <a:prstDash val="solid"/>
+                      <a:round/>
+                      <a:headEnd type="none" w="med" len="med"/>
+                      <a:tailEnd type="none" w="med" len="med"/>
+                    </a:lnL>
+                    <a:lnR w="6350" cap="flat" cmpd="sng" algn="ctr">
+                      <a:solidFill>
+                        <a:srgbClr val="E2E5E9"/>
+                      </a:solidFill>
+                      <a:prstDash val="solid"/>
+                      <a:round/>
+                      <a:headEnd type="none" w="med" len="med"/>
+                      <a:tailEnd type="none" w="med" len="med"/>
+                    </a:lnR>
+                    <a:lnT w="6350" cap="flat" cmpd="sng" algn="ctr">
+                      <a:solidFill>
+                        <a:srgbClr val="E2E5E9"/>
+                      </a:solidFill>
+                      <a:prstDash val="solid"/>
+                      <a:round/>
+                      <a:headEnd type="none" w="med" len="med"/>
+                      <a:tailEnd type="none" w="med" len="med"/>
+                    </a:lnT>
+                    <a:lnB w="6350" cap="flat" cmpd="sng" algn="ctr">
+                      <a:solidFill>
+                        <a:srgbClr val="E2E5E9"/>
+                      </a:solidFill>
+                      <a:prstDash val="solid"/>
+                      <a:round/>
+                      <a:headEnd type="none" w="med" len="med"/>
+                      <a:tailEnd type="none" w="med" len="med"/>
+                    </a:lnB>
+                  </a:tcPr>
+                </a:tc>
+                <a:tc>
+                  <a:txBody>
+                    <a:bodyPr/>
+                    <a:lstStyle/>
+                    <a:p>
+                      <a:pPr indent="0" marL="0">
+                        <a:buNone/>
+                      </a:pPr>
+                      <a:r>
+                        <a:rPr lang="en-US" sz="1050" dirty="0">
+                          <a:solidFill>
+                            <a:srgbClr val="1A1A1A"/>
+                          </a:solidFill>
+                          <a:latin typeface="Microsoft YaHei" pitchFamily="34" charset="0"/>
+                          <a:ea typeface="Microsoft YaHei" pitchFamily="34" charset="-122"/>
+                          <a:cs typeface="Microsoft YaHei" pitchFamily="34" charset="-120"/>
+                        </a:rPr>
+                        <a:t>18</a:t>
+                      </a:r>
+                      <a:endParaRPr lang="en-US" sz="1050" dirty="0">
+                        <a:latin typeface="Microsoft YaHei" charset="0"/>
+                        <a:ea typeface="Microsoft YaHei" charset="0"/>
+                        <a:cs typeface="Microsoft YaHei" charset="0"/>
+                      </a:endParaRPr>
+                    </a:p>
+                  </a:txBody>
+                  <a:tcPr marL="91440" marR="91440" marT="45720" marB="45720" anchor="ctr">
+                    <a:lnL w="6350" cap="flat" cmpd="sng" algn="ctr">
+                      <a:solidFill>
+                        <a:srgbClr val="E2E5E9"/>
+                      </a:solidFill>
+                      <a:prstDash val="solid"/>
+                      <a:round/>
+                      <a:headEnd type="none" w="med" len="med"/>
+                      <a:tailEnd type="none" w="med" len="med"/>
+                    </a:lnL>
+                    <a:lnR w="6350" cap="flat" cmpd="sng" algn="ctr">
+                      <a:solidFill>
+                        <a:srgbClr val="E2E5E9"/>
+                      </a:solidFill>
+                      <a:prstDash val="solid"/>
+                      <a:round/>
+                      <a:headEnd type="none" w="med" len="med"/>
+                      <a:tailEnd type="none" w="med" len="med"/>
+                    </a:lnR>
+                    <a:lnT w="6350" cap="flat" cmpd="sng" algn="ctr">
+                      <a:solidFill>
+                        <a:srgbClr val="E2E5E9"/>
+                      </a:solidFill>
+                      <a:prstDash val="solid"/>
+                      <a:round/>
+                      <a:headEnd type="none" w="med" len="med"/>
+                      <a:tailEnd type="none" w="med" len="med"/>
+                    </a:lnT>
+                    <a:lnB w="6350" cap="flat" cmpd="sng" algn="ctr">
+                      <a:solidFill>
+                        <a:srgbClr val="E2E5E9"/>
+                      </a:solidFill>
+                      <a:prstDash val="solid"/>
+                      <a:round/>
+                      <a:headEnd type="none" w="med" len="med"/>
+                      <a:tailEnd type="none" w="med" len="med"/>
+                    </a:lnB>
+                  </a:tcPr>
+                </a:tc>
+                <a:tc>
+                  <a:txBody>
+                    <a:bodyPr/>
+                    <a:lstStyle/>
+                    <a:p>
+                      <a:pPr indent="0" marL="0">
+                        <a:buNone/>
+                      </a:pPr>
+                      <a:r>
+                        <a:rPr lang="en-US" sz="1050" dirty="0">
+                          <a:solidFill>
+                            <a:srgbClr val="1A1A1A"/>
+                          </a:solidFill>
+                          <a:latin typeface="Microsoft YaHei" pitchFamily="34" charset="0"/>
+                          <a:ea typeface="Microsoft YaHei" pitchFamily="34" charset="-122"/>
+                          <a:cs typeface="Microsoft YaHei" pitchFamily="34" charset="-120"/>
+                        </a:rPr>
+                        <a:t>1</a:t>
+                      </a:r>
+                      <a:endParaRPr lang="en-US" sz="1050" dirty="0">
+                        <a:latin typeface="Microsoft YaHei" charset="0"/>
+                        <a:ea typeface="Microsoft YaHei" charset="0"/>
+                        <a:cs typeface="Microsoft YaHei" charset="0"/>
+                      </a:endParaRPr>
+                    </a:p>
+                  </a:txBody>
+                  <a:tcPr marL="91440" marR="91440" marT="45720" marB="45720" anchor="ctr">
+                    <a:lnL w="6350" cap="flat" cmpd="sng" algn="ctr">
+                      <a:solidFill>
+                        <a:srgbClr val="E2E5E9"/>
+                      </a:solidFill>
+                      <a:prstDash val="solid"/>
+                      <a:round/>
+                      <a:headEnd type="none" w="med" len="med"/>
+                      <a:tailEnd type="none" w="med" len="med"/>
+                    </a:lnL>
+                    <a:lnR w="6350" cap="flat" cmpd="sng" algn="ctr">
+                      <a:solidFill>
+                        <a:srgbClr val="E2E5E9"/>
+                      </a:solidFill>
+                      <a:prstDash val="solid"/>
+                      <a:round/>
+                      <a:headEnd type="none" w="med" len="med"/>
+                      <a:tailEnd type="none" w="med" len="med"/>
+                    </a:lnR>
+                    <a:lnT w="6350" cap="flat" cmpd="sng" algn="ctr">
+                      <a:solidFill>
+                        <a:srgbClr val="E2E5E9"/>
+                      </a:solidFill>
+                      <a:prstDash val="solid"/>
+                      <a:round/>
+                      <a:headEnd type="none" w="med" len="med"/>
+                      <a:tailEnd type="none" w="med" len="med"/>
+                    </a:lnT>
+                    <a:lnB w="6350" cap="flat" cmpd="sng" algn="ctr">
+                      <a:solidFill>
+                        <a:srgbClr val="E2E5E9"/>
+                      </a:solidFill>
+                      <a:prstDash val="solid"/>
+                      <a:round/>
+                      <a:headEnd type="none" w="med" len="med"/>
+                      <a:tailEnd type="none" w="med" len="med"/>
+                    </a:lnB>
+                  </a:tcPr>
+                </a:tc>
+                <a:tc>
+                  <a:txBody>
+                    <a:bodyPr/>
+                    <a:lstStyle/>
+                    <a:p>
+                      <a:pPr indent="0" marL="0">
+                        <a:buNone/>
+                      </a:pPr>
+                      <a:r>
+                        <a:rPr lang="en-US" sz="1050" dirty="0">
+                          <a:solidFill>
+                            <a:srgbClr val="1A1A1A"/>
+                          </a:solidFill>
+                          <a:latin typeface="Microsoft YaHei" pitchFamily="34" charset="0"/>
+                          <a:ea typeface="Microsoft YaHei" pitchFamily="34" charset="-122"/>
+                          <a:cs typeface="Microsoft YaHei" pitchFamily="34" charset="-120"/>
+                        </a:rPr>
+                        <a:t>—</a:t>
+                      </a:r>
+                      <a:endParaRPr lang="en-US" sz="1050" dirty="0">
+                        <a:latin typeface="Microsoft YaHei" charset="0"/>
+                        <a:ea typeface="Microsoft YaHei" charset="0"/>
+                        <a:cs typeface="Microsoft YaHei" charset="0"/>
+                      </a:endParaRPr>
+                    </a:p>
+                  </a:txBody>
+                  <a:tcPr marL="91440" marR="91440" marT="45720" marB="45720" anchor="ctr">
+                    <a:lnL w="6350" cap="flat" cmpd="sng" algn="ctr">
+                      <a:solidFill>
+                        <a:srgbClr val="E2E5E9"/>
+                      </a:solidFill>
+                      <a:prstDash val="solid"/>
+                      <a:round/>
+                      <a:headEnd type="none" w="med" len="med"/>
+                      <a:tailEnd type="none" w="med" len="med"/>
+                    </a:lnL>
+                    <a:lnR w="6350" cap="flat" cmpd="sng" algn="ctr">
+                      <a:solidFill>
+                        <a:srgbClr val="E2E5E9"/>
+                      </a:solidFill>
+                      <a:prstDash val="solid"/>
+                      <a:round/>
+                      <a:headEnd type="none" w="med" len="med"/>
+                      <a:tailEnd type="none" w="med" len="med"/>
+                    </a:lnR>
+                    <a:lnT w="6350" cap="flat" cmpd="sng" algn="ctr">
+                      <a:solidFill>
+                        <a:srgbClr val="E2E5E9"/>
+                      </a:solidFill>
+                      <a:prstDash val="solid"/>
+                      <a:round/>
+                      <a:headEnd type="none" w="med" len="med"/>
+                      <a:tailEnd type="none" w="med" len="med"/>
+                    </a:lnT>
+                    <a:lnB w="6350" cap="flat" cmpd="sng" algn="ctr">
+                      <a:solidFill>
+                        <a:srgbClr val="E2E5E9"/>
+                      </a:solidFill>
+                      <a:prstDash val="solid"/>
+                      <a:round/>
+                      <a:headEnd type="none" w="med" len="med"/>
+                      <a:tailEnd type="none" w="med" len="med"/>
+                    </a:lnB>
+                  </a:tcPr>
+                </a:tc>
+              </a:tr>
+              <a:tr h="205740">
+                <a:tc>
+                  <a:txBody>
+                    <a:bodyPr/>
+                    <a:lstStyle/>
+                    <a:p>
+                      <a:pPr indent="0" marL="0">
+                        <a:buNone/>
+                      </a:pPr>
+                      <a:r>
+                        <a:rPr lang="en-US" sz="1050" dirty="0">
+                          <a:solidFill>
+                            <a:srgbClr val="1A1A1A"/>
+                          </a:solidFill>
+                          <a:latin typeface="Microsoft YaHei" pitchFamily="34" charset="0"/>
+                          <a:ea typeface="Microsoft YaHei" pitchFamily="34" charset="-122"/>
+                          <a:cs typeface="Microsoft YaHei" pitchFamily="34" charset="-120"/>
+                        </a:rPr>
+                        <a:t>人 · 脑</a:t>
+                      </a:r>
+                      <a:endParaRPr lang="en-US" sz="1050" dirty="0">
+                        <a:latin typeface="Microsoft YaHei" charset="0"/>
+                        <a:ea typeface="Microsoft YaHei" charset="0"/>
+                        <a:cs typeface="Microsoft YaHei" charset="0"/>
+                      </a:endParaRPr>
+                    </a:p>
+                  </a:txBody>
+                  <a:tcPr marL="91440" marR="91440" marT="45720" marB="45720" anchor="ctr">
+                    <a:lnL w="6350" cap="flat" cmpd="sng" algn="ctr">
+                      <a:solidFill>
+                        <a:srgbClr val="E2E5E9"/>
+                      </a:solidFill>
+                      <a:prstDash val="solid"/>
+                      <a:round/>
+                      <a:headEnd type="none" w="med" len="med"/>
+                      <a:tailEnd type="none" w="med" len="med"/>
+                    </a:lnL>
+                    <a:lnR w="6350" cap="flat" cmpd="sng" algn="ctr">
+                      <a:solidFill>
+                        <a:srgbClr val="E2E5E9"/>
+                      </a:solidFill>
+                      <a:prstDash val="solid"/>
+                      <a:round/>
+                      <a:headEnd type="none" w="med" len="med"/>
+                      <a:tailEnd type="none" w="med" len="med"/>
+                    </a:lnR>
+                    <a:lnT w="6350" cap="flat" cmpd="sng" algn="ctr">
+                      <a:solidFill>
+                        <a:srgbClr val="E2E5E9"/>
+                      </a:solidFill>
+                      <a:prstDash val="solid"/>
+                      <a:round/>
+                      <a:headEnd type="none" w="med" len="med"/>
+                      <a:tailEnd type="none" w="med" len="med"/>
+                    </a:lnT>
+                    <a:lnB w="6350" cap="flat" cmpd="sng" algn="ctr">
+                      <a:solidFill>
+                        <a:srgbClr val="E2E5E9"/>
+                      </a:solidFill>
+                      <a:prstDash val="solid"/>
+                      <a:round/>
+                      <a:headEnd type="none" w="med" len="med"/>
+                      <a:tailEnd type="none" w="med" len="med"/>
+                    </a:lnB>
+                  </a:tcPr>
+                </a:tc>
+                <a:tc>
+                  <a:txBody>
+                    <a:bodyPr/>
+                    <a:lstStyle/>
+                    <a:p>
+                      <a:pPr indent="0" marL="0">
+                        <a:buNone/>
+                      </a:pPr>
+                      <a:r>
+                        <a:rPr lang="en-US" sz="1050" dirty="0">
+                          <a:solidFill>
+                            <a:srgbClr val="1A1A1A"/>
+                          </a:solidFill>
+                          <a:latin typeface="Microsoft YaHei" pitchFamily="34" charset="0"/>
+                          <a:ea typeface="Microsoft YaHei" pitchFamily="34" charset="-122"/>
+                          <a:cs typeface="Microsoft YaHei" pitchFamily="34" charset="-120"/>
+                        </a:rPr>
+                        <a:t>血管软脑膜细胞</a:t>
+                      </a:r>
+                      <a:endParaRPr lang="en-US" sz="1050" dirty="0">
+                        <a:latin typeface="Microsoft YaHei" charset="0"/>
+                        <a:ea typeface="Microsoft YaHei" charset="0"/>
+                        <a:cs typeface="Microsoft YaHei" charset="0"/>
+                      </a:endParaRPr>
+                    </a:p>
+                  </a:txBody>
+                  <a:tcPr marL="91440" marR="91440" marT="45720" marB="45720" anchor="ctr">
+                    <a:lnL w="6350" cap="flat" cmpd="sng" algn="ctr">
+                      <a:solidFill>
+                        <a:srgbClr val="E2E5E9"/>
+                      </a:solidFill>
+                      <a:prstDash val="solid"/>
+                      <a:round/>
+                      <a:headEnd type="none" w="med" len="med"/>
+                      <a:tailEnd type="none" w="med" len="med"/>
+                    </a:lnL>
+                    <a:lnR w="6350" cap="flat" cmpd="sng" algn="ctr">
+                      <a:solidFill>
+                        <a:srgbClr val="E2E5E9"/>
+                      </a:solidFill>
+                      <a:prstDash val="solid"/>
+                      <a:round/>
+                      <a:headEnd type="none" w="med" len="med"/>
+                      <a:tailEnd type="none" w="med" len="med"/>
+                    </a:lnR>
+                    <a:lnT w="6350" cap="flat" cmpd="sng" algn="ctr">
+                      <a:solidFill>
+                        <a:srgbClr val="E2E5E9"/>
+                      </a:solidFill>
+                      <a:prstDash val="solid"/>
+                      <a:round/>
+                      <a:headEnd type="none" w="med" len="med"/>
+                      <a:tailEnd type="none" w="med" len="med"/>
+                    </a:lnT>
+                    <a:lnB w="6350" cap="flat" cmpd="sng" algn="ctr">
+                      <a:solidFill>
+                        <a:srgbClr val="E2E5E9"/>
+                      </a:solidFill>
+                      <a:prstDash val="solid"/>
+                      <a:round/>
+                      <a:headEnd type="none" w="med" len="med"/>
+                      <a:tailEnd type="none" w="med" len="med"/>
+                    </a:lnB>
+                  </a:tcPr>
+                </a:tc>
+                <a:tc>
+                  <a:txBody>
+                    <a:bodyPr/>
+                    <a:lstStyle/>
+                    <a:p>
+                      <a:pPr indent="0" marL="0">
+                        <a:buNone/>
+                      </a:pPr>
+                      <a:r>
+                        <a:rPr lang="en-US" sz="1050" dirty="0">
+                          <a:solidFill>
+                            <a:srgbClr val="1A1A1A"/>
+                          </a:solidFill>
+                          <a:latin typeface="Microsoft YaHei" pitchFamily="34" charset="0"/>
+                          <a:ea typeface="Microsoft YaHei" pitchFamily="34" charset="-122"/>
+                          <a:cs typeface="Microsoft YaHei" pitchFamily="34" charset="-120"/>
+                        </a:rPr>
+                        <a:t>32.9%　1097/3330</a:t>
+                      </a:r>
+                      <a:endParaRPr lang="en-US" sz="1050" dirty="0">
+                        <a:latin typeface="Microsoft YaHei" charset="0"/>
+                        <a:ea typeface="Microsoft YaHei" charset="0"/>
+                        <a:cs typeface="Microsoft YaHei" charset="0"/>
+                      </a:endParaRPr>
+                    </a:p>
+                  </a:txBody>
+                  <a:tcPr marL="91440" marR="91440" marT="45720" marB="45720" anchor="ctr">
+                    <a:lnL w="6350" cap="flat" cmpd="sng" algn="ctr">
+                      <a:solidFill>
+                        <a:srgbClr val="E2E5E9"/>
+                      </a:solidFill>
+                      <a:prstDash val="solid"/>
+                      <a:round/>
+                      <a:headEnd type="none" w="med" len="med"/>
+                      <a:tailEnd type="none" w="med" len="med"/>
+                    </a:lnL>
+                    <a:lnR w="6350" cap="flat" cmpd="sng" algn="ctr">
+                      <a:solidFill>
+                        <a:srgbClr val="E2E5E9"/>
+                      </a:solidFill>
+                      <a:prstDash val="solid"/>
+                      <a:round/>
+                      <a:headEnd type="none" w="med" len="med"/>
+                      <a:tailEnd type="none" w="med" len="med"/>
+                    </a:lnR>
+                    <a:lnT w="6350" cap="flat" cmpd="sng" algn="ctr">
+                      <a:solidFill>
+                        <a:srgbClr val="E2E5E9"/>
+                      </a:solidFill>
+                      <a:prstDash val="solid"/>
+                      <a:round/>
+                      <a:headEnd type="none" w="med" len="med"/>
+                      <a:tailEnd type="none" w="med" len="med"/>
+                    </a:lnT>
+                    <a:lnB w="6350" cap="flat" cmpd="sng" algn="ctr">
+                      <a:solidFill>
+                        <a:srgbClr val="E2E5E9"/>
+                      </a:solidFill>
+                      <a:prstDash val="solid"/>
+                      <a:round/>
+                      <a:headEnd type="none" w="med" len="med"/>
+                      <a:tailEnd type="none" w="med" len="med"/>
+                    </a:lnB>
+                  </a:tcPr>
+                </a:tc>
+                <a:tc>
+                  <a:txBody>
+                    <a:bodyPr/>
+                    <a:lstStyle/>
+                    <a:p>
+                      <a:pPr indent="0" marL="0">
+                        <a:buNone/>
+                      </a:pPr>
+                      <a:r>
+                        <a:rPr lang="en-US" sz="1050" dirty="0">
+                          <a:solidFill>
+                            <a:srgbClr val="1A1A1A"/>
+                          </a:solidFill>
+                          <a:latin typeface="Microsoft YaHei" pitchFamily="34" charset="0"/>
+                          <a:ea typeface="Microsoft YaHei" pitchFamily="34" charset="-122"/>
+                          <a:cs typeface="Microsoft YaHei" pitchFamily="34" charset="-120"/>
+                        </a:rPr>
+                        <a:t>0.75%　25/3330</a:t>
+                      </a:r>
+                      <a:endParaRPr lang="en-US" sz="1050" dirty="0">
+                        <a:latin typeface="Microsoft YaHei" charset="0"/>
+                        <a:ea typeface="Microsoft YaHei" charset="0"/>
+                        <a:cs typeface="Microsoft YaHei" charset="0"/>
+                      </a:endParaRPr>
+                    </a:p>
+                  </a:txBody>
+                  <a:tcPr marL="91440" marR="91440" marT="45720" marB="45720" anchor="ctr">
+                    <a:lnL w="6350" cap="flat" cmpd="sng" algn="ctr">
+                      <a:solidFill>
+                        <a:srgbClr val="E2E5E9"/>
+                      </a:solidFill>
+                      <a:prstDash val="solid"/>
+                      <a:round/>
+                      <a:headEnd type="none" w="med" len="med"/>
+                      <a:tailEnd type="none" w="med" len="med"/>
+                    </a:lnL>
+                    <a:lnR w="6350" cap="flat" cmpd="sng" algn="ctr">
+                      <a:solidFill>
+                        <a:srgbClr val="E2E5E9"/>
+                      </a:solidFill>
+                      <a:prstDash val="solid"/>
+                      <a:round/>
+                      <a:headEnd type="none" w="med" len="med"/>
+                      <a:tailEnd type="none" w="med" len="med"/>
+                    </a:lnR>
+                    <a:lnT w="6350" cap="flat" cmpd="sng" algn="ctr">
+                      <a:solidFill>
+                        <a:srgbClr val="E2E5E9"/>
+                      </a:solidFill>
+                      <a:prstDash val="solid"/>
+                      <a:round/>
+                      <a:headEnd type="none" w="med" len="med"/>
+                      <a:tailEnd type="none" w="med" len="med"/>
+                    </a:lnT>
+                    <a:lnB w="6350" cap="flat" cmpd="sng" algn="ctr">
+                      <a:solidFill>
+                        <a:srgbClr val="E2E5E9"/>
+                      </a:solidFill>
+                      <a:prstDash val="solid"/>
+                      <a:round/>
+                      <a:headEnd type="none" w="med" len="med"/>
+                      <a:tailEnd type="none" w="med" len="med"/>
+                    </a:lnB>
+                  </a:tcPr>
+                </a:tc>
+                <a:tc>
+                  <a:txBody>
+                    <a:bodyPr/>
+                    <a:lstStyle/>
+                    <a:p>
+                      <a:pPr indent="0" marL="0">
+                        <a:buNone/>
+                      </a:pPr>
+                      <a:r>
+                        <a:rPr lang="en-US" sz="1050" dirty="0">
+                          <a:solidFill>
+                            <a:srgbClr val="1A1A1A"/>
+                          </a:solidFill>
+                          <a:latin typeface="Microsoft YaHei" pitchFamily="34" charset="0"/>
+                          <a:ea typeface="Microsoft YaHei" pitchFamily="34" charset="-122"/>
+                          <a:cs typeface="Microsoft YaHei" pitchFamily="34" charset="-120"/>
+                        </a:rPr>
+                        <a:t>52</a:t>
+                      </a:r>
+                      <a:endParaRPr lang="en-US" sz="1050" dirty="0">
+                        <a:latin typeface="Microsoft YaHei" charset="0"/>
+                        <a:ea typeface="Microsoft YaHei" charset="0"/>
+                        <a:cs typeface="Microsoft YaHei" charset="0"/>
+                      </a:endParaRPr>
+                    </a:p>
+                  </a:txBody>
+                  <a:tcPr marL="91440" marR="91440" marT="45720" marB="45720" anchor="ctr">
+                    <a:lnL w="6350" cap="flat" cmpd="sng" algn="ctr">
+                      <a:solidFill>
+                        <a:srgbClr val="E2E5E9"/>
+                      </a:solidFill>
+                      <a:prstDash val="solid"/>
+                      <a:round/>
+                      <a:headEnd type="none" w="med" len="med"/>
+                      <a:tailEnd type="none" w="med" len="med"/>
+                    </a:lnL>
+                    <a:lnR w="6350" cap="flat" cmpd="sng" algn="ctr">
+                      <a:solidFill>
+                        <a:srgbClr val="E2E5E9"/>
+                      </a:solidFill>
+                      <a:prstDash val="solid"/>
+                      <a:round/>
+                      <a:headEnd type="none" w="med" len="med"/>
+                      <a:tailEnd type="none" w="med" len="med"/>
+                    </a:lnR>
+                    <a:lnT w="6350" cap="flat" cmpd="sng" algn="ctr">
+                      <a:solidFill>
+                        <a:srgbClr val="E2E5E9"/>
+                      </a:solidFill>
+                      <a:prstDash val="solid"/>
+                      <a:round/>
+                      <a:headEnd type="none" w="med" len="med"/>
+                      <a:tailEnd type="none" w="med" len="med"/>
+                    </a:lnT>
+                    <a:lnB w="6350" cap="flat" cmpd="sng" algn="ctr">
+                      <a:solidFill>
+                        <a:srgbClr val="E2E5E9"/>
+                      </a:solidFill>
+                      <a:prstDash val="solid"/>
+                      <a:round/>
+                      <a:headEnd type="none" w="med" len="med"/>
+                      <a:tailEnd type="none" w="med" len="med"/>
+                    </a:lnB>
+                  </a:tcPr>
+                </a:tc>
+                <a:tc>
+                  <a:txBody>
+                    <a:bodyPr/>
+                    <a:lstStyle/>
+                    <a:p>
+                      <a:pPr indent="0" marL="0">
+                        <a:buNone/>
+                      </a:pPr>
+                      <a:r>
+                        <a:rPr lang="en-US" sz="1050" dirty="0">
+                          <a:solidFill>
+                            <a:srgbClr val="1A1A1A"/>
+                          </a:solidFill>
+                          <a:latin typeface="Microsoft YaHei" pitchFamily="34" charset="0"/>
+                          <a:ea typeface="Microsoft YaHei" pitchFamily="34" charset="-122"/>
+                          <a:cs typeface="Microsoft YaHei" pitchFamily="34" charset="-120"/>
+                        </a:rPr>
+                        <a:t>—</a:t>
+                      </a:r>
+                      <a:endParaRPr lang="en-US" sz="1050" dirty="0">
+                        <a:latin typeface="Microsoft YaHei" charset="0"/>
+                        <a:ea typeface="Microsoft YaHei" charset="0"/>
+                        <a:cs typeface="Microsoft YaHei" charset="0"/>
+                      </a:endParaRPr>
+                    </a:p>
+                  </a:txBody>
+                  <a:tcPr marL="91440" marR="91440" marT="45720" marB="45720" anchor="ctr">
+                    <a:lnL w="6350" cap="flat" cmpd="sng" algn="ctr">
+                      <a:solidFill>
+                        <a:srgbClr val="E2E5E9"/>
+                      </a:solidFill>
+                      <a:prstDash val="solid"/>
+                      <a:round/>
+                      <a:headEnd type="none" w="med" len="med"/>
+                      <a:tailEnd type="none" w="med" len="med"/>
+                    </a:lnL>
+                    <a:lnR w="6350" cap="flat" cmpd="sng" algn="ctr">
+                      <a:solidFill>
+                        <a:srgbClr val="E2E5E9"/>
+                      </a:solidFill>
+                      <a:prstDash val="solid"/>
+                      <a:round/>
+                      <a:headEnd type="none" w="med" len="med"/>
+                      <a:tailEnd type="none" w="med" len="med"/>
+                    </a:lnR>
+                    <a:lnT w="6350" cap="flat" cmpd="sng" algn="ctr">
+                      <a:solidFill>
+                        <a:srgbClr val="E2E5E9"/>
+                      </a:solidFill>
+                      <a:prstDash val="solid"/>
+                      <a:round/>
+                      <a:headEnd type="none" w="med" len="med"/>
+                      <a:tailEnd type="none" w="med" len="med"/>
+                    </a:lnT>
+                    <a:lnB w="6350" cap="flat" cmpd="sng" algn="ctr">
+                      <a:solidFill>
+                        <a:srgbClr val="E2E5E9"/>
+                      </a:solidFill>
+                      <a:prstDash val="solid"/>
+                      <a:round/>
+                      <a:headEnd type="none" w="med" len="med"/>
+                      <a:tailEnd type="none" w="med" len="med"/>
+                    </a:lnB>
+                  </a:tcPr>
+                </a:tc>
+                <a:tc>
+                  <a:txBody>
+                    <a:bodyPr/>
+                    <a:lstStyle/>
+                    <a:p>
+                      <a:pPr indent="0" marL="0">
+                        <a:buNone/>
+                      </a:pPr>
+                      <a:r>
+                        <a:rPr lang="en-US" sz="1050" dirty="0">
+                          <a:solidFill>
+                            <a:srgbClr val="1A1A1A"/>
+                          </a:solidFill>
+                          <a:latin typeface="Microsoft YaHei" pitchFamily="34" charset="0"/>
+                          <a:ea typeface="Microsoft YaHei" pitchFamily="34" charset="-122"/>
+                          <a:cs typeface="Microsoft YaHei" pitchFamily="34" charset="-120"/>
+                        </a:rPr>
+                        <a:t>—</a:t>
+                      </a:r>
+                      <a:endParaRPr lang="en-US" sz="1050" dirty="0">
+                        <a:latin typeface="Microsoft YaHei" charset="0"/>
+                        <a:ea typeface="Microsoft YaHei" charset="0"/>
+                        <a:cs typeface="Microsoft YaHei" charset="0"/>
+                      </a:endParaRPr>
+                    </a:p>
+                  </a:txBody>
+                  <a:tcPr marL="91440" marR="91440" marT="45720" marB="45720" anchor="ctr">
+                    <a:lnL w="6350" cap="flat" cmpd="sng" algn="ctr">
+                      <a:solidFill>
+                        <a:srgbClr val="E2E5E9"/>
+                      </a:solidFill>
+                      <a:prstDash val="solid"/>
+                      <a:round/>
+                      <a:headEnd type="none" w="med" len="med"/>
+                      <a:tailEnd type="none" w="med" len="med"/>
+                    </a:lnL>
+                    <a:lnR w="6350" cap="flat" cmpd="sng" algn="ctr">
+                      <a:solidFill>
+                        <a:srgbClr val="E2E5E9"/>
+                      </a:solidFill>
+                      <a:prstDash val="solid"/>
+                      <a:round/>
+                      <a:headEnd type="none" w="med" len="med"/>
+                      <a:tailEnd type="none" w="med" len="med"/>
+                    </a:lnR>
+                    <a:lnT w="6350" cap="flat" cmpd="sng" algn="ctr">
+                      <a:solidFill>
+                        <a:srgbClr val="E2E5E9"/>
+                      </a:solidFill>
+                      <a:prstDash val="solid"/>
+                      <a:round/>
+                      <a:headEnd type="none" w="med" len="med"/>
+                      <a:tailEnd type="none" w="med" len="med"/>
+                    </a:lnT>
+                    <a:lnB w="6350" cap="flat" cmpd="sng" algn="ctr">
+                      <a:solidFill>
+                        <a:srgbClr val="E2E5E9"/>
+                      </a:solidFill>
+                      <a:prstDash val="solid"/>
+                      <a:round/>
+                      <a:headEnd type="none" w="med" len="med"/>
+                      <a:tailEnd type="none" w="med" len="med"/>
+                    </a:lnB>
+                  </a:tcPr>
+                </a:tc>
+              </a:tr>
+              <a:tr h="205740">
+                <a:tc>
+                  <a:txBody>
+                    <a:bodyPr/>
+                    <a:lstStyle/>
+                    <a:p>
+                      <a:pPr indent="0" marL="0">
+                        <a:buNone/>
+                      </a:pPr>
+                      <a:r>
+                        <a:rPr lang="en-US" sz="1050" dirty="0">
+                          <a:solidFill>
+                            <a:srgbClr val="1A1A1A"/>
+                          </a:solidFill>
+                          <a:latin typeface="Microsoft YaHei" pitchFamily="34" charset="0"/>
+                          <a:ea typeface="Microsoft YaHei" pitchFamily="34" charset="-122"/>
+                          <a:cs typeface="Microsoft YaHei" pitchFamily="34" charset="-120"/>
+                        </a:rPr>
+                        <a:t>人 · 肝</a:t>
+                      </a:r>
+                      <a:endParaRPr lang="en-US" sz="1050" dirty="0">
+                        <a:latin typeface="Microsoft YaHei" charset="0"/>
+                        <a:ea typeface="Microsoft YaHei" charset="0"/>
+                        <a:cs typeface="Microsoft YaHei" charset="0"/>
+                      </a:endParaRPr>
+                    </a:p>
+                  </a:txBody>
+                  <a:tcPr marL="91440" marR="91440" marT="45720" marB="45720" anchor="ctr">
+                    <a:lnL w="6350" cap="flat" cmpd="sng" algn="ctr">
+                      <a:solidFill>
+                        <a:srgbClr val="E2E5E9"/>
+                      </a:solidFill>
+                      <a:prstDash val="solid"/>
+                      <a:round/>
+                      <a:headEnd type="none" w="med" len="med"/>
+                      <a:tailEnd type="none" w="med" len="med"/>
+                    </a:lnL>
+                    <a:lnR w="6350" cap="flat" cmpd="sng" algn="ctr">
+                      <a:solidFill>
+                        <a:srgbClr val="E2E5E9"/>
+                      </a:solidFill>
+                      <a:prstDash val="solid"/>
+                      <a:round/>
+                      <a:headEnd type="none" w="med" len="med"/>
+                      <a:tailEnd type="none" w="med" len="med"/>
+                    </a:lnR>
+                    <a:lnT w="6350" cap="flat" cmpd="sng" algn="ctr">
+                      <a:solidFill>
+                        <a:srgbClr val="E2E5E9"/>
+                      </a:solidFill>
+                      <a:prstDash val="solid"/>
+                      <a:round/>
+                      <a:headEnd type="none" w="med" len="med"/>
+                      <a:tailEnd type="none" w="med" len="med"/>
+                    </a:lnT>
+                    <a:lnB w="6350" cap="flat" cmpd="sng" algn="ctr">
+                      <a:solidFill>
+                        <a:srgbClr val="E2E5E9"/>
+                      </a:solidFill>
+                      <a:prstDash val="solid"/>
+                      <a:round/>
+                      <a:headEnd type="none" w="med" len="med"/>
+                      <a:tailEnd type="none" w="med" len="med"/>
+                    </a:lnB>
+                  </a:tcPr>
+                </a:tc>
+                <a:tc>
+                  <a:txBody>
+                    <a:bodyPr/>
+                    <a:lstStyle/>
+                    <a:p>
+                      <a:pPr indent="0" marL="0">
+                        <a:buNone/>
+                      </a:pPr>
+                      <a:r>
+                        <a:rPr lang="en-US" sz="1050" dirty="0">
+                          <a:solidFill>
+                            <a:srgbClr val="1A1A1A"/>
+                          </a:solidFill>
+                          <a:latin typeface="Microsoft YaHei" pitchFamily="34" charset="0"/>
+                          <a:ea typeface="Microsoft YaHei" pitchFamily="34" charset="-122"/>
+                          <a:cs typeface="Microsoft YaHei" pitchFamily="34" charset="-120"/>
+                        </a:rPr>
+                        <a:t>巨核红系祖细胞</a:t>
+                      </a:r>
+                      <a:endParaRPr lang="en-US" sz="1050" dirty="0">
+                        <a:latin typeface="Microsoft YaHei" charset="0"/>
+                        <a:ea typeface="Microsoft YaHei" charset="0"/>
+                        <a:cs typeface="Microsoft YaHei" charset="0"/>
+                      </a:endParaRPr>
+                    </a:p>
+                  </a:txBody>
+                  <a:tcPr marL="91440" marR="91440" marT="45720" marB="45720" anchor="ctr">
+                    <a:lnL w="6350" cap="flat" cmpd="sng" algn="ctr">
+                      <a:solidFill>
+                        <a:srgbClr val="E2E5E9"/>
+                      </a:solidFill>
+                      <a:prstDash val="solid"/>
+                      <a:round/>
+                      <a:headEnd type="none" w="med" len="med"/>
+                      <a:tailEnd type="none" w="med" len="med"/>
+                    </a:lnL>
+                    <a:lnR w="6350" cap="flat" cmpd="sng" algn="ctr">
+                      <a:solidFill>
+                        <a:srgbClr val="E2E5E9"/>
+                      </a:solidFill>
+                      <a:prstDash val="solid"/>
+                      <a:round/>
+                      <a:headEnd type="none" w="med" len="med"/>
+                      <a:tailEnd type="none" w="med" len="med"/>
+                    </a:lnR>
+                    <a:lnT w="6350" cap="flat" cmpd="sng" algn="ctr">
+                      <a:solidFill>
+                        <a:srgbClr val="E2E5E9"/>
+                      </a:solidFill>
+                      <a:prstDash val="solid"/>
+                      <a:round/>
+                      <a:headEnd type="none" w="med" len="med"/>
+                      <a:tailEnd type="none" w="med" len="med"/>
+                    </a:lnT>
+                    <a:lnB w="6350" cap="flat" cmpd="sng" algn="ctr">
+                      <a:solidFill>
+                        <a:srgbClr val="E2E5E9"/>
+                      </a:solidFill>
+                      <a:prstDash val="solid"/>
+                      <a:round/>
+                      <a:headEnd type="none" w="med" len="med"/>
+                      <a:tailEnd type="none" w="med" len="med"/>
+                    </a:lnB>
+                  </a:tcPr>
+                </a:tc>
+                <a:tc>
+                  <a:txBody>
+                    <a:bodyPr/>
+                    <a:lstStyle/>
+                    <a:p>
+                      <a:pPr indent="0" marL="0">
+                        <a:buNone/>
+                      </a:pPr>
+                      <a:r>
+                        <a:rPr lang="en-US" sz="1050" dirty="0">
+                          <a:solidFill>
+                            <a:srgbClr val="1A1A1A"/>
+                          </a:solidFill>
+                          <a:latin typeface="Microsoft YaHei" pitchFamily="34" charset="0"/>
+                          <a:ea typeface="Microsoft YaHei" pitchFamily="34" charset="-122"/>
+                          <a:cs typeface="Microsoft YaHei" pitchFamily="34" charset="-120"/>
+                        </a:rPr>
+                        <a:t>23.6%　718/3049</a:t>
+                      </a:r>
+                      <a:endParaRPr lang="en-US" sz="1050" dirty="0">
+                        <a:latin typeface="Microsoft YaHei" charset="0"/>
+                        <a:ea typeface="Microsoft YaHei" charset="0"/>
+                        <a:cs typeface="Microsoft YaHei" charset="0"/>
+                      </a:endParaRPr>
+                    </a:p>
+                  </a:txBody>
+                  <a:tcPr marL="91440" marR="91440" marT="45720" marB="45720" anchor="ctr">
+                    <a:lnL w="6350" cap="flat" cmpd="sng" algn="ctr">
+                      <a:solidFill>
+                        <a:srgbClr val="E2E5E9"/>
+                      </a:solidFill>
+                      <a:prstDash val="solid"/>
+                      <a:round/>
+                      <a:headEnd type="none" w="med" len="med"/>
+                      <a:tailEnd type="none" w="med" len="med"/>
+                    </a:lnL>
+                    <a:lnR w="6350" cap="flat" cmpd="sng" algn="ctr">
+                      <a:solidFill>
+                        <a:srgbClr val="E2E5E9"/>
+                      </a:solidFill>
+                      <a:prstDash val="solid"/>
+                      <a:round/>
+                      <a:headEnd type="none" w="med" len="med"/>
+                      <a:tailEnd type="none" w="med" len="med"/>
+                    </a:lnR>
+                    <a:lnT w="6350" cap="flat" cmpd="sng" algn="ctr">
+                      <a:solidFill>
+                        <a:srgbClr val="E2E5E9"/>
+                      </a:solidFill>
+                      <a:prstDash val="solid"/>
+                      <a:round/>
+                      <a:headEnd type="none" w="med" len="med"/>
+                      <a:tailEnd type="none" w="med" len="med"/>
+                    </a:lnT>
+                    <a:lnB w="6350" cap="flat" cmpd="sng" algn="ctr">
+                      <a:solidFill>
+                        <a:srgbClr val="E2E5E9"/>
+                      </a:solidFill>
+                      <a:prstDash val="solid"/>
+                      <a:round/>
+                      <a:headEnd type="none" w="med" len="med"/>
+                      <a:tailEnd type="none" w="med" len="med"/>
+                    </a:lnB>
+                  </a:tcPr>
+                </a:tc>
+                <a:tc>
+                  <a:txBody>
+                    <a:bodyPr/>
+                    <a:lstStyle/>
+                    <a:p>
+                      <a:pPr indent="0" marL="0">
+                        <a:buNone/>
+                      </a:pPr>
+                      <a:r>
+                        <a:rPr lang="en-US" sz="1050" dirty="0">
+                          <a:solidFill>
+                            <a:srgbClr val="1A1A1A"/>
+                          </a:solidFill>
+                          <a:latin typeface="Microsoft YaHei" pitchFamily="34" charset="0"/>
+                          <a:ea typeface="Microsoft YaHei" pitchFamily="34" charset="-122"/>
+                          <a:cs typeface="Microsoft YaHei" pitchFamily="34" charset="-120"/>
+                        </a:rPr>
+                        <a:t>3.71%　113/3049</a:t>
+                      </a:r>
+                      <a:endParaRPr lang="en-US" sz="1050" dirty="0">
+                        <a:latin typeface="Microsoft YaHei" charset="0"/>
+                        <a:ea typeface="Microsoft YaHei" charset="0"/>
+                        <a:cs typeface="Microsoft YaHei" charset="0"/>
+                      </a:endParaRPr>
+                    </a:p>
+                  </a:txBody>
+                  <a:tcPr marL="91440" marR="91440" marT="45720" marB="45720" anchor="ctr">
+                    <a:lnL w="6350" cap="flat" cmpd="sng" algn="ctr">
+                      <a:solidFill>
+                        <a:srgbClr val="E2E5E9"/>
+                      </a:solidFill>
+                      <a:prstDash val="solid"/>
+                      <a:round/>
+                      <a:headEnd type="none" w="med" len="med"/>
+                      <a:tailEnd type="none" w="med" len="med"/>
+                    </a:lnL>
+                    <a:lnR w="6350" cap="flat" cmpd="sng" algn="ctr">
+                      <a:solidFill>
+                        <a:srgbClr val="E2E5E9"/>
+                      </a:solidFill>
+                      <a:prstDash val="solid"/>
+                      <a:round/>
+                      <a:headEnd type="none" w="med" len="med"/>
+                      <a:tailEnd type="none" w="med" len="med"/>
+                    </a:lnR>
+                    <a:lnT w="6350" cap="flat" cmpd="sng" algn="ctr">
+                      <a:solidFill>
+                        <a:srgbClr val="E2E5E9"/>
+                      </a:solidFill>
+                      <a:prstDash val="solid"/>
+                      <a:round/>
+                      <a:headEnd type="none" w="med" len="med"/>
+                      <a:tailEnd type="none" w="med" len="med"/>
+                    </a:lnT>
+                    <a:lnB w="6350" cap="flat" cmpd="sng" algn="ctr">
+                      <a:solidFill>
+                        <a:srgbClr val="E2E5E9"/>
+                      </a:solidFill>
+                      <a:prstDash val="solid"/>
+                      <a:round/>
+                      <a:headEnd type="none" w="med" len="med"/>
+                      <a:tailEnd type="none" w="med" len="med"/>
+                    </a:lnB>
+                  </a:tcPr>
+                </a:tc>
+                <a:tc>
+                  <a:txBody>
+                    <a:bodyPr/>
+                    <a:lstStyle/>
+                    <a:p>
+                      <a:pPr indent="0" marL="0">
+                        <a:buNone/>
+                      </a:pPr>
+                      <a:r>
+                        <a:rPr lang="en-US" sz="1050" dirty="0">
+                          <a:solidFill>
+                            <a:srgbClr val="1A1A1A"/>
+                          </a:solidFill>
+                          <a:latin typeface="Microsoft YaHei" pitchFamily="34" charset="0"/>
+                          <a:ea typeface="Microsoft YaHei" pitchFamily="34" charset="-122"/>
+                          <a:cs typeface="Microsoft YaHei" pitchFamily="34" charset="-120"/>
+                        </a:rPr>
+                        <a:t>13</a:t>
+                      </a:r>
+                      <a:endParaRPr lang="en-US" sz="1050" dirty="0">
+                        <a:latin typeface="Microsoft YaHei" charset="0"/>
+                        <a:ea typeface="Microsoft YaHei" charset="0"/>
+                        <a:cs typeface="Microsoft YaHei" charset="0"/>
+                      </a:endParaRPr>
+                    </a:p>
+                  </a:txBody>
+                  <a:tcPr marL="91440" marR="91440" marT="45720" marB="45720" anchor="ctr">
+                    <a:lnL w="6350" cap="flat" cmpd="sng" algn="ctr">
+                      <a:solidFill>
+                        <a:srgbClr val="E2E5E9"/>
+                      </a:solidFill>
+                      <a:prstDash val="solid"/>
+                      <a:round/>
+                      <a:headEnd type="none" w="med" len="med"/>
+                      <a:tailEnd type="none" w="med" len="med"/>
+                    </a:lnL>
+                    <a:lnR w="6350" cap="flat" cmpd="sng" algn="ctr">
+                      <a:solidFill>
+                        <a:srgbClr val="E2E5E9"/>
+                      </a:solidFill>
+                      <a:prstDash val="solid"/>
+                      <a:round/>
+                      <a:headEnd type="none" w="med" len="med"/>
+                      <a:tailEnd type="none" w="med" len="med"/>
+                    </a:lnR>
+                    <a:lnT w="6350" cap="flat" cmpd="sng" algn="ctr">
+                      <a:solidFill>
+                        <a:srgbClr val="E2E5E9"/>
+                      </a:solidFill>
+                      <a:prstDash val="solid"/>
+                      <a:round/>
+                      <a:headEnd type="none" w="med" len="med"/>
+                      <a:tailEnd type="none" w="med" len="med"/>
+                    </a:lnT>
+                    <a:lnB w="6350" cap="flat" cmpd="sng" algn="ctr">
+                      <a:solidFill>
+                        <a:srgbClr val="E2E5E9"/>
+                      </a:solidFill>
+                      <a:prstDash val="solid"/>
+                      <a:round/>
+                      <a:headEnd type="none" w="med" len="med"/>
+                      <a:tailEnd type="none" w="med" len="med"/>
+                    </a:lnB>
+                  </a:tcPr>
+                </a:tc>
+                <a:tc>
+                  <a:txBody>
+                    <a:bodyPr/>
+                    <a:lstStyle/>
+                    <a:p>
+                      <a:pPr indent="0" marL="0">
+                        <a:buNone/>
+                      </a:pPr>
+                      <a:r>
+                        <a:rPr lang="en-US" sz="1050" dirty="0">
+                          <a:solidFill>
+                            <a:srgbClr val="1A1A1A"/>
+                          </a:solidFill>
+                          <a:latin typeface="Microsoft YaHei" pitchFamily="34" charset="0"/>
+                          <a:ea typeface="Microsoft YaHei" pitchFamily="34" charset="-122"/>
+                          <a:cs typeface="Microsoft YaHei" pitchFamily="34" charset="-120"/>
+                        </a:rPr>
+                        <a:t>—</a:t>
+                      </a:r>
+                      <a:endParaRPr lang="en-US" sz="1050" dirty="0">
+                        <a:latin typeface="Microsoft YaHei" charset="0"/>
+                        <a:ea typeface="Microsoft YaHei" charset="0"/>
+                        <a:cs typeface="Microsoft YaHei" charset="0"/>
+                      </a:endParaRPr>
+                    </a:p>
+                  </a:txBody>
+                  <a:tcPr marL="91440" marR="91440" marT="45720" marB="45720" anchor="ctr">
+                    <a:lnL w="6350" cap="flat" cmpd="sng" algn="ctr">
+                      <a:solidFill>
+                        <a:srgbClr val="E2E5E9"/>
+                      </a:solidFill>
+                      <a:prstDash val="solid"/>
+                      <a:round/>
+                      <a:headEnd type="none" w="med" len="med"/>
+                      <a:tailEnd type="none" w="med" len="med"/>
+                    </a:lnL>
+                    <a:lnR w="6350" cap="flat" cmpd="sng" algn="ctr">
+                      <a:solidFill>
+                        <a:srgbClr val="E2E5E9"/>
+                      </a:solidFill>
+                      <a:prstDash val="solid"/>
+                      <a:round/>
+                      <a:headEnd type="none" w="med" len="med"/>
+                      <a:tailEnd type="none" w="med" len="med"/>
+                    </a:lnR>
+                    <a:lnT w="6350" cap="flat" cmpd="sng" algn="ctr">
+                      <a:solidFill>
+                        <a:srgbClr val="E2E5E9"/>
+                      </a:solidFill>
+                      <a:prstDash val="solid"/>
+                      <a:round/>
+                      <a:headEnd type="none" w="med" len="med"/>
+                      <a:tailEnd type="none" w="med" len="med"/>
+                    </a:lnT>
+                    <a:lnB w="6350" cap="flat" cmpd="sng" algn="ctr">
+                      <a:solidFill>
+                        <a:srgbClr val="E2E5E9"/>
+                      </a:solidFill>
+                      <a:prstDash val="solid"/>
+                      <a:round/>
+                      <a:headEnd type="none" w="med" len="med"/>
+                      <a:tailEnd type="none" w="med" len="med"/>
+                    </a:lnB>
+                  </a:tcPr>
+                </a:tc>
+                <a:tc>
+                  <a:txBody>
+                    <a:bodyPr/>
+                    <a:lstStyle/>
+                    <a:p>
+                      <a:pPr indent="0" marL="0">
+                        <a:buNone/>
+                      </a:pPr>
+                      <a:r>
+                        <a:rPr lang="en-US" sz="1050" dirty="0">
+                          <a:solidFill>
+                            <a:srgbClr val="1A1A1A"/>
+                          </a:solidFill>
+                          <a:latin typeface="Microsoft YaHei" pitchFamily="34" charset="0"/>
+                          <a:ea typeface="Microsoft YaHei" pitchFamily="34" charset="-122"/>
+                          <a:cs typeface="Microsoft YaHei" pitchFamily="34" charset="-120"/>
+                        </a:rPr>
+                        <a:t>—</a:t>
+                      </a:r>
+                      <a:endParaRPr lang="en-US" sz="1050" dirty="0">
+                        <a:latin typeface="Microsoft YaHei" charset="0"/>
+                        <a:ea typeface="Microsoft YaHei" charset="0"/>
+                        <a:cs typeface="Microsoft YaHei" charset="0"/>
+                      </a:endParaRPr>
+                    </a:p>
+                  </a:txBody>
+                  <a:tcPr marL="91440" marR="91440" marT="45720" marB="45720" anchor="ctr">
+                    <a:lnL w="6350" cap="flat" cmpd="sng" algn="ctr">
+                      <a:solidFill>
+                        <a:srgbClr val="E2E5E9"/>
+                      </a:solidFill>
+                      <a:prstDash val="solid"/>
+                      <a:round/>
+                      <a:headEnd type="none" w="med" len="med"/>
+                      <a:tailEnd type="none" w="med" len="med"/>
+                    </a:lnL>
+                    <a:lnR w="6350" cap="flat" cmpd="sng" algn="ctr">
+                      <a:solidFill>
+                        <a:srgbClr val="E2E5E9"/>
+                      </a:solidFill>
+                      <a:prstDash val="solid"/>
+                      <a:round/>
+                      <a:headEnd type="none" w="med" len="med"/>
+                      <a:tailEnd type="none" w="med" len="med"/>
+                    </a:lnR>
+                    <a:lnT w="6350" cap="flat" cmpd="sng" algn="ctr">
+                      <a:solidFill>
+                        <a:srgbClr val="E2E5E9"/>
+                      </a:solidFill>
+                      <a:prstDash val="solid"/>
+                      <a:round/>
+                      <a:headEnd type="none" w="med" len="med"/>
+                      <a:tailEnd type="none" w="med" len="med"/>
+                    </a:lnT>
+                    <a:lnB w="6350" cap="flat" cmpd="sng" algn="ctr">
+                      <a:solidFill>
+                        <a:srgbClr val="E2E5E9"/>
+                      </a:solidFill>
+                      <a:prstDash val="solid"/>
+                      <a:round/>
+                      <a:headEnd type="none" w="med" len="med"/>
+                      <a:tailEnd type="none" w="med" len="med"/>
+                    </a:lnB>
+                  </a:tcPr>
+                </a:tc>
+              </a:tr>
+              <a:tr h="205740">
+                <a:tc>
+                  <a:txBody>
+                    <a:bodyPr/>
+                    <a:lstStyle/>
+                    <a:p>
+                      <a:pPr indent="0" marL="0">
+                        <a:buNone/>
+                      </a:pPr>
+                      <a:r>
+                        <a:rPr lang="en-US" sz="1050" dirty="0">
+                          <a:solidFill>
+                            <a:srgbClr val="1A1A1A"/>
+                          </a:solidFill>
+                          <a:latin typeface="Microsoft YaHei" pitchFamily="34" charset="0"/>
+                          <a:ea typeface="Microsoft YaHei" pitchFamily="34" charset="-122"/>
+                          <a:cs typeface="Microsoft YaHei" pitchFamily="34" charset="-120"/>
+                        </a:rPr>
+                        <a:t>人 · 肺</a:t>
+                      </a:r>
+                      <a:endParaRPr lang="en-US" sz="1050" dirty="0">
+                        <a:latin typeface="Microsoft YaHei" charset="0"/>
+                        <a:ea typeface="Microsoft YaHei" charset="0"/>
+                        <a:cs typeface="Microsoft YaHei" charset="0"/>
+                      </a:endParaRPr>
+                    </a:p>
+                  </a:txBody>
+                  <a:tcPr marL="91440" marR="91440" marT="45720" marB="45720" anchor="ctr">
+                    <a:lnL w="6350" cap="flat" cmpd="sng" algn="ctr">
+                      <a:solidFill>
+                        <a:srgbClr val="E2E5E9"/>
+                      </a:solidFill>
+                      <a:prstDash val="solid"/>
+                      <a:round/>
+                      <a:headEnd type="none" w="med" len="med"/>
+                      <a:tailEnd type="none" w="med" len="med"/>
+                    </a:lnL>
+                    <a:lnR w="6350" cap="flat" cmpd="sng" algn="ctr">
+                      <a:solidFill>
+                        <a:srgbClr val="E2E5E9"/>
+                      </a:solidFill>
+                      <a:prstDash val="solid"/>
+                      <a:round/>
+                      <a:headEnd type="none" w="med" len="med"/>
+                      <a:tailEnd type="none" w="med" len="med"/>
+                    </a:lnR>
+                    <a:lnT w="6350" cap="flat" cmpd="sng" algn="ctr">
+                      <a:solidFill>
+                        <a:srgbClr val="E2E5E9"/>
+                      </a:solidFill>
+                      <a:prstDash val="solid"/>
+                      <a:round/>
+                      <a:headEnd type="none" w="med" len="med"/>
+                      <a:tailEnd type="none" w="med" len="med"/>
+                    </a:lnT>
+                    <a:lnB w="6350" cap="flat" cmpd="sng" algn="ctr">
+                      <a:solidFill>
+                        <a:srgbClr val="E2E5E9"/>
+                      </a:solidFill>
+                      <a:prstDash val="solid"/>
+                      <a:round/>
+                      <a:headEnd type="none" w="med" len="med"/>
+                      <a:tailEnd type="none" w="med" len="med"/>
+                    </a:lnB>
+                  </a:tcPr>
+                </a:tc>
+                <a:tc>
+                  <a:txBody>
+                    <a:bodyPr/>
+                    <a:lstStyle/>
+                    <a:p>
+                      <a:pPr indent="0" marL="0">
+                        <a:buNone/>
+                      </a:pPr>
+                      <a:r>
+                        <a:rPr lang="en-US" sz="1050" dirty="0">
+                          <a:solidFill>
+                            <a:srgbClr val="1A1A1A"/>
+                          </a:solidFill>
+                          <a:latin typeface="Microsoft YaHei" pitchFamily="34" charset="0"/>
+                          <a:ea typeface="Microsoft YaHei" pitchFamily="34" charset="-122"/>
+                          <a:cs typeface="Microsoft YaHei" pitchFamily="34" charset="-120"/>
+                        </a:rPr>
+                        <a:t>肺泡外膜成纤维</a:t>
+                      </a:r>
+                      <a:endParaRPr lang="en-US" sz="1050" dirty="0">
+                        <a:latin typeface="Microsoft YaHei" charset="0"/>
+                        <a:ea typeface="Microsoft YaHei" charset="0"/>
+                        <a:cs typeface="Microsoft YaHei" charset="0"/>
+                      </a:endParaRPr>
+                    </a:p>
+                  </a:txBody>
+                  <a:tcPr marL="91440" marR="91440" marT="45720" marB="45720" anchor="ctr">
+                    <a:lnL w="6350" cap="flat" cmpd="sng" algn="ctr">
+                      <a:solidFill>
+                        <a:srgbClr val="E2E5E9"/>
+                      </a:solidFill>
+                      <a:prstDash val="solid"/>
+                      <a:round/>
+                      <a:headEnd type="none" w="med" len="med"/>
+                      <a:tailEnd type="none" w="med" len="med"/>
+                    </a:lnL>
+                    <a:lnR w="6350" cap="flat" cmpd="sng" algn="ctr">
+                      <a:solidFill>
+                        <a:srgbClr val="E2E5E9"/>
+                      </a:solidFill>
+                      <a:prstDash val="solid"/>
+                      <a:round/>
+                      <a:headEnd type="none" w="med" len="med"/>
+                      <a:tailEnd type="none" w="med" len="med"/>
+                    </a:lnR>
+                    <a:lnT w="6350" cap="flat" cmpd="sng" algn="ctr">
+                      <a:solidFill>
+                        <a:srgbClr val="E2E5E9"/>
+                      </a:solidFill>
+                      <a:prstDash val="solid"/>
+                      <a:round/>
+                      <a:headEnd type="none" w="med" len="med"/>
+                      <a:tailEnd type="none" w="med" len="med"/>
+                    </a:lnT>
+                    <a:lnB w="6350" cap="flat" cmpd="sng" algn="ctr">
+                      <a:solidFill>
+                        <a:srgbClr val="E2E5E9"/>
+                      </a:solidFill>
+                      <a:prstDash val="solid"/>
+                      <a:round/>
+                      <a:headEnd type="none" w="med" len="med"/>
+                      <a:tailEnd type="none" w="med" len="med"/>
+                    </a:lnB>
+                  </a:tcPr>
+                </a:tc>
+                <a:tc>
+                  <a:txBody>
+                    <a:bodyPr/>
+                    <a:lstStyle/>
+                    <a:p>
+                      <a:pPr indent="0" marL="0">
+                        <a:buNone/>
+                      </a:pPr>
+                      <a:r>
+                        <a:rPr lang="en-US" sz="1050" dirty="0">
+                          <a:solidFill>
+                            <a:srgbClr val="1A1A1A"/>
+                          </a:solidFill>
+                          <a:latin typeface="Microsoft YaHei" pitchFamily="34" charset="0"/>
+                          <a:ea typeface="Microsoft YaHei" pitchFamily="34" charset="-122"/>
+                          <a:cs typeface="Microsoft YaHei" pitchFamily="34" charset="-120"/>
+                        </a:rPr>
+                        <a:t>16.1%　159/987</a:t>
+                      </a:r>
+                      <a:endParaRPr lang="en-US" sz="1050" dirty="0">
+                        <a:latin typeface="Microsoft YaHei" charset="0"/>
+                        <a:ea typeface="Microsoft YaHei" charset="0"/>
+                        <a:cs typeface="Microsoft YaHei" charset="0"/>
+                      </a:endParaRPr>
+                    </a:p>
+                  </a:txBody>
+                  <a:tcPr marL="91440" marR="91440" marT="45720" marB="45720" anchor="ctr">
+                    <a:lnL w="6350" cap="flat" cmpd="sng" algn="ctr">
+                      <a:solidFill>
+                        <a:srgbClr val="E2E5E9"/>
+                      </a:solidFill>
+                      <a:prstDash val="solid"/>
+                      <a:round/>
+                      <a:headEnd type="none" w="med" len="med"/>
+                      <a:tailEnd type="none" w="med" len="med"/>
+                    </a:lnL>
+                    <a:lnR w="6350" cap="flat" cmpd="sng" algn="ctr">
+                      <a:solidFill>
+                        <a:srgbClr val="E2E5E9"/>
+                      </a:solidFill>
+                      <a:prstDash val="solid"/>
+                      <a:round/>
+                      <a:headEnd type="none" w="med" len="med"/>
+                      <a:tailEnd type="none" w="med" len="med"/>
+                    </a:lnR>
+                    <a:lnT w="6350" cap="flat" cmpd="sng" algn="ctr">
+                      <a:solidFill>
+                        <a:srgbClr val="E2E5E9"/>
+                      </a:solidFill>
+                      <a:prstDash val="solid"/>
+                      <a:round/>
+                      <a:headEnd type="none" w="med" len="med"/>
+                      <a:tailEnd type="none" w="med" len="med"/>
+                    </a:lnT>
+                    <a:lnB w="6350" cap="flat" cmpd="sng" algn="ctr">
+                      <a:solidFill>
+                        <a:srgbClr val="E2E5E9"/>
+                      </a:solidFill>
+                      <a:prstDash val="solid"/>
+                      <a:round/>
+                      <a:headEnd type="none" w="med" len="med"/>
+                      <a:tailEnd type="none" w="med" len="med"/>
+                    </a:lnB>
+                  </a:tcPr>
+                </a:tc>
+                <a:tc>
+                  <a:txBody>
+                    <a:bodyPr/>
+                    <a:lstStyle/>
+                    <a:p>
+                      <a:pPr indent="0" marL="0">
+                        <a:buNone/>
+                      </a:pPr>
+                      <a:r>
+                        <a:rPr lang="en-US" sz="1050" dirty="0">
+                          <a:solidFill>
+                            <a:srgbClr val="1A1A1A"/>
+                          </a:solidFill>
+                          <a:latin typeface="Microsoft YaHei" pitchFamily="34" charset="0"/>
+                          <a:ea typeface="Microsoft YaHei" pitchFamily="34" charset="-122"/>
+                          <a:cs typeface="Microsoft YaHei" pitchFamily="34" charset="-120"/>
+                        </a:rPr>
+                        <a:t>5.17%　51/987</a:t>
+                      </a:r>
+                      <a:endParaRPr lang="en-US" sz="1050" dirty="0">
+                        <a:latin typeface="Microsoft YaHei" charset="0"/>
+                        <a:ea typeface="Microsoft YaHei" charset="0"/>
+                        <a:cs typeface="Microsoft YaHei" charset="0"/>
+                      </a:endParaRPr>
+                    </a:p>
+                  </a:txBody>
+                  <a:tcPr marL="91440" marR="91440" marT="45720" marB="45720" anchor="ctr">
+                    <a:lnL w="6350" cap="flat" cmpd="sng" algn="ctr">
+                      <a:solidFill>
+                        <a:srgbClr val="E2E5E9"/>
+                      </a:solidFill>
+                      <a:prstDash val="solid"/>
+                      <a:round/>
+                      <a:headEnd type="none" w="med" len="med"/>
+                      <a:tailEnd type="none" w="med" len="med"/>
+                    </a:lnL>
+                    <a:lnR w="6350" cap="flat" cmpd="sng" algn="ctr">
+                      <a:solidFill>
+                        <a:srgbClr val="E2E5E9"/>
+                      </a:solidFill>
+                      <a:prstDash val="solid"/>
+                      <a:round/>
+                      <a:headEnd type="none" w="med" len="med"/>
+                      <a:tailEnd type="none" w="med" len="med"/>
+                    </a:lnR>
+                    <a:lnT w="6350" cap="flat" cmpd="sng" algn="ctr">
+                      <a:solidFill>
+                        <a:srgbClr val="E2E5E9"/>
+                      </a:solidFill>
+                      <a:prstDash val="solid"/>
+                      <a:round/>
+                      <a:headEnd type="none" w="med" len="med"/>
+                      <a:tailEnd type="none" w="med" len="med"/>
+                    </a:lnT>
+                    <a:lnB w="6350" cap="flat" cmpd="sng" algn="ctr">
+                      <a:solidFill>
+                        <a:srgbClr val="E2E5E9"/>
+                      </a:solidFill>
+                      <a:prstDash val="solid"/>
+                      <a:round/>
+                      <a:headEnd type="none" w="med" len="med"/>
+                      <a:tailEnd type="none" w="med" len="med"/>
+                    </a:lnB>
+                  </a:tcPr>
+                </a:tc>
+                <a:tc>
+                  <a:txBody>
+                    <a:bodyPr/>
+                    <a:lstStyle/>
+                    <a:p>
+                      <a:pPr indent="0" marL="0">
+                        <a:buNone/>
+                      </a:pPr>
+                      <a:r>
+                        <a:rPr lang="en-US" sz="1050" dirty="0">
+                          <a:solidFill>
+                            <a:srgbClr val="1A1A1A"/>
+                          </a:solidFill>
+                          <a:latin typeface="Microsoft YaHei" pitchFamily="34" charset="0"/>
+                          <a:ea typeface="Microsoft YaHei" pitchFamily="34" charset="-122"/>
+                          <a:cs typeface="Microsoft YaHei" pitchFamily="34" charset="-120"/>
+                        </a:rPr>
+                        <a:t>14</a:t>
+                      </a:r>
+                      <a:endParaRPr lang="en-US" sz="1050" dirty="0">
+                        <a:latin typeface="Microsoft YaHei" charset="0"/>
+                        <a:ea typeface="Microsoft YaHei" charset="0"/>
+                        <a:cs typeface="Microsoft YaHei" charset="0"/>
+                      </a:endParaRPr>
+                    </a:p>
+                  </a:txBody>
+                  <a:tcPr marL="91440" marR="91440" marT="45720" marB="45720" anchor="ctr">
+                    <a:lnL w="6350" cap="flat" cmpd="sng" algn="ctr">
+                      <a:solidFill>
+                        <a:srgbClr val="E2E5E9"/>
+                      </a:solidFill>
+                      <a:prstDash val="solid"/>
+                      <a:round/>
+                      <a:headEnd type="none" w="med" len="med"/>
+                      <a:tailEnd type="none" w="med" len="med"/>
+                    </a:lnL>
+                    <a:lnR w="6350" cap="flat" cmpd="sng" algn="ctr">
+                      <a:solidFill>
+                        <a:srgbClr val="E2E5E9"/>
+                      </a:solidFill>
+                      <a:prstDash val="solid"/>
+                      <a:round/>
+                      <a:headEnd type="none" w="med" len="med"/>
+                      <a:tailEnd type="none" w="med" len="med"/>
+                    </a:lnR>
+                    <a:lnT w="6350" cap="flat" cmpd="sng" algn="ctr">
+                      <a:solidFill>
+                        <a:srgbClr val="E2E5E9"/>
+                      </a:solidFill>
+                      <a:prstDash val="solid"/>
+                      <a:round/>
+                      <a:headEnd type="none" w="med" len="med"/>
+                      <a:tailEnd type="none" w="med" len="med"/>
+                    </a:lnT>
+                    <a:lnB w="6350" cap="flat" cmpd="sng" algn="ctr">
+                      <a:solidFill>
+                        <a:srgbClr val="E2E5E9"/>
+                      </a:solidFill>
+                      <a:prstDash val="solid"/>
+                      <a:round/>
+                      <a:headEnd type="none" w="med" len="med"/>
+                      <a:tailEnd type="none" w="med" len="med"/>
+                    </a:lnB>
+                  </a:tcPr>
+                </a:tc>
+                <a:tc>
+                  <a:txBody>
+                    <a:bodyPr/>
+                    <a:lstStyle/>
+                    <a:p>
+                      <a:pPr indent="0" marL="0">
+                        <a:buNone/>
+                      </a:pPr>
+                      <a:r>
+                        <a:rPr lang="en-US" sz="1050" dirty="0">
+                          <a:solidFill>
+                            <a:srgbClr val="1A1A1A"/>
+                          </a:solidFill>
+                          <a:latin typeface="Microsoft YaHei" pitchFamily="34" charset="0"/>
+                          <a:ea typeface="Microsoft YaHei" pitchFamily="34" charset="-122"/>
+                          <a:cs typeface="Microsoft YaHei" pitchFamily="34" charset="-120"/>
+                        </a:rPr>
+                        <a:t>—</a:t>
+                      </a:r>
+                      <a:endParaRPr lang="en-US" sz="1050" dirty="0">
+                        <a:latin typeface="Microsoft YaHei" charset="0"/>
+                        <a:ea typeface="Microsoft YaHei" charset="0"/>
+                        <a:cs typeface="Microsoft YaHei" charset="0"/>
+                      </a:endParaRPr>
+                    </a:p>
+                  </a:txBody>
+                  <a:tcPr marL="91440" marR="91440" marT="45720" marB="45720" anchor="ctr">
+                    <a:lnL w="6350" cap="flat" cmpd="sng" algn="ctr">
+                      <a:solidFill>
+                        <a:srgbClr val="E2E5E9"/>
+                      </a:solidFill>
+                      <a:prstDash val="solid"/>
+                      <a:round/>
+                      <a:headEnd type="none" w="med" len="med"/>
+                      <a:tailEnd type="none" w="med" len="med"/>
+                    </a:lnL>
+                    <a:lnR w="6350" cap="flat" cmpd="sng" algn="ctr">
+                      <a:solidFill>
+                        <a:srgbClr val="E2E5E9"/>
+                      </a:solidFill>
+                      <a:prstDash val="solid"/>
+                      <a:round/>
+                      <a:headEnd type="none" w="med" len="med"/>
+                      <a:tailEnd type="none" w="med" len="med"/>
+                    </a:lnR>
+                    <a:lnT w="6350" cap="flat" cmpd="sng" algn="ctr">
+                      <a:solidFill>
+                        <a:srgbClr val="E2E5E9"/>
+                      </a:solidFill>
+                      <a:prstDash val="solid"/>
+                      <a:round/>
+                      <a:headEnd type="none" w="med" len="med"/>
+                      <a:tailEnd type="none" w="med" len="med"/>
+                    </a:lnT>
+                    <a:lnB w="6350" cap="flat" cmpd="sng" algn="ctr">
+                      <a:solidFill>
+                        <a:srgbClr val="E2E5E9"/>
+                      </a:solidFill>
+                      <a:prstDash val="solid"/>
+                      <a:round/>
+                      <a:headEnd type="none" w="med" len="med"/>
+                      <a:tailEnd type="none" w="med" len="med"/>
+                    </a:lnB>
+                  </a:tcPr>
+                </a:tc>
+                <a:tc>
+                  <a:txBody>
+                    <a:bodyPr/>
+                    <a:lstStyle/>
+                    <a:p>
+                      <a:pPr indent="0" marL="0">
+                        <a:buNone/>
+                      </a:pPr>
+                      <a:r>
+                        <a:rPr lang="en-US" sz="1050" dirty="0">
+                          <a:solidFill>
+                            <a:srgbClr val="1A1A1A"/>
+                          </a:solidFill>
+                          <a:latin typeface="Microsoft YaHei" pitchFamily="34" charset="0"/>
+                          <a:ea typeface="Microsoft YaHei" pitchFamily="34" charset="-122"/>
+                          <a:cs typeface="Microsoft YaHei" pitchFamily="34" charset="-120"/>
+                        </a:rPr>
+                        <a:t>—</a:t>
+                      </a:r>
+                      <a:endParaRPr lang="en-US" sz="1050" dirty="0">
+                        <a:latin typeface="Microsoft YaHei" charset="0"/>
+                        <a:ea typeface="Microsoft YaHei" charset="0"/>
+                        <a:cs typeface="Microsoft YaHei" charset="0"/>
+                      </a:endParaRPr>
+                    </a:p>
+                  </a:txBody>
+                  <a:tcPr marL="91440" marR="91440" marT="45720" marB="45720" anchor="ctr">
+                    <a:lnL w="6350" cap="flat" cmpd="sng" algn="ctr">
+                      <a:solidFill>
+                        <a:srgbClr val="E2E5E9"/>
+                      </a:solidFill>
+                      <a:prstDash val="solid"/>
+                      <a:round/>
+                      <a:headEnd type="none" w="med" len="med"/>
+                      <a:tailEnd type="none" w="med" len="med"/>
+                    </a:lnL>
+                    <a:lnR w="6350" cap="flat" cmpd="sng" algn="ctr">
+                      <a:solidFill>
+                        <a:srgbClr val="E2E5E9"/>
+                      </a:solidFill>
+                      <a:prstDash val="solid"/>
+                      <a:round/>
+                      <a:headEnd type="none" w="med" len="med"/>
+                      <a:tailEnd type="none" w="med" len="med"/>
+                    </a:lnR>
+                    <a:lnT w="6350" cap="flat" cmpd="sng" algn="ctr">
+                      <a:solidFill>
+                        <a:srgbClr val="E2E5E9"/>
+                      </a:solidFill>
+                      <a:prstDash val="solid"/>
+                      <a:round/>
+                      <a:headEnd type="none" w="med" len="med"/>
+                      <a:tailEnd type="none" w="med" len="med"/>
+                    </a:lnT>
+                    <a:lnB w="6350" cap="flat" cmpd="sng" algn="ctr">
+                      <a:solidFill>
+                        <a:srgbClr val="E2E5E9"/>
+                      </a:solidFill>
+                      <a:prstDash val="solid"/>
+                      <a:round/>
+                      <a:headEnd type="none" w="med" len="med"/>
+                      <a:tailEnd type="none" w="med" len="med"/>
+                    </a:lnB>
+                  </a:tcPr>
+                </a:tc>
+              </a:tr>
+              <a:tr h="205740">
+                <a:tc>
+                  <a:txBody>
+                    <a:bodyPr/>
+                    <a:lstStyle/>
+                    <a:p>
+                      <a:pPr indent="0" marL="0">
+                        <a:buNone/>
+                      </a:pPr>
+                      <a:r>
+                        <a:rPr lang="en-US" sz="1050" dirty="0">
+                          <a:solidFill>
+                            <a:srgbClr val="1A1A1A"/>
+                          </a:solidFill>
+                          <a:latin typeface="Microsoft YaHei" pitchFamily="34" charset="0"/>
+                          <a:ea typeface="Microsoft YaHei" pitchFamily="34" charset="-122"/>
+                          <a:cs typeface="Microsoft YaHei" pitchFamily="34" charset="-120"/>
+                        </a:rPr>
+                        <a:t>小鼠 · 脑</a:t>
+                      </a:r>
+                      <a:endParaRPr lang="en-US" sz="1050" dirty="0">
+                        <a:latin typeface="Microsoft YaHei" charset="0"/>
+                        <a:ea typeface="Microsoft YaHei" charset="0"/>
+                        <a:cs typeface="Microsoft YaHei" charset="0"/>
+                      </a:endParaRPr>
+                    </a:p>
+                  </a:txBody>
+                  <a:tcPr marL="91440" marR="91440" marT="45720" marB="45720" anchor="ctr">
+                    <a:lnL w="6350" cap="flat" cmpd="sng" algn="ctr">
+                      <a:solidFill>
+                        <a:srgbClr val="E2E5E9"/>
+                      </a:solidFill>
+                      <a:prstDash val="solid"/>
+                      <a:round/>
+                      <a:headEnd type="none" w="med" len="med"/>
+                      <a:tailEnd type="none" w="med" len="med"/>
+                    </a:lnL>
+                    <a:lnR w="6350" cap="flat" cmpd="sng" algn="ctr">
+                      <a:solidFill>
+                        <a:srgbClr val="E2E5E9"/>
+                      </a:solidFill>
+                      <a:prstDash val="solid"/>
+                      <a:round/>
+                      <a:headEnd type="none" w="med" len="med"/>
+                      <a:tailEnd type="none" w="med" len="med"/>
+                    </a:lnR>
+                    <a:lnT w="6350" cap="flat" cmpd="sng" algn="ctr">
+                      <a:solidFill>
+                        <a:srgbClr val="E2E5E9"/>
+                      </a:solidFill>
+                      <a:prstDash val="solid"/>
+                      <a:round/>
+                      <a:headEnd type="none" w="med" len="med"/>
+                      <a:tailEnd type="none" w="med" len="med"/>
+                    </a:lnT>
+                    <a:lnB w="6350" cap="flat" cmpd="sng" algn="ctr">
+                      <a:solidFill>
+                        <a:srgbClr val="E2E5E9"/>
+                      </a:solidFill>
+                      <a:prstDash val="solid"/>
+                      <a:round/>
+                      <a:headEnd type="none" w="med" len="med"/>
+                      <a:tailEnd type="none" w="med" len="med"/>
+                    </a:lnB>
+                  </a:tcPr>
+                </a:tc>
+                <a:tc>
+                  <a:txBody>
+                    <a:bodyPr/>
+                    <a:lstStyle/>
+                    <a:p>
+                      <a:pPr indent="0" marL="0">
+                        <a:buNone/>
+                      </a:pPr>
+                      <a:r>
+                        <a:rPr lang="en-US" sz="1050" dirty="0">
+                          <a:solidFill>
+                            <a:srgbClr val="1A1A1A"/>
+                          </a:solidFill>
+                          <a:latin typeface="Microsoft YaHei" pitchFamily="34" charset="0"/>
+                          <a:ea typeface="Microsoft YaHei" pitchFamily="34" charset="-122"/>
+                          <a:cs typeface="Microsoft YaHei" pitchFamily="34" charset="-120"/>
+                        </a:rPr>
+                        <a:t>Cajal-Retzius 神经元</a:t>
+                      </a:r>
+                      <a:endParaRPr lang="en-US" sz="1050" dirty="0">
+                        <a:latin typeface="Microsoft YaHei" charset="0"/>
+                        <a:ea typeface="Microsoft YaHei" charset="0"/>
+                        <a:cs typeface="Microsoft YaHei" charset="0"/>
+                      </a:endParaRPr>
+                    </a:p>
+                  </a:txBody>
+                  <a:tcPr marL="91440" marR="91440" marT="45720" marB="45720" anchor="ctr">
+                    <a:lnL w="6350" cap="flat" cmpd="sng" algn="ctr">
+                      <a:solidFill>
+                        <a:srgbClr val="E2E5E9"/>
+                      </a:solidFill>
+                      <a:prstDash val="solid"/>
+                      <a:round/>
+                      <a:headEnd type="none" w="med" len="med"/>
+                      <a:tailEnd type="none" w="med" len="med"/>
+                    </a:lnL>
+                    <a:lnR w="6350" cap="flat" cmpd="sng" algn="ctr">
+                      <a:solidFill>
+                        <a:srgbClr val="E2E5E9"/>
+                      </a:solidFill>
+                      <a:prstDash val="solid"/>
+                      <a:round/>
+                      <a:headEnd type="none" w="med" len="med"/>
+                      <a:tailEnd type="none" w="med" len="med"/>
+                    </a:lnR>
+                    <a:lnT w="6350" cap="flat" cmpd="sng" algn="ctr">
+                      <a:solidFill>
+                        <a:srgbClr val="E2E5E9"/>
+                      </a:solidFill>
+                      <a:prstDash val="solid"/>
+                      <a:round/>
+                      <a:headEnd type="none" w="med" len="med"/>
+                      <a:tailEnd type="none" w="med" len="med"/>
+                    </a:lnT>
+                    <a:lnB w="6350" cap="flat" cmpd="sng" algn="ctr">
+                      <a:solidFill>
+                        <a:srgbClr val="E2E5E9"/>
+                      </a:solidFill>
+                      <a:prstDash val="solid"/>
+                      <a:round/>
+                      <a:headEnd type="none" w="med" len="med"/>
+                      <a:tailEnd type="none" w="med" len="med"/>
+                    </a:lnB>
+                  </a:tcPr>
+                </a:tc>
+                <a:tc>
+                  <a:txBody>
+                    <a:bodyPr/>
+                    <a:lstStyle/>
+                    <a:p>
+                      <a:pPr indent="0" marL="0">
+                        <a:buNone/>
+                      </a:pPr>
+                      <a:r>
+                        <a:rPr lang="en-US" sz="1050" dirty="0">
+                          <a:solidFill>
+                            <a:srgbClr val="1A1A1A"/>
+                          </a:solidFill>
+                          <a:latin typeface="Microsoft YaHei" pitchFamily="34" charset="0"/>
+                          <a:ea typeface="Microsoft YaHei" pitchFamily="34" charset="-122"/>
+                          <a:cs typeface="Microsoft YaHei" pitchFamily="34" charset="-120"/>
+                        </a:rPr>
+                        <a:t>12.5%　17/136</a:t>
+                      </a:r>
+                      <a:endParaRPr lang="en-US" sz="1050" dirty="0">
+                        <a:latin typeface="Microsoft YaHei" charset="0"/>
+                        <a:ea typeface="Microsoft YaHei" charset="0"/>
+                        <a:cs typeface="Microsoft YaHei" charset="0"/>
+                      </a:endParaRPr>
+                    </a:p>
+                  </a:txBody>
+                  <a:tcPr marL="91440" marR="91440" marT="45720" marB="45720" anchor="ctr">
+                    <a:lnL w="6350" cap="flat" cmpd="sng" algn="ctr">
+                      <a:solidFill>
+                        <a:srgbClr val="E2E5E9"/>
+                      </a:solidFill>
+                      <a:prstDash val="solid"/>
+                      <a:round/>
+                      <a:headEnd type="none" w="med" len="med"/>
+                      <a:tailEnd type="none" w="med" len="med"/>
+                    </a:lnL>
+                    <a:lnR w="6350" cap="flat" cmpd="sng" algn="ctr">
+                      <a:solidFill>
+                        <a:srgbClr val="E2E5E9"/>
+                      </a:solidFill>
+                      <a:prstDash val="solid"/>
+                      <a:round/>
+                      <a:headEnd type="none" w="med" len="med"/>
+                      <a:tailEnd type="none" w="med" len="med"/>
+                    </a:lnR>
+                    <a:lnT w="6350" cap="flat" cmpd="sng" algn="ctr">
+                      <a:solidFill>
+                        <a:srgbClr val="E2E5E9"/>
+                      </a:solidFill>
+                      <a:prstDash val="solid"/>
+                      <a:round/>
+                      <a:headEnd type="none" w="med" len="med"/>
+                      <a:tailEnd type="none" w="med" len="med"/>
+                    </a:lnT>
+                    <a:lnB w="6350" cap="flat" cmpd="sng" algn="ctr">
+                      <a:solidFill>
+                        <a:srgbClr val="E2E5E9"/>
+                      </a:solidFill>
+                      <a:prstDash val="solid"/>
+                      <a:round/>
+                      <a:headEnd type="none" w="med" len="med"/>
+                      <a:tailEnd type="none" w="med" len="med"/>
+                    </a:lnB>
+                  </a:tcPr>
+                </a:tc>
+                <a:tc>
+                  <a:txBody>
+                    <a:bodyPr/>
+                    <a:lstStyle/>
+                    <a:p>
+                      <a:pPr indent="0" marL="0">
+                        <a:buNone/>
+                      </a:pPr>
+                      <a:r>
+                        <a:rPr lang="en-US" sz="1050" dirty="0">
+                          <a:solidFill>
+                            <a:srgbClr val="1A1A1A"/>
+                          </a:solidFill>
+                          <a:latin typeface="Microsoft YaHei" pitchFamily="34" charset="0"/>
+                          <a:ea typeface="Microsoft YaHei" pitchFamily="34" charset="-122"/>
+                          <a:cs typeface="Microsoft YaHei" pitchFamily="34" charset="-120"/>
+                        </a:rPr>
+                        <a:t>0.00%　0/136</a:t>
+                      </a:r>
+                      <a:endParaRPr lang="en-US" sz="1050" dirty="0">
+                        <a:latin typeface="Microsoft YaHei" charset="0"/>
+                        <a:ea typeface="Microsoft YaHei" charset="0"/>
+                        <a:cs typeface="Microsoft YaHei" charset="0"/>
+                      </a:endParaRPr>
+                    </a:p>
+                  </a:txBody>
+                  <a:tcPr marL="91440" marR="91440" marT="45720" marB="45720" anchor="ctr">
+                    <a:lnL w="6350" cap="flat" cmpd="sng" algn="ctr">
+                      <a:solidFill>
+                        <a:srgbClr val="E2E5E9"/>
+                      </a:solidFill>
+                      <a:prstDash val="solid"/>
+                      <a:round/>
+                      <a:headEnd type="none" w="med" len="med"/>
+                      <a:tailEnd type="none" w="med" len="med"/>
+                    </a:lnL>
+                    <a:lnR w="6350" cap="flat" cmpd="sng" algn="ctr">
+                      <a:solidFill>
+                        <a:srgbClr val="E2E5E9"/>
+                      </a:solidFill>
+                      <a:prstDash val="solid"/>
+                      <a:round/>
+                      <a:headEnd type="none" w="med" len="med"/>
+                      <a:tailEnd type="none" w="med" len="med"/>
+                    </a:lnR>
+                    <a:lnT w="6350" cap="flat" cmpd="sng" algn="ctr">
+                      <a:solidFill>
+                        <a:srgbClr val="E2E5E9"/>
+                      </a:solidFill>
+                      <a:prstDash val="solid"/>
+                      <a:round/>
+                      <a:headEnd type="none" w="med" len="med"/>
+                      <a:tailEnd type="none" w="med" len="med"/>
+                    </a:lnT>
+                    <a:lnB w="6350" cap="flat" cmpd="sng" algn="ctr">
+                      <a:solidFill>
+                        <a:srgbClr val="E2E5E9"/>
+                      </a:solidFill>
+                      <a:prstDash val="solid"/>
+                      <a:round/>
+                      <a:headEnd type="none" w="med" len="med"/>
+                      <a:tailEnd type="none" w="med" len="med"/>
+                    </a:lnB>
+                  </a:tcPr>
+                </a:tc>
+                <a:tc>
+                  <a:txBody>
+                    <a:bodyPr/>
+                    <a:lstStyle/>
+                    <a:p>
+                      <a:pPr indent="0" marL="0">
+                        <a:buNone/>
+                      </a:pPr>
+                      <a:r>
+                        <a:rPr lang="en-US" sz="1050" dirty="0">
+                          <a:solidFill>
+                            <a:srgbClr val="1A1A1A"/>
+                          </a:solidFill>
+                          <a:latin typeface="Microsoft YaHei" pitchFamily="34" charset="0"/>
+                          <a:ea typeface="Microsoft YaHei" pitchFamily="34" charset="-122"/>
+                          <a:cs typeface="Microsoft YaHei" pitchFamily="34" charset="-120"/>
+                        </a:rPr>
+                        <a:t>4</a:t>
+                      </a:r>
+                      <a:endParaRPr lang="en-US" sz="1050" dirty="0">
+                        <a:latin typeface="Microsoft YaHei" charset="0"/>
+                        <a:ea typeface="Microsoft YaHei" charset="0"/>
+                        <a:cs typeface="Microsoft YaHei" charset="0"/>
+                      </a:endParaRPr>
+                    </a:p>
+                  </a:txBody>
+                  <a:tcPr marL="91440" marR="91440" marT="45720" marB="45720" anchor="ctr">
+                    <a:lnL w="6350" cap="flat" cmpd="sng" algn="ctr">
+                      <a:solidFill>
+                        <a:srgbClr val="E2E5E9"/>
+                      </a:solidFill>
+                      <a:prstDash val="solid"/>
+                      <a:round/>
+                      <a:headEnd type="none" w="med" len="med"/>
+                      <a:tailEnd type="none" w="med" len="med"/>
+                    </a:lnL>
+                    <a:lnR w="6350" cap="flat" cmpd="sng" algn="ctr">
+                      <a:solidFill>
+                        <a:srgbClr val="E2E5E9"/>
+                      </a:solidFill>
+                      <a:prstDash val="solid"/>
+                      <a:round/>
+                      <a:headEnd type="none" w="med" len="med"/>
+                      <a:tailEnd type="none" w="med" len="med"/>
+                    </a:lnR>
+                    <a:lnT w="6350" cap="flat" cmpd="sng" algn="ctr">
+                      <a:solidFill>
+                        <a:srgbClr val="E2E5E9"/>
+                      </a:solidFill>
+                      <a:prstDash val="solid"/>
+                      <a:round/>
+                      <a:headEnd type="none" w="med" len="med"/>
+                      <a:tailEnd type="none" w="med" len="med"/>
+                    </a:lnT>
+                    <a:lnB w="6350" cap="flat" cmpd="sng" algn="ctr">
+                      <a:solidFill>
+                        <a:srgbClr val="E2E5E9"/>
+                      </a:solidFill>
+                      <a:prstDash val="solid"/>
+                      <a:round/>
+                      <a:headEnd type="none" w="med" len="med"/>
+                      <a:tailEnd type="none" w="med" len="med"/>
+                    </a:lnB>
+                  </a:tcPr>
+                </a:tc>
+                <a:tc>
+                  <a:txBody>
+                    <a:bodyPr/>
+                    <a:lstStyle/>
+                    <a:p>
+                      <a:pPr indent="0" marL="0">
+                        <a:buNone/>
+                      </a:pPr>
+                      <a:r>
+                        <a:rPr lang="en-US" sz="1050" dirty="0">
+                          <a:solidFill>
+                            <a:srgbClr val="1A1A1A"/>
+                          </a:solidFill>
+                          <a:latin typeface="Microsoft YaHei" pitchFamily="34" charset="0"/>
+                          <a:ea typeface="Microsoft YaHei" pitchFamily="34" charset="-122"/>
+                          <a:cs typeface="Microsoft YaHei" pitchFamily="34" charset="-120"/>
+                        </a:rPr>
+                        <a:t>—</a:t>
+                      </a:r>
+                      <a:endParaRPr lang="en-US" sz="1050" dirty="0">
+                        <a:latin typeface="Microsoft YaHei" charset="0"/>
+                        <a:ea typeface="Microsoft YaHei" charset="0"/>
+                        <a:cs typeface="Microsoft YaHei" charset="0"/>
+                      </a:endParaRPr>
+                    </a:p>
+                  </a:txBody>
+                  <a:tcPr marL="91440" marR="91440" marT="45720" marB="45720" anchor="ctr">
+                    <a:lnL w="6350" cap="flat" cmpd="sng" algn="ctr">
+                      <a:solidFill>
+                        <a:srgbClr val="E2E5E9"/>
+                      </a:solidFill>
+                      <a:prstDash val="solid"/>
+                      <a:round/>
+                      <a:headEnd type="none" w="med" len="med"/>
+                      <a:tailEnd type="none" w="med" len="med"/>
+                    </a:lnL>
+                    <a:lnR w="6350" cap="flat" cmpd="sng" algn="ctr">
+                      <a:solidFill>
+                        <a:srgbClr val="E2E5E9"/>
+                      </a:solidFill>
+                      <a:prstDash val="solid"/>
+                      <a:round/>
+                      <a:headEnd type="none" w="med" len="med"/>
+                      <a:tailEnd type="none" w="med" len="med"/>
+                    </a:lnR>
+                    <a:lnT w="6350" cap="flat" cmpd="sng" algn="ctr">
+                      <a:solidFill>
+                        <a:srgbClr val="E2E5E9"/>
+                      </a:solidFill>
+                      <a:prstDash val="solid"/>
+                      <a:round/>
+                      <a:headEnd type="none" w="med" len="med"/>
+                      <a:tailEnd type="none" w="med" len="med"/>
+                    </a:lnT>
+                    <a:lnB w="6350" cap="flat" cmpd="sng" algn="ctr">
+                      <a:solidFill>
+                        <a:srgbClr val="E2E5E9"/>
+                      </a:solidFill>
+                      <a:prstDash val="solid"/>
+                      <a:round/>
+                      <a:headEnd type="none" w="med" len="med"/>
+                      <a:tailEnd type="none" w="med" len="med"/>
+                    </a:lnB>
+                  </a:tcPr>
+                </a:tc>
+                <a:tc>
+                  <a:txBody>
+                    <a:bodyPr/>
+                    <a:lstStyle/>
+                    <a:p>
+                      <a:pPr indent="0" marL="0">
+                        <a:buNone/>
+                      </a:pPr>
+                      <a:r>
+                        <a:rPr lang="en-US" sz="1050" dirty="0">
+                          <a:solidFill>
+                            <a:srgbClr val="1A1A1A"/>
+                          </a:solidFill>
+                          <a:latin typeface="Microsoft YaHei" pitchFamily="34" charset="0"/>
+                          <a:ea typeface="Microsoft YaHei" pitchFamily="34" charset="-122"/>
+                          <a:cs typeface="Microsoft YaHei" pitchFamily="34" charset="-120"/>
+                        </a:rPr>
+                        <a:t>—</a:t>
+                      </a:r>
+                      <a:endParaRPr lang="en-US" sz="1050" dirty="0">
+                        <a:latin typeface="Microsoft YaHei" charset="0"/>
+                        <a:ea typeface="Microsoft YaHei" charset="0"/>
+                        <a:cs typeface="Microsoft YaHei" charset="0"/>
+                      </a:endParaRPr>
+                    </a:p>
+                  </a:txBody>
+                  <a:tcPr marL="91440" marR="91440" marT="45720" marB="45720" anchor="ctr">
+                    <a:lnL w="6350" cap="flat" cmpd="sng" algn="ctr">
+                      <a:solidFill>
+                        <a:srgbClr val="E2E5E9"/>
+                      </a:solidFill>
+                      <a:prstDash val="solid"/>
+                      <a:round/>
+                      <a:headEnd type="none" w="med" len="med"/>
+                      <a:tailEnd type="none" w="med" len="med"/>
+                    </a:lnL>
+                    <a:lnR w="6350" cap="flat" cmpd="sng" algn="ctr">
+                      <a:solidFill>
+                        <a:srgbClr val="E2E5E9"/>
+                      </a:solidFill>
+                      <a:prstDash val="solid"/>
+                      <a:round/>
+                      <a:headEnd type="none" w="med" len="med"/>
+                      <a:tailEnd type="none" w="med" len="med"/>
+                    </a:lnR>
+                    <a:lnT w="6350" cap="flat" cmpd="sng" algn="ctr">
+                      <a:solidFill>
+                        <a:srgbClr val="E2E5E9"/>
+                      </a:solidFill>
+                      <a:prstDash val="solid"/>
+                      <a:round/>
+                      <a:headEnd type="none" w="med" len="med"/>
+                      <a:tailEnd type="none" w="med" len="med"/>
+                    </a:lnT>
+                    <a:lnB w="6350" cap="flat" cmpd="sng" algn="ctr">
+                      <a:solidFill>
+                        <a:srgbClr val="E2E5E9"/>
+                      </a:solidFill>
+                      <a:prstDash val="solid"/>
+                      <a:round/>
+                      <a:headEnd type="none" w="med" len="med"/>
+                      <a:tailEnd type="none" w="med" len="med"/>
+                    </a:lnB>
+                  </a:tcPr>
+                </a:tc>
+              </a:tr>
+            </a:tbl>
+          </a:graphicData>
+        </a:graphic>
+      </p:graphicFrame>
       <p:sp>
         <p:nvSpPr>
-          <p:cNvPr id="2" name="Text 0"/>
+          <p:cNvPr id="5" name="Text 2"/>
           <p:cNvSpPr txBox="1"/>
           <p:nvPr/>
         </p:nvSpPr>
         <p:spPr>
           <a:xfrm>
-            <a:off x="640080" y="384048"/>
-            <a:ext cx="5486400" cy="502920"/>
+            <a:off x="640080" y="5724144"/>
+            <a:ext cx="10908792" cy="365760"/>
+          </a:xfrm>
+          <a:prstGeom prst="rect">
+            <a:avLst/>
+          </a:prstGeom>
+          <a:noFill/>
+          <a:ln/>
+        </p:spPr>
+        <p:txBody>
+          <a:bodyPr wrap="square" rtlCol="0" anchor="t"/>
+          <a:lstStyle/>
+          <a:p>
+            <a:pPr indent="0" marL="0">
+              <a:lnSpc>
+                <a:spcPct val="120000"/>
+              </a:lnSpc>
+              <a:buNone/>
+            </a:pPr>
+            <a:r>
+              <a:rPr lang="en-US" sz="1200" b="1" dirty="0">
+                <a:solidFill>
+                  <a:srgbClr val="1A1A1A"/>
+                </a:solidFill>
+                <a:latin typeface="Microsoft YaHei" pitchFamily="34" charset="0"/>
+                <a:ea typeface="Microsoft YaHei" pitchFamily="34" charset="-122"/>
+                <a:cs typeface="Microsoft YaHei" pitchFamily="34" charset="-120"/>
+              </a:rPr>
+              <a:t>明确阴性：</a:t>
+            </a:r>
+            <a:pPr indent="0" marL="0">
+              <a:lnSpc>
+                <a:spcPct val="120000"/>
+              </a:lnSpc>
+              <a:buNone/>
+            </a:pPr>
+            <a:r>
+              <a:rPr lang="en-US" sz="1200" dirty="0">
+                <a:solidFill>
+                  <a:srgbClr val="1A1A1A"/>
+                </a:solidFill>
+                <a:latin typeface="Microsoft YaHei" pitchFamily="34" charset="0"/>
+                <a:ea typeface="Microsoft YaHei" pitchFamily="34" charset="-122"/>
+                <a:cs typeface="Microsoft YaHei" pitchFamily="34" charset="-120"/>
+              </a:rPr>
+              <a:t>髓系 62 个「细胞类型 × 分层」0 个符合；人肝 11 类、人脊髓白质 11 类 0 个符合；短 IL-18 转录本占 GTEx v8 6792 个样本的 0.09%。</a:t>
+            </a:r>
+            <a:endParaRPr lang="en-US" sz="1200" dirty="0"/>
+          </a:p>
+        </p:txBody>
+      </p:sp>
+      <p:sp>
+        <p:nvSpPr>
+          <p:cNvPr id="6" name="Text 3"/>
+          <p:cNvSpPr txBox="1"/>
+          <p:nvPr/>
+        </p:nvSpPr>
+        <p:spPr>
+          <a:xfrm>
+            <a:off x="640080" y="6071616"/>
+            <a:ext cx="10908792" cy="365760"/>
+          </a:xfrm>
+          <a:prstGeom prst="rect">
+            <a:avLst/>
+          </a:prstGeom>
+          <a:noFill/>
+          <a:ln/>
+        </p:spPr>
+        <p:txBody>
+          <a:bodyPr wrap="square" rtlCol="0" anchor="t"/>
+          <a:lstStyle/>
+          <a:p>
+            <a:pPr indent="0" marL="0">
+              <a:lnSpc>
+                <a:spcPct val="120000"/>
+              </a:lnSpc>
+              <a:buNone/>
+            </a:pPr>
+            <a:r>
+              <a:rPr lang="en-US" sz="1200" b="1" dirty="0">
+                <a:solidFill>
+                  <a:srgbClr val="1A1A1A"/>
+                </a:solidFill>
+                <a:latin typeface="Microsoft YaHei" pitchFamily="34" charset="0"/>
+                <a:ea typeface="Microsoft YaHei" pitchFamily="34" charset="-122"/>
+                <a:cs typeface="Microsoft YaHei" pitchFamily="34" charset="-120"/>
+              </a:rPr>
+              <a:t>物种不互通：</a:t>
+            </a:r>
+            <a:pPr indent="0" marL="0">
+              <a:lnSpc>
+                <a:spcPct val="120000"/>
+              </a:lnSpc>
+              <a:buNone/>
+            </a:pPr>
+            <a:r>
+              <a:rPr lang="en-US" sz="1200" dirty="0">
+                <a:solidFill>
+                  <a:srgbClr val="1A1A1A"/>
+                </a:solidFill>
+                <a:latin typeface="Microsoft YaHei" pitchFamily="34" charset="0"/>
+                <a:ea typeface="Microsoft YaHei" pitchFamily="34" charset="-122"/>
+                <a:cs typeface="Microsoft YaHei" pitchFamily="34" charset="-120"/>
+              </a:rPr>
+              <a:t>人皮层星形胶质 IL18 4.8%（782/16319）；小鼠皮层 PV 中间神经元 Casp1 同样近零，但 Il18 仅 2.2%（684/30434）。</a:t>
+            </a:r>
+            <a:endParaRPr lang="en-US" sz="1200" dirty="0"/>
+          </a:p>
+        </p:txBody>
+      </p:sp>
+      <p:sp>
+        <p:nvSpPr>
+          <p:cNvPr id="7" name="Text 4"/>
+          <p:cNvSpPr txBox="1"/>
+          <p:nvPr/>
+        </p:nvSpPr>
+        <p:spPr>
+          <a:xfrm>
+            <a:off x="640080" y="6455664"/>
+            <a:ext cx="10908792" cy="274320"/>
           </a:xfrm>
           <a:prstGeom prst="rect">
             <a:avLst/>
@@ -4396,318 +10642,17 @@
               <a:buNone/>
             </a:pPr>
             <a:r>
-              <a:rPr lang="en-US" sz="2600" b="1" dirty="0">
+              <a:rPr lang="en-US" sz="1000" dirty="0">
                 <a:solidFill>
-                  <a:srgbClr val="1A1A1A"/>
+                  <a:srgbClr val="9AA0A6"/>
                 </a:solidFill>
                 <a:latin typeface="Microsoft YaHei" pitchFamily="34" charset="0"/>
                 <a:ea typeface="Microsoft YaHei" pitchFamily="34" charset="-122"/>
                 <a:cs typeface="Microsoft YaHei" pitchFamily="34" charset="-120"/>
               </a:rPr>
-              <a:t>限制与后续</a:t>
+              <a:t>检出率为合并口径（原始计数 ≥1 的细胞数 ÷ 分析细胞数）。同一细胞类型见于多个分层时取供体最多者，×n 为分层数。静息基线，未做环境 RNA 校正。</a:t>
             </a:r>
-            <a:endParaRPr lang="en-US" sz="2600" dirty="0"/>
-          </a:p>
-        </p:txBody>
-      </p:sp>
-      <p:sp>
-        <p:nvSpPr>
-          <p:cNvPr id="3" name="Text 1"/>
-          <p:cNvSpPr txBox="1"/>
-          <p:nvPr/>
-        </p:nvSpPr>
-        <p:spPr>
-          <a:xfrm>
-            <a:off x="868680" y="1280160"/>
-            <a:ext cx="10515600" cy="621792"/>
-          </a:xfrm>
-          <a:prstGeom prst="rect">
-            <a:avLst/>
-          </a:prstGeom>
-          <a:noFill/>
-          <a:ln/>
-        </p:spPr>
-        <p:txBody>
-          <a:bodyPr wrap="square" rtlCol="0" anchor="t"/>
-          <a:lstStyle/>
-          <a:p>
-            <a:pPr marL="190500" indent="-190500">
-              <a:lnSpc>
-                <a:spcPct val="120000"/>
-              </a:lnSpc>
-              <a:buSzPct val="100000"/>
-              <a:buChar char="•"/>
-            </a:pPr>
-            <a:r>
-              <a:rPr lang="en-US" sz="1450" dirty="0">
-                <a:solidFill>
-                  <a:srgbClr val="1A1A1A"/>
-                </a:solidFill>
-                <a:latin typeface="Microsoft YaHei" pitchFamily="34" charset="0"/>
-                <a:ea typeface="Microsoft YaHei" pitchFamily="34" charset="-122"/>
-                <a:cs typeface="Microsoft YaHei" pitchFamily="34" charset="-120"/>
-              </a:rPr>
-              <a:t>静息基线，未做环境 RNA 校正。CASP1 为可诱导基因，静息态近零不预测刺激后；CASP3 的 mRNA 不反映 caspase-3 酶活性，仅用于排除最低档。</a:t>
-            </a:r>
-            <a:endParaRPr lang="en-US" sz="1450" dirty="0"/>
-          </a:p>
-        </p:txBody>
-      </p:sp>
-      <p:sp>
-        <p:nvSpPr>
-          <p:cNvPr id="4" name="Text 2"/>
-          <p:cNvSpPr txBox="1"/>
-          <p:nvPr/>
-        </p:nvSpPr>
-        <p:spPr>
-          <a:xfrm>
-            <a:off x="868680" y="2020824"/>
-            <a:ext cx="10515600" cy="356616"/>
-          </a:xfrm>
-          <a:prstGeom prst="rect">
-            <a:avLst/>
-          </a:prstGeom>
-          <a:noFill/>
-          <a:ln/>
-        </p:spPr>
-        <p:txBody>
-          <a:bodyPr wrap="square" rtlCol="0" anchor="t"/>
-          <a:lstStyle/>
-          <a:p>
-            <a:pPr marL="190500" indent="-190500">
-              <a:lnSpc>
-                <a:spcPct val="120000"/>
-              </a:lnSpc>
-              <a:buSzPct val="100000"/>
-              <a:buChar char="•"/>
-            </a:pPr>
-            <a:r>
-              <a:rPr lang="en-US" sz="1450" dirty="0">
-                <a:solidFill>
-                  <a:srgbClr val="1A1A1A"/>
-                </a:solidFill>
-                <a:latin typeface="Microsoft YaHei" pitchFamily="34" charset="0"/>
-                <a:ea typeface="Microsoft YaHei" pitchFamily="34" charset="-122"/>
-                <a:cs typeface="Microsoft YaHei" pitchFamily="34" charset="-120"/>
-              </a:rPr>
-              <a:t>物种之间、数据集之间、单核与单细胞之间仅比较候选名单，不比较数值。</a:t>
-            </a:r>
-            <a:endParaRPr lang="en-US" sz="1450" dirty="0"/>
-          </a:p>
-        </p:txBody>
-      </p:sp>
-      <p:sp>
-        <p:nvSpPr>
-          <p:cNvPr id="5" name="Text 3"/>
-          <p:cNvSpPr txBox="1"/>
-          <p:nvPr/>
-        </p:nvSpPr>
-        <p:spPr>
-          <a:xfrm>
-            <a:off x="868680" y="2496312"/>
-            <a:ext cx="10515600" cy="621792"/>
-          </a:xfrm>
-          <a:prstGeom prst="rect">
-            <a:avLst/>
-          </a:prstGeom>
-          <a:noFill/>
-          <a:ln/>
-        </p:spPr>
-        <p:txBody>
-          <a:bodyPr wrap="square" rtlCol="0" anchor="t"/>
-          <a:lstStyle/>
-          <a:p>
-            <a:pPr marL="190500" indent="-190500">
-              <a:lnSpc>
-                <a:spcPct val="120000"/>
-              </a:lnSpc>
-              <a:buSzPct val="100000"/>
-              <a:buChar char="•"/>
-            </a:pPr>
-            <a:r>
-              <a:rPr lang="en-US" sz="1450" dirty="0">
-                <a:solidFill>
-                  <a:srgbClr val="1A1A1A"/>
-                </a:solidFill>
-                <a:latin typeface="Microsoft YaHei" pitchFamily="34" charset="0"/>
-                <a:ea typeface="Microsoft YaHei" pitchFamily="34" charset="-122"/>
-                <a:cs typeface="Microsoft YaHei" pitchFamily="34" charset="-120"/>
-              </a:rPr>
-              <a:t>参考层覆盖不均：人肺 AT1 与人胰腺腺泡各 1 个参考来源，4 个细胞类型无来源，小鼠星形胶质 4 个。证据分级在相当程度上反映覆盖差异。</a:t>
-            </a:r>
-            <a:endParaRPr lang="en-US" sz="1450" dirty="0"/>
-          </a:p>
-        </p:txBody>
-      </p:sp>
-      <p:sp>
-        <p:nvSpPr>
-          <p:cNvPr id="6" name="Text 4"/>
-          <p:cNvSpPr txBox="1"/>
-          <p:nvPr/>
-        </p:nvSpPr>
-        <p:spPr>
-          <a:xfrm>
-            <a:off x="868680" y="3236976"/>
-            <a:ext cx="10515600" cy="621792"/>
-          </a:xfrm>
-          <a:prstGeom prst="rect">
-            <a:avLst/>
-          </a:prstGeom>
-          <a:noFill/>
-          <a:ln/>
-        </p:spPr>
-        <p:txBody>
-          <a:bodyPr wrap="square" rtlCol="0" anchor="t"/>
-          <a:lstStyle/>
-          <a:p>
-            <a:pPr marL="190500" indent="-190500">
-              <a:lnSpc>
-                <a:spcPct val="120000"/>
-              </a:lnSpc>
-              <a:buSzPct val="100000"/>
-              <a:buChar char="•"/>
-            </a:pPr>
-            <a:r>
-              <a:rPr lang="en-US" sz="1450" dirty="0">
-                <a:solidFill>
-                  <a:srgbClr val="1A1A1A"/>
-                </a:solidFill>
-                <a:latin typeface="Microsoft YaHei" pitchFamily="34" charset="0"/>
-                <a:ea typeface="Microsoft YaHei" pitchFamily="34" charset="-122"/>
-                <a:cs typeface="Microsoft YaHei" pitchFamily="34" charset="-120"/>
-              </a:rPr>
-              <a:t>零值标尺：静息小鼠小胶质 Casp1 约 50–61 CPM、17% 细胞。阳性对照 L5a IT 锥体神经元 8.34 CPM（25 个文库中 24 个非零）。</a:t>
-            </a:r>
-            <a:endParaRPr lang="en-US" sz="1450" dirty="0"/>
-          </a:p>
-        </p:txBody>
-      </p:sp>
-      <p:sp>
-        <p:nvSpPr>
-          <p:cNvPr id="7" name="Text 5"/>
-          <p:cNvSpPr txBox="1"/>
-          <p:nvPr/>
-        </p:nvSpPr>
-        <p:spPr>
-          <a:xfrm>
-            <a:off x="868680" y="3977640"/>
-            <a:ext cx="10515600" cy="621792"/>
-          </a:xfrm>
-          <a:prstGeom prst="rect">
-            <a:avLst/>
-          </a:prstGeom>
-          <a:noFill/>
-          <a:ln/>
-        </p:spPr>
-        <p:txBody>
-          <a:bodyPr wrap="square" rtlCol="0" anchor="t"/>
-          <a:lstStyle/>
-          <a:p>
-            <a:pPr marL="190500" indent="-190500">
-              <a:lnSpc>
-                <a:spcPct val="120000"/>
-              </a:lnSpc>
-              <a:buSzPct val="100000"/>
-              <a:buChar char="•"/>
-            </a:pPr>
-            <a:r>
-              <a:rPr lang="en-US" sz="1450" dirty="0">
-                <a:solidFill>
-                  <a:srgbClr val="1A1A1A"/>
-                </a:solidFill>
-                <a:latin typeface="Microsoft YaHei" pitchFamily="34" charset="0"/>
-                <a:ea typeface="Microsoft YaHei" pitchFamily="34" charset="-122"/>
-                <a:cs typeface="Microsoft YaHei" pitchFamily="34" charset="-120"/>
-              </a:rPr>
-              <a:t>小鼠星形胶质结论限皮层与海马：小脑 Bergmann 胶质 22.4 CPM、脊髓星形胶质 12.5–16.7 CPM 均测到 Casp1。</a:t>
-            </a:r>
-            <a:endParaRPr lang="en-US" sz="1450" dirty="0"/>
-          </a:p>
-        </p:txBody>
-      </p:sp>
-      <p:sp>
-        <p:nvSpPr>
-          <p:cNvPr id="8" name="Text 6"/>
-          <p:cNvSpPr txBox="1"/>
-          <p:nvPr/>
-        </p:nvSpPr>
-        <p:spPr>
-          <a:xfrm>
-            <a:off x="868680" y="4718304"/>
-            <a:ext cx="10515600" cy="356616"/>
-          </a:xfrm>
-          <a:prstGeom prst="rect">
-            <a:avLst/>
-          </a:prstGeom>
-          <a:noFill/>
-          <a:ln/>
-        </p:spPr>
-        <p:txBody>
-          <a:bodyPr wrap="square" rtlCol="0" anchor="t"/>
-          <a:lstStyle/>
-          <a:p>
-            <a:pPr marL="190500" indent="-190500">
-              <a:lnSpc>
-                <a:spcPct val="120000"/>
-              </a:lnSpc>
-              <a:buSzPct val="100000"/>
-              <a:buChar char="•"/>
-            </a:pPr>
-            <a:r>
-              <a:rPr lang="en-US" sz="1450" dirty="0">
-                <a:solidFill>
-                  <a:srgbClr val="1A1A1A"/>
-                </a:solidFill>
-                <a:latin typeface="Microsoft YaHei" pitchFamily="34" charset="0"/>
-                <a:ea typeface="Microsoft YaHei" pitchFamily="34" charset="-122"/>
-                <a:cs typeface="Microsoft YaHei" pitchFamily="34" charset="-120"/>
-              </a:rPr>
-              <a:t>三分位与「CASP3 最低 20%」为工程取值：改用四分位后候选数由 17 降至 12。</a:t>
-            </a:r>
-            <a:endParaRPr lang="en-US" sz="1450" dirty="0"/>
-          </a:p>
-        </p:txBody>
-      </p:sp>
-      <p:sp>
-        <p:nvSpPr>
-          <p:cNvPr id="9" name="Text 7"/>
-          <p:cNvSpPr txBox="1"/>
-          <p:nvPr/>
-        </p:nvSpPr>
-        <p:spPr>
-          <a:xfrm>
-            <a:off x="868680" y="5193792"/>
-            <a:ext cx="10515600" cy="621792"/>
-          </a:xfrm>
-          <a:prstGeom prst="rect">
-            <a:avLst/>
-          </a:prstGeom>
-          <a:noFill/>
-          <a:ln/>
-        </p:spPr>
-        <p:txBody>
-          <a:bodyPr wrap="square" rtlCol="0" anchor="t"/>
-          <a:lstStyle/>
-          <a:p>
-            <a:pPr marL="190500" indent="-190500">
-              <a:lnSpc>
-                <a:spcPct val="120000"/>
-              </a:lnSpc>
-              <a:buSzPct val="100000"/>
-              <a:buChar char="•"/>
-            </a:pPr>
-            <a:r>
-              <a:rPr lang="en-US" sz="1450" dirty="0">
-                <a:solidFill>
-                  <a:srgbClr val="1A1A1A"/>
-                </a:solidFill>
-                <a:latin typeface="Microsoft YaHei" pitchFamily="34" charset="0"/>
-                <a:ea typeface="Microsoft YaHei" pitchFamily="34" charset="-122"/>
-                <a:cs typeface="Microsoft YaHei" pitchFamily="34" charset="-120"/>
-              </a:rPr>
-              <a:t>待补测量：人肺肥大细胞、人肺 AT1、人胰腺腺泡各需一次原代分选后的 CASP1 定量；小鼠胰岛 δ 细胞需复核比值 5.64 的分歧来源。</a:t>
-            </a:r>
-            <a:endParaRPr lang="en-US" sz="1450" dirty="0"/>
+            <a:endParaRPr lang="en-US" sz="1000" dirty="0"/>
           </a:p>
         </p:txBody>
       </p:sp>

--- a/il18_casp5organ/IL18_CASP_五器官筛选.pptx
+++ b/il18_casp5organ/IL18_CASP_五器官筛选.pptx
@@ -3154,13 +3154,14 @@
             <a:tbl>
               <a:tblPr/>
               <a:tblGrid>
-                <a:gridCol w="1417320"/>
-                <a:gridCol w="3063240"/>
-                <a:gridCol w="2194560"/>
-                <a:gridCol w="2194560"/>
-                <a:gridCol w="667512"/>
-                <a:gridCol w="685800"/>
-                <a:gridCol w="685800"/>
+                <a:gridCol w="1261872"/>
+                <a:gridCol w="2487168"/>
+                <a:gridCol w="1956816"/>
+                <a:gridCol w="1956816"/>
+                <a:gridCol w="1956816"/>
+                <a:gridCol w="502920"/>
+                <a:gridCol w="420624"/>
+                <a:gridCol w="365760"/>
               </a:tblGrid>
               <a:tr h="205740">
                 <a:tc>
@@ -3172,7 +3173,7 @@
                         <a:buNone/>
                       </a:pPr>
                       <a:r>
-                        <a:rPr lang="en-US" sz="1050" b="1" dirty="0">
+                        <a:rPr lang="en-US" sz="1000" b="1" dirty="0">
                           <a:solidFill>
                             <a:srgbClr val="3C3C3C"/>
                           </a:solidFill>
@@ -3182,7 +3183,7 @@
                         </a:rPr>
                         <a:t>物种 · 器官</a:t>
                       </a:r>
-                      <a:endParaRPr lang="en-US" sz="1050" dirty="0">
+                      <a:endParaRPr lang="en-US" sz="1000" dirty="0">
                         <a:latin typeface="Microsoft YaHei" charset="0"/>
                         <a:ea typeface="Microsoft YaHei" charset="0"/>
                         <a:cs typeface="Microsoft YaHei" charset="0"/>
@@ -3240,7 +3241,7 @@
                         <a:buNone/>
                       </a:pPr>
                       <a:r>
-                        <a:rPr lang="en-US" sz="1050" b="1" dirty="0">
+                        <a:rPr lang="en-US" sz="1000" b="1" dirty="0">
                           <a:solidFill>
                             <a:srgbClr val="3C3C3C"/>
                           </a:solidFill>
@@ -3250,7 +3251,7 @@
                         </a:rPr>
                         <a:t>细胞类型</a:t>
                       </a:r>
-                      <a:endParaRPr lang="en-US" sz="1050" dirty="0">
+                      <a:endParaRPr lang="en-US" sz="1000" dirty="0">
                         <a:latin typeface="Microsoft YaHei" charset="0"/>
                         <a:ea typeface="Microsoft YaHei" charset="0"/>
                         <a:cs typeface="Microsoft YaHei" charset="0"/>
@@ -3308,7 +3309,7 @@
                         <a:buNone/>
                       </a:pPr>
                       <a:r>
-                        <a:rPr lang="en-US" sz="1050" b="1" dirty="0">
+                        <a:rPr lang="en-US" sz="1000" b="1" dirty="0">
                           <a:solidFill>
                             <a:srgbClr val="3C3C3C"/>
                           </a:solidFill>
@@ -3318,7 +3319,7 @@
                         </a:rPr>
                         <a:t>IL18 检出</a:t>
                       </a:r>
-                      <a:endParaRPr lang="en-US" sz="1050" dirty="0">
+                      <a:endParaRPr lang="en-US" sz="1000" dirty="0">
                         <a:latin typeface="Microsoft YaHei" charset="0"/>
                         <a:ea typeface="Microsoft YaHei" charset="0"/>
                         <a:cs typeface="Microsoft YaHei" charset="0"/>
@@ -3376,7 +3377,7 @@
                         <a:buNone/>
                       </a:pPr>
                       <a:r>
-                        <a:rPr lang="en-US" sz="1050" b="1" dirty="0">
+                        <a:rPr lang="en-US" sz="1000" b="1" dirty="0">
                           <a:solidFill>
                             <a:srgbClr val="3C3C3C"/>
                           </a:solidFill>
@@ -3386,7 +3387,7 @@
                         </a:rPr>
                         <a:t>CASP1 检出</a:t>
                       </a:r>
-                      <a:endParaRPr lang="en-US" sz="1050" dirty="0">
+                      <a:endParaRPr lang="en-US" sz="1000" dirty="0">
                         <a:latin typeface="Microsoft YaHei" charset="0"/>
                         <a:ea typeface="Microsoft YaHei" charset="0"/>
                         <a:cs typeface="Microsoft YaHei" charset="0"/>
@@ -3444,7 +3445,7 @@
                         <a:buNone/>
                       </a:pPr>
                       <a:r>
-                        <a:rPr lang="en-US" sz="1050" b="1" dirty="0">
+                        <a:rPr lang="en-US" sz="1000" b="1" dirty="0">
                           <a:solidFill>
                             <a:srgbClr val="3C3C3C"/>
                           </a:solidFill>
@@ -3452,9 +3453,9 @@
                           <a:ea typeface="Microsoft YaHei" pitchFamily="34" charset="-122"/>
                           <a:cs typeface="Microsoft YaHei" pitchFamily="34" charset="-120"/>
                         </a:rPr>
-                        <a:t>供体</a:t>
+                        <a:t>CASP3 检出</a:t>
                       </a:r>
-                      <a:endParaRPr lang="en-US" sz="1050" dirty="0">
+                      <a:endParaRPr lang="en-US" sz="1000" dirty="0">
                         <a:latin typeface="Microsoft YaHei" charset="0"/>
                         <a:ea typeface="Microsoft YaHei" charset="0"/>
                         <a:cs typeface="Microsoft YaHei" charset="0"/>
@@ -3512,7 +3513,7 @@
                         <a:buNone/>
                       </a:pPr>
                       <a:r>
-                        <a:rPr lang="en-US" sz="1050" b="1" dirty="0">
+                        <a:rPr lang="en-US" sz="1000" b="1" dirty="0">
                           <a:solidFill>
                             <a:srgbClr val="3C3C3C"/>
                           </a:solidFill>
@@ -3520,9 +3521,9 @@
                           <a:ea typeface="Microsoft YaHei" pitchFamily="34" charset="-122"/>
                           <a:cs typeface="Microsoft YaHei" pitchFamily="34" charset="-120"/>
                         </a:rPr>
-                        <a:t>支持</a:t>
+                        <a:t>供体</a:t>
                       </a:r>
-                      <a:endParaRPr lang="en-US" sz="1050" dirty="0">
+                      <a:endParaRPr lang="en-US" sz="1000" dirty="0">
                         <a:latin typeface="Microsoft YaHei" charset="0"/>
                         <a:ea typeface="Microsoft YaHei" charset="0"/>
                         <a:cs typeface="Microsoft YaHei" charset="0"/>
@@ -3580,7 +3581,75 @@
                         <a:buNone/>
                       </a:pPr>
                       <a:r>
-                        <a:rPr lang="en-US" sz="1050" b="1" dirty="0">
+                        <a:rPr lang="en-US" sz="1000" b="1" dirty="0">
+                          <a:solidFill>
+                            <a:srgbClr val="3C3C3C"/>
+                          </a:solidFill>
+                          <a:latin typeface="Microsoft YaHei" pitchFamily="34" charset="0"/>
+                          <a:ea typeface="Microsoft YaHei" pitchFamily="34" charset="-122"/>
+                          <a:cs typeface="Microsoft YaHei" pitchFamily="34" charset="-120"/>
+                        </a:rPr>
+                        <a:t>支持</a:t>
+                      </a:r>
+                      <a:endParaRPr lang="en-US" sz="1000" dirty="0">
+                        <a:latin typeface="Microsoft YaHei" charset="0"/>
+                        <a:ea typeface="Microsoft YaHei" charset="0"/>
+                        <a:cs typeface="Microsoft YaHei" charset="0"/>
+                      </a:endParaRPr>
+                    </a:p>
+                  </a:txBody>
+                  <a:tcPr marL="91440" marR="91440" marT="45720" marB="45720" anchor="ctr">
+                    <a:lnL w="6350" cap="flat" cmpd="sng" algn="ctr">
+                      <a:solidFill>
+                        <a:srgbClr val="E2E5E9"/>
+                      </a:solidFill>
+                      <a:prstDash val="solid"/>
+                      <a:round/>
+                      <a:headEnd type="none" w="med" len="med"/>
+                      <a:tailEnd type="none" w="med" len="med"/>
+                    </a:lnL>
+                    <a:lnR w="6350" cap="flat" cmpd="sng" algn="ctr">
+                      <a:solidFill>
+                        <a:srgbClr val="E2E5E9"/>
+                      </a:solidFill>
+                      <a:prstDash val="solid"/>
+                      <a:round/>
+                      <a:headEnd type="none" w="med" len="med"/>
+                      <a:tailEnd type="none" w="med" len="med"/>
+                    </a:lnR>
+                    <a:lnT w="6350" cap="flat" cmpd="sng" algn="ctr">
+                      <a:solidFill>
+                        <a:srgbClr val="E2E5E9"/>
+                      </a:solidFill>
+                      <a:prstDash val="solid"/>
+                      <a:round/>
+                      <a:headEnd type="none" w="med" len="med"/>
+                      <a:tailEnd type="none" w="med" len="med"/>
+                    </a:lnT>
+                    <a:lnB w="6350" cap="flat" cmpd="sng" algn="ctr">
+                      <a:solidFill>
+                        <a:srgbClr val="E2E5E9"/>
+                      </a:solidFill>
+                      <a:prstDash val="solid"/>
+                      <a:round/>
+                      <a:headEnd type="none" w="med" len="med"/>
+                      <a:tailEnd type="none" w="med" len="med"/>
+                    </a:lnB>
+                    <a:solidFill>
+                      <a:srgbClr val="EEF1F5"/>
+                    </a:solidFill>
+                  </a:tcPr>
+                </a:tc>
+                <a:tc>
+                  <a:txBody>
+                    <a:bodyPr/>
+                    <a:lstStyle/>
+                    <a:p>
+                      <a:pPr indent="0" marL="0">
+                        <a:buNone/>
+                      </a:pPr>
+                      <a:r>
+                        <a:rPr lang="en-US" sz="1000" b="1" dirty="0">
                           <a:solidFill>
                             <a:srgbClr val="3C3C3C"/>
                           </a:solidFill>
@@ -3590,7 +3659,7 @@
                         </a:rPr>
                         <a:t>分歧</a:t>
                       </a:r>
-                      <a:endParaRPr lang="en-US" sz="1050" dirty="0">
+                      <a:endParaRPr lang="en-US" sz="1000" dirty="0">
                         <a:latin typeface="Microsoft YaHei" charset="0"/>
                         <a:ea typeface="Microsoft YaHei" charset="0"/>
                         <a:cs typeface="Microsoft YaHei" charset="0"/>
@@ -3650,7 +3719,7 @@
                         <a:buNone/>
                       </a:pPr>
                       <a:r>
-                        <a:rPr lang="en-US" sz="1050" dirty="0">
+                        <a:rPr lang="en-US" sz="1000" dirty="0">
                           <a:solidFill>
                             <a:srgbClr val="1A1A1A"/>
                           </a:solidFill>
@@ -3660,7 +3729,7 @@
                         </a:rPr>
                         <a:t>小鼠 · 脑</a:t>
                       </a:r>
-                      <a:endParaRPr lang="en-US" sz="1050" dirty="0">
+                      <a:endParaRPr lang="en-US" sz="1000" dirty="0">
                         <a:latin typeface="Microsoft YaHei" charset="0"/>
                         <a:ea typeface="Microsoft YaHei" charset="0"/>
                         <a:cs typeface="Microsoft YaHei" charset="0"/>
@@ -3715,7 +3784,7 @@
                         <a:buNone/>
                       </a:pPr>
                       <a:r>
-                        <a:rPr lang="en-US" sz="1050" dirty="0">
+                        <a:rPr lang="en-US" sz="1000" dirty="0">
                           <a:solidFill>
                             <a:srgbClr val="1A1A1A"/>
                           </a:solidFill>
@@ -3725,7 +3794,7 @@
                         </a:rPr>
                         <a:t>星形胶质</a:t>
                       </a:r>
-                      <a:endParaRPr lang="en-US" sz="1050" dirty="0">
+                      <a:endParaRPr lang="en-US" sz="1000" dirty="0">
                         <a:latin typeface="Microsoft YaHei" charset="0"/>
                         <a:ea typeface="Microsoft YaHei" charset="0"/>
                         <a:cs typeface="Microsoft YaHei" charset="0"/>
@@ -3780,7 +3849,7 @@
                         <a:buNone/>
                       </a:pPr>
                       <a:r>
-                        <a:rPr lang="en-US" sz="1050" dirty="0">
+                        <a:rPr lang="en-US" sz="1000" dirty="0">
                           <a:solidFill>
                             <a:srgbClr val="1A1A1A"/>
                           </a:solidFill>
@@ -3790,7 +3859,7 @@
                         </a:rPr>
                         <a:t>56.7%　2135/3766</a:t>
                       </a:r>
-                      <a:endParaRPr lang="en-US" sz="1050" dirty="0">
+                      <a:endParaRPr lang="en-US" sz="1000" dirty="0">
                         <a:latin typeface="Microsoft YaHei" charset="0"/>
                         <a:ea typeface="Microsoft YaHei" charset="0"/>
                         <a:cs typeface="Microsoft YaHei" charset="0"/>
@@ -3845,7 +3914,7 @@
                         <a:buNone/>
                       </a:pPr>
                       <a:r>
-                        <a:rPr lang="en-US" sz="1050" dirty="0">
+                        <a:rPr lang="en-US" sz="1000" dirty="0">
                           <a:solidFill>
                             <a:srgbClr val="1A1A1A"/>
                           </a:solidFill>
@@ -3855,7 +3924,7 @@
                         </a:rPr>
                         <a:t>0.05%　2/3766</a:t>
                       </a:r>
-                      <a:endParaRPr lang="en-US" sz="1050" dirty="0">
+                      <a:endParaRPr lang="en-US" sz="1000" dirty="0">
                         <a:latin typeface="Microsoft YaHei" charset="0"/>
                         <a:ea typeface="Microsoft YaHei" charset="0"/>
                         <a:cs typeface="Microsoft YaHei" charset="0"/>
@@ -3910,7 +3979,7 @@
                         <a:buNone/>
                       </a:pPr>
                       <a:r>
-                        <a:rPr lang="en-US" sz="1050" dirty="0">
+                        <a:rPr lang="en-US" sz="1000" dirty="0">
                           <a:solidFill>
                             <a:srgbClr val="1A1A1A"/>
                           </a:solidFill>
@@ -3918,9 +3987,9 @@
                           <a:ea typeface="Microsoft YaHei" pitchFamily="34" charset="-122"/>
                           <a:cs typeface="Microsoft YaHei" pitchFamily="34" charset="-120"/>
                         </a:rPr>
-                        <a:t>40</a:t>
+                        <a:t>2.73%　103/3766</a:t>
                       </a:r>
-                      <a:endParaRPr lang="en-US" sz="1050" dirty="0">
+                      <a:endParaRPr lang="en-US" sz="1000" dirty="0">
                         <a:latin typeface="Microsoft YaHei" charset="0"/>
                         <a:ea typeface="Microsoft YaHei" charset="0"/>
                         <a:cs typeface="Microsoft YaHei" charset="0"/>
@@ -3975,7 +4044,7 @@
                         <a:buNone/>
                       </a:pPr>
                       <a:r>
-                        <a:rPr lang="en-US" sz="1050" dirty="0">
+                        <a:rPr lang="en-US" sz="1000" dirty="0">
                           <a:solidFill>
                             <a:srgbClr val="1A1A1A"/>
                           </a:solidFill>
@@ -3983,9 +4052,9 @@
                           <a:ea typeface="Microsoft YaHei" pitchFamily="34" charset="-122"/>
                           <a:cs typeface="Microsoft YaHei" pitchFamily="34" charset="-120"/>
                         </a:rPr>
-                        <a:t>4</a:t>
+                        <a:t>40</a:t>
                       </a:r>
-                      <a:endParaRPr lang="en-US" sz="1050" dirty="0">
+                      <a:endParaRPr lang="en-US" sz="1000" dirty="0">
                         <a:latin typeface="Microsoft YaHei" charset="0"/>
                         <a:ea typeface="Microsoft YaHei" charset="0"/>
                         <a:cs typeface="Microsoft YaHei" charset="0"/>
@@ -4040,7 +4109,72 @@
                         <a:buNone/>
                       </a:pPr>
                       <a:r>
-                        <a:rPr lang="en-US" sz="1050" dirty="0">
+                        <a:rPr lang="en-US" sz="1000" dirty="0">
+                          <a:solidFill>
+                            <a:srgbClr val="1A1A1A"/>
+                          </a:solidFill>
+                          <a:latin typeface="Microsoft YaHei" pitchFamily="34" charset="0"/>
+                          <a:ea typeface="Microsoft YaHei" pitchFamily="34" charset="-122"/>
+                          <a:cs typeface="Microsoft YaHei" pitchFamily="34" charset="-120"/>
+                        </a:rPr>
+                        <a:t>4</a:t>
+                      </a:r>
+                      <a:endParaRPr lang="en-US" sz="1000" dirty="0">
+                        <a:latin typeface="Microsoft YaHei" charset="0"/>
+                        <a:ea typeface="Microsoft YaHei" charset="0"/>
+                        <a:cs typeface="Microsoft YaHei" charset="0"/>
+                      </a:endParaRPr>
+                    </a:p>
+                  </a:txBody>
+                  <a:tcPr marL="91440" marR="91440" marT="45720" marB="45720" anchor="ctr">
+                    <a:lnL w="6350" cap="flat" cmpd="sng" algn="ctr">
+                      <a:solidFill>
+                        <a:srgbClr val="E2E5E9"/>
+                      </a:solidFill>
+                      <a:prstDash val="solid"/>
+                      <a:round/>
+                      <a:headEnd type="none" w="med" len="med"/>
+                      <a:tailEnd type="none" w="med" len="med"/>
+                    </a:lnL>
+                    <a:lnR w="6350" cap="flat" cmpd="sng" algn="ctr">
+                      <a:solidFill>
+                        <a:srgbClr val="E2E5E9"/>
+                      </a:solidFill>
+                      <a:prstDash val="solid"/>
+                      <a:round/>
+                      <a:headEnd type="none" w="med" len="med"/>
+                      <a:tailEnd type="none" w="med" len="med"/>
+                    </a:lnR>
+                    <a:lnT w="6350" cap="flat" cmpd="sng" algn="ctr">
+                      <a:solidFill>
+                        <a:srgbClr val="E2E5E9"/>
+                      </a:solidFill>
+                      <a:prstDash val="solid"/>
+                      <a:round/>
+                      <a:headEnd type="none" w="med" len="med"/>
+                      <a:tailEnd type="none" w="med" len="med"/>
+                    </a:lnT>
+                    <a:lnB w="6350" cap="flat" cmpd="sng" algn="ctr">
+                      <a:solidFill>
+                        <a:srgbClr val="E2E5E9"/>
+                      </a:solidFill>
+                      <a:prstDash val="solid"/>
+                      <a:round/>
+                      <a:headEnd type="none" w="med" len="med"/>
+                      <a:tailEnd type="none" w="med" len="med"/>
+                    </a:lnB>
+                  </a:tcPr>
+                </a:tc>
+                <a:tc>
+                  <a:txBody>
+                    <a:bodyPr/>
+                    <a:lstStyle/>
+                    <a:p>
+                      <a:pPr indent="0" marL="0">
+                        <a:buNone/>
+                      </a:pPr>
+                      <a:r>
+                        <a:rPr lang="en-US" sz="1000" dirty="0">
                           <a:solidFill>
                             <a:srgbClr val="1A1A1A"/>
                           </a:solidFill>
@@ -4050,7 +4184,7 @@
                         </a:rPr>
                         <a:t>—</a:t>
                       </a:r>
-                      <a:endParaRPr lang="en-US" sz="1050" dirty="0">
+                      <a:endParaRPr lang="en-US" sz="1000" dirty="0">
                         <a:latin typeface="Microsoft YaHei" charset="0"/>
                         <a:ea typeface="Microsoft YaHei" charset="0"/>
                         <a:cs typeface="Microsoft YaHei" charset="0"/>
@@ -4107,7 +4241,7 @@
                         <a:buNone/>
                       </a:pPr>
                       <a:r>
-                        <a:rPr lang="en-US" sz="1050" dirty="0">
+                        <a:rPr lang="en-US" sz="1000" dirty="0">
                           <a:solidFill>
                             <a:srgbClr val="1A1A1A"/>
                           </a:solidFill>
@@ -4117,7 +4251,7 @@
                         </a:rPr>
                         <a:t>小鼠 · 胰</a:t>
                       </a:r>
-                      <a:endParaRPr lang="en-US" sz="1050" dirty="0">
+                      <a:endParaRPr lang="en-US" sz="1000" dirty="0">
                         <a:latin typeface="Microsoft YaHei" charset="0"/>
                         <a:ea typeface="Microsoft YaHei" charset="0"/>
                         <a:cs typeface="Microsoft YaHei" charset="0"/>
@@ -4172,7 +4306,7 @@
                         <a:buNone/>
                       </a:pPr>
                       <a:r>
-                        <a:rPr lang="en-US" sz="1050" dirty="0">
+                        <a:rPr lang="en-US" sz="1000" dirty="0">
                           <a:solidFill>
                             <a:srgbClr val="1A1A1A"/>
                           </a:solidFill>
@@ -4182,7 +4316,7 @@
                         </a:rPr>
                         <a:t>胰岛 D(δ) 细胞 ×2</a:t>
                       </a:r>
-                      <a:endParaRPr lang="en-US" sz="1050" dirty="0">
+                      <a:endParaRPr lang="en-US" sz="1000" dirty="0">
                         <a:latin typeface="Microsoft YaHei" charset="0"/>
                         <a:ea typeface="Microsoft YaHei" charset="0"/>
                         <a:cs typeface="Microsoft YaHei" charset="0"/>
@@ -4237,7 +4371,7 @@
                         <a:buNone/>
                       </a:pPr>
                       <a:r>
-                        <a:rPr lang="en-US" sz="1050" dirty="0">
+                        <a:rPr lang="en-US" sz="1000" dirty="0">
                           <a:solidFill>
                             <a:srgbClr val="1A1A1A"/>
                           </a:solidFill>
@@ -4247,7 +4381,7 @@
                         </a:rPr>
                         <a:t>11.3%　842/7468</a:t>
                       </a:r>
-                      <a:endParaRPr lang="en-US" sz="1050" dirty="0">
+                      <a:endParaRPr lang="en-US" sz="1000" dirty="0">
                         <a:latin typeface="Microsoft YaHei" charset="0"/>
                         <a:ea typeface="Microsoft YaHei" charset="0"/>
                         <a:cs typeface="Microsoft YaHei" charset="0"/>
@@ -4302,7 +4436,7 @@
                         <a:buNone/>
                       </a:pPr>
                       <a:r>
-                        <a:rPr lang="en-US" sz="1050" dirty="0">
+                        <a:rPr lang="en-US" sz="1000" dirty="0">
                           <a:solidFill>
                             <a:srgbClr val="1A1A1A"/>
                           </a:solidFill>
@@ -4312,7 +4446,7 @@
                         </a:rPr>
                         <a:t>0.08%　6/7468</a:t>
                       </a:r>
-                      <a:endParaRPr lang="en-US" sz="1050" dirty="0">
+                      <a:endParaRPr lang="en-US" sz="1000" dirty="0">
                         <a:latin typeface="Microsoft YaHei" charset="0"/>
                         <a:ea typeface="Microsoft YaHei" charset="0"/>
                         <a:cs typeface="Microsoft YaHei" charset="0"/>
@@ -4367,7 +4501,7 @@
                         <a:buNone/>
                       </a:pPr>
                       <a:r>
-                        <a:rPr lang="en-US" sz="1050" dirty="0">
+                        <a:rPr lang="en-US" sz="1000" dirty="0">
                           <a:solidFill>
                             <a:srgbClr val="1A1A1A"/>
                           </a:solidFill>
@@ -4375,9 +4509,9 @@
                           <a:ea typeface="Microsoft YaHei" pitchFamily="34" charset="-122"/>
                           <a:cs typeface="Microsoft YaHei" pitchFamily="34" charset="-120"/>
                         </a:rPr>
-                        <a:t>24</a:t>
+                        <a:t>19.3%　1438/7468</a:t>
                       </a:r>
-                      <a:endParaRPr lang="en-US" sz="1050" dirty="0">
+                      <a:endParaRPr lang="en-US" sz="1000" dirty="0">
                         <a:latin typeface="Microsoft YaHei" charset="0"/>
                         <a:ea typeface="Microsoft YaHei" charset="0"/>
                         <a:cs typeface="Microsoft YaHei" charset="0"/>
@@ -4432,7 +4566,7 @@
                         <a:buNone/>
                       </a:pPr>
                       <a:r>
-                        <a:rPr lang="en-US" sz="1050" dirty="0">
+                        <a:rPr lang="en-US" sz="1000" dirty="0">
                           <a:solidFill>
                             <a:srgbClr val="1A1A1A"/>
                           </a:solidFill>
@@ -4440,9 +4574,9 @@
                           <a:ea typeface="Microsoft YaHei" pitchFamily="34" charset="-122"/>
                           <a:cs typeface="Microsoft YaHei" pitchFamily="34" charset="-120"/>
                         </a:rPr>
-                        <a:t>4</a:t>
+                        <a:t>24</a:t>
                       </a:r>
-                      <a:endParaRPr lang="en-US" sz="1050" dirty="0">
+                      <a:endParaRPr lang="en-US" sz="1000" dirty="0">
                         <a:latin typeface="Microsoft YaHei" charset="0"/>
                         <a:ea typeface="Microsoft YaHei" charset="0"/>
                         <a:cs typeface="Microsoft YaHei" charset="0"/>
@@ -4497,7 +4631,72 @@
                         <a:buNone/>
                       </a:pPr>
                       <a:r>
-                        <a:rPr lang="en-US" sz="1050" dirty="0">
+                        <a:rPr lang="en-US" sz="1000" dirty="0">
+                          <a:solidFill>
+                            <a:srgbClr val="1A1A1A"/>
+                          </a:solidFill>
+                          <a:latin typeface="Microsoft YaHei" pitchFamily="34" charset="0"/>
+                          <a:ea typeface="Microsoft YaHei" pitchFamily="34" charset="-122"/>
+                          <a:cs typeface="Microsoft YaHei" pitchFamily="34" charset="-120"/>
+                        </a:rPr>
+                        <a:t>4</a:t>
+                      </a:r>
+                      <a:endParaRPr lang="en-US" sz="1000" dirty="0">
+                        <a:latin typeface="Microsoft YaHei" charset="0"/>
+                        <a:ea typeface="Microsoft YaHei" charset="0"/>
+                        <a:cs typeface="Microsoft YaHei" charset="0"/>
+                      </a:endParaRPr>
+                    </a:p>
+                  </a:txBody>
+                  <a:tcPr marL="91440" marR="91440" marT="45720" marB="45720" anchor="ctr">
+                    <a:lnL w="6350" cap="flat" cmpd="sng" algn="ctr">
+                      <a:solidFill>
+                        <a:srgbClr val="E2E5E9"/>
+                      </a:solidFill>
+                      <a:prstDash val="solid"/>
+                      <a:round/>
+                      <a:headEnd type="none" w="med" len="med"/>
+                      <a:tailEnd type="none" w="med" len="med"/>
+                    </a:lnL>
+                    <a:lnR w="6350" cap="flat" cmpd="sng" algn="ctr">
+                      <a:solidFill>
+                        <a:srgbClr val="E2E5E9"/>
+                      </a:solidFill>
+                      <a:prstDash val="solid"/>
+                      <a:round/>
+                      <a:headEnd type="none" w="med" len="med"/>
+                      <a:tailEnd type="none" w="med" len="med"/>
+                    </a:lnR>
+                    <a:lnT w="6350" cap="flat" cmpd="sng" algn="ctr">
+                      <a:solidFill>
+                        <a:srgbClr val="E2E5E9"/>
+                      </a:solidFill>
+                      <a:prstDash val="solid"/>
+                      <a:round/>
+                      <a:headEnd type="none" w="med" len="med"/>
+                      <a:tailEnd type="none" w="med" len="med"/>
+                    </a:lnT>
+                    <a:lnB w="6350" cap="flat" cmpd="sng" algn="ctr">
+                      <a:solidFill>
+                        <a:srgbClr val="E2E5E9"/>
+                      </a:solidFill>
+                      <a:prstDash val="solid"/>
+                      <a:round/>
+                      <a:headEnd type="none" w="med" len="med"/>
+                      <a:tailEnd type="none" w="med" len="med"/>
+                    </a:lnB>
+                  </a:tcPr>
+                </a:tc>
+                <a:tc>
+                  <a:txBody>
+                    <a:bodyPr/>
+                    <a:lstStyle/>
+                    <a:p>
+                      <a:pPr indent="0" marL="0">
+                        <a:buNone/>
+                      </a:pPr>
+                      <a:r>
+                        <a:rPr lang="en-US" sz="1000" dirty="0">
                           <a:solidFill>
                             <a:srgbClr val="1A1A1A"/>
                           </a:solidFill>
@@ -4507,7 +4706,7 @@
                         </a:rPr>
                         <a:t>1</a:t>
                       </a:r>
-                      <a:endParaRPr lang="en-US" sz="1050" dirty="0">
+                      <a:endParaRPr lang="en-US" sz="1000" dirty="0">
                         <a:latin typeface="Microsoft YaHei" charset="0"/>
                         <a:ea typeface="Microsoft YaHei" charset="0"/>
                         <a:cs typeface="Microsoft YaHei" charset="0"/>
@@ -4564,7 +4763,7 @@
                         <a:buNone/>
                       </a:pPr>
                       <a:r>
-                        <a:rPr lang="en-US" sz="1050" dirty="0">
+                        <a:rPr lang="en-US" sz="1000" dirty="0">
                           <a:solidFill>
                             <a:srgbClr val="1A1A1A"/>
                           </a:solidFill>
@@ -4574,7 +4773,7 @@
                         </a:rPr>
                         <a:t>小鼠 · 脑</a:t>
                       </a:r>
-                      <a:endParaRPr lang="en-US" sz="1050" dirty="0">
+                      <a:endParaRPr lang="en-US" sz="1000" dirty="0">
                         <a:latin typeface="Microsoft YaHei" charset="0"/>
                         <a:ea typeface="Microsoft YaHei" charset="0"/>
                         <a:cs typeface="Microsoft YaHei" charset="0"/>
@@ -4629,7 +4828,7 @@
                         <a:buNone/>
                       </a:pPr>
                       <a:r>
-                        <a:rPr lang="en-US" sz="1050" dirty="0">
+                        <a:rPr lang="en-US" sz="1000" dirty="0">
                           <a:solidFill>
                             <a:srgbClr val="1A1A1A"/>
                           </a:solidFill>
@@ -4639,7 +4838,7 @@
                         </a:rPr>
                         <a:t>少突胶质</a:t>
                       </a:r>
-                      <a:endParaRPr lang="en-US" sz="1050" dirty="0">
+                      <a:endParaRPr lang="en-US" sz="1000" dirty="0">
                         <a:latin typeface="Microsoft YaHei" charset="0"/>
                         <a:ea typeface="Microsoft YaHei" charset="0"/>
                         <a:cs typeface="Microsoft YaHei" charset="0"/>
@@ -4694,7 +4893,7 @@
                         <a:buNone/>
                       </a:pPr>
                       <a:r>
-                        <a:rPr lang="en-US" sz="1050" dirty="0">
+                        <a:rPr lang="en-US" sz="1000" dirty="0">
                           <a:solidFill>
                             <a:srgbClr val="1A1A1A"/>
                           </a:solidFill>
@@ -4704,7 +4903,7 @@
                         </a:rPr>
                         <a:t>27.3%　2452/8987</a:t>
                       </a:r>
-                      <a:endParaRPr lang="en-US" sz="1050" dirty="0">
+                      <a:endParaRPr lang="en-US" sz="1000" dirty="0">
                         <a:latin typeface="Microsoft YaHei" charset="0"/>
                         <a:ea typeface="Microsoft YaHei" charset="0"/>
                         <a:cs typeface="Microsoft YaHei" charset="0"/>
@@ -4759,7 +4958,7 @@
                         <a:buNone/>
                       </a:pPr>
                       <a:r>
-                        <a:rPr lang="en-US" sz="1050" dirty="0">
+                        <a:rPr lang="en-US" sz="1000" dirty="0">
                           <a:solidFill>
                             <a:srgbClr val="1A1A1A"/>
                           </a:solidFill>
@@ -4769,7 +4968,7 @@
                         </a:rPr>
                         <a:t>0.02%　2/8987</a:t>
                       </a:r>
-                      <a:endParaRPr lang="en-US" sz="1050" dirty="0">
+                      <a:endParaRPr lang="en-US" sz="1000" dirty="0">
                         <a:latin typeface="Microsoft YaHei" charset="0"/>
                         <a:ea typeface="Microsoft YaHei" charset="0"/>
                         <a:cs typeface="Microsoft YaHei" charset="0"/>
@@ -4824,7 +5023,7 @@
                         <a:buNone/>
                       </a:pPr>
                       <a:r>
-                        <a:rPr lang="en-US" sz="1050" dirty="0">
+                        <a:rPr lang="en-US" sz="1000" dirty="0">
                           <a:solidFill>
                             <a:srgbClr val="1A1A1A"/>
                           </a:solidFill>
@@ -4832,9 +5031,9 @@
                           <a:ea typeface="Microsoft YaHei" pitchFamily="34" charset="-122"/>
                           <a:cs typeface="Microsoft YaHei" pitchFamily="34" charset="-120"/>
                         </a:rPr>
-                        <a:t>55</a:t>
+                        <a:t>6.83%　614/8987</a:t>
                       </a:r>
-                      <a:endParaRPr lang="en-US" sz="1050" dirty="0">
+                      <a:endParaRPr lang="en-US" sz="1000" dirty="0">
                         <a:latin typeface="Microsoft YaHei" charset="0"/>
                         <a:ea typeface="Microsoft YaHei" charset="0"/>
                         <a:cs typeface="Microsoft YaHei" charset="0"/>
@@ -4889,7 +5088,7 @@
                         <a:buNone/>
                       </a:pPr>
                       <a:r>
-                        <a:rPr lang="en-US" sz="1050" dirty="0">
+                        <a:rPr lang="en-US" sz="1000" dirty="0">
                           <a:solidFill>
                             <a:srgbClr val="1A1A1A"/>
                           </a:solidFill>
@@ -4897,9 +5096,9 @@
                           <a:ea typeface="Microsoft YaHei" pitchFamily="34" charset="-122"/>
                           <a:cs typeface="Microsoft YaHei" pitchFamily="34" charset="-120"/>
                         </a:rPr>
-                        <a:t>3</a:t>
+                        <a:t>55</a:t>
                       </a:r>
-                      <a:endParaRPr lang="en-US" sz="1050" dirty="0">
+                      <a:endParaRPr lang="en-US" sz="1000" dirty="0">
                         <a:latin typeface="Microsoft YaHei" charset="0"/>
                         <a:ea typeface="Microsoft YaHei" charset="0"/>
                         <a:cs typeface="Microsoft YaHei" charset="0"/>
@@ -4954,7 +5153,72 @@
                         <a:buNone/>
                       </a:pPr>
                       <a:r>
-                        <a:rPr lang="en-US" sz="1050" dirty="0">
+                        <a:rPr lang="en-US" sz="1000" dirty="0">
+                          <a:solidFill>
+                            <a:srgbClr val="1A1A1A"/>
+                          </a:solidFill>
+                          <a:latin typeface="Microsoft YaHei" pitchFamily="34" charset="0"/>
+                          <a:ea typeface="Microsoft YaHei" pitchFamily="34" charset="-122"/>
+                          <a:cs typeface="Microsoft YaHei" pitchFamily="34" charset="-120"/>
+                        </a:rPr>
+                        <a:t>3</a:t>
+                      </a:r>
+                      <a:endParaRPr lang="en-US" sz="1000" dirty="0">
+                        <a:latin typeface="Microsoft YaHei" charset="0"/>
+                        <a:ea typeface="Microsoft YaHei" charset="0"/>
+                        <a:cs typeface="Microsoft YaHei" charset="0"/>
+                      </a:endParaRPr>
+                    </a:p>
+                  </a:txBody>
+                  <a:tcPr marL="91440" marR="91440" marT="45720" marB="45720" anchor="ctr">
+                    <a:lnL w="6350" cap="flat" cmpd="sng" algn="ctr">
+                      <a:solidFill>
+                        <a:srgbClr val="E2E5E9"/>
+                      </a:solidFill>
+                      <a:prstDash val="solid"/>
+                      <a:round/>
+                      <a:headEnd type="none" w="med" len="med"/>
+                      <a:tailEnd type="none" w="med" len="med"/>
+                    </a:lnL>
+                    <a:lnR w="6350" cap="flat" cmpd="sng" algn="ctr">
+                      <a:solidFill>
+                        <a:srgbClr val="E2E5E9"/>
+                      </a:solidFill>
+                      <a:prstDash val="solid"/>
+                      <a:round/>
+                      <a:headEnd type="none" w="med" len="med"/>
+                      <a:tailEnd type="none" w="med" len="med"/>
+                    </a:lnR>
+                    <a:lnT w="6350" cap="flat" cmpd="sng" algn="ctr">
+                      <a:solidFill>
+                        <a:srgbClr val="E2E5E9"/>
+                      </a:solidFill>
+                      <a:prstDash val="solid"/>
+                      <a:round/>
+                      <a:headEnd type="none" w="med" len="med"/>
+                      <a:tailEnd type="none" w="med" len="med"/>
+                    </a:lnT>
+                    <a:lnB w="6350" cap="flat" cmpd="sng" algn="ctr">
+                      <a:solidFill>
+                        <a:srgbClr val="E2E5E9"/>
+                      </a:solidFill>
+                      <a:prstDash val="solid"/>
+                      <a:round/>
+                      <a:headEnd type="none" w="med" len="med"/>
+                      <a:tailEnd type="none" w="med" len="med"/>
+                    </a:lnB>
+                  </a:tcPr>
+                </a:tc>
+                <a:tc>
+                  <a:txBody>
+                    <a:bodyPr/>
+                    <a:lstStyle/>
+                    <a:p>
+                      <a:pPr indent="0" marL="0">
+                        <a:buNone/>
+                      </a:pPr>
+                      <a:r>
+                        <a:rPr lang="en-US" sz="1000" dirty="0">
                           <a:solidFill>
                             <a:srgbClr val="1A1A1A"/>
                           </a:solidFill>
@@ -4964,7 +5228,7 @@
                         </a:rPr>
                         <a:t>—</a:t>
                       </a:r>
-                      <a:endParaRPr lang="en-US" sz="1050" dirty="0">
+                      <a:endParaRPr lang="en-US" sz="1000" dirty="0">
                         <a:latin typeface="Microsoft YaHei" charset="0"/>
                         <a:ea typeface="Microsoft YaHei" charset="0"/>
                         <a:cs typeface="Microsoft YaHei" charset="0"/>
@@ -5021,7 +5285,7 @@
                         <a:buNone/>
                       </a:pPr>
                       <a:r>
-                        <a:rPr lang="en-US" sz="1050" dirty="0">
+                        <a:rPr lang="en-US" sz="1000" dirty="0">
                           <a:solidFill>
                             <a:srgbClr val="1A1A1A"/>
                           </a:solidFill>
@@ -5031,7 +5295,7 @@
                         </a:rPr>
                         <a:t>人 · 脑</a:t>
                       </a:r>
-                      <a:endParaRPr lang="en-US" sz="1050" dirty="0">
+                      <a:endParaRPr lang="en-US" sz="1000" dirty="0">
                         <a:latin typeface="Microsoft YaHei" charset="0"/>
                         <a:ea typeface="Microsoft YaHei" charset="0"/>
                         <a:cs typeface="Microsoft YaHei" charset="0"/>
@@ -5086,7 +5350,7 @@
                         <a:buNone/>
                       </a:pPr>
                       <a:r>
-                        <a:rPr lang="en-US" sz="1050" dirty="0">
+                        <a:rPr lang="en-US" sz="1000" dirty="0">
                           <a:solidFill>
                             <a:srgbClr val="1A1A1A"/>
                           </a:solidFill>
@@ -5096,7 +5360,7 @@
                         </a:rPr>
                         <a:t>L5 ET 投射神经元 ×3</a:t>
                       </a:r>
-                      <a:endParaRPr lang="en-US" sz="1050" dirty="0">
+                      <a:endParaRPr lang="en-US" sz="1000" dirty="0">
                         <a:latin typeface="Microsoft YaHei" charset="0"/>
                         <a:ea typeface="Microsoft YaHei" charset="0"/>
                         <a:cs typeface="Microsoft YaHei" charset="0"/>
@@ -5151,7 +5415,7 @@
                         <a:buNone/>
                       </a:pPr>
                       <a:r>
-                        <a:rPr lang="en-US" sz="1050" dirty="0">
+                        <a:rPr lang="en-US" sz="1000" dirty="0">
                           <a:solidFill>
                             <a:srgbClr val="1A1A1A"/>
                           </a:solidFill>
@@ -5161,7 +5425,7 @@
                         </a:rPr>
                         <a:t>36.4%　890/2443</a:t>
                       </a:r>
-                      <a:endParaRPr lang="en-US" sz="1050" dirty="0">
+                      <a:endParaRPr lang="en-US" sz="1000" dirty="0">
                         <a:latin typeface="Microsoft YaHei" charset="0"/>
                         <a:ea typeface="Microsoft YaHei" charset="0"/>
                         <a:cs typeface="Microsoft YaHei" charset="0"/>
@@ -5216,7 +5480,7 @@
                         <a:buNone/>
                       </a:pPr>
                       <a:r>
-                        <a:rPr lang="en-US" sz="1050" dirty="0">
+                        <a:rPr lang="en-US" sz="1000" dirty="0">
                           <a:solidFill>
                             <a:srgbClr val="1A1A1A"/>
                           </a:solidFill>
@@ -5226,7 +5490,7 @@
                         </a:rPr>
                         <a:t>0.20%　5/2443</a:t>
                       </a:r>
-                      <a:endParaRPr lang="en-US" sz="1050" dirty="0">
+                      <a:endParaRPr lang="en-US" sz="1000" dirty="0">
                         <a:latin typeface="Microsoft YaHei" charset="0"/>
                         <a:ea typeface="Microsoft YaHei" charset="0"/>
                         <a:cs typeface="Microsoft YaHei" charset="0"/>
@@ -5281,7 +5545,7 @@
                         <a:buNone/>
                       </a:pPr>
                       <a:r>
-                        <a:rPr lang="en-US" sz="1050" dirty="0">
+                        <a:rPr lang="en-US" sz="1000" dirty="0">
                           <a:solidFill>
                             <a:srgbClr val="1A1A1A"/>
                           </a:solidFill>
@@ -5289,9 +5553,9 @@
                           <a:ea typeface="Microsoft YaHei" pitchFamily="34" charset="-122"/>
                           <a:cs typeface="Microsoft YaHei" pitchFamily="34" charset="-120"/>
                         </a:rPr>
-                        <a:t>42</a:t>
+                        <a:t>60.8%　1486/2443</a:t>
                       </a:r>
-                      <a:endParaRPr lang="en-US" sz="1050" dirty="0">
+                      <a:endParaRPr lang="en-US" sz="1000" dirty="0">
                         <a:latin typeface="Microsoft YaHei" charset="0"/>
                         <a:ea typeface="Microsoft YaHei" charset="0"/>
                         <a:cs typeface="Microsoft YaHei" charset="0"/>
@@ -5346,7 +5610,7 @@
                         <a:buNone/>
                       </a:pPr>
                       <a:r>
-                        <a:rPr lang="en-US" sz="1050" dirty="0">
+                        <a:rPr lang="en-US" sz="1000" dirty="0">
                           <a:solidFill>
                             <a:srgbClr val="1A1A1A"/>
                           </a:solidFill>
@@ -5354,9 +5618,9 @@
                           <a:ea typeface="Microsoft YaHei" pitchFamily="34" charset="-122"/>
                           <a:cs typeface="Microsoft YaHei" pitchFamily="34" charset="-120"/>
                         </a:rPr>
-                        <a:t>2</a:t>
+                        <a:t>42</a:t>
                       </a:r>
-                      <a:endParaRPr lang="en-US" sz="1050" dirty="0">
+                      <a:endParaRPr lang="en-US" sz="1000" dirty="0">
                         <a:latin typeface="Microsoft YaHei" charset="0"/>
                         <a:ea typeface="Microsoft YaHei" charset="0"/>
                         <a:cs typeface="Microsoft YaHei" charset="0"/>
@@ -5411,7 +5675,72 @@
                         <a:buNone/>
                       </a:pPr>
                       <a:r>
-                        <a:rPr lang="en-US" sz="1050" dirty="0">
+                        <a:rPr lang="en-US" sz="1000" dirty="0">
+                          <a:solidFill>
+                            <a:srgbClr val="1A1A1A"/>
+                          </a:solidFill>
+                          <a:latin typeface="Microsoft YaHei" pitchFamily="34" charset="0"/>
+                          <a:ea typeface="Microsoft YaHei" pitchFamily="34" charset="-122"/>
+                          <a:cs typeface="Microsoft YaHei" pitchFamily="34" charset="-120"/>
+                        </a:rPr>
+                        <a:t>2</a:t>
+                      </a:r>
+                      <a:endParaRPr lang="en-US" sz="1000" dirty="0">
+                        <a:latin typeface="Microsoft YaHei" charset="0"/>
+                        <a:ea typeface="Microsoft YaHei" charset="0"/>
+                        <a:cs typeface="Microsoft YaHei" charset="0"/>
+                      </a:endParaRPr>
+                    </a:p>
+                  </a:txBody>
+                  <a:tcPr marL="91440" marR="91440" marT="45720" marB="45720" anchor="ctr">
+                    <a:lnL w="6350" cap="flat" cmpd="sng" algn="ctr">
+                      <a:solidFill>
+                        <a:srgbClr val="E2E5E9"/>
+                      </a:solidFill>
+                      <a:prstDash val="solid"/>
+                      <a:round/>
+                      <a:headEnd type="none" w="med" len="med"/>
+                      <a:tailEnd type="none" w="med" len="med"/>
+                    </a:lnL>
+                    <a:lnR w="6350" cap="flat" cmpd="sng" algn="ctr">
+                      <a:solidFill>
+                        <a:srgbClr val="E2E5E9"/>
+                      </a:solidFill>
+                      <a:prstDash val="solid"/>
+                      <a:round/>
+                      <a:headEnd type="none" w="med" len="med"/>
+                      <a:tailEnd type="none" w="med" len="med"/>
+                    </a:lnR>
+                    <a:lnT w="6350" cap="flat" cmpd="sng" algn="ctr">
+                      <a:solidFill>
+                        <a:srgbClr val="E2E5E9"/>
+                      </a:solidFill>
+                      <a:prstDash val="solid"/>
+                      <a:round/>
+                      <a:headEnd type="none" w="med" len="med"/>
+                      <a:tailEnd type="none" w="med" len="med"/>
+                    </a:lnT>
+                    <a:lnB w="6350" cap="flat" cmpd="sng" algn="ctr">
+                      <a:solidFill>
+                        <a:srgbClr val="E2E5E9"/>
+                      </a:solidFill>
+                      <a:prstDash val="solid"/>
+                      <a:round/>
+                      <a:headEnd type="none" w="med" len="med"/>
+                      <a:tailEnd type="none" w="med" len="med"/>
+                    </a:lnB>
+                  </a:tcPr>
+                </a:tc>
+                <a:tc>
+                  <a:txBody>
+                    <a:bodyPr/>
+                    <a:lstStyle/>
+                    <a:p>
+                      <a:pPr indent="0" marL="0">
+                        <a:buNone/>
+                      </a:pPr>
+                      <a:r>
+                        <a:rPr lang="en-US" sz="1000" dirty="0">
                           <a:solidFill>
                             <a:srgbClr val="1A1A1A"/>
                           </a:solidFill>
@@ -5421,7 +5750,7 @@
                         </a:rPr>
                         <a:t>—</a:t>
                       </a:r>
-                      <a:endParaRPr lang="en-US" sz="1050" dirty="0">
+                      <a:endParaRPr lang="en-US" sz="1000" dirty="0">
                         <a:latin typeface="Microsoft YaHei" charset="0"/>
                         <a:ea typeface="Microsoft YaHei" charset="0"/>
                         <a:cs typeface="Microsoft YaHei" charset="0"/>
@@ -5478,7 +5807,7 @@
                         <a:buNone/>
                       </a:pPr>
                       <a:r>
-                        <a:rPr lang="en-US" sz="1050" dirty="0">
+                        <a:rPr lang="en-US" sz="1000" dirty="0">
                           <a:solidFill>
                             <a:srgbClr val="1A1A1A"/>
                           </a:solidFill>
@@ -5488,7 +5817,7 @@
                         </a:rPr>
                         <a:t>人 · 脑</a:t>
                       </a:r>
-                      <a:endParaRPr lang="en-US" sz="1050" dirty="0">
+                      <a:endParaRPr lang="en-US" sz="1000" dirty="0">
                         <a:latin typeface="Microsoft YaHei" charset="0"/>
                         <a:ea typeface="Microsoft YaHei" charset="0"/>
                         <a:cs typeface="Microsoft YaHei" charset="0"/>
@@ -5543,7 +5872,7 @@
                         <a:buNone/>
                       </a:pPr>
                       <a:r>
-                        <a:rPr lang="en-US" sz="1050" dirty="0">
+                        <a:rPr lang="en-US" sz="1000" dirty="0">
                           <a:solidFill>
                             <a:srgbClr val="1A1A1A"/>
                           </a:solidFill>
@@ -5553,7 +5882,7 @@
                         </a:rPr>
                         <a:t>PV 中间神经元 ×2</a:t>
                       </a:r>
-                      <a:endParaRPr lang="en-US" sz="1050" dirty="0">
+                      <a:endParaRPr lang="en-US" sz="1000" dirty="0">
                         <a:latin typeface="Microsoft YaHei" charset="0"/>
                         <a:ea typeface="Microsoft YaHei" charset="0"/>
                         <a:cs typeface="Microsoft YaHei" charset="0"/>
@@ -5608,7 +5937,7 @@
                         <a:buNone/>
                       </a:pPr>
                       <a:r>
-                        <a:rPr lang="en-US" sz="1050" dirty="0">
+                        <a:rPr lang="en-US" sz="1000" dirty="0">
                           <a:solidFill>
                             <a:srgbClr val="1A1A1A"/>
                           </a:solidFill>
@@ -5618,7 +5947,7 @@
                         </a:rPr>
                         <a:t>24.9%　9484/38028</a:t>
                       </a:r>
-                      <a:endParaRPr lang="en-US" sz="1050" dirty="0">
+                      <a:endParaRPr lang="en-US" sz="1000" dirty="0">
                         <a:latin typeface="Microsoft YaHei" charset="0"/>
                         <a:ea typeface="Microsoft YaHei" charset="0"/>
                         <a:cs typeface="Microsoft YaHei" charset="0"/>
@@ -5673,7 +6002,7 @@
                         <a:buNone/>
                       </a:pPr>
                       <a:r>
-                        <a:rPr lang="en-US" sz="1050" dirty="0">
+                        <a:rPr lang="en-US" sz="1000" dirty="0">
                           <a:solidFill>
                             <a:srgbClr val="1A1A1A"/>
                           </a:solidFill>
@@ -5683,7 +6012,7 @@
                         </a:rPr>
                         <a:t>0.14%　52/38028</a:t>
                       </a:r>
-                      <a:endParaRPr lang="en-US" sz="1050" dirty="0">
+                      <a:endParaRPr lang="en-US" sz="1000" dirty="0">
                         <a:latin typeface="Microsoft YaHei" charset="0"/>
                         <a:ea typeface="Microsoft YaHei" charset="0"/>
                         <a:cs typeface="Microsoft YaHei" charset="0"/>
@@ -5738,7 +6067,7 @@
                         <a:buNone/>
                       </a:pPr>
                       <a:r>
-                        <a:rPr lang="en-US" sz="1050" dirty="0">
+                        <a:rPr lang="en-US" sz="1000" dirty="0">
                           <a:solidFill>
                             <a:srgbClr val="1A1A1A"/>
                           </a:solidFill>
@@ -5746,9 +6075,9 @@
                           <a:ea typeface="Microsoft YaHei" pitchFamily="34" charset="-122"/>
                           <a:cs typeface="Microsoft YaHei" pitchFamily="34" charset="-120"/>
                         </a:rPr>
-                        <a:t>234</a:t>
+                        <a:t>31.7%　12052/38028</a:t>
                       </a:r>
-                      <a:endParaRPr lang="en-US" sz="1050" dirty="0">
+                      <a:endParaRPr lang="en-US" sz="1000" dirty="0">
                         <a:latin typeface="Microsoft YaHei" charset="0"/>
                         <a:ea typeface="Microsoft YaHei" charset="0"/>
                         <a:cs typeface="Microsoft YaHei" charset="0"/>
@@ -5803,7 +6132,7 @@
                         <a:buNone/>
                       </a:pPr>
                       <a:r>
-                        <a:rPr lang="en-US" sz="1050" dirty="0">
+                        <a:rPr lang="en-US" sz="1000" dirty="0">
                           <a:solidFill>
                             <a:srgbClr val="1A1A1A"/>
                           </a:solidFill>
@@ -5811,9 +6140,9 @@
                           <a:ea typeface="Microsoft YaHei" pitchFamily="34" charset="-122"/>
                           <a:cs typeface="Microsoft YaHei" pitchFamily="34" charset="-120"/>
                         </a:rPr>
-                        <a:t>2</a:t>
+                        <a:t>234</a:t>
                       </a:r>
-                      <a:endParaRPr lang="en-US" sz="1050" dirty="0">
+                      <a:endParaRPr lang="en-US" sz="1000" dirty="0">
                         <a:latin typeface="Microsoft YaHei" charset="0"/>
                         <a:ea typeface="Microsoft YaHei" charset="0"/>
                         <a:cs typeface="Microsoft YaHei" charset="0"/>
@@ -5868,7 +6197,72 @@
                         <a:buNone/>
                       </a:pPr>
                       <a:r>
-                        <a:rPr lang="en-US" sz="1050" dirty="0">
+                        <a:rPr lang="en-US" sz="1000" dirty="0">
+                          <a:solidFill>
+                            <a:srgbClr val="1A1A1A"/>
+                          </a:solidFill>
+                          <a:latin typeface="Microsoft YaHei" pitchFamily="34" charset="0"/>
+                          <a:ea typeface="Microsoft YaHei" pitchFamily="34" charset="-122"/>
+                          <a:cs typeface="Microsoft YaHei" pitchFamily="34" charset="-120"/>
+                        </a:rPr>
+                        <a:t>2</a:t>
+                      </a:r>
+                      <a:endParaRPr lang="en-US" sz="1000" dirty="0">
+                        <a:latin typeface="Microsoft YaHei" charset="0"/>
+                        <a:ea typeface="Microsoft YaHei" charset="0"/>
+                        <a:cs typeface="Microsoft YaHei" charset="0"/>
+                      </a:endParaRPr>
+                    </a:p>
+                  </a:txBody>
+                  <a:tcPr marL="91440" marR="91440" marT="45720" marB="45720" anchor="ctr">
+                    <a:lnL w="6350" cap="flat" cmpd="sng" algn="ctr">
+                      <a:solidFill>
+                        <a:srgbClr val="E2E5E9"/>
+                      </a:solidFill>
+                      <a:prstDash val="solid"/>
+                      <a:round/>
+                      <a:headEnd type="none" w="med" len="med"/>
+                      <a:tailEnd type="none" w="med" len="med"/>
+                    </a:lnL>
+                    <a:lnR w="6350" cap="flat" cmpd="sng" algn="ctr">
+                      <a:solidFill>
+                        <a:srgbClr val="E2E5E9"/>
+                      </a:solidFill>
+                      <a:prstDash val="solid"/>
+                      <a:round/>
+                      <a:headEnd type="none" w="med" len="med"/>
+                      <a:tailEnd type="none" w="med" len="med"/>
+                    </a:lnR>
+                    <a:lnT w="6350" cap="flat" cmpd="sng" algn="ctr">
+                      <a:solidFill>
+                        <a:srgbClr val="E2E5E9"/>
+                      </a:solidFill>
+                      <a:prstDash val="solid"/>
+                      <a:round/>
+                      <a:headEnd type="none" w="med" len="med"/>
+                      <a:tailEnd type="none" w="med" len="med"/>
+                    </a:lnT>
+                    <a:lnB w="6350" cap="flat" cmpd="sng" algn="ctr">
+                      <a:solidFill>
+                        <a:srgbClr val="E2E5E9"/>
+                      </a:solidFill>
+                      <a:prstDash val="solid"/>
+                      <a:round/>
+                      <a:headEnd type="none" w="med" len="med"/>
+                      <a:tailEnd type="none" w="med" len="med"/>
+                    </a:lnB>
+                  </a:tcPr>
+                </a:tc>
+                <a:tc>
+                  <a:txBody>
+                    <a:bodyPr/>
+                    <a:lstStyle/>
+                    <a:p>
+                      <a:pPr indent="0" marL="0">
+                        <a:buNone/>
+                      </a:pPr>
+                      <a:r>
+                        <a:rPr lang="en-US" sz="1000" dirty="0">
                           <a:solidFill>
                             <a:srgbClr val="1A1A1A"/>
                           </a:solidFill>
@@ -5878,7 +6272,7 @@
                         </a:rPr>
                         <a:t>—</a:t>
                       </a:r>
-                      <a:endParaRPr lang="en-US" sz="1050" dirty="0">
+                      <a:endParaRPr lang="en-US" sz="1000" dirty="0">
                         <a:latin typeface="Microsoft YaHei" charset="0"/>
                         <a:ea typeface="Microsoft YaHei" charset="0"/>
                         <a:cs typeface="Microsoft YaHei" charset="0"/>
@@ -5935,7 +6329,7 @@
                         <a:buNone/>
                       </a:pPr>
                       <a:r>
-                        <a:rPr lang="en-US" sz="1050" dirty="0">
+                        <a:rPr lang="en-US" sz="1000" dirty="0">
                           <a:solidFill>
                             <a:srgbClr val="1A1A1A"/>
                           </a:solidFill>
@@ -5945,7 +6339,7 @@
                         </a:rPr>
                         <a:t>人 · 脑</a:t>
                       </a:r>
-                      <a:endParaRPr lang="en-US" sz="1050" dirty="0">
+                      <a:endParaRPr lang="en-US" sz="1000" dirty="0">
                         <a:latin typeface="Microsoft YaHei" charset="0"/>
                         <a:ea typeface="Microsoft YaHei" charset="0"/>
                         <a:cs typeface="Microsoft YaHei" charset="0"/>
@@ -6000,7 +6394,7 @@
                         <a:buNone/>
                       </a:pPr>
                       <a:r>
-                        <a:rPr lang="en-US" sz="1050" dirty="0">
+                        <a:rPr lang="en-US" sz="1000" dirty="0">
                           <a:solidFill>
                             <a:srgbClr val="1A1A1A"/>
                           </a:solidFill>
@@ -6010,7 +6404,7 @@
                         </a:rPr>
                         <a:t>枝形 PV 中间神经元</a:t>
                       </a:r>
-                      <a:endParaRPr lang="en-US" sz="1050" dirty="0">
+                      <a:endParaRPr lang="en-US" sz="1000" dirty="0">
                         <a:latin typeface="Microsoft YaHei" charset="0"/>
                         <a:ea typeface="Microsoft YaHei" charset="0"/>
                         <a:cs typeface="Microsoft YaHei" charset="0"/>
@@ -6065,7 +6459,7 @@
                         <a:buNone/>
                       </a:pPr>
                       <a:r>
-                        <a:rPr lang="en-US" sz="1050" dirty="0">
+                        <a:rPr lang="en-US" sz="1000" dirty="0">
                           <a:solidFill>
                             <a:srgbClr val="1A1A1A"/>
                           </a:solidFill>
@@ -6075,7 +6469,7 @@
                         </a:rPr>
                         <a:t>21.5%　294/1367</a:t>
                       </a:r>
-                      <a:endParaRPr lang="en-US" sz="1050" dirty="0">
+                      <a:endParaRPr lang="en-US" sz="1000" dirty="0">
                         <a:latin typeface="Microsoft YaHei" charset="0"/>
                         <a:ea typeface="Microsoft YaHei" charset="0"/>
                         <a:cs typeface="Microsoft YaHei" charset="0"/>
@@ -6130,7 +6524,7 @@
                         <a:buNone/>
                       </a:pPr>
                       <a:r>
-                        <a:rPr lang="en-US" sz="1050" dirty="0">
+                        <a:rPr lang="en-US" sz="1000" dirty="0">
                           <a:solidFill>
                             <a:srgbClr val="1A1A1A"/>
                           </a:solidFill>
@@ -6140,7 +6534,7 @@
                         </a:rPr>
                         <a:t>0.07%　1/1367</a:t>
                       </a:r>
-                      <a:endParaRPr lang="en-US" sz="1050" dirty="0">
+                      <a:endParaRPr lang="en-US" sz="1000" dirty="0">
                         <a:latin typeface="Microsoft YaHei" charset="0"/>
                         <a:ea typeface="Microsoft YaHei" charset="0"/>
                         <a:cs typeface="Microsoft YaHei" charset="0"/>
@@ -6195,7 +6589,7 @@
                         <a:buNone/>
                       </a:pPr>
                       <a:r>
-                        <a:rPr lang="en-US" sz="1050" dirty="0">
+                        <a:rPr lang="en-US" sz="1000" dirty="0">
                           <a:solidFill>
                             <a:srgbClr val="1A1A1A"/>
                           </a:solidFill>
@@ -6203,9 +6597,9 @@
                           <a:ea typeface="Microsoft YaHei" pitchFamily="34" charset="-122"/>
                           <a:cs typeface="Microsoft YaHei" pitchFamily="34" charset="-120"/>
                         </a:rPr>
-                        <a:t>37</a:t>
+                        <a:t>21.6%　295/1367</a:t>
                       </a:r>
-                      <a:endParaRPr lang="en-US" sz="1050" dirty="0">
+                      <a:endParaRPr lang="en-US" sz="1000" dirty="0">
                         <a:latin typeface="Microsoft YaHei" charset="0"/>
                         <a:ea typeface="Microsoft YaHei" charset="0"/>
                         <a:cs typeface="Microsoft YaHei" charset="0"/>
@@ -6260,7 +6654,7 @@
                         <a:buNone/>
                       </a:pPr>
                       <a:r>
-                        <a:rPr lang="en-US" sz="1050" dirty="0">
+                        <a:rPr lang="en-US" sz="1000" dirty="0">
                           <a:solidFill>
                             <a:srgbClr val="1A1A1A"/>
                           </a:solidFill>
@@ -6268,9 +6662,9 @@
                           <a:ea typeface="Microsoft YaHei" pitchFamily="34" charset="-122"/>
                           <a:cs typeface="Microsoft YaHei" pitchFamily="34" charset="-120"/>
                         </a:rPr>
-                        <a:t>2</a:t>
+                        <a:t>37</a:t>
                       </a:r>
-                      <a:endParaRPr lang="en-US" sz="1050" dirty="0">
+                      <a:endParaRPr lang="en-US" sz="1000" dirty="0">
                         <a:latin typeface="Microsoft YaHei" charset="0"/>
                         <a:ea typeface="Microsoft YaHei" charset="0"/>
                         <a:cs typeface="Microsoft YaHei" charset="0"/>
@@ -6325,7 +6719,72 @@
                         <a:buNone/>
                       </a:pPr>
                       <a:r>
-                        <a:rPr lang="en-US" sz="1050" dirty="0">
+                        <a:rPr lang="en-US" sz="1000" dirty="0">
+                          <a:solidFill>
+                            <a:srgbClr val="1A1A1A"/>
+                          </a:solidFill>
+                          <a:latin typeface="Microsoft YaHei" pitchFamily="34" charset="0"/>
+                          <a:ea typeface="Microsoft YaHei" pitchFamily="34" charset="-122"/>
+                          <a:cs typeface="Microsoft YaHei" pitchFamily="34" charset="-120"/>
+                        </a:rPr>
+                        <a:t>2</a:t>
+                      </a:r>
+                      <a:endParaRPr lang="en-US" sz="1000" dirty="0">
+                        <a:latin typeface="Microsoft YaHei" charset="0"/>
+                        <a:ea typeface="Microsoft YaHei" charset="0"/>
+                        <a:cs typeface="Microsoft YaHei" charset="0"/>
+                      </a:endParaRPr>
+                    </a:p>
+                  </a:txBody>
+                  <a:tcPr marL="91440" marR="91440" marT="45720" marB="45720" anchor="ctr">
+                    <a:lnL w="6350" cap="flat" cmpd="sng" algn="ctr">
+                      <a:solidFill>
+                        <a:srgbClr val="E2E5E9"/>
+                      </a:solidFill>
+                      <a:prstDash val="solid"/>
+                      <a:round/>
+                      <a:headEnd type="none" w="med" len="med"/>
+                      <a:tailEnd type="none" w="med" len="med"/>
+                    </a:lnL>
+                    <a:lnR w="6350" cap="flat" cmpd="sng" algn="ctr">
+                      <a:solidFill>
+                        <a:srgbClr val="E2E5E9"/>
+                      </a:solidFill>
+                      <a:prstDash val="solid"/>
+                      <a:round/>
+                      <a:headEnd type="none" w="med" len="med"/>
+                      <a:tailEnd type="none" w="med" len="med"/>
+                    </a:lnR>
+                    <a:lnT w="6350" cap="flat" cmpd="sng" algn="ctr">
+                      <a:solidFill>
+                        <a:srgbClr val="E2E5E9"/>
+                      </a:solidFill>
+                      <a:prstDash val="solid"/>
+                      <a:round/>
+                      <a:headEnd type="none" w="med" len="med"/>
+                      <a:tailEnd type="none" w="med" len="med"/>
+                    </a:lnT>
+                    <a:lnB w="6350" cap="flat" cmpd="sng" algn="ctr">
+                      <a:solidFill>
+                        <a:srgbClr val="E2E5E9"/>
+                      </a:solidFill>
+                      <a:prstDash val="solid"/>
+                      <a:round/>
+                      <a:headEnd type="none" w="med" len="med"/>
+                      <a:tailEnd type="none" w="med" len="med"/>
+                    </a:lnB>
+                  </a:tcPr>
+                </a:tc>
+                <a:tc>
+                  <a:txBody>
+                    <a:bodyPr/>
+                    <a:lstStyle/>
+                    <a:p>
+                      <a:pPr indent="0" marL="0">
+                        <a:buNone/>
+                      </a:pPr>
+                      <a:r>
+                        <a:rPr lang="en-US" sz="1000" dirty="0">
                           <a:solidFill>
                             <a:srgbClr val="1A1A1A"/>
                           </a:solidFill>
@@ -6335,7 +6794,7 @@
                         </a:rPr>
                         <a:t>—</a:t>
                       </a:r>
-                      <a:endParaRPr lang="en-US" sz="1050" dirty="0">
+                      <a:endParaRPr lang="en-US" sz="1000" dirty="0">
                         <a:latin typeface="Microsoft YaHei" charset="0"/>
                         <a:ea typeface="Microsoft YaHei" charset="0"/>
                         <a:cs typeface="Microsoft YaHei" charset="0"/>
@@ -6392,7 +6851,7 @@
                         <a:buNone/>
                       </a:pPr>
                       <a:r>
-                        <a:rPr lang="en-US" sz="1050" dirty="0">
+                        <a:rPr lang="en-US" sz="1000" dirty="0">
                           <a:solidFill>
                             <a:srgbClr val="1A1A1A"/>
                           </a:solidFill>
@@ -6402,7 +6861,7 @@
                         </a:rPr>
                         <a:t>人 · 肺</a:t>
                       </a:r>
-                      <a:endParaRPr lang="en-US" sz="1050" dirty="0">
+                      <a:endParaRPr lang="en-US" sz="1000" dirty="0">
                         <a:latin typeface="Microsoft YaHei" charset="0"/>
                         <a:ea typeface="Microsoft YaHei" charset="0"/>
                         <a:cs typeface="Microsoft YaHei" charset="0"/>
@@ -6457,7 +6916,7 @@
                         <a:buNone/>
                       </a:pPr>
                       <a:r>
-                        <a:rPr lang="en-US" sz="1050" dirty="0">
+                        <a:rPr lang="en-US" sz="1000" dirty="0">
                           <a:solidFill>
                             <a:srgbClr val="1A1A1A"/>
                           </a:solidFill>
@@ -6467,7 +6926,7 @@
                         </a:rPr>
                         <a:t>肥大细胞 ×2</a:t>
                       </a:r>
-                      <a:endParaRPr lang="en-US" sz="1050" dirty="0">
+                      <a:endParaRPr lang="en-US" sz="1000" dirty="0">
                         <a:latin typeface="Microsoft YaHei" charset="0"/>
                         <a:ea typeface="Microsoft YaHei" charset="0"/>
                         <a:cs typeface="Microsoft YaHei" charset="0"/>
@@ -6522,7 +6981,7 @@
                         <a:buNone/>
                       </a:pPr>
                       <a:r>
-                        <a:rPr lang="en-US" sz="1050" dirty="0">
+                        <a:rPr lang="en-US" sz="1000" dirty="0">
                           <a:solidFill>
                             <a:srgbClr val="1A1A1A"/>
                           </a:solidFill>
@@ -6532,7 +6991,7 @@
                         </a:rPr>
                         <a:t>34.9%　1851/5299</a:t>
                       </a:r>
-                      <a:endParaRPr lang="en-US" sz="1050" dirty="0">
+                      <a:endParaRPr lang="en-US" sz="1000" dirty="0">
                         <a:latin typeface="Microsoft YaHei" charset="0"/>
                         <a:ea typeface="Microsoft YaHei" charset="0"/>
                         <a:cs typeface="Microsoft YaHei" charset="0"/>
@@ -6587,7 +7046,7 @@
                         <a:buNone/>
                       </a:pPr>
                       <a:r>
-                        <a:rPr lang="en-US" sz="1050" dirty="0">
+                        <a:rPr lang="en-US" sz="1000" dirty="0">
                           <a:solidFill>
                             <a:srgbClr val="1A1A1A"/>
                           </a:solidFill>
@@ -6597,7 +7056,7 @@
                         </a:rPr>
                         <a:t>2.60%　138/5299</a:t>
                       </a:r>
-                      <a:endParaRPr lang="en-US" sz="1050" dirty="0">
+                      <a:endParaRPr lang="en-US" sz="1000" dirty="0">
                         <a:latin typeface="Microsoft YaHei" charset="0"/>
                         <a:ea typeface="Microsoft YaHei" charset="0"/>
                         <a:cs typeface="Microsoft YaHei" charset="0"/>
@@ -6652,7 +7111,7 @@
                         <a:buNone/>
                       </a:pPr>
                       <a:r>
-                        <a:rPr lang="en-US" sz="1050" dirty="0">
+                        <a:rPr lang="en-US" sz="1000" dirty="0">
                           <a:solidFill>
                             <a:srgbClr val="1A1A1A"/>
                           </a:solidFill>
@@ -6660,9 +7119,9 @@
                           <a:ea typeface="Microsoft YaHei" pitchFamily="34" charset="-122"/>
                           <a:cs typeface="Microsoft YaHei" pitchFamily="34" charset="-120"/>
                         </a:rPr>
-                        <a:t>44</a:t>
+                        <a:t>5.89%　312/5299</a:t>
                       </a:r>
-                      <a:endParaRPr lang="en-US" sz="1050" dirty="0">
+                      <a:endParaRPr lang="en-US" sz="1000" dirty="0">
                         <a:latin typeface="Microsoft YaHei" charset="0"/>
                         <a:ea typeface="Microsoft YaHei" charset="0"/>
                         <a:cs typeface="Microsoft YaHei" charset="0"/>
@@ -6717,7 +7176,7 @@
                         <a:buNone/>
                       </a:pPr>
                       <a:r>
-                        <a:rPr lang="en-US" sz="1050" dirty="0">
+                        <a:rPr lang="en-US" sz="1000" dirty="0">
                           <a:solidFill>
                             <a:srgbClr val="1A1A1A"/>
                           </a:solidFill>
@@ -6725,9 +7184,9 @@
                           <a:ea typeface="Microsoft YaHei" pitchFamily="34" charset="-122"/>
                           <a:cs typeface="Microsoft YaHei" pitchFamily="34" charset="-120"/>
                         </a:rPr>
-                        <a:t>1</a:t>
+                        <a:t>44</a:t>
                       </a:r>
-                      <a:endParaRPr lang="en-US" sz="1050" dirty="0">
+                      <a:endParaRPr lang="en-US" sz="1000" dirty="0">
                         <a:latin typeface="Microsoft YaHei" charset="0"/>
                         <a:ea typeface="Microsoft YaHei" charset="0"/>
                         <a:cs typeface="Microsoft YaHei" charset="0"/>
@@ -6782,7 +7241,72 @@
                         <a:buNone/>
                       </a:pPr>
                       <a:r>
-                        <a:rPr lang="en-US" sz="1050" dirty="0">
+                        <a:rPr lang="en-US" sz="1000" dirty="0">
+                          <a:solidFill>
+                            <a:srgbClr val="1A1A1A"/>
+                          </a:solidFill>
+                          <a:latin typeface="Microsoft YaHei" pitchFamily="34" charset="0"/>
+                          <a:ea typeface="Microsoft YaHei" pitchFamily="34" charset="-122"/>
+                          <a:cs typeface="Microsoft YaHei" pitchFamily="34" charset="-120"/>
+                        </a:rPr>
+                        <a:t>1</a:t>
+                      </a:r>
+                      <a:endParaRPr lang="en-US" sz="1000" dirty="0">
+                        <a:latin typeface="Microsoft YaHei" charset="0"/>
+                        <a:ea typeface="Microsoft YaHei" charset="0"/>
+                        <a:cs typeface="Microsoft YaHei" charset="0"/>
+                      </a:endParaRPr>
+                    </a:p>
+                  </a:txBody>
+                  <a:tcPr marL="91440" marR="91440" marT="45720" marB="45720" anchor="ctr">
+                    <a:lnL w="6350" cap="flat" cmpd="sng" algn="ctr">
+                      <a:solidFill>
+                        <a:srgbClr val="E2E5E9"/>
+                      </a:solidFill>
+                      <a:prstDash val="solid"/>
+                      <a:round/>
+                      <a:headEnd type="none" w="med" len="med"/>
+                      <a:tailEnd type="none" w="med" len="med"/>
+                    </a:lnL>
+                    <a:lnR w="6350" cap="flat" cmpd="sng" algn="ctr">
+                      <a:solidFill>
+                        <a:srgbClr val="E2E5E9"/>
+                      </a:solidFill>
+                      <a:prstDash val="solid"/>
+                      <a:round/>
+                      <a:headEnd type="none" w="med" len="med"/>
+                      <a:tailEnd type="none" w="med" len="med"/>
+                    </a:lnR>
+                    <a:lnT w="6350" cap="flat" cmpd="sng" algn="ctr">
+                      <a:solidFill>
+                        <a:srgbClr val="E2E5E9"/>
+                      </a:solidFill>
+                      <a:prstDash val="solid"/>
+                      <a:round/>
+                      <a:headEnd type="none" w="med" len="med"/>
+                      <a:tailEnd type="none" w="med" len="med"/>
+                    </a:lnT>
+                    <a:lnB w="6350" cap="flat" cmpd="sng" algn="ctr">
+                      <a:solidFill>
+                        <a:srgbClr val="E2E5E9"/>
+                      </a:solidFill>
+                      <a:prstDash val="solid"/>
+                      <a:round/>
+                      <a:headEnd type="none" w="med" len="med"/>
+                      <a:tailEnd type="none" w="med" len="med"/>
+                    </a:lnB>
+                  </a:tcPr>
+                </a:tc>
+                <a:tc>
+                  <a:txBody>
+                    <a:bodyPr/>
+                    <a:lstStyle/>
+                    <a:p>
+                      <a:pPr indent="0" marL="0">
+                        <a:buNone/>
+                      </a:pPr>
+                      <a:r>
+                        <a:rPr lang="en-US" sz="1000" dirty="0">
                           <a:solidFill>
                             <a:srgbClr val="1A1A1A"/>
                           </a:solidFill>
@@ -6792,7 +7316,7 @@
                         </a:rPr>
                         <a:t>2</a:t>
                       </a:r>
-                      <a:endParaRPr lang="en-US" sz="1050" dirty="0">
+                      <a:endParaRPr lang="en-US" sz="1000" dirty="0">
                         <a:latin typeface="Microsoft YaHei" charset="0"/>
                         <a:ea typeface="Microsoft YaHei" charset="0"/>
                         <a:cs typeface="Microsoft YaHei" charset="0"/>
@@ -6849,7 +7373,7 @@
                         <a:buNone/>
                       </a:pPr>
                       <a:r>
-                        <a:rPr lang="en-US" sz="1050" dirty="0">
+                        <a:rPr lang="en-US" sz="1000" dirty="0">
                           <a:solidFill>
                             <a:srgbClr val="1A1A1A"/>
                           </a:solidFill>
@@ -6859,7 +7383,7 @@
                         </a:rPr>
                         <a:t>人 · 肺</a:t>
                       </a:r>
-                      <a:endParaRPr lang="en-US" sz="1050" dirty="0">
+                      <a:endParaRPr lang="en-US" sz="1000" dirty="0">
                         <a:latin typeface="Microsoft YaHei" charset="0"/>
                         <a:ea typeface="Microsoft YaHei" charset="0"/>
                         <a:cs typeface="Microsoft YaHei" charset="0"/>
@@ -6914,7 +7438,7 @@
                         <a:buNone/>
                       </a:pPr>
                       <a:r>
-                        <a:rPr lang="en-US" sz="1050" dirty="0">
+                        <a:rPr lang="en-US" sz="1000" dirty="0">
                           <a:solidFill>
                             <a:srgbClr val="1A1A1A"/>
                           </a:solidFill>
@@ -6924,7 +7448,7 @@
                         </a:rPr>
                         <a:t>AT1 肺泡上皮 ×3</a:t>
                       </a:r>
-                      <a:endParaRPr lang="en-US" sz="1050" dirty="0">
+                      <a:endParaRPr lang="en-US" sz="1000" dirty="0">
                         <a:latin typeface="Microsoft YaHei" charset="0"/>
                         <a:ea typeface="Microsoft YaHei" charset="0"/>
                         <a:cs typeface="Microsoft YaHei" charset="0"/>
@@ -6979,7 +7503,7 @@
                         <a:buNone/>
                       </a:pPr>
                       <a:r>
-                        <a:rPr lang="en-US" sz="1050" dirty="0">
+                        <a:rPr lang="en-US" sz="1000" dirty="0">
                           <a:solidFill>
                             <a:srgbClr val="1A1A1A"/>
                           </a:solidFill>
@@ -6989,7 +7513,7 @@
                         </a:rPr>
                         <a:t>28.2%　2473/8756</a:t>
                       </a:r>
-                      <a:endParaRPr lang="en-US" sz="1050" dirty="0">
+                      <a:endParaRPr lang="en-US" sz="1000" dirty="0">
                         <a:latin typeface="Microsoft YaHei" charset="0"/>
                         <a:ea typeface="Microsoft YaHei" charset="0"/>
                         <a:cs typeface="Microsoft YaHei" charset="0"/>
@@ -7044,7 +7568,7 @@
                         <a:buNone/>
                       </a:pPr>
                       <a:r>
-                        <a:rPr lang="en-US" sz="1050" dirty="0">
+                        <a:rPr lang="en-US" sz="1000" dirty="0">
                           <a:solidFill>
                             <a:srgbClr val="1A1A1A"/>
                           </a:solidFill>
@@ -7054,7 +7578,7 @@
                         </a:rPr>
                         <a:t>4.25%　372/8756</a:t>
                       </a:r>
-                      <a:endParaRPr lang="en-US" sz="1050" dirty="0">
+                      <a:endParaRPr lang="en-US" sz="1000" dirty="0">
                         <a:latin typeface="Microsoft YaHei" charset="0"/>
                         <a:ea typeface="Microsoft YaHei" charset="0"/>
                         <a:cs typeface="Microsoft YaHei" charset="0"/>
@@ -7109,7 +7633,7 @@
                         <a:buNone/>
                       </a:pPr>
                       <a:r>
-                        <a:rPr lang="en-US" sz="1050" dirty="0">
+                        <a:rPr lang="en-US" sz="1000" dirty="0">
                           <a:solidFill>
                             <a:srgbClr val="1A1A1A"/>
                           </a:solidFill>
@@ -7117,9 +7641,9 @@
                           <a:ea typeface="Microsoft YaHei" pitchFamily="34" charset="-122"/>
                           <a:cs typeface="Microsoft YaHei" pitchFamily="34" charset="-120"/>
                         </a:rPr>
-                        <a:t>56</a:t>
+                        <a:t>3.42%　299/8756</a:t>
                       </a:r>
-                      <a:endParaRPr lang="en-US" sz="1050" dirty="0">
+                      <a:endParaRPr lang="en-US" sz="1000" dirty="0">
                         <a:latin typeface="Microsoft YaHei" charset="0"/>
                         <a:ea typeface="Microsoft YaHei" charset="0"/>
                         <a:cs typeface="Microsoft YaHei" charset="0"/>
@@ -7174,7 +7698,7 @@
                         <a:buNone/>
                       </a:pPr>
                       <a:r>
-                        <a:rPr lang="en-US" sz="1050" dirty="0">
+                        <a:rPr lang="en-US" sz="1000" dirty="0">
                           <a:solidFill>
                             <a:srgbClr val="1A1A1A"/>
                           </a:solidFill>
@@ -7182,9 +7706,9 @@
                           <a:ea typeface="Microsoft YaHei" pitchFamily="34" charset="-122"/>
                           <a:cs typeface="Microsoft YaHei" pitchFamily="34" charset="-120"/>
                         </a:rPr>
-                        <a:t>1</a:t>
+                        <a:t>56</a:t>
                       </a:r>
-                      <a:endParaRPr lang="en-US" sz="1050" dirty="0">
+                      <a:endParaRPr lang="en-US" sz="1000" dirty="0">
                         <a:latin typeface="Microsoft YaHei" charset="0"/>
                         <a:ea typeface="Microsoft YaHei" charset="0"/>
                         <a:cs typeface="Microsoft YaHei" charset="0"/>
@@ -7239,7 +7763,72 @@
                         <a:buNone/>
                       </a:pPr>
                       <a:r>
-                        <a:rPr lang="en-US" sz="1050" dirty="0">
+                        <a:rPr lang="en-US" sz="1000" dirty="0">
+                          <a:solidFill>
+                            <a:srgbClr val="1A1A1A"/>
+                          </a:solidFill>
+                          <a:latin typeface="Microsoft YaHei" pitchFamily="34" charset="0"/>
+                          <a:ea typeface="Microsoft YaHei" pitchFamily="34" charset="-122"/>
+                          <a:cs typeface="Microsoft YaHei" pitchFamily="34" charset="-120"/>
+                        </a:rPr>
+                        <a:t>1</a:t>
+                      </a:r>
+                      <a:endParaRPr lang="en-US" sz="1000" dirty="0">
+                        <a:latin typeface="Microsoft YaHei" charset="0"/>
+                        <a:ea typeface="Microsoft YaHei" charset="0"/>
+                        <a:cs typeface="Microsoft YaHei" charset="0"/>
+                      </a:endParaRPr>
+                    </a:p>
+                  </a:txBody>
+                  <a:tcPr marL="91440" marR="91440" marT="45720" marB="45720" anchor="ctr">
+                    <a:lnL w="6350" cap="flat" cmpd="sng" algn="ctr">
+                      <a:solidFill>
+                        <a:srgbClr val="E2E5E9"/>
+                      </a:solidFill>
+                      <a:prstDash val="solid"/>
+                      <a:round/>
+                      <a:headEnd type="none" w="med" len="med"/>
+                      <a:tailEnd type="none" w="med" len="med"/>
+                    </a:lnL>
+                    <a:lnR w="6350" cap="flat" cmpd="sng" algn="ctr">
+                      <a:solidFill>
+                        <a:srgbClr val="E2E5E9"/>
+                      </a:solidFill>
+                      <a:prstDash val="solid"/>
+                      <a:round/>
+                      <a:headEnd type="none" w="med" len="med"/>
+                      <a:tailEnd type="none" w="med" len="med"/>
+                    </a:lnR>
+                    <a:lnT w="6350" cap="flat" cmpd="sng" algn="ctr">
+                      <a:solidFill>
+                        <a:srgbClr val="E2E5E9"/>
+                      </a:solidFill>
+                      <a:prstDash val="solid"/>
+                      <a:round/>
+                      <a:headEnd type="none" w="med" len="med"/>
+                      <a:tailEnd type="none" w="med" len="med"/>
+                    </a:lnT>
+                    <a:lnB w="6350" cap="flat" cmpd="sng" algn="ctr">
+                      <a:solidFill>
+                        <a:srgbClr val="E2E5E9"/>
+                      </a:solidFill>
+                      <a:prstDash val="solid"/>
+                      <a:round/>
+                      <a:headEnd type="none" w="med" len="med"/>
+                      <a:tailEnd type="none" w="med" len="med"/>
+                    </a:lnB>
+                  </a:tcPr>
+                </a:tc>
+                <a:tc>
+                  <a:txBody>
+                    <a:bodyPr/>
+                    <a:lstStyle/>
+                    <a:p>
+                      <a:pPr indent="0" marL="0">
+                        <a:buNone/>
+                      </a:pPr>
+                      <a:r>
+                        <a:rPr lang="en-US" sz="1000" dirty="0">
                           <a:solidFill>
                             <a:srgbClr val="1A1A1A"/>
                           </a:solidFill>
@@ -7249,7 +7838,7 @@
                         </a:rPr>
                         <a:t>—</a:t>
                       </a:r>
-                      <a:endParaRPr lang="en-US" sz="1050" dirty="0">
+                      <a:endParaRPr lang="en-US" sz="1000" dirty="0">
                         <a:latin typeface="Microsoft YaHei" charset="0"/>
                         <a:ea typeface="Microsoft YaHei" charset="0"/>
                         <a:cs typeface="Microsoft YaHei" charset="0"/>
@@ -7306,7 +7895,7 @@
                         <a:buNone/>
                       </a:pPr>
                       <a:r>
-                        <a:rPr lang="en-US" sz="1050" dirty="0">
+                        <a:rPr lang="en-US" sz="1000" dirty="0">
                           <a:solidFill>
                             <a:srgbClr val="1A1A1A"/>
                           </a:solidFill>
@@ -7316,7 +7905,7 @@
                         </a:rPr>
                         <a:t>小鼠 · 胰</a:t>
                       </a:r>
-                      <a:endParaRPr lang="en-US" sz="1050" dirty="0">
+                      <a:endParaRPr lang="en-US" sz="1000" dirty="0">
                         <a:latin typeface="Microsoft YaHei" charset="0"/>
                         <a:ea typeface="Microsoft YaHei" charset="0"/>
                         <a:cs typeface="Microsoft YaHei" charset="0"/>
@@ -7371,7 +7960,7 @@
                         <a:buNone/>
                       </a:pPr>
                       <a:r>
-                        <a:rPr lang="en-US" sz="1050" dirty="0">
+                        <a:rPr lang="en-US" sz="1000" dirty="0">
                           <a:solidFill>
                             <a:srgbClr val="1A1A1A"/>
                           </a:solidFill>
@@ -7381,7 +7970,7 @@
                         </a:rPr>
                         <a:t>胰导管细胞</a:t>
                       </a:r>
-                      <a:endParaRPr lang="en-US" sz="1050" dirty="0">
+                      <a:endParaRPr lang="en-US" sz="1000" dirty="0">
                         <a:latin typeface="Microsoft YaHei" charset="0"/>
                         <a:ea typeface="Microsoft YaHei" charset="0"/>
                         <a:cs typeface="Microsoft YaHei" charset="0"/>
@@ -7436,7 +8025,7 @@
                         <a:buNone/>
                       </a:pPr>
                       <a:r>
-                        <a:rPr lang="en-US" sz="1050" dirty="0">
+                        <a:rPr lang="en-US" sz="1000" dirty="0">
                           <a:solidFill>
                             <a:srgbClr val="1A1A1A"/>
                           </a:solidFill>
@@ -7446,7 +8035,7 @@
                         </a:rPr>
                         <a:t>13.2%　256/1947</a:t>
                       </a:r>
-                      <a:endParaRPr lang="en-US" sz="1050" dirty="0">
+                      <a:endParaRPr lang="en-US" sz="1000" dirty="0">
                         <a:latin typeface="Microsoft YaHei" charset="0"/>
                         <a:ea typeface="Microsoft YaHei" charset="0"/>
                         <a:cs typeface="Microsoft YaHei" charset="0"/>
@@ -7501,7 +8090,7 @@
                         <a:buNone/>
                       </a:pPr>
                       <a:r>
-                        <a:rPr lang="en-US" sz="1050" dirty="0">
+                        <a:rPr lang="en-US" sz="1000" dirty="0">
                           <a:solidFill>
                             <a:srgbClr val="1A1A1A"/>
                           </a:solidFill>
@@ -7511,7 +8100,7 @@
                         </a:rPr>
                         <a:t>0.10%　2/1947</a:t>
                       </a:r>
-                      <a:endParaRPr lang="en-US" sz="1050" dirty="0">
+                      <a:endParaRPr lang="en-US" sz="1000" dirty="0">
                         <a:latin typeface="Microsoft YaHei" charset="0"/>
                         <a:ea typeface="Microsoft YaHei" charset="0"/>
                         <a:cs typeface="Microsoft YaHei" charset="0"/>
@@ -7566,7 +8155,7 @@
                         <a:buNone/>
                       </a:pPr>
                       <a:r>
-                        <a:rPr lang="en-US" sz="1050" dirty="0">
+                        <a:rPr lang="en-US" sz="1000" dirty="0">
                           <a:solidFill>
                             <a:srgbClr val="1A1A1A"/>
                           </a:solidFill>
@@ -7574,9 +8163,9 @@
                           <a:ea typeface="Microsoft YaHei" pitchFamily="34" charset="-122"/>
                           <a:cs typeface="Microsoft YaHei" pitchFamily="34" charset="-120"/>
                         </a:rPr>
-                        <a:t>9</a:t>
+                        <a:t>25.5%　497/1947</a:t>
                       </a:r>
-                      <a:endParaRPr lang="en-US" sz="1050" dirty="0">
+                      <a:endParaRPr lang="en-US" sz="1000" dirty="0">
                         <a:latin typeface="Microsoft YaHei" charset="0"/>
                         <a:ea typeface="Microsoft YaHei" charset="0"/>
                         <a:cs typeface="Microsoft YaHei" charset="0"/>
@@ -7631,7 +8220,7 @@
                         <a:buNone/>
                       </a:pPr>
                       <a:r>
-                        <a:rPr lang="en-US" sz="1050" dirty="0">
+                        <a:rPr lang="en-US" sz="1000" dirty="0">
                           <a:solidFill>
                             <a:srgbClr val="1A1A1A"/>
                           </a:solidFill>
@@ -7639,9 +8228,9 @@
                           <a:ea typeface="Microsoft YaHei" pitchFamily="34" charset="-122"/>
                           <a:cs typeface="Microsoft YaHei" pitchFamily="34" charset="-120"/>
                         </a:rPr>
-                        <a:t>1</a:t>
+                        <a:t>9</a:t>
                       </a:r>
-                      <a:endParaRPr lang="en-US" sz="1050" dirty="0">
+                      <a:endParaRPr lang="en-US" sz="1000" dirty="0">
                         <a:latin typeface="Microsoft YaHei" charset="0"/>
                         <a:ea typeface="Microsoft YaHei" charset="0"/>
                         <a:cs typeface="Microsoft YaHei" charset="0"/>
@@ -7696,7 +8285,72 @@
                         <a:buNone/>
                       </a:pPr>
                       <a:r>
-                        <a:rPr lang="en-US" sz="1050" dirty="0">
+                        <a:rPr lang="en-US" sz="1000" dirty="0">
+                          <a:solidFill>
+                            <a:srgbClr val="1A1A1A"/>
+                          </a:solidFill>
+                          <a:latin typeface="Microsoft YaHei" pitchFamily="34" charset="0"/>
+                          <a:ea typeface="Microsoft YaHei" pitchFamily="34" charset="-122"/>
+                          <a:cs typeface="Microsoft YaHei" pitchFamily="34" charset="-120"/>
+                        </a:rPr>
+                        <a:t>1</a:t>
+                      </a:r>
+                      <a:endParaRPr lang="en-US" sz="1000" dirty="0">
+                        <a:latin typeface="Microsoft YaHei" charset="0"/>
+                        <a:ea typeface="Microsoft YaHei" charset="0"/>
+                        <a:cs typeface="Microsoft YaHei" charset="0"/>
+                      </a:endParaRPr>
+                    </a:p>
+                  </a:txBody>
+                  <a:tcPr marL="91440" marR="91440" marT="45720" marB="45720" anchor="ctr">
+                    <a:lnL w="6350" cap="flat" cmpd="sng" algn="ctr">
+                      <a:solidFill>
+                        <a:srgbClr val="E2E5E9"/>
+                      </a:solidFill>
+                      <a:prstDash val="solid"/>
+                      <a:round/>
+                      <a:headEnd type="none" w="med" len="med"/>
+                      <a:tailEnd type="none" w="med" len="med"/>
+                    </a:lnL>
+                    <a:lnR w="6350" cap="flat" cmpd="sng" algn="ctr">
+                      <a:solidFill>
+                        <a:srgbClr val="E2E5E9"/>
+                      </a:solidFill>
+                      <a:prstDash val="solid"/>
+                      <a:round/>
+                      <a:headEnd type="none" w="med" len="med"/>
+                      <a:tailEnd type="none" w="med" len="med"/>
+                    </a:lnR>
+                    <a:lnT w="6350" cap="flat" cmpd="sng" algn="ctr">
+                      <a:solidFill>
+                        <a:srgbClr val="E2E5E9"/>
+                      </a:solidFill>
+                      <a:prstDash val="solid"/>
+                      <a:round/>
+                      <a:headEnd type="none" w="med" len="med"/>
+                      <a:tailEnd type="none" w="med" len="med"/>
+                    </a:lnT>
+                    <a:lnB w="6350" cap="flat" cmpd="sng" algn="ctr">
+                      <a:solidFill>
+                        <a:srgbClr val="E2E5E9"/>
+                      </a:solidFill>
+                      <a:prstDash val="solid"/>
+                      <a:round/>
+                      <a:headEnd type="none" w="med" len="med"/>
+                      <a:tailEnd type="none" w="med" len="med"/>
+                    </a:lnB>
+                  </a:tcPr>
+                </a:tc>
+                <a:tc>
+                  <a:txBody>
+                    <a:bodyPr/>
+                    <a:lstStyle/>
+                    <a:p>
+                      <a:pPr indent="0" marL="0">
+                        <a:buNone/>
+                      </a:pPr>
+                      <a:r>
+                        <a:rPr lang="en-US" sz="1000" dirty="0">
                           <a:solidFill>
                             <a:srgbClr val="1A1A1A"/>
                           </a:solidFill>
@@ -7706,7 +8360,7 @@
                         </a:rPr>
                         <a:t>—</a:t>
                       </a:r>
-                      <a:endParaRPr lang="en-US" sz="1050" dirty="0">
+                      <a:endParaRPr lang="en-US" sz="1000" dirty="0">
                         <a:latin typeface="Microsoft YaHei" charset="0"/>
                         <a:ea typeface="Microsoft YaHei" charset="0"/>
                         <a:cs typeface="Microsoft YaHei" charset="0"/>
@@ -7763,7 +8417,7 @@
                         <a:buNone/>
                       </a:pPr>
                       <a:r>
-                        <a:rPr lang="en-US" sz="1050" dirty="0">
+                        <a:rPr lang="en-US" sz="1000" dirty="0">
                           <a:solidFill>
                             <a:srgbClr val="1A1A1A"/>
                           </a:solidFill>
@@ -7773,7 +8427,7 @@
                         </a:rPr>
                         <a:t>人 · 脑</a:t>
                       </a:r>
-                      <a:endParaRPr lang="en-US" sz="1050" dirty="0">
+                      <a:endParaRPr lang="en-US" sz="1000" dirty="0">
                         <a:latin typeface="Microsoft YaHei" charset="0"/>
                         <a:ea typeface="Microsoft YaHei" charset="0"/>
                         <a:cs typeface="Microsoft YaHei" charset="0"/>
@@ -7828,7 +8482,7 @@
                         <a:buNone/>
                       </a:pPr>
                       <a:r>
-                        <a:rPr lang="en-US" sz="1050" dirty="0">
+                        <a:rPr lang="en-US" sz="1000" dirty="0">
                           <a:solidFill>
                             <a:srgbClr val="1A1A1A"/>
                           </a:solidFill>
@@ -7838,7 +8492,7 @@
                         </a:rPr>
                         <a:t>CGE 源中间神经元</a:t>
                       </a:r>
-                      <a:endParaRPr lang="en-US" sz="1050" dirty="0">
+                      <a:endParaRPr lang="en-US" sz="1000" dirty="0">
                         <a:latin typeface="Microsoft YaHei" charset="0"/>
                         <a:ea typeface="Microsoft YaHei" charset="0"/>
                         <a:cs typeface="Microsoft YaHei" charset="0"/>
@@ -7893,7 +8547,7 @@
                         <a:buNone/>
                       </a:pPr>
                       <a:r>
-                        <a:rPr lang="en-US" sz="1050" dirty="0">
+                        <a:rPr lang="en-US" sz="1000" dirty="0">
                           <a:solidFill>
                             <a:srgbClr val="1A1A1A"/>
                           </a:solidFill>
@@ -7903,7 +8557,7 @@
                         </a:rPr>
                         <a:t>12.1%　618/5096</a:t>
                       </a:r>
-                      <a:endParaRPr lang="en-US" sz="1050" dirty="0">
+                      <a:endParaRPr lang="en-US" sz="1000" dirty="0">
                         <a:latin typeface="Microsoft YaHei" charset="0"/>
                         <a:ea typeface="Microsoft YaHei" charset="0"/>
                         <a:cs typeface="Microsoft YaHei" charset="0"/>
@@ -7958,7 +8612,7 @@
                         <a:buNone/>
                       </a:pPr>
                       <a:r>
-                        <a:rPr lang="en-US" sz="1050" dirty="0">
+                        <a:rPr lang="en-US" sz="1000" dirty="0">
                           <a:solidFill>
                             <a:srgbClr val="1A1A1A"/>
                           </a:solidFill>
@@ -7968,7 +8622,7 @@
                         </a:rPr>
                         <a:t>0.20%　10/5096</a:t>
                       </a:r>
-                      <a:endParaRPr lang="en-US" sz="1050" dirty="0">
+                      <a:endParaRPr lang="en-US" sz="1000" dirty="0">
                         <a:latin typeface="Microsoft YaHei" charset="0"/>
                         <a:ea typeface="Microsoft YaHei" charset="0"/>
                         <a:cs typeface="Microsoft YaHei" charset="0"/>
@@ -8023,7 +8677,7 @@
                         <a:buNone/>
                       </a:pPr>
                       <a:r>
-                        <a:rPr lang="en-US" sz="1050" dirty="0">
+                        <a:rPr lang="en-US" sz="1000" dirty="0">
                           <a:solidFill>
                             <a:srgbClr val="1A1A1A"/>
                           </a:solidFill>
@@ -8031,9 +8685,9 @@
                           <a:ea typeface="Microsoft YaHei" pitchFamily="34" charset="-122"/>
                           <a:cs typeface="Microsoft YaHei" pitchFamily="34" charset="-120"/>
                         </a:rPr>
-                        <a:t>44</a:t>
+                        <a:t>25.9%　1320/5096</a:t>
                       </a:r>
-                      <a:endParaRPr lang="en-US" sz="1050" dirty="0">
+                      <a:endParaRPr lang="en-US" sz="1000" dirty="0">
                         <a:latin typeface="Microsoft YaHei" charset="0"/>
                         <a:ea typeface="Microsoft YaHei" charset="0"/>
                         <a:cs typeface="Microsoft YaHei" charset="0"/>
@@ -8088,7 +8742,7 @@
                         <a:buNone/>
                       </a:pPr>
                       <a:r>
-                        <a:rPr lang="en-US" sz="1050" dirty="0">
+                        <a:rPr lang="en-US" sz="1000" dirty="0">
                           <a:solidFill>
                             <a:srgbClr val="1A1A1A"/>
                           </a:solidFill>
@@ -8096,9 +8750,9 @@
                           <a:ea typeface="Microsoft YaHei" pitchFamily="34" charset="-122"/>
                           <a:cs typeface="Microsoft YaHei" pitchFamily="34" charset="-120"/>
                         </a:rPr>
-                        <a:t>1</a:t>
+                        <a:t>44</a:t>
                       </a:r>
-                      <a:endParaRPr lang="en-US" sz="1050" dirty="0">
+                      <a:endParaRPr lang="en-US" sz="1000" dirty="0">
                         <a:latin typeface="Microsoft YaHei" charset="0"/>
                         <a:ea typeface="Microsoft YaHei" charset="0"/>
                         <a:cs typeface="Microsoft YaHei" charset="0"/>
@@ -8153,7 +8807,72 @@
                         <a:buNone/>
                       </a:pPr>
                       <a:r>
-                        <a:rPr lang="en-US" sz="1050" dirty="0">
+                        <a:rPr lang="en-US" sz="1000" dirty="0">
+                          <a:solidFill>
+                            <a:srgbClr val="1A1A1A"/>
+                          </a:solidFill>
+                          <a:latin typeface="Microsoft YaHei" pitchFamily="34" charset="0"/>
+                          <a:ea typeface="Microsoft YaHei" pitchFamily="34" charset="-122"/>
+                          <a:cs typeface="Microsoft YaHei" pitchFamily="34" charset="-120"/>
+                        </a:rPr>
+                        <a:t>1</a:t>
+                      </a:r>
+                      <a:endParaRPr lang="en-US" sz="1000" dirty="0">
+                        <a:latin typeface="Microsoft YaHei" charset="0"/>
+                        <a:ea typeface="Microsoft YaHei" charset="0"/>
+                        <a:cs typeface="Microsoft YaHei" charset="0"/>
+                      </a:endParaRPr>
+                    </a:p>
+                  </a:txBody>
+                  <a:tcPr marL="91440" marR="91440" marT="45720" marB="45720" anchor="ctr">
+                    <a:lnL w="6350" cap="flat" cmpd="sng" algn="ctr">
+                      <a:solidFill>
+                        <a:srgbClr val="E2E5E9"/>
+                      </a:solidFill>
+                      <a:prstDash val="solid"/>
+                      <a:round/>
+                      <a:headEnd type="none" w="med" len="med"/>
+                      <a:tailEnd type="none" w="med" len="med"/>
+                    </a:lnL>
+                    <a:lnR w="6350" cap="flat" cmpd="sng" algn="ctr">
+                      <a:solidFill>
+                        <a:srgbClr val="E2E5E9"/>
+                      </a:solidFill>
+                      <a:prstDash val="solid"/>
+                      <a:round/>
+                      <a:headEnd type="none" w="med" len="med"/>
+                      <a:tailEnd type="none" w="med" len="med"/>
+                    </a:lnR>
+                    <a:lnT w="6350" cap="flat" cmpd="sng" algn="ctr">
+                      <a:solidFill>
+                        <a:srgbClr val="E2E5E9"/>
+                      </a:solidFill>
+                      <a:prstDash val="solid"/>
+                      <a:round/>
+                      <a:headEnd type="none" w="med" len="med"/>
+                      <a:tailEnd type="none" w="med" len="med"/>
+                    </a:lnT>
+                    <a:lnB w="6350" cap="flat" cmpd="sng" algn="ctr">
+                      <a:solidFill>
+                        <a:srgbClr val="E2E5E9"/>
+                      </a:solidFill>
+                      <a:prstDash val="solid"/>
+                      <a:round/>
+                      <a:headEnd type="none" w="med" len="med"/>
+                      <a:tailEnd type="none" w="med" len="med"/>
+                    </a:lnB>
+                  </a:tcPr>
+                </a:tc>
+                <a:tc>
+                  <a:txBody>
+                    <a:bodyPr/>
+                    <a:lstStyle/>
+                    <a:p>
+                      <a:pPr indent="0" marL="0">
+                        <a:buNone/>
+                      </a:pPr>
+                      <a:r>
+                        <a:rPr lang="en-US" sz="1000" dirty="0">
                           <a:solidFill>
                             <a:srgbClr val="1A1A1A"/>
                           </a:solidFill>
@@ -8163,7 +8882,7 @@
                         </a:rPr>
                         <a:t>3</a:t>
                       </a:r>
-                      <a:endParaRPr lang="en-US" sz="1050" dirty="0">
+                      <a:endParaRPr lang="en-US" sz="1000" dirty="0">
                         <a:latin typeface="Microsoft YaHei" charset="0"/>
                         <a:ea typeface="Microsoft YaHei" charset="0"/>
                         <a:cs typeface="Microsoft YaHei" charset="0"/>
@@ -8220,7 +8939,7 @@
                         <a:buNone/>
                       </a:pPr>
                       <a:r>
-                        <a:rPr lang="en-US" sz="1050" dirty="0">
+                        <a:rPr lang="en-US" sz="1000" dirty="0">
                           <a:solidFill>
                             <a:srgbClr val="1A1A1A"/>
                           </a:solidFill>
@@ -8230,7 +8949,7 @@
                         </a:rPr>
                         <a:t>人 · 胰</a:t>
                       </a:r>
-                      <a:endParaRPr lang="en-US" sz="1050" dirty="0">
+                      <a:endParaRPr lang="en-US" sz="1000" dirty="0">
                         <a:latin typeface="Microsoft YaHei" charset="0"/>
                         <a:ea typeface="Microsoft YaHei" charset="0"/>
                         <a:cs typeface="Microsoft YaHei" charset="0"/>
@@ -8285,7 +9004,7 @@
                         <a:buNone/>
                       </a:pPr>
                       <a:r>
-                        <a:rPr lang="en-US" sz="1050" dirty="0">
+                        <a:rPr lang="en-US" sz="1000" dirty="0">
                           <a:solidFill>
                             <a:srgbClr val="1A1A1A"/>
                           </a:solidFill>
@@ -8295,7 +9014,7 @@
                         </a:rPr>
                         <a:t>胰腺腺泡细胞 ×2</a:t>
                       </a:r>
-                      <a:endParaRPr lang="en-US" sz="1050" dirty="0">
+                      <a:endParaRPr lang="en-US" sz="1000" dirty="0">
                         <a:latin typeface="Microsoft YaHei" charset="0"/>
                         <a:ea typeface="Microsoft YaHei" charset="0"/>
                         <a:cs typeface="Microsoft YaHei" charset="0"/>
@@ -8350,7 +9069,7 @@
                         <a:buNone/>
                       </a:pPr>
                       <a:r>
-                        <a:rPr lang="en-US" sz="1050" dirty="0">
+                        <a:rPr lang="en-US" sz="1000" dirty="0">
                           <a:solidFill>
                             <a:srgbClr val="1A1A1A"/>
                           </a:solidFill>
@@ -8360,7 +9079,7 @@
                         </a:rPr>
                         <a:t>10.8%　1486/13747</a:t>
                       </a:r>
-                      <a:endParaRPr lang="en-US" sz="1050" dirty="0">
+                      <a:endParaRPr lang="en-US" sz="1000" dirty="0">
                         <a:latin typeface="Microsoft YaHei" charset="0"/>
                         <a:ea typeface="Microsoft YaHei" charset="0"/>
                         <a:cs typeface="Microsoft YaHei" charset="0"/>
@@ -8415,7 +9134,7 @@
                         <a:buNone/>
                       </a:pPr>
                       <a:r>
-                        <a:rPr lang="en-US" sz="1050" dirty="0">
+                        <a:rPr lang="en-US" sz="1000" dirty="0">
                           <a:solidFill>
                             <a:srgbClr val="1A1A1A"/>
                           </a:solidFill>
@@ -8425,7 +9144,7 @@
                         </a:rPr>
                         <a:t>0.25%　34/13747</a:t>
                       </a:r>
-                      <a:endParaRPr lang="en-US" sz="1050" dirty="0">
+                      <a:endParaRPr lang="en-US" sz="1000" dirty="0">
                         <a:latin typeface="Microsoft YaHei" charset="0"/>
                         <a:ea typeface="Microsoft YaHei" charset="0"/>
                         <a:cs typeface="Microsoft YaHei" charset="0"/>
@@ -8480,7 +9199,7 @@
                         <a:buNone/>
                       </a:pPr>
                       <a:r>
-                        <a:rPr lang="en-US" sz="1050" dirty="0">
+                        <a:rPr lang="en-US" sz="1000" dirty="0">
                           <a:solidFill>
                             <a:srgbClr val="1A1A1A"/>
                           </a:solidFill>
@@ -8488,9 +9207,9 @@
                           <a:ea typeface="Microsoft YaHei" pitchFamily="34" charset="-122"/>
                           <a:cs typeface="Microsoft YaHei" pitchFamily="34" charset="-120"/>
                         </a:rPr>
-                        <a:t>18</a:t>
+                        <a:t>16.1%　2219/13747  ▽</a:t>
                       </a:r>
-                      <a:endParaRPr lang="en-US" sz="1050" dirty="0">
+                      <a:endParaRPr lang="en-US" sz="1000" dirty="0">
                         <a:latin typeface="Microsoft YaHei" charset="0"/>
                         <a:ea typeface="Microsoft YaHei" charset="0"/>
                         <a:cs typeface="Microsoft YaHei" charset="0"/>
@@ -8545,7 +9264,7 @@
                         <a:buNone/>
                       </a:pPr>
                       <a:r>
-                        <a:rPr lang="en-US" sz="1050" dirty="0">
+                        <a:rPr lang="en-US" sz="1000" dirty="0">
                           <a:solidFill>
                             <a:srgbClr val="1A1A1A"/>
                           </a:solidFill>
@@ -8553,9 +9272,9 @@
                           <a:ea typeface="Microsoft YaHei" pitchFamily="34" charset="-122"/>
                           <a:cs typeface="Microsoft YaHei" pitchFamily="34" charset="-120"/>
                         </a:rPr>
-                        <a:t>1</a:t>
+                        <a:t>18</a:t>
                       </a:r>
-                      <a:endParaRPr lang="en-US" sz="1050" dirty="0">
+                      <a:endParaRPr lang="en-US" sz="1000" dirty="0">
                         <a:latin typeface="Microsoft YaHei" charset="0"/>
                         <a:ea typeface="Microsoft YaHei" charset="0"/>
                         <a:cs typeface="Microsoft YaHei" charset="0"/>
@@ -8610,7 +9329,72 @@
                         <a:buNone/>
                       </a:pPr>
                       <a:r>
-                        <a:rPr lang="en-US" sz="1050" dirty="0">
+                        <a:rPr lang="en-US" sz="1000" dirty="0">
+                          <a:solidFill>
+                            <a:srgbClr val="1A1A1A"/>
+                          </a:solidFill>
+                          <a:latin typeface="Microsoft YaHei" pitchFamily="34" charset="0"/>
+                          <a:ea typeface="Microsoft YaHei" pitchFamily="34" charset="-122"/>
+                          <a:cs typeface="Microsoft YaHei" pitchFamily="34" charset="-120"/>
+                        </a:rPr>
+                        <a:t>1</a:t>
+                      </a:r>
+                      <a:endParaRPr lang="en-US" sz="1000" dirty="0">
+                        <a:latin typeface="Microsoft YaHei" charset="0"/>
+                        <a:ea typeface="Microsoft YaHei" charset="0"/>
+                        <a:cs typeface="Microsoft YaHei" charset="0"/>
+                      </a:endParaRPr>
+                    </a:p>
+                  </a:txBody>
+                  <a:tcPr marL="91440" marR="91440" marT="45720" marB="45720" anchor="ctr">
+                    <a:lnL w="6350" cap="flat" cmpd="sng" algn="ctr">
+                      <a:solidFill>
+                        <a:srgbClr val="E2E5E9"/>
+                      </a:solidFill>
+                      <a:prstDash val="solid"/>
+                      <a:round/>
+                      <a:headEnd type="none" w="med" len="med"/>
+                      <a:tailEnd type="none" w="med" len="med"/>
+                    </a:lnL>
+                    <a:lnR w="6350" cap="flat" cmpd="sng" algn="ctr">
+                      <a:solidFill>
+                        <a:srgbClr val="E2E5E9"/>
+                      </a:solidFill>
+                      <a:prstDash val="solid"/>
+                      <a:round/>
+                      <a:headEnd type="none" w="med" len="med"/>
+                      <a:tailEnd type="none" w="med" len="med"/>
+                    </a:lnR>
+                    <a:lnT w="6350" cap="flat" cmpd="sng" algn="ctr">
+                      <a:solidFill>
+                        <a:srgbClr val="E2E5E9"/>
+                      </a:solidFill>
+                      <a:prstDash val="solid"/>
+                      <a:round/>
+                      <a:headEnd type="none" w="med" len="med"/>
+                      <a:tailEnd type="none" w="med" len="med"/>
+                    </a:lnT>
+                    <a:lnB w="6350" cap="flat" cmpd="sng" algn="ctr">
+                      <a:solidFill>
+                        <a:srgbClr val="E2E5E9"/>
+                      </a:solidFill>
+                      <a:prstDash val="solid"/>
+                      <a:round/>
+                      <a:headEnd type="none" w="med" len="med"/>
+                      <a:tailEnd type="none" w="med" len="med"/>
+                    </a:lnB>
+                  </a:tcPr>
+                </a:tc>
+                <a:tc>
+                  <a:txBody>
+                    <a:bodyPr/>
+                    <a:lstStyle/>
+                    <a:p>
+                      <a:pPr indent="0" marL="0">
+                        <a:buNone/>
+                      </a:pPr>
+                      <a:r>
+                        <a:rPr lang="en-US" sz="1000" dirty="0">
                           <a:solidFill>
                             <a:srgbClr val="1A1A1A"/>
                           </a:solidFill>
@@ -8620,7 +9404,7 @@
                         </a:rPr>
                         <a:t>—</a:t>
                       </a:r>
-                      <a:endParaRPr lang="en-US" sz="1050" dirty="0">
+                      <a:endParaRPr lang="en-US" sz="1000" dirty="0">
                         <a:latin typeface="Microsoft YaHei" charset="0"/>
                         <a:ea typeface="Microsoft YaHei" charset="0"/>
                         <a:cs typeface="Microsoft YaHei" charset="0"/>
@@ -8677,7 +9461,7 @@
                         <a:buNone/>
                       </a:pPr>
                       <a:r>
-                        <a:rPr lang="en-US" sz="1050" dirty="0">
+                        <a:rPr lang="en-US" sz="1000" dirty="0">
                           <a:solidFill>
                             <a:srgbClr val="1A1A1A"/>
                           </a:solidFill>
@@ -8687,7 +9471,7 @@
                         </a:rPr>
                         <a:t>人 · 脑</a:t>
                       </a:r>
-                      <a:endParaRPr lang="en-US" sz="1050" dirty="0">
+                      <a:endParaRPr lang="en-US" sz="1000" dirty="0">
                         <a:latin typeface="Microsoft YaHei" charset="0"/>
                         <a:ea typeface="Microsoft YaHei" charset="0"/>
                         <a:cs typeface="Microsoft YaHei" charset="0"/>
@@ -8742,7 +9526,7 @@
                         <a:buNone/>
                       </a:pPr>
                       <a:r>
-                        <a:rPr lang="en-US" sz="1050" dirty="0">
+                        <a:rPr lang="en-US" sz="1000" dirty="0">
                           <a:solidFill>
                             <a:srgbClr val="1A1A1A"/>
                           </a:solidFill>
@@ -8752,7 +9536,7 @@
                         </a:rPr>
                         <a:t>血管软脑膜细胞</a:t>
                       </a:r>
-                      <a:endParaRPr lang="en-US" sz="1050" dirty="0">
+                      <a:endParaRPr lang="en-US" sz="1000" dirty="0">
                         <a:latin typeface="Microsoft YaHei" charset="0"/>
                         <a:ea typeface="Microsoft YaHei" charset="0"/>
                         <a:cs typeface="Microsoft YaHei" charset="0"/>
@@ -8807,7 +9591,7 @@
                         <a:buNone/>
                       </a:pPr>
                       <a:r>
-                        <a:rPr lang="en-US" sz="1050" dirty="0">
+                        <a:rPr lang="en-US" sz="1000" dirty="0">
                           <a:solidFill>
                             <a:srgbClr val="1A1A1A"/>
                           </a:solidFill>
@@ -8817,7 +9601,7 @@
                         </a:rPr>
                         <a:t>32.9%　1097/3330</a:t>
                       </a:r>
-                      <a:endParaRPr lang="en-US" sz="1050" dirty="0">
+                      <a:endParaRPr lang="en-US" sz="1000" dirty="0">
                         <a:latin typeface="Microsoft YaHei" charset="0"/>
                         <a:ea typeface="Microsoft YaHei" charset="0"/>
                         <a:cs typeface="Microsoft YaHei" charset="0"/>
@@ -8872,7 +9656,7 @@
                         <a:buNone/>
                       </a:pPr>
                       <a:r>
-                        <a:rPr lang="en-US" sz="1050" dirty="0">
+                        <a:rPr lang="en-US" sz="1000" dirty="0">
                           <a:solidFill>
                             <a:srgbClr val="1A1A1A"/>
                           </a:solidFill>
@@ -8882,7 +9666,7 @@
                         </a:rPr>
                         <a:t>0.75%　25/3330</a:t>
                       </a:r>
-                      <a:endParaRPr lang="en-US" sz="1050" dirty="0">
+                      <a:endParaRPr lang="en-US" sz="1000" dirty="0">
                         <a:latin typeface="Microsoft YaHei" charset="0"/>
                         <a:ea typeface="Microsoft YaHei" charset="0"/>
                         <a:cs typeface="Microsoft YaHei" charset="0"/>
@@ -8937,7 +9721,7 @@
                         <a:buNone/>
                       </a:pPr>
                       <a:r>
-                        <a:rPr lang="en-US" sz="1050" dirty="0">
+                        <a:rPr lang="en-US" sz="1000" dirty="0">
                           <a:solidFill>
                             <a:srgbClr val="1A1A1A"/>
                           </a:solidFill>
@@ -8945,9 +9729,9 @@
                           <a:ea typeface="Microsoft YaHei" pitchFamily="34" charset="-122"/>
                           <a:cs typeface="Microsoft YaHei" pitchFamily="34" charset="-120"/>
                         </a:rPr>
-                        <a:t>52</a:t>
+                        <a:t>7.54%　251/3330</a:t>
                       </a:r>
-                      <a:endParaRPr lang="en-US" sz="1050" dirty="0">
+                      <a:endParaRPr lang="en-US" sz="1000" dirty="0">
                         <a:latin typeface="Microsoft YaHei" charset="0"/>
                         <a:ea typeface="Microsoft YaHei" charset="0"/>
                         <a:cs typeface="Microsoft YaHei" charset="0"/>
@@ -9002,7 +9786,7 @@
                         <a:buNone/>
                       </a:pPr>
                       <a:r>
-                        <a:rPr lang="en-US" sz="1050" dirty="0">
+                        <a:rPr lang="en-US" sz="1000" dirty="0">
                           <a:solidFill>
                             <a:srgbClr val="1A1A1A"/>
                           </a:solidFill>
@@ -9010,9 +9794,9 @@
                           <a:ea typeface="Microsoft YaHei" pitchFamily="34" charset="-122"/>
                           <a:cs typeface="Microsoft YaHei" pitchFamily="34" charset="-120"/>
                         </a:rPr>
-                        <a:t>—</a:t>
+                        <a:t>52</a:t>
                       </a:r>
-                      <a:endParaRPr lang="en-US" sz="1050" dirty="0">
+                      <a:endParaRPr lang="en-US" sz="1000" dirty="0">
                         <a:latin typeface="Microsoft YaHei" charset="0"/>
                         <a:ea typeface="Microsoft YaHei" charset="0"/>
                         <a:cs typeface="Microsoft YaHei" charset="0"/>
@@ -9067,7 +9851,7 @@
                         <a:buNone/>
                       </a:pPr>
                       <a:r>
-                        <a:rPr lang="en-US" sz="1050" dirty="0">
+                        <a:rPr lang="en-US" sz="1000" dirty="0">
                           <a:solidFill>
                             <a:srgbClr val="1A1A1A"/>
                           </a:solidFill>
@@ -9077,7 +9861,72 @@
                         </a:rPr>
                         <a:t>—</a:t>
                       </a:r>
-                      <a:endParaRPr lang="en-US" sz="1050" dirty="0">
+                      <a:endParaRPr lang="en-US" sz="1000" dirty="0">
+                        <a:latin typeface="Microsoft YaHei" charset="0"/>
+                        <a:ea typeface="Microsoft YaHei" charset="0"/>
+                        <a:cs typeface="Microsoft YaHei" charset="0"/>
+                      </a:endParaRPr>
+                    </a:p>
+                  </a:txBody>
+                  <a:tcPr marL="91440" marR="91440" marT="45720" marB="45720" anchor="ctr">
+                    <a:lnL w="6350" cap="flat" cmpd="sng" algn="ctr">
+                      <a:solidFill>
+                        <a:srgbClr val="E2E5E9"/>
+                      </a:solidFill>
+                      <a:prstDash val="solid"/>
+                      <a:round/>
+                      <a:headEnd type="none" w="med" len="med"/>
+                      <a:tailEnd type="none" w="med" len="med"/>
+                    </a:lnL>
+                    <a:lnR w="6350" cap="flat" cmpd="sng" algn="ctr">
+                      <a:solidFill>
+                        <a:srgbClr val="E2E5E9"/>
+                      </a:solidFill>
+                      <a:prstDash val="solid"/>
+                      <a:round/>
+                      <a:headEnd type="none" w="med" len="med"/>
+                      <a:tailEnd type="none" w="med" len="med"/>
+                    </a:lnR>
+                    <a:lnT w="6350" cap="flat" cmpd="sng" algn="ctr">
+                      <a:solidFill>
+                        <a:srgbClr val="E2E5E9"/>
+                      </a:solidFill>
+                      <a:prstDash val="solid"/>
+                      <a:round/>
+                      <a:headEnd type="none" w="med" len="med"/>
+                      <a:tailEnd type="none" w="med" len="med"/>
+                    </a:lnT>
+                    <a:lnB w="6350" cap="flat" cmpd="sng" algn="ctr">
+                      <a:solidFill>
+                        <a:srgbClr val="E2E5E9"/>
+                      </a:solidFill>
+                      <a:prstDash val="solid"/>
+                      <a:round/>
+                      <a:headEnd type="none" w="med" len="med"/>
+                      <a:tailEnd type="none" w="med" len="med"/>
+                    </a:lnB>
+                  </a:tcPr>
+                </a:tc>
+                <a:tc>
+                  <a:txBody>
+                    <a:bodyPr/>
+                    <a:lstStyle/>
+                    <a:p>
+                      <a:pPr indent="0" marL="0">
+                        <a:buNone/>
+                      </a:pPr>
+                      <a:r>
+                        <a:rPr lang="en-US" sz="1000" dirty="0">
+                          <a:solidFill>
+                            <a:srgbClr val="1A1A1A"/>
+                          </a:solidFill>
+                          <a:latin typeface="Microsoft YaHei" pitchFamily="34" charset="0"/>
+                          <a:ea typeface="Microsoft YaHei" pitchFamily="34" charset="-122"/>
+                          <a:cs typeface="Microsoft YaHei" pitchFamily="34" charset="-120"/>
+                        </a:rPr>
+                        <a:t>—</a:t>
+                      </a:r>
+                      <a:endParaRPr lang="en-US" sz="1000" dirty="0">
                         <a:latin typeface="Microsoft YaHei" charset="0"/>
                         <a:ea typeface="Microsoft YaHei" charset="0"/>
                         <a:cs typeface="Microsoft YaHei" charset="0"/>
@@ -9134,7 +9983,7 @@
                         <a:buNone/>
                       </a:pPr>
                       <a:r>
-                        <a:rPr lang="en-US" sz="1050" dirty="0">
+                        <a:rPr lang="en-US" sz="1000" dirty="0">
                           <a:solidFill>
                             <a:srgbClr val="1A1A1A"/>
                           </a:solidFill>
@@ -9144,7 +9993,7 @@
                         </a:rPr>
                         <a:t>人 · 肝</a:t>
                       </a:r>
-                      <a:endParaRPr lang="en-US" sz="1050" dirty="0">
+                      <a:endParaRPr lang="en-US" sz="1000" dirty="0">
                         <a:latin typeface="Microsoft YaHei" charset="0"/>
                         <a:ea typeface="Microsoft YaHei" charset="0"/>
                         <a:cs typeface="Microsoft YaHei" charset="0"/>
@@ -9199,7 +10048,7 @@
                         <a:buNone/>
                       </a:pPr>
                       <a:r>
-                        <a:rPr lang="en-US" sz="1050" dirty="0">
+                        <a:rPr lang="en-US" sz="1000" dirty="0">
                           <a:solidFill>
                             <a:srgbClr val="1A1A1A"/>
                           </a:solidFill>
@@ -9209,7 +10058,7 @@
                         </a:rPr>
                         <a:t>巨核红系祖细胞</a:t>
                       </a:r>
-                      <a:endParaRPr lang="en-US" sz="1050" dirty="0">
+                      <a:endParaRPr lang="en-US" sz="1000" dirty="0">
                         <a:latin typeface="Microsoft YaHei" charset="0"/>
                         <a:ea typeface="Microsoft YaHei" charset="0"/>
                         <a:cs typeface="Microsoft YaHei" charset="0"/>
@@ -9264,7 +10113,7 @@
                         <a:buNone/>
                       </a:pPr>
                       <a:r>
-                        <a:rPr lang="en-US" sz="1050" dirty="0">
+                        <a:rPr lang="en-US" sz="1000" dirty="0">
                           <a:solidFill>
                             <a:srgbClr val="1A1A1A"/>
                           </a:solidFill>
@@ -9274,7 +10123,7 @@
                         </a:rPr>
                         <a:t>23.6%　718/3049</a:t>
                       </a:r>
-                      <a:endParaRPr lang="en-US" sz="1050" dirty="0">
+                      <a:endParaRPr lang="en-US" sz="1000" dirty="0">
                         <a:latin typeface="Microsoft YaHei" charset="0"/>
                         <a:ea typeface="Microsoft YaHei" charset="0"/>
                         <a:cs typeface="Microsoft YaHei" charset="0"/>
@@ -9329,7 +10178,7 @@
                         <a:buNone/>
                       </a:pPr>
                       <a:r>
-                        <a:rPr lang="en-US" sz="1050" dirty="0">
+                        <a:rPr lang="en-US" sz="1000" dirty="0">
                           <a:solidFill>
                             <a:srgbClr val="1A1A1A"/>
                           </a:solidFill>
@@ -9339,7 +10188,7 @@
                         </a:rPr>
                         <a:t>3.71%　113/3049</a:t>
                       </a:r>
-                      <a:endParaRPr lang="en-US" sz="1050" dirty="0">
+                      <a:endParaRPr lang="en-US" sz="1000" dirty="0">
                         <a:latin typeface="Microsoft YaHei" charset="0"/>
                         <a:ea typeface="Microsoft YaHei" charset="0"/>
                         <a:cs typeface="Microsoft YaHei" charset="0"/>
@@ -9394,7 +10243,7 @@
                         <a:buNone/>
                       </a:pPr>
                       <a:r>
-                        <a:rPr lang="en-US" sz="1050" dirty="0">
+                        <a:rPr lang="en-US" sz="1000" dirty="0">
                           <a:solidFill>
                             <a:srgbClr val="1A1A1A"/>
                           </a:solidFill>
@@ -9402,9 +10251,9 @@
                           <a:ea typeface="Microsoft YaHei" pitchFamily="34" charset="-122"/>
                           <a:cs typeface="Microsoft YaHei" pitchFamily="34" charset="-120"/>
                         </a:rPr>
-                        <a:t>13</a:t>
+                        <a:t>40.4%　1232/3049</a:t>
                       </a:r>
-                      <a:endParaRPr lang="en-US" sz="1050" dirty="0">
+                      <a:endParaRPr lang="en-US" sz="1000" dirty="0">
                         <a:latin typeface="Microsoft YaHei" charset="0"/>
                         <a:ea typeface="Microsoft YaHei" charset="0"/>
                         <a:cs typeface="Microsoft YaHei" charset="0"/>
@@ -9459,7 +10308,7 @@
                         <a:buNone/>
                       </a:pPr>
                       <a:r>
-                        <a:rPr lang="en-US" sz="1050" dirty="0">
+                        <a:rPr lang="en-US" sz="1000" dirty="0">
                           <a:solidFill>
                             <a:srgbClr val="1A1A1A"/>
                           </a:solidFill>
@@ -9467,9 +10316,9 @@
                           <a:ea typeface="Microsoft YaHei" pitchFamily="34" charset="-122"/>
                           <a:cs typeface="Microsoft YaHei" pitchFamily="34" charset="-120"/>
                         </a:rPr>
-                        <a:t>—</a:t>
+                        <a:t>13</a:t>
                       </a:r>
-                      <a:endParaRPr lang="en-US" sz="1050" dirty="0">
+                      <a:endParaRPr lang="en-US" sz="1000" dirty="0">
                         <a:latin typeface="Microsoft YaHei" charset="0"/>
                         <a:ea typeface="Microsoft YaHei" charset="0"/>
                         <a:cs typeface="Microsoft YaHei" charset="0"/>
@@ -9524,7 +10373,7 @@
                         <a:buNone/>
                       </a:pPr>
                       <a:r>
-                        <a:rPr lang="en-US" sz="1050" dirty="0">
+                        <a:rPr lang="en-US" sz="1000" dirty="0">
                           <a:solidFill>
                             <a:srgbClr val="1A1A1A"/>
                           </a:solidFill>
@@ -9534,7 +10383,72 @@
                         </a:rPr>
                         <a:t>—</a:t>
                       </a:r>
-                      <a:endParaRPr lang="en-US" sz="1050" dirty="0">
+                      <a:endParaRPr lang="en-US" sz="1000" dirty="0">
+                        <a:latin typeface="Microsoft YaHei" charset="0"/>
+                        <a:ea typeface="Microsoft YaHei" charset="0"/>
+                        <a:cs typeface="Microsoft YaHei" charset="0"/>
+                      </a:endParaRPr>
+                    </a:p>
+                  </a:txBody>
+                  <a:tcPr marL="91440" marR="91440" marT="45720" marB="45720" anchor="ctr">
+                    <a:lnL w="6350" cap="flat" cmpd="sng" algn="ctr">
+                      <a:solidFill>
+                        <a:srgbClr val="E2E5E9"/>
+                      </a:solidFill>
+                      <a:prstDash val="solid"/>
+                      <a:round/>
+                      <a:headEnd type="none" w="med" len="med"/>
+                      <a:tailEnd type="none" w="med" len="med"/>
+                    </a:lnL>
+                    <a:lnR w="6350" cap="flat" cmpd="sng" algn="ctr">
+                      <a:solidFill>
+                        <a:srgbClr val="E2E5E9"/>
+                      </a:solidFill>
+                      <a:prstDash val="solid"/>
+                      <a:round/>
+                      <a:headEnd type="none" w="med" len="med"/>
+                      <a:tailEnd type="none" w="med" len="med"/>
+                    </a:lnR>
+                    <a:lnT w="6350" cap="flat" cmpd="sng" algn="ctr">
+                      <a:solidFill>
+                        <a:srgbClr val="E2E5E9"/>
+                      </a:solidFill>
+                      <a:prstDash val="solid"/>
+                      <a:round/>
+                      <a:headEnd type="none" w="med" len="med"/>
+                      <a:tailEnd type="none" w="med" len="med"/>
+                    </a:lnT>
+                    <a:lnB w="6350" cap="flat" cmpd="sng" algn="ctr">
+                      <a:solidFill>
+                        <a:srgbClr val="E2E5E9"/>
+                      </a:solidFill>
+                      <a:prstDash val="solid"/>
+                      <a:round/>
+                      <a:headEnd type="none" w="med" len="med"/>
+                      <a:tailEnd type="none" w="med" len="med"/>
+                    </a:lnB>
+                  </a:tcPr>
+                </a:tc>
+                <a:tc>
+                  <a:txBody>
+                    <a:bodyPr/>
+                    <a:lstStyle/>
+                    <a:p>
+                      <a:pPr indent="0" marL="0">
+                        <a:buNone/>
+                      </a:pPr>
+                      <a:r>
+                        <a:rPr lang="en-US" sz="1000" dirty="0">
+                          <a:solidFill>
+                            <a:srgbClr val="1A1A1A"/>
+                          </a:solidFill>
+                          <a:latin typeface="Microsoft YaHei" pitchFamily="34" charset="0"/>
+                          <a:ea typeface="Microsoft YaHei" pitchFamily="34" charset="-122"/>
+                          <a:cs typeface="Microsoft YaHei" pitchFamily="34" charset="-120"/>
+                        </a:rPr>
+                        <a:t>—</a:t>
+                      </a:r>
+                      <a:endParaRPr lang="en-US" sz="1000" dirty="0">
                         <a:latin typeface="Microsoft YaHei" charset="0"/>
                         <a:ea typeface="Microsoft YaHei" charset="0"/>
                         <a:cs typeface="Microsoft YaHei" charset="0"/>
@@ -9591,7 +10505,7 @@
                         <a:buNone/>
                       </a:pPr>
                       <a:r>
-                        <a:rPr lang="en-US" sz="1050" dirty="0">
+                        <a:rPr lang="en-US" sz="1000" dirty="0">
                           <a:solidFill>
                             <a:srgbClr val="1A1A1A"/>
                           </a:solidFill>
@@ -9601,7 +10515,7 @@
                         </a:rPr>
                         <a:t>人 · 肺</a:t>
                       </a:r>
-                      <a:endParaRPr lang="en-US" sz="1050" dirty="0">
+                      <a:endParaRPr lang="en-US" sz="1000" dirty="0">
                         <a:latin typeface="Microsoft YaHei" charset="0"/>
                         <a:ea typeface="Microsoft YaHei" charset="0"/>
                         <a:cs typeface="Microsoft YaHei" charset="0"/>
@@ -9656,7 +10570,7 @@
                         <a:buNone/>
                       </a:pPr>
                       <a:r>
-                        <a:rPr lang="en-US" sz="1050" dirty="0">
+                        <a:rPr lang="en-US" sz="1000" dirty="0">
                           <a:solidFill>
                             <a:srgbClr val="1A1A1A"/>
                           </a:solidFill>
@@ -9666,7 +10580,7 @@
                         </a:rPr>
                         <a:t>肺泡外膜成纤维</a:t>
                       </a:r>
-                      <a:endParaRPr lang="en-US" sz="1050" dirty="0">
+                      <a:endParaRPr lang="en-US" sz="1000" dirty="0">
                         <a:latin typeface="Microsoft YaHei" charset="0"/>
                         <a:ea typeface="Microsoft YaHei" charset="0"/>
                         <a:cs typeface="Microsoft YaHei" charset="0"/>
@@ -9721,7 +10635,7 @@
                         <a:buNone/>
                       </a:pPr>
                       <a:r>
-                        <a:rPr lang="en-US" sz="1050" dirty="0">
+                        <a:rPr lang="en-US" sz="1000" dirty="0">
                           <a:solidFill>
                             <a:srgbClr val="1A1A1A"/>
                           </a:solidFill>
@@ -9731,7 +10645,7 @@
                         </a:rPr>
                         <a:t>16.1%　159/987</a:t>
                       </a:r>
-                      <a:endParaRPr lang="en-US" sz="1050" dirty="0">
+                      <a:endParaRPr lang="en-US" sz="1000" dirty="0">
                         <a:latin typeface="Microsoft YaHei" charset="0"/>
                         <a:ea typeface="Microsoft YaHei" charset="0"/>
                         <a:cs typeface="Microsoft YaHei" charset="0"/>
@@ -9786,7 +10700,7 @@
                         <a:buNone/>
                       </a:pPr>
                       <a:r>
-                        <a:rPr lang="en-US" sz="1050" dirty="0">
+                        <a:rPr lang="en-US" sz="1000" dirty="0">
                           <a:solidFill>
                             <a:srgbClr val="1A1A1A"/>
                           </a:solidFill>
@@ -9796,7 +10710,7 @@
                         </a:rPr>
                         <a:t>5.17%　51/987</a:t>
                       </a:r>
-                      <a:endParaRPr lang="en-US" sz="1050" dirty="0">
+                      <a:endParaRPr lang="en-US" sz="1000" dirty="0">
                         <a:latin typeface="Microsoft YaHei" charset="0"/>
                         <a:ea typeface="Microsoft YaHei" charset="0"/>
                         <a:cs typeface="Microsoft YaHei" charset="0"/>
@@ -9851,7 +10765,7 @@
                         <a:buNone/>
                       </a:pPr>
                       <a:r>
-                        <a:rPr lang="en-US" sz="1050" dirty="0">
+                        <a:rPr lang="en-US" sz="1000" dirty="0">
                           <a:solidFill>
                             <a:srgbClr val="1A1A1A"/>
                           </a:solidFill>
@@ -9859,9 +10773,9 @@
                           <a:ea typeface="Microsoft YaHei" pitchFamily="34" charset="-122"/>
                           <a:cs typeface="Microsoft YaHei" pitchFamily="34" charset="-120"/>
                         </a:rPr>
-                        <a:t>14</a:t>
+                        <a:t>8.51%　84/987</a:t>
                       </a:r>
-                      <a:endParaRPr lang="en-US" sz="1050" dirty="0">
+                      <a:endParaRPr lang="en-US" sz="1000" dirty="0">
                         <a:latin typeface="Microsoft YaHei" charset="0"/>
                         <a:ea typeface="Microsoft YaHei" charset="0"/>
                         <a:cs typeface="Microsoft YaHei" charset="0"/>
@@ -9916,7 +10830,7 @@
                         <a:buNone/>
                       </a:pPr>
                       <a:r>
-                        <a:rPr lang="en-US" sz="1050" dirty="0">
+                        <a:rPr lang="en-US" sz="1000" dirty="0">
                           <a:solidFill>
                             <a:srgbClr val="1A1A1A"/>
                           </a:solidFill>
@@ -9924,9 +10838,9 @@
                           <a:ea typeface="Microsoft YaHei" pitchFamily="34" charset="-122"/>
                           <a:cs typeface="Microsoft YaHei" pitchFamily="34" charset="-120"/>
                         </a:rPr>
-                        <a:t>—</a:t>
+                        <a:t>14</a:t>
                       </a:r>
-                      <a:endParaRPr lang="en-US" sz="1050" dirty="0">
+                      <a:endParaRPr lang="en-US" sz="1000" dirty="0">
                         <a:latin typeface="Microsoft YaHei" charset="0"/>
                         <a:ea typeface="Microsoft YaHei" charset="0"/>
                         <a:cs typeface="Microsoft YaHei" charset="0"/>
@@ -9981,7 +10895,7 @@
                         <a:buNone/>
                       </a:pPr>
                       <a:r>
-                        <a:rPr lang="en-US" sz="1050" dirty="0">
+                        <a:rPr lang="en-US" sz="1000" dirty="0">
                           <a:solidFill>
                             <a:srgbClr val="1A1A1A"/>
                           </a:solidFill>
@@ -9991,7 +10905,72 @@
                         </a:rPr>
                         <a:t>—</a:t>
                       </a:r>
-                      <a:endParaRPr lang="en-US" sz="1050" dirty="0">
+                      <a:endParaRPr lang="en-US" sz="1000" dirty="0">
+                        <a:latin typeface="Microsoft YaHei" charset="0"/>
+                        <a:ea typeface="Microsoft YaHei" charset="0"/>
+                        <a:cs typeface="Microsoft YaHei" charset="0"/>
+                      </a:endParaRPr>
+                    </a:p>
+                  </a:txBody>
+                  <a:tcPr marL="91440" marR="91440" marT="45720" marB="45720" anchor="ctr">
+                    <a:lnL w="6350" cap="flat" cmpd="sng" algn="ctr">
+                      <a:solidFill>
+                        <a:srgbClr val="E2E5E9"/>
+                      </a:solidFill>
+                      <a:prstDash val="solid"/>
+                      <a:round/>
+                      <a:headEnd type="none" w="med" len="med"/>
+                      <a:tailEnd type="none" w="med" len="med"/>
+                    </a:lnL>
+                    <a:lnR w="6350" cap="flat" cmpd="sng" algn="ctr">
+                      <a:solidFill>
+                        <a:srgbClr val="E2E5E9"/>
+                      </a:solidFill>
+                      <a:prstDash val="solid"/>
+                      <a:round/>
+                      <a:headEnd type="none" w="med" len="med"/>
+                      <a:tailEnd type="none" w="med" len="med"/>
+                    </a:lnR>
+                    <a:lnT w="6350" cap="flat" cmpd="sng" algn="ctr">
+                      <a:solidFill>
+                        <a:srgbClr val="E2E5E9"/>
+                      </a:solidFill>
+                      <a:prstDash val="solid"/>
+                      <a:round/>
+                      <a:headEnd type="none" w="med" len="med"/>
+                      <a:tailEnd type="none" w="med" len="med"/>
+                    </a:lnT>
+                    <a:lnB w="6350" cap="flat" cmpd="sng" algn="ctr">
+                      <a:solidFill>
+                        <a:srgbClr val="E2E5E9"/>
+                      </a:solidFill>
+                      <a:prstDash val="solid"/>
+                      <a:round/>
+                      <a:headEnd type="none" w="med" len="med"/>
+                      <a:tailEnd type="none" w="med" len="med"/>
+                    </a:lnB>
+                  </a:tcPr>
+                </a:tc>
+                <a:tc>
+                  <a:txBody>
+                    <a:bodyPr/>
+                    <a:lstStyle/>
+                    <a:p>
+                      <a:pPr indent="0" marL="0">
+                        <a:buNone/>
+                      </a:pPr>
+                      <a:r>
+                        <a:rPr lang="en-US" sz="1000" dirty="0">
+                          <a:solidFill>
+                            <a:srgbClr val="1A1A1A"/>
+                          </a:solidFill>
+                          <a:latin typeface="Microsoft YaHei" pitchFamily="34" charset="0"/>
+                          <a:ea typeface="Microsoft YaHei" pitchFamily="34" charset="-122"/>
+                          <a:cs typeface="Microsoft YaHei" pitchFamily="34" charset="-120"/>
+                        </a:rPr>
+                        <a:t>—</a:t>
+                      </a:r>
+                      <a:endParaRPr lang="en-US" sz="1000" dirty="0">
                         <a:latin typeface="Microsoft YaHei" charset="0"/>
                         <a:ea typeface="Microsoft YaHei" charset="0"/>
                         <a:cs typeface="Microsoft YaHei" charset="0"/>
@@ -10048,7 +11027,7 @@
                         <a:buNone/>
                       </a:pPr>
                       <a:r>
-                        <a:rPr lang="en-US" sz="1050" dirty="0">
+                        <a:rPr lang="en-US" sz="1000" dirty="0">
                           <a:solidFill>
                             <a:srgbClr val="1A1A1A"/>
                           </a:solidFill>
@@ -10058,7 +11037,7 @@
                         </a:rPr>
                         <a:t>小鼠 · 脑</a:t>
                       </a:r>
-                      <a:endParaRPr lang="en-US" sz="1050" dirty="0">
+                      <a:endParaRPr lang="en-US" sz="1000" dirty="0">
                         <a:latin typeface="Microsoft YaHei" charset="0"/>
                         <a:ea typeface="Microsoft YaHei" charset="0"/>
                         <a:cs typeface="Microsoft YaHei" charset="0"/>
@@ -10113,7 +11092,7 @@
                         <a:buNone/>
                       </a:pPr>
                       <a:r>
-                        <a:rPr lang="en-US" sz="1050" dirty="0">
+                        <a:rPr lang="en-US" sz="1000" dirty="0">
                           <a:solidFill>
                             <a:srgbClr val="1A1A1A"/>
                           </a:solidFill>
@@ -10123,7 +11102,7 @@
                         </a:rPr>
                         <a:t>Cajal-Retzius 神经元</a:t>
                       </a:r>
-                      <a:endParaRPr lang="en-US" sz="1050" dirty="0">
+                      <a:endParaRPr lang="en-US" sz="1000" dirty="0">
                         <a:latin typeface="Microsoft YaHei" charset="0"/>
                         <a:ea typeface="Microsoft YaHei" charset="0"/>
                         <a:cs typeface="Microsoft YaHei" charset="0"/>
@@ -10178,7 +11157,7 @@
                         <a:buNone/>
                       </a:pPr>
                       <a:r>
-                        <a:rPr lang="en-US" sz="1050" dirty="0">
+                        <a:rPr lang="en-US" sz="1000" dirty="0">
                           <a:solidFill>
                             <a:srgbClr val="1A1A1A"/>
                           </a:solidFill>
@@ -10188,7 +11167,7 @@
                         </a:rPr>
                         <a:t>12.5%　17/136</a:t>
                       </a:r>
-                      <a:endParaRPr lang="en-US" sz="1050" dirty="0">
+                      <a:endParaRPr lang="en-US" sz="1000" dirty="0">
                         <a:latin typeface="Microsoft YaHei" charset="0"/>
                         <a:ea typeface="Microsoft YaHei" charset="0"/>
                         <a:cs typeface="Microsoft YaHei" charset="0"/>
@@ -10243,7 +11222,7 @@
                         <a:buNone/>
                       </a:pPr>
                       <a:r>
-                        <a:rPr lang="en-US" sz="1050" dirty="0">
+                        <a:rPr lang="en-US" sz="1000" dirty="0">
                           <a:solidFill>
                             <a:srgbClr val="1A1A1A"/>
                           </a:solidFill>
@@ -10253,7 +11232,7 @@
                         </a:rPr>
                         <a:t>0.00%　0/136</a:t>
                       </a:r>
-                      <a:endParaRPr lang="en-US" sz="1050" dirty="0">
+                      <a:endParaRPr lang="en-US" sz="1000" dirty="0">
                         <a:latin typeface="Microsoft YaHei" charset="0"/>
                         <a:ea typeface="Microsoft YaHei" charset="0"/>
                         <a:cs typeface="Microsoft YaHei" charset="0"/>
@@ -10308,7 +11287,7 @@
                         <a:buNone/>
                       </a:pPr>
                       <a:r>
-                        <a:rPr lang="en-US" sz="1050" dirty="0">
+                        <a:rPr lang="en-US" sz="1000" dirty="0">
                           <a:solidFill>
                             <a:srgbClr val="1A1A1A"/>
                           </a:solidFill>
@@ -10316,9 +11295,9 @@
                           <a:ea typeface="Microsoft YaHei" pitchFamily="34" charset="-122"/>
                           <a:cs typeface="Microsoft YaHei" pitchFamily="34" charset="-120"/>
                         </a:rPr>
-                        <a:t>4</a:t>
+                        <a:t>35.3%　48/136</a:t>
                       </a:r>
-                      <a:endParaRPr lang="en-US" sz="1050" dirty="0">
+                      <a:endParaRPr lang="en-US" sz="1000" dirty="0">
                         <a:latin typeface="Microsoft YaHei" charset="0"/>
                         <a:ea typeface="Microsoft YaHei" charset="0"/>
                         <a:cs typeface="Microsoft YaHei" charset="0"/>
@@ -10373,7 +11352,7 @@
                         <a:buNone/>
                       </a:pPr>
                       <a:r>
-                        <a:rPr lang="en-US" sz="1050" dirty="0">
+                        <a:rPr lang="en-US" sz="1000" dirty="0">
                           <a:solidFill>
                             <a:srgbClr val="1A1A1A"/>
                           </a:solidFill>
@@ -10381,9 +11360,9 @@
                           <a:ea typeface="Microsoft YaHei" pitchFamily="34" charset="-122"/>
                           <a:cs typeface="Microsoft YaHei" pitchFamily="34" charset="-120"/>
                         </a:rPr>
-                        <a:t>—</a:t>
+                        <a:t>4</a:t>
                       </a:r>
-                      <a:endParaRPr lang="en-US" sz="1050" dirty="0">
+                      <a:endParaRPr lang="en-US" sz="1000" dirty="0">
                         <a:latin typeface="Microsoft YaHei" charset="0"/>
                         <a:ea typeface="Microsoft YaHei" charset="0"/>
                         <a:cs typeface="Microsoft YaHei" charset="0"/>
@@ -10438,7 +11417,7 @@
                         <a:buNone/>
                       </a:pPr>
                       <a:r>
-                        <a:rPr lang="en-US" sz="1050" dirty="0">
+                        <a:rPr lang="en-US" sz="1000" dirty="0">
                           <a:solidFill>
                             <a:srgbClr val="1A1A1A"/>
                           </a:solidFill>
@@ -10448,7 +11427,72 @@
                         </a:rPr>
                         <a:t>—</a:t>
                       </a:r>
-                      <a:endParaRPr lang="en-US" sz="1050" dirty="0">
+                      <a:endParaRPr lang="en-US" sz="1000" dirty="0">
+                        <a:latin typeface="Microsoft YaHei" charset="0"/>
+                        <a:ea typeface="Microsoft YaHei" charset="0"/>
+                        <a:cs typeface="Microsoft YaHei" charset="0"/>
+                      </a:endParaRPr>
+                    </a:p>
+                  </a:txBody>
+                  <a:tcPr marL="91440" marR="91440" marT="45720" marB="45720" anchor="ctr">
+                    <a:lnL w="6350" cap="flat" cmpd="sng" algn="ctr">
+                      <a:solidFill>
+                        <a:srgbClr val="E2E5E9"/>
+                      </a:solidFill>
+                      <a:prstDash val="solid"/>
+                      <a:round/>
+                      <a:headEnd type="none" w="med" len="med"/>
+                      <a:tailEnd type="none" w="med" len="med"/>
+                    </a:lnL>
+                    <a:lnR w="6350" cap="flat" cmpd="sng" algn="ctr">
+                      <a:solidFill>
+                        <a:srgbClr val="E2E5E9"/>
+                      </a:solidFill>
+                      <a:prstDash val="solid"/>
+                      <a:round/>
+                      <a:headEnd type="none" w="med" len="med"/>
+                      <a:tailEnd type="none" w="med" len="med"/>
+                    </a:lnR>
+                    <a:lnT w="6350" cap="flat" cmpd="sng" algn="ctr">
+                      <a:solidFill>
+                        <a:srgbClr val="E2E5E9"/>
+                      </a:solidFill>
+                      <a:prstDash val="solid"/>
+                      <a:round/>
+                      <a:headEnd type="none" w="med" len="med"/>
+                      <a:tailEnd type="none" w="med" len="med"/>
+                    </a:lnT>
+                    <a:lnB w="6350" cap="flat" cmpd="sng" algn="ctr">
+                      <a:solidFill>
+                        <a:srgbClr val="E2E5E9"/>
+                      </a:solidFill>
+                      <a:prstDash val="solid"/>
+                      <a:round/>
+                      <a:headEnd type="none" w="med" len="med"/>
+                      <a:tailEnd type="none" w="med" len="med"/>
+                    </a:lnB>
+                  </a:tcPr>
+                </a:tc>
+                <a:tc>
+                  <a:txBody>
+                    <a:bodyPr/>
+                    <a:lstStyle/>
+                    <a:p>
+                      <a:pPr indent="0" marL="0">
+                        <a:buNone/>
+                      </a:pPr>
+                      <a:r>
+                        <a:rPr lang="en-US" sz="1000" dirty="0">
+                          <a:solidFill>
+                            <a:srgbClr val="1A1A1A"/>
+                          </a:solidFill>
+                          <a:latin typeface="Microsoft YaHei" pitchFamily="34" charset="0"/>
+                          <a:ea typeface="Microsoft YaHei" pitchFamily="34" charset="-122"/>
+                          <a:cs typeface="Microsoft YaHei" pitchFamily="34" charset="-120"/>
+                        </a:rPr>
+                        <a:t>—</a:t>
+                      </a:r>
+                      <a:endParaRPr lang="en-US" sz="1000" dirty="0">
                         <a:latin typeface="Microsoft YaHei" charset="0"/>
                         <a:ea typeface="Microsoft YaHei" charset="0"/>
                         <a:cs typeface="Microsoft YaHei" charset="0"/>
@@ -10650,7 +11694,7 @@
                 <a:ea typeface="Microsoft YaHei" pitchFamily="34" charset="-122"/>
                 <a:cs typeface="Microsoft YaHei" pitchFamily="34" charset="-120"/>
               </a:rPr>
-              <a:t>检出率为合并口径（原始计数 ≥1 的细胞数 ÷ 分析细胞数）。同一细胞类型见于多个分层时取供体最多者，×n 为分层数。静息基线，未做环境 RNA 校正。</a:t>
+              <a:t>检出率为合并口径（原始计数 ≥1 的细胞数 ÷ 分析细胞数）。同一细胞类型见于多个分层时取供体最多者，×n 为分层数。CASP3 不参与候选定义，仅用于排除分层内最低档，▽ 为处于该分层 CASP3 最低档者。静息基线，未做环境 RNA 校正。</a:t>
             </a:r>
             <a:endParaRPr lang="en-US" sz="1000" dirty="0"/>
           </a:p>

--- a/il18_casp5organ/IL18_CASP_五器官筛选.pptx
+++ b/il18_casp5organ/IL18_CASP_五器官筛选.pptx
@@ -19,9 +19,10 @@
     <p:sldId id="267" r:id="rId13"/>
     <p:sldId id="268" r:id="rId14"/>
     <p:sldId id="269" r:id="rId15"/>
+    <p:sldId id="270" r:id="rId16"/>
   </p:sldIdLst>
   <p:notesMasterIdLst>
-    <p:notesMasterId r:id="rId16"/>
+    <p:notesMasterId r:id="rId17"/>
   </p:notesMasterIdLst>
   <p:sldSz cx="12192000" cy="6858000"/>
   <p:notesSz cx="6858000" cy="12192000"/>
@@ -979,6 +980,94 @@
             <a:fld id="{F7021451-1387-4CA6-816F-3879F97B5CBC}" type="slidenum">
               <a:rPr lang="en-US"/>
               <a:t>14</a:t>
+            </a:fld>
+            <a:endParaRPr lang="en-US"/>
+          </a:p>
+        </p:txBody>
+      </p:sp>
+    </p:spTree>
+    <p:extLst>
+      <p:ext uri="{BB962C8B-B14F-4D97-AF65-F5344CB8AC3E}">
+        <p14:creationId xmlns:p14="http://schemas.microsoft.com/office/powerpoint/2010/main" val="1024086991"/>
+      </p:ext>
+    </p:extLst>
+  </p:cSld>
+  <p:clrMapOvr>
+    <a:masterClrMapping/>
+  </p:clrMapOvr>
+</p:notes>
+</file>
+
+<file path=ppt/notesSlides/notesSlide15.xml><?xml version="1.0" encoding="utf-8"?>
+<p:notes xmlns:a="http://schemas.openxmlformats.org/drawingml/2006/main" xmlns:r="http://schemas.openxmlformats.org/officeDocument/2006/relationships" xmlns:p="http://schemas.openxmlformats.org/presentationml/2006/main">
+  <p:cSld>
+    <p:spTree>
+      <p:nvGrpSpPr>
+        <p:cNvPr id="1" name=""/>
+        <p:cNvGrpSpPr/>
+        <p:nvPr/>
+      </p:nvGrpSpPr>
+      <p:grpSpPr>
+        <a:xfrm>
+          <a:off x="0" y="0"/>
+          <a:ext cx="0" cy="0"/>
+          <a:chOff x="0" y="0"/>
+          <a:chExt cx="0" cy="0"/>
+        </a:xfrm>
+      </p:grpSpPr>
+      <p:sp>
+        <p:nvSpPr>
+          <p:cNvPr id="2" name="Slide Image Placeholder 1"/>
+          <p:cNvSpPr>
+            <a:spLocks noGrp="1" noRot="1" noChangeAspect="1"/>
+          </p:cNvSpPr>
+          <p:nvPr>
+            <p:ph type="sldImg"/>
+          </p:nvPr>
+        </p:nvSpPr>
+        <p:spPr/>
+      </p:sp>
+      <p:sp>
+        <p:nvSpPr>
+          <p:cNvPr id="3" name="Notes Placeholder 2"/>
+          <p:cNvSpPr>
+            <a:spLocks noGrp="1"/>
+          </p:cNvSpPr>
+          <p:nvPr>
+            <p:ph type="body" idx="1"/>
+          </p:nvPr>
+        </p:nvSpPr>
+        <p:spPr/>
+        <p:txBody>
+          <a:bodyPr/>
+          <a:lstStyle/>
+          <a:p>
+            <a:r>
+              <a:rPr lang="en-US" dirty="0"/>
+              <a:t/>
+            </a:r>
+            <a:endParaRPr lang="en-US" dirty="0"/>
+          </a:p>
+        </p:txBody>
+      </p:sp>
+      <p:sp>
+        <p:nvSpPr>
+          <p:cNvPr id="4" name="Slide Number Placeholder 3"/>
+          <p:cNvSpPr>
+            <a:spLocks noGrp="1"/>
+          </p:cNvSpPr>
+          <p:nvPr>
+            <p:ph type="sldNum" sz="quarter" idx="10"/>
+          </p:nvPr>
+        </p:nvSpPr>
+        <p:spPr/>
+        <p:txBody>
+          <a:bodyPr/>
+          <a:lstStyle/>
+          <a:p>
+            <a:fld id="{F7021451-1387-4CA6-816F-3879F97B5CBC}" type="slidenum">
+              <a:rPr lang="en-US"/>
+              <a:t>15</a:t>
             </a:fld>
             <a:endParaRPr lang="en-US"/>
           </a:p>
@@ -2058,7 +2147,7 @@
                 <a:ea typeface="Microsoft YaHei" pitchFamily="34" charset="-122"/>
                 <a:cs typeface="Microsoft YaHei" pitchFamily="34" charset="-120"/>
               </a:rPr>
-              <a:t>查阅的数据库</a:t>
+              <a:t>查阅的数据库（一）：单细胞 / 单核</a:t>
             </a:r>
             <a:endParaRPr lang="en-US" sz="2400" dirty="0"/>
           </a:p>
@@ -2072,8 +2161,47 @@
         </p:nvSpPr>
         <p:spPr>
           <a:xfrm>
-            <a:off x="731520" y="1417320"/>
-            <a:ext cx="2286000" cy="457200"/>
+            <a:off x="685800" y="1234440"/>
+            <a:ext cx="2103120" cy="274320"/>
+          </a:xfrm>
+          <a:prstGeom prst="rect">
+            <a:avLst/>
+          </a:prstGeom>
+          <a:noFill/>
+          <a:ln/>
+        </p:spPr>
+        <p:txBody>
+          <a:bodyPr wrap="square" rtlCol="0" anchor="ctr"/>
+          <a:lstStyle/>
+          <a:p>
+            <a:pPr indent="0" marL="0">
+              <a:buNone/>
+            </a:pPr>
+            <a:r>
+              <a:rPr lang="en-US" sz="1250" b="1" dirty="0">
+                <a:solidFill>
+                  <a:srgbClr val="6B6B6B"/>
+                </a:solidFill>
+                <a:latin typeface="Microsoft YaHei" pitchFamily="34" charset="0"/>
+                <a:ea typeface="Microsoft YaHei" pitchFamily="34" charset="-122"/>
+                <a:cs typeface="Microsoft YaHei" pitchFamily="34" charset="-120"/>
+              </a:rPr>
+              <a:t>单细胞 / 单核</a:t>
+            </a:r>
+            <a:endParaRPr lang="en-US" sz="1250" dirty="0"/>
+          </a:p>
+        </p:txBody>
+      </p:sp>
+      <p:sp>
+        <p:nvSpPr>
+          <p:cNvPr id="4" name="Text 2"/>
+          <p:cNvSpPr txBox="1"/>
+          <p:nvPr/>
+        </p:nvSpPr>
+        <p:spPr>
+          <a:xfrm>
+            <a:off x="2788920" y="1234440"/>
+            <a:ext cx="4892040" cy="256032"/>
           </a:xfrm>
           <a:prstGeom prst="rect">
             <a:avLst/>
@@ -2089,30 +2217,1288 @@
               <a:buNone/>
             </a:pPr>
             <a:r>
-              <a:rPr lang="en-US" sz="1350" b="1" dirty="0">
+              <a:rPr lang="en-US" sz="1150" dirty="0">
                 <a:solidFill>
-                  <a:srgbClr val="6B6B6B"/>
+                  <a:srgbClr val="1A1A1A"/>
                 </a:solidFill>
                 <a:latin typeface="Microsoft YaHei" pitchFamily="34" charset="0"/>
                 <a:ea typeface="Microsoft YaHei" pitchFamily="34" charset="-122"/>
                 <a:cs typeface="Microsoft YaHei" pitchFamily="34" charset="-120"/>
               </a:rPr>
-              <a:t>单细胞 / 单核</a:t>
+              <a:t>CZ CELLxGENE Discover（Census LTS 2025-11-08）</a:t>
             </a:r>
-            <a:endParaRPr lang="en-US" sz="1350" dirty="0"/>
+            <a:endParaRPr lang="en-US" sz="1150" dirty="0"/>
           </a:p>
         </p:txBody>
       </p:sp>
       <p:sp>
         <p:nvSpPr>
-          <p:cNvPr id="4" name="Text 2"/>
+          <p:cNvPr id="5" name="Text 3"/>
           <p:cNvSpPr txBox="1"/>
           <p:nvPr/>
         </p:nvSpPr>
         <p:spPr>
           <a:xfrm>
-            <a:off x="3200400" y="1417320"/>
-            <a:ext cx="8321040" cy="841248"/>
+            <a:off x="7726680" y="1234440"/>
+            <a:ext cx="3840480" cy="256032"/>
+          </a:xfrm>
+          <a:prstGeom prst="rect">
+            <a:avLst/>
+          </a:prstGeom>
+          <a:noFill/>
+          <a:ln/>
+        </p:spPr>
+        <p:txBody>
+          <a:bodyPr wrap="square" rtlCol="0" anchor="t"/>
+          <a:lstStyle/>
+          <a:p>
+            <a:pPr indent="0" marL="0">
+              <a:buNone/>
+            </a:pPr>
+            <a:r>
+              <a:rPr lang="en-US" sz="1150" dirty="0">
+                <a:solidFill>
+                  <a:srgbClr val="3C3C3C"/>
+                </a:solidFill>
+                <a:latin typeface="Microsoft YaHei" pitchFamily="34" charset="0"/>
+                <a:ea typeface="Microsoft YaHei" pitchFamily="34" charset="-122"/>
+                <a:cs typeface="Microsoft YaHei" pitchFamily="34" charset="-120"/>
+              </a:rPr>
+              <a:t>Nucleic Acids Res. 2025 Jan 6;53(D1):D886-D900.</a:t>
+            </a:r>
+            <a:endParaRPr lang="en-US" sz="1150" dirty="0"/>
+          </a:p>
+        </p:txBody>
+      </p:sp>
+      <p:sp>
+        <p:nvSpPr>
+          <p:cNvPr id="6" name="Text 4"/>
+          <p:cNvSpPr txBox="1"/>
+          <p:nvPr/>
+        </p:nvSpPr>
+        <p:spPr>
+          <a:xfrm>
+            <a:off x="2788920" y="1501445"/>
+            <a:ext cx="4892040" cy="256032"/>
+          </a:xfrm>
+          <a:prstGeom prst="rect">
+            <a:avLst/>
+          </a:prstGeom>
+          <a:noFill/>
+          <a:ln/>
+        </p:spPr>
+        <p:txBody>
+          <a:bodyPr wrap="square" rtlCol="0" anchor="t"/>
+          <a:lstStyle/>
+          <a:p>
+            <a:pPr indent="0" marL="0">
+              <a:buNone/>
+            </a:pPr>
+            <a:r>
+              <a:rPr lang="en-US" sz="1150" dirty="0">
+                <a:solidFill>
+                  <a:srgbClr val="1A1A1A"/>
+                </a:solidFill>
+                <a:latin typeface="Microsoft YaHei" pitchFamily="34" charset="0"/>
+                <a:ea typeface="Microsoft YaHei" pitchFamily="34" charset="-122"/>
+                <a:cs typeface="Microsoft YaHei" pitchFamily="34" charset="-120"/>
+              </a:rPr>
+              <a:t>Allen Human Variation Study（人皮层单细胞）</a:t>
+            </a:r>
+            <a:endParaRPr lang="en-US" sz="1150" dirty="0"/>
+          </a:p>
+        </p:txBody>
+      </p:sp>
+      <p:sp>
+        <p:nvSpPr>
+          <p:cNvPr id="7" name="Text 5"/>
+          <p:cNvSpPr txBox="1"/>
+          <p:nvPr/>
+        </p:nvSpPr>
+        <p:spPr>
+          <a:xfrm>
+            <a:off x="7726680" y="1501445"/>
+            <a:ext cx="3840480" cy="256032"/>
+          </a:xfrm>
+          <a:prstGeom prst="rect">
+            <a:avLst/>
+          </a:prstGeom>
+          <a:noFill/>
+          <a:ln/>
+        </p:spPr>
+        <p:txBody>
+          <a:bodyPr wrap="square" rtlCol="0" anchor="t"/>
+          <a:lstStyle/>
+          <a:p>
+            <a:pPr indent="0" marL="0">
+              <a:buNone/>
+            </a:pPr>
+            <a:r>
+              <a:rPr lang="en-US" sz="1150" dirty="0">
+                <a:solidFill>
+                  <a:srgbClr val="3C3C3C"/>
+                </a:solidFill>
+                <a:latin typeface="Microsoft YaHei" pitchFamily="34" charset="0"/>
+                <a:ea typeface="Microsoft YaHei" pitchFamily="34" charset="-122"/>
+                <a:cs typeface="Microsoft YaHei" pitchFamily="34" charset="-120"/>
+              </a:rPr>
+              <a:t>Science. 2023 Oct 13;382(6667):eadf2359.</a:t>
+            </a:r>
+            <a:endParaRPr lang="en-US" sz="1150" dirty="0"/>
+          </a:p>
+        </p:txBody>
+      </p:sp>
+      <p:sp>
+        <p:nvSpPr>
+          <p:cNvPr id="8" name="Text 6"/>
+          <p:cNvSpPr txBox="1"/>
+          <p:nvPr/>
+        </p:nvSpPr>
+        <p:spPr>
+          <a:xfrm>
+            <a:off x="2788920" y="1768450"/>
+            <a:ext cx="4892040" cy="256032"/>
+          </a:xfrm>
+          <a:prstGeom prst="rect">
+            <a:avLst/>
+          </a:prstGeom>
+          <a:noFill/>
+          <a:ln/>
+        </p:spPr>
+        <p:txBody>
+          <a:bodyPr wrap="square" rtlCol="0" anchor="t"/>
+          <a:lstStyle/>
+          <a:p>
+            <a:pPr indent="0" marL="0">
+              <a:buNone/>
+            </a:pPr>
+            <a:r>
+              <a:rPr lang="en-US" sz="1150" dirty="0">
+                <a:solidFill>
+                  <a:srgbClr val="1A1A1A"/>
+                </a:solidFill>
+                <a:latin typeface="Microsoft YaHei" pitchFamily="34" charset="0"/>
+                <a:ea typeface="Microsoft YaHei" pitchFamily="34" charset="-122"/>
+                <a:cs typeface="Microsoft YaHei" pitchFamily="34" charset="-120"/>
+              </a:rPr>
+              <a:t>Allen SEA-AD（MTG / DLPFC 单核）</a:t>
+            </a:r>
+            <a:endParaRPr lang="en-US" sz="1150" dirty="0"/>
+          </a:p>
+        </p:txBody>
+      </p:sp>
+      <p:sp>
+        <p:nvSpPr>
+          <p:cNvPr id="9" name="Text 7"/>
+          <p:cNvSpPr txBox="1"/>
+          <p:nvPr/>
+        </p:nvSpPr>
+        <p:spPr>
+          <a:xfrm>
+            <a:off x="7726680" y="1768450"/>
+            <a:ext cx="3840480" cy="256032"/>
+          </a:xfrm>
+          <a:prstGeom prst="rect">
+            <a:avLst/>
+          </a:prstGeom>
+          <a:noFill/>
+          <a:ln/>
+        </p:spPr>
+        <p:txBody>
+          <a:bodyPr wrap="square" rtlCol="0" anchor="t"/>
+          <a:lstStyle/>
+          <a:p>
+            <a:pPr indent="0" marL="0">
+              <a:buNone/>
+            </a:pPr>
+            <a:r>
+              <a:rPr lang="en-US" sz="1150" dirty="0">
+                <a:solidFill>
+                  <a:srgbClr val="3C3C3C"/>
+                </a:solidFill>
+                <a:latin typeface="Microsoft YaHei" pitchFamily="34" charset="0"/>
+                <a:ea typeface="Microsoft YaHei" pitchFamily="34" charset="-122"/>
+                <a:cs typeface="Microsoft YaHei" pitchFamily="34" charset="-120"/>
+              </a:rPr>
+              <a:t>Nat Neurosci. 2024 Dec;27(12):2366-2383.</a:t>
+            </a:r>
+            <a:endParaRPr lang="en-US" sz="1150" dirty="0"/>
+          </a:p>
+        </p:txBody>
+      </p:sp>
+      <p:sp>
+        <p:nvSpPr>
+          <p:cNvPr id="10" name="Text 8"/>
+          <p:cNvSpPr txBox="1"/>
+          <p:nvPr/>
+        </p:nvSpPr>
+        <p:spPr>
+          <a:xfrm>
+            <a:off x="2788920" y="2035454"/>
+            <a:ext cx="4892040" cy="256032"/>
+          </a:xfrm>
+          <a:prstGeom prst="rect">
+            <a:avLst/>
+          </a:prstGeom>
+          <a:noFill/>
+          <a:ln/>
+        </p:spPr>
+        <p:txBody>
+          <a:bodyPr wrap="square" rtlCol="0" anchor="t"/>
+          <a:lstStyle/>
+          <a:p>
+            <a:pPr indent="0" marL="0">
+              <a:buNone/>
+            </a:pPr>
+            <a:r>
+              <a:rPr lang="en-US" sz="1150" dirty="0">
+                <a:solidFill>
+                  <a:srgbClr val="1A1A1A"/>
+                </a:solidFill>
+                <a:latin typeface="Microsoft YaHei" pitchFamily="34" charset="0"/>
+                <a:ea typeface="Microsoft YaHei" pitchFamily="34" charset="-122"/>
+                <a:cs typeface="Microsoft YaHei" pitchFamily="34" charset="-120"/>
+              </a:rPr>
+              <a:t>PsychAD（人前额叶单核）</a:t>
+            </a:r>
+            <a:endParaRPr lang="en-US" sz="1150" dirty="0"/>
+          </a:p>
+        </p:txBody>
+      </p:sp>
+      <p:sp>
+        <p:nvSpPr>
+          <p:cNvPr id="11" name="Text 9"/>
+          <p:cNvSpPr txBox="1"/>
+          <p:nvPr/>
+        </p:nvSpPr>
+        <p:spPr>
+          <a:xfrm>
+            <a:off x="7726680" y="2035454"/>
+            <a:ext cx="3840480" cy="256032"/>
+          </a:xfrm>
+          <a:prstGeom prst="rect">
+            <a:avLst/>
+          </a:prstGeom>
+          <a:noFill/>
+          <a:ln/>
+        </p:spPr>
+        <p:txBody>
+          <a:bodyPr wrap="square" rtlCol="0" anchor="t"/>
+          <a:lstStyle/>
+          <a:p>
+            <a:pPr indent="0" marL="0">
+              <a:buNone/>
+            </a:pPr>
+            <a:r>
+              <a:rPr lang="en-US" sz="1150" dirty="0">
+                <a:solidFill>
+                  <a:srgbClr val="3C3C3C"/>
+                </a:solidFill>
+                <a:latin typeface="Microsoft YaHei" pitchFamily="34" charset="0"/>
+                <a:ea typeface="Microsoft YaHei" pitchFamily="34" charset="-122"/>
+                <a:cs typeface="Microsoft YaHei" pitchFamily="34" charset="-120"/>
+              </a:rPr>
+              <a:t>Nature. 2026 Sep;657(8133):1003-1015.</a:t>
+            </a:r>
+            <a:endParaRPr lang="en-US" sz="1150" dirty="0"/>
+          </a:p>
+        </p:txBody>
+      </p:sp>
+      <p:sp>
+        <p:nvSpPr>
+          <p:cNvPr id="12" name="Text 10"/>
+          <p:cNvSpPr txBox="1"/>
+          <p:nvPr/>
+        </p:nvSpPr>
+        <p:spPr>
+          <a:xfrm>
+            <a:off x="2788920" y="2302459"/>
+            <a:ext cx="4892040" cy="256032"/>
+          </a:xfrm>
+          <a:prstGeom prst="rect">
+            <a:avLst/>
+          </a:prstGeom>
+          <a:noFill/>
+          <a:ln/>
+        </p:spPr>
+        <p:txBody>
+          <a:bodyPr wrap="square" rtlCol="0" anchor="t"/>
+          <a:lstStyle/>
+          <a:p>
+            <a:pPr indent="0" marL="0">
+              <a:buNone/>
+            </a:pPr>
+            <a:r>
+              <a:rPr lang="en-US" sz="1150" dirty="0">
+                <a:solidFill>
+                  <a:srgbClr val="1A1A1A"/>
+                </a:solidFill>
+                <a:latin typeface="Microsoft YaHei" pitchFamily="34" charset="0"/>
+                <a:ea typeface="Microsoft YaHei" pitchFamily="34" charset="-122"/>
+                <a:cs typeface="Microsoft YaHei" pitchFamily="34" charset="-120"/>
+              </a:rPr>
+              <a:t>Siletti 人脑细胞图谱（MTG、脊髓）</a:t>
+            </a:r>
+            <a:endParaRPr lang="en-US" sz="1150" dirty="0"/>
+          </a:p>
+        </p:txBody>
+      </p:sp>
+      <p:sp>
+        <p:nvSpPr>
+          <p:cNvPr id="13" name="Text 11"/>
+          <p:cNvSpPr txBox="1"/>
+          <p:nvPr/>
+        </p:nvSpPr>
+        <p:spPr>
+          <a:xfrm>
+            <a:off x="7726680" y="2302459"/>
+            <a:ext cx="3840480" cy="256032"/>
+          </a:xfrm>
+          <a:prstGeom prst="rect">
+            <a:avLst/>
+          </a:prstGeom>
+          <a:noFill/>
+          <a:ln/>
+        </p:spPr>
+        <p:txBody>
+          <a:bodyPr wrap="square" rtlCol="0" anchor="t"/>
+          <a:lstStyle/>
+          <a:p>
+            <a:pPr indent="0" marL="0">
+              <a:buNone/>
+            </a:pPr>
+            <a:r>
+              <a:rPr lang="en-US" sz="1150" dirty="0">
+                <a:solidFill>
+                  <a:srgbClr val="3C3C3C"/>
+                </a:solidFill>
+                <a:latin typeface="Microsoft YaHei" pitchFamily="34" charset="0"/>
+                <a:ea typeface="Microsoft YaHei" pitchFamily="34" charset="-122"/>
+                <a:cs typeface="Microsoft YaHei" pitchFamily="34" charset="-120"/>
+              </a:rPr>
+              <a:t>Science. 2023 Oct 13;382(6667):eadd7046.</a:t>
+            </a:r>
+            <a:endParaRPr lang="en-US" sz="1150" dirty="0"/>
+          </a:p>
+        </p:txBody>
+      </p:sp>
+      <p:sp>
+        <p:nvSpPr>
+          <p:cNvPr id="14" name="Text 12"/>
+          <p:cNvSpPr txBox="1"/>
+          <p:nvPr/>
+        </p:nvSpPr>
+        <p:spPr>
+          <a:xfrm>
+            <a:off x="2788920" y="2569464"/>
+            <a:ext cx="4892040" cy="256032"/>
+          </a:xfrm>
+          <a:prstGeom prst="rect">
+            <a:avLst/>
+          </a:prstGeom>
+          <a:noFill/>
+          <a:ln/>
+        </p:spPr>
+        <p:txBody>
+          <a:bodyPr wrap="square" rtlCol="0" anchor="t"/>
+          <a:lstStyle/>
+          <a:p>
+            <a:pPr indent="0" marL="0">
+              <a:buNone/>
+            </a:pPr>
+            <a:r>
+              <a:rPr lang="en-US" sz="1150" dirty="0">
+                <a:solidFill>
+                  <a:srgbClr val="1A1A1A"/>
+                </a:solidFill>
+                <a:latin typeface="Microsoft YaHei" pitchFamily="34" charset="0"/>
+                <a:ea typeface="Microsoft YaHei" pitchFamily="34" charset="-122"/>
+                <a:cs typeface="Microsoft YaHei" pitchFamily="34" charset="-120"/>
+              </a:rPr>
+              <a:t>Yao 小鼠全脑图谱（皮层+海马）</a:t>
+            </a:r>
+            <a:endParaRPr lang="en-US" sz="1150" dirty="0"/>
+          </a:p>
+        </p:txBody>
+      </p:sp>
+      <p:sp>
+        <p:nvSpPr>
+          <p:cNvPr id="15" name="Text 13"/>
+          <p:cNvSpPr txBox="1"/>
+          <p:nvPr/>
+        </p:nvSpPr>
+        <p:spPr>
+          <a:xfrm>
+            <a:off x="7726680" y="2569464"/>
+            <a:ext cx="3840480" cy="256032"/>
+          </a:xfrm>
+          <a:prstGeom prst="rect">
+            <a:avLst/>
+          </a:prstGeom>
+          <a:noFill/>
+          <a:ln/>
+        </p:spPr>
+        <p:txBody>
+          <a:bodyPr wrap="square" rtlCol="0" anchor="t"/>
+          <a:lstStyle/>
+          <a:p>
+            <a:pPr indent="0" marL="0">
+              <a:buNone/>
+            </a:pPr>
+            <a:r>
+              <a:rPr lang="en-US" sz="1150" dirty="0">
+                <a:solidFill>
+                  <a:srgbClr val="3C3C3C"/>
+                </a:solidFill>
+                <a:latin typeface="Microsoft YaHei" pitchFamily="34" charset="0"/>
+                <a:ea typeface="Microsoft YaHei" pitchFamily="34" charset="-122"/>
+                <a:cs typeface="Microsoft YaHei" pitchFamily="34" charset="-120"/>
+              </a:rPr>
+              <a:t>Nature. 2023 Dec;624(7991):317-332.</a:t>
+            </a:r>
+            <a:endParaRPr lang="en-US" sz="1150" dirty="0"/>
+          </a:p>
+        </p:txBody>
+      </p:sp>
+      <p:sp>
+        <p:nvSpPr>
+          <p:cNvPr id="16" name="Text 14"/>
+          <p:cNvSpPr txBox="1"/>
+          <p:nvPr/>
+        </p:nvSpPr>
+        <p:spPr>
+          <a:xfrm>
+            <a:off x="2788920" y="2836469"/>
+            <a:ext cx="4892040" cy="256032"/>
+          </a:xfrm>
+          <a:prstGeom prst="rect">
+            <a:avLst/>
+          </a:prstGeom>
+          <a:noFill/>
+          <a:ln/>
+        </p:spPr>
+        <p:txBody>
+          <a:bodyPr wrap="square" rtlCol="0" anchor="t"/>
+          <a:lstStyle/>
+          <a:p>
+            <a:pPr indent="0" marL="0">
+              <a:buNone/>
+            </a:pPr>
+            <a:r>
+              <a:rPr lang="en-US" sz="1150" dirty="0">
+                <a:solidFill>
+                  <a:srgbClr val="1A1A1A"/>
+                </a:solidFill>
+                <a:latin typeface="Microsoft YaHei" pitchFamily="34" charset="0"/>
+                <a:ea typeface="Microsoft YaHei" pitchFamily="34" charset="-122"/>
+                <a:cs typeface="Microsoft YaHei" pitchFamily="34" charset="-120"/>
+              </a:rPr>
+              <a:t>Human Lung Cell Atlas</a:t>
+            </a:r>
+            <a:endParaRPr lang="en-US" sz="1150" dirty="0"/>
+          </a:p>
+        </p:txBody>
+      </p:sp>
+      <p:sp>
+        <p:nvSpPr>
+          <p:cNvPr id="17" name="Text 15"/>
+          <p:cNvSpPr txBox="1"/>
+          <p:nvPr/>
+        </p:nvSpPr>
+        <p:spPr>
+          <a:xfrm>
+            <a:off x="7726680" y="2836469"/>
+            <a:ext cx="3840480" cy="256032"/>
+          </a:xfrm>
+          <a:prstGeom prst="rect">
+            <a:avLst/>
+          </a:prstGeom>
+          <a:noFill/>
+          <a:ln/>
+        </p:spPr>
+        <p:txBody>
+          <a:bodyPr wrap="square" rtlCol="0" anchor="t"/>
+          <a:lstStyle/>
+          <a:p>
+            <a:pPr indent="0" marL="0">
+              <a:buNone/>
+            </a:pPr>
+            <a:r>
+              <a:rPr lang="en-US" sz="1150" dirty="0">
+                <a:solidFill>
+                  <a:srgbClr val="3C3C3C"/>
+                </a:solidFill>
+                <a:latin typeface="Microsoft YaHei" pitchFamily="34" charset="0"/>
+                <a:ea typeface="Microsoft YaHei" pitchFamily="34" charset="-122"/>
+                <a:cs typeface="Microsoft YaHei" pitchFamily="34" charset="-120"/>
+              </a:rPr>
+              <a:t>Nat Med. 2023 Jun;29(6):1563-1577.</a:t>
+            </a:r>
+            <a:endParaRPr lang="en-US" sz="1150" dirty="0"/>
+          </a:p>
+        </p:txBody>
+      </p:sp>
+      <p:sp>
+        <p:nvSpPr>
+          <p:cNvPr id="18" name="Text 16"/>
+          <p:cNvSpPr txBox="1"/>
+          <p:nvPr/>
+        </p:nvSpPr>
+        <p:spPr>
+          <a:xfrm>
+            <a:off x="2788920" y="3103474"/>
+            <a:ext cx="4892040" cy="256032"/>
+          </a:xfrm>
+          <a:prstGeom prst="rect">
+            <a:avLst/>
+          </a:prstGeom>
+          <a:noFill/>
+          <a:ln/>
+        </p:spPr>
+        <p:txBody>
+          <a:bodyPr wrap="square" rtlCol="0" anchor="t"/>
+          <a:lstStyle/>
+          <a:p>
+            <a:pPr indent="0" marL="0">
+              <a:buNone/>
+            </a:pPr>
+            <a:r>
+              <a:rPr lang="en-US" sz="1150" dirty="0">
+                <a:solidFill>
+                  <a:srgbClr val="1A1A1A"/>
+                </a:solidFill>
+                <a:latin typeface="Microsoft YaHei" pitchFamily="34" charset="0"/>
+                <a:ea typeface="Microsoft YaHei" pitchFamily="34" charset="-122"/>
+                <a:cs typeface="Microsoft YaHei" pitchFamily="34" charset="-120"/>
+              </a:rPr>
+              <a:t>LungMAP CellRef（人肺参考）</a:t>
+            </a:r>
+            <a:endParaRPr lang="en-US" sz="1150" dirty="0"/>
+          </a:p>
+        </p:txBody>
+      </p:sp>
+      <p:sp>
+        <p:nvSpPr>
+          <p:cNvPr id="19" name="Text 17"/>
+          <p:cNvSpPr txBox="1"/>
+          <p:nvPr/>
+        </p:nvSpPr>
+        <p:spPr>
+          <a:xfrm>
+            <a:off x="7726680" y="3103474"/>
+            <a:ext cx="3840480" cy="256032"/>
+          </a:xfrm>
+          <a:prstGeom prst="rect">
+            <a:avLst/>
+          </a:prstGeom>
+          <a:noFill/>
+          <a:ln/>
+        </p:spPr>
+        <p:txBody>
+          <a:bodyPr wrap="square" rtlCol="0" anchor="t"/>
+          <a:lstStyle/>
+          <a:p>
+            <a:pPr indent="0" marL="0">
+              <a:buNone/>
+            </a:pPr>
+            <a:r>
+              <a:rPr lang="en-US" sz="1150" dirty="0">
+                <a:solidFill>
+                  <a:srgbClr val="3C3C3C"/>
+                </a:solidFill>
+                <a:latin typeface="Microsoft YaHei" pitchFamily="34" charset="0"/>
+                <a:ea typeface="Microsoft YaHei" pitchFamily="34" charset="-122"/>
+                <a:cs typeface="Microsoft YaHei" pitchFamily="34" charset="-120"/>
+              </a:rPr>
+              <a:t>Nat Commun. 2023 Jul 29;14(1):4566.</a:t>
+            </a:r>
+            <a:endParaRPr lang="en-US" sz="1150" dirty="0"/>
+          </a:p>
+        </p:txBody>
+      </p:sp>
+      <p:sp>
+        <p:nvSpPr>
+          <p:cNvPr id="20" name="Text 18"/>
+          <p:cNvSpPr txBox="1"/>
+          <p:nvPr/>
+        </p:nvSpPr>
+        <p:spPr>
+          <a:xfrm>
+            <a:off x="2788920" y="3370478"/>
+            <a:ext cx="4892040" cy="256032"/>
+          </a:xfrm>
+          <a:prstGeom prst="rect">
+            <a:avLst/>
+          </a:prstGeom>
+          <a:noFill/>
+          <a:ln/>
+        </p:spPr>
+        <p:txBody>
+          <a:bodyPr wrap="square" rtlCol="0" anchor="t"/>
+          <a:lstStyle/>
+          <a:p>
+            <a:pPr indent="0" marL="0">
+              <a:buNone/>
+            </a:pPr>
+            <a:r>
+              <a:rPr lang="en-US" sz="1150" dirty="0">
+                <a:solidFill>
+                  <a:srgbClr val="1A1A1A"/>
+                </a:solidFill>
+                <a:latin typeface="Microsoft YaHei" pitchFamily="34" charset="0"/>
+                <a:ea typeface="Microsoft YaHei" pitchFamily="34" charset="-122"/>
+                <a:cs typeface="Microsoft YaHei" pitchFamily="34" charset="-120"/>
+              </a:rPr>
+              <a:t>Guilliams 人肝图谱</a:t>
+            </a:r>
+            <a:endParaRPr lang="en-US" sz="1150" dirty="0"/>
+          </a:p>
+        </p:txBody>
+      </p:sp>
+      <p:sp>
+        <p:nvSpPr>
+          <p:cNvPr id="21" name="Text 19"/>
+          <p:cNvSpPr txBox="1"/>
+          <p:nvPr/>
+        </p:nvSpPr>
+        <p:spPr>
+          <a:xfrm>
+            <a:off x="7726680" y="3370478"/>
+            <a:ext cx="3840480" cy="256032"/>
+          </a:xfrm>
+          <a:prstGeom prst="rect">
+            <a:avLst/>
+          </a:prstGeom>
+          <a:noFill/>
+          <a:ln/>
+        </p:spPr>
+        <p:txBody>
+          <a:bodyPr wrap="square" rtlCol="0" anchor="t"/>
+          <a:lstStyle/>
+          <a:p>
+            <a:pPr indent="0" marL="0">
+              <a:buNone/>
+            </a:pPr>
+            <a:r>
+              <a:rPr lang="en-US" sz="1150" dirty="0">
+                <a:solidFill>
+                  <a:srgbClr val="3C3C3C"/>
+                </a:solidFill>
+                <a:latin typeface="Microsoft YaHei" pitchFamily="34" charset="0"/>
+                <a:ea typeface="Microsoft YaHei" pitchFamily="34" charset="-122"/>
+                <a:cs typeface="Microsoft YaHei" pitchFamily="34" charset="-120"/>
+              </a:rPr>
+              <a:t>Cell. 2022 Jan 20;185(2):379-396.e38.</a:t>
+            </a:r>
+            <a:endParaRPr lang="en-US" sz="1150" dirty="0"/>
+          </a:p>
+        </p:txBody>
+      </p:sp>
+      <p:sp>
+        <p:nvSpPr>
+          <p:cNvPr id="22" name="Text 20"/>
+          <p:cNvSpPr txBox="1"/>
+          <p:nvPr/>
+        </p:nvSpPr>
+        <p:spPr>
+          <a:xfrm>
+            <a:off x="2788920" y="3637483"/>
+            <a:ext cx="4892040" cy="256032"/>
+          </a:xfrm>
+          <a:prstGeom prst="rect">
+            <a:avLst/>
+          </a:prstGeom>
+          <a:noFill/>
+          <a:ln/>
+        </p:spPr>
+        <p:txBody>
+          <a:bodyPr wrap="square" rtlCol="0" anchor="t"/>
+          <a:lstStyle/>
+          <a:p>
+            <a:pPr indent="0" marL="0">
+              <a:buNone/>
+            </a:pPr>
+            <a:r>
+              <a:rPr lang="en-US" sz="1150" dirty="0">
+                <a:solidFill>
+                  <a:srgbClr val="1A1A1A"/>
+                </a:solidFill>
+                <a:latin typeface="Microsoft YaHei" pitchFamily="34" charset="0"/>
+                <a:ea typeface="Microsoft YaHei" pitchFamily="34" charset="-122"/>
+                <a:cs typeface="Microsoft YaHei" pitchFamily="34" charset="-120"/>
+              </a:rPr>
+              <a:t>Tabula Sapiens（人全器官）</a:t>
+            </a:r>
+            <a:endParaRPr lang="en-US" sz="1150" dirty="0"/>
+          </a:p>
+        </p:txBody>
+      </p:sp>
+      <p:sp>
+        <p:nvSpPr>
+          <p:cNvPr id="23" name="Text 21"/>
+          <p:cNvSpPr txBox="1"/>
+          <p:nvPr/>
+        </p:nvSpPr>
+        <p:spPr>
+          <a:xfrm>
+            <a:off x="7726680" y="3637483"/>
+            <a:ext cx="3840480" cy="256032"/>
+          </a:xfrm>
+          <a:prstGeom prst="rect">
+            <a:avLst/>
+          </a:prstGeom>
+          <a:noFill/>
+          <a:ln/>
+        </p:spPr>
+        <p:txBody>
+          <a:bodyPr wrap="square" rtlCol="0" anchor="t"/>
+          <a:lstStyle/>
+          <a:p>
+            <a:pPr indent="0" marL="0">
+              <a:buNone/>
+            </a:pPr>
+            <a:r>
+              <a:rPr lang="en-US" sz="1150" dirty="0">
+                <a:solidFill>
+                  <a:srgbClr val="3C3C3C"/>
+                </a:solidFill>
+                <a:latin typeface="Microsoft YaHei" pitchFamily="34" charset="0"/>
+                <a:ea typeface="Microsoft YaHei" pitchFamily="34" charset="-122"/>
+                <a:cs typeface="Microsoft YaHei" pitchFamily="34" charset="-120"/>
+              </a:rPr>
+              <a:t>Science. 2022 May 13;376(6594):eabl4896.</a:t>
+            </a:r>
+            <a:endParaRPr lang="en-US" sz="1150" dirty="0"/>
+          </a:p>
+        </p:txBody>
+      </p:sp>
+      <p:sp>
+        <p:nvSpPr>
+          <p:cNvPr id="24" name="Text 22"/>
+          <p:cNvSpPr txBox="1"/>
+          <p:nvPr/>
+        </p:nvSpPr>
+        <p:spPr>
+          <a:xfrm>
+            <a:off x="2788920" y="3904488"/>
+            <a:ext cx="4892040" cy="256032"/>
+          </a:xfrm>
+          <a:prstGeom prst="rect">
+            <a:avLst/>
+          </a:prstGeom>
+          <a:noFill/>
+          <a:ln/>
+        </p:spPr>
+        <p:txBody>
+          <a:bodyPr wrap="square" rtlCol="0" anchor="t"/>
+          <a:lstStyle/>
+          <a:p>
+            <a:pPr indent="0" marL="0">
+              <a:buNone/>
+            </a:pPr>
+            <a:r>
+              <a:rPr lang="en-US" sz="1150" dirty="0">
+                <a:solidFill>
+                  <a:srgbClr val="1A1A1A"/>
+                </a:solidFill>
+                <a:latin typeface="Microsoft YaHei" pitchFamily="34" charset="0"/>
+                <a:ea typeface="Microsoft YaHei" pitchFamily="34" charset="-122"/>
+                <a:cs typeface="Microsoft YaHei" pitchFamily="34" charset="-120"/>
+              </a:rPr>
+              <a:t>Tabula Muris Senis（小鼠全器官）</a:t>
+            </a:r>
+            <a:endParaRPr lang="en-US" sz="1150" dirty="0"/>
+          </a:p>
+        </p:txBody>
+      </p:sp>
+      <p:sp>
+        <p:nvSpPr>
+          <p:cNvPr id="25" name="Text 23"/>
+          <p:cNvSpPr txBox="1"/>
+          <p:nvPr/>
+        </p:nvSpPr>
+        <p:spPr>
+          <a:xfrm>
+            <a:off x="7726680" y="3904488"/>
+            <a:ext cx="3840480" cy="256032"/>
+          </a:xfrm>
+          <a:prstGeom prst="rect">
+            <a:avLst/>
+          </a:prstGeom>
+          <a:noFill/>
+          <a:ln/>
+        </p:spPr>
+        <p:txBody>
+          <a:bodyPr wrap="square" rtlCol="0" anchor="t"/>
+          <a:lstStyle/>
+          <a:p>
+            <a:pPr indent="0" marL="0">
+              <a:buNone/>
+            </a:pPr>
+            <a:r>
+              <a:rPr lang="en-US" sz="1150" dirty="0">
+                <a:solidFill>
+                  <a:srgbClr val="3C3C3C"/>
+                </a:solidFill>
+                <a:latin typeface="Microsoft YaHei" pitchFamily="34" charset="0"/>
+                <a:ea typeface="Microsoft YaHei" pitchFamily="34" charset="-122"/>
+                <a:cs typeface="Microsoft YaHei" pitchFamily="34" charset="-120"/>
+              </a:rPr>
+              <a:t>Nature. 2020 Jul;583(7817):590-595.</a:t>
+            </a:r>
+            <a:endParaRPr lang="en-US" sz="1150" dirty="0"/>
+          </a:p>
+        </p:txBody>
+      </p:sp>
+      <p:sp>
+        <p:nvSpPr>
+          <p:cNvPr id="26" name="Text 24"/>
+          <p:cNvSpPr txBox="1"/>
+          <p:nvPr/>
+        </p:nvSpPr>
+        <p:spPr>
+          <a:xfrm>
+            <a:off x="2788920" y="4171493"/>
+            <a:ext cx="4892040" cy="256032"/>
+          </a:xfrm>
+          <a:prstGeom prst="rect">
+            <a:avLst/>
+          </a:prstGeom>
+          <a:noFill/>
+          <a:ln/>
+        </p:spPr>
+        <p:txBody>
+          <a:bodyPr wrap="square" rtlCol="0" anchor="t"/>
+          <a:lstStyle/>
+          <a:p>
+            <a:pPr indent="0" marL="0">
+              <a:buNone/>
+            </a:pPr>
+            <a:r>
+              <a:rPr lang="en-US" sz="1150" dirty="0">
+                <a:solidFill>
+                  <a:srgbClr val="1A1A1A"/>
+                </a:solidFill>
+                <a:latin typeface="Microsoft YaHei" pitchFamily="34" charset="0"/>
+                <a:ea typeface="Microsoft YaHei" pitchFamily="34" charset="-122"/>
+                <a:cs typeface="Microsoft YaHei" pitchFamily="34" charset="-120"/>
+              </a:rPr>
+              <a:t>人胰岛多组学</a:t>
+            </a:r>
+            <a:endParaRPr lang="en-US" sz="1150" dirty="0"/>
+          </a:p>
+        </p:txBody>
+      </p:sp>
+      <p:sp>
+        <p:nvSpPr>
+          <p:cNvPr id="27" name="Text 25"/>
+          <p:cNvSpPr txBox="1"/>
+          <p:nvPr/>
+        </p:nvSpPr>
+        <p:spPr>
+          <a:xfrm>
+            <a:off x="7726680" y="4171493"/>
+            <a:ext cx="3840480" cy="256032"/>
+          </a:xfrm>
+          <a:prstGeom prst="rect">
+            <a:avLst/>
+          </a:prstGeom>
+          <a:noFill/>
+          <a:ln/>
+        </p:spPr>
+        <p:txBody>
+          <a:bodyPr wrap="square" rtlCol="0" anchor="t"/>
+          <a:lstStyle/>
+          <a:p>
+            <a:pPr indent="0" marL="0">
+              <a:buNone/>
+            </a:pPr>
+            <a:r>
+              <a:rPr lang="en-US" sz="1150" dirty="0">
+                <a:solidFill>
+                  <a:srgbClr val="3C3C3C"/>
+                </a:solidFill>
+                <a:latin typeface="Microsoft YaHei" pitchFamily="34" charset="0"/>
+                <a:ea typeface="Microsoft YaHei" pitchFamily="34" charset="-122"/>
+                <a:cs typeface="Microsoft YaHei" pitchFamily="34" charset="-120"/>
+              </a:rPr>
+              <a:t>Nat Metab. 2022 Feb;4(2):284-299.</a:t>
+            </a:r>
+            <a:endParaRPr lang="en-US" sz="1150" dirty="0"/>
+          </a:p>
+        </p:txBody>
+      </p:sp>
+      <p:sp>
+        <p:nvSpPr>
+          <p:cNvPr id="28" name="Text 26"/>
+          <p:cNvSpPr txBox="1"/>
+          <p:nvPr/>
+        </p:nvSpPr>
+        <p:spPr>
+          <a:xfrm>
+            <a:off x="2788920" y="4438498"/>
+            <a:ext cx="4892040" cy="256032"/>
+          </a:xfrm>
+          <a:prstGeom prst="rect">
+            <a:avLst/>
+          </a:prstGeom>
+          <a:noFill/>
+          <a:ln/>
+        </p:spPr>
+        <p:txBody>
+          <a:bodyPr wrap="square" rtlCol="0" anchor="t"/>
+          <a:lstStyle/>
+          <a:p>
+            <a:pPr indent="0" marL="0">
+              <a:buNone/>
+            </a:pPr>
+            <a:r>
+              <a:rPr lang="en-US" sz="1150" dirty="0">
+                <a:solidFill>
+                  <a:srgbClr val="1A1A1A"/>
+                </a:solidFill>
+                <a:latin typeface="Microsoft YaHei" pitchFamily="34" charset="0"/>
+                <a:ea typeface="Microsoft YaHei" pitchFamily="34" charset="-122"/>
+                <a:cs typeface="Microsoft YaHei" pitchFamily="34" charset="-120"/>
+              </a:rPr>
+              <a:t>小鼠胰岛跨物种图谱</a:t>
+            </a:r>
+            <a:endParaRPr lang="en-US" sz="1150" dirty="0"/>
+          </a:p>
+        </p:txBody>
+      </p:sp>
+      <p:sp>
+        <p:nvSpPr>
+          <p:cNvPr id="29" name="Text 27"/>
+          <p:cNvSpPr txBox="1"/>
+          <p:nvPr/>
+        </p:nvSpPr>
+        <p:spPr>
+          <a:xfrm>
+            <a:off x="7726680" y="4438498"/>
+            <a:ext cx="3840480" cy="256032"/>
+          </a:xfrm>
+          <a:prstGeom prst="rect">
+            <a:avLst/>
+          </a:prstGeom>
+          <a:noFill/>
+          <a:ln/>
+        </p:spPr>
+        <p:txBody>
+          <a:bodyPr wrap="square" rtlCol="0" anchor="t"/>
+          <a:lstStyle/>
+          <a:p>
+            <a:pPr indent="0" marL="0">
+              <a:buNone/>
+            </a:pPr>
+            <a:r>
+              <a:rPr lang="en-US" sz="1150" dirty="0">
+                <a:solidFill>
+                  <a:srgbClr val="3C3C3C"/>
+                </a:solidFill>
+                <a:latin typeface="Microsoft YaHei" pitchFamily="34" charset="0"/>
+                <a:ea typeface="Microsoft YaHei" pitchFamily="34" charset="-122"/>
+                <a:cs typeface="Microsoft YaHei" pitchFamily="34" charset="-120"/>
+              </a:rPr>
+              <a:t>Mol Metab. 2022 Dec;66:101595.</a:t>
+            </a:r>
+            <a:endParaRPr lang="en-US" sz="1150" dirty="0"/>
+          </a:p>
+        </p:txBody>
+      </p:sp>
+      <p:sp>
+        <p:nvSpPr>
+          <p:cNvPr id="30" name="Text 28"/>
+          <p:cNvSpPr txBox="1"/>
+          <p:nvPr/>
+        </p:nvSpPr>
+        <p:spPr>
+          <a:xfrm>
+            <a:off x="2788920" y="4705502"/>
+            <a:ext cx="4892040" cy="256032"/>
+          </a:xfrm>
+          <a:prstGeom prst="rect">
+            <a:avLst/>
+          </a:prstGeom>
+          <a:noFill/>
+          <a:ln/>
+        </p:spPr>
+        <p:txBody>
+          <a:bodyPr wrap="square" rtlCol="0" anchor="t"/>
+          <a:lstStyle/>
+          <a:p>
+            <a:pPr indent="0" marL="0">
+              <a:buNone/>
+            </a:pPr>
+            <a:r>
+              <a:rPr lang="en-US" sz="1150" dirty="0">
+                <a:solidFill>
+                  <a:srgbClr val="1A1A1A"/>
+                </a:solidFill>
+                <a:latin typeface="Microsoft YaHei" pitchFamily="34" charset="0"/>
+                <a:ea typeface="Microsoft YaHei" pitchFamily="34" charset="-122"/>
+                <a:cs typeface="Microsoft YaHei" pitchFamily="34" charset="-120"/>
+              </a:rPr>
+              <a:t>人颈段脊髓白质单核</a:t>
+            </a:r>
+            <a:endParaRPr lang="en-US" sz="1150" dirty="0"/>
+          </a:p>
+        </p:txBody>
+      </p:sp>
+      <p:sp>
+        <p:nvSpPr>
+          <p:cNvPr id="31" name="Text 29"/>
+          <p:cNvSpPr txBox="1"/>
+          <p:nvPr/>
+        </p:nvSpPr>
+        <p:spPr>
+          <a:xfrm>
+            <a:off x="7726680" y="4705502"/>
+            <a:ext cx="3840480" cy="256032"/>
+          </a:xfrm>
+          <a:prstGeom prst="rect">
+            <a:avLst/>
+          </a:prstGeom>
+          <a:noFill/>
+          <a:ln/>
+        </p:spPr>
+        <p:txBody>
+          <a:bodyPr wrap="square" rtlCol="0" anchor="t"/>
+          <a:lstStyle/>
+          <a:p>
+            <a:pPr indent="0" marL="0">
+              <a:buNone/>
+            </a:pPr>
+            <a:r>
+              <a:rPr lang="en-US" sz="1150" dirty="0">
+                <a:solidFill>
+                  <a:srgbClr val="3C3C3C"/>
+                </a:solidFill>
+                <a:latin typeface="Microsoft YaHei" pitchFamily="34" charset="0"/>
+                <a:ea typeface="Microsoft YaHei" pitchFamily="34" charset="-122"/>
+                <a:cs typeface="Microsoft YaHei" pitchFamily="34" charset="-120"/>
+              </a:rPr>
+              <a:t>Acta Neuropathol Commun. 2023 May 22;11(1):84.</a:t>
+            </a:r>
+            <a:endParaRPr lang="en-US" sz="1150" dirty="0"/>
+          </a:p>
+        </p:txBody>
+      </p:sp>
+      <p:sp>
+        <p:nvSpPr>
+          <p:cNvPr id="32" name="Text 30"/>
+          <p:cNvSpPr txBox="1"/>
+          <p:nvPr/>
+        </p:nvSpPr>
+        <p:spPr>
+          <a:xfrm>
+            <a:off x="2788920" y="4972507"/>
+            <a:ext cx="4892040" cy="256032"/>
+          </a:xfrm>
+          <a:prstGeom prst="rect">
+            <a:avLst/>
+          </a:prstGeom>
+          <a:noFill/>
+          <a:ln/>
+        </p:spPr>
+        <p:txBody>
+          <a:bodyPr wrap="square" rtlCol="0" anchor="t"/>
+          <a:lstStyle/>
+          <a:p>
+            <a:pPr indent="0" marL="0">
+              <a:buNone/>
+            </a:pPr>
+            <a:r>
+              <a:rPr lang="en-US" sz="1150" dirty="0">
+                <a:solidFill>
+                  <a:srgbClr val="1A1A1A"/>
+                </a:solidFill>
+                <a:latin typeface="Microsoft YaHei" pitchFamily="34" charset="0"/>
+                <a:ea typeface="Microsoft YaHei" pitchFamily="34" charset="-122"/>
+                <a:cs typeface="Microsoft YaHei" pitchFamily="34" charset="-120"/>
+              </a:rPr>
+              <a:t>小鼠腰段脊髓单核（GSE103892）</a:t>
+            </a:r>
+            <a:endParaRPr lang="en-US" sz="1150" dirty="0"/>
+          </a:p>
+        </p:txBody>
+      </p:sp>
+      <p:sp>
+        <p:nvSpPr>
+          <p:cNvPr id="33" name="Text 31"/>
+          <p:cNvSpPr txBox="1"/>
+          <p:nvPr/>
+        </p:nvSpPr>
+        <p:spPr>
+          <a:xfrm>
+            <a:off x="7726680" y="4972507"/>
+            <a:ext cx="3840480" cy="256032"/>
+          </a:xfrm>
+          <a:prstGeom prst="rect">
+            <a:avLst/>
+          </a:prstGeom>
+          <a:noFill/>
+          <a:ln/>
+        </p:spPr>
+        <p:txBody>
+          <a:bodyPr wrap="square" rtlCol="0" anchor="t"/>
+          <a:lstStyle/>
+          <a:p>
+            <a:pPr indent="0" marL="0">
+              <a:buNone/>
+            </a:pPr>
+            <a:r>
+              <a:rPr lang="en-US" sz="1150" dirty="0">
+                <a:solidFill>
+                  <a:srgbClr val="3C3C3C"/>
+                </a:solidFill>
+                <a:latin typeface="Microsoft YaHei" pitchFamily="34" charset="0"/>
+                <a:ea typeface="Microsoft YaHei" pitchFamily="34" charset="-122"/>
+                <a:cs typeface="Microsoft YaHei" pitchFamily="34" charset="-120"/>
+              </a:rPr>
+              <a:t>Cell Rep. 2018 Feb 20;22(8):2216-2225.</a:t>
+            </a:r>
+            <a:endParaRPr lang="en-US" sz="1150" dirty="0"/>
+          </a:p>
+        </p:txBody>
+      </p:sp>
+      <p:sp>
+        <p:nvSpPr>
+          <p:cNvPr id="34" name="Text 32"/>
+          <p:cNvSpPr txBox="1"/>
+          <p:nvPr/>
+        </p:nvSpPr>
+        <p:spPr>
+          <a:xfrm>
+            <a:off x="685800" y="6382512"/>
+            <a:ext cx="10881360" cy="274320"/>
+          </a:xfrm>
+          <a:prstGeom prst="rect">
+            <a:avLst/>
+          </a:prstGeom>
+          <a:noFill/>
+          <a:ln/>
+        </p:spPr>
+        <p:txBody>
+          <a:bodyPr wrap="square" rtlCol="0" anchor="ctr"/>
+          <a:lstStyle/>
+          <a:p>
+            <a:pPr indent="0" marL="0">
+              <a:buNone/>
+            </a:pPr>
+            <a:r>
+              <a:rPr lang="en-US" sz="1000" dirty="0">
+                <a:solidFill>
+                  <a:srgbClr val="9AA0A6"/>
+                </a:solidFill>
+                <a:latin typeface="Microsoft YaHei" pitchFamily="34" charset="0"/>
+                <a:ea typeface="Microsoft YaHei" pitchFamily="34" charset="-122"/>
+                <a:cs typeface="Microsoft YaHei" pitchFamily="34" charset="-120"/>
+              </a:rPr>
+              <a:t>本筛选从 CELLxGENE Census 取 29 个分层。全部引文经 NCBI E-utilities 逐条核对。</a:t>
+            </a:r>
+            <a:endParaRPr lang="en-US" sz="1000" dirty="0"/>
+          </a:p>
+        </p:txBody>
+      </p:sp>
+    </p:spTree>
+  </p:cSld>
+  <p:clrMapOvr>
+    <a:masterClrMapping/>
+  </p:clrMapOvr>
+</p:sld>
+</file>
+
+<file path=ppt/slides/slide10.xml><?xml version="1.0" encoding="utf-8"?>
+<p:sld xmlns:a="http://schemas.openxmlformats.org/drawingml/2006/main" xmlns:r="http://schemas.openxmlformats.org/officeDocument/2006/relationships" xmlns:p="http://schemas.openxmlformats.org/presentationml/2006/main">
+  <p:cSld name="Slide 10">
+    <p:spTree>
+      <p:nvGrpSpPr>
+        <p:cNvPr id="1" name=""/>
+        <p:cNvGrpSpPr/>
+        <p:nvPr/>
+      </p:nvGrpSpPr>
+      <p:grpSpPr>
+        <a:xfrm>
+          <a:off x="0" y="0"/>
+          <a:ext cx="0" cy="0"/>
+          <a:chOff x="0" y="0"/>
+          <a:chExt cx="0" cy="0"/>
+        </a:xfrm>
+      </p:grpSpPr>
+      <p:sp>
+        <p:nvSpPr>
+          <p:cNvPr id="2" name="Text 0"/>
+          <p:cNvSpPr txBox="1"/>
+          <p:nvPr/>
+        </p:nvSpPr>
+        <p:spPr>
+          <a:xfrm>
+            <a:off x="640080" y="411480"/>
+            <a:ext cx="10972800" cy="640080"/>
+          </a:xfrm>
+          <a:prstGeom prst="rect">
+            <a:avLst/>
+          </a:prstGeom>
+          <a:noFill/>
+          <a:ln/>
+        </p:spPr>
+        <p:txBody>
+          <a:bodyPr wrap="square" rtlCol="0" anchor="ctr"/>
+          <a:lstStyle/>
+          <a:p>
+            <a:pPr indent="0" marL="0">
+              <a:buNone/>
+            </a:pPr>
+            <a:r>
+              <a:rPr lang="en-US" sz="2400" b="1" dirty="0">
+                <a:solidFill>
+                  <a:srgbClr val="1A1A1A"/>
+                </a:solidFill>
+                <a:latin typeface="Microsoft YaHei" pitchFamily="34" charset="0"/>
+                <a:ea typeface="Microsoft YaHei" pitchFamily="34" charset="-122"/>
+                <a:cs typeface="Microsoft YaHei" pitchFamily="34" charset="-120"/>
+              </a:rPr>
+              <a:t>小鼠肺（Tabula Muris Senis 10x）：IL18 / CASP1 / CASP3 三基因</a:t>
+            </a:r>
+            <a:endParaRPr lang="en-US" sz="2400" dirty="0"/>
+          </a:p>
+        </p:txBody>
+      </p:sp>
+      <p:pic>
+        <p:nvPicPr>
+          <p:cNvPr id="3" name="Image 0" descr="/home/user/aaa/il18_casp5organ/figures/mouse/lung_dots.png">    </p:cNvPr>
+          <p:cNvPicPr>
+            <a:picLocks noChangeAspect="1"/>
+          </p:cNvPicPr>
+          <p:nvPr/>
+        </p:nvPicPr>
+        <p:blipFill>
+          <a:blip r:embed="rId1"/>
+          <a:stretch>
+            <a:fillRect/>
+          </a:stretch>
+        </p:blipFill>
+        <p:spPr>
+          <a:xfrm>
+            <a:off x="640080" y="1051560"/>
+            <a:ext cx="10908792" cy="4846320"/>
+          </a:xfrm>
+          <a:prstGeom prst="rect">
+            <a:avLst/>
+          </a:prstGeom>
+        </p:spPr>
+      </p:pic>
+      <p:sp>
+        <p:nvSpPr>
+          <p:cNvPr id="4" name="Text 1"/>
+          <p:cNvSpPr txBox="1"/>
+          <p:nvPr/>
+        </p:nvSpPr>
+        <p:spPr>
+          <a:xfrm>
+            <a:off x="640080" y="5943600"/>
+            <a:ext cx="10927080" cy="786384"/>
           </a:xfrm>
           <a:prstGeom prst="rect">
             <a:avLst/>
@@ -2131,46 +3517,7 @@
               <a:buNone/>
             </a:pPr>
             <a:r>
-              <a:rPr lang="en-US" sz="1300" dirty="0">
-                <a:solidFill>
-                  <a:srgbClr val="1A1A1A"/>
-                </a:solidFill>
-                <a:latin typeface="Microsoft YaHei" pitchFamily="34" charset="0"/>
-                <a:ea typeface="Microsoft YaHei" pitchFamily="34" charset="-122"/>
-                <a:cs typeface="Microsoft YaHei" pitchFamily="34" charset="-120"/>
-              </a:rPr>
-              <a:t>CZ CELLxGENE Census LTS 2025-11-08（29 个分层）· Allen Human Variation Study · SEA-AD · PsychAD · Tabula Muris Senis · Tabula Sapiens · HLCA · CellRef · GEO GSE103892</a:t>
-            </a:r>
-            <a:endParaRPr lang="en-US" sz="1300" dirty="0"/>
-          </a:p>
-        </p:txBody>
-      </p:sp>
-      <p:sp>
-        <p:nvSpPr>
-          <p:cNvPr id="5" name="Text 3"/>
-          <p:cNvSpPr txBox="1"/>
-          <p:nvPr/>
-        </p:nvSpPr>
-        <p:spPr>
-          <a:xfrm>
-            <a:off x="731520" y="2350008"/>
-            <a:ext cx="2286000" cy="457200"/>
-          </a:xfrm>
-          <a:prstGeom prst="rect">
-            <a:avLst/>
-          </a:prstGeom>
-          <a:noFill/>
-          <a:ln/>
-        </p:spPr>
-        <p:txBody>
-          <a:bodyPr wrap="square" rtlCol="0" anchor="t"/>
-          <a:lstStyle/>
-          <a:p>
-            <a:pPr indent="0" marL="0">
-              <a:buNone/>
-            </a:pPr>
-            <a:r>
-              <a:rPr lang="en-US" sz="1350" b="1" dirty="0">
+              <a:rPr lang="en-US" sz="1050" dirty="0">
                 <a:solidFill>
                   <a:srgbClr val="6B6B6B"/>
                 </a:solidFill>
@@ -2178,331 +3525,7 @@
                 <a:ea typeface="Microsoft YaHei" pitchFamily="34" charset="-122"/>
                 <a:cs typeface="Microsoft YaHei" pitchFamily="34" charset="-120"/>
               </a:rPr>
-              <a:t>分选 / 纯化 bulk</a:t>
-            </a:r>
-            <a:endParaRPr lang="en-US" sz="1350" dirty="0"/>
-          </a:p>
-        </p:txBody>
-      </p:sp>
-      <p:sp>
-        <p:nvSpPr>
-          <p:cNvPr id="6" name="Text 4"/>
-          <p:cNvSpPr txBox="1"/>
-          <p:nvPr/>
-        </p:nvSpPr>
-        <p:spPr>
-          <a:xfrm>
-            <a:off x="3200400" y="2350008"/>
-            <a:ext cx="8321040" cy="841248"/>
-          </a:xfrm>
-          <a:prstGeom prst="rect">
-            <a:avLst/>
-          </a:prstGeom>
-          <a:noFill/>
-          <a:ln/>
-        </p:spPr>
-        <p:txBody>
-          <a:bodyPr wrap="square" rtlCol="0" anchor="t"/>
-          <a:lstStyle/>
-          <a:p>
-            <a:pPr indent="0" marL="0">
-              <a:lnSpc>
-                <a:spcPct val="120000"/>
-              </a:lnSpc>
-              <a:buNone/>
-            </a:pPr>
-            <a:r>
-              <a:rPr lang="en-US" sz="1300" dirty="0">
-                <a:solidFill>
-                  <a:srgbClr val="1A1A1A"/>
-                </a:solidFill>
-                <a:latin typeface="Microsoft YaHei" pitchFamily="34" charset="0"/>
-                <a:ea typeface="Microsoft YaHei" pitchFamily="34" charset="-122"/>
-                <a:cs typeface="Microsoft YaHei" pitchFamily="34" charset="-120"/>
-              </a:rPr>
-              <a:t>ImmGen（RNA-seq + 微阵列）· brainrnaseq/Zhang · Pressl 2024 sFANS 分选核 · Allen Human Cortex SMART-seq · RiboTag / TRAP 系列 · LCM 分选 · 多套 GEO FACS 分选</a:t>
-            </a:r>
-            <a:endParaRPr lang="en-US" sz="1300" dirty="0"/>
-          </a:p>
-        </p:txBody>
-      </p:sp>
-      <p:sp>
-        <p:nvSpPr>
-          <p:cNvPr id="7" name="Text 5"/>
-          <p:cNvSpPr txBox="1"/>
-          <p:nvPr/>
-        </p:nvSpPr>
-        <p:spPr>
-          <a:xfrm>
-            <a:off x="731520" y="3282696"/>
-            <a:ext cx="2286000" cy="457200"/>
-          </a:xfrm>
-          <a:prstGeom prst="rect">
-            <a:avLst/>
-          </a:prstGeom>
-          <a:noFill/>
-          <a:ln/>
-        </p:spPr>
-        <p:txBody>
-          <a:bodyPr wrap="square" rtlCol="0" anchor="t"/>
-          <a:lstStyle/>
-          <a:p>
-            <a:pPr indent="0" marL="0">
-              <a:buNone/>
-            </a:pPr>
-            <a:r>
-              <a:rPr lang="en-US" sz="1350" b="1" dirty="0">
-                <a:solidFill>
-                  <a:srgbClr val="6B6B6B"/>
-                </a:solidFill>
-                <a:latin typeface="Microsoft YaHei" pitchFamily="34" charset="0"/>
-                <a:ea typeface="Microsoft YaHei" pitchFamily="34" charset="-122"/>
-                <a:cs typeface="Microsoft YaHei" pitchFamily="34" charset="-120"/>
-              </a:rPr>
-              <a:t>组织 bulk / 蛋白</a:t>
-            </a:r>
-            <a:endParaRPr lang="en-US" sz="1350" dirty="0"/>
-          </a:p>
-        </p:txBody>
-      </p:sp>
-      <p:sp>
-        <p:nvSpPr>
-          <p:cNvPr id="8" name="Text 6"/>
-          <p:cNvSpPr txBox="1"/>
-          <p:nvPr/>
-        </p:nvSpPr>
-        <p:spPr>
-          <a:xfrm>
-            <a:off x="3200400" y="3282696"/>
-            <a:ext cx="8321040" cy="841248"/>
-          </a:xfrm>
-          <a:prstGeom prst="rect">
-            <a:avLst/>
-          </a:prstGeom>
-          <a:noFill/>
-          <a:ln/>
-        </p:spPr>
-        <p:txBody>
-          <a:bodyPr wrap="square" rtlCol="0" anchor="t"/>
-          <a:lstStyle/>
-          <a:p>
-            <a:pPr indent="0" marL="0">
-              <a:lnSpc>
-                <a:spcPct val="120000"/>
-              </a:lnSpc>
-              <a:buNone/>
-            </a:pPr>
-            <a:r>
-              <a:rPr lang="en-US" sz="1300" dirty="0">
-                <a:solidFill>
-                  <a:srgbClr val="1A1A1A"/>
-                </a:solidFill>
-                <a:latin typeface="Microsoft YaHei" pitchFamily="34" charset="0"/>
-                <a:ea typeface="Microsoft YaHei" pitchFamily="34" charset="-122"/>
-                <a:cs typeface="Microsoft YaHei" pitchFamily="34" charset="-120"/>
-              </a:rPr>
-              <a:t>GTEx v8 · Human Protein Atlas v25（RNA + IHC 蛋白）· Monaco 2019 · Haemopedia</a:t>
-            </a:r>
-            <a:endParaRPr lang="en-US" sz="1300" dirty="0"/>
-          </a:p>
-        </p:txBody>
-      </p:sp>
-      <p:sp>
-        <p:nvSpPr>
-          <p:cNvPr id="9" name="Text 7"/>
-          <p:cNvSpPr txBox="1"/>
-          <p:nvPr/>
-        </p:nvSpPr>
-        <p:spPr>
-          <a:xfrm>
-            <a:off x="731520" y="4215384"/>
-            <a:ext cx="2286000" cy="457200"/>
-          </a:xfrm>
-          <a:prstGeom prst="rect">
-            <a:avLst/>
-          </a:prstGeom>
-          <a:noFill/>
-          <a:ln/>
-        </p:spPr>
-        <p:txBody>
-          <a:bodyPr wrap="square" rtlCol="0" anchor="t"/>
-          <a:lstStyle/>
-          <a:p>
-            <a:pPr indent="0" marL="0">
-              <a:buNone/>
-            </a:pPr>
-            <a:r>
-              <a:rPr lang="en-US" sz="1350" b="1" dirty="0">
-                <a:solidFill>
-                  <a:srgbClr val="6B6B6B"/>
-                </a:solidFill>
-                <a:latin typeface="Microsoft YaHei" pitchFamily="34" charset="0"/>
-                <a:ea typeface="Microsoft YaHei" pitchFamily="34" charset="-122"/>
-                <a:cs typeface="Microsoft YaHei" pitchFamily="34" charset="-120"/>
-              </a:rPr>
-              <a:t>剪接连接</a:t>
-            </a:r>
-            <a:endParaRPr lang="en-US" sz="1350" dirty="0"/>
-          </a:p>
-        </p:txBody>
-      </p:sp>
-      <p:sp>
-        <p:nvSpPr>
-          <p:cNvPr id="10" name="Text 8"/>
-          <p:cNvSpPr txBox="1"/>
-          <p:nvPr/>
-        </p:nvSpPr>
-        <p:spPr>
-          <a:xfrm>
-            <a:off x="3200400" y="4215384"/>
-            <a:ext cx="8321040" cy="841248"/>
-          </a:xfrm>
-          <a:prstGeom prst="rect">
-            <a:avLst/>
-          </a:prstGeom>
-          <a:noFill/>
-          <a:ln/>
-        </p:spPr>
-        <p:txBody>
-          <a:bodyPr wrap="square" rtlCol="0" anchor="t"/>
-          <a:lstStyle/>
-          <a:p>
-            <a:pPr indent="0" marL="0">
-              <a:lnSpc>
-                <a:spcPct val="120000"/>
-              </a:lnSpc>
-              <a:buNone/>
-            </a:pPr>
-            <a:r>
-              <a:rPr lang="en-US" sz="1300" dirty="0">
-                <a:solidFill>
-                  <a:srgbClr val="1A1A1A"/>
-                </a:solidFill>
-                <a:latin typeface="Microsoft YaHei" pitchFamily="34" charset="0"/>
-                <a:ea typeface="Microsoft YaHei" pitchFamily="34" charset="-122"/>
-                <a:cs typeface="Microsoft YaHei" pitchFamily="34" charset="-120"/>
-              </a:rPr>
-              <a:t>Snaptron（recount3 / SRA / GTEx v8）</a:t>
-            </a:r>
-            <a:endParaRPr lang="en-US" sz="1300" dirty="0"/>
-          </a:p>
-        </p:txBody>
-      </p:sp>
-      <p:sp>
-        <p:nvSpPr>
-          <p:cNvPr id="11" name="Text 9"/>
-          <p:cNvSpPr txBox="1"/>
-          <p:nvPr/>
-        </p:nvSpPr>
-        <p:spPr>
-          <a:xfrm>
-            <a:off x="731520" y="5148072"/>
-            <a:ext cx="2286000" cy="457200"/>
-          </a:xfrm>
-          <a:prstGeom prst="rect">
-            <a:avLst/>
-          </a:prstGeom>
-          <a:noFill/>
-          <a:ln/>
-        </p:spPr>
-        <p:txBody>
-          <a:bodyPr wrap="square" rtlCol="0" anchor="t"/>
-          <a:lstStyle/>
-          <a:p>
-            <a:pPr indent="0" marL="0">
-              <a:buNone/>
-            </a:pPr>
-            <a:r>
-              <a:rPr lang="en-US" sz="1350" b="1" dirty="0">
-                <a:solidFill>
-                  <a:srgbClr val="6B6B6B"/>
-                </a:solidFill>
-                <a:latin typeface="Microsoft YaHei" pitchFamily="34" charset="0"/>
-                <a:ea typeface="Microsoft YaHei" pitchFamily="34" charset="-122"/>
-                <a:cs typeface="Microsoft YaHei" pitchFamily="34" charset="-120"/>
-              </a:rPr>
-              <a:t>基因模型</a:t>
-            </a:r>
-            <a:endParaRPr lang="en-US" sz="1350" dirty="0"/>
-          </a:p>
-        </p:txBody>
-      </p:sp>
-      <p:sp>
-        <p:nvSpPr>
-          <p:cNvPr id="12" name="Text 10"/>
-          <p:cNvSpPr txBox="1"/>
-          <p:nvPr/>
-        </p:nvSpPr>
-        <p:spPr>
-          <a:xfrm>
-            <a:off x="3200400" y="5148072"/>
-            <a:ext cx="8321040" cy="841248"/>
-          </a:xfrm>
-          <a:prstGeom prst="rect">
-            <a:avLst/>
-          </a:prstGeom>
-          <a:noFill/>
-          <a:ln/>
-        </p:spPr>
-        <p:txBody>
-          <a:bodyPr wrap="square" rtlCol="0" anchor="t"/>
-          <a:lstStyle/>
-          <a:p>
-            <a:pPr indent="0" marL="0">
-              <a:lnSpc>
-                <a:spcPct val="120000"/>
-              </a:lnSpc>
-              <a:buNone/>
-            </a:pPr>
-            <a:r>
-              <a:rPr lang="en-US" sz="1300" dirty="0">
-                <a:solidFill>
-                  <a:srgbClr val="1A1A1A"/>
-                </a:solidFill>
-                <a:latin typeface="Microsoft YaHei" pitchFamily="34" charset="0"/>
-                <a:ea typeface="Microsoft YaHei" pitchFamily="34" charset="-122"/>
-                <a:cs typeface="Microsoft YaHei" pitchFamily="34" charset="-120"/>
-              </a:rPr>
-              <a:t>Ensembl REST</a:t>
-            </a:r>
-            <a:endParaRPr lang="en-US" sz="1300" dirty="0"/>
-          </a:p>
-        </p:txBody>
-      </p:sp>
-      <p:sp>
-        <p:nvSpPr>
-          <p:cNvPr id="13" name="Text 11"/>
-          <p:cNvSpPr txBox="1"/>
-          <p:nvPr/>
-        </p:nvSpPr>
-        <p:spPr>
-          <a:xfrm>
-            <a:off x="731520" y="6355080"/>
-            <a:ext cx="10698480" cy="274320"/>
-          </a:xfrm>
-          <a:prstGeom prst="rect">
-            <a:avLst/>
-          </a:prstGeom>
-          <a:noFill/>
-          <a:ln/>
-        </p:spPr>
-        <p:txBody>
-          <a:bodyPr wrap="square" rtlCol="0" anchor="ctr"/>
-          <a:lstStyle/>
-          <a:p>
-            <a:pPr indent="0" marL="0">
-              <a:buNone/>
-            </a:pPr>
-            <a:r>
-              <a:rPr lang="en-US" sz="1050" dirty="0">
-                <a:solidFill>
-                  <a:srgbClr val="9AA0A6"/>
-                </a:solidFill>
-                <a:latin typeface="Microsoft YaHei" pitchFamily="34" charset="0"/>
-                <a:ea typeface="Microsoft YaHei" pitchFamily="34" charset="-122"/>
-                <a:cs typeface="Microsoft YaHei" pitchFamily="34" charset="-120"/>
-              </a:rPr>
-              <a:t>统一参考表 1714 行，每条带来源、单位、状态与匹配质量标注。</a:t>
+              <a:t>肺泡巨噬 IL18 71.6% 全器官最高，CASP1 13.3%，参考层确认可测。</a:t>
             </a:r>
             <a:endParaRPr lang="en-US" sz="1050" dirty="0"/>
           </a:p>
@@ -2516,9 +3539,9 @@
 </p:sld>
 </file>
 
-<file path=ppt/slides/slide10.xml><?xml version="1.0" encoding="utf-8"?>
+<file path=ppt/slides/slide11.xml><?xml version="1.0" encoding="utf-8"?>
 <p:sld xmlns:a="http://schemas.openxmlformats.org/drawingml/2006/main" xmlns:r="http://schemas.openxmlformats.org/officeDocument/2006/relationships" xmlns:p="http://schemas.openxmlformats.org/presentationml/2006/main">
-  <p:cSld name="Slide 10">
+  <p:cSld name="Slide 11">
     <p:spTree>
       <p:nvGrpSpPr>
         <p:cNvPr id="1" name=""/>
@@ -2646,9 +3669,9 @@
 </p:sld>
 </file>
 
-<file path=ppt/slides/slide11.xml><?xml version="1.0" encoding="utf-8"?>
+<file path=ppt/slides/slide12.xml><?xml version="1.0" encoding="utf-8"?>
 <p:sld xmlns:a="http://schemas.openxmlformats.org/drawingml/2006/main" xmlns:r="http://schemas.openxmlformats.org/officeDocument/2006/relationships" xmlns:p="http://schemas.openxmlformats.org/presentationml/2006/main">
-  <p:cSld name="Slide 11">
+  <p:cSld name="Slide 12">
     <p:spTree>
       <p:nvGrpSpPr>
         <p:cNvPr id="1" name=""/>
@@ -2776,9 +3799,9 @@
 </p:sld>
 </file>
 
-<file path=ppt/slides/slide12.xml><?xml version="1.0" encoding="utf-8"?>
+<file path=ppt/slides/slide13.xml><?xml version="1.0" encoding="utf-8"?>
 <p:sld xmlns:a="http://schemas.openxmlformats.org/drawingml/2006/main" xmlns:r="http://schemas.openxmlformats.org/officeDocument/2006/relationships" xmlns:p="http://schemas.openxmlformats.org/presentationml/2006/main">
-  <p:cSld name="Slide 12">
+  <p:cSld name="Slide 13">
     <p:spTree>
       <p:nvGrpSpPr>
         <p:cNvPr id="1" name=""/>
@@ -2906,9 +3929,9 @@
 </p:sld>
 </file>
 
-<file path=ppt/slides/slide13.xml><?xml version="1.0" encoding="utf-8"?>
+<file path=ppt/slides/slide14.xml><?xml version="1.0" encoding="utf-8"?>
 <p:sld xmlns:a="http://schemas.openxmlformats.org/drawingml/2006/main" xmlns:r="http://schemas.openxmlformats.org/officeDocument/2006/relationships" xmlns:p="http://schemas.openxmlformats.org/presentationml/2006/main">
-  <p:cSld name="Slide 13">
+  <p:cSld name="Slide 14">
     <p:spTree>
       <p:nvGrpSpPr>
         <p:cNvPr id="1" name=""/>
@@ -3036,9 +4059,9 @@
 </p:sld>
 </file>
 
-<file path=ppt/slides/slide14.xml><?xml version="1.0" encoding="utf-8"?>
+<file path=ppt/slides/slide15.xml><?xml version="1.0" encoding="utf-8"?>
 <p:sld xmlns:a="http://schemas.openxmlformats.org/drawingml/2006/main" xmlns:r="http://schemas.openxmlformats.org/officeDocument/2006/relationships" xmlns:p="http://schemas.openxmlformats.org/presentationml/2006/main">
-  <p:cSld name="Slide 14">
+  <p:cSld name="Slide 15">
     <p:spTree>
       <p:nvGrpSpPr>
         <p:cNvPr id="1" name=""/>
@@ -3133,7 +4156,7 @@
       </p:sp>
       <p:graphicFrame>
         <p:nvGraphicFramePr>
-          <p:cNvPr id="15" name="Table 0"/>
+          <p:cNvPr id="16" name="Table 0"/>
           <p:cNvGraphicFramePr>
             <a:graphicFrameLocks noGrp="1"/>
           </p:cNvGraphicFramePr>
@@ -11758,6 +12781,1201 @@
                 <a:ea typeface="Microsoft YaHei" pitchFamily="34" charset="-122"/>
                 <a:cs typeface="Microsoft YaHei" pitchFamily="34" charset="-120"/>
               </a:rPr>
+              <a:t>查阅的数据库（二）：参考层</a:t>
+            </a:r>
+            <a:endParaRPr lang="en-US" sz="2400" dirty="0"/>
+          </a:p>
+        </p:txBody>
+      </p:sp>
+      <p:sp>
+        <p:nvSpPr>
+          <p:cNvPr id="3" name="Text 1"/>
+          <p:cNvSpPr txBox="1"/>
+          <p:nvPr/>
+        </p:nvSpPr>
+        <p:spPr>
+          <a:xfrm>
+            <a:off x="685800" y="1234440"/>
+            <a:ext cx="2103120" cy="274320"/>
+          </a:xfrm>
+          <a:prstGeom prst="rect">
+            <a:avLst/>
+          </a:prstGeom>
+          <a:noFill/>
+          <a:ln/>
+        </p:spPr>
+        <p:txBody>
+          <a:bodyPr wrap="square" rtlCol="0" anchor="ctr"/>
+          <a:lstStyle/>
+          <a:p>
+            <a:pPr indent="0" marL="0">
+              <a:buNone/>
+            </a:pPr>
+            <a:r>
+              <a:rPr lang="en-US" sz="1250" b="1" dirty="0">
+                <a:solidFill>
+                  <a:srgbClr val="6B6B6B"/>
+                </a:solidFill>
+                <a:latin typeface="Microsoft YaHei" pitchFamily="34" charset="0"/>
+                <a:ea typeface="Microsoft YaHei" pitchFamily="34" charset="-122"/>
+                <a:cs typeface="Microsoft YaHei" pitchFamily="34" charset="-120"/>
+              </a:rPr>
+              <a:t>分选 / 纯化 bulk</a:t>
+            </a:r>
+            <a:endParaRPr lang="en-US" sz="1250" dirty="0"/>
+          </a:p>
+        </p:txBody>
+      </p:sp>
+      <p:sp>
+        <p:nvSpPr>
+          <p:cNvPr id="4" name="Text 2"/>
+          <p:cNvSpPr txBox="1"/>
+          <p:nvPr/>
+        </p:nvSpPr>
+        <p:spPr>
+          <a:xfrm>
+            <a:off x="2788920" y="1234440"/>
+            <a:ext cx="4892040" cy="256032"/>
+          </a:xfrm>
+          <a:prstGeom prst="rect">
+            <a:avLst/>
+          </a:prstGeom>
+          <a:noFill/>
+          <a:ln/>
+        </p:spPr>
+        <p:txBody>
+          <a:bodyPr wrap="square" rtlCol="0" anchor="t"/>
+          <a:lstStyle/>
+          <a:p>
+            <a:pPr indent="0" marL="0">
+              <a:buNone/>
+            </a:pPr>
+            <a:r>
+              <a:rPr lang="en-US" sz="1150" dirty="0">
+                <a:solidFill>
+                  <a:srgbClr val="1A1A1A"/>
+                </a:solidFill>
+                <a:latin typeface="Microsoft YaHei" pitchFamily="34" charset="0"/>
+                <a:ea typeface="Microsoft YaHei" pitchFamily="34" charset="-122"/>
+                <a:cs typeface="Microsoft YaHei" pitchFamily="34" charset="-120"/>
+              </a:rPr>
+              <a:t>ImmGen（小鼠免疫细胞，GSE109125）</a:t>
+            </a:r>
+            <a:endParaRPr lang="en-US" sz="1150" dirty="0"/>
+          </a:p>
+        </p:txBody>
+      </p:sp>
+      <p:sp>
+        <p:nvSpPr>
+          <p:cNvPr id="5" name="Text 3"/>
+          <p:cNvSpPr txBox="1"/>
+          <p:nvPr/>
+        </p:nvSpPr>
+        <p:spPr>
+          <a:xfrm>
+            <a:off x="7726680" y="1234440"/>
+            <a:ext cx="3840480" cy="256032"/>
+          </a:xfrm>
+          <a:prstGeom prst="rect">
+            <a:avLst/>
+          </a:prstGeom>
+          <a:noFill/>
+          <a:ln/>
+        </p:spPr>
+        <p:txBody>
+          <a:bodyPr wrap="square" rtlCol="0" anchor="t"/>
+          <a:lstStyle/>
+          <a:p>
+            <a:pPr indent="0" marL="0">
+              <a:buNone/>
+            </a:pPr>
+            <a:r>
+              <a:rPr lang="en-US" sz="1150" dirty="0">
+                <a:solidFill>
+                  <a:srgbClr val="3C3C3C"/>
+                </a:solidFill>
+                <a:latin typeface="Microsoft YaHei" pitchFamily="34" charset="0"/>
+                <a:ea typeface="Microsoft YaHei" pitchFamily="34" charset="-122"/>
+                <a:cs typeface="Microsoft YaHei" pitchFamily="34" charset="-120"/>
+              </a:rPr>
+              <a:t>Cell. 2019 Feb 7;176(4):897-912.e20.</a:t>
+            </a:r>
+            <a:endParaRPr lang="en-US" sz="1150" dirty="0"/>
+          </a:p>
+        </p:txBody>
+      </p:sp>
+      <p:sp>
+        <p:nvSpPr>
+          <p:cNvPr id="6" name="Text 4"/>
+          <p:cNvSpPr txBox="1"/>
+          <p:nvPr/>
+        </p:nvSpPr>
+        <p:spPr>
+          <a:xfrm>
+            <a:off x="2788920" y="1501445"/>
+            <a:ext cx="4892040" cy="256032"/>
+          </a:xfrm>
+          <a:prstGeom prst="rect">
+            <a:avLst/>
+          </a:prstGeom>
+          <a:noFill/>
+          <a:ln/>
+        </p:spPr>
+        <p:txBody>
+          <a:bodyPr wrap="square" rtlCol="0" anchor="t"/>
+          <a:lstStyle/>
+          <a:p>
+            <a:pPr indent="0" marL="0">
+              <a:buNone/>
+            </a:pPr>
+            <a:r>
+              <a:rPr lang="en-US" sz="1150" dirty="0">
+                <a:solidFill>
+                  <a:srgbClr val="1A1A1A"/>
+                </a:solidFill>
+                <a:latin typeface="Microsoft YaHei" pitchFamily="34" charset="0"/>
+                <a:ea typeface="Microsoft YaHei" pitchFamily="34" charset="-122"/>
+                <a:cs typeface="Microsoft YaHei" pitchFamily="34" charset="-120"/>
+              </a:rPr>
+              <a:t>brainrnaseq 小鼠皮层分选</a:t>
+            </a:r>
+            <a:endParaRPr lang="en-US" sz="1150" dirty="0"/>
+          </a:p>
+        </p:txBody>
+      </p:sp>
+      <p:sp>
+        <p:nvSpPr>
+          <p:cNvPr id="7" name="Text 5"/>
+          <p:cNvSpPr txBox="1"/>
+          <p:nvPr/>
+        </p:nvSpPr>
+        <p:spPr>
+          <a:xfrm>
+            <a:off x="7726680" y="1501445"/>
+            <a:ext cx="3840480" cy="256032"/>
+          </a:xfrm>
+          <a:prstGeom prst="rect">
+            <a:avLst/>
+          </a:prstGeom>
+          <a:noFill/>
+          <a:ln/>
+        </p:spPr>
+        <p:txBody>
+          <a:bodyPr wrap="square" rtlCol="0" anchor="t"/>
+          <a:lstStyle/>
+          <a:p>
+            <a:pPr indent="0" marL="0">
+              <a:buNone/>
+            </a:pPr>
+            <a:r>
+              <a:rPr lang="en-US" sz="1150" dirty="0">
+                <a:solidFill>
+                  <a:srgbClr val="3C3C3C"/>
+                </a:solidFill>
+                <a:latin typeface="Microsoft YaHei" pitchFamily="34" charset="0"/>
+                <a:ea typeface="Microsoft YaHei" pitchFamily="34" charset="-122"/>
+                <a:cs typeface="Microsoft YaHei" pitchFamily="34" charset="-120"/>
+              </a:rPr>
+              <a:t>J Neurosci. 2014 Sep 3;34(36):11929-47.</a:t>
+            </a:r>
+            <a:endParaRPr lang="en-US" sz="1150" dirty="0"/>
+          </a:p>
+        </p:txBody>
+      </p:sp>
+      <p:sp>
+        <p:nvSpPr>
+          <p:cNvPr id="8" name="Text 6"/>
+          <p:cNvSpPr txBox="1"/>
+          <p:nvPr/>
+        </p:nvSpPr>
+        <p:spPr>
+          <a:xfrm>
+            <a:off x="2788920" y="1768450"/>
+            <a:ext cx="4892040" cy="256032"/>
+          </a:xfrm>
+          <a:prstGeom prst="rect">
+            <a:avLst/>
+          </a:prstGeom>
+          <a:noFill/>
+          <a:ln/>
+        </p:spPr>
+        <p:txBody>
+          <a:bodyPr wrap="square" rtlCol="0" anchor="t"/>
+          <a:lstStyle/>
+          <a:p>
+            <a:pPr indent="0" marL="0">
+              <a:buNone/>
+            </a:pPr>
+            <a:r>
+              <a:rPr lang="en-US" sz="1150" dirty="0">
+                <a:solidFill>
+                  <a:srgbClr val="1A1A1A"/>
+                </a:solidFill>
+                <a:latin typeface="Microsoft YaHei" pitchFamily="34" charset="0"/>
+                <a:ea typeface="Microsoft YaHei" pitchFamily="34" charset="-122"/>
+                <a:cs typeface="Microsoft YaHei" pitchFamily="34" charset="-120"/>
+              </a:rPr>
+              <a:t>brainrnaseq 人星形胶质分选</a:t>
+            </a:r>
+            <a:endParaRPr lang="en-US" sz="1150" dirty="0"/>
+          </a:p>
+        </p:txBody>
+      </p:sp>
+      <p:sp>
+        <p:nvSpPr>
+          <p:cNvPr id="9" name="Text 7"/>
+          <p:cNvSpPr txBox="1"/>
+          <p:nvPr/>
+        </p:nvSpPr>
+        <p:spPr>
+          <a:xfrm>
+            <a:off x="7726680" y="1768450"/>
+            <a:ext cx="3840480" cy="256032"/>
+          </a:xfrm>
+          <a:prstGeom prst="rect">
+            <a:avLst/>
+          </a:prstGeom>
+          <a:noFill/>
+          <a:ln/>
+        </p:spPr>
+        <p:txBody>
+          <a:bodyPr wrap="square" rtlCol="0" anchor="t"/>
+          <a:lstStyle/>
+          <a:p>
+            <a:pPr indent="0" marL="0">
+              <a:buNone/>
+            </a:pPr>
+            <a:r>
+              <a:rPr lang="en-US" sz="1150" dirty="0">
+                <a:solidFill>
+                  <a:srgbClr val="3C3C3C"/>
+                </a:solidFill>
+                <a:latin typeface="Microsoft YaHei" pitchFamily="34" charset="0"/>
+                <a:ea typeface="Microsoft YaHei" pitchFamily="34" charset="-122"/>
+                <a:cs typeface="Microsoft YaHei" pitchFamily="34" charset="-120"/>
+              </a:rPr>
+              <a:t>Neuron. 2016 Jan 6;89(1):37-53.</a:t>
+            </a:r>
+            <a:endParaRPr lang="en-US" sz="1150" dirty="0"/>
+          </a:p>
+        </p:txBody>
+      </p:sp>
+      <p:sp>
+        <p:nvSpPr>
+          <p:cNvPr id="10" name="Text 8"/>
+          <p:cNvSpPr txBox="1"/>
+          <p:nvPr/>
+        </p:nvSpPr>
+        <p:spPr>
+          <a:xfrm>
+            <a:off x="2788920" y="2035454"/>
+            <a:ext cx="4892040" cy="256032"/>
+          </a:xfrm>
+          <a:prstGeom prst="rect">
+            <a:avLst/>
+          </a:prstGeom>
+          <a:noFill/>
+          <a:ln/>
+        </p:spPr>
+        <p:txBody>
+          <a:bodyPr wrap="square" rtlCol="0" anchor="t"/>
+          <a:lstStyle/>
+          <a:p>
+            <a:pPr indent="0" marL="0">
+              <a:buNone/>
+            </a:pPr>
+            <a:r>
+              <a:rPr lang="en-US" sz="1150" dirty="0">
+                <a:solidFill>
+                  <a:srgbClr val="1A1A1A"/>
+                </a:solidFill>
+                <a:latin typeface="Microsoft YaHei" pitchFamily="34" charset="0"/>
+                <a:ea typeface="Microsoft YaHei" pitchFamily="34" charset="-122"/>
+                <a:cs typeface="Microsoft YaHei" pitchFamily="34" charset="-120"/>
+              </a:rPr>
+              <a:t>Pressl sFANS 分选核（人皮层 L5a）</a:t>
+            </a:r>
+            <a:endParaRPr lang="en-US" sz="1150" dirty="0"/>
+          </a:p>
+        </p:txBody>
+      </p:sp>
+      <p:sp>
+        <p:nvSpPr>
+          <p:cNvPr id="11" name="Text 9"/>
+          <p:cNvSpPr txBox="1"/>
+          <p:nvPr/>
+        </p:nvSpPr>
+        <p:spPr>
+          <a:xfrm>
+            <a:off x="7726680" y="2035454"/>
+            <a:ext cx="3840480" cy="256032"/>
+          </a:xfrm>
+          <a:prstGeom prst="rect">
+            <a:avLst/>
+          </a:prstGeom>
+          <a:noFill/>
+          <a:ln/>
+        </p:spPr>
+        <p:txBody>
+          <a:bodyPr wrap="square" rtlCol="0" anchor="t"/>
+          <a:lstStyle/>
+          <a:p>
+            <a:pPr indent="0" marL="0">
+              <a:buNone/>
+            </a:pPr>
+            <a:r>
+              <a:rPr lang="en-US" sz="1150" dirty="0">
+                <a:solidFill>
+                  <a:srgbClr val="3C3C3C"/>
+                </a:solidFill>
+                <a:latin typeface="Microsoft YaHei" pitchFamily="34" charset="0"/>
+                <a:ea typeface="Microsoft YaHei" pitchFamily="34" charset="-122"/>
+                <a:cs typeface="Microsoft YaHei" pitchFamily="34" charset="-120"/>
+              </a:rPr>
+              <a:t>Neuron. 2024 Mar 20;112(6):924-941.e10.</a:t>
+            </a:r>
+            <a:endParaRPr lang="en-US" sz="1150" dirty="0"/>
+          </a:p>
+        </p:txBody>
+      </p:sp>
+      <p:sp>
+        <p:nvSpPr>
+          <p:cNvPr id="12" name="Text 10"/>
+          <p:cNvSpPr txBox="1"/>
+          <p:nvPr/>
+        </p:nvSpPr>
+        <p:spPr>
+          <a:xfrm>
+            <a:off x="2788920" y="2302459"/>
+            <a:ext cx="4892040" cy="256032"/>
+          </a:xfrm>
+          <a:prstGeom prst="rect">
+            <a:avLst/>
+          </a:prstGeom>
+          <a:noFill/>
+          <a:ln/>
+        </p:spPr>
+        <p:txBody>
+          <a:bodyPr wrap="square" rtlCol="0" anchor="t"/>
+          <a:lstStyle/>
+          <a:p>
+            <a:pPr indent="0" marL="0">
+              <a:buNone/>
+            </a:pPr>
+            <a:r>
+              <a:rPr lang="en-US" sz="1150" dirty="0">
+                <a:solidFill>
+                  <a:srgbClr val="1A1A1A"/>
+                </a:solidFill>
+                <a:latin typeface="Microsoft YaHei" pitchFamily="34" charset="0"/>
+                <a:ea typeface="Microsoft YaHei" pitchFamily="34" charset="-122"/>
+                <a:cs typeface="Microsoft YaHei" pitchFamily="34" charset="-120"/>
+              </a:rPr>
+              <a:t>Allen 人皮层 SMART-seq</a:t>
+            </a:r>
+            <a:endParaRPr lang="en-US" sz="1150" dirty="0"/>
+          </a:p>
+        </p:txBody>
+      </p:sp>
+      <p:sp>
+        <p:nvSpPr>
+          <p:cNvPr id="13" name="Text 11"/>
+          <p:cNvSpPr txBox="1"/>
+          <p:nvPr/>
+        </p:nvSpPr>
+        <p:spPr>
+          <a:xfrm>
+            <a:off x="7726680" y="2302459"/>
+            <a:ext cx="3840480" cy="256032"/>
+          </a:xfrm>
+          <a:prstGeom prst="rect">
+            <a:avLst/>
+          </a:prstGeom>
+          <a:noFill/>
+          <a:ln/>
+        </p:spPr>
+        <p:txBody>
+          <a:bodyPr wrap="square" rtlCol="0" anchor="t"/>
+          <a:lstStyle/>
+          <a:p>
+            <a:pPr indent="0" marL="0">
+              <a:buNone/>
+            </a:pPr>
+            <a:r>
+              <a:rPr lang="en-US" sz="1150" dirty="0">
+                <a:solidFill>
+                  <a:srgbClr val="3C3C3C"/>
+                </a:solidFill>
+                <a:latin typeface="Microsoft YaHei" pitchFamily="34" charset="0"/>
+                <a:ea typeface="Microsoft YaHei" pitchFamily="34" charset="-122"/>
+                <a:cs typeface="Microsoft YaHei" pitchFamily="34" charset="-120"/>
+              </a:rPr>
+              <a:t>Nature. 2019 Sep;573(7772):61-68.</a:t>
+            </a:r>
+            <a:endParaRPr lang="en-US" sz="1150" dirty="0"/>
+          </a:p>
+        </p:txBody>
+      </p:sp>
+      <p:sp>
+        <p:nvSpPr>
+          <p:cNvPr id="14" name="Text 12"/>
+          <p:cNvSpPr txBox="1"/>
+          <p:nvPr/>
+        </p:nvSpPr>
+        <p:spPr>
+          <a:xfrm>
+            <a:off x="685800" y="2724912"/>
+            <a:ext cx="2103120" cy="274320"/>
+          </a:xfrm>
+          <a:prstGeom prst="rect">
+            <a:avLst/>
+          </a:prstGeom>
+          <a:noFill/>
+          <a:ln/>
+        </p:spPr>
+        <p:txBody>
+          <a:bodyPr wrap="square" rtlCol="0" anchor="ctr"/>
+          <a:lstStyle/>
+          <a:p>
+            <a:pPr indent="0" marL="0">
+              <a:buNone/>
+            </a:pPr>
+            <a:r>
+              <a:rPr lang="en-US" sz="1250" b="1" dirty="0">
+                <a:solidFill>
+                  <a:srgbClr val="6B6B6B"/>
+                </a:solidFill>
+                <a:latin typeface="Microsoft YaHei" pitchFamily="34" charset="0"/>
+                <a:ea typeface="Microsoft YaHei" pitchFamily="34" charset="-122"/>
+                <a:cs typeface="Microsoft YaHei" pitchFamily="34" charset="-120"/>
+              </a:rPr>
+              <a:t>组织 bulk / 蛋白</a:t>
+            </a:r>
+            <a:endParaRPr lang="en-US" sz="1250" dirty="0"/>
+          </a:p>
+        </p:txBody>
+      </p:sp>
+      <p:sp>
+        <p:nvSpPr>
+          <p:cNvPr id="15" name="Text 13"/>
+          <p:cNvSpPr txBox="1"/>
+          <p:nvPr/>
+        </p:nvSpPr>
+        <p:spPr>
+          <a:xfrm>
+            <a:off x="2788920" y="2724912"/>
+            <a:ext cx="4892040" cy="256032"/>
+          </a:xfrm>
+          <a:prstGeom prst="rect">
+            <a:avLst/>
+          </a:prstGeom>
+          <a:noFill/>
+          <a:ln/>
+        </p:spPr>
+        <p:txBody>
+          <a:bodyPr wrap="square" rtlCol="0" anchor="t"/>
+          <a:lstStyle/>
+          <a:p>
+            <a:pPr indent="0" marL="0">
+              <a:buNone/>
+            </a:pPr>
+            <a:r>
+              <a:rPr lang="en-US" sz="1150" dirty="0">
+                <a:solidFill>
+                  <a:srgbClr val="1A1A1A"/>
+                </a:solidFill>
+                <a:latin typeface="Microsoft YaHei" pitchFamily="34" charset="0"/>
+                <a:ea typeface="Microsoft YaHei" pitchFamily="34" charset="-122"/>
+                <a:cs typeface="Microsoft YaHei" pitchFamily="34" charset="-120"/>
+              </a:rPr>
+              <a:t>GTEx v8</a:t>
+            </a:r>
+            <a:endParaRPr lang="en-US" sz="1150" dirty="0"/>
+          </a:p>
+        </p:txBody>
+      </p:sp>
+      <p:sp>
+        <p:nvSpPr>
+          <p:cNvPr id="16" name="Text 14"/>
+          <p:cNvSpPr txBox="1"/>
+          <p:nvPr/>
+        </p:nvSpPr>
+        <p:spPr>
+          <a:xfrm>
+            <a:off x="7726680" y="2724912"/>
+            <a:ext cx="3840480" cy="256032"/>
+          </a:xfrm>
+          <a:prstGeom prst="rect">
+            <a:avLst/>
+          </a:prstGeom>
+          <a:noFill/>
+          <a:ln/>
+        </p:spPr>
+        <p:txBody>
+          <a:bodyPr wrap="square" rtlCol="0" anchor="t"/>
+          <a:lstStyle/>
+          <a:p>
+            <a:pPr indent="0" marL="0">
+              <a:buNone/>
+            </a:pPr>
+            <a:r>
+              <a:rPr lang="en-US" sz="1150" dirty="0">
+                <a:solidFill>
+                  <a:srgbClr val="3C3C3C"/>
+                </a:solidFill>
+                <a:latin typeface="Microsoft YaHei" pitchFamily="34" charset="0"/>
+                <a:ea typeface="Microsoft YaHei" pitchFamily="34" charset="-122"/>
+                <a:cs typeface="Microsoft YaHei" pitchFamily="34" charset="-120"/>
+              </a:rPr>
+              <a:t>Science. 2020 Sep 11;369(6509):1318-1330.</a:t>
+            </a:r>
+            <a:endParaRPr lang="en-US" sz="1150" dirty="0"/>
+          </a:p>
+        </p:txBody>
+      </p:sp>
+      <p:sp>
+        <p:nvSpPr>
+          <p:cNvPr id="17" name="Text 15"/>
+          <p:cNvSpPr txBox="1"/>
+          <p:nvPr/>
+        </p:nvSpPr>
+        <p:spPr>
+          <a:xfrm>
+            <a:off x="2788920" y="2991917"/>
+            <a:ext cx="4892040" cy="256032"/>
+          </a:xfrm>
+          <a:prstGeom prst="rect">
+            <a:avLst/>
+          </a:prstGeom>
+          <a:noFill/>
+          <a:ln/>
+        </p:spPr>
+        <p:txBody>
+          <a:bodyPr wrap="square" rtlCol="0" anchor="t"/>
+          <a:lstStyle/>
+          <a:p>
+            <a:pPr indent="0" marL="0">
+              <a:buNone/>
+            </a:pPr>
+            <a:r>
+              <a:rPr lang="en-US" sz="1150" dirty="0">
+                <a:solidFill>
+                  <a:srgbClr val="1A1A1A"/>
+                </a:solidFill>
+                <a:latin typeface="Microsoft YaHei" pitchFamily="34" charset="0"/>
+                <a:ea typeface="Microsoft YaHei" pitchFamily="34" charset="-122"/>
+                <a:cs typeface="Microsoft YaHei" pitchFamily="34" charset="-120"/>
+              </a:rPr>
+              <a:t>Human Protein Atlas（RNA + IHC 蛋白）</a:t>
+            </a:r>
+            <a:endParaRPr lang="en-US" sz="1150" dirty="0"/>
+          </a:p>
+        </p:txBody>
+      </p:sp>
+      <p:sp>
+        <p:nvSpPr>
+          <p:cNvPr id="18" name="Text 16"/>
+          <p:cNvSpPr txBox="1"/>
+          <p:nvPr/>
+        </p:nvSpPr>
+        <p:spPr>
+          <a:xfrm>
+            <a:off x="7726680" y="2991917"/>
+            <a:ext cx="3840480" cy="256032"/>
+          </a:xfrm>
+          <a:prstGeom prst="rect">
+            <a:avLst/>
+          </a:prstGeom>
+          <a:noFill/>
+          <a:ln/>
+        </p:spPr>
+        <p:txBody>
+          <a:bodyPr wrap="square" rtlCol="0" anchor="t"/>
+          <a:lstStyle/>
+          <a:p>
+            <a:pPr indent="0" marL="0">
+              <a:buNone/>
+            </a:pPr>
+            <a:r>
+              <a:rPr lang="en-US" sz="1150" dirty="0">
+                <a:solidFill>
+                  <a:srgbClr val="3C3C3C"/>
+                </a:solidFill>
+                <a:latin typeface="Microsoft YaHei" pitchFamily="34" charset="0"/>
+                <a:ea typeface="Microsoft YaHei" pitchFamily="34" charset="-122"/>
+                <a:cs typeface="Microsoft YaHei" pitchFamily="34" charset="-120"/>
+              </a:rPr>
+              <a:t>Science. 2015 Jan 23;347(6220):1260419.</a:t>
+            </a:r>
+            <a:endParaRPr lang="en-US" sz="1150" dirty="0"/>
+          </a:p>
+        </p:txBody>
+      </p:sp>
+      <p:sp>
+        <p:nvSpPr>
+          <p:cNvPr id="19" name="Text 17"/>
+          <p:cNvSpPr txBox="1"/>
+          <p:nvPr/>
+        </p:nvSpPr>
+        <p:spPr>
+          <a:xfrm>
+            <a:off x="2788920" y="3258922"/>
+            <a:ext cx="4892040" cy="256032"/>
+          </a:xfrm>
+          <a:prstGeom prst="rect">
+            <a:avLst/>
+          </a:prstGeom>
+          <a:noFill/>
+          <a:ln/>
+        </p:spPr>
+        <p:txBody>
+          <a:bodyPr wrap="square" rtlCol="0" anchor="t"/>
+          <a:lstStyle/>
+          <a:p>
+            <a:pPr indent="0" marL="0">
+              <a:buNone/>
+            </a:pPr>
+            <a:r>
+              <a:rPr lang="en-US" sz="1150" dirty="0">
+                <a:solidFill>
+                  <a:srgbClr val="1A1A1A"/>
+                </a:solidFill>
+                <a:latin typeface="Microsoft YaHei" pitchFamily="34" charset="0"/>
+                <a:ea typeface="Microsoft YaHei" pitchFamily="34" charset="-122"/>
+                <a:cs typeface="Microsoft YaHei" pitchFamily="34" charset="-120"/>
+              </a:rPr>
+              <a:t>Monaco 人免疫细胞绝对定量</a:t>
+            </a:r>
+            <a:endParaRPr lang="en-US" sz="1150" dirty="0"/>
+          </a:p>
+        </p:txBody>
+      </p:sp>
+      <p:sp>
+        <p:nvSpPr>
+          <p:cNvPr id="20" name="Text 18"/>
+          <p:cNvSpPr txBox="1"/>
+          <p:nvPr/>
+        </p:nvSpPr>
+        <p:spPr>
+          <a:xfrm>
+            <a:off x="7726680" y="3258922"/>
+            <a:ext cx="3840480" cy="256032"/>
+          </a:xfrm>
+          <a:prstGeom prst="rect">
+            <a:avLst/>
+          </a:prstGeom>
+          <a:noFill/>
+          <a:ln/>
+        </p:spPr>
+        <p:txBody>
+          <a:bodyPr wrap="square" rtlCol="0" anchor="t"/>
+          <a:lstStyle/>
+          <a:p>
+            <a:pPr indent="0" marL="0">
+              <a:buNone/>
+            </a:pPr>
+            <a:r>
+              <a:rPr lang="en-US" sz="1150" dirty="0">
+                <a:solidFill>
+                  <a:srgbClr val="3C3C3C"/>
+                </a:solidFill>
+                <a:latin typeface="Microsoft YaHei" pitchFamily="34" charset="0"/>
+                <a:ea typeface="Microsoft YaHei" pitchFamily="34" charset="-122"/>
+                <a:cs typeface="Microsoft YaHei" pitchFamily="34" charset="-120"/>
+              </a:rPr>
+              <a:t>Cell Rep. 2019 Feb 5;26(6):1627-1640.e7.</a:t>
+            </a:r>
+            <a:endParaRPr lang="en-US" sz="1150" dirty="0"/>
+          </a:p>
+        </p:txBody>
+      </p:sp>
+      <p:sp>
+        <p:nvSpPr>
+          <p:cNvPr id="21" name="Text 19"/>
+          <p:cNvSpPr txBox="1"/>
+          <p:nvPr/>
+        </p:nvSpPr>
+        <p:spPr>
+          <a:xfrm>
+            <a:off x="2788920" y="3525926"/>
+            <a:ext cx="4892040" cy="256032"/>
+          </a:xfrm>
+          <a:prstGeom prst="rect">
+            <a:avLst/>
+          </a:prstGeom>
+          <a:noFill/>
+          <a:ln/>
+        </p:spPr>
+        <p:txBody>
+          <a:bodyPr wrap="square" rtlCol="0" anchor="t"/>
+          <a:lstStyle/>
+          <a:p>
+            <a:pPr indent="0" marL="0">
+              <a:buNone/>
+            </a:pPr>
+            <a:r>
+              <a:rPr lang="en-US" sz="1150" dirty="0">
+                <a:solidFill>
+                  <a:srgbClr val="1A1A1A"/>
+                </a:solidFill>
+                <a:latin typeface="Microsoft YaHei" pitchFamily="34" charset="0"/>
+                <a:ea typeface="Microsoft YaHei" pitchFamily="34" charset="-122"/>
+                <a:cs typeface="Microsoft YaHei" pitchFamily="34" charset="-120"/>
+              </a:rPr>
+              <a:t>Haemopedia（造血谱系）</a:t>
+            </a:r>
+            <a:endParaRPr lang="en-US" sz="1150" dirty="0"/>
+          </a:p>
+        </p:txBody>
+      </p:sp>
+      <p:sp>
+        <p:nvSpPr>
+          <p:cNvPr id="22" name="Text 20"/>
+          <p:cNvSpPr txBox="1"/>
+          <p:nvPr/>
+        </p:nvSpPr>
+        <p:spPr>
+          <a:xfrm>
+            <a:off x="7726680" y="3525926"/>
+            <a:ext cx="3840480" cy="256032"/>
+          </a:xfrm>
+          <a:prstGeom prst="rect">
+            <a:avLst/>
+          </a:prstGeom>
+          <a:noFill/>
+          <a:ln/>
+        </p:spPr>
+        <p:txBody>
+          <a:bodyPr wrap="square" rtlCol="0" anchor="t"/>
+          <a:lstStyle/>
+          <a:p>
+            <a:pPr indent="0" marL="0">
+              <a:buNone/>
+            </a:pPr>
+            <a:r>
+              <a:rPr lang="en-US" sz="1150" dirty="0">
+                <a:solidFill>
+                  <a:srgbClr val="3C3C3C"/>
+                </a:solidFill>
+                <a:latin typeface="Microsoft YaHei" pitchFamily="34" charset="0"/>
+                <a:ea typeface="Microsoft YaHei" pitchFamily="34" charset="-122"/>
+                <a:cs typeface="Microsoft YaHei" pitchFamily="34" charset="-120"/>
+              </a:rPr>
+              <a:t>Nucleic Acids Res. 2019 Jan 8;47(D1):D780-D785.</a:t>
+            </a:r>
+            <a:endParaRPr lang="en-US" sz="1150" dirty="0"/>
+          </a:p>
+        </p:txBody>
+      </p:sp>
+      <p:sp>
+        <p:nvSpPr>
+          <p:cNvPr id="23" name="Text 21"/>
+          <p:cNvSpPr txBox="1"/>
+          <p:nvPr/>
+        </p:nvSpPr>
+        <p:spPr>
+          <a:xfrm>
+            <a:off x="685800" y="3948379"/>
+            <a:ext cx="2103120" cy="274320"/>
+          </a:xfrm>
+          <a:prstGeom prst="rect">
+            <a:avLst/>
+          </a:prstGeom>
+          <a:noFill/>
+          <a:ln/>
+        </p:spPr>
+        <p:txBody>
+          <a:bodyPr wrap="square" rtlCol="0" anchor="ctr"/>
+          <a:lstStyle/>
+          <a:p>
+            <a:pPr indent="0" marL="0">
+              <a:buNone/>
+            </a:pPr>
+            <a:r>
+              <a:rPr lang="en-US" sz="1250" b="1" dirty="0">
+                <a:solidFill>
+                  <a:srgbClr val="6B6B6B"/>
+                </a:solidFill>
+                <a:latin typeface="Microsoft YaHei" pitchFamily="34" charset="0"/>
+                <a:ea typeface="Microsoft YaHei" pitchFamily="34" charset="-122"/>
+                <a:cs typeface="Microsoft YaHei" pitchFamily="34" charset="-120"/>
+              </a:rPr>
+              <a:t>剪接连接</a:t>
+            </a:r>
+            <a:endParaRPr lang="en-US" sz="1250" dirty="0"/>
+          </a:p>
+        </p:txBody>
+      </p:sp>
+      <p:sp>
+        <p:nvSpPr>
+          <p:cNvPr id="24" name="Text 22"/>
+          <p:cNvSpPr txBox="1"/>
+          <p:nvPr/>
+        </p:nvSpPr>
+        <p:spPr>
+          <a:xfrm>
+            <a:off x="2788920" y="3948379"/>
+            <a:ext cx="4892040" cy="256032"/>
+          </a:xfrm>
+          <a:prstGeom prst="rect">
+            <a:avLst/>
+          </a:prstGeom>
+          <a:noFill/>
+          <a:ln/>
+        </p:spPr>
+        <p:txBody>
+          <a:bodyPr wrap="square" rtlCol="0" anchor="t"/>
+          <a:lstStyle/>
+          <a:p>
+            <a:pPr indent="0" marL="0">
+              <a:buNone/>
+            </a:pPr>
+            <a:r>
+              <a:rPr lang="en-US" sz="1150" dirty="0">
+                <a:solidFill>
+                  <a:srgbClr val="1A1A1A"/>
+                </a:solidFill>
+                <a:latin typeface="Microsoft YaHei" pitchFamily="34" charset="0"/>
+                <a:ea typeface="Microsoft YaHei" pitchFamily="34" charset="-122"/>
+                <a:cs typeface="Microsoft YaHei" pitchFamily="34" charset="-120"/>
+              </a:rPr>
+              <a:t>Snaptron</a:t>
+            </a:r>
+            <a:endParaRPr lang="en-US" sz="1150" dirty="0"/>
+          </a:p>
+        </p:txBody>
+      </p:sp>
+      <p:sp>
+        <p:nvSpPr>
+          <p:cNvPr id="25" name="Text 23"/>
+          <p:cNvSpPr txBox="1"/>
+          <p:nvPr/>
+        </p:nvSpPr>
+        <p:spPr>
+          <a:xfrm>
+            <a:off x="7726680" y="3948379"/>
+            <a:ext cx="3840480" cy="256032"/>
+          </a:xfrm>
+          <a:prstGeom prst="rect">
+            <a:avLst/>
+          </a:prstGeom>
+          <a:noFill/>
+          <a:ln/>
+        </p:spPr>
+        <p:txBody>
+          <a:bodyPr wrap="square" rtlCol="0" anchor="t"/>
+          <a:lstStyle/>
+          <a:p>
+            <a:pPr indent="0" marL="0">
+              <a:buNone/>
+            </a:pPr>
+            <a:r>
+              <a:rPr lang="en-US" sz="1150" dirty="0">
+                <a:solidFill>
+                  <a:srgbClr val="3C3C3C"/>
+                </a:solidFill>
+                <a:latin typeface="Microsoft YaHei" pitchFamily="34" charset="0"/>
+                <a:ea typeface="Microsoft YaHei" pitchFamily="34" charset="-122"/>
+                <a:cs typeface="Microsoft YaHei" pitchFamily="34" charset="-120"/>
+              </a:rPr>
+              <a:t>Bioinformatics. 2018 Jan 1;34(1):114-116.</a:t>
+            </a:r>
+            <a:endParaRPr lang="en-US" sz="1150" dirty="0"/>
+          </a:p>
+        </p:txBody>
+      </p:sp>
+      <p:sp>
+        <p:nvSpPr>
+          <p:cNvPr id="26" name="Text 24"/>
+          <p:cNvSpPr txBox="1"/>
+          <p:nvPr/>
+        </p:nvSpPr>
+        <p:spPr>
+          <a:xfrm>
+            <a:off x="2788920" y="4215384"/>
+            <a:ext cx="4892040" cy="256032"/>
+          </a:xfrm>
+          <a:prstGeom prst="rect">
+            <a:avLst/>
+          </a:prstGeom>
+          <a:noFill/>
+          <a:ln/>
+        </p:spPr>
+        <p:txBody>
+          <a:bodyPr wrap="square" rtlCol="0" anchor="t"/>
+          <a:lstStyle/>
+          <a:p>
+            <a:pPr indent="0" marL="0">
+              <a:buNone/>
+            </a:pPr>
+            <a:r>
+              <a:rPr lang="en-US" sz="1150" dirty="0">
+                <a:solidFill>
+                  <a:srgbClr val="1A1A1A"/>
+                </a:solidFill>
+                <a:latin typeface="Microsoft YaHei" pitchFamily="34" charset="0"/>
+                <a:ea typeface="Microsoft YaHei" pitchFamily="34" charset="-122"/>
+                <a:cs typeface="Microsoft YaHei" pitchFamily="34" charset="-120"/>
+              </a:rPr>
+              <a:t>recount3</a:t>
+            </a:r>
+            <a:endParaRPr lang="en-US" sz="1150" dirty="0"/>
+          </a:p>
+        </p:txBody>
+      </p:sp>
+      <p:sp>
+        <p:nvSpPr>
+          <p:cNvPr id="27" name="Text 25"/>
+          <p:cNvSpPr txBox="1"/>
+          <p:nvPr/>
+        </p:nvSpPr>
+        <p:spPr>
+          <a:xfrm>
+            <a:off x="7726680" y="4215384"/>
+            <a:ext cx="3840480" cy="256032"/>
+          </a:xfrm>
+          <a:prstGeom prst="rect">
+            <a:avLst/>
+          </a:prstGeom>
+          <a:noFill/>
+          <a:ln/>
+        </p:spPr>
+        <p:txBody>
+          <a:bodyPr wrap="square" rtlCol="0" anchor="t"/>
+          <a:lstStyle/>
+          <a:p>
+            <a:pPr indent="0" marL="0">
+              <a:buNone/>
+            </a:pPr>
+            <a:r>
+              <a:rPr lang="en-US" sz="1150" dirty="0">
+                <a:solidFill>
+                  <a:srgbClr val="3C3C3C"/>
+                </a:solidFill>
+                <a:latin typeface="Microsoft YaHei" pitchFamily="34" charset="0"/>
+                <a:ea typeface="Microsoft YaHei" pitchFamily="34" charset="-122"/>
+                <a:cs typeface="Microsoft YaHei" pitchFamily="34" charset="-120"/>
+              </a:rPr>
+              <a:t>Genome Biol. 2021 Nov 29;22(1):323.</a:t>
+            </a:r>
+            <a:endParaRPr lang="en-US" sz="1150" dirty="0"/>
+          </a:p>
+        </p:txBody>
+      </p:sp>
+      <p:sp>
+        <p:nvSpPr>
+          <p:cNvPr id="28" name="Text 26"/>
+          <p:cNvSpPr txBox="1"/>
+          <p:nvPr/>
+        </p:nvSpPr>
+        <p:spPr>
+          <a:xfrm>
+            <a:off x="685800" y="4637837"/>
+            <a:ext cx="2103120" cy="274320"/>
+          </a:xfrm>
+          <a:prstGeom prst="rect">
+            <a:avLst/>
+          </a:prstGeom>
+          <a:noFill/>
+          <a:ln/>
+        </p:spPr>
+        <p:txBody>
+          <a:bodyPr wrap="square" rtlCol="0" anchor="ctr"/>
+          <a:lstStyle/>
+          <a:p>
+            <a:pPr indent="0" marL="0">
+              <a:buNone/>
+            </a:pPr>
+            <a:r>
+              <a:rPr lang="en-US" sz="1250" b="1" dirty="0">
+                <a:solidFill>
+                  <a:srgbClr val="6B6B6B"/>
+                </a:solidFill>
+                <a:latin typeface="Microsoft YaHei" pitchFamily="34" charset="0"/>
+                <a:ea typeface="Microsoft YaHei" pitchFamily="34" charset="-122"/>
+                <a:cs typeface="Microsoft YaHei" pitchFamily="34" charset="-120"/>
+              </a:rPr>
+              <a:t>基因模型</a:t>
+            </a:r>
+            <a:endParaRPr lang="en-US" sz="1250" dirty="0"/>
+          </a:p>
+        </p:txBody>
+      </p:sp>
+      <p:sp>
+        <p:nvSpPr>
+          <p:cNvPr id="29" name="Text 27"/>
+          <p:cNvSpPr txBox="1"/>
+          <p:nvPr/>
+        </p:nvSpPr>
+        <p:spPr>
+          <a:xfrm>
+            <a:off x="2788920" y="4637837"/>
+            <a:ext cx="4892040" cy="256032"/>
+          </a:xfrm>
+          <a:prstGeom prst="rect">
+            <a:avLst/>
+          </a:prstGeom>
+          <a:noFill/>
+          <a:ln/>
+        </p:spPr>
+        <p:txBody>
+          <a:bodyPr wrap="square" rtlCol="0" anchor="t"/>
+          <a:lstStyle/>
+          <a:p>
+            <a:pPr indent="0" marL="0">
+              <a:buNone/>
+            </a:pPr>
+            <a:r>
+              <a:rPr lang="en-US" sz="1150" dirty="0">
+                <a:solidFill>
+                  <a:srgbClr val="1A1A1A"/>
+                </a:solidFill>
+                <a:latin typeface="Microsoft YaHei" pitchFamily="34" charset="0"/>
+                <a:ea typeface="Microsoft YaHei" pitchFamily="34" charset="-122"/>
+                <a:cs typeface="Microsoft YaHei" pitchFamily="34" charset="-120"/>
+              </a:rPr>
+              <a:t>Ensembl</a:t>
+            </a:r>
+            <a:endParaRPr lang="en-US" sz="1150" dirty="0"/>
+          </a:p>
+        </p:txBody>
+      </p:sp>
+      <p:sp>
+        <p:nvSpPr>
+          <p:cNvPr id="30" name="Text 28"/>
+          <p:cNvSpPr txBox="1"/>
+          <p:nvPr/>
+        </p:nvSpPr>
+        <p:spPr>
+          <a:xfrm>
+            <a:off x="7726680" y="4637837"/>
+            <a:ext cx="3840480" cy="256032"/>
+          </a:xfrm>
+          <a:prstGeom prst="rect">
+            <a:avLst/>
+          </a:prstGeom>
+          <a:noFill/>
+          <a:ln/>
+        </p:spPr>
+        <p:txBody>
+          <a:bodyPr wrap="square" rtlCol="0" anchor="t"/>
+          <a:lstStyle/>
+          <a:p>
+            <a:pPr indent="0" marL="0">
+              <a:buNone/>
+            </a:pPr>
+            <a:r>
+              <a:rPr lang="en-US" sz="1150" dirty="0">
+                <a:solidFill>
+                  <a:srgbClr val="3C3C3C"/>
+                </a:solidFill>
+                <a:latin typeface="Microsoft YaHei" pitchFamily="34" charset="0"/>
+                <a:ea typeface="Microsoft YaHei" pitchFamily="34" charset="-122"/>
+                <a:cs typeface="Microsoft YaHei" pitchFamily="34" charset="-120"/>
+              </a:rPr>
+              <a:t>Nucleic Acids Res. 2025 Jan 6;53(D1):D948-D957.</a:t>
+            </a:r>
+            <a:endParaRPr lang="en-US" sz="1150" dirty="0"/>
+          </a:p>
+        </p:txBody>
+      </p:sp>
+      <p:sp>
+        <p:nvSpPr>
+          <p:cNvPr id="31" name="Text 29"/>
+          <p:cNvSpPr txBox="1"/>
+          <p:nvPr/>
+        </p:nvSpPr>
+        <p:spPr>
+          <a:xfrm>
+            <a:off x="685800" y="6382512"/>
+            <a:ext cx="10881360" cy="274320"/>
+          </a:xfrm>
+          <a:prstGeom prst="rect">
+            <a:avLst/>
+          </a:prstGeom>
+          <a:noFill/>
+          <a:ln/>
+        </p:spPr>
+        <p:txBody>
+          <a:bodyPr wrap="square" rtlCol="0" anchor="ctr"/>
+          <a:lstStyle/>
+          <a:p>
+            <a:pPr indent="0" marL="0">
+              <a:buNone/>
+            </a:pPr>
+            <a:r>
+              <a:rPr lang="en-US" sz="1000" dirty="0">
+                <a:solidFill>
+                  <a:srgbClr val="9AA0A6"/>
+                </a:solidFill>
+                <a:latin typeface="Microsoft YaHei" pitchFamily="34" charset="0"/>
+                <a:ea typeface="Microsoft YaHei" pitchFamily="34" charset="-122"/>
+                <a:cs typeface="Microsoft YaHei" pitchFamily="34" charset="-120"/>
+              </a:rPr>
+              <a:t>统一参考表 1714 行，每条带来源、单位、状态与匹配质量标注。</a:t>
+            </a:r>
+            <a:endParaRPr lang="en-US" sz="1000" dirty="0"/>
+          </a:p>
+        </p:txBody>
+      </p:sp>
+    </p:spTree>
+  </p:cSld>
+  <p:clrMapOvr>
+    <a:masterClrMapping/>
+  </p:clrMapOvr>
+</p:sld>
+</file>
+
+<file path=ppt/slides/slide3.xml><?xml version="1.0" encoding="utf-8"?>
+<p:sld xmlns:a="http://schemas.openxmlformats.org/drawingml/2006/main" xmlns:r="http://schemas.openxmlformats.org/officeDocument/2006/relationships" xmlns:p="http://schemas.openxmlformats.org/presentationml/2006/main">
+  <p:cSld name="Slide 3">
+    <p:spTree>
+      <p:nvGrpSpPr>
+        <p:cNvPr id="1" name=""/>
+        <p:cNvGrpSpPr/>
+        <p:nvPr/>
+      </p:nvGrpSpPr>
+      <p:grpSpPr>
+        <a:xfrm>
+          <a:off x="0" y="0"/>
+          <a:ext cx="0" cy="0"/>
+          <a:chOff x="0" y="0"/>
+          <a:chExt cx="0" cy="0"/>
+        </a:xfrm>
+      </p:grpSpPr>
+      <p:sp>
+        <p:nvSpPr>
+          <p:cNvPr id="2" name="Text 0"/>
+          <p:cNvSpPr txBox="1"/>
+          <p:nvPr/>
+        </p:nvSpPr>
+        <p:spPr>
+          <a:xfrm>
+            <a:off x="640080" y="411480"/>
+            <a:ext cx="10972800" cy="640080"/>
+          </a:xfrm>
+          <a:prstGeom prst="rect">
+            <a:avLst/>
+          </a:prstGeom>
+          <a:noFill/>
+          <a:ln/>
+        </p:spPr>
+        <p:txBody>
+          <a:bodyPr wrap="square" rtlCol="0" anchor="ctr"/>
+          <a:lstStyle/>
+          <a:p>
+            <a:pPr indent="0" marL="0">
+              <a:buNone/>
+            </a:pPr>
+            <a:r>
+              <a:rPr lang="en-US" sz="2400" b="1" dirty="0">
+                <a:solidFill>
+                  <a:srgbClr val="1A1A1A"/>
+                </a:solidFill>
+                <a:latin typeface="Microsoft YaHei" pitchFamily="34" charset="0"/>
+                <a:ea typeface="Microsoft YaHei" pitchFamily="34" charset="-122"/>
+                <a:cs typeface="Microsoft YaHei" pitchFamily="34" charset="-120"/>
+              </a:rPr>
               <a:t>人：同一条检出率轴上看 IL18 与 CASP1</a:t>
             </a:r>
             <a:endParaRPr lang="en-US" sz="2400" dirty="0"/>
@@ -11838,9 +14056,9 @@
 </p:sld>
 </file>
 
-<file path=ppt/slides/slide3.xml><?xml version="1.0" encoding="utf-8"?>
+<file path=ppt/slides/slide4.xml><?xml version="1.0" encoding="utf-8"?>
 <p:sld xmlns:a="http://schemas.openxmlformats.org/drawingml/2006/main" xmlns:r="http://schemas.openxmlformats.org/officeDocument/2006/relationships" xmlns:p="http://schemas.openxmlformats.org/presentationml/2006/main">
-  <p:cSld name="Slide 3">
+  <p:cSld name="Slide 4">
     <p:spTree>
       <p:nvGrpSpPr>
         <p:cNvPr id="1" name=""/>
@@ -11968,9 +14186,9 @@
 </p:sld>
 </file>
 
-<file path=ppt/slides/slide4.xml><?xml version="1.0" encoding="utf-8"?>
+<file path=ppt/slides/slide5.xml><?xml version="1.0" encoding="utf-8"?>
 <p:sld xmlns:a="http://schemas.openxmlformats.org/drawingml/2006/main" xmlns:r="http://schemas.openxmlformats.org/officeDocument/2006/relationships" xmlns:p="http://schemas.openxmlformats.org/presentationml/2006/main">
-  <p:cSld name="Slide 4">
+  <p:cSld name="Slide 5">
     <p:spTree>
       <p:nvGrpSpPr>
         <p:cNvPr id="1" name=""/>
@@ -12098,9 +14316,9 @@
 </p:sld>
 </file>
 
-<file path=ppt/slides/slide5.xml><?xml version="1.0" encoding="utf-8"?>
+<file path=ppt/slides/slide6.xml><?xml version="1.0" encoding="utf-8"?>
 <p:sld xmlns:a="http://schemas.openxmlformats.org/drawingml/2006/main" xmlns:r="http://schemas.openxmlformats.org/officeDocument/2006/relationships" xmlns:p="http://schemas.openxmlformats.org/presentationml/2006/main">
-  <p:cSld name="Slide 5">
+  <p:cSld name="Slide 6">
     <p:spTree>
       <p:nvGrpSpPr>
         <p:cNvPr id="1" name=""/>
@@ -12228,9 +14446,9 @@
 </p:sld>
 </file>
 
-<file path=ppt/slides/slide6.xml><?xml version="1.0" encoding="utf-8"?>
+<file path=ppt/slides/slide7.xml><?xml version="1.0" encoding="utf-8"?>
 <p:sld xmlns:a="http://schemas.openxmlformats.org/drawingml/2006/main" xmlns:r="http://schemas.openxmlformats.org/officeDocument/2006/relationships" xmlns:p="http://schemas.openxmlformats.org/presentationml/2006/main">
-  <p:cSld name="Slide 6">
+  <p:cSld name="Slide 7">
     <p:spTree>
       <p:nvGrpSpPr>
         <p:cNvPr id="1" name=""/>
@@ -12358,9 +14576,9 @@
 </p:sld>
 </file>
 
-<file path=ppt/slides/slide7.xml><?xml version="1.0" encoding="utf-8"?>
+<file path=ppt/slides/slide8.xml><?xml version="1.0" encoding="utf-8"?>
 <p:sld xmlns:a="http://schemas.openxmlformats.org/drawingml/2006/main" xmlns:r="http://schemas.openxmlformats.org/officeDocument/2006/relationships" xmlns:p="http://schemas.openxmlformats.org/presentationml/2006/main">
-  <p:cSld name="Slide 7">
+  <p:cSld name="Slide 8">
     <p:spTree>
       <p:nvGrpSpPr>
         <p:cNvPr id="1" name=""/>
@@ -12488,9 +14706,9 @@
 </p:sld>
 </file>
 
-<file path=ppt/slides/slide8.xml><?xml version="1.0" encoding="utf-8"?>
+<file path=ppt/slides/slide9.xml><?xml version="1.0" encoding="utf-8"?>
 <p:sld xmlns:a="http://schemas.openxmlformats.org/drawingml/2006/main" xmlns:r="http://schemas.openxmlformats.org/officeDocument/2006/relationships" xmlns:p="http://schemas.openxmlformats.org/presentationml/2006/main">
-  <p:cSld name="Slide 8">
+  <p:cSld name="Slide 9">
     <p:spTree>
       <p:nvGrpSpPr>
         <p:cNvPr id="1" name=""/>
@@ -12605,136 +14823,6 @@
                 <a:cs typeface="Microsoft YaHei" pitchFamily="34" charset="-120"/>
               </a:rPr>
               <a:t>小胶质 IL18 52.3% 但 CASP1 11.8%，其余 10 类 IL18 均 ≤3.2%。</a:t>
-            </a:r>
-            <a:endParaRPr lang="en-US" sz="1050" dirty="0"/>
-          </a:p>
-        </p:txBody>
-      </p:sp>
-    </p:spTree>
-  </p:cSld>
-  <p:clrMapOvr>
-    <a:masterClrMapping/>
-  </p:clrMapOvr>
-</p:sld>
-</file>
-
-<file path=ppt/slides/slide9.xml><?xml version="1.0" encoding="utf-8"?>
-<p:sld xmlns:a="http://schemas.openxmlformats.org/drawingml/2006/main" xmlns:r="http://schemas.openxmlformats.org/officeDocument/2006/relationships" xmlns:p="http://schemas.openxmlformats.org/presentationml/2006/main">
-  <p:cSld name="Slide 9">
-    <p:spTree>
-      <p:nvGrpSpPr>
-        <p:cNvPr id="1" name=""/>
-        <p:cNvGrpSpPr/>
-        <p:nvPr/>
-      </p:nvGrpSpPr>
-      <p:grpSpPr>
-        <a:xfrm>
-          <a:off x="0" y="0"/>
-          <a:ext cx="0" cy="0"/>
-          <a:chOff x="0" y="0"/>
-          <a:chExt cx="0" cy="0"/>
-        </a:xfrm>
-      </p:grpSpPr>
-      <p:sp>
-        <p:nvSpPr>
-          <p:cNvPr id="2" name="Text 0"/>
-          <p:cNvSpPr txBox="1"/>
-          <p:nvPr/>
-        </p:nvSpPr>
-        <p:spPr>
-          <a:xfrm>
-            <a:off x="640080" y="411480"/>
-            <a:ext cx="10972800" cy="640080"/>
-          </a:xfrm>
-          <a:prstGeom prst="rect">
-            <a:avLst/>
-          </a:prstGeom>
-          <a:noFill/>
-          <a:ln/>
-        </p:spPr>
-        <p:txBody>
-          <a:bodyPr wrap="square" rtlCol="0" anchor="ctr"/>
-          <a:lstStyle/>
-          <a:p>
-            <a:pPr indent="0" marL="0">
-              <a:buNone/>
-            </a:pPr>
-            <a:r>
-              <a:rPr lang="en-US" sz="2400" b="1" dirty="0">
-                <a:solidFill>
-                  <a:srgbClr val="1A1A1A"/>
-                </a:solidFill>
-                <a:latin typeface="Microsoft YaHei" pitchFamily="34" charset="0"/>
-                <a:ea typeface="Microsoft YaHei" pitchFamily="34" charset="-122"/>
-                <a:cs typeface="Microsoft YaHei" pitchFamily="34" charset="-120"/>
-              </a:rPr>
-              <a:t>小鼠肺（Tabula Muris Senis 10x）：IL18 / CASP1 / CASP3 三基因</a:t>
-            </a:r>
-            <a:endParaRPr lang="en-US" sz="2400" dirty="0"/>
-          </a:p>
-        </p:txBody>
-      </p:sp>
-      <p:pic>
-        <p:nvPicPr>
-          <p:cNvPr id="3" name="Image 0" descr="/home/user/aaa/il18_casp5organ/figures/mouse/lung_dots.png">    </p:cNvPr>
-          <p:cNvPicPr>
-            <a:picLocks noChangeAspect="1"/>
-          </p:cNvPicPr>
-          <p:nvPr/>
-        </p:nvPicPr>
-        <p:blipFill>
-          <a:blip r:embed="rId1"/>
-          <a:stretch>
-            <a:fillRect/>
-          </a:stretch>
-        </p:blipFill>
-        <p:spPr>
-          <a:xfrm>
-            <a:off x="640080" y="1051560"/>
-            <a:ext cx="10908792" cy="4846320"/>
-          </a:xfrm>
-          <a:prstGeom prst="rect">
-            <a:avLst/>
-          </a:prstGeom>
-        </p:spPr>
-      </p:pic>
-      <p:sp>
-        <p:nvSpPr>
-          <p:cNvPr id="4" name="Text 1"/>
-          <p:cNvSpPr txBox="1"/>
-          <p:nvPr/>
-        </p:nvSpPr>
-        <p:spPr>
-          <a:xfrm>
-            <a:off x="640080" y="5943600"/>
-            <a:ext cx="10927080" cy="786384"/>
-          </a:xfrm>
-          <a:prstGeom prst="rect">
-            <a:avLst/>
-          </a:prstGeom>
-          <a:noFill/>
-          <a:ln/>
-        </p:spPr>
-        <p:txBody>
-          <a:bodyPr wrap="square" rtlCol="0" anchor="t"/>
-          <a:lstStyle/>
-          <a:p>
-            <a:pPr indent="0" marL="0">
-              <a:lnSpc>
-                <a:spcPct val="120000"/>
-              </a:lnSpc>
-              <a:buNone/>
-            </a:pPr>
-            <a:r>
-              <a:rPr lang="en-US" sz="1050" dirty="0">
-                <a:solidFill>
-                  <a:srgbClr val="6B6B6B"/>
-                </a:solidFill>
-                <a:latin typeface="Microsoft YaHei" pitchFamily="34" charset="0"/>
-                <a:ea typeface="Microsoft YaHei" pitchFamily="34" charset="-122"/>
-                <a:cs typeface="Microsoft YaHei" pitchFamily="34" charset="-120"/>
-              </a:rPr>
-              <a:t>肺泡巨噬 IL18 71.6% 全器官最高，CASP1 13.3%，参考层确认可测。</a:t>
             </a:r>
             <a:endParaRPr lang="en-US" sz="1050" dirty="0"/>
           </a:p>
